--- a/資安事件因應分析.pptx
+++ b/資安事件因應分析.pptx
@@ -184,13 +184,13 @@
                 <c:formatCode>General</c:formatCode>
                 <c:ptCount val="3"/>
                 <c:pt idx="0">
-                  <c:v>2</c:v>
+                  <c:v>4</c:v>
                 </c:pt>
                 <c:pt idx="1">
                   <c:v>2</c:v>
                 </c:pt>
                 <c:pt idx="2">
-                  <c:v>4</c:v>
+                  <c:v>2</c:v>
                 </c:pt>
               </c:numCache>
             </c:numRef>
@@ -4596,13 +4596,13 @@
                       <a:r>
                         <a:rPr sz="1150" b="1">
                           <a:solidFill>
-                            <a:srgbClr val="27A6C4"/>
+                            <a:srgbClr val="E63946"/>
                           </a:solidFill>
                           <a:latin typeface="Microsoft JhengHei"/>
                           <a:ea typeface="Microsoft JhengHei"/>
                           <a:cs typeface="Microsoft JhengHei"/>
                         </a:rPr>
-                        <a:t>個資外洩</a:t>
+                        <a:t>駭客攻擊</a:t>
                       </a:r>
                     </a:p>
                   </a:txBody>
@@ -4962,13 +4962,13 @@
                       <a:r>
                         <a:rPr sz="1150" b="1">
                           <a:solidFill>
-                            <a:srgbClr val="27A6C4"/>
+                            <a:srgbClr val="E63946"/>
                           </a:solidFill>
                           <a:latin typeface="Microsoft JhengHei"/>
                           <a:ea typeface="Microsoft JhengHei"/>
                           <a:cs typeface="Microsoft JhengHei"/>
                         </a:rPr>
-                        <a:t>個資外洩</a:t>
+                        <a:t>駭客攻擊</a:t>
                       </a:r>
                     </a:p>
                   </a:txBody>
@@ -5569,7 +5569,7 @@
                 <a:ea typeface="Microsoft JhengHei"/>
                 <a:cs typeface="Microsoft JhengHei"/>
               </a:rPr>
-              <a:t>2 起</a:t>
+              <a:t>4 起</a:t>
             </a:r>
           </a:p>
         </p:txBody>
@@ -5606,7 +5606,7 @@
                 <a:ea typeface="Microsoft JhengHei"/>
                 <a:cs typeface="Microsoft JhengHei"/>
               </a:rPr>
-              <a:t>鴻海、偉康科技</a:t>
+              <a:t>建德工業、鴻海、彰源、偉康科技</a:t>
             </a:r>
           </a:p>
         </p:txBody>
@@ -6055,7 +6055,7 @@
                 <a:ea typeface="Microsoft JhengHei"/>
                 <a:cs typeface="Microsoft JhengHei"/>
               </a:rPr>
-              <a:t>4 起</a:t>
+              <a:t>2 起</a:t>
             </a:r>
           </a:p>
         </p:txBody>
@@ -6092,7 +6092,7 @@
                 <a:ea typeface="Microsoft JhengHei"/>
                 <a:cs typeface="Microsoft JhengHei"/>
               </a:rPr>
-              <a:t>數字、建德工業、永信、彰源</a:t>
+              <a:t>數字、永信</a:t>
             </a:r>
           </a:p>
         </p:txBody>
@@ -8260,7 +8260,7 @@
             <a:avLst/>
           </a:prstGeom>
           <a:solidFill>
-            <a:srgbClr val="27A6C4"/>
+            <a:srgbClr val="E63946"/>
           </a:solidFill>
           <a:ln>
             <a:noFill/>
@@ -8352,7 +8352,7 @@
             <a:avLst/>
           </a:prstGeom>
           <a:solidFill>
-            <a:srgbClr val="27A6C4"/>
+            <a:srgbClr val="E63946"/>
           </a:solidFill>
           <a:ln>
             <a:noFill/>
@@ -8413,7 +8413,7 @@
                 <a:ea typeface="Microsoft JhengHei"/>
                 <a:cs typeface="Microsoft JhengHei"/>
               </a:rPr>
-              <a:t>個資外洩</a:t>
+              <a:t>駭客攻擊</a:t>
             </a:r>
           </a:p>
         </p:txBody>
@@ -8448,7 +8448,7 @@
             <a:r>
               <a:rPr sz="1100" b="1">
                 <a:solidFill>
-                  <a:srgbClr val="27A6C4"/>
+                  <a:srgbClr val="E63946"/>
                 </a:solidFill>
                 <a:latin typeface="Microsoft JhengHei"/>
                 <a:ea typeface="Microsoft JhengHei"/>
@@ -8500,7 +8500,7 @@
             <a:r>
               <a:rPr sz="1100" b="1">
                 <a:solidFill>
-                  <a:srgbClr val="27A6C4"/>
+                  <a:srgbClr val="E63946"/>
                 </a:solidFill>
                 <a:latin typeface="Microsoft JhengHei"/>
                 <a:ea typeface="Microsoft JhengHei"/>
@@ -9380,7 +9380,7 @@
             <a:avLst/>
           </a:prstGeom>
           <a:solidFill>
-            <a:srgbClr val="27A6C4"/>
+            <a:srgbClr val="E63946"/>
           </a:solidFill>
           <a:ln>
             <a:noFill/>
@@ -9472,7 +9472,7 @@
             <a:avLst/>
           </a:prstGeom>
           <a:solidFill>
-            <a:srgbClr val="27A6C4"/>
+            <a:srgbClr val="E63946"/>
           </a:solidFill>
           <a:ln>
             <a:noFill/>
@@ -9533,7 +9533,7 @@
                 <a:ea typeface="Microsoft JhengHei"/>
                 <a:cs typeface="Microsoft JhengHei"/>
               </a:rPr>
-              <a:t>個資外洩</a:t>
+              <a:t>駭客攻擊</a:t>
             </a:r>
           </a:p>
         </p:txBody>
@@ -9568,7 +9568,7 @@
             <a:r>
               <a:rPr sz="1100" b="1">
                 <a:solidFill>
-                  <a:srgbClr val="27A6C4"/>
+                  <a:srgbClr val="E63946"/>
                 </a:solidFill>
                 <a:latin typeface="Microsoft JhengHei"/>
                 <a:ea typeface="Microsoft JhengHei"/>
@@ -9620,7 +9620,7 @@
             <a:r>
               <a:rPr sz="1100" b="1">
                 <a:solidFill>
-                  <a:srgbClr val="27A6C4"/>
+                  <a:srgbClr val="E63946"/>
                 </a:solidFill>
                 <a:latin typeface="Microsoft JhengHei"/>
                 <a:ea typeface="Microsoft JhengHei"/>

--- a/資安事件因應分析.pptx
+++ b/資安事件因應分析.pptx
@@ -3766,17 +3766,12 @@
           <a:solidFill>
             <a:srgbClr val="FFFFFF"/>
           </a:solidFill>
-          <a:ln>
-            <a:noFill/>
+          <a:ln w="12700">
+            <a:solidFill>
+              <a:srgbClr val="DDE3EE"/>
+            </a:solidFill>
           </a:ln>
           <a:effectLst/>
-          <a:effectLst>
-            <a:outerShdw blurRad="60000" dist="25000" dir="5400000" rotWithShape="0">
-              <a:srgbClr val="9AA7BF">
-                <a:alpha val="35000"/>
-              </a:srgbClr>
-            </a:outerShdw>
-          </a:effectLst>
         </p:spPr>
         <p:style>
           <a:lnRef idx="1">
@@ -3891,17 +3886,12 @@
           <a:solidFill>
             <a:srgbClr val="FFFFFF"/>
           </a:solidFill>
-          <a:ln>
-            <a:noFill/>
+          <a:ln w="12700">
+            <a:solidFill>
+              <a:srgbClr val="DDE3EE"/>
+            </a:solidFill>
           </a:ln>
           <a:effectLst/>
-          <a:effectLst>
-            <a:outerShdw blurRad="60000" dist="25000" dir="5400000" rotWithShape="0">
-              <a:srgbClr val="9AA7BF">
-                <a:alpha val="35000"/>
-              </a:srgbClr>
-            </a:outerShdw>
-          </a:effectLst>
         </p:spPr>
         <p:style>
           <a:lnRef idx="1">
@@ -4016,17 +4006,12 @@
           <a:solidFill>
             <a:srgbClr val="FFFFFF"/>
           </a:solidFill>
-          <a:ln>
-            <a:noFill/>
+          <a:ln w="12700">
+            <a:solidFill>
+              <a:srgbClr val="DDE3EE"/>
+            </a:solidFill>
           </a:ln>
           <a:effectLst/>
-          <a:effectLst>
-            <a:outerShdw blurRad="60000" dist="25000" dir="5400000" rotWithShape="0">
-              <a:srgbClr val="9AA7BF">
-                <a:alpha val="35000"/>
-              </a:srgbClr>
-            </a:outerShdw>
-          </a:effectLst>
         </p:spPr>
         <p:style>
           <a:lnRef idx="1">
@@ -5422,17 +5407,12 @@
           <a:solidFill>
             <a:srgbClr val="FFFFFF"/>
           </a:solidFill>
-          <a:ln>
-            <a:noFill/>
+          <a:ln w="12700">
+            <a:solidFill>
+              <a:srgbClr val="DDE3EE"/>
+            </a:solidFill>
           </a:ln>
           <a:effectLst/>
-          <a:effectLst>
-            <a:outerShdw blurRad="60000" dist="25000" dir="5400000" rotWithShape="0">
-              <a:srgbClr val="9AA7BF">
-                <a:alpha val="35000"/>
-              </a:srgbClr>
-            </a:outerShdw>
-          </a:effectLst>
         </p:spPr>
         <p:style>
           <a:lnRef idx="1">
@@ -5665,17 +5645,12 @@
           <a:solidFill>
             <a:srgbClr val="FFFFFF"/>
           </a:solidFill>
-          <a:ln>
-            <a:noFill/>
+          <a:ln w="12700">
+            <a:solidFill>
+              <a:srgbClr val="DDE3EE"/>
+            </a:solidFill>
           </a:ln>
           <a:effectLst/>
-          <a:effectLst>
-            <a:outerShdw blurRad="60000" dist="25000" dir="5400000" rotWithShape="0">
-              <a:srgbClr val="9AA7BF">
-                <a:alpha val="35000"/>
-              </a:srgbClr>
-            </a:outerShdw>
-          </a:effectLst>
         </p:spPr>
         <p:style>
           <a:lnRef idx="1">
@@ -5908,17 +5883,12 @@
           <a:solidFill>
             <a:srgbClr val="FFFFFF"/>
           </a:solidFill>
-          <a:ln>
-            <a:noFill/>
+          <a:ln w="12700">
+            <a:solidFill>
+              <a:srgbClr val="DDE3EE"/>
+            </a:solidFill>
           </a:ln>
           <a:effectLst/>
-          <a:effectLst>
-            <a:outerShdw blurRad="60000" dist="25000" dir="5400000" rotWithShape="0">
-              <a:srgbClr val="9AA7BF">
-                <a:alpha val="35000"/>
-              </a:srgbClr>
-            </a:outerShdw>
-          </a:effectLst>
         </p:spPr>
         <p:style>
           <a:lnRef idx="1">
@@ -6287,17 +6257,12 @@
           <a:solidFill>
             <a:srgbClr val="14213D"/>
           </a:solidFill>
-          <a:ln>
-            <a:noFill/>
+          <a:ln w="12700">
+            <a:solidFill>
+              <a:srgbClr val="DDE3EE"/>
+            </a:solidFill>
           </a:ln>
           <a:effectLst/>
-          <a:effectLst>
-            <a:outerShdw blurRad="60000" dist="25000" dir="5400000" rotWithShape="0">
-              <a:srgbClr val="9AA7BF">
-                <a:alpha val="35000"/>
-              </a:srgbClr>
-            </a:outerShdw>
-          </a:effectLst>
         </p:spPr>
         <p:style>
           <a:lnRef idx="1">
@@ -6535,17 +6500,12 @@
           <a:solidFill>
             <a:srgbClr val="14213D"/>
           </a:solidFill>
-          <a:ln>
-            <a:noFill/>
+          <a:ln w="12700">
+            <a:solidFill>
+              <a:srgbClr val="DDE3EE"/>
+            </a:solidFill>
           </a:ln>
           <a:effectLst/>
-          <a:effectLst>
-            <a:outerShdw blurRad="60000" dist="25000" dir="5400000" rotWithShape="0">
-              <a:srgbClr val="9AA7BF">
-                <a:alpha val="35000"/>
-              </a:srgbClr>
-            </a:outerShdw>
-          </a:effectLst>
         </p:spPr>
         <p:style>
           <a:lnRef idx="1">
@@ -6783,17 +6743,12 @@
           <a:solidFill>
             <a:srgbClr val="14213D"/>
           </a:solidFill>
-          <a:ln>
-            <a:noFill/>
+          <a:ln w="12700">
+            <a:solidFill>
+              <a:srgbClr val="DDE3EE"/>
+            </a:solidFill>
           </a:ln>
           <a:effectLst/>
-          <a:effectLst>
-            <a:outerShdw blurRad="60000" dist="25000" dir="5400000" rotWithShape="0">
-              <a:srgbClr val="9AA7BF">
-                <a:alpha val="35000"/>
-              </a:srgbClr>
-            </a:outerShdw>
-          </a:effectLst>
         </p:spPr>
         <p:style>
           <a:lnRef idx="1">
@@ -7031,17 +6986,12 @@
           <a:solidFill>
             <a:srgbClr val="14213D"/>
           </a:solidFill>
-          <a:ln>
-            <a:noFill/>
+          <a:ln w="12700">
+            <a:solidFill>
+              <a:srgbClr val="DDE3EE"/>
+            </a:solidFill>
           </a:ln>
           <a:effectLst/>
-          <a:effectLst>
-            <a:outerShdw blurRad="60000" dist="25000" dir="5400000" rotWithShape="0">
-              <a:srgbClr val="9AA7BF">
-                <a:alpha val="35000"/>
-              </a:srgbClr>
-            </a:outerShdw>
-          </a:effectLst>
         </p:spPr>
         <p:style>
           <a:lnRef idx="1">
@@ -7555,17 +7505,12 @@
           <a:solidFill>
             <a:srgbClr val="FFFFFF"/>
           </a:solidFill>
-          <a:ln>
-            <a:noFill/>
+          <a:ln w="12700">
+            <a:solidFill>
+              <a:srgbClr val="DDE3EE"/>
+            </a:solidFill>
           </a:ln>
           <a:effectLst/>
-          <a:effectLst>
-            <a:outerShdw blurRad="60000" dist="25000" dir="5400000" rotWithShape="0">
-              <a:srgbClr val="9AA7BF">
-                <a:alpha val="35000"/>
-              </a:srgbClr>
-            </a:outerShdw>
-          </a:effectLst>
         </p:spPr>
         <p:style>
           <a:lnRef idx="1">
@@ -7883,17 +7828,12 @@
           <a:solidFill>
             <a:srgbClr val="FFFFFF"/>
           </a:solidFill>
-          <a:ln>
-            <a:noFill/>
+          <a:ln w="12700">
+            <a:solidFill>
+              <a:srgbClr val="DDE3EE"/>
+            </a:solidFill>
           </a:ln>
           <a:effectLst/>
-          <a:effectLst>
-            <a:outerShdw blurRad="60000" dist="25000" dir="5400000" rotWithShape="0">
-              <a:srgbClr val="9AA7BF">
-                <a:alpha val="35000"/>
-              </a:srgbClr>
-            </a:outerShdw>
-          </a:effectLst>
         </p:spPr>
         <p:style>
           <a:lnRef idx="1">
@@ -8211,17 +8151,12 @@
           <a:solidFill>
             <a:srgbClr val="FFFFFF"/>
           </a:solidFill>
-          <a:ln>
-            <a:noFill/>
+          <a:ln w="12700">
+            <a:solidFill>
+              <a:srgbClr val="DDE3EE"/>
+            </a:solidFill>
           </a:ln>
           <a:effectLst/>
-          <a:effectLst>
-            <a:outerShdw blurRad="60000" dist="25000" dir="5400000" rotWithShape="0">
-              <a:srgbClr val="9AA7BF">
-                <a:alpha val="35000"/>
-              </a:srgbClr>
-            </a:outerShdw>
-          </a:effectLst>
         </p:spPr>
         <p:style>
           <a:lnRef idx="1">
@@ -8539,17 +8474,12 @@
           <a:solidFill>
             <a:srgbClr val="FFFFFF"/>
           </a:solidFill>
-          <a:ln>
-            <a:noFill/>
+          <a:ln w="12700">
+            <a:solidFill>
+              <a:srgbClr val="DDE3EE"/>
+            </a:solidFill>
           </a:ln>
           <a:effectLst/>
-          <a:effectLst>
-            <a:outerShdw blurRad="60000" dist="25000" dir="5400000" rotWithShape="0">
-              <a:srgbClr val="9AA7BF">
-                <a:alpha val="35000"/>
-              </a:srgbClr>
-            </a:outerShdw>
-          </a:effectLst>
         </p:spPr>
         <p:style>
           <a:lnRef idx="1">
@@ -9003,17 +8933,12 @@
           <a:solidFill>
             <a:srgbClr val="FFFFFF"/>
           </a:solidFill>
-          <a:ln>
-            <a:noFill/>
+          <a:ln w="12700">
+            <a:solidFill>
+              <a:srgbClr val="DDE3EE"/>
+            </a:solidFill>
           </a:ln>
           <a:effectLst/>
-          <a:effectLst>
-            <a:outerShdw blurRad="60000" dist="25000" dir="5400000" rotWithShape="0">
-              <a:srgbClr val="9AA7BF">
-                <a:alpha val="35000"/>
-              </a:srgbClr>
-            </a:outerShdw>
-          </a:effectLst>
         </p:spPr>
         <p:style>
           <a:lnRef idx="1">
@@ -9331,17 +9256,12 @@
           <a:solidFill>
             <a:srgbClr val="FFFFFF"/>
           </a:solidFill>
-          <a:ln>
-            <a:noFill/>
+          <a:ln w="12700">
+            <a:solidFill>
+              <a:srgbClr val="DDE3EE"/>
+            </a:solidFill>
           </a:ln>
           <a:effectLst/>
-          <a:effectLst>
-            <a:outerShdw blurRad="60000" dist="25000" dir="5400000" rotWithShape="0">
-              <a:srgbClr val="9AA7BF">
-                <a:alpha val="35000"/>
-              </a:srgbClr>
-            </a:outerShdw>
-          </a:effectLst>
         </p:spPr>
         <p:style>
           <a:lnRef idx="1">
@@ -9659,17 +9579,12 @@
           <a:solidFill>
             <a:srgbClr val="FFFFFF"/>
           </a:solidFill>
-          <a:ln>
-            <a:noFill/>
+          <a:ln w="12700">
+            <a:solidFill>
+              <a:srgbClr val="DDE3EE"/>
+            </a:solidFill>
           </a:ln>
           <a:effectLst/>
-          <a:effectLst>
-            <a:outerShdw blurRad="60000" dist="25000" dir="5400000" rotWithShape="0">
-              <a:srgbClr val="9AA7BF">
-                <a:alpha val="35000"/>
-              </a:srgbClr>
-            </a:outerShdw>
-          </a:effectLst>
         </p:spPr>
         <p:style>
           <a:lnRef idx="1">
@@ -9987,17 +9902,12 @@
           <a:solidFill>
             <a:srgbClr val="FFFFFF"/>
           </a:solidFill>
-          <a:ln>
-            <a:noFill/>
+          <a:ln w="12700">
+            <a:solidFill>
+              <a:srgbClr val="DDE3EE"/>
+            </a:solidFill>
           </a:ln>
           <a:effectLst/>
-          <a:effectLst>
-            <a:outerShdw blurRad="60000" dist="25000" dir="5400000" rotWithShape="0">
-              <a:srgbClr val="9AA7BF">
-                <a:alpha val="35000"/>
-              </a:srgbClr>
-            </a:outerShdw>
-          </a:effectLst>
         </p:spPr>
         <p:style>
           <a:lnRef idx="1">

--- a/資安事件因應分析.pptx
+++ b/資安事件因應分析.pptx
@@ -4319,7 +4319,7 @@
                           <a:ea typeface="Microsoft JhengHei"/>
                           <a:cs typeface="Microsoft JhengHei"/>
                         </a:rPr>
-                        <a:t>/05/26</a:t>
+                        <a:t>05/26</a:t>
                       </a:r>
                     </a:p>
                   </a:txBody>
@@ -4441,7 +4441,7 @@
                           <a:ea typeface="Microsoft JhengHei"/>
                           <a:cs typeface="Microsoft JhengHei"/>
                         </a:rPr>
-                        <a:t>/05/21</a:t>
+                        <a:t>05/21</a:t>
                       </a:r>
                     </a:p>
                   </a:txBody>
@@ -4563,7 +4563,7 @@
                           <a:ea typeface="Microsoft JhengHei"/>
                           <a:cs typeface="Microsoft JhengHei"/>
                         </a:rPr>
-                        <a:t>/05/20</a:t>
+                        <a:t>05/20</a:t>
                       </a:r>
                     </a:p>
                   </a:txBody>
@@ -4685,7 +4685,7 @@
                           <a:ea typeface="Microsoft JhengHei"/>
                           <a:cs typeface="Microsoft JhengHei"/>
                         </a:rPr>
-                        <a:t>/05/15</a:t>
+                        <a:t>05/15</a:t>
                       </a:r>
                     </a:p>
                   </a:txBody>
@@ -4733,7 +4733,7 @@
                           <a:ea typeface="Microsoft JhengHei"/>
                           <a:cs typeface="Microsoft JhengHei"/>
                         </a:rPr>
-                        <a:t/>
+                        <a:t>—</a:t>
                       </a:r>
                     </a:p>
                   </a:txBody>
@@ -4807,7 +4807,7 @@
                           <a:ea typeface="Microsoft JhengHei"/>
                           <a:cs typeface="Microsoft JhengHei"/>
                         </a:rPr>
-                        <a:t>/05/12</a:t>
+                        <a:t>05/12</a:t>
                       </a:r>
                     </a:p>
                   </a:txBody>
@@ -4929,7 +4929,7 @@
                           <a:ea typeface="Microsoft JhengHei"/>
                           <a:cs typeface="Microsoft JhengHei"/>
                         </a:rPr>
-                        <a:t>/05/11</a:t>
+                        <a:t>05/11</a:t>
                       </a:r>
                     </a:p>
                   </a:txBody>
@@ -5051,7 +5051,7 @@
                           <a:ea typeface="Microsoft JhengHei"/>
                           <a:cs typeface="Microsoft JhengHei"/>
                         </a:rPr>
-                        <a:t>/05/11</a:t>
+                        <a:t>05/11</a:t>
                       </a:r>
                     </a:p>
                   </a:txBody>
@@ -5173,7 +5173,7 @@
                           <a:ea typeface="Microsoft JhengHei"/>
                           <a:cs typeface="Microsoft JhengHei"/>
                         </a:rPr>
-                        <a:t>/05/07</a:t>
+                        <a:t>05/07</a:t>
                       </a:r>
                     </a:p>
                   </a:txBody>

--- a/資安事件因應分析.pptx
+++ b/資安事件因應分析.pptx
@@ -11,6 +11,7 @@
     <p:sldId id="259" r:id="rId10"/>
     <p:sldId id="260" r:id="rId11"/>
     <p:sldId id="261" r:id="rId12"/>
+    <p:sldId id="262" r:id="rId13"/>
   </p:sldIdLst>
   <p:sldSz cx="12191695" cy="6858000" type="screen4x3"/>
   <p:notesSz cx="6858000" cy="9144000"/>
@@ -6198,7 +6199,7 @@
                 <a:ea typeface="Microsoft JhengHei"/>
                 <a:cs typeface="Microsoft JhengHei"/>
               </a:rPr>
-              <a:t>共通因應流程</a:t>
+              <a:t>簽證會計師一覽</a:t>
             </a:r>
           </a:p>
         </p:txBody>
@@ -6235,1123 +6236,1138 @@
                 <a:ea typeface="Microsoft JhengHei"/>
                 <a:cs typeface="Microsoft JhengHei"/>
               </a:rPr>
-              <a:t>各公司處理過程高度一致，已形成標準應變劇本</a:t>
-            </a:r>
-          </a:p>
-        </p:txBody>
-      </p:sp>
-      <p:sp>
-        <p:nvSpPr>
-          <p:cNvPr id="5" name="Rounded Rectangle 4"/>
-          <p:cNvSpPr/>
-          <p:nvPr/>
-        </p:nvSpPr>
-        <p:spPr>
-          <a:xfrm>
-            <a:off x="640080" y="1828800"/>
-            <a:ext cx="2514600" cy="2286000"/>
-          </a:xfrm>
-          <a:prstGeom prst="roundRect">
-            <a:avLst/>
-          </a:prstGeom>
-          <a:solidFill>
-            <a:srgbClr val="14213D"/>
-          </a:solidFill>
-          <a:ln w="12700">
-            <a:solidFill>
-              <a:srgbClr val="DDE3EE"/>
-            </a:solidFill>
-          </a:ln>
-          <a:effectLst/>
-        </p:spPr>
-        <p:style>
-          <a:lnRef idx="1">
-            <a:schemeClr val="accent1"/>
-          </a:lnRef>
-          <a:fillRef idx="3">
-            <a:schemeClr val="accent1"/>
-          </a:fillRef>
-          <a:effectRef idx="2">
-            <a:schemeClr val="accent1"/>
-          </a:effectRef>
-          <a:fontRef idx="minor">
-            <a:schemeClr val="lt1"/>
-          </a:fontRef>
-        </p:style>
-        <p:txBody>
-          <a:bodyPr rtlCol="0" anchor="ctr"/>
-          <a:lstStyle/>
-          <a:p>
-            <a:pPr algn="ctr"/>
-          </a:p>
-        </p:txBody>
-      </p:sp>
-      <p:sp>
-        <p:nvSpPr>
-          <p:cNvPr id="6" name="Oval 5"/>
-          <p:cNvSpPr/>
-          <p:nvPr/>
-        </p:nvSpPr>
-        <p:spPr>
-          <a:xfrm>
-            <a:off x="1572768" y="2057400"/>
-            <a:ext cx="658368" cy="658368"/>
-          </a:xfrm>
-          <a:prstGeom prst="ellipse">
-            <a:avLst/>
-          </a:prstGeom>
-          <a:solidFill>
-            <a:srgbClr val="2EC4B6"/>
-          </a:solidFill>
-          <a:ln>
-            <a:noFill/>
-          </a:ln>
-          <a:effectLst/>
-        </p:spPr>
-        <p:style>
-          <a:lnRef idx="1">
-            <a:schemeClr val="accent1"/>
-          </a:lnRef>
-          <a:fillRef idx="3">
-            <a:schemeClr val="accent1"/>
-          </a:fillRef>
-          <a:effectRef idx="2">
-            <a:schemeClr val="accent1"/>
-          </a:effectRef>
-          <a:fontRef idx="minor">
-            <a:schemeClr val="lt1"/>
-          </a:fontRef>
-        </p:style>
-        <p:txBody>
-          <a:bodyPr rtlCol="0" anchor="ctr"/>
-          <a:lstStyle/>
-          <a:p>
-            <a:pPr algn="ctr"/>
-          </a:p>
-        </p:txBody>
-      </p:sp>
-      <p:sp>
-        <p:nvSpPr>
-          <p:cNvPr id="7" name="TextBox 6"/>
-          <p:cNvSpPr txBox="1"/>
-          <p:nvPr/>
-        </p:nvSpPr>
-        <p:spPr>
-          <a:xfrm>
-            <a:off x="1572768" y="2057400"/>
-            <a:ext cx="658368" cy="658368"/>
-          </a:xfrm>
-          <a:prstGeom prst="rect">
-            <a:avLst/>
-          </a:prstGeom>
-          <a:noFill/>
-        </p:spPr>
-        <p:txBody>
-          <a:bodyPr wrap="square" anchor="ctr" lIns="0" rIns="0" tIns="0" bIns="0">
-            <a:spAutoFit/>
-          </a:bodyPr>
-          <a:lstStyle/>
-          <a:p>
-            <a:pPr algn="ctr"/>
-            <a:r>
-              <a:rPr sz="1900" b="1">
-                <a:solidFill>
-                  <a:srgbClr val="14213D"/>
-                </a:solidFill>
-                <a:latin typeface="Microsoft JhengHei"/>
-                <a:ea typeface="Microsoft JhengHei"/>
-                <a:cs typeface="Microsoft JhengHei"/>
-              </a:rPr>
-              <a:t>01</a:t>
-            </a:r>
-          </a:p>
-        </p:txBody>
-      </p:sp>
-      <p:sp>
-        <p:nvSpPr>
-          <p:cNvPr id="8" name="TextBox 7"/>
-          <p:cNvSpPr txBox="1"/>
-          <p:nvPr/>
-        </p:nvSpPr>
-        <p:spPr>
-          <a:xfrm>
-            <a:off x="640080" y="2880360"/>
-            <a:ext cx="2514600" cy="457200"/>
-          </a:xfrm>
-          <a:prstGeom prst="rect">
-            <a:avLst/>
-          </a:prstGeom>
-          <a:noFill/>
-        </p:spPr>
-        <p:txBody>
-          <a:bodyPr wrap="square" anchor="t" lIns="0" rIns="0" tIns="0" bIns="0">
-            <a:spAutoFit/>
-          </a:bodyPr>
-          <a:lstStyle/>
-          <a:p>
-            <a:pPr algn="ctr"/>
-            <a:r>
-              <a:rPr sz="1800" b="1">
-                <a:solidFill>
-                  <a:srgbClr val="FFFFFF"/>
-                </a:solidFill>
-                <a:latin typeface="Microsoft JhengHei"/>
-                <a:ea typeface="Microsoft JhengHei"/>
-                <a:cs typeface="Microsoft JhengHei"/>
-              </a:rPr>
-              <a:t>偵測異常</a:t>
-            </a:r>
-          </a:p>
-        </p:txBody>
-      </p:sp>
-      <p:sp>
-        <p:nvSpPr>
-          <p:cNvPr id="9" name="TextBox 8"/>
-          <p:cNvSpPr txBox="1"/>
-          <p:nvPr/>
-        </p:nvSpPr>
-        <p:spPr>
-          <a:xfrm>
-            <a:off x="777240" y="3364992"/>
-            <a:ext cx="2240280" cy="685800"/>
-          </a:xfrm>
-          <a:prstGeom prst="rect">
-            <a:avLst/>
-          </a:prstGeom>
-          <a:noFill/>
-        </p:spPr>
-        <p:txBody>
-          <a:bodyPr wrap="square" anchor="t" lIns="0" rIns="0" tIns="0" bIns="0">
-            <a:spAutoFit/>
-          </a:bodyPr>
-          <a:lstStyle/>
-          <a:p>
-            <a:pPr algn="ctr">
-              <a:lnSpc>
-                <a:spcPts val="1500"/>
-              </a:lnSpc>
-            </a:pPr>
-            <a:r>
-              <a:rPr sz="1150" b="0">
-                <a:solidFill>
-                  <a:srgbClr val="CADCFC"/>
-                </a:solidFill>
-                <a:latin typeface="Microsoft JhengHei"/>
-                <a:ea typeface="Microsoft JhengHei"/>
-                <a:cs typeface="Microsoft JhengHei"/>
-              </a:rPr>
-              <a:t>資安單位或外部通報
-發現系統異常或入侵</a:t>
-            </a:r>
-          </a:p>
-        </p:txBody>
-      </p:sp>
-      <p:sp>
-        <p:nvSpPr>
-          <p:cNvPr id="10" name="TextBox 9"/>
-          <p:cNvSpPr txBox="1"/>
-          <p:nvPr/>
-        </p:nvSpPr>
-        <p:spPr>
-          <a:xfrm>
-            <a:off x="3127248" y="1828800"/>
-            <a:ext cx="365760" cy="2286000"/>
-          </a:xfrm>
-          <a:prstGeom prst="rect">
-            <a:avLst/>
-          </a:prstGeom>
-          <a:noFill/>
-        </p:spPr>
-        <p:txBody>
-          <a:bodyPr wrap="square" anchor="ctr" lIns="0" rIns="0" tIns="0" bIns="0">
-            <a:spAutoFit/>
-          </a:bodyPr>
-          <a:lstStyle/>
-          <a:p>
-            <a:pPr algn="ctr"/>
-            <a:r>
-              <a:rPr sz="2800" b="1">
-                <a:solidFill>
-                  <a:srgbClr val="5C6679"/>
-                </a:solidFill>
-                <a:latin typeface="Microsoft JhengHei"/>
-                <a:ea typeface="Microsoft JhengHei"/>
-                <a:cs typeface="Microsoft JhengHei"/>
-              </a:rPr>
-              <a:t>›</a:t>
-            </a:r>
-          </a:p>
-        </p:txBody>
-      </p:sp>
-      <p:sp>
-        <p:nvSpPr>
-          <p:cNvPr id="11" name="Rounded Rectangle 10"/>
-          <p:cNvSpPr/>
-          <p:nvPr/>
-        </p:nvSpPr>
-        <p:spPr>
-          <a:xfrm>
-            <a:off x="3447287" y="1828800"/>
-            <a:ext cx="2514600" cy="2286000"/>
-          </a:xfrm>
-          <a:prstGeom prst="roundRect">
-            <a:avLst/>
-          </a:prstGeom>
-          <a:solidFill>
-            <a:srgbClr val="14213D"/>
-          </a:solidFill>
-          <a:ln w="12700">
-            <a:solidFill>
-              <a:srgbClr val="DDE3EE"/>
-            </a:solidFill>
-          </a:ln>
-          <a:effectLst/>
-        </p:spPr>
-        <p:style>
-          <a:lnRef idx="1">
-            <a:schemeClr val="accent1"/>
-          </a:lnRef>
-          <a:fillRef idx="3">
-            <a:schemeClr val="accent1"/>
-          </a:fillRef>
-          <a:effectRef idx="2">
-            <a:schemeClr val="accent1"/>
-          </a:effectRef>
-          <a:fontRef idx="minor">
-            <a:schemeClr val="lt1"/>
-          </a:fontRef>
-        </p:style>
-        <p:txBody>
-          <a:bodyPr rtlCol="0" anchor="ctr"/>
-          <a:lstStyle/>
-          <a:p>
-            <a:pPr algn="ctr"/>
-          </a:p>
-        </p:txBody>
-      </p:sp>
-      <p:sp>
-        <p:nvSpPr>
-          <p:cNvPr id="12" name="Oval 11"/>
-          <p:cNvSpPr/>
-          <p:nvPr/>
-        </p:nvSpPr>
-        <p:spPr>
-          <a:xfrm>
-            <a:off x="4379975" y="2057400"/>
-            <a:ext cx="658368" cy="658368"/>
-          </a:xfrm>
-          <a:prstGeom prst="ellipse">
-            <a:avLst/>
-          </a:prstGeom>
-          <a:solidFill>
-            <a:srgbClr val="2EC4B6"/>
-          </a:solidFill>
-          <a:ln>
-            <a:noFill/>
-          </a:ln>
-          <a:effectLst/>
-        </p:spPr>
-        <p:style>
-          <a:lnRef idx="1">
-            <a:schemeClr val="accent1"/>
-          </a:lnRef>
-          <a:fillRef idx="3">
-            <a:schemeClr val="accent1"/>
-          </a:fillRef>
-          <a:effectRef idx="2">
-            <a:schemeClr val="accent1"/>
-          </a:effectRef>
-          <a:fontRef idx="minor">
-            <a:schemeClr val="lt1"/>
-          </a:fontRef>
-        </p:style>
-        <p:txBody>
-          <a:bodyPr rtlCol="0" anchor="ctr"/>
-          <a:lstStyle/>
-          <a:p>
-            <a:pPr algn="ctr"/>
-          </a:p>
-        </p:txBody>
-      </p:sp>
-      <p:sp>
-        <p:nvSpPr>
-          <p:cNvPr id="13" name="TextBox 12"/>
-          <p:cNvSpPr txBox="1"/>
-          <p:nvPr/>
-        </p:nvSpPr>
-        <p:spPr>
-          <a:xfrm>
-            <a:off x="4379975" y="2057400"/>
-            <a:ext cx="658368" cy="658368"/>
-          </a:xfrm>
-          <a:prstGeom prst="rect">
-            <a:avLst/>
-          </a:prstGeom>
-          <a:noFill/>
-        </p:spPr>
-        <p:txBody>
-          <a:bodyPr wrap="square" anchor="ctr" lIns="0" rIns="0" tIns="0" bIns="0">
-            <a:spAutoFit/>
-          </a:bodyPr>
-          <a:lstStyle/>
-          <a:p>
-            <a:pPr algn="ctr"/>
-            <a:r>
-              <a:rPr sz="1900" b="1">
-                <a:solidFill>
-                  <a:srgbClr val="14213D"/>
-                </a:solidFill>
-                <a:latin typeface="Microsoft JhengHei"/>
-                <a:ea typeface="Microsoft JhengHei"/>
-                <a:cs typeface="Microsoft JhengHei"/>
-              </a:rPr>
-              <a:t>02</a:t>
-            </a:r>
-          </a:p>
-        </p:txBody>
-      </p:sp>
-      <p:sp>
-        <p:nvSpPr>
-          <p:cNvPr id="14" name="TextBox 13"/>
-          <p:cNvSpPr txBox="1"/>
-          <p:nvPr/>
-        </p:nvSpPr>
-        <p:spPr>
-          <a:xfrm>
-            <a:off x="3447287" y="2880360"/>
-            <a:ext cx="2514600" cy="457200"/>
-          </a:xfrm>
-          <a:prstGeom prst="rect">
-            <a:avLst/>
-          </a:prstGeom>
-          <a:noFill/>
-        </p:spPr>
-        <p:txBody>
-          <a:bodyPr wrap="square" anchor="t" lIns="0" rIns="0" tIns="0" bIns="0">
-            <a:spAutoFit/>
-          </a:bodyPr>
-          <a:lstStyle/>
-          <a:p>
-            <a:pPr algn="ctr"/>
-            <a:r>
-              <a:rPr sz="1800" b="1">
-                <a:solidFill>
-                  <a:srgbClr val="FFFFFF"/>
-                </a:solidFill>
-                <a:latin typeface="Microsoft JhengHei"/>
-                <a:ea typeface="Microsoft JhengHei"/>
-                <a:cs typeface="Microsoft JhengHei"/>
-              </a:rPr>
-              <a:t>啟動應變</a:t>
-            </a:r>
-          </a:p>
-        </p:txBody>
-      </p:sp>
-      <p:sp>
-        <p:nvSpPr>
-          <p:cNvPr id="15" name="TextBox 14"/>
-          <p:cNvSpPr txBox="1"/>
-          <p:nvPr/>
-        </p:nvSpPr>
-        <p:spPr>
-          <a:xfrm>
-            <a:off x="3584447" y="3364992"/>
-            <a:ext cx="2240280" cy="685800"/>
-          </a:xfrm>
-          <a:prstGeom prst="rect">
-            <a:avLst/>
-          </a:prstGeom>
-          <a:noFill/>
-        </p:spPr>
-        <p:txBody>
-          <a:bodyPr wrap="square" anchor="t" lIns="0" rIns="0" tIns="0" bIns="0">
-            <a:spAutoFit/>
-          </a:bodyPr>
-          <a:lstStyle/>
-          <a:p>
-            <a:pPr algn="ctr">
-              <a:lnSpc>
-                <a:spcPts val="1500"/>
-              </a:lnSpc>
-            </a:pPr>
-            <a:r>
-              <a:rPr sz="1150" b="0">
-                <a:solidFill>
-                  <a:srgbClr val="CADCFC"/>
-                </a:solidFill>
-                <a:latin typeface="Microsoft JhengHei"/>
-                <a:ea typeface="Microsoft JhengHei"/>
-                <a:cs typeface="Microsoft JhengHei"/>
-              </a:rPr>
-              <a:t>立即啟動資安應變機制
-系統隔離、防護強化</a:t>
-            </a:r>
-          </a:p>
-        </p:txBody>
-      </p:sp>
-      <p:sp>
-        <p:nvSpPr>
-          <p:cNvPr id="16" name="TextBox 15"/>
-          <p:cNvSpPr txBox="1"/>
-          <p:nvPr/>
-        </p:nvSpPr>
-        <p:spPr>
-          <a:xfrm>
-            <a:off x="5934456" y="1828800"/>
-            <a:ext cx="365760" cy="2286000"/>
-          </a:xfrm>
-          <a:prstGeom prst="rect">
-            <a:avLst/>
-          </a:prstGeom>
-          <a:noFill/>
-        </p:spPr>
-        <p:txBody>
-          <a:bodyPr wrap="square" anchor="ctr" lIns="0" rIns="0" tIns="0" bIns="0">
-            <a:spAutoFit/>
-          </a:bodyPr>
-          <a:lstStyle/>
-          <a:p>
-            <a:pPr algn="ctr"/>
-            <a:r>
-              <a:rPr sz="2800" b="1">
-                <a:solidFill>
-                  <a:srgbClr val="5C6679"/>
-                </a:solidFill>
-                <a:latin typeface="Microsoft JhengHei"/>
-                <a:ea typeface="Microsoft JhengHei"/>
-                <a:cs typeface="Microsoft JhengHei"/>
-              </a:rPr>
-              <a:t>›</a:t>
-            </a:r>
-          </a:p>
-        </p:txBody>
-      </p:sp>
-      <p:sp>
-        <p:nvSpPr>
-          <p:cNvPr id="17" name="Rounded Rectangle 16"/>
-          <p:cNvSpPr/>
-          <p:nvPr/>
-        </p:nvSpPr>
-        <p:spPr>
-          <a:xfrm>
-            <a:off x="6254496" y="1828800"/>
-            <a:ext cx="2514600" cy="2286000"/>
-          </a:xfrm>
-          <a:prstGeom prst="roundRect">
-            <a:avLst/>
-          </a:prstGeom>
-          <a:solidFill>
-            <a:srgbClr val="14213D"/>
-          </a:solidFill>
-          <a:ln w="12700">
-            <a:solidFill>
-              <a:srgbClr val="DDE3EE"/>
-            </a:solidFill>
-          </a:ln>
-          <a:effectLst/>
-        </p:spPr>
-        <p:style>
-          <a:lnRef idx="1">
-            <a:schemeClr val="accent1"/>
-          </a:lnRef>
-          <a:fillRef idx="3">
-            <a:schemeClr val="accent1"/>
-          </a:fillRef>
-          <a:effectRef idx="2">
-            <a:schemeClr val="accent1"/>
-          </a:effectRef>
-          <a:fontRef idx="minor">
-            <a:schemeClr val="lt1"/>
-          </a:fontRef>
-        </p:style>
-        <p:txBody>
-          <a:bodyPr rtlCol="0" anchor="ctr"/>
-          <a:lstStyle/>
-          <a:p>
-            <a:pPr algn="ctr"/>
-          </a:p>
-        </p:txBody>
-      </p:sp>
-      <p:sp>
-        <p:nvSpPr>
-          <p:cNvPr id="18" name="Oval 17"/>
-          <p:cNvSpPr/>
-          <p:nvPr/>
-        </p:nvSpPr>
-        <p:spPr>
-          <a:xfrm>
-            <a:off x="7187183" y="2057400"/>
-            <a:ext cx="658368" cy="658368"/>
-          </a:xfrm>
-          <a:prstGeom prst="ellipse">
-            <a:avLst/>
-          </a:prstGeom>
-          <a:solidFill>
-            <a:srgbClr val="2EC4B6"/>
-          </a:solidFill>
-          <a:ln>
-            <a:noFill/>
-          </a:ln>
-          <a:effectLst/>
-        </p:spPr>
-        <p:style>
-          <a:lnRef idx="1">
-            <a:schemeClr val="accent1"/>
-          </a:lnRef>
-          <a:fillRef idx="3">
-            <a:schemeClr val="accent1"/>
-          </a:fillRef>
-          <a:effectRef idx="2">
-            <a:schemeClr val="accent1"/>
-          </a:effectRef>
-          <a:fontRef idx="minor">
-            <a:schemeClr val="lt1"/>
-          </a:fontRef>
-        </p:style>
-        <p:txBody>
-          <a:bodyPr rtlCol="0" anchor="ctr"/>
-          <a:lstStyle/>
-          <a:p>
-            <a:pPr algn="ctr"/>
-          </a:p>
-        </p:txBody>
-      </p:sp>
-      <p:sp>
-        <p:nvSpPr>
-          <p:cNvPr id="19" name="TextBox 18"/>
-          <p:cNvSpPr txBox="1"/>
-          <p:nvPr/>
-        </p:nvSpPr>
-        <p:spPr>
-          <a:xfrm>
-            <a:off x="7187183" y="2057400"/>
-            <a:ext cx="658368" cy="658368"/>
-          </a:xfrm>
-          <a:prstGeom prst="rect">
-            <a:avLst/>
-          </a:prstGeom>
-          <a:noFill/>
-        </p:spPr>
-        <p:txBody>
-          <a:bodyPr wrap="square" anchor="ctr" lIns="0" rIns="0" tIns="0" bIns="0">
-            <a:spAutoFit/>
-          </a:bodyPr>
-          <a:lstStyle/>
-          <a:p>
-            <a:pPr algn="ctr"/>
-            <a:r>
-              <a:rPr sz="1900" b="1">
-                <a:solidFill>
-                  <a:srgbClr val="14213D"/>
-                </a:solidFill>
-                <a:latin typeface="Microsoft JhengHei"/>
-                <a:ea typeface="Microsoft JhengHei"/>
-                <a:cs typeface="Microsoft JhengHei"/>
-              </a:rPr>
-              <a:t>03</a:t>
-            </a:r>
-          </a:p>
-        </p:txBody>
-      </p:sp>
-      <p:sp>
-        <p:nvSpPr>
-          <p:cNvPr id="20" name="TextBox 19"/>
-          <p:cNvSpPr txBox="1"/>
-          <p:nvPr/>
-        </p:nvSpPr>
-        <p:spPr>
-          <a:xfrm>
-            <a:off x="6254496" y="2880360"/>
-            <a:ext cx="2514600" cy="457200"/>
-          </a:xfrm>
-          <a:prstGeom prst="rect">
-            <a:avLst/>
-          </a:prstGeom>
-          <a:noFill/>
-        </p:spPr>
-        <p:txBody>
-          <a:bodyPr wrap="square" anchor="t" lIns="0" rIns="0" tIns="0" bIns="0">
-            <a:spAutoFit/>
-          </a:bodyPr>
-          <a:lstStyle/>
-          <a:p>
-            <a:pPr algn="ctr"/>
-            <a:r>
-              <a:rPr sz="1800" b="1">
-                <a:solidFill>
-                  <a:srgbClr val="FFFFFF"/>
-                </a:solidFill>
-                <a:latin typeface="Microsoft JhengHei"/>
-                <a:ea typeface="Microsoft JhengHei"/>
-                <a:cs typeface="Microsoft JhengHei"/>
-              </a:rPr>
-              <a:t>外部協助</a:t>
-            </a:r>
-          </a:p>
-        </p:txBody>
-      </p:sp>
-      <p:sp>
-        <p:nvSpPr>
-          <p:cNvPr id="21" name="TextBox 20"/>
-          <p:cNvSpPr txBox="1"/>
-          <p:nvPr/>
-        </p:nvSpPr>
-        <p:spPr>
-          <a:xfrm>
-            <a:off x="6391656" y="3364992"/>
-            <a:ext cx="2240280" cy="685800"/>
-          </a:xfrm>
-          <a:prstGeom prst="rect">
-            <a:avLst/>
-          </a:prstGeom>
-          <a:noFill/>
-        </p:spPr>
-        <p:txBody>
-          <a:bodyPr wrap="square" anchor="t" lIns="0" rIns="0" tIns="0" bIns="0">
-            <a:spAutoFit/>
-          </a:bodyPr>
-          <a:lstStyle/>
-          <a:p>
-            <a:pPr algn="ctr">
-              <a:lnSpc>
-                <a:spcPts val="1500"/>
-              </a:lnSpc>
-            </a:pPr>
-            <a:r>
-              <a:rPr sz="1150" b="0">
-                <a:solidFill>
-                  <a:srgbClr val="CADCFC"/>
-                </a:solidFill>
-                <a:latin typeface="Microsoft JhengHei"/>
-                <a:ea typeface="Microsoft JhengHei"/>
-                <a:cs typeface="Microsoft JhengHei"/>
-              </a:rPr>
-              <a:t>委請外部資安專業團隊
-鑑識調查與資料復原</a:t>
-            </a:r>
-          </a:p>
-        </p:txBody>
-      </p:sp>
-      <p:sp>
-        <p:nvSpPr>
-          <p:cNvPr id="22" name="TextBox 21"/>
-          <p:cNvSpPr txBox="1"/>
-          <p:nvPr/>
-        </p:nvSpPr>
-        <p:spPr>
-          <a:xfrm>
-            <a:off x="8741664" y="1828800"/>
-            <a:ext cx="365760" cy="2286000"/>
-          </a:xfrm>
-          <a:prstGeom prst="rect">
-            <a:avLst/>
-          </a:prstGeom>
-          <a:noFill/>
-        </p:spPr>
-        <p:txBody>
-          <a:bodyPr wrap="square" anchor="ctr" lIns="0" rIns="0" tIns="0" bIns="0">
-            <a:spAutoFit/>
-          </a:bodyPr>
-          <a:lstStyle/>
-          <a:p>
-            <a:pPr algn="ctr"/>
-            <a:r>
-              <a:rPr sz="2800" b="1">
-                <a:solidFill>
-                  <a:srgbClr val="5C6679"/>
-                </a:solidFill>
-                <a:latin typeface="Microsoft JhengHei"/>
-                <a:ea typeface="Microsoft JhengHei"/>
-                <a:cs typeface="Microsoft JhengHei"/>
-              </a:rPr>
-              <a:t>›</a:t>
-            </a:r>
-          </a:p>
-        </p:txBody>
-      </p:sp>
-      <p:sp>
-        <p:nvSpPr>
-          <p:cNvPr id="23" name="Rounded Rectangle 22"/>
-          <p:cNvSpPr/>
-          <p:nvPr/>
-        </p:nvSpPr>
-        <p:spPr>
-          <a:xfrm>
-            <a:off x="9061703" y="1828800"/>
-            <a:ext cx="2514600" cy="2286000"/>
-          </a:xfrm>
-          <a:prstGeom prst="roundRect">
-            <a:avLst/>
-          </a:prstGeom>
-          <a:solidFill>
-            <a:srgbClr val="14213D"/>
-          </a:solidFill>
-          <a:ln w="12700">
-            <a:solidFill>
-              <a:srgbClr val="DDE3EE"/>
-            </a:solidFill>
-          </a:ln>
-          <a:effectLst/>
-        </p:spPr>
-        <p:style>
-          <a:lnRef idx="1">
-            <a:schemeClr val="accent1"/>
-          </a:lnRef>
-          <a:fillRef idx="3">
-            <a:schemeClr val="accent1"/>
-          </a:fillRef>
-          <a:effectRef idx="2">
-            <a:schemeClr val="accent1"/>
-          </a:effectRef>
-          <a:fontRef idx="minor">
-            <a:schemeClr val="lt1"/>
-          </a:fontRef>
-        </p:style>
-        <p:txBody>
-          <a:bodyPr rtlCol="0" anchor="ctr"/>
-          <a:lstStyle/>
-          <a:p>
-            <a:pPr algn="ctr"/>
-          </a:p>
-        </p:txBody>
-      </p:sp>
-      <p:sp>
-        <p:nvSpPr>
-          <p:cNvPr id="24" name="Oval 23"/>
-          <p:cNvSpPr/>
-          <p:nvPr/>
-        </p:nvSpPr>
-        <p:spPr>
-          <a:xfrm>
-            <a:off x="9994391" y="2057400"/>
-            <a:ext cx="658368" cy="658368"/>
-          </a:xfrm>
-          <a:prstGeom prst="ellipse">
-            <a:avLst/>
-          </a:prstGeom>
-          <a:solidFill>
-            <a:srgbClr val="2EC4B6"/>
-          </a:solidFill>
-          <a:ln>
-            <a:noFill/>
-          </a:ln>
-          <a:effectLst/>
-        </p:spPr>
-        <p:style>
-          <a:lnRef idx="1">
-            <a:schemeClr val="accent1"/>
-          </a:lnRef>
-          <a:fillRef idx="3">
-            <a:schemeClr val="accent1"/>
-          </a:fillRef>
-          <a:effectRef idx="2">
-            <a:schemeClr val="accent1"/>
-          </a:effectRef>
-          <a:fontRef idx="minor">
-            <a:schemeClr val="lt1"/>
-          </a:fontRef>
-        </p:style>
-        <p:txBody>
-          <a:bodyPr rtlCol="0" anchor="ctr"/>
-          <a:lstStyle/>
-          <a:p>
-            <a:pPr algn="ctr"/>
-          </a:p>
-        </p:txBody>
-      </p:sp>
-      <p:sp>
-        <p:nvSpPr>
-          <p:cNvPr id="25" name="TextBox 24"/>
-          <p:cNvSpPr txBox="1"/>
-          <p:nvPr/>
-        </p:nvSpPr>
-        <p:spPr>
-          <a:xfrm>
-            <a:off x="9994391" y="2057400"/>
-            <a:ext cx="658368" cy="658368"/>
-          </a:xfrm>
-          <a:prstGeom prst="rect">
-            <a:avLst/>
-          </a:prstGeom>
-          <a:noFill/>
-        </p:spPr>
-        <p:txBody>
-          <a:bodyPr wrap="square" anchor="ctr" lIns="0" rIns="0" tIns="0" bIns="0">
-            <a:spAutoFit/>
-          </a:bodyPr>
-          <a:lstStyle/>
-          <a:p>
-            <a:pPr algn="ctr"/>
-            <a:r>
-              <a:rPr sz="1900" b="1">
-                <a:solidFill>
-                  <a:srgbClr val="14213D"/>
-                </a:solidFill>
-                <a:latin typeface="Microsoft JhengHei"/>
-                <a:ea typeface="Microsoft JhengHei"/>
-                <a:cs typeface="Microsoft JhengHei"/>
-              </a:rPr>
-              <a:t>04</a:t>
-            </a:r>
-          </a:p>
-        </p:txBody>
-      </p:sp>
-      <p:sp>
-        <p:nvSpPr>
-          <p:cNvPr id="26" name="TextBox 25"/>
-          <p:cNvSpPr txBox="1"/>
-          <p:nvPr/>
-        </p:nvSpPr>
-        <p:spPr>
-          <a:xfrm>
-            <a:off x="9061703" y="2880360"/>
-            <a:ext cx="2514600" cy="457200"/>
-          </a:xfrm>
-          <a:prstGeom prst="rect">
-            <a:avLst/>
-          </a:prstGeom>
-          <a:noFill/>
-        </p:spPr>
-        <p:txBody>
-          <a:bodyPr wrap="square" anchor="t" lIns="0" rIns="0" tIns="0" bIns="0">
-            <a:spAutoFit/>
-          </a:bodyPr>
-          <a:lstStyle/>
-          <a:p>
-            <a:pPr algn="ctr"/>
-            <a:r>
-              <a:rPr sz="1800" b="1">
-                <a:solidFill>
-                  <a:srgbClr val="FFFFFF"/>
-                </a:solidFill>
-                <a:latin typeface="Microsoft JhengHei"/>
-                <a:ea typeface="Microsoft JhengHei"/>
-                <a:cs typeface="Microsoft JhengHei"/>
-              </a:rPr>
-              <a:t>強化監控</a:t>
-            </a:r>
-          </a:p>
-        </p:txBody>
-      </p:sp>
-      <p:sp>
-        <p:nvSpPr>
-          <p:cNvPr id="27" name="TextBox 26"/>
-          <p:cNvSpPr txBox="1"/>
-          <p:nvPr/>
-        </p:nvSpPr>
-        <p:spPr>
-          <a:xfrm>
-            <a:off x="9198863" y="3364992"/>
-            <a:ext cx="2240280" cy="685800"/>
-          </a:xfrm>
-          <a:prstGeom prst="rect">
-            <a:avLst/>
-          </a:prstGeom>
-          <a:noFill/>
-        </p:spPr>
-        <p:txBody>
-          <a:bodyPr wrap="square" anchor="t" lIns="0" rIns="0" tIns="0" bIns="0">
-            <a:spAutoFit/>
-          </a:bodyPr>
-          <a:lstStyle/>
-          <a:p>
-            <a:pPr algn="ctr">
-              <a:lnSpc>
-                <a:spcPts val="1500"/>
-              </a:lnSpc>
-            </a:pPr>
-            <a:r>
-              <a:rPr sz="1150" b="0">
-                <a:solidFill>
-                  <a:srgbClr val="CADCFC"/>
-                </a:solidFill>
-                <a:latin typeface="Microsoft JhengHei"/>
-                <a:ea typeface="Microsoft JhengHei"/>
-                <a:cs typeface="Microsoft JhengHei"/>
-              </a:rPr>
-              <a:t>盤查系統、提升架構
-持續密切監控防護</a:t>
-            </a:r>
-          </a:p>
-        </p:txBody>
-      </p:sp>
-      <p:sp>
-        <p:nvSpPr>
-          <p:cNvPr id="28" name="Rounded Rectangle 27"/>
-          <p:cNvSpPr/>
-          <p:nvPr/>
-        </p:nvSpPr>
-        <p:spPr>
-          <a:xfrm>
-            <a:off x="640080" y="4572000"/>
-            <a:ext cx="10881360" cy="1325880"/>
-          </a:xfrm>
-          <a:prstGeom prst="roundRect">
-            <a:avLst/>
-          </a:prstGeom>
-          <a:solidFill>
-            <a:srgbClr val="FFF1F0"/>
-          </a:solidFill>
-          <a:ln>
-            <a:noFill/>
-          </a:ln>
-          <a:effectLst/>
-        </p:spPr>
-        <p:style>
-          <a:lnRef idx="1">
-            <a:schemeClr val="accent1"/>
-          </a:lnRef>
-          <a:fillRef idx="3">
-            <a:schemeClr val="accent1"/>
-          </a:fillRef>
-          <a:effectRef idx="2">
-            <a:schemeClr val="accent1"/>
-          </a:effectRef>
-          <a:fontRef idx="minor">
-            <a:schemeClr val="lt1"/>
-          </a:fontRef>
-        </p:style>
-        <p:txBody>
-          <a:bodyPr rtlCol="0" anchor="ctr"/>
-          <a:lstStyle/>
-          <a:p>
-            <a:pPr algn="ctr"/>
-          </a:p>
-        </p:txBody>
-      </p:sp>
-      <p:sp>
-        <p:nvSpPr>
-          <p:cNvPr id="29" name="Rectangle 28"/>
-          <p:cNvSpPr/>
-          <p:nvPr/>
-        </p:nvSpPr>
-        <p:spPr>
-          <a:xfrm>
-            <a:off x="640080" y="4572000"/>
-            <a:ext cx="109728" cy="1325880"/>
-          </a:xfrm>
-          <a:prstGeom prst="rect">
-            <a:avLst/>
-          </a:prstGeom>
-          <a:solidFill>
-            <a:srgbClr val="E63946"/>
-          </a:solidFill>
-          <a:ln>
-            <a:noFill/>
-          </a:ln>
-          <a:effectLst/>
-        </p:spPr>
-        <p:style>
-          <a:lnRef idx="1">
-            <a:schemeClr val="accent1"/>
-          </a:lnRef>
-          <a:fillRef idx="3">
-            <a:schemeClr val="accent1"/>
-          </a:fillRef>
-          <a:effectRef idx="2">
-            <a:schemeClr val="accent1"/>
-          </a:effectRef>
-          <a:fontRef idx="minor">
-            <a:schemeClr val="lt1"/>
-          </a:fontRef>
-        </p:style>
-        <p:txBody>
-          <a:bodyPr rtlCol="0" anchor="ctr"/>
-          <a:lstStyle/>
-          <a:p>
-            <a:pPr algn="ctr"/>
-          </a:p>
-        </p:txBody>
-      </p:sp>
-      <p:sp>
-        <p:nvSpPr>
-          <p:cNvPr id="30" name="TextBox 29"/>
-          <p:cNvSpPr txBox="1"/>
-          <p:nvPr/>
-        </p:nvSpPr>
-        <p:spPr>
-          <a:xfrm>
-            <a:off x="868680" y="4709160"/>
-            <a:ext cx="10424160" cy="411480"/>
-          </a:xfrm>
-          <a:prstGeom prst="rect">
-            <a:avLst/>
-          </a:prstGeom>
-          <a:noFill/>
-        </p:spPr>
-        <p:txBody>
-          <a:bodyPr wrap="square" anchor="ctr" lIns="0" rIns="0" tIns="0" bIns="0">
-            <a:spAutoFit/>
-          </a:bodyPr>
-          <a:lstStyle/>
-          <a:p>
-            <a:pPr algn="l"/>
-            <a:r>
-              <a:rPr sz="1500" b="1">
-                <a:solidFill>
-                  <a:srgbClr val="E63946"/>
-                </a:solidFill>
-                <a:latin typeface="Microsoft JhengHei"/>
-                <a:ea typeface="Microsoft JhengHei"/>
-                <a:cs typeface="Microsoft JhengHei"/>
-              </a:rPr>
-              <a:t>個資外洩事件額外步驟　</a:t>
-            </a:r>
-            <a:r>
-              <a:rPr sz="1200" b="0">
-                <a:solidFill>
-                  <a:srgbClr val="5C6679"/>
-                </a:solidFill>
-                <a:latin typeface="Microsoft JhengHei"/>
-                <a:ea typeface="Microsoft JhengHei"/>
-                <a:cs typeface="Microsoft JhengHei"/>
-              </a:rPr>
-              <a:t>（依事件性質適用）</a:t>
-            </a:r>
-          </a:p>
-        </p:txBody>
-      </p:sp>
-      <p:sp>
-        <p:nvSpPr>
-          <p:cNvPr id="31" name="TextBox 30"/>
-          <p:cNvSpPr txBox="1"/>
-          <p:nvPr/>
-        </p:nvSpPr>
-        <p:spPr>
-          <a:xfrm>
-            <a:off x="868680" y="5166360"/>
-            <a:ext cx="10515600" cy="548640"/>
-          </a:xfrm>
-          <a:prstGeom prst="rect">
-            <a:avLst/>
-          </a:prstGeom>
-          <a:noFill/>
-        </p:spPr>
-        <p:txBody>
-          <a:bodyPr wrap="square" anchor="t" lIns="0" rIns="0" tIns="0" bIns="0">
-            <a:spAutoFit/>
-          </a:bodyPr>
-          <a:lstStyle/>
-          <a:p>
-            <a:pPr algn="l">
-              <a:lnSpc>
-                <a:spcPts val="1600"/>
-              </a:lnSpc>
-            </a:pPr>
-            <a:r>
-              <a:rPr sz="1200" b="0">
-                <a:solidFill>
-                  <a:srgbClr val="1A2233"/>
-                </a:solidFill>
-                <a:latin typeface="Microsoft JhengHei"/>
-                <a:ea typeface="Microsoft JhengHei"/>
-                <a:cs typeface="Microsoft JhengHei"/>
-              </a:rPr>
-              <a:t>依法通報主管機關　•　主動通知受影響當事人並提供客服　•　向調查局報案　•　強化委外廠商與第三方工具管理</a:t>
-            </a:r>
-          </a:p>
-        </p:txBody>
-      </p:sp>
+              <a:t>各公司目前之簽證會計師事務所與簽證會計師</a:t>
+            </a:r>
+          </a:p>
+        </p:txBody>
+      </p:sp>
+      <p:graphicFrame>
+        <p:nvGraphicFramePr>
+          <p:cNvPr id="5" name="Table 4"/>
+          <p:cNvGraphicFramePr>
+            <a:graphicFrameLocks noGrp="1"/>
+          </p:cNvGraphicFramePr>
+          <p:nvPr/>
+        </p:nvGraphicFramePr>
+        <p:xfrm>
+          <a:off x="548640" y="1600200"/>
+          <a:ext cx="10789920" cy="4114800"/>
+        </p:xfrm>
+        <a:graphic>
+          <a:graphicData uri="http://schemas.openxmlformats.org/drawingml/2006/table">
+            <a:tbl>
+              <a:tblPr>
+                <a:tableStyleId>{5C22544A-7EE6-4342-B048-85BDC9FD1C3A}</a:tableStyleId>
+              </a:tblPr>
+              <a:tblGrid>
+                <a:gridCol w="1828800"/>
+                <a:gridCol w="868680"/>
+                <a:gridCol w="2103120"/>
+                <a:gridCol w="3383280"/>
+                <a:gridCol w="2606040"/>
+              </a:tblGrid>
+              <a:tr h="457200">
+                <a:tc>
+                  <a:txBody>
+                    <a:bodyPr/>
+                    <a:lstStyle/>
+                    <a:p>
+                      <a:r>
+                        <a:rPr sz="1250" b="1">
+                          <a:solidFill>
+                            <a:srgbClr val="FFFFFF"/>
+                          </a:solidFill>
+                          <a:latin typeface="Microsoft JhengHei"/>
+                          <a:ea typeface="Microsoft JhengHei"/>
+                          <a:cs typeface="Microsoft JhengHei"/>
+                        </a:rPr>
+                        <a:t>公司</a:t>
+                      </a:r>
+                    </a:p>
+                  </a:txBody>
+                  <a:tcPr anchor="ctr" marL="73152" marT="18288" marB="18288">
+                    <a:solidFill>
+                      <a:srgbClr val="14213D"/>
+                    </a:solidFill>
+                  </a:tcPr>
+                </a:tc>
+                <a:tc>
+                  <a:txBody>
+                    <a:bodyPr/>
+                    <a:lstStyle/>
+                    <a:p>
+                      <a:r>
+                        <a:rPr sz="1250" b="1">
+                          <a:solidFill>
+                            <a:srgbClr val="FFFFFF"/>
+                          </a:solidFill>
+                          <a:latin typeface="Microsoft JhengHei"/>
+                          <a:ea typeface="Microsoft JhengHei"/>
+                          <a:cs typeface="Microsoft JhengHei"/>
+                        </a:rPr>
+                        <a:t>代號</a:t>
+                      </a:r>
+                    </a:p>
+                  </a:txBody>
+                  <a:tcPr anchor="ctr" marL="73152" marT="18288" marB="18288">
+                    <a:solidFill>
+                      <a:srgbClr val="14213D"/>
+                    </a:solidFill>
+                  </a:tcPr>
+                </a:tc>
+                <a:tc>
+                  <a:txBody>
+                    <a:bodyPr/>
+                    <a:lstStyle/>
+                    <a:p>
+                      <a:r>
+                        <a:rPr sz="1250" b="1">
+                          <a:solidFill>
+                            <a:srgbClr val="FFFFFF"/>
+                          </a:solidFill>
+                          <a:latin typeface="Microsoft JhengHei"/>
+                          <a:ea typeface="Microsoft JhengHei"/>
+                          <a:cs typeface="Microsoft JhengHei"/>
+                        </a:rPr>
+                        <a:t>事件類型</a:t>
+                      </a:r>
+                    </a:p>
+                  </a:txBody>
+                  <a:tcPr anchor="ctr" marL="73152" marT="18288" marB="18288">
+                    <a:solidFill>
+                      <a:srgbClr val="14213D"/>
+                    </a:solidFill>
+                  </a:tcPr>
+                </a:tc>
+                <a:tc>
+                  <a:txBody>
+                    <a:bodyPr/>
+                    <a:lstStyle/>
+                    <a:p>
+                      <a:r>
+                        <a:rPr sz="1250" b="1">
+                          <a:solidFill>
+                            <a:srgbClr val="FFFFFF"/>
+                          </a:solidFill>
+                          <a:latin typeface="Microsoft JhengHei"/>
+                          <a:ea typeface="Microsoft JhengHei"/>
+                          <a:cs typeface="Microsoft JhengHei"/>
+                        </a:rPr>
+                        <a:t>簽證會計師事務所</a:t>
+                      </a:r>
+                    </a:p>
+                  </a:txBody>
+                  <a:tcPr anchor="ctr" marL="73152" marT="18288" marB="18288">
+                    <a:solidFill>
+                      <a:srgbClr val="14213D"/>
+                    </a:solidFill>
+                  </a:tcPr>
+                </a:tc>
+                <a:tc>
+                  <a:txBody>
+                    <a:bodyPr/>
+                    <a:lstStyle/>
+                    <a:p>
+                      <a:r>
+                        <a:rPr sz="1250" b="1">
+                          <a:solidFill>
+                            <a:srgbClr val="FFFFFF"/>
+                          </a:solidFill>
+                          <a:latin typeface="Microsoft JhengHei"/>
+                          <a:ea typeface="Microsoft JhengHei"/>
+                          <a:cs typeface="Microsoft JhengHei"/>
+                        </a:rPr>
+                        <a:t>簽證會計師</a:t>
+                      </a:r>
+                    </a:p>
+                  </a:txBody>
+                  <a:tcPr anchor="ctr" marL="73152" marT="18288" marB="18288">
+                    <a:solidFill>
+                      <a:srgbClr val="14213D"/>
+                    </a:solidFill>
+                  </a:tcPr>
+                </a:tc>
+              </a:tr>
+              <a:tr h="457200">
+                <a:tc>
+                  <a:txBody>
+                    <a:bodyPr/>
+                    <a:lstStyle/>
+                    <a:p>
+                      <a:r>
+                        <a:rPr sz="1150" b="0">
+                          <a:solidFill>
+                            <a:srgbClr val="1A2233"/>
+                          </a:solidFill>
+                          <a:latin typeface="Microsoft JhengHei"/>
+                          <a:ea typeface="Microsoft JhengHei"/>
+                          <a:cs typeface="Microsoft JhengHei"/>
+                        </a:rPr>
+                        <a:t>數字</a:t>
+                      </a:r>
+                    </a:p>
+                  </a:txBody>
+                  <a:tcPr anchor="ctr" marL="73152" marT="9144" marB="9144">
+                    <a:solidFill>
+                      <a:srgbClr val="FFFFFF"/>
+                    </a:solidFill>
+                  </a:tcPr>
+                </a:tc>
+                <a:tc>
+                  <a:txBody>
+                    <a:bodyPr/>
+                    <a:lstStyle/>
+                    <a:p>
+                      <a:r>
+                        <a:rPr sz="1150" b="0">
+                          <a:solidFill>
+                            <a:srgbClr val="1A2233"/>
+                          </a:solidFill>
+                          <a:latin typeface="Microsoft JhengHei"/>
+                          <a:ea typeface="Microsoft JhengHei"/>
+                          <a:cs typeface="Microsoft JhengHei"/>
+                        </a:rPr>
+                        <a:t>5287</a:t>
+                      </a:r>
+                    </a:p>
+                  </a:txBody>
+                  <a:tcPr anchor="ctr" marL="73152" marT="9144" marB="9144">
+                    <a:solidFill>
+                      <a:srgbClr val="FFFFFF"/>
+                    </a:solidFill>
+                  </a:tcPr>
+                </a:tc>
+                <a:tc>
+                  <a:txBody>
+                    <a:bodyPr/>
+                    <a:lstStyle/>
+                    <a:p>
+                      <a:r>
+                        <a:rPr sz="1150" b="1">
+                          <a:solidFill>
+                            <a:srgbClr val="27A6C4"/>
+                          </a:solidFill>
+                          <a:latin typeface="Microsoft JhengHei"/>
+                          <a:ea typeface="Microsoft JhengHei"/>
+                          <a:cs typeface="Microsoft JhengHei"/>
+                        </a:rPr>
+                        <a:t>個資外洩</a:t>
+                      </a:r>
+                    </a:p>
+                  </a:txBody>
+                  <a:tcPr anchor="ctr" marL="73152" marT="9144" marB="9144">
+                    <a:solidFill>
+                      <a:srgbClr val="FFFFFF"/>
+                    </a:solidFill>
+                  </a:tcPr>
+                </a:tc>
+                <a:tc>
+                  <a:txBody>
+                    <a:bodyPr/>
+                    <a:lstStyle/>
+                    <a:p>
+                      <a:r>
+                        <a:rPr sz="1150" b="0">
+                          <a:solidFill>
+                            <a:srgbClr val="1A2233"/>
+                          </a:solidFill>
+                          <a:latin typeface="Microsoft JhengHei"/>
+                          <a:ea typeface="Microsoft JhengHei"/>
+                          <a:cs typeface="Microsoft JhengHei"/>
+                        </a:rPr>
+                        <a:t>安侯建業聯合會計師事務所</a:t>
+                      </a:r>
+                    </a:p>
+                  </a:txBody>
+                  <a:tcPr anchor="ctr" marL="73152" marT="9144" marB="9144">
+                    <a:solidFill>
+                      <a:srgbClr val="FFFFFF"/>
+                    </a:solidFill>
+                  </a:tcPr>
+                </a:tc>
+                <a:tc>
+                  <a:txBody>
+                    <a:bodyPr/>
+                    <a:lstStyle/>
+                    <a:p>
+                      <a:r>
+                        <a:rPr sz="1150" b="0">
+                          <a:solidFill>
+                            <a:srgbClr val="1A2233"/>
+                          </a:solidFill>
+                          <a:latin typeface="Microsoft JhengHei"/>
+                          <a:ea typeface="Microsoft JhengHei"/>
+                          <a:cs typeface="Microsoft JhengHei"/>
+                        </a:rPr>
+                        <a:t>羅瑞芝、余聖河</a:t>
+                      </a:r>
+                    </a:p>
+                  </a:txBody>
+                  <a:tcPr anchor="ctr" marL="73152" marT="9144" marB="9144">
+                    <a:solidFill>
+                      <a:srgbClr val="FFFFFF"/>
+                    </a:solidFill>
+                  </a:tcPr>
+                </a:tc>
+              </a:tr>
+              <a:tr h="457200">
+                <a:tc>
+                  <a:txBody>
+                    <a:bodyPr/>
+                    <a:lstStyle/>
+                    <a:p>
+                      <a:r>
+                        <a:rPr sz="1150" b="0">
+                          <a:solidFill>
+                            <a:srgbClr val="1A2233"/>
+                          </a:solidFill>
+                          <a:latin typeface="Microsoft JhengHei"/>
+                          <a:ea typeface="Microsoft JhengHei"/>
+                          <a:cs typeface="Microsoft JhengHei"/>
+                        </a:rPr>
+                        <a:t>弘塑</a:t>
+                      </a:r>
+                    </a:p>
+                  </a:txBody>
+                  <a:tcPr anchor="ctr" marL="73152" marT="9144" marB="9144">
+                    <a:solidFill>
+                      <a:srgbClr val="EEF2F9"/>
+                    </a:solidFill>
+                  </a:tcPr>
+                </a:tc>
+                <a:tc>
+                  <a:txBody>
+                    <a:bodyPr/>
+                    <a:lstStyle/>
+                    <a:p>
+                      <a:r>
+                        <a:rPr sz="1150" b="0">
+                          <a:solidFill>
+                            <a:srgbClr val="1A2233"/>
+                          </a:solidFill>
+                          <a:latin typeface="Microsoft JhengHei"/>
+                          <a:ea typeface="Microsoft JhengHei"/>
+                          <a:cs typeface="Microsoft JhengHei"/>
+                        </a:rPr>
+                        <a:t>3131</a:t>
+                      </a:r>
+                    </a:p>
+                  </a:txBody>
+                  <a:tcPr anchor="ctr" marL="73152" marT="9144" marB="9144">
+                    <a:solidFill>
+                      <a:srgbClr val="EEF2F9"/>
+                    </a:solidFill>
+                  </a:tcPr>
+                </a:tc>
+                <a:tc>
+                  <a:txBody>
+                    <a:bodyPr/>
+                    <a:lstStyle/>
+                    <a:p>
+                      <a:r>
+                        <a:rPr sz="1150" b="1">
+                          <a:solidFill>
+                            <a:srgbClr val="F4A261"/>
+                          </a:solidFill>
+                          <a:latin typeface="Microsoft JhengHei"/>
+                          <a:ea typeface="Microsoft JhengHei"/>
+                          <a:cs typeface="Microsoft JhengHei"/>
+                        </a:rPr>
+                        <a:t>勒索病毒/加密</a:t>
+                      </a:r>
+                    </a:p>
+                  </a:txBody>
+                  <a:tcPr anchor="ctr" marL="73152" marT="9144" marB="9144">
+                    <a:solidFill>
+                      <a:srgbClr val="EEF2F9"/>
+                    </a:solidFill>
+                  </a:tcPr>
+                </a:tc>
+                <a:tc>
+                  <a:txBody>
+                    <a:bodyPr/>
+                    <a:lstStyle/>
+                    <a:p>
+                      <a:r>
+                        <a:rPr sz="1150" b="0">
+                          <a:solidFill>
+                            <a:srgbClr val="1A2233"/>
+                          </a:solidFill>
+                          <a:latin typeface="Microsoft JhengHei"/>
+                          <a:ea typeface="Microsoft JhengHei"/>
+                          <a:cs typeface="Microsoft JhengHei"/>
+                        </a:rPr>
+                        <a:t>資誠聯合會計師事務所</a:t>
+                      </a:r>
+                    </a:p>
+                  </a:txBody>
+                  <a:tcPr anchor="ctr" marL="73152" marT="9144" marB="9144">
+                    <a:solidFill>
+                      <a:srgbClr val="EEF2F9"/>
+                    </a:solidFill>
+                  </a:tcPr>
+                </a:tc>
+                <a:tc>
+                  <a:txBody>
+                    <a:bodyPr/>
+                    <a:lstStyle/>
+                    <a:p>
+                      <a:r>
+                        <a:rPr sz="1150" b="0">
+                          <a:solidFill>
+                            <a:srgbClr val="1A2233"/>
+                          </a:solidFill>
+                          <a:latin typeface="Microsoft JhengHei"/>
+                          <a:ea typeface="Microsoft JhengHei"/>
+                          <a:cs typeface="Microsoft JhengHei"/>
+                        </a:rPr>
+                        <a:t>李典易、蔣承翰</a:t>
+                      </a:r>
+                    </a:p>
+                  </a:txBody>
+                  <a:tcPr anchor="ctr" marL="73152" marT="9144" marB="9144">
+                    <a:solidFill>
+                      <a:srgbClr val="EEF2F9"/>
+                    </a:solidFill>
+                  </a:tcPr>
+                </a:tc>
+              </a:tr>
+              <a:tr h="457200">
+                <a:tc>
+                  <a:txBody>
+                    <a:bodyPr/>
+                    <a:lstStyle/>
+                    <a:p>
+                      <a:r>
+                        <a:rPr sz="1150" b="0">
+                          <a:solidFill>
+                            <a:srgbClr val="1A2233"/>
+                          </a:solidFill>
+                          <a:latin typeface="Microsoft JhengHei"/>
+                          <a:ea typeface="Microsoft JhengHei"/>
+                          <a:cs typeface="Microsoft JhengHei"/>
+                        </a:rPr>
+                        <a:t>建德工業</a:t>
+                      </a:r>
+                    </a:p>
+                  </a:txBody>
+                  <a:tcPr anchor="ctr" marL="73152" marT="9144" marB="9144">
+                    <a:solidFill>
+                      <a:srgbClr val="FFFFFF"/>
+                    </a:solidFill>
+                  </a:tcPr>
+                </a:tc>
+                <a:tc>
+                  <a:txBody>
+                    <a:bodyPr/>
+                    <a:lstStyle/>
+                    <a:p>
+                      <a:r>
+                        <a:rPr sz="1150" b="0">
+                          <a:solidFill>
+                            <a:srgbClr val="1A2233"/>
+                          </a:solidFill>
+                          <a:latin typeface="Microsoft JhengHei"/>
+                          <a:ea typeface="Microsoft JhengHei"/>
+                          <a:cs typeface="Microsoft JhengHei"/>
+                        </a:rPr>
+                        <a:t>6606</a:t>
+                      </a:r>
+                    </a:p>
+                  </a:txBody>
+                  <a:tcPr anchor="ctr" marL="73152" marT="9144" marB="9144">
+                    <a:solidFill>
+                      <a:srgbClr val="FFFFFF"/>
+                    </a:solidFill>
+                  </a:tcPr>
+                </a:tc>
+                <a:tc>
+                  <a:txBody>
+                    <a:bodyPr/>
+                    <a:lstStyle/>
+                    <a:p>
+                      <a:r>
+                        <a:rPr sz="1150" b="1">
+                          <a:solidFill>
+                            <a:srgbClr val="E63946"/>
+                          </a:solidFill>
+                          <a:latin typeface="Microsoft JhengHei"/>
+                          <a:ea typeface="Microsoft JhengHei"/>
+                          <a:cs typeface="Microsoft JhengHei"/>
+                        </a:rPr>
+                        <a:t>駭客攻擊</a:t>
+                      </a:r>
+                    </a:p>
+                  </a:txBody>
+                  <a:tcPr anchor="ctr" marL="73152" marT="9144" marB="9144">
+                    <a:solidFill>
+                      <a:srgbClr val="FFFFFF"/>
+                    </a:solidFill>
+                  </a:tcPr>
+                </a:tc>
+                <a:tc>
+                  <a:txBody>
+                    <a:bodyPr/>
+                    <a:lstStyle/>
+                    <a:p>
+                      <a:r>
+                        <a:rPr sz="1150" b="0">
+                          <a:solidFill>
+                            <a:srgbClr val="1A2233"/>
+                          </a:solidFill>
+                          <a:latin typeface="Microsoft JhengHei"/>
+                          <a:ea typeface="Microsoft JhengHei"/>
+                          <a:cs typeface="Microsoft JhengHei"/>
+                        </a:rPr>
+                        <a:t>資誠聯合會計師事務所</a:t>
+                      </a:r>
+                    </a:p>
+                  </a:txBody>
+                  <a:tcPr anchor="ctr" marL="73152" marT="9144" marB="9144">
+                    <a:solidFill>
+                      <a:srgbClr val="FFFFFF"/>
+                    </a:solidFill>
+                  </a:tcPr>
+                </a:tc>
+                <a:tc>
+                  <a:txBody>
+                    <a:bodyPr/>
+                    <a:lstStyle/>
+                    <a:p>
+                      <a:r>
+                        <a:rPr sz="1150" b="0">
+                          <a:solidFill>
+                            <a:srgbClr val="1A2233"/>
+                          </a:solidFill>
+                          <a:latin typeface="Microsoft JhengHei"/>
+                          <a:ea typeface="Microsoft JhengHei"/>
+                          <a:cs typeface="Microsoft JhengHei"/>
+                        </a:rPr>
+                        <a:t>林秀珊、吳建志</a:t>
+                      </a:r>
+                    </a:p>
+                  </a:txBody>
+                  <a:tcPr anchor="ctr" marL="73152" marT="9144" marB="9144">
+                    <a:solidFill>
+                      <a:srgbClr val="FFFFFF"/>
+                    </a:solidFill>
+                  </a:tcPr>
+                </a:tc>
+              </a:tr>
+              <a:tr h="457200">
+                <a:tc>
+                  <a:txBody>
+                    <a:bodyPr/>
+                    <a:lstStyle/>
+                    <a:p>
+                      <a:r>
+                        <a:rPr sz="1150" b="0">
+                          <a:solidFill>
+                            <a:srgbClr val="1A2233"/>
+                          </a:solidFill>
+                          <a:latin typeface="Microsoft JhengHei"/>
+                          <a:ea typeface="Microsoft JhengHei"/>
+                          <a:cs typeface="Microsoft JhengHei"/>
+                        </a:rPr>
+                        <a:t>永信</a:t>
+                      </a:r>
+                    </a:p>
+                  </a:txBody>
+                  <a:tcPr anchor="ctr" marL="73152" marT="9144" marB="9144">
+                    <a:solidFill>
+                      <a:srgbClr val="EEF2F9"/>
+                    </a:solidFill>
+                  </a:tcPr>
+                </a:tc>
+                <a:tc>
+                  <a:txBody>
+                    <a:bodyPr/>
+                    <a:lstStyle/>
+                    <a:p>
+                      <a:r>
+                        <a:rPr sz="1150" b="0">
+                          <a:solidFill>
+                            <a:srgbClr val="1A2233"/>
+                          </a:solidFill>
+                          <a:latin typeface="Microsoft JhengHei"/>
+                          <a:ea typeface="Microsoft JhengHei"/>
+                          <a:cs typeface="Microsoft JhengHei"/>
+                        </a:rPr>
+                        <a:t>3705</a:t>
+                      </a:r>
+                    </a:p>
+                  </a:txBody>
+                  <a:tcPr anchor="ctr" marL="73152" marT="9144" marB="9144">
+                    <a:solidFill>
+                      <a:srgbClr val="EEF2F9"/>
+                    </a:solidFill>
+                  </a:tcPr>
+                </a:tc>
+                <a:tc>
+                  <a:txBody>
+                    <a:bodyPr/>
+                    <a:lstStyle/>
+                    <a:p>
+                      <a:r>
+                        <a:rPr sz="1150" b="1">
+                          <a:solidFill>
+                            <a:srgbClr val="27A6C4"/>
+                          </a:solidFill>
+                          <a:latin typeface="Microsoft JhengHei"/>
+                          <a:ea typeface="Microsoft JhengHei"/>
+                          <a:cs typeface="Microsoft JhengHei"/>
+                        </a:rPr>
+                        <a:t>個資外洩</a:t>
+                      </a:r>
+                    </a:p>
+                  </a:txBody>
+                  <a:tcPr anchor="ctr" marL="73152" marT="9144" marB="9144">
+                    <a:solidFill>
+                      <a:srgbClr val="EEF2F9"/>
+                    </a:solidFill>
+                  </a:tcPr>
+                </a:tc>
+                <a:tc>
+                  <a:txBody>
+                    <a:bodyPr/>
+                    <a:lstStyle/>
+                    <a:p>
+                      <a:r>
+                        <a:rPr sz="1150" b="0">
+                          <a:solidFill>
+                            <a:srgbClr val="1A2233"/>
+                          </a:solidFill>
+                          <a:latin typeface="Microsoft JhengHei"/>
+                          <a:ea typeface="Microsoft JhengHei"/>
+                          <a:cs typeface="Microsoft JhengHei"/>
+                        </a:rPr>
+                        <a:t>安侯建業聯合會計師事務所</a:t>
+                      </a:r>
+                    </a:p>
+                  </a:txBody>
+                  <a:tcPr anchor="ctr" marL="73152" marT="9144" marB="9144">
+                    <a:solidFill>
+                      <a:srgbClr val="EEF2F9"/>
+                    </a:solidFill>
+                  </a:tcPr>
+                </a:tc>
+                <a:tc>
+                  <a:txBody>
+                    <a:bodyPr/>
+                    <a:lstStyle/>
+                    <a:p>
+                      <a:r>
+                        <a:rPr sz="1150" b="0">
+                          <a:solidFill>
+                            <a:srgbClr val="1A2233"/>
+                          </a:solidFill>
+                          <a:latin typeface="Microsoft JhengHei"/>
+                          <a:ea typeface="Microsoft JhengHei"/>
+                          <a:cs typeface="Microsoft JhengHei"/>
+                        </a:rPr>
+                        <a:t>趙敏如、吳佳翰</a:t>
+                      </a:r>
+                    </a:p>
+                  </a:txBody>
+                  <a:tcPr anchor="ctr" marL="73152" marT="9144" marB="9144">
+                    <a:solidFill>
+                      <a:srgbClr val="EEF2F9"/>
+                    </a:solidFill>
+                  </a:tcPr>
+                </a:tc>
+              </a:tr>
+              <a:tr h="457200">
+                <a:tc>
+                  <a:txBody>
+                    <a:bodyPr/>
+                    <a:lstStyle/>
+                    <a:p>
+                      <a:r>
+                        <a:rPr sz="1150" b="0">
+                          <a:solidFill>
+                            <a:srgbClr val="1A2233"/>
+                          </a:solidFill>
+                          <a:latin typeface="Microsoft JhengHei"/>
+                          <a:ea typeface="Microsoft JhengHei"/>
+                          <a:cs typeface="Microsoft JhengHei"/>
+                        </a:rPr>
+                        <a:t>鴻海</a:t>
+                      </a:r>
+                    </a:p>
+                  </a:txBody>
+                  <a:tcPr anchor="ctr" marL="73152" marT="9144" marB="9144">
+                    <a:solidFill>
+                      <a:srgbClr val="FFFFFF"/>
+                    </a:solidFill>
+                  </a:tcPr>
+                </a:tc>
+                <a:tc>
+                  <a:txBody>
+                    <a:bodyPr/>
+                    <a:lstStyle/>
+                    <a:p>
+                      <a:r>
+                        <a:rPr sz="1150" b="0">
+                          <a:solidFill>
+                            <a:srgbClr val="1A2233"/>
+                          </a:solidFill>
+                          <a:latin typeface="Microsoft JhengHei"/>
+                          <a:ea typeface="Microsoft JhengHei"/>
+                          <a:cs typeface="Microsoft JhengHei"/>
+                        </a:rPr>
+                        <a:t>2317</a:t>
+                      </a:r>
+                    </a:p>
+                  </a:txBody>
+                  <a:tcPr anchor="ctr" marL="73152" marT="9144" marB="9144">
+                    <a:solidFill>
+                      <a:srgbClr val="FFFFFF"/>
+                    </a:solidFill>
+                  </a:tcPr>
+                </a:tc>
+                <a:tc>
+                  <a:txBody>
+                    <a:bodyPr/>
+                    <a:lstStyle/>
+                    <a:p>
+                      <a:r>
+                        <a:rPr sz="1150" b="1">
+                          <a:solidFill>
+                            <a:srgbClr val="E63946"/>
+                          </a:solidFill>
+                          <a:latin typeface="Microsoft JhengHei"/>
+                          <a:ea typeface="Microsoft JhengHei"/>
+                          <a:cs typeface="Microsoft JhengHei"/>
+                        </a:rPr>
+                        <a:t>駭客攻擊</a:t>
+                      </a:r>
+                    </a:p>
+                  </a:txBody>
+                  <a:tcPr anchor="ctr" marL="73152" marT="9144" marB="9144">
+                    <a:solidFill>
+                      <a:srgbClr val="FFFFFF"/>
+                    </a:solidFill>
+                  </a:tcPr>
+                </a:tc>
+                <a:tc>
+                  <a:txBody>
+                    <a:bodyPr/>
+                    <a:lstStyle/>
+                    <a:p>
+                      <a:r>
+                        <a:rPr sz="1150" b="0">
+                          <a:solidFill>
+                            <a:srgbClr val="1A2233"/>
+                          </a:solidFill>
+                          <a:latin typeface="Microsoft JhengHei"/>
+                          <a:ea typeface="Microsoft JhengHei"/>
+                          <a:cs typeface="Microsoft JhengHei"/>
+                        </a:rPr>
+                        <a:t>資誠聯合會計師事務所</a:t>
+                      </a:r>
+                    </a:p>
+                  </a:txBody>
+                  <a:tcPr anchor="ctr" marL="73152" marT="9144" marB="9144">
+                    <a:solidFill>
+                      <a:srgbClr val="FFFFFF"/>
+                    </a:solidFill>
+                  </a:tcPr>
+                </a:tc>
+                <a:tc>
+                  <a:txBody>
+                    <a:bodyPr/>
+                    <a:lstStyle/>
+                    <a:p>
+                      <a:r>
+                        <a:rPr sz="1150" b="0">
+                          <a:solidFill>
+                            <a:srgbClr val="1A2233"/>
+                          </a:solidFill>
+                          <a:latin typeface="Microsoft JhengHei"/>
+                          <a:ea typeface="Microsoft JhengHei"/>
+                          <a:cs typeface="Microsoft JhengHei"/>
+                        </a:rPr>
+                        <a:t>徐聖忠、徐潔如</a:t>
+                      </a:r>
+                    </a:p>
+                  </a:txBody>
+                  <a:tcPr anchor="ctr" marL="73152" marT="9144" marB="9144">
+                    <a:solidFill>
+                      <a:srgbClr val="FFFFFF"/>
+                    </a:solidFill>
+                  </a:tcPr>
+                </a:tc>
+              </a:tr>
+              <a:tr h="457200">
+                <a:tc>
+                  <a:txBody>
+                    <a:bodyPr/>
+                    <a:lstStyle/>
+                    <a:p>
+                      <a:r>
+                        <a:rPr sz="1150" b="0">
+                          <a:solidFill>
+                            <a:srgbClr val="1A2233"/>
+                          </a:solidFill>
+                          <a:latin typeface="Microsoft JhengHei"/>
+                          <a:ea typeface="Microsoft JhengHei"/>
+                          <a:cs typeface="Microsoft JhengHei"/>
+                        </a:rPr>
+                        <a:t>彰源</a:t>
+                      </a:r>
+                    </a:p>
+                  </a:txBody>
+                  <a:tcPr anchor="ctr" marL="73152" marT="9144" marB="9144">
+                    <a:solidFill>
+                      <a:srgbClr val="EEF2F9"/>
+                    </a:solidFill>
+                  </a:tcPr>
+                </a:tc>
+                <a:tc>
+                  <a:txBody>
+                    <a:bodyPr/>
+                    <a:lstStyle/>
+                    <a:p>
+                      <a:r>
+                        <a:rPr sz="1150" b="0">
+                          <a:solidFill>
+                            <a:srgbClr val="1A2233"/>
+                          </a:solidFill>
+                          <a:latin typeface="Microsoft JhengHei"/>
+                          <a:ea typeface="Microsoft JhengHei"/>
+                          <a:cs typeface="Microsoft JhengHei"/>
+                        </a:rPr>
+                        <a:t>2030</a:t>
+                      </a:r>
+                    </a:p>
+                  </a:txBody>
+                  <a:tcPr anchor="ctr" marL="73152" marT="9144" marB="9144">
+                    <a:solidFill>
+                      <a:srgbClr val="EEF2F9"/>
+                    </a:solidFill>
+                  </a:tcPr>
+                </a:tc>
+                <a:tc>
+                  <a:txBody>
+                    <a:bodyPr/>
+                    <a:lstStyle/>
+                    <a:p>
+                      <a:r>
+                        <a:rPr sz="1150" b="1">
+                          <a:solidFill>
+                            <a:srgbClr val="E63946"/>
+                          </a:solidFill>
+                          <a:latin typeface="Microsoft JhengHei"/>
+                          <a:ea typeface="Microsoft JhengHei"/>
+                          <a:cs typeface="Microsoft JhengHei"/>
+                        </a:rPr>
+                        <a:t>駭客攻擊</a:t>
+                      </a:r>
+                    </a:p>
+                  </a:txBody>
+                  <a:tcPr anchor="ctr" marL="73152" marT="9144" marB="9144">
+                    <a:solidFill>
+                      <a:srgbClr val="EEF2F9"/>
+                    </a:solidFill>
+                  </a:tcPr>
+                </a:tc>
+                <a:tc>
+                  <a:txBody>
+                    <a:bodyPr/>
+                    <a:lstStyle/>
+                    <a:p>
+                      <a:r>
+                        <a:rPr sz="1150" b="0">
+                          <a:solidFill>
+                            <a:srgbClr val="1A2233"/>
+                          </a:solidFill>
+                          <a:latin typeface="Microsoft JhengHei"/>
+                          <a:ea typeface="Microsoft JhengHei"/>
+                          <a:cs typeface="Microsoft JhengHei"/>
+                        </a:rPr>
+                        <a:t>勤業眾信聯合會計師事務所</a:t>
+                      </a:r>
+                    </a:p>
+                  </a:txBody>
+                  <a:tcPr anchor="ctr" marL="73152" marT="9144" marB="9144">
+                    <a:solidFill>
+                      <a:srgbClr val="EEF2F9"/>
+                    </a:solidFill>
+                  </a:tcPr>
+                </a:tc>
+                <a:tc>
+                  <a:txBody>
+                    <a:bodyPr/>
+                    <a:lstStyle/>
+                    <a:p>
+                      <a:r>
+                        <a:rPr sz="1150" b="0">
+                          <a:solidFill>
+                            <a:srgbClr val="1A2233"/>
+                          </a:solidFill>
+                          <a:latin typeface="Microsoft JhengHei"/>
+                          <a:ea typeface="Microsoft JhengHei"/>
+                          <a:cs typeface="Microsoft JhengHei"/>
+                        </a:rPr>
+                        <a:t>許瑞隆、吳少君</a:t>
+                      </a:r>
+                    </a:p>
+                  </a:txBody>
+                  <a:tcPr anchor="ctr" marL="73152" marT="9144" marB="9144">
+                    <a:solidFill>
+                      <a:srgbClr val="EEF2F9"/>
+                    </a:solidFill>
+                  </a:tcPr>
+                </a:tc>
+              </a:tr>
+              <a:tr h="457200">
+                <a:tc>
+                  <a:txBody>
+                    <a:bodyPr/>
+                    <a:lstStyle/>
+                    <a:p>
+                      <a:r>
+                        <a:rPr sz="1150" b="0">
+                          <a:solidFill>
+                            <a:srgbClr val="1A2233"/>
+                          </a:solidFill>
+                          <a:latin typeface="Microsoft JhengHei"/>
+                          <a:ea typeface="Microsoft JhengHei"/>
+                          <a:cs typeface="Microsoft JhengHei"/>
+                        </a:rPr>
+                        <a:t>偉康科技</a:t>
+                      </a:r>
+                    </a:p>
+                  </a:txBody>
+                  <a:tcPr anchor="ctr" marL="73152" marT="9144" marB="9144">
+                    <a:solidFill>
+                      <a:srgbClr val="FFFFFF"/>
+                    </a:solidFill>
+                  </a:tcPr>
+                </a:tc>
+                <a:tc>
+                  <a:txBody>
+                    <a:bodyPr/>
+                    <a:lstStyle/>
+                    <a:p>
+                      <a:r>
+                        <a:rPr sz="1150" b="0">
+                          <a:solidFill>
+                            <a:srgbClr val="1A2233"/>
+                          </a:solidFill>
+                          <a:latin typeface="Microsoft JhengHei"/>
+                          <a:ea typeface="Microsoft JhengHei"/>
+                          <a:cs typeface="Microsoft JhengHei"/>
+                        </a:rPr>
+                        <a:t>6865</a:t>
+                      </a:r>
+                    </a:p>
+                  </a:txBody>
+                  <a:tcPr anchor="ctr" marL="73152" marT="9144" marB="9144">
+                    <a:solidFill>
+                      <a:srgbClr val="FFFFFF"/>
+                    </a:solidFill>
+                  </a:tcPr>
+                </a:tc>
+                <a:tc>
+                  <a:txBody>
+                    <a:bodyPr/>
+                    <a:lstStyle/>
+                    <a:p>
+                      <a:r>
+                        <a:rPr sz="1150" b="1">
+                          <a:solidFill>
+                            <a:srgbClr val="E63946"/>
+                          </a:solidFill>
+                          <a:latin typeface="Microsoft JhengHei"/>
+                          <a:ea typeface="Microsoft JhengHei"/>
+                          <a:cs typeface="Microsoft JhengHei"/>
+                        </a:rPr>
+                        <a:t>駭客攻擊</a:t>
+                      </a:r>
+                    </a:p>
+                  </a:txBody>
+                  <a:tcPr anchor="ctr" marL="73152" marT="9144" marB="9144">
+                    <a:solidFill>
+                      <a:srgbClr val="FFFFFF"/>
+                    </a:solidFill>
+                  </a:tcPr>
+                </a:tc>
+                <a:tc>
+                  <a:txBody>
+                    <a:bodyPr/>
+                    <a:lstStyle/>
+                    <a:p>
+                      <a:r>
+                        <a:rPr sz="1150" b="0">
+                          <a:solidFill>
+                            <a:srgbClr val="1A2233"/>
+                          </a:solidFill>
+                          <a:latin typeface="Microsoft JhengHei"/>
+                          <a:ea typeface="Microsoft JhengHei"/>
+                          <a:cs typeface="Microsoft JhengHei"/>
+                        </a:rPr>
+                        <a:t>安侯建業聯合會計師事務所</a:t>
+                      </a:r>
+                    </a:p>
+                  </a:txBody>
+                  <a:tcPr anchor="ctr" marL="73152" marT="9144" marB="9144">
+                    <a:solidFill>
+                      <a:srgbClr val="FFFFFF"/>
+                    </a:solidFill>
+                  </a:tcPr>
+                </a:tc>
+                <a:tc>
+                  <a:txBody>
+                    <a:bodyPr/>
+                    <a:lstStyle/>
+                    <a:p>
+                      <a:r>
+                        <a:rPr sz="1150" b="0">
+                          <a:solidFill>
+                            <a:srgbClr val="1A2233"/>
+                          </a:solidFill>
+                          <a:latin typeface="Microsoft JhengHei"/>
+                          <a:ea typeface="Microsoft JhengHei"/>
+                          <a:cs typeface="Microsoft JhengHei"/>
+                        </a:rPr>
+                        <a:t>洪士剛、莊鈞維</a:t>
+                      </a:r>
+                    </a:p>
+                  </a:txBody>
+                  <a:tcPr anchor="ctr" marL="73152" marT="9144" marB="9144">
+                    <a:solidFill>
+                      <a:srgbClr val="FFFFFF"/>
+                    </a:solidFill>
+                  </a:tcPr>
+                </a:tc>
+              </a:tr>
+              <a:tr h="457200">
+                <a:tc>
+                  <a:txBody>
+                    <a:bodyPr/>
+                    <a:lstStyle/>
+                    <a:p>
+                      <a:r>
+                        <a:rPr sz="1150" b="0">
+                          <a:solidFill>
+                            <a:srgbClr val="1A2233"/>
+                          </a:solidFill>
+                          <a:latin typeface="Microsoft JhengHei"/>
+                          <a:ea typeface="Microsoft JhengHei"/>
+                          <a:cs typeface="Microsoft JhengHei"/>
+                        </a:rPr>
+                        <a:t>碩天</a:t>
+                      </a:r>
+                    </a:p>
+                  </a:txBody>
+                  <a:tcPr anchor="ctr" marL="73152" marT="9144" marB="9144">
+                    <a:solidFill>
+                      <a:srgbClr val="EEF2F9"/>
+                    </a:solidFill>
+                  </a:tcPr>
+                </a:tc>
+                <a:tc>
+                  <a:txBody>
+                    <a:bodyPr/>
+                    <a:lstStyle/>
+                    <a:p>
+                      <a:r>
+                        <a:rPr sz="1150" b="0">
+                          <a:solidFill>
+                            <a:srgbClr val="1A2233"/>
+                          </a:solidFill>
+                          <a:latin typeface="Microsoft JhengHei"/>
+                          <a:ea typeface="Microsoft JhengHei"/>
+                          <a:cs typeface="Microsoft JhengHei"/>
+                        </a:rPr>
+                        <a:t>3617</a:t>
+                      </a:r>
+                    </a:p>
+                  </a:txBody>
+                  <a:tcPr anchor="ctr" marL="73152" marT="9144" marB="9144">
+                    <a:solidFill>
+                      <a:srgbClr val="EEF2F9"/>
+                    </a:solidFill>
+                  </a:tcPr>
+                </a:tc>
+                <a:tc>
+                  <a:txBody>
+                    <a:bodyPr/>
+                    <a:lstStyle/>
+                    <a:p>
+                      <a:r>
+                        <a:rPr sz="1150" b="1">
+                          <a:solidFill>
+                            <a:srgbClr val="F4A261"/>
+                          </a:solidFill>
+                          <a:latin typeface="Microsoft JhengHei"/>
+                          <a:ea typeface="Microsoft JhengHei"/>
+                          <a:cs typeface="Microsoft JhengHei"/>
+                        </a:rPr>
+                        <a:t>勒索病毒/加密</a:t>
+                      </a:r>
+                    </a:p>
+                  </a:txBody>
+                  <a:tcPr anchor="ctr" marL="73152" marT="9144" marB="9144">
+                    <a:solidFill>
+                      <a:srgbClr val="EEF2F9"/>
+                    </a:solidFill>
+                  </a:tcPr>
+                </a:tc>
+                <a:tc>
+                  <a:txBody>
+                    <a:bodyPr/>
+                    <a:lstStyle/>
+                    <a:p>
+                      <a:r>
+                        <a:rPr sz="1150" b="0">
+                          <a:solidFill>
+                            <a:srgbClr val="1A2233"/>
+                          </a:solidFill>
+                          <a:latin typeface="Microsoft JhengHei"/>
+                          <a:ea typeface="Microsoft JhengHei"/>
+                          <a:cs typeface="Microsoft JhengHei"/>
+                        </a:rPr>
+                        <a:t>勤業眾信聯合會計師事務所</a:t>
+                      </a:r>
+                    </a:p>
+                  </a:txBody>
+                  <a:tcPr anchor="ctr" marL="73152" marT="9144" marB="9144">
+                    <a:solidFill>
+                      <a:srgbClr val="EEF2F9"/>
+                    </a:solidFill>
+                  </a:tcPr>
+                </a:tc>
+                <a:tc>
+                  <a:txBody>
+                    <a:bodyPr/>
+                    <a:lstStyle/>
+                    <a:p>
+                      <a:r>
+                        <a:rPr sz="1150" b="0">
+                          <a:solidFill>
+                            <a:srgbClr val="1A2233"/>
+                          </a:solidFill>
+                          <a:latin typeface="Microsoft JhengHei"/>
+                          <a:ea typeface="Microsoft JhengHei"/>
+                          <a:cs typeface="Microsoft JhengHei"/>
+                        </a:rPr>
+                        <a:t>張至誼、鄭淂蓁</a:t>
+                      </a:r>
+                    </a:p>
+                  </a:txBody>
+                  <a:tcPr anchor="ctr" marL="73152" marT="9144" marB="9144">
+                    <a:solidFill>
+                      <a:srgbClr val="EEF2F9"/>
+                    </a:solidFill>
+                  </a:tcPr>
+                </a:tc>
+              </a:tr>
+            </a:tbl>
+          </a:graphicData>
+        </a:graphic>
+      </p:graphicFrame>
     </p:spTree>
   </p:cSld>
   <p:clrMapOvr>
@@ -7423,6 +7439,1254 @@
         <p:spPr>
           <a:xfrm>
             <a:off x="548640" y="365760"/>
+            <a:ext cx="8229600" cy="640080"/>
+          </a:xfrm>
+          <a:prstGeom prst="rect">
+            <a:avLst/>
+          </a:prstGeom>
+          <a:noFill/>
+        </p:spPr>
+        <p:txBody>
+          <a:bodyPr wrap="square" anchor="t" lIns="0" rIns="0" tIns="0" bIns="0">
+            <a:spAutoFit/>
+          </a:bodyPr>
+          <a:lstStyle/>
+          <a:p>
+            <a:pPr algn="l"/>
+            <a:r>
+              <a:rPr sz="3000" b="1">
+                <a:solidFill>
+                  <a:srgbClr val="1A2233"/>
+                </a:solidFill>
+                <a:latin typeface="Microsoft JhengHei"/>
+                <a:ea typeface="Microsoft JhengHei"/>
+                <a:cs typeface="Microsoft JhengHei"/>
+              </a:rPr>
+              <a:t>共通因應流程</a:t>
+            </a:r>
+          </a:p>
+        </p:txBody>
+      </p:sp>
+      <p:sp>
+        <p:nvSpPr>
+          <p:cNvPr id="4" name="TextBox 3"/>
+          <p:cNvSpPr txBox="1"/>
+          <p:nvPr/>
+        </p:nvSpPr>
+        <p:spPr>
+          <a:xfrm>
+            <a:off x="566928" y="1005840"/>
+            <a:ext cx="10058400" cy="365760"/>
+          </a:xfrm>
+          <a:prstGeom prst="rect">
+            <a:avLst/>
+          </a:prstGeom>
+          <a:noFill/>
+        </p:spPr>
+        <p:txBody>
+          <a:bodyPr wrap="square" anchor="t" lIns="0" rIns="0" tIns="0" bIns="0">
+            <a:spAutoFit/>
+          </a:bodyPr>
+          <a:lstStyle/>
+          <a:p>
+            <a:pPr algn="l"/>
+            <a:r>
+              <a:rPr sz="1300" b="0">
+                <a:solidFill>
+                  <a:srgbClr val="5C6679"/>
+                </a:solidFill>
+                <a:latin typeface="Microsoft JhengHei"/>
+                <a:ea typeface="Microsoft JhengHei"/>
+                <a:cs typeface="Microsoft JhengHei"/>
+              </a:rPr>
+              <a:t>各公司處理過程高度一致，已形成標準應變劇本</a:t>
+            </a:r>
+          </a:p>
+        </p:txBody>
+      </p:sp>
+      <p:sp>
+        <p:nvSpPr>
+          <p:cNvPr id="5" name="Rounded Rectangle 4"/>
+          <p:cNvSpPr/>
+          <p:nvPr/>
+        </p:nvSpPr>
+        <p:spPr>
+          <a:xfrm>
+            <a:off x="640080" y="1828800"/>
+            <a:ext cx="2514600" cy="2286000"/>
+          </a:xfrm>
+          <a:prstGeom prst="roundRect">
+            <a:avLst/>
+          </a:prstGeom>
+          <a:solidFill>
+            <a:srgbClr val="14213D"/>
+          </a:solidFill>
+          <a:ln w="12700">
+            <a:solidFill>
+              <a:srgbClr val="DDE3EE"/>
+            </a:solidFill>
+          </a:ln>
+          <a:effectLst/>
+        </p:spPr>
+        <p:style>
+          <a:lnRef idx="1">
+            <a:schemeClr val="accent1"/>
+          </a:lnRef>
+          <a:fillRef idx="3">
+            <a:schemeClr val="accent1"/>
+          </a:fillRef>
+          <a:effectRef idx="2">
+            <a:schemeClr val="accent1"/>
+          </a:effectRef>
+          <a:fontRef idx="minor">
+            <a:schemeClr val="lt1"/>
+          </a:fontRef>
+        </p:style>
+        <p:txBody>
+          <a:bodyPr rtlCol="0" anchor="ctr"/>
+          <a:lstStyle/>
+          <a:p>
+            <a:pPr algn="ctr"/>
+          </a:p>
+        </p:txBody>
+      </p:sp>
+      <p:sp>
+        <p:nvSpPr>
+          <p:cNvPr id="6" name="Oval 5"/>
+          <p:cNvSpPr/>
+          <p:nvPr/>
+        </p:nvSpPr>
+        <p:spPr>
+          <a:xfrm>
+            <a:off x="1572768" y="2057400"/>
+            <a:ext cx="658368" cy="658368"/>
+          </a:xfrm>
+          <a:prstGeom prst="ellipse">
+            <a:avLst/>
+          </a:prstGeom>
+          <a:solidFill>
+            <a:srgbClr val="2EC4B6"/>
+          </a:solidFill>
+          <a:ln>
+            <a:noFill/>
+          </a:ln>
+          <a:effectLst/>
+        </p:spPr>
+        <p:style>
+          <a:lnRef idx="1">
+            <a:schemeClr val="accent1"/>
+          </a:lnRef>
+          <a:fillRef idx="3">
+            <a:schemeClr val="accent1"/>
+          </a:fillRef>
+          <a:effectRef idx="2">
+            <a:schemeClr val="accent1"/>
+          </a:effectRef>
+          <a:fontRef idx="minor">
+            <a:schemeClr val="lt1"/>
+          </a:fontRef>
+        </p:style>
+        <p:txBody>
+          <a:bodyPr rtlCol="0" anchor="ctr"/>
+          <a:lstStyle/>
+          <a:p>
+            <a:pPr algn="ctr"/>
+          </a:p>
+        </p:txBody>
+      </p:sp>
+      <p:sp>
+        <p:nvSpPr>
+          <p:cNvPr id="7" name="TextBox 6"/>
+          <p:cNvSpPr txBox="1"/>
+          <p:nvPr/>
+        </p:nvSpPr>
+        <p:spPr>
+          <a:xfrm>
+            <a:off x="1572768" y="2057400"/>
+            <a:ext cx="658368" cy="658368"/>
+          </a:xfrm>
+          <a:prstGeom prst="rect">
+            <a:avLst/>
+          </a:prstGeom>
+          <a:noFill/>
+        </p:spPr>
+        <p:txBody>
+          <a:bodyPr wrap="square" anchor="ctr" lIns="0" rIns="0" tIns="0" bIns="0">
+            <a:spAutoFit/>
+          </a:bodyPr>
+          <a:lstStyle/>
+          <a:p>
+            <a:pPr algn="ctr"/>
+            <a:r>
+              <a:rPr sz="1900" b="1">
+                <a:solidFill>
+                  <a:srgbClr val="14213D"/>
+                </a:solidFill>
+                <a:latin typeface="Microsoft JhengHei"/>
+                <a:ea typeface="Microsoft JhengHei"/>
+                <a:cs typeface="Microsoft JhengHei"/>
+              </a:rPr>
+              <a:t>01</a:t>
+            </a:r>
+          </a:p>
+        </p:txBody>
+      </p:sp>
+      <p:sp>
+        <p:nvSpPr>
+          <p:cNvPr id="8" name="TextBox 7"/>
+          <p:cNvSpPr txBox="1"/>
+          <p:nvPr/>
+        </p:nvSpPr>
+        <p:spPr>
+          <a:xfrm>
+            <a:off x="640080" y="2880360"/>
+            <a:ext cx="2514600" cy="457200"/>
+          </a:xfrm>
+          <a:prstGeom prst="rect">
+            <a:avLst/>
+          </a:prstGeom>
+          <a:noFill/>
+        </p:spPr>
+        <p:txBody>
+          <a:bodyPr wrap="square" anchor="t" lIns="0" rIns="0" tIns="0" bIns="0">
+            <a:spAutoFit/>
+          </a:bodyPr>
+          <a:lstStyle/>
+          <a:p>
+            <a:pPr algn="ctr"/>
+            <a:r>
+              <a:rPr sz="1800" b="1">
+                <a:solidFill>
+                  <a:srgbClr val="FFFFFF"/>
+                </a:solidFill>
+                <a:latin typeface="Microsoft JhengHei"/>
+                <a:ea typeface="Microsoft JhengHei"/>
+                <a:cs typeface="Microsoft JhengHei"/>
+              </a:rPr>
+              <a:t>偵測異常</a:t>
+            </a:r>
+          </a:p>
+        </p:txBody>
+      </p:sp>
+      <p:sp>
+        <p:nvSpPr>
+          <p:cNvPr id="9" name="TextBox 8"/>
+          <p:cNvSpPr txBox="1"/>
+          <p:nvPr/>
+        </p:nvSpPr>
+        <p:spPr>
+          <a:xfrm>
+            <a:off x="777240" y="3364992"/>
+            <a:ext cx="2240280" cy="685800"/>
+          </a:xfrm>
+          <a:prstGeom prst="rect">
+            <a:avLst/>
+          </a:prstGeom>
+          <a:noFill/>
+        </p:spPr>
+        <p:txBody>
+          <a:bodyPr wrap="square" anchor="t" lIns="0" rIns="0" tIns="0" bIns="0">
+            <a:spAutoFit/>
+          </a:bodyPr>
+          <a:lstStyle/>
+          <a:p>
+            <a:pPr algn="ctr">
+              <a:lnSpc>
+                <a:spcPts val="1500"/>
+              </a:lnSpc>
+            </a:pPr>
+            <a:r>
+              <a:rPr sz="1150" b="0">
+                <a:solidFill>
+                  <a:srgbClr val="CADCFC"/>
+                </a:solidFill>
+                <a:latin typeface="Microsoft JhengHei"/>
+                <a:ea typeface="Microsoft JhengHei"/>
+                <a:cs typeface="Microsoft JhengHei"/>
+              </a:rPr>
+              <a:t>資安單位或外部通報
+發現系統異常或入侵</a:t>
+            </a:r>
+          </a:p>
+        </p:txBody>
+      </p:sp>
+      <p:sp>
+        <p:nvSpPr>
+          <p:cNvPr id="10" name="TextBox 9"/>
+          <p:cNvSpPr txBox="1"/>
+          <p:nvPr/>
+        </p:nvSpPr>
+        <p:spPr>
+          <a:xfrm>
+            <a:off x="3127248" y="1828800"/>
+            <a:ext cx="365760" cy="2286000"/>
+          </a:xfrm>
+          <a:prstGeom prst="rect">
+            <a:avLst/>
+          </a:prstGeom>
+          <a:noFill/>
+        </p:spPr>
+        <p:txBody>
+          <a:bodyPr wrap="square" anchor="ctr" lIns="0" rIns="0" tIns="0" bIns="0">
+            <a:spAutoFit/>
+          </a:bodyPr>
+          <a:lstStyle/>
+          <a:p>
+            <a:pPr algn="ctr"/>
+            <a:r>
+              <a:rPr sz="2800" b="1">
+                <a:solidFill>
+                  <a:srgbClr val="5C6679"/>
+                </a:solidFill>
+                <a:latin typeface="Microsoft JhengHei"/>
+                <a:ea typeface="Microsoft JhengHei"/>
+                <a:cs typeface="Microsoft JhengHei"/>
+              </a:rPr>
+              <a:t>›</a:t>
+            </a:r>
+          </a:p>
+        </p:txBody>
+      </p:sp>
+      <p:sp>
+        <p:nvSpPr>
+          <p:cNvPr id="11" name="Rounded Rectangle 10"/>
+          <p:cNvSpPr/>
+          <p:nvPr/>
+        </p:nvSpPr>
+        <p:spPr>
+          <a:xfrm>
+            <a:off x="3447287" y="1828800"/>
+            <a:ext cx="2514600" cy="2286000"/>
+          </a:xfrm>
+          <a:prstGeom prst="roundRect">
+            <a:avLst/>
+          </a:prstGeom>
+          <a:solidFill>
+            <a:srgbClr val="14213D"/>
+          </a:solidFill>
+          <a:ln w="12700">
+            <a:solidFill>
+              <a:srgbClr val="DDE3EE"/>
+            </a:solidFill>
+          </a:ln>
+          <a:effectLst/>
+        </p:spPr>
+        <p:style>
+          <a:lnRef idx="1">
+            <a:schemeClr val="accent1"/>
+          </a:lnRef>
+          <a:fillRef idx="3">
+            <a:schemeClr val="accent1"/>
+          </a:fillRef>
+          <a:effectRef idx="2">
+            <a:schemeClr val="accent1"/>
+          </a:effectRef>
+          <a:fontRef idx="minor">
+            <a:schemeClr val="lt1"/>
+          </a:fontRef>
+        </p:style>
+        <p:txBody>
+          <a:bodyPr rtlCol="0" anchor="ctr"/>
+          <a:lstStyle/>
+          <a:p>
+            <a:pPr algn="ctr"/>
+          </a:p>
+        </p:txBody>
+      </p:sp>
+      <p:sp>
+        <p:nvSpPr>
+          <p:cNvPr id="12" name="Oval 11"/>
+          <p:cNvSpPr/>
+          <p:nvPr/>
+        </p:nvSpPr>
+        <p:spPr>
+          <a:xfrm>
+            <a:off x="4379975" y="2057400"/>
+            <a:ext cx="658368" cy="658368"/>
+          </a:xfrm>
+          <a:prstGeom prst="ellipse">
+            <a:avLst/>
+          </a:prstGeom>
+          <a:solidFill>
+            <a:srgbClr val="2EC4B6"/>
+          </a:solidFill>
+          <a:ln>
+            <a:noFill/>
+          </a:ln>
+          <a:effectLst/>
+        </p:spPr>
+        <p:style>
+          <a:lnRef idx="1">
+            <a:schemeClr val="accent1"/>
+          </a:lnRef>
+          <a:fillRef idx="3">
+            <a:schemeClr val="accent1"/>
+          </a:fillRef>
+          <a:effectRef idx="2">
+            <a:schemeClr val="accent1"/>
+          </a:effectRef>
+          <a:fontRef idx="minor">
+            <a:schemeClr val="lt1"/>
+          </a:fontRef>
+        </p:style>
+        <p:txBody>
+          <a:bodyPr rtlCol="0" anchor="ctr"/>
+          <a:lstStyle/>
+          <a:p>
+            <a:pPr algn="ctr"/>
+          </a:p>
+        </p:txBody>
+      </p:sp>
+      <p:sp>
+        <p:nvSpPr>
+          <p:cNvPr id="13" name="TextBox 12"/>
+          <p:cNvSpPr txBox="1"/>
+          <p:nvPr/>
+        </p:nvSpPr>
+        <p:spPr>
+          <a:xfrm>
+            <a:off x="4379975" y="2057400"/>
+            <a:ext cx="658368" cy="658368"/>
+          </a:xfrm>
+          <a:prstGeom prst="rect">
+            <a:avLst/>
+          </a:prstGeom>
+          <a:noFill/>
+        </p:spPr>
+        <p:txBody>
+          <a:bodyPr wrap="square" anchor="ctr" lIns="0" rIns="0" tIns="0" bIns="0">
+            <a:spAutoFit/>
+          </a:bodyPr>
+          <a:lstStyle/>
+          <a:p>
+            <a:pPr algn="ctr"/>
+            <a:r>
+              <a:rPr sz="1900" b="1">
+                <a:solidFill>
+                  <a:srgbClr val="14213D"/>
+                </a:solidFill>
+                <a:latin typeface="Microsoft JhengHei"/>
+                <a:ea typeface="Microsoft JhengHei"/>
+                <a:cs typeface="Microsoft JhengHei"/>
+              </a:rPr>
+              <a:t>02</a:t>
+            </a:r>
+          </a:p>
+        </p:txBody>
+      </p:sp>
+      <p:sp>
+        <p:nvSpPr>
+          <p:cNvPr id="14" name="TextBox 13"/>
+          <p:cNvSpPr txBox="1"/>
+          <p:nvPr/>
+        </p:nvSpPr>
+        <p:spPr>
+          <a:xfrm>
+            <a:off x="3447287" y="2880360"/>
+            <a:ext cx="2514600" cy="457200"/>
+          </a:xfrm>
+          <a:prstGeom prst="rect">
+            <a:avLst/>
+          </a:prstGeom>
+          <a:noFill/>
+        </p:spPr>
+        <p:txBody>
+          <a:bodyPr wrap="square" anchor="t" lIns="0" rIns="0" tIns="0" bIns="0">
+            <a:spAutoFit/>
+          </a:bodyPr>
+          <a:lstStyle/>
+          <a:p>
+            <a:pPr algn="ctr"/>
+            <a:r>
+              <a:rPr sz="1800" b="1">
+                <a:solidFill>
+                  <a:srgbClr val="FFFFFF"/>
+                </a:solidFill>
+                <a:latin typeface="Microsoft JhengHei"/>
+                <a:ea typeface="Microsoft JhengHei"/>
+                <a:cs typeface="Microsoft JhengHei"/>
+              </a:rPr>
+              <a:t>啟動應變</a:t>
+            </a:r>
+          </a:p>
+        </p:txBody>
+      </p:sp>
+      <p:sp>
+        <p:nvSpPr>
+          <p:cNvPr id="15" name="TextBox 14"/>
+          <p:cNvSpPr txBox="1"/>
+          <p:nvPr/>
+        </p:nvSpPr>
+        <p:spPr>
+          <a:xfrm>
+            <a:off x="3584447" y="3364992"/>
+            <a:ext cx="2240280" cy="685800"/>
+          </a:xfrm>
+          <a:prstGeom prst="rect">
+            <a:avLst/>
+          </a:prstGeom>
+          <a:noFill/>
+        </p:spPr>
+        <p:txBody>
+          <a:bodyPr wrap="square" anchor="t" lIns="0" rIns="0" tIns="0" bIns="0">
+            <a:spAutoFit/>
+          </a:bodyPr>
+          <a:lstStyle/>
+          <a:p>
+            <a:pPr algn="ctr">
+              <a:lnSpc>
+                <a:spcPts val="1500"/>
+              </a:lnSpc>
+            </a:pPr>
+            <a:r>
+              <a:rPr sz="1150" b="0">
+                <a:solidFill>
+                  <a:srgbClr val="CADCFC"/>
+                </a:solidFill>
+                <a:latin typeface="Microsoft JhengHei"/>
+                <a:ea typeface="Microsoft JhengHei"/>
+                <a:cs typeface="Microsoft JhengHei"/>
+              </a:rPr>
+              <a:t>立即啟動資安應變機制
+系統隔離、防護強化</a:t>
+            </a:r>
+          </a:p>
+        </p:txBody>
+      </p:sp>
+      <p:sp>
+        <p:nvSpPr>
+          <p:cNvPr id="16" name="TextBox 15"/>
+          <p:cNvSpPr txBox="1"/>
+          <p:nvPr/>
+        </p:nvSpPr>
+        <p:spPr>
+          <a:xfrm>
+            <a:off x="5934456" y="1828800"/>
+            <a:ext cx="365760" cy="2286000"/>
+          </a:xfrm>
+          <a:prstGeom prst="rect">
+            <a:avLst/>
+          </a:prstGeom>
+          <a:noFill/>
+        </p:spPr>
+        <p:txBody>
+          <a:bodyPr wrap="square" anchor="ctr" lIns="0" rIns="0" tIns="0" bIns="0">
+            <a:spAutoFit/>
+          </a:bodyPr>
+          <a:lstStyle/>
+          <a:p>
+            <a:pPr algn="ctr"/>
+            <a:r>
+              <a:rPr sz="2800" b="1">
+                <a:solidFill>
+                  <a:srgbClr val="5C6679"/>
+                </a:solidFill>
+                <a:latin typeface="Microsoft JhengHei"/>
+                <a:ea typeface="Microsoft JhengHei"/>
+                <a:cs typeface="Microsoft JhengHei"/>
+              </a:rPr>
+              <a:t>›</a:t>
+            </a:r>
+          </a:p>
+        </p:txBody>
+      </p:sp>
+      <p:sp>
+        <p:nvSpPr>
+          <p:cNvPr id="17" name="Rounded Rectangle 16"/>
+          <p:cNvSpPr/>
+          <p:nvPr/>
+        </p:nvSpPr>
+        <p:spPr>
+          <a:xfrm>
+            <a:off x="6254496" y="1828800"/>
+            <a:ext cx="2514600" cy="2286000"/>
+          </a:xfrm>
+          <a:prstGeom prst="roundRect">
+            <a:avLst/>
+          </a:prstGeom>
+          <a:solidFill>
+            <a:srgbClr val="14213D"/>
+          </a:solidFill>
+          <a:ln w="12700">
+            <a:solidFill>
+              <a:srgbClr val="DDE3EE"/>
+            </a:solidFill>
+          </a:ln>
+          <a:effectLst/>
+        </p:spPr>
+        <p:style>
+          <a:lnRef idx="1">
+            <a:schemeClr val="accent1"/>
+          </a:lnRef>
+          <a:fillRef idx="3">
+            <a:schemeClr val="accent1"/>
+          </a:fillRef>
+          <a:effectRef idx="2">
+            <a:schemeClr val="accent1"/>
+          </a:effectRef>
+          <a:fontRef idx="minor">
+            <a:schemeClr val="lt1"/>
+          </a:fontRef>
+        </p:style>
+        <p:txBody>
+          <a:bodyPr rtlCol="0" anchor="ctr"/>
+          <a:lstStyle/>
+          <a:p>
+            <a:pPr algn="ctr"/>
+          </a:p>
+        </p:txBody>
+      </p:sp>
+      <p:sp>
+        <p:nvSpPr>
+          <p:cNvPr id="18" name="Oval 17"/>
+          <p:cNvSpPr/>
+          <p:nvPr/>
+        </p:nvSpPr>
+        <p:spPr>
+          <a:xfrm>
+            <a:off x="7187183" y="2057400"/>
+            <a:ext cx="658368" cy="658368"/>
+          </a:xfrm>
+          <a:prstGeom prst="ellipse">
+            <a:avLst/>
+          </a:prstGeom>
+          <a:solidFill>
+            <a:srgbClr val="2EC4B6"/>
+          </a:solidFill>
+          <a:ln>
+            <a:noFill/>
+          </a:ln>
+          <a:effectLst/>
+        </p:spPr>
+        <p:style>
+          <a:lnRef idx="1">
+            <a:schemeClr val="accent1"/>
+          </a:lnRef>
+          <a:fillRef idx="3">
+            <a:schemeClr val="accent1"/>
+          </a:fillRef>
+          <a:effectRef idx="2">
+            <a:schemeClr val="accent1"/>
+          </a:effectRef>
+          <a:fontRef idx="minor">
+            <a:schemeClr val="lt1"/>
+          </a:fontRef>
+        </p:style>
+        <p:txBody>
+          <a:bodyPr rtlCol="0" anchor="ctr"/>
+          <a:lstStyle/>
+          <a:p>
+            <a:pPr algn="ctr"/>
+          </a:p>
+        </p:txBody>
+      </p:sp>
+      <p:sp>
+        <p:nvSpPr>
+          <p:cNvPr id="19" name="TextBox 18"/>
+          <p:cNvSpPr txBox="1"/>
+          <p:nvPr/>
+        </p:nvSpPr>
+        <p:spPr>
+          <a:xfrm>
+            <a:off x="7187183" y="2057400"/>
+            <a:ext cx="658368" cy="658368"/>
+          </a:xfrm>
+          <a:prstGeom prst="rect">
+            <a:avLst/>
+          </a:prstGeom>
+          <a:noFill/>
+        </p:spPr>
+        <p:txBody>
+          <a:bodyPr wrap="square" anchor="ctr" lIns="0" rIns="0" tIns="0" bIns="0">
+            <a:spAutoFit/>
+          </a:bodyPr>
+          <a:lstStyle/>
+          <a:p>
+            <a:pPr algn="ctr"/>
+            <a:r>
+              <a:rPr sz="1900" b="1">
+                <a:solidFill>
+                  <a:srgbClr val="14213D"/>
+                </a:solidFill>
+                <a:latin typeface="Microsoft JhengHei"/>
+                <a:ea typeface="Microsoft JhengHei"/>
+                <a:cs typeface="Microsoft JhengHei"/>
+              </a:rPr>
+              <a:t>03</a:t>
+            </a:r>
+          </a:p>
+        </p:txBody>
+      </p:sp>
+      <p:sp>
+        <p:nvSpPr>
+          <p:cNvPr id="20" name="TextBox 19"/>
+          <p:cNvSpPr txBox="1"/>
+          <p:nvPr/>
+        </p:nvSpPr>
+        <p:spPr>
+          <a:xfrm>
+            <a:off x="6254496" y="2880360"/>
+            <a:ext cx="2514600" cy="457200"/>
+          </a:xfrm>
+          <a:prstGeom prst="rect">
+            <a:avLst/>
+          </a:prstGeom>
+          <a:noFill/>
+        </p:spPr>
+        <p:txBody>
+          <a:bodyPr wrap="square" anchor="t" lIns="0" rIns="0" tIns="0" bIns="0">
+            <a:spAutoFit/>
+          </a:bodyPr>
+          <a:lstStyle/>
+          <a:p>
+            <a:pPr algn="ctr"/>
+            <a:r>
+              <a:rPr sz="1800" b="1">
+                <a:solidFill>
+                  <a:srgbClr val="FFFFFF"/>
+                </a:solidFill>
+                <a:latin typeface="Microsoft JhengHei"/>
+                <a:ea typeface="Microsoft JhengHei"/>
+                <a:cs typeface="Microsoft JhengHei"/>
+              </a:rPr>
+              <a:t>外部協助</a:t>
+            </a:r>
+          </a:p>
+        </p:txBody>
+      </p:sp>
+      <p:sp>
+        <p:nvSpPr>
+          <p:cNvPr id="21" name="TextBox 20"/>
+          <p:cNvSpPr txBox="1"/>
+          <p:nvPr/>
+        </p:nvSpPr>
+        <p:spPr>
+          <a:xfrm>
+            <a:off x="6391656" y="3364992"/>
+            <a:ext cx="2240280" cy="685800"/>
+          </a:xfrm>
+          <a:prstGeom prst="rect">
+            <a:avLst/>
+          </a:prstGeom>
+          <a:noFill/>
+        </p:spPr>
+        <p:txBody>
+          <a:bodyPr wrap="square" anchor="t" lIns="0" rIns="0" tIns="0" bIns="0">
+            <a:spAutoFit/>
+          </a:bodyPr>
+          <a:lstStyle/>
+          <a:p>
+            <a:pPr algn="ctr">
+              <a:lnSpc>
+                <a:spcPts val="1500"/>
+              </a:lnSpc>
+            </a:pPr>
+            <a:r>
+              <a:rPr sz="1150" b="0">
+                <a:solidFill>
+                  <a:srgbClr val="CADCFC"/>
+                </a:solidFill>
+                <a:latin typeface="Microsoft JhengHei"/>
+                <a:ea typeface="Microsoft JhengHei"/>
+                <a:cs typeface="Microsoft JhengHei"/>
+              </a:rPr>
+              <a:t>委請外部資安專業團隊
+鑑識調查與資料復原</a:t>
+            </a:r>
+          </a:p>
+        </p:txBody>
+      </p:sp>
+      <p:sp>
+        <p:nvSpPr>
+          <p:cNvPr id="22" name="TextBox 21"/>
+          <p:cNvSpPr txBox="1"/>
+          <p:nvPr/>
+        </p:nvSpPr>
+        <p:spPr>
+          <a:xfrm>
+            <a:off x="8741664" y="1828800"/>
+            <a:ext cx="365760" cy="2286000"/>
+          </a:xfrm>
+          <a:prstGeom prst="rect">
+            <a:avLst/>
+          </a:prstGeom>
+          <a:noFill/>
+        </p:spPr>
+        <p:txBody>
+          <a:bodyPr wrap="square" anchor="ctr" lIns="0" rIns="0" tIns="0" bIns="0">
+            <a:spAutoFit/>
+          </a:bodyPr>
+          <a:lstStyle/>
+          <a:p>
+            <a:pPr algn="ctr"/>
+            <a:r>
+              <a:rPr sz="2800" b="1">
+                <a:solidFill>
+                  <a:srgbClr val="5C6679"/>
+                </a:solidFill>
+                <a:latin typeface="Microsoft JhengHei"/>
+                <a:ea typeface="Microsoft JhengHei"/>
+                <a:cs typeface="Microsoft JhengHei"/>
+              </a:rPr>
+              <a:t>›</a:t>
+            </a:r>
+          </a:p>
+        </p:txBody>
+      </p:sp>
+      <p:sp>
+        <p:nvSpPr>
+          <p:cNvPr id="23" name="Rounded Rectangle 22"/>
+          <p:cNvSpPr/>
+          <p:nvPr/>
+        </p:nvSpPr>
+        <p:spPr>
+          <a:xfrm>
+            <a:off x="9061703" y="1828800"/>
+            <a:ext cx="2514600" cy="2286000"/>
+          </a:xfrm>
+          <a:prstGeom prst="roundRect">
+            <a:avLst/>
+          </a:prstGeom>
+          <a:solidFill>
+            <a:srgbClr val="14213D"/>
+          </a:solidFill>
+          <a:ln w="12700">
+            <a:solidFill>
+              <a:srgbClr val="DDE3EE"/>
+            </a:solidFill>
+          </a:ln>
+          <a:effectLst/>
+        </p:spPr>
+        <p:style>
+          <a:lnRef idx="1">
+            <a:schemeClr val="accent1"/>
+          </a:lnRef>
+          <a:fillRef idx="3">
+            <a:schemeClr val="accent1"/>
+          </a:fillRef>
+          <a:effectRef idx="2">
+            <a:schemeClr val="accent1"/>
+          </a:effectRef>
+          <a:fontRef idx="minor">
+            <a:schemeClr val="lt1"/>
+          </a:fontRef>
+        </p:style>
+        <p:txBody>
+          <a:bodyPr rtlCol="0" anchor="ctr"/>
+          <a:lstStyle/>
+          <a:p>
+            <a:pPr algn="ctr"/>
+          </a:p>
+        </p:txBody>
+      </p:sp>
+      <p:sp>
+        <p:nvSpPr>
+          <p:cNvPr id="24" name="Oval 23"/>
+          <p:cNvSpPr/>
+          <p:nvPr/>
+        </p:nvSpPr>
+        <p:spPr>
+          <a:xfrm>
+            <a:off x="9994391" y="2057400"/>
+            <a:ext cx="658368" cy="658368"/>
+          </a:xfrm>
+          <a:prstGeom prst="ellipse">
+            <a:avLst/>
+          </a:prstGeom>
+          <a:solidFill>
+            <a:srgbClr val="2EC4B6"/>
+          </a:solidFill>
+          <a:ln>
+            <a:noFill/>
+          </a:ln>
+          <a:effectLst/>
+        </p:spPr>
+        <p:style>
+          <a:lnRef idx="1">
+            <a:schemeClr val="accent1"/>
+          </a:lnRef>
+          <a:fillRef idx="3">
+            <a:schemeClr val="accent1"/>
+          </a:fillRef>
+          <a:effectRef idx="2">
+            <a:schemeClr val="accent1"/>
+          </a:effectRef>
+          <a:fontRef idx="minor">
+            <a:schemeClr val="lt1"/>
+          </a:fontRef>
+        </p:style>
+        <p:txBody>
+          <a:bodyPr rtlCol="0" anchor="ctr"/>
+          <a:lstStyle/>
+          <a:p>
+            <a:pPr algn="ctr"/>
+          </a:p>
+        </p:txBody>
+      </p:sp>
+      <p:sp>
+        <p:nvSpPr>
+          <p:cNvPr id="25" name="TextBox 24"/>
+          <p:cNvSpPr txBox="1"/>
+          <p:nvPr/>
+        </p:nvSpPr>
+        <p:spPr>
+          <a:xfrm>
+            <a:off x="9994391" y="2057400"/>
+            <a:ext cx="658368" cy="658368"/>
+          </a:xfrm>
+          <a:prstGeom prst="rect">
+            <a:avLst/>
+          </a:prstGeom>
+          <a:noFill/>
+        </p:spPr>
+        <p:txBody>
+          <a:bodyPr wrap="square" anchor="ctr" lIns="0" rIns="0" tIns="0" bIns="0">
+            <a:spAutoFit/>
+          </a:bodyPr>
+          <a:lstStyle/>
+          <a:p>
+            <a:pPr algn="ctr"/>
+            <a:r>
+              <a:rPr sz="1900" b="1">
+                <a:solidFill>
+                  <a:srgbClr val="14213D"/>
+                </a:solidFill>
+                <a:latin typeface="Microsoft JhengHei"/>
+                <a:ea typeface="Microsoft JhengHei"/>
+                <a:cs typeface="Microsoft JhengHei"/>
+              </a:rPr>
+              <a:t>04</a:t>
+            </a:r>
+          </a:p>
+        </p:txBody>
+      </p:sp>
+      <p:sp>
+        <p:nvSpPr>
+          <p:cNvPr id="26" name="TextBox 25"/>
+          <p:cNvSpPr txBox="1"/>
+          <p:nvPr/>
+        </p:nvSpPr>
+        <p:spPr>
+          <a:xfrm>
+            <a:off x="9061703" y="2880360"/>
+            <a:ext cx="2514600" cy="457200"/>
+          </a:xfrm>
+          <a:prstGeom prst="rect">
+            <a:avLst/>
+          </a:prstGeom>
+          <a:noFill/>
+        </p:spPr>
+        <p:txBody>
+          <a:bodyPr wrap="square" anchor="t" lIns="0" rIns="0" tIns="0" bIns="0">
+            <a:spAutoFit/>
+          </a:bodyPr>
+          <a:lstStyle/>
+          <a:p>
+            <a:pPr algn="ctr"/>
+            <a:r>
+              <a:rPr sz="1800" b="1">
+                <a:solidFill>
+                  <a:srgbClr val="FFFFFF"/>
+                </a:solidFill>
+                <a:latin typeface="Microsoft JhengHei"/>
+                <a:ea typeface="Microsoft JhengHei"/>
+                <a:cs typeface="Microsoft JhengHei"/>
+              </a:rPr>
+              <a:t>強化監控</a:t>
+            </a:r>
+          </a:p>
+        </p:txBody>
+      </p:sp>
+      <p:sp>
+        <p:nvSpPr>
+          <p:cNvPr id="27" name="TextBox 26"/>
+          <p:cNvSpPr txBox="1"/>
+          <p:nvPr/>
+        </p:nvSpPr>
+        <p:spPr>
+          <a:xfrm>
+            <a:off x="9198863" y="3364992"/>
+            <a:ext cx="2240280" cy="685800"/>
+          </a:xfrm>
+          <a:prstGeom prst="rect">
+            <a:avLst/>
+          </a:prstGeom>
+          <a:noFill/>
+        </p:spPr>
+        <p:txBody>
+          <a:bodyPr wrap="square" anchor="t" lIns="0" rIns="0" tIns="0" bIns="0">
+            <a:spAutoFit/>
+          </a:bodyPr>
+          <a:lstStyle/>
+          <a:p>
+            <a:pPr algn="ctr">
+              <a:lnSpc>
+                <a:spcPts val="1500"/>
+              </a:lnSpc>
+            </a:pPr>
+            <a:r>
+              <a:rPr sz="1150" b="0">
+                <a:solidFill>
+                  <a:srgbClr val="CADCFC"/>
+                </a:solidFill>
+                <a:latin typeface="Microsoft JhengHei"/>
+                <a:ea typeface="Microsoft JhengHei"/>
+                <a:cs typeface="Microsoft JhengHei"/>
+              </a:rPr>
+              <a:t>盤查系統、提升架構
+持續密切監控防護</a:t>
+            </a:r>
+          </a:p>
+        </p:txBody>
+      </p:sp>
+      <p:sp>
+        <p:nvSpPr>
+          <p:cNvPr id="28" name="Rounded Rectangle 27"/>
+          <p:cNvSpPr/>
+          <p:nvPr/>
+        </p:nvSpPr>
+        <p:spPr>
+          <a:xfrm>
+            <a:off x="640080" y="4572000"/>
+            <a:ext cx="10881360" cy="1325880"/>
+          </a:xfrm>
+          <a:prstGeom prst="roundRect">
+            <a:avLst/>
+          </a:prstGeom>
+          <a:solidFill>
+            <a:srgbClr val="FFF1F0"/>
+          </a:solidFill>
+          <a:ln>
+            <a:noFill/>
+          </a:ln>
+          <a:effectLst/>
+        </p:spPr>
+        <p:style>
+          <a:lnRef idx="1">
+            <a:schemeClr val="accent1"/>
+          </a:lnRef>
+          <a:fillRef idx="3">
+            <a:schemeClr val="accent1"/>
+          </a:fillRef>
+          <a:effectRef idx="2">
+            <a:schemeClr val="accent1"/>
+          </a:effectRef>
+          <a:fontRef idx="minor">
+            <a:schemeClr val="lt1"/>
+          </a:fontRef>
+        </p:style>
+        <p:txBody>
+          <a:bodyPr rtlCol="0" anchor="ctr"/>
+          <a:lstStyle/>
+          <a:p>
+            <a:pPr algn="ctr"/>
+          </a:p>
+        </p:txBody>
+      </p:sp>
+      <p:sp>
+        <p:nvSpPr>
+          <p:cNvPr id="29" name="Rectangle 28"/>
+          <p:cNvSpPr/>
+          <p:nvPr/>
+        </p:nvSpPr>
+        <p:spPr>
+          <a:xfrm>
+            <a:off x="640080" y="4572000"/>
+            <a:ext cx="109728" cy="1325880"/>
+          </a:xfrm>
+          <a:prstGeom prst="rect">
+            <a:avLst/>
+          </a:prstGeom>
+          <a:solidFill>
+            <a:srgbClr val="E63946"/>
+          </a:solidFill>
+          <a:ln>
+            <a:noFill/>
+          </a:ln>
+          <a:effectLst/>
+        </p:spPr>
+        <p:style>
+          <a:lnRef idx="1">
+            <a:schemeClr val="accent1"/>
+          </a:lnRef>
+          <a:fillRef idx="3">
+            <a:schemeClr val="accent1"/>
+          </a:fillRef>
+          <a:effectRef idx="2">
+            <a:schemeClr val="accent1"/>
+          </a:effectRef>
+          <a:fontRef idx="minor">
+            <a:schemeClr val="lt1"/>
+          </a:fontRef>
+        </p:style>
+        <p:txBody>
+          <a:bodyPr rtlCol="0" anchor="ctr"/>
+          <a:lstStyle/>
+          <a:p>
+            <a:pPr algn="ctr"/>
+          </a:p>
+        </p:txBody>
+      </p:sp>
+      <p:sp>
+        <p:nvSpPr>
+          <p:cNvPr id="30" name="TextBox 29"/>
+          <p:cNvSpPr txBox="1"/>
+          <p:nvPr/>
+        </p:nvSpPr>
+        <p:spPr>
+          <a:xfrm>
+            <a:off x="868680" y="4709160"/>
+            <a:ext cx="10424160" cy="411480"/>
+          </a:xfrm>
+          <a:prstGeom prst="rect">
+            <a:avLst/>
+          </a:prstGeom>
+          <a:noFill/>
+        </p:spPr>
+        <p:txBody>
+          <a:bodyPr wrap="square" anchor="ctr" lIns="0" rIns="0" tIns="0" bIns="0">
+            <a:spAutoFit/>
+          </a:bodyPr>
+          <a:lstStyle/>
+          <a:p>
+            <a:pPr algn="l"/>
+            <a:r>
+              <a:rPr sz="1500" b="1">
+                <a:solidFill>
+                  <a:srgbClr val="E63946"/>
+                </a:solidFill>
+                <a:latin typeface="Microsoft JhengHei"/>
+                <a:ea typeface="Microsoft JhengHei"/>
+                <a:cs typeface="Microsoft JhengHei"/>
+              </a:rPr>
+              <a:t>個資外洩事件額外步驟　</a:t>
+            </a:r>
+            <a:r>
+              <a:rPr sz="1200" b="0">
+                <a:solidFill>
+                  <a:srgbClr val="5C6679"/>
+                </a:solidFill>
+                <a:latin typeface="Microsoft JhengHei"/>
+                <a:ea typeface="Microsoft JhengHei"/>
+                <a:cs typeface="Microsoft JhengHei"/>
+              </a:rPr>
+              <a:t>（依事件性質適用）</a:t>
+            </a:r>
+          </a:p>
+        </p:txBody>
+      </p:sp>
+      <p:sp>
+        <p:nvSpPr>
+          <p:cNvPr id="31" name="TextBox 30"/>
+          <p:cNvSpPr txBox="1"/>
+          <p:nvPr/>
+        </p:nvSpPr>
+        <p:spPr>
+          <a:xfrm>
+            <a:off x="868680" y="5166360"/>
+            <a:ext cx="10515600" cy="548640"/>
+          </a:xfrm>
+          <a:prstGeom prst="rect">
+            <a:avLst/>
+          </a:prstGeom>
+          <a:noFill/>
+        </p:spPr>
+        <p:txBody>
+          <a:bodyPr wrap="square" anchor="t" lIns="0" rIns="0" tIns="0" bIns="0">
+            <a:spAutoFit/>
+          </a:bodyPr>
+          <a:lstStyle/>
+          <a:p>
+            <a:pPr algn="l">
+              <a:lnSpc>
+                <a:spcPts val="1600"/>
+              </a:lnSpc>
+            </a:pPr>
+            <a:r>
+              <a:rPr sz="1200" b="0">
+                <a:solidFill>
+                  <a:srgbClr val="1A2233"/>
+                </a:solidFill>
+                <a:latin typeface="Microsoft JhengHei"/>
+                <a:ea typeface="Microsoft JhengHei"/>
+                <a:cs typeface="Microsoft JhengHei"/>
+              </a:rPr>
+              <a:t>依法通報主管機關　•　主動通知受影響當事人並提供客服　•　向調查局報案　•　強化委外廠商與第三方工具管理</a:t>
+            </a:r>
+          </a:p>
+        </p:txBody>
+      </p:sp>
+    </p:spTree>
+  </p:cSld>
+  <p:clrMapOvr>
+    <a:masterClrMapping/>
+  </p:clrMapOvr>
+</p:sld>
+</file>
+
+<file path=ppt/slides/slide6.xml><?xml version="1.0" encoding="utf-8"?>
+<p:sld xmlns:a="http://schemas.openxmlformats.org/drawingml/2006/main" xmlns:p="http://schemas.openxmlformats.org/presentationml/2006/main" xmlns:r="http://schemas.openxmlformats.org/officeDocument/2006/relationships">
+  <p:cSld>
+    <p:spTree>
+      <p:nvGrpSpPr>
+        <p:cNvPr id="1" name=""/>
+        <p:cNvGrpSpPr/>
+        <p:nvPr/>
+      </p:nvGrpSpPr>
+      <p:grpSpPr/>
+      <p:sp>
+        <p:nvSpPr>
+          <p:cNvPr id="2" name="Rectangle 1"/>
+          <p:cNvSpPr/>
+          <p:nvPr/>
+        </p:nvSpPr>
+        <p:spPr>
+          <a:xfrm>
+            <a:off x="0" y="0"/>
+            <a:ext cx="12191695" cy="6858000"/>
+          </a:xfrm>
+          <a:prstGeom prst="rect">
+            <a:avLst/>
+          </a:prstGeom>
+          <a:solidFill>
+            <a:srgbClr val="F6F8FC"/>
+          </a:solidFill>
+          <a:ln>
+            <a:noFill/>
+          </a:ln>
+          <a:effectLst/>
+        </p:spPr>
+        <p:style>
+          <a:lnRef idx="1">
+            <a:schemeClr val="accent1"/>
+          </a:lnRef>
+          <a:fillRef idx="3">
+            <a:schemeClr val="accent1"/>
+          </a:fillRef>
+          <a:effectRef idx="2">
+            <a:schemeClr val="accent1"/>
+          </a:effectRef>
+          <a:fontRef idx="minor">
+            <a:schemeClr val="lt1"/>
+          </a:fontRef>
+        </p:style>
+        <p:txBody>
+          <a:bodyPr rtlCol="0" anchor="ctr"/>
+          <a:lstStyle/>
+          <a:p>
+            <a:pPr algn="ctr"/>
+          </a:p>
+        </p:txBody>
+      </p:sp>
+      <p:sp>
+        <p:nvSpPr>
+          <p:cNvPr id="3" name="TextBox 2"/>
+          <p:cNvSpPr txBox="1"/>
+          <p:nvPr/>
+        </p:nvSpPr>
+        <p:spPr>
+          <a:xfrm>
+            <a:off x="548640" y="365760"/>
             <a:ext cx="9144000" cy="640080"/>
           </a:xfrm>
           <a:prstGeom prst="rect">
@@ -8788,7 +10052,7 @@
 </p:sld>
 </file>
 
-<file path=ppt/slides/slide6.xml><?xml version="1.0" encoding="utf-8"?>
+<file path=ppt/slides/slide7.xml><?xml version="1.0" encoding="utf-8"?>
 <p:sld xmlns:a="http://schemas.openxmlformats.org/drawingml/2006/main" xmlns:p="http://schemas.openxmlformats.org/presentationml/2006/main" xmlns:r="http://schemas.openxmlformats.org/officeDocument/2006/relationships">
   <p:cSld>
     <p:spTree>

--- a/資安事件因應分析.pptx
+++ b/資安事件因應分析.pptx
@@ -3528,7 +3528,7 @@
                 <a:ea typeface="Microsoft JhengHei"/>
                 <a:cs typeface="Microsoft JhengHei"/>
               </a:rPr>
-              <a:t>資料期間 2026-05-01 ~ 2026-05-31　｜　MOPS 重大訊息全文檢索　｜　8 家公司</a:t>
+              <a:t>資料期間 2026-04-30 ~ 2026-05-31　｜　MOPS 重大訊息全文檢索　｜　8 家公司</a:t>
             </a:r>
           </a:p>
         </p:txBody>
@@ -6475,7 +6475,7 @@
                           <a:ea typeface="Microsoft JhengHei"/>
                           <a:cs typeface="Microsoft JhengHei"/>
                         </a:rPr>
-                        <a:t>安侯建業聯合會計師事務所</a:t>
+                        <a:t>—</a:t>
                       </a:r>
                     </a:p>
                   </a:txBody>
@@ -6499,7 +6499,7 @@
                           <a:ea typeface="Microsoft JhengHei"/>
                           <a:cs typeface="Microsoft JhengHei"/>
                         </a:rPr>
-                        <a:t>羅瑞芝、余聖河</a:t>
+                        <a:t>—</a:t>
                       </a:r>
                     </a:p>
                   </a:txBody>

--- a/資安事件因應分析.pptx
+++ b/資安事件因應分析.pptx
@@ -6475,7 +6475,7 @@
                           <a:ea typeface="Microsoft JhengHei"/>
                           <a:cs typeface="Microsoft JhengHei"/>
                         </a:rPr>
-                        <a:t>—</a:t>
+                        <a:t>安侯建業聯合會計師事務所</a:t>
                       </a:r>
                     </a:p>
                   </a:txBody>
@@ -6499,7 +6499,7 @@
                           <a:ea typeface="Microsoft JhengHei"/>
                           <a:cs typeface="Microsoft JhengHei"/>
                         </a:rPr>
-                        <a:t>—</a:t>
+                        <a:t>羅瑞芝、余聖河</a:t>
                       </a:r>
                     </a:p>
                   </a:txBody>

--- a/資安事件因應分析.pptx
+++ b/資安事件因應分析.pptx
@@ -3528,7 +3528,7 @@
                 <a:ea typeface="Microsoft JhengHei"/>
                 <a:cs typeface="Microsoft JhengHei"/>
               </a:rPr>
-              <a:t>資料期間 2026-04-30 ~ 2026-05-31　｜　MOPS 重大訊息全文檢索　｜　8 家公司</a:t>
+              <a:t>資料期間 2026-05-01 ~ 2026-06-01　｜　MOPS 重大訊息全文檢索　｜　8 家公司</a:t>
             </a:r>
           </a:p>
         </p:txBody>

--- a/資安事件因應分析.pptx
+++ b/資安事件因應分析.pptx
@@ -12,6 +12,7 @@
     <p:sldId id="260" r:id="rId11"/>
     <p:sldId id="261" r:id="rId12"/>
     <p:sldId id="262" r:id="rId13"/>
+    <p:sldId id="263" r:id="rId14"/>
   </p:sldIdLst>
   <p:sldSz cx="12191695" cy="6858000" type="screen4x3"/>
   <p:notesSz cx="6858000" cy="9144000"/>
@@ -161,11 +162,19 @@
               </a:solidFill>
             </c:spPr>
           </c:dPt>
+          <c:dPt>
+            <c:idx val="3"/>
+            <c:spPr>
+              <a:solidFill>
+                <a:srgbClr val="5C6679"/>
+              </a:solidFill>
+            </c:spPr>
+          </c:dPt>
           <c:cat>
             <c:strRef>
-              <c:f>Sheet1!$A$2:$A$4</c:f>
+              <c:f>Sheet1!$A$2:$A$5</c:f>
               <c:strCache>
-                <c:ptCount val="3"/>
+                <c:ptCount val="4"/>
                 <c:pt idx="0">
                   <c:v>駭客攻擊</c:v>
                 </c:pt>
@@ -175,22 +184,28 @@
                 <c:pt idx="2">
                   <c:v>個資外洩</c:v>
                 </c:pt>
+                <c:pt idx="3">
+                  <c:v>其他</c:v>
+                </c:pt>
               </c:strCache>
             </c:strRef>
           </c:cat>
           <c:val>
             <c:numRef>
-              <c:f>Sheet1!$B$2:$B$4</c:f>
+              <c:f>Sheet1!$B$2:$B$5</c:f>
               <c:numCache>
                 <c:formatCode>General</c:formatCode>
-                <c:ptCount val="3"/>
+                <c:ptCount val="4"/>
                 <c:pt idx="0">
-                  <c:v>4</c:v>
+                  <c:v>5</c:v>
                 </c:pt>
                 <c:pt idx="1">
-                  <c:v>2</c:v>
+                  <c:v>1</c:v>
                 </c:pt>
                 <c:pt idx="2">
+                  <c:v>1</c:v>
+                </c:pt>
+                <c:pt idx="3">
                   <c:v>2</c:v>
                 </c:pt>
               </c:numCache>
@@ -3528,7 +3543,7 @@
                 <a:ea typeface="Microsoft JhengHei"/>
                 <a:cs typeface="Microsoft JhengHei"/>
               </a:rPr>
-              <a:t>資料期間 2026-05-01 ~ 2026-06-01　｜　MOPS 重大訊息全文檢索　｜　8 家公司</a:t>
+              <a:t>資料期間 2026-05-03 ~ 2026-06-03　｜　MOPS 重大訊息全文檢索　｜　9 家公司</a:t>
             </a:r>
           </a:p>
         </p:txBody>
@@ -3745,7 +3760,7 @@
                 <a:ea typeface="Microsoft JhengHei"/>
                 <a:cs typeface="Microsoft JhengHei"/>
               </a:rPr>
-              <a:t>資料期間內 MOPS 揭露之 8 起資安相關重大訊息</a:t>
+              <a:t>資料期間內 MOPS 揭露之 9 起資安相關重大訊息</a:t>
             </a:r>
           </a:p>
         </p:txBody>
@@ -3828,7 +3843,7 @@
                 <a:ea typeface="Microsoft JhengHei"/>
                 <a:cs typeface="Microsoft JhengHei"/>
               </a:rPr>
-              <a:t>8</a:t>
+              <a:t>9</a:t>
             </a:r>
           </a:p>
         </p:txBody>
@@ -3948,7 +3963,7 @@
                 <a:ea typeface="Microsoft JhengHei"/>
                 <a:cs typeface="Microsoft JhengHei"/>
               </a:rPr>
-              <a:t>3</a:t>
+              <a:t>4</a:t>
             </a:r>
           </a:p>
         </p:txBody>
@@ -4120,7 +4135,7 @@
         </p:nvGraphicFramePr>
         <p:xfrm>
           <a:off x="548640" y="2697480"/>
-          <a:ext cx="11064240" cy="3456432"/>
+          <a:ext cx="11064240" cy="3566160"/>
         </p:xfrm>
         <a:graphic>
           <a:graphicData uri="http://schemas.openxmlformats.org/drawingml/2006/table">
@@ -4135,7 +4150,7 @@
                 <a:gridCol w="2286000"/>
                 <a:gridCol w="5120640"/>
               </a:tblGrid>
-              <a:tr h="384048">
+              <a:tr h="356616">
                 <a:tc>
                   <a:txBody>
                     <a:bodyPr/>
@@ -4257,7 +4272,7 @@
                   </a:tcPr>
                 </a:tc>
               </a:tr>
-              <a:tr h="384048">
+              <a:tr h="356616">
                 <a:tc>
                   <a:txBody>
                     <a:bodyPr/>
@@ -4272,7 +4287,7 @@
                           <a:ea typeface="Microsoft JhengHei"/>
                           <a:cs typeface="Microsoft JhengHei"/>
                         </a:rPr>
-                        <a:t>數字</a:t>
+                        <a:t>巨路</a:t>
                       </a:r>
                     </a:p>
                   </a:txBody>
@@ -4296,7 +4311,7 @@
                           <a:ea typeface="Microsoft JhengHei"/>
                           <a:cs typeface="Microsoft JhengHei"/>
                         </a:rPr>
-                        <a:t>5287</a:t>
+                        <a:t>6192</a:t>
                       </a:r>
                     </a:p>
                   </a:txBody>
@@ -4320,7 +4335,495 @@
                           <a:ea typeface="Microsoft JhengHei"/>
                           <a:cs typeface="Microsoft JhengHei"/>
                         </a:rPr>
+                        <a:t>06/02</a:t>
+                      </a:r>
+                    </a:p>
+                  </a:txBody>
+                  <a:tcPr anchor="ctr" marL="73152" marT="9144" marB="9144">
+                    <a:solidFill>
+                      <a:srgbClr val="FFFFFF"/>
+                    </a:solidFill>
+                  </a:tcPr>
+                </a:tc>
+                <a:tc>
+                  <a:txBody>
+                    <a:bodyPr/>
+                    <a:lstStyle/>
+                    <a:p>
+                      <a:r>
+                        <a:rPr sz="1150" b="1">
+                          <a:solidFill>
+                            <a:srgbClr val="E63946"/>
+                          </a:solidFill>
+                          <a:latin typeface="Microsoft JhengHei"/>
+                          <a:ea typeface="Microsoft JhengHei"/>
+                          <a:cs typeface="Microsoft JhengHei"/>
+                        </a:rPr>
+                        <a:t>駭客攻擊</a:t>
+                      </a:r>
+                    </a:p>
+                  </a:txBody>
+                  <a:tcPr anchor="ctr" marL="73152" marT="9144" marB="9144">
+                    <a:solidFill>
+                      <a:srgbClr val="FFFFFF"/>
+                    </a:solidFill>
+                  </a:tcPr>
+                </a:tc>
+                <a:tc>
+                  <a:txBody>
+                    <a:bodyPr/>
+                    <a:lstStyle/>
+                    <a:p>
+                      <a:r>
+                        <a:rPr sz="1150" b="0">
+                          <a:solidFill>
+                            <a:srgbClr val="1A2233"/>
+                          </a:solidFill>
+                          <a:latin typeface="Microsoft JhengHei"/>
+                          <a:ea typeface="Microsoft JhengHei"/>
+                          <a:cs typeface="Microsoft JhengHei"/>
+                        </a:rPr>
+                        <a:t>—</a:t>
+                      </a:r>
+                    </a:p>
+                  </a:txBody>
+                  <a:tcPr anchor="ctr" marL="73152" marT="9144" marB="9144">
+                    <a:solidFill>
+                      <a:srgbClr val="FFFFFF"/>
+                    </a:solidFill>
+                  </a:tcPr>
+                </a:tc>
+              </a:tr>
+              <a:tr h="356616">
+                <a:tc>
+                  <a:txBody>
+                    <a:bodyPr/>
+                    <a:lstStyle/>
+                    <a:p>
+                      <a:r>
+                        <a:rPr sz="1150" b="0">
+                          <a:solidFill>
+                            <a:srgbClr val="1A2233"/>
+                          </a:solidFill>
+                          <a:latin typeface="Microsoft JhengHei"/>
+                          <a:ea typeface="Microsoft JhengHei"/>
+                          <a:cs typeface="Microsoft JhengHei"/>
+                        </a:rPr>
+                        <a:t>數字</a:t>
+                      </a:r>
+                    </a:p>
+                  </a:txBody>
+                  <a:tcPr anchor="ctr" marL="73152" marT="9144" marB="9144">
+                    <a:solidFill>
+                      <a:srgbClr val="EEF2F9"/>
+                    </a:solidFill>
+                  </a:tcPr>
+                </a:tc>
+                <a:tc>
+                  <a:txBody>
+                    <a:bodyPr/>
+                    <a:lstStyle/>
+                    <a:p>
+                      <a:r>
+                        <a:rPr sz="1150" b="0">
+                          <a:solidFill>
+                            <a:srgbClr val="1A2233"/>
+                          </a:solidFill>
+                          <a:latin typeface="Microsoft JhengHei"/>
+                          <a:ea typeface="Microsoft JhengHei"/>
+                          <a:cs typeface="Microsoft JhengHei"/>
+                        </a:rPr>
+                        <a:t>5287</a:t>
+                      </a:r>
+                    </a:p>
+                  </a:txBody>
+                  <a:tcPr anchor="ctr" marL="73152" marT="9144" marB="9144">
+                    <a:solidFill>
+                      <a:srgbClr val="EEF2F9"/>
+                    </a:solidFill>
+                  </a:tcPr>
+                </a:tc>
+                <a:tc>
+                  <a:txBody>
+                    <a:bodyPr/>
+                    <a:lstStyle/>
+                    <a:p>
+                      <a:r>
+                        <a:rPr sz="1150" b="0">
+                          <a:solidFill>
+                            <a:srgbClr val="1A2233"/>
+                          </a:solidFill>
+                          <a:latin typeface="Microsoft JhengHei"/>
+                          <a:ea typeface="Microsoft JhengHei"/>
+                          <a:cs typeface="Microsoft JhengHei"/>
+                        </a:rPr>
                         <a:t>05/26</a:t>
+                      </a:r>
+                    </a:p>
+                  </a:txBody>
+                  <a:tcPr anchor="ctr" marL="73152" marT="9144" marB="9144">
+                    <a:solidFill>
+                      <a:srgbClr val="EEF2F9"/>
+                    </a:solidFill>
+                  </a:tcPr>
+                </a:tc>
+                <a:tc>
+                  <a:txBody>
+                    <a:bodyPr/>
+                    <a:lstStyle/>
+                    <a:p>
+                      <a:r>
+                        <a:rPr sz="1150" b="1">
+                          <a:solidFill>
+                            <a:srgbClr val="5C6679"/>
+                          </a:solidFill>
+                          <a:latin typeface="Microsoft JhengHei"/>
+                          <a:ea typeface="Microsoft JhengHei"/>
+                          <a:cs typeface="Microsoft JhengHei"/>
+                        </a:rPr>
+                        <a:t>其他</a:t>
+                      </a:r>
+                    </a:p>
+                  </a:txBody>
+                  <a:tcPr anchor="ctr" marL="73152" marT="9144" marB="9144">
+                    <a:solidFill>
+                      <a:srgbClr val="EEF2F9"/>
+                    </a:solidFill>
+                  </a:tcPr>
+                </a:tc>
+                <a:tc>
+                  <a:txBody>
+                    <a:bodyPr/>
+                    <a:lstStyle/>
+                    <a:p>
+                      <a:r>
+                        <a:rPr sz="1150" b="0">
+                          <a:solidFill>
+                            <a:srgbClr val="1A2233"/>
+                          </a:solidFill>
+                          <a:latin typeface="Microsoft JhengHei"/>
+                          <a:ea typeface="Microsoft JhengHei"/>
+                          <a:cs typeface="Microsoft JhengHei"/>
+                        </a:rPr>
+                        <a:t>—</a:t>
+                      </a:r>
+                    </a:p>
+                  </a:txBody>
+                  <a:tcPr anchor="ctr" marL="73152" marT="9144" marB="9144">
+                    <a:solidFill>
+                      <a:srgbClr val="EEF2F9"/>
+                    </a:solidFill>
+                  </a:tcPr>
+                </a:tc>
+              </a:tr>
+              <a:tr h="356616">
+                <a:tc>
+                  <a:txBody>
+                    <a:bodyPr/>
+                    <a:lstStyle/>
+                    <a:p>
+                      <a:r>
+                        <a:rPr sz="1150" b="0">
+                          <a:solidFill>
+                            <a:srgbClr val="1A2233"/>
+                          </a:solidFill>
+                          <a:latin typeface="Microsoft JhengHei"/>
+                          <a:ea typeface="Microsoft JhengHei"/>
+                          <a:cs typeface="Microsoft JhengHei"/>
+                        </a:rPr>
+                        <a:t>弘塑</a:t>
+                      </a:r>
+                    </a:p>
+                  </a:txBody>
+                  <a:tcPr anchor="ctr" marL="73152" marT="9144" marB="9144">
+                    <a:solidFill>
+                      <a:srgbClr val="FFFFFF"/>
+                    </a:solidFill>
+                  </a:tcPr>
+                </a:tc>
+                <a:tc>
+                  <a:txBody>
+                    <a:bodyPr/>
+                    <a:lstStyle/>
+                    <a:p>
+                      <a:r>
+                        <a:rPr sz="1150" b="0">
+                          <a:solidFill>
+                            <a:srgbClr val="1A2233"/>
+                          </a:solidFill>
+                          <a:latin typeface="Microsoft JhengHei"/>
+                          <a:ea typeface="Microsoft JhengHei"/>
+                          <a:cs typeface="Microsoft JhengHei"/>
+                        </a:rPr>
+                        <a:t>3131</a:t>
+                      </a:r>
+                    </a:p>
+                  </a:txBody>
+                  <a:tcPr anchor="ctr" marL="73152" marT="9144" marB="9144">
+                    <a:solidFill>
+                      <a:srgbClr val="FFFFFF"/>
+                    </a:solidFill>
+                  </a:tcPr>
+                </a:tc>
+                <a:tc>
+                  <a:txBody>
+                    <a:bodyPr/>
+                    <a:lstStyle/>
+                    <a:p>
+                      <a:r>
+                        <a:rPr sz="1150" b="0">
+                          <a:solidFill>
+                            <a:srgbClr val="1A2233"/>
+                          </a:solidFill>
+                          <a:latin typeface="Microsoft JhengHei"/>
+                          <a:ea typeface="Microsoft JhengHei"/>
+                          <a:cs typeface="Microsoft JhengHei"/>
+                        </a:rPr>
+                        <a:t>05/21</a:t>
+                      </a:r>
+                    </a:p>
+                  </a:txBody>
+                  <a:tcPr anchor="ctr" marL="73152" marT="9144" marB="9144">
+                    <a:solidFill>
+                      <a:srgbClr val="FFFFFF"/>
+                    </a:solidFill>
+                  </a:tcPr>
+                </a:tc>
+                <a:tc>
+                  <a:txBody>
+                    <a:bodyPr/>
+                    <a:lstStyle/>
+                    <a:p>
+                      <a:r>
+                        <a:rPr sz="1150" b="1">
+                          <a:solidFill>
+                            <a:srgbClr val="5C6679"/>
+                          </a:solidFill>
+                          <a:latin typeface="Microsoft JhengHei"/>
+                          <a:ea typeface="Microsoft JhengHei"/>
+                          <a:cs typeface="Microsoft JhengHei"/>
+                        </a:rPr>
+                        <a:t>其他</a:t>
+                      </a:r>
+                    </a:p>
+                  </a:txBody>
+                  <a:tcPr anchor="ctr" marL="73152" marT="9144" marB="9144">
+                    <a:solidFill>
+                      <a:srgbClr val="FFFFFF"/>
+                    </a:solidFill>
+                  </a:tcPr>
+                </a:tc>
+                <a:tc>
+                  <a:txBody>
+                    <a:bodyPr/>
+                    <a:lstStyle/>
+                    <a:p>
+                      <a:r>
+                        <a:rPr sz="1150" b="0">
+                          <a:solidFill>
+                            <a:srgbClr val="1A2233"/>
+                          </a:solidFill>
+                          <a:latin typeface="Microsoft JhengHei"/>
+                          <a:ea typeface="Microsoft JhengHei"/>
+                          <a:cs typeface="Microsoft JhengHei"/>
+                        </a:rPr>
+                        <a:t>—</a:t>
+                      </a:r>
+                    </a:p>
+                  </a:txBody>
+                  <a:tcPr anchor="ctr" marL="73152" marT="9144" marB="9144">
+                    <a:solidFill>
+                      <a:srgbClr val="FFFFFF"/>
+                    </a:solidFill>
+                  </a:tcPr>
+                </a:tc>
+              </a:tr>
+              <a:tr h="356616">
+                <a:tc>
+                  <a:txBody>
+                    <a:bodyPr/>
+                    <a:lstStyle/>
+                    <a:p>
+                      <a:r>
+                        <a:rPr sz="1150" b="0">
+                          <a:solidFill>
+                            <a:srgbClr val="1A2233"/>
+                          </a:solidFill>
+                          <a:latin typeface="Microsoft JhengHei"/>
+                          <a:ea typeface="Microsoft JhengHei"/>
+                          <a:cs typeface="Microsoft JhengHei"/>
+                        </a:rPr>
+                        <a:t>建德工業</a:t>
+                      </a:r>
+                    </a:p>
+                  </a:txBody>
+                  <a:tcPr anchor="ctr" marL="73152" marT="9144" marB="9144">
+                    <a:solidFill>
+                      <a:srgbClr val="EEF2F9"/>
+                    </a:solidFill>
+                  </a:tcPr>
+                </a:tc>
+                <a:tc>
+                  <a:txBody>
+                    <a:bodyPr/>
+                    <a:lstStyle/>
+                    <a:p>
+                      <a:r>
+                        <a:rPr sz="1150" b="0">
+                          <a:solidFill>
+                            <a:srgbClr val="1A2233"/>
+                          </a:solidFill>
+                          <a:latin typeface="Microsoft JhengHei"/>
+                          <a:ea typeface="Microsoft JhengHei"/>
+                          <a:cs typeface="Microsoft JhengHei"/>
+                        </a:rPr>
+                        <a:t>6606</a:t>
+                      </a:r>
+                    </a:p>
+                  </a:txBody>
+                  <a:tcPr anchor="ctr" marL="73152" marT="9144" marB="9144">
+                    <a:solidFill>
+                      <a:srgbClr val="EEF2F9"/>
+                    </a:solidFill>
+                  </a:tcPr>
+                </a:tc>
+                <a:tc>
+                  <a:txBody>
+                    <a:bodyPr/>
+                    <a:lstStyle/>
+                    <a:p>
+                      <a:r>
+                        <a:rPr sz="1150" b="0">
+                          <a:solidFill>
+                            <a:srgbClr val="1A2233"/>
+                          </a:solidFill>
+                          <a:latin typeface="Microsoft JhengHei"/>
+                          <a:ea typeface="Microsoft JhengHei"/>
+                          <a:cs typeface="Microsoft JhengHei"/>
+                        </a:rPr>
+                        <a:t>05/20</a:t>
+                      </a:r>
+                    </a:p>
+                  </a:txBody>
+                  <a:tcPr anchor="ctr" marL="73152" marT="9144" marB="9144">
+                    <a:solidFill>
+                      <a:srgbClr val="EEF2F9"/>
+                    </a:solidFill>
+                  </a:tcPr>
+                </a:tc>
+                <a:tc>
+                  <a:txBody>
+                    <a:bodyPr/>
+                    <a:lstStyle/>
+                    <a:p>
+                      <a:r>
+                        <a:rPr sz="1150" b="1">
+                          <a:solidFill>
+                            <a:srgbClr val="E63946"/>
+                          </a:solidFill>
+                          <a:latin typeface="Microsoft JhengHei"/>
+                          <a:ea typeface="Microsoft JhengHei"/>
+                          <a:cs typeface="Microsoft JhengHei"/>
+                        </a:rPr>
+                        <a:t>駭客攻擊</a:t>
+                      </a:r>
+                    </a:p>
+                  </a:txBody>
+                  <a:tcPr anchor="ctr" marL="73152" marT="9144" marB="9144">
+                    <a:solidFill>
+                      <a:srgbClr val="EEF2F9"/>
+                    </a:solidFill>
+                  </a:tcPr>
+                </a:tc>
+                <a:tc>
+                  <a:txBody>
+                    <a:bodyPr/>
+                    <a:lstStyle/>
+                    <a:p>
+                      <a:r>
+                        <a:rPr sz="1150" b="0">
+                          <a:solidFill>
+                            <a:srgbClr val="1A2233"/>
+                          </a:solidFill>
+                          <a:latin typeface="Microsoft JhengHei"/>
+                          <a:ea typeface="Microsoft JhengHei"/>
+                          <a:cs typeface="Microsoft JhengHei"/>
+                        </a:rPr>
+                        <a:t>目前無個資、機密資料外洩等情事發生，對本公司營運無重大影響。</a:t>
+                      </a:r>
+                    </a:p>
+                  </a:txBody>
+                  <a:tcPr anchor="ctr" marL="73152" marT="9144" marB="9144">
+                    <a:solidFill>
+                      <a:srgbClr val="EEF2F9"/>
+                    </a:solidFill>
+                  </a:tcPr>
+                </a:tc>
+              </a:tr>
+              <a:tr h="356616">
+                <a:tc>
+                  <a:txBody>
+                    <a:bodyPr/>
+                    <a:lstStyle/>
+                    <a:p>
+                      <a:r>
+                        <a:rPr sz="1150" b="0">
+                          <a:solidFill>
+                            <a:srgbClr val="1A2233"/>
+                          </a:solidFill>
+                          <a:latin typeface="Microsoft JhengHei"/>
+                          <a:ea typeface="Microsoft JhengHei"/>
+                          <a:cs typeface="Microsoft JhengHei"/>
+                        </a:rPr>
+                        <a:t>永信</a:t>
+                      </a:r>
+                    </a:p>
+                  </a:txBody>
+                  <a:tcPr anchor="ctr" marL="73152" marT="9144" marB="9144">
+                    <a:solidFill>
+                      <a:srgbClr val="FFFFFF"/>
+                    </a:solidFill>
+                  </a:tcPr>
+                </a:tc>
+                <a:tc>
+                  <a:txBody>
+                    <a:bodyPr/>
+                    <a:lstStyle/>
+                    <a:p>
+                      <a:r>
+                        <a:rPr sz="1150" b="0">
+                          <a:solidFill>
+                            <a:srgbClr val="1A2233"/>
+                          </a:solidFill>
+                          <a:latin typeface="Microsoft JhengHei"/>
+                          <a:ea typeface="Microsoft JhengHei"/>
+                          <a:cs typeface="Microsoft JhengHei"/>
+                        </a:rPr>
+                        <a:t>3705</a:t>
+                      </a:r>
+                    </a:p>
+                  </a:txBody>
+                  <a:tcPr anchor="ctr" marL="73152" marT="9144" marB="9144">
+                    <a:solidFill>
+                      <a:srgbClr val="FFFFFF"/>
+                    </a:solidFill>
+                  </a:tcPr>
+                </a:tc>
+                <a:tc>
+                  <a:txBody>
+                    <a:bodyPr/>
+                    <a:lstStyle/>
+                    <a:p>
+                      <a:r>
+                        <a:rPr sz="1150" b="0">
+                          <a:solidFill>
+                            <a:srgbClr val="1A2233"/>
+                          </a:solidFill>
+                          <a:latin typeface="Microsoft JhengHei"/>
+                          <a:ea typeface="Microsoft JhengHei"/>
+                          <a:cs typeface="Microsoft JhengHei"/>
+                        </a:rPr>
+                        <a:t>05/15</a:t>
                       </a:r>
                     </a:p>
                   </a:txBody>
@@ -4368,7 +4871,7 @@
                           <a:ea typeface="Microsoft JhengHei"/>
                           <a:cs typeface="Microsoft JhengHei"/>
                         </a:rPr>
-                        <a:t>目前評估對公司營運尚無重大影響。</a:t>
+                        <a:t>—</a:t>
                       </a:r>
                     </a:p>
                   </a:txBody>
@@ -4379,7 +4882,7 @@
                   </a:tcPr>
                 </a:tc>
               </a:tr>
-              <a:tr h="384048">
+              <a:tr h="356616">
                 <a:tc>
                   <a:txBody>
                     <a:bodyPr/>
@@ -4394,7 +4897,7 @@
                           <a:ea typeface="Microsoft JhengHei"/>
                           <a:cs typeface="Microsoft JhengHei"/>
                         </a:rPr>
-                        <a:t>弘塑</a:t>
+                        <a:t>鴻海</a:t>
                       </a:r>
                     </a:p>
                   </a:txBody>
@@ -4418,7 +4921,7 @@
                           <a:ea typeface="Microsoft JhengHei"/>
                           <a:cs typeface="Microsoft JhengHei"/>
                         </a:rPr>
-                        <a:t>3131</a:t>
+                        <a:t>2317</a:t>
                       </a:r>
                     </a:p>
                   </a:txBody>
@@ -4442,7 +4945,7 @@
                           <a:ea typeface="Microsoft JhengHei"/>
                           <a:cs typeface="Microsoft JhengHei"/>
                         </a:rPr>
-                        <a:t>05/21</a:t>
+                        <a:t>05/12</a:t>
                       </a:r>
                     </a:p>
                   </a:txBody>
@@ -4460,13 +4963,13 @@
                       <a:r>
                         <a:rPr sz="1150" b="1">
                           <a:solidFill>
-                            <a:srgbClr val="F4A261"/>
+                            <a:srgbClr val="E63946"/>
                           </a:solidFill>
                           <a:latin typeface="Microsoft JhengHei"/>
                           <a:ea typeface="Microsoft JhengHei"/>
                           <a:cs typeface="Microsoft JhengHei"/>
                         </a:rPr>
-                        <a:t>勒索病毒/加密</a:t>
+                        <a:t>駭客攻擊</a:t>
                       </a:r>
                     </a:p>
                   </a:txBody>
@@ -4490,7 +4993,7 @@
                           <a:ea typeface="Microsoft JhengHei"/>
                           <a:cs typeface="Microsoft JhengHei"/>
                         </a:rPr>
-                        <a:t>公司於4/10發現網路異常後，立即中斷公司網路及相關對外連結，全面停…</a:t>
+                        <a:t>目前受影響廠區之生產營運均維持正常。</a:t>
                       </a:r>
                     </a:p>
                   </a:txBody>
@@ -4501,7 +5004,7 @@
                   </a:tcPr>
                 </a:tc>
               </a:tr>
-              <a:tr h="384048">
+              <a:tr h="356616">
                 <a:tc>
                   <a:txBody>
                     <a:bodyPr/>
@@ -4516,7 +5019,7 @@
                           <a:ea typeface="Microsoft JhengHei"/>
                           <a:cs typeface="Microsoft JhengHei"/>
                         </a:rPr>
-                        <a:t>建德工業</a:t>
+                        <a:t>彰源</a:t>
                       </a:r>
                     </a:p>
                   </a:txBody>
@@ -4540,7 +5043,7 @@
                           <a:ea typeface="Microsoft JhengHei"/>
                           <a:cs typeface="Microsoft JhengHei"/>
                         </a:rPr>
-                        <a:t>6606</a:t>
+                        <a:t>2030</a:t>
                       </a:r>
                     </a:p>
                   </a:txBody>
@@ -4564,7 +5067,7 @@
                           <a:ea typeface="Microsoft JhengHei"/>
                           <a:cs typeface="Microsoft JhengHei"/>
                         </a:rPr>
-                        <a:t>05/20</a:t>
+                        <a:t>05/11</a:t>
                       </a:r>
                     </a:p>
                   </a:txBody>
@@ -4612,7 +5115,7 @@
                           <a:ea typeface="Microsoft JhengHei"/>
                           <a:cs typeface="Microsoft JhengHei"/>
                         </a:rPr>
-                        <a:t>目前無個資、機密資料外洩等情事發生，對本公司營運無重大影響。</a:t>
+                        <a:t>目前評估沒有個資、亦沒有機密或重要的文件資料外洩等情事發生，對本公司…</a:t>
                       </a:r>
                     </a:p>
                   </a:txBody>
@@ -4623,7 +5126,7 @@
                   </a:tcPr>
                 </a:tc>
               </a:tr>
-              <a:tr h="384048">
+              <a:tr h="356616">
                 <a:tc>
                   <a:txBody>
                     <a:bodyPr/>
@@ -4638,7 +5141,7 @@
                           <a:ea typeface="Microsoft JhengHei"/>
                           <a:cs typeface="Microsoft JhengHei"/>
                         </a:rPr>
-                        <a:t>永信</a:t>
+                        <a:t>偉康科技</a:t>
                       </a:r>
                     </a:p>
                   </a:txBody>
@@ -4662,251 +5165,7 @@
                           <a:ea typeface="Microsoft JhengHei"/>
                           <a:cs typeface="Microsoft JhengHei"/>
                         </a:rPr>
-                        <a:t>3705</a:t>
-                      </a:r>
-                    </a:p>
-                  </a:txBody>
-                  <a:tcPr anchor="ctr" marL="73152" marT="9144" marB="9144">
-                    <a:solidFill>
-                      <a:srgbClr val="EEF2F9"/>
-                    </a:solidFill>
-                  </a:tcPr>
-                </a:tc>
-                <a:tc>
-                  <a:txBody>
-                    <a:bodyPr/>
-                    <a:lstStyle/>
-                    <a:p>
-                      <a:r>
-                        <a:rPr sz="1150" b="0">
-                          <a:solidFill>
-                            <a:srgbClr val="1A2233"/>
-                          </a:solidFill>
-                          <a:latin typeface="Microsoft JhengHei"/>
-                          <a:ea typeface="Microsoft JhengHei"/>
-                          <a:cs typeface="Microsoft JhengHei"/>
-                        </a:rPr>
-                        <a:t>05/15</a:t>
-                      </a:r>
-                    </a:p>
-                  </a:txBody>
-                  <a:tcPr anchor="ctr" marL="73152" marT="9144" marB="9144">
-                    <a:solidFill>
-                      <a:srgbClr val="EEF2F9"/>
-                    </a:solidFill>
-                  </a:tcPr>
-                </a:tc>
-                <a:tc>
-                  <a:txBody>
-                    <a:bodyPr/>
-                    <a:lstStyle/>
-                    <a:p>
-                      <a:r>
-                        <a:rPr sz="1150" b="1">
-                          <a:solidFill>
-                            <a:srgbClr val="27A6C4"/>
-                          </a:solidFill>
-                          <a:latin typeface="Microsoft JhengHei"/>
-                          <a:ea typeface="Microsoft JhengHei"/>
-                          <a:cs typeface="Microsoft JhengHei"/>
-                        </a:rPr>
-                        <a:t>個資外洩</a:t>
-                      </a:r>
-                    </a:p>
-                  </a:txBody>
-                  <a:tcPr anchor="ctr" marL="73152" marT="9144" marB="9144">
-                    <a:solidFill>
-                      <a:srgbClr val="EEF2F9"/>
-                    </a:solidFill>
-                  </a:tcPr>
-                </a:tc>
-                <a:tc>
-                  <a:txBody>
-                    <a:bodyPr/>
-                    <a:lstStyle/>
-                    <a:p>
-                      <a:r>
-                        <a:rPr sz="1150" b="0">
-                          <a:solidFill>
-                            <a:srgbClr val="1A2233"/>
-                          </a:solidFill>
-                          <a:latin typeface="Microsoft JhengHei"/>
-                          <a:ea typeface="Microsoft JhengHei"/>
-                          <a:cs typeface="Microsoft JhengHei"/>
-                        </a:rPr>
-                        <a:t>—</a:t>
-                      </a:r>
-                    </a:p>
-                  </a:txBody>
-                  <a:tcPr anchor="ctr" marL="73152" marT="9144" marB="9144">
-                    <a:solidFill>
-                      <a:srgbClr val="EEF2F9"/>
-                    </a:solidFill>
-                  </a:tcPr>
-                </a:tc>
-              </a:tr>
-              <a:tr h="384048">
-                <a:tc>
-                  <a:txBody>
-                    <a:bodyPr/>
-                    <a:lstStyle/>
-                    <a:p>
-                      <a:r>
-                        <a:rPr sz="1150" b="0">
-                          <a:solidFill>
-                            <a:srgbClr val="1A2233"/>
-                          </a:solidFill>
-                          <a:latin typeface="Microsoft JhengHei"/>
-                          <a:ea typeface="Microsoft JhengHei"/>
-                          <a:cs typeface="Microsoft JhengHei"/>
-                        </a:rPr>
-                        <a:t>鴻海</a:t>
-                      </a:r>
-                    </a:p>
-                  </a:txBody>
-                  <a:tcPr anchor="ctr" marL="73152" marT="9144" marB="9144">
-                    <a:solidFill>
-                      <a:srgbClr val="FFFFFF"/>
-                    </a:solidFill>
-                  </a:tcPr>
-                </a:tc>
-                <a:tc>
-                  <a:txBody>
-                    <a:bodyPr/>
-                    <a:lstStyle/>
-                    <a:p>
-                      <a:r>
-                        <a:rPr sz="1150" b="0">
-                          <a:solidFill>
-                            <a:srgbClr val="1A2233"/>
-                          </a:solidFill>
-                          <a:latin typeface="Microsoft JhengHei"/>
-                          <a:ea typeface="Microsoft JhengHei"/>
-                          <a:cs typeface="Microsoft JhengHei"/>
-                        </a:rPr>
-                        <a:t>2317</a:t>
-                      </a:r>
-                    </a:p>
-                  </a:txBody>
-                  <a:tcPr anchor="ctr" marL="73152" marT="9144" marB="9144">
-                    <a:solidFill>
-                      <a:srgbClr val="FFFFFF"/>
-                    </a:solidFill>
-                  </a:tcPr>
-                </a:tc>
-                <a:tc>
-                  <a:txBody>
-                    <a:bodyPr/>
-                    <a:lstStyle/>
-                    <a:p>
-                      <a:r>
-                        <a:rPr sz="1150" b="0">
-                          <a:solidFill>
-                            <a:srgbClr val="1A2233"/>
-                          </a:solidFill>
-                          <a:latin typeface="Microsoft JhengHei"/>
-                          <a:ea typeface="Microsoft JhengHei"/>
-                          <a:cs typeface="Microsoft JhengHei"/>
-                        </a:rPr>
-                        <a:t>05/12</a:t>
-                      </a:r>
-                    </a:p>
-                  </a:txBody>
-                  <a:tcPr anchor="ctr" marL="73152" marT="9144" marB="9144">
-                    <a:solidFill>
-                      <a:srgbClr val="FFFFFF"/>
-                    </a:solidFill>
-                  </a:tcPr>
-                </a:tc>
-                <a:tc>
-                  <a:txBody>
-                    <a:bodyPr/>
-                    <a:lstStyle/>
-                    <a:p>
-                      <a:r>
-                        <a:rPr sz="1150" b="1">
-                          <a:solidFill>
-                            <a:srgbClr val="E63946"/>
-                          </a:solidFill>
-                          <a:latin typeface="Microsoft JhengHei"/>
-                          <a:ea typeface="Microsoft JhengHei"/>
-                          <a:cs typeface="Microsoft JhengHei"/>
-                        </a:rPr>
-                        <a:t>駭客攻擊</a:t>
-                      </a:r>
-                    </a:p>
-                  </a:txBody>
-                  <a:tcPr anchor="ctr" marL="73152" marT="9144" marB="9144">
-                    <a:solidFill>
-                      <a:srgbClr val="FFFFFF"/>
-                    </a:solidFill>
-                  </a:tcPr>
-                </a:tc>
-                <a:tc>
-                  <a:txBody>
-                    <a:bodyPr/>
-                    <a:lstStyle/>
-                    <a:p>
-                      <a:r>
-                        <a:rPr sz="1150" b="0">
-                          <a:solidFill>
-                            <a:srgbClr val="1A2233"/>
-                          </a:solidFill>
-                          <a:latin typeface="Microsoft JhengHei"/>
-                          <a:ea typeface="Microsoft JhengHei"/>
-                          <a:cs typeface="Microsoft JhengHei"/>
-                        </a:rPr>
-                        <a:t>目前受影響廠區之生產營運均維持正常。</a:t>
-                      </a:r>
-                    </a:p>
-                  </a:txBody>
-                  <a:tcPr anchor="ctr" marL="73152" marT="9144" marB="9144">
-                    <a:solidFill>
-                      <a:srgbClr val="FFFFFF"/>
-                    </a:solidFill>
-                  </a:tcPr>
-                </a:tc>
-              </a:tr>
-              <a:tr h="384048">
-                <a:tc>
-                  <a:txBody>
-                    <a:bodyPr/>
-                    <a:lstStyle/>
-                    <a:p>
-                      <a:r>
-                        <a:rPr sz="1150" b="0">
-                          <a:solidFill>
-                            <a:srgbClr val="1A2233"/>
-                          </a:solidFill>
-                          <a:latin typeface="Microsoft JhengHei"/>
-                          <a:ea typeface="Microsoft JhengHei"/>
-                          <a:cs typeface="Microsoft JhengHei"/>
-                        </a:rPr>
-                        <a:t>彰源</a:t>
-                      </a:r>
-                    </a:p>
-                  </a:txBody>
-                  <a:tcPr anchor="ctr" marL="73152" marT="9144" marB="9144">
-                    <a:solidFill>
-                      <a:srgbClr val="EEF2F9"/>
-                    </a:solidFill>
-                  </a:tcPr>
-                </a:tc>
-                <a:tc>
-                  <a:txBody>
-                    <a:bodyPr/>
-                    <a:lstStyle/>
-                    <a:p>
-                      <a:r>
-                        <a:rPr sz="1150" b="0">
-                          <a:solidFill>
-                            <a:srgbClr val="1A2233"/>
-                          </a:solidFill>
-                          <a:latin typeface="Microsoft JhengHei"/>
-                          <a:ea typeface="Microsoft JhengHei"/>
-                          <a:cs typeface="Microsoft JhengHei"/>
-                        </a:rPr>
-                        <a:t>2030</a:t>
+                        <a:t>6865</a:t>
                       </a:r>
                     </a:p>
                   </a:txBody>
@@ -4978,7 +5237,7 @@
                           <a:ea typeface="Microsoft JhengHei"/>
                           <a:cs typeface="Microsoft JhengHei"/>
                         </a:rPr>
-                        <a:t>目前評估沒有個資、亦沒有機密或重要的文件資料外洩等情事發生，對本公司…</a:t>
+                        <a:t>目前評估對公司營運無重大影響。</a:t>
                       </a:r>
                     </a:p>
                   </a:txBody>
@@ -4989,7 +5248,7 @@
                   </a:tcPr>
                 </a:tc>
               </a:tr>
-              <a:tr h="384048">
+              <a:tr h="356616">
                 <a:tc>
                   <a:txBody>
                     <a:bodyPr/>
@@ -5004,7 +5263,7 @@
                           <a:ea typeface="Microsoft JhengHei"/>
                           <a:cs typeface="Microsoft JhengHei"/>
                         </a:rPr>
-                        <a:t>偉康科技</a:t>
+                        <a:t>碩天</a:t>
                       </a:r>
                     </a:p>
                   </a:txBody>
@@ -5028,7 +5287,7 @@
                           <a:ea typeface="Microsoft JhengHei"/>
                           <a:cs typeface="Microsoft JhengHei"/>
                         </a:rPr>
-                        <a:t>6865</a:t>
+                        <a:t>3617</a:t>
                       </a:r>
                     </a:p>
                   </a:txBody>
@@ -5052,7 +5311,7 @@
                           <a:ea typeface="Microsoft JhengHei"/>
                           <a:cs typeface="Microsoft JhengHei"/>
                         </a:rPr>
-                        <a:t>05/11</a:t>
+                        <a:t>05/07</a:t>
                       </a:r>
                     </a:p>
                   </a:txBody>
@@ -5070,13 +5329,13 @@
                       <a:r>
                         <a:rPr sz="1150" b="1">
                           <a:solidFill>
-                            <a:srgbClr val="E63946"/>
+                            <a:srgbClr val="F4A261"/>
                           </a:solidFill>
                           <a:latin typeface="Microsoft JhengHei"/>
                           <a:ea typeface="Microsoft JhengHei"/>
                           <a:cs typeface="Microsoft JhengHei"/>
                         </a:rPr>
-                        <a:t>駭客攻擊</a:t>
+                        <a:t>勒索病毒/加密</a:t>
                       </a:r>
                     </a:p>
                   </a:txBody>
@@ -5100,135 +5359,13 @@
                           <a:ea typeface="Microsoft JhengHei"/>
                           <a:cs typeface="Microsoft JhengHei"/>
                         </a:rPr>
-                        <a:t>目前評估對公司營運無重大影響。</a:t>
+                        <a:t>經評估對公司財務、業務及營運皆無重大影響。</a:t>
                       </a:r>
                     </a:p>
                   </a:txBody>
                   <a:tcPr anchor="ctr" marL="73152" marT="9144" marB="9144">
                     <a:solidFill>
                       <a:srgbClr val="FFFFFF"/>
-                    </a:solidFill>
-                  </a:tcPr>
-                </a:tc>
-              </a:tr>
-              <a:tr h="384048">
-                <a:tc>
-                  <a:txBody>
-                    <a:bodyPr/>
-                    <a:lstStyle/>
-                    <a:p>
-                      <a:r>
-                        <a:rPr sz="1150" b="0">
-                          <a:solidFill>
-                            <a:srgbClr val="1A2233"/>
-                          </a:solidFill>
-                          <a:latin typeface="Microsoft JhengHei"/>
-                          <a:ea typeface="Microsoft JhengHei"/>
-                          <a:cs typeface="Microsoft JhengHei"/>
-                        </a:rPr>
-                        <a:t>碩天</a:t>
-                      </a:r>
-                    </a:p>
-                  </a:txBody>
-                  <a:tcPr anchor="ctr" marL="73152" marT="9144" marB="9144">
-                    <a:solidFill>
-                      <a:srgbClr val="EEF2F9"/>
-                    </a:solidFill>
-                  </a:tcPr>
-                </a:tc>
-                <a:tc>
-                  <a:txBody>
-                    <a:bodyPr/>
-                    <a:lstStyle/>
-                    <a:p>
-                      <a:r>
-                        <a:rPr sz="1150" b="0">
-                          <a:solidFill>
-                            <a:srgbClr val="1A2233"/>
-                          </a:solidFill>
-                          <a:latin typeface="Microsoft JhengHei"/>
-                          <a:ea typeface="Microsoft JhengHei"/>
-                          <a:cs typeface="Microsoft JhengHei"/>
-                        </a:rPr>
-                        <a:t>3617</a:t>
-                      </a:r>
-                    </a:p>
-                  </a:txBody>
-                  <a:tcPr anchor="ctr" marL="73152" marT="9144" marB="9144">
-                    <a:solidFill>
-                      <a:srgbClr val="EEF2F9"/>
-                    </a:solidFill>
-                  </a:tcPr>
-                </a:tc>
-                <a:tc>
-                  <a:txBody>
-                    <a:bodyPr/>
-                    <a:lstStyle/>
-                    <a:p>
-                      <a:r>
-                        <a:rPr sz="1150" b="0">
-                          <a:solidFill>
-                            <a:srgbClr val="1A2233"/>
-                          </a:solidFill>
-                          <a:latin typeface="Microsoft JhengHei"/>
-                          <a:ea typeface="Microsoft JhengHei"/>
-                          <a:cs typeface="Microsoft JhengHei"/>
-                        </a:rPr>
-                        <a:t>05/07</a:t>
-                      </a:r>
-                    </a:p>
-                  </a:txBody>
-                  <a:tcPr anchor="ctr" marL="73152" marT="9144" marB="9144">
-                    <a:solidFill>
-                      <a:srgbClr val="EEF2F9"/>
-                    </a:solidFill>
-                  </a:tcPr>
-                </a:tc>
-                <a:tc>
-                  <a:txBody>
-                    <a:bodyPr/>
-                    <a:lstStyle/>
-                    <a:p>
-                      <a:r>
-                        <a:rPr sz="1150" b="1">
-                          <a:solidFill>
-                            <a:srgbClr val="F4A261"/>
-                          </a:solidFill>
-                          <a:latin typeface="Microsoft JhengHei"/>
-                          <a:ea typeface="Microsoft JhengHei"/>
-                          <a:cs typeface="Microsoft JhengHei"/>
-                        </a:rPr>
-                        <a:t>勒索病毒/加密</a:t>
-                      </a:r>
-                    </a:p>
-                  </a:txBody>
-                  <a:tcPr anchor="ctr" marL="73152" marT="9144" marB="9144">
-                    <a:solidFill>
-                      <a:srgbClr val="EEF2F9"/>
-                    </a:solidFill>
-                  </a:tcPr>
-                </a:tc>
-                <a:tc>
-                  <a:txBody>
-                    <a:bodyPr/>
-                    <a:lstStyle/>
-                    <a:p>
-                      <a:r>
-                        <a:rPr sz="1150" b="0">
-                          <a:solidFill>
-                            <a:srgbClr val="1A2233"/>
-                          </a:solidFill>
-                          <a:latin typeface="Microsoft JhengHei"/>
-                          <a:ea typeface="Microsoft JhengHei"/>
-                          <a:cs typeface="Microsoft JhengHei"/>
-                        </a:rPr>
-                        <a:t>經評估對公司財務、業務及營運皆無重大影響。</a:t>
-                      </a:r>
-                    </a:p>
-                  </a:txBody>
-                  <a:tcPr anchor="ctr" marL="73152" marT="9144" marB="9144">
-                    <a:solidFill>
-                      <a:srgbClr val="EEF2F9"/>
                     </a:solidFill>
                   </a:tcPr>
                 </a:tc>
@@ -5550,7 +5687,7 @@
                 <a:ea typeface="Microsoft JhengHei"/>
                 <a:cs typeface="Microsoft JhengHei"/>
               </a:rPr>
-              <a:t>4 起</a:t>
+              <a:t>5 起</a:t>
             </a:r>
           </a:p>
         </p:txBody>
@@ -5587,7 +5724,7 @@
                 <a:ea typeface="Microsoft JhengHei"/>
                 <a:cs typeface="Microsoft JhengHei"/>
               </a:rPr>
-              <a:t>建德工業、鴻海、彰源、偉康科技</a:t>
+              <a:t>巨路、建德工業、鴻海、彰源、偉康科技</a:t>
             </a:r>
           </a:p>
         </p:txBody>
@@ -5788,7 +5925,7 @@
                 <a:ea typeface="Microsoft JhengHei"/>
                 <a:cs typeface="Microsoft JhengHei"/>
               </a:rPr>
-              <a:t>2 起</a:t>
+              <a:t>1 起</a:t>
             </a:r>
           </a:p>
         </p:txBody>
@@ -5825,7 +5962,7 @@
                 <a:ea typeface="Microsoft JhengHei"/>
                 <a:cs typeface="Microsoft JhengHei"/>
               </a:rPr>
-              <a:t>弘塑、碩天</a:t>
+              <a:t>碩天</a:t>
             </a:r>
           </a:p>
         </p:txBody>
@@ -6026,7 +6163,7 @@
                 <a:ea typeface="Microsoft JhengHei"/>
                 <a:cs typeface="Microsoft JhengHei"/>
               </a:rPr>
-              <a:t>2 起</a:t>
+              <a:t>1 起</a:t>
             </a:r>
           </a:p>
         </p:txBody>
@@ -6063,7 +6200,7 @@
                 <a:ea typeface="Microsoft JhengHei"/>
                 <a:cs typeface="Microsoft JhengHei"/>
               </a:rPr>
-              <a:t>數字、永信</a:t>
+              <a:t>永信</a:t>
             </a:r>
           </a:p>
         </p:txBody>
@@ -6101,6 +6238,244 @@
                 <a:cs typeface="Microsoft JhengHei"/>
               </a:rPr>
               <a:t>源自開發流程或委外廠商，須通報並通知當事人</a:t>
+            </a:r>
+          </a:p>
+        </p:txBody>
+      </p:sp>
+      <p:sp>
+        <p:nvSpPr>
+          <p:cNvPr id="24" name="Rounded Rectangle 23"/>
+          <p:cNvSpPr/>
+          <p:nvPr/>
+        </p:nvSpPr>
+        <p:spPr>
+          <a:xfrm>
+            <a:off x="5669280" y="5669279"/>
+            <a:ext cx="6035040" cy="1170432"/>
+          </a:xfrm>
+          <a:prstGeom prst="roundRect">
+            <a:avLst/>
+          </a:prstGeom>
+          <a:solidFill>
+            <a:srgbClr val="FFFFFF"/>
+          </a:solidFill>
+          <a:ln w="12700">
+            <a:solidFill>
+              <a:srgbClr val="DDE3EE"/>
+            </a:solidFill>
+          </a:ln>
+          <a:effectLst/>
+        </p:spPr>
+        <p:style>
+          <a:lnRef idx="1">
+            <a:schemeClr val="accent1"/>
+          </a:lnRef>
+          <a:fillRef idx="3">
+            <a:schemeClr val="accent1"/>
+          </a:fillRef>
+          <a:effectRef idx="2">
+            <a:schemeClr val="accent1"/>
+          </a:effectRef>
+          <a:fontRef idx="minor">
+            <a:schemeClr val="lt1"/>
+          </a:fontRef>
+        </p:style>
+        <p:txBody>
+          <a:bodyPr rtlCol="0" anchor="ctr"/>
+          <a:lstStyle/>
+          <a:p>
+            <a:pPr algn="ctr"/>
+          </a:p>
+        </p:txBody>
+      </p:sp>
+      <p:sp>
+        <p:nvSpPr>
+          <p:cNvPr id="25" name="Rectangle 24"/>
+          <p:cNvSpPr/>
+          <p:nvPr/>
+        </p:nvSpPr>
+        <p:spPr>
+          <a:xfrm>
+            <a:off x="5669280" y="5669279"/>
+            <a:ext cx="109728" cy="1170432"/>
+          </a:xfrm>
+          <a:prstGeom prst="rect">
+            <a:avLst/>
+          </a:prstGeom>
+          <a:solidFill>
+            <a:srgbClr val="5C6679"/>
+          </a:solidFill>
+          <a:ln>
+            <a:noFill/>
+          </a:ln>
+          <a:effectLst/>
+        </p:spPr>
+        <p:style>
+          <a:lnRef idx="1">
+            <a:schemeClr val="accent1"/>
+          </a:lnRef>
+          <a:fillRef idx="3">
+            <a:schemeClr val="accent1"/>
+          </a:fillRef>
+          <a:effectRef idx="2">
+            <a:schemeClr val="accent1"/>
+          </a:effectRef>
+          <a:fontRef idx="minor">
+            <a:schemeClr val="lt1"/>
+          </a:fontRef>
+        </p:style>
+        <p:txBody>
+          <a:bodyPr rtlCol="0" anchor="ctr"/>
+          <a:lstStyle/>
+          <a:p>
+            <a:pPr algn="ctr"/>
+          </a:p>
+        </p:txBody>
+      </p:sp>
+      <p:sp>
+        <p:nvSpPr>
+          <p:cNvPr id="26" name="TextBox 25"/>
+          <p:cNvSpPr txBox="1"/>
+          <p:nvPr/>
+        </p:nvSpPr>
+        <p:spPr>
+          <a:xfrm>
+            <a:off x="5897880" y="5779007"/>
+            <a:ext cx="4206240" cy="365760"/>
+          </a:xfrm>
+          <a:prstGeom prst="rect">
+            <a:avLst/>
+          </a:prstGeom>
+          <a:noFill/>
+        </p:spPr>
+        <p:txBody>
+          <a:bodyPr wrap="square" anchor="ctr" lIns="0" rIns="0" tIns="0" bIns="0">
+            <a:spAutoFit/>
+          </a:bodyPr>
+          <a:lstStyle/>
+          <a:p>
+            <a:pPr algn="l"/>
+            <a:r>
+              <a:rPr sz="1600" b="1">
+                <a:solidFill>
+                  <a:srgbClr val="1A2233"/>
+                </a:solidFill>
+                <a:latin typeface="Microsoft JhengHei"/>
+                <a:ea typeface="Microsoft JhengHei"/>
+                <a:cs typeface="Microsoft JhengHei"/>
+              </a:rPr>
+              <a:t>其他</a:t>
+            </a:r>
+          </a:p>
+        </p:txBody>
+      </p:sp>
+      <p:sp>
+        <p:nvSpPr>
+          <p:cNvPr id="27" name="TextBox 26"/>
+          <p:cNvSpPr txBox="1"/>
+          <p:nvPr/>
+        </p:nvSpPr>
+        <p:spPr>
+          <a:xfrm>
+            <a:off x="10058400" y="5779007"/>
+            <a:ext cx="1463040" cy="365760"/>
+          </a:xfrm>
+          <a:prstGeom prst="rect">
+            <a:avLst/>
+          </a:prstGeom>
+          <a:noFill/>
+        </p:spPr>
+        <p:txBody>
+          <a:bodyPr wrap="square" anchor="ctr" lIns="0" rIns="0" tIns="0" bIns="0">
+            <a:spAutoFit/>
+          </a:bodyPr>
+          <a:lstStyle/>
+          <a:p>
+            <a:pPr algn="r"/>
+            <a:r>
+              <a:rPr sz="1800" b="1">
+                <a:solidFill>
+                  <a:srgbClr val="5C6679"/>
+                </a:solidFill>
+                <a:latin typeface="Microsoft JhengHei"/>
+                <a:ea typeface="Microsoft JhengHei"/>
+                <a:cs typeface="Microsoft JhengHei"/>
+              </a:rPr>
+              <a:t>2 起</a:t>
+            </a:r>
+          </a:p>
+        </p:txBody>
+      </p:sp>
+      <p:sp>
+        <p:nvSpPr>
+          <p:cNvPr id="28" name="TextBox 27"/>
+          <p:cNvSpPr txBox="1"/>
+          <p:nvPr/>
+        </p:nvSpPr>
+        <p:spPr>
+          <a:xfrm>
+            <a:off x="5897880" y="6172199"/>
+            <a:ext cx="5577840" cy="274320"/>
+          </a:xfrm>
+          <a:prstGeom prst="rect">
+            <a:avLst/>
+          </a:prstGeom>
+          <a:noFill/>
+        </p:spPr>
+        <p:txBody>
+          <a:bodyPr wrap="square" anchor="t" lIns="0" rIns="0" tIns="0" bIns="0">
+            <a:spAutoFit/>
+          </a:bodyPr>
+          <a:lstStyle/>
+          <a:p>
+            <a:pPr algn="l"/>
+            <a:r>
+              <a:rPr sz="1150" b="1">
+                <a:solidFill>
+                  <a:srgbClr val="1A2233"/>
+                </a:solidFill>
+                <a:latin typeface="Microsoft JhengHei"/>
+                <a:ea typeface="Microsoft JhengHei"/>
+                <a:cs typeface="Microsoft JhengHei"/>
+              </a:rPr>
+              <a:t>數字、弘塑</a:t>
+            </a:r>
+          </a:p>
+        </p:txBody>
+      </p:sp>
+      <p:sp>
+        <p:nvSpPr>
+          <p:cNvPr id="29" name="TextBox 28"/>
+          <p:cNvSpPr txBox="1"/>
+          <p:nvPr/>
+        </p:nvSpPr>
+        <p:spPr>
+          <a:xfrm>
+            <a:off x="5897880" y="6437375"/>
+            <a:ext cx="5669280" cy="329184"/>
+          </a:xfrm>
+          <a:prstGeom prst="rect">
+            <a:avLst/>
+          </a:prstGeom>
+          <a:noFill/>
+        </p:spPr>
+        <p:txBody>
+          <a:bodyPr wrap="square" anchor="t" lIns="0" rIns="0" tIns="0" bIns="0">
+            <a:spAutoFit/>
+          </a:bodyPr>
+          <a:lstStyle/>
+          <a:p>
+            <a:pPr algn="l"/>
+            <a:r>
+              <a:rPr sz="1100" b="0">
+                <a:solidFill>
+                  <a:srgbClr val="5C6679"/>
+                </a:solidFill>
+                <a:latin typeface="Microsoft JhengHei"/>
+                <a:ea typeface="Microsoft JhengHei"/>
+                <a:cs typeface="Microsoft JhengHei"/>
+              </a:rPr>
+              <a:t>其他資安相關事件</a:t>
             </a:r>
           </a:p>
         </p:txBody>
@@ -6251,7 +6626,7 @@
         </p:nvGraphicFramePr>
         <p:xfrm>
           <a:off x="548640" y="1600200"/>
-          <a:ext cx="10789920" cy="4114800"/>
+          <a:ext cx="10789920" cy="4480560"/>
         </p:xfrm>
         <a:graphic>
           <a:graphicData uri="http://schemas.openxmlformats.org/drawingml/2006/table">
@@ -6266,7 +6641,7 @@
                 <a:gridCol w="3383280"/>
                 <a:gridCol w="2606040"/>
               </a:tblGrid>
-              <a:tr h="457200">
+              <a:tr h="448056">
                 <a:tc>
                   <a:txBody>
                     <a:bodyPr/>
@@ -6388,7 +6763,7 @@
                   </a:tcPr>
                 </a:tc>
               </a:tr>
-              <a:tr h="457200">
+              <a:tr h="448056">
                 <a:tc>
                   <a:txBody>
                     <a:bodyPr/>
@@ -6403,7 +6778,7 @@
                           <a:ea typeface="Microsoft JhengHei"/>
                           <a:cs typeface="Microsoft JhengHei"/>
                         </a:rPr>
-                        <a:t>數字</a:t>
+                        <a:t>巨路</a:t>
                       </a:r>
                     </a:p>
                   </a:txBody>
@@ -6427,7 +6802,495 @@
                           <a:ea typeface="Microsoft JhengHei"/>
                           <a:cs typeface="Microsoft JhengHei"/>
                         </a:rPr>
+                        <a:t>6192</a:t>
+                      </a:r>
+                    </a:p>
+                  </a:txBody>
+                  <a:tcPr anchor="ctr" marL="73152" marT="9144" marB="9144">
+                    <a:solidFill>
+                      <a:srgbClr val="FFFFFF"/>
+                    </a:solidFill>
+                  </a:tcPr>
+                </a:tc>
+                <a:tc>
+                  <a:txBody>
+                    <a:bodyPr/>
+                    <a:lstStyle/>
+                    <a:p>
+                      <a:r>
+                        <a:rPr sz="1150" b="1">
+                          <a:solidFill>
+                            <a:srgbClr val="E63946"/>
+                          </a:solidFill>
+                          <a:latin typeface="Microsoft JhengHei"/>
+                          <a:ea typeface="Microsoft JhengHei"/>
+                          <a:cs typeface="Microsoft JhengHei"/>
+                        </a:rPr>
+                        <a:t>駭客攻擊</a:t>
+                      </a:r>
+                    </a:p>
+                  </a:txBody>
+                  <a:tcPr anchor="ctr" marL="73152" marT="9144" marB="9144">
+                    <a:solidFill>
+                      <a:srgbClr val="FFFFFF"/>
+                    </a:solidFill>
+                  </a:tcPr>
+                </a:tc>
+                <a:tc>
+                  <a:txBody>
+                    <a:bodyPr/>
+                    <a:lstStyle/>
+                    <a:p>
+                      <a:r>
+                        <a:rPr sz="1150" b="0">
+                          <a:solidFill>
+                            <a:srgbClr val="1A2233"/>
+                          </a:solidFill>
+                          <a:latin typeface="Microsoft JhengHei"/>
+                          <a:ea typeface="Microsoft JhengHei"/>
+                          <a:cs typeface="Microsoft JhengHei"/>
+                        </a:rPr>
+                        <a:t>—</a:t>
+                      </a:r>
+                    </a:p>
+                  </a:txBody>
+                  <a:tcPr anchor="ctr" marL="73152" marT="9144" marB="9144">
+                    <a:solidFill>
+                      <a:srgbClr val="FFFFFF"/>
+                    </a:solidFill>
+                  </a:tcPr>
+                </a:tc>
+                <a:tc>
+                  <a:txBody>
+                    <a:bodyPr/>
+                    <a:lstStyle/>
+                    <a:p>
+                      <a:r>
+                        <a:rPr sz="1150" b="0">
+                          <a:solidFill>
+                            <a:srgbClr val="1A2233"/>
+                          </a:solidFill>
+                          <a:latin typeface="Microsoft JhengHei"/>
+                          <a:ea typeface="Microsoft JhengHei"/>
+                          <a:cs typeface="Microsoft JhengHei"/>
+                        </a:rPr>
+                        <a:t>—</a:t>
+                      </a:r>
+                    </a:p>
+                  </a:txBody>
+                  <a:tcPr anchor="ctr" marL="73152" marT="9144" marB="9144">
+                    <a:solidFill>
+                      <a:srgbClr val="FFFFFF"/>
+                    </a:solidFill>
+                  </a:tcPr>
+                </a:tc>
+              </a:tr>
+              <a:tr h="448056">
+                <a:tc>
+                  <a:txBody>
+                    <a:bodyPr/>
+                    <a:lstStyle/>
+                    <a:p>
+                      <a:r>
+                        <a:rPr sz="1150" b="0">
+                          <a:solidFill>
+                            <a:srgbClr val="1A2233"/>
+                          </a:solidFill>
+                          <a:latin typeface="Microsoft JhengHei"/>
+                          <a:ea typeface="Microsoft JhengHei"/>
+                          <a:cs typeface="Microsoft JhengHei"/>
+                        </a:rPr>
+                        <a:t>數字</a:t>
+                      </a:r>
+                    </a:p>
+                  </a:txBody>
+                  <a:tcPr anchor="ctr" marL="73152" marT="9144" marB="9144">
+                    <a:solidFill>
+                      <a:srgbClr val="EEF2F9"/>
+                    </a:solidFill>
+                  </a:tcPr>
+                </a:tc>
+                <a:tc>
+                  <a:txBody>
+                    <a:bodyPr/>
+                    <a:lstStyle/>
+                    <a:p>
+                      <a:r>
+                        <a:rPr sz="1150" b="0">
+                          <a:solidFill>
+                            <a:srgbClr val="1A2233"/>
+                          </a:solidFill>
+                          <a:latin typeface="Microsoft JhengHei"/>
+                          <a:ea typeface="Microsoft JhengHei"/>
+                          <a:cs typeface="Microsoft JhengHei"/>
+                        </a:rPr>
                         <a:t>5287</a:t>
+                      </a:r>
+                    </a:p>
+                  </a:txBody>
+                  <a:tcPr anchor="ctr" marL="73152" marT="9144" marB="9144">
+                    <a:solidFill>
+                      <a:srgbClr val="EEF2F9"/>
+                    </a:solidFill>
+                  </a:tcPr>
+                </a:tc>
+                <a:tc>
+                  <a:txBody>
+                    <a:bodyPr/>
+                    <a:lstStyle/>
+                    <a:p>
+                      <a:r>
+                        <a:rPr sz="1150" b="1">
+                          <a:solidFill>
+                            <a:srgbClr val="5C6679"/>
+                          </a:solidFill>
+                          <a:latin typeface="Microsoft JhengHei"/>
+                          <a:ea typeface="Microsoft JhengHei"/>
+                          <a:cs typeface="Microsoft JhengHei"/>
+                        </a:rPr>
+                        <a:t>其他</a:t>
+                      </a:r>
+                    </a:p>
+                  </a:txBody>
+                  <a:tcPr anchor="ctr" marL="73152" marT="9144" marB="9144">
+                    <a:solidFill>
+                      <a:srgbClr val="EEF2F9"/>
+                    </a:solidFill>
+                  </a:tcPr>
+                </a:tc>
+                <a:tc>
+                  <a:txBody>
+                    <a:bodyPr/>
+                    <a:lstStyle/>
+                    <a:p>
+                      <a:r>
+                        <a:rPr sz="1150" b="0">
+                          <a:solidFill>
+                            <a:srgbClr val="1A2233"/>
+                          </a:solidFill>
+                          <a:latin typeface="Microsoft JhengHei"/>
+                          <a:ea typeface="Microsoft JhengHei"/>
+                          <a:cs typeface="Microsoft JhengHei"/>
+                        </a:rPr>
+                        <a:t>—</a:t>
+                      </a:r>
+                    </a:p>
+                  </a:txBody>
+                  <a:tcPr anchor="ctr" marL="73152" marT="9144" marB="9144">
+                    <a:solidFill>
+                      <a:srgbClr val="EEF2F9"/>
+                    </a:solidFill>
+                  </a:tcPr>
+                </a:tc>
+                <a:tc>
+                  <a:txBody>
+                    <a:bodyPr/>
+                    <a:lstStyle/>
+                    <a:p>
+                      <a:r>
+                        <a:rPr sz="1150" b="0">
+                          <a:solidFill>
+                            <a:srgbClr val="1A2233"/>
+                          </a:solidFill>
+                          <a:latin typeface="Microsoft JhengHei"/>
+                          <a:ea typeface="Microsoft JhengHei"/>
+                          <a:cs typeface="Microsoft JhengHei"/>
+                        </a:rPr>
+                        <a:t>—</a:t>
+                      </a:r>
+                    </a:p>
+                  </a:txBody>
+                  <a:tcPr anchor="ctr" marL="73152" marT="9144" marB="9144">
+                    <a:solidFill>
+                      <a:srgbClr val="EEF2F9"/>
+                    </a:solidFill>
+                  </a:tcPr>
+                </a:tc>
+              </a:tr>
+              <a:tr h="448056">
+                <a:tc>
+                  <a:txBody>
+                    <a:bodyPr/>
+                    <a:lstStyle/>
+                    <a:p>
+                      <a:r>
+                        <a:rPr sz="1150" b="0">
+                          <a:solidFill>
+                            <a:srgbClr val="1A2233"/>
+                          </a:solidFill>
+                          <a:latin typeface="Microsoft JhengHei"/>
+                          <a:ea typeface="Microsoft JhengHei"/>
+                          <a:cs typeface="Microsoft JhengHei"/>
+                        </a:rPr>
+                        <a:t>弘塑</a:t>
+                      </a:r>
+                    </a:p>
+                  </a:txBody>
+                  <a:tcPr anchor="ctr" marL="73152" marT="9144" marB="9144">
+                    <a:solidFill>
+                      <a:srgbClr val="FFFFFF"/>
+                    </a:solidFill>
+                  </a:tcPr>
+                </a:tc>
+                <a:tc>
+                  <a:txBody>
+                    <a:bodyPr/>
+                    <a:lstStyle/>
+                    <a:p>
+                      <a:r>
+                        <a:rPr sz="1150" b="0">
+                          <a:solidFill>
+                            <a:srgbClr val="1A2233"/>
+                          </a:solidFill>
+                          <a:latin typeface="Microsoft JhengHei"/>
+                          <a:ea typeface="Microsoft JhengHei"/>
+                          <a:cs typeface="Microsoft JhengHei"/>
+                        </a:rPr>
+                        <a:t>3131</a:t>
+                      </a:r>
+                    </a:p>
+                  </a:txBody>
+                  <a:tcPr anchor="ctr" marL="73152" marT="9144" marB="9144">
+                    <a:solidFill>
+                      <a:srgbClr val="FFFFFF"/>
+                    </a:solidFill>
+                  </a:tcPr>
+                </a:tc>
+                <a:tc>
+                  <a:txBody>
+                    <a:bodyPr/>
+                    <a:lstStyle/>
+                    <a:p>
+                      <a:r>
+                        <a:rPr sz="1150" b="1">
+                          <a:solidFill>
+                            <a:srgbClr val="5C6679"/>
+                          </a:solidFill>
+                          <a:latin typeface="Microsoft JhengHei"/>
+                          <a:ea typeface="Microsoft JhengHei"/>
+                          <a:cs typeface="Microsoft JhengHei"/>
+                        </a:rPr>
+                        <a:t>其他</a:t>
+                      </a:r>
+                    </a:p>
+                  </a:txBody>
+                  <a:tcPr anchor="ctr" marL="73152" marT="9144" marB="9144">
+                    <a:solidFill>
+                      <a:srgbClr val="FFFFFF"/>
+                    </a:solidFill>
+                  </a:tcPr>
+                </a:tc>
+                <a:tc>
+                  <a:txBody>
+                    <a:bodyPr/>
+                    <a:lstStyle/>
+                    <a:p>
+                      <a:r>
+                        <a:rPr sz="1150" b="0">
+                          <a:solidFill>
+                            <a:srgbClr val="1A2233"/>
+                          </a:solidFill>
+                          <a:latin typeface="Microsoft JhengHei"/>
+                          <a:ea typeface="Microsoft JhengHei"/>
+                          <a:cs typeface="Microsoft JhengHei"/>
+                        </a:rPr>
+                        <a:t>—</a:t>
+                      </a:r>
+                    </a:p>
+                  </a:txBody>
+                  <a:tcPr anchor="ctr" marL="73152" marT="9144" marB="9144">
+                    <a:solidFill>
+                      <a:srgbClr val="FFFFFF"/>
+                    </a:solidFill>
+                  </a:tcPr>
+                </a:tc>
+                <a:tc>
+                  <a:txBody>
+                    <a:bodyPr/>
+                    <a:lstStyle/>
+                    <a:p>
+                      <a:r>
+                        <a:rPr sz="1150" b="0">
+                          <a:solidFill>
+                            <a:srgbClr val="1A2233"/>
+                          </a:solidFill>
+                          <a:latin typeface="Microsoft JhengHei"/>
+                          <a:ea typeface="Microsoft JhengHei"/>
+                          <a:cs typeface="Microsoft JhengHei"/>
+                        </a:rPr>
+                        <a:t>—</a:t>
+                      </a:r>
+                    </a:p>
+                  </a:txBody>
+                  <a:tcPr anchor="ctr" marL="73152" marT="9144" marB="9144">
+                    <a:solidFill>
+                      <a:srgbClr val="FFFFFF"/>
+                    </a:solidFill>
+                  </a:tcPr>
+                </a:tc>
+              </a:tr>
+              <a:tr h="448056">
+                <a:tc>
+                  <a:txBody>
+                    <a:bodyPr/>
+                    <a:lstStyle/>
+                    <a:p>
+                      <a:r>
+                        <a:rPr sz="1150" b="0">
+                          <a:solidFill>
+                            <a:srgbClr val="1A2233"/>
+                          </a:solidFill>
+                          <a:latin typeface="Microsoft JhengHei"/>
+                          <a:ea typeface="Microsoft JhengHei"/>
+                          <a:cs typeface="Microsoft JhengHei"/>
+                        </a:rPr>
+                        <a:t>建德工業</a:t>
+                      </a:r>
+                    </a:p>
+                  </a:txBody>
+                  <a:tcPr anchor="ctr" marL="73152" marT="9144" marB="9144">
+                    <a:solidFill>
+                      <a:srgbClr val="EEF2F9"/>
+                    </a:solidFill>
+                  </a:tcPr>
+                </a:tc>
+                <a:tc>
+                  <a:txBody>
+                    <a:bodyPr/>
+                    <a:lstStyle/>
+                    <a:p>
+                      <a:r>
+                        <a:rPr sz="1150" b="0">
+                          <a:solidFill>
+                            <a:srgbClr val="1A2233"/>
+                          </a:solidFill>
+                          <a:latin typeface="Microsoft JhengHei"/>
+                          <a:ea typeface="Microsoft JhengHei"/>
+                          <a:cs typeface="Microsoft JhengHei"/>
+                        </a:rPr>
+                        <a:t>6606</a:t>
+                      </a:r>
+                    </a:p>
+                  </a:txBody>
+                  <a:tcPr anchor="ctr" marL="73152" marT="9144" marB="9144">
+                    <a:solidFill>
+                      <a:srgbClr val="EEF2F9"/>
+                    </a:solidFill>
+                  </a:tcPr>
+                </a:tc>
+                <a:tc>
+                  <a:txBody>
+                    <a:bodyPr/>
+                    <a:lstStyle/>
+                    <a:p>
+                      <a:r>
+                        <a:rPr sz="1150" b="1">
+                          <a:solidFill>
+                            <a:srgbClr val="E63946"/>
+                          </a:solidFill>
+                          <a:latin typeface="Microsoft JhengHei"/>
+                          <a:ea typeface="Microsoft JhengHei"/>
+                          <a:cs typeface="Microsoft JhengHei"/>
+                        </a:rPr>
+                        <a:t>駭客攻擊</a:t>
+                      </a:r>
+                    </a:p>
+                  </a:txBody>
+                  <a:tcPr anchor="ctr" marL="73152" marT="9144" marB="9144">
+                    <a:solidFill>
+                      <a:srgbClr val="EEF2F9"/>
+                    </a:solidFill>
+                  </a:tcPr>
+                </a:tc>
+                <a:tc>
+                  <a:txBody>
+                    <a:bodyPr/>
+                    <a:lstStyle/>
+                    <a:p>
+                      <a:r>
+                        <a:rPr sz="1150" b="0">
+                          <a:solidFill>
+                            <a:srgbClr val="1A2233"/>
+                          </a:solidFill>
+                          <a:latin typeface="Microsoft JhengHei"/>
+                          <a:ea typeface="Microsoft JhengHei"/>
+                          <a:cs typeface="Microsoft JhengHei"/>
+                        </a:rPr>
+                        <a:t>—</a:t>
+                      </a:r>
+                    </a:p>
+                  </a:txBody>
+                  <a:tcPr anchor="ctr" marL="73152" marT="9144" marB="9144">
+                    <a:solidFill>
+                      <a:srgbClr val="EEF2F9"/>
+                    </a:solidFill>
+                  </a:tcPr>
+                </a:tc>
+                <a:tc>
+                  <a:txBody>
+                    <a:bodyPr/>
+                    <a:lstStyle/>
+                    <a:p>
+                      <a:r>
+                        <a:rPr sz="1150" b="0">
+                          <a:solidFill>
+                            <a:srgbClr val="1A2233"/>
+                          </a:solidFill>
+                          <a:latin typeface="Microsoft JhengHei"/>
+                          <a:ea typeface="Microsoft JhengHei"/>
+                          <a:cs typeface="Microsoft JhengHei"/>
+                        </a:rPr>
+                        <a:t>—</a:t>
+                      </a:r>
+                    </a:p>
+                  </a:txBody>
+                  <a:tcPr anchor="ctr" marL="73152" marT="9144" marB="9144">
+                    <a:solidFill>
+                      <a:srgbClr val="EEF2F9"/>
+                    </a:solidFill>
+                  </a:tcPr>
+                </a:tc>
+              </a:tr>
+              <a:tr h="448056">
+                <a:tc>
+                  <a:txBody>
+                    <a:bodyPr/>
+                    <a:lstStyle/>
+                    <a:p>
+                      <a:r>
+                        <a:rPr sz="1150" b="0">
+                          <a:solidFill>
+                            <a:srgbClr val="1A2233"/>
+                          </a:solidFill>
+                          <a:latin typeface="Microsoft JhengHei"/>
+                          <a:ea typeface="Microsoft JhengHei"/>
+                          <a:cs typeface="Microsoft JhengHei"/>
+                        </a:rPr>
+                        <a:t>永信</a:t>
+                      </a:r>
+                    </a:p>
+                  </a:txBody>
+                  <a:tcPr anchor="ctr" marL="73152" marT="9144" marB="9144">
+                    <a:solidFill>
+                      <a:srgbClr val="FFFFFF"/>
+                    </a:solidFill>
+                  </a:tcPr>
+                </a:tc>
+                <a:tc>
+                  <a:txBody>
+                    <a:bodyPr/>
+                    <a:lstStyle/>
+                    <a:p>
+                      <a:r>
+                        <a:rPr sz="1150" b="0">
+                          <a:solidFill>
+                            <a:srgbClr val="1A2233"/>
+                          </a:solidFill>
+                          <a:latin typeface="Microsoft JhengHei"/>
+                          <a:ea typeface="Microsoft JhengHei"/>
+                          <a:cs typeface="Microsoft JhengHei"/>
+                        </a:rPr>
+                        <a:t>3705</a:t>
                       </a:r>
                     </a:p>
                   </a:txBody>
@@ -6499,7 +7362,7 @@
                           <a:ea typeface="Microsoft JhengHei"/>
                           <a:cs typeface="Microsoft JhengHei"/>
                         </a:rPr>
-                        <a:t>羅瑞芝、余聖河</a:t>
+                        <a:t>趙敏如、吳佳翰</a:t>
                       </a:r>
                     </a:p>
                   </a:txBody>
@@ -6510,7 +7373,7 @@
                   </a:tcPr>
                 </a:tc>
               </a:tr>
-              <a:tr h="457200">
+              <a:tr h="448056">
                 <a:tc>
                   <a:txBody>
                     <a:bodyPr/>
@@ -6525,7 +7388,7 @@
                           <a:ea typeface="Microsoft JhengHei"/>
                           <a:cs typeface="Microsoft JhengHei"/>
                         </a:rPr>
-                        <a:t>弘塑</a:t>
+                        <a:t>鴻海</a:t>
                       </a:r>
                     </a:p>
                   </a:txBody>
@@ -6549,7 +7412,7 @@
                           <a:ea typeface="Microsoft JhengHei"/>
                           <a:cs typeface="Microsoft JhengHei"/>
                         </a:rPr>
-                        <a:t>3131</a:t>
+                        <a:t>2317</a:t>
                       </a:r>
                     </a:p>
                   </a:txBody>
@@ -6567,13 +7430,13 @@
                       <a:r>
                         <a:rPr sz="1150" b="1">
                           <a:solidFill>
-                            <a:srgbClr val="F4A261"/>
+                            <a:srgbClr val="E63946"/>
                           </a:solidFill>
                           <a:latin typeface="Microsoft JhengHei"/>
                           <a:ea typeface="Microsoft JhengHei"/>
                           <a:cs typeface="Microsoft JhengHei"/>
                         </a:rPr>
-                        <a:t>勒索病毒/加密</a:t>
+                        <a:t>駭客攻擊</a:t>
                       </a:r>
                     </a:p>
                   </a:txBody>
@@ -6621,7 +7484,7 @@
                           <a:ea typeface="Microsoft JhengHei"/>
                           <a:cs typeface="Microsoft JhengHei"/>
                         </a:rPr>
-                        <a:t>李典易、蔣承翰</a:t>
+                        <a:t>徐聖忠、徐潔如</a:t>
                       </a:r>
                     </a:p>
                   </a:txBody>
@@ -6632,7 +7495,7 @@
                   </a:tcPr>
                 </a:tc>
               </a:tr>
-              <a:tr h="457200">
+              <a:tr h="448056">
                 <a:tc>
                   <a:txBody>
                     <a:bodyPr/>
@@ -6647,7 +7510,7 @@
                           <a:ea typeface="Microsoft JhengHei"/>
                           <a:cs typeface="Microsoft JhengHei"/>
                         </a:rPr>
-                        <a:t>建德工業</a:t>
+                        <a:t>彰源</a:t>
                       </a:r>
                     </a:p>
                   </a:txBody>
@@ -6671,7 +7534,7 @@
                           <a:ea typeface="Microsoft JhengHei"/>
                           <a:cs typeface="Microsoft JhengHei"/>
                         </a:rPr>
-                        <a:t>6606</a:t>
+                        <a:t>2030</a:t>
                       </a:r>
                     </a:p>
                   </a:txBody>
@@ -6719,7 +7582,7 @@
                           <a:ea typeface="Microsoft JhengHei"/>
                           <a:cs typeface="Microsoft JhengHei"/>
                         </a:rPr>
-                        <a:t>資誠聯合會計師事務所</a:t>
+                        <a:t>勤業眾信聯合會計師事務所</a:t>
                       </a:r>
                     </a:p>
                   </a:txBody>
@@ -6743,7 +7606,7 @@
                           <a:ea typeface="Microsoft JhengHei"/>
                           <a:cs typeface="Microsoft JhengHei"/>
                         </a:rPr>
-                        <a:t>林秀珊、吳建志</a:t>
+                        <a:t>許瑞隆、吳少君</a:t>
                       </a:r>
                     </a:p>
                   </a:txBody>
@@ -6754,7 +7617,7 @@
                   </a:tcPr>
                 </a:tc>
               </a:tr>
-              <a:tr h="457200">
+              <a:tr h="448056">
                 <a:tc>
                   <a:txBody>
                     <a:bodyPr/>
@@ -6769,7 +7632,7 @@
                           <a:ea typeface="Microsoft JhengHei"/>
                           <a:cs typeface="Microsoft JhengHei"/>
                         </a:rPr>
-                        <a:t>永信</a:t>
+                        <a:t>偉康科技</a:t>
                       </a:r>
                     </a:p>
                   </a:txBody>
@@ -6793,7 +7656,7 @@
                           <a:ea typeface="Microsoft JhengHei"/>
                           <a:cs typeface="Microsoft JhengHei"/>
                         </a:rPr>
-                        <a:t>3705</a:t>
+                        <a:t>6865</a:t>
                       </a:r>
                     </a:p>
                   </a:txBody>
@@ -6811,13 +7674,13 @@
                       <a:r>
                         <a:rPr sz="1150" b="1">
                           <a:solidFill>
-                            <a:srgbClr val="27A6C4"/>
+                            <a:srgbClr val="E63946"/>
                           </a:solidFill>
                           <a:latin typeface="Microsoft JhengHei"/>
                           <a:ea typeface="Microsoft JhengHei"/>
                           <a:cs typeface="Microsoft JhengHei"/>
                         </a:rPr>
-                        <a:t>個資外洩</a:t>
+                        <a:t>駭客攻擊</a:t>
                       </a:r>
                     </a:p>
                   </a:txBody>
@@ -6865,7 +7728,7 @@
                           <a:ea typeface="Microsoft JhengHei"/>
                           <a:cs typeface="Microsoft JhengHei"/>
                         </a:rPr>
-                        <a:t>趙敏如、吳佳翰</a:t>
+                        <a:t>洪士剛、莊鈞維</a:t>
                       </a:r>
                     </a:p>
                   </a:txBody>
@@ -6876,7 +7739,7 @@
                   </a:tcPr>
                 </a:tc>
               </a:tr>
-              <a:tr h="457200">
+              <a:tr h="448056">
                 <a:tc>
                   <a:txBody>
                     <a:bodyPr/>
@@ -6891,7 +7754,7 @@
                           <a:ea typeface="Microsoft JhengHei"/>
                           <a:cs typeface="Microsoft JhengHei"/>
                         </a:rPr>
-                        <a:t>鴻海</a:t>
+                        <a:t>碩天</a:t>
                       </a:r>
                     </a:p>
                   </a:txBody>
@@ -6915,7 +7778,7 @@
                           <a:ea typeface="Microsoft JhengHei"/>
                           <a:cs typeface="Microsoft JhengHei"/>
                         </a:rPr>
-                        <a:t>2317</a:t>
+                        <a:t>3617</a:t>
                       </a:r>
                     </a:p>
                   </a:txBody>
@@ -6933,13 +7796,13 @@
                       <a:r>
                         <a:rPr sz="1150" b="1">
                           <a:solidFill>
-                            <a:srgbClr val="E63946"/>
+                            <a:srgbClr val="F4A261"/>
                           </a:solidFill>
                           <a:latin typeface="Microsoft JhengHei"/>
                           <a:ea typeface="Microsoft JhengHei"/>
                           <a:cs typeface="Microsoft JhengHei"/>
                         </a:rPr>
-                        <a:t>駭客攻擊</a:t>
+                        <a:t>勒索病毒/加密</a:t>
                       </a:r>
                     </a:p>
                   </a:txBody>
@@ -6963,7 +7826,7 @@
                           <a:ea typeface="Microsoft JhengHei"/>
                           <a:cs typeface="Microsoft JhengHei"/>
                         </a:rPr>
-                        <a:t>資誠聯合會計師事務所</a:t>
+                        <a:t>勤業眾信聯合會計師事務所</a:t>
                       </a:r>
                     </a:p>
                   </a:txBody>
@@ -6987,379 +7850,13 @@
                           <a:ea typeface="Microsoft JhengHei"/>
                           <a:cs typeface="Microsoft JhengHei"/>
                         </a:rPr>
-                        <a:t>徐聖忠、徐潔如</a:t>
+                        <a:t>張至誼、鄭淂蓁</a:t>
                       </a:r>
                     </a:p>
                   </a:txBody>
                   <a:tcPr anchor="ctr" marL="73152" marT="9144" marB="9144">
                     <a:solidFill>
                       <a:srgbClr val="FFFFFF"/>
-                    </a:solidFill>
-                  </a:tcPr>
-                </a:tc>
-              </a:tr>
-              <a:tr h="457200">
-                <a:tc>
-                  <a:txBody>
-                    <a:bodyPr/>
-                    <a:lstStyle/>
-                    <a:p>
-                      <a:r>
-                        <a:rPr sz="1150" b="0">
-                          <a:solidFill>
-                            <a:srgbClr val="1A2233"/>
-                          </a:solidFill>
-                          <a:latin typeface="Microsoft JhengHei"/>
-                          <a:ea typeface="Microsoft JhengHei"/>
-                          <a:cs typeface="Microsoft JhengHei"/>
-                        </a:rPr>
-                        <a:t>彰源</a:t>
-                      </a:r>
-                    </a:p>
-                  </a:txBody>
-                  <a:tcPr anchor="ctr" marL="73152" marT="9144" marB="9144">
-                    <a:solidFill>
-                      <a:srgbClr val="EEF2F9"/>
-                    </a:solidFill>
-                  </a:tcPr>
-                </a:tc>
-                <a:tc>
-                  <a:txBody>
-                    <a:bodyPr/>
-                    <a:lstStyle/>
-                    <a:p>
-                      <a:r>
-                        <a:rPr sz="1150" b="0">
-                          <a:solidFill>
-                            <a:srgbClr val="1A2233"/>
-                          </a:solidFill>
-                          <a:latin typeface="Microsoft JhengHei"/>
-                          <a:ea typeface="Microsoft JhengHei"/>
-                          <a:cs typeface="Microsoft JhengHei"/>
-                        </a:rPr>
-                        <a:t>2030</a:t>
-                      </a:r>
-                    </a:p>
-                  </a:txBody>
-                  <a:tcPr anchor="ctr" marL="73152" marT="9144" marB="9144">
-                    <a:solidFill>
-                      <a:srgbClr val="EEF2F9"/>
-                    </a:solidFill>
-                  </a:tcPr>
-                </a:tc>
-                <a:tc>
-                  <a:txBody>
-                    <a:bodyPr/>
-                    <a:lstStyle/>
-                    <a:p>
-                      <a:r>
-                        <a:rPr sz="1150" b="1">
-                          <a:solidFill>
-                            <a:srgbClr val="E63946"/>
-                          </a:solidFill>
-                          <a:latin typeface="Microsoft JhengHei"/>
-                          <a:ea typeface="Microsoft JhengHei"/>
-                          <a:cs typeface="Microsoft JhengHei"/>
-                        </a:rPr>
-                        <a:t>駭客攻擊</a:t>
-                      </a:r>
-                    </a:p>
-                  </a:txBody>
-                  <a:tcPr anchor="ctr" marL="73152" marT="9144" marB="9144">
-                    <a:solidFill>
-                      <a:srgbClr val="EEF2F9"/>
-                    </a:solidFill>
-                  </a:tcPr>
-                </a:tc>
-                <a:tc>
-                  <a:txBody>
-                    <a:bodyPr/>
-                    <a:lstStyle/>
-                    <a:p>
-                      <a:r>
-                        <a:rPr sz="1150" b="0">
-                          <a:solidFill>
-                            <a:srgbClr val="1A2233"/>
-                          </a:solidFill>
-                          <a:latin typeface="Microsoft JhengHei"/>
-                          <a:ea typeface="Microsoft JhengHei"/>
-                          <a:cs typeface="Microsoft JhengHei"/>
-                        </a:rPr>
-                        <a:t>勤業眾信聯合會計師事務所</a:t>
-                      </a:r>
-                    </a:p>
-                  </a:txBody>
-                  <a:tcPr anchor="ctr" marL="73152" marT="9144" marB="9144">
-                    <a:solidFill>
-                      <a:srgbClr val="EEF2F9"/>
-                    </a:solidFill>
-                  </a:tcPr>
-                </a:tc>
-                <a:tc>
-                  <a:txBody>
-                    <a:bodyPr/>
-                    <a:lstStyle/>
-                    <a:p>
-                      <a:r>
-                        <a:rPr sz="1150" b="0">
-                          <a:solidFill>
-                            <a:srgbClr val="1A2233"/>
-                          </a:solidFill>
-                          <a:latin typeface="Microsoft JhengHei"/>
-                          <a:ea typeface="Microsoft JhengHei"/>
-                          <a:cs typeface="Microsoft JhengHei"/>
-                        </a:rPr>
-                        <a:t>許瑞隆、吳少君</a:t>
-                      </a:r>
-                    </a:p>
-                  </a:txBody>
-                  <a:tcPr anchor="ctr" marL="73152" marT="9144" marB="9144">
-                    <a:solidFill>
-                      <a:srgbClr val="EEF2F9"/>
-                    </a:solidFill>
-                  </a:tcPr>
-                </a:tc>
-              </a:tr>
-              <a:tr h="457200">
-                <a:tc>
-                  <a:txBody>
-                    <a:bodyPr/>
-                    <a:lstStyle/>
-                    <a:p>
-                      <a:r>
-                        <a:rPr sz="1150" b="0">
-                          <a:solidFill>
-                            <a:srgbClr val="1A2233"/>
-                          </a:solidFill>
-                          <a:latin typeface="Microsoft JhengHei"/>
-                          <a:ea typeface="Microsoft JhengHei"/>
-                          <a:cs typeface="Microsoft JhengHei"/>
-                        </a:rPr>
-                        <a:t>偉康科技</a:t>
-                      </a:r>
-                    </a:p>
-                  </a:txBody>
-                  <a:tcPr anchor="ctr" marL="73152" marT="9144" marB="9144">
-                    <a:solidFill>
-                      <a:srgbClr val="FFFFFF"/>
-                    </a:solidFill>
-                  </a:tcPr>
-                </a:tc>
-                <a:tc>
-                  <a:txBody>
-                    <a:bodyPr/>
-                    <a:lstStyle/>
-                    <a:p>
-                      <a:r>
-                        <a:rPr sz="1150" b="0">
-                          <a:solidFill>
-                            <a:srgbClr val="1A2233"/>
-                          </a:solidFill>
-                          <a:latin typeface="Microsoft JhengHei"/>
-                          <a:ea typeface="Microsoft JhengHei"/>
-                          <a:cs typeface="Microsoft JhengHei"/>
-                        </a:rPr>
-                        <a:t>6865</a:t>
-                      </a:r>
-                    </a:p>
-                  </a:txBody>
-                  <a:tcPr anchor="ctr" marL="73152" marT="9144" marB="9144">
-                    <a:solidFill>
-                      <a:srgbClr val="FFFFFF"/>
-                    </a:solidFill>
-                  </a:tcPr>
-                </a:tc>
-                <a:tc>
-                  <a:txBody>
-                    <a:bodyPr/>
-                    <a:lstStyle/>
-                    <a:p>
-                      <a:r>
-                        <a:rPr sz="1150" b="1">
-                          <a:solidFill>
-                            <a:srgbClr val="E63946"/>
-                          </a:solidFill>
-                          <a:latin typeface="Microsoft JhengHei"/>
-                          <a:ea typeface="Microsoft JhengHei"/>
-                          <a:cs typeface="Microsoft JhengHei"/>
-                        </a:rPr>
-                        <a:t>駭客攻擊</a:t>
-                      </a:r>
-                    </a:p>
-                  </a:txBody>
-                  <a:tcPr anchor="ctr" marL="73152" marT="9144" marB="9144">
-                    <a:solidFill>
-                      <a:srgbClr val="FFFFFF"/>
-                    </a:solidFill>
-                  </a:tcPr>
-                </a:tc>
-                <a:tc>
-                  <a:txBody>
-                    <a:bodyPr/>
-                    <a:lstStyle/>
-                    <a:p>
-                      <a:r>
-                        <a:rPr sz="1150" b="0">
-                          <a:solidFill>
-                            <a:srgbClr val="1A2233"/>
-                          </a:solidFill>
-                          <a:latin typeface="Microsoft JhengHei"/>
-                          <a:ea typeface="Microsoft JhengHei"/>
-                          <a:cs typeface="Microsoft JhengHei"/>
-                        </a:rPr>
-                        <a:t>安侯建業聯合會計師事務所</a:t>
-                      </a:r>
-                    </a:p>
-                  </a:txBody>
-                  <a:tcPr anchor="ctr" marL="73152" marT="9144" marB="9144">
-                    <a:solidFill>
-                      <a:srgbClr val="FFFFFF"/>
-                    </a:solidFill>
-                  </a:tcPr>
-                </a:tc>
-                <a:tc>
-                  <a:txBody>
-                    <a:bodyPr/>
-                    <a:lstStyle/>
-                    <a:p>
-                      <a:r>
-                        <a:rPr sz="1150" b="0">
-                          <a:solidFill>
-                            <a:srgbClr val="1A2233"/>
-                          </a:solidFill>
-                          <a:latin typeface="Microsoft JhengHei"/>
-                          <a:ea typeface="Microsoft JhengHei"/>
-                          <a:cs typeface="Microsoft JhengHei"/>
-                        </a:rPr>
-                        <a:t>洪士剛、莊鈞維</a:t>
-                      </a:r>
-                    </a:p>
-                  </a:txBody>
-                  <a:tcPr anchor="ctr" marL="73152" marT="9144" marB="9144">
-                    <a:solidFill>
-                      <a:srgbClr val="FFFFFF"/>
-                    </a:solidFill>
-                  </a:tcPr>
-                </a:tc>
-              </a:tr>
-              <a:tr h="457200">
-                <a:tc>
-                  <a:txBody>
-                    <a:bodyPr/>
-                    <a:lstStyle/>
-                    <a:p>
-                      <a:r>
-                        <a:rPr sz="1150" b="0">
-                          <a:solidFill>
-                            <a:srgbClr val="1A2233"/>
-                          </a:solidFill>
-                          <a:latin typeface="Microsoft JhengHei"/>
-                          <a:ea typeface="Microsoft JhengHei"/>
-                          <a:cs typeface="Microsoft JhengHei"/>
-                        </a:rPr>
-                        <a:t>碩天</a:t>
-                      </a:r>
-                    </a:p>
-                  </a:txBody>
-                  <a:tcPr anchor="ctr" marL="73152" marT="9144" marB="9144">
-                    <a:solidFill>
-                      <a:srgbClr val="EEF2F9"/>
-                    </a:solidFill>
-                  </a:tcPr>
-                </a:tc>
-                <a:tc>
-                  <a:txBody>
-                    <a:bodyPr/>
-                    <a:lstStyle/>
-                    <a:p>
-                      <a:r>
-                        <a:rPr sz="1150" b="0">
-                          <a:solidFill>
-                            <a:srgbClr val="1A2233"/>
-                          </a:solidFill>
-                          <a:latin typeface="Microsoft JhengHei"/>
-                          <a:ea typeface="Microsoft JhengHei"/>
-                          <a:cs typeface="Microsoft JhengHei"/>
-                        </a:rPr>
-                        <a:t>3617</a:t>
-                      </a:r>
-                    </a:p>
-                  </a:txBody>
-                  <a:tcPr anchor="ctr" marL="73152" marT="9144" marB="9144">
-                    <a:solidFill>
-                      <a:srgbClr val="EEF2F9"/>
-                    </a:solidFill>
-                  </a:tcPr>
-                </a:tc>
-                <a:tc>
-                  <a:txBody>
-                    <a:bodyPr/>
-                    <a:lstStyle/>
-                    <a:p>
-                      <a:r>
-                        <a:rPr sz="1150" b="1">
-                          <a:solidFill>
-                            <a:srgbClr val="F4A261"/>
-                          </a:solidFill>
-                          <a:latin typeface="Microsoft JhengHei"/>
-                          <a:ea typeface="Microsoft JhengHei"/>
-                          <a:cs typeface="Microsoft JhengHei"/>
-                        </a:rPr>
-                        <a:t>勒索病毒/加密</a:t>
-                      </a:r>
-                    </a:p>
-                  </a:txBody>
-                  <a:tcPr anchor="ctr" marL="73152" marT="9144" marB="9144">
-                    <a:solidFill>
-                      <a:srgbClr val="EEF2F9"/>
-                    </a:solidFill>
-                  </a:tcPr>
-                </a:tc>
-                <a:tc>
-                  <a:txBody>
-                    <a:bodyPr/>
-                    <a:lstStyle/>
-                    <a:p>
-                      <a:r>
-                        <a:rPr sz="1150" b="0">
-                          <a:solidFill>
-                            <a:srgbClr val="1A2233"/>
-                          </a:solidFill>
-                          <a:latin typeface="Microsoft JhengHei"/>
-                          <a:ea typeface="Microsoft JhengHei"/>
-                          <a:cs typeface="Microsoft JhengHei"/>
-                        </a:rPr>
-                        <a:t>勤業眾信聯合會計師事務所</a:t>
-                      </a:r>
-                    </a:p>
-                  </a:txBody>
-                  <a:tcPr anchor="ctr" marL="73152" marT="9144" marB="9144">
-                    <a:solidFill>
-                      <a:srgbClr val="EEF2F9"/>
-                    </a:solidFill>
-                  </a:tcPr>
-                </a:tc>
-                <a:tc>
-                  <a:txBody>
-                    <a:bodyPr/>
-                    <a:lstStyle/>
-                    <a:p>
-                      <a:r>
-                        <a:rPr sz="1150" b="0">
-                          <a:solidFill>
-                            <a:srgbClr val="1A2233"/>
-                          </a:solidFill>
-                          <a:latin typeface="Microsoft JhengHei"/>
-                          <a:ea typeface="Microsoft JhengHei"/>
-                          <a:cs typeface="Microsoft JhengHei"/>
-                        </a:rPr>
-                        <a:t>張至誼、鄭淂蓁</a:t>
-                      </a:r>
-                    </a:p>
-                  </a:txBody>
-                  <a:tcPr anchor="ctr" marL="73152" marT="9144" marB="9144">
-                    <a:solidFill>
-                      <a:srgbClr val="EEF2F9"/>
                     </a:solidFill>
                   </a:tcPr>
                 </a:tc>
@@ -8813,7 +9310,7 @@
             <a:avLst/>
           </a:prstGeom>
           <a:solidFill>
-            <a:srgbClr val="27A6C4"/>
+            <a:srgbClr val="E63946"/>
           </a:solidFill>
           <a:ln>
             <a:noFill/>
@@ -8874,7 +9371,7 @@
                 <a:ea typeface="Microsoft JhengHei"/>
                 <a:cs typeface="Microsoft JhengHei"/>
               </a:rPr>
-              <a:t>數字 </a:t>
+              <a:t>巨路 </a:t>
             </a:r>
             <a:r>
               <a:rPr sz="1300" b="0">
@@ -8885,7 +9382,7 @@
                 <a:ea typeface="Microsoft JhengHei"/>
                 <a:cs typeface="Microsoft JhengHei"/>
               </a:rPr>
-              <a:t>5287</a:t>
+              <a:t>6192</a:t>
             </a:r>
           </a:p>
         </p:txBody>
@@ -8905,7 +9402,7 @@
             <a:avLst/>
           </a:prstGeom>
           <a:solidFill>
-            <a:srgbClr val="27A6C4"/>
+            <a:srgbClr val="E63946"/>
           </a:solidFill>
           <a:ln>
             <a:noFill/>
@@ -8966,7 +9463,7 @@
                 <a:ea typeface="Microsoft JhengHei"/>
                 <a:cs typeface="Microsoft JhengHei"/>
               </a:rPr>
-              <a:t>個資外洩</a:t>
+              <a:t>駭客攻擊</a:t>
             </a:r>
           </a:p>
         </p:txBody>
@@ -9001,7 +9498,7 @@
             <a:r>
               <a:rPr sz="1100" b="1">
                 <a:solidFill>
-                  <a:srgbClr val="27A6C4"/>
+                  <a:srgbClr val="E63946"/>
                 </a:solidFill>
                 <a:latin typeface="Microsoft JhengHei"/>
                 <a:ea typeface="Microsoft JhengHei"/>
@@ -9018,7 +9515,7 @@
                 <a:ea typeface="Microsoft JhengHei"/>
                 <a:cs typeface="Microsoft JhengHei"/>
               </a:rPr>
-              <a:t>本公司於115年5月25日進行內部活動網頁開發與測試流程時，因程式碼管理作業設定不當，致部分未去…</a:t>
+              <a:t/>
             </a:r>
           </a:p>
         </p:txBody>
@@ -9053,7 +9550,7 @@
             <a:r>
               <a:rPr sz="1100" b="1">
                 <a:solidFill>
-                  <a:srgbClr val="27A6C4"/>
+                  <a:srgbClr val="E63946"/>
                 </a:solidFill>
                 <a:latin typeface="Microsoft JhengHei"/>
                 <a:ea typeface="Microsoft JhengHei"/>
@@ -9070,7 +9567,7 @@
                 <a:ea typeface="Microsoft JhengHei"/>
                 <a:cs typeface="Microsoft JhengHei"/>
               </a:rPr>
-              <a:t>(1)依據安全軟體發展生命週期(SSDLC)之框架，優化開發流程管制作業(2)落實權限管理及審查，避免未經授權之人員得以…</a:t>
+              <a:t/>
             </a:r>
           </a:p>
         </p:txBody>
@@ -9136,7 +9633,7 @@
             <a:avLst/>
           </a:prstGeom>
           <a:solidFill>
-            <a:srgbClr val="F4A261"/>
+            <a:srgbClr val="5C6679"/>
           </a:solidFill>
           <a:ln>
             <a:noFill/>
@@ -9197,7 +9694,7 @@
                 <a:ea typeface="Microsoft JhengHei"/>
                 <a:cs typeface="Microsoft JhengHei"/>
               </a:rPr>
-              <a:t>弘塑 </a:t>
+              <a:t>數字 </a:t>
             </a:r>
             <a:r>
               <a:rPr sz="1300" b="0">
@@ -9208,7 +9705,7 @@
                 <a:ea typeface="Microsoft JhengHei"/>
                 <a:cs typeface="Microsoft JhengHei"/>
               </a:rPr>
-              <a:t>3131</a:t>
+              <a:t>5287</a:t>
             </a:r>
           </a:p>
         </p:txBody>
@@ -9228,7 +9725,7 @@
             <a:avLst/>
           </a:prstGeom>
           <a:solidFill>
-            <a:srgbClr val="F4A261"/>
+            <a:srgbClr val="5C6679"/>
           </a:solidFill>
           <a:ln>
             <a:noFill/>
@@ -9289,7 +9786,7 @@
                 <a:ea typeface="Microsoft JhengHei"/>
                 <a:cs typeface="Microsoft JhengHei"/>
               </a:rPr>
-              <a:t>勒索病毒/加密</a:t>
+              <a:t>其他</a:t>
             </a:r>
           </a:p>
         </p:txBody>
@@ -9324,7 +9821,7 @@
             <a:r>
               <a:rPr sz="1100" b="1">
                 <a:solidFill>
-                  <a:srgbClr val="F4A261"/>
+                  <a:srgbClr val="5C6679"/>
                 </a:solidFill>
                 <a:latin typeface="Microsoft JhengHei"/>
                 <a:ea typeface="Microsoft JhengHei"/>
@@ -9341,7 +9838,7 @@
                 <a:ea typeface="Microsoft JhengHei"/>
                 <a:cs typeface="Microsoft JhengHei"/>
               </a:rPr>
-              <a:t>本公司資訊系統遭受勒索病毒攻擊。</a:t>
+              <a:t/>
             </a:r>
           </a:p>
         </p:txBody>
@@ -9376,7 +9873,7 @@
             <a:r>
               <a:rPr sz="1100" b="1">
                 <a:solidFill>
-                  <a:srgbClr val="F4A261"/>
+                  <a:srgbClr val="5C6679"/>
                 </a:solidFill>
                 <a:latin typeface="Microsoft JhengHei"/>
                 <a:ea typeface="Microsoft JhengHei"/>
@@ -9393,7 +9890,7 @@
                 <a:ea typeface="Microsoft JhengHei"/>
                 <a:cs typeface="Microsoft JhengHei"/>
               </a:rPr>
-              <a:t>本公司將持續加強資訊安全監控與防護機制，提升網路與資訊基礎架構之安全管理，並導入更完善之資安控管措施，以降低未來風險。</a:t>
+              <a:t/>
             </a:r>
           </a:p>
         </p:txBody>
@@ -9459,7 +9956,7 @@
             <a:avLst/>
           </a:prstGeom>
           <a:solidFill>
-            <a:srgbClr val="E63946"/>
+            <a:srgbClr val="5C6679"/>
           </a:solidFill>
           <a:ln>
             <a:noFill/>
@@ -9520,7 +10017,7 @@
                 <a:ea typeface="Microsoft JhengHei"/>
                 <a:cs typeface="Microsoft JhengHei"/>
               </a:rPr>
-              <a:t>建德工業 </a:t>
+              <a:t>弘塑 </a:t>
             </a:r>
             <a:r>
               <a:rPr sz="1300" b="0">
@@ -9531,7 +10028,7 @@
                 <a:ea typeface="Microsoft JhengHei"/>
                 <a:cs typeface="Microsoft JhengHei"/>
               </a:rPr>
-              <a:t>6606</a:t>
+              <a:t>3131</a:t>
             </a:r>
           </a:p>
         </p:txBody>
@@ -9551,7 +10048,7 @@
             <a:avLst/>
           </a:prstGeom>
           <a:solidFill>
-            <a:srgbClr val="E63946"/>
+            <a:srgbClr val="5C6679"/>
           </a:solidFill>
           <a:ln>
             <a:noFill/>
@@ -9612,7 +10109,7 @@
                 <a:ea typeface="Microsoft JhengHei"/>
                 <a:cs typeface="Microsoft JhengHei"/>
               </a:rPr>
-              <a:t>駭客攻擊</a:t>
+              <a:t>其他</a:t>
             </a:r>
           </a:p>
         </p:txBody>
@@ -9647,7 +10144,7 @@
             <a:r>
               <a:rPr sz="1100" b="1">
                 <a:solidFill>
-                  <a:srgbClr val="E63946"/>
+                  <a:srgbClr val="5C6679"/>
                 </a:solidFill>
                 <a:latin typeface="Microsoft JhengHei"/>
                 <a:ea typeface="Microsoft JhengHei"/>
@@ -9664,7 +10161,7 @@
                 <a:ea typeface="Microsoft JhengHei"/>
                 <a:cs typeface="Microsoft JhengHei"/>
               </a:rPr>
-              <a:t>本公司資訊系統疑遭受駭客網路攻擊</a:t>
+              <a:t/>
             </a:r>
           </a:p>
         </p:txBody>
@@ -9699,7 +10196,7 @@
             <a:r>
               <a:rPr sz="1100" b="1">
                 <a:solidFill>
-                  <a:srgbClr val="E63946"/>
+                  <a:srgbClr val="5C6679"/>
                 </a:solidFill>
                 <a:latin typeface="Microsoft JhengHei"/>
                 <a:ea typeface="Microsoft JhengHei"/>
@@ -9716,7 +10213,7 @@
                 <a:ea typeface="Microsoft JhengHei"/>
                 <a:cs typeface="Microsoft JhengHei"/>
               </a:rPr>
-              <a:t>目前已全面盤查本公司資訊系統，確保無植入木馬程式等攻擊手段，將持續提昇網路資訊安全架構，並持續嚴密監控，以確保資訊安全。</a:t>
+              <a:t/>
             </a:r>
           </a:p>
         </p:txBody>
@@ -9782,7 +10279,7 @@
             <a:avLst/>
           </a:prstGeom>
           <a:solidFill>
-            <a:srgbClr val="27A6C4"/>
+            <a:srgbClr val="E63946"/>
           </a:solidFill>
           <a:ln>
             <a:noFill/>
@@ -9843,7 +10340,7 @@
                 <a:ea typeface="Microsoft JhengHei"/>
                 <a:cs typeface="Microsoft JhengHei"/>
               </a:rPr>
-              <a:t>永信 </a:t>
+              <a:t>建德工業 </a:t>
             </a:r>
             <a:r>
               <a:rPr sz="1300" b="0">
@@ -9854,7 +10351,7 @@
                 <a:ea typeface="Microsoft JhengHei"/>
                 <a:cs typeface="Microsoft JhengHei"/>
               </a:rPr>
-              <a:t>3705</a:t>
+              <a:t>6606</a:t>
             </a:r>
           </a:p>
         </p:txBody>
@@ -9874,7 +10371,7 @@
             <a:avLst/>
           </a:prstGeom>
           <a:solidFill>
-            <a:srgbClr val="27A6C4"/>
+            <a:srgbClr val="E63946"/>
           </a:solidFill>
           <a:ln>
             <a:noFill/>
@@ -9935,7 +10432,7 @@
                 <a:ea typeface="Microsoft JhengHei"/>
                 <a:cs typeface="Microsoft JhengHei"/>
               </a:rPr>
-              <a:t>個資外洩</a:t>
+              <a:t>駭客攻擊</a:t>
             </a:r>
           </a:p>
         </p:txBody>
@@ -9970,7 +10467,7 @@
             <a:r>
               <a:rPr sz="1100" b="1">
                 <a:solidFill>
-                  <a:srgbClr val="27A6C4"/>
+                  <a:srgbClr val="E63946"/>
                 </a:solidFill>
                 <a:latin typeface="Microsoft JhengHei"/>
                 <a:ea typeface="Microsoft JhengHei"/>
@@ -9987,7 +10484,7 @@
                 <a:ea typeface="Microsoft JhengHei"/>
                 <a:cs typeface="Microsoft JhengHei"/>
               </a:rPr>
-              <a:t>永信藥品本日接獲資安公司通報，廠商於網路巡檢時，發現駭客取得永信藥品委外廠商活動網站的消費者發票…</a:t>
+              <a:t>本公司資訊系統疑遭受駭客網路攻擊</a:t>
             </a:r>
           </a:p>
         </p:txBody>
@@ -10022,7 +10519,7 @@
             <a:r>
               <a:rPr sz="1100" b="1">
                 <a:solidFill>
-                  <a:srgbClr val="27A6C4"/>
+                  <a:srgbClr val="E63946"/>
                 </a:solidFill>
                 <a:latin typeface="Microsoft JhengHei"/>
                 <a:ea typeface="Microsoft JhengHei"/>
@@ -10039,7 +10536,7 @@
                 <a:ea typeface="Microsoft JhengHei"/>
                 <a:cs typeface="Microsoft JhengHei"/>
               </a:rPr>
-              <a:t>(1)已立即啟動資安應變機制，並要求委外廠商進行系統隔離、鑑識調查。(2)已委請資訊安全專業團隊協助調查事件原因及影響範…</a:t>
+              <a:t>目前已全面盤查本公司資訊系統，確保無植入木馬程式等攻擊手段，將持續提昇網路資訊安全架構，並持續嚴密監控，以確保資訊安全。</a:t>
             </a:r>
           </a:p>
         </p:txBody>
@@ -10241,7 +10738,7 @@
             <a:avLst/>
           </a:prstGeom>
           <a:solidFill>
-            <a:srgbClr val="E63946"/>
+            <a:srgbClr val="27A6C4"/>
           </a:solidFill>
           <a:ln>
             <a:noFill/>
@@ -10302,7 +10799,7 @@
                 <a:ea typeface="Microsoft JhengHei"/>
                 <a:cs typeface="Microsoft JhengHei"/>
               </a:rPr>
-              <a:t>鴻海 </a:t>
+              <a:t>永信 </a:t>
             </a:r>
             <a:r>
               <a:rPr sz="1300" b="0">
@@ -10313,7 +10810,7 @@
                 <a:ea typeface="Microsoft JhengHei"/>
                 <a:cs typeface="Microsoft JhengHei"/>
               </a:rPr>
-              <a:t>2317</a:t>
+              <a:t>3705</a:t>
             </a:r>
           </a:p>
         </p:txBody>
@@ -10333,7 +10830,7 @@
             <a:avLst/>
           </a:prstGeom>
           <a:solidFill>
-            <a:srgbClr val="E63946"/>
+            <a:srgbClr val="27A6C4"/>
           </a:solidFill>
           <a:ln>
             <a:noFill/>
@@ -10394,7 +10891,7 @@
                 <a:ea typeface="Microsoft JhengHei"/>
                 <a:cs typeface="Microsoft JhengHei"/>
               </a:rPr>
-              <a:t>駭客攻擊</a:t>
+              <a:t>個資外洩</a:t>
             </a:r>
           </a:p>
         </p:txBody>
@@ -10429,7 +10926,7 @@
             <a:r>
               <a:rPr sz="1100" b="1">
                 <a:solidFill>
-                  <a:srgbClr val="E63946"/>
+                  <a:srgbClr val="27A6C4"/>
                 </a:solidFill>
                 <a:latin typeface="Microsoft JhengHei"/>
                 <a:ea typeface="Microsoft JhengHei"/>
@@ -10446,7 +10943,7 @@
                 <a:ea typeface="Microsoft JhengHei"/>
                 <a:cs typeface="Microsoft JhengHei"/>
               </a:rPr>
-              <a:t>鴻海集團位於北美的部分廠區遭受網路攻擊。</a:t>
+              <a:t>永信藥品本日接獲資安公司通報，廠商於網路巡檢時，發現駭客取得永信藥品委外廠商活動網站的消費者發票…</a:t>
             </a:r>
           </a:p>
         </p:txBody>
@@ -10481,7 +10978,7 @@
             <a:r>
               <a:rPr sz="1100" b="1">
                 <a:solidFill>
-                  <a:srgbClr val="E63946"/>
+                  <a:srgbClr val="27A6C4"/>
                 </a:solidFill>
                 <a:latin typeface="Microsoft JhengHei"/>
                 <a:ea typeface="Microsoft JhengHei"/>
@@ -10498,7 +10995,7 @@
                 <a:ea typeface="Microsoft JhengHei"/>
                 <a:cs typeface="Microsoft JhengHei"/>
               </a:rPr>
-              <a:t>不適用</a:t>
+              <a:t>(1)已立即啟動資安應變機制，並要求委外廠商進行系統隔離、鑑識調查。(2)已委請資訊安全專業團隊協助調查事件原因及影響範…</a:t>
             </a:r>
           </a:p>
         </p:txBody>
@@ -10625,7 +11122,7 @@
                 <a:ea typeface="Microsoft JhengHei"/>
                 <a:cs typeface="Microsoft JhengHei"/>
               </a:rPr>
-              <a:t>彰源 </a:t>
+              <a:t>鴻海 </a:t>
             </a:r>
             <a:r>
               <a:rPr sz="1300" b="0">
@@ -10636,7 +11133,7 @@
                 <a:ea typeface="Microsoft JhengHei"/>
                 <a:cs typeface="Microsoft JhengHei"/>
               </a:rPr>
-              <a:t>2030</a:t>
+              <a:t>2317</a:t>
             </a:r>
           </a:p>
         </p:txBody>
@@ -10769,7 +11266,7 @@
                 <a:ea typeface="Microsoft JhengHei"/>
                 <a:cs typeface="Microsoft JhengHei"/>
               </a:rPr>
-              <a:t>本公司內網有被企圖登入，資訊系統遭受駭客網路攻擊。</a:t>
+              <a:t>鴻海集團位於北美的部分廠區遭受網路攻擊。</a:t>
             </a:r>
           </a:p>
         </p:txBody>
@@ -10821,7 +11318,7 @@
                 <a:ea typeface="Microsoft JhengHei"/>
                 <a:cs typeface="Microsoft JhengHei"/>
               </a:rPr>
-              <a:t>目前已經委託國際級網路資訊安全處理公司協助解決，此事件後將持續提升網路與資訊基礎架構之安全控管，並持續密切監控，以確保資…</a:t>
+              <a:t>不適用</a:t>
             </a:r>
           </a:p>
         </p:txBody>
@@ -10948,7 +11445,7 @@
                 <a:ea typeface="Microsoft JhengHei"/>
                 <a:cs typeface="Microsoft JhengHei"/>
               </a:rPr>
-              <a:t>偉康科技 </a:t>
+              <a:t>彰源 </a:t>
             </a:r>
             <a:r>
               <a:rPr sz="1300" b="0">
@@ -10959,7 +11456,7 @@
                 <a:ea typeface="Microsoft JhengHei"/>
                 <a:cs typeface="Microsoft JhengHei"/>
               </a:rPr>
-              <a:t>6865</a:t>
+              <a:t>2030</a:t>
             </a:r>
           </a:p>
         </p:txBody>
@@ -11092,7 +11589,7 @@
                 <a:ea typeface="Microsoft JhengHei"/>
                 <a:cs typeface="Microsoft JhengHei"/>
               </a:rPr>
-              <a:t>說明本公司遭受駭客攻擊事件。</a:t>
+              <a:t>本公司內網有被企圖登入，資訊系統遭受駭客網路攻擊。</a:t>
             </a:r>
           </a:p>
         </p:txBody>
@@ -11144,7 +11641,7 @@
                 <a:ea typeface="Microsoft JhengHei"/>
                 <a:cs typeface="Microsoft JhengHei"/>
               </a:rPr>
-              <a:t>本公司已啟動防禦應變，並持續強化資安管控。</a:t>
+              <a:t>目前已經委託國際級網路資訊安全處理公司協助解決，此事件後將持續提升網路與資訊基礎架構之安全控管，並持續密切監控，以確保資…</a:t>
             </a:r>
           </a:p>
         </p:txBody>
@@ -11210,7 +11707,7 @@
             <a:avLst/>
           </a:prstGeom>
           <a:solidFill>
-            <a:srgbClr val="F4A261"/>
+            <a:srgbClr val="E63946"/>
           </a:solidFill>
           <a:ln>
             <a:noFill/>
@@ -11271,7 +11768,7 @@
                 <a:ea typeface="Microsoft JhengHei"/>
                 <a:cs typeface="Microsoft JhengHei"/>
               </a:rPr>
-              <a:t>碩天 </a:t>
+              <a:t>偉康科技 </a:t>
             </a:r>
             <a:r>
               <a:rPr sz="1300" b="0">
@@ -11282,7 +11779,7 @@
                 <a:ea typeface="Microsoft JhengHei"/>
                 <a:cs typeface="Microsoft JhengHei"/>
               </a:rPr>
-              <a:t>3617</a:t>
+              <a:t>6865</a:t>
             </a:r>
           </a:p>
         </p:txBody>
@@ -11299,6 +11796,373 @@
             <a:ext cx="1234440" cy="347472"/>
           </a:xfrm>
           <a:prstGeom prst="roundRect">
+            <a:avLst/>
+          </a:prstGeom>
+          <a:solidFill>
+            <a:srgbClr val="E63946"/>
+          </a:solidFill>
+          <a:ln>
+            <a:noFill/>
+          </a:ln>
+          <a:effectLst/>
+        </p:spPr>
+        <p:style>
+          <a:lnRef idx="1">
+            <a:schemeClr val="accent1"/>
+          </a:lnRef>
+          <a:fillRef idx="3">
+            <a:schemeClr val="accent1"/>
+          </a:fillRef>
+          <a:effectRef idx="2">
+            <a:schemeClr val="accent1"/>
+          </a:effectRef>
+          <a:fontRef idx="minor">
+            <a:schemeClr val="lt1"/>
+          </a:fontRef>
+        </p:style>
+        <p:txBody>
+          <a:bodyPr rtlCol="0" anchor="ctr"/>
+          <a:lstStyle/>
+          <a:p>
+            <a:pPr algn="ctr"/>
+          </a:p>
+        </p:txBody>
+      </p:sp>
+      <p:sp>
+        <p:nvSpPr>
+          <p:cNvPr id="30" name="TextBox 29"/>
+          <p:cNvSpPr txBox="1"/>
+          <p:nvPr/>
+        </p:nvSpPr>
+        <p:spPr>
+          <a:xfrm>
+            <a:off x="10149840" y="4123944"/>
+            <a:ext cx="1234440" cy="347472"/>
+          </a:xfrm>
+          <a:prstGeom prst="rect">
+            <a:avLst/>
+          </a:prstGeom>
+          <a:noFill/>
+        </p:spPr>
+        <p:txBody>
+          <a:bodyPr wrap="square" anchor="ctr" lIns="0" rIns="0" tIns="0" bIns="0">
+            <a:spAutoFit/>
+          </a:bodyPr>
+          <a:lstStyle/>
+          <a:p>
+            <a:pPr algn="ctr"/>
+            <a:r>
+              <a:rPr sz="1050" b="1">
+                <a:solidFill>
+                  <a:srgbClr val="FFFFFF"/>
+                </a:solidFill>
+                <a:latin typeface="Microsoft JhengHei"/>
+                <a:ea typeface="Microsoft JhengHei"/>
+                <a:cs typeface="Microsoft JhengHei"/>
+              </a:rPr>
+              <a:t>駭客攻擊</a:t>
+            </a:r>
+          </a:p>
+        </p:txBody>
+      </p:sp>
+      <p:sp>
+        <p:nvSpPr>
+          <p:cNvPr id="31" name="TextBox 30"/>
+          <p:cNvSpPr txBox="1"/>
+          <p:nvPr/>
+        </p:nvSpPr>
+        <p:spPr>
+          <a:xfrm>
+            <a:off x="6400800" y="4599432"/>
+            <a:ext cx="4937760" cy="640080"/>
+          </a:xfrm>
+          <a:prstGeom prst="rect">
+            <a:avLst/>
+          </a:prstGeom>
+          <a:noFill/>
+        </p:spPr>
+        <p:txBody>
+          <a:bodyPr wrap="square" anchor="t" lIns="0" rIns="0" tIns="0" bIns="0">
+            <a:spAutoFit/>
+          </a:bodyPr>
+          <a:lstStyle/>
+          <a:p>
+            <a:pPr algn="l">
+              <a:lnSpc>
+                <a:spcPts val="1500"/>
+              </a:lnSpc>
+            </a:pPr>
+            <a:r>
+              <a:rPr sz="1100" b="1">
+                <a:solidFill>
+                  <a:srgbClr val="E63946"/>
+                </a:solidFill>
+                <a:latin typeface="Microsoft JhengHei"/>
+                <a:ea typeface="Microsoft JhengHei"/>
+                <a:cs typeface="Microsoft JhengHei"/>
+              </a:rPr>
+              <a:t>緣由　</a:t>
+            </a:r>
+            <a:r>
+              <a:rPr sz="1100" b="0">
+                <a:solidFill>
+                  <a:srgbClr val="1A2233"/>
+                </a:solidFill>
+                <a:latin typeface="Microsoft JhengHei"/>
+                <a:ea typeface="Microsoft JhengHei"/>
+                <a:cs typeface="Microsoft JhengHei"/>
+              </a:rPr>
+              <a:t>說明本公司遭受駭客攻擊事件。</a:t>
+            </a:r>
+          </a:p>
+        </p:txBody>
+      </p:sp>
+      <p:sp>
+        <p:nvSpPr>
+          <p:cNvPr id="32" name="TextBox 31"/>
+          <p:cNvSpPr txBox="1"/>
+          <p:nvPr/>
+        </p:nvSpPr>
+        <p:spPr>
+          <a:xfrm>
+            <a:off x="6400800" y="5257800"/>
+            <a:ext cx="4937760" cy="713232"/>
+          </a:xfrm>
+          <a:prstGeom prst="rect">
+            <a:avLst/>
+          </a:prstGeom>
+          <a:noFill/>
+        </p:spPr>
+        <p:txBody>
+          <a:bodyPr wrap="square" anchor="t" lIns="0" rIns="0" tIns="0" bIns="0">
+            <a:spAutoFit/>
+          </a:bodyPr>
+          <a:lstStyle/>
+          <a:p>
+            <a:pPr algn="l">
+              <a:lnSpc>
+                <a:spcPts val="1500"/>
+              </a:lnSpc>
+            </a:pPr>
+            <a:r>
+              <a:rPr sz="1100" b="1">
+                <a:solidFill>
+                  <a:srgbClr val="E63946"/>
+                </a:solidFill>
+                <a:latin typeface="Microsoft JhengHei"/>
+                <a:ea typeface="Microsoft JhengHei"/>
+                <a:cs typeface="Microsoft JhengHei"/>
+              </a:rPr>
+              <a:t>因應　</a:t>
+            </a:r>
+            <a:r>
+              <a:rPr sz="1100" b="0">
+                <a:solidFill>
+                  <a:srgbClr val="1A2233"/>
+                </a:solidFill>
+                <a:latin typeface="Microsoft JhengHei"/>
+                <a:ea typeface="Microsoft JhengHei"/>
+                <a:cs typeface="Microsoft JhengHei"/>
+              </a:rPr>
+              <a:t>本公司已啟動防禦應變，並持續強化資安管控。</a:t>
+            </a:r>
+          </a:p>
+        </p:txBody>
+      </p:sp>
+    </p:spTree>
+  </p:cSld>
+  <p:clrMapOvr>
+    <a:masterClrMapping/>
+  </p:clrMapOvr>
+</p:sld>
+</file>
+
+<file path=ppt/slides/slide8.xml><?xml version="1.0" encoding="utf-8"?>
+<p:sld xmlns:a="http://schemas.openxmlformats.org/drawingml/2006/main" xmlns:p="http://schemas.openxmlformats.org/presentationml/2006/main" xmlns:r="http://schemas.openxmlformats.org/officeDocument/2006/relationships">
+  <p:cSld>
+    <p:spTree>
+      <p:nvGrpSpPr>
+        <p:cNvPr id="1" name=""/>
+        <p:cNvGrpSpPr/>
+        <p:nvPr/>
+      </p:nvGrpSpPr>
+      <p:grpSpPr/>
+      <p:sp>
+        <p:nvSpPr>
+          <p:cNvPr id="2" name="Rectangle 1"/>
+          <p:cNvSpPr/>
+          <p:nvPr/>
+        </p:nvSpPr>
+        <p:spPr>
+          <a:xfrm>
+            <a:off x="0" y="0"/>
+            <a:ext cx="12191695" cy="6858000"/>
+          </a:xfrm>
+          <a:prstGeom prst="rect">
+            <a:avLst/>
+          </a:prstGeom>
+          <a:solidFill>
+            <a:srgbClr val="F6F8FC"/>
+          </a:solidFill>
+          <a:ln>
+            <a:noFill/>
+          </a:ln>
+          <a:effectLst/>
+        </p:spPr>
+        <p:style>
+          <a:lnRef idx="1">
+            <a:schemeClr val="accent1"/>
+          </a:lnRef>
+          <a:fillRef idx="3">
+            <a:schemeClr val="accent1"/>
+          </a:fillRef>
+          <a:effectRef idx="2">
+            <a:schemeClr val="accent1"/>
+          </a:effectRef>
+          <a:fontRef idx="minor">
+            <a:schemeClr val="lt1"/>
+          </a:fontRef>
+        </p:style>
+        <p:txBody>
+          <a:bodyPr rtlCol="0" anchor="ctr"/>
+          <a:lstStyle/>
+          <a:p>
+            <a:pPr algn="ctr"/>
+          </a:p>
+        </p:txBody>
+      </p:sp>
+      <p:sp>
+        <p:nvSpPr>
+          <p:cNvPr id="3" name="TextBox 2"/>
+          <p:cNvSpPr txBox="1"/>
+          <p:nvPr/>
+        </p:nvSpPr>
+        <p:spPr>
+          <a:xfrm>
+            <a:off x="548640" y="365760"/>
+            <a:ext cx="9144000" cy="640080"/>
+          </a:xfrm>
+          <a:prstGeom prst="rect">
+            <a:avLst/>
+          </a:prstGeom>
+          <a:noFill/>
+        </p:spPr>
+        <p:txBody>
+          <a:bodyPr wrap="square" anchor="t" lIns="0" rIns="0" tIns="0" bIns="0">
+            <a:spAutoFit/>
+          </a:bodyPr>
+          <a:lstStyle/>
+          <a:p>
+            <a:pPr algn="l"/>
+            <a:r>
+              <a:rPr sz="3000" b="1">
+                <a:solidFill>
+                  <a:srgbClr val="1A2233"/>
+                </a:solidFill>
+                <a:latin typeface="Microsoft JhengHei"/>
+                <a:ea typeface="Microsoft JhengHei"/>
+                <a:cs typeface="Microsoft JhengHei"/>
+              </a:rPr>
+              <a:t>個案因應重點（3）</a:t>
+            </a:r>
+          </a:p>
+        </p:txBody>
+      </p:sp>
+      <p:sp>
+        <p:nvSpPr>
+          <p:cNvPr id="4" name="TextBox 3"/>
+          <p:cNvSpPr txBox="1"/>
+          <p:nvPr/>
+        </p:nvSpPr>
+        <p:spPr>
+          <a:xfrm>
+            <a:off x="566928" y="1005840"/>
+            <a:ext cx="10058400" cy="365760"/>
+          </a:xfrm>
+          <a:prstGeom prst="rect">
+            <a:avLst/>
+          </a:prstGeom>
+          <a:noFill/>
+        </p:spPr>
+        <p:txBody>
+          <a:bodyPr wrap="square" anchor="t" lIns="0" rIns="0" tIns="0" bIns="0">
+            <a:spAutoFit/>
+          </a:bodyPr>
+          <a:lstStyle/>
+          <a:p>
+            <a:pPr algn="l"/>
+            <a:r>
+              <a:rPr sz="1300" b="0">
+                <a:solidFill>
+                  <a:srgbClr val="5C6679"/>
+                </a:solidFill>
+                <a:latin typeface="Microsoft JhengHei"/>
+                <a:ea typeface="Microsoft JhengHei"/>
+                <a:cs typeface="Microsoft JhengHei"/>
+              </a:rPr>
+              <a:t>各公司公告之發生緣由與因應措施摘要</a:t>
+            </a:r>
+          </a:p>
+        </p:txBody>
+      </p:sp>
+      <p:sp>
+        <p:nvSpPr>
+          <p:cNvPr id="5" name="Rounded Rectangle 4"/>
+          <p:cNvSpPr/>
+          <p:nvPr/>
+        </p:nvSpPr>
+        <p:spPr>
+          <a:xfrm>
+            <a:off x="548640" y="1554480"/>
+            <a:ext cx="5394960" cy="2148840"/>
+          </a:xfrm>
+          <a:prstGeom prst="roundRect">
+            <a:avLst/>
+          </a:prstGeom>
+          <a:solidFill>
+            <a:srgbClr val="FFFFFF"/>
+          </a:solidFill>
+          <a:ln w="12700">
+            <a:solidFill>
+              <a:srgbClr val="DDE3EE"/>
+            </a:solidFill>
+          </a:ln>
+          <a:effectLst/>
+        </p:spPr>
+        <p:style>
+          <a:lnRef idx="1">
+            <a:schemeClr val="accent1"/>
+          </a:lnRef>
+          <a:fillRef idx="3">
+            <a:schemeClr val="accent1"/>
+          </a:fillRef>
+          <a:effectRef idx="2">
+            <a:schemeClr val="accent1"/>
+          </a:effectRef>
+          <a:fontRef idx="minor">
+            <a:schemeClr val="lt1"/>
+          </a:fontRef>
+        </p:style>
+        <p:txBody>
+          <a:bodyPr rtlCol="0" anchor="ctr"/>
+          <a:lstStyle/>
+          <a:p>
+            <a:pPr algn="ctr"/>
+          </a:p>
+        </p:txBody>
+      </p:sp>
+      <p:sp>
+        <p:nvSpPr>
+          <p:cNvPr id="6" name="Rectangle 5"/>
+          <p:cNvSpPr/>
+          <p:nvPr/>
+        </p:nvSpPr>
+        <p:spPr>
+          <a:xfrm>
+            <a:off x="548640" y="1554480"/>
+            <a:ext cx="5394960" cy="109728"/>
+          </a:xfrm>
+          <a:prstGeom prst="rect">
             <a:avLst/>
           </a:prstGeom>
           <a:solidFill>
@@ -11333,13 +12197,105 @@
       </p:sp>
       <p:sp>
         <p:nvSpPr>
-          <p:cNvPr id="30" name="TextBox 29"/>
+          <p:cNvPr id="7" name="TextBox 6"/>
           <p:cNvSpPr txBox="1"/>
           <p:nvPr/>
         </p:nvSpPr>
         <p:spPr>
           <a:xfrm>
-            <a:off x="10149840" y="4123944"/>
+            <a:off x="777240" y="1773936"/>
+            <a:ext cx="3657600" cy="365760"/>
+          </a:xfrm>
+          <a:prstGeom prst="rect">
+            <a:avLst/>
+          </a:prstGeom>
+          <a:noFill/>
+        </p:spPr>
+        <p:txBody>
+          <a:bodyPr wrap="square" anchor="ctr" lIns="0" rIns="0" tIns="0" bIns="0">
+            <a:spAutoFit/>
+          </a:bodyPr>
+          <a:lstStyle/>
+          <a:p>
+            <a:pPr algn="l"/>
+            <a:r>
+              <a:rPr sz="1600" b="1">
+                <a:solidFill>
+                  <a:srgbClr val="1A2233"/>
+                </a:solidFill>
+                <a:latin typeface="Microsoft JhengHei"/>
+                <a:ea typeface="Microsoft JhengHei"/>
+                <a:cs typeface="Microsoft JhengHei"/>
+              </a:rPr>
+              <a:t>碩天 </a:t>
+            </a:r>
+            <a:r>
+              <a:rPr sz="1300" b="0">
+                <a:solidFill>
+                  <a:srgbClr val="5C6679"/>
+                </a:solidFill>
+                <a:latin typeface="Microsoft JhengHei"/>
+                <a:ea typeface="Microsoft JhengHei"/>
+                <a:cs typeface="Microsoft JhengHei"/>
+              </a:rPr>
+              <a:t>3617</a:t>
+            </a:r>
+          </a:p>
+        </p:txBody>
+      </p:sp>
+      <p:sp>
+        <p:nvSpPr>
+          <p:cNvPr id="8" name="Rounded Rectangle 7"/>
+          <p:cNvSpPr/>
+          <p:nvPr/>
+        </p:nvSpPr>
+        <p:spPr>
+          <a:xfrm>
+            <a:off x="4526280" y="1792224"/>
+            <a:ext cx="1234440" cy="347472"/>
+          </a:xfrm>
+          <a:prstGeom prst="roundRect">
+            <a:avLst/>
+          </a:prstGeom>
+          <a:solidFill>
+            <a:srgbClr val="F4A261"/>
+          </a:solidFill>
+          <a:ln>
+            <a:noFill/>
+          </a:ln>
+          <a:effectLst/>
+        </p:spPr>
+        <p:style>
+          <a:lnRef idx="1">
+            <a:schemeClr val="accent1"/>
+          </a:lnRef>
+          <a:fillRef idx="3">
+            <a:schemeClr val="accent1"/>
+          </a:fillRef>
+          <a:effectRef idx="2">
+            <a:schemeClr val="accent1"/>
+          </a:effectRef>
+          <a:fontRef idx="minor">
+            <a:schemeClr val="lt1"/>
+          </a:fontRef>
+        </p:style>
+        <p:txBody>
+          <a:bodyPr rtlCol="0" anchor="ctr"/>
+          <a:lstStyle/>
+          <a:p>
+            <a:pPr algn="ctr"/>
+          </a:p>
+        </p:txBody>
+      </p:sp>
+      <p:sp>
+        <p:nvSpPr>
+          <p:cNvPr id="9" name="TextBox 8"/>
+          <p:cNvSpPr txBox="1"/>
+          <p:nvPr/>
+        </p:nvSpPr>
+        <p:spPr>
+          <a:xfrm>
+            <a:off x="4526280" y="1792224"/>
             <a:ext cx="1234440" cy="347472"/>
           </a:xfrm>
           <a:prstGeom prst="rect">
@@ -11370,13 +12326,13 @@
       </p:sp>
       <p:sp>
         <p:nvSpPr>
-          <p:cNvPr id="31" name="TextBox 30"/>
+          <p:cNvPr id="10" name="TextBox 9"/>
           <p:cNvSpPr txBox="1"/>
           <p:nvPr/>
         </p:nvSpPr>
         <p:spPr>
           <a:xfrm>
-            <a:off x="6400800" y="4599432"/>
+            <a:off x="777240" y="2267712"/>
             <a:ext cx="4937760" cy="640080"/>
           </a:xfrm>
           <a:prstGeom prst="rect">
@@ -11422,13 +12378,13 @@
       </p:sp>
       <p:sp>
         <p:nvSpPr>
-          <p:cNvPr id="32" name="TextBox 31"/>
+          <p:cNvPr id="11" name="TextBox 10"/>
           <p:cNvSpPr txBox="1"/>
           <p:nvPr/>
         </p:nvSpPr>
         <p:spPr>
           <a:xfrm>
-            <a:off x="6400800" y="5257800"/>
+            <a:off x="777240" y="2926080"/>
             <a:ext cx="4937760" cy="713232"/>
           </a:xfrm>
           <a:prstGeom prst="rect">

--- a/資安事件因應分析.pptx
+++ b/資安事件因應分析.pptx
@@ -12,7 +12,6 @@
     <p:sldId id="260" r:id="rId11"/>
     <p:sldId id="261" r:id="rId12"/>
     <p:sldId id="262" r:id="rId13"/>
-    <p:sldId id="263" r:id="rId14"/>
   </p:sldIdLst>
   <p:sldSz cx="12191695" cy="6858000" type="screen4x3"/>
   <p:notesSz cx="6858000" cy="9144000"/>
@@ -162,19 +161,11 @@
               </a:solidFill>
             </c:spPr>
           </c:dPt>
-          <c:dPt>
-            <c:idx val="3"/>
-            <c:spPr>
-              <a:solidFill>
-                <a:srgbClr val="5C6679"/>
-              </a:solidFill>
-            </c:spPr>
-          </c:dPt>
           <c:cat>
             <c:strRef>
-              <c:f>Sheet1!$A$2:$A$5</c:f>
+              <c:f>Sheet1!$A$2:$A$4</c:f>
               <c:strCache>
-                <c:ptCount val="4"/>
+                <c:ptCount val="3"/>
                 <c:pt idx="0">
                   <c:v>駭客攻擊</c:v>
                 </c:pt>
@@ -184,18 +175,15 @@
                 <c:pt idx="2">
                   <c:v>個資外洩</c:v>
                 </c:pt>
-                <c:pt idx="3">
-                  <c:v>其他</c:v>
-                </c:pt>
               </c:strCache>
             </c:strRef>
           </c:cat>
           <c:val>
             <c:numRef>
-              <c:f>Sheet1!$B$2:$B$5</c:f>
+              <c:f>Sheet1!$B$2:$B$4</c:f>
               <c:numCache>
                 <c:formatCode>General</c:formatCode>
-                <c:ptCount val="4"/>
+                <c:ptCount val="3"/>
                 <c:pt idx="0">
                   <c:v>5</c:v>
                 </c:pt>
@@ -203,9 +191,6 @@
                   <c:v>1</c:v>
                 </c:pt>
                 <c:pt idx="2">
-                  <c:v>1</c:v>
-                </c:pt>
-                <c:pt idx="3">
                   <c:v>2</c:v>
                 </c:pt>
               </c:numCache>
@@ -3543,7 +3528,7 @@
                 <a:ea typeface="Microsoft JhengHei"/>
                 <a:cs typeface="Microsoft JhengHei"/>
               </a:rPr>
-              <a:t>資料期間 2026-05-03 ~ 2026-06-03　｜　MOPS 重大訊息全文檢索　｜　9 家公司</a:t>
+              <a:t>資料期間 2026-05-09 ~ 2026-06-09　｜　MOPS 重大訊息全文檢索　｜　8 家公司</a:t>
             </a:r>
           </a:p>
         </p:txBody>
@@ -3760,7 +3745,7 @@
                 <a:ea typeface="Microsoft JhengHei"/>
                 <a:cs typeface="Microsoft JhengHei"/>
               </a:rPr>
-              <a:t>資料期間內 MOPS 揭露之 9 起資安相關重大訊息</a:t>
+              <a:t>資料期間內 MOPS 揭露之 8 起資安相關重大訊息</a:t>
             </a:r>
           </a:p>
         </p:txBody>
@@ -3843,7 +3828,7 @@
                 <a:ea typeface="Microsoft JhengHei"/>
                 <a:cs typeface="Microsoft JhengHei"/>
               </a:rPr>
-              <a:t>9</a:t>
+              <a:t>8</a:t>
             </a:r>
           </a:p>
         </p:txBody>
@@ -3963,7 +3948,7 @@
                 <a:ea typeface="Microsoft JhengHei"/>
                 <a:cs typeface="Microsoft JhengHei"/>
               </a:rPr>
-              <a:t>4</a:t>
+              <a:t>3</a:t>
             </a:r>
           </a:p>
         </p:txBody>
@@ -4135,7 +4120,7 @@
         </p:nvGraphicFramePr>
         <p:xfrm>
           <a:off x="548640" y="2697480"/>
-          <a:ext cx="11064240" cy="3566160"/>
+          <a:ext cx="11064240" cy="3456432"/>
         </p:xfrm>
         <a:graphic>
           <a:graphicData uri="http://schemas.openxmlformats.org/drawingml/2006/table">
@@ -4150,7 +4135,7 @@
                 <a:gridCol w="2286000"/>
                 <a:gridCol w="5120640"/>
               </a:tblGrid>
-              <a:tr h="356616">
+              <a:tr h="384048">
                 <a:tc>
                   <a:txBody>
                     <a:bodyPr/>
@@ -4272,7 +4257,7 @@
                   </a:tcPr>
                 </a:tc>
               </a:tr>
-              <a:tr h="356616">
+              <a:tr h="384048">
                 <a:tc>
                   <a:txBody>
                     <a:bodyPr/>
@@ -4383,7 +4368,7 @@
                           <a:ea typeface="Microsoft JhengHei"/>
                           <a:cs typeface="Microsoft JhengHei"/>
                         </a:rPr>
-                        <a:t>—</a:t>
+                        <a:t>目前評估對公司營運無重大影響，亦未發現個資或機密資料外洩之情事。</a:t>
                       </a:r>
                     </a:p>
                   </a:txBody>
@@ -4394,7 +4379,7 @@
                   </a:tcPr>
                 </a:tc>
               </a:tr>
-              <a:tr h="356616">
+              <a:tr h="384048">
                 <a:tc>
                   <a:txBody>
                     <a:bodyPr/>
@@ -4475,13 +4460,13 @@
                       <a:r>
                         <a:rPr sz="1150" b="1">
                           <a:solidFill>
-                            <a:srgbClr val="5C6679"/>
+                            <a:srgbClr val="27A6C4"/>
                           </a:solidFill>
                           <a:latin typeface="Microsoft JhengHei"/>
                           <a:ea typeface="Microsoft JhengHei"/>
                           <a:cs typeface="Microsoft JhengHei"/>
                         </a:rPr>
-                        <a:t>其他</a:t>
+                        <a:t>個資外洩</a:t>
                       </a:r>
                     </a:p>
                   </a:txBody>
@@ -4505,7 +4490,7 @@
                           <a:ea typeface="Microsoft JhengHei"/>
                           <a:cs typeface="Microsoft JhengHei"/>
                         </a:rPr>
-                        <a:t>—</a:t>
+                        <a:t>目前評估對公司營運尚無重大影響。</a:t>
                       </a:r>
                     </a:p>
                   </a:txBody>
@@ -4516,7 +4501,7 @@
                   </a:tcPr>
                 </a:tc>
               </a:tr>
-              <a:tr h="356616">
+              <a:tr h="384048">
                 <a:tc>
                   <a:txBody>
                     <a:bodyPr/>
@@ -4597,13 +4582,13 @@
                       <a:r>
                         <a:rPr sz="1150" b="1">
                           <a:solidFill>
-                            <a:srgbClr val="5C6679"/>
+                            <a:srgbClr val="F4A261"/>
                           </a:solidFill>
                           <a:latin typeface="Microsoft JhengHei"/>
                           <a:ea typeface="Microsoft JhengHei"/>
                           <a:cs typeface="Microsoft JhengHei"/>
                         </a:rPr>
-                        <a:t>其他</a:t>
+                        <a:t>勒索病毒/加密</a:t>
                       </a:r>
                     </a:p>
                   </a:txBody>
@@ -4627,7 +4612,7 @@
                           <a:ea typeface="Microsoft JhengHei"/>
                           <a:cs typeface="Microsoft JhengHei"/>
                         </a:rPr>
-                        <a:t>—</a:t>
+                        <a:t>公司於4/10發現網路異常後，立即中斷公司網路及相關對外連結，全面停…</a:t>
                       </a:r>
                     </a:p>
                   </a:txBody>
@@ -4638,7 +4623,7 @@
                   </a:tcPr>
                 </a:tc>
               </a:tr>
-              <a:tr h="356616">
+              <a:tr h="384048">
                 <a:tc>
                   <a:txBody>
                     <a:bodyPr/>
@@ -4760,7 +4745,7 @@
                   </a:tcPr>
                 </a:tc>
               </a:tr>
-              <a:tr h="356616">
+              <a:tr h="384048">
                 <a:tc>
                   <a:txBody>
                     <a:bodyPr/>
@@ -4882,7 +4867,7 @@
                   </a:tcPr>
                 </a:tc>
               </a:tr>
-              <a:tr h="356616">
+              <a:tr h="384048">
                 <a:tc>
                   <a:txBody>
                     <a:bodyPr/>
@@ -5004,7 +4989,7 @@
                   </a:tcPr>
                 </a:tc>
               </a:tr>
-              <a:tr h="356616">
+              <a:tr h="384048">
                 <a:tc>
                   <a:txBody>
                     <a:bodyPr/>
@@ -5126,7 +5111,7 @@
                   </a:tcPr>
                 </a:tc>
               </a:tr>
-              <a:tr h="356616">
+              <a:tr h="384048">
                 <a:tc>
                   <a:txBody>
                     <a:bodyPr/>
@@ -5248,128 +5233,6 @@
                   </a:tcPr>
                 </a:tc>
               </a:tr>
-              <a:tr h="356616">
-                <a:tc>
-                  <a:txBody>
-                    <a:bodyPr/>
-                    <a:lstStyle/>
-                    <a:p>
-                      <a:r>
-                        <a:rPr sz="1150" b="0">
-                          <a:solidFill>
-                            <a:srgbClr val="1A2233"/>
-                          </a:solidFill>
-                          <a:latin typeface="Microsoft JhengHei"/>
-                          <a:ea typeface="Microsoft JhengHei"/>
-                          <a:cs typeface="Microsoft JhengHei"/>
-                        </a:rPr>
-                        <a:t>碩天</a:t>
-                      </a:r>
-                    </a:p>
-                  </a:txBody>
-                  <a:tcPr anchor="ctr" marL="73152" marT="9144" marB="9144">
-                    <a:solidFill>
-                      <a:srgbClr val="FFFFFF"/>
-                    </a:solidFill>
-                  </a:tcPr>
-                </a:tc>
-                <a:tc>
-                  <a:txBody>
-                    <a:bodyPr/>
-                    <a:lstStyle/>
-                    <a:p>
-                      <a:r>
-                        <a:rPr sz="1150" b="0">
-                          <a:solidFill>
-                            <a:srgbClr val="1A2233"/>
-                          </a:solidFill>
-                          <a:latin typeface="Microsoft JhengHei"/>
-                          <a:ea typeface="Microsoft JhengHei"/>
-                          <a:cs typeface="Microsoft JhengHei"/>
-                        </a:rPr>
-                        <a:t>3617</a:t>
-                      </a:r>
-                    </a:p>
-                  </a:txBody>
-                  <a:tcPr anchor="ctr" marL="73152" marT="9144" marB="9144">
-                    <a:solidFill>
-                      <a:srgbClr val="FFFFFF"/>
-                    </a:solidFill>
-                  </a:tcPr>
-                </a:tc>
-                <a:tc>
-                  <a:txBody>
-                    <a:bodyPr/>
-                    <a:lstStyle/>
-                    <a:p>
-                      <a:r>
-                        <a:rPr sz="1150" b="0">
-                          <a:solidFill>
-                            <a:srgbClr val="1A2233"/>
-                          </a:solidFill>
-                          <a:latin typeface="Microsoft JhengHei"/>
-                          <a:ea typeface="Microsoft JhengHei"/>
-                          <a:cs typeface="Microsoft JhengHei"/>
-                        </a:rPr>
-                        <a:t>05/07</a:t>
-                      </a:r>
-                    </a:p>
-                  </a:txBody>
-                  <a:tcPr anchor="ctr" marL="73152" marT="9144" marB="9144">
-                    <a:solidFill>
-                      <a:srgbClr val="FFFFFF"/>
-                    </a:solidFill>
-                  </a:tcPr>
-                </a:tc>
-                <a:tc>
-                  <a:txBody>
-                    <a:bodyPr/>
-                    <a:lstStyle/>
-                    <a:p>
-                      <a:r>
-                        <a:rPr sz="1150" b="1">
-                          <a:solidFill>
-                            <a:srgbClr val="F4A261"/>
-                          </a:solidFill>
-                          <a:latin typeface="Microsoft JhengHei"/>
-                          <a:ea typeface="Microsoft JhengHei"/>
-                          <a:cs typeface="Microsoft JhengHei"/>
-                        </a:rPr>
-                        <a:t>勒索病毒/加密</a:t>
-                      </a:r>
-                    </a:p>
-                  </a:txBody>
-                  <a:tcPr anchor="ctr" marL="73152" marT="9144" marB="9144">
-                    <a:solidFill>
-                      <a:srgbClr val="FFFFFF"/>
-                    </a:solidFill>
-                  </a:tcPr>
-                </a:tc>
-                <a:tc>
-                  <a:txBody>
-                    <a:bodyPr/>
-                    <a:lstStyle/>
-                    <a:p>
-                      <a:r>
-                        <a:rPr sz="1150" b="0">
-                          <a:solidFill>
-                            <a:srgbClr val="1A2233"/>
-                          </a:solidFill>
-                          <a:latin typeface="Microsoft JhengHei"/>
-                          <a:ea typeface="Microsoft JhengHei"/>
-                          <a:cs typeface="Microsoft JhengHei"/>
-                        </a:rPr>
-                        <a:t>經評估對公司財務、業務及營運皆無重大影響。</a:t>
-                      </a:r>
-                    </a:p>
-                  </a:txBody>
-                  <a:tcPr anchor="ctr" marL="73152" marT="9144" marB="9144">
-                    <a:solidFill>
-                      <a:srgbClr val="FFFFFF"/>
-                    </a:solidFill>
-                  </a:tcPr>
-                </a:tc>
-              </a:tr>
             </a:tbl>
           </a:graphicData>
         </a:graphic>
@@ -5962,7 +5825,7 @@
                 <a:ea typeface="Microsoft JhengHei"/>
                 <a:cs typeface="Microsoft JhengHei"/>
               </a:rPr>
-              <a:t>碩天</a:t>
+              <a:t>弘塑</a:t>
             </a:r>
           </a:p>
         </p:txBody>
@@ -6163,7 +6026,7 @@
                 <a:ea typeface="Microsoft JhengHei"/>
                 <a:cs typeface="Microsoft JhengHei"/>
               </a:rPr>
-              <a:t>1 起</a:t>
+              <a:t>2 起</a:t>
             </a:r>
           </a:p>
         </p:txBody>
@@ -6200,7 +6063,7 @@
                 <a:ea typeface="Microsoft JhengHei"/>
                 <a:cs typeface="Microsoft JhengHei"/>
               </a:rPr>
-              <a:t>永信</a:t>
+              <a:t>數字、永信</a:t>
             </a:r>
           </a:p>
         </p:txBody>
@@ -6238,244 +6101,6 @@
                 <a:cs typeface="Microsoft JhengHei"/>
               </a:rPr>
               <a:t>源自開發流程或委外廠商，須通報並通知當事人</a:t>
-            </a:r>
-          </a:p>
-        </p:txBody>
-      </p:sp>
-      <p:sp>
-        <p:nvSpPr>
-          <p:cNvPr id="24" name="Rounded Rectangle 23"/>
-          <p:cNvSpPr/>
-          <p:nvPr/>
-        </p:nvSpPr>
-        <p:spPr>
-          <a:xfrm>
-            <a:off x="5669280" y="5669279"/>
-            <a:ext cx="6035040" cy="1170432"/>
-          </a:xfrm>
-          <a:prstGeom prst="roundRect">
-            <a:avLst/>
-          </a:prstGeom>
-          <a:solidFill>
-            <a:srgbClr val="FFFFFF"/>
-          </a:solidFill>
-          <a:ln w="12700">
-            <a:solidFill>
-              <a:srgbClr val="DDE3EE"/>
-            </a:solidFill>
-          </a:ln>
-          <a:effectLst/>
-        </p:spPr>
-        <p:style>
-          <a:lnRef idx="1">
-            <a:schemeClr val="accent1"/>
-          </a:lnRef>
-          <a:fillRef idx="3">
-            <a:schemeClr val="accent1"/>
-          </a:fillRef>
-          <a:effectRef idx="2">
-            <a:schemeClr val="accent1"/>
-          </a:effectRef>
-          <a:fontRef idx="minor">
-            <a:schemeClr val="lt1"/>
-          </a:fontRef>
-        </p:style>
-        <p:txBody>
-          <a:bodyPr rtlCol="0" anchor="ctr"/>
-          <a:lstStyle/>
-          <a:p>
-            <a:pPr algn="ctr"/>
-          </a:p>
-        </p:txBody>
-      </p:sp>
-      <p:sp>
-        <p:nvSpPr>
-          <p:cNvPr id="25" name="Rectangle 24"/>
-          <p:cNvSpPr/>
-          <p:nvPr/>
-        </p:nvSpPr>
-        <p:spPr>
-          <a:xfrm>
-            <a:off x="5669280" y="5669279"/>
-            <a:ext cx="109728" cy="1170432"/>
-          </a:xfrm>
-          <a:prstGeom prst="rect">
-            <a:avLst/>
-          </a:prstGeom>
-          <a:solidFill>
-            <a:srgbClr val="5C6679"/>
-          </a:solidFill>
-          <a:ln>
-            <a:noFill/>
-          </a:ln>
-          <a:effectLst/>
-        </p:spPr>
-        <p:style>
-          <a:lnRef idx="1">
-            <a:schemeClr val="accent1"/>
-          </a:lnRef>
-          <a:fillRef idx="3">
-            <a:schemeClr val="accent1"/>
-          </a:fillRef>
-          <a:effectRef idx="2">
-            <a:schemeClr val="accent1"/>
-          </a:effectRef>
-          <a:fontRef idx="minor">
-            <a:schemeClr val="lt1"/>
-          </a:fontRef>
-        </p:style>
-        <p:txBody>
-          <a:bodyPr rtlCol="0" anchor="ctr"/>
-          <a:lstStyle/>
-          <a:p>
-            <a:pPr algn="ctr"/>
-          </a:p>
-        </p:txBody>
-      </p:sp>
-      <p:sp>
-        <p:nvSpPr>
-          <p:cNvPr id="26" name="TextBox 25"/>
-          <p:cNvSpPr txBox="1"/>
-          <p:nvPr/>
-        </p:nvSpPr>
-        <p:spPr>
-          <a:xfrm>
-            <a:off x="5897880" y="5779007"/>
-            <a:ext cx="4206240" cy="365760"/>
-          </a:xfrm>
-          <a:prstGeom prst="rect">
-            <a:avLst/>
-          </a:prstGeom>
-          <a:noFill/>
-        </p:spPr>
-        <p:txBody>
-          <a:bodyPr wrap="square" anchor="ctr" lIns="0" rIns="0" tIns="0" bIns="0">
-            <a:spAutoFit/>
-          </a:bodyPr>
-          <a:lstStyle/>
-          <a:p>
-            <a:pPr algn="l"/>
-            <a:r>
-              <a:rPr sz="1600" b="1">
-                <a:solidFill>
-                  <a:srgbClr val="1A2233"/>
-                </a:solidFill>
-                <a:latin typeface="Microsoft JhengHei"/>
-                <a:ea typeface="Microsoft JhengHei"/>
-                <a:cs typeface="Microsoft JhengHei"/>
-              </a:rPr>
-              <a:t>其他</a:t>
-            </a:r>
-          </a:p>
-        </p:txBody>
-      </p:sp>
-      <p:sp>
-        <p:nvSpPr>
-          <p:cNvPr id="27" name="TextBox 26"/>
-          <p:cNvSpPr txBox="1"/>
-          <p:nvPr/>
-        </p:nvSpPr>
-        <p:spPr>
-          <a:xfrm>
-            <a:off x="10058400" y="5779007"/>
-            <a:ext cx="1463040" cy="365760"/>
-          </a:xfrm>
-          <a:prstGeom prst="rect">
-            <a:avLst/>
-          </a:prstGeom>
-          <a:noFill/>
-        </p:spPr>
-        <p:txBody>
-          <a:bodyPr wrap="square" anchor="ctr" lIns="0" rIns="0" tIns="0" bIns="0">
-            <a:spAutoFit/>
-          </a:bodyPr>
-          <a:lstStyle/>
-          <a:p>
-            <a:pPr algn="r"/>
-            <a:r>
-              <a:rPr sz="1800" b="1">
-                <a:solidFill>
-                  <a:srgbClr val="5C6679"/>
-                </a:solidFill>
-                <a:latin typeface="Microsoft JhengHei"/>
-                <a:ea typeface="Microsoft JhengHei"/>
-                <a:cs typeface="Microsoft JhengHei"/>
-              </a:rPr>
-              <a:t>2 起</a:t>
-            </a:r>
-          </a:p>
-        </p:txBody>
-      </p:sp>
-      <p:sp>
-        <p:nvSpPr>
-          <p:cNvPr id="28" name="TextBox 27"/>
-          <p:cNvSpPr txBox="1"/>
-          <p:nvPr/>
-        </p:nvSpPr>
-        <p:spPr>
-          <a:xfrm>
-            <a:off x="5897880" y="6172199"/>
-            <a:ext cx="5577840" cy="274320"/>
-          </a:xfrm>
-          <a:prstGeom prst="rect">
-            <a:avLst/>
-          </a:prstGeom>
-          <a:noFill/>
-        </p:spPr>
-        <p:txBody>
-          <a:bodyPr wrap="square" anchor="t" lIns="0" rIns="0" tIns="0" bIns="0">
-            <a:spAutoFit/>
-          </a:bodyPr>
-          <a:lstStyle/>
-          <a:p>
-            <a:pPr algn="l"/>
-            <a:r>
-              <a:rPr sz="1150" b="1">
-                <a:solidFill>
-                  <a:srgbClr val="1A2233"/>
-                </a:solidFill>
-                <a:latin typeface="Microsoft JhengHei"/>
-                <a:ea typeface="Microsoft JhengHei"/>
-                <a:cs typeface="Microsoft JhengHei"/>
-              </a:rPr>
-              <a:t>數字、弘塑</a:t>
-            </a:r>
-          </a:p>
-        </p:txBody>
-      </p:sp>
-      <p:sp>
-        <p:nvSpPr>
-          <p:cNvPr id="29" name="TextBox 28"/>
-          <p:cNvSpPr txBox="1"/>
-          <p:nvPr/>
-        </p:nvSpPr>
-        <p:spPr>
-          <a:xfrm>
-            <a:off x="5897880" y="6437375"/>
-            <a:ext cx="5669280" cy="329184"/>
-          </a:xfrm>
-          <a:prstGeom prst="rect">
-            <a:avLst/>
-          </a:prstGeom>
-          <a:noFill/>
-        </p:spPr>
-        <p:txBody>
-          <a:bodyPr wrap="square" anchor="t" lIns="0" rIns="0" tIns="0" bIns="0">
-            <a:spAutoFit/>
-          </a:bodyPr>
-          <a:lstStyle/>
-          <a:p>
-            <a:pPr algn="l"/>
-            <a:r>
-              <a:rPr sz="1100" b="0">
-                <a:solidFill>
-                  <a:srgbClr val="5C6679"/>
-                </a:solidFill>
-                <a:latin typeface="Microsoft JhengHei"/>
-                <a:ea typeface="Microsoft JhengHei"/>
-                <a:cs typeface="Microsoft JhengHei"/>
-              </a:rPr>
-              <a:t>其他資安相關事件</a:t>
             </a:r>
           </a:p>
         </p:txBody>
@@ -6626,7 +6251,7 @@
         </p:nvGraphicFramePr>
         <p:xfrm>
           <a:off x="548640" y="1600200"/>
-          <a:ext cx="10789920" cy="4480560"/>
+          <a:ext cx="10789920" cy="4114800"/>
         </p:xfrm>
         <a:graphic>
           <a:graphicData uri="http://schemas.openxmlformats.org/drawingml/2006/table">
@@ -6641,7 +6266,7 @@
                 <a:gridCol w="3383280"/>
                 <a:gridCol w="2606040"/>
               </a:tblGrid>
-              <a:tr h="448056">
+              <a:tr h="457200">
                 <a:tc>
                   <a:txBody>
                     <a:bodyPr/>
@@ -6763,7 +6388,7 @@
                   </a:tcPr>
                 </a:tc>
               </a:tr>
-              <a:tr h="448056">
+              <a:tr h="457200">
                 <a:tc>
                   <a:txBody>
                     <a:bodyPr/>
@@ -6850,7 +6475,7 @@
                           <a:ea typeface="Microsoft JhengHei"/>
                           <a:cs typeface="Microsoft JhengHei"/>
                         </a:rPr>
-                        <a:t>—</a:t>
+                        <a:t>勤業眾信聯合會計師事務所</a:t>
                       </a:r>
                     </a:p>
                   </a:txBody>
@@ -6874,7 +6499,7 @@
                           <a:ea typeface="Microsoft JhengHei"/>
                           <a:cs typeface="Microsoft JhengHei"/>
                         </a:rPr>
-                        <a:t>—</a:t>
+                        <a:t>劉建良、張麗君</a:t>
                       </a:r>
                     </a:p>
                   </a:txBody>
@@ -6885,7 +6510,7 @@
                   </a:tcPr>
                 </a:tc>
               </a:tr>
-              <a:tr h="448056">
+              <a:tr h="457200">
                 <a:tc>
                   <a:txBody>
                     <a:bodyPr/>
@@ -6942,13 +6567,13 @@
                       <a:r>
                         <a:rPr sz="1150" b="1">
                           <a:solidFill>
-                            <a:srgbClr val="5C6679"/>
+                            <a:srgbClr val="27A6C4"/>
                           </a:solidFill>
                           <a:latin typeface="Microsoft JhengHei"/>
                           <a:ea typeface="Microsoft JhengHei"/>
                           <a:cs typeface="Microsoft JhengHei"/>
                         </a:rPr>
-                        <a:t>其他</a:t>
+                        <a:t>個資外洩</a:t>
                       </a:r>
                     </a:p>
                   </a:txBody>
@@ -6972,7 +6597,7 @@
                           <a:ea typeface="Microsoft JhengHei"/>
                           <a:cs typeface="Microsoft JhengHei"/>
                         </a:rPr>
-                        <a:t>—</a:t>
+                        <a:t>安侯建業聯合會計師事務所</a:t>
                       </a:r>
                     </a:p>
                   </a:txBody>
@@ -6996,7 +6621,7 @@
                           <a:ea typeface="Microsoft JhengHei"/>
                           <a:cs typeface="Microsoft JhengHei"/>
                         </a:rPr>
-                        <a:t>—</a:t>
+                        <a:t>羅瑞芝、余聖河</a:t>
                       </a:r>
                     </a:p>
                   </a:txBody>
@@ -7007,7 +6632,7 @@
                   </a:tcPr>
                 </a:tc>
               </a:tr>
-              <a:tr h="448056">
+              <a:tr h="457200">
                 <a:tc>
                   <a:txBody>
                     <a:bodyPr/>
@@ -7064,13 +6689,13 @@
                       <a:r>
                         <a:rPr sz="1150" b="1">
                           <a:solidFill>
-                            <a:srgbClr val="5C6679"/>
+                            <a:srgbClr val="F4A261"/>
                           </a:solidFill>
                           <a:latin typeface="Microsoft JhengHei"/>
                           <a:ea typeface="Microsoft JhengHei"/>
                           <a:cs typeface="Microsoft JhengHei"/>
                         </a:rPr>
-                        <a:t>其他</a:t>
+                        <a:t>勒索病毒/加密</a:t>
                       </a:r>
                     </a:p>
                   </a:txBody>
@@ -7094,7 +6719,7 @@
                           <a:ea typeface="Microsoft JhengHei"/>
                           <a:cs typeface="Microsoft JhengHei"/>
                         </a:rPr>
-                        <a:t>—</a:t>
+                        <a:t>資誠聯合會計師事務所</a:t>
                       </a:r>
                     </a:p>
                   </a:txBody>
@@ -7118,7 +6743,7 @@
                           <a:ea typeface="Microsoft JhengHei"/>
                           <a:cs typeface="Microsoft JhengHei"/>
                         </a:rPr>
-                        <a:t>—</a:t>
+                        <a:t>李典易、蔣承翰</a:t>
                       </a:r>
                     </a:p>
                   </a:txBody>
@@ -7129,7 +6754,7 @@
                   </a:tcPr>
                 </a:tc>
               </a:tr>
-              <a:tr h="448056">
+              <a:tr h="457200">
                 <a:tc>
                   <a:txBody>
                     <a:bodyPr/>
@@ -7216,7 +6841,7 @@
                           <a:ea typeface="Microsoft JhengHei"/>
                           <a:cs typeface="Microsoft JhengHei"/>
                         </a:rPr>
-                        <a:t>—</a:t>
+                        <a:t>資誠聯合會計師事務所</a:t>
                       </a:r>
                     </a:p>
                   </a:txBody>
@@ -7240,7 +6865,7 @@
                           <a:ea typeface="Microsoft JhengHei"/>
                           <a:cs typeface="Microsoft JhengHei"/>
                         </a:rPr>
-                        <a:t>—</a:t>
+                        <a:t>林秀珊、吳建志</a:t>
                       </a:r>
                     </a:p>
                   </a:txBody>
@@ -7251,7 +6876,7 @@
                   </a:tcPr>
                 </a:tc>
               </a:tr>
-              <a:tr h="448056">
+              <a:tr h="457200">
                 <a:tc>
                   <a:txBody>
                     <a:bodyPr/>
@@ -7373,7 +6998,7 @@
                   </a:tcPr>
                 </a:tc>
               </a:tr>
-              <a:tr h="448056">
+              <a:tr h="457200">
                 <a:tc>
                   <a:txBody>
                     <a:bodyPr/>
@@ -7495,7 +7120,7 @@
                   </a:tcPr>
                 </a:tc>
               </a:tr>
-              <a:tr h="448056">
+              <a:tr h="457200">
                 <a:tc>
                   <a:txBody>
                     <a:bodyPr/>
@@ -7617,7 +7242,7 @@
                   </a:tcPr>
                 </a:tc>
               </a:tr>
-              <a:tr h="448056">
+              <a:tr h="457200">
                 <a:tc>
                   <a:txBody>
                     <a:bodyPr/>
@@ -7739,128 +7364,6 @@
                   </a:tcPr>
                 </a:tc>
               </a:tr>
-              <a:tr h="448056">
-                <a:tc>
-                  <a:txBody>
-                    <a:bodyPr/>
-                    <a:lstStyle/>
-                    <a:p>
-                      <a:r>
-                        <a:rPr sz="1150" b="0">
-                          <a:solidFill>
-                            <a:srgbClr val="1A2233"/>
-                          </a:solidFill>
-                          <a:latin typeface="Microsoft JhengHei"/>
-                          <a:ea typeface="Microsoft JhengHei"/>
-                          <a:cs typeface="Microsoft JhengHei"/>
-                        </a:rPr>
-                        <a:t>碩天</a:t>
-                      </a:r>
-                    </a:p>
-                  </a:txBody>
-                  <a:tcPr anchor="ctr" marL="73152" marT="9144" marB="9144">
-                    <a:solidFill>
-                      <a:srgbClr val="FFFFFF"/>
-                    </a:solidFill>
-                  </a:tcPr>
-                </a:tc>
-                <a:tc>
-                  <a:txBody>
-                    <a:bodyPr/>
-                    <a:lstStyle/>
-                    <a:p>
-                      <a:r>
-                        <a:rPr sz="1150" b="0">
-                          <a:solidFill>
-                            <a:srgbClr val="1A2233"/>
-                          </a:solidFill>
-                          <a:latin typeface="Microsoft JhengHei"/>
-                          <a:ea typeface="Microsoft JhengHei"/>
-                          <a:cs typeface="Microsoft JhengHei"/>
-                        </a:rPr>
-                        <a:t>3617</a:t>
-                      </a:r>
-                    </a:p>
-                  </a:txBody>
-                  <a:tcPr anchor="ctr" marL="73152" marT="9144" marB="9144">
-                    <a:solidFill>
-                      <a:srgbClr val="FFFFFF"/>
-                    </a:solidFill>
-                  </a:tcPr>
-                </a:tc>
-                <a:tc>
-                  <a:txBody>
-                    <a:bodyPr/>
-                    <a:lstStyle/>
-                    <a:p>
-                      <a:r>
-                        <a:rPr sz="1150" b="1">
-                          <a:solidFill>
-                            <a:srgbClr val="F4A261"/>
-                          </a:solidFill>
-                          <a:latin typeface="Microsoft JhengHei"/>
-                          <a:ea typeface="Microsoft JhengHei"/>
-                          <a:cs typeface="Microsoft JhengHei"/>
-                        </a:rPr>
-                        <a:t>勒索病毒/加密</a:t>
-                      </a:r>
-                    </a:p>
-                  </a:txBody>
-                  <a:tcPr anchor="ctr" marL="73152" marT="9144" marB="9144">
-                    <a:solidFill>
-                      <a:srgbClr val="FFFFFF"/>
-                    </a:solidFill>
-                  </a:tcPr>
-                </a:tc>
-                <a:tc>
-                  <a:txBody>
-                    <a:bodyPr/>
-                    <a:lstStyle/>
-                    <a:p>
-                      <a:r>
-                        <a:rPr sz="1150" b="0">
-                          <a:solidFill>
-                            <a:srgbClr val="1A2233"/>
-                          </a:solidFill>
-                          <a:latin typeface="Microsoft JhengHei"/>
-                          <a:ea typeface="Microsoft JhengHei"/>
-                          <a:cs typeface="Microsoft JhengHei"/>
-                        </a:rPr>
-                        <a:t>勤業眾信聯合會計師事務所</a:t>
-                      </a:r>
-                    </a:p>
-                  </a:txBody>
-                  <a:tcPr anchor="ctr" marL="73152" marT="9144" marB="9144">
-                    <a:solidFill>
-                      <a:srgbClr val="FFFFFF"/>
-                    </a:solidFill>
-                  </a:tcPr>
-                </a:tc>
-                <a:tc>
-                  <a:txBody>
-                    <a:bodyPr/>
-                    <a:lstStyle/>
-                    <a:p>
-                      <a:r>
-                        <a:rPr sz="1150" b="0">
-                          <a:solidFill>
-                            <a:srgbClr val="1A2233"/>
-                          </a:solidFill>
-                          <a:latin typeface="Microsoft JhengHei"/>
-                          <a:ea typeface="Microsoft JhengHei"/>
-                          <a:cs typeface="Microsoft JhengHei"/>
-                        </a:rPr>
-                        <a:t>張至誼、鄭淂蓁</a:t>
-                      </a:r>
-                    </a:p>
-                  </a:txBody>
-                  <a:tcPr anchor="ctr" marL="73152" marT="9144" marB="9144">
-                    <a:solidFill>
-                      <a:srgbClr val="FFFFFF"/>
-                    </a:solidFill>
-                  </a:tcPr>
-                </a:tc>
-              </a:tr>
             </a:tbl>
           </a:graphicData>
         </a:graphic>
@@ -9515,7 +9018,7 @@
                 <a:ea typeface="Microsoft JhengHei"/>
                 <a:cs typeface="Microsoft JhengHei"/>
               </a:rPr>
-              <a:t/>
+              <a:t>本公司部份資訊系統遭受駭客網路攻擊。</a:t>
             </a:r>
           </a:p>
         </p:txBody>
@@ -9567,7 +9070,7 @@
                 <a:ea typeface="Microsoft JhengHei"/>
                 <a:cs typeface="Microsoft JhengHei"/>
               </a:rPr>
-              <a:t/>
+              <a:t>本公司將持續強化網路與資訊安全架構，並擴大資安防禦措施，以提升整體資安防護能力</a:t>
             </a:r>
           </a:p>
         </p:txBody>
@@ -9633,7 +9136,7 @@
             <a:avLst/>
           </a:prstGeom>
           <a:solidFill>
-            <a:srgbClr val="5C6679"/>
+            <a:srgbClr val="27A6C4"/>
           </a:solidFill>
           <a:ln>
             <a:noFill/>
@@ -9725,7 +9228,7 @@
             <a:avLst/>
           </a:prstGeom>
           <a:solidFill>
-            <a:srgbClr val="5C6679"/>
+            <a:srgbClr val="27A6C4"/>
           </a:solidFill>
           <a:ln>
             <a:noFill/>
@@ -9786,7 +9289,7 @@
                 <a:ea typeface="Microsoft JhengHei"/>
                 <a:cs typeface="Microsoft JhengHei"/>
               </a:rPr>
-              <a:t>其他</a:t>
+              <a:t>個資外洩</a:t>
             </a:r>
           </a:p>
         </p:txBody>
@@ -9821,7 +9324,7 @@
             <a:r>
               <a:rPr sz="1100" b="1">
                 <a:solidFill>
-                  <a:srgbClr val="5C6679"/>
+                  <a:srgbClr val="27A6C4"/>
                 </a:solidFill>
                 <a:latin typeface="Microsoft JhengHei"/>
                 <a:ea typeface="Microsoft JhengHei"/>
@@ -9838,7 +9341,7 @@
                 <a:ea typeface="Microsoft JhengHei"/>
                 <a:cs typeface="Microsoft JhengHei"/>
               </a:rPr>
-              <a:t/>
+              <a:t>本公司於115年5月25日進行內部活動網頁開發與測試流程時，因程式碼管理作業設定不當，致部分未去…</a:t>
             </a:r>
           </a:p>
         </p:txBody>
@@ -9873,7 +9376,7 @@
             <a:r>
               <a:rPr sz="1100" b="1">
                 <a:solidFill>
-                  <a:srgbClr val="5C6679"/>
+                  <a:srgbClr val="27A6C4"/>
                 </a:solidFill>
                 <a:latin typeface="Microsoft JhengHei"/>
                 <a:ea typeface="Microsoft JhengHei"/>
@@ -9890,7 +9393,7 @@
                 <a:ea typeface="Microsoft JhengHei"/>
                 <a:cs typeface="Microsoft JhengHei"/>
               </a:rPr>
-              <a:t/>
+              <a:t>(1)依據安全軟體發展生命週期(SSDLC)之框架，優化開發流程管制作業(2)落實權限管理及審查，避免未經授權之人員得以…</a:t>
             </a:r>
           </a:p>
         </p:txBody>
@@ -9956,7 +9459,7 @@
             <a:avLst/>
           </a:prstGeom>
           <a:solidFill>
-            <a:srgbClr val="5C6679"/>
+            <a:srgbClr val="F4A261"/>
           </a:solidFill>
           <a:ln>
             <a:noFill/>
@@ -10048,7 +9551,7 @@
             <a:avLst/>
           </a:prstGeom>
           <a:solidFill>
-            <a:srgbClr val="5C6679"/>
+            <a:srgbClr val="F4A261"/>
           </a:solidFill>
           <a:ln>
             <a:noFill/>
@@ -10109,7 +9612,7 @@
                 <a:ea typeface="Microsoft JhengHei"/>
                 <a:cs typeface="Microsoft JhengHei"/>
               </a:rPr>
-              <a:t>其他</a:t>
+              <a:t>勒索病毒/加密</a:t>
             </a:r>
           </a:p>
         </p:txBody>
@@ -10144,7 +9647,7 @@
             <a:r>
               <a:rPr sz="1100" b="1">
                 <a:solidFill>
-                  <a:srgbClr val="5C6679"/>
+                  <a:srgbClr val="F4A261"/>
                 </a:solidFill>
                 <a:latin typeface="Microsoft JhengHei"/>
                 <a:ea typeface="Microsoft JhengHei"/>
@@ -10161,7 +9664,7 @@
                 <a:ea typeface="Microsoft JhengHei"/>
                 <a:cs typeface="Microsoft JhengHei"/>
               </a:rPr>
-              <a:t/>
+              <a:t>本公司資訊系統遭受勒索病毒攻擊。</a:t>
             </a:r>
           </a:p>
         </p:txBody>
@@ -10196,7 +9699,7 @@
             <a:r>
               <a:rPr sz="1100" b="1">
                 <a:solidFill>
-                  <a:srgbClr val="5C6679"/>
+                  <a:srgbClr val="F4A261"/>
                 </a:solidFill>
                 <a:latin typeface="Microsoft JhengHei"/>
                 <a:ea typeface="Microsoft JhengHei"/>
@@ -10213,7 +9716,7 @@
                 <a:ea typeface="Microsoft JhengHei"/>
                 <a:cs typeface="Microsoft JhengHei"/>
               </a:rPr>
-              <a:t/>
+              <a:t>本公司將持續加強資訊安全監控與防護機制，提升網路與資訊基礎架構之安全管理，並導入更完善之資安控管措施，以降低未來風險。</a:t>
             </a:r>
           </a:p>
         </p:txBody>
@@ -11965,465 +11468,6 @@
                 <a:cs typeface="Microsoft JhengHei"/>
               </a:rPr>
               <a:t>本公司已啟動防禦應變，並持續強化資安管控。</a:t>
-            </a:r>
-          </a:p>
-        </p:txBody>
-      </p:sp>
-    </p:spTree>
-  </p:cSld>
-  <p:clrMapOvr>
-    <a:masterClrMapping/>
-  </p:clrMapOvr>
-</p:sld>
-</file>
-
-<file path=ppt/slides/slide8.xml><?xml version="1.0" encoding="utf-8"?>
-<p:sld xmlns:a="http://schemas.openxmlformats.org/drawingml/2006/main" xmlns:p="http://schemas.openxmlformats.org/presentationml/2006/main" xmlns:r="http://schemas.openxmlformats.org/officeDocument/2006/relationships">
-  <p:cSld>
-    <p:spTree>
-      <p:nvGrpSpPr>
-        <p:cNvPr id="1" name=""/>
-        <p:cNvGrpSpPr/>
-        <p:nvPr/>
-      </p:nvGrpSpPr>
-      <p:grpSpPr/>
-      <p:sp>
-        <p:nvSpPr>
-          <p:cNvPr id="2" name="Rectangle 1"/>
-          <p:cNvSpPr/>
-          <p:nvPr/>
-        </p:nvSpPr>
-        <p:spPr>
-          <a:xfrm>
-            <a:off x="0" y="0"/>
-            <a:ext cx="12191695" cy="6858000"/>
-          </a:xfrm>
-          <a:prstGeom prst="rect">
-            <a:avLst/>
-          </a:prstGeom>
-          <a:solidFill>
-            <a:srgbClr val="F6F8FC"/>
-          </a:solidFill>
-          <a:ln>
-            <a:noFill/>
-          </a:ln>
-          <a:effectLst/>
-        </p:spPr>
-        <p:style>
-          <a:lnRef idx="1">
-            <a:schemeClr val="accent1"/>
-          </a:lnRef>
-          <a:fillRef idx="3">
-            <a:schemeClr val="accent1"/>
-          </a:fillRef>
-          <a:effectRef idx="2">
-            <a:schemeClr val="accent1"/>
-          </a:effectRef>
-          <a:fontRef idx="minor">
-            <a:schemeClr val="lt1"/>
-          </a:fontRef>
-        </p:style>
-        <p:txBody>
-          <a:bodyPr rtlCol="0" anchor="ctr"/>
-          <a:lstStyle/>
-          <a:p>
-            <a:pPr algn="ctr"/>
-          </a:p>
-        </p:txBody>
-      </p:sp>
-      <p:sp>
-        <p:nvSpPr>
-          <p:cNvPr id="3" name="TextBox 2"/>
-          <p:cNvSpPr txBox="1"/>
-          <p:nvPr/>
-        </p:nvSpPr>
-        <p:spPr>
-          <a:xfrm>
-            <a:off x="548640" y="365760"/>
-            <a:ext cx="9144000" cy="640080"/>
-          </a:xfrm>
-          <a:prstGeom prst="rect">
-            <a:avLst/>
-          </a:prstGeom>
-          <a:noFill/>
-        </p:spPr>
-        <p:txBody>
-          <a:bodyPr wrap="square" anchor="t" lIns="0" rIns="0" tIns="0" bIns="0">
-            <a:spAutoFit/>
-          </a:bodyPr>
-          <a:lstStyle/>
-          <a:p>
-            <a:pPr algn="l"/>
-            <a:r>
-              <a:rPr sz="3000" b="1">
-                <a:solidFill>
-                  <a:srgbClr val="1A2233"/>
-                </a:solidFill>
-                <a:latin typeface="Microsoft JhengHei"/>
-                <a:ea typeface="Microsoft JhengHei"/>
-                <a:cs typeface="Microsoft JhengHei"/>
-              </a:rPr>
-              <a:t>個案因應重點（3）</a:t>
-            </a:r>
-          </a:p>
-        </p:txBody>
-      </p:sp>
-      <p:sp>
-        <p:nvSpPr>
-          <p:cNvPr id="4" name="TextBox 3"/>
-          <p:cNvSpPr txBox="1"/>
-          <p:nvPr/>
-        </p:nvSpPr>
-        <p:spPr>
-          <a:xfrm>
-            <a:off x="566928" y="1005840"/>
-            <a:ext cx="10058400" cy="365760"/>
-          </a:xfrm>
-          <a:prstGeom prst="rect">
-            <a:avLst/>
-          </a:prstGeom>
-          <a:noFill/>
-        </p:spPr>
-        <p:txBody>
-          <a:bodyPr wrap="square" anchor="t" lIns="0" rIns="0" tIns="0" bIns="0">
-            <a:spAutoFit/>
-          </a:bodyPr>
-          <a:lstStyle/>
-          <a:p>
-            <a:pPr algn="l"/>
-            <a:r>
-              <a:rPr sz="1300" b="0">
-                <a:solidFill>
-                  <a:srgbClr val="5C6679"/>
-                </a:solidFill>
-                <a:latin typeface="Microsoft JhengHei"/>
-                <a:ea typeface="Microsoft JhengHei"/>
-                <a:cs typeface="Microsoft JhengHei"/>
-              </a:rPr>
-              <a:t>各公司公告之發生緣由與因應措施摘要</a:t>
-            </a:r>
-          </a:p>
-        </p:txBody>
-      </p:sp>
-      <p:sp>
-        <p:nvSpPr>
-          <p:cNvPr id="5" name="Rounded Rectangle 4"/>
-          <p:cNvSpPr/>
-          <p:nvPr/>
-        </p:nvSpPr>
-        <p:spPr>
-          <a:xfrm>
-            <a:off x="548640" y="1554480"/>
-            <a:ext cx="5394960" cy="2148840"/>
-          </a:xfrm>
-          <a:prstGeom prst="roundRect">
-            <a:avLst/>
-          </a:prstGeom>
-          <a:solidFill>
-            <a:srgbClr val="FFFFFF"/>
-          </a:solidFill>
-          <a:ln w="12700">
-            <a:solidFill>
-              <a:srgbClr val="DDE3EE"/>
-            </a:solidFill>
-          </a:ln>
-          <a:effectLst/>
-        </p:spPr>
-        <p:style>
-          <a:lnRef idx="1">
-            <a:schemeClr val="accent1"/>
-          </a:lnRef>
-          <a:fillRef idx="3">
-            <a:schemeClr val="accent1"/>
-          </a:fillRef>
-          <a:effectRef idx="2">
-            <a:schemeClr val="accent1"/>
-          </a:effectRef>
-          <a:fontRef idx="minor">
-            <a:schemeClr val="lt1"/>
-          </a:fontRef>
-        </p:style>
-        <p:txBody>
-          <a:bodyPr rtlCol="0" anchor="ctr"/>
-          <a:lstStyle/>
-          <a:p>
-            <a:pPr algn="ctr"/>
-          </a:p>
-        </p:txBody>
-      </p:sp>
-      <p:sp>
-        <p:nvSpPr>
-          <p:cNvPr id="6" name="Rectangle 5"/>
-          <p:cNvSpPr/>
-          <p:nvPr/>
-        </p:nvSpPr>
-        <p:spPr>
-          <a:xfrm>
-            <a:off x="548640" y="1554480"/>
-            <a:ext cx="5394960" cy="109728"/>
-          </a:xfrm>
-          <a:prstGeom prst="rect">
-            <a:avLst/>
-          </a:prstGeom>
-          <a:solidFill>
-            <a:srgbClr val="F4A261"/>
-          </a:solidFill>
-          <a:ln>
-            <a:noFill/>
-          </a:ln>
-          <a:effectLst/>
-        </p:spPr>
-        <p:style>
-          <a:lnRef idx="1">
-            <a:schemeClr val="accent1"/>
-          </a:lnRef>
-          <a:fillRef idx="3">
-            <a:schemeClr val="accent1"/>
-          </a:fillRef>
-          <a:effectRef idx="2">
-            <a:schemeClr val="accent1"/>
-          </a:effectRef>
-          <a:fontRef idx="minor">
-            <a:schemeClr val="lt1"/>
-          </a:fontRef>
-        </p:style>
-        <p:txBody>
-          <a:bodyPr rtlCol="0" anchor="ctr"/>
-          <a:lstStyle/>
-          <a:p>
-            <a:pPr algn="ctr"/>
-          </a:p>
-        </p:txBody>
-      </p:sp>
-      <p:sp>
-        <p:nvSpPr>
-          <p:cNvPr id="7" name="TextBox 6"/>
-          <p:cNvSpPr txBox="1"/>
-          <p:nvPr/>
-        </p:nvSpPr>
-        <p:spPr>
-          <a:xfrm>
-            <a:off x="777240" y="1773936"/>
-            <a:ext cx="3657600" cy="365760"/>
-          </a:xfrm>
-          <a:prstGeom prst="rect">
-            <a:avLst/>
-          </a:prstGeom>
-          <a:noFill/>
-        </p:spPr>
-        <p:txBody>
-          <a:bodyPr wrap="square" anchor="ctr" lIns="0" rIns="0" tIns="0" bIns="0">
-            <a:spAutoFit/>
-          </a:bodyPr>
-          <a:lstStyle/>
-          <a:p>
-            <a:pPr algn="l"/>
-            <a:r>
-              <a:rPr sz="1600" b="1">
-                <a:solidFill>
-                  <a:srgbClr val="1A2233"/>
-                </a:solidFill>
-                <a:latin typeface="Microsoft JhengHei"/>
-                <a:ea typeface="Microsoft JhengHei"/>
-                <a:cs typeface="Microsoft JhengHei"/>
-              </a:rPr>
-              <a:t>碩天 </a:t>
-            </a:r>
-            <a:r>
-              <a:rPr sz="1300" b="0">
-                <a:solidFill>
-                  <a:srgbClr val="5C6679"/>
-                </a:solidFill>
-                <a:latin typeface="Microsoft JhengHei"/>
-                <a:ea typeface="Microsoft JhengHei"/>
-                <a:cs typeface="Microsoft JhengHei"/>
-              </a:rPr>
-              <a:t>3617</a:t>
-            </a:r>
-          </a:p>
-        </p:txBody>
-      </p:sp>
-      <p:sp>
-        <p:nvSpPr>
-          <p:cNvPr id="8" name="Rounded Rectangle 7"/>
-          <p:cNvSpPr/>
-          <p:nvPr/>
-        </p:nvSpPr>
-        <p:spPr>
-          <a:xfrm>
-            <a:off x="4526280" y="1792224"/>
-            <a:ext cx="1234440" cy="347472"/>
-          </a:xfrm>
-          <a:prstGeom prst="roundRect">
-            <a:avLst/>
-          </a:prstGeom>
-          <a:solidFill>
-            <a:srgbClr val="F4A261"/>
-          </a:solidFill>
-          <a:ln>
-            <a:noFill/>
-          </a:ln>
-          <a:effectLst/>
-        </p:spPr>
-        <p:style>
-          <a:lnRef idx="1">
-            <a:schemeClr val="accent1"/>
-          </a:lnRef>
-          <a:fillRef idx="3">
-            <a:schemeClr val="accent1"/>
-          </a:fillRef>
-          <a:effectRef idx="2">
-            <a:schemeClr val="accent1"/>
-          </a:effectRef>
-          <a:fontRef idx="minor">
-            <a:schemeClr val="lt1"/>
-          </a:fontRef>
-        </p:style>
-        <p:txBody>
-          <a:bodyPr rtlCol="0" anchor="ctr"/>
-          <a:lstStyle/>
-          <a:p>
-            <a:pPr algn="ctr"/>
-          </a:p>
-        </p:txBody>
-      </p:sp>
-      <p:sp>
-        <p:nvSpPr>
-          <p:cNvPr id="9" name="TextBox 8"/>
-          <p:cNvSpPr txBox="1"/>
-          <p:nvPr/>
-        </p:nvSpPr>
-        <p:spPr>
-          <a:xfrm>
-            <a:off x="4526280" y="1792224"/>
-            <a:ext cx="1234440" cy="347472"/>
-          </a:xfrm>
-          <a:prstGeom prst="rect">
-            <a:avLst/>
-          </a:prstGeom>
-          <a:noFill/>
-        </p:spPr>
-        <p:txBody>
-          <a:bodyPr wrap="square" anchor="ctr" lIns="0" rIns="0" tIns="0" bIns="0">
-            <a:spAutoFit/>
-          </a:bodyPr>
-          <a:lstStyle/>
-          <a:p>
-            <a:pPr algn="ctr"/>
-            <a:r>
-              <a:rPr sz="1050" b="1">
-                <a:solidFill>
-                  <a:srgbClr val="FFFFFF"/>
-                </a:solidFill>
-                <a:latin typeface="Microsoft JhengHei"/>
-                <a:ea typeface="Microsoft JhengHei"/>
-                <a:cs typeface="Microsoft JhengHei"/>
-              </a:rPr>
-              <a:t>勒索病毒/加密</a:t>
-            </a:r>
-          </a:p>
-        </p:txBody>
-      </p:sp>
-      <p:sp>
-        <p:nvSpPr>
-          <p:cNvPr id="10" name="TextBox 9"/>
-          <p:cNvSpPr txBox="1"/>
-          <p:nvPr/>
-        </p:nvSpPr>
-        <p:spPr>
-          <a:xfrm>
-            <a:off x="777240" y="2267712"/>
-            <a:ext cx="4937760" cy="640080"/>
-          </a:xfrm>
-          <a:prstGeom prst="rect">
-            <a:avLst/>
-          </a:prstGeom>
-          <a:noFill/>
-        </p:spPr>
-        <p:txBody>
-          <a:bodyPr wrap="square" anchor="t" lIns="0" rIns="0" tIns="0" bIns="0">
-            <a:spAutoFit/>
-          </a:bodyPr>
-          <a:lstStyle/>
-          <a:p>
-            <a:pPr algn="l">
-              <a:lnSpc>
-                <a:spcPts val="1500"/>
-              </a:lnSpc>
-            </a:pPr>
-            <a:r>
-              <a:rPr sz="1100" b="1">
-                <a:solidFill>
-                  <a:srgbClr val="F4A261"/>
-                </a:solidFill>
-                <a:latin typeface="Microsoft JhengHei"/>
-                <a:ea typeface="Microsoft JhengHei"/>
-                <a:cs typeface="Microsoft JhengHei"/>
-              </a:rPr>
-              <a:t>緣由　</a:t>
-            </a:r>
-            <a:r>
-              <a:rPr sz="1100" b="0">
-                <a:solidFill>
-                  <a:srgbClr val="1A2233"/>
-                </a:solidFill>
-                <a:latin typeface="Microsoft JhengHei"/>
-                <a:ea typeface="Microsoft JhengHei"/>
-                <a:cs typeface="Microsoft JhengHei"/>
-              </a:rPr>
-              <a:t>本公司資安單位發現遭不明駭客入侵主機並將部分伺服器資料加密。</a:t>
-            </a:r>
-          </a:p>
-        </p:txBody>
-      </p:sp>
-      <p:sp>
-        <p:nvSpPr>
-          <p:cNvPr id="11" name="TextBox 10"/>
-          <p:cNvSpPr txBox="1"/>
-          <p:nvPr/>
-        </p:nvSpPr>
-        <p:spPr>
-          <a:xfrm>
-            <a:off x="777240" y="2926080"/>
-            <a:ext cx="4937760" cy="713232"/>
-          </a:xfrm>
-          <a:prstGeom prst="rect">
-            <a:avLst/>
-          </a:prstGeom>
-          <a:noFill/>
-        </p:spPr>
-        <p:txBody>
-          <a:bodyPr wrap="square" anchor="t" lIns="0" rIns="0" tIns="0" bIns="0">
-            <a:spAutoFit/>
-          </a:bodyPr>
-          <a:lstStyle/>
-          <a:p>
-            <a:pPr algn="l">
-              <a:lnSpc>
-                <a:spcPts val="1500"/>
-              </a:lnSpc>
-            </a:pPr>
-            <a:r>
-              <a:rPr sz="1100" b="1">
-                <a:solidFill>
-                  <a:srgbClr val="F4A261"/>
-                </a:solidFill>
-                <a:latin typeface="Microsoft JhengHei"/>
-                <a:ea typeface="Microsoft JhengHei"/>
-                <a:cs typeface="Microsoft JhengHei"/>
-              </a:rPr>
-              <a:t>因應　</a:t>
-            </a:r>
-            <a:r>
-              <a:rPr sz="1100" b="0">
-                <a:solidFill>
-                  <a:srgbClr val="1A2233"/>
-                </a:solidFill>
-                <a:latin typeface="Microsoft JhengHei"/>
-                <a:ea typeface="Microsoft JhengHei"/>
-                <a:cs typeface="Microsoft JhengHei"/>
-              </a:rPr>
-              <a:t>本公司將持續提升網路與資訊基礎架構之安全管控，以確保資訊安全。</a:t>
             </a:r>
           </a:p>
         </p:txBody>

--- a/資安事件因應分析.pptx
+++ b/資安事件因應分析.pptx
@@ -161,11 +161,19 @@
               </a:solidFill>
             </c:spPr>
           </c:dPt>
+          <c:dPt>
+            <c:idx val="3"/>
+            <c:spPr>
+              <a:solidFill>
+                <a:srgbClr val="5C6679"/>
+              </a:solidFill>
+            </c:spPr>
+          </c:dPt>
           <c:cat>
             <c:strRef>
-              <c:f>Sheet1!$A$2:$A$4</c:f>
+              <c:f>Sheet1!$A$2:$A$5</c:f>
               <c:strCache>
-                <c:ptCount val="3"/>
+                <c:ptCount val="4"/>
                 <c:pt idx="0">
                   <c:v>駭客攻擊</c:v>
                 </c:pt>
@@ -175,23 +183,29 @@
                 <c:pt idx="2">
                   <c:v>個資外洩</c:v>
                 </c:pt>
+                <c:pt idx="3">
+                  <c:v>其他</c:v>
+                </c:pt>
               </c:strCache>
             </c:strRef>
           </c:cat>
           <c:val>
             <c:numRef>
-              <c:f>Sheet1!$B$2:$B$4</c:f>
+              <c:f>Sheet1!$B$2:$B$5</c:f>
               <c:numCache>
                 <c:formatCode>General</c:formatCode>
-                <c:ptCount val="3"/>
+                <c:ptCount val="4"/>
                 <c:pt idx="0">
-                  <c:v>5</c:v>
+                  <c:v>2</c:v>
                 </c:pt>
                 <c:pt idx="1">
                   <c:v>1</c:v>
                 </c:pt>
                 <c:pt idx="2">
-                  <c:v>2</c:v>
+                  <c:v>1</c:v>
+                </c:pt>
+                <c:pt idx="3">
+                  <c:v>1</c:v>
                 </c:pt>
               </c:numCache>
             </c:numRef>
@@ -3528,7 +3542,7 @@
                 <a:ea typeface="Microsoft JhengHei"/>
                 <a:cs typeface="Microsoft JhengHei"/>
               </a:rPr>
-              <a:t>資料期間 2026-05-09 ~ 2026-06-09　｜　MOPS 重大訊息全文檢索　｜　8 家公司</a:t>
+              <a:t>資料期間 2026-05-17 ~ 2026-06-17　｜　MOPS 重大訊息全文檢索　｜　5 家公司</a:t>
             </a:r>
           </a:p>
         </p:txBody>
@@ -3745,7 +3759,7 @@
                 <a:ea typeface="Microsoft JhengHei"/>
                 <a:cs typeface="Microsoft JhengHei"/>
               </a:rPr>
-              <a:t>資料期間內 MOPS 揭露之 8 起資安相關重大訊息</a:t>
+              <a:t>資料期間內 MOPS 揭露之 5 起資安相關重大訊息</a:t>
             </a:r>
           </a:p>
         </p:txBody>
@@ -3828,7 +3842,7 @@
                 <a:ea typeface="Microsoft JhengHei"/>
                 <a:cs typeface="Microsoft JhengHei"/>
               </a:rPr>
-              <a:t>8</a:t>
+              <a:t>5</a:t>
             </a:r>
           </a:p>
         </p:txBody>
@@ -3948,7 +3962,7 @@
                 <a:ea typeface="Microsoft JhengHei"/>
                 <a:cs typeface="Microsoft JhengHei"/>
               </a:rPr>
-              <a:t>3</a:t>
+              <a:t>4</a:t>
             </a:r>
           </a:p>
         </p:txBody>
@@ -4120,7 +4134,7 @@
         </p:nvGraphicFramePr>
         <p:xfrm>
           <a:off x="548640" y="2697480"/>
-          <a:ext cx="11064240" cy="3456432"/>
+          <a:ext cx="11064240" cy="2304288"/>
         </p:xfrm>
         <a:graphic>
           <a:graphicData uri="http://schemas.openxmlformats.org/drawingml/2006/table">
@@ -4272,7 +4286,7 @@
                           <a:ea typeface="Microsoft JhengHei"/>
                           <a:cs typeface="Microsoft JhengHei"/>
                         </a:rPr>
-                        <a:t>巨路</a:t>
+                        <a:t>上福</a:t>
                       </a:r>
                     </a:p>
                   </a:txBody>
@@ -4296,7 +4310,7 @@
                           <a:ea typeface="Microsoft JhengHei"/>
                           <a:cs typeface="Microsoft JhengHei"/>
                         </a:rPr>
-                        <a:t>6192</a:t>
+                        <a:t>6128</a:t>
                       </a:r>
                     </a:p>
                   </a:txBody>
@@ -4320,7 +4334,495 @@
                           <a:ea typeface="Microsoft JhengHei"/>
                           <a:cs typeface="Microsoft JhengHei"/>
                         </a:rPr>
+                        <a:t>06/16</a:t>
+                      </a:r>
+                    </a:p>
+                  </a:txBody>
+                  <a:tcPr anchor="ctr" marL="73152" marT="9144" marB="9144">
+                    <a:solidFill>
+                      <a:srgbClr val="FFFFFF"/>
+                    </a:solidFill>
+                  </a:tcPr>
+                </a:tc>
+                <a:tc>
+                  <a:txBody>
+                    <a:bodyPr/>
+                    <a:lstStyle/>
+                    <a:p>
+                      <a:r>
+                        <a:rPr sz="1150" b="1">
+                          <a:solidFill>
+                            <a:srgbClr val="5C6679"/>
+                          </a:solidFill>
+                          <a:latin typeface="Microsoft JhengHei"/>
+                          <a:ea typeface="Microsoft JhengHei"/>
+                          <a:cs typeface="Microsoft JhengHei"/>
+                        </a:rPr>
+                        <a:t>其他</a:t>
+                      </a:r>
+                    </a:p>
+                  </a:txBody>
+                  <a:tcPr anchor="ctr" marL="73152" marT="9144" marB="9144">
+                    <a:solidFill>
+                      <a:srgbClr val="FFFFFF"/>
+                    </a:solidFill>
+                  </a:tcPr>
+                </a:tc>
+                <a:tc>
+                  <a:txBody>
+                    <a:bodyPr/>
+                    <a:lstStyle/>
+                    <a:p>
+                      <a:r>
+                        <a:rPr sz="1150" b="0">
+                          <a:solidFill>
+                            <a:srgbClr val="1A2233"/>
+                          </a:solidFill>
+                          <a:latin typeface="Microsoft JhengHei"/>
+                          <a:ea typeface="Microsoft JhengHei"/>
+                          <a:cs typeface="Microsoft JhengHei"/>
+                        </a:rPr>
+                        <a:t>目前評估該事件對公司營運造成暫停出貨的影響，現階段出貨已陸續恢復中。</a:t>
+                      </a:r>
+                    </a:p>
+                  </a:txBody>
+                  <a:tcPr anchor="ctr" marL="73152" marT="9144" marB="9144">
+                    <a:solidFill>
+                      <a:srgbClr val="FFFFFF"/>
+                    </a:solidFill>
+                  </a:tcPr>
+                </a:tc>
+              </a:tr>
+              <a:tr h="384048">
+                <a:tc>
+                  <a:txBody>
+                    <a:bodyPr/>
+                    <a:lstStyle/>
+                    <a:p>
+                      <a:r>
+                        <a:rPr sz="1150" b="0">
+                          <a:solidFill>
+                            <a:srgbClr val="1A2233"/>
+                          </a:solidFill>
+                          <a:latin typeface="Microsoft JhengHei"/>
+                          <a:ea typeface="Microsoft JhengHei"/>
+                          <a:cs typeface="Microsoft JhengHei"/>
+                        </a:rPr>
+                        <a:t>巨路</a:t>
+                      </a:r>
+                    </a:p>
+                  </a:txBody>
+                  <a:tcPr anchor="ctr" marL="73152" marT="9144" marB="9144">
+                    <a:solidFill>
+                      <a:srgbClr val="EEF2F9"/>
+                    </a:solidFill>
+                  </a:tcPr>
+                </a:tc>
+                <a:tc>
+                  <a:txBody>
+                    <a:bodyPr/>
+                    <a:lstStyle/>
+                    <a:p>
+                      <a:r>
+                        <a:rPr sz="1150" b="0">
+                          <a:solidFill>
+                            <a:srgbClr val="1A2233"/>
+                          </a:solidFill>
+                          <a:latin typeface="Microsoft JhengHei"/>
+                          <a:ea typeface="Microsoft JhengHei"/>
+                          <a:cs typeface="Microsoft JhengHei"/>
+                        </a:rPr>
+                        <a:t>6192</a:t>
+                      </a:r>
+                    </a:p>
+                  </a:txBody>
+                  <a:tcPr anchor="ctr" marL="73152" marT="9144" marB="9144">
+                    <a:solidFill>
+                      <a:srgbClr val="EEF2F9"/>
+                    </a:solidFill>
+                  </a:tcPr>
+                </a:tc>
+                <a:tc>
+                  <a:txBody>
+                    <a:bodyPr/>
+                    <a:lstStyle/>
+                    <a:p>
+                      <a:r>
+                        <a:rPr sz="1150" b="0">
+                          <a:solidFill>
+                            <a:srgbClr val="1A2233"/>
+                          </a:solidFill>
+                          <a:latin typeface="Microsoft JhengHei"/>
+                          <a:ea typeface="Microsoft JhengHei"/>
+                          <a:cs typeface="Microsoft JhengHei"/>
+                        </a:rPr>
                         <a:t>06/02</a:t>
+                      </a:r>
+                    </a:p>
+                  </a:txBody>
+                  <a:tcPr anchor="ctr" marL="73152" marT="9144" marB="9144">
+                    <a:solidFill>
+                      <a:srgbClr val="EEF2F9"/>
+                    </a:solidFill>
+                  </a:tcPr>
+                </a:tc>
+                <a:tc>
+                  <a:txBody>
+                    <a:bodyPr/>
+                    <a:lstStyle/>
+                    <a:p>
+                      <a:r>
+                        <a:rPr sz="1150" b="1">
+                          <a:solidFill>
+                            <a:srgbClr val="E63946"/>
+                          </a:solidFill>
+                          <a:latin typeface="Microsoft JhengHei"/>
+                          <a:ea typeface="Microsoft JhengHei"/>
+                          <a:cs typeface="Microsoft JhengHei"/>
+                        </a:rPr>
+                        <a:t>駭客攻擊</a:t>
+                      </a:r>
+                    </a:p>
+                  </a:txBody>
+                  <a:tcPr anchor="ctr" marL="73152" marT="9144" marB="9144">
+                    <a:solidFill>
+                      <a:srgbClr val="EEF2F9"/>
+                    </a:solidFill>
+                  </a:tcPr>
+                </a:tc>
+                <a:tc>
+                  <a:txBody>
+                    <a:bodyPr/>
+                    <a:lstStyle/>
+                    <a:p>
+                      <a:r>
+                        <a:rPr sz="1150" b="0">
+                          <a:solidFill>
+                            <a:srgbClr val="1A2233"/>
+                          </a:solidFill>
+                          <a:latin typeface="Microsoft JhengHei"/>
+                          <a:ea typeface="Microsoft JhengHei"/>
+                          <a:cs typeface="Microsoft JhengHei"/>
+                        </a:rPr>
+                        <a:t>目前評估對公司營運無重大影響，亦未發現個資或機密資料外洩之情事。</a:t>
+                      </a:r>
+                    </a:p>
+                  </a:txBody>
+                  <a:tcPr anchor="ctr" marL="73152" marT="9144" marB="9144">
+                    <a:solidFill>
+                      <a:srgbClr val="EEF2F9"/>
+                    </a:solidFill>
+                  </a:tcPr>
+                </a:tc>
+              </a:tr>
+              <a:tr h="384048">
+                <a:tc>
+                  <a:txBody>
+                    <a:bodyPr/>
+                    <a:lstStyle/>
+                    <a:p>
+                      <a:r>
+                        <a:rPr sz="1150" b="0">
+                          <a:solidFill>
+                            <a:srgbClr val="1A2233"/>
+                          </a:solidFill>
+                          <a:latin typeface="Microsoft JhengHei"/>
+                          <a:ea typeface="Microsoft JhengHei"/>
+                          <a:cs typeface="Microsoft JhengHei"/>
+                        </a:rPr>
+                        <a:t>數字</a:t>
+                      </a:r>
+                    </a:p>
+                  </a:txBody>
+                  <a:tcPr anchor="ctr" marL="73152" marT="9144" marB="9144">
+                    <a:solidFill>
+                      <a:srgbClr val="FFFFFF"/>
+                    </a:solidFill>
+                  </a:tcPr>
+                </a:tc>
+                <a:tc>
+                  <a:txBody>
+                    <a:bodyPr/>
+                    <a:lstStyle/>
+                    <a:p>
+                      <a:r>
+                        <a:rPr sz="1150" b="0">
+                          <a:solidFill>
+                            <a:srgbClr val="1A2233"/>
+                          </a:solidFill>
+                          <a:latin typeface="Microsoft JhengHei"/>
+                          <a:ea typeface="Microsoft JhengHei"/>
+                          <a:cs typeface="Microsoft JhengHei"/>
+                        </a:rPr>
+                        <a:t>5287</a:t>
+                      </a:r>
+                    </a:p>
+                  </a:txBody>
+                  <a:tcPr anchor="ctr" marL="73152" marT="9144" marB="9144">
+                    <a:solidFill>
+                      <a:srgbClr val="FFFFFF"/>
+                    </a:solidFill>
+                  </a:tcPr>
+                </a:tc>
+                <a:tc>
+                  <a:txBody>
+                    <a:bodyPr/>
+                    <a:lstStyle/>
+                    <a:p>
+                      <a:r>
+                        <a:rPr sz="1150" b="0">
+                          <a:solidFill>
+                            <a:srgbClr val="1A2233"/>
+                          </a:solidFill>
+                          <a:latin typeface="Microsoft JhengHei"/>
+                          <a:ea typeface="Microsoft JhengHei"/>
+                          <a:cs typeface="Microsoft JhengHei"/>
+                        </a:rPr>
+                        <a:t>05/26</a:t>
+                      </a:r>
+                    </a:p>
+                  </a:txBody>
+                  <a:tcPr anchor="ctr" marL="73152" marT="9144" marB="9144">
+                    <a:solidFill>
+                      <a:srgbClr val="FFFFFF"/>
+                    </a:solidFill>
+                  </a:tcPr>
+                </a:tc>
+                <a:tc>
+                  <a:txBody>
+                    <a:bodyPr/>
+                    <a:lstStyle/>
+                    <a:p>
+                      <a:r>
+                        <a:rPr sz="1150" b="1">
+                          <a:solidFill>
+                            <a:srgbClr val="27A6C4"/>
+                          </a:solidFill>
+                          <a:latin typeface="Microsoft JhengHei"/>
+                          <a:ea typeface="Microsoft JhengHei"/>
+                          <a:cs typeface="Microsoft JhengHei"/>
+                        </a:rPr>
+                        <a:t>個資外洩</a:t>
+                      </a:r>
+                    </a:p>
+                  </a:txBody>
+                  <a:tcPr anchor="ctr" marL="73152" marT="9144" marB="9144">
+                    <a:solidFill>
+                      <a:srgbClr val="FFFFFF"/>
+                    </a:solidFill>
+                  </a:tcPr>
+                </a:tc>
+                <a:tc>
+                  <a:txBody>
+                    <a:bodyPr/>
+                    <a:lstStyle/>
+                    <a:p>
+                      <a:r>
+                        <a:rPr sz="1150" b="0">
+                          <a:solidFill>
+                            <a:srgbClr val="1A2233"/>
+                          </a:solidFill>
+                          <a:latin typeface="Microsoft JhengHei"/>
+                          <a:ea typeface="Microsoft JhengHei"/>
+                          <a:cs typeface="Microsoft JhengHei"/>
+                        </a:rPr>
+                        <a:t>目前評估對公司營運尚無重大影響。</a:t>
+                      </a:r>
+                    </a:p>
+                  </a:txBody>
+                  <a:tcPr anchor="ctr" marL="73152" marT="9144" marB="9144">
+                    <a:solidFill>
+                      <a:srgbClr val="FFFFFF"/>
+                    </a:solidFill>
+                  </a:tcPr>
+                </a:tc>
+              </a:tr>
+              <a:tr h="384048">
+                <a:tc>
+                  <a:txBody>
+                    <a:bodyPr/>
+                    <a:lstStyle/>
+                    <a:p>
+                      <a:r>
+                        <a:rPr sz="1150" b="0">
+                          <a:solidFill>
+                            <a:srgbClr val="1A2233"/>
+                          </a:solidFill>
+                          <a:latin typeface="Microsoft JhengHei"/>
+                          <a:ea typeface="Microsoft JhengHei"/>
+                          <a:cs typeface="Microsoft JhengHei"/>
+                        </a:rPr>
+                        <a:t>弘塑</a:t>
+                      </a:r>
+                    </a:p>
+                  </a:txBody>
+                  <a:tcPr anchor="ctr" marL="73152" marT="9144" marB="9144">
+                    <a:solidFill>
+                      <a:srgbClr val="EEF2F9"/>
+                    </a:solidFill>
+                  </a:tcPr>
+                </a:tc>
+                <a:tc>
+                  <a:txBody>
+                    <a:bodyPr/>
+                    <a:lstStyle/>
+                    <a:p>
+                      <a:r>
+                        <a:rPr sz="1150" b="0">
+                          <a:solidFill>
+                            <a:srgbClr val="1A2233"/>
+                          </a:solidFill>
+                          <a:latin typeface="Microsoft JhengHei"/>
+                          <a:ea typeface="Microsoft JhengHei"/>
+                          <a:cs typeface="Microsoft JhengHei"/>
+                        </a:rPr>
+                        <a:t>3131</a:t>
+                      </a:r>
+                    </a:p>
+                  </a:txBody>
+                  <a:tcPr anchor="ctr" marL="73152" marT="9144" marB="9144">
+                    <a:solidFill>
+                      <a:srgbClr val="EEF2F9"/>
+                    </a:solidFill>
+                  </a:tcPr>
+                </a:tc>
+                <a:tc>
+                  <a:txBody>
+                    <a:bodyPr/>
+                    <a:lstStyle/>
+                    <a:p>
+                      <a:r>
+                        <a:rPr sz="1150" b="0">
+                          <a:solidFill>
+                            <a:srgbClr val="1A2233"/>
+                          </a:solidFill>
+                          <a:latin typeface="Microsoft JhengHei"/>
+                          <a:ea typeface="Microsoft JhengHei"/>
+                          <a:cs typeface="Microsoft JhengHei"/>
+                        </a:rPr>
+                        <a:t>05/21</a:t>
+                      </a:r>
+                    </a:p>
+                  </a:txBody>
+                  <a:tcPr anchor="ctr" marL="73152" marT="9144" marB="9144">
+                    <a:solidFill>
+                      <a:srgbClr val="EEF2F9"/>
+                    </a:solidFill>
+                  </a:tcPr>
+                </a:tc>
+                <a:tc>
+                  <a:txBody>
+                    <a:bodyPr/>
+                    <a:lstStyle/>
+                    <a:p>
+                      <a:r>
+                        <a:rPr sz="1150" b="1">
+                          <a:solidFill>
+                            <a:srgbClr val="F4A261"/>
+                          </a:solidFill>
+                          <a:latin typeface="Microsoft JhengHei"/>
+                          <a:ea typeface="Microsoft JhengHei"/>
+                          <a:cs typeface="Microsoft JhengHei"/>
+                        </a:rPr>
+                        <a:t>勒索病毒/加密</a:t>
+                      </a:r>
+                    </a:p>
+                  </a:txBody>
+                  <a:tcPr anchor="ctr" marL="73152" marT="9144" marB="9144">
+                    <a:solidFill>
+                      <a:srgbClr val="EEF2F9"/>
+                    </a:solidFill>
+                  </a:tcPr>
+                </a:tc>
+                <a:tc>
+                  <a:txBody>
+                    <a:bodyPr/>
+                    <a:lstStyle/>
+                    <a:p>
+                      <a:r>
+                        <a:rPr sz="1150" b="0">
+                          <a:solidFill>
+                            <a:srgbClr val="1A2233"/>
+                          </a:solidFill>
+                          <a:latin typeface="Microsoft JhengHei"/>
+                          <a:ea typeface="Microsoft JhengHei"/>
+                          <a:cs typeface="Microsoft JhengHei"/>
+                        </a:rPr>
+                        <a:t>公司於4/10發現網路異常後，立即中斷公司網路及相關對外連結，全面停…</a:t>
+                      </a:r>
+                    </a:p>
+                  </a:txBody>
+                  <a:tcPr anchor="ctr" marL="73152" marT="9144" marB="9144">
+                    <a:solidFill>
+                      <a:srgbClr val="EEF2F9"/>
+                    </a:solidFill>
+                  </a:tcPr>
+                </a:tc>
+              </a:tr>
+              <a:tr h="384048">
+                <a:tc>
+                  <a:txBody>
+                    <a:bodyPr/>
+                    <a:lstStyle/>
+                    <a:p>
+                      <a:r>
+                        <a:rPr sz="1150" b="0">
+                          <a:solidFill>
+                            <a:srgbClr val="1A2233"/>
+                          </a:solidFill>
+                          <a:latin typeface="Microsoft JhengHei"/>
+                          <a:ea typeface="Microsoft JhengHei"/>
+                          <a:cs typeface="Microsoft JhengHei"/>
+                        </a:rPr>
+                        <a:t>建德工業</a:t>
+                      </a:r>
+                    </a:p>
+                  </a:txBody>
+                  <a:tcPr anchor="ctr" marL="73152" marT="9144" marB="9144">
+                    <a:solidFill>
+                      <a:srgbClr val="FFFFFF"/>
+                    </a:solidFill>
+                  </a:tcPr>
+                </a:tc>
+                <a:tc>
+                  <a:txBody>
+                    <a:bodyPr/>
+                    <a:lstStyle/>
+                    <a:p>
+                      <a:r>
+                        <a:rPr sz="1150" b="0">
+                          <a:solidFill>
+                            <a:srgbClr val="1A2233"/>
+                          </a:solidFill>
+                          <a:latin typeface="Microsoft JhengHei"/>
+                          <a:ea typeface="Microsoft JhengHei"/>
+                          <a:cs typeface="Microsoft JhengHei"/>
+                        </a:rPr>
+                        <a:t>6606</a:t>
+                      </a:r>
+                    </a:p>
+                  </a:txBody>
+                  <a:tcPr anchor="ctr" marL="73152" marT="9144" marB="9144">
+                    <a:solidFill>
+                      <a:srgbClr val="FFFFFF"/>
+                    </a:solidFill>
+                  </a:tcPr>
+                </a:tc>
+                <a:tc>
+                  <a:txBody>
+                    <a:bodyPr/>
+                    <a:lstStyle/>
+                    <a:p>
+                      <a:r>
+                        <a:rPr sz="1150" b="0">
+                          <a:solidFill>
+                            <a:srgbClr val="1A2233"/>
+                          </a:solidFill>
+                          <a:latin typeface="Microsoft JhengHei"/>
+                          <a:ea typeface="Microsoft JhengHei"/>
+                          <a:cs typeface="Microsoft JhengHei"/>
+                        </a:rPr>
+                        <a:t>05/20</a:t>
                       </a:r>
                     </a:p>
                   </a:txBody>
@@ -4368,867 +4870,13 @@
                           <a:ea typeface="Microsoft JhengHei"/>
                           <a:cs typeface="Microsoft JhengHei"/>
                         </a:rPr>
-                        <a:t>目前評估對公司營運無重大影響，亦未發現個資或機密資料外洩之情事。</a:t>
+                        <a:t>目前無個資、機密資料外洩等情事發生，對本公司營運無重大影響。</a:t>
                       </a:r>
                     </a:p>
                   </a:txBody>
                   <a:tcPr anchor="ctr" marL="73152" marT="9144" marB="9144">
                     <a:solidFill>
                       <a:srgbClr val="FFFFFF"/>
-                    </a:solidFill>
-                  </a:tcPr>
-                </a:tc>
-              </a:tr>
-              <a:tr h="384048">
-                <a:tc>
-                  <a:txBody>
-                    <a:bodyPr/>
-                    <a:lstStyle/>
-                    <a:p>
-                      <a:r>
-                        <a:rPr sz="1150" b="0">
-                          <a:solidFill>
-                            <a:srgbClr val="1A2233"/>
-                          </a:solidFill>
-                          <a:latin typeface="Microsoft JhengHei"/>
-                          <a:ea typeface="Microsoft JhengHei"/>
-                          <a:cs typeface="Microsoft JhengHei"/>
-                        </a:rPr>
-                        <a:t>數字</a:t>
-                      </a:r>
-                    </a:p>
-                  </a:txBody>
-                  <a:tcPr anchor="ctr" marL="73152" marT="9144" marB="9144">
-                    <a:solidFill>
-                      <a:srgbClr val="EEF2F9"/>
-                    </a:solidFill>
-                  </a:tcPr>
-                </a:tc>
-                <a:tc>
-                  <a:txBody>
-                    <a:bodyPr/>
-                    <a:lstStyle/>
-                    <a:p>
-                      <a:r>
-                        <a:rPr sz="1150" b="0">
-                          <a:solidFill>
-                            <a:srgbClr val="1A2233"/>
-                          </a:solidFill>
-                          <a:latin typeface="Microsoft JhengHei"/>
-                          <a:ea typeface="Microsoft JhengHei"/>
-                          <a:cs typeface="Microsoft JhengHei"/>
-                        </a:rPr>
-                        <a:t>5287</a:t>
-                      </a:r>
-                    </a:p>
-                  </a:txBody>
-                  <a:tcPr anchor="ctr" marL="73152" marT="9144" marB="9144">
-                    <a:solidFill>
-                      <a:srgbClr val="EEF2F9"/>
-                    </a:solidFill>
-                  </a:tcPr>
-                </a:tc>
-                <a:tc>
-                  <a:txBody>
-                    <a:bodyPr/>
-                    <a:lstStyle/>
-                    <a:p>
-                      <a:r>
-                        <a:rPr sz="1150" b="0">
-                          <a:solidFill>
-                            <a:srgbClr val="1A2233"/>
-                          </a:solidFill>
-                          <a:latin typeface="Microsoft JhengHei"/>
-                          <a:ea typeface="Microsoft JhengHei"/>
-                          <a:cs typeface="Microsoft JhengHei"/>
-                        </a:rPr>
-                        <a:t>05/26</a:t>
-                      </a:r>
-                    </a:p>
-                  </a:txBody>
-                  <a:tcPr anchor="ctr" marL="73152" marT="9144" marB="9144">
-                    <a:solidFill>
-                      <a:srgbClr val="EEF2F9"/>
-                    </a:solidFill>
-                  </a:tcPr>
-                </a:tc>
-                <a:tc>
-                  <a:txBody>
-                    <a:bodyPr/>
-                    <a:lstStyle/>
-                    <a:p>
-                      <a:r>
-                        <a:rPr sz="1150" b="1">
-                          <a:solidFill>
-                            <a:srgbClr val="27A6C4"/>
-                          </a:solidFill>
-                          <a:latin typeface="Microsoft JhengHei"/>
-                          <a:ea typeface="Microsoft JhengHei"/>
-                          <a:cs typeface="Microsoft JhengHei"/>
-                        </a:rPr>
-                        <a:t>個資外洩</a:t>
-                      </a:r>
-                    </a:p>
-                  </a:txBody>
-                  <a:tcPr anchor="ctr" marL="73152" marT="9144" marB="9144">
-                    <a:solidFill>
-                      <a:srgbClr val="EEF2F9"/>
-                    </a:solidFill>
-                  </a:tcPr>
-                </a:tc>
-                <a:tc>
-                  <a:txBody>
-                    <a:bodyPr/>
-                    <a:lstStyle/>
-                    <a:p>
-                      <a:r>
-                        <a:rPr sz="1150" b="0">
-                          <a:solidFill>
-                            <a:srgbClr val="1A2233"/>
-                          </a:solidFill>
-                          <a:latin typeface="Microsoft JhengHei"/>
-                          <a:ea typeface="Microsoft JhengHei"/>
-                          <a:cs typeface="Microsoft JhengHei"/>
-                        </a:rPr>
-                        <a:t>目前評估對公司營運尚無重大影響。</a:t>
-                      </a:r>
-                    </a:p>
-                  </a:txBody>
-                  <a:tcPr anchor="ctr" marL="73152" marT="9144" marB="9144">
-                    <a:solidFill>
-                      <a:srgbClr val="EEF2F9"/>
-                    </a:solidFill>
-                  </a:tcPr>
-                </a:tc>
-              </a:tr>
-              <a:tr h="384048">
-                <a:tc>
-                  <a:txBody>
-                    <a:bodyPr/>
-                    <a:lstStyle/>
-                    <a:p>
-                      <a:r>
-                        <a:rPr sz="1150" b="0">
-                          <a:solidFill>
-                            <a:srgbClr val="1A2233"/>
-                          </a:solidFill>
-                          <a:latin typeface="Microsoft JhengHei"/>
-                          <a:ea typeface="Microsoft JhengHei"/>
-                          <a:cs typeface="Microsoft JhengHei"/>
-                        </a:rPr>
-                        <a:t>弘塑</a:t>
-                      </a:r>
-                    </a:p>
-                  </a:txBody>
-                  <a:tcPr anchor="ctr" marL="73152" marT="9144" marB="9144">
-                    <a:solidFill>
-                      <a:srgbClr val="FFFFFF"/>
-                    </a:solidFill>
-                  </a:tcPr>
-                </a:tc>
-                <a:tc>
-                  <a:txBody>
-                    <a:bodyPr/>
-                    <a:lstStyle/>
-                    <a:p>
-                      <a:r>
-                        <a:rPr sz="1150" b="0">
-                          <a:solidFill>
-                            <a:srgbClr val="1A2233"/>
-                          </a:solidFill>
-                          <a:latin typeface="Microsoft JhengHei"/>
-                          <a:ea typeface="Microsoft JhengHei"/>
-                          <a:cs typeface="Microsoft JhengHei"/>
-                        </a:rPr>
-                        <a:t>3131</a:t>
-                      </a:r>
-                    </a:p>
-                  </a:txBody>
-                  <a:tcPr anchor="ctr" marL="73152" marT="9144" marB="9144">
-                    <a:solidFill>
-                      <a:srgbClr val="FFFFFF"/>
-                    </a:solidFill>
-                  </a:tcPr>
-                </a:tc>
-                <a:tc>
-                  <a:txBody>
-                    <a:bodyPr/>
-                    <a:lstStyle/>
-                    <a:p>
-                      <a:r>
-                        <a:rPr sz="1150" b="0">
-                          <a:solidFill>
-                            <a:srgbClr val="1A2233"/>
-                          </a:solidFill>
-                          <a:latin typeface="Microsoft JhengHei"/>
-                          <a:ea typeface="Microsoft JhengHei"/>
-                          <a:cs typeface="Microsoft JhengHei"/>
-                        </a:rPr>
-                        <a:t>05/21</a:t>
-                      </a:r>
-                    </a:p>
-                  </a:txBody>
-                  <a:tcPr anchor="ctr" marL="73152" marT="9144" marB="9144">
-                    <a:solidFill>
-                      <a:srgbClr val="FFFFFF"/>
-                    </a:solidFill>
-                  </a:tcPr>
-                </a:tc>
-                <a:tc>
-                  <a:txBody>
-                    <a:bodyPr/>
-                    <a:lstStyle/>
-                    <a:p>
-                      <a:r>
-                        <a:rPr sz="1150" b="1">
-                          <a:solidFill>
-                            <a:srgbClr val="F4A261"/>
-                          </a:solidFill>
-                          <a:latin typeface="Microsoft JhengHei"/>
-                          <a:ea typeface="Microsoft JhengHei"/>
-                          <a:cs typeface="Microsoft JhengHei"/>
-                        </a:rPr>
-                        <a:t>勒索病毒/加密</a:t>
-                      </a:r>
-                    </a:p>
-                  </a:txBody>
-                  <a:tcPr anchor="ctr" marL="73152" marT="9144" marB="9144">
-                    <a:solidFill>
-                      <a:srgbClr val="FFFFFF"/>
-                    </a:solidFill>
-                  </a:tcPr>
-                </a:tc>
-                <a:tc>
-                  <a:txBody>
-                    <a:bodyPr/>
-                    <a:lstStyle/>
-                    <a:p>
-                      <a:r>
-                        <a:rPr sz="1150" b="0">
-                          <a:solidFill>
-                            <a:srgbClr val="1A2233"/>
-                          </a:solidFill>
-                          <a:latin typeface="Microsoft JhengHei"/>
-                          <a:ea typeface="Microsoft JhengHei"/>
-                          <a:cs typeface="Microsoft JhengHei"/>
-                        </a:rPr>
-                        <a:t>公司於4/10發現網路異常後，立即中斷公司網路及相關對外連結，全面停…</a:t>
-                      </a:r>
-                    </a:p>
-                  </a:txBody>
-                  <a:tcPr anchor="ctr" marL="73152" marT="9144" marB="9144">
-                    <a:solidFill>
-                      <a:srgbClr val="FFFFFF"/>
-                    </a:solidFill>
-                  </a:tcPr>
-                </a:tc>
-              </a:tr>
-              <a:tr h="384048">
-                <a:tc>
-                  <a:txBody>
-                    <a:bodyPr/>
-                    <a:lstStyle/>
-                    <a:p>
-                      <a:r>
-                        <a:rPr sz="1150" b="0">
-                          <a:solidFill>
-                            <a:srgbClr val="1A2233"/>
-                          </a:solidFill>
-                          <a:latin typeface="Microsoft JhengHei"/>
-                          <a:ea typeface="Microsoft JhengHei"/>
-                          <a:cs typeface="Microsoft JhengHei"/>
-                        </a:rPr>
-                        <a:t>建德工業</a:t>
-                      </a:r>
-                    </a:p>
-                  </a:txBody>
-                  <a:tcPr anchor="ctr" marL="73152" marT="9144" marB="9144">
-                    <a:solidFill>
-                      <a:srgbClr val="EEF2F9"/>
-                    </a:solidFill>
-                  </a:tcPr>
-                </a:tc>
-                <a:tc>
-                  <a:txBody>
-                    <a:bodyPr/>
-                    <a:lstStyle/>
-                    <a:p>
-                      <a:r>
-                        <a:rPr sz="1150" b="0">
-                          <a:solidFill>
-                            <a:srgbClr val="1A2233"/>
-                          </a:solidFill>
-                          <a:latin typeface="Microsoft JhengHei"/>
-                          <a:ea typeface="Microsoft JhengHei"/>
-                          <a:cs typeface="Microsoft JhengHei"/>
-                        </a:rPr>
-                        <a:t>6606</a:t>
-                      </a:r>
-                    </a:p>
-                  </a:txBody>
-                  <a:tcPr anchor="ctr" marL="73152" marT="9144" marB="9144">
-                    <a:solidFill>
-                      <a:srgbClr val="EEF2F9"/>
-                    </a:solidFill>
-                  </a:tcPr>
-                </a:tc>
-                <a:tc>
-                  <a:txBody>
-                    <a:bodyPr/>
-                    <a:lstStyle/>
-                    <a:p>
-                      <a:r>
-                        <a:rPr sz="1150" b="0">
-                          <a:solidFill>
-                            <a:srgbClr val="1A2233"/>
-                          </a:solidFill>
-                          <a:latin typeface="Microsoft JhengHei"/>
-                          <a:ea typeface="Microsoft JhengHei"/>
-                          <a:cs typeface="Microsoft JhengHei"/>
-                        </a:rPr>
-                        <a:t>05/20</a:t>
-                      </a:r>
-                    </a:p>
-                  </a:txBody>
-                  <a:tcPr anchor="ctr" marL="73152" marT="9144" marB="9144">
-                    <a:solidFill>
-                      <a:srgbClr val="EEF2F9"/>
-                    </a:solidFill>
-                  </a:tcPr>
-                </a:tc>
-                <a:tc>
-                  <a:txBody>
-                    <a:bodyPr/>
-                    <a:lstStyle/>
-                    <a:p>
-                      <a:r>
-                        <a:rPr sz="1150" b="1">
-                          <a:solidFill>
-                            <a:srgbClr val="E63946"/>
-                          </a:solidFill>
-                          <a:latin typeface="Microsoft JhengHei"/>
-                          <a:ea typeface="Microsoft JhengHei"/>
-                          <a:cs typeface="Microsoft JhengHei"/>
-                        </a:rPr>
-                        <a:t>駭客攻擊</a:t>
-                      </a:r>
-                    </a:p>
-                  </a:txBody>
-                  <a:tcPr anchor="ctr" marL="73152" marT="9144" marB="9144">
-                    <a:solidFill>
-                      <a:srgbClr val="EEF2F9"/>
-                    </a:solidFill>
-                  </a:tcPr>
-                </a:tc>
-                <a:tc>
-                  <a:txBody>
-                    <a:bodyPr/>
-                    <a:lstStyle/>
-                    <a:p>
-                      <a:r>
-                        <a:rPr sz="1150" b="0">
-                          <a:solidFill>
-                            <a:srgbClr val="1A2233"/>
-                          </a:solidFill>
-                          <a:latin typeface="Microsoft JhengHei"/>
-                          <a:ea typeface="Microsoft JhengHei"/>
-                          <a:cs typeface="Microsoft JhengHei"/>
-                        </a:rPr>
-                        <a:t>目前無個資、機密資料外洩等情事發生，對本公司營運無重大影響。</a:t>
-                      </a:r>
-                    </a:p>
-                  </a:txBody>
-                  <a:tcPr anchor="ctr" marL="73152" marT="9144" marB="9144">
-                    <a:solidFill>
-                      <a:srgbClr val="EEF2F9"/>
-                    </a:solidFill>
-                  </a:tcPr>
-                </a:tc>
-              </a:tr>
-              <a:tr h="384048">
-                <a:tc>
-                  <a:txBody>
-                    <a:bodyPr/>
-                    <a:lstStyle/>
-                    <a:p>
-                      <a:r>
-                        <a:rPr sz="1150" b="0">
-                          <a:solidFill>
-                            <a:srgbClr val="1A2233"/>
-                          </a:solidFill>
-                          <a:latin typeface="Microsoft JhengHei"/>
-                          <a:ea typeface="Microsoft JhengHei"/>
-                          <a:cs typeface="Microsoft JhengHei"/>
-                        </a:rPr>
-                        <a:t>永信</a:t>
-                      </a:r>
-                    </a:p>
-                  </a:txBody>
-                  <a:tcPr anchor="ctr" marL="73152" marT="9144" marB="9144">
-                    <a:solidFill>
-                      <a:srgbClr val="FFFFFF"/>
-                    </a:solidFill>
-                  </a:tcPr>
-                </a:tc>
-                <a:tc>
-                  <a:txBody>
-                    <a:bodyPr/>
-                    <a:lstStyle/>
-                    <a:p>
-                      <a:r>
-                        <a:rPr sz="1150" b="0">
-                          <a:solidFill>
-                            <a:srgbClr val="1A2233"/>
-                          </a:solidFill>
-                          <a:latin typeface="Microsoft JhengHei"/>
-                          <a:ea typeface="Microsoft JhengHei"/>
-                          <a:cs typeface="Microsoft JhengHei"/>
-                        </a:rPr>
-                        <a:t>3705</a:t>
-                      </a:r>
-                    </a:p>
-                  </a:txBody>
-                  <a:tcPr anchor="ctr" marL="73152" marT="9144" marB="9144">
-                    <a:solidFill>
-                      <a:srgbClr val="FFFFFF"/>
-                    </a:solidFill>
-                  </a:tcPr>
-                </a:tc>
-                <a:tc>
-                  <a:txBody>
-                    <a:bodyPr/>
-                    <a:lstStyle/>
-                    <a:p>
-                      <a:r>
-                        <a:rPr sz="1150" b="0">
-                          <a:solidFill>
-                            <a:srgbClr val="1A2233"/>
-                          </a:solidFill>
-                          <a:latin typeface="Microsoft JhengHei"/>
-                          <a:ea typeface="Microsoft JhengHei"/>
-                          <a:cs typeface="Microsoft JhengHei"/>
-                        </a:rPr>
-                        <a:t>05/15</a:t>
-                      </a:r>
-                    </a:p>
-                  </a:txBody>
-                  <a:tcPr anchor="ctr" marL="73152" marT="9144" marB="9144">
-                    <a:solidFill>
-                      <a:srgbClr val="FFFFFF"/>
-                    </a:solidFill>
-                  </a:tcPr>
-                </a:tc>
-                <a:tc>
-                  <a:txBody>
-                    <a:bodyPr/>
-                    <a:lstStyle/>
-                    <a:p>
-                      <a:r>
-                        <a:rPr sz="1150" b="1">
-                          <a:solidFill>
-                            <a:srgbClr val="27A6C4"/>
-                          </a:solidFill>
-                          <a:latin typeface="Microsoft JhengHei"/>
-                          <a:ea typeface="Microsoft JhengHei"/>
-                          <a:cs typeface="Microsoft JhengHei"/>
-                        </a:rPr>
-                        <a:t>個資外洩</a:t>
-                      </a:r>
-                    </a:p>
-                  </a:txBody>
-                  <a:tcPr anchor="ctr" marL="73152" marT="9144" marB="9144">
-                    <a:solidFill>
-                      <a:srgbClr val="FFFFFF"/>
-                    </a:solidFill>
-                  </a:tcPr>
-                </a:tc>
-                <a:tc>
-                  <a:txBody>
-                    <a:bodyPr/>
-                    <a:lstStyle/>
-                    <a:p>
-                      <a:r>
-                        <a:rPr sz="1150" b="0">
-                          <a:solidFill>
-                            <a:srgbClr val="1A2233"/>
-                          </a:solidFill>
-                          <a:latin typeface="Microsoft JhengHei"/>
-                          <a:ea typeface="Microsoft JhengHei"/>
-                          <a:cs typeface="Microsoft JhengHei"/>
-                        </a:rPr>
-                        <a:t>—</a:t>
-                      </a:r>
-                    </a:p>
-                  </a:txBody>
-                  <a:tcPr anchor="ctr" marL="73152" marT="9144" marB="9144">
-                    <a:solidFill>
-                      <a:srgbClr val="FFFFFF"/>
-                    </a:solidFill>
-                  </a:tcPr>
-                </a:tc>
-              </a:tr>
-              <a:tr h="384048">
-                <a:tc>
-                  <a:txBody>
-                    <a:bodyPr/>
-                    <a:lstStyle/>
-                    <a:p>
-                      <a:r>
-                        <a:rPr sz="1150" b="0">
-                          <a:solidFill>
-                            <a:srgbClr val="1A2233"/>
-                          </a:solidFill>
-                          <a:latin typeface="Microsoft JhengHei"/>
-                          <a:ea typeface="Microsoft JhengHei"/>
-                          <a:cs typeface="Microsoft JhengHei"/>
-                        </a:rPr>
-                        <a:t>鴻海</a:t>
-                      </a:r>
-                    </a:p>
-                  </a:txBody>
-                  <a:tcPr anchor="ctr" marL="73152" marT="9144" marB="9144">
-                    <a:solidFill>
-                      <a:srgbClr val="EEF2F9"/>
-                    </a:solidFill>
-                  </a:tcPr>
-                </a:tc>
-                <a:tc>
-                  <a:txBody>
-                    <a:bodyPr/>
-                    <a:lstStyle/>
-                    <a:p>
-                      <a:r>
-                        <a:rPr sz="1150" b="0">
-                          <a:solidFill>
-                            <a:srgbClr val="1A2233"/>
-                          </a:solidFill>
-                          <a:latin typeface="Microsoft JhengHei"/>
-                          <a:ea typeface="Microsoft JhengHei"/>
-                          <a:cs typeface="Microsoft JhengHei"/>
-                        </a:rPr>
-                        <a:t>2317</a:t>
-                      </a:r>
-                    </a:p>
-                  </a:txBody>
-                  <a:tcPr anchor="ctr" marL="73152" marT="9144" marB="9144">
-                    <a:solidFill>
-                      <a:srgbClr val="EEF2F9"/>
-                    </a:solidFill>
-                  </a:tcPr>
-                </a:tc>
-                <a:tc>
-                  <a:txBody>
-                    <a:bodyPr/>
-                    <a:lstStyle/>
-                    <a:p>
-                      <a:r>
-                        <a:rPr sz="1150" b="0">
-                          <a:solidFill>
-                            <a:srgbClr val="1A2233"/>
-                          </a:solidFill>
-                          <a:latin typeface="Microsoft JhengHei"/>
-                          <a:ea typeface="Microsoft JhengHei"/>
-                          <a:cs typeface="Microsoft JhengHei"/>
-                        </a:rPr>
-                        <a:t>05/12</a:t>
-                      </a:r>
-                    </a:p>
-                  </a:txBody>
-                  <a:tcPr anchor="ctr" marL="73152" marT="9144" marB="9144">
-                    <a:solidFill>
-                      <a:srgbClr val="EEF2F9"/>
-                    </a:solidFill>
-                  </a:tcPr>
-                </a:tc>
-                <a:tc>
-                  <a:txBody>
-                    <a:bodyPr/>
-                    <a:lstStyle/>
-                    <a:p>
-                      <a:r>
-                        <a:rPr sz="1150" b="1">
-                          <a:solidFill>
-                            <a:srgbClr val="E63946"/>
-                          </a:solidFill>
-                          <a:latin typeface="Microsoft JhengHei"/>
-                          <a:ea typeface="Microsoft JhengHei"/>
-                          <a:cs typeface="Microsoft JhengHei"/>
-                        </a:rPr>
-                        <a:t>駭客攻擊</a:t>
-                      </a:r>
-                    </a:p>
-                  </a:txBody>
-                  <a:tcPr anchor="ctr" marL="73152" marT="9144" marB="9144">
-                    <a:solidFill>
-                      <a:srgbClr val="EEF2F9"/>
-                    </a:solidFill>
-                  </a:tcPr>
-                </a:tc>
-                <a:tc>
-                  <a:txBody>
-                    <a:bodyPr/>
-                    <a:lstStyle/>
-                    <a:p>
-                      <a:r>
-                        <a:rPr sz="1150" b="0">
-                          <a:solidFill>
-                            <a:srgbClr val="1A2233"/>
-                          </a:solidFill>
-                          <a:latin typeface="Microsoft JhengHei"/>
-                          <a:ea typeface="Microsoft JhengHei"/>
-                          <a:cs typeface="Microsoft JhengHei"/>
-                        </a:rPr>
-                        <a:t>目前受影響廠區之生產營運均維持正常。</a:t>
-                      </a:r>
-                    </a:p>
-                  </a:txBody>
-                  <a:tcPr anchor="ctr" marL="73152" marT="9144" marB="9144">
-                    <a:solidFill>
-                      <a:srgbClr val="EEF2F9"/>
-                    </a:solidFill>
-                  </a:tcPr>
-                </a:tc>
-              </a:tr>
-              <a:tr h="384048">
-                <a:tc>
-                  <a:txBody>
-                    <a:bodyPr/>
-                    <a:lstStyle/>
-                    <a:p>
-                      <a:r>
-                        <a:rPr sz="1150" b="0">
-                          <a:solidFill>
-                            <a:srgbClr val="1A2233"/>
-                          </a:solidFill>
-                          <a:latin typeface="Microsoft JhengHei"/>
-                          <a:ea typeface="Microsoft JhengHei"/>
-                          <a:cs typeface="Microsoft JhengHei"/>
-                        </a:rPr>
-                        <a:t>彰源</a:t>
-                      </a:r>
-                    </a:p>
-                  </a:txBody>
-                  <a:tcPr anchor="ctr" marL="73152" marT="9144" marB="9144">
-                    <a:solidFill>
-                      <a:srgbClr val="FFFFFF"/>
-                    </a:solidFill>
-                  </a:tcPr>
-                </a:tc>
-                <a:tc>
-                  <a:txBody>
-                    <a:bodyPr/>
-                    <a:lstStyle/>
-                    <a:p>
-                      <a:r>
-                        <a:rPr sz="1150" b="0">
-                          <a:solidFill>
-                            <a:srgbClr val="1A2233"/>
-                          </a:solidFill>
-                          <a:latin typeface="Microsoft JhengHei"/>
-                          <a:ea typeface="Microsoft JhengHei"/>
-                          <a:cs typeface="Microsoft JhengHei"/>
-                        </a:rPr>
-                        <a:t>2030</a:t>
-                      </a:r>
-                    </a:p>
-                  </a:txBody>
-                  <a:tcPr anchor="ctr" marL="73152" marT="9144" marB="9144">
-                    <a:solidFill>
-                      <a:srgbClr val="FFFFFF"/>
-                    </a:solidFill>
-                  </a:tcPr>
-                </a:tc>
-                <a:tc>
-                  <a:txBody>
-                    <a:bodyPr/>
-                    <a:lstStyle/>
-                    <a:p>
-                      <a:r>
-                        <a:rPr sz="1150" b="0">
-                          <a:solidFill>
-                            <a:srgbClr val="1A2233"/>
-                          </a:solidFill>
-                          <a:latin typeface="Microsoft JhengHei"/>
-                          <a:ea typeface="Microsoft JhengHei"/>
-                          <a:cs typeface="Microsoft JhengHei"/>
-                        </a:rPr>
-                        <a:t>05/11</a:t>
-                      </a:r>
-                    </a:p>
-                  </a:txBody>
-                  <a:tcPr anchor="ctr" marL="73152" marT="9144" marB="9144">
-                    <a:solidFill>
-                      <a:srgbClr val="FFFFFF"/>
-                    </a:solidFill>
-                  </a:tcPr>
-                </a:tc>
-                <a:tc>
-                  <a:txBody>
-                    <a:bodyPr/>
-                    <a:lstStyle/>
-                    <a:p>
-                      <a:r>
-                        <a:rPr sz="1150" b="1">
-                          <a:solidFill>
-                            <a:srgbClr val="E63946"/>
-                          </a:solidFill>
-                          <a:latin typeface="Microsoft JhengHei"/>
-                          <a:ea typeface="Microsoft JhengHei"/>
-                          <a:cs typeface="Microsoft JhengHei"/>
-                        </a:rPr>
-                        <a:t>駭客攻擊</a:t>
-                      </a:r>
-                    </a:p>
-                  </a:txBody>
-                  <a:tcPr anchor="ctr" marL="73152" marT="9144" marB="9144">
-                    <a:solidFill>
-                      <a:srgbClr val="FFFFFF"/>
-                    </a:solidFill>
-                  </a:tcPr>
-                </a:tc>
-                <a:tc>
-                  <a:txBody>
-                    <a:bodyPr/>
-                    <a:lstStyle/>
-                    <a:p>
-                      <a:r>
-                        <a:rPr sz="1150" b="0">
-                          <a:solidFill>
-                            <a:srgbClr val="1A2233"/>
-                          </a:solidFill>
-                          <a:latin typeface="Microsoft JhengHei"/>
-                          <a:ea typeface="Microsoft JhengHei"/>
-                          <a:cs typeface="Microsoft JhengHei"/>
-                        </a:rPr>
-                        <a:t>目前評估沒有個資、亦沒有機密或重要的文件資料外洩等情事發生，對本公司…</a:t>
-                      </a:r>
-                    </a:p>
-                  </a:txBody>
-                  <a:tcPr anchor="ctr" marL="73152" marT="9144" marB="9144">
-                    <a:solidFill>
-                      <a:srgbClr val="FFFFFF"/>
-                    </a:solidFill>
-                  </a:tcPr>
-                </a:tc>
-              </a:tr>
-              <a:tr h="384048">
-                <a:tc>
-                  <a:txBody>
-                    <a:bodyPr/>
-                    <a:lstStyle/>
-                    <a:p>
-                      <a:r>
-                        <a:rPr sz="1150" b="0">
-                          <a:solidFill>
-                            <a:srgbClr val="1A2233"/>
-                          </a:solidFill>
-                          <a:latin typeface="Microsoft JhengHei"/>
-                          <a:ea typeface="Microsoft JhengHei"/>
-                          <a:cs typeface="Microsoft JhengHei"/>
-                        </a:rPr>
-                        <a:t>偉康科技</a:t>
-                      </a:r>
-                    </a:p>
-                  </a:txBody>
-                  <a:tcPr anchor="ctr" marL="73152" marT="9144" marB="9144">
-                    <a:solidFill>
-                      <a:srgbClr val="EEF2F9"/>
-                    </a:solidFill>
-                  </a:tcPr>
-                </a:tc>
-                <a:tc>
-                  <a:txBody>
-                    <a:bodyPr/>
-                    <a:lstStyle/>
-                    <a:p>
-                      <a:r>
-                        <a:rPr sz="1150" b="0">
-                          <a:solidFill>
-                            <a:srgbClr val="1A2233"/>
-                          </a:solidFill>
-                          <a:latin typeface="Microsoft JhengHei"/>
-                          <a:ea typeface="Microsoft JhengHei"/>
-                          <a:cs typeface="Microsoft JhengHei"/>
-                        </a:rPr>
-                        <a:t>6865</a:t>
-                      </a:r>
-                    </a:p>
-                  </a:txBody>
-                  <a:tcPr anchor="ctr" marL="73152" marT="9144" marB="9144">
-                    <a:solidFill>
-                      <a:srgbClr val="EEF2F9"/>
-                    </a:solidFill>
-                  </a:tcPr>
-                </a:tc>
-                <a:tc>
-                  <a:txBody>
-                    <a:bodyPr/>
-                    <a:lstStyle/>
-                    <a:p>
-                      <a:r>
-                        <a:rPr sz="1150" b="0">
-                          <a:solidFill>
-                            <a:srgbClr val="1A2233"/>
-                          </a:solidFill>
-                          <a:latin typeface="Microsoft JhengHei"/>
-                          <a:ea typeface="Microsoft JhengHei"/>
-                          <a:cs typeface="Microsoft JhengHei"/>
-                        </a:rPr>
-                        <a:t>05/11</a:t>
-                      </a:r>
-                    </a:p>
-                  </a:txBody>
-                  <a:tcPr anchor="ctr" marL="73152" marT="9144" marB="9144">
-                    <a:solidFill>
-                      <a:srgbClr val="EEF2F9"/>
-                    </a:solidFill>
-                  </a:tcPr>
-                </a:tc>
-                <a:tc>
-                  <a:txBody>
-                    <a:bodyPr/>
-                    <a:lstStyle/>
-                    <a:p>
-                      <a:r>
-                        <a:rPr sz="1150" b="1">
-                          <a:solidFill>
-                            <a:srgbClr val="E63946"/>
-                          </a:solidFill>
-                          <a:latin typeface="Microsoft JhengHei"/>
-                          <a:ea typeface="Microsoft JhengHei"/>
-                          <a:cs typeface="Microsoft JhengHei"/>
-                        </a:rPr>
-                        <a:t>駭客攻擊</a:t>
-                      </a:r>
-                    </a:p>
-                  </a:txBody>
-                  <a:tcPr anchor="ctr" marL="73152" marT="9144" marB="9144">
-                    <a:solidFill>
-                      <a:srgbClr val="EEF2F9"/>
-                    </a:solidFill>
-                  </a:tcPr>
-                </a:tc>
-                <a:tc>
-                  <a:txBody>
-                    <a:bodyPr/>
-                    <a:lstStyle/>
-                    <a:p>
-                      <a:r>
-                        <a:rPr sz="1150" b="0">
-                          <a:solidFill>
-                            <a:srgbClr val="1A2233"/>
-                          </a:solidFill>
-                          <a:latin typeface="Microsoft JhengHei"/>
-                          <a:ea typeface="Microsoft JhengHei"/>
-                          <a:cs typeface="Microsoft JhengHei"/>
-                        </a:rPr>
-                        <a:t>目前評估對公司營運無重大影響。</a:t>
-                      </a:r>
-                    </a:p>
-                  </a:txBody>
-                  <a:tcPr anchor="ctr" marL="73152" marT="9144" marB="9144">
-                    <a:solidFill>
-                      <a:srgbClr val="EEF2F9"/>
                     </a:solidFill>
                   </a:tcPr>
                 </a:tc>
@@ -5550,7 +5198,7 @@
                 <a:ea typeface="Microsoft JhengHei"/>
                 <a:cs typeface="Microsoft JhengHei"/>
               </a:rPr>
-              <a:t>5 起</a:t>
+              <a:t>2 起</a:t>
             </a:r>
           </a:p>
         </p:txBody>
@@ -5587,7 +5235,7 @@
                 <a:ea typeface="Microsoft JhengHei"/>
                 <a:cs typeface="Microsoft JhengHei"/>
               </a:rPr>
-              <a:t>巨路、建德工業、鴻海、彰源、偉康科技</a:t>
+              <a:t>巨路、建德工業</a:t>
             </a:r>
           </a:p>
         </p:txBody>
@@ -6026,7 +5674,7 @@
                 <a:ea typeface="Microsoft JhengHei"/>
                 <a:cs typeface="Microsoft JhengHei"/>
               </a:rPr>
-              <a:t>2 起</a:t>
+              <a:t>1 起</a:t>
             </a:r>
           </a:p>
         </p:txBody>
@@ -6063,7 +5711,7 @@
                 <a:ea typeface="Microsoft JhengHei"/>
                 <a:cs typeface="Microsoft JhengHei"/>
               </a:rPr>
-              <a:t>數字、永信</a:t>
+              <a:t>數字</a:t>
             </a:r>
           </a:p>
         </p:txBody>
@@ -6101,6 +5749,244 @@
                 <a:cs typeface="Microsoft JhengHei"/>
               </a:rPr>
               <a:t>源自開發流程或委外廠商，須通報並通知當事人</a:t>
+            </a:r>
+          </a:p>
+        </p:txBody>
+      </p:sp>
+      <p:sp>
+        <p:nvSpPr>
+          <p:cNvPr id="24" name="Rounded Rectangle 23"/>
+          <p:cNvSpPr/>
+          <p:nvPr/>
+        </p:nvSpPr>
+        <p:spPr>
+          <a:xfrm>
+            <a:off x="5669280" y="5669279"/>
+            <a:ext cx="6035040" cy="1170432"/>
+          </a:xfrm>
+          <a:prstGeom prst="roundRect">
+            <a:avLst/>
+          </a:prstGeom>
+          <a:solidFill>
+            <a:srgbClr val="FFFFFF"/>
+          </a:solidFill>
+          <a:ln w="12700">
+            <a:solidFill>
+              <a:srgbClr val="DDE3EE"/>
+            </a:solidFill>
+          </a:ln>
+          <a:effectLst/>
+        </p:spPr>
+        <p:style>
+          <a:lnRef idx="1">
+            <a:schemeClr val="accent1"/>
+          </a:lnRef>
+          <a:fillRef idx="3">
+            <a:schemeClr val="accent1"/>
+          </a:fillRef>
+          <a:effectRef idx="2">
+            <a:schemeClr val="accent1"/>
+          </a:effectRef>
+          <a:fontRef idx="minor">
+            <a:schemeClr val="lt1"/>
+          </a:fontRef>
+        </p:style>
+        <p:txBody>
+          <a:bodyPr rtlCol="0" anchor="ctr"/>
+          <a:lstStyle/>
+          <a:p>
+            <a:pPr algn="ctr"/>
+          </a:p>
+        </p:txBody>
+      </p:sp>
+      <p:sp>
+        <p:nvSpPr>
+          <p:cNvPr id="25" name="Rectangle 24"/>
+          <p:cNvSpPr/>
+          <p:nvPr/>
+        </p:nvSpPr>
+        <p:spPr>
+          <a:xfrm>
+            <a:off x="5669280" y="5669279"/>
+            <a:ext cx="109728" cy="1170432"/>
+          </a:xfrm>
+          <a:prstGeom prst="rect">
+            <a:avLst/>
+          </a:prstGeom>
+          <a:solidFill>
+            <a:srgbClr val="5C6679"/>
+          </a:solidFill>
+          <a:ln>
+            <a:noFill/>
+          </a:ln>
+          <a:effectLst/>
+        </p:spPr>
+        <p:style>
+          <a:lnRef idx="1">
+            <a:schemeClr val="accent1"/>
+          </a:lnRef>
+          <a:fillRef idx="3">
+            <a:schemeClr val="accent1"/>
+          </a:fillRef>
+          <a:effectRef idx="2">
+            <a:schemeClr val="accent1"/>
+          </a:effectRef>
+          <a:fontRef idx="minor">
+            <a:schemeClr val="lt1"/>
+          </a:fontRef>
+        </p:style>
+        <p:txBody>
+          <a:bodyPr rtlCol="0" anchor="ctr"/>
+          <a:lstStyle/>
+          <a:p>
+            <a:pPr algn="ctr"/>
+          </a:p>
+        </p:txBody>
+      </p:sp>
+      <p:sp>
+        <p:nvSpPr>
+          <p:cNvPr id="26" name="TextBox 25"/>
+          <p:cNvSpPr txBox="1"/>
+          <p:nvPr/>
+        </p:nvSpPr>
+        <p:spPr>
+          <a:xfrm>
+            <a:off x="5897880" y="5779007"/>
+            <a:ext cx="4206240" cy="365760"/>
+          </a:xfrm>
+          <a:prstGeom prst="rect">
+            <a:avLst/>
+          </a:prstGeom>
+          <a:noFill/>
+        </p:spPr>
+        <p:txBody>
+          <a:bodyPr wrap="square" anchor="ctr" lIns="0" rIns="0" tIns="0" bIns="0">
+            <a:spAutoFit/>
+          </a:bodyPr>
+          <a:lstStyle/>
+          <a:p>
+            <a:pPr algn="l"/>
+            <a:r>
+              <a:rPr sz="1600" b="1">
+                <a:solidFill>
+                  <a:srgbClr val="1A2233"/>
+                </a:solidFill>
+                <a:latin typeface="Microsoft JhengHei"/>
+                <a:ea typeface="Microsoft JhengHei"/>
+                <a:cs typeface="Microsoft JhengHei"/>
+              </a:rPr>
+              <a:t>其他</a:t>
+            </a:r>
+          </a:p>
+        </p:txBody>
+      </p:sp>
+      <p:sp>
+        <p:nvSpPr>
+          <p:cNvPr id="27" name="TextBox 26"/>
+          <p:cNvSpPr txBox="1"/>
+          <p:nvPr/>
+        </p:nvSpPr>
+        <p:spPr>
+          <a:xfrm>
+            <a:off x="10058400" y="5779007"/>
+            <a:ext cx="1463040" cy="365760"/>
+          </a:xfrm>
+          <a:prstGeom prst="rect">
+            <a:avLst/>
+          </a:prstGeom>
+          <a:noFill/>
+        </p:spPr>
+        <p:txBody>
+          <a:bodyPr wrap="square" anchor="ctr" lIns="0" rIns="0" tIns="0" bIns="0">
+            <a:spAutoFit/>
+          </a:bodyPr>
+          <a:lstStyle/>
+          <a:p>
+            <a:pPr algn="r"/>
+            <a:r>
+              <a:rPr sz="1800" b="1">
+                <a:solidFill>
+                  <a:srgbClr val="5C6679"/>
+                </a:solidFill>
+                <a:latin typeface="Microsoft JhengHei"/>
+                <a:ea typeface="Microsoft JhengHei"/>
+                <a:cs typeface="Microsoft JhengHei"/>
+              </a:rPr>
+              <a:t>1 起</a:t>
+            </a:r>
+          </a:p>
+        </p:txBody>
+      </p:sp>
+      <p:sp>
+        <p:nvSpPr>
+          <p:cNvPr id="28" name="TextBox 27"/>
+          <p:cNvSpPr txBox="1"/>
+          <p:nvPr/>
+        </p:nvSpPr>
+        <p:spPr>
+          <a:xfrm>
+            <a:off x="5897880" y="6172199"/>
+            <a:ext cx="5577840" cy="274320"/>
+          </a:xfrm>
+          <a:prstGeom prst="rect">
+            <a:avLst/>
+          </a:prstGeom>
+          <a:noFill/>
+        </p:spPr>
+        <p:txBody>
+          <a:bodyPr wrap="square" anchor="t" lIns="0" rIns="0" tIns="0" bIns="0">
+            <a:spAutoFit/>
+          </a:bodyPr>
+          <a:lstStyle/>
+          <a:p>
+            <a:pPr algn="l"/>
+            <a:r>
+              <a:rPr sz="1150" b="1">
+                <a:solidFill>
+                  <a:srgbClr val="1A2233"/>
+                </a:solidFill>
+                <a:latin typeface="Microsoft JhengHei"/>
+                <a:ea typeface="Microsoft JhengHei"/>
+                <a:cs typeface="Microsoft JhengHei"/>
+              </a:rPr>
+              <a:t>上福</a:t>
+            </a:r>
+          </a:p>
+        </p:txBody>
+      </p:sp>
+      <p:sp>
+        <p:nvSpPr>
+          <p:cNvPr id="29" name="TextBox 28"/>
+          <p:cNvSpPr txBox="1"/>
+          <p:nvPr/>
+        </p:nvSpPr>
+        <p:spPr>
+          <a:xfrm>
+            <a:off x="5897880" y="6437375"/>
+            <a:ext cx="5669280" cy="329184"/>
+          </a:xfrm>
+          <a:prstGeom prst="rect">
+            <a:avLst/>
+          </a:prstGeom>
+          <a:noFill/>
+        </p:spPr>
+        <p:txBody>
+          <a:bodyPr wrap="square" anchor="t" lIns="0" rIns="0" tIns="0" bIns="0">
+            <a:spAutoFit/>
+          </a:bodyPr>
+          <a:lstStyle/>
+          <a:p>
+            <a:pPr algn="l"/>
+            <a:r>
+              <a:rPr sz="1100" b="0">
+                <a:solidFill>
+                  <a:srgbClr val="5C6679"/>
+                </a:solidFill>
+                <a:latin typeface="Microsoft JhengHei"/>
+                <a:ea typeface="Microsoft JhengHei"/>
+                <a:cs typeface="Microsoft JhengHei"/>
+              </a:rPr>
+              <a:t>其他資安相關事件</a:t>
             </a:r>
           </a:p>
         </p:txBody>
@@ -6251,7 +6137,7 @@
         </p:nvGraphicFramePr>
         <p:xfrm>
           <a:off x="548640" y="1600200"/>
-          <a:ext cx="10789920" cy="4114800"/>
+          <a:ext cx="10789920" cy="2743200"/>
         </p:xfrm>
         <a:graphic>
           <a:graphicData uri="http://schemas.openxmlformats.org/drawingml/2006/table">
@@ -6403,7 +6289,7 @@
                           <a:ea typeface="Microsoft JhengHei"/>
                           <a:cs typeface="Microsoft JhengHei"/>
                         </a:rPr>
-                        <a:t>巨路</a:t>
+                        <a:t>上福</a:t>
                       </a:r>
                     </a:p>
                   </a:txBody>
@@ -6427,7 +6313,7 @@
                           <a:ea typeface="Microsoft JhengHei"/>
                           <a:cs typeface="Microsoft JhengHei"/>
                         </a:rPr>
-                        <a:t>6192</a:t>
+                        <a:t>6128</a:t>
                       </a:r>
                     </a:p>
                   </a:txBody>
@@ -6445,13 +6331,13 @@
                       <a:r>
                         <a:rPr sz="1150" b="1">
                           <a:solidFill>
-                            <a:srgbClr val="E63946"/>
+                            <a:srgbClr val="5C6679"/>
                           </a:solidFill>
                           <a:latin typeface="Microsoft JhengHei"/>
                           <a:ea typeface="Microsoft JhengHei"/>
                           <a:cs typeface="Microsoft JhengHei"/>
                         </a:rPr>
-                        <a:t>駭客攻擊</a:t>
+                        <a:t>其他</a:t>
                       </a:r>
                     </a:p>
                   </a:txBody>
@@ -6475,7 +6361,7 @@
                           <a:ea typeface="Microsoft JhengHei"/>
                           <a:cs typeface="Microsoft JhengHei"/>
                         </a:rPr>
-                        <a:t>勤業眾信聯合會計師事務所</a:t>
+                        <a:t>安永聯合會計師事務所</a:t>
                       </a:r>
                     </a:p>
                   </a:txBody>
@@ -6499,7 +6385,7 @@
                           <a:ea typeface="Microsoft JhengHei"/>
                           <a:cs typeface="Microsoft JhengHei"/>
                         </a:rPr>
-                        <a:t>劉建良、張麗君</a:t>
+                        <a:t>黃宇廷、賴書晨</a:t>
                       </a:r>
                     </a:p>
                   </a:txBody>
@@ -6525,7 +6411,7 @@
                           <a:ea typeface="Microsoft JhengHei"/>
                           <a:cs typeface="Microsoft JhengHei"/>
                         </a:rPr>
-                        <a:t>數字</a:t>
+                        <a:t>巨路</a:t>
                       </a:r>
                     </a:p>
                   </a:txBody>
@@ -6549,251 +6435,7 @@
                           <a:ea typeface="Microsoft JhengHei"/>
                           <a:cs typeface="Microsoft JhengHei"/>
                         </a:rPr>
-                        <a:t>5287</a:t>
-                      </a:r>
-                    </a:p>
-                  </a:txBody>
-                  <a:tcPr anchor="ctr" marL="73152" marT="9144" marB="9144">
-                    <a:solidFill>
-                      <a:srgbClr val="EEF2F9"/>
-                    </a:solidFill>
-                  </a:tcPr>
-                </a:tc>
-                <a:tc>
-                  <a:txBody>
-                    <a:bodyPr/>
-                    <a:lstStyle/>
-                    <a:p>
-                      <a:r>
-                        <a:rPr sz="1150" b="1">
-                          <a:solidFill>
-                            <a:srgbClr val="27A6C4"/>
-                          </a:solidFill>
-                          <a:latin typeface="Microsoft JhengHei"/>
-                          <a:ea typeface="Microsoft JhengHei"/>
-                          <a:cs typeface="Microsoft JhengHei"/>
-                        </a:rPr>
-                        <a:t>個資外洩</a:t>
-                      </a:r>
-                    </a:p>
-                  </a:txBody>
-                  <a:tcPr anchor="ctr" marL="73152" marT="9144" marB="9144">
-                    <a:solidFill>
-                      <a:srgbClr val="EEF2F9"/>
-                    </a:solidFill>
-                  </a:tcPr>
-                </a:tc>
-                <a:tc>
-                  <a:txBody>
-                    <a:bodyPr/>
-                    <a:lstStyle/>
-                    <a:p>
-                      <a:r>
-                        <a:rPr sz="1150" b="0">
-                          <a:solidFill>
-                            <a:srgbClr val="1A2233"/>
-                          </a:solidFill>
-                          <a:latin typeface="Microsoft JhengHei"/>
-                          <a:ea typeface="Microsoft JhengHei"/>
-                          <a:cs typeface="Microsoft JhengHei"/>
-                        </a:rPr>
-                        <a:t>安侯建業聯合會計師事務所</a:t>
-                      </a:r>
-                    </a:p>
-                  </a:txBody>
-                  <a:tcPr anchor="ctr" marL="73152" marT="9144" marB="9144">
-                    <a:solidFill>
-                      <a:srgbClr val="EEF2F9"/>
-                    </a:solidFill>
-                  </a:tcPr>
-                </a:tc>
-                <a:tc>
-                  <a:txBody>
-                    <a:bodyPr/>
-                    <a:lstStyle/>
-                    <a:p>
-                      <a:r>
-                        <a:rPr sz="1150" b="0">
-                          <a:solidFill>
-                            <a:srgbClr val="1A2233"/>
-                          </a:solidFill>
-                          <a:latin typeface="Microsoft JhengHei"/>
-                          <a:ea typeface="Microsoft JhengHei"/>
-                          <a:cs typeface="Microsoft JhengHei"/>
-                        </a:rPr>
-                        <a:t>羅瑞芝、余聖河</a:t>
-                      </a:r>
-                    </a:p>
-                  </a:txBody>
-                  <a:tcPr anchor="ctr" marL="73152" marT="9144" marB="9144">
-                    <a:solidFill>
-                      <a:srgbClr val="EEF2F9"/>
-                    </a:solidFill>
-                  </a:tcPr>
-                </a:tc>
-              </a:tr>
-              <a:tr h="457200">
-                <a:tc>
-                  <a:txBody>
-                    <a:bodyPr/>
-                    <a:lstStyle/>
-                    <a:p>
-                      <a:r>
-                        <a:rPr sz="1150" b="0">
-                          <a:solidFill>
-                            <a:srgbClr val="1A2233"/>
-                          </a:solidFill>
-                          <a:latin typeface="Microsoft JhengHei"/>
-                          <a:ea typeface="Microsoft JhengHei"/>
-                          <a:cs typeface="Microsoft JhengHei"/>
-                        </a:rPr>
-                        <a:t>弘塑</a:t>
-                      </a:r>
-                    </a:p>
-                  </a:txBody>
-                  <a:tcPr anchor="ctr" marL="73152" marT="9144" marB="9144">
-                    <a:solidFill>
-                      <a:srgbClr val="FFFFFF"/>
-                    </a:solidFill>
-                  </a:tcPr>
-                </a:tc>
-                <a:tc>
-                  <a:txBody>
-                    <a:bodyPr/>
-                    <a:lstStyle/>
-                    <a:p>
-                      <a:r>
-                        <a:rPr sz="1150" b="0">
-                          <a:solidFill>
-                            <a:srgbClr val="1A2233"/>
-                          </a:solidFill>
-                          <a:latin typeface="Microsoft JhengHei"/>
-                          <a:ea typeface="Microsoft JhengHei"/>
-                          <a:cs typeface="Microsoft JhengHei"/>
-                        </a:rPr>
-                        <a:t>3131</a:t>
-                      </a:r>
-                    </a:p>
-                  </a:txBody>
-                  <a:tcPr anchor="ctr" marL="73152" marT="9144" marB="9144">
-                    <a:solidFill>
-                      <a:srgbClr val="FFFFFF"/>
-                    </a:solidFill>
-                  </a:tcPr>
-                </a:tc>
-                <a:tc>
-                  <a:txBody>
-                    <a:bodyPr/>
-                    <a:lstStyle/>
-                    <a:p>
-                      <a:r>
-                        <a:rPr sz="1150" b="1">
-                          <a:solidFill>
-                            <a:srgbClr val="F4A261"/>
-                          </a:solidFill>
-                          <a:latin typeface="Microsoft JhengHei"/>
-                          <a:ea typeface="Microsoft JhengHei"/>
-                          <a:cs typeface="Microsoft JhengHei"/>
-                        </a:rPr>
-                        <a:t>勒索病毒/加密</a:t>
-                      </a:r>
-                    </a:p>
-                  </a:txBody>
-                  <a:tcPr anchor="ctr" marL="73152" marT="9144" marB="9144">
-                    <a:solidFill>
-                      <a:srgbClr val="FFFFFF"/>
-                    </a:solidFill>
-                  </a:tcPr>
-                </a:tc>
-                <a:tc>
-                  <a:txBody>
-                    <a:bodyPr/>
-                    <a:lstStyle/>
-                    <a:p>
-                      <a:r>
-                        <a:rPr sz="1150" b="0">
-                          <a:solidFill>
-                            <a:srgbClr val="1A2233"/>
-                          </a:solidFill>
-                          <a:latin typeface="Microsoft JhengHei"/>
-                          <a:ea typeface="Microsoft JhengHei"/>
-                          <a:cs typeface="Microsoft JhengHei"/>
-                        </a:rPr>
-                        <a:t>資誠聯合會計師事務所</a:t>
-                      </a:r>
-                    </a:p>
-                  </a:txBody>
-                  <a:tcPr anchor="ctr" marL="73152" marT="9144" marB="9144">
-                    <a:solidFill>
-                      <a:srgbClr val="FFFFFF"/>
-                    </a:solidFill>
-                  </a:tcPr>
-                </a:tc>
-                <a:tc>
-                  <a:txBody>
-                    <a:bodyPr/>
-                    <a:lstStyle/>
-                    <a:p>
-                      <a:r>
-                        <a:rPr sz="1150" b="0">
-                          <a:solidFill>
-                            <a:srgbClr val="1A2233"/>
-                          </a:solidFill>
-                          <a:latin typeface="Microsoft JhengHei"/>
-                          <a:ea typeface="Microsoft JhengHei"/>
-                          <a:cs typeface="Microsoft JhengHei"/>
-                        </a:rPr>
-                        <a:t>李典易、蔣承翰</a:t>
-                      </a:r>
-                    </a:p>
-                  </a:txBody>
-                  <a:tcPr anchor="ctr" marL="73152" marT="9144" marB="9144">
-                    <a:solidFill>
-                      <a:srgbClr val="FFFFFF"/>
-                    </a:solidFill>
-                  </a:tcPr>
-                </a:tc>
-              </a:tr>
-              <a:tr h="457200">
-                <a:tc>
-                  <a:txBody>
-                    <a:bodyPr/>
-                    <a:lstStyle/>
-                    <a:p>
-                      <a:r>
-                        <a:rPr sz="1150" b="0">
-                          <a:solidFill>
-                            <a:srgbClr val="1A2233"/>
-                          </a:solidFill>
-                          <a:latin typeface="Microsoft JhengHei"/>
-                          <a:ea typeface="Microsoft JhengHei"/>
-                          <a:cs typeface="Microsoft JhengHei"/>
-                        </a:rPr>
-                        <a:t>建德工業</a:t>
-                      </a:r>
-                    </a:p>
-                  </a:txBody>
-                  <a:tcPr anchor="ctr" marL="73152" marT="9144" marB="9144">
-                    <a:solidFill>
-                      <a:srgbClr val="EEF2F9"/>
-                    </a:solidFill>
-                  </a:tcPr>
-                </a:tc>
-                <a:tc>
-                  <a:txBody>
-                    <a:bodyPr/>
-                    <a:lstStyle/>
-                    <a:p>
-                      <a:r>
-                        <a:rPr sz="1150" b="0">
-                          <a:solidFill>
-                            <a:srgbClr val="1A2233"/>
-                          </a:solidFill>
-                          <a:latin typeface="Microsoft JhengHei"/>
-                          <a:ea typeface="Microsoft JhengHei"/>
-                          <a:cs typeface="Microsoft JhengHei"/>
-                        </a:rPr>
-                        <a:t>6606</a:t>
+                        <a:t>6192</a:t>
                       </a:r>
                     </a:p>
                   </a:txBody>
@@ -6841,7 +6483,7 @@
                           <a:ea typeface="Microsoft JhengHei"/>
                           <a:cs typeface="Microsoft JhengHei"/>
                         </a:rPr>
-                        <a:t>資誠聯合會計師事務所</a:t>
+                        <a:t>勤業眾信聯合會計師事務所</a:t>
                       </a:r>
                     </a:p>
                   </a:txBody>
@@ -6865,7 +6507,7 @@
                           <a:ea typeface="Microsoft JhengHei"/>
                           <a:cs typeface="Microsoft JhengHei"/>
                         </a:rPr>
-                        <a:t>林秀珊、吳建志</a:t>
+                        <a:t>劉建良、張麗君</a:t>
                       </a:r>
                     </a:p>
                   </a:txBody>
@@ -6891,7 +6533,7 @@
                           <a:ea typeface="Microsoft JhengHei"/>
                           <a:cs typeface="Microsoft JhengHei"/>
                         </a:rPr>
-                        <a:t>永信</a:t>
+                        <a:t>數字</a:t>
                       </a:r>
                     </a:p>
                   </a:txBody>
@@ -6915,7 +6557,7 @@
                           <a:ea typeface="Microsoft JhengHei"/>
                           <a:cs typeface="Microsoft JhengHei"/>
                         </a:rPr>
-                        <a:t>3705</a:t>
+                        <a:t>5287</a:t>
                       </a:r>
                     </a:p>
                   </a:txBody>
@@ -6987,7 +6629,7 @@
                           <a:ea typeface="Microsoft JhengHei"/>
                           <a:cs typeface="Microsoft JhengHei"/>
                         </a:rPr>
-                        <a:t>趙敏如、吳佳翰</a:t>
+                        <a:t>羅瑞芝、余聖河</a:t>
                       </a:r>
                     </a:p>
                   </a:txBody>
@@ -7013,7 +6655,7 @@
                           <a:ea typeface="Microsoft JhengHei"/>
                           <a:cs typeface="Microsoft JhengHei"/>
                         </a:rPr>
-                        <a:t>鴻海</a:t>
+                        <a:t>弘塑</a:t>
                       </a:r>
                     </a:p>
                   </a:txBody>
@@ -7037,7 +6679,7 @@
                           <a:ea typeface="Microsoft JhengHei"/>
                           <a:cs typeface="Microsoft JhengHei"/>
                         </a:rPr>
-                        <a:t>2317</a:t>
+                        <a:t>3131</a:t>
                       </a:r>
                     </a:p>
                   </a:txBody>
@@ -7055,13 +6697,13 @@
                       <a:r>
                         <a:rPr sz="1150" b="1">
                           <a:solidFill>
-                            <a:srgbClr val="E63946"/>
+                            <a:srgbClr val="F4A261"/>
                           </a:solidFill>
                           <a:latin typeface="Microsoft JhengHei"/>
                           <a:ea typeface="Microsoft JhengHei"/>
                           <a:cs typeface="Microsoft JhengHei"/>
                         </a:rPr>
-                        <a:t>駭客攻擊</a:t>
+                        <a:t>勒索病毒/加密</a:t>
                       </a:r>
                     </a:p>
                   </a:txBody>
@@ -7109,7 +6751,7 @@
                           <a:ea typeface="Microsoft JhengHei"/>
                           <a:cs typeface="Microsoft JhengHei"/>
                         </a:rPr>
-                        <a:t>徐聖忠、徐潔如</a:t>
+                        <a:t>李典易、蔣承翰</a:t>
                       </a:r>
                     </a:p>
                   </a:txBody>
@@ -7135,7 +6777,7 @@
                           <a:ea typeface="Microsoft JhengHei"/>
                           <a:cs typeface="Microsoft JhengHei"/>
                         </a:rPr>
-                        <a:t>彰源</a:t>
+                        <a:t>建德工業</a:t>
                       </a:r>
                     </a:p>
                   </a:txBody>
@@ -7159,7 +6801,7 @@
                           <a:ea typeface="Microsoft JhengHei"/>
                           <a:cs typeface="Microsoft JhengHei"/>
                         </a:rPr>
-                        <a:t>2030</a:t>
+                        <a:t>6606</a:t>
                       </a:r>
                     </a:p>
                   </a:txBody>
@@ -7207,7 +6849,7 @@
                           <a:ea typeface="Microsoft JhengHei"/>
                           <a:cs typeface="Microsoft JhengHei"/>
                         </a:rPr>
-                        <a:t>勤業眾信聯合會計師事務所</a:t>
+                        <a:t>資誠聯合會計師事務所</a:t>
                       </a:r>
                     </a:p>
                   </a:txBody>
@@ -7231,135 +6873,13 @@
                           <a:ea typeface="Microsoft JhengHei"/>
                           <a:cs typeface="Microsoft JhengHei"/>
                         </a:rPr>
-                        <a:t>許瑞隆、吳少君</a:t>
+                        <a:t>林秀珊、吳建志</a:t>
                       </a:r>
                     </a:p>
                   </a:txBody>
                   <a:tcPr anchor="ctr" marL="73152" marT="9144" marB="9144">
                     <a:solidFill>
                       <a:srgbClr val="FFFFFF"/>
-                    </a:solidFill>
-                  </a:tcPr>
-                </a:tc>
-              </a:tr>
-              <a:tr h="457200">
-                <a:tc>
-                  <a:txBody>
-                    <a:bodyPr/>
-                    <a:lstStyle/>
-                    <a:p>
-                      <a:r>
-                        <a:rPr sz="1150" b="0">
-                          <a:solidFill>
-                            <a:srgbClr val="1A2233"/>
-                          </a:solidFill>
-                          <a:latin typeface="Microsoft JhengHei"/>
-                          <a:ea typeface="Microsoft JhengHei"/>
-                          <a:cs typeface="Microsoft JhengHei"/>
-                        </a:rPr>
-                        <a:t>偉康科技</a:t>
-                      </a:r>
-                    </a:p>
-                  </a:txBody>
-                  <a:tcPr anchor="ctr" marL="73152" marT="9144" marB="9144">
-                    <a:solidFill>
-                      <a:srgbClr val="EEF2F9"/>
-                    </a:solidFill>
-                  </a:tcPr>
-                </a:tc>
-                <a:tc>
-                  <a:txBody>
-                    <a:bodyPr/>
-                    <a:lstStyle/>
-                    <a:p>
-                      <a:r>
-                        <a:rPr sz="1150" b="0">
-                          <a:solidFill>
-                            <a:srgbClr val="1A2233"/>
-                          </a:solidFill>
-                          <a:latin typeface="Microsoft JhengHei"/>
-                          <a:ea typeface="Microsoft JhengHei"/>
-                          <a:cs typeface="Microsoft JhengHei"/>
-                        </a:rPr>
-                        <a:t>6865</a:t>
-                      </a:r>
-                    </a:p>
-                  </a:txBody>
-                  <a:tcPr anchor="ctr" marL="73152" marT="9144" marB="9144">
-                    <a:solidFill>
-                      <a:srgbClr val="EEF2F9"/>
-                    </a:solidFill>
-                  </a:tcPr>
-                </a:tc>
-                <a:tc>
-                  <a:txBody>
-                    <a:bodyPr/>
-                    <a:lstStyle/>
-                    <a:p>
-                      <a:r>
-                        <a:rPr sz="1150" b="1">
-                          <a:solidFill>
-                            <a:srgbClr val="E63946"/>
-                          </a:solidFill>
-                          <a:latin typeface="Microsoft JhengHei"/>
-                          <a:ea typeface="Microsoft JhengHei"/>
-                          <a:cs typeface="Microsoft JhengHei"/>
-                        </a:rPr>
-                        <a:t>駭客攻擊</a:t>
-                      </a:r>
-                    </a:p>
-                  </a:txBody>
-                  <a:tcPr anchor="ctr" marL="73152" marT="9144" marB="9144">
-                    <a:solidFill>
-                      <a:srgbClr val="EEF2F9"/>
-                    </a:solidFill>
-                  </a:tcPr>
-                </a:tc>
-                <a:tc>
-                  <a:txBody>
-                    <a:bodyPr/>
-                    <a:lstStyle/>
-                    <a:p>
-                      <a:r>
-                        <a:rPr sz="1150" b="0">
-                          <a:solidFill>
-                            <a:srgbClr val="1A2233"/>
-                          </a:solidFill>
-                          <a:latin typeface="Microsoft JhengHei"/>
-                          <a:ea typeface="Microsoft JhengHei"/>
-                          <a:cs typeface="Microsoft JhengHei"/>
-                        </a:rPr>
-                        <a:t>安侯建業聯合會計師事務所</a:t>
-                      </a:r>
-                    </a:p>
-                  </a:txBody>
-                  <a:tcPr anchor="ctr" marL="73152" marT="9144" marB="9144">
-                    <a:solidFill>
-                      <a:srgbClr val="EEF2F9"/>
-                    </a:solidFill>
-                  </a:tcPr>
-                </a:tc>
-                <a:tc>
-                  <a:txBody>
-                    <a:bodyPr/>
-                    <a:lstStyle/>
-                    <a:p>
-                      <a:r>
-                        <a:rPr sz="1150" b="0">
-                          <a:solidFill>
-                            <a:srgbClr val="1A2233"/>
-                          </a:solidFill>
-                          <a:latin typeface="Microsoft JhengHei"/>
-                          <a:ea typeface="Microsoft JhengHei"/>
-                          <a:cs typeface="Microsoft JhengHei"/>
-                        </a:rPr>
-                        <a:t>洪士剛、莊鈞維</a:t>
-                      </a:r>
-                    </a:p>
-                  </a:txBody>
-                  <a:tcPr anchor="ctr" marL="73152" marT="9144" marB="9144">
-                    <a:solidFill>
-                      <a:srgbClr val="EEF2F9"/>
                     </a:solidFill>
                   </a:tcPr>
                 </a:tc>
@@ -8813,7 +8333,7 @@
             <a:avLst/>
           </a:prstGeom>
           <a:solidFill>
-            <a:srgbClr val="E63946"/>
+            <a:srgbClr val="5C6679"/>
           </a:solidFill>
           <a:ln>
             <a:noFill/>
@@ -8874,7 +8394,7 @@
                 <a:ea typeface="Microsoft JhengHei"/>
                 <a:cs typeface="Microsoft JhengHei"/>
               </a:rPr>
-              <a:t>巨路 </a:t>
+              <a:t>上福 </a:t>
             </a:r>
             <a:r>
               <a:rPr sz="1300" b="0">
@@ -8885,7 +8405,7 @@
                 <a:ea typeface="Microsoft JhengHei"/>
                 <a:cs typeface="Microsoft JhengHei"/>
               </a:rPr>
-              <a:t>6192</a:t>
+              <a:t>6128</a:t>
             </a:r>
           </a:p>
         </p:txBody>
@@ -8905,7 +8425,7 @@
             <a:avLst/>
           </a:prstGeom>
           <a:solidFill>
-            <a:srgbClr val="E63946"/>
+            <a:srgbClr val="5C6679"/>
           </a:solidFill>
           <a:ln>
             <a:noFill/>
@@ -8966,7 +8486,7 @@
                 <a:ea typeface="Microsoft JhengHei"/>
                 <a:cs typeface="Microsoft JhengHei"/>
               </a:rPr>
-              <a:t>駭客攻擊</a:t>
+              <a:t>其他</a:t>
             </a:r>
           </a:p>
         </p:txBody>
@@ -9001,7 +8521,7 @@
             <a:r>
               <a:rPr sz="1100" b="1">
                 <a:solidFill>
-                  <a:srgbClr val="E63946"/>
+                  <a:srgbClr val="5C6679"/>
                 </a:solidFill>
                 <a:latin typeface="Microsoft JhengHei"/>
                 <a:ea typeface="Microsoft JhengHei"/>
@@ -9018,7 +8538,7 @@
                 <a:ea typeface="Microsoft JhengHei"/>
                 <a:cs typeface="Microsoft JhengHei"/>
               </a:rPr>
-              <a:t>本公司部份資訊系統遭受駭客網路攻擊。</a:t>
+              <a:t>KatunCorporation資訊設備遭受未授權外部存取。</a:t>
             </a:r>
           </a:p>
         </p:txBody>
@@ -9053,7 +8573,7 @@
             <a:r>
               <a:rPr sz="1100" b="1">
                 <a:solidFill>
-                  <a:srgbClr val="E63946"/>
+                  <a:srgbClr val="5C6679"/>
                 </a:solidFill>
                 <a:latin typeface="Microsoft JhengHei"/>
                 <a:ea typeface="Microsoft JhengHei"/>
@@ -9070,7 +8590,7 @@
                 <a:ea typeface="Microsoft JhengHei"/>
                 <a:cs typeface="Microsoft JhengHei"/>
               </a:rPr>
-              <a:t>本公司將持續強化網路與資訊安全架構，並擴大資安防禦措施，以提升整體資安防護能力</a:t>
+              <a:t>此事件後將持續提升網路與資訊基礎架構之安全控管，並持續密切監控，以確保資訊安全。</a:t>
             </a:r>
           </a:p>
         </p:txBody>
@@ -9136,7 +8656,7 @@
             <a:avLst/>
           </a:prstGeom>
           <a:solidFill>
-            <a:srgbClr val="27A6C4"/>
+            <a:srgbClr val="E63946"/>
           </a:solidFill>
           <a:ln>
             <a:noFill/>
@@ -9197,7 +8717,7 @@
                 <a:ea typeface="Microsoft JhengHei"/>
                 <a:cs typeface="Microsoft JhengHei"/>
               </a:rPr>
-              <a:t>數字 </a:t>
+              <a:t>巨路 </a:t>
             </a:r>
             <a:r>
               <a:rPr sz="1300" b="0">
@@ -9208,7 +8728,7 @@
                 <a:ea typeface="Microsoft JhengHei"/>
                 <a:cs typeface="Microsoft JhengHei"/>
               </a:rPr>
-              <a:t>5287</a:t>
+              <a:t>6192</a:t>
             </a:r>
           </a:p>
         </p:txBody>
@@ -9228,7 +8748,7 @@
             <a:avLst/>
           </a:prstGeom>
           <a:solidFill>
-            <a:srgbClr val="27A6C4"/>
+            <a:srgbClr val="E63946"/>
           </a:solidFill>
           <a:ln>
             <a:noFill/>
@@ -9289,7 +8809,7 @@
                 <a:ea typeface="Microsoft JhengHei"/>
                 <a:cs typeface="Microsoft JhengHei"/>
               </a:rPr>
-              <a:t>個資外洩</a:t>
+              <a:t>駭客攻擊</a:t>
             </a:r>
           </a:p>
         </p:txBody>
@@ -9324,7 +8844,7 @@
             <a:r>
               <a:rPr sz="1100" b="1">
                 <a:solidFill>
-                  <a:srgbClr val="27A6C4"/>
+                  <a:srgbClr val="E63946"/>
                 </a:solidFill>
                 <a:latin typeface="Microsoft JhengHei"/>
                 <a:ea typeface="Microsoft JhengHei"/>
@@ -9341,7 +8861,7 @@
                 <a:ea typeface="Microsoft JhengHei"/>
                 <a:cs typeface="Microsoft JhengHei"/>
               </a:rPr>
-              <a:t>本公司於115年5月25日進行內部活動網頁開發與測試流程時，因程式碼管理作業設定不當，致部分未去…</a:t>
+              <a:t>本公司部份資訊系統遭受駭客網路攻擊。</a:t>
             </a:r>
           </a:p>
         </p:txBody>
@@ -9376,7 +8896,7 @@
             <a:r>
               <a:rPr sz="1100" b="1">
                 <a:solidFill>
-                  <a:srgbClr val="27A6C4"/>
+                  <a:srgbClr val="E63946"/>
                 </a:solidFill>
                 <a:latin typeface="Microsoft JhengHei"/>
                 <a:ea typeface="Microsoft JhengHei"/>
@@ -9393,7 +8913,7 @@
                 <a:ea typeface="Microsoft JhengHei"/>
                 <a:cs typeface="Microsoft JhengHei"/>
               </a:rPr>
-              <a:t>(1)依據安全軟體發展生命週期(SSDLC)之框架，優化開發流程管制作業(2)落實權限管理及審查，避免未經授權之人員得以…</a:t>
+              <a:t>本公司將持續強化網路與資訊安全架構，並擴大資安防禦措施，以提升整體資安防護能力</a:t>
             </a:r>
           </a:p>
         </p:txBody>
@@ -9459,7 +8979,7 @@
             <a:avLst/>
           </a:prstGeom>
           <a:solidFill>
-            <a:srgbClr val="F4A261"/>
+            <a:srgbClr val="27A6C4"/>
           </a:solidFill>
           <a:ln>
             <a:noFill/>
@@ -9520,7 +9040,7 @@
                 <a:ea typeface="Microsoft JhengHei"/>
                 <a:cs typeface="Microsoft JhengHei"/>
               </a:rPr>
-              <a:t>弘塑 </a:t>
+              <a:t>數字 </a:t>
             </a:r>
             <a:r>
               <a:rPr sz="1300" b="0">
@@ -9531,7 +9051,7 @@
                 <a:ea typeface="Microsoft JhengHei"/>
                 <a:cs typeface="Microsoft JhengHei"/>
               </a:rPr>
-              <a:t>3131</a:t>
+              <a:t>5287</a:t>
             </a:r>
           </a:p>
         </p:txBody>
@@ -9551,7 +9071,7 @@
             <a:avLst/>
           </a:prstGeom>
           <a:solidFill>
-            <a:srgbClr val="F4A261"/>
+            <a:srgbClr val="27A6C4"/>
           </a:solidFill>
           <a:ln>
             <a:noFill/>
@@ -9612,7 +9132,7 @@
                 <a:ea typeface="Microsoft JhengHei"/>
                 <a:cs typeface="Microsoft JhengHei"/>
               </a:rPr>
-              <a:t>勒索病毒/加密</a:t>
+              <a:t>個資外洩</a:t>
             </a:r>
           </a:p>
         </p:txBody>
@@ -9647,7 +9167,7 @@
             <a:r>
               <a:rPr sz="1100" b="1">
                 <a:solidFill>
-                  <a:srgbClr val="F4A261"/>
+                  <a:srgbClr val="27A6C4"/>
                 </a:solidFill>
                 <a:latin typeface="Microsoft JhengHei"/>
                 <a:ea typeface="Microsoft JhengHei"/>
@@ -9664,7 +9184,7 @@
                 <a:ea typeface="Microsoft JhengHei"/>
                 <a:cs typeface="Microsoft JhengHei"/>
               </a:rPr>
-              <a:t>本公司資訊系統遭受勒索病毒攻擊。</a:t>
+              <a:t>本公司於115年5月25日進行內部活動網頁開發與測試流程時，因程式碼管理作業設定不當，致部分未去…</a:t>
             </a:r>
           </a:p>
         </p:txBody>
@@ -9699,7 +9219,7 @@
             <a:r>
               <a:rPr sz="1100" b="1">
                 <a:solidFill>
-                  <a:srgbClr val="F4A261"/>
+                  <a:srgbClr val="27A6C4"/>
                 </a:solidFill>
                 <a:latin typeface="Microsoft JhengHei"/>
                 <a:ea typeface="Microsoft JhengHei"/>
@@ -9716,7 +9236,7 @@
                 <a:ea typeface="Microsoft JhengHei"/>
                 <a:cs typeface="Microsoft JhengHei"/>
               </a:rPr>
-              <a:t>本公司將持續加強資訊安全監控與防護機制，提升網路與資訊基礎架構之安全管理，並導入更完善之資安控管措施，以降低未來風險。</a:t>
+              <a:t>(1)依據安全軟體發展生命週期(SSDLC)之框架，優化開發流程管制作業(2)落實權限管理及審查，避免未經授權之人員得以…</a:t>
             </a:r>
           </a:p>
         </p:txBody>
@@ -9782,7 +9302,7 @@
             <a:avLst/>
           </a:prstGeom>
           <a:solidFill>
-            <a:srgbClr val="E63946"/>
+            <a:srgbClr val="F4A261"/>
           </a:solidFill>
           <a:ln>
             <a:noFill/>
@@ -9843,7 +9363,7 @@
                 <a:ea typeface="Microsoft JhengHei"/>
                 <a:cs typeface="Microsoft JhengHei"/>
               </a:rPr>
-              <a:t>建德工業 </a:t>
+              <a:t>弘塑 </a:t>
             </a:r>
             <a:r>
               <a:rPr sz="1300" b="0">
@@ -9854,7 +9374,7 @@
                 <a:ea typeface="Microsoft JhengHei"/>
                 <a:cs typeface="Microsoft JhengHei"/>
               </a:rPr>
-              <a:t>6606</a:t>
+              <a:t>3131</a:t>
             </a:r>
           </a:p>
         </p:txBody>
@@ -9874,7 +9394,7 @@
             <a:avLst/>
           </a:prstGeom>
           <a:solidFill>
-            <a:srgbClr val="E63946"/>
+            <a:srgbClr val="F4A261"/>
           </a:solidFill>
           <a:ln>
             <a:noFill/>
@@ -9935,7 +9455,7 @@
                 <a:ea typeface="Microsoft JhengHei"/>
                 <a:cs typeface="Microsoft JhengHei"/>
               </a:rPr>
-              <a:t>駭客攻擊</a:t>
+              <a:t>勒索病毒/加密</a:t>
             </a:r>
           </a:p>
         </p:txBody>
@@ -9970,7 +9490,7 @@
             <a:r>
               <a:rPr sz="1100" b="1">
                 <a:solidFill>
-                  <a:srgbClr val="E63946"/>
+                  <a:srgbClr val="F4A261"/>
                 </a:solidFill>
                 <a:latin typeface="Microsoft JhengHei"/>
                 <a:ea typeface="Microsoft JhengHei"/>
@@ -9987,7 +9507,7 @@
                 <a:ea typeface="Microsoft JhengHei"/>
                 <a:cs typeface="Microsoft JhengHei"/>
               </a:rPr>
-              <a:t>本公司資訊系統疑遭受駭客網路攻擊</a:t>
+              <a:t>本公司資訊系統遭受勒索病毒攻擊。</a:t>
             </a:r>
           </a:p>
         </p:txBody>
@@ -10022,7 +9542,7 @@
             <a:r>
               <a:rPr sz="1100" b="1">
                 <a:solidFill>
-                  <a:srgbClr val="E63946"/>
+                  <a:srgbClr val="F4A261"/>
                 </a:solidFill>
                 <a:latin typeface="Microsoft JhengHei"/>
                 <a:ea typeface="Microsoft JhengHei"/>
@@ -10039,7 +9559,7 @@
                 <a:ea typeface="Microsoft JhengHei"/>
                 <a:cs typeface="Microsoft JhengHei"/>
               </a:rPr>
-              <a:t>目前已全面盤查本公司資訊系統，確保無植入木馬程式等攻擊手段，將持續提昇網路資訊安全架構，並持續嚴密監控，以確保資訊安全。</a:t>
+              <a:t>本公司將持續加強資訊安全監控與防護機制，提升網路與資訊基礎架構之安全管理，並導入更完善之資安控管措施，以降低未來風險。</a:t>
             </a:r>
           </a:p>
         </p:txBody>
@@ -10241,7 +9761,7 @@
             <a:avLst/>
           </a:prstGeom>
           <a:solidFill>
-            <a:srgbClr val="27A6C4"/>
+            <a:srgbClr val="E63946"/>
           </a:solidFill>
           <a:ln>
             <a:noFill/>
@@ -10302,7 +9822,7 @@
                 <a:ea typeface="Microsoft JhengHei"/>
                 <a:cs typeface="Microsoft JhengHei"/>
               </a:rPr>
-              <a:t>永信 </a:t>
+              <a:t>建德工業 </a:t>
             </a:r>
             <a:r>
               <a:rPr sz="1300" b="0">
@@ -10313,7 +9833,7 @@
                 <a:ea typeface="Microsoft JhengHei"/>
                 <a:cs typeface="Microsoft JhengHei"/>
               </a:rPr>
-              <a:t>3705</a:t>
+              <a:t>6606</a:t>
             </a:r>
           </a:p>
         </p:txBody>
@@ -10330,237 +9850,6 @@
             <a:ext cx="1234440" cy="347472"/>
           </a:xfrm>
           <a:prstGeom prst="roundRect">
-            <a:avLst/>
-          </a:prstGeom>
-          <a:solidFill>
-            <a:srgbClr val="27A6C4"/>
-          </a:solidFill>
-          <a:ln>
-            <a:noFill/>
-          </a:ln>
-          <a:effectLst/>
-        </p:spPr>
-        <p:style>
-          <a:lnRef idx="1">
-            <a:schemeClr val="accent1"/>
-          </a:lnRef>
-          <a:fillRef idx="3">
-            <a:schemeClr val="accent1"/>
-          </a:fillRef>
-          <a:effectRef idx="2">
-            <a:schemeClr val="accent1"/>
-          </a:effectRef>
-          <a:fontRef idx="minor">
-            <a:schemeClr val="lt1"/>
-          </a:fontRef>
-        </p:style>
-        <p:txBody>
-          <a:bodyPr rtlCol="0" anchor="ctr"/>
-          <a:lstStyle/>
-          <a:p>
-            <a:pPr algn="ctr"/>
-          </a:p>
-        </p:txBody>
-      </p:sp>
-      <p:sp>
-        <p:nvSpPr>
-          <p:cNvPr id="9" name="TextBox 8"/>
-          <p:cNvSpPr txBox="1"/>
-          <p:nvPr/>
-        </p:nvSpPr>
-        <p:spPr>
-          <a:xfrm>
-            <a:off x="4526280" y="1792224"/>
-            <a:ext cx="1234440" cy="347472"/>
-          </a:xfrm>
-          <a:prstGeom prst="rect">
-            <a:avLst/>
-          </a:prstGeom>
-          <a:noFill/>
-        </p:spPr>
-        <p:txBody>
-          <a:bodyPr wrap="square" anchor="ctr" lIns="0" rIns="0" tIns="0" bIns="0">
-            <a:spAutoFit/>
-          </a:bodyPr>
-          <a:lstStyle/>
-          <a:p>
-            <a:pPr algn="ctr"/>
-            <a:r>
-              <a:rPr sz="1050" b="1">
-                <a:solidFill>
-                  <a:srgbClr val="FFFFFF"/>
-                </a:solidFill>
-                <a:latin typeface="Microsoft JhengHei"/>
-                <a:ea typeface="Microsoft JhengHei"/>
-                <a:cs typeface="Microsoft JhengHei"/>
-              </a:rPr>
-              <a:t>個資外洩</a:t>
-            </a:r>
-          </a:p>
-        </p:txBody>
-      </p:sp>
-      <p:sp>
-        <p:nvSpPr>
-          <p:cNvPr id="10" name="TextBox 9"/>
-          <p:cNvSpPr txBox="1"/>
-          <p:nvPr/>
-        </p:nvSpPr>
-        <p:spPr>
-          <a:xfrm>
-            <a:off x="777240" y="2267712"/>
-            <a:ext cx="4937760" cy="640080"/>
-          </a:xfrm>
-          <a:prstGeom prst="rect">
-            <a:avLst/>
-          </a:prstGeom>
-          <a:noFill/>
-        </p:spPr>
-        <p:txBody>
-          <a:bodyPr wrap="square" anchor="t" lIns="0" rIns="0" tIns="0" bIns="0">
-            <a:spAutoFit/>
-          </a:bodyPr>
-          <a:lstStyle/>
-          <a:p>
-            <a:pPr algn="l">
-              <a:lnSpc>
-                <a:spcPts val="1500"/>
-              </a:lnSpc>
-            </a:pPr>
-            <a:r>
-              <a:rPr sz="1100" b="1">
-                <a:solidFill>
-                  <a:srgbClr val="27A6C4"/>
-                </a:solidFill>
-                <a:latin typeface="Microsoft JhengHei"/>
-                <a:ea typeface="Microsoft JhengHei"/>
-                <a:cs typeface="Microsoft JhengHei"/>
-              </a:rPr>
-              <a:t>緣由　</a:t>
-            </a:r>
-            <a:r>
-              <a:rPr sz="1100" b="0">
-                <a:solidFill>
-                  <a:srgbClr val="1A2233"/>
-                </a:solidFill>
-                <a:latin typeface="Microsoft JhengHei"/>
-                <a:ea typeface="Microsoft JhengHei"/>
-                <a:cs typeface="Microsoft JhengHei"/>
-              </a:rPr>
-              <a:t>永信藥品本日接獲資安公司通報，廠商於網路巡檢時，發現駭客取得永信藥品委外廠商活動網站的消費者發票…</a:t>
-            </a:r>
-          </a:p>
-        </p:txBody>
-      </p:sp>
-      <p:sp>
-        <p:nvSpPr>
-          <p:cNvPr id="11" name="TextBox 10"/>
-          <p:cNvSpPr txBox="1"/>
-          <p:nvPr/>
-        </p:nvSpPr>
-        <p:spPr>
-          <a:xfrm>
-            <a:off x="777240" y="2926080"/>
-            <a:ext cx="4937760" cy="713232"/>
-          </a:xfrm>
-          <a:prstGeom prst="rect">
-            <a:avLst/>
-          </a:prstGeom>
-          <a:noFill/>
-        </p:spPr>
-        <p:txBody>
-          <a:bodyPr wrap="square" anchor="t" lIns="0" rIns="0" tIns="0" bIns="0">
-            <a:spAutoFit/>
-          </a:bodyPr>
-          <a:lstStyle/>
-          <a:p>
-            <a:pPr algn="l">
-              <a:lnSpc>
-                <a:spcPts val="1500"/>
-              </a:lnSpc>
-            </a:pPr>
-            <a:r>
-              <a:rPr sz="1100" b="1">
-                <a:solidFill>
-                  <a:srgbClr val="27A6C4"/>
-                </a:solidFill>
-                <a:latin typeface="Microsoft JhengHei"/>
-                <a:ea typeface="Microsoft JhengHei"/>
-                <a:cs typeface="Microsoft JhengHei"/>
-              </a:rPr>
-              <a:t>因應　</a:t>
-            </a:r>
-            <a:r>
-              <a:rPr sz="1100" b="0">
-                <a:solidFill>
-                  <a:srgbClr val="1A2233"/>
-                </a:solidFill>
-                <a:latin typeface="Microsoft JhengHei"/>
-                <a:ea typeface="Microsoft JhengHei"/>
-                <a:cs typeface="Microsoft JhengHei"/>
-              </a:rPr>
-              <a:t>(1)已立即啟動資安應變機制，並要求委外廠商進行系統隔離、鑑識調查。(2)已委請資訊安全專業團隊協助調查事件原因及影響範…</a:t>
-            </a:r>
-          </a:p>
-        </p:txBody>
-      </p:sp>
-      <p:sp>
-        <p:nvSpPr>
-          <p:cNvPr id="12" name="Rounded Rectangle 11"/>
-          <p:cNvSpPr/>
-          <p:nvPr/>
-        </p:nvSpPr>
-        <p:spPr>
-          <a:xfrm>
-            <a:off x="6172200" y="1554480"/>
-            <a:ext cx="5394960" cy="2148840"/>
-          </a:xfrm>
-          <a:prstGeom prst="roundRect">
-            <a:avLst/>
-          </a:prstGeom>
-          <a:solidFill>
-            <a:srgbClr val="FFFFFF"/>
-          </a:solidFill>
-          <a:ln w="12700">
-            <a:solidFill>
-              <a:srgbClr val="DDE3EE"/>
-            </a:solidFill>
-          </a:ln>
-          <a:effectLst/>
-        </p:spPr>
-        <p:style>
-          <a:lnRef idx="1">
-            <a:schemeClr val="accent1"/>
-          </a:lnRef>
-          <a:fillRef idx="3">
-            <a:schemeClr val="accent1"/>
-          </a:fillRef>
-          <a:effectRef idx="2">
-            <a:schemeClr val="accent1"/>
-          </a:effectRef>
-          <a:fontRef idx="minor">
-            <a:schemeClr val="lt1"/>
-          </a:fontRef>
-        </p:style>
-        <p:txBody>
-          <a:bodyPr rtlCol="0" anchor="ctr"/>
-          <a:lstStyle/>
-          <a:p>
-            <a:pPr algn="ctr"/>
-          </a:p>
-        </p:txBody>
-      </p:sp>
-      <p:sp>
-        <p:nvSpPr>
-          <p:cNvPr id="13" name="Rectangle 12"/>
-          <p:cNvSpPr/>
-          <p:nvPr/>
-        </p:nvSpPr>
-        <p:spPr>
-          <a:xfrm>
-            <a:off x="6172200" y="1554480"/>
-            <a:ext cx="5394960" cy="109728"/>
-          </a:xfrm>
-          <a:prstGeom prst="rect">
             <a:avLst/>
           </a:prstGeom>
           <a:solidFill>
@@ -10595,105 +9884,13 @@
       </p:sp>
       <p:sp>
         <p:nvSpPr>
-          <p:cNvPr id="14" name="TextBox 13"/>
+          <p:cNvPr id="9" name="TextBox 8"/>
           <p:cNvSpPr txBox="1"/>
           <p:nvPr/>
         </p:nvSpPr>
         <p:spPr>
           <a:xfrm>
-            <a:off x="6400800" y="1773936"/>
-            <a:ext cx="3657600" cy="365760"/>
-          </a:xfrm>
-          <a:prstGeom prst="rect">
-            <a:avLst/>
-          </a:prstGeom>
-          <a:noFill/>
-        </p:spPr>
-        <p:txBody>
-          <a:bodyPr wrap="square" anchor="ctr" lIns="0" rIns="0" tIns="0" bIns="0">
-            <a:spAutoFit/>
-          </a:bodyPr>
-          <a:lstStyle/>
-          <a:p>
-            <a:pPr algn="l"/>
-            <a:r>
-              <a:rPr sz="1600" b="1">
-                <a:solidFill>
-                  <a:srgbClr val="1A2233"/>
-                </a:solidFill>
-                <a:latin typeface="Microsoft JhengHei"/>
-                <a:ea typeface="Microsoft JhengHei"/>
-                <a:cs typeface="Microsoft JhengHei"/>
-              </a:rPr>
-              <a:t>鴻海 </a:t>
-            </a:r>
-            <a:r>
-              <a:rPr sz="1300" b="0">
-                <a:solidFill>
-                  <a:srgbClr val="5C6679"/>
-                </a:solidFill>
-                <a:latin typeface="Microsoft JhengHei"/>
-                <a:ea typeface="Microsoft JhengHei"/>
-                <a:cs typeface="Microsoft JhengHei"/>
-              </a:rPr>
-              <a:t>2317</a:t>
-            </a:r>
-          </a:p>
-        </p:txBody>
-      </p:sp>
-      <p:sp>
-        <p:nvSpPr>
-          <p:cNvPr id="15" name="Rounded Rectangle 14"/>
-          <p:cNvSpPr/>
-          <p:nvPr/>
-        </p:nvSpPr>
-        <p:spPr>
-          <a:xfrm>
-            <a:off x="10149840" y="1792224"/>
-            <a:ext cx="1234440" cy="347472"/>
-          </a:xfrm>
-          <a:prstGeom prst="roundRect">
-            <a:avLst/>
-          </a:prstGeom>
-          <a:solidFill>
-            <a:srgbClr val="E63946"/>
-          </a:solidFill>
-          <a:ln>
-            <a:noFill/>
-          </a:ln>
-          <a:effectLst/>
-        </p:spPr>
-        <p:style>
-          <a:lnRef idx="1">
-            <a:schemeClr val="accent1"/>
-          </a:lnRef>
-          <a:fillRef idx="3">
-            <a:schemeClr val="accent1"/>
-          </a:fillRef>
-          <a:effectRef idx="2">
-            <a:schemeClr val="accent1"/>
-          </a:effectRef>
-          <a:fontRef idx="minor">
-            <a:schemeClr val="lt1"/>
-          </a:fontRef>
-        </p:style>
-        <p:txBody>
-          <a:bodyPr rtlCol="0" anchor="ctr"/>
-          <a:lstStyle/>
-          <a:p>
-            <a:pPr algn="ctr"/>
-          </a:p>
-        </p:txBody>
-      </p:sp>
-      <p:sp>
-        <p:nvSpPr>
-          <p:cNvPr id="16" name="TextBox 15"/>
-          <p:cNvSpPr txBox="1"/>
-          <p:nvPr/>
-        </p:nvSpPr>
-        <p:spPr>
-          <a:xfrm>
-            <a:off x="10149840" y="1792224"/>
+            <a:off x="4526280" y="1792224"/>
             <a:ext cx="1234440" cy="347472"/>
           </a:xfrm>
           <a:prstGeom prst="rect">
@@ -10724,13 +9921,13 @@
       </p:sp>
       <p:sp>
         <p:nvSpPr>
-          <p:cNvPr id="17" name="TextBox 16"/>
+          <p:cNvPr id="10" name="TextBox 9"/>
           <p:cNvSpPr txBox="1"/>
           <p:nvPr/>
         </p:nvSpPr>
         <p:spPr>
           <a:xfrm>
-            <a:off x="6400800" y="2267712"/>
+            <a:off x="777240" y="2267712"/>
             <a:ext cx="4937760" cy="640080"/>
           </a:xfrm>
           <a:prstGeom prst="rect">
@@ -10769,20 +9966,20 @@
                 <a:ea typeface="Microsoft JhengHei"/>
                 <a:cs typeface="Microsoft JhengHei"/>
               </a:rPr>
-              <a:t>鴻海集團位於北美的部分廠區遭受網路攻擊。</a:t>
-            </a:r>
-          </a:p>
-        </p:txBody>
-      </p:sp>
-      <p:sp>
-        <p:nvSpPr>
-          <p:cNvPr id="18" name="TextBox 17"/>
+              <a:t>本公司資訊系統疑遭受駭客網路攻擊</a:t>
+            </a:r>
+          </a:p>
+        </p:txBody>
+      </p:sp>
+      <p:sp>
+        <p:nvSpPr>
+          <p:cNvPr id="11" name="TextBox 10"/>
           <p:cNvSpPr txBox="1"/>
           <p:nvPr/>
         </p:nvSpPr>
         <p:spPr>
           <a:xfrm>
-            <a:off x="6400800" y="2926080"/>
+            <a:off x="777240" y="2926080"/>
             <a:ext cx="4937760" cy="713232"/>
           </a:xfrm>
           <a:prstGeom prst="rect">
@@ -10821,653 +10018,7 @@
                 <a:ea typeface="Microsoft JhengHei"/>
                 <a:cs typeface="Microsoft JhengHei"/>
               </a:rPr>
-              <a:t>不適用</a:t>
-            </a:r>
-          </a:p>
-        </p:txBody>
-      </p:sp>
-      <p:sp>
-        <p:nvSpPr>
-          <p:cNvPr id="19" name="Rounded Rectangle 18"/>
-          <p:cNvSpPr/>
-          <p:nvPr/>
-        </p:nvSpPr>
-        <p:spPr>
-          <a:xfrm>
-            <a:off x="548640" y="3886200"/>
-            <a:ext cx="5394960" cy="2148840"/>
-          </a:xfrm>
-          <a:prstGeom prst="roundRect">
-            <a:avLst/>
-          </a:prstGeom>
-          <a:solidFill>
-            <a:srgbClr val="FFFFFF"/>
-          </a:solidFill>
-          <a:ln w="12700">
-            <a:solidFill>
-              <a:srgbClr val="DDE3EE"/>
-            </a:solidFill>
-          </a:ln>
-          <a:effectLst/>
-        </p:spPr>
-        <p:style>
-          <a:lnRef idx="1">
-            <a:schemeClr val="accent1"/>
-          </a:lnRef>
-          <a:fillRef idx="3">
-            <a:schemeClr val="accent1"/>
-          </a:fillRef>
-          <a:effectRef idx="2">
-            <a:schemeClr val="accent1"/>
-          </a:effectRef>
-          <a:fontRef idx="minor">
-            <a:schemeClr val="lt1"/>
-          </a:fontRef>
-        </p:style>
-        <p:txBody>
-          <a:bodyPr rtlCol="0" anchor="ctr"/>
-          <a:lstStyle/>
-          <a:p>
-            <a:pPr algn="ctr"/>
-          </a:p>
-        </p:txBody>
-      </p:sp>
-      <p:sp>
-        <p:nvSpPr>
-          <p:cNvPr id="20" name="Rectangle 19"/>
-          <p:cNvSpPr/>
-          <p:nvPr/>
-        </p:nvSpPr>
-        <p:spPr>
-          <a:xfrm>
-            <a:off x="548640" y="3886200"/>
-            <a:ext cx="5394960" cy="109728"/>
-          </a:xfrm>
-          <a:prstGeom prst="rect">
-            <a:avLst/>
-          </a:prstGeom>
-          <a:solidFill>
-            <a:srgbClr val="E63946"/>
-          </a:solidFill>
-          <a:ln>
-            <a:noFill/>
-          </a:ln>
-          <a:effectLst/>
-        </p:spPr>
-        <p:style>
-          <a:lnRef idx="1">
-            <a:schemeClr val="accent1"/>
-          </a:lnRef>
-          <a:fillRef idx="3">
-            <a:schemeClr val="accent1"/>
-          </a:fillRef>
-          <a:effectRef idx="2">
-            <a:schemeClr val="accent1"/>
-          </a:effectRef>
-          <a:fontRef idx="minor">
-            <a:schemeClr val="lt1"/>
-          </a:fontRef>
-        </p:style>
-        <p:txBody>
-          <a:bodyPr rtlCol="0" anchor="ctr"/>
-          <a:lstStyle/>
-          <a:p>
-            <a:pPr algn="ctr"/>
-          </a:p>
-        </p:txBody>
-      </p:sp>
-      <p:sp>
-        <p:nvSpPr>
-          <p:cNvPr id="21" name="TextBox 20"/>
-          <p:cNvSpPr txBox="1"/>
-          <p:nvPr/>
-        </p:nvSpPr>
-        <p:spPr>
-          <a:xfrm>
-            <a:off x="777240" y="4105656"/>
-            <a:ext cx="3657600" cy="365760"/>
-          </a:xfrm>
-          <a:prstGeom prst="rect">
-            <a:avLst/>
-          </a:prstGeom>
-          <a:noFill/>
-        </p:spPr>
-        <p:txBody>
-          <a:bodyPr wrap="square" anchor="ctr" lIns="0" rIns="0" tIns="0" bIns="0">
-            <a:spAutoFit/>
-          </a:bodyPr>
-          <a:lstStyle/>
-          <a:p>
-            <a:pPr algn="l"/>
-            <a:r>
-              <a:rPr sz="1600" b="1">
-                <a:solidFill>
-                  <a:srgbClr val="1A2233"/>
-                </a:solidFill>
-                <a:latin typeface="Microsoft JhengHei"/>
-                <a:ea typeface="Microsoft JhengHei"/>
-                <a:cs typeface="Microsoft JhengHei"/>
-              </a:rPr>
-              <a:t>彰源 </a:t>
-            </a:r>
-            <a:r>
-              <a:rPr sz="1300" b="0">
-                <a:solidFill>
-                  <a:srgbClr val="5C6679"/>
-                </a:solidFill>
-                <a:latin typeface="Microsoft JhengHei"/>
-                <a:ea typeface="Microsoft JhengHei"/>
-                <a:cs typeface="Microsoft JhengHei"/>
-              </a:rPr>
-              <a:t>2030</a:t>
-            </a:r>
-          </a:p>
-        </p:txBody>
-      </p:sp>
-      <p:sp>
-        <p:nvSpPr>
-          <p:cNvPr id="22" name="Rounded Rectangle 21"/>
-          <p:cNvSpPr/>
-          <p:nvPr/>
-        </p:nvSpPr>
-        <p:spPr>
-          <a:xfrm>
-            <a:off x="4526280" y="4123944"/>
-            <a:ext cx="1234440" cy="347472"/>
-          </a:xfrm>
-          <a:prstGeom prst="roundRect">
-            <a:avLst/>
-          </a:prstGeom>
-          <a:solidFill>
-            <a:srgbClr val="E63946"/>
-          </a:solidFill>
-          <a:ln>
-            <a:noFill/>
-          </a:ln>
-          <a:effectLst/>
-        </p:spPr>
-        <p:style>
-          <a:lnRef idx="1">
-            <a:schemeClr val="accent1"/>
-          </a:lnRef>
-          <a:fillRef idx="3">
-            <a:schemeClr val="accent1"/>
-          </a:fillRef>
-          <a:effectRef idx="2">
-            <a:schemeClr val="accent1"/>
-          </a:effectRef>
-          <a:fontRef idx="minor">
-            <a:schemeClr val="lt1"/>
-          </a:fontRef>
-        </p:style>
-        <p:txBody>
-          <a:bodyPr rtlCol="0" anchor="ctr"/>
-          <a:lstStyle/>
-          <a:p>
-            <a:pPr algn="ctr"/>
-          </a:p>
-        </p:txBody>
-      </p:sp>
-      <p:sp>
-        <p:nvSpPr>
-          <p:cNvPr id="23" name="TextBox 22"/>
-          <p:cNvSpPr txBox="1"/>
-          <p:nvPr/>
-        </p:nvSpPr>
-        <p:spPr>
-          <a:xfrm>
-            <a:off x="4526280" y="4123944"/>
-            <a:ext cx="1234440" cy="347472"/>
-          </a:xfrm>
-          <a:prstGeom prst="rect">
-            <a:avLst/>
-          </a:prstGeom>
-          <a:noFill/>
-        </p:spPr>
-        <p:txBody>
-          <a:bodyPr wrap="square" anchor="ctr" lIns="0" rIns="0" tIns="0" bIns="0">
-            <a:spAutoFit/>
-          </a:bodyPr>
-          <a:lstStyle/>
-          <a:p>
-            <a:pPr algn="ctr"/>
-            <a:r>
-              <a:rPr sz="1050" b="1">
-                <a:solidFill>
-                  <a:srgbClr val="FFFFFF"/>
-                </a:solidFill>
-                <a:latin typeface="Microsoft JhengHei"/>
-                <a:ea typeface="Microsoft JhengHei"/>
-                <a:cs typeface="Microsoft JhengHei"/>
-              </a:rPr>
-              <a:t>駭客攻擊</a:t>
-            </a:r>
-          </a:p>
-        </p:txBody>
-      </p:sp>
-      <p:sp>
-        <p:nvSpPr>
-          <p:cNvPr id="24" name="TextBox 23"/>
-          <p:cNvSpPr txBox="1"/>
-          <p:nvPr/>
-        </p:nvSpPr>
-        <p:spPr>
-          <a:xfrm>
-            <a:off x="777240" y="4599432"/>
-            <a:ext cx="4937760" cy="640080"/>
-          </a:xfrm>
-          <a:prstGeom prst="rect">
-            <a:avLst/>
-          </a:prstGeom>
-          <a:noFill/>
-        </p:spPr>
-        <p:txBody>
-          <a:bodyPr wrap="square" anchor="t" lIns="0" rIns="0" tIns="0" bIns="0">
-            <a:spAutoFit/>
-          </a:bodyPr>
-          <a:lstStyle/>
-          <a:p>
-            <a:pPr algn="l">
-              <a:lnSpc>
-                <a:spcPts val="1500"/>
-              </a:lnSpc>
-            </a:pPr>
-            <a:r>
-              <a:rPr sz="1100" b="1">
-                <a:solidFill>
-                  <a:srgbClr val="E63946"/>
-                </a:solidFill>
-                <a:latin typeface="Microsoft JhengHei"/>
-                <a:ea typeface="Microsoft JhengHei"/>
-                <a:cs typeface="Microsoft JhengHei"/>
-              </a:rPr>
-              <a:t>緣由　</a:t>
-            </a:r>
-            <a:r>
-              <a:rPr sz="1100" b="0">
-                <a:solidFill>
-                  <a:srgbClr val="1A2233"/>
-                </a:solidFill>
-                <a:latin typeface="Microsoft JhengHei"/>
-                <a:ea typeface="Microsoft JhengHei"/>
-                <a:cs typeface="Microsoft JhengHei"/>
-              </a:rPr>
-              <a:t>本公司內網有被企圖登入，資訊系統遭受駭客網路攻擊。</a:t>
-            </a:r>
-          </a:p>
-        </p:txBody>
-      </p:sp>
-      <p:sp>
-        <p:nvSpPr>
-          <p:cNvPr id="25" name="TextBox 24"/>
-          <p:cNvSpPr txBox="1"/>
-          <p:nvPr/>
-        </p:nvSpPr>
-        <p:spPr>
-          <a:xfrm>
-            <a:off x="777240" y="5257800"/>
-            <a:ext cx="4937760" cy="713232"/>
-          </a:xfrm>
-          <a:prstGeom prst="rect">
-            <a:avLst/>
-          </a:prstGeom>
-          <a:noFill/>
-        </p:spPr>
-        <p:txBody>
-          <a:bodyPr wrap="square" anchor="t" lIns="0" rIns="0" tIns="0" bIns="0">
-            <a:spAutoFit/>
-          </a:bodyPr>
-          <a:lstStyle/>
-          <a:p>
-            <a:pPr algn="l">
-              <a:lnSpc>
-                <a:spcPts val="1500"/>
-              </a:lnSpc>
-            </a:pPr>
-            <a:r>
-              <a:rPr sz="1100" b="1">
-                <a:solidFill>
-                  <a:srgbClr val="E63946"/>
-                </a:solidFill>
-                <a:latin typeface="Microsoft JhengHei"/>
-                <a:ea typeface="Microsoft JhengHei"/>
-                <a:cs typeface="Microsoft JhengHei"/>
-              </a:rPr>
-              <a:t>因應　</a:t>
-            </a:r>
-            <a:r>
-              <a:rPr sz="1100" b="0">
-                <a:solidFill>
-                  <a:srgbClr val="1A2233"/>
-                </a:solidFill>
-                <a:latin typeface="Microsoft JhengHei"/>
-                <a:ea typeface="Microsoft JhengHei"/>
-                <a:cs typeface="Microsoft JhengHei"/>
-              </a:rPr>
-              <a:t>目前已經委託國際級網路資訊安全處理公司協助解決，此事件後將持續提升網路與資訊基礎架構之安全控管，並持續密切監控，以確保資…</a:t>
-            </a:r>
-          </a:p>
-        </p:txBody>
-      </p:sp>
-      <p:sp>
-        <p:nvSpPr>
-          <p:cNvPr id="26" name="Rounded Rectangle 25"/>
-          <p:cNvSpPr/>
-          <p:nvPr/>
-        </p:nvSpPr>
-        <p:spPr>
-          <a:xfrm>
-            <a:off x="6172200" y="3886200"/>
-            <a:ext cx="5394960" cy="2148840"/>
-          </a:xfrm>
-          <a:prstGeom prst="roundRect">
-            <a:avLst/>
-          </a:prstGeom>
-          <a:solidFill>
-            <a:srgbClr val="FFFFFF"/>
-          </a:solidFill>
-          <a:ln w="12700">
-            <a:solidFill>
-              <a:srgbClr val="DDE3EE"/>
-            </a:solidFill>
-          </a:ln>
-          <a:effectLst/>
-        </p:spPr>
-        <p:style>
-          <a:lnRef idx="1">
-            <a:schemeClr val="accent1"/>
-          </a:lnRef>
-          <a:fillRef idx="3">
-            <a:schemeClr val="accent1"/>
-          </a:fillRef>
-          <a:effectRef idx="2">
-            <a:schemeClr val="accent1"/>
-          </a:effectRef>
-          <a:fontRef idx="minor">
-            <a:schemeClr val="lt1"/>
-          </a:fontRef>
-        </p:style>
-        <p:txBody>
-          <a:bodyPr rtlCol="0" anchor="ctr"/>
-          <a:lstStyle/>
-          <a:p>
-            <a:pPr algn="ctr"/>
-          </a:p>
-        </p:txBody>
-      </p:sp>
-      <p:sp>
-        <p:nvSpPr>
-          <p:cNvPr id="27" name="Rectangle 26"/>
-          <p:cNvSpPr/>
-          <p:nvPr/>
-        </p:nvSpPr>
-        <p:spPr>
-          <a:xfrm>
-            <a:off x="6172200" y="3886200"/>
-            <a:ext cx="5394960" cy="109728"/>
-          </a:xfrm>
-          <a:prstGeom prst="rect">
-            <a:avLst/>
-          </a:prstGeom>
-          <a:solidFill>
-            <a:srgbClr val="E63946"/>
-          </a:solidFill>
-          <a:ln>
-            <a:noFill/>
-          </a:ln>
-          <a:effectLst/>
-        </p:spPr>
-        <p:style>
-          <a:lnRef idx="1">
-            <a:schemeClr val="accent1"/>
-          </a:lnRef>
-          <a:fillRef idx="3">
-            <a:schemeClr val="accent1"/>
-          </a:fillRef>
-          <a:effectRef idx="2">
-            <a:schemeClr val="accent1"/>
-          </a:effectRef>
-          <a:fontRef idx="minor">
-            <a:schemeClr val="lt1"/>
-          </a:fontRef>
-        </p:style>
-        <p:txBody>
-          <a:bodyPr rtlCol="0" anchor="ctr"/>
-          <a:lstStyle/>
-          <a:p>
-            <a:pPr algn="ctr"/>
-          </a:p>
-        </p:txBody>
-      </p:sp>
-      <p:sp>
-        <p:nvSpPr>
-          <p:cNvPr id="28" name="TextBox 27"/>
-          <p:cNvSpPr txBox="1"/>
-          <p:nvPr/>
-        </p:nvSpPr>
-        <p:spPr>
-          <a:xfrm>
-            <a:off x="6400800" y="4105656"/>
-            <a:ext cx="3657600" cy="365760"/>
-          </a:xfrm>
-          <a:prstGeom prst="rect">
-            <a:avLst/>
-          </a:prstGeom>
-          <a:noFill/>
-        </p:spPr>
-        <p:txBody>
-          <a:bodyPr wrap="square" anchor="ctr" lIns="0" rIns="0" tIns="0" bIns="0">
-            <a:spAutoFit/>
-          </a:bodyPr>
-          <a:lstStyle/>
-          <a:p>
-            <a:pPr algn="l"/>
-            <a:r>
-              <a:rPr sz="1600" b="1">
-                <a:solidFill>
-                  <a:srgbClr val="1A2233"/>
-                </a:solidFill>
-                <a:latin typeface="Microsoft JhengHei"/>
-                <a:ea typeface="Microsoft JhengHei"/>
-                <a:cs typeface="Microsoft JhengHei"/>
-              </a:rPr>
-              <a:t>偉康科技 </a:t>
-            </a:r>
-            <a:r>
-              <a:rPr sz="1300" b="0">
-                <a:solidFill>
-                  <a:srgbClr val="5C6679"/>
-                </a:solidFill>
-                <a:latin typeface="Microsoft JhengHei"/>
-                <a:ea typeface="Microsoft JhengHei"/>
-                <a:cs typeface="Microsoft JhengHei"/>
-              </a:rPr>
-              <a:t>6865</a:t>
-            </a:r>
-          </a:p>
-        </p:txBody>
-      </p:sp>
-      <p:sp>
-        <p:nvSpPr>
-          <p:cNvPr id="29" name="Rounded Rectangle 28"/>
-          <p:cNvSpPr/>
-          <p:nvPr/>
-        </p:nvSpPr>
-        <p:spPr>
-          <a:xfrm>
-            <a:off x="10149840" y="4123944"/>
-            <a:ext cx="1234440" cy="347472"/>
-          </a:xfrm>
-          <a:prstGeom prst="roundRect">
-            <a:avLst/>
-          </a:prstGeom>
-          <a:solidFill>
-            <a:srgbClr val="E63946"/>
-          </a:solidFill>
-          <a:ln>
-            <a:noFill/>
-          </a:ln>
-          <a:effectLst/>
-        </p:spPr>
-        <p:style>
-          <a:lnRef idx="1">
-            <a:schemeClr val="accent1"/>
-          </a:lnRef>
-          <a:fillRef idx="3">
-            <a:schemeClr val="accent1"/>
-          </a:fillRef>
-          <a:effectRef idx="2">
-            <a:schemeClr val="accent1"/>
-          </a:effectRef>
-          <a:fontRef idx="minor">
-            <a:schemeClr val="lt1"/>
-          </a:fontRef>
-        </p:style>
-        <p:txBody>
-          <a:bodyPr rtlCol="0" anchor="ctr"/>
-          <a:lstStyle/>
-          <a:p>
-            <a:pPr algn="ctr"/>
-          </a:p>
-        </p:txBody>
-      </p:sp>
-      <p:sp>
-        <p:nvSpPr>
-          <p:cNvPr id="30" name="TextBox 29"/>
-          <p:cNvSpPr txBox="1"/>
-          <p:nvPr/>
-        </p:nvSpPr>
-        <p:spPr>
-          <a:xfrm>
-            <a:off x="10149840" y="4123944"/>
-            <a:ext cx="1234440" cy="347472"/>
-          </a:xfrm>
-          <a:prstGeom prst="rect">
-            <a:avLst/>
-          </a:prstGeom>
-          <a:noFill/>
-        </p:spPr>
-        <p:txBody>
-          <a:bodyPr wrap="square" anchor="ctr" lIns="0" rIns="0" tIns="0" bIns="0">
-            <a:spAutoFit/>
-          </a:bodyPr>
-          <a:lstStyle/>
-          <a:p>
-            <a:pPr algn="ctr"/>
-            <a:r>
-              <a:rPr sz="1050" b="1">
-                <a:solidFill>
-                  <a:srgbClr val="FFFFFF"/>
-                </a:solidFill>
-                <a:latin typeface="Microsoft JhengHei"/>
-                <a:ea typeface="Microsoft JhengHei"/>
-                <a:cs typeface="Microsoft JhengHei"/>
-              </a:rPr>
-              <a:t>駭客攻擊</a:t>
-            </a:r>
-          </a:p>
-        </p:txBody>
-      </p:sp>
-      <p:sp>
-        <p:nvSpPr>
-          <p:cNvPr id="31" name="TextBox 30"/>
-          <p:cNvSpPr txBox="1"/>
-          <p:nvPr/>
-        </p:nvSpPr>
-        <p:spPr>
-          <a:xfrm>
-            <a:off x="6400800" y="4599432"/>
-            <a:ext cx="4937760" cy="640080"/>
-          </a:xfrm>
-          <a:prstGeom prst="rect">
-            <a:avLst/>
-          </a:prstGeom>
-          <a:noFill/>
-        </p:spPr>
-        <p:txBody>
-          <a:bodyPr wrap="square" anchor="t" lIns="0" rIns="0" tIns="0" bIns="0">
-            <a:spAutoFit/>
-          </a:bodyPr>
-          <a:lstStyle/>
-          <a:p>
-            <a:pPr algn="l">
-              <a:lnSpc>
-                <a:spcPts val="1500"/>
-              </a:lnSpc>
-            </a:pPr>
-            <a:r>
-              <a:rPr sz="1100" b="1">
-                <a:solidFill>
-                  <a:srgbClr val="E63946"/>
-                </a:solidFill>
-                <a:latin typeface="Microsoft JhengHei"/>
-                <a:ea typeface="Microsoft JhengHei"/>
-                <a:cs typeface="Microsoft JhengHei"/>
-              </a:rPr>
-              <a:t>緣由　</a:t>
-            </a:r>
-            <a:r>
-              <a:rPr sz="1100" b="0">
-                <a:solidFill>
-                  <a:srgbClr val="1A2233"/>
-                </a:solidFill>
-                <a:latin typeface="Microsoft JhengHei"/>
-                <a:ea typeface="Microsoft JhengHei"/>
-                <a:cs typeface="Microsoft JhengHei"/>
-              </a:rPr>
-              <a:t>說明本公司遭受駭客攻擊事件。</a:t>
-            </a:r>
-          </a:p>
-        </p:txBody>
-      </p:sp>
-      <p:sp>
-        <p:nvSpPr>
-          <p:cNvPr id="32" name="TextBox 31"/>
-          <p:cNvSpPr txBox="1"/>
-          <p:nvPr/>
-        </p:nvSpPr>
-        <p:spPr>
-          <a:xfrm>
-            <a:off x="6400800" y="5257800"/>
-            <a:ext cx="4937760" cy="713232"/>
-          </a:xfrm>
-          <a:prstGeom prst="rect">
-            <a:avLst/>
-          </a:prstGeom>
-          <a:noFill/>
-        </p:spPr>
-        <p:txBody>
-          <a:bodyPr wrap="square" anchor="t" lIns="0" rIns="0" tIns="0" bIns="0">
-            <a:spAutoFit/>
-          </a:bodyPr>
-          <a:lstStyle/>
-          <a:p>
-            <a:pPr algn="l">
-              <a:lnSpc>
-                <a:spcPts val="1500"/>
-              </a:lnSpc>
-            </a:pPr>
-            <a:r>
-              <a:rPr sz="1100" b="1">
-                <a:solidFill>
-                  <a:srgbClr val="E63946"/>
-                </a:solidFill>
-                <a:latin typeface="Microsoft JhengHei"/>
-                <a:ea typeface="Microsoft JhengHei"/>
-                <a:cs typeface="Microsoft JhengHei"/>
-              </a:rPr>
-              <a:t>因應　</a:t>
-            </a:r>
-            <a:r>
-              <a:rPr sz="1100" b="0">
-                <a:solidFill>
-                  <a:srgbClr val="1A2233"/>
-                </a:solidFill>
-                <a:latin typeface="Microsoft JhengHei"/>
-                <a:ea typeface="Microsoft JhengHei"/>
-                <a:cs typeface="Microsoft JhengHei"/>
-              </a:rPr>
-              <a:t>本公司已啟動防禦應變，並持續強化資安管控。</a:t>
+              <a:t>目前已全面盤查本公司資訊系統，確保無植入木馬程式等攻擊手段，將持續提昇網路資訊安全架構，並持續嚴密監控，以確保資訊安全。</a:t>
             </a:r>
           </a:p>
         </p:txBody>

--- a/資安事件因應分析.pptx
+++ b/資安事件因應分析.pptx
@@ -196,16 +196,16 @@
                 <c:formatCode>General</c:formatCode>
                 <c:ptCount val="4"/>
                 <c:pt idx="0">
-                  <c:v>2</c:v>
+                  <c:v>1</c:v>
                 </c:pt>
                 <c:pt idx="1">
-                  <c:v>1</c:v>
+                  <c:v>2</c:v>
                 </c:pt>
                 <c:pt idx="2">
                   <c:v>1</c:v>
                 </c:pt>
                 <c:pt idx="3">
-                  <c:v>1</c:v>
+                  <c:v>2</c:v>
                 </c:pt>
               </c:numCache>
             </c:numRef>
@@ -3542,7 +3542,7 @@
                 <a:ea typeface="Microsoft JhengHei"/>
                 <a:cs typeface="Microsoft JhengHei"/>
               </a:rPr>
-              <a:t>資料期間 2026-05-17 ~ 2026-06-17　｜　MOPS 重大訊息全文檢索　｜　5 家公司</a:t>
+              <a:t>資料期間 2026-05-23 ~ 2026-06-23　｜　MOPS 重大訊息全文檢索　｜　6 家公司</a:t>
             </a:r>
           </a:p>
         </p:txBody>
@@ -3759,7 +3759,7 @@
                 <a:ea typeface="Microsoft JhengHei"/>
                 <a:cs typeface="Microsoft JhengHei"/>
               </a:rPr>
-              <a:t>資料期間內 MOPS 揭露之 5 起資安相關重大訊息</a:t>
+              <a:t>資料期間內 MOPS 揭露之 6 起資安相關重大訊息</a:t>
             </a:r>
           </a:p>
         </p:txBody>
@@ -3842,7 +3842,7 @@
                 <a:ea typeface="Microsoft JhengHei"/>
                 <a:cs typeface="Microsoft JhengHei"/>
               </a:rPr>
-              <a:t>5</a:t>
+              <a:t>6</a:t>
             </a:r>
           </a:p>
         </p:txBody>
@@ -4134,7 +4134,7 @@
         </p:nvGraphicFramePr>
         <p:xfrm>
           <a:off x="548640" y="2697480"/>
-          <a:ext cx="11064240" cy="2304288"/>
+          <a:ext cx="11064240" cy="2688336"/>
         </p:xfrm>
         <a:graphic>
           <a:graphicData uri="http://schemas.openxmlformats.org/drawingml/2006/table">
@@ -4286,7 +4286,7 @@
                           <a:ea typeface="Microsoft JhengHei"/>
                           <a:cs typeface="Microsoft JhengHei"/>
                         </a:rPr>
-                        <a:t>上福</a:t>
+                        <a:t>耕興</a:t>
                       </a:r>
                     </a:p>
                   </a:txBody>
@@ -4310,7 +4310,7 @@
                           <a:ea typeface="Microsoft JhengHei"/>
                           <a:cs typeface="Microsoft JhengHei"/>
                         </a:rPr>
-                        <a:t>6128</a:t>
+                        <a:t>6146</a:t>
                       </a:r>
                     </a:p>
                   </a:txBody>
@@ -4334,7 +4334,7 @@
                           <a:ea typeface="Microsoft JhengHei"/>
                           <a:cs typeface="Microsoft JhengHei"/>
                         </a:rPr>
-                        <a:t>06/16</a:t>
+                        <a:t>06/22</a:t>
                       </a:r>
                     </a:p>
                   </a:txBody>
@@ -4382,7 +4382,7 @@
                           <a:ea typeface="Microsoft JhengHei"/>
                           <a:cs typeface="Microsoft JhengHei"/>
                         </a:rPr>
-                        <a:t>目前評估該事件對公司營運造成暫停出貨的影響，現階段出貨已陸續恢復中。</a:t>
+                        <a:t>受影響之資料檔案留有備份，不影響公司營運、業務進行等。</a:t>
                       </a:r>
                     </a:p>
                   </a:txBody>
@@ -4408,7 +4408,7 @@
                           <a:ea typeface="Microsoft JhengHei"/>
                           <a:cs typeface="Microsoft JhengHei"/>
                         </a:rPr>
-                        <a:t>巨路</a:t>
+                        <a:t>易發</a:t>
                       </a:r>
                     </a:p>
                   </a:txBody>
@@ -4432,7 +4432,7 @@
                           <a:ea typeface="Microsoft JhengHei"/>
                           <a:cs typeface="Microsoft JhengHei"/>
                         </a:rPr>
-                        <a:t>6192</a:t>
+                        <a:t>6425</a:t>
                       </a:r>
                     </a:p>
                   </a:txBody>
@@ -4456,251 +4456,7 @@
                           <a:ea typeface="Microsoft JhengHei"/>
                           <a:cs typeface="Microsoft JhengHei"/>
                         </a:rPr>
-                        <a:t>06/02</a:t>
-                      </a:r>
-                    </a:p>
-                  </a:txBody>
-                  <a:tcPr anchor="ctr" marL="73152" marT="9144" marB="9144">
-                    <a:solidFill>
-                      <a:srgbClr val="EEF2F9"/>
-                    </a:solidFill>
-                  </a:tcPr>
-                </a:tc>
-                <a:tc>
-                  <a:txBody>
-                    <a:bodyPr/>
-                    <a:lstStyle/>
-                    <a:p>
-                      <a:r>
-                        <a:rPr sz="1150" b="1">
-                          <a:solidFill>
-                            <a:srgbClr val="E63946"/>
-                          </a:solidFill>
-                          <a:latin typeface="Microsoft JhengHei"/>
-                          <a:ea typeface="Microsoft JhengHei"/>
-                          <a:cs typeface="Microsoft JhengHei"/>
-                        </a:rPr>
-                        <a:t>駭客攻擊</a:t>
-                      </a:r>
-                    </a:p>
-                  </a:txBody>
-                  <a:tcPr anchor="ctr" marL="73152" marT="9144" marB="9144">
-                    <a:solidFill>
-                      <a:srgbClr val="EEF2F9"/>
-                    </a:solidFill>
-                  </a:tcPr>
-                </a:tc>
-                <a:tc>
-                  <a:txBody>
-                    <a:bodyPr/>
-                    <a:lstStyle/>
-                    <a:p>
-                      <a:r>
-                        <a:rPr sz="1150" b="0">
-                          <a:solidFill>
-                            <a:srgbClr val="1A2233"/>
-                          </a:solidFill>
-                          <a:latin typeface="Microsoft JhengHei"/>
-                          <a:ea typeface="Microsoft JhengHei"/>
-                          <a:cs typeface="Microsoft JhengHei"/>
-                        </a:rPr>
-                        <a:t>目前評估對公司營運無重大影響，亦未發現個資或機密資料外洩之情事。</a:t>
-                      </a:r>
-                    </a:p>
-                  </a:txBody>
-                  <a:tcPr anchor="ctr" marL="73152" marT="9144" marB="9144">
-                    <a:solidFill>
-                      <a:srgbClr val="EEF2F9"/>
-                    </a:solidFill>
-                  </a:tcPr>
-                </a:tc>
-              </a:tr>
-              <a:tr h="384048">
-                <a:tc>
-                  <a:txBody>
-                    <a:bodyPr/>
-                    <a:lstStyle/>
-                    <a:p>
-                      <a:r>
-                        <a:rPr sz="1150" b="0">
-                          <a:solidFill>
-                            <a:srgbClr val="1A2233"/>
-                          </a:solidFill>
-                          <a:latin typeface="Microsoft JhengHei"/>
-                          <a:ea typeface="Microsoft JhengHei"/>
-                          <a:cs typeface="Microsoft JhengHei"/>
-                        </a:rPr>
-                        <a:t>數字</a:t>
-                      </a:r>
-                    </a:p>
-                  </a:txBody>
-                  <a:tcPr anchor="ctr" marL="73152" marT="9144" marB="9144">
-                    <a:solidFill>
-                      <a:srgbClr val="FFFFFF"/>
-                    </a:solidFill>
-                  </a:tcPr>
-                </a:tc>
-                <a:tc>
-                  <a:txBody>
-                    <a:bodyPr/>
-                    <a:lstStyle/>
-                    <a:p>
-                      <a:r>
-                        <a:rPr sz="1150" b="0">
-                          <a:solidFill>
-                            <a:srgbClr val="1A2233"/>
-                          </a:solidFill>
-                          <a:latin typeface="Microsoft JhengHei"/>
-                          <a:ea typeface="Microsoft JhengHei"/>
-                          <a:cs typeface="Microsoft JhengHei"/>
-                        </a:rPr>
-                        <a:t>5287</a:t>
-                      </a:r>
-                    </a:p>
-                  </a:txBody>
-                  <a:tcPr anchor="ctr" marL="73152" marT="9144" marB="9144">
-                    <a:solidFill>
-                      <a:srgbClr val="FFFFFF"/>
-                    </a:solidFill>
-                  </a:tcPr>
-                </a:tc>
-                <a:tc>
-                  <a:txBody>
-                    <a:bodyPr/>
-                    <a:lstStyle/>
-                    <a:p>
-                      <a:r>
-                        <a:rPr sz="1150" b="0">
-                          <a:solidFill>
-                            <a:srgbClr val="1A2233"/>
-                          </a:solidFill>
-                          <a:latin typeface="Microsoft JhengHei"/>
-                          <a:ea typeface="Microsoft JhengHei"/>
-                          <a:cs typeface="Microsoft JhengHei"/>
-                        </a:rPr>
-                        <a:t>05/26</a:t>
-                      </a:r>
-                    </a:p>
-                  </a:txBody>
-                  <a:tcPr anchor="ctr" marL="73152" marT="9144" marB="9144">
-                    <a:solidFill>
-                      <a:srgbClr val="FFFFFF"/>
-                    </a:solidFill>
-                  </a:tcPr>
-                </a:tc>
-                <a:tc>
-                  <a:txBody>
-                    <a:bodyPr/>
-                    <a:lstStyle/>
-                    <a:p>
-                      <a:r>
-                        <a:rPr sz="1150" b="1">
-                          <a:solidFill>
-                            <a:srgbClr val="27A6C4"/>
-                          </a:solidFill>
-                          <a:latin typeface="Microsoft JhengHei"/>
-                          <a:ea typeface="Microsoft JhengHei"/>
-                          <a:cs typeface="Microsoft JhengHei"/>
-                        </a:rPr>
-                        <a:t>個資外洩</a:t>
-                      </a:r>
-                    </a:p>
-                  </a:txBody>
-                  <a:tcPr anchor="ctr" marL="73152" marT="9144" marB="9144">
-                    <a:solidFill>
-                      <a:srgbClr val="FFFFFF"/>
-                    </a:solidFill>
-                  </a:tcPr>
-                </a:tc>
-                <a:tc>
-                  <a:txBody>
-                    <a:bodyPr/>
-                    <a:lstStyle/>
-                    <a:p>
-                      <a:r>
-                        <a:rPr sz="1150" b="0">
-                          <a:solidFill>
-                            <a:srgbClr val="1A2233"/>
-                          </a:solidFill>
-                          <a:latin typeface="Microsoft JhengHei"/>
-                          <a:ea typeface="Microsoft JhengHei"/>
-                          <a:cs typeface="Microsoft JhengHei"/>
-                        </a:rPr>
-                        <a:t>目前評估對公司營運尚無重大影響。</a:t>
-                      </a:r>
-                    </a:p>
-                  </a:txBody>
-                  <a:tcPr anchor="ctr" marL="73152" marT="9144" marB="9144">
-                    <a:solidFill>
-                      <a:srgbClr val="FFFFFF"/>
-                    </a:solidFill>
-                  </a:tcPr>
-                </a:tc>
-              </a:tr>
-              <a:tr h="384048">
-                <a:tc>
-                  <a:txBody>
-                    <a:bodyPr/>
-                    <a:lstStyle/>
-                    <a:p>
-                      <a:r>
-                        <a:rPr sz="1150" b="0">
-                          <a:solidFill>
-                            <a:srgbClr val="1A2233"/>
-                          </a:solidFill>
-                          <a:latin typeface="Microsoft JhengHei"/>
-                          <a:ea typeface="Microsoft JhengHei"/>
-                          <a:cs typeface="Microsoft JhengHei"/>
-                        </a:rPr>
-                        <a:t>弘塑</a:t>
-                      </a:r>
-                    </a:p>
-                  </a:txBody>
-                  <a:tcPr anchor="ctr" marL="73152" marT="9144" marB="9144">
-                    <a:solidFill>
-                      <a:srgbClr val="EEF2F9"/>
-                    </a:solidFill>
-                  </a:tcPr>
-                </a:tc>
-                <a:tc>
-                  <a:txBody>
-                    <a:bodyPr/>
-                    <a:lstStyle/>
-                    <a:p>
-                      <a:r>
-                        <a:rPr sz="1150" b="0">
-                          <a:solidFill>
-                            <a:srgbClr val="1A2233"/>
-                          </a:solidFill>
-                          <a:latin typeface="Microsoft JhengHei"/>
-                          <a:ea typeface="Microsoft JhengHei"/>
-                          <a:cs typeface="Microsoft JhengHei"/>
-                        </a:rPr>
-                        <a:t>3131</a:t>
-                      </a:r>
-                    </a:p>
-                  </a:txBody>
-                  <a:tcPr anchor="ctr" marL="73152" marT="9144" marB="9144">
-                    <a:solidFill>
-                      <a:srgbClr val="EEF2F9"/>
-                    </a:solidFill>
-                  </a:tcPr>
-                </a:tc>
-                <a:tc>
-                  <a:txBody>
-                    <a:bodyPr/>
-                    <a:lstStyle/>
-                    <a:p>
-                      <a:r>
-                        <a:rPr sz="1150" b="0">
-                          <a:solidFill>
-                            <a:srgbClr val="1A2233"/>
-                          </a:solidFill>
-                          <a:latin typeface="Microsoft JhengHei"/>
-                          <a:ea typeface="Microsoft JhengHei"/>
-                          <a:cs typeface="Microsoft JhengHei"/>
-                        </a:rPr>
-                        <a:t>05/21</a:t>
+                        <a:t>06/22</a:t>
                       </a:r>
                     </a:p>
                   </a:txBody>
@@ -4748,7 +4504,7 @@
                           <a:ea typeface="Microsoft JhengHei"/>
                           <a:cs typeface="Microsoft JhengHei"/>
                         </a:rPr>
-                        <a:t>公司於4/10發現網路異常後，立即中斷公司網路及相關對外連結，全面停…</a:t>
+                        <a:t>目前初步評估對公司運作無重大影響。</a:t>
                       </a:r>
                     </a:p>
                   </a:txBody>
@@ -4774,7 +4530,7 @@
                           <a:ea typeface="Microsoft JhengHei"/>
                           <a:cs typeface="Microsoft JhengHei"/>
                         </a:rPr>
-                        <a:t>建德工業</a:t>
+                        <a:t>尼得科超眾</a:t>
                       </a:r>
                     </a:p>
                   </a:txBody>
@@ -4798,7 +4554,7 @@
                           <a:ea typeface="Microsoft JhengHei"/>
                           <a:cs typeface="Microsoft JhengHei"/>
                         </a:rPr>
-                        <a:t>6606</a:t>
+                        <a:t>6230</a:t>
                       </a:r>
                     </a:p>
                   </a:txBody>
@@ -4822,7 +4578,251 @@
                           <a:ea typeface="Microsoft JhengHei"/>
                           <a:cs typeface="Microsoft JhengHei"/>
                         </a:rPr>
-                        <a:t>05/20</a:t>
+                        <a:t>06/22</a:t>
+                      </a:r>
+                    </a:p>
+                  </a:txBody>
+                  <a:tcPr anchor="ctr" marL="73152" marT="9144" marB="9144">
+                    <a:solidFill>
+                      <a:srgbClr val="FFFFFF"/>
+                    </a:solidFill>
+                  </a:tcPr>
+                </a:tc>
+                <a:tc>
+                  <a:txBody>
+                    <a:bodyPr/>
+                    <a:lstStyle/>
+                    <a:p>
+                      <a:r>
+                        <a:rPr sz="1150" b="1">
+                          <a:solidFill>
+                            <a:srgbClr val="F4A261"/>
+                          </a:solidFill>
+                          <a:latin typeface="Microsoft JhengHei"/>
+                          <a:ea typeface="Microsoft JhengHei"/>
+                          <a:cs typeface="Microsoft JhengHei"/>
+                        </a:rPr>
+                        <a:t>勒索病毒/加密</a:t>
+                      </a:r>
+                    </a:p>
+                  </a:txBody>
+                  <a:tcPr anchor="ctr" marL="73152" marT="9144" marB="9144">
+                    <a:solidFill>
+                      <a:srgbClr val="FFFFFF"/>
+                    </a:solidFill>
+                  </a:tcPr>
+                </a:tc>
+                <a:tc>
+                  <a:txBody>
+                    <a:bodyPr/>
+                    <a:lstStyle/>
+                    <a:p>
+                      <a:r>
+                        <a:rPr sz="1150" b="0">
+                          <a:solidFill>
+                            <a:srgbClr val="1A2233"/>
+                          </a:solidFill>
+                          <a:latin typeface="Microsoft JhengHei"/>
+                          <a:ea typeface="Microsoft JhengHei"/>
+                          <a:cs typeface="Microsoft JhengHei"/>
+                        </a:rPr>
+                        <a:t>目前受影響之系統正陸續復原中，對公司整體營運及財務之影響程度尚在評估…</a:t>
+                      </a:r>
+                    </a:p>
+                  </a:txBody>
+                  <a:tcPr anchor="ctr" marL="73152" marT="9144" marB="9144">
+                    <a:solidFill>
+                      <a:srgbClr val="FFFFFF"/>
+                    </a:solidFill>
+                  </a:tcPr>
+                </a:tc>
+              </a:tr>
+              <a:tr h="384048">
+                <a:tc>
+                  <a:txBody>
+                    <a:bodyPr/>
+                    <a:lstStyle/>
+                    <a:p>
+                      <a:r>
+                        <a:rPr sz="1150" b="0">
+                          <a:solidFill>
+                            <a:srgbClr val="1A2233"/>
+                          </a:solidFill>
+                          <a:latin typeface="Microsoft JhengHei"/>
+                          <a:ea typeface="Microsoft JhengHei"/>
+                          <a:cs typeface="Microsoft JhengHei"/>
+                        </a:rPr>
+                        <a:t>上福</a:t>
+                      </a:r>
+                    </a:p>
+                  </a:txBody>
+                  <a:tcPr anchor="ctr" marL="73152" marT="9144" marB="9144">
+                    <a:solidFill>
+                      <a:srgbClr val="EEF2F9"/>
+                    </a:solidFill>
+                  </a:tcPr>
+                </a:tc>
+                <a:tc>
+                  <a:txBody>
+                    <a:bodyPr/>
+                    <a:lstStyle/>
+                    <a:p>
+                      <a:r>
+                        <a:rPr sz="1150" b="0">
+                          <a:solidFill>
+                            <a:srgbClr val="1A2233"/>
+                          </a:solidFill>
+                          <a:latin typeface="Microsoft JhengHei"/>
+                          <a:ea typeface="Microsoft JhengHei"/>
+                          <a:cs typeface="Microsoft JhengHei"/>
+                        </a:rPr>
+                        <a:t>6128</a:t>
+                      </a:r>
+                    </a:p>
+                  </a:txBody>
+                  <a:tcPr anchor="ctr" marL="73152" marT="9144" marB="9144">
+                    <a:solidFill>
+                      <a:srgbClr val="EEF2F9"/>
+                    </a:solidFill>
+                  </a:tcPr>
+                </a:tc>
+                <a:tc>
+                  <a:txBody>
+                    <a:bodyPr/>
+                    <a:lstStyle/>
+                    <a:p>
+                      <a:r>
+                        <a:rPr sz="1150" b="0">
+                          <a:solidFill>
+                            <a:srgbClr val="1A2233"/>
+                          </a:solidFill>
+                          <a:latin typeface="Microsoft JhengHei"/>
+                          <a:ea typeface="Microsoft JhengHei"/>
+                          <a:cs typeface="Microsoft JhengHei"/>
+                        </a:rPr>
+                        <a:t>06/16</a:t>
+                      </a:r>
+                    </a:p>
+                  </a:txBody>
+                  <a:tcPr anchor="ctr" marL="73152" marT="9144" marB="9144">
+                    <a:solidFill>
+                      <a:srgbClr val="EEF2F9"/>
+                    </a:solidFill>
+                  </a:tcPr>
+                </a:tc>
+                <a:tc>
+                  <a:txBody>
+                    <a:bodyPr/>
+                    <a:lstStyle/>
+                    <a:p>
+                      <a:r>
+                        <a:rPr sz="1150" b="1">
+                          <a:solidFill>
+                            <a:srgbClr val="5C6679"/>
+                          </a:solidFill>
+                          <a:latin typeface="Microsoft JhengHei"/>
+                          <a:ea typeface="Microsoft JhengHei"/>
+                          <a:cs typeface="Microsoft JhengHei"/>
+                        </a:rPr>
+                        <a:t>其他</a:t>
+                      </a:r>
+                    </a:p>
+                  </a:txBody>
+                  <a:tcPr anchor="ctr" marL="73152" marT="9144" marB="9144">
+                    <a:solidFill>
+                      <a:srgbClr val="EEF2F9"/>
+                    </a:solidFill>
+                  </a:tcPr>
+                </a:tc>
+                <a:tc>
+                  <a:txBody>
+                    <a:bodyPr/>
+                    <a:lstStyle/>
+                    <a:p>
+                      <a:r>
+                        <a:rPr sz="1150" b="0">
+                          <a:solidFill>
+                            <a:srgbClr val="1A2233"/>
+                          </a:solidFill>
+                          <a:latin typeface="Microsoft JhengHei"/>
+                          <a:ea typeface="Microsoft JhengHei"/>
+                          <a:cs typeface="Microsoft JhengHei"/>
+                        </a:rPr>
+                        <a:t>目前評估該事件對公司營運造成暫停出貨的影響，現階段出貨已陸續恢復中。</a:t>
+                      </a:r>
+                    </a:p>
+                  </a:txBody>
+                  <a:tcPr anchor="ctr" marL="73152" marT="9144" marB="9144">
+                    <a:solidFill>
+                      <a:srgbClr val="EEF2F9"/>
+                    </a:solidFill>
+                  </a:tcPr>
+                </a:tc>
+              </a:tr>
+              <a:tr h="384048">
+                <a:tc>
+                  <a:txBody>
+                    <a:bodyPr/>
+                    <a:lstStyle/>
+                    <a:p>
+                      <a:r>
+                        <a:rPr sz="1150" b="0">
+                          <a:solidFill>
+                            <a:srgbClr val="1A2233"/>
+                          </a:solidFill>
+                          <a:latin typeface="Microsoft JhengHei"/>
+                          <a:ea typeface="Microsoft JhengHei"/>
+                          <a:cs typeface="Microsoft JhengHei"/>
+                        </a:rPr>
+                        <a:t>巨路</a:t>
+                      </a:r>
+                    </a:p>
+                  </a:txBody>
+                  <a:tcPr anchor="ctr" marL="73152" marT="9144" marB="9144">
+                    <a:solidFill>
+                      <a:srgbClr val="FFFFFF"/>
+                    </a:solidFill>
+                  </a:tcPr>
+                </a:tc>
+                <a:tc>
+                  <a:txBody>
+                    <a:bodyPr/>
+                    <a:lstStyle/>
+                    <a:p>
+                      <a:r>
+                        <a:rPr sz="1150" b="0">
+                          <a:solidFill>
+                            <a:srgbClr val="1A2233"/>
+                          </a:solidFill>
+                          <a:latin typeface="Microsoft JhengHei"/>
+                          <a:ea typeface="Microsoft JhengHei"/>
+                          <a:cs typeface="Microsoft JhengHei"/>
+                        </a:rPr>
+                        <a:t>6192</a:t>
+                      </a:r>
+                    </a:p>
+                  </a:txBody>
+                  <a:tcPr anchor="ctr" marL="73152" marT="9144" marB="9144">
+                    <a:solidFill>
+                      <a:srgbClr val="FFFFFF"/>
+                    </a:solidFill>
+                  </a:tcPr>
+                </a:tc>
+                <a:tc>
+                  <a:txBody>
+                    <a:bodyPr/>
+                    <a:lstStyle/>
+                    <a:p>
+                      <a:r>
+                        <a:rPr sz="1150" b="0">
+                          <a:solidFill>
+                            <a:srgbClr val="1A2233"/>
+                          </a:solidFill>
+                          <a:latin typeface="Microsoft JhengHei"/>
+                          <a:ea typeface="Microsoft JhengHei"/>
+                          <a:cs typeface="Microsoft JhengHei"/>
+                        </a:rPr>
+                        <a:t>06/02</a:t>
                       </a:r>
                     </a:p>
                   </a:txBody>
@@ -4870,13 +4870,135 @@
                           <a:ea typeface="Microsoft JhengHei"/>
                           <a:cs typeface="Microsoft JhengHei"/>
                         </a:rPr>
-                        <a:t>目前無個資、機密資料外洩等情事發生，對本公司營運無重大影響。</a:t>
+                        <a:t>目前評估對公司營運無重大影響，亦未發現個資或機密資料外洩之情事。</a:t>
                       </a:r>
                     </a:p>
                   </a:txBody>
                   <a:tcPr anchor="ctr" marL="73152" marT="9144" marB="9144">
                     <a:solidFill>
                       <a:srgbClr val="FFFFFF"/>
+                    </a:solidFill>
+                  </a:tcPr>
+                </a:tc>
+              </a:tr>
+              <a:tr h="384048">
+                <a:tc>
+                  <a:txBody>
+                    <a:bodyPr/>
+                    <a:lstStyle/>
+                    <a:p>
+                      <a:r>
+                        <a:rPr sz="1150" b="0">
+                          <a:solidFill>
+                            <a:srgbClr val="1A2233"/>
+                          </a:solidFill>
+                          <a:latin typeface="Microsoft JhengHei"/>
+                          <a:ea typeface="Microsoft JhengHei"/>
+                          <a:cs typeface="Microsoft JhengHei"/>
+                        </a:rPr>
+                        <a:t>數字</a:t>
+                      </a:r>
+                    </a:p>
+                  </a:txBody>
+                  <a:tcPr anchor="ctr" marL="73152" marT="9144" marB="9144">
+                    <a:solidFill>
+                      <a:srgbClr val="EEF2F9"/>
+                    </a:solidFill>
+                  </a:tcPr>
+                </a:tc>
+                <a:tc>
+                  <a:txBody>
+                    <a:bodyPr/>
+                    <a:lstStyle/>
+                    <a:p>
+                      <a:r>
+                        <a:rPr sz="1150" b="0">
+                          <a:solidFill>
+                            <a:srgbClr val="1A2233"/>
+                          </a:solidFill>
+                          <a:latin typeface="Microsoft JhengHei"/>
+                          <a:ea typeface="Microsoft JhengHei"/>
+                          <a:cs typeface="Microsoft JhengHei"/>
+                        </a:rPr>
+                        <a:t>5287</a:t>
+                      </a:r>
+                    </a:p>
+                  </a:txBody>
+                  <a:tcPr anchor="ctr" marL="73152" marT="9144" marB="9144">
+                    <a:solidFill>
+                      <a:srgbClr val="EEF2F9"/>
+                    </a:solidFill>
+                  </a:tcPr>
+                </a:tc>
+                <a:tc>
+                  <a:txBody>
+                    <a:bodyPr/>
+                    <a:lstStyle/>
+                    <a:p>
+                      <a:r>
+                        <a:rPr sz="1150" b="0">
+                          <a:solidFill>
+                            <a:srgbClr val="1A2233"/>
+                          </a:solidFill>
+                          <a:latin typeface="Microsoft JhengHei"/>
+                          <a:ea typeface="Microsoft JhengHei"/>
+                          <a:cs typeface="Microsoft JhengHei"/>
+                        </a:rPr>
+                        <a:t>05/26</a:t>
+                      </a:r>
+                    </a:p>
+                  </a:txBody>
+                  <a:tcPr anchor="ctr" marL="73152" marT="9144" marB="9144">
+                    <a:solidFill>
+                      <a:srgbClr val="EEF2F9"/>
+                    </a:solidFill>
+                  </a:tcPr>
+                </a:tc>
+                <a:tc>
+                  <a:txBody>
+                    <a:bodyPr/>
+                    <a:lstStyle/>
+                    <a:p>
+                      <a:r>
+                        <a:rPr sz="1150" b="1">
+                          <a:solidFill>
+                            <a:srgbClr val="27A6C4"/>
+                          </a:solidFill>
+                          <a:latin typeface="Microsoft JhengHei"/>
+                          <a:ea typeface="Microsoft JhengHei"/>
+                          <a:cs typeface="Microsoft JhengHei"/>
+                        </a:rPr>
+                        <a:t>個資外洩</a:t>
+                      </a:r>
+                    </a:p>
+                  </a:txBody>
+                  <a:tcPr anchor="ctr" marL="73152" marT="9144" marB="9144">
+                    <a:solidFill>
+                      <a:srgbClr val="EEF2F9"/>
+                    </a:solidFill>
+                  </a:tcPr>
+                </a:tc>
+                <a:tc>
+                  <a:txBody>
+                    <a:bodyPr/>
+                    <a:lstStyle/>
+                    <a:p>
+                      <a:r>
+                        <a:rPr sz="1150" b="0">
+                          <a:solidFill>
+                            <a:srgbClr val="1A2233"/>
+                          </a:solidFill>
+                          <a:latin typeface="Microsoft JhengHei"/>
+                          <a:ea typeface="Microsoft JhengHei"/>
+                          <a:cs typeface="Microsoft JhengHei"/>
+                        </a:rPr>
+                        <a:t>目前評估對公司營運尚無重大影響。</a:t>
+                      </a:r>
+                    </a:p>
+                  </a:txBody>
+                  <a:tcPr anchor="ctr" marL="73152" marT="9144" marB="9144">
+                    <a:solidFill>
+                      <a:srgbClr val="EEF2F9"/>
                     </a:solidFill>
                   </a:tcPr>
                 </a:tc>
@@ -5198,7 +5320,7 @@
                 <a:ea typeface="Microsoft JhengHei"/>
                 <a:cs typeface="Microsoft JhengHei"/>
               </a:rPr>
-              <a:t>2 起</a:t>
+              <a:t>1 起</a:t>
             </a:r>
           </a:p>
         </p:txBody>
@@ -5235,7 +5357,7 @@
                 <a:ea typeface="Microsoft JhengHei"/>
                 <a:cs typeface="Microsoft JhengHei"/>
               </a:rPr>
-              <a:t>巨路、建德工業</a:t>
+              <a:t>巨路</a:t>
             </a:r>
           </a:p>
         </p:txBody>
@@ -5436,7 +5558,7 @@
                 <a:ea typeface="Microsoft JhengHei"/>
                 <a:cs typeface="Microsoft JhengHei"/>
               </a:rPr>
-              <a:t>1 起</a:t>
+              <a:t>2 起</a:t>
             </a:r>
           </a:p>
         </p:txBody>
@@ -5473,7 +5595,7 @@
                 <a:ea typeface="Microsoft JhengHei"/>
                 <a:cs typeface="Microsoft JhengHei"/>
               </a:rPr>
-              <a:t>弘塑</a:t>
+              <a:t>易發、尼得科超眾</a:t>
             </a:r>
           </a:p>
         </p:txBody>
@@ -5912,7 +6034,7 @@
                 <a:ea typeface="Microsoft JhengHei"/>
                 <a:cs typeface="Microsoft JhengHei"/>
               </a:rPr>
-              <a:t>1 起</a:t>
+              <a:t>2 起</a:t>
             </a:r>
           </a:p>
         </p:txBody>
@@ -5949,7 +6071,7 @@
                 <a:ea typeface="Microsoft JhengHei"/>
                 <a:cs typeface="Microsoft JhengHei"/>
               </a:rPr>
-              <a:t>上福</a:t>
+              <a:t>耕興、上福</a:t>
             </a:r>
           </a:p>
         </p:txBody>
@@ -6137,7 +6259,7 @@
         </p:nvGraphicFramePr>
         <p:xfrm>
           <a:off x="548640" y="1600200"/>
-          <a:ext cx="10789920" cy="2743200"/>
+          <a:ext cx="10789920" cy="3200400"/>
         </p:xfrm>
         <a:graphic>
           <a:graphicData uri="http://schemas.openxmlformats.org/drawingml/2006/table">
@@ -6289,7 +6411,7 @@
                           <a:ea typeface="Microsoft JhengHei"/>
                           <a:cs typeface="Microsoft JhengHei"/>
                         </a:rPr>
-                        <a:t>上福</a:t>
+                        <a:t>耕興</a:t>
                       </a:r>
                     </a:p>
                   </a:txBody>
@@ -6313,7 +6435,7 @@
                           <a:ea typeface="Microsoft JhengHei"/>
                           <a:cs typeface="Microsoft JhengHei"/>
                         </a:rPr>
-                        <a:t>6128</a:t>
+                        <a:t>6146</a:t>
                       </a:r>
                     </a:p>
                   </a:txBody>
@@ -6361,7 +6483,7 @@
                           <a:ea typeface="Microsoft JhengHei"/>
                           <a:cs typeface="Microsoft JhengHei"/>
                         </a:rPr>
-                        <a:t>安永聯合會計師事務所</a:t>
+                        <a:t>勤業眾信聯合會計師事務所</a:t>
                       </a:r>
                     </a:p>
                   </a:txBody>
@@ -6385,7 +6507,7 @@
                           <a:ea typeface="Microsoft JhengHei"/>
                           <a:cs typeface="Microsoft JhengHei"/>
                         </a:rPr>
-                        <a:t>黃宇廷、賴書晨</a:t>
+                        <a:t>黃毅民、陳文香</a:t>
                       </a:r>
                     </a:p>
                   </a:txBody>
@@ -6411,7 +6533,7 @@
                           <a:ea typeface="Microsoft JhengHei"/>
                           <a:cs typeface="Microsoft JhengHei"/>
                         </a:rPr>
-                        <a:t>巨路</a:t>
+                        <a:t>易發</a:t>
                       </a:r>
                     </a:p>
                   </a:txBody>
@@ -6435,7 +6557,7 @@
                           <a:ea typeface="Microsoft JhengHei"/>
                           <a:cs typeface="Microsoft JhengHei"/>
                         </a:rPr>
-                        <a:t>6192</a:t>
+                        <a:t>6425</a:t>
                       </a:r>
                     </a:p>
                   </a:txBody>
@@ -6453,13 +6575,13 @@
                       <a:r>
                         <a:rPr sz="1150" b="1">
                           <a:solidFill>
-                            <a:srgbClr val="E63946"/>
+                            <a:srgbClr val="F4A261"/>
                           </a:solidFill>
                           <a:latin typeface="Microsoft JhengHei"/>
                           <a:ea typeface="Microsoft JhengHei"/>
                           <a:cs typeface="Microsoft JhengHei"/>
                         </a:rPr>
-                        <a:t>駭客攻擊</a:t>
+                        <a:t>勒索病毒/加密</a:t>
                       </a:r>
                     </a:p>
                   </a:txBody>
@@ -6507,7 +6629,7 @@
                           <a:ea typeface="Microsoft JhengHei"/>
                           <a:cs typeface="Microsoft JhengHei"/>
                         </a:rPr>
-                        <a:t>劉建良、張麗君</a:t>
+                        <a:t>張至誼、洪國田</a:t>
                       </a:r>
                     </a:p>
                   </a:txBody>
@@ -6533,7 +6655,7 @@
                           <a:ea typeface="Microsoft JhengHei"/>
                           <a:cs typeface="Microsoft JhengHei"/>
                         </a:rPr>
-                        <a:t>數字</a:t>
+                        <a:t>尼得科超眾</a:t>
                       </a:r>
                     </a:p>
                   </a:txBody>
@@ -6557,7 +6679,7 @@
                           <a:ea typeface="Microsoft JhengHei"/>
                           <a:cs typeface="Microsoft JhengHei"/>
                         </a:rPr>
-                        <a:t>5287</a:t>
+                        <a:t>6230</a:t>
                       </a:r>
                     </a:p>
                   </a:txBody>
@@ -6575,13 +6697,13 @@
                       <a:r>
                         <a:rPr sz="1150" b="1">
                           <a:solidFill>
-                            <a:srgbClr val="27A6C4"/>
+                            <a:srgbClr val="F4A261"/>
                           </a:solidFill>
                           <a:latin typeface="Microsoft JhengHei"/>
                           <a:ea typeface="Microsoft JhengHei"/>
                           <a:cs typeface="Microsoft JhengHei"/>
                         </a:rPr>
-                        <a:t>個資外洩</a:t>
+                        <a:t>勒索病毒/加密</a:t>
                       </a:r>
                     </a:p>
                   </a:txBody>
@@ -6629,7 +6751,7 @@
                           <a:ea typeface="Microsoft JhengHei"/>
                           <a:cs typeface="Microsoft JhengHei"/>
                         </a:rPr>
-                        <a:t>羅瑞芝、余聖河</a:t>
+                        <a:t>郭欣頤、張肇文</a:t>
                       </a:r>
                     </a:p>
                   </a:txBody>
@@ -6655,7 +6777,7 @@
                           <a:ea typeface="Microsoft JhengHei"/>
                           <a:cs typeface="Microsoft JhengHei"/>
                         </a:rPr>
-                        <a:t>弘塑</a:t>
+                        <a:t>上福</a:t>
                       </a:r>
                     </a:p>
                   </a:txBody>
@@ -6679,7 +6801,7 @@
                           <a:ea typeface="Microsoft JhengHei"/>
                           <a:cs typeface="Microsoft JhengHei"/>
                         </a:rPr>
-                        <a:t>3131</a:t>
+                        <a:t>6128</a:t>
                       </a:r>
                     </a:p>
                   </a:txBody>
@@ -6697,13 +6819,13 @@
                       <a:r>
                         <a:rPr sz="1150" b="1">
                           <a:solidFill>
-                            <a:srgbClr val="F4A261"/>
+                            <a:srgbClr val="5C6679"/>
                           </a:solidFill>
                           <a:latin typeface="Microsoft JhengHei"/>
                           <a:ea typeface="Microsoft JhengHei"/>
                           <a:cs typeface="Microsoft JhengHei"/>
                         </a:rPr>
-                        <a:t>勒索病毒/加密</a:t>
+                        <a:t>其他</a:t>
                       </a:r>
                     </a:p>
                   </a:txBody>
@@ -6727,7 +6849,7 @@
                           <a:ea typeface="Microsoft JhengHei"/>
                           <a:cs typeface="Microsoft JhengHei"/>
                         </a:rPr>
-                        <a:t>資誠聯合會計師事務所</a:t>
+                        <a:t>安永聯合會計師事務所</a:t>
                       </a:r>
                     </a:p>
                   </a:txBody>
@@ -6751,7 +6873,7 @@
                           <a:ea typeface="Microsoft JhengHei"/>
                           <a:cs typeface="Microsoft JhengHei"/>
                         </a:rPr>
-                        <a:t>李典易、蔣承翰</a:t>
+                        <a:t>黃宇廷、賴書晨</a:t>
                       </a:r>
                     </a:p>
                   </a:txBody>
@@ -6777,7 +6899,7 @@
                           <a:ea typeface="Microsoft JhengHei"/>
                           <a:cs typeface="Microsoft JhengHei"/>
                         </a:rPr>
-                        <a:t>建德工業</a:t>
+                        <a:t>巨路</a:t>
                       </a:r>
                     </a:p>
                   </a:txBody>
@@ -6801,7 +6923,7 @@
                           <a:ea typeface="Microsoft JhengHei"/>
                           <a:cs typeface="Microsoft JhengHei"/>
                         </a:rPr>
-                        <a:t>6606</a:t>
+                        <a:t>6192</a:t>
                       </a:r>
                     </a:p>
                   </a:txBody>
@@ -6849,7 +6971,7 @@
                           <a:ea typeface="Microsoft JhengHei"/>
                           <a:cs typeface="Microsoft JhengHei"/>
                         </a:rPr>
-                        <a:t>資誠聯合會計師事務所</a:t>
+                        <a:t>勤業眾信聯合會計師事務所</a:t>
                       </a:r>
                     </a:p>
                   </a:txBody>
@@ -6873,13 +6995,135 @@
                           <a:ea typeface="Microsoft JhengHei"/>
                           <a:cs typeface="Microsoft JhengHei"/>
                         </a:rPr>
-                        <a:t>林秀珊、吳建志</a:t>
+                        <a:t>劉建良、張麗君</a:t>
                       </a:r>
                     </a:p>
                   </a:txBody>
                   <a:tcPr anchor="ctr" marL="73152" marT="9144" marB="9144">
                     <a:solidFill>
                       <a:srgbClr val="FFFFFF"/>
+                    </a:solidFill>
+                  </a:tcPr>
+                </a:tc>
+              </a:tr>
+              <a:tr h="457200">
+                <a:tc>
+                  <a:txBody>
+                    <a:bodyPr/>
+                    <a:lstStyle/>
+                    <a:p>
+                      <a:r>
+                        <a:rPr sz="1150" b="0">
+                          <a:solidFill>
+                            <a:srgbClr val="1A2233"/>
+                          </a:solidFill>
+                          <a:latin typeface="Microsoft JhengHei"/>
+                          <a:ea typeface="Microsoft JhengHei"/>
+                          <a:cs typeface="Microsoft JhengHei"/>
+                        </a:rPr>
+                        <a:t>數字</a:t>
+                      </a:r>
+                    </a:p>
+                  </a:txBody>
+                  <a:tcPr anchor="ctr" marL="73152" marT="9144" marB="9144">
+                    <a:solidFill>
+                      <a:srgbClr val="EEF2F9"/>
+                    </a:solidFill>
+                  </a:tcPr>
+                </a:tc>
+                <a:tc>
+                  <a:txBody>
+                    <a:bodyPr/>
+                    <a:lstStyle/>
+                    <a:p>
+                      <a:r>
+                        <a:rPr sz="1150" b="0">
+                          <a:solidFill>
+                            <a:srgbClr val="1A2233"/>
+                          </a:solidFill>
+                          <a:latin typeface="Microsoft JhengHei"/>
+                          <a:ea typeface="Microsoft JhengHei"/>
+                          <a:cs typeface="Microsoft JhengHei"/>
+                        </a:rPr>
+                        <a:t>5287</a:t>
+                      </a:r>
+                    </a:p>
+                  </a:txBody>
+                  <a:tcPr anchor="ctr" marL="73152" marT="9144" marB="9144">
+                    <a:solidFill>
+                      <a:srgbClr val="EEF2F9"/>
+                    </a:solidFill>
+                  </a:tcPr>
+                </a:tc>
+                <a:tc>
+                  <a:txBody>
+                    <a:bodyPr/>
+                    <a:lstStyle/>
+                    <a:p>
+                      <a:r>
+                        <a:rPr sz="1150" b="1">
+                          <a:solidFill>
+                            <a:srgbClr val="27A6C4"/>
+                          </a:solidFill>
+                          <a:latin typeface="Microsoft JhengHei"/>
+                          <a:ea typeface="Microsoft JhengHei"/>
+                          <a:cs typeface="Microsoft JhengHei"/>
+                        </a:rPr>
+                        <a:t>個資外洩</a:t>
+                      </a:r>
+                    </a:p>
+                  </a:txBody>
+                  <a:tcPr anchor="ctr" marL="73152" marT="9144" marB="9144">
+                    <a:solidFill>
+                      <a:srgbClr val="EEF2F9"/>
+                    </a:solidFill>
+                  </a:tcPr>
+                </a:tc>
+                <a:tc>
+                  <a:txBody>
+                    <a:bodyPr/>
+                    <a:lstStyle/>
+                    <a:p>
+                      <a:r>
+                        <a:rPr sz="1150" b="0">
+                          <a:solidFill>
+                            <a:srgbClr val="1A2233"/>
+                          </a:solidFill>
+                          <a:latin typeface="Microsoft JhengHei"/>
+                          <a:ea typeface="Microsoft JhengHei"/>
+                          <a:cs typeface="Microsoft JhengHei"/>
+                        </a:rPr>
+                        <a:t>安侯建業聯合會計師事務所</a:t>
+                      </a:r>
+                    </a:p>
+                  </a:txBody>
+                  <a:tcPr anchor="ctr" marL="73152" marT="9144" marB="9144">
+                    <a:solidFill>
+                      <a:srgbClr val="EEF2F9"/>
+                    </a:solidFill>
+                  </a:tcPr>
+                </a:tc>
+                <a:tc>
+                  <a:txBody>
+                    <a:bodyPr/>
+                    <a:lstStyle/>
+                    <a:p>
+                      <a:r>
+                        <a:rPr sz="1150" b="0">
+                          <a:solidFill>
+                            <a:srgbClr val="1A2233"/>
+                          </a:solidFill>
+                          <a:latin typeface="Microsoft JhengHei"/>
+                          <a:ea typeface="Microsoft JhengHei"/>
+                          <a:cs typeface="Microsoft JhengHei"/>
+                        </a:rPr>
+                        <a:t>羅瑞芝、余聖河</a:t>
+                      </a:r>
+                    </a:p>
+                  </a:txBody>
+                  <a:tcPr anchor="ctr" marL="73152" marT="9144" marB="9144">
+                    <a:solidFill>
+                      <a:srgbClr val="EEF2F9"/>
                     </a:solidFill>
                   </a:tcPr>
                 </a:tc>
@@ -8394,7 +8638,7 @@
                 <a:ea typeface="Microsoft JhengHei"/>
                 <a:cs typeface="Microsoft JhengHei"/>
               </a:rPr>
-              <a:t>上福 </a:t>
+              <a:t>耕興 </a:t>
             </a:r>
             <a:r>
               <a:rPr sz="1300" b="0">
@@ -8405,7 +8649,7 @@
                 <a:ea typeface="Microsoft JhengHei"/>
                 <a:cs typeface="Microsoft JhengHei"/>
               </a:rPr>
-              <a:t>6128</a:t>
+              <a:t>6146</a:t>
             </a:r>
           </a:p>
         </p:txBody>
@@ -8538,7 +8782,7 @@
                 <a:ea typeface="Microsoft JhengHei"/>
                 <a:cs typeface="Microsoft JhengHei"/>
               </a:rPr>
-              <a:t>KatunCorporation資訊設備遭受未授權外部存取。</a:t>
+              <a:t>本公司部分資訊系統發生網路資安事件。</a:t>
             </a:r>
           </a:p>
         </p:txBody>
@@ -8590,7 +8834,7 @@
                 <a:ea typeface="Microsoft JhengHei"/>
                 <a:cs typeface="Microsoft JhengHei"/>
               </a:rPr>
-              <a:t>此事件後將持續提升網路與資訊基礎架構之安全控管，並持續密切監控，以確保資訊安全。</a:t>
+              <a:t>本公司將持續提升網路與資訊基礎架構之安全管控，並依外部資安技術專家之建議加強防護，確保資訊安全。</a:t>
             </a:r>
           </a:p>
         </p:txBody>
@@ -8656,7 +8900,7 @@
             <a:avLst/>
           </a:prstGeom>
           <a:solidFill>
-            <a:srgbClr val="E63946"/>
+            <a:srgbClr val="F4A261"/>
           </a:solidFill>
           <a:ln>
             <a:noFill/>
@@ -8717,7 +8961,7 @@
                 <a:ea typeface="Microsoft JhengHei"/>
                 <a:cs typeface="Microsoft JhengHei"/>
               </a:rPr>
-              <a:t>巨路 </a:t>
+              <a:t>易發 </a:t>
             </a:r>
             <a:r>
               <a:rPr sz="1300" b="0">
@@ -8728,7 +8972,7 @@
                 <a:ea typeface="Microsoft JhengHei"/>
                 <a:cs typeface="Microsoft JhengHei"/>
               </a:rPr>
-              <a:t>6192</a:t>
+              <a:t>6425</a:t>
             </a:r>
           </a:p>
         </p:txBody>
@@ -8748,7 +8992,7 @@
             <a:avLst/>
           </a:prstGeom>
           <a:solidFill>
-            <a:srgbClr val="E63946"/>
+            <a:srgbClr val="F4A261"/>
           </a:solidFill>
           <a:ln>
             <a:noFill/>
@@ -8809,7 +9053,7 @@
                 <a:ea typeface="Microsoft JhengHei"/>
                 <a:cs typeface="Microsoft JhengHei"/>
               </a:rPr>
-              <a:t>駭客攻擊</a:t>
+              <a:t>勒索病毒/加密</a:t>
             </a:r>
           </a:p>
         </p:txBody>
@@ -8844,7 +9088,7 @@
             <a:r>
               <a:rPr sz="1100" b="1">
                 <a:solidFill>
-                  <a:srgbClr val="E63946"/>
+                  <a:srgbClr val="F4A261"/>
                 </a:solidFill>
                 <a:latin typeface="Microsoft JhengHei"/>
                 <a:ea typeface="Microsoft JhengHei"/>
@@ -8861,7 +9105,7 @@
                 <a:ea typeface="Microsoft JhengHei"/>
                 <a:cs typeface="Microsoft JhengHei"/>
               </a:rPr>
-              <a:t>本公司部份資訊系統遭受駭客網路攻擊。</a:t>
+              <a:t>本公司之子公司東野精機(股)公司日福精工(股)公司，發現遭不明駭客入侵主機，並將伺服器資料加密，…</a:t>
             </a:r>
           </a:p>
         </p:txBody>
@@ -8896,7 +9140,7 @@
             <a:r>
               <a:rPr sz="1100" b="1">
                 <a:solidFill>
-                  <a:srgbClr val="E63946"/>
+                  <a:srgbClr val="F4A261"/>
                 </a:solidFill>
                 <a:latin typeface="Microsoft JhengHei"/>
                 <a:ea typeface="Microsoft JhengHei"/>
@@ -8913,7 +9157,7 @@
                 <a:ea typeface="Microsoft JhengHei"/>
                 <a:cs typeface="Microsoft JhengHei"/>
               </a:rPr>
-              <a:t>本公司將持續強化網路與資訊安全架構，並擴大資安防禦措施，以提升整體資安防護能力</a:t>
+              <a:t>本公司之子公司東野精機(股)公司日福精工(股)公司將修復安全漏洞，持續提升網路與資訊基礎架構之安全管控，以確保資訊安全。</a:t>
             </a:r>
           </a:p>
         </p:txBody>
@@ -8979,7 +9223,7 @@
             <a:avLst/>
           </a:prstGeom>
           <a:solidFill>
-            <a:srgbClr val="27A6C4"/>
+            <a:srgbClr val="F4A261"/>
           </a:solidFill>
           <a:ln>
             <a:noFill/>
@@ -9040,7 +9284,7 @@
                 <a:ea typeface="Microsoft JhengHei"/>
                 <a:cs typeface="Microsoft JhengHei"/>
               </a:rPr>
-              <a:t>數字 </a:t>
+              <a:t>尼得科超眾 </a:t>
             </a:r>
             <a:r>
               <a:rPr sz="1300" b="0">
@@ -9051,7 +9295,7 @@
                 <a:ea typeface="Microsoft JhengHei"/>
                 <a:cs typeface="Microsoft JhengHei"/>
               </a:rPr>
-              <a:t>5287</a:t>
+              <a:t>6230</a:t>
             </a:r>
           </a:p>
         </p:txBody>
@@ -9071,7 +9315,7 @@
             <a:avLst/>
           </a:prstGeom>
           <a:solidFill>
-            <a:srgbClr val="27A6C4"/>
+            <a:srgbClr val="F4A261"/>
           </a:solidFill>
           <a:ln>
             <a:noFill/>
@@ -9132,7 +9376,7 @@
                 <a:ea typeface="Microsoft JhengHei"/>
                 <a:cs typeface="Microsoft JhengHei"/>
               </a:rPr>
-              <a:t>個資外洩</a:t>
+              <a:t>勒索病毒/加密</a:t>
             </a:r>
           </a:p>
         </p:txBody>
@@ -9167,7 +9411,7 @@
             <a:r>
               <a:rPr sz="1100" b="1">
                 <a:solidFill>
-                  <a:srgbClr val="27A6C4"/>
+                  <a:srgbClr val="F4A261"/>
                 </a:solidFill>
                 <a:latin typeface="Microsoft JhengHei"/>
                 <a:ea typeface="Microsoft JhengHei"/>
@@ -9184,7 +9428,7 @@
                 <a:ea typeface="Microsoft JhengHei"/>
                 <a:cs typeface="Microsoft JhengHei"/>
               </a:rPr>
-              <a:t>本公司於115年5月25日進行內部活動網頁開發與測試流程時，因程式碼管理作業設定不當，致部分未去…</a:t>
+              <a:t>本公司於今日偵測到部份伺服器遭受網路勒索病毒攻擊，致使包含ERP在內之部份資訊系統無法正常運作。</a:t>
             </a:r>
           </a:p>
         </p:txBody>
@@ -9219,7 +9463,7 @@
             <a:r>
               <a:rPr sz="1100" b="1">
                 <a:solidFill>
-                  <a:srgbClr val="27A6C4"/>
+                  <a:srgbClr val="F4A261"/>
                 </a:solidFill>
                 <a:latin typeface="Microsoft JhengHei"/>
                 <a:ea typeface="Microsoft JhengHei"/>
@@ -9236,7 +9480,7 @@
                 <a:ea typeface="Microsoft JhengHei"/>
                 <a:cs typeface="Microsoft JhengHei"/>
               </a:rPr>
-              <a:t>(1)依據安全軟體發展生命週期(SSDLC)之框架，優化開發流程管制作業(2)落實權限管理及審查，避免未經授權之人員得以…</a:t>
+              <a:t>本公司亦將視系統復原進度，適時調整生產與出貨排程。</a:t>
             </a:r>
           </a:p>
         </p:txBody>
@@ -9302,7 +9546,7 @@
             <a:avLst/>
           </a:prstGeom>
           <a:solidFill>
-            <a:srgbClr val="F4A261"/>
+            <a:srgbClr val="5C6679"/>
           </a:solidFill>
           <a:ln>
             <a:noFill/>
@@ -9363,7 +9607,7 @@
                 <a:ea typeface="Microsoft JhengHei"/>
                 <a:cs typeface="Microsoft JhengHei"/>
               </a:rPr>
-              <a:t>弘塑 </a:t>
+              <a:t>上福 </a:t>
             </a:r>
             <a:r>
               <a:rPr sz="1300" b="0">
@@ -9374,7 +9618,7 @@
                 <a:ea typeface="Microsoft JhengHei"/>
                 <a:cs typeface="Microsoft JhengHei"/>
               </a:rPr>
-              <a:t>3131</a:t>
+              <a:t>6128</a:t>
             </a:r>
           </a:p>
         </p:txBody>
@@ -9394,7 +9638,7 @@
             <a:avLst/>
           </a:prstGeom>
           <a:solidFill>
-            <a:srgbClr val="F4A261"/>
+            <a:srgbClr val="5C6679"/>
           </a:solidFill>
           <a:ln>
             <a:noFill/>
@@ -9455,7 +9699,7 @@
                 <a:ea typeface="Microsoft JhengHei"/>
                 <a:cs typeface="Microsoft JhengHei"/>
               </a:rPr>
-              <a:t>勒索病毒/加密</a:t>
+              <a:t>其他</a:t>
             </a:r>
           </a:p>
         </p:txBody>
@@ -9490,7 +9734,7 @@
             <a:r>
               <a:rPr sz="1100" b="1">
                 <a:solidFill>
-                  <a:srgbClr val="F4A261"/>
+                  <a:srgbClr val="5C6679"/>
                 </a:solidFill>
                 <a:latin typeface="Microsoft JhengHei"/>
                 <a:ea typeface="Microsoft JhengHei"/>
@@ -9507,7 +9751,7 @@
                 <a:ea typeface="Microsoft JhengHei"/>
                 <a:cs typeface="Microsoft JhengHei"/>
               </a:rPr>
-              <a:t>本公司資訊系統遭受勒索病毒攻擊。</a:t>
+              <a:t>KatunCorporation資訊設備遭受未授權外部存取。</a:t>
             </a:r>
           </a:p>
         </p:txBody>
@@ -9542,7 +9786,7 @@
             <a:r>
               <a:rPr sz="1100" b="1">
                 <a:solidFill>
-                  <a:srgbClr val="F4A261"/>
+                  <a:srgbClr val="5C6679"/>
                 </a:solidFill>
                 <a:latin typeface="Microsoft JhengHei"/>
                 <a:ea typeface="Microsoft JhengHei"/>
@@ -9559,7 +9803,7 @@
                 <a:ea typeface="Microsoft JhengHei"/>
                 <a:cs typeface="Microsoft JhengHei"/>
               </a:rPr>
-              <a:t>本公司將持續加強資訊安全監控與防護機制，提升網路與資訊基礎架構之安全管理，並導入更完善之資安控管措施，以降低未來風險。</a:t>
+              <a:t>此事件後將持續提升網路與資訊基礎架構之安全控管，並持續密切監控，以確保資訊安全。</a:t>
             </a:r>
           </a:p>
         </p:txBody>
@@ -9822,7 +10066,7 @@
                 <a:ea typeface="Microsoft JhengHei"/>
                 <a:cs typeface="Microsoft JhengHei"/>
               </a:rPr>
-              <a:t>建德工業 </a:t>
+              <a:t>巨路 </a:t>
             </a:r>
             <a:r>
               <a:rPr sz="1300" b="0">
@@ -9833,7 +10077,7 @@
                 <a:ea typeface="Microsoft JhengHei"/>
                 <a:cs typeface="Microsoft JhengHei"/>
               </a:rPr>
-              <a:t>6606</a:t>
+              <a:t>6192</a:t>
             </a:r>
           </a:p>
         </p:txBody>
@@ -9966,7 +10210,7 @@
                 <a:ea typeface="Microsoft JhengHei"/>
                 <a:cs typeface="Microsoft JhengHei"/>
               </a:rPr>
-              <a:t>本公司資訊系統疑遭受駭客網路攻擊</a:t>
+              <a:t>本公司部份資訊系統遭受駭客網路攻擊。</a:t>
             </a:r>
           </a:p>
         </p:txBody>
@@ -10018,7 +10262,330 @@
                 <a:ea typeface="Microsoft JhengHei"/>
                 <a:cs typeface="Microsoft JhengHei"/>
               </a:rPr>
-              <a:t>目前已全面盤查本公司資訊系統，確保無植入木馬程式等攻擊手段，將持續提昇網路資訊安全架構，並持續嚴密監控，以確保資訊安全。</a:t>
+              <a:t>本公司將持續強化網路與資訊安全架構，並擴大資安防禦措施，以提升整體資安防護能力</a:t>
+            </a:r>
+          </a:p>
+        </p:txBody>
+      </p:sp>
+      <p:sp>
+        <p:nvSpPr>
+          <p:cNvPr id="12" name="Rounded Rectangle 11"/>
+          <p:cNvSpPr/>
+          <p:nvPr/>
+        </p:nvSpPr>
+        <p:spPr>
+          <a:xfrm>
+            <a:off x="6172200" y="1554480"/>
+            <a:ext cx="5394960" cy="2148840"/>
+          </a:xfrm>
+          <a:prstGeom prst="roundRect">
+            <a:avLst/>
+          </a:prstGeom>
+          <a:solidFill>
+            <a:srgbClr val="FFFFFF"/>
+          </a:solidFill>
+          <a:ln w="12700">
+            <a:solidFill>
+              <a:srgbClr val="DDE3EE"/>
+            </a:solidFill>
+          </a:ln>
+          <a:effectLst/>
+        </p:spPr>
+        <p:style>
+          <a:lnRef idx="1">
+            <a:schemeClr val="accent1"/>
+          </a:lnRef>
+          <a:fillRef idx="3">
+            <a:schemeClr val="accent1"/>
+          </a:fillRef>
+          <a:effectRef idx="2">
+            <a:schemeClr val="accent1"/>
+          </a:effectRef>
+          <a:fontRef idx="minor">
+            <a:schemeClr val="lt1"/>
+          </a:fontRef>
+        </p:style>
+        <p:txBody>
+          <a:bodyPr rtlCol="0" anchor="ctr"/>
+          <a:lstStyle/>
+          <a:p>
+            <a:pPr algn="ctr"/>
+          </a:p>
+        </p:txBody>
+      </p:sp>
+      <p:sp>
+        <p:nvSpPr>
+          <p:cNvPr id="13" name="Rectangle 12"/>
+          <p:cNvSpPr/>
+          <p:nvPr/>
+        </p:nvSpPr>
+        <p:spPr>
+          <a:xfrm>
+            <a:off x="6172200" y="1554480"/>
+            <a:ext cx="5394960" cy="109728"/>
+          </a:xfrm>
+          <a:prstGeom prst="rect">
+            <a:avLst/>
+          </a:prstGeom>
+          <a:solidFill>
+            <a:srgbClr val="27A6C4"/>
+          </a:solidFill>
+          <a:ln>
+            <a:noFill/>
+          </a:ln>
+          <a:effectLst/>
+        </p:spPr>
+        <p:style>
+          <a:lnRef idx="1">
+            <a:schemeClr val="accent1"/>
+          </a:lnRef>
+          <a:fillRef idx="3">
+            <a:schemeClr val="accent1"/>
+          </a:fillRef>
+          <a:effectRef idx="2">
+            <a:schemeClr val="accent1"/>
+          </a:effectRef>
+          <a:fontRef idx="minor">
+            <a:schemeClr val="lt1"/>
+          </a:fontRef>
+        </p:style>
+        <p:txBody>
+          <a:bodyPr rtlCol="0" anchor="ctr"/>
+          <a:lstStyle/>
+          <a:p>
+            <a:pPr algn="ctr"/>
+          </a:p>
+        </p:txBody>
+      </p:sp>
+      <p:sp>
+        <p:nvSpPr>
+          <p:cNvPr id="14" name="TextBox 13"/>
+          <p:cNvSpPr txBox="1"/>
+          <p:nvPr/>
+        </p:nvSpPr>
+        <p:spPr>
+          <a:xfrm>
+            <a:off x="6400800" y="1773936"/>
+            <a:ext cx="3657600" cy="365760"/>
+          </a:xfrm>
+          <a:prstGeom prst="rect">
+            <a:avLst/>
+          </a:prstGeom>
+          <a:noFill/>
+        </p:spPr>
+        <p:txBody>
+          <a:bodyPr wrap="square" anchor="ctr" lIns="0" rIns="0" tIns="0" bIns="0">
+            <a:spAutoFit/>
+          </a:bodyPr>
+          <a:lstStyle/>
+          <a:p>
+            <a:pPr algn="l"/>
+            <a:r>
+              <a:rPr sz="1600" b="1">
+                <a:solidFill>
+                  <a:srgbClr val="1A2233"/>
+                </a:solidFill>
+                <a:latin typeface="Microsoft JhengHei"/>
+                <a:ea typeface="Microsoft JhengHei"/>
+                <a:cs typeface="Microsoft JhengHei"/>
+              </a:rPr>
+              <a:t>數字 </a:t>
+            </a:r>
+            <a:r>
+              <a:rPr sz="1300" b="0">
+                <a:solidFill>
+                  <a:srgbClr val="5C6679"/>
+                </a:solidFill>
+                <a:latin typeface="Microsoft JhengHei"/>
+                <a:ea typeface="Microsoft JhengHei"/>
+                <a:cs typeface="Microsoft JhengHei"/>
+              </a:rPr>
+              <a:t>5287</a:t>
+            </a:r>
+          </a:p>
+        </p:txBody>
+      </p:sp>
+      <p:sp>
+        <p:nvSpPr>
+          <p:cNvPr id="15" name="Rounded Rectangle 14"/>
+          <p:cNvSpPr/>
+          <p:nvPr/>
+        </p:nvSpPr>
+        <p:spPr>
+          <a:xfrm>
+            <a:off x="10149840" y="1792224"/>
+            <a:ext cx="1234440" cy="347472"/>
+          </a:xfrm>
+          <a:prstGeom prst="roundRect">
+            <a:avLst/>
+          </a:prstGeom>
+          <a:solidFill>
+            <a:srgbClr val="27A6C4"/>
+          </a:solidFill>
+          <a:ln>
+            <a:noFill/>
+          </a:ln>
+          <a:effectLst/>
+        </p:spPr>
+        <p:style>
+          <a:lnRef idx="1">
+            <a:schemeClr val="accent1"/>
+          </a:lnRef>
+          <a:fillRef idx="3">
+            <a:schemeClr val="accent1"/>
+          </a:fillRef>
+          <a:effectRef idx="2">
+            <a:schemeClr val="accent1"/>
+          </a:effectRef>
+          <a:fontRef idx="minor">
+            <a:schemeClr val="lt1"/>
+          </a:fontRef>
+        </p:style>
+        <p:txBody>
+          <a:bodyPr rtlCol="0" anchor="ctr"/>
+          <a:lstStyle/>
+          <a:p>
+            <a:pPr algn="ctr"/>
+          </a:p>
+        </p:txBody>
+      </p:sp>
+      <p:sp>
+        <p:nvSpPr>
+          <p:cNvPr id="16" name="TextBox 15"/>
+          <p:cNvSpPr txBox="1"/>
+          <p:nvPr/>
+        </p:nvSpPr>
+        <p:spPr>
+          <a:xfrm>
+            <a:off x="10149840" y="1792224"/>
+            <a:ext cx="1234440" cy="347472"/>
+          </a:xfrm>
+          <a:prstGeom prst="rect">
+            <a:avLst/>
+          </a:prstGeom>
+          <a:noFill/>
+        </p:spPr>
+        <p:txBody>
+          <a:bodyPr wrap="square" anchor="ctr" lIns="0" rIns="0" tIns="0" bIns="0">
+            <a:spAutoFit/>
+          </a:bodyPr>
+          <a:lstStyle/>
+          <a:p>
+            <a:pPr algn="ctr"/>
+            <a:r>
+              <a:rPr sz="1050" b="1">
+                <a:solidFill>
+                  <a:srgbClr val="FFFFFF"/>
+                </a:solidFill>
+                <a:latin typeface="Microsoft JhengHei"/>
+                <a:ea typeface="Microsoft JhengHei"/>
+                <a:cs typeface="Microsoft JhengHei"/>
+              </a:rPr>
+              <a:t>個資外洩</a:t>
+            </a:r>
+          </a:p>
+        </p:txBody>
+      </p:sp>
+      <p:sp>
+        <p:nvSpPr>
+          <p:cNvPr id="17" name="TextBox 16"/>
+          <p:cNvSpPr txBox="1"/>
+          <p:nvPr/>
+        </p:nvSpPr>
+        <p:spPr>
+          <a:xfrm>
+            <a:off x="6400800" y="2267712"/>
+            <a:ext cx="4937760" cy="640080"/>
+          </a:xfrm>
+          <a:prstGeom prst="rect">
+            <a:avLst/>
+          </a:prstGeom>
+          <a:noFill/>
+        </p:spPr>
+        <p:txBody>
+          <a:bodyPr wrap="square" anchor="t" lIns="0" rIns="0" tIns="0" bIns="0">
+            <a:spAutoFit/>
+          </a:bodyPr>
+          <a:lstStyle/>
+          <a:p>
+            <a:pPr algn="l">
+              <a:lnSpc>
+                <a:spcPts val="1500"/>
+              </a:lnSpc>
+            </a:pPr>
+            <a:r>
+              <a:rPr sz="1100" b="1">
+                <a:solidFill>
+                  <a:srgbClr val="27A6C4"/>
+                </a:solidFill>
+                <a:latin typeface="Microsoft JhengHei"/>
+                <a:ea typeface="Microsoft JhengHei"/>
+                <a:cs typeface="Microsoft JhengHei"/>
+              </a:rPr>
+              <a:t>緣由　</a:t>
+            </a:r>
+            <a:r>
+              <a:rPr sz="1100" b="0">
+                <a:solidFill>
+                  <a:srgbClr val="1A2233"/>
+                </a:solidFill>
+                <a:latin typeface="Microsoft JhengHei"/>
+                <a:ea typeface="Microsoft JhengHei"/>
+                <a:cs typeface="Microsoft JhengHei"/>
+              </a:rPr>
+              <a:t>本公司於115年5月25日進行內部活動網頁開發與測試流程時，因程式碼管理作業設定不當，致部分未去…</a:t>
+            </a:r>
+          </a:p>
+        </p:txBody>
+      </p:sp>
+      <p:sp>
+        <p:nvSpPr>
+          <p:cNvPr id="18" name="TextBox 17"/>
+          <p:cNvSpPr txBox="1"/>
+          <p:nvPr/>
+        </p:nvSpPr>
+        <p:spPr>
+          <a:xfrm>
+            <a:off x="6400800" y="2926080"/>
+            <a:ext cx="4937760" cy="713232"/>
+          </a:xfrm>
+          <a:prstGeom prst="rect">
+            <a:avLst/>
+          </a:prstGeom>
+          <a:noFill/>
+        </p:spPr>
+        <p:txBody>
+          <a:bodyPr wrap="square" anchor="t" lIns="0" rIns="0" tIns="0" bIns="0">
+            <a:spAutoFit/>
+          </a:bodyPr>
+          <a:lstStyle/>
+          <a:p>
+            <a:pPr algn="l">
+              <a:lnSpc>
+                <a:spcPts val="1500"/>
+              </a:lnSpc>
+            </a:pPr>
+            <a:r>
+              <a:rPr sz="1100" b="1">
+                <a:solidFill>
+                  <a:srgbClr val="27A6C4"/>
+                </a:solidFill>
+                <a:latin typeface="Microsoft JhengHei"/>
+                <a:ea typeface="Microsoft JhengHei"/>
+                <a:cs typeface="Microsoft JhengHei"/>
+              </a:rPr>
+              <a:t>因應　</a:t>
+            </a:r>
+            <a:r>
+              <a:rPr sz="1100" b="0">
+                <a:solidFill>
+                  <a:srgbClr val="1A2233"/>
+                </a:solidFill>
+                <a:latin typeface="Microsoft JhengHei"/>
+                <a:ea typeface="Microsoft JhengHei"/>
+                <a:cs typeface="Microsoft JhengHei"/>
+              </a:rPr>
+              <a:t>(1)依據安全軟體發展生命週期(SSDLC)之框架，優化開發流程管制作業(2)落實權限管理及審查，避免未經授權之人員得以…</a:t>
             </a:r>
           </a:p>
         </p:txBody>

--- a/資安事件因應分析.pptx
+++ b/資安事件因應分析.pptx
@@ -157,23 +157,15 @@
             <c:idx val="2"/>
             <c:spPr>
               <a:solidFill>
-                <a:srgbClr val="27A6C4"/>
-              </a:solidFill>
-            </c:spPr>
-          </c:dPt>
-          <c:dPt>
-            <c:idx val="3"/>
-            <c:spPr>
-              <a:solidFill>
                 <a:srgbClr val="5C6679"/>
               </a:solidFill>
             </c:spPr>
           </c:dPt>
           <c:cat>
             <c:strRef>
-              <c:f>Sheet1!$A$2:$A$5</c:f>
+              <c:f>Sheet1!$A$2:$A$4</c:f>
               <c:strCache>
-                <c:ptCount val="4"/>
+                <c:ptCount val="3"/>
                 <c:pt idx="0">
                   <c:v>駭客攻擊</c:v>
                 </c:pt>
@@ -181,9 +173,6 @@
                   <c:v>勒索病毒/加密</c:v>
                 </c:pt>
                 <c:pt idx="2">
-                  <c:v>個資外洩</c:v>
-                </c:pt>
-                <c:pt idx="3">
                   <c:v>其他</c:v>
                 </c:pt>
               </c:strCache>
@@ -191,10 +180,10 @@
           </c:cat>
           <c:val>
             <c:numRef>
-              <c:f>Sheet1!$B$2:$B$5</c:f>
+              <c:f>Sheet1!$B$2:$B$4</c:f>
               <c:numCache>
                 <c:formatCode>General</c:formatCode>
-                <c:ptCount val="4"/>
+                <c:ptCount val="3"/>
                 <c:pt idx="0">
                   <c:v>1</c:v>
                 </c:pt>
@@ -202,9 +191,6 @@
                   <c:v>2</c:v>
                 </c:pt>
                 <c:pt idx="2">
-                  <c:v>1</c:v>
-                </c:pt>
-                <c:pt idx="3">
                   <c:v>2</c:v>
                 </c:pt>
               </c:numCache>
@@ -3542,7 +3528,7 @@
                 <a:ea typeface="Microsoft JhengHei"/>
                 <a:cs typeface="Microsoft JhengHei"/>
               </a:rPr>
-              <a:t>資料期間 2026-05-23 ~ 2026-06-23　｜　MOPS 重大訊息全文檢索　｜　6 家公司</a:t>
+              <a:t>資料期間 2026-05-27 ~ 2026-06-27　｜　MOPS 重大訊息全文檢索　｜　5 家公司</a:t>
             </a:r>
           </a:p>
         </p:txBody>
@@ -3759,7 +3745,7 @@
                 <a:ea typeface="Microsoft JhengHei"/>
                 <a:cs typeface="Microsoft JhengHei"/>
               </a:rPr>
-              <a:t>資料期間內 MOPS 揭露之 6 起資安相關重大訊息</a:t>
+              <a:t>資料期間內 MOPS 揭露之 5 起資安相關重大訊息</a:t>
             </a:r>
           </a:p>
         </p:txBody>
@@ -3842,7 +3828,7 @@
                 <a:ea typeface="Microsoft JhengHei"/>
                 <a:cs typeface="Microsoft JhengHei"/>
               </a:rPr>
-              <a:t>6</a:t>
+              <a:t>5</a:t>
             </a:r>
           </a:p>
         </p:txBody>
@@ -3962,7 +3948,7 @@
                 <a:ea typeface="Microsoft JhengHei"/>
                 <a:cs typeface="Microsoft JhengHei"/>
               </a:rPr>
-              <a:t>4</a:t>
+              <a:t>3</a:t>
             </a:r>
           </a:p>
         </p:txBody>
@@ -4134,7 +4120,7 @@
         </p:nvGraphicFramePr>
         <p:xfrm>
           <a:off x="548640" y="2697480"/>
-          <a:ext cx="11064240" cy="2688336"/>
+          <a:ext cx="11064240" cy="2304288"/>
         </p:xfrm>
         <a:graphic>
           <a:graphicData uri="http://schemas.openxmlformats.org/drawingml/2006/table">
@@ -4881,128 +4867,6 @@
                   </a:tcPr>
                 </a:tc>
               </a:tr>
-              <a:tr h="384048">
-                <a:tc>
-                  <a:txBody>
-                    <a:bodyPr/>
-                    <a:lstStyle/>
-                    <a:p>
-                      <a:r>
-                        <a:rPr sz="1150" b="0">
-                          <a:solidFill>
-                            <a:srgbClr val="1A2233"/>
-                          </a:solidFill>
-                          <a:latin typeface="Microsoft JhengHei"/>
-                          <a:ea typeface="Microsoft JhengHei"/>
-                          <a:cs typeface="Microsoft JhengHei"/>
-                        </a:rPr>
-                        <a:t>數字</a:t>
-                      </a:r>
-                    </a:p>
-                  </a:txBody>
-                  <a:tcPr anchor="ctr" marL="73152" marT="9144" marB="9144">
-                    <a:solidFill>
-                      <a:srgbClr val="EEF2F9"/>
-                    </a:solidFill>
-                  </a:tcPr>
-                </a:tc>
-                <a:tc>
-                  <a:txBody>
-                    <a:bodyPr/>
-                    <a:lstStyle/>
-                    <a:p>
-                      <a:r>
-                        <a:rPr sz="1150" b="0">
-                          <a:solidFill>
-                            <a:srgbClr val="1A2233"/>
-                          </a:solidFill>
-                          <a:latin typeface="Microsoft JhengHei"/>
-                          <a:ea typeface="Microsoft JhengHei"/>
-                          <a:cs typeface="Microsoft JhengHei"/>
-                        </a:rPr>
-                        <a:t>5287</a:t>
-                      </a:r>
-                    </a:p>
-                  </a:txBody>
-                  <a:tcPr anchor="ctr" marL="73152" marT="9144" marB="9144">
-                    <a:solidFill>
-                      <a:srgbClr val="EEF2F9"/>
-                    </a:solidFill>
-                  </a:tcPr>
-                </a:tc>
-                <a:tc>
-                  <a:txBody>
-                    <a:bodyPr/>
-                    <a:lstStyle/>
-                    <a:p>
-                      <a:r>
-                        <a:rPr sz="1150" b="0">
-                          <a:solidFill>
-                            <a:srgbClr val="1A2233"/>
-                          </a:solidFill>
-                          <a:latin typeface="Microsoft JhengHei"/>
-                          <a:ea typeface="Microsoft JhengHei"/>
-                          <a:cs typeface="Microsoft JhengHei"/>
-                        </a:rPr>
-                        <a:t>05/26</a:t>
-                      </a:r>
-                    </a:p>
-                  </a:txBody>
-                  <a:tcPr anchor="ctr" marL="73152" marT="9144" marB="9144">
-                    <a:solidFill>
-                      <a:srgbClr val="EEF2F9"/>
-                    </a:solidFill>
-                  </a:tcPr>
-                </a:tc>
-                <a:tc>
-                  <a:txBody>
-                    <a:bodyPr/>
-                    <a:lstStyle/>
-                    <a:p>
-                      <a:r>
-                        <a:rPr sz="1150" b="1">
-                          <a:solidFill>
-                            <a:srgbClr val="27A6C4"/>
-                          </a:solidFill>
-                          <a:latin typeface="Microsoft JhengHei"/>
-                          <a:ea typeface="Microsoft JhengHei"/>
-                          <a:cs typeface="Microsoft JhengHei"/>
-                        </a:rPr>
-                        <a:t>個資外洩</a:t>
-                      </a:r>
-                    </a:p>
-                  </a:txBody>
-                  <a:tcPr anchor="ctr" marL="73152" marT="9144" marB="9144">
-                    <a:solidFill>
-                      <a:srgbClr val="EEF2F9"/>
-                    </a:solidFill>
-                  </a:tcPr>
-                </a:tc>
-                <a:tc>
-                  <a:txBody>
-                    <a:bodyPr/>
-                    <a:lstStyle/>
-                    <a:p>
-                      <a:r>
-                        <a:rPr sz="1150" b="0">
-                          <a:solidFill>
-                            <a:srgbClr val="1A2233"/>
-                          </a:solidFill>
-                          <a:latin typeface="Microsoft JhengHei"/>
-                          <a:ea typeface="Microsoft JhengHei"/>
-                          <a:cs typeface="Microsoft JhengHei"/>
-                        </a:rPr>
-                        <a:t>目前評估對公司營運尚無重大影響。</a:t>
-                      </a:r>
-                    </a:p>
-                  </a:txBody>
-                  <a:tcPr anchor="ctr" marL="73152" marT="9144" marB="9144">
-                    <a:solidFill>
-                      <a:srgbClr val="EEF2F9"/>
-                    </a:solidFill>
-                  </a:tcPr>
-                </a:tc>
-              </a:tr>
             </a:tbl>
           </a:graphicData>
         </a:graphic>
@@ -5698,244 +5562,6 @@
             <a:avLst/>
           </a:prstGeom>
           <a:solidFill>
-            <a:srgbClr val="27A6C4"/>
-          </a:solidFill>
-          <a:ln>
-            <a:noFill/>
-          </a:ln>
-          <a:effectLst/>
-        </p:spPr>
-        <p:style>
-          <a:lnRef idx="1">
-            <a:schemeClr val="accent1"/>
-          </a:lnRef>
-          <a:fillRef idx="3">
-            <a:schemeClr val="accent1"/>
-          </a:fillRef>
-          <a:effectRef idx="2">
-            <a:schemeClr val="accent1"/>
-          </a:effectRef>
-          <a:fontRef idx="minor">
-            <a:schemeClr val="lt1"/>
-          </a:fontRef>
-        </p:style>
-        <p:txBody>
-          <a:bodyPr rtlCol="0" anchor="ctr"/>
-          <a:lstStyle/>
-          <a:p>
-            <a:pPr algn="ctr"/>
-          </a:p>
-        </p:txBody>
-      </p:sp>
-      <p:sp>
-        <p:nvSpPr>
-          <p:cNvPr id="20" name="TextBox 19"/>
-          <p:cNvSpPr txBox="1"/>
-          <p:nvPr/>
-        </p:nvSpPr>
-        <p:spPr>
-          <a:xfrm>
-            <a:off x="5897880" y="4453128"/>
-            <a:ext cx="4206240" cy="365760"/>
-          </a:xfrm>
-          <a:prstGeom prst="rect">
-            <a:avLst/>
-          </a:prstGeom>
-          <a:noFill/>
-        </p:spPr>
-        <p:txBody>
-          <a:bodyPr wrap="square" anchor="ctr" lIns="0" rIns="0" tIns="0" bIns="0">
-            <a:spAutoFit/>
-          </a:bodyPr>
-          <a:lstStyle/>
-          <a:p>
-            <a:pPr algn="l"/>
-            <a:r>
-              <a:rPr sz="1600" b="1">
-                <a:solidFill>
-                  <a:srgbClr val="1A2233"/>
-                </a:solidFill>
-                <a:latin typeface="Microsoft JhengHei"/>
-                <a:ea typeface="Microsoft JhengHei"/>
-                <a:cs typeface="Microsoft JhengHei"/>
-              </a:rPr>
-              <a:t>個資外洩</a:t>
-            </a:r>
-          </a:p>
-        </p:txBody>
-      </p:sp>
-      <p:sp>
-        <p:nvSpPr>
-          <p:cNvPr id="21" name="TextBox 20"/>
-          <p:cNvSpPr txBox="1"/>
-          <p:nvPr/>
-        </p:nvSpPr>
-        <p:spPr>
-          <a:xfrm>
-            <a:off x="10058400" y="4453128"/>
-            <a:ext cx="1463040" cy="365760"/>
-          </a:xfrm>
-          <a:prstGeom prst="rect">
-            <a:avLst/>
-          </a:prstGeom>
-          <a:noFill/>
-        </p:spPr>
-        <p:txBody>
-          <a:bodyPr wrap="square" anchor="ctr" lIns="0" rIns="0" tIns="0" bIns="0">
-            <a:spAutoFit/>
-          </a:bodyPr>
-          <a:lstStyle/>
-          <a:p>
-            <a:pPr algn="r"/>
-            <a:r>
-              <a:rPr sz="1800" b="1">
-                <a:solidFill>
-                  <a:srgbClr val="27A6C4"/>
-                </a:solidFill>
-                <a:latin typeface="Microsoft JhengHei"/>
-                <a:ea typeface="Microsoft JhengHei"/>
-                <a:cs typeface="Microsoft JhengHei"/>
-              </a:rPr>
-              <a:t>1 起</a:t>
-            </a:r>
-          </a:p>
-        </p:txBody>
-      </p:sp>
-      <p:sp>
-        <p:nvSpPr>
-          <p:cNvPr id="22" name="TextBox 21"/>
-          <p:cNvSpPr txBox="1"/>
-          <p:nvPr/>
-        </p:nvSpPr>
-        <p:spPr>
-          <a:xfrm>
-            <a:off x="5897880" y="4846320"/>
-            <a:ext cx="5577840" cy="274320"/>
-          </a:xfrm>
-          <a:prstGeom prst="rect">
-            <a:avLst/>
-          </a:prstGeom>
-          <a:noFill/>
-        </p:spPr>
-        <p:txBody>
-          <a:bodyPr wrap="square" anchor="t" lIns="0" rIns="0" tIns="0" bIns="0">
-            <a:spAutoFit/>
-          </a:bodyPr>
-          <a:lstStyle/>
-          <a:p>
-            <a:pPr algn="l"/>
-            <a:r>
-              <a:rPr sz="1150" b="1">
-                <a:solidFill>
-                  <a:srgbClr val="1A2233"/>
-                </a:solidFill>
-                <a:latin typeface="Microsoft JhengHei"/>
-                <a:ea typeface="Microsoft JhengHei"/>
-                <a:cs typeface="Microsoft JhengHei"/>
-              </a:rPr>
-              <a:t>數字</a:t>
-            </a:r>
-          </a:p>
-        </p:txBody>
-      </p:sp>
-      <p:sp>
-        <p:nvSpPr>
-          <p:cNvPr id="23" name="TextBox 22"/>
-          <p:cNvSpPr txBox="1"/>
-          <p:nvPr/>
-        </p:nvSpPr>
-        <p:spPr>
-          <a:xfrm>
-            <a:off x="5897880" y="5111496"/>
-            <a:ext cx="5669280" cy="329184"/>
-          </a:xfrm>
-          <a:prstGeom prst="rect">
-            <a:avLst/>
-          </a:prstGeom>
-          <a:noFill/>
-        </p:spPr>
-        <p:txBody>
-          <a:bodyPr wrap="square" anchor="t" lIns="0" rIns="0" tIns="0" bIns="0">
-            <a:spAutoFit/>
-          </a:bodyPr>
-          <a:lstStyle/>
-          <a:p>
-            <a:pPr algn="l"/>
-            <a:r>
-              <a:rPr sz="1100" b="0">
-                <a:solidFill>
-                  <a:srgbClr val="5C6679"/>
-                </a:solidFill>
-                <a:latin typeface="Microsoft JhengHei"/>
-                <a:ea typeface="Microsoft JhengHei"/>
-                <a:cs typeface="Microsoft JhengHei"/>
-              </a:rPr>
-              <a:t>源自開發流程或委外廠商，須通報並通知當事人</a:t>
-            </a:r>
-          </a:p>
-        </p:txBody>
-      </p:sp>
-      <p:sp>
-        <p:nvSpPr>
-          <p:cNvPr id="24" name="Rounded Rectangle 23"/>
-          <p:cNvSpPr/>
-          <p:nvPr/>
-        </p:nvSpPr>
-        <p:spPr>
-          <a:xfrm>
-            <a:off x="5669280" y="5669279"/>
-            <a:ext cx="6035040" cy="1170432"/>
-          </a:xfrm>
-          <a:prstGeom prst="roundRect">
-            <a:avLst/>
-          </a:prstGeom>
-          <a:solidFill>
-            <a:srgbClr val="FFFFFF"/>
-          </a:solidFill>
-          <a:ln w="12700">
-            <a:solidFill>
-              <a:srgbClr val="DDE3EE"/>
-            </a:solidFill>
-          </a:ln>
-          <a:effectLst/>
-        </p:spPr>
-        <p:style>
-          <a:lnRef idx="1">
-            <a:schemeClr val="accent1"/>
-          </a:lnRef>
-          <a:fillRef idx="3">
-            <a:schemeClr val="accent1"/>
-          </a:fillRef>
-          <a:effectRef idx="2">
-            <a:schemeClr val="accent1"/>
-          </a:effectRef>
-          <a:fontRef idx="minor">
-            <a:schemeClr val="lt1"/>
-          </a:fontRef>
-        </p:style>
-        <p:txBody>
-          <a:bodyPr rtlCol="0" anchor="ctr"/>
-          <a:lstStyle/>
-          <a:p>
-            <a:pPr algn="ctr"/>
-          </a:p>
-        </p:txBody>
-      </p:sp>
-      <p:sp>
-        <p:nvSpPr>
-          <p:cNvPr id="25" name="Rectangle 24"/>
-          <p:cNvSpPr/>
-          <p:nvPr/>
-        </p:nvSpPr>
-        <p:spPr>
-          <a:xfrm>
-            <a:off x="5669280" y="5669279"/>
-            <a:ext cx="109728" cy="1170432"/>
-          </a:xfrm>
-          <a:prstGeom prst="rect">
-            <a:avLst/>
-          </a:prstGeom>
-          <a:solidFill>
             <a:srgbClr val="5C6679"/>
           </a:solidFill>
           <a:ln>
@@ -5967,13 +5593,13 @@
       </p:sp>
       <p:sp>
         <p:nvSpPr>
-          <p:cNvPr id="26" name="TextBox 25"/>
+          <p:cNvPr id="20" name="TextBox 19"/>
           <p:cNvSpPr txBox="1"/>
           <p:nvPr/>
         </p:nvSpPr>
         <p:spPr>
           <a:xfrm>
-            <a:off x="5897880" y="5779007"/>
+            <a:off x="5897880" y="4453128"/>
             <a:ext cx="4206240" cy="365760"/>
           </a:xfrm>
           <a:prstGeom prst="rect">
@@ -6004,13 +5630,13 @@
       </p:sp>
       <p:sp>
         <p:nvSpPr>
-          <p:cNvPr id="27" name="TextBox 26"/>
+          <p:cNvPr id="21" name="TextBox 20"/>
           <p:cNvSpPr txBox="1"/>
           <p:nvPr/>
         </p:nvSpPr>
         <p:spPr>
           <a:xfrm>
-            <a:off x="10058400" y="5779007"/>
+            <a:off x="10058400" y="4453128"/>
             <a:ext cx="1463040" cy="365760"/>
           </a:xfrm>
           <a:prstGeom prst="rect">
@@ -6041,13 +5667,13 @@
       </p:sp>
       <p:sp>
         <p:nvSpPr>
-          <p:cNvPr id="28" name="TextBox 27"/>
+          <p:cNvPr id="22" name="TextBox 21"/>
           <p:cNvSpPr txBox="1"/>
           <p:nvPr/>
         </p:nvSpPr>
         <p:spPr>
           <a:xfrm>
-            <a:off x="5897880" y="6172199"/>
+            <a:off x="5897880" y="4846320"/>
             <a:ext cx="5577840" cy="274320"/>
           </a:xfrm>
           <a:prstGeom prst="rect">
@@ -6078,13 +5704,13 @@
       </p:sp>
       <p:sp>
         <p:nvSpPr>
-          <p:cNvPr id="29" name="TextBox 28"/>
+          <p:cNvPr id="23" name="TextBox 22"/>
           <p:cNvSpPr txBox="1"/>
           <p:nvPr/>
         </p:nvSpPr>
         <p:spPr>
           <a:xfrm>
-            <a:off x="5897880" y="6437375"/>
+            <a:off x="5897880" y="5111496"/>
             <a:ext cx="5669280" cy="329184"/>
           </a:xfrm>
           <a:prstGeom prst="rect">
@@ -6259,7 +5885,7 @@
         </p:nvGraphicFramePr>
         <p:xfrm>
           <a:off x="548640" y="1600200"/>
-          <a:ext cx="10789920" cy="3200400"/>
+          <a:ext cx="10789920" cy="2743200"/>
         </p:xfrm>
         <a:graphic>
           <a:graphicData uri="http://schemas.openxmlformats.org/drawingml/2006/table">
@@ -7006,128 +6632,6 @@
                   </a:tcPr>
                 </a:tc>
               </a:tr>
-              <a:tr h="457200">
-                <a:tc>
-                  <a:txBody>
-                    <a:bodyPr/>
-                    <a:lstStyle/>
-                    <a:p>
-                      <a:r>
-                        <a:rPr sz="1150" b="0">
-                          <a:solidFill>
-                            <a:srgbClr val="1A2233"/>
-                          </a:solidFill>
-                          <a:latin typeface="Microsoft JhengHei"/>
-                          <a:ea typeface="Microsoft JhengHei"/>
-                          <a:cs typeface="Microsoft JhengHei"/>
-                        </a:rPr>
-                        <a:t>數字</a:t>
-                      </a:r>
-                    </a:p>
-                  </a:txBody>
-                  <a:tcPr anchor="ctr" marL="73152" marT="9144" marB="9144">
-                    <a:solidFill>
-                      <a:srgbClr val="EEF2F9"/>
-                    </a:solidFill>
-                  </a:tcPr>
-                </a:tc>
-                <a:tc>
-                  <a:txBody>
-                    <a:bodyPr/>
-                    <a:lstStyle/>
-                    <a:p>
-                      <a:r>
-                        <a:rPr sz="1150" b="0">
-                          <a:solidFill>
-                            <a:srgbClr val="1A2233"/>
-                          </a:solidFill>
-                          <a:latin typeface="Microsoft JhengHei"/>
-                          <a:ea typeface="Microsoft JhengHei"/>
-                          <a:cs typeface="Microsoft JhengHei"/>
-                        </a:rPr>
-                        <a:t>5287</a:t>
-                      </a:r>
-                    </a:p>
-                  </a:txBody>
-                  <a:tcPr anchor="ctr" marL="73152" marT="9144" marB="9144">
-                    <a:solidFill>
-                      <a:srgbClr val="EEF2F9"/>
-                    </a:solidFill>
-                  </a:tcPr>
-                </a:tc>
-                <a:tc>
-                  <a:txBody>
-                    <a:bodyPr/>
-                    <a:lstStyle/>
-                    <a:p>
-                      <a:r>
-                        <a:rPr sz="1150" b="1">
-                          <a:solidFill>
-                            <a:srgbClr val="27A6C4"/>
-                          </a:solidFill>
-                          <a:latin typeface="Microsoft JhengHei"/>
-                          <a:ea typeface="Microsoft JhengHei"/>
-                          <a:cs typeface="Microsoft JhengHei"/>
-                        </a:rPr>
-                        <a:t>個資外洩</a:t>
-                      </a:r>
-                    </a:p>
-                  </a:txBody>
-                  <a:tcPr anchor="ctr" marL="73152" marT="9144" marB="9144">
-                    <a:solidFill>
-                      <a:srgbClr val="EEF2F9"/>
-                    </a:solidFill>
-                  </a:tcPr>
-                </a:tc>
-                <a:tc>
-                  <a:txBody>
-                    <a:bodyPr/>
-                    <a:lstStyle/>
-                    <a:p>
-                      <a:r>
-                        <a:rPr sz="1150" b="0">
-                          <a:solidFill>
-                            <a:srgbClr val="1A2233"/>
-                          </a:solidFill>
-                          <a:latin typeface="Microsoft JhengHei"/>
-                          <a:ea typeface="Microsoft JhengHei"/>
-                          <a:cs typeface="Microsoft JhengHei"/>
-                        </a:rPr>
-                        <a:t>安侯建業聯合會計師事務所</a:t>
-                      </a:r>
-                    </a:p>
-                  </a:txBody>
-                  <a:tcPr anchor="ctr" marL="73152" marT="9144" marB="9144">
-                    <a:solidFill>
-                      <a:srgbClr val="EEF2F9"/>
-                    </a:solidFill>
-                  </a:tcPr>
-                </a:tc>
-                <a:tc>
-                  <a:txBody>
-                    <a:bodyPr/>
-                    <a:lstStyle/>
-                    <a:p>
-                      <a:r>
-                        <a:rPr sz="1150" b="0">
-                          <a:solidFill>
-                            <a:srgbClr val="1A2233"/>
-                          </a:solidFill>
-                          <a:latin typeface="Microsoft JhengHei"/>
-                          <a:ea typeface="Microsoft JhengHei"/>
-                          <a:cs typeface="Microsoft JhengHei"/>
-                        </a:rPr>
-                        <a:t>羅瑞芝、余聖河</a:t>
-                      </a:r>
-                    </a:p>
-                  </a:txBody>
-                  <a:tcPr anchor="ctr" marL="73152" marT="9144" marB="9144">
-                    <a:solidFill>
-                      <a:srgbClr val="EEF2F9"/>
-                    </a:solidFill>
-                  </a:tcPr>
-                </a:tc>
-              </a:tr>
             </a:tbl>
           </a:graphicData>
         </a:graphic>
@@ -10263,329 +9767,6 @@
                 <a:cs typeface="Microsoft JhengHei"/>
               </a:rPr>
               <a:t>本公司將持續強化網路與資訊安全架構，並擴大資安防禦措施，以提升整體資安防護能力</a:t>
-            </a:r>
-          </a:p>
-        </p:txBody>
-      </p:sp>
-      <p:sp>
-        <p:nvSpPr>
-          <p:cNvPr id="12" name="Rounded Rectangle 11"/>
-          <p:cNvSpPr/>
-          <p:nvPr/>
-        </p:nvSpPr>
-        <p:spPr>
-          <a:xfrm>
-            <a:off x="6172200" y="1554480"/>
-            <a:ext cx="5394960" cy="2148840"/>
-          </a:xfrm>
-          <a:prstGeom prst="roundRect">
-            <a:avLst/>
-          </a:prstGeom>
-          <a:solidFill>
-            <a:srgbClr val="FFFFFF"/>
-          </a:solidFill>
-          <a:ln w="12700">
-            <a:solidFill>
-              <a:srgbClr val="DDE3EE"/>
-            </a:solidFill>
-          </a:ln>
-          <a:effectLst/>
-        </p:spPr>
-        <p:style>
-          <a:lnRef idx="1">
-            <a:schemeClr val="accent1"/>
-          </a:lnRef>
-          <a:fillRef idx="3">
-            <a:schemeClr val="accent1"/>
-          </a:fillRef>
-          <a:effectRef idx="2">
-            <a:schemeClr val="accent1"/>
-          </a:effectRef>
-          <a:fontRef idx="minor">
-            <a:schemeClr val="lt1"/>
-          </a:fontRef>
-        </p:style>
-        <p:txBody>
-          <a:bodyPr rtlCol="0" anchor="ctr"/>
-          <a:lstStyle/>
-          <a:p>
-            <a:pPr algn="ctr"/>
-          </a:p>
-        </p:txBody>
-      </p:sp>
-      <p:sp>
-        <p:nvSpPr>
-          <p:cNvPr id="13" name="Rectangle 12"/>
-          <p:cNvSpPr/>
-          <p:nvPr/>
-        </p:nvSpPr>
-        <p:spPr>
-          <a:xfrm>
-            <a:off x="6172200" y="1554480"/>
-            <a:ext cx="5394960" cy="109728"/>
-          </a:xfrm>
-          <a:prstGeom prst="rect">
-            <a:avLst/>
-          </a:prstGeom>
-          <a:solidFill>
-            <a:srgbClr val="27A6C4"/>
-          </a:solidFill>
-          <a:ln>
-            <a:noFill/>
-          </a:ln>
-          <a:effectLst/>
-        </p:spPr>
-        <p:style>
-          <a:lnRef idx="1">
-            <a:schemeClr val="accent1"/>
-          </a:lnRef>
-          <a:fillRef idx="3">
-            <a:schemeClr val="accent1"/>
-          </a:fillRef>
-          <a:effectRef idx="2">
-            <a:schemeClr val="accent1"/>
-          </a:effectRef>
-          <a:fontRef idx="minor">
-            <a:schemeClr val="lt1"/>
-          </a:fontRef>
-        </p:style>
-        <p:txBody>
-          <a:bodyPr rtlCol="0" anchor="ctr"/>
-          <a:lstStyle/>
-          <a:p>
-            <a:pPr algn="ctr"/>
-          </a:p>
-        </p:txBody>
-      </p:sp>
-      <p:sp>
-        <p:nvSpPr>
-          <p:cNvPr id="14" name="TextBox 13"/>
-          <p:cNvSpPr txBox="1"/>
-          <p:nvPr/>
-        </p:nvSpPr>
-        <p:spPr>
-          <a:xfrm>
-            <a:off x="6400800" y="1773936"/>
-            <a:ext cx="3657600" cy="365760"/>
-          </a:xfrm>
-          <a:prstGeom prst="rect">
-            <a:avLst/>
-          </a:prstGeom>
-          <a:noFill/>
-        </p:spPr>
-        <p:txBody>
-          <a:bodyPr wrap="square" anchor="ctr" lIns="0" rIns="0" tIns="0" bIns="0">
-            <a:spAutoFit/>
-          </a:bodyPr>
-          <a:lstStyle/>
-          <a:p>
-            <a:pPr algn="l"/>
-            <a:r>
-              <a:rPr sz="1600" b="1">
-                <a:solidFill>
-                  <a:srgbClr val="1A2233"/>
-                </a:solidFill>
-                <a:latin typeface="Microsoft JhengHei"/>
-                <a:ea typeface="Microsoft JhengHei"/>
-                <a:cs typeface="Microsoft JhengHei"/>
-              </a:rPr>
-              <a:t>數字 </a:t>
-            </a:r>
-            <a:r>
-              <a:rPr sz="1300" b="0">
-                <a:solidFill>
-                  <a:srgbClr val="5C6679"/>
-                </a:solidFill>
-                <a:latin typeface="Microsoft JhengHei"/>
-                <a:ea typeface="Microsoft JhengHei"/>
-                <a:cs typeface="Microsoft JhengHei"/>
-              </a:rPr>
-              <a:t>5287</a:t>
-            </a:r>
-          </a:p>
-        </p:txBody>
-      </p:sp>
-      <p:sp>
-        <p:nvSpPr>
-          <p:cNvPr id="15" name="Rounded Rectangle 14"/>
-          <p:cNvSpPr/>
-          <p:nvPr/>
-        </p:nvSpPr>
-        <p:spPr>
-          <a:xfrm>
-            <a:off x="10149840" y="1792224"/>
-            <a:ext cx="1234440" cy="347472"/>
-          </a:xfrm>
-          <a:prstGeom prst="roundRect">
-            <a:avLst/>
-          </a:prstGeom>
-          <a:solidFill>
-            <a:srgbClr val="27A6C4"/>
-          </a:solidFill>
-          <a:ln>
-            <a:noFill/>
-          </a:ln>
-          <a:effectLst/>
-        </p:spPr>
-        <p:style>
-          <a:lnRef idx="1">
-            <a:schemeClr val="accent1"/>
-          </a:lnRef>
-          <a:fillRef idx="3">
-            <a:schemeClr val="accent1"/>
-          </a:fillRef>
-          <a:effectRef idx="2">
-            <a:schemeClr val="accent1"/>
-          </a:effectRef>
-          <a:fontRef idx="minor">
-            <a:schemeClr val="lt1"/>
-          </a:fontRef>
-        </p:style>
-        <p:txBody>
-          <a:bodyPr rtlCol="0" anchor="ctr"/>
-          <a:lstStyle/>
-          <a:p>
-            <a:pPr algn="ctr"/>
-          </a:p>
-        </p:txBody>
-      </p:sp>
-      <p:sp>
-        <p:nvSpPr>
-          <p:cNvPr id="16" name="TextBox 15"/>
-          <p:cNvSpPr txBox="1"/>
-          <p:nvPr/>
-        </p:nvSpPr>
-        <p:spPr>
-          <a:xfrm>
-            <a:off x="10149840" y="1792224"/>
-            <a:ext cx="1234440" cy="347472"/>
-          </a:xfrm>
-          <a:prstGeom prst="rect">
-            <a:avLst/>
-          </a:prstGeom>
-          <a:noFill/>
-        </p:spPr>
-        <p:txBody>
-          <a:bodyPr wrap="square" anchor="ctr" lIns="0" rIns="0" tIns="0" bIns="0">
-            <a:spAutoFit/>
-          </a:bodyPr>
-          <a:lstStyle/>
-          <a:p>
-            <a:pPr algn="ctr"/>
-            <a:r>
-              <a:rPr sz="1050" b="1">
-                <a:solidFill>
-                  <a:srgbClr val="FFFFFF"/>
-                </a:solidFill>
-                <a:latin typeface="Microsoft JhengHei"/>
-                <a:ea typeface="Microsoft JhengHei"/>
-                <a:cs typeface="Microsoft JhengHei"/>
-              </a:rPr>
-              <a:t>個資外洩</a:t>
-            </a:r>
-          </a:p>
-        </p:txBody>
-      </p:sp>
-      <p:sp>
-        <p:nvSpPr>
-          <p:cNvPr id="17" name="TextBox 16"/>
-          <p:cNvSpPr txBox="1"/>
-          <p:nvPr/>
-        </p:nvSpPr>
-        <p:spPr>
-          <a:xfrm>
-            <a:off x="6400800" y="2267712"/>
-            <a:ext cx="4937760" cy="640080"/>
-          </a:xfrm>
-          <a:prstGeom prst="rect">
-            <a:avLst/>
-          </a:prstGeom>
-          <a:noFill/>
-        </p:spPr>
-        <p:txBody>
-          <a:bodyPr wrap="square" anchor="t" lIns="0" rIns="0" tIns="0" bIns="0">
-            <a:spAutoFit/>
-          </a:bodyPr>
-          <a:lstStyle/>
-          <a:p>
-            <a:pPr algn="l">
-              <a:lnSpc>
-                <a:spcPts val="1500"/>
-              </a:lnSpc>
-            </a:pPr>
-            <a:r>
-              <a:rPr sz="1100" b="1">
-                <a:solidFill>
-                  <a:srgbClr val="27A6C4"/>
-                </a:solidFill>
-                <a:latin typeface="Microsoft JhengHei"/>
-                <a:ea typeface="Microsoft JhengHei"/>
-                <a:cs typeface="Microsoft JhengHei"/>
-              </a:rPr>
-              <a:t>緣由　</a:t>
-            </a:r>
-            <a:r>
-              <a:rPr sz="1100" b="0">
-                <a:solidFill>
-                  <a:srgbClr val="1A2233"/>
-                </a:solidFill>
-                <a:latin typeface="Microsoft JhengHei"/>
-                <a:ea typeface="Microsoft JhengHei"/>
-                <a:cs typeface="Microsoft JhengHei"/>
-              </a:rPr>
-              <a:t>本公司於115年5月25日進行內部活動網頁開發與測試流程時，因程式碼管理作業設定不當，致部分未去…</a:t>
-            </a:r>
-          </a:p>
-        </p:txBody>
-      </p:sp>
-      <p:sp>
-        <p:nvSpPr>
-          <p:cNvPr id="18" name="TextBox 17"/>
-          <p:cNvSpPr txBox="1"/>
-          <p:nvPr/>
-        </p:nvSpPr>
-        <p:spPr>
-          <a:xfrm>
-            <a:off x="6400800" y="2926080"/>
-            <a:ext cx="4937760" cy="713232"/>
-          </a:xfrm>
-          <a:prstGeom prst="rect">
-            <a:avLst/>
-          </a:prstGeom>
-          <a:noFill/>
-        </p:spPr>
-        <p:txBody>
-          <a:bodyPr wrap="square" anchor="t" lIns="0" rIns="0" tIns="0" bIns="0">
-            <a:spAutoFit/>
-          </a:bodyPr>
-          <a:lstStyle/>
-          <a:p>
-            <a:pPr algn="l">
-              <a:lnSpc>
-                <a:spcPts val="1500"/>
-              </a:lnSpc>
-            </a:pPr>
-            <a:r>
-              <a:rPr sz="1100" b="1">
-                <a:solidFill>
-                  <a:srgbClr val="27A6C4"/>
-                </a:solidFill>
-                <a:latin typeface="Microsoft JhengHei"/>
-                <a:ea typeface="Microsoft JhengHei"/>
-                <a:cs typeface="Microsoft JhengHei"/>
-              </a:rPr>
-              <a:t>因應　</a:t>
-            </a:r>
-            <a:r>
-              <a:rPr sz="1100" b="0">
-                <a:solidFill>
-                  <a:srgbClr val="1A2233"/>
-                </a:solidFill>
-                <a:latin typeface="Microsoft JhengHei"/>
-                <a:ea typeface="Microsoft JhengHei"/>
-                <a:cs typeface="Microsoft JhengHei"/>
-              </a:rPr>
-              <a:t>(1)依據安全軟體發展生命週期(SSDLC)之框架，優化開發流程管制作業(2)落實權限管理及審查，避免未經授權之人員得以…</a:t>
             </a:r>
           </a:p>
         </p:txBody>

--- a/資安事件因應分析.pptx
+++ b/資安事件因應分析.pptx
@@ -185,7 +185,7 @@
                 <c:formatCode>General</c:formatCode>
                 <c:ptCount val="3"/>
                 <c:pt idx="0">
-                  <c:v>1</c:v>
+                  <c:v>2</c:v>
                 </c:pt>
                 <c:pt idx="1">
                   <c:v>2</c:v>
@@ -3528,7 +3528,7 @@
                 <a:ea typeface="Microsoft JhengHei"/>
                 <a:cs typeface="Microsoft JhengHei"/>
               </a:rPr>
-              <a:t>資料期間 2026-05-27 ~ 2026-06-27　｜　MOPS 重大訊息全文檢索　｜　5 家公司</a:t>
+              <a:t>資料期間 2026-06-01 ~ 2026-07-01　｜　MOPS 重大訊息全文檢索　｜　6 家公司</a:t>
             </a:r>
           </a:p>
         </p:txBody>
@@ -3745,7 +3745,7 @@
                 <a:ea typeface="Microsoft JhengHei"/>
                 <a:cs typeface="Microsoft JhengHei"/>
               </a:rPr>
-              <a:t>資料期間內 MOPS 揭露之 5 起資安相關重大訊息</a:t>
+              <a:t>資料期間內 MOPS 揭露之 6 起資安相關重大訊息</a:t>
             </a:r>
           </a:p>
         </p:txBody>
@@ -3828,7 +3828,7 @@
                 <a:ea typeface="Microsoft JhengHei"/>
                 <a:cs typeface="Microsoft JhengHei"/>
               </a:rPr>
-              <a:t>5</a:t>
+              <a:t>6</a:t>
             </a:r>
           </a:p>
         </p:txBody>
@@ -4120,7 +4120,7 @@
         </p:nvGraphicFramePr>
         <p:xfrm>
           <a:off x="548640" y="2697480"/>
-          <a:ext cx="11064240" cy="2304288"/>
+          <a:ext cx="11064240" cy="2688336"/>
         </p:xfrm>
         <a:graphic>
           <a:graphicData uri="http://schemas.openxmlformats.org/drawingml/2006/table">
@@ -4272,7 +4272,7 @@
                           <a:ea typeface="Microsoft JhengHei"/>
                           <a:cs typeface="Microsoft JhengHei"/>
                         </a:rPr>
-                        <a:t>耕興</a:t>
+                        <a:t>網家</a:t>
                       </a:r>
                     </a:p>
                   </a:txBody>
@@ -4296,7 +4296,251 @@
                           <a:ea typeface="Microsoft JhengHei"/>
                           <a:cs typeface="Microsoft JhengHei"/>
                         </a:rPr>
+                        <a:t>8044</a:t>
+                      </a:r>
+                    </a:p>
+                  </a:txBody>
+                  <a:tcPr anchor="ctr" marL="73152" marT="9144" marB="9144">
+                    <a:solidFill>
+                      <a:srgbClr val="FFFFFF"/>
+                    </a:solidFill>
+                  </a:tcPr>
+                </a:tc>
+                <a:tc>
+                  <a:txBody>
+                    <a:bodyPr/>
+                    <a:lstStyle/>
+                    <a:p>
+                      <a:r>
+                        <a:rPr sz="1150" b="0">
+                          <a:solidFill>
+                            <a:srgbClr val="1A2233"/>
+                          </a:solidFill>
+                          <a:latin typeface="Microsoft JhengHei"/>
+                          <a:ea typeface="Microsoft JhengHei"/>
+                          <a:cs typeface="Microsoft JhengHei"/>
+                        </a:rPr>
+                        <a:t>07/01</a:t>
+                      </a:r>
+                    </a:p>
+                  </a:txBody>
+                  <a:tcPr anchor="ctr" marL="73152" marT="9144" marB="9144">
+                    <a:solidFill>
+                      <a:srgbClr val="FFFFFF"/>
+                    </a:solidFill>
+                  </a:tcPr>
+                </a:tc>
+                <a:tc>
+                  <a:txBody>
+                    <a:bodyPr/>
+                    <a:lstStyle/>
+                    <a:p>
+                      <a:r>
+                        <a:rPr sz="1150" b="1">
+                          <a:solidFill>
+                            <a:srgbClr val="E63946"/>
+                          </a:solidFill>
+                          <a:latin typeface="Microsoft JhengHei"/>
+                          <a:ea typeface="Microsoft JhengHei"/>
+                          <a:cs typeface="Microsoft JhengHei"/>
+                        </a:rPr>
+                        <a:t>駭客攻擊</a:t>
+                      </a:r>
+                    </a:p>
+                  </a:txBody>
+                  <a:tcPr anchor="ctr" marL="73152" marT="9144" marB="9144">
+                    <a:solidFill>
+                      <a:srgbClr val="FFFFFF"/>
+                    </a:solidFill>
+                  </a:tcPr>
+                </a:tc>
+                <a:tc>
+                  <a:txBody>
+                    <a:bodyPr/>
+                    <a:lstStyle/>
+                    <a:p>
+                      <a:r>
+                        <a:rPr sz="1150" b="0">
+                          <a:solidFill>
+                            <a:srgbClr val="1A2233"/>
+                          </a:solidFill>
+                          <a:latin typeface="Microsoft JhengHei"/>
+                          <a:ea typeface="Microsoft JhengHei"/>
+                          <a:cs typeface="Microsoft JhengHei"/>
+                        </a:rPr>
+                        <a:t>—</a:t>
+                      </a:r>
+                    </a:p>
+                  </a:txBody>
+                  <a:tcPr anchor="ctr" marL="73152" marT="9144" marB="9144">
+                    <a:solidFill>
+                      <a:srgbClr val="FFFFFF"/>
+                    </a:solidFill>
+                  </a:tcPr>
+                </a:tc>
+              </a:tr>
+              <a:tr h="384048">
+                <a:tc>
+                  <a:txBody>
+                    <a:bodyPr/>
+                    <a:lstStyle/>
+                    <a:p>
+                      <a:r>
+                        <a:rPr sz="1150" b="0">
+                          <a:solidFill>
+                            <a:srgbClr val="1A2233"/>
+                          </a:solidFill>
+                          <a:latin typeface="Microsoft JhengHei"/>
+                          <a:ea typeface="Microsoft JhengHei"/>
+                          <a:cs typeface="Microsoft JhengHei"/>
+                        </a:rPr>
+                        <a:t>耕興</a:t>
+                      </a:r>
+                    </a:p>
+                  </a:txBody>
+                  <a:tcPr anchor="ctr" marL="73152" marT="9144" marB="9144">
+                    <a:solidFill>
+                      <a:srgbClr val="EEF2F9"/>
+                    </a:solidFill>
+                  </a:tcPr>
+                </a:tc>
+                <a:tc>
+                  <a:txBody>
+                    <a:bodyPr/>
+                    <a:lstStyle/>
+                    <a:p>
+                      <a:r>
+                        <a:rPr sz="1150" b="0">
+                          <a:solidFill>
+                            <a:srgbClr val="1A2233"/>
+                          </a:solidFill>
+                          <a:latin typeface="Microsoft JhengHei"/>
+                          <a:ea typeface="Microsoft JhengHei"/>
+                          <a:cs typeface="Microsoft JhengHei"/>
+                        </a:rPr>
                         <a:t>6146</a:t>
+                      </a:r>
+                    </a:p>
+                  </a:txBody>
+                  <a:tcPr anchor="ctr" marL="73152" marT="9144" marB="9144">
+                    <a:solidFill>
+                      <a:srgbClr val="EEF2F9"/>
+                    </a:solidFill>
+                  </a:tcPr>
+                </a:tc>
+                <a:tc>
+                  <a:txBody>
+                    <a:bodyPr/>
+                    <a:lstStyle/>
+                    <a:p>
+                      <a:r>
+                        <a:rPr sz="1150" b="0">
+                          <a:solidFill>
+                            <a:srgbClr val="1A2233"/>
+                          </a:solidFill>
+                          <a:latin typeface="Microsoft JhengHei"/>
+                          <a:ea typeface="Microsoft JhengHei"/>
+                          <a:cs typeface="Microsoft JhengHei"/>
+                        </a:rPr>
+                        <a:t>06/22</a:t>
+                      </a:r>
+                    </a:p>
+                  </a:txBody>
+                  <a:tcPr anchor="ctr" marL="73152" marT="9144" marB="9144">
+                    <a:solidFill>
+                      <a:srgbClr val="EEF2F9"/>
+                    </a:solidFill>
+                  </a:tcPr>
+                </a:tc>
+                <a:tc>
+                  <a:txBody>
+                    <a:bodyPr/>
+                    <a:lstStyle/>
+                    <a:p>
+                      <a:r>
+                        <a:rPr sz="1150" b="1">
+                          <a:solidFill>
+                            <a:srgbClr val="5C6679"/>
+                          </a:solidFill>
+                          <a:latin typeface="Microsoft JhengHei"/>
+                          <a:ea typeface="Microsoft JhengHei"/>
+                          <a:cs typeface="Microsoft JhengHei"/>
+                        </a:rPr>
+                        <a:t>其他</a:t>
+                      </a:r>
+                    </a:p>
+                  </a:txBody>
+                  <a:tcPr anchor="ctr" marL="73152" marT="9144" marB="9144">
+                    <a:solidFill>
+                      <a:srgbClr val="EEF2F9"/>
+                    </a:solidFill>
+                  </a:tcPr>
+                </a:tc>
+                <a:tc>
+                  <a:txBody>
+                    <a:bodyPr/>
+                    <a:lstStyle/>
+                    <a:p>
+                      <a:r>
+                        <a:rPr sz="1150" b="0">
+                          <a:solidFill>
+                            <a:srgbClr val="1A2233"/>
+                          </a:solidFill>
+                          <a:latin typeface="Microsoft JhengHei"/>
+                          <a:ea typeface="Microsoft JhengHei"/>
+                          <a:cs typeface="Microsoft JhengHei"/>
+                        </a:rPr>
+                        <a:t>受影響之資料檔案留有備份，不影響公司營運、業務進行等。</a:t>
+                      </a:r>
+                    </a:p>
+                  </a:txBody>
+                  <a:tcPr anchor="ctr" marL="73152" marT="9144" marB="9144">
+                    <a:solidFill>
+                      <a:srgbClr val="EEF2F9"/>
+                    </a:solidFill>
+                  </a:tcPr>
+                </a:tc>
+              </a:tr>
+              <a:tr h="384048">
+                <a:tc>
+                  <a:txBody>
+                    <a:bodyPr/>
+                    <a:lstStyle/>
+                    <a:p>
+                      <a:r>
+                        <a:rPr sz="1150" b="0">
+                          <a:solidFill>
+                            <a:srgbClr val="1A2233"/>
+                          </a:solidFill>
+                          <a:latin typeface="Microsoft JhengHei"/>
+                          <a:ea typeface="Microsoft JhengHei"/>
+                          <a:cs typeface="Microsoft JhengHei"/>
+                        </a:rPr>
+                        <a:t>易發</a:t>
+                      </a:r>
+                    </a:p>
+                  </a:txBody>
+                  <a:tcPr anchor="ctr" marL="73152" marT="9144" marB="9144">
+                    <a:solidFill>
+                      <a:srgbClr val="FFFFFF"/>
+                    </a:solidFill>
+                  </a:tcPr>
+                </a:tc>
+                <a:tc>
+                  <a:txBody>
+                    <a:bodyPr/>
+                    <a:lstStyle/>
+                    <a:p>
+                      <a:r>
+                        <a:rPr sz="1150" b="0">
+                          <a:solidFill>
+                            <a:srgbClr val="1A2233"/>
+                          </a:solidFill>
+                          <a:latin typeface="Microsoft JhengHei"/>
+                          <a:ea typeface="Microsoft JhengHei"/>
+                          <a:cs typeface="Microsoft JhengHei"/>
+                        </a:rPr>
+                        <a:t>6425</a:t>
                       </a:r>
                     </a:p>
                   </a:txBody>
@@ -4338,13 +4582,13 @@
                       <a:r>
                         <a:rPr sz="1150" b="1">
                           <a:solidFill>
-                            <a:srgbClr val="5C6679"/>
+                            <a:srgbClr val="F4A261"/>
                           </a:solidFill>
                           <a:latin typeface="Microsoft JhengHei"/>
                           <a:ea typeface="Microsoft JhengHei"/>
                           <a:cs typeface="Microsoft JhengHei"/>
                         </a:rPr>
-                        <a:t>其他</a:t>
+                        <a:t>勒索病毒/加密</a:t>
                       </a:r>
                     </a:p>
                   </a:txBody>
@@ -4368,7 +4612,7 @@
                           <a:ea typeface="Microsoft JhengHei"/>
                           <a:cs typeface="Microsoft JhengHei"/>
                         </a:rPr>
-                        <a:t>受影響之資料檔案留有備份，不影響公司營運、業務進行等。</a:t>
+                        <a:t>目前初步評估對公司運作無重大影響。</a:t>
                       </a:r>
                     </a:p>
                   </a:txBody>
@@ -4394,7 +4638,7 @@
                           <a:ea typeface="Microsoft JhengHei"/>
                           <a:cs typeface="Microsoft JhengHei"/>
                         </a:rPr>
-                        <a:t>易發</a:t>
+                        <a:t>尼得科超眾</a:t>
                       </a:r>
                     </a:p>
                   </a:txBody>
@@ -4418,7 +4662,7 @@
                           <a:ea typeface="Microsoft JhengHei"/>
                           <a:cs typeface="Microsoft JhengHei"/>
                         </a:rPr>
-                        <a:t>6425</a:t>
+                        <a:t>6230</a:t>
                       </a:r>
                     </a:p>
                   </a:txBody>
@@ -4490,7 +4734,7 @@
                           <a:ea typeface="Microsoft JhengHei"/>
                           <a:cs typeface="Microsoft JhengHei"/>
                         </a:rPr>
-                        <a:t>目前初步評估對公司運作無重大影響。</a:t>
+                        <a:t>目前受影響之系統正陸續復原中，對公司整體營運及財務之影響程度尚在評估…</a:t>
                       </a:r>
                     </a:p>
                   </a:txBody>
@@ -4516,7 +4760,7 @@
                           <a:ea typeface="Microsoft JhengHei"/>
                           <a:cs typeface="Microsoft JhengHei"/>
                         </a:rPr>
-                        <a:t>尼得科超眾</a:t>
+                        <a:t>上福</a:t>
                       </a:r>
                     </a:p>
                   </a:txBody>
@@ -4540,7 +4784,7 @@
                           <a:ea typeface="Microsoft JhengHei"/>
                           <a:cs typeface="Microsoft JhengHei"/>
                         </a:rPr>
-                        <a:t>6230</a:t>
+                        <a:t>6128</a:t>
                       </a:r>
                     </a:p>
                   </a:txBody>
@@ -4564,7 +4808,7 @@
                           <a:ea typeface="Microsoft JhengHei"/>
                           <a:cs typeface="Microsoft JhengHei"/>
                         </a:rPr>
-                        <a:t>06/22</a:t>
+                        <a:t>06/16</a:t>
                       </a:r>
                     </a:p>
                   </a:txBody>
@@ -4582,13 +4826,13 @@
                       <a:r>
                         <a:rPr sz="1150" b="1">
                           <a:solidFill>
-                            <a:srgbClr val="F4A261"/>
+                            <a:srgbClr val="5C6679"/>
                           </a:solidFill>
                           <a:latin typeface="Microsoft JhengHei"/>
                           <a:ea typeface="Microsoft JhengHei"/>
                           <a:cs typeface="Microsoft JhengHei"/>
                         </a:rPr>
-                        <a:t>勒索病毒/加密</a:t>
+                        <a:t>其他</a:t>
                       </a:r>
                     </a:p>
                   </a:txBody>
@@ -4612,7 +4856,7 @@
                           <a:ea typeface="Microsoft JhengHei"/>
                           <a:cs typeface="Microsoft JhengHei"/>
                         </a:rPr>
-                        <a:t>目前受影響之系統正陸續復原中，對公司整體營運及財務之影響程度尚在評估…</a:t>
+                        <a:t>目前評估該事件對公司營運造成暫停出貨的影響，現階段出貨已陸續恢復中。</a:t>
                       </a:r>
                     </a:p>
                   </a:txBody>
@@ -4638,7 +4882,7 @@
                           <a:ea typeface="Microsoft JhengHei"/>
                           <a:cs typeface="Microsoft JhengHei"/>
                         </a:rPr>
-                        <a:t>上福</a:t>
+                        <a:t>巨路</a:t>
                       </a:r>
                     </a:p>
                   </a:txBody>
@@ -4662,7 +4906,7 @@
                           <a:ea typeface="Microsoft JhengHei"/>
                           <a:cs typeface="Microsoft JhengHei"/>
                         </a:rPr>
-                        <a:t>6128</a:t>
+                        <a:t>6192</a:t>
                       </a:r>
                     </a:p>
                   </a:txBody>
@@ -4686,7 +4930,7 @@
                           <a:ea typeface="Microsoft JhengHei"/>
                           <a:cs typeface="Microsoft JhengHei"/>
                         </a:rPr>
-                        <a:t>06/16</a:t>
+                        <a:t>06/02</a:t>
                       </a:r>
                     </a:p>
                   </a:txBody>
@@ -4704,13 +4948,13 @@
                       <a:r>
                         <a:rPr sz="1150" b="1">
                           <a:solidFill>
-                            <a:srgbClr val="5C6679"/>
+                            <a:srgbClr val="E63946"/>
                           </a:solidFill>
                           <a:latin typeface="Microsoft JhengHei"/>
                           <a:ea typeface="Microsoft JhengHei"/>
                           <a:cs typeface="Microsoft JhengHei"/>
                         </a:rPr>
-                        <a:t>其他</a:t>
+                        <a:t>駭客攻擊</a:t>
                       </a:r>
                     </a:p>
                   </a:txBody>
@@ -4734,135 +4978,13 @@
                           <a:ea typeface="Microsoft JhengHei"/>
                           <a:cs typeface="Microsoft JhengHei"/>
                         </a:rPr>
-                        <a:t>目前評估該事件對公司營運造成暫停出貨的影響，現階段出貨已陸續恢復中。</a:t>
+                        <a:t>目前評估對公司營運無重大影響，亦未發現個資或機密資料外洩之情事。</a:t>
                       </a:r>
                     </a:p>
                   </a:txBody>
                   <a:tcPr anchor="ctr" marL="73152" marT="9144" marB="9144">
                     <a:solidFill>
                       <a:srgbClr val="EEF2F9"/>
-                    </a:solidFill>
-                  </a:tcPr>
-                </a:tc>
-              </a:tr>
-              <a:tr h="384048">
-                <a:tc>
-                  <a:txBody>
-                    <a:bodyPr/>
-                    <a:lstStyle/>
-                    <a:p>
-                      <a:r>
-                        <a:rPr sz="1150" b="0">
-                          <a:solidFill>
-                            <a:srgbClr val="1A2233"/>
-                          </a:solidFill>
-                          <a:latin typeface="Microsoft JhengHei"/>
-                          <a:ea typeface="Microsoft JhengHei"/>
-                          <a:cs typeface="Microsoft JhengHei"/>
-                        </a:rPr>
-                        <a:t>巨路</a:t>
-                      </a:r>
-                    </a:p>
-                  </a:txBody>
-                  <a:tcPr anchor="ctr" marL="73152" marT="9144" marB="9144">
-                    <a:solidFill>
-                      <a:srgbClr val="FFFFFF"/>
-                    </a:solidFill>
-                  </a:tcPr>
-                </a:tc>
-                <a:tc>
-                  <a:txBody>
-                    <a:bodyPr/>
-                    <a:lstStyle/>
-                    <a:p>
-                      <a:r>
-                        <a:rPr sz="1150" b="0">
-                          <a:solidFill>
-                            <a:srgbClr val="1A2233"/>
-                          </a:solidFill>
-                          <a:latin typeface="Microsoft JhengHei"/>
-                          <a:ea typeface="Microsoft JhengHei"/>
-                          <a:cs typeface="Microsoft JhengHei"/>
-                        </a:rPr>
-                        <a:t>6192</a:t>
-                      </a:r>
-                    </a:p>
-                  </a:txBody>
-                  <a:tcPr anchor="ctr" marL="73152" marT="9144" marB="9144">
-                    <a:solidFill>
-                      <a:srgbClr val="FFFFFF"/>
-                    </a:solidFill>
-                  </a:tcPr>
-                </a:tc>
-                <a:tc>
-                  <a:txBody>
-                    <a:bodyPr/>
-                    <a:lstStyle/>
-                    <a:p>
-                      <a:r>
-                        <a:rPr sz="1150" b="0">
-                          <a:solidFill>
-                            <a:srgbClr val="1A2233"/>
-                          </a:solidFill>
-                          <a:latin typeface="Microsoft JhengHei"/>
-                          <a:ea typeface="Microsoft JhengHei"/>
-                          <a:cs typeface="Microsoft JhengHei"/>
-                        </a:rPr>
-                        <a:t>06/02</a:t>
-                      </a:r>
-                    </a:p>
-                  </a:txBody>
-                  <a:tcPr anchor="ctr" marL="73152" marT="9144" marB="9144">
-                    <a:solidFill>
-                      <a:srgbClr val="FFFFFF"/>
-                    </a:solidFill>
-                  </a:tcPr>
-                </a:tc>
-                <a:tc>
-                  <a:txBody>
-                    <a:bodyPr/>
-                    <a:lstStyle/>
-                    <a:p>
-                      <a:r>
-                        <a:rPr sz="1150" b="1">
-                          <a:solidFill>
-                            <a:srgbClr val="E63946"/>
-                          </a:solidFill>
-                          <a:latin typeface="Microsoft JhengHei"/>
-                          <a:ea typeface="Microsoft JhengHei"/>
-                          <a:cs typeface="Microsoft JhengHei"/>
-                        </a:rPr>
-                        <a:t>駭客攻擊</a:t>
-                      </a:r>
-                    </a:p>
-                  </a:txBody>
-                  <a:tcPr anchor="ctr" marL="73152" marT="9144" marB="9144">
-                    <a:solidFill>
-                      <a:srgbClr val="FFFFFF"/>
-                    </a:solidFill>
-                  </a:tcPr>
-                </a:tc>
-                <a:tc>
-                  <a:txBody>
-                    <a:bodyPr/>
-                    <a:lstStyle/>
-                    <a:p>
-                      <a:r>
-                        <a:rPr sz="1150" b="0">
-                          <a:solidFill>
-                            <a:srgbClr val="1A2233"/>
-                          </a:solidFill>
-                          <a:latin typeface="Microsoft JhengHei"/>
-                          <a:ea typeface="Microsoft JhengHei"/>
-                          <a:cs typeface="Microsoft JhengHei"/>
-                        </a:rPr>
-                        <a:t>目前評估對公司營運無重大影響，亦未發現個資或機密資料外洩之情事。</a:t>
-                      </a:r>
-                    </a:p>
-                  </a:txBody>
-                  <a:tcPr anchor="ctr" marL="73152" marT="9144" marB="9144">
-                    <a:solidFill>
-                      <a:srgbClr val="FFFFFF"/>
                     </a:solidFill>
                   </a:tcPr>
                 </a:tc>
@@ -5184,7 +5306,7 @@
                 <a:ea typeface="Microsoft JhengHei"/>
                 <a:cs typeface="Microsoft JhengHei"/>
               </a:rPr>
-              <a:t>1 起</a:t>
+              <a:t>2 起</a:t>
             </a:r>
           </a:p>
         </p:txBody>
@@ -5221,7 +5343,7 @@
                 <a:ea typeface="Microsoft JhengHei"/>
                 <a:cs typeface="Microsoft JhengHei"/>
               </a:rPr>
-              <a:t>巨路</a:t>
+              <a:t>網家、巨路</a:t>
             </a:r>
           </a:p>
         </p:txBody>
@@ -5885,7 +6007,7 @@
         </p:nvGraphicFramePr>
         <p:xfrm>
           <a:off x="548640" y="1600200"/>
-          <a:ext cx="10789920" cy="2743200"/>
+          <a:ext cx="10789920" cy="3200400"/>
         </p:xfrm>
         <a:graphic>
           <a:graphicData uri="http://schemas.openxmlformats.org/drawingml/2006/table">
@@ -6037,7 +6159,7 @@
                           <a:ea typeface="Microsoft JhengHei"/>
                           <a:cs typeface="Microsoft JhengHei"/>
                         </a:rPr>
-                        <a:t>耕興</a:t>
+                        <a:t>網家</a:t>
                       </a:r>
                     </a:p>
                   </a:txBody>
@@ -6061,7 +6183,495 @@
                           <a:ea typeface="Microsoft JhengHei"/>
                           <a:cs typeface="Microsoft JhengHei"/>
                         </a:rPr>
+                        <a:t>8044</a:t>
+                      </a:r>
+                    </a:p>
+                  </a:txBody>
+                  <a:tcPr anchor="ctr" marL="73152" marT="9144" marB="9144">
+                    <a:solidFill>
+                      <a:srgbClr val="FFFFFF"/>
+                    </a:solidFill>
+                  </a:tcPr>
+                </a:tc>
+                <a:tc>
+                  <a:txBody>
+                    <a:bodyPr/>
+                    <a:lstStyle/>
+                    <a:p>
+                      <a:r>
+                        <a:rPr sz="1150" b="1">
+                          <a:solidFill>
+                            <a:srgbClr val="E63946"/>
+                          </a:solidFill>
+                          <a:latin typeface="Microsoft JhengHei"/>
+                          <a:ea typeface="Microsoft JhengHei"/>
+                          <a:cs typeface="Microsoft JhengHei"/>
+                        </a:rPr>
+                        <a:t>駭客攻擊</a:t>
+                      </a:r>
+                    </a:p>
+                  </a:txBody>
+                  <a:tcPr anchor="ctr" marL="73152" marT="9144" marB="9144">
+                    <a:solidFill>
+                      <a:srgbClr val="FFFFFF"/>
+                    </a:solidFill>
+                  </a:tcPr>
+                </a:tc>
+                <a:tc>
+                  <a:txBody>
+                    <a:bodyPr/>
+                    <a:lstStyle/>
+                    <a:p>
+                      <a:r>
+                        <a:rPr sz="1150" b="0">
+                          <a:solidFill>
+                            <a:srgbClr val="1A2233"/>
+                          </a:solidFill>
+                          <a:latin typeface="Microsoft JhengHei"/>
+                          <a:ea typeface="Microsoft JhengHei"/>
+                          <a:cs typeface="Microsoft JhengHei"/>
+                        </a:rPr>
+                        <a:t>資誠聯合會計師事務所</a:t>
+                      </a:r>
+                    </a:p>
+                  </a:txBody>
+                  <a:tcPr anchor="ctr" marL="73152" marT="9144" marB="9144">
+                    <a:solidFill>
+                      <a:srgbClr val="FFFFFF"/>
+                    </a:solidFill>
+                  </a:tcPr>
+                </a:tc>
+                <a:tc>
+                  <a:txBody>
+                    <a:bodyPr/>
+                    <a:lstStyle/>
+                    <a:p>
+                      <a:r>
+                        <a:rPr sz="1150" b="0">
+                          <a:solidFill>
+                            <a:srgbClr val="1A2233"/>
+                          </a:solidFill>
+                          <a:latin typeface="Microsoft JhengHei"/>
+                          <a:ea typeface="Microsoft JhengHei"/>
+                          <a:cs typeface="Microsoft JhengHei"/>
+                        </a:rPr>
+                        <a:t>廖容翎、梁嬋女</a:t>
+                      </a:r>
+                    </a:p>
+                  </a:txBody>
+                  <a:tcPr anchor="ctr" marL="73152" marT="9144" marB="9144">
+                    <a:solidFill>
+                      <a:srgbClr val="FFFFFF"/>
+                    </a:solidFill>
+                  </a:tcPr>
+                </a:tc>
+              </a:tr>
+              <a:tr h="457200">
+                <a:tc>
+                  <a:txBody>
+                    <a:bodyPr/>
+                    <a:lstStyle/>
+                    <a:p>
+                      <a:r>
+                        <a:rPr sz="1150" b="0">
+                          <a:solidFill>
+                            <a:srgbClr val="1A2233"/>
+                          </a:solidFill>
+                          <a:latin typeface="Microsoft JhengHei"/>
+                          <a:ea typeface="Microsoft JhengHei"/>
+                          <a:cs typeface="Microsoft JhengHei"/>
+                        </a:rPr>
+                        <a:t>耕興</a:t>
+                      </a:r>
+                    </a:p>
+                  </a:txBody>
+                  <a:tcPr anchor="ctr" marL="73152" marT="9144" marB="9144">
+                    <a:solidFill>
+                      <a:srgbClr val="EEF2F9"/>
+                    </a:solidFill>
+                  </a:tcPr>
+                </a:tc>
+                <a:tc>
+                  <a:txBody>
+                    <a:bodyPr/>
+                    <a:lstStyle/>
+                    <a:p>
+                      <a:r>
+                        <a:rPr sz="1150" b="0">
+                          <a:solidFill>
+                            <a:srgbClr val="1A2233"/>
+                          </a:solidFill>
+                          <a:latin typeface="Microsoft JhengHei"/>
+                          <a:ea typeface="Microsoft JhengHei"/>
+                          <a:cs typeface="Microsoft JhengHei"/>
+                        </a:rPr>
                         <a:t>6146</a:t>
+                      </a:r>
+                    </a:p>
+                  </a:txBody>
+                  <a:tcPr anchor="ctr" marL="73152" marT="9144" marB="9144">
+                    <a:solidFill>
+                      <a:srgbClr val="EEF2F9"/>
+                    </a:solidFill>
+                  </a:tcPr>
+                </a:tc>
+                <a:tc>
+                  <a:txBody>
+                    <a:bodyPr/>
+                    <a:lstStyle/>
+                    <a:p>
+                      <a:r>
+                        <a:rPr sz="1150" b="1">
+                          <a:solidFill>
+                            <a:srgbClr val="5C6679"/>
+                          </a:solidFill>
+                          <a:latin typeface="Microsoft JhengHei"/>
+                          <a:ea typeface="Microsoft JhengHei"/>
+                          <a:cs typeface="Microsoft JhengHei"/>
+                        </a:rPr>
+                        <a:t>其他</a:t>
+                      </a:r>
+                    </a:p>
+                  </a:txBody>
+                  <a:tcPr anchor="ctr" marL="73152" marT="9144" marB="9144">
+                    <a:solidFill>
+                      <a:srgbClr val="EEF2F9"/>
+                    </a:solidFill>
+                  </a:tcPr>
+                </a:tc>
+                <a:tc>
+                  <a:txBody>
+                    <a:bodyPr/>
+                    <a:lstStyle/>
+                    <a:p>
+                      <a:r>
+                        <a:rPr sz="1150" b="0">
+                          <a:solidFill>
+                            <a:srgbClr val="1A2233"/>
+                          </a:solidFill>
+                          <a:latin typeface="Microsoft JhengHei"/>
+                          <a:ea typeface="Microsoft JhengHei"/>
+                          <a:cs typeface="Microsoft JhengHei"/>
+                        </a:rPr>
+                        <a:t>勤業眾信聯合會計師事務所</a:t>
+                      </a:r>
+                    </a:p>
+                  </a:txBody>
+                  <a:tcPr anchor="ctr" marL="73152" marT="9144" marB="9144">
+                    <a:solidFill>
+                      <a:srgbClr val="EEF2F9"/>
+                    </a:solidFill>
+                  </a:tcPr>
+                </a:tc>
+                <a:tc>
+                  <a:txBody>
+                    <a:bodyPr/>
+                    <a:lstStyle/>
+                    <a:p>
+                      <a:r>
+                        <a:rPr sz="1150" b="0">
+                          <a:solidFill>
+                            <a:srgbClr val="1A2233"/>
+                          </a:solidFill>
+                          <a:latin typeface="Microsoft JhengHei"/>
+                          <a:ea typeface="Microsoft JhengHei"/>
+                          <a:cs typeface="Microsoft JhengHei"/>
+                        </a:rPr>
+                        <a:t>黃毅民、陳文香</a:t>
+                      </a:r>
+                    </a:p>
+                  </a:txBody>
+                  <a:tcPr anchor="ctr" marL="73152" marT="9144" marB="9144">
+                    <a:solidFill>
+                      <a:srgbClr val="EEF2F9"/>
+                    </a:solidFill>
+                  </a:tcPr>
+                </a:tc>
+              </a:tr>
+              <a:tr h="457200">
+                <a:tc>
+                  <a:txBody>
+                    <a:bodyPr/>
+                    <a:lstStyle/>
+                    <a:p>
+                      <a:r>
+                        <a:rPr sz="1150" b="0">
+                          <a:solidFill>
+                            <a:srgbClr val="1A2233"/>
+                          </a:solidFill>
+                          <a:latin typeface="Microsoft JhengHei"/>
+                          <a:ea typeface="Microsoft JhengHei"/>
+                          <a:cs typeface="Microsoft JhengHei"/>
+                        </a:rPr>
+                        <a:t>易發</a:t>
+                      </a:r>
+                    </a:p>
+                  </a:txBody>
+                  <a:tcPr anchor="ctr" marL="73152" marT="9144" marB="9144">
+                    <a:solidFill>
+                      <a:srgbClr val="FFFFFF"/>
+                    </a:solidFill>
+                  </a:tcPr>
+                </a:tc>
+                <a:tc>
+                  <a:txBody>
+                    <a:bodyPr/>
+                    <a:lstStyle/>
+                    <a:p>
+                      <a:r>
+                        <a:rPr sz="1150" b="0">
+                          <a:solidFill>
+                            <a:srgbClr val="1A2233"/>
+                          </a:solidFill>
+                          <a:latin typeface="Microsoft JhengHei"/>
+                          <a:ea typeface="Microsoft JhengHei"/>
+                          <a:cs typeface="Microsoft JhengHei"/>
+                        </a:rPr>
+                        <a:t>6425</a:t>
+                      </a:r>
+                    </a:p>
+                  </a:txBody>
+                  <a:tcPr anchor="ctr" marL="73152" marT="9144" marB="9144">
+                    <a:solidFill>
+                      <a:srgbClr val="FFFFFF"/>
+                    </a:solidFill>
+                  </a:tcPr>
+                </a:tc>
+                <a:tc>
+                  <a:txBody>
+                    <a:bodyPr/>
+                    <a:lstStyle/>
+                    <a:p>
+                      <a:r>
+                        <a:rPr sz="1150" b="1">
+                          <a:solidFill>
+                            <a:srgbClr val="F4A261"/>
+                          </a:solidFill>
+                          <a:latin typeface="Microsoft JhengHei"/>
+                          <a:ea typeface="Microsoft JhengHei"/>
+                          <a:cs typeface="Microsoft JhengHei"/>
+                        </a:rPr>
+                        <a:t>勒索病毒/加密</a:t>
+                      </a:r>
+                    </a:p>
+                  </a:txBody>
+                  <a:tcPr anchor="ctr" marL="73152" marT="9144" marB="9144">
+                    <a:solidFill>
+                      <a:srgbClr val="FFFFFF"/>
+                    </a:solidFill>
+                  </a:tcPr>
+                </a:tc>
+                <a:tc>
+                  <a:txBody>
+                    <a:bodyPr/>
+                    <a:lstStyle/>
+                    <a:p>
+                      <a:r>
+                        <a:rPr sz="1150" b="0">
+                          <a:solidFill>
+                            <a:srgbClr val="1A2233"/>
+                          </a:solidFill>
+                          <a:latin typeface="Microsoft JhengHei"/>
+                          <a:ea typeface="Microsoft JhengHei"/>
+                          <a:cs typeface="Microsoft JhengHei"/>
+                        </a:rPr>
+                        <a:t>勤業眾信聯合會計師事務所</a:t>
+                      </a:r>
+                    </a:p>
+                  </a:txBody>
+                  <a:tcPr anchor="ctr" marL="73152" marT="9144" marB="9144">
+                    <a:solidFill>
+                      <a:srgbClr val="FFFFFF"/>
+                    </a:solidFill>
+                  </a:tcPr>
+                </a:tc>
+                <a:tc>
+                  <a:txBody>
+                    <a:bodyPr/>
+                    <a:lstStyle/>
+                    <a:p>
+                      <a:r>
+                        <a:rPr sz="1150" b="0">
+                          <a:solidFill>
+                            <a:srgbClr val="1A2233"/>
+                          </a:solidFill>
+                          <a:latin typeface="Microsoft JhengHei"/>
+                          <a:ea typeface="Microsoft JhengHei"/>
+                          <a:cs typeface="Microsoft JhengHei"/>
+                        </a:rPr>
+                        <a:t>張至誼、洪國田</a:t>
+                      </a:r>
+                    </a:p>
+                  </a:txBody>
+                  <a:tcPr anchor="ctr" marL="73152" marT="9144" marB="9144">
+                    <a:solidFill>
+                      <a:srgbClr val="FFFFFF"/>
+                    </a:solidFill>
+                  </a:tcPr>
+                </a:tc>
+              </a:tr>
+              <a:tr h="457200">
+                <a:tc>
+                  <a:txBody>
+                    <a:bodyPr/>
+                    <a:lstStyle/>
+                    <a:p>
+                      <a:r>
+                        <a:rPr sz="1150" b="0">
+                          <a:solidFill>
+                            <a:srgbClr val="1A2233"/>
+                          </a:solidFill>
+                          <a:latin typeface="Microsoft JhengHei"/>
+                          <a:ea typeface="Microsoft JhengHei"/>
+                          <a:cs typeface="Microsoft JhengHei"/>
+                        </a:rPr>
+                        <a:t>尼得科超眾</a:t>
+                      </a:r>
+                    </a:p>
+                  </a:txBody>
+                  <a:tcPr anchor="ctr" marL="73152" marT="9144" marB="9144">
+                    <a:solidFill>
+                      <a:srgbClr val="EEF2F9"/>
+                    </a:solidFill>
+                  </a:tcPr>
+                </a:tc>
+                <a:tc>
+                  <a:txBody>
+                    <a:bodyPr/>
+                    <a:lstStyle/>
+                    <a:p>
+                      <a:r>
+                        <a:rPr sz="1150" b="0">
+                          <a:solidFill>
+                            <a:srgbClr val="1A2233"/>
+                          </a:solidFill>
+                          <a:latin typeface="Microsoft JhengHei"/>
+                          <a:ea typeface="Microsoft JhengHei"/>
+                          <a:cs typeface="Microsoft JhengHei"/>
+                        </a:rPr>
+                        <a:t>6230</a:t>
+                      </a:r>
+                    </a:p>
+                  </a:txBody>
+                  <a:tcPr anchor="ctr" marL="73152" marT="9144" marB="9144">
+                    <a:solidFill>
+                      <a:srgbClr val="EEF2F9"/>
+                    </a:solidFill>
+                  </a:tcPr>
+                </a:tc>
+                <a:tc>
+                  <a:txBody>
+                    <a:bodyPr/>
+                    <a:lstStyle/>
+                    <a:p>
+                      <a:r>
+                        <a:rPr sz="1150" b="1">
+                          <a:solidFill>
+                            <a:srgbClr val="F4A261"/>
+                          </a:solidFill>
+                          <a:latin typeface="Microsoft JhengHei"/>
+                          <a:ea typeface="Microsoft JhengHei"/>
+                          <a:cs typeface="Microsoft JhengHei"/>
+                        </a:rPr>
+                        <a:t>勒索病毒/加密</a:t>
+                      </a:r>
+                    </a:p>
+                  </a:txBody>
+                  <a:tcPr anchor="ctr" marL="73152" marT="9144" marB="9144">
+                    <a:solidFill>
+                      <a:srgbClr val="EEF2F9"/>
+                    </a:solidFill>
+                  </a:tcPr>
+                </a:tc>
+                <a:tc>
+                  <a:txBody>
+                    <a:bodyPr/>
+                    <a:lstStyle/>
+                    <a:p>
+                      <a:r>
+                        <a:rPr sz="1150" b="0">
+                          <a:solidFill>
+                            <a:srgbClr val="1A2233"/>
+                          </a:solidFill>
+                          <a:latin typeface="Microsoft JhengHei"/>
+                          <a:ea typeface="Microsoft JhengHei"/>
+                          <a:cs typeface="Microsoft JhengHei"/>
+                        </a:rPr>
+                        <a:t>安侯建業聯合會計師事務所</a:t>
+                      </a:r>
+                    </a:p>
+                  </a:txBody>
+                  <a:tcPr anchor="ctr" marL="73152" marT="9144" marB="9144">
+                    <a:solidFill>
+                      <a:srgbClr val="EEF2F9"/>
+                    </a:solidFill>
+                  </a:tcPr>
+                </a:tc>
+                <a:tc>
+                  <a:txBody>
+                    <a:bodyPr/>
+                    <a:lstStyle/>
+                    <a:p>
+                      <a:r>
+                        <a:rPr sz="1150" b="0">
+                          <a:solidFill>
+                            <a:srgbClr val="1A2233"/>
+                          </a:solidFill>
+                          <a:latin typeface="Microsoft JhengHei"/>
+                          <a:ea typeface="Microsoft JhengHei"/>
+                          <a:cs typeface="Microsoft JhengHei"/>
+                        </a:rPr>
+                        <a:t>郭欣頤、張肇文</a:t>
+                      </a:r>
+                    </a:p>
+                  </a:txBody>
+                  <a:tcPr anchor="ctr" marL="73152" marT="9144" marB="9144">
+                    <a:solidFill>
+                      <a:srgbClr val="EEF2F9"/>
+                    </a:solidFill>
+                  </a:tcPr>
+                </a:tc>
+              </a:tr>
+              <a:tr h="457200">
+                <a:tc>
+                  <a:txBody>
+                    <a:bodyPr/>
+                    <a:lstStyle/>
+                    <a:p>
+                      <a:r>
+                        <a:rPr sz="1150" b="0">
+                          <a:solidFill>
+                            <a:srgbClr val="1A2233"/>
+                          </a:solidFill>
+                          <a:latin typeface="Microsoft JhengHei"/>
+                          <a:ea typeface="Microsoft JhengHei"/>
+                          <a:cs typeface="Microsoft JhengHei"/>
+                        </a:rPr>
+                        <a:t>上福</a:t>
+                      </a:r>
+                    </a:p>
+                  </a:txBody>
+                  <a:tcPr anchor="ctr" marL="73152" marT="9144" marB="9144">
+                    <a:solidFill>
+                      <a:srgbClr val="FFFFFF"/>
+                    </a:solidFill>
+                  </a:tcPr>
+                </a:tc>
+                <a:tc>
+                  <a:txBody>
+                    <a:bodyPr/>
+                    <a:lstStyle/>
+                    <a:p>
+                      <a:r>
+                        <a:rPr sz="1150" b="0">
+                          <a:solidFill>
+                            <a:srgbClr val="1A2233"/>
+                          </a:solidFill>
+                          <a:latin typeface="Microsoft JhengHei"/>
+                          <a:ea typeface="Microsoft JhengHei"/>
+                          <a:cs typeface="Microsoft JhengHei"/>
+                        </a:rPr>
+                        <a:t>6128</a:t>
                       </a:r>
                     </a:p>
                   </a:txBody>
@@ -6109,7 +6719,7 @@
                           <a:ea typeface="Microsoft JhengHei"/>
                           <a:cs typeface="Microsoft JhengHei"/>
                         </a:rPr>
-                        <a:t>勤業眾信聯合會計師事務所</a:t>
+                        <a:t>安永聯合會計師事務所</a:t>
                       </a:r>
                     </a:p>
                   </a:txBody>
@@ -6133,7 +6743,7 @@
                           <a:ea typeface="Microsoft JhengHei"/>
                           <a:cs typeface="Microsoft JhengHei"/>
                         </a:rPr>
-                        <a:t>黃毅民、陳文香</a:t>
+                        <a:t>黃宇廷、賴書晨</a:t>
                       </a:r>
                     </a:p>
                   </a:txBody>
@@ -6159,7 +6769,7 @@
                           <a:ea typeface="Microsoft JhengHei"/>
                           <a:cs typeface="Microsoft JhengHei"/>
                         </a:rPr>
-                        <a:t>易發</a:t>
+                        <a:t>巨路</a:t>
                       </a:r>
                     </a:p>
                   </a:txBody>
@@ -6183,7 +6793,7 @@
                           <a:ea typeface="Microsoft JhengHei"/>
                           <a:cs typeface="Microsoft JhengHei"/>
                         </a:rPr>
-                        <a:t>6425</a:t>
+                        <a:t>6192</a:t>
                       </a:r>
                     </a:p>
                   </a:txBody>
@@ -6201,13 +6811,13 @@
                       <a:r>
                         <a:rPr sz="1150" b="1">
                           <a:solidFill>
-                            <a:srgbClr val="F4A261"/>
+                            <a:srgbClr val="E63946"/>
                           </a:solidFill>
                           <a:latin typeface="Microsoft JhengHei"/>
                           <a:ea typeface="Microsoft JhengHei"/>
                           <a:cs typeface="Microsoft JhengHei"/>
                         </a:rPr>
-                        <a:t>勒索病毒/加密</a:t>
+                        <a:t>駭客攻擊</a:t>
                       </a:r>
                     </a:p>
                   </a:txBody>
@@ -6255,379 +6865,13 @@
                           <a:ea typeface="Microsoft JhengHei"/>
                           <a:cs typeface="Microsoft JhengHei"/>
                         </a:rPr>
-                        <a:t>張至誼、洪國田</a:t>
+                        <a:t>劉建良、張麗君</a:t>
                       </a:r>
                     </a:p>
                   </a:txBody>
                   <a:tcPr anchor="ctr" marL="73152" marT="9144" marB="9144">
                     <a:solidFill>
                       <a:srgbClr val="EEF2F9"/>
-                    </a:solidFill>
-                  </a:tcPr>
-                </a:tc>
-              </a:tr>
-              <a:tr h="457200">
-                <a:tc>
-                  <a:txBody>
-                    <a:bodyPr/>
-                    <a:lstStyle/>
-                    <a:p>
-                      <a:r>
-                        <a:rPr sz="1150" b="0">
-                          <a:solidFill>
-                            <a:srgbClr val="1A2233"/>
-                          </a:solidFill>
-                          <a:latin typeface="Microsoft JhengHei"/>
-                          <a:ea typeface="Microsoft JhengHei"/>
-                          <a:cs typeface="Microsoft JhengHei"/>
-                        </a:rPr>
-                        <a:t>尼得科超眾</a:t>
-                      </a:r>
-                    </a:p>
-                  </a:txBody>
-                  <a:tcPr anchor="ctr" marL="73152" marT="9144" marB="9144">
-                    <a:solidFill>
-                      <a:srgbClr val="FFFFFF"/>
-                    </a:solidFill>
-                  </a:tcPr>
-                </a:tc>
-                <a:tc>
-                  <a:txBody>
-                    <a:bodyPr/>
-                    <a:lstStyle/>
-                    <a:p>
-                      <a:r>
-                        <a:rPr sz="1150" b="0">
-                          <a:solidFill>
-                            <a:srgbClr val="1A2233"/>
-                          </a:solidFill>
-                          <a:latin typeface="Microsoft JhengHei"/>
-                          <a:ea typeface="Microsoft JhengHei"/>
-                          <a:cs typeface="Microsoft JhengHei"/>
-                        </a:rPr>
-                        <a:t>6230</a:t>
-                      </a:r>
-                    </a:p>
-                  </a:txBody>
-                  <a:tcPr anchor="ctr" marL="73152" marT="9144" marB="9144">
-                    <a:solidFill>
-                      <a:srgbClr val="FFFFFF"/>
-                    </a:solidFill>
-                  </a:tcPr>
-                </a:tc>
-                <a:tc>
-                  <a:txBody>
-                    <a:bodyPr/>
-                    <a:lstStyle/>
-                    <a:p>
-                      <a:r>
-                        <a:rPr sz="1150" b="1">
-                          <a:solidFill>
-                            <a:srgbClr val="F4A261"/>
-                          </a:solidFill>
-                          <a:latin typeface="Microsoft JhengHei"/>
-                          <a:ea typeface="Microsoft JhengHei"/>
-                          <a:cs typeface="Microsoft JhengHei"/>
-                        </a:rPr>
-                        <a:t>勒索病毒/加密</a:t>
-                      </a:r>
-                    </a:p>
-                  </a:txBody>
-                  <a:tcPr anchor="ctr" marL="73152" marT="9144" marB="9144">
-                    <a:solidFill>
-                      <a:srgbClr val="FFFFFF"/>
-                    </a:solidFill>
-                  </a:tcPr>
-                </a:tc>
-                <a:tc>
-                  <a:txBody>
-                    <a:bodyPr/>
-                    <a:lstStyle/>
-                    <a:p>
-                      <a:r>
-                        <a:rPr sz="1150" b="0">
-                          <a:solidFill>
-                            <a:srgbClr val="1A2233"/>
-                          </a:solidFill>
-                          <a:latin typeface="Microsoft JhengHei"/>
-                          <a:ea typeface="Microsoft JhengHei"/>
-                          <a:cs typeface="Microsoft JhengHei"/>
-                        </a:rPr>
-                        <a:t>安侯建業聯合會計師事務所</a:t>
-                      </a:r>
-                    </a:p>
-                  </a:txBody>
-                  <a:tcPr anchor="ctr" marL="73152" marT="9144" marB="9144">
-                    <a:solidFill>
-                      <a:srgbClr val="FFFFFF"/>
-                    </a:solidFill>
-                  </a:tcPr>
-                </a:tc>
-                <a:tc>
-                  <a:txBody>
-                    <a:bodyPr/>
-                    <a:lstStyle/>
-                    <a:p>
-                      <a:r>
-                        <a:rPr sz="1150" b="0">
-                          <a:solidFill>
-                            <a:srgbClr val="1A2233"/>
-                          </a:solidFill>
-                          <a:latin typeface="Microsoft JhengHei"/>
-                          <a:ea typeface="Microsoft JhengHei"/>
-                          <a:cs typeface="Microsoft JhengHei"/>
-                        </a:rPr>
-                        <a:t>郭欣頤、張肇文</a:t>
-                      </a:r>
-                    </a:p>
-                  </a:txBody>
-                  <a:tcPr anchor="ctr" marL="73152" marT="9144" marB="9144">
-                    <a:solidFill>
-                      <a:srgbClr val="FFFFFF"/>
-                    </a:solidFill>
-                  </a:tcPr>
-                </a:tc>
-              </a:tr>
-              <a:tr h="457200">
-                <a:tc>
-                  <a:txBody>
-                    <a:bodyPr/>
-                    <a:lstStyle/>
-                    <a:p>
-                      <a:r>
-                        <a:rPr sz="1150" b="0">
-                          <a:solidFill>
-                            <a:srgbClr val="1A2233"/>
-                          </a:solidFill>
-                          <a:latin typeface="Microsoft JhengHei"/>
-                          <a:ea typeface="Microsoft JhengHei"/>
-                          <a:cs typeface="Microsoft JhengHei"/>
-                        </a:rPr>
-                        <a:t>上福</a:t>
-                      </a:r>
-                    </a:p>
-                  </a:txBody>
-                  <a:tcPr anchor="ctr" marL="73152" marT="9144" marB="9144">
-                    <a:solidFill>
-                      <a:srgbClr val="EEF2F9"/>
-                    </a:solidFill>
-                  </a:tcPr>
-                </a:tc>
-                <a:tc>
-                  <a:txBody>
-                    <a:bodyPr/>
-                    <a:lstStyle/>
-                    <a:p>
-                      <a:r>
-                        <a:rPr sz="1150" b="0">
-                          <a:solidFill>
-                            <a:srgbClr val="1A2233"/>
-                          </a:solidFill>
-                          <a:latin typeface="Microsoft JhengHei"/>
-                          <a:ea typeface="Microsoft JhengHei"/>
-                          <a:cs typeface="Microsoft JhengHei"/>
-                        </a:rPr>
-                        <a:t>6128</a:t>
-                      </a:r>
-                    </a:p>
-                  </a:txBody>
-                  <a:tcPr anchor="ctr" marL="73152" marT="9144" marB="9144">
-                    <a:solidFill>
-                      <a:srgbClr val="EEF2F9"/>
-                    </a:solidFill>
-                  </a:tcPr>
-                </a:tc>
-                <a:tc>
-                  <a:txBody>
-                    <a:bodyPr/>
-                    <a:lstStyle/>
-                    <a:p>
-                      <a:r>
-                        <a:rPr sz="1150" b="1">
-                          <a:solidFill>
-                            <a:srgbClr val="5C6679"/>
-                          </a:solidFill>
-                          <a:latin typeface="Microsoft JhengHei"/>
-                          <a:ea typeface="Microsoft JhengHei"/>
-                          <a:cs typeface="Microsoft JhengHei"/>
-                        </a:rPr>
-                        <a:t>其他</a:t>
-                      </a:r>
-                    </a:p>
-                  </a:txBody>
-                  <a:tcPr anchor="ctr" marL="73152" marT="9144" marB="9144">
-                    <a:solidFill>
-                      <a:srgbClr val="EEF2F9"/>
-                    </a:solidFill>
-                  </a:tcPr>
-                </a:tc>
-                <a:tc>
-                  <a:txBody>
-                    <a:bodyPr/>
-                    <a:lstStyle/>
-                    <a:p>
-                      <a:r>
-                        <a:rPr sz="1150" b="0">
-                          <a:solidFill>
-                            <a:srgbClr val="1A2233"/>
-                          </a:solidFill>
-                          <a:latin typeface="Microsoft JhengHei"/>
-                          <a:ea typeface="Microsoft JhengHei"/>
-                          <a:cs typeface="Microsoft JhengHei"/>
-                        </a:rPr>
-                        <a:t>安永聯合會計師事務所</a:t>
-                      </a:r>
-                    </a:p>
-                  </a:txBody>
-                  <a:tcPr anchor="ctr" marL="73152" marT="9144" marB="9144">
-                    <a:solidFill>
-                      <a:srgbClr val="EEF2F9"/>
-                    </a:solidFill>
-                  </a:tcPr>
-                </a:tc>
-                <a:tc>
-                  <a:txBody>
-                    <a:bodyPr/>
-                    <a:lstStyle/>
-                    <a:p>
-                      <a:r>
-                        <a:rPr sz="1150" b="0">
-                          <a:solidFill>
-                            <a:srgbClr val="1A2233"/>
-                          </a:solidFill>
-                          <a:latin typeface="Microsoft JhengHei"/>
-                          <a:ea typeface="Microsoft JhengHei"/>
-                          <a:cs typeface="Microsoft JhengHei"/>
-                        </a:rPr>
-                        <a:t>黃宇廷、賴書晨</a:t>
-                      </a:r>
-                    </a:p>
-                  </a:txBody>
-                  <a:tcPr anchor="ctr" marL="73152" marT="9144" marB="9144">
-                    <a:solidFill>
-                      <a:srgbClr val="EEF2F9"/>
-                    </a:solidFill>
-                  </a:tcPr>
-                </a:tc>
-              </a:tr>
-              <a:tr h="457200">
-                <a:tc>
-                  <a:txBody>
-                    <a:bodyPr/>
-                    <a:lstStyle/>
-                    <a:p>
-                      <a:r>
-                        <a:rPr sz="1150" b="0">
-                          <a:solidFill>
-                            <a:srgbClr val="1A2233"/>
-                          </a:solidFill>
-                          <a:latin typeface="Microsoft JhengHei"/>
-                          <a:ea typeface="Microsoft JhengHei"/>
-                          <a:cs typeface="Microsoft JhengHei"/>
-                        </a:rPr>
-                        <a:t>巨路</a:t>
-                      </a:r>
-                    </a:p>
-                  </a:txBody>
-                  <a:tcPr anchor="ctr" marL="73152" marT="9144" marB="9144">
-                    <a:solidFill>
-                      <a:srgbClr val="FFFFFF"/>
-                    </a:solidFill>
-                  </a:tcPr>
-                </a:tc>
-                <a:tc>
-                  <a:txBody>
-                    <a:bodyPr/>
-                    <a:lstStyle/>
-                    <a:p>
-                      <a:r>
-                        <a:rPr sz="1150" b="0">
-                          <a:solidFill>
-                            <a:srgbClr val="1A2233"/>
-                          </a:solidFill>
-                          <a:latin typeface="Microsoft JhengHei"/>
-                          <a:ea typeface="Microsoft JhengHei"/>
-                          <a:cs typeface="Microsoft JhengHei"/>
-                        </a:rPr>
-                        <a:t>6192</a:t>
-                      </a:r>
-                    </a:p>
-                  </a:txBody>
-                  <a:tcPr anchor="ctr" marL="73152" marT="9144" marB="9144">
-                    <a:solidFill>
-                      <a:srgbClr val="FFFFFF"/>
-                    </a:solidFill>
-                  </a:tcPr>
-                </a:tc>
-                <a:tc>
-                  <a:txBody>
-                    <a:bodyPr/>
-                    <a:lstStyle/>
-                    <a:p>
-                      <a:r>
-                        <a:rPr sz="1150" b="1">
-                          <a:solidFill>
-                            <a:srgbClr val="E63946"/>
-                          </a:solidFill>
-                          <a:latin typeface="Microsoft JhengHei"/>
-                          <a:ea typeface="Microsoft JhengHei"/>
-                          <a:cs typeface="Microsoft JhengHei"/>
-                        </a:rPr>
-                        <a:t>駭客攻擊</a:t>
-                      </a:r>
-                    </a:p>
-                  </a:txBody>
-                  <a:tcPr anchor="ctr" marL="73152" marT="9144" marB="9144">
-                    <a:solidFill>
-                      <a:srgbClr val="FFFFFF"/>
-                    </a:solidFill>
-                  </a:tcPr>
-                </a:tc>
-                <a:tc>
-                  <a:txBody>
-                    <a:bodyPr/>
-                    <a:lstStyle/>
-                    <a:p>
-                      <a:r>
-                        <a:rPr sz="1150" b="0">
-                          <a:solidFill>
-                            <a:srgbClr val="1A2233"/>
-                          </a:solidFill>
-                          <a:latin typeface="Microsoft JhengHei"/>
-                          <a:ea typeface="Microsoft JhengHei"/>
-                          <a:cs typeface="Microsoft JhengHei"/>
-                        </a:rPr>
-                        <a:t>勤業眾信聯合會計師事務所</a:t>
-                      </a:r>
-                    </a:p>
-                  </a:txBody>
-                  <a:tcPr anchor="ctr" marL="73152" marT="9144" marB="9144">
-                    <a:solidFill>
-                      <a:srgbClr val="FFFFFF"/>
-                    </a:solidFill>
-                  </a:tcPr>
-                </a:tc>
-                <a:tc>
-                  <a:txBody>
-                    <a:bodyPr/>
-                    <a:lstStyle/>
-                    <a:p>
-                      <a:r>
-                        <a:rPr sz="1150" b="0">
-                          <a:solidFill>
-                            <a:srgbClr val="1A2233"/>
-                          </a:solidFill>
-                          <a:latin typeface="Microsoft JhengHei"/>
-                          <a:ea typeface="Microsoft JhengHei"/>
-                          <a:cs typeface="Microsoft JhengHei"/>
-                        </a:rPr>
-                        <a:t>劉建良、張麗君</a:t>
-                      </a:r>
-                    </a:p>
-                  </a:txBody>
-                  <a:tcPr anchor="ctr" marL="73152" marT="9144" marB="9144">
-                    <a:solidFill>
-                      <a:srgbClr val="FFFFFF"/>
                     </a:solidFill>
                   </a:tcPr>
                 </a:tc>
@@ -8081,7 +8325,7 @@
             <a:avLst/>
           </a:prstGeom>
           <a:solidFill>
-            <a:srgbClr val="5C6679"/>
+            <a:srgbClr val="E63946"/>
           </a:solidFill>
           <a:ln>
             <a:noFill/>
@@ -8142,7 +8386,7 @@
                 <a:ea typeface="Microsoft JhengHei"/>
                 <a:cs typeface="Microsoft JhengHei"/>
               </a:rPr>
-              <a:t>耕興 </a:t>
+              <a:t>網家 </a:t>
             </a:r>
             <a:r>
               <a:rPr sz="1300" b="0">
@@ -8153,7 +8397,7 @@
                 <a:ea typeface="Microsoft JhengHei"/>
                 <a:cs typeface="Microsoft JhengHei"/>
               </a:rPr>
-              <a:t>6146</a:t>
+              <a:t>8044</a:t>
             </a:r>
           </a:p>
         </p:txBody>
@@ -8173,7 +8417,7 @@
             <a:avLst/>
           </a:prstGeom>
           <a:solidFill>
-            <a:srgbClr val="5C6679"/>
+            <a:srgbClr val="E63946"/>
           </a:solidFill>
           <a:ln>
             <a:noFill/>
@@ -8234,7 +8478,7 @@
                 <a:ea typeface="Microsoft JhengHei"/>
                 <a:cs typeface="Microsoft JhengHei"/>
               </a:rPr>
-              <a:t>其他</a:t>
+              <a:t>駭客攻擊</a:t>
             </a:r>
           </a:p>
         </p:txBody>
@@ -8269,7 +8513,7 @@
             <a:r>
               <a:rPr sz="1100" b="1">
                 <a:solidFill>
-                  <a:srgbClr val="5C6679"/>
+                  <a:srgbClr val="E63946"/>
                 </a:solidFill>
                 <a:latin typeface="Microsoft JhengHei"/>
                 <a:ea typeface="Microsoft JhengHei"/>
@@ -8286,7 +8530,7 @@
                 <a:ea typeface="Microsoft JhengHei"/>
                 <a:cs typeface="Microsoft JhengHei"/>
               </a:rPr>
-              <a:t>本公司部分資訊系統發生網路資安事件。</a:t>
+              <a:t>公司對該等報導或提供訊息之說明:(1)資訊安全防線：本公司及各轉投資事業係依不同服務型態各自營運…</a:t>
             </a:r>
           </a:p>
         </p:txBody>
@@ -8321,7 +8565,7 @@
             <a:r>
               <a:rPr sz="1100" b="1">
                 <a:solidFill>
-                  <a:srgbClr val="5C6679"/>
+                  <a:srgbClr val="E63946"/>
                 </a:solidFill>
                 <a:latin typeface="Microsoft JhengHei"/>
                 <a:ea typeface="Microsoft JhengHei"/>
@@ -8338,7 +8582,7 @@
                 <a:ea typeface="Microsoft JhengHei"/>
                 <a:cs typeface="Microsoft JhengHei"/>
               </a:rPr>
-              <a:t>本公司將持續提升網路與資訊基礎架構之安全管控，並依外部資安技術專家之建議加強防護，確保資訊安全。</a:t>
+              <a:t>(1)全面啟動應變與調查：拍付國際獲悉駭客聲稱之入侵及勒索訊息後，已立即啟動資安應變程序，會同資安專家進行全面系統檢測與…</a:t>
             </a:r>
           </a:p>
         </p:txBody>
@@ -8404,7 +8648,7 @@
             <a:avLst/>
           </a:prstGeom>
           <a:solidFill>
-            <a:srgbClr val="F4A261"/>
+            <a:srgbClr val="5C6679"/>
           </a:solidFill>
           <a:ln>
             <a:noFill/>
@@ -8465,7 +8709,7 @@
                 <a:ea typeface="Microsoft JhengHei"/>
                 <a:cs typeface="Microsoft JhengHei"/>
               </a:rPr>
-              <a:t>易發 </a:t>
+              <a:t>耕興 </a:t>
             </a:r>
             <a:r>
               <a:rPr sz="1300" b="0">
@@ -8476,7 +8720,7 @@
                 <a:ea typeface="Microsoft JhengHei"/>
                 <a:cs typeface="Microsoft JhengHei"/>
               </a:rPr>
-              <a:t>6425</a:t>
+              <a:t>6146</a:t>
             </a:r>
           </a:p>
         </p:txBody>
@@ -8496,7 +8740,7 @@
             <a:avLst/>
           </a:prstGeom>
           <a:solidFill>
-            <a:srgbClr val="F4A261"/>
+            <a:srgbClr val="5C6679"/>
           </a:solidFill>
           <a:ln>
             <a:noFill/>
@@ -8557,7 +8801,7 @@
                 <a:ea typeface="Microsoft JhengHei"/>
                 <a:cs typeface="Microsoft JhengHei"/>
               </a:rPr>
-              <a:t>勒索病毒/加密</a:t>
+              <a:t>其他</a:t>
             </a:r>
           </a:p>
         </p:txBody>
@@ -8592,7 +8836,7 @@
             <a:r>
               <a:rPr sz="1100" b="1">
                 <a:solidFill>
-                  <a:srgbClr val="F4A261"/>
+                  <a:srgbClr val="5C6679"/>
                 </a:solidFill>
                 <a:latin typeface="Microsoft JhengHei"/>
                 <a:ea typeface="Microsoft JhengHei"/>
@@ -8609,7 +8853,7 @@
                 <a:ea typeface="Microsoft JhengHei"/>
                 <a:cs typeface="Microsoft JhengHei"/>
               </a:rPr>
-              <a:t>本公司之子公司東野精機(股)公司日福精工(股)公司，發現遭不明駭客入侵主機，並將伺服器資料加密，…</a:t>
+              <a:t>本公司部分資訊系統發生網路資安事件。</a:t>
             </a:r>
           </a:p>
         </p:txBody>
@@ -8644,7 +8888,7 @@
             <a:r>
               <a:rPr sz="1100" b="1">
                 <a:solidFill>
-                  <a:srgbClr val="F4A261"/>
+                  <a:srgbClr val="5C6679"/>
                 </a:solidFill>
                 <a:latin typeface="Microsoft JhengHei"/>
                 <a:ea typeface="Microsoft JhengHei"/>
@@ -8661,7 +8905,7 @@
                 <a:ea typeface="Microsoft JhengHei"/>
                 <a:cs typeface="Microsoft JhengHei"/>
               </a:rPr>
-              <a:t>本公司之子公司東野精機(股)公司日福精工(股)公司將修復安全漏洞，持續提升網路與資訊基礎架構之安全管控，以確保資訊安全。</a:t>
+              <a:t>本公司將持續提升網路與資訊基礎架構之安全管控，並依外部資安技術專家之建議加強防護，確保資訊安全。</a:t>
             </a:r>
           </a:p>
         </p:txBody>
@@ -8788,7 +9032,7 @@
                 <a:ea typeface="Microsoft JhengHei"/>
                 <a:cs typeface="Microsoft JhengHei"/>
               </a:rPr>
-              <a:t>尼得科超眾 </a:t>
+              <a:t>易發 </a:t>
             </a:r>
             <a:r>
               <a:rPr sz="1300" b="0">
@@ -8799,7 +9043,7 @@
                 <a:ea typeface="Microsoft JhengHei"/>
                 <a:cs typeface="Microsoft JhengHei"/>
               </a:rPr>
-              <a:t>6230</a:t>
+              <a:t>6425</a:t>
             </a:r>
           </a:p>
         </p:txBody>
@@ -8932,7 +9176,7 @@
                 <a:ea typeface="Microsoft JhengHei"/>
                 <a:cs typeface="Microsoft JhengHei"/>
               </a:rPr>
-              <a:t>本公司於今日偵測到部份伺服器遭受網路勒索病毒攻擊，致使包含ERP在內之部份資訊系統無法正常運作。</a:t>
+              <a:t>本公司之子公司東野精機(股)公司日福精工(股)公司，發現遭不明駭客入侵主機，並將伺服器資料加密，…</a:t>
             </a:r>
           </a:p>
         </p:txBody>
@@ -8984,7 +9228,7 @@
                 <a:ea typeface="Microsoft JhengHei"/>
                 <a:cs typeface="Microsoft JhengHei"/>
               </a:rPr>
-              <a:t>本公司亦將視系統復原進度，適時調整生產與出貨排程。</a:t>
+              <a:t>本公司之子公司東野精機(股)公司日福精工(股)公司將修復安全漏洞，持續提升網路與資訊基礎架構之安全管控，以確保資訊安全。</a:t>
             </a:r>
           </a:p>
         </p:txBody>
@@ -9050,7 +9294,7 @@
             <a:avLst/>
           </a:prstGeom>
           <a:solidFill>
-            <a:srgbClr val="5C6679"/>
+            <a:srgbClr val="F4A261"/>
           </a:solidFill>
           <a:ln>
             <a:noFill/>
@@ -9111,7 +9355,7 @@
                 <a:ea typeface="Microsoft JhengHei"/>
                 <a:cs typeface="Microsoft JhengHei"/>
               </a:rPr>
-              <a:t>上福 </a:t>
+              <a:t>尼得科超眾 </a:t>
             </a:r>
             <a:r>
               <a:rPr sz="1300" b="0">
@@ -9122,7 +9366,7 @@
                 <a:ea typeface="Microsoft JhengHei"/>
                 <a:cs typeface="Microsoft JhengHei"/>
               </a:rPr>
-              <a:t>6128</a:t>
+              <a:t>6230</a:t>
             </a:r>
           </a:p>
         </p:txBody>
@@ -9142,7 +9386,7 @@
             <a:avLst/>
           </a:prstGeom>
           <a:solidFill>
-            <a:srgbClr val="5C6679"/>
+            <a:srgbClr val="F4A261"/>
           </a:solidFill>
           <a:ln>
             <a:noFill/>
@@ -9203,7 +9447,7 @@
                 <a:ea typeface="Microsoft JhengHei"/>
                 <a:cs typeface="Microsoft JhengHei"/>
               </a:rPr>
-              <a:t>其他</a:t>
+              <a:t>勒索病毒/加密</a:t>
             </a:r>
           </a:p>
         </p:txBody>
@@ -9238,7 +9482,7 @@
             <a:r>
               <a:rPr sz="1100" b="1">
                 <a:solidFill>
-                  <a:srgbClr val="5C6679"/>
+                  <a:srgbClr val="F4A261"/>
                 </a:solidFill>
                 <a:latin typeface="Microsoft JhengHei"/>
                 <a:ea typeface="Microsoft JhengHei"/>
@@ -9255,7 +9499,7 @@
                 <a:ea typeface="Microsoft JhengHei"/>
                 <a:cs typeface="Microsoft JhengHei"/>
               </a:rPr>
-              <a:t>KatunCorporation資訊設備遭受未授權外部存取。</a:t>
+              <a:t>本公司於今日偵測到部份伺服器遭受網路勒索病毒攻擊，致使包含ERP在內之部份資訊系統無法正常運作。</a:t>
             </a:r>
           </a:p>
         </p:txBody>
@@ -9290,7 +9534,7 @@
             <a:r>
               <a:rPr sz="1100" b="1">
                 <a:solidFill>
-                  <a:srgbClr val="5C6679"/>
+                  <a:srgbClr val="F4A261"/>
                 </a:solidFill>
                 <a:latin typeface="Microsoft JhengHei"/>
                 <a:ea typeface="Microsoft JhengHei"/>
@@ -9307,7 +9551,7 @@
                 <a:ea typeface="Microsoft JhengHei"/>
                 <a:cs typeface="Microsoft JhengHei"/>
               </a:rPr>
-              <a:t>此事件後將持續提升網路與資訊基礎架構之安全控管，並持續密切監控，以確保資訊安全。</a:t>
+              <a:t>本公司亦將視系統復原進度，適時調整生產與出貨排程。</a:t>
             </a:r>
           </a:p>
         </p:txBody>
@@ -9509,7 +9753,7 @@
             <a:avLst/>
           </a:prstGeom>
           <a:solidFill>
-            <a:srgbClr val="E63946"/>
+            <a:srgbClr val="5C6679"/>
           </a:solidFill>
           <a:ln>
             <a:noFill/>
@@ -9570,7 +9814,7 @@
                 <a:ea typeface="Microsoft JhengHei"/>
                 <a:cs typeface="Microsoft JhengHei"/>
               </a:rPr>
-              <a:t>巨路 </a:t>
+              <a:t>上福 </a:t>
             </a:r>
             <a:r>
               <a:rPr sz="1300" b="0">
@@ -9581,7 +9825,7 @@
                 <a:ea typeface="Microsoft JhengHei"/>
                 <a:cs typeface="Microsoft JhengHei"/>
               </a:rPr>
-              <a:t>6192</a:t>
+              <a:t>6128</a:t>
             </a:r>
           </a:p>
         </p:txBody>
@@ -9598,6 +9842,237 @@
             <a:ext cx="1234440" cy="347472"/>
           </a:xfrm>
           <a:prstGeom prst="roundRect">
+            <a:avLst/>
+          </a:prstGeom>
+          <a:solidFill>
+            <a:srgbClr val="5C6679"/>
+          </a:solidFill>
+          <a:ln>
+            <a:noFill/>
+          </a:ln>
+          <a:effectLst/>
+        </p:spPr>
+        <p:style>
+          <a:lnRef idx="1">
+            <a:schemeClr val="accent1"/>
+          </a:lnRef>
+          <a:fillRef idx="3">
+            <a:schemeClr val="accent1"/>
+          </a:fillRef>
+          <a:effectRef idx="2">
+            <a:schemeClr val="accent1"/>
+          </a:effectRef>
+          <a:fontRef idx="minor">
+            <a:schemeClr val="lt1"/>
+          </a:fontRef>
+        </p:style>
+        <p:txBody>
+          <a:bodyPr rtlCol="0" anchor="ctr"/>
+          <a:lstStyle/>
+          <a:p>
+            <a:pPr algn="ctr"/>
+          </a:p>
+        </p:txBody>
+      </p:sp>
+      <p:sp>
+        <p:nvSpPr>
+          <p:cNvPr id="9" name="TextBox 8"/>
+          <p:cNvSpPr txBox="1"/>
+          <p:nvPr/>
+        </p:nvSpPr>
+        <p:spPr>
+          <a:xfrm>
+            <a:off x="4526280" y="1792224"/>
+            <a:ext cx="1234440" cy="347472"/>
+          </a:xfrm>
+          <a:prstGeom prst="rect">
+            <a:avLst/>
+          </a:prstGeom>
+          <a:noFill/>
+        </p:spPr>
+        <p:txBody>
+          <a:bodyPr wrap="square" anchor="ctr" lIns="0" rIns="0" tIns="0" bIns="0">
+            <a:spAutoFit/>
+          </a:bodyPr>
+          <a:lstStyle/>
+          <a:p>
+            <a:pPr algn="ctr"/>
+            <a:r>
+              <a:rPr sz="1050" b="1">
+                <a:solidFill>
+                  <a:srgbClr val="FFFFFF"/>
+                </a:solidFill>
+                <a:latin typeface="Microsoft JhengHei"/>
+                <a:ea typeface="Microsoft JhengHei"/>
+                <a:cs typeface="Microsoft JhengHei"/>
+              </a:rPr>
+              <a:t>其他</a:t>
+            </a:r>
+          </a:p>
+        </p:txBody>
+      </p:sp>
+      <p:sp>
+        <p:nvSpPr>
+          <p:cNvPr id="10" name="TextBox 9"/>
+          <p:cNvSpPr txBox="1"/>
+          <p:nvPr/>
+        </p:nvSpPr>
+        <p:spPr>
+          <a:xfrm>
+            <a:off x="777240" y="2267712"/>
+            <a:ext cx="4937760" cy="640080"/>
+          </a:xfrm>
+          <a:prstGeom prst="rect">
+            <a:avLst/>
+          </a:prstGeom>
+          <a:noFill/>
+        </p:spPr>
+        <p:txBody>
+          <a:bodyPr wrap="square" anchor="t" lIns="0" rIns="0" tIns="0" bIns="0">
+            <a:spAutoFit/>
+          </a:bodyPr>
+          <a:lstStyle/>
+          <a:p>
+            <a:pPr algn="l">
+              <a:lnSpc>
+                <a:spcPts val="1500"/>
+              </a:lnSpc>
+            </a:pPr>
+            <a:r>
+              <a:rPr sz="1100" b="1">
+                <a:solidFill>
+                  <a:srgbClr val="5C6679"/>
+                </a:solidFill>
+                <a:latin typeface="Microsoft JhengHei"/>
+                <a:ea typeface="Microsoft JhengHei"/>
+                <a:cs typeface="Microsoft JhengHei"/>
+              </a:rPr>
+              <a:t>緣由　</a:t>
+            </a:r>
+            <a:r>
+              <a:rPr sz="1100" b="0">
+                <a:solidFill>
+                  <a:srgbClr val="1A2233"/>
+                </a:solidFill>
+                <a:latin typeface="Microsoft JhengHei"/>
+                <a:ea typeface="Microsoft JhengHei"/>
+                <a:cs typeface="Microsoft JhengHei"/>
+              </a:rPr>
+              <a:t>KatunCorporation資訊設備遭受未授權外部存取。</a:t>
+            </a:r>
+          </a:p>
+        </p:txBody>
+      </p:sp>
+      <p:sp>
+        <p:nvSpPr>
+          <p:cNvPr id="11" name="TextBox 10"/>
+          <p:cNvSpPr txBox="1"/>
+          <p:nvPr/>
+        </p:nvSpPr>
+        <p:spPr>
+          <a:xfrm>
+            <a:off x="777240" y="2926080"/>
+            <a:ext cx="4937760" cy="713232"/>
+          </a:xfrm>
+          <a:prstGeom prst="rect">
+            <a:avLst/>
+          </a:prstGeom>
+          <a:noFill/>
+        </p:spPr>
+        <p:txBody>
+          <a:bodyPr wrap="square" anchor="t" lIns="0" rIns="0" tIns="0" bIns="0">
+            <a:spAutoFit/>
+          </a:bodyPr>
+          <a:lstStyle/>
+          <a:p>
+            <a:pPr algn="l">
+              <a:lnSpc>
+                <a:spcPts val="1500"/>
+              </a:lnSpc>
+            </a:pPr>
+            <a:r>
+              <a:rPr sz="1100" b="1">
+                <a:solidFill>
+                  <a:srgbClr val="5C6679"/>
+                </a:solidFill>
+                <a:latin typeface="Microsoft JhengHei"/>
+                <a:ea typeface="Microsoft JhengHei"/>
+                <a:cs typeface="Microsoft JhengHei"/>
+              </a:rPr>
+              <a:t>因應　</a:t>
+            </a:r>
+            <a:r>
+              <a:rPr sz="1100" b="0">
+                <a:solidFill>
+                  <a:srgbClr val="1A2233"/>
+                </a:solidFill>
+                <a:latin typeface="Microsoft JhengHei"/>
+                <a:ea typeface="Microsoft JhengHei"/>
+                <a:cs typeface="Microsoft JhengHei"/>
+              </a:rPr>
+              <a:t>此事件後將持續提升網路與資訊基礎架構之安全控管，並持續密切監控，以確保資訊安全。</a:t>
+            </a:r>
+          </a:p>
+        </p:txBody>
+      </p:sp>
+      <p:sp>
+        <p:nvSpPr>
+          <p:cNvPr id="12" name="Rounded Rectangle 11"/>
+          <p:cNvSpPr/>
+          <p:nvPr/>
+        </p:nvSpPr>
+        <p:spPr>
+          <a:xfrm>
+            <a:off x="6172200" y="1554480"/>
+            <a:ext cx="5394960" cy="2148840"/>
+          </a:xfrm>
+          <a:prstGeom prst="roundRect">
+            <a:avLst/>
+          </a:prstGeom>
+          <a:solidFill>
+            <a:srgbClr val="FFFFFF"/>
+          </a:solidFill>
+          <a:ln w="12700">
+            <a:solidFill>
+              <a:srgbClr val="DDE3EE"/>
+            </a:solidFill>
+          </a:ln>
+          <a:effectLst/>
+        </p:spPr>
+        <p:style>
+          <a:lnRef idx="1">
+            <a:schemeClr val="accent1"/>
+          </a:lnRef>
+          <a:fillRef idx="3">
+            <a:schemeClr val="accent1"/>
+          </a:fillRef>
+          <a:effectRef idx="2">
+            <a:schemeClr val="accent1"/>
+          </a:effectRef>
+          <a:fontRef idx="minor">
+            <a:schemeClr val="lt1"/>
+          </a:fontRef>
+        </p:style>
+        <p:txBody>
+          <a:bodyPr rtlCol="0" anchor="ctr"/>
+          <a:lstStyle/>
+          <a:p>
+            <a:pPr algn="ctr"/>
+          </a:p>
+        </p:txBody>
+      </p:sp>
+      <p:sp>
+        <p:nvSpPr>
+          <p:cNvPr id="13" name="Rectangle 12"/>
+          <p:cNvSpPr/>
+          <p:nvPr/>
+        </p:nvSpPr>
+        <p:spPr>
+          <a:xfrm>
+            <a:off x="6172200" y="1554480"/>
+            <a:ext cx="5394960" cy="109728"/>
+          </a:xfrm>
+          <a:prstGeom prst="rect">
             <a:avLst/>
           </a:prstGeom>
           <a:solidFill>
@@ -9632,13 +10107,105 @@
       </p:sp>
       <p:sp>
         <p:nvSpPr>
-          <p:cNvPr id="9" name="TextBox 8"/>
+          <p:cNvPr id="14" name="TextBox 13"/>
           <p:cNvSpPr txBox="1"/>
           <p:nvPr/>
         </p:nvSpPr>
         <p:spPr>
           <a:xfrm>
-            <a:off x="4526280" y="1792224"/>
+            <a:off x="6400800" y="1773936"/>
+            <a:ext cx="3657600" cy="365760"/>
+          </a:xfrm>
+          <a:prstGeom prst="rect">
+            <a:avLst/>
+          </a:prstGeom>
+          <a:noFill/>
+        </p:spPr>
+        <p:txBody>
+          <a:bodyPr wrap="square" anchor="ctr" lIns="0" rIns="0" tIns="0" bIns="0">
+            <a:spAutoFit/>
+          </a:bodyPr>
+          <a:lstStyle/>
+          <a:p>
+            <a:pPr algn="l"/>
+            <a:r>
+              <a:rPr sz="1600" b="1">
+                <a:solidFill>
+                  <a:srgbClr val="1A2233"/>
+                </a:solidFill>
+                <a:latin typeface="Microsoft JhengHei"/>
+                <a:ea typeface="Microsoft JhengHei"/>
+                <a:cs typeface="Microsoft JhengHei"/>
+              </a:rPr>
+              <a:t>巨路 </a:t>
+            </a:r>
+            <a:r>
+              <a:rPr sz="1300" b="0">
+                <a:solidFill>
+                  <a:srgbClr val="5C6679"/>
+                </a:solidFill>
+                <a:latin typeface="Microsoft JhengHei"/>
+                <a:ea typeface="Microsoft JhengHei"/>
+                <a:cs typeface="Microsoft JhengHei"/>
+              </a:rPr>
+              <a:t>6192</a:t>
+            </a:r>
+          </a:p>
+        </p:txBody>
+      </p:sp>
+      <p:sp>
+        <p:nvSpPr>
+          <p:cNvPr id="15" name="Rounded Rectangle 14"/>
+          <p:cNvSpPr/>
+          <p:nvPr/>
+        </p:nvSpPr>
+        <p:spPr>
+          <a:xfrm>
+            <a:off x="10149840" y="1792224"/>
+            <a:ext cx="1234440" cy="347472"/>
+          </a:xfrm>
+          <a:prstGeom prst="roundRect">
+            <a:avLst/>
+          </a:prstGeom>
+          <a:solidFill>
+            <a:srgbClr val="E63946"/>
+          </a:solidFill>
+          <a:ln>
+            <a:noFill/>
+          </a:ln>
+          <a:effectLst/>
+        </p:spPr>
+        <p:style>
+          <a:lnRef idx="1">
+            <a:schemeClr val="accent1"/>
+          </a:lnRef>
+          <a:fillRef idx="3">
+            <a:schemeClr val="accent1"/>
+          </a:fillRef>
+          <a:effectRef idx="2">
+            <a:schemeClr val="accent1"/>
+          </a:effectRef>
+          <a:fontRef idx="minor">
+            <a:schemeClr val="lt1"/>
+          </a:fontRef>
+        </p:style>
+        <p:txBody>
+          <a:bodyPr rtlCol="0" anchor="ctr"/>
+          <a:lstStyle/>
+          <a:p>
+            <a:pPr algn="ctr"/>
+          </a:p>
+        </p:txBody>
+      </p:sp>
+      <p:sp>
+        <p:nvSpPr>
+          <p:cNvPr id="16" name="TextBox 15"/>
+          <p:cNvSpPr txBox="1"/>
+          <p:nvPr/>
+        </p:nvSpPr>
+        <p:spPr>
+          <a:xfrm>
+            <a:off x="10149840" y="1792224"/>
             <a:ext cx="1234440" cy="347472"/>
           </a:xfrm>
           <a:prstGeom prst="rect">
@@ -9669,13 +10236,13 @@
       </p:sp>
       <p:sp>
         <p:nvSpPr>
-          <p:cNvPr id="10" name="TextBox 9"/>
+          <p:cNvPr id="17" name="TextBox 16"/>
           <p:cNvSpPr txBox="1"/>
           <p:nvPr/>
         </p:nvSpPr>
         <p:spPr>
           <a:xfrm>
-            <a:off x="777240" y="2267712"/>
+            <a:off x="6400800" y="2267712"/>
             <a:ext cx="4937760" cy="640080"/>
           </a:xfrm>
           <a:prstGeom prst="rect">
@@ -9721,13 +10288,13 @@
       </p:sp>
       <p:sp>
         <p:nvSpPr>
-          <p:cNvPr id="11" name="TextBox 10"/>
+          <p:cNvPr id="18" name="TextBox 17"/>
           <p:cNvSpPr txBox="1"/>
           <p:nvPr/>
         </p:nvSpPr>
         <p:spPr>
           <a:xfrm>
-            <a:off x="777240" y="2926080"/>
+            <a:off x="6400800" y="2926080"/>
             <a:ext cx="4937760" cy="713232"/>
           </a:xfrm>
           <a:prstGeom prst="rect">

--- a/資安事件因應分析.pptx
+++ b/資安事件因應分析.pptx
@@ -191,7 +191,7 @@
                   <c:v>2</c:v>
                 </c:pt>
                 <c:pt idx="2">
-                  <c:v>2</c:v>
+                  <c:v>3</c:v>
                 </c:pt>
               </c:numCache>
             </c:numRef>
@@ -3528,7 +3528,7 @@
                 <a:ea typeface="Microsoft JhengHei"/>
                 <a:cs typeface="Microsoft JhengHei"/>
               </a:rPr>
-              <a:t>資料期間 2026-06-01 ~ 2026-07-01　｜　MOPS 重大訊息全文檢索　｜　6 家公司</a:t>
+              <a:t>資料期間 2026-06-02 ~ 2026-07-02　｜　MOPS 重大訊息全文檢索　｜　7 家公司</a:t>
             </a:r>
           </a:p>
         </p:txBody>
@@ -3745,7 +3745,7 @@
                 <a:ea typeface="Microsoft JhengHei"/>
                 <a:cs typeface="Microsoft JhengHei"/>
               </a:rPr>
-              <a:t>資料期間內 MOPS 揭露之 6 起資安相關重大訊息</a:t>
+              <a:t>資料期間內 MOPS 揭露之 7 起資安相關重大訊息</a:t>
             </a:r>
           </a:p>
         </p:txBody>
@@ -3828,7 +3828,7 @@
                 <a:ea typeface="Microsoft JhengHei"/>
                 <a:cs typeface="Microsoft JhengHei"/>
               </a:rPr>
-              <a:t>6</a:t>
+              <a:t>7</a:t>
             </a:r>
           </a:p>
         </p:txBody>
@@ -4120,7 +4120,7 @@
         </p:nvGraphicFramePr>
         <p:xfrm>
           <a:off x="548640" y="2697480"/>
-          <a:ext cx="11064240" cy="2688336"/>
+          <a:ext cx="11064240" cy="3072384"/>
         </p:xfrm>
         <a:graphic>
           <a:graphicData uri="http://schemas.openxmlformats.org/drawingml/2006/table">
@@ -4272,7 +4272,7 @@
                           <a:ea typeface="Microsoft JhengHei"/>
                           <a:cs typeface="Microsoft JhengHei"/>
                         </a:rPr>
-                        <a:t>網家</a:t>
+                        <a:t>GOGOLOOK</a:t>
                       </a:r>
                     </a:p>
                   </a:txBody>
@@ -4296,7 +4296,7 @@
                           <a:ea typeface="Microsoft JhengHei"/>
                           <a:cs typeface="Microsoft JhengHei"/>
                         </a:rPr>
-                        <a:t>8044</a:t>
+                        <a:t>6902</a:t>
                       </a:r>
                     </a:p>
                   </a:txBody>
@@ -4338,13 +4338,13 @@
                       <a:r>
                         <a:rPr sz="1150" b="1">
                           <a:solidFill>
-                            <a:srgbClr val="E63946"/>
+                            <a:srgbClr val="5C6679"/>
                           </a:solidFill>
                           <a:latin typeface="Microsoft JhengHei"/>
                           <a:ea typeface="Microsoft JhengHei"/>
                           <a:cs typeface="Microsoft JhengHei"/>
                         </a:rPr>
-                        <a:t>駭客攻擊</a:t>
+                        <a:t>其他</a:t>
                       </a:r>
                     </a:p>
                   </a:txBody>
@@ -4368,7 +4368,7 @@
                           <a:ea typeface="Microsoft JhengHei"/>
                           <a:cs typeface="Microsoft JhengHei"/>
                         </a:rPr>
-                        <a:t>—</a:t>
+                        <a:t>目前評估對公司營運尚無重大影響。</a:t>
                       </a:r>
                     </a:p>
                   </a:txBody>
@@ -4394,7 +4394,7 @@
                           <a:ea typeface="Microsoft JhengHei"/>
                           <a:cs typeface="Microsoft JhengHei"/>
                         </a:rPr>
-                        <a:t>耕興</a:t>
+                        <a:t>網家</a:t>
                       </a:r>
                     </a:p>
                   </a:txBody>
@@ -4418,7 +4418,251 @@
                           <a:ea typeface="Microsoft JhengHei"/>
                           <a:cs typeface="Microsoft JhengHei"/>
                         </a:rPr>
+                        <a:t>8044</a:t>
+                      </a:r>
+                    </a:p>
+                  </a:txBody>
+                  <a:tcPr anchor="ctr" marL="73152" marT="9144" marB="9144">
+                    <a:solidFill>
+                      <a:srgbClr val="EEF2F9"/>
+                    </a:solidFill>
+                  </a:tcPr>
+                </a:tc>
+                <a:tc>
+                  <a:txBody>
+                    <a:bodyPr/>
+                    <a:lstStyle/>
+                    <a:p>
+                      <a:r>
+                        <a:rPr sz="1150" b="0">
+                          <a:solidFill>
+                            <a:srgbClr val="1A2233"/>
+                          </a:solidFill>
+                          <a:latin typeface="Microsoft JhengHei"/>
+                          <a:ea typeface="Microsoft JhengHei"/>
+                          <a:cs typeface="Microsoft JhengHei"/>
+                        </a:rPr>
+                        <a:t>07/01</a:t>
+                      </a:r>
+                    </a:p>
+                  </a:txBody>
+                  <a:tcPr anchor="ctr" marL="73152" marT="9144" marB="9144">
+                    <a:solidFill>
+                      <a:srgbClr val="EEF2F9"/>
+                    </a:solidFill>
+                  </a:tcPr>
+                </a:tc>
+                <a:tc>
+                  <a:txBody>
+                    <a:bodyPr/>
+                    <a:lstStyle/>
+                    <a:p>
+                      <a:r>
+                        <a:rPr sz="1150" b="1">
+                          <a:solidFill>
+                            <a:srgbClr val="E63946"/>
+                          </a:solidFill>
+                          <a:latin typeface="Microsoft JhengHei"/>
+                          <a:ea typeface="Microsoft JhengHei"/>
+                          <a:cs typeface="Microsoft JhengHei"/>
+                        </a:rPr>
+                        <a:t>駭客攻擊</a:t>
+                      </a:r>
+                    </a:p>
+                  </a:txBody>
+                  <a:tcPr anchor="ctr" marL="73152" marT="9144" marB="9144">
+                    <a:solidFill>
+                      <a:srgbClr val="EEF2F9"/>
+                    </a:solidFill>
+                  </a:tcPr>
+                </a:tc>
+                <a:tc>
+                  <a:txBody>
+                    <a:bodyPr/>
+                    <a:lstStyle/>
+                    <a:p>
+                      <a:r>
+                        <a:rPr sz="1150" b="0">
+                          <a:solidFill>
+                            <a:srgbClr val="1A2233"/>
+                          </a:solidFill>
+                          <a:latin typeface="Microsoft JhengHei"/>
+                          <a:ea typeface="Microsoft JhengHei"/>
+                          <a:cs typeface="Microsoft JhengHei"/>
+                        </a:rPr>
+                        <a:t>—</a:t>
+                      </a:r>
+                    </a:p>
+                  </a:txBody>
+                  <a:tcPr anchor="ctr" marL="73152" marT="9144" marB="9144">
+                    <a:solidFill>
+                      <a:srgbClr val="EEF2F9"/>
+                    </a:solidFill>
+                  </a:tcPr>
+                </a:tc>
+              </a:tr>
+              <a:tr h="384048">
+                <a:tc>
+                  <a:txBody>
+                    <a:bodyPr/>
+                    <a:lstStyle/>
+                    <a:p>
+                      <a:r>
+                        <a:rPr sz="1150" b="0">
+                          <a:solidFill>
+                            <a:srgbClr val="1A2233"/>
+                          </a:solidFill>
+                          <a:latin typeface="Microsoft JhengHei"/>
+                          <a:ea typeface="Microsoft JhengHei"/>
+                          <a:cs typeface="Microsoft JhengHei"/>
+                        </a:rPr>
+                        <a:t>耕興</a:t>
+                      </a:r>
+                    </a:p>
+                  </a:txBody>
+                  <a:tcPr anchor="ctr" marL="73152" marT="9144" marB="9144">
+                    <a:solidFill>
+                      <a:srgbClr val="FFFFFF"/>
+                    </a:solidFill>
+                  </a:tcPr>
+                </a:tc>
+                <a:tc>
+                  <a:txBody>
+                    <a:bodyPr/>
+                    <a:lstStyle/>
+                    <a:p>
+                      <a:r>
+                        <a:rPr sz="1150" b="0">
+                          <a:solidFill>
+                            <a:srgbClr val="1A2233"/>
+                          </a:solidFill>
+                          <a:latin typeface="Microsoft JhengHei"/>
+                          <a:ea typeface="Microsoft JhengHei"/>
+                          <a:cs typeface="Microsoft JhengHei"/>
+                        </a:rPr>
                         <a:t>6146</a:t>
+                      </a:r>
+                    </a:p>
+                  </a:txBody>
+                  <a:tcPr anchor="ctr" marL="73152" marT="9144" marB="9144">
+                    <a:solidFill>
+                      <a:srgbClr val="FFFFFF"/>
+                    </a:solidFill>
+                  </a:tcPr>
+                </a:tc>
+                <a:tc>
+                  <a:txBody>
+                    <a:bodyPr/>
+                    <a:lstStyle/>
+                    <a:p>
+                      <a:r>
+                        <a:rPr sz="1150" b="0">
+                          <a:solidFill>
+                            <a:srgbClr val="1A2233"/>
+                          </a:solidFill>
+                          <a:latin typeface="Microsoft JhengHei"/>
+                          <a:ea typeface="Microsoft JhengHei"/>
+                          <a:cs typeface="Microsoft JhengHei"/>
+                        </a:rPr>
+                        <a:t>06/22</a:t>
+                      </a:r>
+                    </a:p>
+                  </a:txBody>
+                  <a:tcPr anchor="ctr" marL="73152" marT="9144" marB="9144">
+                    <a:solidFill>
+                      <a:srgbClr val="FFFFFF"/>
+                    </a:solidFill>
+                  </a:tcPr>
+                </a:tc>
+                <a:tc>
+                  <a:txBody>
+                    <a:bodyPr/>
+                    <a:lstStyle/>
+                    <a:p>
+                      <a:r>
+                        <a:rPr sz="1150" b="1">
+                          <a:solidFill>
+                            <a:srgbClr val="5C6679"/>
+                          </a:solidFill>
+                          <a:latin typeface="Microsoft JhengHei"/>
+                          <a:ea typeface="Microsoft JhengHei"/>
+                          <a:cs typeface="Microsoft JhengHei"/>
+                        </a:rPr>
+                        <a:t>其他</a:t>
+                      </a:r>
+                    </a:p>
+                  </a:txBody>
+                  <a:tcPr anchor="ctr" marL="73152" marT="9144" marB="9144">
+                    <a:solidFill>
+                      <a:srgbClr val="FFFFFF"/>
+                    </a:solidFill>
+                  </a:tcPr>
+                </a:tc>
+                <a:tc>
+                  <a:txBody>
+                    <a:bodyPr/>
+                    <a:lstStyle/>
+                    <a:p>
+                      <a:r>
+                        <a:rPr sz="1150" b="0">
+                          <a:solidFill>
+                            <a:srgbClr val="1A2233"/>
+                          </a:solidFill>
+                          <a:latin typeface="Microsoft JhengHei"/>
+                          <a:ea typeface="Microsoft JhengHei"/>
+                          <a:cs typeface="Microsoft JhengHei"/>
+                        </a:rPr>
+                        <a:t>受影響之資料檔案留有備份，不影響公司營運、業務進行等。</a:t>
+                      </a:r>
+                    </a:p>
+                  </a:txBody>
+                  <a:tcPr anchor="ctr" marL="73152" marT="9144" marB="9144">
+                    <a:solidFill>
+                      <a:srgbClr val="FFFFFF"/>
+                    </a:solidFill>
+                  </a:tcPr>
+                </a:tc>
+              </a:tr>
+              <a:tr h="384048">
+                <a:tc>
+                  <a:txBody>
+                    <a:bodyPr/>
+                    <a:lstStyle/>
+                    <a:p>
+                      <a:r>
+                        <a:rPr sz="1150" b="0">
+                          <a:solidFill>
+                            <a:srgbClr val="1A2233"/>
+                          </a:solidFill>
+                          <a:latin typeface="Microsoft JhengHei"/>
+                          <a:ea typeface="Microsoft JhengHei"/>
+                          <a:cs typeface="Microsoft JhengHei"/>
+                        </a:rPr>
+                        <a:t>易發</a:t>
+                      </a:r>
+                    </a:p>
+                  </a:txBody>
+                  <a:tcPr anchor="ctr" marL="73152" marT="9144" marB="9144">
+                    <a:solidFill>
+                      <a:srgbClr val="EEF2F9"/>
+                    </a:solidFill>
+                  </a:tcPr>
+                </a:tc>
+                <a:tc>
+                  <a:txBody>
+                    <a:bodyPr/>
+                    <a:lstStyle/>
+                    <a:p>
+                      <a:r>
+                        <a:rPr sz="1150" b="0">
+                          <a:solidFill>
+                            <a:srgbClr val="1A2233"/>
+                          </a:solidFill>
+                          <a:latin typeface="Microsoft JhengHei"/>
+                          <a:ea typeface="Microsoft JhengHei"/>
+                          <a:cs typeface="Microsoft JhengHei"/>
+                        </a:rPr>
+                        <a:t>6425</a:t>
                       </a:r>
                     </a:p>
                   </a:txBody>
@@ -4460,13 +4704,13 @@
                       <a:r>
                         <a:rPr sz="1150" b="1">
                           <a:solidFill>
-                            <a:srgbClr val="5C6679"/>
+                            <a:srgbClr val="F4A261"/>
                           </a:solidFill>
                           <a:latin typeface="Microsoft JhengHei"/>
                           <a:ea typeface="Microsoft JhengHei"/>
                           <a:cs typeface="Microsoft JhengHei"/>
                         </a:rPr>
-                        <a:t>其他</a:t>
+                        <a:t>勒索病毒/加密</a:t>
                       </a:r>
                     </a:p>
                   </a:txBody>
@@ -4490,7 +4734,7 @@
                           <a:ea typeface="Microsoft JhengHei"/>
                           <a:cs typeface="Microsoft JhengHei"/>
                         </a:rPr>
-                        <a:t>受影響之資料檔案留有備份，不影響公司營運、業務進行等。</a:t>
+                        <a:t>目前初步評估對公司運作無重大影響。</a:t>
                       </a:r>
                     </a:p>
                   </a:txBody>
@@ -4516,7 +4760,7 @@
                           <a:ea typeface="Microsoft JhengHei"/>
                           <a:cs typeface="Microsoft JhengHei"/>
                         </a:rPr>
-                        <a:t>易發</a:t>
+                        <a:t>尼得科超眾</a:t>
                       </a:r>
                     </a:p>
                   </a:txBody>
@@ -4540,7 +4784,7 @@
                           <a:ea typeface="Microsoft JhengHei"/>
                           <a:cs typeface="Microsoft JhengHei"/>
                         </a:rPr>
-                        <a:t>6425</a:t>
+                        <a:t>6230</a:t>
                       </a:r>
                     </a:p>
                   </a:txBody>
@@ -4612,7 +4856,7 @@
                           <a:ea typeface="Microsoft JhengHei"/>
                           <a:cs typeface="Microsoft JhengHei"/>
                         </a:rPr>
-                        <a:t>目前初步評估對公司運作無重大影響。</a:t>
+                        <a:t>目前受影響之系統正陸續復原中，對公司整體營運及財務之影響程度尚在評估…</a:t>
                       </a:r>
                     </a:p>
                   </a:txBody>
@@ -4638,7 +4882,7 @@
                           <a:ea typeface="Microsoft JhengHei"/>
                           <a:cs typeface="Microsoft JhengHei"/>
                         </a:rPr>
-                        <a:t>尼得科超眾</a:t>
+                        <a:t>上福</a:t>
                       </a:r>
                     </a:p>
                   </a:txBody>
@@ -4662,7 +4906,7 @@
                           <a:ea typeface="Microsoft JhengHei"/>
                           <a:cs typeface="Microsoft JhengHei"/>
                         </a:rPr>
-                        <a:t>6230</a:t>
+                        <a:t>6128</a:t>
                       </a:r>
                     </a:p>
                   </a:txBody>
@@ -4686,7 +4930,7 @@
                           <a:ea typeface="Microsoft JhengHei"/>
                           <a:cs typeface="Microsoft JhengHei"/>
                         </a:rPr>
-                        <a:t>06/22</a:t>
+                        <a:t>06/16</a:t>
                       </a:r>
                     </a:p>
                   </a:txBody>
@@ -4704,13 +4948,13 @@
                       <a:r>
                         <a:rPr sz="1150" b="1">
                           <a:solidFill>
-                            <a:srgbClr val="F4A261"/>
+                            <a:srgbClr val="5C6679"/>
                           </a:solidFill>
                           <a:latin typeface="Microsoft JhengHei"/>
                           <a:ea typeface="Microsoft JhengHei"/>
                           <a:cs typeface="Microsoft JhengHei"/>
                         </a:rPr>
-                        <a:t>勒索病毒/加密</a:t>
+                        <a:t>其他</a:t>
                       </a:r>
                     </a:p>
                   </a:txBody>
@@ -4734,7 +4978,7 @@
                           <a:ea typeface="Microsoft JhengHei"/>
                           <a:cs typeface="Microsoft JhengHei"/>
                         </a:rPr>
-                        <a:t>目前受影響之系統正陸續復原中，對公司整體營運及財務之影響程度尚在評估…</a:t>
+                        <a:t>目前評估該事件對公司營運造成暫停出貨的影響，現階段出貨已陸續恢復中。</a:t>
                       </a:r>
                     </a:p>
                   </a:txBody>
@@ -4760,7 +5004,7 @@
                           <a:ea typeface="Microsoft JhengHei"/>
                           <a:cs typeface="Microsoft JhengHei"/>
                         </a:rPr>
-                        <a:t>上福</a:t>
+                        <a:t>巨路</a:t>
                       </a:r>
                     </a:p>
                   </a:txBody>
@@ -4784,7 +5028,7 @@
                           <a:ea typeface="Microsoft JhengHei"/>
                           <a:cs typeface="Microsoft JhengHei"/>
                         </a:rPr>
-                        <a:t>6128</a:t>
+                        <a:t>6192</a:t>
                       </a:r>
                     </a:p>
                   </a:txBody>
@@ -4808,7 +5052,7 @@
                           <a:ea typeface="Microsoft JhengHei"/>
                           <a:cs typeface="Microsoft JhengHei"/>
                         </a:rPr>
-                        <a:t>06/16</a:t>
+                        <a:t>06/02</a:t>
                       </a:r>
                     </a:p>
                   </a:txBody>
@@ -4826,13 +5070,13 @@
                       <a:r>
                         <a:rPr sz="1150" b="1">
                           <a:solidFill>
-                            <a:srgbClr val="5C6679"/>
+                            <a:srgbClr val="E63946"/>
                           </a:solidFill>
                           <a:latin typeface="Microsoft JhengHei"/>
                           <a:ea typeface="Microsoft JhengHei"/>
                           <a:cs typeface="Microsoft JhengHei"/>
                         </a:rPr>
-                        <a:t>其他</a:t>
+                        <a:t>駭客攻擊</a:t>
                       </a:r>
                     </a:p>
                   </a:txBody>
@@ -4856,135 +5100,13 @@
                           <a:ea typeface="Microsoft JhengHei"/>
                           <a:cs typeface="Microsoft JhengHei"/>
                         </a:rPr>
-                        <a:t>目前評估該事件對公司營運造成暫停出貨的影響，現階段出貨已陸續恢復中。</a:t>
+                        <a:t>目前評估對公司營運無重大影響，亦未發現個資或機密資料外洩之情事。</a:t>
                       </a:r>
                     </a:p>
                   </a:txBody>
                   <a:tcPr anchor="ctr" marL="73152" marT="9144" marB="9144">
                     <a:solidFill>
                       <a:srgbClr val="FFFFFF"/>
-                    </a:solidFill>
-                  </a:tcPr>
-                </a:tc>
-              </a:tr>
-              <a:tr h="384048">
-                <a:tc>
-                  <a:txBody>
-                    <a:bodyPr/>
-                    <a:lstStyle/>
-                    <a:p>
-                      <a:r>
-                        <a:rPr sz="1150" b="0">
-                          <a:solidFill>
-                            <a:srgbClr val="1A2233"/>
-                          </a:solidFill>
-                          <a:latin typeface="Microsoft JhengHei"/>
-                          <a:ea typeface="Microsoft JhengHei"/>
-                          <a:cs typeface="Microsoft JhengHei"/>
-                        </a:rPr>
-                        <a:t>巨路</a:t>
-                      </a:r>
-                    </a:p>
-                  </a:txBody>
-                  <a:tcPr anchor="ctr" marL="73152" marT="9144" marB="9144">
-                    <a:solidFill>
-                      <a:srgbClr val="EEF2F9"/>
-                    </a:solidFill>
-                  </a:tcPr>
-                </a:tc>
-                <a:tc>
-                  <a:txBody>
-                    <a:bodyPr/>
-                    <a:lstStyle/>
-                    <a:p>
-                      <a:r>
-                        <a:rPr sz="1150" b="0">
-                          <a:solidFill>
-                            <a:srgbClr val="1A2233"/>
-                          </a:solidFill>
-                          <a:latin typeface="Microsoft JhengHei"/>
-                          <a:ea typeface="Microsoft JhengHei"/>
-                          <a:cs typeface="Microsoft JhengHei"/>
-                        </a:rPr>
-                        <a:t>6192</a:t>
-                      </a:r>
-                    </a:p>
-                  </a:txBody>
-                  <a:tcPr anchor="ctr" marL="73152" marT="9144" marB="9144">
-                    <a:solidFill>
-                      <a:srgbClr val="EEF2F9"/>
-                    </a:solidFill>
-                  </a:tcPr>
-                </a:tc>
-                <a:tc>
-                  <a:txBody>
-                    <a:bodyPr/>
-                    <a:lstStyle/>
-                    <a:p>
-                      <a:r>
-                        <a:rPr sz="1150" b="0">
-                          <a:solidFill>
-                            <a:srgbClr val="1A2233"/>
-                          </a:solidFill>
-                          <a:latin typeface="Microsoft JhengHei"/>
-                          <a:ea typeface="Microsoft JhengHei"/>
-                          <a:cs typeface="Microsoft JhengHei"/>
-                        </a:rPr>
-                        <a:t>06/02</a:t>
-                      </a:r>
-                    </a:p>
-                  </a:txBody>
-                  <a:tcPr anchor="ctr" marL="73152" marT="9144" marB="9144">
-                    <a:solidFill>
-                      <a:srgbClr val="EEF2F9"/>
-                    </a:solidFill>
-                  </a:tcPr>
-                </a:tc>
-                <a:tc>
-                  <a:txBody>
-                    <a:bodyPr/>
-                    <a:lstStyle/>
-                    <a:p>
-                      <a:r>
-                        <a:rPr sz="1150" b="1">
-                          <a:solidFill>
-                            <a:srgbClr val="E63946"/>
-                          </a:solidFill>
-                          <a:latin typeface="Microsoft JhengHei"/>
-                          <a:ea typeface="Microsoft JhengHei"/>
-                          <a:cs typeface="Microsoft JhengHei"/>
-                        </a:rPr>
-                        <a:t>駭客攻擊</a:t>
-                      </a:r>
-                    </a:p>
-                  </a:txBody>
-                  <a:tcPr anchor="ctr" marL="73152" marT="9144" marB="9144">
-                    <a:solidFill>
-                      <a:srgbClr val="EEF2F9"/>
-                    </a:solidFill>
-                  </a:tcPr>
-                </a:tc>
-                <a:tc>
-                  <a:txBody>
-                    <a:bodyPr/>
-                    <a:lstStyle/>
-                    <a:p>
-                      <a:r>
-                        <a:rPr sz="1150" b="0">
-                          <a:solidFill>
-                            <a:srgbClr val="1A2233"/>
-                          </a:solidFill>
-                          <a:latin typeface="Microsoft JhengHei"/>
-                          <a:ea typeface="Microsoft JhengHei"/>
-                          <a:cs typeface="Microsoft JhengHei"/>
-                        </a:rPr>
-                        <a:t>目前評估對公司營運無重大影響，亦未發現個資或機密資料外洩之情事。</a:t>
-                      </a:r>
-                    </a:p>
-                  </a:txBody>
-                  <a:tcPr anchor="ctr" marL="73152" marT="9144" marB="9144">
-                    <a:solidFill>
-                      <a:srgbClr val="EEF2F9"/>
                     </a:solidFill>
                   </a:tcPr>
                 </a:tc>
@@ -5782,7 +5904,7 @@
                 <a:ea typeface="Microsoft JhengHei"/>
                 <a:cs typeface="Microsoft JhengHei"/>
               </a:rPr>
-              <a:t>2 起</a:t>
+              <a:t>3 起</a:t>
             </a:r>
           </a:p>
         </p:txBody>
@@ -5819,7 +5941,7 @@
                 <a:ea typeface="Microsoft JhengHei"/>
                 <a:cs typeface="Microsoft JhengHei"/>
               </a:rPr>
-              <a:t>耕興、上福</a:t>
+              <a:t>GOGOLOOK、耕興、上福</a:t>
             </a:r>
           </a:p>
         </p:txBody>
@@ -6007,7 +6129,7 @@
         </p:nvGraphicFramePr>
         <p:xfrm>
           <a:off x="548640" y="1600200"/>
-          <a:ext cx="10789920" cy="3200400"/>
+          <a:ext cx="10789920" cy="3657600"/>
         </p:xfrm>
         <a:graphic>
           <a:graphicData uri="http://schemas.openxmlformats.org/drawingml/2006/table">
@@ -6159,7 +6281,7 @@
                           <a:ea typeface="Microsoft JhengHei"/>
                           <a:cs typeface="Microsoft JhengHei"/>
                         </a:rPr>
-                        <a:t>網家</a:t>
+                        <a:t>GOGOLOOK</a:t>
                       </a:r>
                     </a:p>
                   </a:txBody>
@@ -6183,7 +6305,739 @@
                           <a:ea typeface="Microsoft JhengHei"/>
                           <a:cs typeface="Microsoft JhengHei"/>
                         </a:rPr>
+                        <a:t>6902</a:t>
+                      </a:r>
+                    </a:p>
+                  </a:txBody>
+                  <a:tcPr anchor="ctr" marL="73152" marT="9144" marB="9144">
+                    <a:solidFill>
+                      <a:srgbClr val="FFFFFF"/>
+                    </a:solidFill>
+                  </a:tcPr>
+                </a:tc>
+                <a:tc>
+                  <a:txBody>
+                    <a:bodyPr/>
+                    <a:lstStyle/>
+                    <a:p>
+                      <a:r>
+                        <a:rPr sz="1150" b="1">
+                          <a:solidFill>
+                            <a:srgbClr val="5C6679"/>
+                          </a:solidFill>
+                          <a:latin typeface="Microsoft JhengHei"/>
+                          <a:ea typeface="Microsoft JhengHei"/>
+                          <a:cs typeface="Microsoft JhengHei"/>
+                        </a:rPr>
+                        <a:t>其他</a:t>
+                      </a:r>
+                    </a:p>
+                  </a:txBody>
+                  <a:tcPr anchor="ctr" marL="73152" marT="9144" marB="9144">
+                    <a:solidFill>
+                      <a:srgbClr val="FFFFFF"/>
+                    </a:solidFill>
+                  </a:tcPr>
+                </a:tc>
+                <a:tc>
+                  <a:txBody>
+                    <a:bodyPr/>
+                    <a:lstStyle/>
+                    <a:p>
+                      <a:r>
+                        <a:rPr sz="1150" b="0">
+                          <a:solidFill>
+                            <a:srgbClr val="1A2233"/>
+                          </a:solidFill>
+                          <a:latin typeface="Microsoft JhengHei"/>
+                          <a:ea typeface="Microsoft JhengHei"/>
+                          <a:cs typeface="Microsoft JhengHei"/>
+                        </a:rPr>
+                        <a:t>資誠聯合會計師事務所</a:t>
+                      </a:r>
+                    </a:p>
+                  </a:txBody>
+                  <a:tcPr anchor="ctr" marL="73152" marT="9144" marB="9144">
+                    <a:solidFill>
+                      <a:srgbClr val="FFFFFF"/>
+                    </a:solidFill>
+                  </a:tcPr>
+                </a:tc>
+                <a:tc>
+                  <a:txBody>
+                    <a:bodyPr/>
+                    <a:lstStyle/>
+                    <a:p>
+                      <a:r>
+                        <a:rPr sz="1150" b="0">
+                          <a:solidFill>
+                            <a:srgbClr val="1A2233"/>
+                          </a:solidFill>
+                          <a:latin typeface="Microsoft JhengHei"/>
+                          <a:ea typeface="Microsoft JhengHei"/>
+                          <a:cs typeface="Microsoft JhengHei"/>
+                        </a:rPr>
+                        <a:t>吳尚燉、王昱欣</a:t>
+                      </a:r>
+                    </a:p>
+                  </a:txBody>
+                  <a:tcPr anchor="ctr" marL="73152" marT="9144" marB="9144">
+                    <a:solidFill>
+                      <a:srgbClr val="FFFFFF"/>
+                    </a:solidFill>
+                  </a:tcPr>
+                </a:tc>
+              </a:tr>
+              <a:tr h="457200">
+                <a:tc>
+                  <a:txBody>
+                    <a:bodyPr/>
+                    <a:lstStyle/>
+                    <a:p>
+                      <a:r>
+                        <a:rPr sz="1150" b="0">
+                          <a:solidFill>
+                            <a:srgbClr val="1A2233"/>
+                          </a:solidFill>
+                          <a:latin typeface="Microsoft JhengHei"/>
+                          <a:ea typeface="Microsoft JhengHei"/>
+                          <a:cs typeface="Microsoft JhengHei"/>
+                        </a:rPr>
+                        <a:t>網家</a:t>
+                      </a:r>
+                    </a:p>
+                  </a:txBody>
+                  <a:tcPr anchor="ctr" marL="73152" marT="9144" marB="9144">
+                    <a:solidFill>
+                      <a:srgbClr val="EEF2F9"/>
+                    </a:solidFill>
+                  </a:tcPr>
+                </a:tc>
+                <a:tc>
+                  <a:txBody>
+                    <a:bodyPr/>
+                    <a:lstStyle/>
+                    <a:p>
+                      <a:r>
+                        <a:rPr sz="1150" b="0">
+                          <a:solidFill>
+                            <a:srgbClr val="1A2233"/>
+                          </a:solidFill>
+                          <a:latin typeface="Microsoft JhengHei"/>
+                          <a:ea typeface="Microsoft JhengHei"/>
+                          <a:cs typeface="Microsoft JhengHei"/>
+                        </a:rPr>
                         <a:t>8044</a:t>
+                      </a:r>
+                    </a:p>
+                  </a:txBody>
+                  <a:tcPr anchor="ctr" marL="73152" marT="9144" marB="9144">
+                    <a:solidFill>
+                      <a:srgbClr val="EEF2F9"/>
+                    </a:solidFill>
+                  </a:tcPr>
+                </a:tc>
+                <a:tc>
+                  <a:txBody>
+                    <a:bodyPr/>
+                    <a:lstStyle/>
+                    <a:p>
+                      <a:r>
+                        <a:rPr sz="1150" b="1">
+                          <a:solidFill>
+                            <a:srgbClr val="E63946"/>
+                          </a:solidFill>
+                          <a:latin typeface="Microsoft JhengHei"/>
+                          <a:ea typeface="Microsoft JhengHei"/>
+                          <a:cs typeface="Microsoft JhengHei"/>
+                        </a:rPr>
+                        <a:t>駭客攻擊</a:t>
+                      </a:r>
+                    </a:p>
+                  </a:txBody>
+                  <a:tcPr anchor="ctr" marL="73152" marT="9144" marB="9144">
+                    <a:solidFill>
+                      <a:srgbClr val="EEF2F9"/>
+                    </a:solidFill>
+                  </a:tcPr>
+                </a:tc>
+                <a:tc>
+                  <a:txBody>
+                    <a:bodyPr/>
+                    <a:lstStyle/>
+                    <a:p>
+                      <a:r>
+                        <a:rPr sz="1150" b="0">
+                          <a:solidFill>
+                            <a:srgbClr val="1A2233"/>
+                          </a:solidFill>
+                          <a:latin typeface="Microsoft JhengHei"/>
+                          <a:ea typeface="Microsoft JhengHei"/>
+                          <a:cs typeface="Microsoft JhengHei"/>
+                        </a:rPr>
+                        <a:t>資誠聯合會計師事務所</a:t>
+                      </a:r>
+                    </a:p>
+                  </a:txBody>
+                  <a:tcPr anchor="ctr" marL="73152" marT="9144" marB="9144">
+                    <a:solidFill>
+                      <a:srgbClr val="EEF2F9"/>
+                    </a:solidFill>
+                  </a:tcPr>
+                </a:tc>
+                <a:tc>
+                  <a:txBody>
+                    <a:bodyPr/>
+                    <a:lstStyle/>
+                    <a:p>
+                      <a:r>
+                        <a:rPr sz="1150" b="0">
+                          <a:solidFill>
+                            <a:srgbClr val="1A2233"/>
+                          </a:solidFill>
+                          <a:latin typeface="Microsoft JhengHei"/>
+                          <a:ea typeface="Microsoft JhengHei"/>
+                          <a:cs typeface="Microsoft JhengHei"/>
+                        </a:rPr>
+                        <a:t>廖容翎、梁嬋女</a:t>
+                      </a:r>
+                    </a:p>
+                  </a:txBody>
+                  <a:tcPr anchor="ctr" marL="73152" marT="9144" marB="9144">
+                    <a:solidFill>
+                      <a:srgbClr val="EEF2F9"/>
+                    </a:solidFill>
+                  </a:tcPr>
+                </a:tc>
+              </a:tr>
+              <a:tr h="457200">
+                <a:tc>
+                  <a:txBody>
+                    <a:bodyPr/>
+                    <a:lstStyle/>
+                    <a:p>
+                      <a:r>
+                        <a:rPr sz="1150" b="0">
+                          <a:solidFill>
+                            <a:srgbClr val="1A2233"/>
+                          </a:solidFill>
+                          <a:latin typeface="Microsoft JhengHei"/>
+                          <a:ea typeface="Microsoft JhengHei"/>
+                          <a:cs typeface="Microsoft JhengHei"/>
+                        </a:rPr>
+                        <a:t>耕興</a:t>
+                      </a:r>
+                    </a:p>
+                  </a:txBody>
+                  <a:tcPr anchor="ctr" marL="73152" marT="9144" marB="9144">
+                    <a:solidFill>
+                      <a:srgbClr val="FFFFFF"/>
+                    </a:solidFill>
+                  </a:tcPr>
+                </a:tc>
+                <a:tc>
+                  <a:txBody>
+                    <a:bodyPr/>
+                    <a:lstStyle/>
+                    <a:p>
+                      <a:r>
+                        <a:rPr sz="1150" b="0">
+                          <a:solidFill>
+                            <a:srgbClr val="1A2233"/>
+                          </a:solidFill>
+                          <a:latin typeface="Microsoft JhengHei"/>
+                          <a:ea typeface="Microsoft JhengHei"/>
+                          <a:cs typeface="Microsoft JhengHei"/>
+                        </a:rPr>
+                        <a:t>6146</a:t>
+                      </a:r>
+                    </a:p>
+                  </a:txBody>
+                  <a:tcPr anchor="ctr" marL="73152" marT="9144" marB="9144">
+                    <a:solidFill>
+                      <a:srgbClr val="FFFFFF"/>
+                    </a:solidFill>
+                  </a:tcPr>
+                </a:tc>
+                <a:tc>
+                  <a:txBody>
+                    <a:bodyPr/>
+                    <a:lstStyle/>
+                    <a:p>
+                      <a:r>
+                        <a:rPr sz="1150" b="1">
+                          <a:solidFill>
+                            <a:srgbClr val="5C6679"/>
+                          </a:solidFill>
+                          <a:latin typeface="Microsoft JhengHei"/>
+                          <a:ea typeface="Microsoft JhengHei"/>
+                          <a:cs typeface="Microsoft JhengHei"/>
+                        </a:rPr>
+                        <a:t>其他</a:t>
+                      </a:r>
+                    </a:p>
+                  </a:txBody>
+                  <a:tcPr anchor="ctr" marL="73152" marT="9144" marB="9144">
+                    <a:solidFill>
+                      <a:srgbClr val="FFFFFF"/>
+                    </a:solidFill>
+                  </a:tcPr>
+                </a:tc>
+                <a:tc>
+                  <a:txBody>
+                    <a:bodyPr/>
+                    <a:lstStyle/>
+                    <a:p>
+                      <a:r>
+                        <a:rPr sz="1150" b="0">
+                          <a:solidFill>
+                            <a:srgbClr val="1A2233"/>
+                          </a:solidFill>
+                          <a:latin typeface="Microsoft JhengHei"/>
+                          <a:ea typeface="Microsoft JhengHei"/>
+                          <a:cs typeface="Microsoft JhengHei"/>
+                        </a:rPr>
+                        <a:t>勤業眾信聯合會計師事務所</a:t>
+                      </a:r>
+                    </a:p>
+                  </a:txBody>
+                  <a:tcPr anchor="ctr" marL="73152" marT="9144" marB="9144">
+                    <a:solidFill>
+                      <a:srgbClr val="FFFFFF"/>
+                    </a:solidFill>
+                  </a:tcPr>
+                </a:tc>
+                <a:tc>
+                  <a:txBody>
+                    <a:bodyPr/>
+                    <a:lstStyle/>
+                    <a:p>
+                      <a:r>
+                        <a:rPr sz="1150" b="0">
+                          <a:solidFill>
+                            <a:srgbClr val="1A2233"/>
+                          </a:solidFill>
+                          <a:latin typeface="Microsoft JhengHei"/>
+                          <a:ea typeface="Microsoft JhengHei"/>
+                          <a:cs typeface="Microsoft JhengHei"/>
+                        </a:rPr>
+                        <a:t>黃毅民、陳文香</a:t>
+                      </a:r>
+                    </a:p>
+                  </a:txBody>
+                  <a:tcPr anchor="ctr" marL="73152" marT="9144" marB="9144">
+                    <a:solidFill>
+                      <a:srgbClr val="FFFFFF"/>
+                    </a:solidFill>
+                  </a:tcPr>
+                </a:tc>
+              </a:tr>
+              <a:tr h="457200">
+                <a:tc>
+                  <a:txBody>
+                    <a:bodyPr/>
+                    <a:lstStyle/>
+                    <a:p>
+                      <a:r>
+                        <a:rPr sz="1150" b="0">
+                          <a:solidFill>
+                            <a:srgbClr val="1A2233"/>
+                          </a:solidFill>
+                          <a:latin typeface="Microsoft JhengHei"/>
+                          <a:ea typeface="Microsoft JhengHei"/>
+                          <a:cs typeface="Microsoft JhengHei"/>
+                        </a:rPr>
+                        <a:t>易發</a:t>
+                      </a:r>
+                    </a:p>
+                  </a:txBody>
+                  <a:tcPr anchor="ctr" marL="73152" marT="9144" marB="9144">
+                    <a:solidFill>
+                      <a:srgbClr val="EEF2F9"/>
+                    </a:solidFill>
+                  </a:tcPr>
+                </a:tc>
+                <a:tc>
+                  <a:txBody>
+                    <a:bodyPr/>
+                    <a:lstStyle/>
+                    <a:p>
+                      <a:r>
+                        <a:rPr sz="1150" b="0">
+                          <a:solidFill>
+                            <a:srgbClr val="1A2233"/>
+                          </a:solidFill>
+                          <a:latin typeface="Microsoft JhengHei"/>
+                          <a:ea typeface="Microsoft JhengHei"/>
+                          <a:cs typeface="Microsoft JhengHei"/>
+                        </a:rPr>
+                        <a:t>6425</a:t>
+                      </a:r>
+                    </a:p>
+                  </a:txBody>
+                  <a:tcPr anchor="ctr" marL="73152" marT="9144" marB="9144">
+                    <a:solidFill>
+                      <a:srgbClr val="EEF2F9"/>
+                    </a:solidFill>
+                  </a:tcPr>
+                </a:tc>
+                <a:tc>
+                  <a:txBody>
+                    <a:bodyPr/>
+                    <a:lstStyle/>
+                    <a:p>
+                      <a:r>
+                        <a:rPr sz="1150" b="1">
+                          <a:solidFill>
+                            <a:srgbClr val="F4A261"/>
+                          </a:solidFill>
+                          <a:latin typeface="Microsoft JhengHei"/>
+                          <a:ea typeface="Microsoft JhengHei"/>
+                          <a:cs typeface="Microsoft JhengHei"/>
+                        </a:rPr>
+                        <a:t>勒索病毒/加密</a:t>
+                      </a:r>
+                    </a:p>
+                  </a:txBody>
+                  <a:tcPr anchor="ctr" marL="73152" marT="9144" marB="9144">
+                    <a:solidFill>
+                      <a:srgbClr val="EEF2F9"/>
+                    </a:solidFill>
+                  </a:tcPr>
+                </a:tc>
+                <a:tc>
+                  <a:txBody>
+                    <a:bodyPr/>
+                    <a:lstStyle/>
+                    <a:p>
+                      <a:r>
+                        <a:rPr sz="1150" b="0">
+                          <a:solidFill>
+                            <a:srgbClr val="1A2233"/>
+                          </a:solidFill>
+                          <a:latin typeface="Microsoft JhengHei"/>
+                          <a:ea typeface="Microsoft JhengHei"/>
+                          <a:cs typeface="Microsoft JhengHei"/>
+                        </a:rPr>
+                        <a:t>勤業眾信聯合會計師事務所</a:t>
+                      </a:r>
+                    </a:p>
+                  </a:txBody>
+                  <a:tcPr anchor="ctr" marL="73152" marT="9144" marB="9144">
+                    <a:solidFill>
+                      <a:srgbClr val="EEF2F9"/>
+                    </a:solidFill>
+                  </a:tcPr>
+                </a:tc>
+                <a:tc>
+                  <a:txBody>
+                    <a:bodyPr/>
+                    <a:lstStyle/>
+                    <a:p>
+                      <a:r>
+                        <a:rPr sz="1150" b="0">
+                          <a:solidFill>
+                            <a:srgbClr val="1A2233"/>
+                          </a:solidFill>
+                          <a:latin typeface="Microsoft JhengHei"/>
+                          <a:ea typeface="Microsoft JhengHei"/>
+                          <a:cs typeface="Microsoft JhengHei"/>
+                        </a:rPr>
+                        <a:t>張至誼、洪國田</a:t>
+                      </a:r>
+                    </a:p>
+                  </a:txBody>
+                  <a:tcPr anchor="ctr" marL="73152" marT="9144" marB="9144">
+                    <a:solidFill>
+                      <a:srgbClr val="EEF2F9"/>
+                    </a:solidFill>
+                  </a:tcPr>
+                </a:tc>
+              </a:tr>
+              <a:tr h="457200">
+                <a:tc>
+                  <a:txBody>
+                    <a:bodyPr/>
+                    <a:lstStyle/>
+                    <a:p>
+                      <a:r>
+                        <a:rPr sz="1150" b="0">
+                          <a:solidFill>
+                            <a:srgbClr val="1A2233"/>
+                          </a:solidFill>
+                          <a:latin typeface="Microsoft JhengHei"/>
+                          <a:ea typeface="Microsoft JhengHei"/>
+                          <a:cs typeface="Microsoft JhengHei"/>
+                        </a:rPr>
+                        <a:t>尼得科超眾</a:t>
+                      </a:r>
+                    </a:p>
+                  </a:txBody>
+                  <a:tcPr anchor="ctr" marL="73152" marT="9144" marB="9144">
+                    <a:solidFill>
+                      <a:srgbClr val="FFFFFF"/>
+                    </a:solidFill>
+                  </a:tcPr>
+                </a:tc>
+                <a:tc>
+                  <a:txBody>
+                    <a:bodyPr/>
+                    <a:lstStyle/>
+                    <a:p>
+                      <a:r>
+                        <a:rPr sz="1150" b="0">
+                          <a:solidFill>
+                            <a:srgbClr val="1A2233"/>
+                          </a:solidFill>
+                          <a:latin typeface="Microsoft JhengHei"/>
+                          <a:ea typeface="Microsoft JhengHei"/>
+                          <a:cs typeface="Microsoft JhengHei"/>
+                        </a:rPr>
+                        <a:t>6230</a:t>
+                      </a:r>
+                    </a:p>
+                  </a:txBody>
+                  <a:tcPr anchor="ctr" marL="73152" marT="9144" marB="9144">
+                    <a:solidFill>
+                      <a:srgbClr val="FFFFFF"/>
+                    </a:solidFill>
+                  </a:tcPr>
+                </a:tc>
+                <a:tc>
+                  <a:txBody>
+                    <a:bodyPr/>
+                    <a:lstStyle/>
+                    <a:p>
+                      <a:r>
+                        <a:rPr sz="1150" b="1">
+                          <a:solidFill>
+                            <a:srgbClr val="F4A261"/>
+                          </a:solidFill>
+                          <a:latin typeface="Microsoft JhengHei"/>
+                          <a:ea typeface="Microsoft JhengHei"/>
+                          <a:cs typeface="Microsoft JhengHei"/>
+                        </a:rPr>
+                        <a:t>勒索病毒/加密</a:t>
+                      </a:r>
+                    </a:p>
+                  </a:txBody>
+                  <a:tcPr anchor="ctr" marL="73152" marT="9144" marB="9144">
+                    <a:solidFill>
+                      <a:srgbClr val="FFFFFF"/>
+                    </a:solidFill>
+                  </a:tcPr>
+                </a:tc>
+                <a:tc>
+                  <a:txBody>
+                    <a:bodyPr/>
+                    <a:lstStyle/>
+                    <a:p>
+                      <a:r>
+                        <a:rPr sz="1150" b="0">
+                          <a:solidFill>
+                            <a:srgbClr val="1A2233"/>
+                          </a:solidFill>
+                          <a:latin typeface="Microsoft JhengHei"/>
+                          <a:ea typeface="Microsoft JhengHei"/>
+                          <a:cs typeface="Microsoft JhengHei"/>
+                        </a:rPr>
+                        <a:t>安侯建業聯合會計師事務所</a:t>
+                      </a:r>
+                    </a:p>
+                  </a:txBody>
+                  <a:tcPr anchor="ctr" marL="73152" marT="9144" marB="9144">
+                    <a:solidFill>
+                      <a:srgbClr val="FFFFFF"/>
+                    </a:solidFill>
+                  </a:tcPr>
+                </a:tc>
+                <a:tc>
+                  <a:txBody>
+                    <a:bodyPr/>
+                    <a:lstStyle/>
+                    <a:p>
+                      <a:r>
+                        <a:rPr sz="1150" b="0">
+                          <a:solidFill>
+                            <a:srgbClr val="1A2233"/>
+                          </a:solidFill>
+                          <a:latin typeface="Microsoft JhengHei"/>
+                          <a:ea typeface="Microsoft JhengHei"/>
+                          <a:cs typeface="Microsoft JhengHei"/>
+                        </a:rPr>
+                        <a:t>郭欣頤、張肇文</a:t>
+                      </a:r>
+                    </a:p>
+                  </a:txBody>
+                  <a:tcPr anchor="ctr" marL="73152" marT="9144" marB="9144">
+                    <a:solidFill>
+                      <a:srgbClr val="FFFFFF"/>
+                    </a:solidFill>
+                  </a:tcPr>
+                </a:tc>
+              </a:tr>
+              <a:tr h="457200">
+                <a:tc>
+                  <a:txBody>
+                    <a:bodyPr/>
+                    <a:lstStyle/>
+                    <a:p>
+                      <a:r>
+                        <a:rPr sz="1150" b="0">
+                          <a:solidFill>
+                            <a:srgbClr val="1A2233"/>
+                          </a:solidFill>
+                          <a:latin typeface="Microsoft JhengHei"/>
+                          <a:ea typeface="Microsoft JhengHei"/>
+                          <a:cs typeface="Microsoft JhengHei"/>
+                        </a:rPr>
+                        <a:t>上福</a:t>
+                      </a:r>
+                    </a:p>
+                  </a:txBody>
+                  <a:tcPr anchor="ctr" marL="73152" marT="9144" marB="9144">
+                    <a:solidFill>
+                      <a:srgbClr val="EEF2F9"/>
+                    </a:solidFill>
+                  </a:tcPr>
+                </a:tc>
+                <a:tc>
+                  <a:txBody>
+                    <a:bodyPr/>
+                    <a:lstStyle/>
+                    <a:p>
+                      <a:r>
+                        <a:rPr sz="1150" b="0">
+                          <a:solidFill>
+                            <a:srgbClr val="1A2233"/>
+                          </a:solidFill>
+                          <a:latin typeface="Microsoft JhengHei"/>
+                          <a:ea typeface="Microsoft JhengHei"/>
+                          <a:cs typeface="Microsoft JhengHei"/>
+                        </a:rPr>
+                        <a:t>6128</a:t>
+                      </a:r>
+                    </a:p>
+                  </a:txBody>
+                  <a:tcPr anchor="ctr" marL="73152" marT="9144" marB="9144">
+                    <a:solidFill>
+                      <a:srgbClr val="EEF2F9"/>
+                    </a:solidFill>
+                  </a:tcPr>
+                </a:tc>
+                <a:tc>
+                  <a:txBody>
+                    <a:bodyPr/>
+                    <a:lstStyle/>
+                    <a:p>
+                      <a:r>
+                        <a:rPr sz="1150" b="1">
+                          <a:solidFill>
+                            <a:srgbClr val="5C6679"/>
+                          </a:solidFill>
+                          <a:latin typeface="Microsoft JhengHei"/>
+                          <a:ea typeface="Microsoft JhengHei"/>
+                          <a:cs typeface="Microsoft JhengHei"/>
+                        </a:rPr>
+                        <a:t>其他</a:t>
+                      </a:r>
+                    </a:p>
+                  </a:txBody>
+                  <a:tcPr anchor="ctr" marL="73152" marT="9144" marB="9144">
+                    <a:solidFill>
+                      <a:srgbClr val="EEF2F9"/>
+                    </a:solidFill>
+                  </a:tcPr>
+                </a:tc>
+                <a:tc>
+                  <a:txBody>
+                    <a:bodyPr/>
+                    <a:lstStyle/>
+                    <a:p>
+                      <a:r>
+                        <a:rPr sz="1150" b="0">
+                          <a:solidFill>
+                            <a:srgbClr val="1A2233"/>
+                          </a:solidFill>
+                          <a:latin typeface="Microsoft JhengHei"/>
+                          <a:ea typeface="Microsoft JhengHei"/>
+                          <a:cs typeface="Microsoft JhengHei"/>
+                        </a:rPr>
+                        <a:t>安永聯合會計師事務所</a:t>
+                      </a:r>
+                    </a:p>
+                  </a:txBody>
+                  <a:tcPr anchor="ctr" marL="73152" marT="9144" marB="9144">
+                    <a:solidFill>
+                      <a:srgbClr val="EEF2F9"/>
+                    </a:solidFill>
+                  </a:tcPr>
+                </a:tc>
+                <a:tc>
+                  <a:txBody>
+                    <a:bodyPr/>
+                    <a:lstStyle/>
+                    <a:p>
+                      <a:r>
+                        <a:rPr sz="1150" b="0">
+                          <a:solidFill>
+                            <a:srgbClr val="1A2233"/>
+                          </a:solidFill>
+                          <a:latin typeface="Microsoft JhengHei"/>
+                          <a:ea typeface="Microsoft JhengHei"/>
+                          <a:cs typeface="Microsoft JhengHei"/>
+                        </a:rPr>
+                        <a:t>黃宇廷、賴書晨</a:t>
+                      </a:r>
+                    </a:p>
+                  </a:txBody>
+                  <a:tcPr anchor="ctr" marL="73152" marT="9144" marB="9144">
+                    <a:solidFill>
+                      <a:srgbClr val="EEF2F9"/>
+                    </a:solidFill>
+                  </a:tcPr>
+                </a:tc>
+              </a:tr>
+              <a:tr h="457200">
+                <a:tc>
+                  <a:txBody>
+                    <a:bodyPr/>
+                    <a:lstStyle/>
+                    <a:p>
+                      <a:r>
+                        <a:rPr sz="1150" b="0">
+                          <a:solidFill>
+                            <a:srgbClr val="1A2233"/>
+                          </a:solidFill>
+                          <a:latin typeface="Microsoft JhengHei"/>
+                          <a:ea typeface="Microsoft JhengHei"/>
+                          <a:cs typeface="Microsoft JhengHei"/>
+                        </a:rPr>
+                        <a:t>巨路</a:t>
+                      </a:r>
+                    </a:p>
+                  </a:txBody>
+                  <a:tcPr anchor="ctr" marL="73152" marT="9144" marB="9144">
+                    <a:solidFill>
+                      <a:srgbClr val="FFFFFF"/>
+                    </a:solidFill>
+                  </a:tcPr>
+                </a:tc>
+                <a:tc>
+                  <a:txBody>
+                    <a:bodyPr/>
+                    <a:lstStyle/>
+                    <a:p>
+                      <a:r>
+                        <a:rPr sz="1150" b="0">
+                          <a:solidFill>
+                            <a:srgbClr val="1A2233"/>
+                          </a:solidFill>
+                          <a:latin typeface="Microsoft JhengHei"/>
+                          <a:ea typeface="Microsoft JhengHei"/>
+                          <a:cs typeface="Microsoft JhengHei"/>
+                        </a:rPr>
+                        <a:t>6192</a:t>
                       </a:r>
                     </a:p>
                   </a:txBody>
@@ -6231,250 +7085,6 @@
                           <a:ea typeface="Microsoft JhengHei"/>
                           <a:cs typeface="Microsoft JhengHei"/>
                         </a:rPr>
-                        <a:t>資誠聯合會計師事務所</a:t>
-                      </a:r>
-                    </a:p>
-                  </a:txBody>
-                  <a:tcPr anchor="ctr" marL="73152" marT="9144" marB="9144">
-                    <a:solidFill>
-                      <a:srgbClr val="FFFFFF"/>
-                    </a:solidFill>
-                  </a:tcPr>
-                </a:tc>
-                <a:tc>
-                  <a:txBody>
-                    <a:bodyPr/>
-                    <a:lstStyle/>
-                    <a:p>
-                      <a:r>
-                        <a:rPr sz="1150" b="0">
-                          <a:solidFill>
-                            <a:srgbClr val="1A2233"/>
-                          </a:solidFill>
-                          <a:latin typeface="Microsoft JhengHei"/>
-                          <a:ea typeface="Microsoft JhengHei"/>
-                          <a:cs typeface="Microsoft JhengHei"/>
-                        </a:rPr>
-                        <a:t>廖容翎、梁嬋女</a:t>
-                      </a:r>
-                    </a:p>
-                  </a:txBody>
-                  <a:tcPr anchor="ctr" marL="73152" marT="9144" marB="9144">
-                    <a:solidFill>
-                      <a:srgbClr val="FFFFFF"/>
-                    </a:solidFill>
-                  </a:tcPr>
-                </a:tc>
-              </a:tr>
-              <a:tr h="457200">
-                <a:tc>
-                  <a:txBody>
-                    <a:bodyPr/>
-                    <a:lstStyle/>
-                    <a:p>
-                      <a:r>
-                        <a:rPr sz="1150" b="0">
-                          <a:solidFill>
-                            <a:srgbClr val="1A2233"/>
-                          </a:solidFill>
-                          <a:latin typeface="Microsoft JhengHei"/>
-                          <a:ea typeface="Microsoft JhengHei"/>
-                          <a:cs typeface="Microsoft JhengHei"/>
-                        </a:rPr>
-                        <a:t>耕興</a:t>
-                      </a:r>
-                    </a:p>
-                  </a:txBody>
-                  <a:tcPr anchor="ctr" marL="73152" marT="9144" marB="9144">
-                    <a:solidFill>
-                      <a:srgbClr val="EEF2F9"/>
-                    </a:solidFill>
-                  </a:tcPr>
-                </a:tc>
-                <a:tc>
-                  <a:txBody>
-                    <a:bodyPr/>
-                    <a:lstStyle/>
-                    <a:p>
-                      <a:r>
-                        <a:rPr sz="1150" b="0">
-                          <a:solidFill>
-                            <a:srgbClr val="1A2233"/>
-                          </a:solidFill>
-                          <a:latin typeface="Microsoft JhengHei"/>
-                          <a:ea typeface="Microsoft JhengHei"/>
-                          <a:cs typeface="Microsoft JhengHei"/>
-                        </a:rPr>
-                        <a:t>6146</a:t>
-                      </a:r>
-                    </a:p>
-                  </a:txBody>
-                  <a:tcPr anchor="ctr" marL="73152" marT="9144" marB="9144">
-                    <a:solidFill>
-                      <a:srgbClr val="EEF2F9"/>
-                    </a:solidFill>
-                  </a:tcPr>
-                </a:tc>
-                <a:tc>
-                  <a:txBody>
-                    <a:bodyPr/>
-                    <a:lstStyle/>
-                    <a:p>
-                      <a:r>
-                        <a:rPr sz="1150" b="1">
-                          <a:solidFill>
-                            <a:srgbClr val="5C6679"/>
-                          </a:solidFill>
-                          <a:latin typeface="Microsoft JhengHei"/>
-                          <a:ea typeface="Microsoft JhengHei"/>
-                          <a:cs typeface="Microsoft JhengHei"/>
-                        </a:rPr>
-                        <a:t>其他</a:t>
-                      </a:r>
-                    </a:p>
-                  </a:txBody>
-                  <a:tcPr anchor="ctr" marL="73152" marT="9144" marB="9144">
-                    <a:solidFill>
-                      <a:srgbClr val="EEF2F9"/>
-                    </a:solidFill>
-                  </a:tcPr>
-                </a:tc>
-                <a:tc>
-                  <a:txBody>
-                    <a:bodyPr/>
-                    <a:lstStyle/>
-                    <a:p>
-                      <a:r>
-                        <a:rPr sz="1150" b="0">
-                          <a:solidFill>
-                            <a:srgbClr val="1A2233"/>
-                          </a:solidFill>
-                          <a:latin typeface="Microsoft JhengHei"/>
-                          <a:ea typeface="Microsoft JhengHei"/>
-                          <a:cs typeface="Microsoft JhengHei"/>
-                        </a:rPr>
-                        <a:t>勤業眾信聯合會計師事務所</a:t>
-                      </a:r>
-                    </a:p>
-                  </a:txBody>
-                  <a:tcPr anchor="ctr" marL="73152" marT="9144" marB="9144">
-                    <a:solidFill>
-                      <a:srgbClr val="EEF2F9"/>
-                    </a:solidFill>
-                  </a:tcPr>
-                </a:tc>
-                <a:tc>
-                  <a:txBody>
-                    <a:bodyPr/>
-                    <a:lstStyle/>
-                    <a:p>
-                      <a:r>
-                        <a:rPr sz="1150" b="0">
-                          <a:solidFill>
-                            <a:srgbClr val="1A2233"/>
-                          </a:solidFill>
-                          <a:latin typeface="Microsoft JhengHei"/>
-                          <a:ea typeface="Microsoft JhengHei"/>
-                          <a:cs typeface="Microsoft JhengHei"/>
-                        </a:rPr>
-                        <a:t>黃毅民、陳文香</a:t>
-                      </a:r>
-                    </a:p>
-                  </a:txBody>
-                  <a:tcPr anchor="ctr" marL="73152" marT="9144" marB="9144">
-                    <a:solidFill>
-                      <a:srgbClr val="EEF2F9"/>
-                    </a:solidFill>
-                  </a:tcPr>
-                </a:tc>
-              </a:tr>
-              <a:tr h="457200">
-                <a:tc>
-                  <a:txBody>
-                    <a:bodyPr/>
-                    <a:lstStyle/>
-                    <a:p>
-                      <a:r>
-                        <a:rPr sz="1150" b="0">
-                          <a:solidFill>
-                            <a:srgbClr val="1A2233"/>
-                          </a:solidFill>
-                          <a:latin typeface="Microsoft JhengHei"/>
-                          <a:ea typeface="Microsoft JhengHei"/>
-                          <a:cs typeface="Microsoft JhengHei"/>
-                        </a:rPr>
-                        <a:t>易發</a:t>
-                      </a:r>
-                    </a:p>
-                  </a:txBody>
-                  <a:tcPr anchor="ctr" marL="73152" marT="9144" marB="9144">
-                    <a:solidFill>
-                      <a:srgbClr val="FFFFFF"/>
-                    </a:solidFill>
-                  </a:tcPr>
-                </a:tc>
-                <a:tc>
-                  <a:txBody>
-                    <a:bodyPr/>
-                    <a:lstStyle/>
-                    <a:p>
-                      <a:r>
-                        <a:rPr sz="1150" b="0">
-                          <a:solidFill>
-                            <a:srgbClr val="1A2233"/>
-                          </a:solidFill>
-                          <a:latin typeface="Microsoft JhengHei"/>
-                          <a:ea typeface="Microsoft JhengHei"/>
-                          <a:cs typeface="Microsoft JhengHei"/>
-                        </a:rPr>
-                        <a:t>6425</a:t>
-                      </a:r>
-                    </a:p>
-                  </a:txBody>
-                  <a:tcPr anchor="ctr" marL="73152" marT="9144" marB="9144">
-                    <a:solidFill>
-                      <a:srgbClr val="FFFFFF"/>
-                    </a:solidFill>
-                  </a:tcPr>
-                </a:tc>
-                <a:tc>
-                  <a:txBody>
-                    <a:bodyPr/>
-                    <a:lstStyle/>
-                    <a:p>
-                      <a:r>
-                        <a:rPr sz="1150" b="1">
-                          <a:solidFill>
-                            <a:srgbClr val="F4A261"/>
-                          </a:solidFill>
-                          <a:latin typeface="Microsoft JhengHei"/>
-                          <a:ea typeface="Microsoft JhengHei"/>
-                          <a:cs typeface="Microsoft JhengHei"/>
-                        </a:rPr>
-                        <a:t>勒索病毒/加密</a:t>
-                      </a:r>
-                    </a:p>
-                  </a:txBody>
-                  <a:tcPr anchor="ctr" marL="73152" marT="9144" marB="9144">
-                    <a:solidFill>
-                      <a:srgbClr val="FFFFFF"/>
-                    </a:solidFill>
-                  </a:tcPr>
-                </a:tc>
-                <a:tc>
-                  <a:txBody>
-                    <a:bodyPr/>
-                    <a:lstStyle/>
-                    <a:p>
-                      <a:r>
-                        <a:rPr sz="1150" b="0">
-                          <a:solidFill>
-                            <a:srgbClr val="1A2233"/>
-                          </a:solidFill>
-                          <a:latin typeface="Microsoft JhengHei"/>
-                          <a:ea typeface="Microsoft JhengHei"/>
-                          <a:cs typeface="Microsoft JhengHei"/>
-                        </a:rPr>
                         <a:t>勤業眾信聯合會計師事務所</a:t>
                       </a:r>
                     </a:p>
@@ -6499,379 +7109,13 @@
                           <a:ea typeface="Microsoft JhengHei"/>
                           <a:cs typeface="Microsoft JhengHei"/>
                         </a:rPr>
-                        <a:t>張至誼、洪國田</a:t>
+                        <a:t>劉建良、張麗君</a:t>
                       </a:r>
                     </a:p>
                   </a:txBody>
                   <a:tcPr anchor="ctr" marL="73152" marT="9144" marB="9144">
                     <a:solidFill>
                       <a:srgbClr val="FFFFFF"/>
-                    </a:solidFill>
-                  </a:tcPr>
-                </a:tc>
-              </a:tr>
-              <a:tr h="457200">
-                <a:tc>
-                  <a:txBody>
-                    <a:bodyPr/>
-                    <a:lstStyle/>
-                    <a:p>
-                      <a:r>
-                        <a:rPr sz="1150" b="0">
-                          <a:solidFill>
-                            <a:srgbClr val="1A2233"/>
-                          </a:solidFill>
-                          <a:latin typeface="Microsoft JhengHei"/>
-                          <a:ea typeface="Microsoft JhengHei"/>
-                          <a:cs typeface="Microsoft JhengHei"/>
-                        </a:rPr>
-                        <a:t>尼得科超眾</a:t>
-                      </a:r>
-                    </a:p>
-                  </a:txBody>
-                  <a:tcPr anchor="ctr" marL="73152" marT="9144" marB="9144">
-                    <a:solidFill>
-                      <a:srgbClr val="EEF2F9"/>
-                    </a:solidFill>
-                  </a:tcPr>
-                </a:tc>
-                <a:tc>
-                  <a:txBody>
-                    <a:bodyPr/>
-                    <a:lstStyle/>
-                    <a:p>
-                      <a:r>
-                        <a:rPr sz="1150" b="0">
-                          <a:solidFill>
-                            <a:srgbClr val="1A2233"/>
-                          </a:solidFill>
-                          <a:latin typeface="Microsoft JhengHei"/>
-                          <a:ea typeface="Microsoft JhengHei"/>
-                          <a:cs typeface="Microsoft JhengHei"/>
-                        </a:rPr>
-                        <a:t>6230</a:t>
-                      </a:r>
-                    </a:p>
-                  </a:txBody>
-                  <a:tcPr anchor="ctr" marL="73152" marT="9144" marB="9144">
-                    <a:solidFill>
-                      <a:srgbClr val="EEF2F9"/>
-                    </a:solidFill>
-                  </a:tcPr>
-                </a:tc>
-                <a:tc>
-                  <a:txBody>
-                    <a:bodyPr/>
-                    <a:lstStyle/>
-                    <a:p>
-                      <a:r>
-                        <a:rPr sz="1150" b="1">
-                          <a:solidFill>
-                            <a:srgbClr val="F4A261"/>
-                          </a:solidFill>
-                          <a:latin typeface="Microsoft JhengHei"/>
-                          <a:ea typeface="Microsoft JhengHei"/>
-                          <a:cs typeface="Microsoft JhengHei"/>
-                        </a:rPr>
-                        <a:t>勒索病毒/加密</a:t>
-                      </a:r>
-                    </a:p>
-                  </a:txBody>
-                  <a:tcPr anchor="ctr" marL="73152" marT="9144" marB="9144">
-                    <a:solidFill>
-                      <a:srgbClr val="EEF2F9"/>
-                    </a:solidFill>
-                  </a:tcPr>
-                </a:tc>
-                <a:tc>
-                  <a:txBody>
-                    <a:bodyPr/>
-                    <a:lstStyle/>
-                    <a:p>
-                      <a:r>
-                        <a:rPr sz="1150" b="0">
-                          <a:solidFill>
-                            <a:srgbClr val="1A2233"/>
-                          </a:solidFill>
-                          <a:latin typeface="Microsoft JhengHei"/>
-                          <a:ea typeface="Microsoft JhengHei"/>
-                          <a:cs typeface="Microsoft JhengHei"/>
-                        </a:rPr>
-                        <a:t>安侯建業聯合會計師事務所</a:t>
-                      </a:r>
-                    </a:p>
-                  </a:txBody>
-                  <a:tcPr anchor="ctr" marL="73152" marT="9144" marB="9144">
-                    <a:solidFill>
-                      <a:srgbClr val="EEF2F9"/>
-                    </a:solidFill>
-                  </a:tcPr>
-                </a:tc>
-                <a:tc>
-                  <a:txBody>
-                    <a:bodyPr/>
-                    <a:lstStyle/>
-                    <a:p>
-                      <a:r>
-                        <a:rPr sz="1150" b="0">
-                          <a:solidFill>
-                            <a:srgbClr val="1A2233"/>
-                          </a:solidFill>
-                          <a:latin typeface="Microsoft JhengHei"/>
-                          <a:ea typeface="Microsoft JhengHei"/>
-                          <a:cs typeface="Microsoft JhengHei"/>
-                        </a:rPr>
-                        <a:t>郭欣頤、張肇文</a:t>
-                      </a:r>
-                    </a:p>
-                  </a:txBody>
-                  <a:tcPr anchor="ctr" marL="73152" marT="9144" marB="9144">
-                    <a:solidFill>
-                      <a:srgbClr val="EEF2F9"/>
-                    </a:solidFill>
-                  </a:tcPr>
-                </a:tc>
-              </a:tr>
-              <a:tr h="457200">
-                <a:tc>
-                  <a:txBody>
-                    <a:bodyPr/>
-                    <a:lstStyle/>
-                    <a:p>
-                      <a:r>
-                        <a:rPr sz="1150" b="0">
-                          <a:solidFill>
-                            <a:srgbClr val="1A2233"/>
-                          </a:solidFill>
-                          <a:latin typeface="Microsoft JhengHei"/>
-                          <a:ea typeface="Microsoft JhengHei"/>
-                          <a:cs typeface="Microsoft JhengHei"/>
-                        </a:rPr>
-                        <a:t>上福</a:t>
-                      </a:r>
-                    </a:p>
-                  </a:txBody>
-                  <a:tcPr anchor="ctr" marL="73152" marT="9144" marB="9144">
-                    <a:solidFill>
-                      <a:srgbClr val="FFFFFF"/>
-                    </a:solidFill>
-                  </a:tcPr>
-                </a:tc>
-                <a:tc>
-                  <a:txBody>
-                    <a:bodyPr/>
-                    <a:lstStyle/>
-                    <a:p>
-                      <a:r>
-                        <a:rPr sz="1150" b="0">
-                          <a:solidFill>
-                            <a:srgbClr val="1A2233"/>
-                          </a:solidFill>
-                          <a:latin typeface="Microsoft JhengHei"/>
-                          <a:ea typeface="Microsoft JhengHei"/>
-                          <a:cs typeface="Microsoft JhengHei"/>
-                        </a:rPr>
-                        <a:t>6128</a:t>
-                      </a:r>
-                    </a:p>
-                  </a:txBody>
-                  <a:tcPr anchor="ctr" marL="73152" marT="9144" marB="9144">
-                    <a:solidFill>
-                      <a:srgbClr val="FFFFFF"/>
-                    </a:solidFill>
-                  </a:tcPr>
-                </a:tc>
-                <a:tc>
-                  <a:txBody>
-                    <a:bodyPr/>
-                    <a:lstStyle/>
-                    <a:p>
-                      <a:r>
-                        <a:rPr sz="1150" b="1">
-                          <a:solidFill>
-                            <a:srgbClr val="5C6679"/>
-                          </a:solidFill>
-                          <a:latin typeface="Microsoft JhengHei"/>
-                          <a:ea typeface="Microsoft JhengHei"/>
-                          <a:cs typeface="Microsoft JhengHei"/>
-                        </a:rPr>
-                        <a:t>其他</a:t>
-                      </a:r>
-                    </a:p>
-                  </a:txBody>
-                  <a:tcPr anchor="ctr" marL="73152" marT="9144" marB="9144">
-                    <a:solidFill>
-                      <a:srgbClr val="FFFFFF"/>
-                    </a:solidFill>
-                  </a:tcPr>
-                </a:tc>
-                <a:tc>
-                  <a:txBody>
-                    <a:bodyPr/>
-                    <a:lstStyle/>
-                    <a:p>
-                      <a:r>
-                        <a:rPr sz="1150" b="0">
-                          <a:solidFill>
-                            <a:srgbClr val="1A2233"/>
-                          </a:solidFill>
-                          <a:latin typeface="Microsoft JhengHei"/>
-                          <a:ea typeface="Microsoft JhengHei"/>
-                          <a:cs typeface="Microsoft JhengHei"/>
-                        </a:rPr>
-                        <a:t>安永聯合會計師事務所</a:t>
-                      </a:r>
-                    </a:p>
-                  </a:txBody>
-                  <a:tcPr anchor="ctr" marL="73152" marT="9144" marB="9144">
-                    <a:solidFill>
-                      <a:srgbClr val="FFFFFF"/>
-                    </a:solidFill>
-                  </a:tcPr>
-                </a:tc>
-                <a:tc>
-                  <a:txBody>
-                    <a:bodyPr/>
-                    <a:lstStyle/>
-                    <a:p>
-                      <a:r>
-                        <a:rPr sz="1150" b="0">
-                          <a:solidFill>
-                            <a:srgbClr val="1A2233"/>
-                          </a:solidFill>
-                          <a:latin typeface="Microsoft JhengHei"/>
-                          <a:ea typeface="Microsoft JhengHei"/>
-                          <a:cs typeface="Microsoft JhengHei"/>
-                        </a:rPr>
-                        <a:t>黃宇廷、賴書晨</a:t>
-                      </a:r>
-                    </a:p>
-                  </a:txBody>
-                  <a:tcPr anchor="ctr" marL="73152" marT="9144" marB="9144">
-                    <a:solidFill>
-                      <a:srgbClr val="FFFFFF"/>
-                    </a:solidFill>
-                  </a:tcPr>
-                </a:tc>
-              </a:tr>
-              <a:tr h="457200">
-                <a:tc>
-                  <a:txBody>
-                    <a:bodyPr/>
-                    <a:lstStyle/>
-                    <a:p>
-                      <a:r>
-                        <a:rPr sz="1150" b="0">
-                          <a:solidFill>
-                            <a:srgbClr val="1A2233"/>
-                          </a:solidFill>
-                          <a:latin typeface="Microsoft JhengHei"/>
-                          <a:ea typeface="Microsoft JhengHei"/>
-                          <a:cs typeface="Microsoft JhengHei"/>
-                        </a:rPr>
-                        <a:t>巨路</a:t>
-                      </a:r>
-                    </a:p>
-                  </a:txBody>
-                  <a:tcPr anchor="ctr" marL="73152" marT="9144" marB="9144">
-                    <a:solidFill>
-                      <a:srgbClr val="EEF2F9"/>
-                    </a:solidFill>
-                  </a:tcPr>
-                </a:tc>
-                <a:tc>
-                  <a:txBody>
-                    <a:bodyPr/>
-                    <a:lstStyle/>
-                    <a:p>
-                      <a:r>
-                        <a:rPr sz="1150" b="0">
-                          <a:solidFill>
-                            <a:srgbClr val="1A2233"/>
-                          </a:solidFill>
-                          <a:latin typeface="Microsoft JhengHei"/>
-                          <a:ea typeface="Microsoft JhengHei"/>
-                          <a:cs typeface="Microsoft JhengHei"/>
-                        </a:rPr>
-                        <a:t>6192</a:t>
-                      </a:r>
-                    </a:p>
-                  </a:txBody>
-                  <a:tcPr anchor="ctr" marL="73152" marT="9144" marB="9144">
-                    <a:solidFill>
-                      <a:srgbClr val="EEF2F9"/>
-                    </a:solidFill>
-                  </a:tcPr>
-                </a:tc>
-                <a:tc>
-                  <a:txBody>
-                    <a:bodyPr/>
-                    <a:lstStyle/>
-                    <a:p>
-                      <a:r>
-                        <a:rPr sz="1150" b="1">
-                          <a:solidFill>
-                            <a:srgbClr val="E63946"/>
-                          </a:solidFill>
-                          <a:latin typeface="Microsoft JhengHei"/>
-                          <a:ea typeface="Microsoft JhengHei"/>
-                          <a:cs typeface="Microsoft JhengHei"/>
-                        </a:rPr>
-                        <a:t>駭客攻擊</a:t>
-                      </a:r>
-                    </a:p>
-                  </a:txBody>
-                  <a:tcPr anchor="ctr" marL="73152" marT="9144" marB="9144">
-                    <a:solidFill>
-                      <a:srgbClr val="EEF2F9"/>
-                    </a:solidFill>
-                  </a:tcPr>
-                </a:tc>
-                <a:tc>
-                  <a:txBody>
-                    <a:bodyPr/>
-                    <a:lstStyle/>
-                    <a:p>
-                      <a:r>
-                        <a:rPr sz="1150" b="0">
-                          <a:solidFill>
-                            <a:srgbClr val="1A2233"/>
-                          </a:solidFill>
-                          <a:latin typeface="Microsoft JhengHei"/>
-                          <a:ea typeface="Microsoft JhengHei"/>
-                          <a:cs typeface="Microsoft JhengHei"/>
-                        </a:rPr>
-                        <a:t>勤業眾信聯合會計師事務所</a:t>
-                      </a:r>
-                    </a:p>
-                  </a:txBody>
-                  <a:tcPr anchor="ctr" marL="73152" marT="9144" marB="9144">
-                    <a:solidFill>
-                      <a:srgbClr val="EEF2F9"/>
-                    </a:solidFill>
-                  </a:tcPr>
-                </a:tc>
-                <a:tc>
-                  <a:txBody>
-                    <a:bodyPr/>
-                    <a:lstStyle/>
-                    <a:p>
-                      <a:r>
-                        <a:rPr sz="1150" b="0">
-                          <a:solidFill>
-                            <a:srgbClr val="1A2233"/>
-                          </a:solidFill>
-                          <a:latin typeface="Microsoft JhengHei"/>
-                          <a:ea typeface="Microsoft JhengHei"/>
-                          <a:cs typeface="Microsoft JhengHei"/>
-                        </a:rPr>
-                        <a:t>劉建良、張麗君</a:t>
-                      </a:r>
-                    </a:p>
-                  </a:txBody>
-                  <a:tcPr anchor="ctr" marL="73152" marT="9144" marB="9144">
-                    <a:solidFill>
-                      <a:srgbClr val="EEF2F9"/>
                     </a:solidFill>
                   </a:tcPr>
                 </a:tc>
@@ -8325,7 +8569,7 @@
             <a:avLst/>
           </a:prstGeom>
           <a:solidFill>
-            <a:srgbClr val="E63946"/>
+            <a:srgbClr val="5C6679"/>
           </a:solidFill>
           <a:ln>
             <a:noFill/>
@@ -8386,7 +8630,7 @@
                 <a:ea typeface="Microsoft JhengHei"/>
                 <a:cs typeface="Microsoft JhengHei"/>
               </a:rPr>
-              <a:t>網家 </a:t>
+              <a:t>GOGOLOOK </a:t>
             </a:r>
             <a:r>
               <a:rPr sz="1300" b="0">
@@ -8397,7 +8641,7 @@
                 <a:ea typeface="Microsoft JhengHei"/>
                 <a:cs typeface="Microsoft JhengHei"/>
               </a:rPr>
-              <a:t>8044</a:t>
+              <a:t>6902</a:t>
             </a:r>
           </a:p>
         </p:txBody>
@@ -8417,7 +8661,7 @@
             <a:avLst/>
           </a:prstGeom>
           <a:solidFill>
-            <a:srgbClr val="E63946"/>
+            <a:srgbClr val="5C6679"/>
           </a:solidFill>
           <a:ln>
             <a:noFill/>
@@ -8478,7 +8722,7 @@
                 <a:ea typeface="Microsoft JhengHei"/>
                 <a:cs typeface="Microsoft JhengHei"/>
               </a:rPr>
-              <a:t>駭客攻擊</a:t>
+              <a:t>其他</a:t>
             </a:r>
           </a:p>
         </p:txBody>
@@ -8513,7 +8757,7 @@
             <a:r>
               <a:rPr sz="1100" b="1">
                 <a:solidFill>
-                  <a:srgbClr val="E63946"/>
+                  <a:srgbClr val="5C6679"/>
                 </a:solidFill>
                 <a:latin typeface="Microsoft JhengHei"/>
                 <a:ea typeface="Microsoft JhengHei"/>
@@ -8530,7 +8774,7 @@
                 <a:ea typeface="Microsoft JhengHei"/>
                 <a:cs typeface="Microsoft JhengHei"/>
               </a:rPr>
-              <a:t>公司對該等報導或提供訊息之說明:(1)資訊安全防線：本公司及各轉投資事業係依不同服務型態各自營運…</a:t>
+              <a:t>本公司發生網路資安事件。</a:t>
             </a:r>
           </a:p>
         </p:txBody>
@@ -8565,7 +8809,7 @@
             <a:r>
               <a:rPr sz="1100" b="1">
                 <a:solidFill>
-                  <a:srgbClr val="E63946"/>
+                  <a:srgbClr val="5C6679"/>
                 </a:solidFill>
                 <a:latin typeface="Microsoft JhengHei"/>
                 <a:ea typeface="Microsoft JhengHei"/>
@@ -8582,7 +8826,7 @@
                 <a:ea typeface="Microsoft JhengHei"/>
                 <a:cs typeface="Microsoft JhengHei"/>
               </a:rPr>
-              <a:t>(1)全面啟動應變與調查：拍付國際獲悉駭客聲稱之入侵及勒索訊息後，已立即啟動資安應變程序，會同資安專家進行全面系統檢測與…</a:t>
+              <a:t>本公司後續仍持續強化資安管控及防禦機制，確保資訊安全與服務體驗。</a:t>
             </a:r>
           </a:p>
         </p:txBody>
@@ -8648,7 +8892,7 @@
             <a:avLst/>
           </a:prstGeom>
           <a:solidFill>
-            <a:srgbClr val="5C6679"/>
+            <a:srgbClr val="E63946"/>
           </a:solidFill>
           <a:ln>
             <a:noFill/>
@@ -8709,7 +8953,7 @@
                 <a:ea typeface="Microsoft JhengHei"/>
                 <a:cs typeface="Microsoft JhengHei"/>
               </a:rPr>
-              <a:t>耕興 </a:t>
+              <a:t>網家 </a:t>
             </a:r>
             <a:r>
               <a:rPr sz="1300" b="0">
@@ -8720,7 +8964,7 @@
                 <a:ea typeface="Microsoft JhengHei"/>
                 <a:cs typeface="Microsoft JhengHei"/>
               </a:rPr>
-              <a:t>6146</a:t>
+              <a:t>8044</a:t>
             </a:r>
           </a:p>
         </p:txBody>
@@ -8740,7 +8984,7 @@
             <a:avLst/>
           </a:prstGeom>
           <a:solidFill>
-            <a:srgbClr val="5C6679"/>
+            <a:srgbClr val="E63946"/>
           </a:solidFill>
           <a:ln>
             <a:noFill/>
@@ -8801,7 +9045,7 @@
                 <a:ea typeface="Microsoft JhengHei"/>
                 <a:cs typeface="Microsoft JhengHei"/>
               </a:rPr>
-              <a:t>其他</a:t>
+              <a:t>駭客攻擊</a:t>
             </a:r>
           </a:p>
         </p:txBody>
@@ -8836,7 +9080,7 @@
             <a:r>
               <a:rPr sz="1100" b="1">
                 <a:solidFill>
-                  <a:srgbClr val="5C6679"/>
+                  <a:srgbClr val="E63946"/>
                 </a:solidFill>
                 <a:latin typeface="Microsoft JhengHei"/>
                 <a:ea typeface="Microsoft JhengHei"/>
@@ -8853,7 +9097,7 @@
                 <a:ea typeface="Microsoft JhengHei"/>
                 <a:cs typeface="Microsoft JhengHei"/>
               </a:rPr>
-              <a:t>本公司部分資訊系統發生網路資安事件。</a:t>
+              <a:t>公司對該等報導或提供訊息之說明:(1)資訊安全防線：本公司及各轉投資事業係依不同服務型態各自營運…</a:t>
             </a:r>
           </a:p>
         </p:txBody>
@@ -8888,7 +9132,7 @@
             <a:r>
               <a:rPr sz="1100" b="1">
                 <a:solidFill>
-                  <a:srgbClr val="5C6679"/>
+                  <a:srgbClr val="E63946"/>
                 </a:solidFill>
                 <a:latin typeface="Microsoft JhengHei"/>
                 <a:ea typeface="Microsoft JhengHei"/>
@@ -8905,7 +9149,7 @@
                 <a:ea typeface="Microsoft JhengHei"/>
                 <a:cs typeface="Microsoft JhengHei"/>
               </a:rPr>
-              <a:t>本公司將持續提升網路與資訊基礎架構之安全管控，並依外部資安技術專家之建議加強防護，確保資訊安全。</a:t>
+              <a:t>(1)全面啟動應變與調查：拍付國際獲悉駭客聲稱之入侵及勒索訊息後，已立即啟動資安應變程序，會同資安專家進行全面系統檢測與…</a:t>
             </a:r>
           </a:p>
         </p:txBody>
@@ -8971,7 +9215,7 @@
             <a:avLst/>
           </a:prstGeom>
           <a:solidFill>
-            <a:srgbClr val="F4A261"/>
+            <a:srgbClr val="5C6679"/>
           </a:solidFill>
           <a:ln>
             <a:noFill/>
@@ -9032,7 +9276,7 @@
                 <a:ea typeface="Microsoft JhengHei"/>
                 <a:cs typeface="Microsoft JhengHei"/>
               </a:rPr>
-              <a:t>易發 </a:t>
+              <a:t>耕興 </a:t>
             </a:r>
             <a:r>
               <a:rPr sz="1300" b="0">
@@ -9043,7 +9287,7 @@
                 <a:ea typeface="Microsoft JhengHei"/>
                 <a:cs typeface="Microsoft JhengHei"/>
               </a:rPr>
-              <a:t>6425</a:t>
+              <a:t>6146</a:t>
             </a:r>
           </a:p>
         </p:txBody>
@@ -9063,7 +9307,7 @@
             <a:avLst/>
           </a:prstGeom>
           <a:solidFill>
-            <a:srgbClr val="F4A261"/>
+            <a:srgbClr val="5C6679"/>
           </a:solidFill>
           <a:ln>
             <a:noFill/>
@@ -9124,7 +9368,7 @@
                 <a:ea typeface="Microsoft JhengHei"/>
                 <a:cs typeface="Microsoft JhengHei"/>
               </a:rPr>
-              <a:t>勒索病毒/加密</a:t>
+              <a:t>其他</a:t>
             </a:r>
           </a:p>
         </p:txBody>
@@ -9159,7 +9403,7 @@
             <a:r>
               <a:rPr sz="1100" b="1">
                 <a:solidFill>
-                  <a:srgbClr val="F4A261"/>
+                  <a:srgbClr val="5C6679"/>
                 </a:solidFill>
                 <a:latin typeface="Microsoft JhengHei"/>
                 <a:ea typeface="Microsoft JhengHei"/>
@@ -9176,7 +9420,7 @@
                 <a:ea typeface="Microsoft JhengHei"/>
                 <a:cs typeface="Microsoft JhengHei"/>
               </a:rPr>
-              <a:t>本公司之子公司東野精機(股)公司日福精工(股)公司，發現遭不明駭客入侵主機，並將伺服器資料加密，…</a:t>
+              <a:t>本公司部分資訊系統發生網路資安事件。</a:t>
             </a:r>
           </a:p>
         </p:txBody>
@@ -9211,7 +9455,7 @@
             <a:r>
               <a:rPr sz="1100" b="1">
                 <a:solidFill>
-                  <a:srgbClr val="F4A261"/>
+                  <a:srgbClr val="5C6679"/>
                 </a:solidFill>
                 <a:latin typeface="Microsoft JhengHei"/>
                 <a:ea typeface="Microsoft JhengHei"/>
@@ -9228,7 +9472,7 @@
                 <a:ea typeface="Microsoft JhengHei"/>
                 <a:cs typeface="Microsoft JhengHei"/>
               </a:rPr>
-              <a:t>本公司之子公司東野精機(股)公司日福精工(股)公司將修復安全漏洞，持續提升網路與資訊基礎架構之安全管控，以確保資訊安全。</a:t>
+              <a:t>本公司將持續提升網路與資訊基礎架構之安全管控，並依外部資安技術專家之建議加強防護，確保資訊安全。</a:t>
             </a:r>
           </a:p>
         </p:txBody>
@@ -9355,7 +9599,7 @@
                 <a:ea typeface="Microsoft JhengHei"/>
                 <a:cs typeface="Microsoft JhengHei"/>
               </a:rPr>
-              <a:t>尼得科超眾 </a:t>
+              <a:t>易發 </a:t>
             </a:r>
             <a:r>
               <a:rPr sz="1300" b="0">
@@ -9366,7 +9610,7 @@
                 <a:ea typeface="Microsoft JhengHei"/>
                 <a:cs typeface="Microsoft JhengHei"/>
               </a:rPr>
-              <a:t>6230</a:t>
+              <a:t>6425</a:t>
             </a:r>
           </a:p>
         </p:txBody>
@@ -9499,7 +9743,7 @@
                 <a:ea typeface="Microsoft JhengHei"/>
                 <a:cs typeface="Microsoft JhengHei"/>
               </a:rPr>
-              <a:t>本公司於今日偵測到部份伺服器遭受網路勒索病毒攻擊，致使包含ERP在內之部份資訊系統無法正常運作。</a:t>
+              <a:t>本公司之子公司東野精機(股)公司日福精工(股)公司，發現遭不明駭客入侵主機，並將伺服器資料加密，…</a:t>
             </a:r>
           </a:p>
         </p:txBody>
@@ -9551,7 +9795,7 @@
                 <a:ea typeface="Microsoft JhengHei"/>
                 <a:cs typeface="Microsoft JhengHei"/>
               </a:rPr>
-              <a:t>本公司亦將視系統復原進度，適時調整生產與出貨排程。</a:t>
+              <a:t>本公司之子公司東野精機(股)公司日福精工(股)公司將修復安全漏洞，持續提升網路與資訊基礎架構之安全管控，以確保資訊安全。</a:t>
             </a:r>
           </a:p>
         </p:txBody>
@@ -9753,7 +9997,7 @@
             <a:avLst/>
           </a:prstGeom>
           <a:solidFill>
-            <a:srgbClr val="5C6679"/>
+            <a:srgbClr val="F4A261"/>
           </a:solidFill>
           <a:ln>
             <a:noFill/>
@@ -9814,7 +10058,7 @@
                 <a:ea typeface="Microsoft JhengHei"/>
                 <a:cs typeface="Microsoft JhengHei"/>
               </a:rPr>
-              <a:t>上福 </a:t>
+              <a:t>尼得科超眾 </a:t>
             </a:r>
             <a:r>
               <a:rPr sz="1300" b="0">
@@ -9825,7 +10069,7 @@
                 <a:ea typeface="Microsoft JhengHei"/>
                 <a:cs typeface="Microsoft JhengHei"/>
               </a:rPr>
-              <a:t>6128</a:t>
+              <a:t>6230</a:t>
             </a:r>
           </a:p>
         </p:txBody>
@@ -9845,7 +10089,7 @@
             <a:avLst/>
           </a:prstGeom>
           <a:solidFill>
-            <a:srgbClr val="5C6679"/>
+            <a:srgbClr val="F4A261"/>
           </a:solidFill>
           <a:ln>
             <a:noFill/>
@@ -9906,7 +10150,7 @@
                 <a:ea typeface="Microsoft JhengHei"/>
                 <a:cs typeface="Microsoft JhengHei"/>
               </a:rPr>
-              <a:t>其他</a:t>
+              <a:t>勒索病毒/加密</a:t>
             </a:r>
           </a:p>
         </p:txBody>
@@ -9941,7 +10185,7 @@
             <a:r>
               <a:rPr sz="1100" b="1">
                 <a:solidFill>
-                  <a:srgbClr val="5C6679"/>
+                  <a:srgbClr val="F4A261"/>
                 </a:solidFill>
                 <a:latin typeface="Microsoft JhengHei"/>
                 <a:ea typeface="Microsoft JhengHei"/>
@@ -9958,7 +10202,7 @@
                 <a:ea typeface="Microsoft JhengHei"/>
                 <a:cs typeface="Microsoft JhengHei"/>
               </a:rPr>
-              <a:t>KatunCorporation資訊設備遭受未授權外部存取。</a:t>
+              <a:t>本公司於今日偵測到部份伺服器遭受網路勒索病毒攻擊，致使包含ERP在內之部份資訊系統無法正常運作。</a:t>
             </a:r>
           </a:p>
         </p:txBody>
@@ -9993,7 +10237,7 @@
             <a:r>
               <a:rPr sz="1100" b="1">
                 <a:solidFill>
-                  <a:srgbClr val="5C6679"/>
+                  <a:srgbClr val="F4A261"/>
                 </a:solidFill>
                 <a:latin typeface="Microsoft JhengHei"/>
                 <a:ea typeface="Microsoft JhengHei"/>
@@ -10010,7 +10254,7 @@
                 <a:ea typeface="Microsoft JhengHei"/>
                 <a:cs typeface="Microsoft JhengHei"/>
               </a:rPr>
-              <a:t>此事件後將持續提升網路與資訊基礎架構之安全控管，並持續密切監控，以確保資訊安全。</a:t>
+              <a:t>本公司亦將視系統復原進度，適時調整生產與出貨排程。</a:t>
             </a:r>
           </a:p>
         </p:txBody>
@@ -10076,7 +10320,7 @@
             <a:avLst/>
           </a:prstGeom>
           <a:solidFill>
-            <a:srgbClr val="E63946"/>
+            <a:srgbClr val="5C6679"/>
           </a:solidFill>
           <a:ln>
             <a:noFill/>
@@ -10137,7 +10381,7 @@
                 <a:ea typeface="Microsoft JhengHei"/>
                 <a:cs typeface="Microsoft JhengHei"/>
               </a:rPr>
-              <a:t>巨路 </a:t>
+              <a:t>上福 </a:t>
             </a:r>
             <a:r>
               <a:rPr sz="1300" b="0">
@@ -10148,7 +10392,7 @@
                 <a:ea typeface="Microsoft JhengHei"/>
                 <a:cs typeface="Microsoft JhengHei"/>
               </a:rPr>
-              <a:t>6192</a:t>
+              <a:t>6128</a:t>
             </a:r>
           </a:p>
         </p:txBody>
@@ -10165,6 +10409,237 @@
             <a:ext cx="1234440" cy="347472"/>
           </a:xfrm>
           <a:prstGeom prst="roundRect">
+            <a:avLst/>
+          </a:prstGeom>
+          <a:solidFill>
+            <a:srgbClr val="5C6679"/>
+          </a:solidFill>
+          <a:ln>
+            <a:noFill/>
+          </a:ln>
+          <a:effectLst/>
+        </p:spPr>
+        <p:style>
+          <a:lnRef idx="1">
+            <a:schemeClr val="accent1"/>
+          </a:lnRef>
+          <a:fillRef idx="3">
+            <a:schemeClr val="accent1"/>
+          </a:fillRef>
+          <a:effectRef idx="2">
+            <a:schemeClr val="accent1"/>
+          </a:effectRef>
+          <a:fontRef idx="minor">
+            <a:schemeClr val="lt1"/>
+          </a:fontRef>
+        </p:style>
+        <p:txBody>
+          <a:bodyPr rtlCol="0" anchor="ctr"/>
+          <a:lstStyle/>
+          <a:p>
+            <a:pPr algn="ctr"/>
+          </a:p>
+        </p:txBody>
+      </p:sp>
+      <p:sp>
+        <p:nvSpPr>
+          <p:cNvPr id="16" name="TextBox 15"/>
+          <p:cNvSpPr txBox="1"/>
+          <p:nvPr/>
+        </p:nvSpPr>
+        <p:spPr>
+          <a:xfrm>
+            <a:off x="10149840" y="1792224"/>
+            <a:ext cx="1234440" cy="347472"/>
+          </a:xfrm>
+          <a:prstGeom prst="rect">
+            <a:avLst/>
+          </a:prstGeom>
+          <a:noFill/>
+        </p:spPr>
+        <p:txBody>
+          <a:bodyPr wrap="square" anchor="ctr" lIns="0" rIns="0" tIns="0" bIns="0">
+            <a:spAutoFit/>
+          </a:bodyPr>
+          <a:lstStyle/>
+          <a:p>
+            <a:pPr algn="ctr"/>
+            <a:r>
+              <a:rPr sz="1050" b="1">
+                <a:solidFill>
+                  <a:srgbClr val="FFFFFF"/>
+                </a:solidFill>
+                <a:latin typeface="Microsoft JhengHei"/>
+                <a:ea typeface="Microsoft JhengHei"/>
+                <a:cs typeface="Microsoft JhengHei"/>
+              </a:rPr>
+              <a:t>其他</a:t>
+            </a:r>
+          </a:p>
+        </p:txBody>
+      </p:sp>
+      <p:sp>
+        <p:nvSpPr>
+          <p:cNvPr id="17" name="TextBox 16"/>
+          <p:cNvSpPr txBox="1"/>
+          <p:nvPr/>
+        </p:nvSpPr>
+        <p:spPr>
+          <a:xfrm>
+            <a:off x="6400800" y="2267712"/>
+            <a:ext cx="4937760" cy="640080"/>
+          </a:xfrm>
+          <a:prstGeom prst="rect">
+            <a:avLst/>
+          </a:prstGeom>
+          <a:noFill/>
+        </p:spPr>
+        <p:txBody>
+          <a:bodyPr wrap="square" anchor="t" lIns="0" rIns="0" tIns="0" bIns="0">
+            <a:spAutoFit/>
+          </a:bodyPr>
+          <a:lstStyle/>
+          <a:p>
+            <a:pPr algn="l">
+              <a:lnSpc>
+                <a:spcPts val="1500"/>
+              </a:lnSpc>
+            </a:pPr>
+            <a:r>
+              <a:rPr sz="1100" b="1">
+                <a:solidFill>
+                  <a:srgbClr val="5C6679"/>
+                </a:solidFill>
+                <a:latin typeface="Microsoft JhengHei"/>
+                <a:ea typeface="Microsoft JhengHei"/>
+                <a:cs typeface="Microsoft JhengHei"/>
+              </a:rPr>
+              <a:t>緣由　</a:t>
+            </a:r>
+            <a:r>
+              <a:rPr sz="1100" b="0">
+                <a:solidFill>
+                  <a:srgbClr val="1A2233"/>
+                </a:solidFill>
+                <a:latin typeface="Microsoft JhengHei"/>
+                <a:ea typeface="Microsoft JhengHei"/>
+                <a:cs typeface="Microsoft JhengHei"/>
+              </a:rPr>
+              <a:t>KatunCorporation資訊設備遭受未授權外部存取。</a:t>
+            </a:r>
+          </a:p>
+        </p:txBody>
+      </p:sp>
+      <p:sp>
+        <p:nvSpPr>
+          <p:cNvPr id="18" name="TextBox 17"/>
+          <p:cNvSpPr txBox="1"/>
+          <p:nvPr/>
+        </p:nvSpPr>
+        <p:spPr>
+          <a:xfrm>
+            <a:off x="6400800" y="2926080"/>
+            <a:ext cx="4937760" cy="713232"/>
+          </a:xfrm>
+          <a:prstGeom prst="rect">
+            <a:avLst/>
+          </a:prstGeom>
+          <a:noFill/>
+        </p:spPr>
+        <p:txBody>
+          <a:bodyPr wrap="square" anchor="t" lIns="0" rIns="0" tIns="0" bIns="0">
+            <a:spAutoFit/>
+          </a:bodyPr>
+          <a:lstStyle/>
+          <a:p>
+            <a:pPr algn="l">
+              <a:lnSpc>
+                <a:spcPts val="1500"/>
+              </a:lnSpc>
+            </a:pPr>
+            <a:r>
+              <a:rPr sz="1100" b="1">
+                <a:solidFill>
+                  <a:srgbClr val="5C6679"/>
+                </a:solidFill>
+                <a:latin typeface="Microsoft JhengHei"/>
+                <a:ea typeface="Microsoft JhengHei"/>
+                <a:cs typeface="Microsoft JhengHei"/>
+              </a:rPr>
+              <a:t>因應　</a:t>
+            </a:r>
+            <a:r>
+              <a:rPr sz="1100" b="0">
+                <a:solidFill>
+                  <a:srgbClr val="1A2233"/>
+                </a:solidFill>
+                <a:latin typeface="Microsoft JhengHei"/>
+                <a:ea typeface="Microsoft JhengHei"/>
+                <a:cs typeface="Microsoft JhengHei"/>
+              </a:rPr>
+              <a:t>此事件後將持續提升網路與資訊基礎架構之安全控管，並持續密切監控，以確保資訊安全。</a:t>
+            </a:r>
+          </a:p>
+        </p:txBody>
+      </p:sp>
+      <p:sp>
+        <p:nvSpPr>
+          <p:cNvPr id="19" name="Rounded Rectangle 18"/>
+          <p:cNvSpPr/>
+          <p:nvPr/>
+        </p:nvSpPr>
+        <p:spPr>
+          <a:xfrm>
+            <a:off x="548640" y="3886200"/>
+            <a:ext cx="5394960" cy="2148840"/>
+          </a:xfrm>
+          <a:prstGeom prst="roundRect">
+            <a:avLst/>
+          </a:prstGeom>
+          <a:solidFill>
+            <a:srgbClr val="FFFFFF"/>
+          </a:solidFill>
+          <a:ln w="12700">
+            <a:solidFill>
+              <a:srgbClr val="DDE3EE"/>
+            </a:solidFill>
+          </a:ln>
+          <a:effectLst/>
+        </p:spPr>
+        <p:style>
+          <a:lnRef idx="1">
+            <a:schemeClr val="accent1"/>
+          </a:lnRef>
+          <a:fillRef idx="3">
+            <a:schemeClr val="accent1"/>
+          </a:fillRef>
+          <a:effectRef idx="2">
+            <a:schemeClr val="accent1"/>
+          </a:effectRef>
+          <a:fontRef idx="minor">
+            <a:schemeClr val="lt1"/>
+          </a:fontRef>
+        </p:style>
+        <p:txBody>
+          <a:bodyPr rtlCol="0" anchor="ctr"/>
+          <a:lstStyle/>
+          <a:p>
+            <a:pPr algn="ctr"/>
+          </a:p>
+        </p:txBody>
+      </p:sp>
+      <p:sp>
+        <p:nvSpPr>
+          <p:cNvPr id="20" name="Rectangle 19"/>
+          <p:cNvSpPr/>
+          <p:nvPr/>
+        </p:nvSpPr>
+        <p:spPr>
+          <a:xfrm>
+            <a:off x="548640" y="3886200"/>
+            <a:ext cx="5394960" cy="109728"/>
+          </a:xfrm>
+          <a:prstGeom prst="rect">
             <a:avLst/>
           </a:prstGeom>
           <a:solidFill>
@@ -10199,13 +10674,105 @@
       </p:sp>
       <p:sp>
         <p:nvSpPr>
-          <p:cNvPr id="16" name="TextBox 15"/>
+          <p:cNvPr id="21" name="TextBox 20"/>
           <p:cNvSpPr txBox="1"/>
           <p:nvPr/>
         </p:nvSpPr>
         <p:spPr>
           <a:xfrm>
-            <a:off x="10149840" y="1792224"/>
+            <a:off x="777240" y="4105656"/>
+            <a:ext cx="3657600" cy="365760"/>
+          </a:xfrm>
+          <a:prstGeom prst="rect">
+            <a:avLst/>
+          </a:prstGeom>
+          <a:noFill/>
+        </p:spPr>
+        <p:txBody>
+          <a:bodyPr wrap="square" anchor="ctr" lIns="0" rIns="0" tIns="0" bIns="0">
+            <a:spAutoFit/>
+          </a:bodyPr>
+          <a:lstStyle/>
+          <a:p>
+            <a:pPr algn="l"/>
+            <a:r>
+              <a:rPr sz="1600" b="1">
+                <a:solidFill>
+                  <a:srgbClr val="1A2233"/>
+                </a:solidFill>
+                <a:latin typeface="Microsoft JhengHei"/>
+                <a:ea typeface="Microsoft JhengHei"/>
+                <a:cs typeface="Microsoft JhengHei"/>
+              </a:rPr>
+              <a:t>巨路 </a:t>
+            </a:r>
+            <a:r>
+              <a:rPr sz="1300" b="0">
+                <a:solidFill>
+                  <a:srgbClr val="5C6679"/>
+                </a:solidFill>
+                <a:latin typeface="Microsoft JhengHei"/>
+                <a:ea typeface="Microsoft JhengHei"/>
+                <a:cs typeface="Microsoft JhengHei"/>
+              </a:rPr>
+              <a:t>6192</a:t>
+            </a:r>
+          </a:p>
+        </p:txBody>
+      </p:sp>
+      <p:sp>
+        <p:nvSpPr>
+          <p:cNvPr id="22" name="Rounded Rectangle 21"/>
+          <p:cNvSpPr/>
+          <p:nvPr/>
+        </p:nvSpPr>
+        <p:spPr>
+          <a:xfrm>
+            <a:off x="4526280" y="4123944"/>
+            <a:ext cx="1234440" cy="347472"/>
+          </a:xfrm>
+          <a:prstGeom prst="roundRect">
+            <a:avLst/>
+          </a:prstGeom>
+          <a:solidFill>
+            <a:srgbClr val="E63946"/>
+          </a:solidFill>
+          <a:ln>
+            <a:noFill/>
+          </a:ln>
+          <a:effectLst/>
+        </p:spPr>
+        <p:style>
+          <a:lnRef idx="1">
+            <a:schemeClr val="accent1"/>
+          </a:lnRef>
+          <a:fillRef idx="3">
+            <a:schemeClr val="accent1"/>
+          </a:fillRef>
+          <a:effectRef idx="2">
+            <a:schemeClr val="accent1"/>
+          </a:effectRef>
+          <a:fontRef idx="minor">
+            <a:schemeClr val="lt1"/>
+          </a:fontRef>
+        </p:style>
+        <p:txBody>
+          <a:bodyPr rtlCol="0" anchor="ctr"/>
+          <a:lstStyle/>
+          <a:p>
+            <a:pPr algn="ctr"/>
+          </a:p>
+        </p:txBody>
+      </p:sp>
+      <p:sp>
+        <p:nvSpPr>
+          <p:cNvPr id="23" name="TextBox 22"/>
+          <p:cNvSpPr txBox="1"/>
+          <p:nvPr/>
+        </p:nvSpPr>
+        <p:spPr>
+          <a:xfrm>
+            <a:off x="4526280" y="4123944"/>
             <a:ext cx="1234440" cy="347472"/>
           </a:xfrm>
           <a:prstGeom prst="rect">
@@ -10236,13 +10803,13 @@
       </p:sp>
       <p:sp>
         <p:nvSpPr>
-          <p:cNvPr id="17" name="TextBox 16"/>
+          <p:cNvPr id="24" name="TextBox 23"/>
           <p:cNvSpPr txBox="1"/>
           <p:nvPr/>
         </p:nvSpPr>
         <p:spPr>
           <a:xfrm>
-            <a:off x="6400800" y="2267712"/>
+            <a:off x="777240" y="4599432"/>
             <a:ext cx="4937760" cy="640080"/>
           </a:xfrm>
           <a:prstGeom prst="rect">
@@ -10288,13 +10855,13 @@
       </p:sp>
       <p:sp>
         <p:nvSpPr>
-          <p:cNvPr id="18" name="TextBox 17"/>
+          <p:cNvPr id="25" name="TextBox 24"/>
           <p:cNvSpPr txBox="1"/>
           <p:nvPr/>
         </p:nvSpPr>
         <p:spPr>
           <a:xfrm>
-            <a:off x="6400800" y="2926080"/>
+            <a:off x="777240" y="5257800"/>
             <a:ext cx="4937760" cy="713232"/>
           </a:xfrm>
           <a:prstGeom prst="rect">

--- a/資安事件因應分析.pptx
+++ b/資安事件因應分析.pptx
@@ -3528,7 +3528,7 @@
                 <a:ea typeface="Microsoft JhengHei"/>
                 <a:cs typeface="Microsoft JhengHei"/>
               </a:rPr>
-              <a:t>資料期間 2026-06-02 ~ 2026-07-02　｜　MOPS 重大訊息全文檢索　｜　7 家公司</a:t>
+              <a:t>資料期間 2026-06-03 ~ 2026-07-03　｜　MOPS 重大訊息全文檢索　｜　7 家公司</a:t>
             </a:r>
           </a:p>
         </p:txBody>
@@ -4272,7 +4272,7 @@
                           <a:ea typeface="Microsoft JhengHei"/>
                           <a:cs typeface="Microsoft JhengHei"/>
                         </a:rPr>
-                        <a:t>GOGOLOOK</a:t>
+                        <a:t>麗清</a:t>
                       </a:r>
                     </a:p>
                   </a:txBody>
@@ -4296,7 +4296,251 @@
                           <a:ea typeface="Microsoft JhengHei"/>
                           <a:cs typeface="Microsoft JhengHei"/>
                         </a:rPr>
+                        <a:t>3346</a:t>
+                      </a:r>
+                    </a:p>
+                  </a:txBody>
+                  <a:tcPr anchor="ctr" marL="73152" marT="9144" marB="9144">
+                    <a:solidFill>
+                      <a:srgbClr val="FFFFFF"/>
+                    </a:solidFill>
+                  </a:tcPr>
+                </a:tc>
+                <a:tc>
+                  <a:txBody>
+                    <a:bodyPr/>
+                    <a:lstStyle/>
+                    <a:p>
+                      <a:r>
+                        <a:rPr sz="1150" b="0">
+                          <a:solidFill>
+                            <a:srgbClr val="1A2233"/>
+                          </a:solidFill>
+                          <a:latin typeface="Microsoft JhengHei"/>
+                          <a:ea typeface="Microsoft JhengHei"/>
+                          <a:cs typeface="Microsoft JhengHei"/>
+                        </a:rPr>
+                        <a:t>07/02</a:t>
+                      </a:r>
+                    </a:p>
+                  </a:txBody>
+                  <a:tcPr anchor="ctr" marL="73152" marT="9144" marB="9144">
+                    <a:solidFill>
+                      <a:srgbClr val="FFFFFF"/>
+                    </a:solidFill>
+                  </a:tcPr>
+                </a:tc>
+                <a:tc>
+                  <a:txBody>
+                    <a:bodyPr/>
+                    <a:lstStyle/>
+                    <a:p>
+                      <a:r>
+                        <a:rPr sz="1150" b="1">
+                          <a:solidFill>
+                            <a:srgbClr val="E63946"/>
+                          </a:solidFill>
+                          <a:latin typeface="Microsoft JhengHei"/>
+                          <a:ea typeface="Microsoft JhengHei"/>
+                          <a:cs typeface="Microsoft JhengHei"/>
+                        </a:rPr>
+                        <a:t>駭客攻擊</a:t>
+                      </a:r>
+                    </a:p>
+                  </a:txBody>
+                  <a:tcPr anchor="ctr" marL="73152" marT="9144" marB="9144">
+                    <a:solidFill>
+                      <a:srgbClr val="FFFFFF"/>
+                    </a:solidFill>
+                  </a:tcPr>
+                </a:tc>
+                <a:tc>
+                  <a:txBody>
+                    <a:bodyPr/>
+                    <a:lstStyle/>
+                    <a:p>
+                      <a:r>
+                        <a:rPr sz="1150" b="0">
+                          <a:solidFill>
+                            <a:srgbClr val="1A2233"/>
+                          </a:solidFill>
+                          <a:latin typeface="Microsoft JhengHei"/>
+                          <a:ea typeface="Microsoft JhengHei"/>
+                          <a:cs typeface="Microsoft JhengHei"/>
+                        </a:rPr>
+                        <a:t>目前初步評估對公司運作無重大影響。</a:t>
+                      </a:r>
+                    </a:p>
+                  </a:txBody>
+                  <a:tcPr anchor="ctr" marL="73152" marT="9144" marB="9144">
+                    <a:solidFill>
+                      <a:srgbClr val="FFFFFF"/>
+                    </a:solidFill>
+                  </a:tcPr>
+                </a:tc>
+              </a:tr>
+              <a:tr h="384048">
+                <a:tc>
+                  <a:txBody>
+                    <a:bodyPr/>
+                    <a:lstStyle/>
+                    <a:p>
+                      <a:r>
+                        <a:rPr sz="1150" b="0">
+                          <a:solidFill>
+                            <a:srgbClr val="1A2233"/>
+                          </a:solidFill>
+                          <a:latin typeface="Microsoft JhengHei"/>
+                          <a:ea typeface="Microsoft JhengHei"/>
+                          <a:cs typeface="Microsoft JhengHei"/>
+                        </a:rPr>
+                        <a:t>GOGOLOOK</a:t>
+                      </a:r>
+                    </a:p>
+                  </a:txBody>
+                  <a:tcPr anchor="ctr" marL="73152" marT="9144" marB="9144">
+                    <a:solidFill>
+                      <a:srgbClr val="EEF2F9"/>
+                    </a:solidFill>
+                  </a:tcPr>
+                </a:tc>
+                <a:tc>
+                  <a:txBody>
+                    <a:bodyPr/>
+                    <a:lstStyle/>
+                    <a:p>
+                      <a:r>
+                        <a:rPr sz="1150" b="0">
+                          <a:solidFill>
+                            <a:srgbClr val="1A2233"/>
+                          </a:solidFill>
+                          <a:latin typeface="Microsoft JhengHei"/>
+                          <a:ea typeface="Microsoft JhengHei"/>
+                          <a:cs typeface="Microsoft JhengHei"/>
+                        </a:rPr>
                         <a:t>6902</a:t>
+                      </a:r>
+                    </a:p>
+                  </a:txBody>
+                  <a:tcPr anchor="ctr" marL="73152" marT="9144" marB="9144">
+                    <a:solidFill>
+                      <a:srgbClr val="EEF2F9"/>
+                    </a:solidFill>
+                  </a:tcPr>
+                </a:tc>
+                <a:tc>
+                  <a:txBody>
+                    <a:bodyPr/>
+                    <a:lstStyle/>
+                    <a:p>
+                      <a:r>
+                        <a:rPr sz="1150" b="0">
+                          <a:solidFill>
+                            <a:srgbClr val="1A2233"/>
+                          </a:solidFill>
+                          <a:latin typeface="Microsoft JhengHei"/>
+                          <a:ea typeface="Microsoft JhengHei"/>
+                          <a:cs typeface="Microsoft JhengHei"/>
+                        </a:rPr>
+                        <a:t>07/01</a:t>
+                      </a:r>
+                    </a:p>
+                  </a:txBody>
+                  <a:tcPr anchor="ctr" marL="73152" marT="9144" marB="9144">
+                    <a:solidFill>
+                      <a:srgbClr val="EEF2F9"/>
+                    </a:solidFill>
+                  </a:tcPr>
+                </a:tc>
+                <a:tc>
+                  <a:txBody>
+                    <a:bodyPr/>
+                    <a:lstStyle/>
+                    <a:p>
+                      <a:r>
+                        <a:rPr sz="1150" b="1">
+                          <a:solidFill>
+                            <a:srgbClr val="5C6679"/>
+                          </a:solidFill>
+                          <a:latin typeface="Microsoft JhengHei"/>
+                          <a:ea typeface="Microsoft JhengHei"/>
+                          <a:cs typeface="Microsoft JhengHei"/>
+                        </a:rPr>
+                        <a:t>其他</a:t>
+                      </a:r>
+                    </a:p>
+                  </a:txBody>
+                  <a:tcPr anchor="ctr" marL="73152" marT="9144" marB="9144">
+                    <a:solidFill>
+                      <a:srgbClr val="EEF2F9"/>
+                    </a:solidFill>
+                  </a:tcPr>
+                </a:tc>
+                <a:tc>
+                  <a:txBody>
+                    <a:bodyPr/>
+                    <a:lstStyle/>
+                    <a:p>
+                      <a:r>
+                        <a:rPr sz="1150" b="0">
+                          <a:solidFill>
+                            <a:srgbClr val="1A2233"/>
+                          </a:solidFill>
+                          <a:latin typeface="Microsoft JhengHei"/>
+                          <a:ea typeface="Microsoft JhengHei"/>
+                          <a:cs typeface="Microsoft JhengHei"/>
+                        </a:rPr>
+                        <a:t>目前評估對公司營運尚無重大影響。</a:t>
+                      </a:r>
+                    </a:p>
+                  </a:txBody>
+                  <a:tcPr anchor="ctr" marL="73152" marT="9144" marB="9144">
+                    <a:solidFill>
+                      <a:srgbClr val="EEF2F9"/>
+                    </a:solidFill>
+                  </a:tcPr>
+                </a:tc>
+              </a:tr>
+              <a:tr h="384048">
+                <a:tc>
+                  <a:txBody>
+                    <a:bodyPr/>
+                    <a:lstStyle/>
+                    <a:p>
+                      <a:r>
+                        <a:rPr sz="1150" b="0">
+                          <a:solidFill>
+                            <a:srgbClr val="1A2233"/>
+                          </a:solidFill>
+                          <a:latin typeface="Microsoft JhengHei"/>
+                          <a:ea typeface="Microsoft JhengHei"/>
+                          <a:cs typeface="Microsoft JhengHei"/>
+                        </a:rPr>
+                        <a:t>網家</a:t>
+                      </a:r>
+                    </a:p>
+                  </a:txBody>
+                  <a:tcPr anchor="ctr" marL="73152" marT="9144" marB="9144">
+                    <a:solidFill>
+                      <a:srgbClr val="FFFFFF"/>
+                    </a:solidFill>
+                  </a:tcPr>
+                </a:tc>
+                <a:tc>
+                  <a:txBody>
+                    <a:bodyPr/>
+                    <a:lstStyle/>
+                    <a:p>
+                      <a:r>
+                        <a:rPr sz="1150" b="0">
+                          <a:solidFill>
+                            <a:srgbClr val="1A2233"/>
+                          </a:solidFill>
+                          <a:latin typeface="Microsoft JhengHei"/>
+                          <a:ea typeface="Microsoft JhengHei"/>
+                          <a:cs typeface="Microsoft JhengHei"/>
+                        </a:rPr>
+                        <a:t>8044</a:t>
                       </a:r>
                     </a:p>
                   </a:txBody>
@@ -4338,13 +4582,13 @@
                       <a:r>
                         <a:rPr sz="1150" b="1">
                           <a:solidFill>
-                            <a:srgbClr val="5C6679"/>
+                            <a:srgbClr val="E63946"/>
                           </a:solidFill>
                           <a:latin typeface="Microsoft JhengHei"/>
                           <a:ea typeface="Microsoft JhengHei"/>
                           <a:cs typeface="Microsoft JhengHei"/>
                         </a:rPr>
-                        <a:t>其他</a:t>
+                        <a:t>駭客攻擊</a:t>
                       </a:r>
                     </a:p>
                   </a:txBody>
@@ -4368,7 +4612,7 @@
                           <a:ea typeface="Microsoft JhengHei"/>
                           <a:cs typeface="Microsoft JhengHei"/>
                         </a:rPr>
-                        <a:t>目前評估對公司營運尚無重大影響。</a:t>
+                        <a:t>—</a:t>
                       </a:r>
                     </a:p>
                   </a:txBody>
@@ -4394,7 +4638,7 @@
                           <a:ea typeface="Microsoft JhengHei"/>
                           <a:cs typeface="Microsoft JhengHei"/>
                         </a:rPr>
-                        <a:t>網家</a:t>
+                        <a:t>耕興</a:t>
                       </a:r>
                     </a:p>
                   </a:txBody>
@@ -4418,7 +4662,7 @@
                           <a:ea typeface="Microsoft JhengHei"/>
                           <a:cs typeface="Microsoft JhengHei"/>
                         </a:rPr>
-                        <a:t>8044</a:t>
+                        <a:t>6146</a:t>
                       </a:r>
                     </a:p>
                   </a:txBody>
@@ -4442,7 +4686,7 @@
                           <a:ea typeface="Microsoft JhengHei"/>
                           <a:cs typeface="Microsoft JhengHei"/>
                         </a:rPr>
-                        <a:t>07/01</a:t>
+                        <a:t>06/22</a:t>
                       </a:r>
                     </a:p>
                   </a:txBody>
@@ -4460,13 +4704,13 @@
                       <a:r>
                         <a:rPr sz="1150" b="1">
                           <a:solidFill>
-                            <a:srgbClr val="E63946"/>
+                            <a:srgbClr val="5C6679"/>
                           </a:solidFill>
                           <a:latin typeface="Microsoft JhengHei"/>
                           <a:ea typeface="Microsoft JhengHei"/>
                           <a:cs typeface="Microsoft JhengHei"/>
                         </a:rPr>
-                        <a:t>駭客攻擊</a:t>
+                        <a:t>其他</a:t>
                       </a:r>
                     </a:p>
                   </a:txBody>
@@ -4490,7 +4734,7 @@
                           <a:ea typeface="Microsoft JhengHei"/>
                           <a:cs typeface="Microsoft JhengHei"/>
                         </a:rPr>
-                        <a:t>—</a:t>
+                        <a:t>受影響之資料檔案留有備份，不影響公司營運、業務進行等。</a:t>
                       </a:r>
                     </a:p>
                   </a:txBody>
@@ -4516,7 +4760,7 @@
                           <a:ea typeface="Microsoft JhengHei"/>
                           <a:cs typeface="Microsoft JhengHei"/>
                         </a:rPr>
-                        <a:t>耕興</a:t>
+                        <a:t>易發</a:t>
                       </a:r>
                     </a:p>
                   </a:txBody>
@@ -4540,7 +4784,7 @@
                           <a:ea typeface="Microsoft JhengHei"/>
                           <a:cs typeface="Microsoft JhengHei"/>
                         </a:rPr>
-                        <a:t>6146</a:t>
+                        <a:t>6425</a:t>
                       </a:r>
                     </a:p>
                   </a:txBody>
@@ -4582,13 +4826,13 @@
                       <a:r>
                         <a:rPr sz="1150" b="1">
                           <a:solidFill>
-                            <a:srgbClr val="5C6679"/>
+                            <a:srgbClr val="F4A261"/>
                           </a:solidFill>
                           <a:latin typeface="Microsoft JhengHei"/>
                           <a:ea typeface="Microsoft JhengHei"/>
                           <a:cs typeface="Microsoft JhengHei"/>
                         </a:rPr>
-                        <a:t>其他</a:t>
+                        <a:t>勒索病毒/加密</a:t>
                       </a:r>
                     </a:p>
                   </a:txBody>
@@ -4612,7 +4856,7 @@
                           <a:ea typeface="Microsoft JhengHei"/>
                           <a:cs typeface="Microsoft JhengHei"/>
                         </a:rPr>
-                        <a:t>受影響之資料檔案留有備份，不影響公司營運、業務進行等。</a:t>
+                        <a:t>目前初步評估對公司運作無重大影響。</a:t>
                       </a:r>
                     </a:p>
                   </a:txBody>
@@ -4638,7 +4882,7 @@
                           <a:ea typeface="Microsoft JhengHei"/>
                           <a:cs typeface="Microsoft JhengHei"/>
                         </a:rPr>
-                        <a:t>易發</a:t>
+                        <a:t>尼得科超眾</a:t>
                       </a:r>
                     </a:p>
                   </a:txBody>
@@ -4662,7 +4906,7 @@
                           <a:ea typeface="Microsoft JhengHei"/>
                           <a:cs typeface="Microsoft JhengHei"/>
                         </a:rPr>
-                        <a:t>6425</a:t>
+                        <a:t>6230</a:t>
                       </a:r>
                     </a:p>
                   </a:txBody>
@@ -4734,7 +4978,7 @@
                           <a:ea typeface="Microsoft JhengHei"/>
                           <a:cs typeface="Microsoft JhengHei"/>
                         </a:rPr>
-                        <a:t>目前初步評估對公司運作無重大影響。</a:t>
+                        <a:t>目前受影響之系統正陸續復原中，對公司整體營運及財務之影響程度尚在評估…</a:t>
                       </a:r>
                     </a:p>
                   </a:txBody>
@@ -4760,7 +5004,7 @@
                           <a:ea typeface="Microsoft JhengHei"/>
                           <a:cs typeface="Microsoft JhengHei"/>
                         </a:rPr>
-                        <a:t>尼得科超眾</a:t>
+                        <a:t>上福</a:t>
                       </a:r>
                     </a:p>
                   </a:txBody>
@@ -4784,7 +5028,7 @@
                           <a:ea typeface="Microsoft JhengHei"/>
                           <a:cs typeface="Microsoft JhengHei"/>
                         </a:rPr>
-                        <a:t>6230</a:t>
+                        <a:t>6128</a:t>
                       </a:r>
                     </a:p>
                   </a:txBody>
@@ -4808,7 +5052,7 @@
                           <a:ea typeface="Microsoft JhengHei"/>
                           <a:cs typeface="Microsoft JhengHei"/>
                         </a:rPr>
-                        <a:t>06/22</a:t>
+                        <a:t>06/16</a:t>
                       </a:r>
                     </a:p>
                   </a:txBody>
@@ -4826,13 +5070,13 @@
                       <a:r>
                         <a:rPr sz="1150" b="1">
                           <a:solidFill>
-                            <a:srgbClr val="F4A261"/>
+                            <a:srgbClr val="5C6679"/>
                           </a:solidFill>
                           <a:latin typeface="Microsoft JhengHei"/>
                           <a:ea typeface="Microsoft JhengHei"/>
                           <a:cs typeface="Microsoft JhengHei"/>
                         </a:rPr>
-                        <a:t>勒索病毒/加密</a:t>
+                        <a:t>其他</a:t>
                       </a:r>
                     </a:p>
                   </a:txBody>
@@ -4856,251 +5100,7 @@
                           <a:ea typeface="Microsoft JhengHei"/>
                           <a:cs typeface="Microsoft JhengHei"/>
                         </a:rPr>
-                        <a:t>目前受影響之系統正陸續復原中，對公司整體營運及財務之影響程度尚在評估…</a:t>
-                      </a:r>
-                    </a:p>
-                  </a:txBody>
-                  <a:tcPr anchor="ctr" marL="73152" marT="9144" marB="9144">
-                    <a:solidFill>
-                      <a:srgbClr val="FFFFFF"/>
-                    </a:solidFill>
-                  </a:tcPr>
-                </a:tc>
-              </a:tr>
-              <a:tr h="384048">
-                <a:tc>
-                  <a:txBody>
-                    <a:bodyPr/>
-                    <a:lstStyle/>
-                    <a:p>
-                      <a:r>
-                        <a:rPr sz="1150" b="0">
-                          <a:solidFill>
-                            <a:srgbClr val="1A2233"/>
-                          </a:solidFill>
-                          <a:latin typeface="Microsoft JhengHei"/>
-                          <a:ea typeface="Microsoft JhengHei"/>
-                          <a:cs typeface="Microsoft JhengHei"/>
-                        </a:rPr>
-                        <a:t>上福</a:t>
-                      </a:r>
-                    </a:p>
-                  </a:txBody>
-                  <a:tcPr anchor="ctr" marL="73152" marT="9144" marB="9144">
-                    <a:solidFill>
-                      <a:srgbClr val="EEF2F9"/>
-                    </a:solidFill>
-                  </a:tcPr>
-                </a:tc>
-                <a:tc>
-                  <a:txBody>
-                    <a:bodyPr/>
-                    <a:lstStyle/>
-                    <a:p>
-                      <a:r>
-                        <a:rPr sz="1150" b="0">
-                          <a:solidFill>
-                            <a:srgbClr val="1A2233"/>
-                          </a:solidFill>
-                          <a:latin typeface="Microsoft JhengHei"/>
-                          <a:ea typeface="Microsoft JhengHei"/>
-                          <a:cs typeface="Microsoft JhengHei"/>
-                        </a:rPr>
-                        <a:t>6128</a:t>
-                      </a:r>
-                    </a:p>
-                  </a:txBody>
-                  <a:tcPr anchor="ctr" marL="73152" marT="9144" marB="9144">
-                    <a:solidFill>
-                      <a:srgbClr val="EEF2F9"/>
-                    </a:solidFill>
-                  </a:tcPr>
-                </a:tc>
-                <a:tc>
-                  <a:txBody>
-                    <a:bodyPr/>
-                    <a:lstStyle/>
-                    <a:p>
-                      <a:r>
-                        <a:rPr sz="1150" b="0">
-                          <a:solidFill>
-                            <a:srgbClr val="1A2233"/>
-                          </a:solidFill>
-                          <a:latin typeface="Microsoft JhengHei"/>
-                          <a:ea typeface="Microsoft JhengHei"/>
-                          <a:cs typeface="Microsoft JhengHei"/>
-                        </a:rPr>
-                        <a:t>06/16</a:t>
-                      </a:r>
-                    </a:p>
-                  </a:txBody>
-                  <a:tcPr anchor="ctr" marL="73152" marT="9144" marB="9144">
-                    <a:solidFill>
-                      <a:srgbClr val="EEF2F9"/>
-                    </a:solidFill>
-                  </a:tcPr>
-                </a:tc>
-                <a:tc>
-                  <a:txBody>
-                    <a:bodyPr/>
-                    <a:lstStyle/>
-                    <a:p>
-                      <a:r>
-                        <a:rPr sz="1150" b="1">
-                          <a:solidFill>
-                            <a:srgbClr val="5C6679"/>
-                          </a:solidFill>
-                          <a:latin typeface="Microsoft JhengHei"/>
-                          <a:ea typeface="Microsoft JhengHei"/>
-                          <a:cs typeface="Microsoft JhengHei"/>
-                        </a:rPr>
-                        <a:t>其他</a:t>
-                      </a:r>
-                    </a:p>
-                  </a:txBody>
-                  <a:tcPr anchor="ctr" marL="73152" marT="9144" marB="9144">
-                    <a:solidFill>
-                      <a:srgbClr val="EEF2F9"/>
-                    </a:solidFill>
-                  </a:tcPr>
-                </a:tc>
-                <a:tc>
-                  <a:txBody>
-                    <a:bodyPr/>
-                    <a:lstStyle/>
-                    <a:p>
-                      <a:r>
-                        <a:rPr sz="1150" b="0">
-                          <a:solidFill>
-                            <a:srgbClr val="1A2233"/>
-                          </a:solidFill>
-                          <a:latin typeface="Microsoft JhengHei"/>
-                          <a:ea typeface="Microsoft JhengHei"/>
-                          <a:cs typeface="Microsoft JhengHei"/>
-                        </a:rPr>
                         <a:t>目前評估該事件對公司營運造成暫停出貨的影響，現階段出貨已陸續恢復中。</a:t>
-                      </a:r>
-                    </a:p>
-                  </a:txBody>
-                  <a:tcPr anchor="ctr" marL="73152" marT="9144" marB="9144">
-                    <a:solidFill>
-                      <a:srgbClr val="EEF2F9"/>
-                    </a:solidFill>
-                  </a:tcPr>
-                </a:tc>
-              </a:tr>
-              <a:tr h="384048">
-                <a:tc>
-                  <a:txBody>
-                    <a:bodyPr/>
-                    <a:lstStyle/>
-                    <a:p>
-                      <a:r>
-                        <a:rPr sz="1150" b="0">
-                          <a:solidFill>
-                            <a:srgbClr val="1A2233"/>
-                          </a:solidFill>
-                          <a:latin typeface="Microsoft JhengHei"/>
-                          <a:ea typeface="Microsoft JhengHei"/>
-                          <a:cs typeface="Microsoft JhengHei"/>
-                        </a:rPr>
-                        <a:t>巨路</a:t>
-                      </a:r>
-                    </a:p>
-                  </a:txBody>
-                  <a:tcPr anchor="ctr" marL="73152" marT="9144" marB="9144">
-                    <a:solidFill>
-                      <a:srgbClr val="FFFFFF"/>
-                    </a:solidFill>
-                  </a:tcPr>
-                </a:tc>
-                <a:tc>
-                  <a:txBody>
-                    <a:bodyPr/>
-                    <a:lstStyle/>
-                    <a:p>
-                      <a:r>
-                        <a:rPr sz="1150" b="0">
-                          <a:solidFill>
-                            <a:srgbClr val="1A2233"/>
-                          </a:solidFill>
-                          <a:latin typeface="Microsoft JhengHei"/>
-                          <a:ea typeface="Microsoft JhengHei"/>
-                          <a:cs typeface="Microsoft JhengHei"/>
-                        </a:rPr>
-                        <a:t>6192</a:t>
-                      </a:r>
-                    </a:p>
-                  </a:txBody>
-                  <a:tcPr anchor="ctr" marL="73152" marT="9144" marB="9144">
-                    <a:solidFill>
-                      <a:srgbClr val="FFFFFF"/>
-                    </a:solidFill>
-                  </a:tcPr>
-                </a:tc>
-                <a:tc>
-                  <a:txBody>
-                    <a:bodyPr/>
-                    <a:lstStyle/>
-                    <a:p>
-                      <a:r>
-                        <a:rPr sz="1150" b="0">
-                          <a:solidFill>
-                            <a:srgbClr val="1A2233"/>
-                          </a:solidFill>
-                          <a:latin typeface="Microsoft JhengHei"/>
-                          <a:ea typeface="Microsoft JhengHei"/>
-                          <a:cs typeface="Microsoft JhengHei"/>
-                        </a:rPr>
-                        <a:t>06/02</a:t>
-                      </a:r>
-                    </a:p>
-                  </a:txBody>
-                  <a:tcPr anchor="ctr" marL="73152" marT="9144" marB="9144">
-                    <a:solidFill>
-                      <a:srgbClr val="FFFFFF"/>
-                    </a:solidFill>
-                  </a:tcPr>
-                </a:tc>
-                <a:tc>
-                  <a:txBody>
-                    <a:bodyPr/>
-                    <a:lstStyle/>
-                    <a:p>
-                      <a:r>
-                        <a:rPr sz="1150" b="1">
-                          <a:solidFill>
-                            <a:srgbClr val="E63946"/>
-                          </a:solidFill>
-                          <a:latin typeface="Microsoft JhengHei"/>
-                          <a:ea typeface="Microsoft JhengHei"/>
-                          <a:cs typeface="Microsoft JhengHei"/>
-                        </a:rPr>
-                        <a:t>駭客攻擊</a:t>
-                      </a:r>
-                    </a:p>
-                  </a:txBody>
-                  <a:tcPr anchor="ctr" marL="73152" marT="9144" marB="9144">
-                    <a:solidFill>
-                      <a:srgbClr val="FFFFFF"/>
-                    </a:solidFill>
-                  </a:tcPr>
-                </a:tc>
-                <a:tc>
-                  <a:txBody>
-                    <a:bodyPr/>
-                    <a:lstStyle/>
-                    <a:p>
-                      <a:r>
-                        <a:rPr sz="1150" b="0">
-                          <a:solidFill>
-                            <a:srgbClr val="1A2233"/>
-                          </a:solidFill>
-                          <a:latin typeface="Microsoft JhengHei"/>
-                          <a:ea typeface="Microsoft JhengHei"/>
-                          <a:cs typeface="Microsoft JhengHei"/>
-                        </a:rPr>
-                        <a:t>目前評估對公司營運無重大影響，亦未發現個資或機密資料外洩之情事。</a:t>
                       </a:r>
                     </a:p>
                   </a:txBody>
@@ -5465,7 +5465,7 @@
                 <a:ea typeface="Microsoft JhengHei"/>
                 <a:cs typeface="Microsoft JhengHei"/>
               </a:rPr>
-              <a:t>網家、巨路</a:t>
+              <a:t>麗清、網家</a:t>
             </a:r>
           </a:p>
         </p:txBody>
@@ -6281,7 +6281,7 @@
                           <a:ea typeface="Microsoft JhengHei"/>
                           <a:cs typeface="Microsoft JhengHei"/>
                         </a:rPr>
-                        <a:t>GOGOLOOK</a:t>
+                        <a:t>麗清</a:t>
                       </a:r>
                     </a:p>
                   </a:txBody>
@@ -6305,739 +6305,7 @@
                           <a:ea typeface="Microsoft JhengHei"/>
                           <a:cs typeface="Microsoft JhengHei"/>
                         </a:rPr>
-                        <a:t>6902</a:t>
-                      </a:r>
-                    </a:p>
-                  </a:txBody>
-                  <a:tcPr anchor="ctr" marL="73152" marT="9144" marB="9144">
-                    <a:solidFill>
-                      <a:srgbClr val="FFFFFF"/>
-                    </a:solidFill>
-                  </a:tcPr>
-                </a:tc>
-                <a:tc>
-                  <a:txBody>
-                    <a:bodyPr/>
-                    <a:lstStyle/>
-                    <a:p>
-                      <a:r>
-                        <a:rPr sz="1150" b="1">
-                          <a:solidFill>
-                            <a:srgbClr val="5C6679"/>
-                          </a:solidFill>
-                          <a:latin typeface="Microsoft JhengHei"/>
-                          <a:ea typeface="Microsoft JhengHei"/>
-                          <a:cs typeface="Microsoft JhengHei"/>
-                        </a:rPr>
-                        <a:t>其他</a:t>
-                      </a:r>
-                    </a:p>
-                  </a:txBody>
-                  <a:tcPr anchor="ctr" marL="73152" marT="9144" marB="9144">
-                    <a:solidFill>
-                      <a:srgbClr val="FFFFFF"/>
-                    </a:solidFill>
-                  </a:tcPr>
-                </a:tc>
-                <a:tc>
-                  <a:txBody>
-                    <a:bodyPr/>
-                    <a:lstStyle/>
-                    <a:p>
-                      <a:r>
-                        <a:rPr sz="1150" b="0">
-                          <a:solidFill>
-                            <a:srgbClr val="1A2233"/>
-                          </a:solidFill>
-                          <a:latin typeface="Microsoft JhengHei"/>
-                          <a:ea typeface="Microsoft JhengHei"/>
-                          <a:cs typeface="Microsoft JhengHei"/>
-                        </a:rPr>
-                        <a:t>資誠聯合會計師事務所</a:t>
-                      </a:r>
-                    </a:p>
-                  </a:txBody>
-                  <a:tcPr anchor="ctr" marL="73152" marT="9144" marB="9144">
-                    <a:solidFill>
-                      <a:srgbClr val="FFFFFF"/>
-                    </a:solidFill>
-                  </a:tcPr>
-                </a:tc>
-                <a:tc>
-                  <a:txBody>
-                    <a:bodyPr/>
-                    <a:lstStyle/>
-                    <a:p>
-                      <a:r>
-                        <a:rPr sz="1150" b="0">
-                          <a:solidFill>
-                            <a:srgbClr val="1A2233"/>
-                          </a:solidFill>
-                          <a:latin typeface="Microsoft JhengHei"/>
-                          <a:ea typeface="Microsoft JhengHei"/>
-                          <a:cs typeface="Microsoft JhengHei"/>
-                        </a:rPr>
-                        <a:t>吳尚燉、王昱欣</a:t>
-                      </a:r>
-                    </a:p>
-                  </a:txBody>
-                  <a:tcPr anchor="ctr" marL="73152" marT="9144" marB="9144">
-                    <a:solidFill>
-                      <a:srgbClr val="FFFFFF"/>
-                    </a:solidFill>
-                  </a:tcPr>
-                </a:tc>
-              </a:tr>
-              <a:tr h="457200">
-                <a:tc>
-                  <a:txBody>
-                    <a:bodyPr/>
-                    <a:lstStyle/>
-                    <a:p>
-                      <a:r>
-                        <a:rPr sz="1150" b="0">
-                          <a:solidFill>
-                            <a:srgbClr val="1A2233"/>
-                          </a:solidFill>
-                          <a:latin typeface="Microsoft JhengHei"/>
-                          <a:ea typeface="Microsoft JhengHei"/>
-                          <a:cs typeface="Microsoft JhengHei"/>
-                        </a:rPr>
-                        <a:t>網家</a:t>
-                      </a:r>
-                    </a:p>
-                  </a:txBody>
-                  <a:tcPr anchor="ctr" marL="73152" marT="9144" marB="9144">
-                    <a:solidFill>
-                      <a:srgbClr val="EEF2F9"/>
-                    </a:solidFill>
-                  </a:tcPr>
-                </a:tc>
-                <a:tc>
-                  <a:txBody>
-                    <a:bodyPr/>
-                    <a:lstStyle/>
-                    <a:p>
-                      <a:r>
-                        <a:rPr sz="1150" b="0">
-                          <a:solidFill>
-                            <a:srgbClr val="1A2233"/>
-                          </a:solidFill>
-                          <a:latin typeface="Microsoft JhengHei"/>
-                          <a:ea typeface="Microsoft JhengHei"/>
-                          <a:cs typeface="Microsoft JhengHei"/>
-                        </a:rPr>
-                        <a:t>8044</a:t>
-                      </a:r>
-                    </a:p>
-                  </a:txBody>
-                  <a:tcPr anchor="ctr" marL="73152" marT="9144" marB="9144">
-                    <a:solidFill>
-                      <a:srgbClr val="EEF2F9"/>
-                    </a:solidFill>
-                  </a:tcPr>
-                </a:tc>
-                <a:tc>
-                  <a:txBody>
-                    <a:bodyPr/>
-                    <a:lstStyle/>
-                    <a:p>
-                      <a:r>
-                        <a:rPr sz="1150" b="1">
-                          <a:solidFill>
-                            <a:srgbClr val="E63946"/>
-                          </a:solidFill>
-                          <a:latin typeface="Microsoft JhengHei"/>
-                          <a:ea typeface="Microsoft JhengHei"/>
-                          <a:cs typeface="Microsoft JhengHei"/>
-                        </a:rPr>
-                        <a:t>駭客攻擊</a:t>
-                      </a:r>
-                    </a:p>
-                  </a:txBody>
-                  <a:tcPr anchor="ctr" marL="73152" marT="9144" marB="9144">
-                    <a:solidFill>
-                      <a:srgbClr val="EEF2F9"/>
-                    </a:solidFill>
-                  </a:tcPr>
-                </a:tc>
-                <a:tc>
-                  <a:txBody>
-                    <a:bodyPr/>
-                    <a:lstStyle/>
-                    <a:p>
-                      <a:r>
-                        <a:rPr sz="1150" b="0">
-                          <a:solidFill>
-                            <a:srgbClr val="1A2233"/>
-                          </a:solidFill>
-                          <a:latin typeface="Microsoft JhengHei"/>
-                          <a:ea typeface="Microsoft JhengHei"/>
-                          <a:cs typeface="Microsoft JhengHei"/>
-                        </a:rPr>
-                        <a:t>資誠聯合會計師事務所</a:t>
-                      </a:r>
-                    </a:p>
-                  </a:txBody>
-                  <a:tcPr anchor="ctr" marL="73152" marT="9144" marB="9144">
-                    <a:solidFill>
-                      <a:srgbClr val="EEF2F9"/>
-                    </a:solidFill>
-                  </a:tcPr>
-                </a:tc>
-                <a:tc>
-                  <a:txBody>
-                    <a:bodyPr/>
-                    <a:lstStyle/>
-                    <a:p>
-                      <a:r>
-                        <a:rPr sz="1150" b="0">
-                          <a:solidFill>
-                            <a:srgbClr val="1A2233"/>
-                          </a:solidFill>
-                          <a:latin typeface="Microsoft JhengHei"/>
-                          <a:ea typeface="Microsoft JhengHei"/>
-                          <a:cs typeface="Microsoft JhengHei"/>
-                        </a:rPr>
-                        <a:t>廖容翎、梁嬋女</a:t>
-                      </a:r>
-                    </a:p>
-                  </a:txBody>
-                  <a:tcPr anchor="ctr" marL="73152" marT="9144" marB="9144">
-                    <a:solidFill>
-                      <a:srgbClr val="EEF2F9"/>
-                    </a:solidFill>
-                  </a:tcPr>
-                </a:tc>
-              </a:tr>
-              <a:tr h="457200">
-                <a:tc>
-                  <a:txBody>
-                    <a:bodyPr/>
-                    <a:lstStyle/>
-                    <a:p>
-                      <a:r>
-                        <a:rPr sz="1150" b="0">
-                          <a:solidFill>
-                            <a:srgbClr val="1A2233"/>
-                          </a:solidFill>
-                          <a:latin typeface="Microsoft JhengHei"/>
-                          <a:ea typeface="Microsoft JhengHei"/>
-                          <a:cs typeface="Microsoft JhengHei"/>
-                        </a:rPr>
-                        <a:t>耕興</a:t>
-                      </a:r>
-                    </a:p>
-                  </a:txBody>
-                  <a:tcPr anchor="ctr" marL="73152" marT="9144" marB="9144">
-                    <a:solidFill>
-                      <a:srgbClr val="FFFFFF"/>
-                    </a:solidFill>
-                  </a:tcPr>
-                </a:tc>
-                <a:tc>
-                  <a:txBody>
-                    <a:bodyPr/>
-                    <a:lstStyle/>
-                    <a:p>
-                      <a:r>
-                        <a:rPr sz="1150" b="0">
-                          <a:solidFill>
-                            <a:srgbClr val="1A2233"/>
-                          </a:solidFill>
-                          <a:latin typeface="Microsoft JhengHei"/>
-                          <a:ea typeface="Microsoft JhengHei"/>
-                          <a:cs typeface="Microsoft JhengHei"/>
-                        </a:rPr>
-                        <a:t>6146</a:t>
-                      </a:r>
-                    </a:p>
-                  </a:txBody>
-                  <a:tcPr anchor="ctr" marL="73152" marT="9144" marB="9144">
-                    <a:solidFill>
-                      <a:srgbClr val="FFFFFF"/>
-                    </a:solidFill>
-                  </a:tcPr>
-                </a:tc>
-                <a:tc>
-                  <a:txBody>
-                    <a:bodyPr/>
-                    <a:lstStyle/>
-                    <a:p>
-                      <a:r>
-                        <a:rPr sz="1150" b="1">
-                          <a:solidFill>
-                            <a:srgbClr val="5C6679"/>
-                          </a:solidFill>
-                          <a:latin typeface="Microsoft JhengHei"/>
-                          <a:ea typeface="Microsoft JhengHei"/>
-                          <a:cs typeface="Microsoft JhengHei"/>
-                        </a:rPr>
-                        <a:t>其他</a:t>
-                      </a:r>
-                    </a:p>
-                  </a:txBody>
-                  <a:tcPr anchor="ctr" marL="73152" marT="9144" marB="9144">
-                    <a:solidFill>
-                      <a:srgbClr val="FFFFFF"/>
-                    </a:solidFill>
-                  </a:tcPr>
-                </a:tc>
-                <a:tc>
-                  <a:txBody>
-                    <a:bodyPr/>
-                    <a:lstStyle/>
-                    <a:p>
-                      <a:r>
-                        <a:rPr sz="1150" b="0">
-                          <a:solidFill>
-                            <a:srgbClr val="1A2233"/>
-                          </a:solidFill>
-                          <a:latin typeface="Microsoft JhengHei"/>
-                          <a:ea typeface="Microsoft JhengHei"/>
-                          <a:cs typeface="Microsoft JhengHei"/>
-                        </a:rPr>
-                        <a:t>勤業眾信聯合會計師事務所</a:t>
-                      </a:r>
-                    </a:p>
-                  </a:txBody>
-                  <a:tcPr anchor="ctr" marL="73152" marT="9144" marB="9144">
-                    <a:solidFill>
-                      <a:srgbClr val="FFFFFF"/>
-                    </a:solidFill>
-                  </a:tcPr>
-                </a:tc>
-                <a:tc>
-                  <a:txBody>
-                    <a:bodyPr/>
-                    <a:lstStyle/>
-                    <a:p>
-                      <a:r>
-                        <a:rPr sz="1150" b="0">
-                          <a:solidFill>
-                            <a:srgbClr val="1A2233"/>
-                          </a:solidFill>
-                          <a:latin typeface="Microsoft JhengHei"/>
-                          <a:ea typeface="Microsoft JhengHei"/>
-                          <a:cs typeface="Microsoft JhengHei"/>
-                        </a:rPr>
-                        <a:t>黃毅民、陳文香</a:t>
-                      </a:r>
-                    </a:p>
-                  </a:txBody>
-                  <a:tcPr anchor="ctr" marL="73152" marT="9144" marB="9144">
-                    <a:solidFill>
-                      <a:srgbClr val="FFFFFF"/>
-                    </a:solidFill>
-                  </a:tcPr>
-                </a:tc>
-              </a:tr>
-              <a:tr h="457200">
-                <a:tc>
-                  <a:txBody>
-                    <a:bodyPr/>
-                    <a:lstStyle/>
-                    <a:p>
-                      <a:r>
-                        <a:rPr sz="1150" b="0">
-                          <a:solidFill>
-                            <a:srgbClr val="1A2233"/>
-                          </a:solidFill>
-                          <a:latin typeface="Microsoft JhengHei"/>
-                          <a:ea typeface="Microsoft JhengHei"/>
-                          <a:cs typeface="Microsoft JhengHei"/>
-                        </a:rPr>
-                        <a:t>易發</a:t>
-                      </a:r>
-                    </a:p>
-                  </a:txBody>
-                  <a:tcPr anchor="ctr" marL="73152" marT="9144" marB="9144">
-                    <a:solidFill>
-                      <a:srgbClr val="EEF2F9"/>
-                    </a:solidFill>
-                  </a:tcPr>
-                </a:tc>
-                <a:tc>
-                  <a:txBody>
-                    <a:bodyPr/>
-                    <a:lstStyle/>
-                    <a:p>
-                      <a:r>
-                        <a:rPr sz="1150" b="0">
-                          <a:solidFill>
-                            <a:srgbClr val="1A2233"/>
-                          </a:solidFill>
-                          <a:latin typeface="Microsoft JhengHei"/>
-                          <a:ea typeface="Microsoft JhengHei"/>
-                          <a:cs typeface="Microsoft JhengHei"/>
-                        </a:rPr>
-                        <a:t>6425</a:t>
-                      </a:r>
-                    </a:p>
-                  </a:txBody>
-                  <a:tcPr anchor="ctr" marL="73152" marT="9144" marB="9144">
-                    <a:solidFill>
-                      <a:srgbClr val="EEF2F9"/>
-                    </a:solidFill>
-                  </a:tcPr>
-                </a:tc>
-                <a:tc>
-                  <a:txBody>
-                    <a:bodyPr/>
-                    <a:lstStyle/>
-                    <a:p>
-                      <a:r>
-                        <a:rPr sz="1150" b="1">
-                          <a:solidFill>
-                            <a:srgbClr val="F4A261"/>
-                          </a:solidFill>
-                          <a:latin typeface="Microsoft JhengHei"/>
-                          <a:ea typeface="Microsoft JhengHei"/>
-                          <a:cs typeface="Microsoft JhengHei"/>
-                        </a:rPr>
-                        <a:t>勒索病毒/加密</a:t>
-                      </a:r>
-                    </a:p>
-                  </a:txBody>
-                  <a:tcPr anchor="ctr" marL="73152" marT="9144" marB="9144">
-                    <a:solidFill>
-                      <a:srgbClr val="EEF2F9"/>
-                    </a:solidFill>
-                  </a:tcPr>
-                </a:tc>
-                <a:tc>
-                  <a:txBody>
-                    <a:bodyPr/>
-                    <a:lstStyle/>
-                    <a:p>
-                      <a:r>
-                        <a:rPr sz="1150" b="0">
-                          <a:solidFill>
-                            <a:srgbClr val="1A2233"/>
-                          </a:solidFill>
-                          <a:latin typeface="Microsoft JhengHei"/>
-                          <a:ea typeface="Microsoft JhengHei"/>
-                          <a:cs typeface="Microsoft JhengHei"/>
-                        </a:rPr>
-                        <a:t>勤業眾信聯合會計師事務所</a:t>
-                      </a:r>
-                    </a:p>
-                  </a:txBody>
-                  <a:tcPr anchor="ctr" marL="73152" marT="9144" marB="9144">
-                    <a:solidFill>
-                      <a:srgbClr val="EEF2F9"/>
-                    </a:solidFill>
-                  </a:tcPr>
-                </a:tc>
-                <a:tc>
-                  <a:txBody>
-                    <a:bodyPr/>
-                    <a:lstStyle/>
-                    <a:p>
-                      <a:r>
-                        <a:rPr sz="1150" b="0">
-                          <a:solidFill>
-                            <a:srgbClr val="1A2233"/>
-                          </a:solidFill>
-                          <a:latin typeface="Microsoft JhengHei"/>
-                          <a:ea typeface="Microsoft JhengHei"/>
-                          <a:cs typeface="Microsoft JhengHei"/>
-                        </a:rPr>
-                        <a:t>張至誼、洪國田</a:t>
-                      </a:r>
-                    </a:p>
-                  </a:txBody>
-                  <a:tcPr anchor="ctr" marL="73152" marT="9144" marB="9144">
-                    <a:solidFill>
-                      <a:srgbClr val="EEF2F9"/>
-                    </a:solidFill>
-                  </a:tcPr>
-                </a:tc>
-              </a:tr>
-              <a:tr h="457200">
-                <a:tc>
-                  <a:txBody>
-                    <a:bodyPr/>
-                    <a:lstStyle/>
-                    <a:p>
-                      <a:r>
-                        <a:rPr sz="1150" b="0">
-                          <a:solidFill>
-                            <a:srgbClr val="1A2233"/>
-                          </a:solidFill>
-                          <a:latin typeface="Microsoft JhengHei"/>
-                          <a:ea typeface="Microsoft JhengHei"/>
-                          <a:cs typeface="Microsoft JhengHei"/>
-                        </a:rPr>
-                        <a:t>尼得科超眾</a:t>
-                      </a:r>
-                    </a:p>
-                  </a:txBody>
-                  <a:tcPr anchor="ctr" marL="73152" marT="9144" marB="9144">
-                    <a:solidFill>
-                      <a:srgbClr val="FFFFFF"/>
-                    </a:solidFill>
-                  </a:tcPr>
-                </a:tc>
-                <a:tc>
-                  <a:txBody>
-                    <a:bodyPr/>
-                    <a:lstStyle/>
-                    <a:p>
-                      <a:r>
-                        <a:rPr sz="1150" b="0">
-                          <a:solidFill>
-                            <a:srgbClr val="1A2233"/>
-                          </a:solidFill>
-                          <a:latin typeface="Microsoft JhengHei"/>
-                          <a:ea typeface="Microsoft JhengHei"/>
-                          <a:cs typeface="Microsoft JhengHei"/>
-                        </a:rPr>
-                        <a:t>6230</a:t>
-                      </a:r>
-                    </a:p>
-                  </a:txBody>
-                  <a:tcPr anchor="ctr" marL="73152" marT="9144" marB="9144">
-                    <a:solidFill>
-                      <a:srgbClr val="FFFFFF"/>
-                    </a:solidFill>
-                  </a:tcPr>
-                </a:tc>
-                <a:tc>
-                  <a:txBody>
-                    <a:bodyPr/>
-                    <a:lstStyle/>
-                    <a:p>
-                      <a:r>
-                        <a:rPr sz="1150" b="1">
-                          <a:solidFill>
-                            <a:srgbClr val="F4A261"/>
-                          </a:solidFill>
-                          <a:latin typeface="Microsoft JhengHei"/>
-                          <a:ea typeface="Microsoft JhengHei"/>
-                          <a:cs typeface="Microsoft JhengHei"/>
-                        </a:rPr>
-                        <a:t>勒索病毒/加密</a:t>
-                      </a:r>
-                    </a:p>
-                  </a:txBody>
-                  <a:tcPr anchor="ctr" marL="73152" marT="9144" marB="9144">
-                    <a:solidFill>
-                      <a:srgbClr val="FFFFFF"/>
-                    </a:solidFill>
-                  </a:tcPr>
-                </a:tc>
-                <a:tc>
-                  <a:txBody>
-                    <a:bodyPr/>
-                    <a:lstStyle/>
-                    <a:p>
-                      <a:r>
-                        <a:rPr sz="1150" b="0">
-                          <a:solidFill>
-                            <a:srgbClr val="1A2233"/>
-                          </a:solidFill>
-                          <a:latin typeface="Microsoft JhengHei"/>
-                          <a:ea typeface="Microsoft JhengHei"/>
-                          <a:cs typeface="Microsoft JhengHei"/>
-                        </a:rPr>
-                        <a:t>安侯建業聯合會計師事務所</a:t>
-                      </a:r>
-                    </a:p>
-                  </a:txBody>
-                  <a:tcPr anchor="ctr" marL="73152" marT="9144" marB="9144">
-                    <a:solidFill>
-                      <a:srgbClr val="FFFFFF"/>
-                    </a:solidFill>
-                  </a:tcPr>
-                </a:tc>
-                <a:tc>
-                  <a:txBody>
-                    <a:bodyPr/>
-                    <a:lstStyle/>
-                    <a:p>
-                      <a:r>
-                        <a:rPr sz="1150" b="0">
-                          <a:solidFill>
-                            <a:srgbClr val="1A2233"/>
-                          </a:solidFill>
-                          <a:latin typeface="Microsoft JhengHei"/>
-                          <a:ea typeface="Microsoft JhengHei"/>
-                          <a:cs typeface="Microsoft JhengHei"/>
-                        </a:rPr>
-                        <a:t>郭欣頤、張肇文</a:t>
-                      </a:r>
-                    </a:p>
-                  </a:txBody>
-                  <a:tcPr anchor="ctr" marL="73152" marT="9144" marB="9144">
-                    <a:solidFill>
-                      <a:srgbClr val="FFFFFF"/>
-                    </a:solidFill>
-                  </a:tcPr>
-                </a:tc>
-              </a:tr>
-              <a:tr h="457200">
-                <a:tc>
-                  <a:txBody>
-                    <a:bodyPr/>
-                    <a:lstStyle/>
-                    <a:p>
-                      <a:r>
-                        <a:rPr sz="1150" b="0">
-                          <a:solidFill>
-                            <a:srgbClr val="1A2233"/>
-                          </a:solidFill>
-                          <a:latin typeface="Microsoft JhengHei"/>
-                          <a:ea typeface="Microsoft JhengHei"/>
-                          <a:cs typeface="Microsoft JhengHei"/>
-                        </a:rPr>
-                        <a:t>上福</a:t>
-                      </a:r>
-                    </a:p>
-                  </a:txBody>
-                  <a:tcPr anchor="ctr" marL="73152" marT="9144" marB="9144">
-                    <a:solidFill>
-                      <a:srgbClr val="EEF2F9"/>
-                    </a:solidFill>
-                  </a:tcPr>
-                </a:tc>
-                <a:tc>
-                  <a:txBody>
-                    <a:bodyPr/>
-                    <a:lstStyle/>
-                    <a:p>
-                      <a:r>
-                        <a:rPr sz="1150" b="0">
-                          <a:solidFill>
-                            <a:srgbClr val="1A2233"/>
-                          </a:solidFill>
-                          <a:latin typeface="Microsoft JhengHei"/>
-                          <a:ea typeface="Microsoft JhengHei"/>
-                          <a:cs typeface="Microsoft JhengHei"/>
-                        </a:rPr>
-                        <a:t>6128</a:t>
-                      </a:r>
-                    </a:p>
-                  </a:txBody>
-                  <a:tcPr anchor="ctr" marL="73152" marT="9144" marB="9144">
-                    <a:solidFill>
-                      <a:srgbClr val="EEF2F9"/>
-                    </a:solidFill>
-                  </a:tcPr>
-                </a:tc>
-                <a:tc>
-                  <a:txBody>
-                    <a:bodyPr/>
-                    <a:lstStyle/>
-                    <a:p>
-                      <a:r>
-                        <a:rPr sz="1150" b="1">
-                          <a:solidFill>
-                            <a:srgbClr val="5C6679"/>
-                          </a:solidFill>
-                          <a:latin typeface="Microsoft JhengHei"/>
-                          <a:ea typeface="Microsoft JhengHei"/>
-                          <a:cs typeface="Microsoft JhengHei"/>
-                        </a:rPr>
-                        <a:t>其他</a:t>
-                      </a:r>
-                    </a:p>
-                  </a:txBody>
-                  <a:tcPr anchor="ctr" marL="73152" marT="9144" marB="9144">
-                    <a:solidFill>
-                      <a:srgbClr val="EEF2F9"/>
-                    </a:solidFill>
-                  </a:tcPr>
-                </a:tc>
-                <a:tc>
-                  <a:txBody>
-                    <a:bodyPr/>
-                    <a:lstStyle/>
-                    <a:p>
-                      <a:r>
-                        <a:rPr sz="1150" b="0">
-                          <a:solidFill>
-                            <a:srgbClr val="1A2233"/>
-                          </a:solidFill>
-                          <a:latin typeface="Microsoft JhengHei"/>
-                          <a:ea typeface="Microsoft JhengHei"/>
-                          <a:cs typeface="Microsoft JhengHei"/>
-                        </a:rPr>
-                        <a:t>安永聯合會計師事務所</a:t>
-                      </a:r>
-                    </a:p>
-                  </a:txBody>
-                  <a:tcPr anchor="ctr" marL="73152" marT="9144" marB="9144">
-                    <a:solidFill>
-                      <a:srgbClr val="EEF2F9"/>
-                    </a:solidFill>
-                  </a:tcPr>
-                </a:tc>
-                <a:tc>
-                  <a:txBody>
-                    <a:bodyPr/>
-                    <a:lstStyle/>
-                    <a:p>
-                      <a:r>
-                        <a:rPr sz="1150" b="0">
-                          <a:solidFill>
-                            <a:srgbClr val="1A2233"/>
-                          </a:solidFill>
-                          <a:latin typeface="Microsoft JhengHei"/>
-                          <a:ea typeface="Microsoft JhengHei"/>
-                          <a:cs typeface="Microsoft JhengHei"/>
-                        </a:rPr>
-                        <a:t>黃宇廷、賴書晨</a:t>
-                      </a:r>
-                    </a:p>
-                  </a:txBody>
-                  <a:tcPr anchor="ctr" marL="73152" marT="9144" marB="9144">
-                    <a:solidFill>
-                      <a:srgbClr val="EEF2F9"/>
-                    </a:solidFill>
-                  </a:tcPr>
-                </a:tc>
-              </a:tr>
-              <a:tr h="457200">
-                <a:tc>
-                  <a:txBody>
-                    <a:bodyPr/>
-                    <a:lstStyle/>
-                    <a:p>
-                      <a:r>
-                        <a:rPr sz="1150" b="0">
-                          <a:solidFill>
-                            <a:srgbClr val="1A2233"/>
-                          </a:solidFill>
-                          <a:latin typeface="Microsoft JhengHei"/>
-                          <a:ea typeface="Microsoft JhengHei"/>
-                          <a:cs typeface="Microsoft JhengHei"/>
-                        </a:rPr>
-                        <a:t>巨路</a:t>
-                      </a:r>
-                    </a:p>
-                  </a:txBody>
-                  <a:tcPr anchor="ctr" marL="73152" marT="9144" marB="9144">
-                    <a:solidFill>
-                      <a:srgbClr val="FFFFFF"/>
-                    </a:solidFill>
-                  </a:tcPr>
-                </a:tc>
-                <a:tc>
-                  <a:txBody>
-                    <a:bodyPr/>
-                    <a:lstStyle/>
-                    <a:p>
-                      <a:r>
-                        <a:rPr sz="1150" b="0">
-                          <a:solidFill>
-                            <a:srgbClr val="1A2233"/>
-                          </a:solidFill>
-                          <a:latin typeface="Microsoft JhengHei"/>
-                          <a:ea typeface="Microsoft JhengHei"/>
-                          <a:cs typeface="Microsoft JhengHei"/>
-                        </a:rPr>
-                        <a:t>6192</a:t>
+                        <a:t>3346</a:t>
                       </a:r>
                     </a:p>
                   </a:txBody>
@@ -7109,7 +6377,739 @@
                           <a:ea typeface="Microsoft JhengHei"/>
                           <a:cs typeface="Microsoft JhengHei"/>
                         </a:rPr>
-                        <a:t>劉建良、張麗君</a:t>
+                        <a:t>陳致源、黃堯麟</a:t>
+                      </a:r>
+                    </a:p>
+                  </a:txBody>
+                  <a:tcPr anchor="ctr" marL="73152" marT="9144" marB="9144">
+                    <a:solidFill>
+                      <a:srgbClr val="FFFFFF"/>
+                    </a:solidFill>
+                  </a:tcPr>
+                </a:tc>
+              </a:tr>
+              <a:tr h="457200">
+                <a:tc>
+                  <a:txBody>
+                    <a:bodyPr/>
+                    <a:lstStyle/>
+                    <a:p>
+                      <a:r>
+                        <a:rPr sz="1150" b="0">
+                          <a:solidFill>
+                            <a:srgbClr val="1A2233"/>
+                          </a:solidFill>
+                          <a:latin typeface="Microsoft JhengHei"/>
+                          <a:ea typeface="Microsoft JhengHei"/>
+                          <a:cs typeface="Microsoft JhengHei"/>
+                        </a:rPr>
+                        <a:t>GOGOLOOK</a:t>
+                      </a:r>
+                    </a:p>
+                  </a:txBody>
+                  <a:tcPr anchor="ctr" marL="73152" marT="9144" marB="9144">
+                    <a:solidFill>
+                      <a:srgbClr val="EEF2F9"/>
+                    </a:solidFill>
+                  </a:tcPr>
+                </a:tc>
+                <a:tc>
+                  <a:txBody>
+                    <a:bodyPr/>
+                    <a:lstStyle/>
+                    <a:p>
+                      <a:r>
+                        <a:rPr sz="1150" b="0">
+                          <a:solidFill>
+                            <a:srgbClr val="1A2233"/>
+                          </a:solidFill>
+                          <a:latin typeface="Microsoft JhengHei"/>
+                          <a:ea typeface="Microsoft JhengHei"/>
+                          <a:cs typeface="Microsoft JhengHei"/>
+                        </a:rPr>
+                        <a:t>6902</a:t>
+                      </a:r>
+                    </a:p>
+                  </a:txBody>
+                  <a:tcPr anchor="ctr" marL="73152" marT="9144" marB="9144">
+                    <a:solidFill>
+                      <a:srgbClr val="EEF2F9"/>
+                    </a:solidFill>
+                  </a:tcPr>
+                </a:tc>
+                <a:tc>
+                  <a:txBody>
+                    <a:bodyPr/>
+                    <a:lstStyle/>
+                    <a:p>
+                      <a:r>
+                        <a:rPr sz="1150" b="1">
+                          <a:solidFill>
+                            <a:srgbClr val="5C6679"/>
+                          </a:solidFill>
+                          <a:latin typeface="Microsoft JhengHei"/>
+                          <a:ea typeface="Microsoft JhengHei"/>
+                          <a:cs typeface="Microsoft JhengHei"/>
+                        </a:rPr>
+                        <a:t>其他</a:t>
+                      </a:r>
+                    </a:p>
+                  </a:txBody>
+                  <a:tcPr anchor="ctr" marL="73152" marT="9144" marB="9144">
+                    <a:solidFill>
+                      <a:srgbClr val="EEF2F9"/>
+                    </a:solidFill>
+                  </a:tcPr>
+                </a:tc>
+                <a:tc>
+                  <a:txBody>
+                    <a:bodyPr/>
+                    <a:lstStyle/>
+                    <a:p>
+                      <a:r>
+                        <a:rPr sz="1150" b="0">
+                          <a:solidFill>
+                            <a:srgbClr val="1A2233"/>
+                          </a:solidFill>
+                          <a:latin typeface="Microsoft JhengHei"/>
+                          <a:ea typeface="Microsoft JhengHei"/>
+                          <a:cs typeface="Microsoft JhengHei"/>
+                        </a:rPr>
+                        <a:t>資誠聯合會計師事務所</a:t>
+                      </a:r>
+                    </a:p>
+                  </a:txBody>
+                  <a:tcPr anchor="ctr" marL="73152" marT="9144" marB="9144">
+                    <a:solidFill>
+                      <a:srgbClr val="EEF2F9"/>
+                    </a:solidFill>
+                  </a:tcPr>
+                </a:tc>
+                <a:tc>
+                  <a:txBody>
+                    <a:bodyPr/>
+                    <a:lstStyle/>
+                    <a:p>
+                      <a:r>
+                        <a:rPr sz="1150" b="0">
+                          <a:solidFill>
+                            <a:srgbClr val="1A2233"/>
+                          </a:solidFill>
+                          <a:latin typeface="Microsoft JhengHei"/>
+                          <a:ea typeface="Microsoft JhengHei"/>
+                          <a:cs typeface="Microsoft JhengHei"/>
+                        </a:rPr>
+                        <a:t>吳尚燉、王昱欣</a:t>
+                      </a:r>
+                    </a:p>
+                  </a:txBody>
+                  <a:tcPr anchor="ctr" marL="73152" marT="9144" marB="9144">
+                    <a:solidFill>
+                      <a:srgbClr val="EEF2F9"/>
+                    </a:solidFill>
+                  </a:tcPr>
+                </a:tc>
+              </a:tr>
+              <a:tr h="457200">
+                <a:tc>
+                  <a:txBody>
+                    <a:bodyPr/>
+                    <a:lstStyle/>
+                    <a:p>
+                      <a:r>
+                        <a:rPr sz="1150" b="0">
+                          <a:solidFill>
+                            <a:srgbClr val="1A2233"/>
+                          </a:solidFill>
+                          <a:latin typeface="Microsoft JhengHei"/>
+                          <a:ea typeface="Microsoft JhengHei"/>
+                          <a:cs typeface="Microsoft JhengHei"/>
+                        </a:rPr>
+                        <a:t>網家</a:t>
+                      </a:r>
+                    </a:p>
+                  </a:txBody>
+                  <a:tcPr anchor="ctr" marL="73152" marT="9144" marB="9144">
+                    <a:solidFill>
+                      <a:srgbClr val="FFFFFF"/>
+                    </a:solidFill>
+                  </a:tcPr>
+                </a:tc>
+                <a:tc>
+                  <a:txBody>
+                    <a:bodyPr/>
+                    <a:lstStyle/>
+                    <a:p>
+                      <a:r>
+                        <a:rPr sz="1150" b="0">
+                          <a:solidFill>
+                            <a:srgbClr val="1A2233"/>
+                          </a:solidFill>
+                          <a:latin typeface="Microsoft JhengHei"/>
+                          <a:ea typeface="Microsoft JhengHei"/>
+                          <a:cs typeface="Microsoft JhengHei"/>
+                        </a:rPr>
+                        <a:t>8044</a:t>
+                      </a:r>
+                    </a:p>
+                  </a:txBody>
+                  <a:tcPr anchor="ctr" marL="73152" marT="9144" marB="9144">
+                    <a:solidFill>
+                      <a:srgbClr val="FFFFFF"/>
+                    </a:solidFill>
+                  </a:tcPr>
+                </a:tc>
+                <a:tc>
+                  <a:txBody>
+                    <a:bodyPr/>
+                    <a:lstStyle/>
+                    <a:p>
+                      <a:r>
+                        <a:rPr sz="1150" b="1">
+                          <a:solidFill>
+                            <a:srgbClr val="E63946"/>
+                          </a:solidFill>
+                          <a:latin typeface="Microsoft JhengHei"/>
+                          <a:ea typeface="Microsoft JhengHei"/>
+                          <a:cs typeface="Microsoft JhengHei"/>
+                        </a:rPr>
+                        <a:t>駭客攻擊</a:t>
+                      </a:r>
+                    </a:p>
+                  </a:txBody>
+                  <a:tcPr anchor="ctr" marL="73152" marT="9144" marB="9144">
+                    <a:solidFill>
+                      <a:srgbClr val="FFFFFF"/>
+                    </a:solidFill>
+                  </a:tcPr>
+                </a:tc>
+                <a:tc>
+                  <a:txBody>
+                    <a:bodyPr/>
+                    <a:lstStyle/>
+                    <a:p>
+                      <a:r>
+                        <a:rPr sz="1150" b="0">
+                          <a:solidFill>
+                            <a:srgbClr val="1A2233"/>
+                          </a:solidFill>
+                          <a:latin typeface="Microsoft JhengHei"/>
+                          <a:ea typeface="Microsoft JhengHei"/>
+                          <a:cs typeface="Microsoft JhengHei"/>
+                        </a:rPr>
+                        <a:t>資誠聯合會計師事務所</a:t>
+                      </a:r>
+                    </a:p>
+                  </a:txBody>
+                  <a:tcPr anchor="ctr" marL="73152" marT="9144" marB="9144">
+                    <a:solidFill>
+                      <a:srgbClr val="FFFFFF"/>
+                    </a:solidFill>
+                  </a:tcPr>
+                </a:tc>
+                <a:tc>
+                  <a:txBody>
+                    <a:bodyPr/>
+                    <a:lstStyle/>
+                    <a:p>
+                      <a:r>
+                        <a:rPr sz="1150" b="0">
+                          <a:solidFill>
+                            <a:srgbClr val="1A2233"/>
+                          </a:solidFill>
+                          <a:latin typeface="Microsoft JhengHei"/>
+                          <a:ea typeface="Microsoft JhengHei"/>
+                          <a:cs typeface="Microsoft JhengHei"/>
+                        </a:rPr>
+                        <a:t>廖容翎、梁嬋女</a:t>
+                      </a:r>
+                    </a:p>
+                  </a:txBody>
+                  <a:tcPr anchor="ctr" marL="73152" marT="9144" marB="9144">
+                    <a:solidFill>
+                      <a:srgbClr val="FFFFFF"/>
+                    </a:solidFill>
+                  </a:tcPr>
+                </a:tc>
+              </a:tr>
+              <a:tr h="457200">
+                <a:tc>
+                  <a:txBody>
+                    <a:bodyPr/>
+                    <a:lstStyle/>
+                    <a:p>
+                      <a:r>
+                        <a:rPr sz="1150" b="0">
+                          <a:solidFill>
+                            <a:srgbClr val="1A2233"/>
+                          </a:solidFill>
+                          <a:latin typeface="Microsoft JhengHei"/>
+                          <a:ea typeface="Microsoft JhengHei"/>
+                          <a:cs typeface="Microsoft JhengHei"/>
+                        </a:rPr>
+                        <a:t>耕興</a:t>
+                      </a:r>
+                    </a:p>
+                  </a:txBody>
+                  <a:tcPr anchor="ctr" marL="73152" marT="9144" marB="9144">
+                    <a:solidFill>
+                      <a:srgbClr val="EEF2F9"/>
+                    </a:solidFill>
+                  </a:tcPr>
+                </a:tc>
+                <a:tc>
+                  <a:txBody>
+                    <a:bodyPr/>
+                    <a:lstStyle/>
+                    <a:p>
+                      <a:r>
+                        <a:rPr sz="1150" b="0">
+                          <a:solidFill>
+                            <a:srgbClr val="1A2233"/>
+                          </a:solidFill>
+                          <a:latin typeface="Microsoft JhengHei"/>
+                          <a:ea typeface="Microsoft JhengHei"/>
+                          <a:cs typeface="Microsoft JhengHei"/>
+                        </a:rPr>
+                        <a:t>6146</a:t>
+                      </a:r>
+                    </a:p>
+                  </a:txBody>
+                  <a:tcPr anchor="ctr" marL="73152" marT="9144" marB="9144">
+                    <a:solidFill>
+                      <a:srgbClr val="EEF2F9"/>
+                    </a:solidFill>
+                  </a:tcPr>
+                </a:tc>
+                <a:tc>
+                  <a:txBody>
+                    <a:bodyPr/>
+                    <a:lstStyle/>
+                    <a:p>
+                      <a:r>
+                        <a:rPr sz="1150" b="1">
+                          <a:solidFill>
+                            <a:srgbClr val="5C6679"/>
+                          </a:solidFill>
+                          <a:latin typeface="Microsoft JhengHei"/>
+                          <a:ea typeface="Microsoft JhengHei"/>
+                          <a:cs typeface="Microsoft JhengHei"/>
+                        </a:rPr>
+                        <a:t>其他</a:t>
+                      </a:r>
+                    </a:p>
+                  </a:txBody>
+                  <a:tcPr anchor="ctr" marL="73152" marT="9144" marB="9144">
+                    <a:solidFill>
+                      <a:srgbClr val="EEF2F9"/>
+                    </a:solidFill>
+                  </a:tcPr>
+                </a:tc>
+                <a:tc>
+                  <a:txBody>
+                    <a:bodyPr/>
+                    <a:lstStyle/>
+                    <a:p>
+                      <a:r>
+                        <a:rPr sz="1150" b="0">
+                          <a:solidFill>
+                            <a:srgbClr val="1A2233"/>
+                          </a:solidFill>
+                          <a:latin typeface="Microsoft JhengHei"/>
+                          <a:ea typeface="Microsoft JhengHei"/>
+                          <a:cs typeface="Microsoft JhengHei"/>
+                        </a:rPr>
+                        <a:t>勤業眾信聯合會計師事務所</a:t>
+                      </a:r>
+                    </a:p>
+                  </a:txBody>
+                  <a:tcPr anchor="ctr" marL="73152" marT="9144" marB="9144">
+                    <a:solidFill>
+                      <a:srgbClr val="EEF2F9"/>
+                    </a:solidFill>
+                  </a:tcPr>
+                </a:tc>
+                <a:tc>
+                  <a:txBody>
+                    <a:bodyPr/>
+                    <a:lstStyle/>
+                    <a:p>
+                      <a:r>
+                        <a:rPr sz="1150" b="0">
+                          <a:solidFill>
+                            <a:srgbClr val="1A2233"/>
+                          </a:solidFill>
+                          <a:latin typeface="Microsoft JhengHei"/>
+                          <a:ea typeface="Microsoft JhengHei"/>
+                          <a:cs typeface="Microsoft JhengHei"/>
+                        </a:rPr>
+                        <a:t>黃毅民、陳文香</a:t>
+                      </a:r>
+                    </a:p>
+                  </a:txBody>
+                  <a:tcPr anchor="ctr" marL="73152" marT="9144" marB="9144">
+                    <a:solidFill>
+                      <a:srgbClr val="EEF2F9"/>
+                    </a:solidFill>
+                  </a:tcPr>
+                </a:tc>
+              </a:tr>
+              <a:tr h="457200">
+                <a:tc>
+                  <a:txBody>
+                    <a:bodyPr/>
+                    <a:lstStyle/>
+                    <a:p>
+                      <a:r>
+                        <a:rPr sz="1150" b="0">
+                          <a:solidFill>
+                            <a:srgbClr val="1A2233"/>
+                          </a:solidFill>
+                          <a:latin typeface="Microsoft JhengHei"/>
+                          <a:ea typeface="Microsoft JhengHei"/>
+                          <a:cs typeface="Microsoft JhengHei"/>
+                        </a:rPr>
+                        <a:t>易發</a:t>
+                      </a:r>
+                    </a:p>
+                  </a:txBody>
+                  <a:tcPr anchor="ctr" marL="73152" marT="9144" marB="9144">
+                    <a:solidFill>
+                      <a:srgbClr val="FFFFFF"/>
+                    </a:solidFill>
+                  </a:tcPr>
+                </a:tc>
+                <a:tc>
+                  <a:txBody>
+                    <a:bodyPr/>
+                    <a:lstStyle/>
+                    <a:p>
+                      <a:r>
+                        <a:rPr sz="1150" b="0">
+                          <a:solidFill>
+                            <a:srgbClr val="1A2233"/>
+                          </a:solidFill>
+                          <a:latin typeface="Microsoft JhengHei"/>
+                          <a:ea typeface="Microsoft JhengHei"/>
+                          <a:cs typeface="Microsoft JhengHei"/>
+                        </a:rPr>
+                        <a:t>6425</a:t>
+                      </a:r>
+                    </a:p>
+                  </a:txBody>
+                  <a:tcPr anchor="ctr" marL="73152" marT="9144" marB="9144">
+                    <a:solidFill>
+                      <a:srgbClr val="FFFFFF"/>
+                    </a:solidFill>
+                  </a:tcPr>
+                </a:tc>
+                <a:tc>
+                  <a:txBody>
+                    <a:bodyPr/>
+                    <a:lstStyle/>
+                    <a:p>
+                      <a:r>
+                        <a:rPr sz="1150" b="1">
+                          <a:solidFill>
+                            <a:srgbClr val="F4A261"/>
+                          </a:solidFill>
+                          <a:latin typeface="Microsoft JhengHei"/>
+                          <a:ea typeface="Microsoft JhengHei"/>
+                          <a:cs typeface="Microsoft JhengHei"/>
+                        </a:rPr>
+                        <a:t>勒索病毒/加密</a:t>
+                      </a:r>
+                    </a:p>
+                  </a:txBody>
+                  <a:tcPr anchor="ctr" marL="73152" marT="9144" marB="9144">
+                    <a:solidFill>
+                      <a:srgbClr val="FFFFFF"/>
+                    </a:solidFill>
+                  </a:tcPr>
+                </a:tc>
+                <a:tc>
+                  <a:txBody>
+                    <a:bodyPr/>
+                    <a:lstStyle/>
+                    <a:p>
+                      <a:r>
+                        <a:rPr sz="1150" b="0">
+                          <a:solidFill>
+                            <a:srgbClr val="1A2233"/>
+                          </a:solidFill>
+                          <a:latin typeface="Microsoft JhengHei"/>
+                          <a:ea typeface="Microsoft JhengHei"/>
+                          <a:cs typeface="Microsoft JhengHei"/>
+                        </a:rPr>
+                        <a:t>勤業眾信聯合會計師事務所</a:t>
+                      </a:r>
+                    </a:p>
+                  </a:txBody>
+                  <a:tcPr anchor="ctr" marL="73152" marT="9144" marB="9144">
+                    <a:solidFill>
+                      <a:srgbClr val="FFFFFF"/>
+                    </a:solidFill>
+                  </a:tcPr>
+                </a:tc>
+                <a:tc>
+                  <a:txBody>
+                    <a:bodyPr/>
+                    <a:lstStyle/>
+                    <a:p>
+                      <a:r>
+                        <a:rPr sz="1150" b="0">
+                          <a:solidFill>
+                            <a:srgbClr val="1A2233"/>
+                          </a:solidFill>
+                          <a:latin typeface="Microsoft JhengHei"/>
+                          <a:ea typeface="Microsoft JhengHei"/>
+                          <a:cs typeface="Microsoft JhengHei"/>
+                        </a:rPr>
+                        <a:t>張至誼、洪國田</a:t>
+                      </a:r>
+                    </a:p>
+                  </a:txBody>
+                  <a:tcPr anchor="ctr" marL="73152" marT="9144" marB="9144">
+                    <a:solidFill>
+                      <a:srgbClr val="FFFFFF"/>
+                    </a:solidFill>
+                  </a:tcPr>
+                </a:tc>
+              </a:tr>
+              <a:tr h="457200">
+                <a:tc>
+                  <a:txBody>
+                    <a:bodyPr/>
+                    <a:lstStyle/>
+                    <a:p>
+                      <a:r>
+                        <a:rPr sz="1150" b="0">
+                          <a:solidFill>
+                            <a:srgbClr val="1A2233"/>
+                          </a:solidFill>
+                          <a:latin typeface="Microsoft JhengHei"/>
+                          <a:ea typeface="Microsoft JhengHei"/>
+                          <a:cs typeface="Microsoft JhengHei"/>
+                        </a:rPr>
+                        <a:t>尼得科超眾</a:t>
+                      </a:r>
+                    </a:p>
+                  </a:txBody>
+                  <a:tcPr anchor="ctr" marL="73152" marT="9144" marB="9144">
+                    <a:solidFill>
+                      <a:srgbClr val="EEF2F9"/>
+                    </a:solidFill>
+                  </a:tcPr>
+                </a:tc>
+                <a:tc>
+                  <a:txBody>
+                    <a:bodyPr/>
+                    <a:lstStyle/>
+                    <a:p>
+                      <a:r>
+                        <a:rPr sz="1150" b="0">
+                          <a:solidFill>
+                            <a:srgbClr val="1A2233"/>
+                          </a:solidFill>
+                          <a:latin typeface="Microsoft JhengHei"/>
+                          <a:ea typeface="Microsoft JhengHei"/>
+                          <a:cs typeface="Microsoft JhengHei"/>
+                        </a:rPr>
+                        <a:t>6230</a:t>
+                      </a:r>
+                    </a:p>
+                  </a:txBody>
+                  <a:tcPr anchor="ctr" marL="73152" marT="9144" marB="9144">
+                    <a:solidFill>
+                      <a:srgbClr val="EEF2F9"/>
+                    </a:solidFill>
+                  </a:tcPr>
+                </a:tc>
+                <a:tc>
+                  <a:txBody>
+                    <a:bodyPr/>
+                    <a:lstStyle/>
+                    <a:p>
+                      <a:r>
+                        <a:rPr sz="1150" b="1">
+                          <a:solidFill>
+                            <a:srgbClr val="F4A261"/>
+                          </a:solidFill>
+                          <a:latin typeface="Microsoft JhengHei"/>
+                          <a:ea typeface="Microsoft JhengHei"/>
+                          <a:cs typeface="Microsoft JhengHei"/>
+                        </a:rPr>
+                        <a:t>勒索病毒/加密</a:t>
+                      </a:r>
+                    </a:p>
+                  </a:txBody>
+                  <a:tcPr anchor="ctr" marL="73152" marT="9144" marB="9144">
+                    <a:solidFill>
+                      <a:srgbClr val="EEF2F9"/>
+                    </a:solidFill>
+                  </a:tcPr>
+                </a:tc>
+                <a:tc>
+                  <a:txBody>
+                    <a:bodyPr/>
+                    <a:lstStyle/>
+                    <a:p>
+                      <a:r>
+                        <a:rPr sz="1150" b="0">
+                          <a:solidFill>
+                            <a:srgbClr val="1A2233"/>
+                          </a:solidFill>
+                          <a:latin typeface="Microsoft JhengHei"/>
+                          <a:ea typeface="Microsoft JhengHei"/>
+                          <a:cs typeface="Microsoft JhengHei"/>
+                        </a:rPr>
+                        <a:t>安侯建業聯合會計師事務所</a:t>
+                      </a:r>
+                    </a:p>
+                  </a:txBody>
+                  <a:tcPr anchor="ctr" marL="73152" marT="9144" marB="9144">
+                    <a:solidFill>
+                      <a:srgbClr val="EEF2F9"/>
+                    </a:solidFill>
+                  </a:tcPr>
+                </a:tc>
+                <a:tc>
+                  <a:txBody>
+                    <a:bodyPr/>
+                    <a:lstStyle/>
+                    <a:p>
+                      <a:r>
+                        <a:rPr sz="1150" b="0">
+                          <a:solidFill>
+                            <a:srgbClr val="1A2233"/>
+                          </a:solidFill>
+                          <a:latin typeface="Microsoft JhengHei"/>
+                          <a:ea typeface="Microsoft JhengHei"/>
+                          <a:cs typeface="Microsoft JhengHei"/>
+                        </a:rPr>
+                        <a:t>郭欣頤、張肇文</a:t>
+                      </a:r>
+                    </a:p>
+                  </a:txBody>
+                  <a:tcPr anchor="ctr" marL="73152" marT="9144" marB="9144">
+                    <a:solidFill>
+                      <a:srgbClr val="EEF2F9"/>
+                    </a:solidFill>
+                  </a:tcPr>
+                </a:tc>
+              </a:tr>
+              <a:tr h="457200">
+                <a:tc>
+                  <a:txBody>
+                    <a:bodyPr/>
+                    <a:lstStyle/>
+                    <a:p>
+                      <a:r>
+                        <a:rPr sz="1150" b="0">
+                          <a:solidFill>
+                            <a:srgbClr val="1A2233"/>
+                          </a:solidFill>
+                          <a:latin typeface="Microsoft JhengHei"/>
+                          <a:ea typeface="Microsoft JhengHei"/>
+                          <a:cs typeface="Microsoft JhengHei"/>
+                        </a:rPr>
+                        <a:t>上福</a:t>
+                      </a:r>
+                    </a:p>
+                  </a:txBody>
+                  <a:tcPr anchor="ctr" marL="73152" marT="9144" marB="9144">
+                    <a:solidFill>
+                      <a:srgbClr val="FFFFFF"/>
+                    </a:solidFill>
+                  </a:tcPr>
+                </a:tc>
+                <a:tc>
+                  <a:txBody>
+                    <a:bodyPr/>
+                    <a:lstStyle/>
+                    <a:p>
+                      <a:r>
+                        <a:rPr sz="1150" b="0">
+                          <a:solidFill>
+                            <a:srgbClr val="1A2233"/>
+                          </a:solidFill>
+                          <a:latin typeface="Microsoft JhengHei"/>
+                          <a:ea typeface="Microsoft JhengHei"/>
+                          <a:cs typeface="Microsoft JhengHei"/>
+                        </a:rPr>
+                        <a:t>6128</a:t>
+                      </a:r>
+                    </a:p>
+                  </a:txBody>
+                  <a:tcPr anchor="ctr" marL="73152" marT="9144" marB="9144">
+                    <a:solidFill>
+                      <a:srgbClr val="FFFFFF"/>
+                    </a:solidFill>
+                  </a:tcPr>
+                </a:tc>
+                <a:tc>
+                  <a:txBody>
+                    <a:bodyPr/>
+                    <a:lstStyle/>
+                    <a:p>
+                      <a:r>
+                        <a:rPr sz="1150" b="1">
+                          <a:solidFill>
+                            <a:srgbClr val="5C6679"/>
+                          </a:solidFill>
+                          <a:latin typeface="Microsoft JhengHei"/>
+                          <a:ea typeface="Microsoft JhengHei"/>
+                          <a:cs typeface="Microsoft JhengHei"/>
+                        </a:rPr>
+                        <a:t>其他</a:t>
+                      </a:r>
+                    </a:p>
+                  </a:txBody>
+                  <a:tcPr anchor="ctr" marL="73152" marT="9144" marB="9144">
+                    <a:solidFill>
+                      <a:srgbClr val="FFFFFF"/>
+                    </a:solidFill>
+                  </a:tcPr>
+                </a:tc>
+                <a:tc>
+                  <a:txBody>
+                    <a:bodyPr/>
+                    <a:lstStyle/>
+                    <a:p>
+                      <a:r>
+                        <a:rPr sz="1150" b="0">
+                          <a:solidFill>
+                            <a:srgbClr val="1A2233"/>
+                          </a:solidFill>
+                          <a:latin typeface="Microsoft JhengHei"/>
+                          <a:ea typeface="Microsoft JhengHei"/>
+                          <a:cs typeface="Microsoft JhengHei"/>
+                        </a:rPr>
+                        <a:t>安永聯合會計師事務所</a:t>
+                      </a:r>
+                    </a:p>
+                  </a:txBody>
+                  <a:tcPr anchor="ctr" marL="73152" marT="9144" marB="9144">
+                    <a:solidFill>
+                      <a:srgbClr val="FFFFFF"/>
+                    </a:solidFill>
+                  </a:tcPr>
+                </a:tc>
+                <a:tc>
+                  <a:txBody>
+                    <a:bodyPr/>
+                    <a:lstStyle/>
+                    <a:p>
+                      <a:r>
+                        <a:rPr sz="1150" b="0">
+                          <a:solidFill>
+                            <a:srgbClr val="1A2233"/>
+                          </a:solidFill>
+                          <a:latin typeface="Microsoft JhengHei"/>
+                          <a:ea typeface="Microsoft JhengHei"/>
+                          <a:cs typeface="Microsoft JhengHei"/>
+                        </a:rPr>
+                        <a:t>黃宇廷、賴書晨</a:t>
                       </a:r>
                     </a:p>
                   </a:txBody>
@@ -8569,7 +8569,7 @@
             <a:avLst/>
           </a:prstGeom>
           <a:solidFill>
-            <a:srgbClr val="5C6679"/>
+            <a:srgbClr val="E63946"/>
           </a:solidFill>
           <a:ln>
             <a:noFill/>
@@ -8630,7 +8630,7 @@
                 <a:ea typeface="Microsoft JhengHei"/>
                 <a:cs typeface="Microsoft JhengHei"/>
               </a:rPr>
-              <a:t>GOGOLOOK </a:t>
+              <a:t>麗清 </a:t>
             </a:r>
             <a:r>
               <a:rPr sz="1300" b="0">
@@ -8641,7 +8641,7 @@
                 <a:ea typeface="Microsoft JhengHei"/>
                 <a:cs typeface="Microsoft JhengHei"/>
               </a:rPr>
-              <a:t>6902</a:t>
+              <a:t>3346</a:t>
             </a:r>
           </a:p>
         </p:txBody>
@@ -8661,7 +8661,7 @@
             <a:avLst/>
           </a:prstGeom>
           <a:solidFill>
-            <a:srgbClr val="5C6679"/>
+            <a:srgbClr val="E63946"/>
           </a:solidFill>
           <a:ln>
             <a:noFill/>
@@ -8722,7 +8722,7 @@
                 <a:ea typeface="Microsoft JhengHei"/>
                 <a:cs typeface="Microsoft JhengHei"/>
               </a:rPr>
-              <a:t>其他</a:t>
+              <a:t>駭客攻擊</a:t>
             </a:r>
           </a:p>
         </p:txBody>
@@ -8757,7 +8757,7 @@
             <a:r>
               <a:rPr sz="1100" b="1">
                 <a:solidFill>
-                  <a:srgbClr val="5C6679"/>
+                  <a:srgbClr val="E63946"/>
                 </a:solidFill>
                 <a:latin typeface="Microsoft JhengHei"/>
                 <a:ea typeface="Microsoft JhengHei"/>
@@ -8774,7 +8774,7 @@
                 <a:ea typeface="Microsoft JhengHei"/>
                 <a:cs typeface="Microsoft JhengHei"/>
               </a:rPr>
-              <a:t>本公司發生網路資安事件。</a:t>
+              <a:t>本公司部份資訊系統遭受駭客網路攻擊。</a:t>
             </a:r>
           </a:p>
         </p:txBody>
@@ -8809,7 +8809,7 @@
             <a:r>
               <a:rPr sz="1100" b="1">
                 <a:solidFill>
-                  <a:srgbClr val="5C6679"/>
+                  <a:srgbClr val="E63946"/>
                 </a:solidFill>
                 <a:latin typeface="Microsoft JhengHei"/>
                 <a:ea typeface="Microsoft JhengHei"/>
@@ -8826,7 +8826,7 @@
                 <a:ea typeface="Microsoft JhengHei"/>
                 <a:cs typeface="Microsoft JhengHei"/>
               </a:rPr>
-              <a:t>本公司後續仍持續強化資安管控及防禦機制，確保資訊安全與服務體驗。</a:t>
+              <a:t>修復安全漏洞並持續提升網路與資訊基礎架構之安全管控以確保資訊安全。</a:t>
             </a:r>
           </a:p>
         </p:txBody>
@@ -8892,7 +8892,7 @@
             <a:avLst/>
           </a:prstGeom>
           <a:solidFill>
-            <a:srgbClr val="E63946"/>
+            <a:srgbClr val="5C6679"/>
           </a:solidFill>
           <a:ln>
             <a:noFill/>
@@ -8953,7 +8953,7 @@
                 <a:ea typeface="Microsoft JhengHei"/>
                 <a:cs typeface="Microsoft JhengHei"/>
               </a:rPr>
-              <a:t>網家 </a:t>
+              <a:t>GOGOLOOK </a:t>
             </a:r>
             <a:r>
               <a:rPr sz="1300" b="0">
@@ -8964,7 +8964,7 @@
                 <a:ea typeface="Microsoft JhengHei"/>
                 <a:cs typeface="Microsoft JhengHei"/>
               </a:rPr>
-              <a:t>8044</a:t>
+              <a:t>6902</a:t>
             </a:r>
           </a:p>
         </p:txBody>
@@ -8984,7 +8984,7 @@
             <a:avLst/>
           </a:prstGeom>
           <a:solidFill>
-            <a:srgbClr val="E63946"/>
+            <a:srgbClr val="5C6679"/>
           </a:solidFill>
           <a:ln>
             <a:noFill/>
@@ -9045,7 +9045,7 @@
                 <a:ea typeface="Microsoft JhengHei"/>
                 <a:cs typeface="Microsoft JhengHei"/>
               </a:rPr>
-              <a:t>駭客攻擊</a:t>
+              <a:t>其他</a:t>
             </a:r>
           </a:p>
         </p:txBody>
@@ -9080,7 +9080,7 @@
             <a:r>
               <a:rPr sz="1100" b="1">
                 <a:solidFill>
-                  <a:srgbClr val="E63946"/>
+                  <a:srgbClr val="5C6679"/>
                 </a:solidFill>
                 <a:latin typeface="Microsoft JhengHei"/>
                 <a:ea typeface="Microsoft JhengHei"/>
@@ -9097,7 +9097,7 @@
                 <a:ea typeface="Microsoft JhengHei"/>
                 <a:cs typeface="Microsoft JhengHei"/>
               </a:rPr>
-              <a:t>公司對該等報導或提供訊息之說明:(1)資訊安全防線：本公司及各轉投資事業係依不同服務型態各自營運…</a:t>
+              <a:t>本公司發生網路資安事件。</a:t>
             </a:r>
           </a:p>
         </p:txBody>
@@ -9132,7 +9132,7 @@
             <a:r>
               <a:rPr sz="1100" b="1">
                 <a:solidFill>
-                  <a:srgbClr val="E63946"/>
+                  <a:srgbClr val="5C6679"/>
                 </a:solidFill>
                 <a:latin typeface="Microsoft JhengHei"/>
                 <a:ea typeface="Microsoft JhengHei"/>
@@ -9149,7 +9149,7 @@
                 <a:ea typeface="Microsoft JhengHei"/>
                 <a:cs typeface="Microsoft JhengHei"/>
               </a:rPr>
-              <a:t>(1)全面啟動應變與調查：拍付國際獲悉駭客聲稱之入侵及勒索訊息後，已立即啟動資安應變程序，會同資安專家進行全面系統檢測與…</a:t>
+              <a:t>本公司後續仍持續強化資安管控及防禦機制，確保資訊安全與服務體驗。</a:t>
             </a:r>
           </a:p>
         </p:txBody>
@@ -9215,7 +9215,7 @@
             <a:avLst/>
           </a:prstGeom>
           <a:solidFill>
-            <a:srgbClr val="5C6679"/>
+            <a:srgbClr val="E63946"/>
           </a:solidFill>
           <a:ln>
             <a:noFill/>
@@ -9276,7 +9276,7 @@
                 <a:ea typeface="Microsoft JhengHei"/>
                 <a:cs typeface="Microsoft JhengHei"/>
               </a:rPr>
-              <a:t>耕興 </a:t>
+              <a:t>網家 </a:t>
             </a:r>
             <a:r>
               <a:rPr sz="1300" b="0">
@@ -9287,7 +9287,7 @@
                 <a:ea typeface="Microsoft JhengHei"/>
                 <a:cs typeface="Microsoft JhengHei"/>
               </a:rPr>
-              <a:t>6146</a:t>
+              <a:t>8044</a:t>
             </a:r>
           </a:p>
         </p:txBody>
@@ -9307,7 +9307,7 @@
             <a:avLst/>
           </a:prstGeom>
           <a:solidFill>
-            <a:srgbClr val="5C6679"/>
+            <a:srgbClr val="E63946"/>
           </a:solidFill>
           <a:ln>
             <a:noFill/>
@@ -9368,7 +9368,7 @@
                 <a:ea typeface="Microsoft JhengHei"/>
                 <a:cs typeface="Microsoft JhengHei"/>
               </a:rPr>
-              <a:t>其他</a:t>
+              <a:t>駭客攻擊</a:t>
             </a:r>
           </a:p>
         </p:txBody>
@@ -9403,7 +9403,7 @@
             <a:r>
               <a:rPr sz="1100" b="1">
                 <a:solidFill>
-                  <a:srgbClr val="5C6679"/>
+                  <a:srgbClr val="E63946"/>
                 </a:solidFill>
                 <a:latin typeface="Microsoft JhengHei"/>
                 <a:ea typeface="Microsoft JhengHei"/>
@@ -9420,7 +9420,7 @@
                 <a:ea typeface="Microsoft JhengHei"/>
                 <a:cs typeface="Microsoft JhengHei"/>
               </a:rPr>
-              <a:t>本公司部分資訊系統發生網路資安事件。</a:t>
+              <a:t>公司對該等報導或提供訊息之說明:(1)資訊安全防線：本公司及各轉投資事業係依不同服務型態各自營運…</a:t>
             </a:r>
           </a:p>
         </p:txBody>
@@ -9455,7 +9455,7 @@
             <a:r>
               <a:rPr sz="1100" b="1">
                 <a:solidFill>
-                  <a:srgbClr val="5C6679"/>
+                  <a:srgbClr val="E63946"/>
                 </a:solidFill>
                 <a:latin typeface="Microsoft JhengHei"/>
                 <a:ea typeface="Microsoft JhengHei"/>
@@ -9472,7 +9472,7 @@
                 <a:ea typeface="Microsoft JhengHei"/>
                 <a:cs typeface="Microsoft JhengHei"/>
               </a:rPr>
-              <a:t>本公司將持續提升網路與資訊基礎架構之安全管控，並依外部資安技術專家之建議加強防護，確保資訊安全。</a:t>
+              <a:t>(1)全面啟動應變與調查：拍付國際獲悉駭客聲稱之入侵及勒索訊息後，已立即啟動資安應變程序，會同資安專家進行全面系統檢測與…</a:t>
             </a:r>
           </a:p>
         </p:txBody>
@@ -9538,7 +9538,7 @@
             <a:avLst/>
           </a:prstGeom>
           <a:solidFill>
-            <a:srgbClr val="F4A261"/>
+            <a:srgbClr val="5C6679"/>
           </a:solidFill>
           <a:ln>
             <a:noFill/>
@@ -9599,7 +9599,7 @@
                 <a:ea typeface="Microsoft JhengHei"/>
                 <a:cs typeface="Microsoft JhengHei"/>
               </a:rPr>
-              <a:t>易發 </a:t>
+              <a:t>耕興 </a:t>
             </a:r>
             <a:r>
               <a:rPr sz="1300" b="0">
@@ -9610,7 +9610,7 @@
                 <a:ea typeface="Microsoft JhengHei"/>
                 <a:cs typeface="Microsoft JhengHei"/>
               </a:rPr>
-              <a:t>6425</a:t>
+              <a:t>6146</a:t>
             </a:r>
           </a:p>
         </p:txBody>
@@ -9630,7 +9630,7 @@
             <a:avLst/>
           </a:prstGeom>
           <a:solidFill>
-            <a:srgbClr val="F4A261"/>
+            <a:srgbClr val="5C6679"/>
           </a:solidFill>
           <a:ln>
             <a:noFill/>
@@ -9691,7 +9691,7 @@
                 <a:ea typeface="Microsoft JhengHei"/>
                 <a:cs typeface="Microsoft JhengHei"/>
               </a:rPr>
-              <a:t>勒索病毒/加密</a:t>
+              <a:t>其他</a:t>
             </a:r>
           </a:p>
         </p:txBody>
@@ -9726,7 +9726,7 @@
             <a:r>
               <a:rPr sz="1100" b="1">
                 <a:solidFill>
-                  <a:srgbClr val="F4A261"/>
+                  <a:srgbClr val="5C6679"/>
                 </a:solidFill>
                 <a:latin typeface="Microsoft JhengHei"/>
                 <a:ea typeface="Microsoft JhengHei"/>
@@ -9743,7 +9743,7 @@
                 <a:ea typeface="Microsoft JhengHei"/>
                 <a:cs typeface="Microsoft JhengHei"/>
               </a:rPr>
-              <a:t>本公司之子公司東野精機(股)公司日福精工(股)公司，發現遭不明駭客入侵主機，並將伺服器資料加密，…</a:t>
+              <a:t>本公司部分資訊系統發生網路資安事件。</a:t>
             </a:r>
           </a:p>
         </p:txBody>
@@ -9778,7 +9778,7 @@
             <a:r>
               <a:rPr sz="1100" b="1">
                 <a:solidFill>
-                  <a:srgbClr val="F4A261"/>
+                  <a:srgbClr val="5C6679"/>
                 </a:solidFill>
                 <a:latin typeface="Microsoft JhengHei"/>
                 <a:ea typeface="Microsoft JhengHei"/>
@@ -9795,7 +9795,7 @@
                 <a:ea typeface="Microsoft JhengHei"/>
                 <a:cs typeface="Microsoft JhengHei"/>
               </a:rPr>
-              <a:t>本公司之子公司東野精機(股)公司日福精工(股)公司將修復安全漏洞，持續提升網路與資訊基礎架構之安全管控，以確保資訊安全。</a:t>
+              <a:t>本公司將持續提升網路與資訊基礎架構之安全管控，並依外部資安技術專家之建議加強防護，確保資訊安全。</a:t>
             </a:r>
           </a:p>
         </p:txBody>
@@ -10058,7 +10058,7 @@
                 <a:ea typeface="Microsoft JhengHei"/>
                 <a:cs typeface="Microsoft JhengHei"/>
               </a:rPr>
-              <a:t>尼得科超眾 </a:t>
+              <a:t>易發 </a:t>
             </a:r>
             <a:r>
               <a:rPr sz="1300" b="0">
@@ -10069,7 +10069,7 @@
                 <a:ea typeface="Microsoft JhengHei"/>
                 <a:cs typeface="Microsoft JhengHei"/>
               </a:rPr>
-              <a:t>6230</a:t>
+              <a:t>6425</a:t>
             </a:r>
           </a:p>
         </p:txBody>
@@ -10202,7 +10202,7 @@
                 <a:ea typeface="Microsoft JhengHei"/>
                 <a:cs typeface="Microsoft JhengHei"/>
               </a:rPr>
-              <a:t>本公司於今日偵測到部份伺服器遭受網路勒索病毒攻擊，致使包含ERP在內之部份資訊系統無法正常運作。</a:t>
+              <a:t>本公司之子公司東野精機(股)公司日福精工(股)公司，發現遭不明駭客入侵主機，並將伺服器資料加密，…</a:t>
             </a:r>
           </a:p>
         </p:txBody>
@@ -10254,7 +10254,7 @@
                 <a:ea typeface="Microsoft JhengHei"/>
                 <a:cs typeface="Microsoft JhengHei"/>
               </a:rPr>
-              <a:t>本公司亦將視系統復原進度，適時調整生產與出貨排程。</a:t>
+              <a:t>本公司之子公司東野精機(股)公司日福精工(股)公司將修復安全漏洞，持續提升網路與資訊基礎架構之安全管控，以確保資訊安全。</a:t>
             </a:r>
           </a:p>
         </p:txBody>
@@ -10320,7 +10320,7 @@
             <a:avLst/>
           </a:prstGeom>
           <a:solidFill>
-            <a:srgbClr val="5C6679"/>
+            <a:srgbClr val="F4A261"/>
           </a:solidFill>
           <a:ln>
             <a:noFill/>
@@ -10381,7 +10381,7 @@
                 <a:ea typeface="Microsoft JhengHei"/>
                 <a:cs typeface="Microsoft JhengHei"/>
               </a:rPr>
-              <a:t>上福 </a:t>
+              <a:t>尼得科超眾 </a:t>
             </a:r>
             <a:r>
               <a:rPr sz="1300" b="0">
@@ -10392,7 +10392,7 @@
                 <a:ea typeface="Microsoft JhengHei"/>
                 <a:cs typeface="Microsoft JhengHei"/>
               </a:rPr>
-              <a:t>6128</a:t>
+              <a:t>6230</a:t>
             </a:r>
           </a:p>
         </p:txBody>
@@ -10412,7 +10412,7 @@
             <a:avLst/>
           </a:prstGeom>
           <a:solidFill>
-            <a:srgbClr val="5C6679"/>
+            <a:srgbClr val="F4A261"/>
           </a:solidFill>
           <a:ln>
             <a:noFill/>
@@ -10473,7 +10473,7 @@
                 <a:ea typeface="Microsoft JhengHei"/>
                 <a:cs typeface="Microsoft JhengHei"/>
               </a:rPr>
-              <a:t>其他</a:t>
+              <a:t>勒索病毒/加密</a:t>
             </a:r>
           </a:p>
         </p:txBody>
@@ -10508,7 +10508,7 @@
             <a:r>
               <a:rPr sz="1100" b="1">
                 <a:solidFill>
-                  <a:srgbClr val="5C6679"/>
+                  <a:srgbClr val="F4A261"/>
                 </a:solidFill>
                 <a:latin typeface="Microsoft JhengHei"/>
                 <a:ea typeface="Microsoft JhengHei"/>
@@ -10525,7 +10525,7 @@
                 <a:ea typeface="Microsoft JhengHei"/>
                 <a:cs typeface="Microsoft JhengHei"/>
               </a:rPr>
-              <a:t>KatunCorporation資訊設備遭受未授權外部存取。</a:t>
+              <a:t>本公司於今日偵測到部份伺服器遭受網路勒索病毒攻擊，致使包含ERP在內之部份資訊系統無法正常運作。</a:t>
             </a:r>
           </a:p>
         </p:txBody>
@@ -10560,7 +10560,7 @@
             <a:r>
               <a:rPr sz="1100" b="1">
                 <a:solidFill>
-                  <a:srgbClr val="5C6679"/>
+                  <a:srgbClr val="F4A261"/>
                 </a:solidFill>
                 <a:latin typeface="Microsoft JhengHei"/>
                 <a:ea typeface="Microsoft JhengHei"/>
@@ -10577,7 +10577,7 @@
                 <a:ea typeface="Microsoft JhengHei"/>
                 <a:cs typeface="Microsoft JhengHei"/>
               </a:rPr>
-              <a:t>此事件後將持續提升網路與資訊基礎架構之安全控管，並持續密切監控，以確保資訊安全。</a:t>
+              <a:t>本公司亦將視系統復原進度，適時調整生產與出貨排程。</a:t>
             </a:r>
           </a:p>
         </p:txBody>
@@ -10643,7 +10643,7 @@
             <a:avLst/>
           </a:prstGeom>
           <a:solidFill>
-            <a:srgbClr val="E63946"/>
+            <a:srgbClr val="5C6679"/>
           </a:solidFill>
           <a:ln>
             <a:noFill/>
@@ -10704,7 +10704,7 @@
                 <a:ea typeface="Microsoft JhengHei"/>
                 <a:cs typeface="Microsoft JhengHei"/>
               </a:rPr>
-              <a:t>巨路 </a:t>
+              <a:t>上福 </a:t>
             </a:r>
             <a:r>
               <a:rPr sz="1300" b="0">
@@ -10715,7 +10715,7 @@
                 <a:ea typeface="Microsoft JhengHei"/>
                 <a:cs typeface="Microsoft JhengHei"/>
               </a:rPr>
-              <a:t>6192</a:t>
+              <a:t>6128</a:t>
             </a:r>
           </a:p>
         </p:txBody>
@@ -10735,7 +10735,7 @@
             <a:avLst/>
           </a:prstGeom>
           <a:solidFill>
-            <a:srgbClr val="E63946"/>
+            <a:srgbClr val="5C6679"/>
           </a:solidFill>
           <a:ln>
             <a:noFill/>
@@ -10796,7 +10796,7 @@
                 <a:ea typeface="Microsoft JhengHei"/>
                 <a:cs typeface="Microsoft JhengHei"/>
               </a:rPr>
-              <a:t>駭客攻擊</a:t>
+              <a:t>其他</a:t>
             </a:r>
           </a:p>
         </p:txBody>
@@ -10831,7 +10831,7 @@
             <a:r>
               <a:rPr sz="1100" b="1">
                 <a:solidFill>
-                  <a:srgbClr val="E63946"/>
+                  <a:srgbClr val="5C6679"/>
                 </a:solidFill>
                 <a:latin typeface="Microsoft JhengHei"/>
                 <a:ea typeface="Microsoft JhengHei"/>
@@ -10848,7 +10848,7 @@
                 <a:ea typeface="Microsoft JhengHei"/>
                 <a:cs typeface="Microsoft JhengHei"/>
               </a:rPr>
-              <a:t>本公司部份資訊系統遭受駭客網路攻擊。</a:t>
+              <a:t>KatunCorporation資訊設備遭受未授權外部存取。</a:t>
             </a:r>
           </a:p>
         </p:txBody>
@@ -10883,7 +10883,7 @@
             <a:r>
               <a:rPr sz="1100" b="1">
                 <a:solidFill>
-                  <a:srgbClr val="E63946"/>
+                  <a:srgbClr val="5C6679"/>
                 </a:solidFill>
                 <a:latin typeface="Microsoft JhengHei"/>
                 <a:ea typeface="Microsoft JhengHei"/>
@@ -10900,7 +10900,7 @@
                 <a:ea typeface="Microsoft JhengHei"/>
                 <a:cs typeface="Microsoft JhengHei"/>
               </a:rPr>
-              <a:t>本公司將持續強化網路與資訊安全架構，並擴大資安防禦措施，以提升整體資安防護能力</a:t>
+              <a:t>此事件後將持續提升網路與資訊基礎架構之安全控管，並持續密切監控，以確保資訊安全。</a:t>
             </a:r>
           </a:p>
         </p:txBody>

--- a/資安事件因應分析.pptx
+++ b/資安事件因應分析.pptx
@@ -3528,7 +3528,7 @@
                 <a:ea typeface="Microsoft JhengHei"/>
                 <a:cs typeface="Microsoft JhengHei"/>
               </a:rPr>
-              <a:t>資料期間 2026-06-03 ~ 2026-07-03　｜　MOPS 重大訊息全文檢索　｜　7 家公司</a:t>
+              <a:t>資料期間 2026-06-07 ~ 2026-07-07　｜　MOPS 重大訊息全文檢索　｜　7 家公司</a:t>
             </a:r>
           </a:p>
         </p:txBody>

--- a/資安事件因應分析.pptx
+++ b/資安事件因應分析.pptx
@@ -185,10 +185,10 @@
                 <c:formatCode>General</c:formatCode>
                 <c:ptCount val="3"/>
                 <c:pt idx="0">
-                  <c:v>2</c:v>
+                  <c:v>3</c:v>
                 </c:pt>
                 <c:pt idx="1">
-                  <c:v>2</c:v>
+                  <c:v>1</c:v>
                 </c:pt>
                 <c:pt idx="2">
                   <c:v>3</c:v>
@@ -3528,7 +3528,7 @@
                 <a:ea typeface="Microsoft JhengHei"/>
                 <a:cs typeface="Microsoft JhengHei"/>
               </a:rPr>
-              <a:t>資料期間 2026-06-07 ~ 2026-07-07　｜　MOPS 重大訊息全文檢索　｜　7 家公司</a:t>
+              <a:t>資料期間 2026-06-08 ~ 2026-07-08　｜　MOPS 重大訊息全文檢索　｜　7 家公司</a:t>
             </a:r>
           </a:p>
         </p:txBody>
@@ -4272,7 +4272,7 @@
                           <a:ea typeface="Microsoft JhengHei"/>
                           <a:cs typeface="Microsoft JhengHei"/>
                         </a:rPr>
-                        <a:t>麗清</a:t>
+                        <a:t>優盛</a:t>
                       </a:r>
                     </a:p>
                   </a:txBody>
@@ -4296,7 +4296,7 @@
                           <a:ea typeface="Microsoft JhengHei"/>
                           <a:cs typeface="Microsoft JhengHei"/>
                         </a:rPr>
-                        <a:t>3346</a:t>
+                        <a:t>4121</a:t>
                       </a:r>
                     </a:p>
                   </a:txBody>
@@ -4320,7 +4320,7 @@
                           <a:ea typeface="Microsoft JhengHei"/>
                           <a:cs typeface="Microsoft JhengHei"/>
                         </a:rPr>
-                        <a:t>07/02</a:t>
+                        <a:t>07/07</a:t>
                       </a:r>
                     </a:p>
                   </a:txBody>
@@ -4368,7 +4368,7 @@
                           <a:ea typeface="Microsoft JhengHei"/>
                           <a:cs typeface="Microsoft JhengHei"/>
                         </a:rPr>
-                        <a:t>目前初步評估對公司運作無重大影響。</a:t>
+                        <a:t>本資訊網站已暫時停止服務，該事件對公司營運、資訊安全、個資等無重大影…</a:t>
                       </a:r>
                     </a:p>
                   </a:txBody>
@@ -4394,7 +4394,7 @@
                           <a:ea typeface="Microsoft JhengHei"/>
                           <a:cs typeface="Microsoft JhengHei"/>
                         </a:rPr>
-                        <a:t>GOGOLOOK</a:t>
+                        <a:t>麗清</a:t>
                       </a:r>
                     </a:p>
                   </a:txBody>
@@ -4418,7 +4418,251 @@
                           <a:ea typeface="Microsoft JhengHei"/>
                           <a:cs typeface="Microsoft JhengHei"/>
                         </a:rPr>
+                        <a:t>3346</a:t>
+                      </a:r>
+                    </a:p>
+                  </a:txBody>
+                  <a:tcPr anchor="ctr" marL="73152" marT="9144" marB="9144">
+                    <a:solidFill>
+                      <a:srgbClr val="EEF2F9"/>
+                    </a:solidFill>
+                  </a:tcPr>
+                </a:tc>
+                <a:tc>
+                  <a:txBody>
+                    <a:bodyPr/>
+                    <a:lstStyle/>
+                    <a:p>
+                      <a:r>
+                        <a:rPr sz="1150" b="0">
+                          <a:solidFill>
+                            <a:srgbClr val="1A2233"/>
+                          </a:solidFill>
+                          <a:latin typeface="Microsoft JhengHei"/>
+                          <a:ea typeface="Microsoft JhengHei"/>
+                          <a:cs typeface="Microsoft JhengHei"/>
+                        </a:rPr>
+                        <a:t>07/02</a:t>
+                      </a:r>
+                    </a:p>
+                  </a:txBody>
+                  <a:tcPr anchor="ctr" marL="73152" marT="9144" marB="9144">
+                    <a:solidFill>
+                      <a:srgbClr val="EEF2F9"/>
+                    </a:solidFill>
+                  </a:tcPr>
+                </a:tc>
+                <a:tc>
+                  <a:txBody>
+                    <a:bodyPr/>
+                    <a:lstStyle/>
+                    <a:p>
+                      <a:r>
+                        <a:rPr sz="1150" b="1">
+                          <a:solidFill>
+                            <a:srgbClr val="E63946"/>
+                          </a:solidFill>
+                          <a:latin typeface="Microsoft JhengHei"/>
+                          <a:ea typeface="Microsoft JhengHei"/>
+                          <a:cs typeface="Microsoft JhengHei"/>
+                        </a:rPr>
+                        <a:t>駭客攻擊</a:t>
+                      </a:r>
+                    </a:p>
+                  </a:txBody>
+                  <a:tcPr anchor="ctr" marL="73152" marT="9144" marB="9144">
+                    <a:solidFill>
+                      <a:srgbClr val="EEF2F9"/>
+                    </a:solidFill>
+                  </a:tcPr>
+                </a:tc>
+                <a:tc>
+                  <a:txBody>
+                    <a:bodyPr/>
+                    <a:lstStyle/>
+                    <a:p>
+                      <a:r>
+                        <a:rPr sz="1150" b="0">
+                          <a:solidFill>
+                            <a:srgbClr val="1A2233"/>
+                          </a:solidFill>
+                          <a:latin typeface="Microsoft JhengHei"/>
+                          <a:ea typeface="Microsoft JhengHei"/>
+                          <a:cs typeface="Microsoft JhengHei"/>
+                        </a:rPr>
+                        <a:t>目前初步評估對公司運作無重大影響。</a:t>
+                      </a:r>
+                    </a:p>
+                  </a:txBody>
+                  <a:tcPr anchor="ctr" marL="73152" marT="9144" marB="9144">
+                    <a:solidFill>
+                      <a:srgbClr val="EEF2F9"/>
+                    </a:solidFill>
+                  </a:tcPr>
+                </a:tc>
+              </a:tr>
+              <a:tr h="384048">
+                <a:tc>
+                  <a:txBody>
+                    <a:bodyPr/>
+                    <a:lstStyle/>
+                    <a:p>
+                      <a:r>
+                        <a:rPr sz="1150" b="0">
+                          <a:solidFill>
+                            <a:srgbClr val="1A2233"/>
+                          </a:solidFill>
+                          <a:latin typeface="Microsoft JhengHei"/>
+                          <a:ea typeface="Microsoft JhengHei"/>
+                          <a:cs typeface="Microsoft JhengHei"/>
+                        </a:rPr>
+                        <a:t>GOGOLOOK</a:t>
+                      </a:r>
+                    </a:p>
+                  </a:txBody>
+                  <a:tcPr anchor="ctr" marL="73152" marT="9144" marB="9144">
+                    <a:solidFill>
+                      <a:srgbClr val="FFFFFF"/>
+                    </a:solidFill>
+                  </a:tcPr>
+                </a:tc>
+                <a:tc>
+                  <a:txBody>
+                    <a:bodyPr/>
+                    <a:lstStyle/>
+                    <a:p>
+                      <a:r>
+                        <a:rPr sz="1150" b="0">
+                          <a:solidFill>
+                            <a:srgbClr val="1A2233"/>
+                          </a:solidFill>
+                          <a:latin typeface="Microsoft JhengHei"/>
+                          <a:ea typeface="Microsoft JhengHei"/>
+                          <a:cs typeface="Microsoft JhengHei"/>
+                        </a:rPr>
                         <a:t>6902</a:t>
+                      </a:r>
+                    </a:p>
+                  </a:txBody>
+                  <a:tcPr anchor="ctr" marL="73152" marT="9144" marB="9144">
+                    <a:solidFill>
+                      <a:srgbClr val="FFFFFF"/>
+                    </a:solidFill>
+                  </a:tcPr>
+                </a:tc>
+                <a:tc>
+                  <a:txBody>
+                    <a:bodyPr/>
+                    <a:lstStyle/>
+                    <a:p>
+                      <a:r>
+                        <a:rPr sz="1150" b="0">
+                          <a:solidFill>
+                            <a:srgbClr val="1A2233"/>
+                          </a:solidFill>
+                          <a:latin typeface="Microsoft JhengHei"/>
+                          <a:ea typeface="Microsoft JhengHei"/>
+                          <a:cs typeface="Microsoft JhengHei"/>
+                        </a:rPr>
+                        <a:t>07/01</a:t>
+                      </a:r>
+                    </a:p>
+                  </a:txBody>
+                  <a:tcPr anchor="ctr" marL="73152" marT="9144" marB="9144">
+                    <a:solidFill>
+                      <a:srgbClr val="FFFFFF"/>
+                    </a:solidFill>
+                  </a:tcPr>
+                </a:tc>
+                <a:tc>
+                  <a:txBody>
+                    <a:bodyPr/>
+                    <a:lstStyle/>
+                    <a:p>
+                      <a:r>
+                        <a:rPr sz="1150" b="1">
+                          <a:solidFill>
+                            <a:srgbClr val="5C6679"/>
+                          </a:solidFill>
+                          <a:latin typeface="Microsoft JhengHei"/>
+                          <a:ea typeface="Microsoft JhengHei"/>
+                          <a:cs typeface="Microsoft JhengHei"/>
+                        </a:rPr>
+                        <a:t>其他</a:t>
+                      </a:r>
+                    </a:p>
+                  </a:txBody>
+                  <a:tcPr anchor="ctr" marL="73152" marT="9144" marB="9144">
+                    <a:solidFill>
+                      <a:srgbClr val="FFFFFF"/>
+                    </a:solidFill>
+                  </a:tcPr>
+                </a:tc>
+                <a:tc>
+                  <a:txBody>
+                    <a:bodyPr/>
+                    <a:lstStyle/>
+                    <a:p>
+                      <a:r>
+                        <a:rPr sz="1150" b="0">
+                          <a:solidFill>
+                            <a:srgbClr val="1A2233"/>
+                          </a:solidFill>
+                          <a:latin typeface="Microsoft JhengHei"/>
+                          <a:ea typeface="Microsoft JhengHei"/>
+                          <a:cs typeface="Microsoft JhengHei"/>
+                        </a:rPr>
+                        <a:t>目前評估對公司營運尚無重大影響。</a:t>
+                      </a:r>
+                    </a:p>
+                  </a:txBody>
+                  <a:tcPr anchor="ctr" marL="73152" marT="9144" marB="9144">
+                    <a:solidFill>
+                      <a:srgbClr val="FFFFFF"/>
+                    </a:solidFill>
+                  </a:tcPr>
+                </a:tc>
+              </a:tr>
+              <a:tr h="384048">
+                <a:tc>
+                  <a:txBody>
+                    <a:bodyPr/>
+                    <a:lstStyle/>
+                    <a:p>
+                      <a:r>
+                        <a:rPr sz="1150" b="0">
+                          <a:solidFill>
+                            <a:srgbClr val="1A2233"/>
+                          </a:solidFill>
+                          <a:latin typeface="Microsoft JhengHei"/>
+                          <a:ea typeface="Microsoft JhengHei"/>
+                          <a:cs typeface="Microsoft JhengHei"/>
+                        </a:rPr>
+                        <a:t>網家</a:t>
+                      </a:r>
+                    </a:p>
+                  </a:txBody>
+                  <a:tcPr anchor="ctr" marL="73152" marT="9144" marB="9144">
+                    <a:solidFill>
+                      <a:srgbClr val="EEF2F9"/>
+                    </a:solidFill>
+                  </a:tcPr>
+                </a:tc>
+                <a:tc>
+                  <a:txBody>
+                    <a:bodyPr/>
+                    <a:lstStyle/>
+                    <a:p>
+                      <a:r>
+                        <a:rPr sz="1150" b="0">
+                          <a:solidFill>
+                            <a:srgbClr val="1A2233"/>
+                          </a:solidFill>
+                          <a:latin typeface="Microsoft JhengHei"/>
+                          <a:ea typeface="Microsoft JhengHei"/>
+                          <a:cs typeface="Microsoft JhengHei"/>
+                        </a:rPr>
+                        <a:t>8044</a:t>
                       </a:r>
                     </a:p>
                   </a:txBody>
@@ -4460,13 +4704,13 @@
                       <a:r>
                         <a:rPr sz="1150" b="1">
                           <a:solidFill>
-                            <a:srgbClr val="5C6679"/>
+                            <a:srgbClr val="E63946"/>
                           </a:solidFill>
                           <a:latin typeface="Microsoft JhengHei"/>
                           <a:ea typeface="Microsoft JhengHei"/>
                           <a:cs typeface="Microsoft JhengHei"/>
                         </a:rPr>
-                        <a:t>其他</a:t>
+                        <a:t>駭客攻擊</a:t>
                       </a:r>
                     </a:p>
                   </a:txBody>
@@ -4490,7 +4734,7 @@
                           <a:ea typeface="Microsoft JhengHei"/>
                           <a:cs typeface="Microsoft JhengHei"/>
                         </a:rPr>
-                        <a:t>目前評估對公司營運尚無重大影響。</a:t>
+                        <a:t>—</a:t>
                       </a:r>
                     </a:p>
                   </a:txBody>
@@ -4516,7 +4760,7 @@
                           <a:ea typeface="Microsoft JhengHei"/>
                           <a:cs typeface="Microsoft JhengHei"/>
                         </a:rPr>
-                        <a:t>網家</a:t>
+                        <a:t>耕興</a:t>
                       </a:r>
                     </a:p>
                   </a:txBody>
@@ -4540,251 +4784,7 @@
                           <a:ea typeface="Microsoft JhengHei"/>
                           <a:cs typeface="Microsoft JhengHei"/>
                         </a:rPr>
-                        <a:t>8044</a:t>
-                      </a:r>
-                    </a:p>
-                  </a:txBody>
-                  <a:tcPr anchor="ctr" marL="73152" marT="9144" marB="9144">
-                    <a:solidFill>
-                      <a:srgbClr val="FFFFFF"/>
-                    </a:solidFill>
-                  </a:tcPr>
-                </a:tc>
-                <a:tc>
-                  <a:txBody>
-                    <a:bodyPr/>
-                    <a:lstStyle/>
-                    <a:p>
-                      <a:r>
-                        <a:rPr sz="1150" b="0">
-                          <a:solidFill>
-                            <a:srgbClr val="1A2233"/>
-                          </a:solidFill>
-                          <a:latin typeface="Microsoft JhengHei"/>
-                          <a:ea typeface="Microsoft JhengHei"/>
-                          <a:cs typeface="Microsoft JhengHei"/>
-                        </a:rPr>
-                        <a:t>07/01</a:t>
-                      </a:r>
-                    </a:p>
-                  </a:txBody>
-                  <a:tcPr anchor="ctr" marL="73152" marT="9144" marB="9144">
-                    <a:solidFill>
-                      <a:srgbClr val="FFFFFF"/>
-                    </a:solidFill>
-                  </a:tcPr>
-                </a:tc>
-                <a:tc>
-                  <a:txBody>
-                    <a:bodyPr/>
-                    <a:lstStyle/>
-                    <a:p>
-                      <a:r>
-                        <a:rPr sz="1150" b="1">
-                          <a:solidFill>
-                            <a:srgbClr val="E63946"/>
-                          </a:solidFill>
-                          <a:latin typeface="Microsoft JhengHei"/>
-                          <a:ea typeface="Microsoft JhengHei"/>
-                          <a:cs typeface="Microsoft JhengHei"/>
-                        </a:rPr>
-                        <a:t>駭客攻擊</a:t>
-                      </a:r>
-                    </a:p>
-                  </a:txBody>
-                  <a:tcPr anchor="ctr" marL="73152" marT="9144" marB="9144">
-                    <a:solidFill>
-                      <a:srgbClr val="FFFFFF"/>
-                    </a:solidFill>
-                  </a:tcPr>
-                </a:tc>
-                <a:tc>
-                  <a:txBody>
-                    <a:bodyPr/>
-                    <a:lstStyle/>
-                    <a:p>
-                      <a:r>
-                        <a:rPr sz="1150" b="0">
-                          <a:solidFill>
-                            <a:srgbClr val="1A2233"/>
-                          </a:solidFill>
-                          <a:latin typeface="Microsoft JhengHei"/>
-                          <a:ea typeface="Microsoft JhengHei"/>
-                          <a:cs typeface="Microsoft JhengHei"/>
-                        </a:rPr>
-                        <a:t>—</a:t>
-                      </a:r>
-                    </a:p>
-                  </a:txBody>
-                  <a:tcPr anchor="ctr" marL="73152" marT="9144" marB="9144">
-                    <a:solidFill>
-                      <a:srgbClr val="FFFFFF"/>
-                    </a:solidFill>
-                  </a:tcPr>
-                </a:tc>
-              </a:tr>
-              <a:tr h="384048">
-                <a:tc>
-                  <a:txBody>
-                    <a:bodyPr/>
-                    <a:lstStyle/>
-                    <a:p>
-                      <a:r>
-                        <a:rPr sz="1150" b="0">
-                          <a:solidFill>
-                            <a:srgbClr val="1A2233"/>
-                          </a:solidFill>
-                          <a:latin typeface="Microsoft JhengHei"/>
-                          <a:ea typeface="Microsoft JhengHei"/>
-                          <a:cs typeface="Microsoft JhengHei"/>
-                        </a:rPr>
-                        <a:t>耕興</a:t>
-                      </a:r>
-                    </a:p>
-                  </a:txBody>
-                  <a:tcPr anchor="ctr" marL="73152" marT="9144" marB="9144">
-                    <a:solidFill>
-                      <a:srgbClr val="EEF2F9"/>
-                    </a:solidFill>
-                  </a:tcPr>
-                </a:tc>
-                <a:tc>
-                  <a:txBody>
-                    <a:bodyPr/>
-                    <a:lstStyle/>
-                    <a:p>
-                      <a:r>
-                        <a:rPr sz="1150" b="0">
-                          <a:solidFill>
-                            <a:srgbClr val="1A2233"/>
-                          </a:solidFill>
-                          <a:latin typeface="Microsoft JhengHei"/>
-                          <a:ea typeface="Microsoft JhengHei"/>
-                          <a:cs typeface="Microsoft JhengHei"/>
-                        </a:rPr>
                         <a:t>6146</a:t>
-                      </a:r>
-                    </a:p>
-                  </a:txBody>
-                  <a:tcPr anchor="ctr" marL="73152" marT="9144" marB="9144">
-                    <a:solidFill>
-                      <a:srgbClr val="EEF2F9"/>
-                    </a:solidFill>
-                  </a:tcPr>
-                </a:tc>
-                <a:tc>
-                  <a:txBody>
-                    <a:bodyPr/>
-                    <a:lstStyle/>
-                    <a:p>
-                      <a:r>
-                        <a:rPr sz="1150" b="0">
-                          <a:solidFill>
-                            <a:srgbClr val="1A2233"/>
-                          </a:solidFill>
-                          <a:latin typeface="Microsoft JhengHei"/>
-                          <a:ea typeface="Microsoft JhengHei"/>
-                          <a:cs typeface="Microsoft JhengHei"/>
-                        </a:rPr>
-                        <a:t>06/22</a:t>
-                      </a:r>
-                    </a:p>
-                  </a:txBody>
-                  <a:tcPr anchor="ctr" marL="73152" marT="9144" marB="9144">
-                    <a:solidFill>
-                      <a:srgbClr val="EEF2F9"/>
-                    </a:solidFill>
-                  </a:tcPr>
-                </a:tc>
-                <a:tc>
-                  <a:txBody>
-                    <a:bodyPr/>
-                    <a:lstStyle/>
-                    <a:p>
-                      <a:r>
-                        <a:rPr sz="1150" b="1">
-                          <a:solidFill>
-                            <a:srgbClr val="5C6679"/>
-                          </a:solidFill>
-                          <a:latin typeface="Microsoft JhengHei"/>
-                          <a:ea typeface="Microsoft JhengHei"/>
-                          <a:cs typeface="Microsoft JhengHei"/>
-                        </a:rPr>
-                        <a:t>其他</a:t>
-                      </a:r>
-                    </a:p>
-                  </a:txBody>
-                  <a:tcPr anchor="ctr" marL="73152" marT="9144" marB="9144">
-                    <a:solidFill>
-                      <a:srgbClr val="EEF2F9"/>
-                    </a:solidFill>
-                  </a:tcPr>
-                </a:tc>
-                <a:tc>
-                  <a:txBody>
-                    <a:bodyPr/>
-                    <a:lstStyle/>
-                    <a:p>
-                      <a:r>
-                        <a:rPr sz="1150" b="0">
-                          <a:solidFill>
-                            <a:srgbClr val="1A2233"/>
-                          </a:solidFill>
-                          <a:latin typeface="Microsoft JhengHei"/>
-                          <a:ea typeface="Microsoft JhengHei"/>
-                          <a:cs typeface="Microsoft JhengHei"/>
-                        </a:rPr>
-                        <a:t>受影響之資料檔案留有備份，不影響公司營運、業務進行等。</a:t>
-                      </a:r>
-                    </a:p>
-                  </a:txBody>
-                  <a:tcPr anchor="ctr" marL="73152" marT="9144" marB="9144">
-                    <a:solidFill>
-                      <a:srgbClr val="EEF2F9"/>
-                    </a:solidFill>
-                  </a:tcPr>
-                </a:tc>
-              </a:tr>
-              <a:tr h="384048">
-                <a:tc>
-                  <a:txBody>
-                    <a:bodyPr/>
-                    <a:lstStyle/>
-                    <a:p>
-                      <a:r>
-                        <a:rPr sz="1150" b="0">
-                          <a:solidFill>
-                            <a:srgbClr val="1A2233"/>
-                          </a:solidFill>
-                          <a:latin typeface="Microsoft JhengHei"/>
-                          <a:ea typeface="Microsoft JhengHei"/>
-                          <a:cs typeface="Microsoft JhengHei"/>
-                        </a:rPr>
-                        <a:t>易發</a:t>
-                      </a:r>
-                    </a:p>
-                  </a:txBody>
-                  <a:tcPr anchor="ctr" marL="73152" marT="9144" marB="9144">
-                    <a:solidFill>
-                      <a:srgbClr val="FFFFFF"/>
-                    </a:solidFill>
-                  </a:tcPr>
-                </a:tc>
-                <a:tc>
-                  <a:txBody>
-                    <a:bodyPr/>
-                    <a:lstStyle/>
-                    <a:p>
-                      <a:r>
-                        <a:rPr sz="1150" b="0">
-                          <a:solidFill>
-                            <a:srgbClr val="1A2233"/>
-                          </a:solidFill>
-                          <a:latin typeface="Microsoft JhengHei"/>
-                          <a:ea typeface="Microsoft JhengHei"/>
-                          <a:cs typeface="Microsoft JhengHei"/>
-                        </a:rPr>
-                        <a:t>6425</a:t>
                       </a:r>
                     </a:p>
                   </a:txBody>
@@ -4826,13 +4826,13 @@
                       <a:r>
                         <a:rPr sz="1150" b="1">
                           <a:solidFill>
-                            <a:srgbClr val="F4A261"/>
+                            <a:srgbClr val="5C6679"/>
                           </a:solidFill>
                           <a:latin typeface="Microsoft JhengHei"/>
                           <a:ea typeface="Microsoft JhengHei"/>
                           <a:cs typeface="Microsoft JhengHei"/>
                         </a:rPr>
-                        <a:t>勒索病毒/加密</a:t>
+                        <a:t>其他</a:t>
                       </a:r>
                     </a:p>
                   </a:txBody>
@@ -4856,7 +4856,7 @@
                           <a:ea typeface="Microsoft JhengHei"/>
                           <a:cs typeface="Microsoft JhengHei"/>
                         </a:rPr>
-                        <a:t>目前初步評估對公司運作無重大影響。</a:t>
+                        <a:t>受影響之資料檔案留有備份，不影響公司營運、業務進行等。</a:t>
                       </a:r>
                     </a:p>
                   </a:txBody>
@@ -4882,7 +4882,7 @@
                           <a:ea typeface="Microsoft JhengHei"/>
                           <a:cs typeface="Microsoft JhengHei"/>
                         </a:rPr>
-                        <a:t>尼得科超眾</a:t>
+                        <a:t>易發</a:t>
                       </a:r>
                     </a:p>
                   </a:txBody>
@@ -4906,7 +4906,7 @@
                           <a:ea typeface="Microsoft JhengHei"/>
                           <a:cs typeface="Microsoft JhengHei"/>
                         </a:rPr>
-                        <a:t>6230</a:t>
+                        <a:t>6425</a:t>
                       </a:r>
                     </a:p>
                   </a:txBody>
@@ -4978,7 +4978,7 @@
                           <a:ea typeface="Microsoft JhengHei"/>
                           <a:cs typeface="Microsoft JhengHei"/>
                         </a:rPr>
-                        <a:t>目前受影響之系統正陸續復原中，對公司整體營運及財務之影響程度尚在評估…</a:t>
+                        <a:t>目前初步評估對公司運作無重大影響。</a:t>
                       </a:r>
                     </a:p>
                   </a:txBody>
@@ -5428,7 +5428,7 @@
                 <a:ea typeface="Microsoft JhengHei"/>
                 <a:cs typeface="Microsoft JhengHei"/>
               </a:rPr>
-              <a:t>2 起</a:t>
+              <a:t>3 起</a:t>
             </a:r>
           </a:p>
         </p:txBody>
@@ -5465,7 +5465,7 @@
                 <a:ea typeface="Microsoft JhengHei"/>
                 <a:cs typeface="Microsoft JhengHei"/>
               </a:rPr>
-              <a:t>麗清、網家</a:t>
+              <a:t>優盛、麗清、網家</a:t>
             </a:r>
           </a:p>
         </p:txBody>
@@ -5666,7 +5666,7 @@
                 <a:ea typeface="Microsoft JhengHei"/>
                 <a:cs typeface="Microsoft JhengHei"/>
               </a:rPr>
-              <a:t>2 起</a:t>
+              <a:t>1 起</a:t>
             </a:r>
           </a:p>
         </p:txBody>
@@ -5703,7 +5703,7 @@
                 <a:ea typeface="Microsoft JhengHei"/>
                 <a:cs typeface="Microsoft JhengHei"/>
               </a:rPr>
-              <a:t>易發、尼得科超眾</a:t>
+              <a:t>易發</a:t>
             </a:r>
           </a:p>
         </p:txBody>
@@ -6281,7 +6281,7 @@
                           <a:ea typeface="Microsoft JhengHei"/>
                           <a:cs typeface="Microsoft JhengHei"/>
                         </a:rPr>
-                        <a:t>麗清</a:t>
+                        <a:t>優盛</a:t>
                       </a:r>
                     </a:p>
                   </a:txBody>
@@ -6305,7 +6305,7 @@
                           <a:ea typeface="Microsoft JhengHei"/>
                           <a:cs typeface="Microsoft JhengHei"/>
                         </a:rPr>
-                        <a:t>3346</a:t>
+                        <a:t>4121</a:t>
                       </a:r>
                     </a:p>
                   </a:txBody>
@@ -6353,7 +6353,7 @@
                           <a:ea typeface="Microsoft JhengHei"/>
                           <a:cs typeface="Microsoft JhengHei"/>
                         </a:rPr>
-                        <a:t>勤業眾信聯合會計師事務所</a:t>
+                        <a:t>安侯建業聯合會計師事務所</a:t>
                       </a:r>
                     </a:p>
                   </a:txBody>
@@ -6377,7 +6377,7 @@
                           <a:ea typeface="Microsoft JhengHei"/>
                           <a:cs typeface="Microsoft JhengHei"/>
                         </a:rPr>
-                        <a:t>陳致源、黃堯麟</a:t>
+                        <a:t>鄒依芸、毛聖崴</a:t>
                       </a:r>
                     </a:p>
                   </a:txBody>
@@ -6403,7 +6403,7 @@
                           <a:ea typeface="Microsoft JhengHei"/>
                           <a:cs typeface="Microsoft JhengHei"/>
                         </a:rPr>
-                        <a:t>GOGOLOOK</a:t>
+                        <a:t>麗清</a:t>
                       </a:r>
                     </a:p>
                   </a:txBody>
@@ -6427,13 +6427,135 @@
                           <a:ea typeface="Microsoft JhengHei"/>
                           <a:cs typeface="Microsoft JhengHei"/>
                         </a:rPr>
+                        <a:t>3346</a:t>
+                      </a:r>
+                    </a:p>
+                  </a:txBody>
+                  <a:tcPr anchor="ctr" marL="73152" marT="9144" marB="9144">
+                    <a:solidFill>
+                      <a:srgbClr val="EEF2F9"/>
+                    </a:solidFill>
+                  </a:tcPr>
+                </a:tc>
+                <a:tc>
+                  <a:txBody>
+                    <a:bodyPr/>
+                    <a:lstStyle/>
+                    <a:p>
+                      <a:r>
+                        <a:rPr sz="1150" b="1">
+                          <a:solidFill>
+                            <a:srgbClr val="E63946"/>
+                          </a:solidFill>
+                          <a:latin typeface="Microsoft JhengHei"/>
+                          <a:ea typeface="Microsoft JhengHei"/>
+                          <a:cs typeface="Microsoft JhengHei"/>
+                        </a:rPr>
+                        <a:t>駭客攻擊</a:t>
+                      </a:r>
+                    </a:p>
+                  </a:txBody>
+                  <a:tcPr anchor="ctr" marL="73152" marT="9144" marB="9144">
+                    <a:solidFill>
+                      <a:srgbClr val="EEF2F9"/>
+                    </a:solidFill>
+                  </a:tcPr>
+                </a:tc>
+                <a:tc>
+                  <a:txBody>
+                    <a:bodyPr/>
+                    <a:lstStyle/>
+                    <a:p>
+                      <a:r>
+                        <a:rPr sz="1150" b="0">
+                          <a:solidFill>
+                            <a:srgbClr val="1A2233"/>
+                          </a:solidFill>
+                          <a:latin typeface="Microsoft JhengHei"/>
+                          <a:ea typeface="Microsoft JhengHei"/>
+                          <a:cs typeface="Microsoft JhengHei"/>
+                        </a:rPr>
+                        <a:t>勤業眾信聯合會計師事務所</a:t>
+                      </a:r>
+                    </a:p>
+                  </a:txBody>
+                  <a:tcPr anchor="ctr" marL="73152" marT="9144" marB="9144">
+                    <a:solidFill>
+                      <a:srgbClr val="EEF2F9"/>
+                    </a:solidFill>
+                  </a:tcPr>
+                </a:tc>
+                <a:tc>
+                  <a:txBody>
+                    <a:bodyPr/>
+                    <a:lstStyle/>
+                    <a:p>
+                      <a:r>
+                        <a:rPr sz="1150" b="0">
+                          <a:solidFill>
+                            <a:srgbClr val="1A2233"/>
+                          </a:solidFill>
+                          <a:latin typeface="Microsoft JhengHei"/>
+                          <a:ea typeface="Microsoft JhengHei"/>
+                          <a:cs typeface="Microsoft JhengHei"/>
+                        </a:rPr>
+                        <a:t>陳致源、黃堯麟</a:t>
+                      </a:r>
+                    </a:p>
+                  </a:txBody>
+                  <a:tcPr anchor="ctr" marL="73152" marT="9144" marB="9144">
+                    <a:solidFill>
+                      <a:srgbClr val="EEF2F9"/>
+                    </a:solidFill>
+                  </a:tcPr>
+                </a:tc>
+              </a:tr>
+              <a:tr h="457200">
+                <a:tc>
+                  <a:txBody>
+                    <a:bodyPr/>
+                    <a:lstStyle/>
+                    <a:p>
+                      <a:r>
+                        <a:rPr sz="1150" b="0">
+                          <a:solidFill>
+                            <a:srgbClr val="1A2233"/>
+                          </a:solidFill>
+                          <a:latin typeface="Microsoft JhengHei"/>
+                          <a:ea typeface="Microsoft JhengHei"/>
+                          <a:cs typeface="Microsoft JhengHei"/>
+                        </a:rPr>
+                        <a:t>GOGOLOOK</a:t>
+                      </a:r>
+                    </a:p>
+                  </a:txBody>
+                  <a:tcPr anchor="ctr" marL="73152" marT="9144" marB="9144">
+                    <a:solidFill>
+                      <a:srgbClr val="FFFFFF"/>
+                    </a:solidFill>
+                  </a:tcPr>
+                </a:tc>
+                <a:tc>
+                  <a:txBody>
+                    <a:bodyPr/>
+                    <a:lstStyle/>
+                    <a:p>
+                      <a:r>
+                        <a:rPr sz="1150" b="0">
+                          <a:solidFill>
+                            <a:srgbClr val="1A2233"/>
+                          </a:solidFill>
+                          <a:latin typeface="Microsoft JhengHei"/>
+                          <a:ea typeface="Microsoft JhengHei"/>
+                          <a:cs typeface="Microsoft JhengHei"/>
+                        </a:rPr>
                         <a:t>6902</a:t>
                       </a:r>
                     </a:p>
                   </a:txBody>
                   <a:tcPr anchor="ctr" marL="73152" marT="9144" marB="9144">
                     <a:solidFill>
-                      <a:srgbClr val="EEF2F9"/>
+                      <a:srgbClr val="FFFFFF"/>
                     </a:solidFill>
                   </a:tcPr>
                 </a:tc>
@@ -6452,6 +6574,128 @@
                           <a:cs typeface="Microsoft JhengHei"/>
                         </a:rPr>
                         <a:t>其他</a:t>
+                      </a:r>
+                    </a:p>
+                  </a:txBody>
+                  <a:tcPr anchor="ctr" marL="73152" marT="9144" marB="9144">
+                    <a:solidFill>
+                      <a:srgbClr val="FFFFFF"/>
+                    </a:solidFill>
+                  </a:tcPr>
+                </a:tc>
+                <a:tc>
+                  <a:txBody>
+                    <a:bodyPr/>
+                    <a:lstStyle/>
+                    <a:p>
+                      <a:r>
+                        <a:rPr sz="1150" b="0">
+                          <a:solidFill>
+                            <a:srgbClr val="1A2233"/>
+                          </a:solidFill>
+                          <a:latin typeface="Microsoft JhengHei"/>
+                          <a:ea typeface="Microsoft JhengHei"/>
+                          <a:cs typeface="Microsoft JhengHei"/>
+                        </a:rPr>
+                        <a:t>資誠聯合會計師事務所</a:t>
+                      </a:r>
+                    </a:p>
+                  </a:txBody>
+                  <a:tcPr anchor="ctr" marL="73152" marT="9144" marB="9144">
+                    <a:solidFill>
+                      <a:srgbClr val="FFFFFF"/>
+                    </a:solidFill>
+                  </a:tcPr>
+                </a:tc>
+                <a:tc>
+                  <a:txBody>
+                    <a:bodyPr/>
+                    <a:lstStyle/>
+                    <a:p>
+                      <a:r>
+                        <a:rPr sz="1150" b="0">
+                          <a:solidFill>
+                            <a:srgbClr val="1A2233"/>
+                          </a:solidFill>
+                          <a:latin typeface="Microsoft JhengHei"/>
+                          <a:ea typeface="Microsoft JhengHei"/>
+                          <a:cs typeface="Microsoft JhengHei"/>
+                        </a:rPr>
+                        <a:t>吳尚燉、王昱欣</a:t>
+                      </a:r>
+                    </a:p>
+                  </a:txBody>
+                  <a:tcPr anchor="ctr" marL="73152" marT="9144" marB="9144">
+                    <a:solidFill>
+                      <a:srgbClr val="FFFFFF"/>
+                    </a:solidFill>
+                  </a:tcPr>
+                </a:tc>
+              </a:tr>
+              <a:tr h="457200">
+                <a:tc>
+                  <a:txBody>
+                    <a:bodyPr/>
+                    <a:lstStyle/>
+                    <a:p>
+                      <a:r>
+                        <a:rPr sz="1150" b="0">
+                          <a:solidFill>
+                            <a:srgbClr val="1A2233"/>
+                          </a:solidFill>
+                          <a:latin typeface="Microsoft JhengHei"/>
+                          <a:ea typeface="Microsoft JhengHei"/>
+                          <a:cs typeface="Microsoft JhengHei"/>
+                        </a:rPr>
+                        <a:t>網家</a:t>
+                      </a:r>
+                    </a:p>
+                  </a:txBody>
+                  <a:tcPr anchor="ctr" marL="73152" marT="9144" marB="9144">
+                    <a:solidFill>
+                      <a:srgbClr val="EEF2F9"/>
+                    </a:solidFill>
+                  </a:tcPr>
+                </a:tc>
+                <a:tc>
+                  <a:txBody>
+                    <a:bodyPr/>
+                    <a:lstStyle/>
+                    <a:p>
+                      <a:r>
+                        <a:rPr sz="1150" b="0">
+                          <a:solidFill>
+                            <a:srgbClr val="1A2233"/>
+                          </a:solidFill>
+                          <a:latin typeface="Microsoft JhengHei"/>
+                          <a:ea typeface="Microsoft JhengHei"/>
+                          <a:cs typeface="Microsoft JhengHei"/>
+                        </a:rPr>
+                        <a:t>8044</a:t>
+                      </a:r>
+                    </a:p>
+                  </a:txBody>
+                  <a:tcPr anchor="ctr" marL="73152" marT="9144" marB="9144">
+                    <a:solidFill>
+                      <a:srgbClr val="EEF2F9"/>
+                    </a:solidFill>
+                  </a:tcPr>
+                </a:tc>
+                <a:tc>
+                  <a:txBody>
+                    <a:bodyPr/>
+                    <a:lstStyle/>
+                    <a:p>
+                      <a:r>
+                        <a:rPr sz="1150" b="1">
+                          <a:solidFill>
+                            <a:srgbClr val="E63946"/>
+                          </a:solidFill>
+                          <a:latin typeface="Microsoft JhengHei"/>
+                          <a:ea typeface="Microsoft JhengHei"/>
+                          <a:cs typeface="Microsoft JhengHei"/>
+                        </a:rPr>
+                        <a:t>駭客攻擊</a:t>
                       </a:r>
                     </a:p>
                   </a:txBody>
@@ -6499,7 +6743,7 @@
                           <a:ea typeface="Microsoft JhengHei"/>
                           <a:cs typeface="Microsoft JhengHei"/>
                         </a:rPr>
-                        <a:t>吳尚燉、王昱欣</a:t>
+                        <a:t>廖容翎、梁嬋女</a:t>
                       </a:r>
                     </a:p>
                   </a:txBody>
@@ -6525,7 +6769,7 @@
                           <a:ea typeface="Microsoft JhengHei"/>
                           <a:cs typeface="Microsoft JhengHei"/>
                         </a:rPr>
-                        <a:t>網家</a:t>
+                        <a:t>耕興</a:t>
                       </a:r>
                     </a:p>
                   </a:txBody>
@@ -6549,7 +6793,7 @@
                           <a:ea typeface="Microsoft JhengHei"/>
                           <a:cs typeface="Microsoft JhengHei"/>
                         </a:rPr>
-                        <a:t>8044</a:t>
+                        <a:t>6146</a:t>
                       </a:r>
                     </a:p>
                   </a:txBody>
@@ -6567,13 +6811,13 @@
                       <a:r>
                         <a:rPr sz="1150" b="1">
                           <a:solidFill>
-                            <a:srgbClr val="E63946"/>
+                            <a:srgbClr val="5C6679"/>
                           </a:solidFill>
                           <a:latin typeface="Microsoft JhengHei"/>
                           <a:ea typeface="Microsoft JhengHei"/>
                           <a:cs typeface="Microsoft JhengHei"/>
                         </a:rPr>
-                        <a:t>駭客攻擊</a:t>
+                        <a:t>其他</a:t>
                       </a:r>
                     </a:p>
                   </a:txBody>
@@ -6597,7 +6841,7 @@
                           <a:ea typeface="Microsoft JhengHei"/>
                           <a:cs typeface="Microsoft JhengHei"/>
                         </a:rPr>
-                        <a:t>資誠聯合會計師事務所</a:t>
+                        <a:t>勤業眾信聯合會計師事務所</a:t>
                       </a:r>
                     </a:p>
                   </a:txBody>
@@ -6621,7 +6865,7 @@
                           <a:ea typeface="Microsoft JhengHei"/>
                           <a:cs typeface="Microsoft JhengHei"/>
                         </a:rPr>
-                        <a:t>廖容翎、梁嬋女</a:t>
+                        <a:t>黃毅民、陳文香</a:t>
                       </a:r>
                     </a:p>
                   </a:txBody>
@@ -6647,7 +6891,7 @@
                           <a:ea typeface="Microsoft JhengHei"/>
                           <a:cs typeface="Microsoft JhengHei"/>
                         </a:rPr>
-                        <a:t>耕興</a:t>
+                        <a:t>易發</a:t>
                       </a:r>
                     </a:p>
                   </a:txBody>
@@ -6671,7 +6915,7 @@
                           <a:ea typeface="Microsoft JhengHei"/>
                           <a:cs typeface="Microsoft JhengHei"/>
                         </a:rPr>
-                        <a:t>6146</a:t>
+                        <a:t>6425</a:t>
                       </a:r>
                     </a:p>
                   </a:txBody>
@@ -6689,13 +6933,13 @@
                       <a:r>
                         <a:rPr sz="1150" b="1">
                           <a:solidFill>
-                            <a:srgbClr val="5C6679"/>
+                            <a:srgbClr val="F4A261"/>
                           </a:solidFill>
                           <a:latin typeface="Microsoft JhengHei"/>
                           <a:ea typeface="Microsoft JhengHei"/>
                           <a:cs typeface="Microsoft JhengHei"/>
                         </a:rPr>
-                        <a:t>其他</a:t>
+                        <a:t>勒索病毒/加密</a:t>
                       </a:r>
                     </a:p>
                   </a:txBody>
@@ -6743,251 +6987,7 @@
                           <a:ea typeface="Microsoft JhengHei"/>
                           <a:cs typeface="Microsoft JhengHei"/>
                         </a:rPr>
-                        <a:t>黃毅民、陳文香</a:t>
-                      </a:r>
-                    </a:p>
-                  </a:txBody>
-                  <a:tcPr anchor="ctr" marL="73152" marT="9144" marB="9144">
-                    <a:solidFill>
-                      <a:srgbClr val="EEF2F9"/>
-                    </a:solidFill>
-                  </a:tcPr>
-                </a:tc>
-              </a:tr>
-              <a:tr h="457200">
-                <a:tc>
-                  <a:txBody>
-                    <a:bodyPr/>
-                    <a:lstStyle/>
-                    <a:p>
-                      <a:r>
-                        <a:rPr sz="1150" b="0">
-                          <a:solidFill>
-                            <a:srgbClr val="1A2233"/>
-                          </a:solidFill>
-                          <a:latin typeface="Microsoft JhengHei"/>
-                          <a:ea typeface="Microsoft JhengHei"/>
-                          <a:cs typeface="Microsoft JhengHei"/>
-                        </a:rPr>
-                        <a:t>易發</a:t>
-                      </a:r>
-                    </a:p>
-                  </a:txBody>
-                  <a:tcPr anchor="ctr" marL="73152" marT="9144" marB="9144">
-                    <a:solidFill>
-                      <a:srgbClr val="FFFFFF"/>
-                    </a:solidFill>
-                  </a:tcPr>
-                </a:tc>
-                <a:tc>
-                  <a:txBody>
-                    <a:bodyPr/>
-                    <a:lstStyle/>
-                    <a:p>
-                      <a:r>
-                        <a:rPr sz="1150" b="0">
-                          <a:solidFill>
-                            <a:srgbClr val="1A2233"/>
-                          </a:solidFill>
-                          <a:latin typeface="Microsoft JhengHei"/>
-                          <a:ea typeface="Microsoft JhengHei"/>
-                          <a:cs typeface="Microsoft JhengHei"/>
-                        </a:rPr>
-                        <a:t>6425</a:t>
-                      </a:r>
-                    </a:p>
-                  </a:txBody>
-                  <a:tcPr anchor="ctr" marL="73152" marT="9144" marB="9144">
-                    <a:solidFill>
-                      <a:srgbClr val="FFFFFF"/>
-                    </a:solidFill>
-                  </a:tcPr>
-                </a:tc>
-                <a:tc>
-                  <a:txBody>
-                    <a:bodyPr/>
-                    <a:lstStyle/>
-                    <a:p>
-                      <a:r>
-                        <a:rPr sz="1150" b="1">
-                          <a:solidFill>
-                            <a:srgbClr val="F4A261"/>
-                          </a:solidFill>
-                          <a:latin typeface="Microsoft JhengHei"/>
-                          <a:ea typeface="Microsoft JhengHei"/>
-                          <a:cs typeface="Microsoft JhengHei"/>
-                        </a:rPr>
-                        <a:t>勒索病毒/加密</a:t>
-                      </a:r>
-                    </a:p>
-                  </a:txBody>
-                  <a:tcPr anchor="ctr" marL="73152" marT="9144" marB="9144">
-                    <a:solidFill>
-                      <a:srgbClr val="FFFFFF"/>
-                    </a:solidFill>
-                  </a:tcPr>
-                </a:tc>
-                <a:tc>
-                  <a:txBody>
-                    <a:bodyPr/>
-                    <a:lstStyle/>
-                    <a:p>
-                      <a:r>
-                        <a:rPr sz="1150" b="0">
-                          <a:solidFill>
-                            <a:srgbClr val="1A2233"/>
-                          </a:solidFill>
-                          <a:latin typeface="Microsoft JhengHei"/>
-                          <a:ea typeface="Microsoft JhengHei"/>
-                          <a:cs typeface="Microsoft JhengHei"/>
-                        </a:rPr>
-                        <a:t>勤業眾信聯合會計師事務所</a:t>
-                      </a:r>
-                    </a:p>
-                  </a:txBody>
-                  <a:tcPr anchor="ctr" marL="73152" marT="9144" marB="9144">
-                    <a:solidFill>
-                      <a:srgbClr val="FFFFFF"/>
-                    </a:solidFill>
-                  </a:tcPr>
-                </a:tc>
-                <a:tc>
-                  <a:txBody>
-                    <a:bodyPr/>
-                    <a:lstStyle/>
-                    <a:p>
-                      <a:r>
-                        <a:rPr sz="1150" b="0">
-                          <a:solidFill>
-                            <a:srgbClr val="1A2233"/>
-                          </a:solidFill>
-                          <a:latin typeface="Microsoft JhengHei"/>
-                          <a:ea typeface="Microsoft JhengHei"/>
-                          <a:cs typeface="Microsoft JhengHei"/>
-                        </a:rPr>
                         <a:t>張至誼、洪國田</a:t>
-                      </a:r>
-                    </a:p>
-                  </a:txBody>
-                  <a:tcPr anchor="ctr" marL="73152" marT="9144" marB="9144">
-                    <a:solidFill>
-                      <a:srgbClr val="FFFFFF"/>
-                    </a:solidFill>
-                  </a:tcPr>
-                </a:tc>
-              </a:tr>
-              <a:tr h="457200">
-                <a:tc>
-                  <a:txBody>
-                    <a:bodyPr/>
-                    <a:lstStyle/>
-                    <a:p>
-                      <a:r>
-                        <a:rPr sz="1150" b="0">
-                          <a:solidFill>
-                            <a:srgbClr val="1A2233"/>
-                          </a:solidFill>
-                          <a:latin typeface="Microsoft JhengHei"/>
-                          <a:ea typeface="Microsoft JhengHei"/>
-                          <a:cs typeface="Microsoft JhengHei"/>
-                        </a:rPr>
-                        <a:t>尼得科超眾</a:t>
-                      </a:r>
-                    </a:p>
-                  </a:txBody>
-                  <a:tcPr anchor="ctr" marL="73152" marT="9144" marB="9144">
-                    <a:solidFill>
-                      <a:srgbClr val="EEF2F9"/>
-                    </a:solidFill>
-                  </a:tcPr>
-                </a:tc>
-                <a:tc>
-                  <a:txBody>
-                    <a:bodyPr/>
-                    <a:lstStyle/>
-                    <a:p>
-                      <a:r>
-                        <a:rPr sz="1150" b="0">
-                          <a:solidFill>
-                            <a:srgbClr val="1A2233"/>
-                          </a:solidFill>
-                          <a:latin typeface="Microsoft JhengHei"/>
-                          <a:ea typeface="Microsoft JhengHei"/>
-                          <a:cs typeface="Microsoft JhengHei"/>
-                        </a:rPr>
-                        <a:t>6230</a:t>
-                      </a:r>
-                    </a:p>
-                  </a:txBody>
-                  <a:tcPr anchor="ctr" marL="73152" marT="9144" marB="9144">
-                    <a:solidFill>
-                      <a:srgbClr val="EEF2F9"/>
-                    </a:solidFill>
-                  </a:tcPr>
-                </a:tc>
-                <a:tc>
-                  <a:txBody>
-                    <a:bodyPr/>
-                    <a:lstStyle/>
-                    <a:p>
-                      <a:r>
-                        <a:rPr sz="1150" b="1">
-                          <a:solidFill>
-                            <a:srgbClr val="F4A261"/>
-                          </a:solidFill>
-                          <a:latin typeface="Microsoft JhengHei"/>
-                          <a:ea typeface="Microsoft JhengHei"/>
-                          <a:cs typeface="Microsoft JhengHei"/>
-                        </a:rPr>
-                        <a:t>勒索病毒/加密</a:t>
-                      </a:r>
-                    </a:p>
-                  </a:txBody>
-                  <a:tcPr anchor="ctr" marL="73152" marT="9144" marB="9144">
-                    <a:solidFill>
-                      <a:srgbClr val="EEF2F9"/>
-                    </a:solidFill>
-                  </a:tcPr>
-                </a:tc>
-                <a:tc>
-                  <a:txBody>
-                    <a:bodyPr/>
-                    <a:lstStyle/>
-                    <a:p>
-                      <a:r>
-                        <a:rPr sz="1150" b="0">
-                          <a:solidFill>
-                            <a:srgbClr val="1A2233"/>
-                          </a:solidFill>
-                          <a:latin typeface="Microsoft JhengHei"/>
-                          <a:ea typeface="Microsoft JhengHei"/>
-                          <a:cs typeface="Microsoft JhengHei"/>
-                        </a:rPr>
-                        <a:t>安侯建業聯合會計師事務所</a:t>
-                      </a:r>
-                    </a:p>
-                  </a:txBody>
-                  <a:tcPr anchor="ctr" marL="73152" marT="9144" marB="9144">
-                    <a:solidFill>
-                      <a:srgbClr val="EEF2F9"/>
-                    </a:solidFill>
-                  </a:tcPr>
-                </a:tc>
-                <a:tc>
-                  <a:txBody>
-                    <a:bodyPr/>
-                    <a:lstStyle/>
-                    <a:p>
-                      <a:r>
-                        <a:rPr sz="1150" b="0">
-                          <a:solidFill>
-                            <a:srgbClr val="1A2233"/>
-                          </a:solidFill>
-                          <a:latin typeface="Microsoft JhengHei"/>
-                          <a:ea typeface="Microsoft JhengHei"/>
-                          <a:cs typeface="Microsoft JhengHei"/>
-                        </a:rPr>
-                        <a:t>郭欣頤、張肇文</a:t>
                       </a:r>
                     </a:p>
                   </a:txBody>
@@ -8630,7 +8630,7 @@
                 <a:ea typeface="Microsoft JhengHei"/>
                 <a:cs typeface="Microsoft JhengHei"/>
               </a:rPr>
-              <a:t>麗清 </a:t>
+              <a:t>優盛 </a:t>
             </a:r>
             <a:r>
               <a:rPr sz="1300" b="0">
@@ -8641,7 +8641,7 @@
                 <a:ea typeface="Microsoft JhengHei"/>
                 <a:cs typeface="Microsoft JhengHei"/>
               </a:rPr>
-              <a:t>3346</a:t>
+              <a:t>4121</a:t>
             </a:r>
           </a:p>
         </p:txBody>
@@ -8774,7 +8774,7 @@
                 <a:ea typeface="Microsoft JhengHei"/>
                 <a:cs typeface="Microsoft JhengHei"/>
               </a:rPr>
-              <a:t>本公司部份資訊系統遭受駭客網路攻擊。</a:t>
+              <a:t>本公司之官網於今天下午遭受網路駭客攻擊</a:t>
             </a:r>
           </a:p>
         </p:txBody>
@@ -8826,7 +8826,7 @@
                 <a:ea typeface="Microsoft JhengHei"/>
                 <a:cs typeface="Microsoft JhengHei"/>
               </a:rPr>
-              <a:t>修復安全漏洞並持續提升網路與資訊基礎架構之安全管控以確保資訊安全。</a:t>
+              <a:t>本公司後續將持續提升網路與資訊基礎架構之安全管控以確保資訊安全。</a:t>
             </a:r>
           </a:p>
         </p:txBody>
@@ -8892,7 +8892,7 @@
             <a:avLst/>
           </a:prstGeom>
           <a:solidFill>
-            <a:srgbClr val="5C6679"/>
+            <a:srgbClr val="E63946"/>
           </a:solidFill>
           <a:ln>
             <a:noFill/>
@@ -8953,7 +8953,7 @@
                 <a:ea typeface="Microsoft JhengHei"/>
                 <a:cs typeface="Microsoft JhengHei"/>
               </a:rPr>
-              <a:t>GOGOLOOK </a:t>
+              <a:t>麗清 </a:t>
             </a:r>
             <a:r>
               <a:rPr sz="1300" b="0">
@@ -8964,7 +8964,7 @@
                 <a:ea typeface="Microsoft JhengHei"/>
                 <a:cs typeface="Microsoft JhengHei"/>
               </a:rPr>
-              <a:t>6902</a:t>
+              <a:t>3346</a:t>
             </a:r>
           </a:p>
         </p:txBody>
@@ -8984,7 +8984,7 @@
             <a:avLst/>
           </a:prstGeom>
           <a:solidFill>
-            <a:srgbClr val="5C6679"/>
+            <a:srgbClr val="E63946"/>
           </a:solidFill>
           <a:ln>
             <a:noFill/>
@@ -9045,7 +9045,7 @@
                 <a:ea typeface="Microsoft JhengHei"/>
                 <a:cs typeface="Microsoft JhengHei"/>
               </a:rPr>
-              <a:t>其他</a:t>
+              <a:t>駭客攻擊</a:t>
             </a:r>
           </a:p>
         </p:txBody>
@@ -9080,7 +9080,7 @@
             <a:r>
               <a:rPr sz="1100" b="1">
                 <a:solidFill>
-                  <a:srgbClr val="5C6679"/>
+                  <a:srgbClr val="E63946"/>
                 </a:solidFill>
                 <a:latin typeface="Microsoft JhengHei"/>
                 <a:ea typeface="Microsoft JhengHei"/>
@@ -9097,7 +9097,7 @@
                 <a:ea typeface="Microsoft JhengHei"/>
                 <a:cs typeface="Microsoft JhengHei"/>
               </a:rPr>
-              <a:t>本公司發生網路資安事件。</a:t>
+              <a:t>本公司部份資訊系統遭受駭客網路攻擊。</a:t>
             </a:r>
           </a:p>
         </p:txBody>
@@ -9132,7 +9132,7 @@
             <a:r>
               <a:rPr sz="1100" b="1">
                 <a:solidFill>
-                  <a:srgbClr val="5C6679"/>
+                  <a:srgbClr val="E63946"/>
                 </a:solidFill>
                 <a:latin typeface="Microsoft JhengHei"/>
                 <a:ea typeface="Microsoft JhengHei"/>
@@ -9149,7 +9149,7 @@
                 <a:ea typeface="Microsoft JhengHei"/>
                 <a:cs typeface="Microsoft JhengHei"/>
               </a:rPr>
-              <a:t>本公司後續仍持續強化資安管控及防禦機制，確保資訊安全與服務體驗。</a:t>
+              <a:t>修復安全漏洞並持續提升網路與資訊基礎架構之安全管控以確保資訊安全。</a:t>
             </a:r>
           </a:p>
         </p:txBody>
@@ -9215,7 +9215,7 @@
             <a:avLst/>
           </a:prstGeom>
           <a:solidFill>
-            <a:srgbClr val="E63946"/>
+            <a:srgbClr val="5C6679"/>
           </a:solidFill>
           <a:ln>
             <a:noFill/>
@@ -9276,7 +9276,7 @@
                 <a:ea typeface="Microsoft JhengHei"/>
                 <a:cs typeface="Microsoft JhengHei"/>
               </a:rPr>
-              <a:t>網家 </a:t>
+              <a:t>GOGOLOOK </a:t>
             </a:r>
             <a:r>
               <a:rPr sz="1300" b="0">
@@ -9287,7 +9287,7 @@
                 <a:ea typeface="Microsoft JhengHei"/>
                 <a:cs typeface="Microsoft JhengHei"/>
               </a:rPr>
-              <a:t>8044</a:t>
+              <a:t>6902</a:t>
             </a:r>
           </a:p>
         </p:txBody>
@@ -9307,7 +9307,7 @@
             <a:avLst/>
           </a:prstGeom>
           <a:solidFill>
-            <a:srgbClr val="E63946"/>
+            <a:srgbClr val="5C6679"/>
           </a:solidFill>
           <a:ln>
             <a:noFill/>
@@ -9368,7 +9368,7 @@
                 <a:ea typeface="Microsoft JhengHei"/>
                 <a:cs typeface="Microsoft JhengHei"/>
               </a:rPr>
-              <a:t>駭客攻擊</a:t>
+              <a:t>其他</a:t>
             </a:r>
           </a:p>
         </p:txBody>
@@ -9403,7 +9403,7 @@
             <a:r>
               <a:rPr sz="1100" b="1">
                 <a:solidFill>
-                  <a:srgbClr val="E63946"/>
+                  <a:srgbClr val="5C6679"/>
                 </a:solidFill>
                 <a:latin typeface="Microsoft JhengHei"/>
                 <a:ea typeface="Microsoft JhengHei"/>
@@ -9420,7 +9420,7 @@
                 <a:ea typeface="Microsoft JhengHei"/>
                 <a:cs typeface="Microsoft JhengHei"/>
               </a:rPr>
-              <a:t>公司對該等報導或提供訊息之說明:(1)資訊安全防線：本公司及各轉投資事業係依不同服務型態各自營運…</a:t>
+              <a:t>本公司發生網路資安事件。</a:t>
             </a:r>
           </a:p>
         </p:txBody>
@@ -9455,7 +9455,7 @@
             <a:r>
               <a:rPr sz="1100" b="1">
                 <a:solidFill>
-                  <a:srgbClr val="E63946"/>
+                  <a:srgbClr val="5C6679"/>
                 </a:solidFill>
                 <a:latin typeface="Microsoft JhengHei"/>
                 <a:ea typeface="Microsoft JhengHei"/>
@@ -9472,7 +9472,7 @@
                 <a:ea typeface="Microsoft JhengHei"/>
                 <a:cs typeface="Microsoft JhengHei"/>
               </a:rPr>
-              <a:t>(1)全面啟動應變與調查：拍付國際獲悉駭客聲稱之入侵及勒索訊息後，已立即啟動資安應變程序，會同資安專家進行全面系統檢測與…</a:t>
+              <a:t>本公司後續仍持續強化資安管控及防禦機制，確保資訊安全與服務體驗。</a:t>
             </a:r>
           </a:p>
         </p:txBody>
@@ -9538,7 +9538,7 @@
             <a:avLst/>
           </a:prstGeom>
           <a:solidFill>
-            <a:srgbClr val="5C6679"/>
+            <a:srgbClr val="E63946"/>
           </a:solidFill>
           <a:ln>
             <a:noFill/>
@@ -9599,7 +9599,7 @@
                 <a:ea typeface="Microsoft JhengHei"/>
                 <a:cs typeface="Microsoft JhengHei"/>
               </a:rPr>
-              <a:t>耕興 </a:t>
+              <a:t>網家 </a:t>
             </a:r>
             <a:r>
               <a:rPr sz="1300" b="0">
@@ -9610,7 +9610,7 @@
                 <a:ea typeface="Microsoft JhengHei"/>
                 <a:cs typeface="Microsoft JhengHei"/>
               </a:rPr>
-              <a:t>6146</a:t>
+              <a:t>8044</a:t>
             </a:r>
           </a:p>
         </p:txBody>
@@ -9630,7 +9630,7 @@
             <a:avLst/>
           </a:prstGeom>
           <a:solidFill>
-            <a:srgbClr val="5C6679"/>
+            <a:srgbClr val="E63946"/>
           </a:solidFill>
           <a:ln>
             <a:noFill/>
@@ -9691,7 +9691,7 @@
                 <a:ea typeface="Microsoft JhengHei"/>
                 <a:cs typeface="Microsoft JhengHei"/>
               </a:rPr>
-              <a:t>其他</a:t>
+              <a:t>駭客攻擊</a:t>
             </a:r>
           </a:p>
         </p:txBody>
@@ -9726,7 +9726,7 @@
             <a:r>
               <a:rPr sz="1100" b="1">
                 <a:solidFill>
-                  <a:srgbClr val="5C6679"/>
+                  <a:srgbClr val="E63946"/>
                 </a:solidFill>
                 <a:latin typeface="Microsoft JhengHei"/>
                 <a:ea typeface="Microsoft JhengHei"/>
@@ -9743,7 +9743,7 @@
                 <a:ea typeface="Microsoft JhengHei"/>
                 <a:cs typeface="Microsoft JhengHei"/>
               </a:rPr>
-              <a:t>本公司部分資訊系統發生網路資安事件。</a:t>
+              <a:t>公司對該等報導或提供訊息之說明:(1)資訊安全防線：本公司及各轉投資事業係依不同服務型態各自營運…</a:t>
             </a:r>
           </a:p>
         </p:txBody>
@@ -9778,7 +9778,7 @@
             <a:r>
               <a:rPr sz="1100" b="1">
                 <a:solidFill>
-                  <a:srgbClr val="5C6679"/>
+                  <a:srgbClr val="E63946"/>
                 </a:solidFill>
                 <a:latin typeface="Microsoft JhengHei"/>
                 <a:ea typeface="Microsoft JhengHei"/>
@@ -9795,7 +9795,7 @@
                 <a:ea typeface="Microsoft JhengHei"/>
                 <a:cs typeface="Microsoft JhengHei"/>
               </a:rPr>
-              <a:t>本公司將持續提升網路與資訊基礎架構之安全管控，並依外部資安技術專家之建議加強防護，確保資訊安全。</a:t>
+              <a:t>(1)全面啟動應變與調查：拍付國際獲悉駭客聲稱之入侵及勒索訊息後，已立即啟動資安應變程序，會同資安專家進行全面系統檢測與…</a:t>
             </a:r>
           </a:p>
         </p:txBody>
@@ -9997,7 +9997,7 @@
             <a:avLst/>
           </a:prstGeom>
           <a:solidFill>
-            <a:srgbClr val="F4A261"/>
+            <a:srgbClr val="5C6679"/>
           </a:solidFill>
           <a:ln>
             <a:noFill/>
@@ -10058,7 +10058,7 @@
                 <a:ea typeface="Microsoft JhengHei"/>
                 <a:cs typeface="Microsoft JhengHei"/>
               </a:rPr>
-              <a:t>易發 </a:t>
+              <a:t>耕興 </a:t>
             </a:r>
             <a:r>
               <a:rPr sz="1300" b="0">
@@ -10069,7 +10069,7 @@
                 <a:ea typeface="Microsoft JhengHei"/>
                 <a:cs typeface="Microsoft JhengHei"/>
               </a:rPr>
-              <a:t>6425</a:t>
+              <a:t>6146</a:t>
             </a:r>
           </a:p>
         </p:txBody>
@@ -10089,7 +10089,7 @@
             <a:avLst/>
           </a:prstGeom>
           <a:solidFill>
-            <a:srgbClr val="F4A261"/>
+            <a:srgbClr val="5C6679"/>
           </a:solidFill>
           <a:ln>
             <a:noFill/>
@@ -10150,7 +10150,7 @@
                 <a:ea typeface="Microsoft JhengHei"/>
                 <a:cs typeface="Microsoft JhengHei"/>
               </a:rPr>
-              <a:t>勒索病毒/加密</a:t>
+              <a:t>其他</a:t>
             </a:r>
           </a:p>
         </p:txBody>
@@ -10185,7 +10185,7 @@
             <a:r>
               <a:rPr sz="1100" b="1">
                 <a:solidFill>
-                  <a:srgbClr val="F4A261"/>
+                  <a:srgbClr val="5C6679"/>
                 </a:solidFill>
                 <a:latin typeface="Microsoft JhengHei"/>
                 <a:ea typeface="Microsoft JhengHei"/>
@@ -10202,7 +10202,7 @@
                 <a:ea typeface="Microsoft JhengHei"/>
                 <a:cs typeface="Microsoft JhengHei"/>
               </a:rPr>
-              <a:t>本公司之子公司東野精機(股)公司日福精工(股)公司，發現遭不明駭客入侵主機，並將伺服器資料加密，…</a:t>
+              <a:t>本公司部分資訊系統發生網路資安事件。</a:t>
             </a:r>
           </a:p>
         </p:txBody>
@@ -10237,7 +10237,7 @@
             <a:r>
               <a:rPr sz="1100" b="1">
                 <a:solidFill>
-                  <a:srgbClr val="F4A261"/>
+                  <a:srgbClr val="5C6679"/>
                 </a:solidFill>
                 <a:latin typeface="Microsoft JhengHei"/>
                 <a:ea typeface="Microsoft JhengHei"/>
@@ -10254,7 +10254,7 @@
                 <a:ea typeface="Microsoft JhengHei"/>
                 <a:cs typeface="Microsoft JhengHei"/>
               </a:rPr>
-              <a:t>本公司之子公司東野精機(股)公司日福精工(股)公司將修復安全漏洞，持續提升網路與資訊基礎架構之安全管控，以確保資訊安全。</a:t>
+              <a:t>本公司將持續提升網路與資訊基礎架構之安全管控，並依外部資安技術專家之建議加強防護，確保資訊安全。</a:t>
             </a:r>
           </a:p>
         </p:txBody>
@@ -10381,7 +10381,7 @@
                 <a:ea typeface="Microsoft JhengHei"/>
                 <a:cs typeface="Microsoft JhengHei"/>
               </a:rPr>
-              <a:t>尼得科超眾 </a:t>
+              <a:t>易發 </a:t>
             </a:r>
             <a:r>
               <a:rPr sz="1300" b="0">
@@ -10392,7 +10392,7 @@
                 <a:ea typeface="Microsoft JhengHei"/>
                 <a:cs typeface="Microsoft JhengHei"/>
               </a:rPr>
-              <a:t>6230</a:t>
+              <a:t>6425</a:t>
             </a:r>
           </a:p>
         </p:txBody>
@@ -10525,7 +10525,7 @@
                 <a:ea typeface="Microsoft JhengHei"/>
                 <a:cs typeface="Microsoft JhengHei"/>
               </a:rPr>
-              <a:t>本公司於今日偵測到部份伺服器遭受網路勒索病毒攻擊，致使包含ERP在內之部份資訊系統無法正常運作。</a:t>
+              <a:t>本公司之子公司東野精機(股)公司日福精工(股)公司，發現遭不明駭客入侵主機，並將伺服器資料加密，…</a:t>
             </a:r>
           </a:p>
         </p:txBody>
@@ -10577,7 +10577,7 @@
                 <a:ea typeface="Microsoft JhengHei"/>
                 <a:cs typeface="Microsoft JhengHei"/>
               </a:rPr>
-              <a:t>本公司亦將視系統復原進度，適時調整生產與出貨排程。</a:t>
+              <a:t>本公司之子公司東野精機(股)公司日福精工(股)公司將修復安全漏洞，持續提升網路與資訊基礎架構之安全管控，以確保資訊安全。</a:t>
             </a:r>
           </a:p>
         </p:txBody>

--- a/資安事件因應分析.pptx
+++ b/資安事件因應分析.pptx
@@ -188,7 +188,7 @@
                   <c:v>3</c:v>
                 </c:pt>
                 <c:pt idx="1">
-                  <c:v>1</c:v>
+                  <c:v>2</c:v>
                 </c:pt>
                 <c:pt idx="2">
                   <c:v>3</c:v>
@@ -3528,7 +3528,7 @@
                 <a:ea typeface="Microsoft JhengHei"/>
                 <a:cs typeface="Microsoft JhengHei"/>
               </a:rPr>
-              <a:t>資料期間 2026-06-08 ~ 2026-07-08　｜　MOPS 重大訊息全文檢索　｜　7 家公司</a:t>
+              <a:t>資料期間 2026-06-09 ~ 2026-07-09　｜　MOPS 重大訊息全文檢索　｜　8 家公司</a:t>
             </a:r>
           </a:p>
         </p:txBody>
@@ -3745,7 +3745,7 @@
                 <a:ea typeface="Microsoft JhengHei"/>
                 <a:cs typeface="Microsoft JhengHei"/>
               </a:rPr>
-              <a:t>資料期間內 MOPS 揭露之 7 起資安相關重大訊息</a:t>
+              <a:t>資料期間內 MOPS 揭露之 8 起資安相關重大訊息</a:t>
             </a:r>
           </a:p>
         </p:txBody>
@@ -3828,7 +3828,7 @@
                 <a:ea typeface="Microsoft JhengHei"/>
                 <a:cs typeface="Microsoft JhengHei"/>
               </a:rPr>
-              <a:t>7</a:t>
+              <a:t>8</a:t>
             </a:r>
           </a:p>
         </p:txBody>
@@ -4120,7 +4120,7 @@
         </p:nvGraphicFramePr>
         <p:xfrm>
           <a:off x="548640" y="2697480"/>
-          <a:ext cx="11064240" cy="3072384"/>
+          <a:ext cx="11064240" cy="3456432"/>
         </p:xfrm>
         <a:graphic>
           <a:graphicData uri="http://schemas.openxmlformats.org/drawingml/2006/table">
@@ -5004,7 +5004,7 @@
                           <a:ea typeface="Microsoft JhengHei"/>
                           <a:cs typeface="Microsoft JhengHei"/>
                         </a:rPr>
-                        <a:t>上福</a:t>
+                        <a:t>尼得科超眾</a:t>
                       </a:r>
                     </a:p>
                   </a:txBody>
@@ -5028,7 +5028,7 @@
                           <a:ea typeface="Microsoft JhengHei"/>
                           <a:cs typeface="Microsoft JhengHei"/>
                         </a:rPr>
-                        <a:t>6128</a:t>
+                        <a:t>6230</a:t>
                       </a:r>
                     </a:p>
                   </a:txBody>
@@ -5052,13 +5052,135 @@
                           <a:ea typeface="Microsoft JhengHei"/>
                           <a:cs typeface="Microsoft JhengHei"/>
                         </a:rPr>
+                        <a:t>06/22</a:t>
+                      </a:r>
+                    </a:p>
+                  </a:txBody>
+                  <a:tcPr anchor="ctr" marL="73152" marT="9144" marB="9144">
+                    <a:solidFill>
+                      <a:srgbClr val="FFFFFF"/>
+                    </a:solidFill>
+                  </a:tcPr>
+                </a:tc>
+                <a:tc>
+                  <a:txBody>
+                    <a:bodyPr/>
+                    <a:lstStyle/>
+                    <a:p>
+                      <a:r>
+                        <a:rPr sz="1150" b="1">
+                          <a:solidFill>
+                            <a:srgbClr val="F4A261"/>
+                          </a:solidFill>
+                          <a:latin typeface="Microsoft JhengHei"/>
+                          <a:ea typeface="Microsoft JhengHei"/>
+                          <a:cs typeface="Microsoft JhengHei"/>
+                        </a:rPr>
+                        <a:t>勒索病毒/加密</a:t>
+                      </a:r>
+                    </a:p>
+                  </a:txBody>
+                  <a:tcPr anchor="ctr" marL="73152" marT="9144" marB="9144">
+                    <a:solidFill>
+                      <a:srgbClr val="FFFFFF"/>
+                    </a:solidFill>
+                  </a:tcPr>
+                </a:tc>
+                <a:tc>
+                  <a:txBody>
+                    <a:bodyPr/>
+                    <a:lstStyle/>
+                    <a:p>
+                      <a:r>
+                        <a:rPr sz="1150" b="0">
+                          <a:solidFill>
+                            <a:srgbClr val="1A2233"/>
+                          </a:solidFill>
+                          <a:latin typeface="Microsoft JhengHei"/>
+                          <a:ea typeface="Microsoft JhengHei"/>
+                          <a:cs typeface="Microsoft JhengHei"/>
+                        </a:rPr>
+                        <a:t>目前受影響之系統正陸續復原中，對公司整體營運及財務之影響程度尚在評估…</a:t>
+                      </a:r>
+                    </a:p>
+                  </a:txBody>
+                  <a:tcPr anchor="ctr" marL="73152" marT="9144" marB="9144">
+                    <a:solidFill>
+                      <a:srgbClr val="FFFFFF"/>
+                    </a:solidFill>
+                  </a:tcPr>
+                </a:tc>
+              </a:tr>
+              <a:tr h="384048">
+                <a:tc>
+                  <a:txBody>
+                    <a:bodyPr/>
+                    <a:lstStyle/>
+                    <a:p>
+                      <a:r>
+                        <a:rPr sz="1150" b="0">
+                          <a:solidFill>
+                            <a:srgbClr val="1A2233"/>
+                          </a:solidFill>
+                          <a:latin typeface="Microsoft JhengHei"/>
+                          <a:ea typeface="Microsoft JhengHei"/>
+                          <a:cs typeface="Microsoft JhengHei"/>
+                        </a:rPr>
+                        <a:t>上福</a:t>
+                      </a:r>
+                    </a:p>
+                  </a:txBody>
+                  <a:tcPr anchor="ctr" marL="73152" marT="9144" marB="9144">
+                    <a:solidFill>
+                      <a:srgbClr val="EEF2F9"/>
+                    </a:solidFill>
+                  </a:tcPr>
+                </a:tc>
+                <a:tc>
+                  <a:txBody>
+                    <a:bodyPr/>
+                    <a:lstStyle/>
+                    <a:p>
+                      <a:r>
+                        <a:rPr sz="1150" b="0">
+                          <a:solidFill>
+                            <a:srgbClr val="1A2233"/>
+                          </a:solidFill>
+                          <a:latin typeface="Microsoft JhengHei"/>
+                          <a:ea typeface="Microsoft JhengHei"/>
+                          <a:cs typeface="Microsoft JhengHei"/>
+                        </a:rPr>
+                        <a:t>6128</a:t>
+                      </a:r>
+                    </a:p>
+                  </a:txBody>
+                  <a:tcPr anchor="ctr" marL="73152" marT="9144" marB="9144">
+                    <a:solidFill>
+                      <a:srgbClr val="EEF2F9"/>
+                    </a:solidFill>
+                  </a:tcPr>
+                </a:tc>
+                <a:tc>
+                  <a:txBody>
+                    <a:bodyPr/>
+                    <a:lstStyle/>
+                    <a:p>
+                      <a:r>
+                        <a:rPr sz="1150" b="0">
+                          <a:solidFill>
+                            <a:srgbClr val="1A2233"/>
+                          </a:solidFill>
+                          <a:latin typeface="Microsoft JhengHei"/>
+                          <a:ea typeface="Microsoft JhengHei"/>
+                          <a:cs typeface="Microsoft JhengHei"/>
+                        </a:rPr>
                         <a:t>06/16</a:t>
                       </a:r>
                     </a:p>
                   </a:txBody>
                   <a:tcPr anchor="ctr" marL="73152" marT="9144" marB="9144">
                     <a:solidFill>
-                      <a:srgbClr val="FFFFFF"/>
+                      <a:srgbClr val="EEF2F9"/>
                     </a:solidFill>
                   </a:tcPr>
                 </a:tc>
@@ -5082,7 +5204,7 @@
                   </a:txBody>
                   <a:tcPr anchor="ctr" marL="73152" marT="9144" marB="9144">
                     <a:solidFill>
-                      <a:srgbClr val="FFFFFF"/>
+                      <a:srgbClr val="EEF2F9"/>
                     </a:solidFill>
                   </a:tcPr>
                 </a:tc>
@@ -5106,7 +5228,7 @@
                   </a:txBody>
                   <a:tcPr anchor="ctr" marL="73152" marT="9144" marB="9144">
                     <a:solidFill>
-                      <a:srgbClr val="FFFFFF"/>
+                      <a:srgbClr val="EEF2F9"/>
                     </a:solidFill>
                   </a:tcPr>
                 </a:tc>
@@ -5666,7 +5788,7 @@
                 <a:ea typeface="Microsoft JhengHei"/>
                 <a:cs typeface="Microsoft JhengHei"/>
               </a:rPr>
-              <a:t>1 起</a:t>
+              <a:t>2 起</a:t>
             </a:r>
           </a:p>
         </p:txBody>
@@ -5703,7 +5825,7 @@
                 <a:ea typeface="Microsoft JhengHei"/>
                 <a:cs typeface="Microsoft JhengHei"/>
               </a:rPr>
-              <a:t>易發</a:t>
+              <a:t>易發、尼得科超眾</a:t>
             </a:r>
           </a:p>
         </p:txBody>
@@ -6129,7 +6251,7 @@
         </p:nvGraphicFramePr>
         <p:xfrm>
           <a:off x="548640" y="1600200"/>
-          <a:ext cx="10789920" cy="3657600"/>
+          <a:ext cx="10789920" cy="4114800"/>
         </p:xfrm>
         <a:graphic>
           <a:graphicData uri="http://schemas.openxmlformats.org/drawingml/2006/table">
@@ -7013,7 +7135,7 @@
                           <a:ea typeface="Microsoft JhengHei"/>
                           <a:cs typeface="Microsoft JhengHei"/>
                         </a:rPr>
-                        <a:t>上福</a:t>
+                        <a:t>尼得科超眾</a:t>
                       </a:r>
                     </a:p>
                   </a:txBody>
@@ -7037,13 +7159,135 @@
                           <a:ea typeface="Microsoft JhengHei"/>
                           <a:cs typeface="Microsoft JhengHei"/>
                         </a:rPr>
+                        <a:t>6230</a:t>
+                      </a:r>
+                    </a:p>
+                  </a:txBody>
+                  <a:tcPr anchor="ctr" marL="73152" marT="9144" marB="9144">
+                    <a:solidFill>
+                      <a:srgbClr val="FFFFFF"/>
+                    </a:solidFill>
+                  </a:tcPr>
+                </a:tc>
+                <a:tc>
+                  <a:txBody>
+                    <a:bodyPr/>
+                    <a:lstStyle/>
+                    <a:p>
+                      <a:r>
+                        <a:rPr sz="1150" b="1">
+                          <a:solidFill>
+                            <a:srgbClr val="F4A261"/>
+                          </a:solidFill>
+                          <a:latin typeface="Microsoft JhengHei"/>
+                          <a:ea typeface="Microsoft JhengHei"/>
+                          <a:cs typeface="Microsoft JhengHei"/>
+                        </a:rPr>
+                        <a:t>勒索病毒/加密</a:t>
+                      </a:r>
+                    </a:p>
+                  </a:txBody>
+                  <a:tcPr anchor="ctr" marL="73152" marT="9144" marB="9144">
+                    <a:solidFill>
+                      <a:srgbClr val="FFFFFF"/>
+                    </a:solidFill>
+                  </a:tcPr>
+                </a:tc>
+                <a:tc>
+                  <a:txBody>
+                    <a:bodyPr/>
+                    <a:lstStyle/>
+                    <a:p>
+                      <a:r>
+                        <a:rPr sz="1150" b="0">
+                          <a:solidFill>
+                            <a:srgbClr val="1A2233"/>
+                          </a:solidFill>
+                          <a:latin typeface="Microsoft JhengHei"/>
+                          <a:ea typeface="Microsoft JhengHei"/>
+                          <a:cs typeface="Microsoft JhengHei"/>
+                        </a:rPr>
+                        <a:t>安侯建業聯合會計師事務所</a:t>
+                      </a:r>
+                    </a:p>
+                  </a:txBody>
+                  <a:tcPr anchor="ctr" marL="73152" marT="9144" marB="9144">
+                    <a:solidFill>
+                      <a:srgbClr val="FFFFFF"/>
+                    </a:solidFill>
+                  </a:tcPr>
+                </a:tc>
+                <a:tc>
+                  <a:txBody>
+                    <a:bodyPr/>
+                    <a:lstStyle/>
+                    <a:p>
+                      <a:r>
+                        <a:rPr sz="1150" b="0">
+                          <a:solidFill>
+                            <a:srgbClr val="1A2233"/>
+                          </a:solidFill>
+                          <a:latin typeface="Microsoft JhengHei"/>
+                          <a:ea typeface="Microsoft JhengHei"/>
+                          <a:cs typeface="Microsoft JhengHei"/>
+                        </a:rPr>
+                        <a:t>郭欣頤、張肇文</a:t>
+                      </a:r>
+                    </a:p>
+                  </a:txBody>
+                  <a:tcPr anchor="ctr" marL="73152" marT="9144" marB="9144">
+                    <a:solidFill>
+                      <a:srgbClr val="FFFFFF"/>
+                    </a:solidFill>
+                  </a:tcPr>
+                </a:tc>
+              </a:tr>
+              <a:tr h="457200">
+                <a:tc>
+                  <a:txBody>
+                    <a:bodyPr/>
+                    <a:lstStyle/>
+                    <a:p>
+                      <a:r>
+                        <a:rPr sz="1150" b="0">
+                          <a:solidFill>
+                            <a:srgbClr val="1A2233"/>
+                          </a:solidFill>
+                          <a:latin typeface="Microsoft JhengHei"/>
+                          <a:ea typeface="Microsoft JhengHei"/>
+                          <a:cs typeface="Microsoft JhengHei"/>
+                        </a:rPr>
+                        <a:t>上福</a:t>
+                      </a:r>
+                    </a:p>
+                  </a:txBody>
+                  <a:tcPr anchor="ctr" marL="73152" marT="9144" marB="9144">
+                    <a:solidFill>
+                      <a:srgbClr val="EEF2F9"/>
+                    </a:solidFill>
+                  </a:tcPr>
+                </a:tc>
+                <a:tc>
+                  <a:txBody>
+                    <a:bodyPr/>
+                    <a:lstStyle/>
+                    <a:p>
+                      <a:r>
+                        <a:rPr sz="1150" b="0">
+                          <a:solidFill>
+                            <a:srgbClr val="1A2233"/>
+                          </a:solidFill>
+                          <a:latin typeface="Microsoft JhengHei"/>
+                          <a:ea typeface="Microsoft JhengHei"/>
+                          <a:cs typeface="Microsoft JhengHei"/>
+                        </a:rPr>
                         <a:t>6128</a:t>
                       </a:r>
                     </a:p>
                   </a:txBody>
                   <a:tcPr anchor="ctr" marL="73152" marT="9144" marB="9144">
                     <a:solidFill>
-                      <a:srgbClr val="FFFFFF"/>
+                      <a:srgbClr val="EEF2F9"/>
                     </a:solidFill>
                   </a:tcPr>
                 </a:tc>
@@ -7067,7 +7311,7 @@
                   </a:txBody>
                   <a:tcPr anchor="ctr" marL="73152" marT="9144" marB="9144">
                     <a:solidFill>
-                      <a:srgbClr val="FFFFFF"/>
+                      <a:srgbClr val="EEF2F9"/>
                     </a:solidFill>
                   </a:tcPr>
                 </a:tc>
@@ -7091,7 +7335,7 @@
                   </a:txBody>
                   <a:tcPr anchor="ctr" marL="73152" marT="9144" marB="9144">
                     <a:solidFill>
-                      <a:srgbClr val="FFFFFF"/>
+                      <a:srgbClr val="EEF2F9"/>
                     </a:solidFill>
                   </a:tcPr>
                 </a:tc>
@@ -7115,7 +7359,7 @@
                   </a:txBody>
                   <a:tcPr anchor="ctr" marL="73152" marT="9144" marB="9144">
                     <a:solidFill>
-                      <a:srgbClr val="FFFFFF"/>
+                      <a:srgbClr val="EEF2F9"/>
                     </a:solidFill>
                   </a:tcPr>
                 </a:tc>
@@ -10643,7 +10887,7 @@
             <a:avLst/>
           </a:prstGeom>
           <a:solidFill>
-            <a:srgbClr val="5C6679"/>
+            <a:srgbClr val="F4A261"/>
           </a:solidFill>
           <a:ln>
             <a:noFill/>
@@ -10704,7 +10948,7 @@
                 <a:ea typeface="Microsoft JhengHei"/>
                 <a:cs typeface="Microsoft JhengHei"/>
               </a:rPr>
-              <a:t>上福 </a:t>
+              <a:t>尼得科超眾 </a:t>
             </a:r>
             <a:r>
               <a:rPr sz="1300" b="0">
@@ -10715,7 +10959,7 @@
                 <a:ea typeface="Microsoft JhengHei"/>
                 <a:cs typeface="Microsoft JhengHei"/>
               </a:rPr>
-              <a:t>6128</a:t>
+              <a:t>6230</a:t>
             </a:r>
           </a:p>
         </p:txBody>
@@ -10732,6 +10976,237 @@
             <a:ext cx="1234440" cy="347472"/>
           </a:xfrm>
           <a:prstGeom prst="roundRect">
+            <a:avLst/>
+          </a:prstGeom>
+          <a:solidFill>
+            <a:srgbClr val="F4A261"/>
+          </a:solidFill>
+          <a:ln>
+            <a:noFill/>
+          </a:ln>
+          <a:effectLst/>
+        </p:spPr>
+        <p:style>
+          <a:lnRef idx="1">
+            <a:schemeClr val="accent1"/>
+          </a:lnRef>
+          <a:fillRef idx="3">
+            <a:schemeClr val="accent1"/>
+          </a:fillRef>
+          <a:effectRef idx="2">
+            <a:schemeClr val="accent1"/>
+          </a:effectRef>
+          <a:fontRef idx="minor">
+            <a:schemeClr val="lt1"/>
+          </a:fontRef>
+        </p:style>
+        <p:txBody>
+          <a:bodyPr rtlCol="0" anchor="ctr"/>
+          <a:lstStyle/>
+          <a:p>
+            <a:pPr algn="ctr"/>
+          </a:p>
+        </p:txBody>
+      </p:sp>
+      <p:sp>
+        <p:nvSpPr>
+          <p:cNvPr id="23" name="TextBox 22"/>
+          <p:cNvSpPr txBox="1"/>
+          <p:nvPr/>
+        </p:nvSpPr>
+        <p:spPr>
+          <a:xfrm>
+            <a:off x="4526280" y="4123944"/>
+            <a:ext cx="1234440" cy="347472"/>
+          </a:xfrm>
+          <a:prstGeom prst="rect">
+            <a:avLst/>
+          </a:prstGeom>
+          <a:noFill/>
+        </p:spPr>
+        <p:txBody>
+          <a:bodyPr wrap="square" anchor="ctr" lIns="0" rIns="0" tIns="0" bIns="0">
+            <a:spAutoFit/>
+          </a:bodyPr>
+          <a:lstStyle/>
+          <a:p>
+            <a:pPr algn="ctr"/>
+            <a:r>
+              <a:rPr sz="1050" b="1">
+                <a:solidFill>
+                  <a:srgbClr val="FFFFFF"/>
+                </a:solidFill>
+                <a:latin typeface="Microsoft JhengHei"/>
+                <a:ea typeface="Microsoft JhengHei"/>
+                <a:cs typeface="Microsoft JhengHei"/>
+              </a:rPr>
+              <a:t>勒索病毒/加密</a:t>
+            </a:r>
+          </a:p>
+        </p:txBody>
+      </p:sp>
+      <p:sp>
+        <p:nvSpPr>
+          <p:cNvPr id="24" name="TextBox 23"/>
+          <p:cNvSpPr txBox="1"/>
+          <p:nvPr/>
+        </p:nvSpPr>
+        <p:spPr>
+          <a:xfrm>
+            <a:off x="777240" y="4599432"/>
+            <a:ext cx="4937760" cy="640080"/>
+          </a:xfrm>
+          <a:prstGeom prst="rect">
+            <a:avLst/>
+          </a:prstGeom>
+          <a:noFill/>
+        </p:spPr>
+        <p:txBody>
+          <a:bodyPr wrap="square" anchor="t" lIns="0" rIns="0" tIns="0" bIns="0">
+            <a:spAutoFit/>
+          </a:bodyPr>
+          <a:lstStyle/>
+          <a:p>
+            <a:pPr algn="l">
+              <a:lnSpc>
+                <a:spcPts val="1500"/>
+              </a:lnSpc>
+            </a:pPr>
+            <a:r>
+              <a:rPr sz="1100" b="1">
+                <a:solidFill>
+                  <a:srgbClr val="F4A261"/>
+                </a:solidFill>
+                <a:latin typeface="Microsoft JhengHei"/>
+                <a:ea typeface="Microsoft JhengHei"/>
+                <a:cs typeface="Microsoft JhengHei"/>
+              </a:rPr>
+              <a:t>緣由　</a:t>
+            </a:r>
+            <a:r>
+              <a:rPr sz="1100" b="0">
+                <a:solidFill>
+                  <a:srgbClr val="1A2233"/>
+                </a:solidFill>
+                <a:latin typeface="Microsoft JhengHei"/>
+                <a:ea typeface="Microsoft JhengHei"/>
+                <a:cs typeface="Microsoft JhengHei"/>
+              </a:rPr>
+              <a:t>本公司於今日偵測到部份伺服器遭受網路勒索病毒攻擊，致使包含ERP在內之部份資訊系統無法正常運作。</a:t>
+            </a:r>
+          </a:p>
+        </p:txBody>
+      </p:sp>
+      <p:sp>
+        <p:nvSpPr>
+          <p:cNvPr id="25" name="TextBox 24"/>
+          <p:cNvSpPr txBox="1"/>
+          <p:nvPr/>
+        </p:nvSpPr>
+        <p:spPr>
+          <a:xfrm>
+            <a:off x="777240" y="5257800"/>
+            <a:ext cx="4937760" cy="713232"/>
+          </a:xfrm>
+          <a:prstGeom prst="rect">
+            <a:avLst/>
+          </a:prstGeom>
+          <a:noFill/>
+        </p:spPr>
+        <p:txBody>
+          <a:bodyPr wrap="square" anchor="t" lIns="0" rIns="0" tIns="0" bIns="0">
+            <a:spAutoFit/>
+          </a:bodyPr>
+          <a:lstStyle/>
+          <a:p>
+            <a:pPr algn="l">
+              <a:lnSpc>
+                <a:spcPts val="1500"/>
+              </a:lnSpc>
+            </a:pPr>
+            <a:r>
+              <a:rPr sz="1100" b="1">
+                <a:solidFill>
+                  <a:srgbClr val="F4A261"/>
+                </a:solidFill>
+                <a:latin typeface="Microsoft JhengHei"/>
+                <a:ea typeface="Microsoft JhengHei"/>
+                <a:cs typeface="Microsoft JhengHei"/>
+              </a:rPr>
+              <a:t>因應　</a:t>
+            </a:r>
+            <a:r>
+              <a:rPr sz="1100" b="0">
+                <a:solidFill>
+                  <a:srgbClr val="1A2233"/>
+                </a:solidFill>
+                <a:latin typeface="Microsoft JhengHei"/>
+                <a:ea typeface="Microsoft JhengHei"/>
+                <a:cs typeface="Microsoft JhengHei"/>
+              </a:rPr>
+              <a:t>本公司亦將視系統復原進度，適時調整生產與出貨排程。</a:t>
+            </a:r>
+          </a:p>
+        </p:txBody>
+      </p:sp>
+      <p:sp>
+        <p:nvSpPr>
+          <p:cNvPr id="26" name="Rounded Rectangle 25"/>
+          <p:cNvSpPr/>
+          <p:nvPr/>
+        </p:nvSpPr>
+        <p:spPr>
+          <a:xfrm>
+            <a:off x="6172200" y="3886200"/>
+            <a:ext cx="5394960" cy="2148840"/>
+          </a:xfrm>
+          <a:prstGeom prst="roundRect">
+            <a:avLst/>
+          </a:prstGeom>
+          <a:solidFill>
+            <a:srgbClr val="FFFFFF"/>
+          </a:solidFill>
+          <a:ln w="12700">
+            <a:solidFill>
+              <a:srgbClr val="DDE3EE"/>
+            </a:solidFill>
+          </a:ln>
+          <a:effectLst/>
+        </p:spPr>
+        <p:style>
+          <a:lnRef idx="1">
+            <a:schemeClr val="accent1"/>
+          </a:lnRef>
+          <a:fillRef idx="3">
+            <a:schemeClr val="accent1"/>
+          </a:fillRef>
+          <a:effectRef idx="2">
+            <a:schemeClr val="accent1"/>
+          </a:effectRef>
+          <a:fontRef idx="minor">
+            <a:schemeClr val="lt1"/>
+          </a:fontRef>
+        </p:style>
+        <p:txBody>
+          <a:bodyPr rtlCol="0" anchor="ctr"/>
+          <a:lstStyle/>
+          <a:p>
+            <a:pPr algn="ctr"/>
+          </a:p>
+        </p:txBody>
+      </p:sp>
+      <p:sp>
+        <p:nvSpPr>
+          <p:cNvPr id="27" name="Rectangle 26"/>
+          <p:cNvSpPr/>
+          <p:nvPr/>
+        </p:nvSpPr>
+        <p:spPr>
+          <a:xfrm>
+            <a:off x="6172200" y="3886200"/>
+            <a:ext cx="5394960" cy="109728"/>
+          </a:xfrm>
+          <a:prstGeom prst="rect">
             <a:avLst/>
           </a:prstGeom>
           <a:solidFill>
@@ -10766,13 +11241,105 @@
       </p:sp>
       <p:sp>
         <p:nvSpPr>
-          <p:cNvPr id="23" name="TextBox 22"/>
+          <p:cNvPr id="28" name="TextBox 27"/>
           <p:cNvSpPr txBox="1"/>
           <p:nvPr/>
         </p:nvSpPr>
         <p:spPr>
           <a:xfrm>
-            <a:off x="4526280" y="4123944"/>
+            <a:off x="6400800" y="4105656"/>
+            <a:ext cx="3657600" cy="365760"/>
+          </a:xfrm>
+          <a:prstGeom prst="rect">
+            <a:avLst/>
+          </a:prstGeom>
+          <a:noFill/>
+        </p:spPr>
+        <p:txBody>
+          <a:bodyPr wrap="square" anchor="ctr" lIns="0" rIns="0" tIns="0" bIns="0">
+            <a:spAutoFit/>
+          </a:bodyPr>
+          <a:lstStyle/>
+          <a:p>
+            <a:pPr algn="l"/>
+            <a:r>
+              <a:rPr sz="1600" b="1">
+                <a:solidFill>
+                  <a:srgbClr val="1A2233"/>
+                </a:solidFill>
+                <a:latin typeface="Microsoft JhengHei"/>
+                <a:ea typeface="Microsoft JhengHei"/>
+                <a:cs typeface="Microsoft JhengHei"/>
+              </a:rPr>
+              <a:t>上福 </a:t>
+            </a:r>
+            <a:r>
+              <a:rPr sz="1300" b="0">
+                <a:solidFill>
+                  <a:srgbClr val="5C6679"/>
+                </a:solidFill>
+                <a:latin typeface="Microsoft JhengHei"/>
+                <a:ea typeface="Microsoft JhengHei"/>
+                <a:cs typeface="Microsoft JhengHei"/>
+              </a:rPr>
+              <a:t>6128</a:t>
+            </a:r>
+          </a:p>
+        </p:txBody>
+      </p:sp>
+      <p:sp>
+        <p:nvSpPr>
+          <p:cNvPr id="29" name="Rounded Rectangle 28"/>
+          <p:cNvSpPr/>
+          <p:nvPr/>
+        </p:nvSpPr>
+        <p:spPr>
+          <a:xfrm>
+            <a:off x="10149840" y="4123944"/>
+            <a:ext cx="1234440" cy="347472"/>
+          </a:xfrm>
+          <a:prstGeom prst="roundRect">
+            <a:avLst/>
+          </a:prstGeom>
+          <a:solidFill>
+            <a:srgbClr val="5C6679"/>
+          </a:solidFill>
+          <a:ln>
+            <a:noFill/>
+          </a:ln>
+          <a:effectLst/>
+        </p:spPr>
+        <p:style>
+          <a:lnRef idx="1">
+            <a:schemeClr val="accent1"/>
+          </a:lnRef>
+          <a:fillRef idx="3">
+            <a:schemeClr val="accent1"/>
+          </a:fillRef>
+          <a:effectRef idx="2">
+            <a:schemeClr val="accent1"/>
+          </a:effectRef>
+          <a:fontRef idx="minor">
+            <a:schemeClr val="lt1"/>
+          </a:fontRef>
+        </p:style>
+        <p:txBody>
+          <a:bodyPr rtlCol="0" anchor="ctr"/>
+          <a:lstStyle/>
+          <a:p>
+            <a:pPr algn="ctr"/>
+          </a:p>
+        </p:txBody>
+      </p:sp>
+      <p:sp>
+        <p:nvSpPr>
+          <p:cNvPr id="30" name="TextBox 29"/>
+          <p:cNvSpPr txBox="1"/>
+          <p:nvPr/>
+        </p:nvSpPr>
+        <p:spPr>
+          <a:xfrm>
+            <a:off x="10149840" y="4123944"/>
             <a:ext cx="1234440" cy="347472"/>
           </a:xfrm>
           <a:prstGeom prst="rect">
@@ -10803,13 +11370,13 @@
       </p:sp>
       <p:sp>
         <p:nvSpPr>
-          <p:cNvPr id="24" name="TextBox 23"/>
+          <p:cNvPr id="31" name="TextBox 30"/>
           <p:cNvSpPr txBox="1"/>
           <p:nvPr/>
         </p:nvSpPr>
         <p:spPr>
           <a:xfrm>
-            <a:off x="777240" y="4599432"/>
+            <a:off x="6400800" y="4599432"/>
             <a:ext cx="4937760" cy="640080"/>
           </a:xfrm>
           <a:prstGeom prst="rect">
@@ -10855,13 +11422,13 @@
       </p:sp>
       <p:sp>
         <p:nvSpPr>
-          <p:cNvPr id="25" name="TextBox 24"/>
+          <p:cNvPr id="32" name="TextBox 31"/>
           <p:cNvSpPr txBox="1"/>
           <p:nvPr/>
         </p:nvSpPr>
         <p:spPr>
           <a:xfrm>
-            <a:off x="777240" y="5257800"/>
+            <a:off x="6400800" y="5257800"/>
             <a:ext cx="4937760" cy="713232"/>
           </a:xfrm>
           <a:prstGeom prst="rect">

--- a/資安事件因應分析.pptx
+++ b/資安事件因應分析.pptx
@@ -3528,7 +3528,7 @@
                 <a:ea typeface="Microsoft JhengHei"/>
                 <a:cs typeface="Microsoft JhengHei"/>
               </a:rPr>
-              <a:t>資料期間 2026-06-09 ~ 2026-07-09　｜　MOPS 重大訊息全文檢索　｜　8 家公司</a:t>
+              <a:t>資料期間 2026-06-11 ~ 2026-07-11　｜　MOPS 重大訊息全文檢索　｜　8 家公司</a:t>
             </a:r>
           </a:p>
         </p:txBody>

--- a/資安事件因應分析.pptx
+++ b/資安事件因應分析.pptx
@@ -3528,7 +3528,7 @@
                 <a:ea typeface="Microsoft JhengHei"/>
                 <a:cs typeface="Microsoft JhengHei"/>
               </a:rPr>
-              <a:t>資料期間 2026-06-11 ~ 2026-07-11　｜　MOPS 重大訊息全文檢索　｜　8 家公司</a:t>
+              <a:t>資料期間 2026-06-14 ~ 2026-07-14　｜　MOPS 重大訊息全文檢索　｜　8 家公司</a:t>
             </a:r>
           </a:p>
         </p:txBody>

--- a/資安事件因應分析.pptx
+++ b/資安事件因應分析.pptx
@@ -3528,7 +3528,7 @@
                 <a:ea typeface="Microsoft JhengHei"/>
                 <a:cs typeface="Microsoft JhengHei"/>
               </a:rPr>
-              <a:t>資料期間 2026-06-14 ~ 2026-07-14　｜　MOPS 重大訊息全文檢索　｜　8 家公司</a:t>
+              <a:t>資料期間 2026-06-16 ~ 2026-07-16　｜　MOPS 重大訊息全文檢索　｜　8 家公司</a:t>
             </a:r>
           </a:p>
         </p:txBody>

--- a/資安事件因應分析.pptx
+++ b/資安事件因應分析.pptx
@@ -12,6 +12,7 @@
     <p:sldId id="260" r:id="rId11"/>
     <p:sldId id="261" r:id="rId12"/>
     <p:sldId id="262" r:id="rId13"/>
+    <p:sldId id="263" r:id="rId14"/>
   </p:sldIdLst>
   <p:sldSz cx="12191695" cy="6858000" type="screen4x3"/>
   <p:notesSz cx="6858000" cy="9144000"/>
@@ -185,7 +186,7 @@
                 <c:formatCode>General</c:formatCode>
                 <c:ptCount val="3"/>
                 <c:pt idx="0">
-                  <c:v>3</c:v>
+                  <c:v>4</c:v>
                 </c:pt>
                 <c:pt idx="1">
                   <c:v>2</c:v>
@@ -3528,7 +3529,7 @@
                 <a:ea typeface="Microsoft JhengHei"/>
                 <a:cs typeface="Microsoft JhengHei"/>
               </a:rPr>
-              <a:t>資料期間 2026-06-16 ~ 2026-07-16　｜　MOPS 重大訊息全文檢索　｜　8 家公司</a:t>
+              <a:t>資料期間 2026-06-21 ~ 2026-07-21　｜　MOPS 重大訊息全文檢索　｜　9 家公司</a:t>
             </a:r>
           </a:p>
         </p:txBody>
@@ -3745,7 +3746,7 @@
                 <a:ea typeface="Microsoft JhengHei"/>
                 <a:cs typeface="Microsoft JhengHei"/>
               </a:rPr>
-              <a:t>資料期間內 MOPS 揭露之 8 起資安相關重大訊息</a:t>
+              <a:t>資料期間內 MOPS 揭露之 9 起資安相關重大訊息</a:t>
             </a:r>
           </a:p>
         </p:txBody>
@@ -3828,7 +3829,7 @@
                 <a:ea typeface="Microsoft JhengHei"/>
                 <a:cs typeface="Microsoft JhengHei"/>
               </a:rPr>
-              <a:t>8</a:t>
+              <a:t>9</a:t>
             </a:r>
           </a:p>
         </p:txBody>
@@ -4120,7 +4121,7 @@
         </p:nvGraphicFramePr>
         <p:xfrm>
           <a:off x="548640" y="2697480"/>
-          <a:ext cx="11064240" cy="3456432"/>
+          <a:ext cx="11064240" cy="3566160"/>
         </p:xfrm>
         <a:graphic>
           <a:graphicData uri="http://schemas.openxmlformats.org/drawingml/2006/table">
@@ -4135,7 +4136,7 @@
                 <a:gridCol w="2286000"/>
                 <a:gridCol w="5120640"/>
               </a:tblGrid>
-              <a:tr h="384048">
+              <a:tr h="356616">
                 <a:tc>
                   <a:txBody>
                     <a:bodyPr/>
@@ -4257,7 +4258,251 @@
                   </a:tcPr>
                 </a:tc>
               </a:tr>
-              <a:tr h="384048">
+              <a:tr h="356616">
+                <a:tc>
+                  <a:txBody>
+                    <a:bodyPr/>
+                    <a:lstStyle/>
+                    <a:p>
+                      <a:r>
+                        <a:rPr sz="1150" b="0">
+                          <a:solidFill>
+                            <a:srgbClr val="1A2233"/>
+                          </a:solidFill>
+                          <a:latin typeface="Microsoft JhengHei"/>
+                          <a:ea typeface="Microsoft JhengHei"/>
+                          <a:cs typeface="Microsoft JhengHei"/>
+                        </a:rPr>
+                        <a:t>淳安</a:t>
+                      </a:r>
+                    </a:p>
+                  </a:txBody>
+                  <a:tcPr anchor="ctr" marL="73152" marT="9144" marB="9144">
+                    <a:solidFill>
+                      <a:srgbClr val="FFFFFF"/>
+                    </a:solidFill>
+                  </a:tcPr>
+                </a:tc>
+                <a:tc>
+                  <a:txBody>
+                    <a:bodyPr/>
+                    <a:lstStyle/>
+                    <a:p>
+                      <a:r>
+                        <a:rPr sz="1150" b="0">
+                          <a:solidFill>
+                            <a:srgbClr val="1A2233"/>
+                          </a:solidFill>
+                          <a:latin typeface="Microsoft JhengHei"/>
+                          <a:ea typeface="Microsoft JhengHei"/>
+                          <a:cs typeface="Microsoft JhengHei"/>
+                        </a:rPr>
+                        <a:t>6283</a:t>
+                      </a:r>
+                    </a:p>
+                  </a:txBody>
+                  <a:tcPr anchor="ctr" marL="73152" marT="9144" marB="9144">
+                    <a:solidFill>
+                      <a:srgbClr val="FFFFFF"/>
+                    </a:solidFill>
+                  </a:tcPr>
+                </a:tc>
+                <a:tc>
+                  <a:txBody>
+                    <a:bodyPr/>
+                    <a:lstStyle/>
+                    <a:p>
+                      <a:r>
+                        <a:rPr sz="1150" b="0">
+                          <a:solidFill>
+                            <a:srgbClr val="1A2233"/>
+                          </a:solidFill>
+                          <a:latin typeface="Microsoft JhengHei"/>
+                          <a:ea typeface="Microsoft JhengHei"/>
+                          <a:cs typeface="Microsoft JhengHei"/>
+                        </a:rPr>
+                        <a:t>07/20</a:t>
+                      </a:r>
+                    </a:p>
+                  </a:txBody>
+                  <a:tcPr anchor="ctr" marL="73152" marT="9144" marB="9144">
+                    <a:solidFill>
+                      <a:srgbClr val="FFFFFF"/>
+                    </a:solidFill>
+                  </a:tcPr>
+                </a:tc>
+                <a:tc>
+                  <a:txBody>
+                    <a:bodyPr/>
+                    <a:lstStyle/>
+                    <a:p>
+                      <a:r>
+                        <a:rPr sz="1150" b="1">
+                          <a:solidFill>
+                            <a:srgbClr val="5C6679"/>
+                          </a:solidFill>
+                          <a:latin typeface="Microsoft JhengHei"/>
+                          <a:ea typeface="Microsoft JhengHei"/>
+                          <a:cs typeface="Microsoft JhengHei"/>
+                        </a:rPr>
+                        <a:t>其他</a:t>
+                      </a:r>
+                    </a:p>
+                  </a:txBody>
+                  <a:tcPr anchor="ctr" marL="73152" marT="9144" marB="9144">
+                    <a:solidFill>
+                      <a:srgbClr val="FFFFFF"/>
+                    </a:solidFill>
+                  </a:tcPr>
+                </a:tc>
+                <a:tc>
+                  <a:txBody>
+                    <a:bodyPr/>
+                    <a:lstStyle/>
+                    <a:p>
+                      <a:r>
+                        <a:rPr sz="1150" b="0">
+                          <a:solidFill>
+                            <a:srgbClr val="1A2233"/>
+                          </a:solidFill>
+                          <a:latin typeface="Microsoft JhengHei"/>
+                          <a:ea typeface="Microsoft JhengHei"/>
+                          <a:cs typeface="Microsoft JhengHei"/>
+                        </a:rPr>
+                        <a:t>經評估對公司營運無重大影響。</a:t>
+                      </a:r>
+                    </a:p>
+                  </a:txBody>
+                  <a:tcPr anchor="ctr" marL="73152" marT="9144" marB="9144">
+                    <a:solidFill>
+                      <a:srgbClr val="FFFFFF"/>
+                    </a:solidFill>
+                  </a:tcPr>
+                </a:tc>
+              </a:tr>
+              <a:tr h="356616">
+                <a:tc>
+                  <a:txBody>
+                    <a:bodyPr/>
+                    <a:lstStyle/>
+                    <a:p>
+                      <a:r>
+                        <a:rPr sz="1150" b="0">
+                          <a:solidFill>
+                            <a:srgbClr val="1A2233"/>
+                          </a:solidFill>
+                          <a:latin typeface="Microsoft JhengHei"/>
+                          <a:ea typeface="Microsoft JhengHei"/>
+                          <a:cs typeface="Microsoft JhengHei"/>
+                        </a:rPr>
+                        <a:t>松上</a:t>
+                      </a:r>
+                    </a:p>
+                  </a:txBody>
+                  <a:tcPr anchor="ctr" marL="73152" marT="9144" marB="9144">
+                    <a:solidFill>
+                      <a:srgbClr val="EEF2F9"/>
+                    </a:solidFill>
+                  </a:tcPr>
+                </a:tc>
+                <a:tc>
+                  <a:txBody>
+                    <a:bodyPr/>
+                    <a:lstStyle/>
+                    <a:p>
+                      <a:r>
+                        <a:rPr sz="1150" b="0">
+                          <a:solidFill>
+                            <a:srgbClr val="1A2233"/>
+                          </a:solidFill>
+                          <a:latin typeface="Microsoft JhengHei"/>
+                          <a:ea typeface="Microsoft JhengHei"/>
+                          <a:cs typeface="Microsoft JhengHei"/>
+                        </a:rPr>
+                        <a:t>6156</a:t>
+                      </a:r>
+                    </a:p>
+                  </a:txBody>
+                  <a:tcPr anchor="ctr" marL="73152" marT="9144" marB="9144">
+                    <a:solidFill>
+                      <a:srgbClr val="EEF2F9"/>
+                    </a:solidFill>
+                  </a:tcPr>
+                </a:tc>
+                <a:tc>
+                  <a:txBody>
+                    <a:bodyPr/>
+                    <a:lstStyle/>
+                    <a:p>
+                      <a:r>
+                        <a:rPr sz="1150" b="0">
+                          <a:solidFill>
+                            <a:srgbClr val="1A2233"/>
+                          </a:solidFill>
+                          <a:latin typeface="Microsoft JhengHei"/>
+                          <a:ea typeface="Microsoft JhengHei"/>
+                          <a:cs typeface="Microsoft JhengHei"/>
+                        </a:rPr>
+                        <a:t>07/17</a:t>
+                      </a:r>
+                    </a:p>
+                  </a:txBody>
+                  <a:tcPr anchor="ctr" marL="73152" marT="9144" marB="9144">
+                    <a:solidFill>
+                      <a:srgbClr val="EEF2F9"/>
+                    </a:solidFill>
+                  </a:tcPr>
+                </a:tc>
+                <a:tc>
+                  <a:txBody>
+                    <a:bodyPr/>
+                    <a:lstStyle/>
+                    <a:p>
+                      <a:r>
+                        <a:rPr sz="1150" b="1">
+                          <a:solidFill>
+                            <a:srgbClr val="E63946"/>
+                          </a:solidFill>
+                          <a:latin typeface="Microsoft JhengHei"/>
+                          <a:ea typeface="Microsoft JhengHei"/>
+                          <a:cs typeface="Microsoft JhengHei"/>
+                        </a:rPr>
+                        <a:t>駭客攻擊</a:t>
+                      </a:r>
+                    </a:p>
+                  </a:txBody>
+                  <a:tcPr anchor="ctr" marL="73152" marT="9144" marB="9144">
+                    <a:solidFill>
+                      <a:srgbClr val="EEF2F9"/>
+                    </a:solidFill>
+                  </a:tcPr>
+                </a:tc>
+                <a:tc>
+                  <a:txBody>
+                    <a:bodyPr/>
+                    <a:lstStyle/>
+                    <a:p>
+                      <a:r>
+                        <a:rPr sz="1150" b="0">
+                          <a:solidFill>
+                            <a:srgbClr val="1A2233"/>
+                          </a:solidFill>
+                          <a:latin typeface="Microsoft JhengHei"/>
+                          <a:ea typeface="Microsoft JhengHei"/>
+                          <a:cs typeface="Microsoft JhengHei"/>
+                        </a:rPr>
+                        <a:t>目前評估對公司營運無重大影響。</a:t>
+                      </a:r>
+                    </a:p>
+                  </a:txBody>
+                  <a:tcPr anchor="ctr" marL="73152" marT="9144" marB="9144">
+                    <a:solidFill>
+                      <a:srgbClr val="EEF2F9"/>
+                    </a:solidFill>
+                  </a:tcPr>
+                </a:tc>
+              </a:tr>
+              <a:tr h="356616">
                 <a:tc>
                   <a:txBody>
                     <a:bodyPr/>
@@ -4379,7 +4624,7 @@
                   </a:tcPr>
                 </a:tc>
               </a:tr>
-              <a:tr h="384048">
+              <a:tr h="356616">
                 <a:tc>
                   <a:txBody>
                     <a:bodyPr/>
@@ -4501,7 +4746,7 @@
                   </a:tcPr>
                 </a:tc>
               </a:tr>
-              <a:tr h="384048">
+              <a:tr h="356616">
                 <a:tc>
                   <a:txBody>
                     <a:bodyPr/>
@@ -4623,7 +4868,7 @@
                   </a:tcPr>
                 </a:tc>
               </a:tr>
-              <a:tr h="384048">
+              <a:tr h="356616">
                 <a:tc>
                   <a:txBody>
                     <a:bodyPr/>
@@ -4745,7 +4990,7 @@
                   </a:tcPr>
                 </a:tc>
               </a:tr>
-              <a:tr h="384048">
+              <a:tr h="356616">
                 <a:tc>
                   <a:txBody>
                     <a:bodyPr/>
@@ -4867,7 +5112,7 @@
                   </a:tcPr>
                 </a:tc>
               </a:tr>
-              <a:tr h="384048">
+              <a:tr h="356616">
                 <a:tc>
                   <a:txBody>
                     <a:bodyPr/>
@@ -4989,7 +5234,7 @@
                   </a:tcPr>
                 </a:tc>
               </a:tr>
-              <a:tr h="384048">
+              <a:tr h="356616">
                 <a:tc>
                   <a:txBody>
                     <a:bodyPr/>
@@ -5111,128 +5356,6 @@
                   </a:tcPr>
                 </a:tc>
               </a:tr>
-              <a:tr h="384048">
-                <a:tc>
-                  <a:txBody>
-                    <a:bodyPr/>
-                    <a:lstStyle/>
-                    <a:p>
-                      <a:r>
-                        <a:rPr sz="1150" b="0">
-                          <a:solidFill>
-                            <a:srgbClr val="1A2233"/>
-                          </a:solidFill>
-                          <a:latin typeface="Microsoft JhengHei"/>
-                          <a:ea typeface="Microsoft JhengHei"/>
-                          <a:cs typeface="Microsoft JhengHei"/>
-                        </a:rPr>
-                        <a:t>上福</a:t>
-                      </a:r>
-                    </a:p>
-                  </a:txBody>
-                  <a:tcPr anchor="ctr" marL="73152" marT="9144" marB="9144">
-                    <a:solidFill>
-                      <a:srgbClr val="EEF2F9"/>
-                    </a:solidFill>
-                  </a:tcPr>
-                </a:tc>
-                <a:tc>
-                  <a:txBody>
-                    <a:bodyPr/>
-                    <a:lstStyle/>
-                    <a:p>
-                      <a:r>
-                        <a:rPr sz="1150" b="0">
-                          <a:solidFill>
-                            <a:srgbClr val="1A2233"/>
-                          </a:solidFill>
-                          <a:latin typeface="Microsoft JhengHei"/>
-                          <a:ea typeface="Microsoft JhengHei"/>
-                          <a:cs typeface="Microsoft JhengHei"/>
-                        </a:rPr>
-                        <a:t>6128</a:t>
-                      </a:r>
-                    </a:p>
-                  </a:txBody>
-                  <a:tcPr anchor="ctr" marL="73152" marT="9144" marB="9144">
-                    <a:solidFill>
-                      <a:srgbClr val="EEF2F9"/>
-                    </a:solidFill>
-                  </a:tcPr>
-                </a:tc>
-                <a:tc>
-                  <a:txBody>
-                    <a:bodyPr/>
-                    <a:lstStyle/>
-                    <a:p>
-                      <a:r>
-                        <a:rPr sz="1150" b="0">
-                          <a:solidFill>
-                            <a:srgbClr val="1A2233"/>
-                          </a:solidFill>
-                          <a:latin typeface="Microsoft JhengHei"/>
-                          <a:ea typeface="Microsoft JhengHei"/>
-                          <a:cs typeface="Microsoft JhengHei"/>
-                        </a:rPr>
-                        <a:t>06/16</a:t>
-                      </a:r>
-                    </a:p>
-                  </a:txBody>
-                  <a:tcPr anchor="ctr" marL="73152" marT="9144" marB="9144">
-                    <a:solidFill>
-                      <a:srgbClr val="EEF2F9"/>
-                    </a:solidFill>
-                  </a:tcPr>
-                </a:tc>
-                <a:tc>
-                  <a:txBody>
-                    <a:bodyPr/>
-                    <a:lstStyle/>
-                    <a:p>
-                      <a:r>
-                        <a:rPr sz="1150" b="1">
-                          <a:solidFill>
-                            <a:srgbClr val="5C6679"/>
-                          </a:solidFill>
-                          <a:latin typeface="Microsoft JhengHei"/>
-                          <a:ea typeface="Microsoft JhengHei"/>
-                          <a:cs typeface="Microsoft JhengHei"/>
-                        </a:rPr>
-                        <a:t>其他</a:t>
-                      </a:r>
-                    </a:p>
-                  </a:txBody>
-                  <a:tcPr anchor="ctr" marL="73152" marT="9144" marB="9144">
-                    <a:solidFill>
-                      <a:srgbClr val="EEF2F9"/>
-                    </a:solidFill>
-                  </a:tcPr>
-                </a:tc>
-                <a:tc>
-                  <a:txBody>
-                    <a:bodyPr/>
-                    <a:lstStyle/>
-                    <a:p>
-                      <a:r>
-                        <a:rPr sz="1150" b="0">
-                          <a:solidFill>
-                            <a:srgbClr val="1A2233"/>
-                          </a:solidFill>
-                          <a:latin typeface="Microsoft JhengHei"/>
-                          <a:ea typeface="Microsoft JhengHei"/>
-                          <a:cs typeface="Microsoft JhengHei"/>
-                        </a:rPr>
-                        <a:t>目前評估該事件對公司營運造成暫停出貨的影響，現階段出貨已陸續恢復中。</a:t>
-                      </a:r>
-                    </a:p>
-                  </a:txBody>
-                  <a:tcPr anchor="ctr" marL="73152" marT="9144" marB="9144">
-                    <a:solidFill>
-                      <a:srgbClr val="EEF2F9"/>
-                    </a:solidFill>
-                  </a:tcPr>
-                </a:tc>
-              </a:tr>
             </a:tbl>
           </a:graphicData>
         </a:graphic>
@@ -5550,7 +5673,7 @@
                 <a:ea typeface="Microsoft JhengHei"/>
                 <a:cs typeface="Microsoft JhengHei"/>
               </a:rPr>
-              <a:t>3 起</a:t>
+              <a:t>4 起</a:t>
             </a:r>
           </a:p>
         </p:txBody>
@@ -5587,7 +5710,7 @@
                 <a:ea typeface="Microsoft JhengHei"/>
                 <a:cs typeface="Microsoft JhengHei"/>
               </a:rPr>
-              <a:t>優盛、麗清、網家</a:t>
+              <a:t>松上、優盛、麗清、網家</a:t>
             </a:r>
           </a:p>
         </p:txBody>
@@ -6063,7 +6186,7 @@
                 <a:ea typeface="Microsoft JhengHei"/>
                 <a:cs typeface="Microsoft JhengHei"/>
               </a:rPr>
-              <a:t>GOGOLOOK、耕興、上福</a:t>
+              <a:t>淳安、GOGOLOOK、耕興</a:t>
             </a:r>
           </a:p>
         </p:txBody>
@@ -6251,7 +6374,7 @@
         </p:nvGraphicFramePr>
         <p:xfrm>
           <a:off x="548640" y="1600200"/>
-          <a:ext cx="10789920" cy="4114800"/>
+          <a:ext cx="10789920" cy="4480560"/>
         </p:xfrm>
         <a:graphic>
           <a:graphicData uri="http://schemas.openxmlformats.org/drawingml/2006/table">
@@ -6266,7 +6389,7 @@
                 <a:gridCol w="3383280"/>
                 <a:gridCol w="2606040"/>
               </a:tblGrid>
-              <a:tr h="457200">
+              <a:tr h="448056">
                 <a:tc>
                   <a:txBody>
                     <a:bodyPr/>
@@ -6388,7 +6511,251 @@
                   </a:tcPr>
                 </a:tc>
               </a:tr>
-              <a:tr h="457200">
+              <a:tr h="448056">
+                <a:tc>
+                  <a:txBody>
+                    <a:bodyPr/>
+                    <a:lstStyle/>
+                    <a:p>
+                      <a:r>
+                        <a:rPr sz="1150" b="0">
+                          <a:solidFill>
+                            <a:srgbClr val="1A2233"/>
+                          </a:solidFill>
+                          <a:latin typeface="Microsoft JhengHei"/>
+                          <a:ea typeface="Microsoft JhengHei"/>
+                          <a:cs typeface="Microsoft JhengHei"/>
+                        </a:rPr>
+                        <a:t>淳安</a:t>
+                      </a:r>
+                    </a:p>
+                  </a:txBody>
+                  <a:tcPr anchor="ctr" marL="73152" marT="9144" marB="9144">
+                    <a:solidFill>
+                      <a:srgbClr val="FFFFFF"/>
+                    </a:solidFill>
+                  </a:tcPr>
+                </a:tc>
+                <a:tc>
+                  <a:txBody>
+                    <a:bodyPr/>
+                    <a:lstStyle/>
+                    <a:p>
+                      <a:r>
+                        <a:rPr sz="1150" b="0">
+                          <a:solidFill>
+                            <a:srgbClr val="1A2233"/>
+                          </a:solidFill>
+                          <a:latin typeface="Microsoft JhengHei"/>
+                          <a:ea typeface="Microsoft JhengHei"/>
+                          <a:cs typeface="Microsoft JhengHei"/>
+                        </a:rPr>
+                        <a:t>6283</a:t>
+                      </a:r>
+                    </a:p>
+                  </a:txBody>
+                  <a:tcPr anchor="ctr" marL="73152" marT="9144" marB="9144">
+                    <a:solidFill>
+                      <a:srgbClr val="FFFFFF"/>
+                    </a:solidFill>
+                  </a:tcPr>
+                </a:tc>
+                <a:tc>
+                  <a:txBody>
+                    <a:bodyPr/>
+                    <a:lstStyle/>
+                    <a:p>
+                      <a:r>
+                        <a:rPr sz="1150" b="1">
+                          <a:solidFill>
+                            <a:srgbClr val="5C6679"/>
+                          </a:solidFill>
+                          <a:latin typeface="Microsoft JhengHei"/>
+                          <a:ea typeface="Microsoft JhengHei"/>
+                          <a:cs typeface="Microsoft JhengHei"/>
+                        </a:rPr>
+                        <a:t>其他</a:t>
+                      </a:r>
+                    </a:p>
+                  </a:txBody>
+                  <a:tcPr anchor="ctr" marL="73152" marT="9144" marB="9144">
+                    <a:solidFill>
+                      <a:srgbClr val="FFFFFF"/>
+                    </a:solidFill>
+                  </a:tcPr>
+                </a:tc>
+                <a:tc>
+                  <a:txBody>
+                    <a:bodyPr/>
+                    <a:lstStyle/>
+                    <a:p>
+                      <a:r>
+                        <a:rPr sz="1150" b="0">
+                          <a:solidFill>
+                            <a:srgbClr val="1A2233"/>
+                          </a:solidFill>
+                          <a:latin typeface="Microsoft JhengHei"/>
+                          <a:ea typeface="Microsoft JhengHei"/>
+                          <a:cs typeface="Microsoft JhengHei"/>
+                        </a:rPr>
+                        <a:t>資誠聯合會計師事務所</a:t>
+                      </a:r>
+                    </a:p>
+                  </a:txBody>
+                  <a:tcPr anchor="ctr" marL="73152" marT="9144" marB="9144">
+                    <a:solidFill>
+                      <a:srgbClr val="FFFFFF"/>
+                    </a:solidFill>
+                  </a:tcPr>
+                </a:tc>
+                <a:tc>
+                  <a:txBody>
+                    <a:bodyPr/>
+                    <a:lstStyle/>
+                    <a:p>
+                      <a:r>
+                        <a:rPr sz="1150" b="0">
+                          <a:solidFill>
+                            <a:srgbClr val="1A2233"/>
+                          </a:solidFill>
+                          <a:latin typeface="Microsoft JhengHei"/>
+                          <a:ea typeface="Microsoft JhengHei"/>
+                          <a:cs typeface="Microsoft JhengHei"/>
+                        </a:rPr>
+                        <a:t>林永智、廖福銘</a:t>
+                      </a:r>
+                    </a:p>
+                  </a:txBody>
+                  <a:tcPr anchor="ctr" marL="73152" marT="9144" marB="9144">
+                    <a:solidFill>
+                      <a:srgbClr val="FFFFFF"/>
+                    </a:solidFill>
+                  </a:tcPr>
+                </a:tc>
+              </a:tr>
+              <a:tr h="448056">
+                <a:tc>
+                  <a:txBody>
+                    <a:bodyPr/>
+                    <a:lstStyle/>
+                    <a:p>
+                      <a:r>
+                        <a:rPr sz="1150" b="0">
+                          <a:solidFill>
+                            <a:srgbClr val="1A2233"/>
+                          </a:solidFill>
+                          <a:latin typeface="Microsoft JhengHei"/>
+                          <a:ea typeface="Microsoft JhengHei"/>
+                          <a:cs typeface="Microsoft JhengHei"/>
+                        </a:rPr>
+                        <a:t>松上</a:t>
+                      </a:r>
+                    </a:p>
+                  </a:txBody>
+                  <a:tcPr anchor="ctr" marL="73152" marT="9144" marB="9144">
+                    <a:solidFill>
+                      <a:srgbClr val="EEF2F9"/>
+                    </a:solidFill>
+                  </a:tcPr>
+                </a:tc>
+                <a:tc>
+                  <a:txBody>
+                    <a:bodyPr/>
+                    <a:lstStyle/>
+                    <a:p>
+                      <a:r>
+                        <a:rPr sz="1150" b="0">
+                          <a:solidFill>
+                            <a:srgbClr val="1A2233"/>
+                          </a:solidFill>
+                          <a:latin typeface="Microsoft JhengHei"/>
+                          <a:ea typeface="Microsoft JhengHei"/>
+                          <a:cs typeface="Microsoft JhengHei"/>
+                        </a:rPr>
+                        <a:t>6156</a:t>
+                      </a:r>
+                    </a:p>
+                  </a:txBody>
+                  <a:tcPr anchor="ctr" marL="73152" marT="9144" marB="9144">
+                    <a:solidFill>
+                      <a:srgbClr val="EEF2F9"/>
+                    </a:solidFill>
+                  </a:tcPr>
+                </a:tc>
+                <a:tc>
+                  <a:txBody>
+                    <a:bodyPr/>
+                    <a:lstStyle/>
+                    <a:p>
+                      <a:r>
+                        <a:rPr sz="1150" b="1">
+                          <a:solidFill>
+                            <a:srgbClr val="E63946"/>
+                          </a:solidFill>
+                          <a:latin typeface="Microsoft JhengHei"/>
+                          <a:ea typeface="Microsoft JhengHei"/>
+                          <a:cs typeface="Microsoft JhengHei"/>
+                        </a:rPr>
+                        <a:t>駭客攻擊</a:t>
+                      </a:r>
+                    </a:p>
+                  </a:txBody>
+                  <a:tcPr anchor="ctr" marL="73152" marT="9144" marB="9144">
+                    <a:solidFill>
+                      <a:srgbClr val="EEF2F9"/>
+                    </a:solidFill>
+                  </a:tcPr>
+                </a:tc>
+                <a:tc>
+                  <a:txBody>
+                    <a:bodyPr/>
+                    <a:lstStyle/>
+                    <a:p>
+                      <a:r>
+                        <a:rPr sz="1150" b="0">
+                          <a:solidFill>
+                            <a:srgbClr val="1A2233"/>
+                          </a:solidFill>
+                          <a:latin typeface="Microsoft JhengHei"/>
+                          <a:ea typeface="Microsoft JhengHei"/>
+                          <a:cs typeface="Microsoft JhengHei"/>
+                        </a:rPr>
+                        <a:t>安永聯合會計師事務所</a:t>
+                      </a:r>
+                    </a:p>
+                  </a:txBody>
+                  <a:tcPr anchor="ctr" marL="73152" marT="9144" marB="9144">
+                    <a:solidFill>
+                      <a:srgbClr val="EEF2F9"/>
+                    </a:solidFill>
+                  </a:tcPr>
+                </a:tc>
+                <a:tc>
+                  <a:txBody>
+                    <a:bodyPr/>
+                    <a:lstStyle/>
+                    <a:p>
+                      <a:r>
+                        <a:rPr sz="1150" b="0">
+                          <a:solidFill>
+                            <a:srgbClr val="1A2233"/>
+                          </a:solidFill>
+                          <a:latin typeface="Microsoft JhengHei"/>
+                          <a:ea typeface="Microsoft JhengHei"/>
+                          <a:cs typeface="Microsoft JhengHei"/>
+                        </a:rPr>
+                        <a:t>羅筱靖、陳國帥</a:t>
+                      </a:r>
+                    </a:p>
+                  </a:txBody>
+                  <a:tcPr anchor="ctr" marL="73152" marT="9144" marB="9144">
+                    <a:solidFill>
+                      <a:srgbClr val="EEF2F9"/>
+                    </a:solidFill>
+                  </a:tcPr>
+                </a:tc>
+              </a:tr>
+              <a:tr h="448056">
                 <a:tc>
                   <a:txBody>
                     <a:bodyPr/>
@@ -6510,7 +6877,7 @@
                   </a:tcPr>
                 </a:tc>
               </a:tr>
-              <a:tr h="457200">
+              <a:tr h="448056">
                 <a:tc>
                   <a:txBody>
                     <a:bodyPr/>
@@ -6632,7 +6999,7 @@
                   </a:tcPr>
                 </a:tc>
               </a:tr>
-              <a:tr h="457200">
+              <a:tr h="448056">
                 <a:tc>
                   <a:txBody>
                     <a:bodyPr/>
@@ -6754,7 +7121,7 @@
                   </a:tcPr>
                 </a:tc>
               </a:tr>
-              <a:tr h="457200">
+              <a:tr h="448056">
                 <a:tc>
                   <a:txBody>
                     <a:bodyPr/>
@@ -6876,7 +7243,7 @@
                   </a:tcPr>
                 </a:tc>
               </a:tr>
-              <a:tr h="457200">
+              <a:tr h="448056">
                 <a:tc>
                   <a:txBody>
                     <a:bodyPr/>
@@ -6998,7 +7365,7 @@
                   </a:tcPr>
                 </a:tc>
               </a:tr>
-              <a:tr h="457200">
+              <a:tr h="448056">
                 <a:tc>
                   <a:txBody>
                     <a:bodyPr/>
@@ -7120,7 +7487,7 @@
                   </a:tcPr>
                 </a:tc>
               </a:tr>
-              <a:tr h="457200">
+              <a:tr h="448056">
                 <a:tc>
                   <a:txBody>
                     <a:bodyPr/>
@@ -7242,128 +7609,6 @@
                   </a:tcPr>
                 </a:tc>
               </a:tr>
-              <a:tr h="457200">
-                <a:tc>
-                  <a:txBody>
-                    <a:bodyPr/>
-                    <a:lstStyle/>
-                    <a:p>
-                      <a:r>
-                        <a:rPr sz="1150" b="0">
-                          <a:solidFill>
-                            <a:srgbClr val="1A2233"/>
-                          </a:solidFill>
-                          <a:latin typeface="Microsoft JhengHei"/>
-                          <a:ea typeface="Microsoft JhengHei"/>
-                          <a:cs typeface="Microsoft JhengHei"/>
-                        </a:rPr>
-                        <a:t>上福</a:t>
-                      </a:r>
-                    </a:p>
-                  </a:txBody>
-                  <a:tcPr anchor="ctr" marL="73152" marT="9144" marB="9144">
-                    <a:solidFill>
-                      <a:srgbClr val="EEF2F9"/>
-                    </a:solidFill>
-                  </a:tcPr>
-                </a:tc>
-                <a:tc>
-                  <a:txBody>
-                    <a:bodyPr/>
-                    <a:lstStyle/>
-                    <a:p>
-                      <a:r>
-                        <a:rPr sz="1150" b="0">
-                          <a:solidFill>
-                            <a:srgbClr val="1A2233"/>
-                          </a:solidFill>
-                          <a:latin typeface="Microsoft JhengHei"/>
-                          <a:ea typeface="Microsoft JhengHei"/>
-                          <a:cs typeface="Microsoft JhengHei"/>
-                        </a:rPr>
-                        <a:t>6128</a:t>
-                      </a:r>
-                    </a:p>
-                  </a:txBody>
-                  <a:tcPr anchor="ctr" marL="73152" marT="9144" marB="9144">
-                    <a:solidFill>
-                      <a:srgbClr val="EEF2F9"/>
-                    </a:solidFill>
-                  </a:tcPr>
-                </a:tc>
-                <a:tc>
-                  <a:txBody>
-                    <a:bodyPr/>
-                    <a:lstStyle/>
-                    <a:p>
-                      <a:r>
-                        <a:rPr sz="1150" b="1">
-                          <a:solidFill>
-                            <a:srgbClr val="5C6679"/>
-                          </a:solidFill>
-                          <a:latin typeface="Microsoft JhengHei"/>
-                          <a:ea typeface="Microsoft JhengHei"/>
-                          <a:cs typeface="Microsoft JhengHei"/>
-                        </a:rPr>
-                        <a:t>其他</a:t>
-                      </a:r>
-                    </a:p>
-                  </a:txBody>
-                  <a:tcPr anchor="ctr" marL="73152" marT="9144" marB="9144">
-                    <a:solidFill>
-                      <a:srgbClr val="EEF2F9"/>
-                    </a:solidFill>
-                  </a:tcPr>
-                </a:tc>
-                <a:tc>
-                  <a:txBody>
-                    <a:bodyPr/>
-                    <a:lstStyle/>
-                    <a:p>
-                      <a:r>
-                        <a:rPr sz="1150" b="0">
-                          <a:solidFill>
-                            <a:srgbClr val="1A2233"/>
-                          </a:solidFill>
-                          <a:latin typeface="Microsoft JhengHei"/>
-                          <a:ea typeface="Microsoft JhengHei"/>
-                          <a:cs typeface="Microsoft JhengHei"/>
-                        </a:rPr>
-                        <a:t>安永聯合會計師事務所</a:t>
-                      </a:r>
-                    </a:p>
-                  </a:txBody>
-                  <a:tcPr anchor="ctr" marL="73152" marT="9144" marB="9144">
-                    <a:solidFill>
-                      <a:srgbClr val="EEF2F9"/>
-                    </a:solidFill>
-                  </a:tcPr>
-                </a:tc>
-                <a:tc>
-                  <a:txBody>
-                    <a:bodyPr/>
-                    <a:lstStyle/>
-                    <a:p>
-                      <a:r>
-                        <a:rPr sz="1150" b="0">
-                          <a:solidFill>
-                            <a:srgbClr val="1A2233"/>
-                          </a:solidFill>
-                          <a:latin typeface="Microsoft JhengHei"/>
-                          <a:ea typeface="Microsoft JhengHei"/>
-                          <a:cs typeface="Microsoft JhengHei"/>
-                        </a:rPr>
-                        <a:t>黃宇廷、賴書晨</a:t>
-                      </a:r>
-                    </a:p>
-                  </a:txBody>
-                  <a:tcPr anchor="ctr" marL="73152" marT="9144" marB="9144">
-                    <a:solidFill>
-                      <a:srgbClr val="EEF2F9"/>
-                    </a:solidFill>
-                  </a:tcPr>
-                </a:tc>
-              </a:tr>
             </a:tbl>
           </a:graphicData>
         </a:graphic>
@@ -8813,7 +9058,7 @@
             <a:avLst/>
           </a:prstGeom>
           <a:solidFill>
-            <a:srgbClr val="E63946"/>
+            <a:srgbClr val="5C6679"/>
           </a:solidFill>
           <a:ln>
             <a:noFill/>
@@ -8874,7 +9119,7 @@
                 <a:ea typeface="Microsoft JhengHei"/>
                 <a:cs typeface="Microsoft JhengHei"/>
               </a:rPr>
-              <a:t>優盛 </a:t>
+              <a:t>淳安 </a:t>
             </a:r>
             <a:r>
               <a:rPr sz="1300" b="0">
@@ -8885,7 +9130,7 @@
                 <a:ea typeface="Microsoft JhengHei"/>
                 <a:cs typeface="Microsoft JhengHei"/>
               </a:rPr>
-              <a:t>4121</a:t>
+              <a:t>6283</a:t>
             </a:r>
           </a:p>
         </p:txBody>
@@ -8905,7 +9150,7 @@
             <a:avLst/>
           </a:prstGeom>
           <a:solidFill>
-            <a:srgbClr val="E63946"/>
+            <a:srgbClr val="5C6679"/>
           </a:solidFill>
           <a:ln>
             <a:noFill/>
@@ -8966,7 +9211,7 @@
                 <a:ea typeface="Microsoft JhengHei"/>
                 <a:cs typeface="Microsoft JhengHei"/>
               </a:rPr>
-              <a:t>駭客攻擊</a:t>
+              <a:t>其他</a:t>
             </a:r>
           </a:p>
         </p:txBody>
@@ -9001,7 +9246,7 @@
             <a:r>
               <a:rPr sz="1100" b="1">
                 <a:solidFill>
-                  <a:srgbClr val="E63946"/>
+                  <a:srgbClr val="5C6679"/>
                 </a:solidFill>
                 <a:latin typeface="Microsoft JhengHei"/>
                 <a:ea typeface="Microsoft JhengHei"/>
@@ -9018,7 +9263,7 @@
                 <a:ea typeface="Microsoft JhengHei"/>
                 <a:cs typeface="Microsoft JhengHei"/>
               </a:rPr>
-              <a:t>本公司之官網於今天下午遭受網路駭客攻擊</a:t>
+              <a:t>本公司網路資安事件說明</a:t>
             </a:r>
           </a:p>
         </p:txBody>
@@ -9053,7 +9298,7 @@
             <a:r>
               <a:rPr sz="1100" b="1">
                 <a:solidFill>
-                  <a:srgbClr val="E63946"/>
+                  <a:srgbClr val="5C6679"/>
                 </a:solidFill>
                 <a:latin typeface="Microsoft JhengHei"/>
                 <a:ea typeface="Microsoft JhengHei"/>
@@ -9070,7 +9315,7 @@
                 <a:ea typeface="Microsoft JhengHei"/>
                 <a:cs typeface="Microsoft JhengHei"/>
               </a:rPr>
-              <a:t>本公司後續將持續提升網路與資訊基礎架構之安全管控以確保資訊安全。</a:t>
+              <a:t>本公司後續將持續提升網路與資訊基礎架構之安全管控，以確保資訊安全。</a:t>
             </a:r>
           </a:p>
         </p:txBody>
@@ -9197,7 +9442,7 @@
                 <a:ea typeface="Microsoft JhengHei"/>
                 <a:cs typeface="Microsoft JhengHei"/>
               </a:rPr>
-              <a:t>麗清 </a:t>
+              <a:t>松上 </a:t>
             </a:r>
             <a:r>
               <a:rPr sz="1300" b="0">
@@ -9208,7 +9453,7 @@
                 <a:ea typeface="Microsoft JhengHei"/>
                 <a:cs typeface="Microsoft JhengHei"/>
               </a:rPr>
-              <a:t>3346</a:t>
+              <a:t>6156</a:t>
             </a:r>
           </a:p>
         </p:txBody>
@@ -9341,7 +9586,7 @@
                 <a:ea typeface="Microsoft JhengHei"/>
                 <a:cs typeface="Microsoft JhengHei"/>
               </a:rPr>
-              <a:t>本公司部份資訊系統遭受駭客網路攻擊。</a:t>
+              <a:t>本公司使用之部分資訊系統遭受駭客網路攻擊。</a:t>
             </a:r>
           </a:p>
         </p:txBody>
@@ -9393,7 +9638,7 @@
                 <a:ea typeface="Microsoft JhengHei"/>
                 <a:cs typeface="Microsoft JhengHei"/>
               </a:rPr>
-              <a:t>修復安全漏洞並持續提升網路與資訊基礎架構之安全管控以確保資訊安全。</a:t>
+              <a:t>本公司後續仍將持續提升網路與資訊基礎架構之安全管控以確保資訊安全。</a:t>
             </a:r>
           </a:p>
         </p:txBody>
@@ -9459,7 +9704,7 @@
             <a:avLst/>
           </a:prstGeom>
           <a:solidFill>
-            <a:srgbClr val="5C6679"/>
+            <a:srgbClr val="E63946"/>
           </a:solidFill>
           <a:ln>
             <a:noFill/>
@@ -9520,7 +9765,7 @@
                 <a:ea typeface="Microsoft JhengHei"/>
                 <a:cs typeface="Microsoft JhengHei"/>
               </a:rPr>
-              <a:t>GOGOLOOK </a:t>
+              <a:t>優盛 </a:t>
             </a:r>
             <a:r>
               <a:rPr sz="1300" b="0">
@@ -9531,7 +9776,7 @@
                 <a:ea typeface="Microsoft JhengHei"/>
                 <a:cs typeface="Microsoft JhengHei"/>
               </a:rPr>
-              <a:t>6902</a:t>
+              <a:t>4121</a:t>
             </a:r>
           </a:p>
         </p:txBody>
@@ -9551,7 +9796,7 @@
             <a:avLst/>
           </a:prstGeom>
           <a:solidFill>
-            <a:srgbClr val="5C6679"/>
+            <a:srgbClr val="E63946"/>
           </a:solidFill>
           <a:ln>
             <a:noFill/>
@@ -9612,7 +9857,7 @@
                 <a:ea typeface="Microsoft JhengHei"/>
                 <a:cs typeface="Microsoft JhengHei"/>
               </a:rPr>
-              <a:t>其他</a:t>
+              <a:t>駭客攻擊</a:t>
             </a:r>
           </a:p>
         </p:txBody>
@@ -9647,7 +9892,7 @@
             <a:r>
               <a:rPr sz="1100" b="1">
                 <a:solidFill>
-                  <a:srgbClr val="5C6679"/>
+                  <a:srgbClr val="E63946"/>
                 </a:solidFill>
                 <a:latin typeface="Microsoft JhengHei"/>
                 <a:ea typeface="Microsoft JhengHei"/>
@@ -9664,7 +9909,7 @@
                 <a:ea typeface="Microsoft JhengHei"/>
                 <a:cs typeface="Microsoft JhengHei"/>
               </a:rPr>
-              <a:t>本公司發生網路資安事件。</a:t>
+              <a:t>本公司之官網於今天下午遭受網路駭客攻擊</a:t>
             </a:r>
           </a:p>
         </p:txBody>
@@ -9699,7 +9944,7 @@
             <a:r>
               <a:rPr sz="1100" b="1">
                 <a:solidFill>
-                  <a:srgbClr val="5C6679"/>
+                  <a:srgbClr val="E63946"/>
                 </a:solidFill>
                 <a:latin typeface="Microsoft JhengHei"/>
                 <a:ea typeface="Microsoft JhengHei"/>
@@ -9716,7 +9961,7 @@
                 <a:ea typeface="Microsoft JhengHei"/>
                 <a:cs typeface="Microsoft JhengHei"/>
               </a:rPr>
-              <a:t>本公司後續仍持續強化資安管控及防禦機制，確保資訊安全與服務體驗。</a:t>
+              <a:t>本公司後續將持續提升網路與資訊基礎架構之安全管控以確保資訊安全。</a:t>
             </a:r>
           </a:p>
         </p:txBody>
@@ -9843,7 +10088,7 @@
                 <a:ea typeface="Microsoft JhengHei"/>
                 <a:cs typeface="Microsoft JhengHei"/>
               </a:rPr>
-              <a:t>網家 </a:t>
+              <a:t>麗清 </a:t>
             </a:r>
             <a:r>
               <a:rPr sz="1300" b="0">
@@ -9854,7 +10099,7 @@
                 <a:ea typeface="Microsoft JhengHei"/>
                 <a:cs typeface="Microsoft JhengHei"/>
               </a:rPr>
-              <a:t>8044</a:t>
+              <a:t>3346</a:t>
             </a:r>
           </a:p>
         </p:txBody>
@@ -9987,7 +10232,7 @@
                 <a:ea typeface="Microsoft JhengHei"/>
                 <a:cs typeface="Microsoft JhengHei"/>
               </a:rPr>
-              <a:t>公司對該等報導或提供訊息之說明:(1)資訊安全防線：本公司及各轉投資事業係依不同服務型態各自營運…</a:t>
+              <a:t>本公司部份資訊系統遭受駭客網路攻擊。</a:t>
             </a:r>
           </a:p>
         </p:txBody>
@@ -10039,7 +10284,7 @@
                 <a:ea typeface="Microsoft JhengHei"/>
                 <a:cs typeface="Microsoft JhengHei"/>
               </a:rPr>
-              <a:t>(1)全面啟動應變與調查：拍付國際獲悉駭客聲稱之入侵及勒索訊息後，已立即啟動資安應變程序，會同資安專家進行全面系統檢測與…</a:t>
+              <a:t>修復安全漏洞並持續提升網路與資訊基礎架構之安全管控以確保資訊安全。</a:t>
             </a:r>
           </a:p>
         </p:txBody>
@@ -10302,7 +10547,7 @@
                 <a:ea typeface="Microsoft JhengHei"/>
                 <a:cs typeface="Microsoft JhengHei"/>
               </a:rPr>
-              <a:t>耕興 </a:t>
+              <a:t>GOGOLOOK </a:t>
             </a:r>
             <a:r>
               <a:rPr sz="1300" b="0">
@@ -10313,7 +10558,7 @@
                 <a:ea typeface="Microsoft JhengHei"/>
                 <a:cs typeface="Microsoft JhengHei"/>
               </a:rPr>
-              <a:t>6146</a:t>
+              <a:t>6902</a:t>
             </a:r>
           </a:p>
         </p:txBody>
@@ -10446,7 +10691,7 @@
                 <a:ea typeface="Microsoft JhengHei"/>
                 <a:cs typeface="Microsoft JhengHei"/>
               </a:rPr>
-              <a:t>本公司部分資訊系統發生網路資安事件。</a:t>
+              <a:t>本公司發生網路資安事件。</a:t>
             </a:r>
           </a:p>
         </p:txBody>
@@ -10498,7 +10743,7 @@
                 <a:ea typeface="Microsoft JhengHei"/>
                 <a:cs typeface="Microsoft JhengHei"/>
               </a:rPr>
-              <a:t>本公司將持續提升網路與資訊基礎架構之安全管控，並依外部資安技術專家之建議加強防護，確保資訊安全。</a:t>
+              <a:t>本公司後續仍持續強化資安管控及防禦機制，確保資訊安全與服務體驗。</a:t>
             </a:r>
           </a:p>
         </p:txBody>
@@ -10564,7 +10809,7 @@
             <a:avLst/>
           </a:prstGeom>
           <a:solidFill>
-            <a:srgbClr val="F4A261"/>
+            <a:srgbClr val="E63946"/>
           </a:solidFill>
           <a:ln>
             <a:noFill/>
@@ -10625,7 +10870,7 @@
                 <a:ea typeface="Microsoft JhengHei"/>
                 <a:cs typeface="Microsoft JhengHei"/>
               </a:rPr>
-              <a:t>易發 </a:t>
+              <a:t>網家 </a:t>
             </a:r>
             <a:r>
               <a:rPr sz="1300" b="0">
@@ -10636,7 +10881,7 @@
                 <a:ea typeface="Microsoft JhengHei"/>
                 <a:cs typeface="Microsoft JhengHei"/>
               </a:rPr>
-              <a:t>6425</a:t>
+              <a:t>8044</a:t>
             </a:r>
           </a:p>
         </p:txBody>
@@ -10656,7 +10901,7 @@
             <a:avLst/>
           </a:prstGeom>
           <a:solidFill>
-            <a:srgbClr val="F4A261"/>
+            <a:srgbClr val="E63946"/>
           </a:solidFill>
           <a:ln>
             <a:noFill/>
@@ -10717,7 +10962,7 @@
                 <a:ea typeface="Microsoft JhengHei"/>
                 <a:cs typeface="Microsoft JhengHei"/>
               </a:rPr>
-              <a:t>勒索病毒/加密</a:t>
+              <a:t>駭客攻擊</a:t>
             </a:r>
           </a:p>
         </p:txBody>
@@ -10752,7 +10997,7 @@
             <a:r>
               <a:rPr sz="1100" b="1">
                 <a:solidFill>
-                  <a:srgbClr val="F4A261"/>
+                  <a:srgbClr val="E63946"/>
                 </a:solidFill>
                 <a:latin typeface="Microsoft JhengHei"/>
                 <a:ea typeface="Microsoft JhengHei"/>
@@ -10769,7 +11014,7 @@
                 <a:ea typeface="Microsoft JhengHei"/>
                 <a:cs typeface="Microsoft JhengHei"/>
               </a:rPr>
-              <a:t>本公司之子公司東野精機(股)公司日福精工(股)公司，發現遭不明駭客入侵主機，並將伺服器資料加密，…</a:t>
+              <a:t>公司對該等報導或提供訊息之說明:(1)資訊安全防線：本公司及各轉投資事業係依不同服務型態各自營運…</a:t>
             </a:r>
           </a:p>
         </p:txBody>
@@ -10804,7 +11049,7 @@
             <a:r>
               <a:rPr sz="1100" b="1">
                 <a:solidFill>
-                  <a:srgbClr val="F4A261"/>
+                  <a:srgbClr val="E63946"/>
                 </a:solidFill>
                 <a:latin typeface="Microsoft JhengHei"/>
                 <a:ea typeface="Microsoft JhengHei"/>
@@ -10821,7 +11066,7 @@
                 <a:ea typeface="Microsoft JhengHei"/>
                 <a:cs typeface="Microsoft JhengHei"/>
               </a:rPr>
-              <a:t>本公司之子公司東野精機(股)公司日福精工(股)公司將修復安全漏洞，持續提升網路與資訊基礎架構之安全管控，以確保資訊安全。</a:t>
+              <a:t>(1)全面啟動應變與調查：拍付國際獲悉駭客聲稱之入侵及勒索訊息後，已立即啟動資安應變程序，會同資安專家進行全面系統檢測與…</a:t>
             </a:r>
           </a:p>
         </p:txBody>
@@ -10887,7 +11132,7 @@
             <a:avLst/>
           </a:prstGeom>
           <a:solidFill>
-            <a:srgbClr val="F4A261"/>
+            <a:srgbClr val="5C6679"/>
           </a:solidFill>
           <a:ln>
             <a:noFill/>
@@ -10948,7 +11193,7 @@
                 <a:ea typeface="Microsoft JhengHei"/>
                 <a:cs typeface="Microsoft JhengHei"/>
               </a:rPr>
-              <a:t>尼得科超眾 </a:t>
+              <a:t>耕興 </a:t>
             </a:r>
             <a:r>
               <a:rPr sz="1300" b="0">
@@ -10959,7 +11204,7 @@
                 <a:ea typeface="Microsoft JhengHei"/>
                 <a:cs typeface="Microsoft JhengHei"/>
               </a:rPr>
-              <a:t>6230</a:t>
+              <a:t>6146</a:t>
             </a:r>
           </a:p>
         </p:txBody>
@@ -10979,7 +11224,7 @@
             <a:avLst/>
           </a:prstGeom>
           <a:solidFill>
-            <a:srgbClr val="F4A261"/>
+            <a:srgbClr val="5C6679"/>
           </a:solidFill>
           <a:ln>
             <a:noFill/>
@@ -11040,7 +11285,7 @@
                 <a:ea typeface="Microsoft JhengHei"/>
                 <a:cs typeface="Microsoft JhengHei"/>
               </a:rPr>
-              <a:t>勒索病毒/加密</a:t>
+              <a:t>其他</a:t>
             </a:r>
           </a:p>
         </p:txBody>
@@ -11075,7 +11320,7 @@
             <a:r>
               <a:rPr sz="1100" b="1">
                 <a:solidFill>
-                  <a:srgbClr val="F4A261"/>
+                  <a:srgbClr val="5C6679"/>
                 </a:solidFill>
                 <a:latin typeface="Microsoft JhengHei"/>
                 <a:ea typeface="Microsoft JhengHei"/>
@@ -11092,7 +11337,7 @@
                 <a:ea typeface="Microsoft JhengHei"/>
                 <a:cs typeface="Microsoft JhengHei"/>
               </a:rPr>
-              <a:t>本公司於今日偵測到部份伺服器遭受網路勒索病毒攻擊，致使包含ERP在內之部份資訊系統無法正常運作。</a:t>
+              <a:t>本公司部分資訊系統發生網路資安事件。</a:t>
             </a:r>
           </a:p>
         </p:txBody>
@@ -11127,7 +11372,7 @@
             <a:r>
               <a:rPr sz="1100" b="1">
                 <a:solidFill>
-                  <a:srgbClr val="F4A261"/>
+                  <a:srgbClr val="5C6679"/>
                 </a:solidFill>
                 <a:latin typeface="Microsoft JhengHei"/>
                 <a:ea typeface="Microsoft JhengHei"/>
@@ -11144,7 +11389,7 @@
                 <a:ea typeface="Microsoft JhengHei"/>
                 <a:cs typeface="Microsoft JhengHei"/>
               </a:rPr>
-              <a:t>本公司亦將視系統復原進度，適時調整生產與出貨排程。</a:t>
+              <a:t>本公司將持續提升網路與資訊基礎架構之安全管控，並依外部資安技術專家之建議加強防護，確保資訊安全。</a:t>
             </a:r>
           </a:p>
         </p:txBody>
@@ -11210,7 +11455,7 @@
             <a:avLst/>
           </a:prstGeom>
           <a:solidFill>
-            <a:srgbClr val="5C6679"/>
+            <a:srgbClr val="F4A261"/>
           </a:solidFill>
           <a:ln>
             <a:noFill/>
@@ -11271,7 +11516,7 @@
                 <a:ea typeface="Microsoft JhengHei"/>
                 <a:cs typeface="Microsoft JhengHei"/>
               </a:rPr>
-              <a:t>上福 </a:t>
+              <a:t>易發 </a:t>
             </a:r>
             <a:r>
               <a:rPr sz="1300" b="0">
@@ -11282,7 +11527,7 @@
                 <a:ea typeface="Microsoft JhengHei"/>
                 <a:cs typeface="Microsoft JhengHei"/>
               </a:rPr>
-              <a:t>6128</a:t>
+              <a:t>6425</a:t>
             </a:r>
           </a:p>
         </p:txBody>
@@ -11302,7 +11547,7 @@
             <a:avLst/>
           </a:prstGeom>
           <a:solidFill>
-            <a:srgbClr val="5C6679"/>
+            <a:srgbClr val="F4A261"/>
           </a:solidFill>
           <a:ln>
             <a:noFill/>
@@ -11363,7 +11608,7 @@
                 <a:ea typeface="Microsoft JhengHei"/>
                 <a:cs typeface="Microsoft JhengHei"/>
               </a:rPr>
-              <a:t>其他</a:t>
+              <a:t>勒索病毒/加密</a:t>
             </a:r>
           </a:p>
         </p:txBody>
@@ -11398,7 +11643,7 @@
             <a:r>
               <a:rPr sz="1100" b="1">
                 <a:solidFill>
-                  <a:srgbClr val="5C6679"/>
+                  <a:srgbClr val="F4A261"/>
                 </a:solidFill>
                 <a:latin typeface="Microsoft JhengHei"/>
                 <a:ea typeface="Microsoft JhengHei"/>
@@ -11415,7 +11660,7 @@
                 <a:ea typeface="Microsoft JhengHei"/>
                 <a:cs typeface="Microsoft JhengHei"/>
               </a:rPr>
-              <a:t>KatunCorporation資訊設備遭受未授權外部存取。</a:t>
+              <a:t>本公司之子公司東野精機(股)公司日福精工(股)公司，發現遭不明駭客入侵主機，並將伺服器資料加密，…</a:t>
             </a:r>
           </a:p>
         </p:txBody>
@@ -11450,7 +11695,7 @@
             <a:r>
               <a:rPr sz="1100" b="1">
                 <a:solidFill>
-                  <a:srgbClr val="5C6679"/>
+                  <a:srgbClr val="F4A261"/>
                 </a:solidFill>
                 <a:latin typeface="Microsoft JhengHei"/>
                 <a:ea typeface="Microsoft JhengHei"/>
@@ -11467,7 +11712,466 @@
                 <a:ea typeface="Microsoft JhengHei"/>
                 <a:cs typeface="Microsoft JhengHei"/>
               </a:rPr>
-              <a:t>此事件後將持續提升網路與資訊基礎架構之安全控管，並持續密切監控，以確保資訊安全。</a:t>
+              <a:t>本公司之子公司東野精機(股)公司日福精工(股)公司將修復安全漏洞，持續提升網路與資訊基礎架構之安全管控，以確保資訊安全。</a:t>
+            </a:r>
+          </a:p>
+        </p:txBody>
+      </p:sp>
+    </p:spTree>
+  </p:cSld>
+  <p:clrMapOvr>
+    <a:masterClrMapping/>
+  </p:clrMapOvr>
+</p:sld>
+</file>
+
+<file path=ppt/slides/slide8.xml><?xml version="1.0" encoding="utf-8"?>
+<p:sld xmlns:a="http://schemas.openxmlformats.org/drawingml/2006/main" xmlns:p="http://schemas.openxmlformats.org/presentationml/2006/main" xmlns:r="http://schemas.openxmlformats.org/officeDocument/2006/relationships">
+  <p:cSld>
+    <p:spTree>
+      <p:nvGrpSpPr>
+        <p:cNvPr id="1" name=""/>
+        <p:cNvGrpSpPr/>
+        <p:nvPr/>
+      </p:nvGrpSpPr>
+      <p:grpSpPr/>
+      <p:sp>
+        <p:nvSpPr>
+          <p:cNvPr id="2" name="Rectangle 1"/>
+          <p:cNvSpPr/>
+          <p:nvPr/>
+        </p:nvSpPr>
+        <p:spPr>
+          <a:xfrm>
+            <a:off x="0" y="0"/>
+            <a:ext cx="12191695" cy="6858000"/>
+          </a:xfrm>
+          <a:prstGeom prst="rect">
+            <a:avLst/>
+          </a:prstGeom>
+          <a:solidFill>
+            <a:srgbClr val="F6F8FC"/>
+          </a:solidFill>
+          <a:ln>
+            <a:noFill/>
+          </a:ln>
+          <a:effectLst/>
+        </p:spPr>
+        <p:style>
+          <a:lnRef idx="1">
+            <a:schemeClr val="accent1"/>
+          </a:lnRef>
+          <a:fillRef idx="3">
+            <a:schemeClr val="accent1"/>
+          </a:fillRef>
+          <a:effectRef idx="2">
+            <a:schemeClr val="accent1"/>
+          </a:effectRef>
+          <a:fontRef idx="minor">
+            <a:schemeClr val="lt1"/>
+          </a:fontRef>
+        </p:style>
+        <p:txBody>
+          <a:bodyPr rtlCol="0" anchor="ctr"/>
+          <a:lstStyle/>
+          <a:p>
+            <a:pPr algn="ctr"/>
+          </a:p>
+        </p:txBody>
+      </p:sp>
+      <p:sp>
+        <p:nvSpPr>
+          <p:cNvPr id="3" name="TextBox 2"/>
+          <p:cNvSpPr txBox="1"/>
+          <p:nvPr/>
+        </p:nvSpPr>
+        <p:spPr>
+          <a:xfrm>
+            <a:off x="548640" y="365760"/>
+            <a:ext cx="9144000" cy="640080"/>
+          </a:xfrm>
+          <a:prstGeom prst="rect">
+            <a:avLst/>
+          </a:prstGeom>
+          <a:noFill/>
+        </p:spPr>
+        <p:txBody>
+          <a:bodyPr wrap="square" anchor="t" lIns="0" rIns="0" tIns="0" bIns="0">
+            <a:spAutoFit/>
+          </a:bodyPr>
+          <a:lstStyle/>
+          <a:p>
+            <a:pPr algn="l"/>
+            <a:r>
+              <a:rPr sz="3000" b="1">
+                <a:solidFill>
+                  <a:srgbClr val="1A2233"/>
+                </a:solidFill>
+                <a:latin typeface="Microsoft JhengHei"/>
+                <a:ea typeface="Microsoft JhengHei"/>
+                <a:cs typeface="Microsoft JhengHei"/>
+              </a:rPr>
+              <a:t>個案因應重點（3）</a:t>
+            </a:r>
+          </a:p>
+        </p:txBody>
+      </p:sp>
+      <p:sp>
+        <p:nvSpPr>
+          <p:cNvPr id="4" name="TextBox 3"/>
+          <p:cNvSpPr txBox="1"/>
+          <p:nvPr/>
+        </p:nvSpPr>
+        <p:spPr>
+          <a:xfrm>
+            <a:off x="566928" y="1005840"/>
+            <a:ext cx="10058400" cy="365760"/>
+          </a:xfrm>
+          <a:prstGeom prst="rect">
+            <a:avLst/>
+          </a:prstGeom>
+          <a:noFill/>
+        </p:spPr>
+        <p:txBody>
+          <a:bodyPr wrap="square" anchor="t" lIns="0" rIns="0" tIns="0" bIns="0">
+            <a:spAutoFit/>
+          </a:bodyPr>
+          <a:lstStyle/>
+          <a:p>
+            <a:pPr algn="l"/>
+            <a:r>
+              <a:rPr sz="1300" b="0">
+                <a:solidFill>
+                  <a:srgbClr val="5C6679"/>
+                </a:solidFill>
+                <a:latin typeface="Microsoft JhengHei"/>
+                <a:ea typeface="Microsoft JhengHei"/>
+                <a:cs typeface="Microsoft JhengHei"/>
+              </a:rPr>
+              <a:t>各公司公告之發生緣由與因應措施摘要</a:t>
+            </a:r>
+          </a:p>
+        </p:txBody>
+      </p:sp>
+      <p:sp>
+        <p:nvSpPr>
+          <p:cNvPr id="5" name="Rounded Rectangle 4"/>
+          <p:cNvSpPr/>
+          <p:nvPr/>
+        </p:nvSpPr>
+        <p:spPr>
+          <a:xfrm>
+            <a:off x="548640" y="1554480"/>
+            <a:ext cx="5394960" cy="2148840"/>
+          </a:xfrm>
+          <a:prstGeom prst="roundRect">
+            <a:avLst/>
+          </a:prstGeom>
+          <a:solidFill>
+            <a:srgbClr val="FFFFFF"/>
+          </a:solidFill>
+          <a:ln w="12700">
+            <a:solidFill>
+              <a:srgbClr val="DDE3EE"/>
+            </a:solidFill>
+          </a:ln>
+          <a:effectLst/>
+        </p:spPr>
+        <p:style>
+          <a:lnRef idx="1">
+            <a:schemeClr val="accent1"/>
+          </a:lnRef>
+          <a:fillRef idx="3">
+            <a:schemeClr val="accent1"/>
+          </a:fillRef>
+          <a:effectRef idx="2">
+            <a:schemeClr val="accent1"/>
+          </a:effectRef>
+          <a:fontRef idx="minor">
+            <a:schemeClr val="lt1"/>
+          </a:fontRef>
+        </p:style>
+        <p:txBody>
+          <a:bodyPr rtlCol="0" anchor="ctr"/>
+          <a:lstStyle/>
+          <a:p>
+            <a:pPr algn="ctr"/>
+          </a:p>
+        </p:txBody>
+      </p:sp>
+      <p:sp>
+        <p:nvSpPr>
+          <p:cNvPr id="6" name="Rectangle 5"/>
+          <p:cNvSpPr/>
+          <p:nvPr/>
+        </p:nvSpPr>
+        <p:spPr>
+          <a:xfrm>
+            <a:off x="548640" y="1554480"/>
+            <a:ext cx="5394960" cy="109728"/>
+          </a:xfrm>
+          <a:prstGeom prst="rect">
+            <a:avLst/>
+          </a:prstGeom>
+          <a:solidFill>
+            <a:srgbClr val="F4A261"/>
+          </a:solidFill>
+          <a:ln>
+            <a:noFill/>
+          </a:ln>
+          <a:effectLst/>
+        </p:spPr>
+        <p:style>
+          <a:lnRef idx="1">
+            <a:schemeClr val="accent1"/>
+          </a:lnRef>
+          <a:fillRef idx="3">
+            <a:schemeClr val="accent1"/>
+          </a:fillRef>
+          <a:effectRef idx="2">
+            <a:schemeClr val="accent1"/>
+          </a:effectRef>
+          <a:fontRef idx="minor">
+            <a:schemeClr val="lt1"/>
+          </a:fontRef>
+        </p:style>
+        <p:txBody>
+          <a:bodyPr rtlCol="0" anchor="ctr"/>
+          <a:lstStyle/>
+          <a:p>
+            <a:pPr algn="ctr"/>
+          </a:p>
+        </p:txBody>
+      </p:sp>
+      <p:sp>
+        <p:nvSpPr>
+          <p:cNvPr id="7" name="TextBox 6"/>
+          <p:cNvSpPr txBox="1"/>
+          <p:nvPr/>
+        </p:nvSpPr>
+        <p:spPr>
+          <a:xfrm>
+            <a:off x="777240" y="1773936"/>
+            <a:ext cx="3657600" cy="365760"/>
+          </a:xfrm>
+          <a:prstGeom prst="rect">
+            <a:avLst/>
+          </a:prstGeom>
+          <a:noFill/>
+        </p:spPr>
+        <p:txBody>
+          <a:bodyPr wrap="square" anchor="ctr" lIns="0" rIns="0" tIns="0" bIns="0">
+            <a:spAutoFit/>
+          </a:bodyPr>
+          <a:lstStyle/>
+          <a:p>
+            <a:pPr algn="l"/>
+            <a:r>
+              <a:rPr sz="1600" b="1">
+                <a:solidFill>
+                  <a:srgbClr val="1A2233"/>
+                </a:solidFill>
+                <a:latin typeface="Microsoft JhengHei"/>
+                <a:ea typeface="Microsoft JhengHei"/>
+                <a:cs typeface="Microsoft JhengHei"/>
+              </a:rPr>
+              <a:t>尼得科超眾 </a:t>
+            </a:r>
+            <a:r>
+              <a:rPr sz="1300" b="0">
+                <a:solidFill>
+                  <a:srgbClr val="5C6679"/>
+                </a:solidFill>
+                <a:latin typeface="Microsoft JhengHei"/>
+                <a:ea typeface="Microsoft JhengHei"/>
+                <a:cs typeface="Microsoft JhengHei"/>
+              </a:rPr>
+              <a:t>6230</a:t>
+            </a:r>
+          </a:p>
+        </p:txBody>
+      </p:sp>
+      <p:sp>
+        <p:nvSpPr>
+          <p:cNvPr id="8" name="Rounded Rectangle 7"/>
+          <p:cNvSpPr/>
+          <p:nvPr/>
+        </p:nvSpPr>
+        <p:spPr>
+          <a:xfrm>
+            <a:off x="4526280" y="1792224"/>
+            <a:ext cx="1234440" cy="347472"/>
+          </a:xfrm>
+          <a:prstGeom prst="roundRect">
+            <a:avLst/>
+          </a:prstGeom>
+          <a:solidFill>
+            <a:srgbClr val="F4A261"/>
+          </a:solidFill>
+          <a:ln>
+            <a:noFill/>
+          </a:ln>
+          <a:effectLst/>
+        </p:spPr>
+        <p:style>
+          <a:lnRef idx="1">
+            <a:schemeClr val="accent1"/>
+          </a:lnRef>
+          <a:fillRef idx="3">
+            <a:schemeClr val="accent1"/>
+          </a:fillRef>
+          <a:effectRef idx="2">
+            <a:schemeClr val="accent1"/>
+          </a:effectRef>
+          <a:fontRef idx="minor">
+            <a:schemeClr val="lt1"/>
+          </a:fontRef>
+        </p:style>
+        <p:txBody>
+          <a:bodyPr rtlCol="0" anchor="ctr"/>
+          <a:lstStyle/>
+          <a:p>
+            <a:pPr algn="ctr"/>
+          </a:p>
+        </p:txBody>
+      </p:sp>
+      <p:sp>
+        <p:nvSpPr>
+          <p:cNvPr id="9" name="TextBox 8"/>
+          <p:cNvSpPr txBox="1"/>
+          <p:nvPr/>
+        </p:nvSpPr>
+        <p:spPr>
+          <a:xfrm>
+            <a:off x="4526280" y="1792224"/>
+            <a:ext cx="1234440" cy="347472"/>
+          </a:xfrm>
+          <a:prstGeom prst="rect">
+            <a:avLst/>
+          </a:prstGeom>
+          <a:noFill/>
+        </p:spPr>
+        <p:txBody>
+          <a:bodyPr wrap="square" anchor="ctr" lIns="0" rIns="0" tIns="0" bIns="0">
+            <a:spAutoFit/>
+          </a:bodyPr>
+          <a:lstStyle/>
+          <a:p>
+            <a:pPr algn="ctr"/>
+            <a:r>
+              <a:rPr sz="1050" b="1">
+                <a:solidFill>
+                  <a:srgbClr val="FFFFFF"/>
+                </a:solidFill>
+                <a:latin typeface="Microsoft JhengHei"/>
+                <a:ea typeface="Microsoft JhengHei"/>
+                <a:cs typeface="Microsoft JhengHei"/>
+              </a:rPr>
+              <a:t>勒索病毒/加密</a:t>
+            </a:r>
+          </a:p>
+        </p:txBody>
+      </p:sp>
+      <p:sp>
+        <p:nvSpPr>
+          <p:cNvPr id="10" name="TextBox 9"/>
+          <p:cNvSpPr txBox="1"/>
+          <p:nvPr/>
+        </p:nvSpPr>
+        <p:spPr>
+          <a:xfrm>
+            <a:off x="777240" y="2267712"/>
+            <a:ext cx="4937760" cy="640080"/>
+          </a:xfrm>
+          <a:prstGeom prst="rect">
+            <a:avLst/>
+          </a:prstGeom>
+          <a:noFill/>
+        </p:spPr>
+        <p:txBody>
+          <a:bodyPr wrap="square" anchor="t" lIns="0" rIns="0" tIns="0" bIns="0">
+            <a:spAutoFit/>
+          </a:bodyPr>
+          <a:lstStyle/>
+          <a:p>
+            <a:pPr algn="l">
+              <a:lnSpc>
+                <a:spcPts val="1500"/>
+              </a:lnSpc>
+            </a:pPr>
+            <a:r>
+              <a:rPr sz="1100" b="1">
+                <a:solidFill>
+                  <a:srgbClr val="F4A261"/>
+                </a:solidFill>
+                <a:latin typeface="Microsoft JhengHei"/>
+                <a:ea typeface="Microsoft JhengHei"/>
+                <a:cs typeface="Microsoft JhengHei"/>
+              </a:rPr>
+              <a:t>緣由　</a:t>
+            </a:r>
+            <a:r>
+              <a:rPr sz="1100" b="0">
+                <a:solidFill>
+                  <a:srgbClr val="1A2233"/>
+                </a:solidFill>
+                <a:latin typeface="Microsoft JhengHei"/>
+                <a:ea typeface="Microsoft JhengHei"/>
+                <a:cs typeface="Microsoft JhengHei"/>
+              </a:rPr>
+              <a:t>本公司於今日偵測到部份伺服器遭受網路勒索病毒攻擊，致使包含ERP在內之部份資訊系統無法正常運作。</a:t>
+            </a:r>
+          </a:p>
+        </p:txBody>
+      </p:sp>
+      <p:sp>
+        <p:nvSpPr>
+          <p:cNvPr id="11" name="TextBox 10"/>
+          <p:cNvSpPr txBox="1"/>
+          <p:nvPr/>
+        </p:nvSpPr>
+        <p:spPr>
+          <a:xfrm>
+            <a:off x="777240" y="2926080"/>
+            <a:ext cx="4937760" cy="713232"/>
+          </a:xfrm>
+          <a:prstGeom prst="rect">
+            <a:avLst/>
+          </a:prstGeom>
+          <a:noFill/>
+        </p:spPr>
+        <p:txBody>
+          <a:bodyPr wrap="square" anchor="t" lIns="0" rIns="0" tIns="0" bIns="0">
+            <a:spAutoFit/>
+          </a:bodyPr>
+          <a:lstStyle/>
+          <a:p>
+            <a:pPr algn="l">
+              <a:lnSpc>
+                <a:spcPts val="1500"/>
+              </a:lnSpc>
+            </a:pPr>
+            <a:r>
+              <a:rPr sz="1100" b="1">
+                <a:solidFill>
+                  <a:srgbClr val="F4A261"/>
+                </a:solidFill>
+                <a:latin typeface="Microsoft JhengHei"/>
+                <a:ea typeface="Microsoft JhengHei"/>
+                <a:cs typeface="Microsoft JhengHei"/>
+              </a:rPr>
+              <a:t>因應　</a:t>
+            </a:r>
+            <a:r>
+              <a:rPr sz="1100" b="0">
+                <a:solidFill>
+                  <a:srgbClr val="1A2233"/>
+                </a:solidFill>
+                <a:latin typeface="Microsoft JhengHei"/>
+                <a:ea typeface="Microsoft JhengHei"/>
+                <a:cs typeface="Microsoft JhengHei"/>
+              </a:rPr>
+              <a:t>本公司亦將視系統復原進度，適時調整生產與出貨排程。</a:t>
             </a:r>
           </a:p>
         </p:txBody>

--- a/資安事件因應分析.pptx
+++ b/資安事件因應分析.pptx
@@ -192,7 +192,7 @@
                   <c:v>2</c:v>
                 </c:pt>
                 <c:pt idx="2">
-                  <c:v>3</c:v>
+                  <c:v>4</c:v>
                 </c:pt>
               </c:numCache>
             </c:numRef>
@@ -3529,7 +3529,7 @@
                 <a:ea typeface="Microsoft JhengHei"/>
                 <a:cs typeface="Microsoft JhengHei"/>
               </a:rPr>
-              <a:t>資料期間 2026-06-21 ~ 2026-07-21　｜　MOPS 重大訊息全文檢索　｜　9 家公司</a:t>
+              <a:t>資料期間 2026-06-22 ~ 2026-07-22　｜　MOPS 重大訊息全文檢索　｜　10 家公司</a:t>
             </a:r>
           </a:p>
         </p:txBody>
@@ -3746,7 +3746,7 @@
                 <a:ea typeface="Microsoft JhengHei"/>
                 <a:cs typeface="Microsoft JhengHei"/>
               </a:rPr>
-              <a:t>資料期間內 MOPS 揭露之 9 起資安相關重大訊息</a:t>
+              <a:t>資料期間內 MOPS 揭露之 10 起資安相關重大訊息</a:t>
             </a:r>
           </a:p>
         </p:txBody>
@@ -3829,7 +3829,7 @@
                 <a:ea typeface="Microsoft JhengHei"/>
                 <a:cs typeface="Microsoft JhengHei"/>
               </a:rPr>
-              <a:t>9</a:t>
+              <a:t>10</a:t>
             </a:r>
           </a:p>
         </p:txBody>
@@ -4136,7 +4136,7 @@
                 <a:gridCol w="2286000"/>
                 <a:gridCol w="5120640"/>
               </a:tblGrid>
-              <a:tr h="356616">
+              <a:tr h="324196">
                 <a:tc>
                   <a:txBody>
                     <a:bodyPr/>
@@ -4258,7 +4258,7 @@
                   </a:tcPr>
                 </a:tc>
               </a:tr>
-              <a:tr h="356616">
+              <a:tr h="324196">
                 <a:tc>
                   <a:txBody>
                     <a:bodyPr/>
@@ -4321,7 +4321,7 @@
                           <a:ea typeface="Microsoft JhengHei"/>
                           <a:cs typeface="Microsoft JhengHei"/>
                         </a:rPr>
-                        <a:t>07/20</a:t>
+                        <a:t>07/21</a:t>
                       </a:r>
                     </a:p>
                   </a:txBody>
@@ -4380,7 +4380,7 @@
                   </a:tcPr>
                 </a:tc>
               </a:tr>
-              <a:tr h="356616">
+              <a:tr h="324196">
                 <a:tc>
                   <a:txBody>
                     <a:bodyPr/>
@@ -4395,7 +4395,7 @@
                           <a:ea typeface="Microsoft JhengHei"/>
                           <a:cs typeface="Microsoft JhengHei"/>
                         </a:rPr>
-                        <a:t>松上</a:t>
+                        <a:t>淳安</a:t>
                       </a:r>
                     </a:p>
                   </a:txBody>
@@ -4419,7 +4419,7 @@
                           <a:ea typeface="Microsoft JhengHei"/>
                           <a:cs typeface="Microsoft JhengHei"/>
                         </a:rPr>
-                        <a:t>6156</a:t>
+                        <a:t>6283</a:t>
                       </a:r>
                     </a:p>
                   </a:txBody>
@@ -4443,7 +4443,251 @@
                           <a:ea typeface="Microsoft JhengHei"/>
                           <a:cs typeface="Microsoft JhengHei"/>
                         </a:rPr>
+                        <a:t>07/20</a:t>
+                      </a:r>
+                    </a:p>
+                  </a:txBody>
+                  <a:tcPr anchor="ctr" marL="73152" marT="9144" marB="9144">
+                    <a:solidFill>
+                      <a:srgbClr val="EEF2F9"/>
+                    </a:solidFill>
+                  </a:tcPr>
+                </a:tc>
+                <a:tc>
+                  <a:txBody>
+                    <a:bodyPr/>
+                    <a:lstStyle/>
+                    <a:p>
+                      <a:r>
+                        <a:rPr sz="1150" b="1">
+                          <a:solidFill>
+                            <a:srgbClr val="5C6679"/>
+                          </a:solidFill>
+                          <a:latin typeface="Microsoft JhengHei"/>
+                          <a:ea typeface="Microsoft JhengHei"/>
+                          <a:cs typeface="Microsoft JhengHei"/>
+                        </a:rPr>
+                        <a:t>其他</a:t>
+                      </a:r>
+                    </a:p>
+                  </a:txBody>
+                  <a:tcPr anchor="ctr" marL="73152" marT="9144" marB="9144">
+                    <a:solidFill>
+                      <a:srgbClr val="EEF2F9"/>
+                    </a:solidFill>
+                  </a:tcPr>
+                </a:tc>
+                <a:tc>
+                  <a:txBody>
+                    <a:bodyPr/>
+                    <a:lstStyle/>
+                    <a:p>
+                      <a:r>
+                        <a:rPr sz="1150" b="0">
+                          <a:solidFill>
+                            <a:srgbClr val="1A2233"/>
+                          </a:solidFill>
+                          <a:latin typeface="Microsoft JhengHei"/>
+                          <a:ea typeface="Microsoft JhengHei"/>
+                          <a:cs typeface="Microsoft JhengHei"/>
+                        </a:rPr>
+                        <a:t>經評估對公司營運無重大影響。</a:t>
+                      </a:r>
+                    </a:p>
+                  </a:txBody>
+                  <a:tcPr anchor="ctr" marL="73152" marT="9144" marB="9144">
+                    <a:solidFill>
+                      <a:srgbClr val="EEF2F9"/>
+                    </a:solidFill>
+                  </a:tcPr>
+                </a:tc>
+              </a:tr>
+              <a:tr h="324196">
+                <a:tc>
+                  <a:txBody>
+                    <a:bodyPr/>
+                    <a:lstStyle/>
+                    <a:p>
+                      <a:r>
+                        <a:rPr sz="1150" b="0">
+                          <a:solidFill>
+                            <a:srgbClr val="1A2233"/>
+                          </a:solidFill>
+                          <a:latin typeface="Microsoft JhengHei"/>
+                          <a:ea typeface="Microsoft JhengHei"/>
+                          <a:cs typeface="Microsoft JhengHei"/>
+                        </a:rPr>
+                        <a:t>松上</a:t>
+                      </a:r>
+                    </a:p>
+                  </a:txBody>
+                  <a:tcPr anchor="ctr" marL="73152" marT="9144" marB="9144">
+                    <a:solidFill>
+                      <a:srgbClr val="FFFFFF"/>
+                    </a:solidFill>
+                  </a:tcPr>
+                </a:tc>
+                <a:tc>
+                  <a:txBody>
+                    <a:bodyPr/>
+                    <a:lstStyle/>
+                    <a:p>
+                      <a:r>
+                        <a:rPr sz="1150" b="0">
+                          <a:solidFill>
+                            <a:srgbClr val="1A2233"/>
+                          </a:solidFill>
+                          <a:latin typeface="Microsoft JhengHei"/>
+                          <a:ea typeface="Microsoft JhengHei"/>
+                          <a:cs typeface="Microsoft JhengHei"/>
+                        </a:rPr>
+                        <a:t>6156</a:t>
+                      </a:r>
+                    </a:p>
+                  </a:txBody>
+                  <a:tcPr anchor="ctr" marL="73152" marT="9144" marB="9144">
+                    <a:solidFill>
+                      <a:srgbClr val="FFFFFF"/>
+                    </a:solidFill>
+                  </a:tcPr>
+                </a:tc>
+                <a:tc>
+                  <a:txBody>
+                    <a:bodyPr/>
+                    <a:lstStyle/>
+                    <a:p>
+                      <a:r>
+                        <a:rPr sz="1150" b="0">
+                          <a:solidFill>
+                            <a:srgbClr val="1A2233"/>
+                          </a:solidFill>
+                          <a:latin typeface="Microsoft JhengHei"/>
+                          <a:ea typeface="Microsoft JhengHei"/>
+                          <a:cs typeface="Microsoft JhengHei"/>
+                        </a:rPr>
                         <a:t>07/17</a:t>
+                      </a:r>
+                    </a:p>
+                  </a:txBody>
+                  <a:tcPr anchor="ctr" marL="73152" marT="9144" marB="9144">
+                    <a:solidFill>
+                      <a:srgbClr val="FFFFFF"/>
+                    </a:solidFill>
+                  </a:tcPr>
+                </a:tc>
+                <a:tc>
+                  <a:txBody>
+                    <a:bodyPr/>
+                    <a:lstStyle/>
+                    <a:p>
+                      <a:r>
+                        <a:rPr sz="1150" b="1">
+                          <a:solidFill>
+                            <a:srgbClr val="E63946"/>
+                          </a:solidFill>
+                          <a:latin typeface="Microsoft JhengHei"/>
+                          <a:ea typeface="Microsoft JhengHei"/>
+                          <a:cs typeface="Microsoft JhengHei"/>
+                        </a:rPr>
+                        <a:t>駭客攻擊</a:t>
+                      </a:r>
+                    </a:p>
+                  </a:txBody>
+                  <a:tcPr anchor="ctr" marL="73152" marT="9144" marB="9144">
+                    <a:solidFill>
+                      <a:srgbClr val="FFFFFF"/>
+                    </a:solidFill>
+                  </a:tcPr>
+                </a:tc>
+                <a:tc>
+                  <a:txBody>
+                    <a:bodyPr/>
+                    <a:lstStyle/>
+                    <a:p>
+                      <a:r>
+                        <a:rPr sz="1150" b="0">
+                          <a:solidFill>
+                            <a:srgbClr val="1A2233"/>
+                          </a:solidFill>
+                          <a:latin typeface="Microsoft JhengHei"/>
+                          <a:ea typeface="Microsoft JhengHei"/>
+                          <a:cs typeface="Microsoft JhengHei"/>
+                        </a:rPr>
+                        <a:t>目前評估對公司營運無重大影響。</a:t>
+                      </a:r>
+                    </a:p>
+                  </a:txBody>
+                  <a:tcPr anchor="ctr" marL="73152" marT="9144" marB="9144">
+                    <a:solidFill>
+                      <a:srgbClr val="FFFFFF"/>
+                    </a:solidFill>
+                  </a:tcPr>
+                </a:tc>
+              </a:tr>
+              <a:tr h="324196">
+                <a:tc>
+                  <a:txBody>
+                    <a:bodyPr/>
+                    <a:lstStyle/>
+                    <a:p>
+                      <a:r>
+                        <a:rPr sz="1150" b="0">
+                          <a:solidFill>
+                            <a:srgbClr val="1A2233"/>
+                          </a:solidFill>
+                          <a:latin typeface="Microsoft JhengHei"/>
+                          <a:ea typeface="Microsoft JhengHei"/>
+                          <a:cs typeface="Microsoft JhengHei"/>
+                        </a:rPr>
+                        <a:t>優盛</a:t>
+                      </a:r>
+                    </a:p>
+                  </a:txBody>
+                  <a:tcPr anchor="ctr" marL="73152" marT="9144" marB="9144">
+                    <a:solidFill>
+                      <a:srgbClr val="EEF2F9"/>
+                    </a:solidFill>
+                  </a:tcPr>
+                </a:tc>
+                <a:tc>
+                  <a:txBody>
+                    <a:bodyPr/>
+                    <a:lstStyle/>
+                    <a:p>
+                      <a:r>
+                        <a:rPr sz="1150" b="0">
+                          <a:solidFill>
+                            <a:srgbClr val="1A2233"/>
+                          </a:solidFill>
+                          <a:latin typeface="Microsoft JhengHei"/>
+                          <a:ea typeface="Microsoft JhengHei"/>
+                          <a:cs typeface="Microsoft JhengHei"/>
+                        </a:rPr>
+                        <a:t>4121</a:t>
+                      </a:r>
+                    </a:p>
+                  </a:txBody>
+                  <a:tcPr anchor="ctr" marL="73152" marT="9144" marB="9144">
+                    <a:solidFill>
+                      <a:srgbClr val="EEF2F9"/>
+                    </a:solidFill>
+                  </a:tcPr>
+                </a:tc>
+                <a:tc>
+                  <a:txBody>
+                    <a:bodyPr/>
+                    <a:lstStyle/>
+                    <a:p>
+                      <a:r>
+                        <a:rPr sz="1150" b="0">
+                          <a:solidFill>
+                            <a:srgbClr val="1A2233"/>
+                          </a:solidFill>
+                          <a:latin typeface="Microsoft JhengHei"/>
+                          <a:ea typeface="Microsoft JhengHei"/>
+                          <a:cs typeface="Microsoft JhengHei"/>
+                        </a:rPr>
+                        <a:t>07/07</a:t>
                       </a:r>
                     </a:p>
                   </a:txBody>
@@ -4491,7 +4735,7 @@
                           <a:ea typeface="Microsoft JhengHei"/>
                           <a:cs typeface="Microsoft JhengHei"/>
                         </a:rPr>
-                        <a:t>目前評估對公司營運無重大影響。</a:t>
+                        <a:t>本資訊網站已暫時停止服務，該事件對公司營運、資訊安全、個資等無重大影…</a:t>
                       </a:r>
                     </a:p>
                   </a:txBody>
@@ -4502,7 +4746,7 @@
                   </a:tcPr>
                 </a:tc>
               </a:tr>
-              <a:tr h="356616">
+              <a:tr h="324196">
                 <a:tc>
                   <a:txBody>
                     <a:bodyPr/>
@@ -4517,7 +4761,7 @@
                           <a:ea typeface="Microsoft JhengHei"/>
                           <a:cs typeface="Microsoft JhengHei"/>
                         </a:rPr>
-                        <a:t>優盛</a:t>
+                        <a:t>麗清</a:t>
                       </a:r>
                     </a:p>
                   </a:txBody>
@@ -4541,7 +4785,7 @@
                           <a:ea typeface="Microsoft JhengHei"/>
                           <a:cs typeface="Microsoft JhengHei"/>
                         </a:rPr>
-                        <a:t>4121</a:t>
+                        <a:t>3346</a:t>
                       </a:r>
                     </a:p>
                   </a:txBody>
@@ -4565,7 +4809,7 @@
                           <a:ea typeface="Microsoft JhengHei"/>
                           <a:cs typeface="Microsoft JhengHei"/>
                         </a:rPr>
-                        <a:t>07/07</a:t>
+                        <a:t>07/02</a:t>
                       </a:r>
                     </a:p>
                   </a:txBody>
@@ -4613,7 +4857,7 @@
                           <a:ea typeface="Microsoft JhengHei"/>
                           <a:cs typeface="Microsoft JhengHei"/>
                         </a:rPr>
-                        <a:t>本資訊網站已暫時停止服務，該事件對公司營運、資訊安全、個資等無重大影…</a:t>
+                        <a:t>目前初步評估對公司運作無重大影響。</a:t>
                       </a:r>
                     </a:p>
                   </a:txBody>
@@ -4624,7 +4868,7 @@
                   </a:tcPr>
                 </a:tc>
               </a:tr>
-              <a:tr h="356616">
+              <a:tr h="324196">
                 <a:tc>
                   <a:txBody>
                     <a:bodyPr/>
@@ -4639,7 +4883,7 @@
                           <a:ea typeface="Microsoft JhengHei"/>
                           <a:cs typeface="Microsoft JhengHei"/>
                         </a:rPr>
-                        <a:t>麗清</a:t>
+                        <a:t>GOGOLOOK</a:t>
                       </a:r>
                     </a:p>
                   </a:txBody>
@@ -4663,7 +4907,7 @@
                           <a:ea typeface="Microsoft JhengHei"/>
                           <a:cs typeface="Microsoft JhengHei"/>
                         </a:rPr>
-                        <a:t>3346</a:t>
+                        <a:t>6902</a:t>
                       </a:r>
                     </a:p>
                   </a:txBody>
@@ -4687,7 +4931,7 @@
                           <a:ea typeface="Microsoft JhengHei"/>
                           <a:cs typeface="Microsoft JhengHei"/>
                         </a:rPr>
-                        <a:t>07/02</a:t>
+                        <a:t>07/01</a:t>
                       </a:r>
                     </a:p>
                   </a:txBody>
@@ -4705,13 +4949,13 @@
                       <a:r>
                         <a:rPr sz="1150" b="1">
                           <a:solidFill>
-                            <a:srgbClr val="E63946"/>
+                            <a:srgbClr val="5C6679"/>
                           </a:solidFill>
                           <a:latin typeface="Microsoft JhengHei"/>
                           <a:ea typeface="Microsoft JhengHei"/>
                           <a:cs typeface="Microsoft JhengHei"/>
                         </a:rPr>
-                        <a:t>駭客攻擊</a:t>
+                        <a:t>其他</a:t>
                       </a:r>
                     </a:p>
                   </a:txBody>
@@ -4735,7 +4979,7 @@
                           <a:ea typeface="Microsoft JhengHei"/>
                           <a:cs typeface="Microsoft JhengHei"/>
                         </a:rPr>
-                        <a:t>目前初步評估對公司運作無重大影響。</a:t>
+                        <a:t>目前評估對公司營運尚無重大影響。</a:t>
                       </a:r>
                     </a:p>
                   </a:txBody>
@@ -4746,7 +4990,7 @@
                   </a:tcPr>
                 </a:tc>
               </a:tr>
-              <a:tr h="356616">
+              <a:tr h="324196">
                 <a:tc>
                   <a:txBody>
                     <a:bodyPr/>
@@ -4761,7 +5005,7 @@
                           <a:ea typeface="Microsoft JhengHei"/>
                           <a:cs typeface="Microsoft JhengHei"/>
                         </a:rPr>
-                        <a:t>GOGOLOOK</a:t>
+                        <a:t>網家</a:t>
                       </a:r>
                     </a:p>
                   </a:txBody>
@@ -4785,7 +5029,7 @@
                           <a:ea typeface="Microsoft JhengHei"/>
                           <a:cs typeface="Microsoft JhengHei"/>
                         </a:rPr>
-                        <a:t>6902</a:t>
+                        <a:t>8044</a:t>
                       </a:r>
                     </a:p>
                   </a:txBody>
@@ -4827,13 +5071,13 @@
                       <a:r>
                         <a:rPr sz="1150" b="1">
                           <a:solidFill>
-                            <a:srgbClr val="5C6679"/>
+                            <a:srgbClr val="E63946"/>
                           </a:solidFill>
                           <a:latin typeface="Microsoft JhengHei"/>
                           <a:ea typeface="Microsoft JhengHei"/>
                           <a:cs typeface="Microsoft JhengHei"/>
                         </a:rPr>
-                        <a:t>其他</a:t>
+                        <a:t>駭客攻擊</a:t>
                       </a:r>
                     </a:p>
                   </a:txBody>
@@ -4857,7 +5101,7 @@
                           <a:ea typeface="Microsoft JhengHei"/>
                           <a:cs typeface="Microsoft JhengHei"/>
                         </a:rPr>
-                        <a:t>目前評估對公司營運尚無重大影響。</a:t>
+                        <a:t>—</a:t>
                       </a:r>
                     </a:p>
                   </a:txBody>
@@ -4868,7 +5112,7 @@
                   </a:tcPr>
                 </a:tc>
               </a:tr>
-              <a:tr h="356616">
+              <a:tr h="324196">
                 <a:tc>
                   <a:txBody>
                     <a:bodyPr/>
@@ -4883,7 +5127,7 @@
                           <a:ea typeface="Microsoft JhengHei"/>
                           <a:cs typeface="Microsoft JhengHei"/>
                         </a:rPr>
-                        <a:t>網家</a:t>
+                        <a:t>耕興</a:t>
                       </a:r>
                     </a:p>
                   </a:txBody>
@@ -4907,7 +5151,7 @@
                           <a:ea typeface="Microsoft JhengHei"/>
                           <a:cs typeface="Microsoft JhengHei"/>
                         </a:rPr>
-                        <a:t>8044</a:t>
+                        <a:t>6146</a:t>
                       </a:r>
                     </a:p>
                   </a:txBody>
@@ -4931,7 +5175,7 @@
                           <a:ea typeface="Microsoft JhengHei"/>
                           <a:cs typeface="Microsoft JhengHei"/>
                         </a:rPr>
-                        <a:t>07/01</a:t>
+                        <a:t>06/22</a:t>
                       </a:r>
                     </a:p>
                   </a:txBody>
@@ -4949,13 +5193,13 @@
                       <a:r>
                         <a:rPr sz="1150" b="1">
                           <a:solidFill>
-                            <a:srgbClr val="E63946"/>
+                            <a:srgbClr val="5C6679"/>
                           </a:solidFill>
                           <a:latin typeface="Microsoft JhengHei"/>
                           <a:ea typeface="Microsoft JhengHei"/>
                           <a:cs typeface="Microsoft JhengHei"/>
                         </a:rPr>
-                        <a:t>駭客攻擊</a:t>
+                        <a:t>其他</a:t>
                       </a:r>
                     </a:p>
                   </a:txBody>
@@ -4979,7 +5223,7 @@
                           <a:ea typeface="Microsoft JhengHei"/>
                           <a:cs typeface="Microsoft JhengHei"/>
                         </a:rPr>
-                        <a:t>—</a:t>
+                        <a:t>受影響之資料檔案留有備份，不影響公司營運、業務進行等。</a:t>
                       </a:r>
                     </a:p>
                   </a:txBody>
@@ -4990,7 +5234,7 @@
                   </a:tcPr>
                 </a:tc>
               </a:tr>
-              <a:tr h="356616">
+              <a:tr h="324196">
                 <a:tc>
                   <a:txBody>
                     <a:bodyPr/>
@@ -5005,7 +5249,7 @@
                           <a:ea typeface="Microsoft JhengHei"/>
                           <a:cs typeface="Microsoft JhengHei"/>
                         </a:rPr>
-                        <a:t>耕興</a:t>
+                        <a:t>易發</a:t>
                       </a:r>
                     </a:p>
                   </a:txBody>
@@ -5029,7 +5273,7 @@
                           <a:ea typeface="Microsoft JhengHei"/>
                           <a:cs typeface="Microsoft JhengHei"/>
                         </a:rPr>
-                        <a:t>6146</a:t>
+                        <a:t>6425</a:t>
                       </a:r>
                     </a:p>
                   </a:txBody>
@@ -5071,13 +5315,13 @@
                       <a:r>
                         <a:rPr sz="1150" b="1">
                           <a:solidFill>
-                            <a:srgbClr val="5C6679"/>
+                            <a:srgbClr val="F4A261"/>
                           </a:solidFill>
                           <a:latin typeface="Microsoft JhengHei"/>
                           <a:ea typeface="Microsoft JhengHei"/>
                           <a:cs typeface="Microsoft JhengHei"/>
                         </a:rPr>
-                        <a:t>其他</a:t>
+                        <a:t>勒索病毒/加密</a:t>
                       </a:r>
                     </a:p>
                   </a:txBody>
@@ -5101,7 +5345,7 @@
                           <a:ea typeface="Microsoft JhengHei"/>
                           <a:cs typeface="Microsoft JhengHei"/>
                         </a:rPr>
-                        <a:t>受影響之資料檔案留有備份，不影響公司營運、業務進行等。</a:t>
+                        <a:t>目前初步評估對公司運作無重大影響。</a:t>
                       </a:r>
                     </a:p>
                   </a:txBody>
@@ -5112,7 +5356,7 @@
                   </a:tcPr>
                 </a:tc>
               </a:tr>
-              <a:tr h="356616">
+              <a:tr h="324200">
                 <a:tc>
                   <a:txBody>
                     <a:bodyPr/>
@@ -5127,7 +5371,7 @@
                           <a:ea typeface="Microsoft JhengHei"/>
                           <a:cs typeface="Microsoft JhengHei"/>
                         </a:rPr>
-                        <a:t>易發</a:t>
+                        <a:t>尼得科超眾</a:t>
                       </a:r>
                     </a:p>
                   </a:txBody>
@@ -5151,7 +5395,7 @@
                           <a:ea typeface="Microsoft JhengHei"/>
                           <a:cs typeface="Microsoft JhengHei"/>
                         </a:rPr>
-                        <a:t>6425</a:t>
+                        <a:t>6230</a:t>
                       </a:r>
                     </a:p>
                   </a:txBody>
@@ -5223,135 +5467,13 @@
                           <a:ea typeface="Microsoft JhengHei"/>
                           <a:cs typeface="Microsoft JhengHei"/>
                         </a:rPr>
-                        <a:t>目前初步評估對公司運作無重大影響。</a:t>
+                        <a:t>目前受影響之系統正陸續復原中，對公司整體營運及財務之影響程度尚在評估…</a:t>
                       </a:r>
                     </a:p>
                   </a:txBody>
                   <a:tcPr anchor="ctr" marL="73152" marT="9144" marB="9144">
                     <a:solidFill>
                       <a:srgbClr val="EEF2F9"/>
-                    </a:solidFill>
-                  </a:tcPr>
-                </a:tc>
-              </a:tr>
-              <a:tr h="356616">
-                <a:tc>
-                  <a:txBody>
-                    <a:bodyPr/>
-                    <a:lstStyle/>
-                    <a:p>
-                      <a:r>
-                        <a:rPr sz="1150" b="0">
-                          <a:solidFill>
-                            <a:srgbClr val="1A2233"/>
-                          </a:solidFill>
-                          <a:latin typeface="Microsoft JhengHei"/>
-                          <a:ea typeface="Microsoft JhengHei"/>
-                          <a:cs typeface="Microsoft JhengHei"/>
-                        </a:rPr>
-                        <a:t>尼得科超眾</a:t>
-                      </a:r>
-                    </a:p>
-                  </a:txBody>
-                  <a:tcPr anchor="ctr" marL="73152" marT="9144" marB="9144">
-                    <a:solidFill>
-                      <a:srgbClr val="FFFFFF"/>
-                    </a:solidFill>
-                  </a:tcPr>
-                </a:tc>
-                <a:tc>
-                  <a:txBody>
-                    <a:bodyPr/>
-                    <a:lstStyle/>
-                    <a:p>
-                      <a:r>
-                        <a:rPr sz="1150" b="0">
-                          <a:solidFill>
-                            <a:srgbClr val="1A2233"/>
-                          </a:solidFill>
-                          <a:latin typeface="Microsoft JhengHei"/>
-                          <a:ea typeface="Microsoft JhengHei"/>
-                          <a:cs typeface="Microsoft JhengHei"/>
-                        </a:rPr>
-                        <a:t>6230</a:t>
-                      </a:r>
-                    </a:p>
-                  </a:txBody>
-                  <a:tcPr anchor="ctr" marL="73152" marT="9144" marB="9144">
-                    <a:solidFill>
-                      <a:srgbClr val="FFFFFF"/>
-                    </a:solidFill>
-                  </a:tcPr>
-                </a:tc>
-                <a:tc>
-                  <a:txBody>
-                    <a:bodyPr/>
-                    <a:lstStyle/>
-                    <a:p>
-                      <a:r>
-                        <a:rPr sz="1150" b="0">
-                          <a:solidFill>
-                            <a:srgbClr val="1A2233"/>
-                          </a:solidFill>
-                          <a:latin typeface="Microsoft JhengHei"/>
-                          <a:ea typeface="Microsoft JhengHei"/>
-                          <a:cs typeface="Microsoft JhengHei"/>
-                        </a:rPr>
-                        <a:t>06/22</a:t>
-                      </a:r>
-                    </a:p>
-                  </a:txBody>
-                  <a:tcPr anchor="ctr" marL="73152" marT="9144" marB="9144">
-                    <a:solidFill>
-                      <a:srgbClr val="FFFFFF"/>
-                    </a:solidFill>
-                  </a:tcPr>
-                </a:tc>
-                <a:tc>
-                  <a:txBody>
-                    <a:bodyPr/>
-                    <a:lstStyle/>
-                    <a:p>
-                      <a:r>
-                        <a:rPr sz="1150" b="1">
-                          <a:solidFill>
-                            <a:srgbClr val="F4A261"/>
-                          </a:solidFill>
-                          <a:latin typeface="Microsoft JhengHei"/>
-                          <a:ea typeface="Microsoft JhengHei"/>
-                          <a:cs typeface="Microsoft JhengHei"/>
-                        </a:rPr>
-                        <a:t>勒索病毒/加密</a:t>
-                      </a:r>
-                    </a:p>
-                  </a:txBody>
-                  <a:tcPr anchor="ctr" marL="73152" marT="9144" marB="9144">
-                    <a:solidFill>
-                      <a:srgbClr val="FFFFFF"/>
-                    </a:solidFill>
-                  </a:tcPr>
-                </a:tc>
-                <a:tc>
-                  <a:txBody>
-                    <a:bodyPr/>
-                    <a:lstStyle/>
-                    <a:p>
-                      <a:r>
-                        <a:rPr sz="1150" b="0">
-                          <a:solidFill>
-                            <a:srgbClr val="1A2233"/>
-                          </a:solidFill>
-                          <a:latin typeface="Microsoft JhengHei"/>
-                          <a:ea typeface="Microsoft JhengHei"/>
-                          <a:cs typeface="Microsoft JhengHei"/>
-                        </a:rPr>
-                        <a:t>目前受影響之系統正陸續復原中，對公司整體營運及財務之影響程度尚在評估…</a:t>
-                      </a:r>
-                    </a:p>
-                  </a:txBody>
-                  <a:tcPr anchor="ctr" marL="73152" marT="9144" marB="9144">
-                    <a:solidFill>
-                      <a:srgbClr val="FFFFFF"/>
                     </a:solidFill>
                   </a:tcPr>
                 </a:tc>
@@ -6149,7 +6271,7 @@
                 <a:ea typeface="Microsoft JhengHei"/>
                 <a:cs typeface="Microsoft JhengHei"/>
               </a:rPr>
-              <a:t>3 起</a:t>
+              <a:t>4 起</a:t>
             </a:r>
           </a:p>
         </p:txBody>
@@ -6186,7 +6308,7 @@
                 <a:ea typeface="Microsoft JhengHei"/>
                 <a:cs typeface="Microsoft JhengHei"/>
               </a:rPr>
-              <a:t>淳安、GOGOLOOK、耕興</a:t>
+              <a:t>淳安、淳安、GOGOLOOK、耕興</a:t>
             </a:r>
           </a:p>
         </p:txBody>
@@ -6389,7 +6511,7 @@
                 <a:gridCol w="3383280"/>
                 <a:gridCol w="2606040"/>
               </a:tblGrid>
-              <a:tr h="448056">
+              <a:tr h="407323">
                 <a:tc>
                   <a:txBody>
                     <a:bodyPr/>
@@ -6511,7 +6633,7 @@
                   </a:tcPr>
                 </a:tc>
               </a:tr>
-              <a:tr h="448056">
+              <a:tr h="407323">
                 <a:tc>
                   <a:txBody>
                     <a:bodyPr/>
@@ -6633,7 +6755,7 @@
                   </a:tcPr>
                 </a:tc>
               </a:tr>
-              <a:tr h="448056">
+              <a:tr h="407323">
                 <a:tc>
                   <a:txBody>
                     <a:bodyPr/>
@@ -6648,7 +6770,7 @@
                           <a:ea typeface="Microsoft JhengHei"/>
                           <a:cs typeface="Microsoft JhengHei"/>
                         </a:rPr>
-                        <a:t>松上</a:t>
+                        <a:t>淳安</a:t>
                       </a:r>
                     </a:p>
                   </a:txBody>
@@ -6672,7 +6794,251 @@
                           <a:ea typeface="Microsoft JhengHei"/>
                           <a:cs typeface="Microsoft JhengHei"/>
                         </a:rPr>
+                        <a:t>6283</a:t>
+                      </a:r>
+                    </a:p>
+                  </a:txBody>
+                  <a:tcPr anchor="ctr" marL="73152" marT="9144" marB="9144">
+                    <a:solidFill>
+                      <a:srgbClr val="EEF2F9"/>
+                    </a:solidFill>
+                  </a:tcPr>
+                </a:tc>
+                <a:tc>
+                  <a:txBody>
+                    <a:bodyPr/>
+                    <a:lstStyle/>
+                    <a:p>
+                      <a:r>
+                        <a:rPr sz="1150" b="1">
+                          <a:solidFill>
+                            <a:srgbClr val="5C6679"/>
+                          </a:solidFill>
+                          <a:latin typeface="Microsoft JhengHei"/>
+                          <a:ea typeface="Microsoft JhengHei"/>
+                          <a:cs typeface="Microsoft JhengHei"/>
+                        </a:rPr>
+                        <a:t>其他</a:t>
+                      </a:r>
+                    </a:p>
+                  </a:txBody>
+                  <a:tcPr anchor="ctr" marL="73152" marT="9144" marB="9144">
+                    <a:solidFill>
+                      <a:srgbClr val="EEF2F9"/>
+                    </a:solidFill>
+                  </a:tcPr>
+                </a:tc>
+                <a:tc>
+                  <a:txBody>
+                    <a:bodyPr/>
+                    <a:lstStyle/>
+                    <a:p>
+                      <a:r>
+                        <a:rPr sz="1150" b="0">
+                          <a:solidFill>
+                            <a:srgbClr val="1A2233"/>
+                          </a:solidFill>
+                          <a:latin typeface="Microsoft JhengHei"/>
+                          <a:ea typeface="Microsoft JhengHei"/>
+                          <a:cs typeface="Microsoft JhengHei"/>
+                        </a:rPr>
+                        <a:t>資誠聯合會計師事務所</a:t>
+                      </a:r>
+                    </a:p>
+                  </a:txBody>
+                  <a:tcPr anchor="ctr" marL="73152" marT="9144" marB="9144">
+                    <a:solidFill>
+                      <a:srgbClr val="EEF2F9"/>
+                    </a:solidFill>
+                  </a:tcPr>
+                </a:tc>
+                <a:tc>
+                  <a:txBody>
+                    <a:bodyPr/>
+                    <a:lstStyle/>
+                    <a:p>
+                      <a:r>
+                        <a:rPr sz="1150" b="0">
+                          <a:solidFill>
+                            <a:srgbClr val="1A2233"/>
+                          </a:solidFill>
+                          <a:latin typeface="Microsoft JhengHei"/>
+                          <a:ea typeface="Microsoft JhengHei"/>
+                          <a:cs typeface="Microsoft JhengHei"/>
+                        </a:rPr>
+                        <a:t>林永智、廖福銘</a:t>
+                      </a:r>
+                    </a:p>
+                  </a:txBody>
+                  <a:tcPr anchor="ctr" marL="73152" marT="9144" marB="9144">
+                    <a:solidFill>
+                      <a:srgbClr val="EEF2F9"/>
+                    </a:solidFill>
+                  </a:tcPr>
+                </a:tc>
+              </a:tr>
+              <a:tr h="407323">
+                <a:tc>
+                  <a:txBody>
+                    <a:bodyPr/>
+                    <a:lstStyle/>
+                    <a:p>
+                      <a:r>
+                        <a:rPr sz="1150" b="0">
+                          <a:solidFill>
+                            <a:srgbClr val="1A2233"/>
+                          </a:solidFill>
+                          <a:latin typeface="Microsoft JhengHei"/>
+                          <a:ea typeface="Microsoft JhengHei"/>
+                          <a:cs typeface="Microsoft JhengHei"/>
+                        </a:rPr>
+                        <a:t>松上</a:t>
+                      </a:r>
+                    </a:p>
+                  </a:txBody>
+                  <a:tcPr anchor="ctr" marL="73152" marT="9144" marB="9144">
+                    <a:solidFill>
+                      <a:srgbClr val="FFFFFF"/>
+                    </a:solidFill>
+                  </a:tcPr>
+                </a:tc>
+                <a:tc>
+                  <a:txBody>
+                    <a:bodyPr/>
+                    <a:lstStyle/>
+                    <a:p>
+                      <a:r>
+                        <a:rPr sz="1150" b="0">
+                          <a:solidFill>
+                            <a:srgbClr val="1A2233"/>
+                          </a:solidFill>
+                          <a:latin typeface="Microsoft JhengHei"/>
+                          <a:ea typeface="Microsoft JhengHei"/>
+                          <a:cs typeface="Microsoft JhengHei"/>
+                        </a:rPr>
                         <a:t>6156</a:t>
+                      </a:r>
+                    </a:p>
+                  </a:txBody>
+                  <a:tcPr anchor="ctr" marL="73152" marT="9144" marB="9144">
+                    <a:solidFill>
+                      <a:srgbClr val="FFFFFF"/>
+                    </a:solidFill>
+                  </a:tcPr>
+                </a:tc>
+                <a:tc>
+                  <a:txBody>
+                    <a:bodyPr/>
+                    <a:lstStyle/>
+                    <a:p>
+                      <a:r>
+                        <a:rPr sz="1150" b="1">
+                          <a:solidFill>
+                            <a:srgbClr val="E63946"/>
+                          </a:solidFill>
+                          <a:latin typeface="Microsoft JhengHei"/>
+                          <a:ea typeface="Microsoft JhengHei"/>
+                          <a:cs typeface="Microsoft JhengHei"/>
+                        </a:rPr>
+                        <a:t>駭客攻擊</a:t>
+                      </a:r>
+                    </a:p>
+                  </a:txBody>
+                  <a:tcPr anchor="ctr" marL="73152" marT="9144" marB="9144">
+                    <a:solidFill>
+                      <a:srgbClr val="FFFFFF"/>
+                    </a:solidFill>
+                  </a:tcPr>
+                </a:tc>
+                <a:tc>
+                  <a:txBody>
+                    <a:bodyPr/>
+                    <a:lstStyle/>
+                    <a:p>
+                      <a:r>
+                        <a:rPr sz="1150" b="0">
+                          <a:solidFill>
+                            <a:srgbClr val="1A2233"/>
+                          </a:solidFill>
+                          <a:latin typeface="Microsoft JhengHei"/>
+                          <a:ea typeface="Microsoft JhengHei"/>
+                          <a:cs typeface="Microsoft JhengHei"/>
+                        </a:rPr>
+                        <a:t>安永聯合會計師事務所</a:t>
+                      </a:r>
+                    </a:p>
+                  </a:txBody>
+                  <a:tcPr anchor="ctr" marL="73152" marT="9144" marB="9144">
+                    <a:solidFill>
+                      <a:srgbClr val="FFFFFF"/>
+                    </a:solidFill>
+                  </a:tcPr>
+                </a:tc>
+                <a:tc>
+                  <a:txBody>
+                    <a:bodyPr/>
+                    <a:lstStyle/>
+                    <a:p>
+                      <a:r>
+                        <a:rPr sz="1150" b="0">
+                          <a:solidFill>
+                            <a:srgbClr val="1A2233"/>
+                          </a:solidFill>
+                          <a:latin typeface="Microsoft JhengHei"/>
+                          <a:ea typeface="Microsoft JhengHei"/>
+                          <a:cs typeface="Microsoft JhengHei"/>
+                        </a:rPr>
+                        <a:t>羅筱靖、陳國帥</a:t>
+                      </a:r>
+                    </a:p>
+                  </a:txBody>
+                  <a:tcPr anchor="ctr" marL="73152" marT="9144" marB="9144">
+                    <a:solidFill>
+                      <a:srgbClr val="FFFFFF"/>
+                    </a:solidFill>
+                  </a:tcPr>
+                </a:tc>
+              </a:tr>
+              <a:tr h="407323">
+                <a:tc>
+                  <a:txBody>
+                    <a:bodyPr/>
+                    <a:lstStyle/>
+                    <a:p>
+                      <a:r>
+                        <a:rPr sz="1150" b="0">
+                          <a:solidFill>
+                            <a:srgbClr val="1A2233"/>
+                          </a:solidFill>
+                          <a:latin typeface="Microsoft JhengHei"/>
+                          <a:ea typeface="Microsoft JhengHei"/>
+                          <a:cs typeface="Microsoft JhengHei"/>
+                        </a:rPr>
+                        <a:t>優盛</a:t>
+                      </a:r>
+                    </a:p>
+                  </a:txBody>
+                  <a:tcPr anchor="ctr" marL="73152" marT="9144" marB="9144">
+                    <a:solidFill>
+                      <a:srgbClr val="EEF2F9"/>
+                    </a:solidFill>
+                  </a:tcPr>
+                </a:tc>
+                <a:tc>
+                  <a:txBody>
+                    <a:bodyPr/>
+                    <a:lstStyle/>
+                    <a:p>
+                      <a:r>
+                        <a:rPr sz="1150" b="0">
+                          <a:solidFill>
+                            <a:srgbClr val="1A2233"/>
+                          </a:solidFill>
+                          <a:latin typeface="Microsoft JhengHei"/>
+                          <a:ea typeface="Microsoft JhengHei"/>
+                          <a:cs typeface="Microsoft JhengHei"/>
+                        </a:rPr>
+                        <a:t>4121</a:t>
                       </a:r>
                     </a:p>
                   </a:txBody>
@@ -6720,7 +7086,7 @@
                           <a:ea typeface="Microsoft JhengHei"/>
                           <a:cs typeface="Microsoft JhengHei"/>
                         </a:rPr>
-                        <a:t>安永聯合會計師事務所</a:t>
+                        <a:t>安侯建業聯合會計師事務所</a:t>
                       </a:r>
                     </a:p>
                   </a:txBody>
@@ -6744,7 +7110,7 @@
                           <a:ea typeface="Microsoft JhengHei"/>
                           <a:cs typeface="Microsoft JhengHei"/>
                         </a:rPr>
-                        <a:t>羅筱靖、陳國帥</a:t>
+                        <a:t>鄒依芸、毛聖崴</a:t>
                       </a:r>
                     </a:p>
                   </a:txBody>
@@ -6755,7 +7121,7 @@
                   </a:tcPr>
                 </a:tc>
               </a:tr>
-              <a:tr h="448056">
+              <a:tr h="407323">
                 <a:tc>
                   <a:txBody>
                     <a:bodyPr/>
@@ -6770,7 +7136,7 @@
                           <a:ea typeface="Microsoft JhengHei"/>
                           <a:cs typeface="Microsoft JhengHei"/>
                         </a:rPr>
-                        <a:t>優盛</a:t>
+                        <a:t>麗清</a:t>
                       </a:r>
                     </a:p>
                   </a:txBody>
@@ -6794,7 +7160,7 @@
                           <a:ea typeface="Microsoft JhengHei"/>
                           <a:cs typeface="Microsoft JhengHei"/>
                         </a:rPr>
-                        <a:t>4121</a:t>
+                        <a:t>3346</a:t>
                       </a:r>
                     </a:p>
                   </a:txBody>
@@ -6842,7 +7208,7 @@
                           <a:ea typeface="Microsoft JhengHei"/>
                           <a:cs typeface="Microsoft JhengHei"/>
                         </a:rPr>
-                        <a:t>安侯建業聯合會計師事務所</a:t>
+                        <a:t>勤業眾信聯合會計師事務所</a:t>
                       </a:r>
                     </a:p>
                   </a:txBody>
@@ -6866,7 +7232,7 @@
                           <a:ea typeface="Microsoft JhengHei"/>
                           <a:cs typeface="Microsoft JhengHei"/>
                         </a:rPr>
-                        <a:t>鄒依芸、毛聖崴</a:t>
+                        <a:t>陳致源、黃堯麟</a:t>
                       </a:r>
                     </a:p>
                   </a:txBody>
@@ -6877,7 +7243,7 @@
                   </a:tcPr>
                 </a:tc>
               </a:tr>
-              <a:tr h="448056">
+              <a:tr h="407323">
                 <a:tc>
                   <a:txBody>
                     <a:bodyPr/>
@@ -6892,7 +7258,7 @@
                           <a:ea typeface="Microsoft JhengHei"/>
                           <a:cs typeface="Microsoft JhengHei"/>
                         </a:rPr>
-                        <a:t>麗清</a:t>
+                        <a:t>GOGOLOOK</a:t>
                       </a:r>
                     </a:p>
                   </a:txBody>
@@ -6916,13 +7282,135 @@
                           <a:ea typeface="Microsoft JhengHei"/>
                           <a:cs typeface="Microsoft JhengHei"/>
                         </a:rPr>
-                        <a:t>3346</a:t>
+                        <a:t>6902</a:t>
                       </a:r>
                     </a:p>
                   </a:txBody>
                   <a:tcPr anchor="ctr" marL="73152" marT="9144" marB="9144">
                     <a:solidFill>
                       <a:srgbClr val="EEF2F9"/>
+                    </a:solidFill>
+                  </a:tcPr>
+                </a:tc>
+                <a:tc>
+                  <a:txBody>
+                    <a:bodyPr/>
+                    <a:lstStyle/>
+                    <a:p>
+                      <a:r>
+                        <a:rPr sz="1150" b="1">
+                          <a:solidFill>
+                            <a:srgbClr val="5C6679"/>
+                          </a:solidFill>
+                          <a:latin typeface="Microsoft JhengHei"/>
+                          <a:ea typeface="Microsoft JhengHei"/>
+                          <a:cs typeface="Microsoft JhengHei"/>
+                        </a:rPr>
+                        <a:t>其他</a:t>
+                      </a:r>
+                    </a:p>
+                  </a:txBody>
+                  <a:tcPr anchor="ctr" marL="73152" marT="9144" marB="9144">
+                    <a:solidFill>
+                      <a:srgbClr val="EEF2F9"/>
+                    </a:solidFill>
+                  </a:tcPr>
+                </a:tc>
+                <a:tc>
+                  <a:txBody>
+                    <a:bodyPr/>
+                    <a:lstStyle/>
+                    <a:p>
+                      <a:r>
+                        <a:rPr sz="1150" b="0">
+                          <a:solidFill>
+                            <a:srgbClr val="1A2233"/>
+                          </a:solidFill>
+                          <a:latin typeface="Microsoft JhengHei"/>
+                          <a:ea typeface="Microsoft JhengHei"/>
+                          <a:cs typeface="Microsoft JhengHei"/>
+                        </a:rPr>
+                        <a:t>資誠聯合會計師事務所</a:t>
+                      </a:r>
+                    </a:p>
+                  </a:txBody>
+                  <a:tcPr anchor="ctr" marL="73152" marT="9144" marB="9144">
+                    <a:solidFill>
+                      <a:srgbClr val="EEF2F9"/>
+                    </a:solidFill>
+                  </a:tcPr>
+                </a:tc>
+                <a:tc>
+                  <a:txBody>
+                    <a:bodyPr/>
+                    <a:lstStyle/>
+                    <a:p>
+                      <a:r>
+                        <a:rPr sz="1150" b="0">
+                          <a:solidFill>
+                            <a:srgbClr val="1A2233"/>
+                          </a:solidFill>
+                          <a:latin typeface="Microsoft JhengHei"/>
+                          <a:ea typeface="Microsoft JhengHei"/>
+                          <a:cs typeface="Microsoft JhengHei"/>
+                        </a:rPr>
+                        <a:t>吳尚燉、王昱欣</a:t>
+                      </a:r>
+                    </a:p>
+                  </a:txBody>
+                  <a:tcPr anchor="ctr" marL="73152" marT="9144" marB="9144">
+                    <a:solidFill>
+                      <a:srgbClr val="EEF2F9"/>
+                    </a:solidFill>
+                  </a:tcPr>
+                </a:tc>
+              </a:tr>
+              <a:tr h="407323">
+                <a:tc>
+                  <a:txBody>
+                    <a:bodyPr/>
+                    <a:lstStyle/>
+                    <a:p>
+                      <a:r>
+                        <a:rPr sz="1150" b="0">
+                          <a:solidFill>
+                            <a:srgbClr val="1A2233"/>
+                          </a:solidFill>
+                          <a:latin typeface="Microsoft JhengHei"/>
+                          <a:ea typeface="Microsoft JhengHei"/>
+                          <a:cs typeface="Microsoft JhengHei"/>
+                        </a:rPr>
+                        <a:t>網家</a:t>
+                      </a:r>
+                    </a:p>
+                  </a:txBody>
+                  <a:tcPr anchor="ctr" marL="73152" marT="9144" marB="9144">
+                    <a:solidFill>
+                      <a:srgbClr val="FFFFFF"/>
+                    </a:solidFill>
+                  </a:tcPr>
+                </a:tc>
+                <a:tc>
+                  <a:txBody>
+                    <a:bodyPr/>
+                    <a:lstStyle/>
+                    <a:p>
+                      <a:r>
+                        <a:rPr sz="1150" b="0">
+                          <a:solidFill>
+                            <a:srgbClr val="1A2233"/>
+                          </a:solidFill>
+                          <a:latin typeface="Microsoft JhengHei"/>
+                          <a:ea typeface="Microsoft JhengHei"/>
+                          <a:cs typeface="Microsoft JhengHei"/>
+                        </a:rPr>
+                        <a:t>8044</a:t>
+                      </a:r>
+                    </a:p>
+                  </a:txBody>
+                  <a:tcPr anchor="ctr" marL="73152" marT="9144" marB="9144">
+                    <a:solidFill>
+                      <a:srgbClr val="FFFFFF"/>
                     </a:solidFill>
                   </a:tcPr>
                 </a:tc>
@@ -6941,6 +7429,128 @@
                           <a:cs typeface="Microsoft JhengHei"/>
                         </a:rPr>
                         <a:t>駭客攻擊</a:t>
+                      </a:r>
+                    </a:p>
+                  </a:txBody>
+                  <a:tcPr anchor="ctr" marL="73152" marT="9144" marB="9144">
+                    <a:solidFill>
+                      <a:srgbClr val="FFFFFF"/>
+                    </a:solidFill>
+                  </a:tcPr>
+                </a:tc>
+                <a:tc>
+                  <a:txBody>
+                    <a:bodyPr/>
+                    <a:lstStyle/>
+                    <a:p>
+                      <a:r>
+                        <a:rPr sz="1150" b="0">
+                          <a:solidFill>
+                            <a:srgbClr val="1A2233"/>
+                          </a:solidFill>
+                          <a:latin typeface="Microsoft JhengHei"/>
+                          <a:ea typeface="Microsoft JhengHei"/>
+                          <a:cs typeface="Microsoft JhengHei"/>
+                        </a:rPr>
+                        <a:t>資誠聯合會計師事務所</a:t>
+                      </a:r>
+                    </a:p>
+                  </a:txBody>
+                  <a:tcPr anchor="ctr" marL="73152" marT="9144" marB="9144">
+                    <a:solidFill>
+                      <a:srgbClr val="FFFFFF"/>
+                    </a:solidFill>
+                  </a:tcPr>
+                </a:tc>
+                <a:tc>
+                  <a:txBody>
+                    <a:bodyPr/>
+                    <a:lstStyle/>
+                    <a:p>
+                      <a:r>
+                        <a:rPr sz="1150" b="0">
+                          <a:solidFill>
+                            <a:srgbClr val="1A2233"/>
+                          </a:solidFill>
+                          <a:latin typeface="Microsoft JhengHei"/>
+                          <a:ea typeface="Microsoft JhengHei"/>
+                          <a:cs typeface="Microsoft JhengHei"/>
+                        </a:rPr>
+                        <a:t>廖容翎、梁嬋女</a:t>
+                      </a:r>
+                    </a:p>
+                  </a:txBody>
+                  <a:tcPr anchor="ctr" marL="73152" marT="9144" marB="9144">
+                    <a:solidFill>
+                      <a:srgbClr val="FFFFFF"/>
+                    </a:solidFill>
+                  </a:tcPr>
+                </a:tc>
+              </a:tr>
+              <a:tr h="407323">
+                <a:tc>
+                  <a:txBody>
+                    <a:bodyPr/>
+                    <a:lstStyle/>
+                    <a:p>
+                      <a:r>
+                        <a:rPr sz="1150" b="0">
+                          <a:solidFill>
+                            <a:srgbClr val="1A2233"/>
+                          </a:solidFill>
+                          <a:latin typeface="Microsoft JhengHei"/>
+                          <a:ea typeface="Microsoft JhengHei"/>
+                          <a:cs typeface="Microsoft JhengHei"/>
+                        </a:rPr>
+                        <a:t>耕興</a:t>
+                      </a:r>
+                    </a:p>
+                  </a:txBody>
+                  <a:tcPr anchor="ctr" marL="73152" marT="9144" marB="9144">
+                    <a:solidFill>
+                      <a:srgbClr val="EEF2F9"/>
+                    </a:solidFill>
+                  </a:tcPr>
+                </a:tc>
+                <a:tc>
+                  <a:txBody>
+                    <a:bodyPr/>
+                    <a:lstStyle/>
+                    <a:p>
+                      <a:r>
+                        <a:rPr sz="1150" b="0">
+                          <a:solidFill>
+                            <a:srgbClr val="1A2233"/>
+                          </a:solidFill>
+                          <a:latin typeface="Microsoft JhengHei"/>
+                          <a:ea typeface="Microsoft JhengHei"/>
+                          <a:cs typeface="Microsoft JhengHei"/>
+                        </a:rPr>
+                        <a:t>6146</a:t>
+                      </a:r>
+                    </a:p>
+                  </a:txBody>
+                  <a:tcPr anchor="ctr" marL="73152" marT="9144" marB="9144">
+                    <a:solidFill>
+                      <a:srgbClr val="EEF2F9"/>
+                    </a:solidFill>
+                  </a:tcPr>
+                </a:tc>
+                <a:tc>
+                  <a:txBody>
+                    <a:bodyPr/>
+                    <a:lstStyle/>
+                    <a:p>
+                      <a:r>
+                        <a:rPr sz="1150" b="1">
+                          <a:solidFill>
+                            <a:srgbClr val="5C6679"/>
+                          </a:solidFill>
+                          <a:latin typeface="Microsoft JhengHei"/>
+                          <a:ea typeface="Microsoft JhengHei"/>
+                          <a:cs typeface="Microsoft JhengHei"/>
+                        </a:rPr>
+                        <a:t>其他</a:t>
                       </a:r>
                     </a:p>
                   </a:txBody>
@@ -6988,7 +7598,7 @@
                           <a:ea typeface="Microsoft JhengHei"/>
                           <a:cs typeface="Microsoft JhengHei"/>
                         </a:rPr>
-                        <a:t>陳致源、黃堯麟</a:t>
+                        <a:t>黃毅民、陳文香</a:t>
                       </a:r>
                     </a:p>
                   </a:txBody>
@@ -6999,7 +7609,7 @@
                   </a:tcPr>
                 </a:tc>
               </a:tr>
-              <a:tr h="448056">
+              <a:tr h="407323">
                 <a:tc>
                   <a:txBody>
                     <a:bodyPr/>
@@ -7014,7 +7624,7 @@
                           <a:ea typeface="Microsoft JhengHei"/>
                           <a:cs typeface="Microsoft JhengHei"/>
                         </a:rPr>
-                        <a:t>GOGOLOOK</a:t>
+                        <a:t>易發</a:t>
                       </a:r>
                     </a:p>
                   </a:txBody>
@@ -7038,7 +7648,7 @@
                           <a:ea typeface="Microsoft JhengHei"/>
                           <a:cs typeface="Microsoft JhengHei"/>
                         </a:rPr>
-                        <a:t>6902</a:t>
+                        <a:t>6425</a:t>
                       </a:r>
                     </a:p>
                   </a:txBody>
@@ -7056,257 +7666,13 @@
                       <a:r>
                         <a:rPr sz="1150" b="1">
                           <a:solidFill>
-                            <a:srgbClr val="5C6679"/>
+                            <a:srgbClr val="F4A261"/>
                           </a:solidFill>
                           <a:latin typeface="Microsoft JhengHei"/>
                           <a:ea typeface="Microsoft JhengHei"/>
                           <a:cs typeface="Microsoft JhengHei"/>
                         </a:rPr>
-                        <a:t>其他</a:t>
-                      </a:r>
-                    </a:p>
-                  </a:txBody>
-                  <a:tcPr anchor="ctr" marL="73152" marT="9144" marB="9144">
-                    <a:solidFill>
-                      <a:srgbClr val="FFFFFF"/>
-                    </a:solidFill>
-                  </a:tcPr>
-                </a:tc>
-                <a:tc>
-                  <a:txBody>
-                    <a:bodyPr/>
-                    <a:lstStyle/>
-                    <a:p>
-                      <a:r>
-                        <a:rPr sz="1150" b="0">
-                          <a:solidFill>
-                            <a:srgbClr val="1A2233"/>
-                          </a:solidFill>
-                          <a:latin typeface="Microsoft JhengHei"/>
-                          <a:ea typeface="Microsoft JhengHei"/>
-                          <a:cs typeface="Microsoft JhengHei"/>
-                        </a:rPr>
-                        <a:t>資誠聯合會計師事務所</a:t>
-                      </a:r>
-                    </a:p>
-                  </a:txBody>
-                  <a:tcPr anchor="ctr" marL="73152" marT="9144" marB="9144">
-                    <a:solidFill>
-                      <a:srgbClr val="FFFFFF"/>
-                    </a:solidFill>
-                  </a:tcPr>
-                </a:tc>
-                <a:tc>
-                  <a:txBody>
-                    <a:bodyPr/>
-                    <a:lstStyle/>
-                    <a:p>
-                      <a:r>
-                        <a:rPr sz="1150" b="0">
-                          <a:solidFill>
-                            <a:srgbClr val="1A2233"/>
-                          </a:solidFill>
-                          <a:latin typeface="Microsoft JhengHei"/>
-                          <a:ea typeface="Microsoft JhengHei"/>
-                          <a:cs typeface="Microsoft JhengHei"/>
-                        </a:rPr>
-                        <a:t>吳尚燉、王昱欣</a:t>
-                      </a:r>
-                    </a:p>
-                  </a:txBody>
-                  <a:tcPr anchor="ctr" marL="73152" marT="9144" marB="9144">
-                    <a:solidFill>
-                      <a:srgbClr val="FFFFFF"/>
-                    </a:solidFill>
-                  </a:tcPr>
-                </a:tc>
-              </a:tr>
-              <a:tr h="448056">
-                <a:tc>
-                  <a:txBody>
-                    <a:bodyPr/>
-                    <a:lstStyle/>
-                    <a:p>
-                      <a:r>
-                        <a:rPr sz="1150" b="0">
-                          <a:solidFill>
-                            <a:srgbClr val="1A2233"/>
-                          </a:solidFill>
-                          <a:latin typeface="Microsoft JhengHei"/>
-                          <a:ea typeface="Microsoft JhengHei"/>
-                          <a:cs typeface="Microsoft JhengHei"/>
-                        </a:rPr>
-                        <a:t>網家</a:t>
-                      </a:r>
-                    </a:p>
-                  </a:txBody>
-                  <a:tcPr anchor="ctr" marL="73152" marT="9144" marB="9144">
-                    <a:solidFill>
-                      <a:srgbClr val="EEF2F9"/>
-                    </a:solidFill>
-                  </a:tcPr>
-                </a:tc>
-                <a:tc>
-                  <a:txBody>
-                    <a:bodyPr/>
-                    <a:lstStyle/>
-                    <a:p>
-                      <a:r>
-                        <a:rPr sz="1150" b="0">
-                          <a:solidFill>
-                            <a:srgbClr val="1A2233"/>
-                          </a:solidFill>
-                          <a:latin typeface="Microsoft JhengHei"/>
-                          <a:ea typeface="Microsoft JhengHei"/>
-                          <a:cs typeface="Microsoft JhengHei"/>
-                        </a:rPr>
-                        <a:t>8044</a:t>
-                      </a:r>
-                    </a:p>
-                  </a:txBody>
-                  <a:tcPr anchor="ctr" marL="73152" marT="9144" marB="9144">
-                    <a:solidFill>
-                      <a:srgbClr val="EEF2F9"/>
-                    </a:solidFill>
-                  </a:tcPr>
-                </a:tc>
-                <a:tc>
-                  <a:txBody>
-                    <a:bodyPr/>
-                    <a:lstStyle/>
-                    <a:p>
-                      <a:r>
-                        <a:rPr sz="1150" b="1">
-                          <a:solidFill>
-                            <a:srgbClr val="E63946"/>
-                          </a:solidFill>
-                          <a:latin typeface="Microsoft JhengHei"/>
-                          <a:ea typeface="Microsoft JhengHei"/>
-                          <a:cs typeface="Microsoft JhengHei"/>
-                        </a:rPr>
-                        <a:t>駭客攻擊</a:t>
-                      </a:r>
-                    </a:p>
-                  </a:txBody>
-                  <a:tcPr anchor="ctr" marL="73152" marT="9144" marB="9144">
-                    <a:solidFill>
-                      <a:srgbClr val="EEF2F9"/>
-                    </a:solidFill>
-                  </a:tcPr>
-                </a:tc>
-                <a:tc>
-                  <a:txBody>
-                    <a:bodyPr/>
-                    <a:lstStyle/>
-                    <a:p>
-                      <a:r>
-                        <a:rPr sz="1150" b="0">
-                          <a:solidFill>
-                            <a:srgbClr val="1A2233"/>
-                          </a:solidFill>
-                          <a:latin typeface="Microsoft JhengHei"/>
-                          <a:ea typeface="Microsoft JhengHei"/>
-                          <a:cs typeface="Microsoft JhengHei"/>
-                        </a:rPr>
-                        <a:t>資誠聯合會計師事務所</a:t>
-                      </a:r>
-                    </a:p>
-                  </a:txBody>
-                  <a:tcPr anchor="ctr" marL="73152" marT="9144" marB="9144">
-                    <a:solidFill>
-                      <a:srgbClr val="EEF2F9"/>
-                    </a:solidFill>
-                  </a:tcPr>
-                </a:tc>
-                <a:tc>
-                  <a:txBody>
-                    <a:bodyPr/>
-                    <a:lstStyle/>
-                    <a:p>
-                      <a:r>
-                        <a:rPr sz="1150" b="0">
-                          <a:solidFill>
-                            <a:srgbClr val="1A2233"/>
-                          </a:solidFill>
-                          <a:latin typeface="Microsoft JhengHei"/>
-                          <a:ea typeface="Microsoft JhengHei"/>
-                          <a:cs typeface="Microsoft JhengHei"/>
-                        </a:rPr>
-                        <a:t>廖容翎、梁嬋女</a:t>
-                      </a:r>
-                    </a:p>
-                  </a:txBody>
-                  <a:tcPr anchor="ctr" marL="73152" marT="9144" marB="9144">
-                    <a:solidFill>
-                      <a:srgbClr val="EEF2F9"/>
-                    </a:solidFill>
-                  </a:tcPr>
-                </a:tc>
-              </a:tr>
-              <a:tr h="448056">
-                <a:tc>
-                  <a:txBody>
-                    <a:bodyPr/>
-                    <a:lstStyle/>
-                    <a:p>
-                      <a:r>
-                        <a:rPr sz="1150" b="0">
-                          <a:solidFill>
-                            <a:srgbClr val="1A2233"/>
-                          </a:solidFill>
-                          <a:latin typeface="Microsoft JhengHei"/>
-                          <a:ea typeface="Microsoft JhengHei"/>
-                          <a:cs typeface="Microsoft JhengHei"/>
-                        </a:rPr>
-                        <a:t>耕興</a:t>
-                      </a:r>
-                    </a:p>
-                  </a:txBody>
-                  <a:tcPr anchor="ctr" marL="73152" marT="9144" marB="9144">
-                    <a:solidFill>
-                      <a:srgbClr val="FFFFFF"/>
-                    </a:solidFill>
-                  </a:tcPr>
-                </a:tc>
-                <a:tc>
-                  <a:txBody>
-                    <a:bodyPr/>
-                    <a:lstStyle/>
-                    <a:p>
-                      <a:r>
-                        <a:rPr sz="1150" b="0">
-                          <a:solidFill>
-                            <a:srgbClr val="1A2233"/>
-                          </a:solidFill>
-                          <a:latin typeface="Microsoft JhengHei"/>
-                          <a:ea typeface="Microsoft JhengHei"/>
-                          <a:cs typeface="Microsoft JhengHei"/>
-                        </a:rPr>
-                        <a:t>6146</a:t>
-                      </a:r>
-                    </a:p>
-                  </a:txBody>
-                  <a:tcPr anchor="ctr" marL="73152" marT="9144" marB="9144">
-                    <a:solidFill>
-                      <a:srgbClr val="FFFFFF"/>
-                    </a:solidFill>
-                  </a:tcPr>
-                </a:tc>
-                <a:tc>
-                  <a:txBody>
-                    <a:bodyPr/>
-                    <a:lstStyle/>
-                    <a:p>
-                      <a:r>
-                        <a:rPr sz="1150" b="1">
-                          <a:solidFill>
-                            <a:srgbClr val="5C6679"/>
-                          </a:solidFill>
-                          <a:latin typeface="Microsoft JhengHei"/>
-                          <a:ea typeface="Microsoft JhengHei"/>
-                          <a:cs typeface="Microsoft JhengHei"/>
-                        </a:rPr>
-                        <a:t>其他</a:t>
+                        <a:t>勒索病毒/加密</a:t>
                       </a:r>
                     </a:p>
                   </a:txBody>
@@ -7354,7 +7720,7 @@
                           <a:ea typeface="Microsoft JhengHei"/>
                           <a:cs typeface="Microsoft JhengHei"/>
                         </a:rPr>
-                        <a:t>黃毅民、陳文香</a:t>
+                        <a:t>張至誼、洪國田</a:t>
                       </a:r>
                     </a:p>
                   </a:txBody>
@@ -7365,7 +7731,7 @@
                   </a:tcPr>
                 </a:tc>
               </a:tr>
-              <a:tr h="448056">
+              <a:tr h="407330">
                 <a:tc>
                   <a:txBody>
                     <a:bodyPr/>
@@ -7380,7 +7746,7 @@
                           <a:ea typeface="Microsoft JhengHei"/>
                           <a:cs typeface="Microsoft JhengHei"/>
                         </a:rPr>
-                        <a:t>易發</a:t>
+                        <a:t>尼得科超眾</a:t>
                       </a:r>
                     </a:p>
                   </a:txBody>
@@ -7404,7 +7770,7 @@
                           <a:ea typeface="Microsoft JhengHei"/>
                           <a:cs typeface="Microsoft JhengHei"/>
                         </a:rPr>
-                        <a:t>6425</a:t>
+                        <a:t>6230</a:t>
                       </a:r>
                     </a:p>
                   </a:txBody>
@@ -7452,7 +7818,7 @@
                           <a:ea typeface="Microsoft JhengHei"/>
                           <a:cs typeface="Microsoft JhengHei"/>
                         </a:rPr>
-                        <a:t>勤業眾信聯合會計師事務所</a:t>
+                        <a:t>安侯建業聯合會計師事務所</a:t>
                       </a:r>
                     </a:p>
                   </a:txBody>
@@ -7476,135 +7842,13 @@
                           <a:ea typeface="Microsoft JhengHei"/>
                           <a:cs typeface="Microsoft JhengHei"/>
                         </a:rPr>
-                        <a:t>張至誼、洪國田</a:t>
+                        <a:t>郭欣頤、張肇文</a:t>
                       </a:r>
                     </a:p>
                   </a:txBody>
                   <a:tcPr anchor="ctr" marL="73152" marT="9144" marB="9144">
                     <a:solidFill>
                       <a:srgbClr val="EEF2F9"/>
-                    </a:solidFill>
-                  </a:tcPr>
-                </a:tc>
-              </a:tr>
-              <a:tr h="448056">
-                <a:tc>
-                  <a:txBody>
-                    <a:bodyPr/>
-                    <a:lstStyle/>
-                    <a:p>
-                      <a:r>
-                        <a:rPr sz="1150" b="0">
-                          <a:solidFill>
-                            <a:srgbClr val="1A2233"/>
-                          </a:solidFill>
-                          <a:latin typeface="Microsoft JhengHei"/>
-                          <a:ea typeface="Microsoft JhengHei"/>
-                          <a:cs typeface="Microsoft JhengHei"/>
-                        </a:rPr>
-                        <a:t>尼得科超眾</a:t>
-                      </a:r>
-                    </a:p>
-                  </a:txBody>
-                  <a:tcPr anchor="ctr" marL="73152" marT="9144" marB="9144">
-                    <a:solidFill>
-                      <a:srgbClr val="FFFFFF"/>
-                    </a:solidFill>
-                  </a:tcPr>
-                </a:tc>
-                <a:tc>
-                  <a:txBody>
-                    <a:bodyPr/>
-                    <a:lstStyle/>
-                    <a:p>
-                      <a:r>
-                        <a:rPr sz="1150" b="0">
-                          <a:solidFill>
-                            <a:srgbClr val="1A2233"/>
-                          </a:solidFill>
-                          <a:latin typeface="Microsoft JhengHei"/>
-                          <a:ea typeface="Microsoft JhengHei"/>
-                          <a:cs typeface="Microsoft JhengHei"/>
-                        </a:rPr>
-                        <a:t>6230</a:t>
-                      </a:r>
-                    </a:p>
-                  </a:txBody>
-                  <a:tcPr anchor="ctr" marL="73152" marT="9144" marB="9144">
-                    <a:solidFill>
-                      <a:srgbClr val="FFFFFF"/>
-                    </a:solidFill>
-                  </a:tcPr>
-                </a:tc>
-                <a:tc>
-                  <a:txBody>
-                    <a:bodyPr/>
-                    <a:lstStyle/>
-                    <a:p>
-                      <a:r>
-                        <a:rPr sz="1150" b="1">
-                          <a:solidFill>
-                            <a:srgbClr val="F4A261"/>
-                          </a:solidFill>
-                          <a:latin typeface="Microsoft JhengHei"/>
-                          <a:ea typeface="Microsoft JhengHei"/>
-                          <a:cs typeface="Microsoft JhengHei"/>
-                        </a:rPr>
-                        <a:t>勒索病毒/加密</a:t>
-                      </a:r>
-                    </a:p>
-                  </a:txBody>
-                  <a:tcPr anchor="ctr" marL="73152" marT="9144" marB="9144">
-                    <a:solidFill>
-                      <a:srgbClr val="FFFFFF"/>
-                    </a:solidFill>
-                  </a:tcPr>
-                </a:tc>
-                <a:tc>
-                  <a:txBody>
-                    <a:bodyPr/>
-                    <a:lstStyle/>
-                    <a:p>
-                      <a:r>
-                        <a:rPr sz="1150" b="0">
-                          <a:solidFill>
-                            <a:srgbClr val="1A2233"/>
-                          </a:solidFill>
-                          <a:latin typeface="Microsoft JhengHei"/>
-                          <a:ea typeface="Microsoft JhengHei"/>
-                          <a:cs typeface="Microsoft JhengHei"/>
-                        </a:rPr>
-                        <a:t>安侯建業聯合會計師事務所</a:t>
-                      </a:r>
-                    </a:p>
-                  </a:txBody>
-                  <a:tcPr anchor="ctr" marL="73152" marT="9144" marB="9144">
-                    <a:solidFill>
-                      <a:srgbClr val="FFFFFF"/>
-                    </a:solidFill>
-                  </a:tcPr>
-                </a:tc>
-                <a:tc>
-                  <a:txBody>
-                    <a:bodyPr/>
-                    <a:lstStyle/>
-                    <a:p>
-                      <a:r>
-                        <a:rPr sz="1150" b="0">
-                          <a:solidFill>
-                            <a:srgbClr val="1A2233"/>
-                          </a:solidFill>
-                          <a:latin typeface="Microsoft JhengHei"/>
-                          <a:ea typeface="Microsoft JhengHei"/>
-                          <a:cs typeface="Microsoft JhengHei"/>
-                        </a:rPr>
-                        <a:t>郭欣頤、張肇文</a:t>
-                      </a:r>
-                    </a:p>
-                  </a:txBody>
-                  <a:tcPr anchor="ctr" marL="73152" marT="9144" marB="9144">
-                    <a:solidFill>
-                      <a:srgbClr val="FFFFFF"/>
                     </a:solidFill>
                   </a:tcPr>
                 </a:tc>
@@ -9381,7 +9625,7 @@
             <a:avLst/>
           </a:prstGeom>
           <a:solidFill>
-            <a:srgbClr val="E63946"/>
+            <a:srgbClr val="5C6679"/>
           </a:solidFill>
           <a:ln>
             <a:noFill/>
@@ -9442,7 +9686,7 @@
                 <a:ea typeface="Microsoft JhengHei"/>
                 <a:cs typeface="Microsoft JhengHei"/>
               </a:rPr>
-              <a:t>松上 </a:t>
+              <a:t>淳安 </a:t>
             </a:r>
             <a:r>
               <a:rPr sz="1300" b="0">
@@ -9453,7 +9697,7 @@
                 <a:ea typeface="Microsoft JhengHei"/>
                 <a:cs typeface="Microsoft JhengHei"/>
               </a:rPr>
-              <a:t>6156</a:t>
+              <a:t>6283</a:t>
             </a:r>
           </a:p>
         </p:txBody>
@@ -9473,7 +9717,7 @@
             <a:avLst/>
           </a:prstGeom>
           <a:solidFill>
-            <a:srgbClr val="E63946"/>
+            <a:srgbClr val="5C6679"/>
           </a:solidFill>
           <a:ln>
             <a:noFill/>
@@ -9534,7 +9778,7 @@
                 <a:ea typeface="Microsoft JhengHei"/>
                 <a:cs typeface="Microsoft JhengHei"/>
               </a:rPr>
-              <a:t>駭客攻擊</a:t>
+              <a:t>其他</a:t>
             </a:r>
           </a:p>
         </p:txBody>
@@ -9569,7 +9813,7 @@
             <a:r>
               <a:rPr sz="1100" b="1">
                 <a:solidFill>
-                  <a:srgbClr val="E63946"/>
+                  <a:srgbClr val="5C6679"/>
                 </a:solidFill>
                 <a:latin typeface="Microsoft JhengHei"/>
                 <a:ea typeface="Microsoft JhengHei"/>
@@ -9586,7 +9830,7 @@
                 <a:ea typeface="Microsoft JhengHei"/>
                 <a:cs typeface="Microsoft JhengHei"/>
               </a:rPr>
-              <a:t>本公司使用之部分資訊系統遭受駭客網路攻擊。</a:t>
+              <a:t>本公司網路資安事件說明</a:t>
             </a:r>
           </a:p>
         </p:txBody>
@@ -9621,7 +9865,7 @@
             <a:r>
               <a:rPr sz="1100" b="1">
                 <a:solidFill>
-                  <a:srgbClr val="E63946"/>
+                  <a:srgbClr val="5C6679"/>
                 </a:solidFill>
                 <a:latin typeface="Microsoft JhengHei"/>
                 <a:ea typeface="Microsoft JhengHei"/>
@@ -9638,7 +9882,7 @@
                 <a:ea typeface="Microsoft JhengHei"/>
                 <a:cs typeface="Microsoft JhengHei"/>
               </a:rPr>
-              <a:t>本公司後續仍將持續提升網路與資訊基礎架構之安全管控以確保資訊安全。</a:t>
+              <a:t>本公司後續將持續提升網路與資訊基礎架構之安全管控，以確保資訊安全。</a:t>
             </a:r>
           </a:p>
         </p:txBody>
@@ -9765,7 +10009,7 @@
                 <a:ea typeface="Microsoft JhengHei"/>
                 <a:cs typeface="Microsoft JhengHei"/>
               </a:rPr>
-              <a:t>優盛 </a:t>
+              <a:t>松上 </a:t>
             </a:r>
             <a:r>
               <a:rPr sz="1300" b="0">
@@ -9776,7 +10020,7 @@
                 <a:ea typeface="Microsoft JhengHei"/>
                 <a:cs typeface="Microsoft JhengHei"/>
               </a:rPr>
-              <a:t>4121</a:t>
+              <a:t>6156</a:t>
             </a:r>
           </a:p>
         </p:txBody>
@@ -9909,7 +10153,7 @@
                 <a:ea typeface="Microsoft JhengHei"/>
                 <a:cs typeface="Microsoft JhengHei"/>
               </a:rPr>
-              <a:t>本公司之官網於今天下午遭受網路駭客攻擊</a:t>
+              <a:t>本公司使用之部分資訊系統遭受駭客網路攻擊。</a:t>
             </a:r>
           </a:p>
         </p:txBody>
@@ -9961,7 +10205,7 @@
                 <a:ea typeface="Microsoft JhengHei"/>
                 <a:cs typeface="Microsoft JhengHei"/>
               </a:rPr>
-              <a:t>本公司後續將持續提升網路與資訊基礎架構之安全管控以確保資訊安全。</a:t>
+              <a:t>本公司後續仍將持續提升網路與資訊基礎架構之安全管控以確保資訊安全。</a:t>
             </a:r>
           </a:p>
         </p:txBody>
@@ -10088,7 +10332,7 @@
                 <a:ea typeface="Microsoft JhengHei"/>
                 <a:cs typeface="Microsoft JhengHei"/>
               </a:rPr>
-              <a:t>麗清 </a:t>
+              <a:t>優盛 </a:t>
             </a:r>
             <a:r>
               <a:rPr sz="1300" b="0">
@@ -10099,7 +10343,7 @@
                 <a:ea typeface="Microsoft JhengHei"/>
                 <a:cs typeface="Microsoft JhengHei"/>
               </a:rPr>
-              <a:t>3346</a:t>
+              <a:t>4121</a:t>
             </a:r>
           </a:p>
         </p:txBody>
@@ -10232,7 +10476,7 @@
                 <a:ea typeface="Microsoft JhengHei"/>
                 <a:cs typeface="Microsoft JhengHei"/>
               </a:rPr>
-              <a:t>本公司部份資訊系統遭受駭客網路攻擊。</a:t>
+              <a:t>本公司之官網於今天下午遭受網路駭客攻擊</a:t>
             </a:r>
           </a:p>
         </p:txBody>
@@ -10284,7 +10528,7 @@
                 <a:ea typeface="Microsoft JhengHei"/>
                 <a:cs typeface="Microsoft JhengHei"/>
               </a:rPr>
-              <a:t>修復安全漏洞並持續提升網路與資訊基礎架構之安全管控以確保資訊安全。</a:t>
+              <a:t>本公司後續將持續提升網路與資訊基礎架構之安全管控以確保資訊安全。</a:t>
             </a:r>
           </a:p>
         </p:txBody>
@@ -10486,7 +10730,7 @@
             <a:avLst/>
           </a:prstGeom>
           <a:solidFill>
-            <a:srgbClr val="5C6679"/>
+            <a:srgbClr val="E63946"/>
           </a:solidFill>
           <a:ln>
             <a:noFill/>
@@ -10547,7 +10791,7 @@
                 <a:ea typeface="Microsoft JhengHei"/>
                 <a:cs typeface="Microsoft JhengHei"/>
               </a:rPr>
-              <a:t>GOGOLOOK </a:t>
+              <a:t>麗清 </a:t>
             </a:r>
             <a:r>
               <a:rPr sz="1300" b="0">
@@ -10558,7 +10802,7 @@
                 <a:ea typeface="Microsoft JhengHei"/>
                 <a:cs typeface="Microsoft JhengHei"/>
               </a:rPr>
-              <a:t>6902</a:t>
+              <a:t>3346</a:t>
             </a:r>
           </a:p>
         </p:txBody>
@@ -10578,7 +10822,7 @@
             <a:avLst/>
           </a:prstGeom>
           <a:solidFill>
-            <a:srgbClr val="5C6679"/>
+            <a:srgbClr val="E63946"/>
           </a:solidFill>
           <a:ln>
             <a:noFill/>
@@ -10639,7 +10883,7 @@
                 <a:ea typeface="Microsoft JhengHei"/>
                 <a:cs typeface="Microsoft JhengHei"/>
               </a:rPr>
-              <a:t>其他</a:t>
+              <a:t>駭客攻擊</a:t>
             </a:r>
           </a:p>
         </p:txBody>
@@ -10674,7 +10918,7 @@
             <a:r>
               <a:rPr sz="1100" b="1">
                 <a:solidFill>
-                  <a:srgbClr val="5C6679"/>
+                  <a:srgbClr val="E63946"/>
                 </a:solidFill>
                 <a:latin typeface="Microsoft JhengHei"/>
                 <a:ea typeface="Microsoft JhengHei"/>
@@ -10691,7 +10935,7 @@
                 <a:ea typeface="Microsoft JhengHei"/>
                 <a:cs typeface="Microsoft JhengHei"/>
               </a:rPr>
-              <a:t>本公司發生網路資安事件。</a:t>
+              <a:t>本公司部份資訊系統遭受駭客網路攻擊。</a:t>
             </a:r>
           </a:p>
         </p:txBody>
@@ -10726,7 +10970,7 @@
             <a:r>
               <a:rPr sz="1100" b="1">
                 <a:solidFill>
-                  <a:srgbClr val="5C6679"/>
+                  <a:srgbClr val="E63946"/>
                 </a:solidFill>
                 <a:latin typeface="Microsoft JhengHei"/>
                 <a:ea typeface="Microsoft JhengHei"/>
@@ -10743,7 +10987,7 @@
                 <a:ea typeface="Microsoft JhengHei"/>
                 <a:cs typeface="Microsoft JhengHei"/>
               </a:rPr>
-              <a:t>本公司後續仍持續強化資安管控及防禦機制，確保資訊安全與服務體驗。</a:t>
+              <a:t>修復安全漏洞並持續提升網路與資訊基礎架構之安全管控以確保資訊安全。</a:t>
             </a:r>
           </a:p>
         </p:txBody>
@@ -10809,7 +11053,7 @@
             <a:avLst/>
           </a:prstGeom>
           <a:solidFill>
-            <a:srgbClr val="E63946"/>
+            <a:srgbClr val="5C6679"/>
           </a:solidFill>
           <a:ln>
             <a:noFill/>
@@ -10870,7 +11114,7 @@
                 <a:ea typeface="Microsoft JhengHei"/>
                 <a:cs typeface="Microsoft JhengHei"/>
               </a:rPr>
-              <a:t>網家 </a:t>
+              <a:t>GOGOLOOK </a:t>
             </a:r>
             <a:r>
               <a:rPr sz="1300" b="0">
@@ -10881,7 +11125,7 @@
                 <a:ea typeface="Microsoft JhengHei"/>
                 <a:cs typeface="Microsoft JhengHei"/>
               </a:rPr>
-              <a:t>8044</a:t>
+              <a:t>6902</a:t>
             </a:r>
           </a:p>
         </p:txBody>
@@ -10901,7 +11145,7 @@
             <a:avLst/>
           </a:prstGeom>
           <a:solidFill>
-            <a:srgbClr val="E63946"/>
+            <a:srgbClr val="5C6679"/>
           </a:solidFill>
           <a:ln>
             <a:noFill/>
@@ -10962,7 +11206,7 @@
                 <a:ea typeface="Microsoft JhengHei"/>
                 <a:cs typeface="Microsoft JhengHei"/>
               </a:rPr>
-              <a:t>駭客攻擊</a:t>
+              <a:t>其他</a:t>
             </a:r>
           </a:p>
         </p:txBody>
@@ -10997,7 +11241,7 @@
             <a:r>
               <a:rPr sz="1100" b="1">
                 <a:solidFill>
-                  <a:srgbClr val="E63946"/>
+                  <a:srgbClr val="5C6679"/>
                 </a:solidFill>
                 <a:latin typeface="Microsoft JhengHei"/>
                 <a:ea typeface="Microsoft JhengHei"/>
@@ -11014,7 +11258,7 @@
                 <a:ea typeface="Microsoft JhengHei"/>
                 <a:cs typeface="Microsoft JhengHei"/>
               </a:rPr>
-              <a:t>公司對該等報導或提供訊息之說明:(1)資訊安全防線：本公司及各轉投資事業係依不同服務型態各自營運…</a:t>
+              <a:t>本公司發生網路資安事件。</a:t>
             </a:r>
           </a:p>
         </p:txBody>
@@ -11049,7 +11293,7 @@
             <a:r>
               <a:rPr sz="1100" b="1">
                 <a:solidFill>
-                  <a:srgbClr val="E63946"/>
+                  <a:srgbClr val="5C6679"/>
                 </a:solidFill>
                 <a:latin typeface="Microsoft JhengHei"/>
                 <a:ea typeface="Microsoft JhengHei"/>
@@ -11066,7 +11310,7 @@
                 <a:ea typeface="Microsoft JhengHei"/>
                 <a:cs typeface="Microsoft JhengHei"/>
               </a:rPr>
-              <a:t>(1)全面啟動應變與調查：拍付國際獲悉駭客聲稱之入侵及勒索訊息後，已立即啟動資安應變程序，會同資安專家進行全面系統檢測與…</a:t>
+              <a:t>本公司後續仍持續強化資安管控及防禦機制，確保資訊安全與服務體驗。</a:t>
             </a:r>
           </a:p>
         </p:txBody>
@@ -11132,7 +11376,7 @@
             <a:avLst/>
           </a:prstGeom>
           <a:solidFill>
-            <a:srgbClr val="5C6679"/>
+            <a:srgbClr val="E63946"/>
           </a:solidFill>
           <a:ln>
             <a:noFill/>
@@ -11193,7 +11437,7 @@
                 <a:ea typeface="Microsoft JhengHei"/>
                 <a:cs typeface="Microsoft JhengHei"/>
               </a:rPr>
-              <a:t>耕興 </a:t>
+              <a:t>網家 </a:t>
             </a:r>
             <a:r>
               <a:rPr sz="1300" b="0">
@@ -11204,7 +11448,7 @@
                 <a:ea typeface="Microsoft JhengHei"/>
                 <a:cs typeface="Microsoft JhengHei"/>
               </a:rPr>
-              <a:t>6146</a:t>
+              <a:t>8044</a:t>
             </a:r>
           </a:p>
         </p:txBody>
@@ -11224,7 +11468,7 @@
             <a:avLst/>
           </a:prstGeom>
           <a:solidFill>
-            <a:srgbClr val="5C6679"/>
+            <a:srgbClr val="E63946"/>
           </a:solidFill>
           <a:ln>
             <a:noFill/>
@@ -11285,7 +11529,7 @@
                 <a:ea typeface="Microsoft JhengHei"/>
                 <a:cs typeface="Microsoft JhengHei"/>
               </a:rPr>
-              <a:t>其他</a:t>
+              <a:t>駭客攻擊</a:t>
             </a:r>
           </a:p>
         </p:txBody>
@@ -11320,7 +11564,7 @@
             <a:r>
               <a:rPr sz="1100" b="1">
                 <a:solidFill>
-                  <a:srgbClr val="5C6679"/>
+                  <a:srgbClr val="E63946"/>
                 </a:solidFill>
                 <a:latin typeface="Microsoft JhengHei"/>
                 <a:ea typeface="Microsoft JhengHei"/>
@@ -11337,7 +11581,7 @@
                 <a:ea typeface="Microsoft JhengHei"/>
                 <a:cs typeface="Microsoft JhengHei"/>
               </a:rPr>
-              <a:t>本公司部分資訊系統發生網路資安事件。</a:t>
+              <a:t>公司對該等報導或提供訊息之說明:(1)資訊安全防線：本公司及各轉投資事業係依不同服務型態各自營運…</a:t>
             </a:r>
           </a:p>
         </p:txBody>
@@ -11372,7 +11616,7 @@
             <a:r>
               <a:rPr sz="1100" b="1">
                 <a:solidFill>
-                  <a:srgbClr val="5C6679"/>
+                  <a:srgbClr val="E63946"/>
                 </a:solidFill>
                 <a:latin typeface="Microsoft JhengHei"/>
                 <a:ea typeface="Microsoft JhengHei"/>
@@ -11389,7 +11633,7 @@
                 <a:ea typeface="Microsoft JhengHei"/>
                 <a:cs typeface="Microsoft JhengHei"/>
               </a:rPr>
-              <a:t>本公司將持續提升網路與資訊基礎架構之安全管控，並依外部資安技術專家之建議加強防護，確保資訊安全。</a:t>
+              <a:t>(1)全面啟動應變與調查：拍付國際獲悉駭客聲稱之入侵及勒索訊息後，已立即啟動資安應變程序，會同資安專家進行全面系統檢測與…</a:t>
             </a:r>
           </a:p>
         </p:txBody>
@@ -11455,7 +11699,7 @@
             <a:avLst/>
           </a:prstGeom>
           <a:solidFill>
-            <a:srgbClr val="F4A261"/>
+            <a:srgbClr val="5C6679"/>
           </a:solidFill>
           <a:ln>
             <a:noFill/>
@@ -11516,7 +11760,7 @@
                 <a:ea typeface="Microsoft JhengHei"/>
                 <a:cs typeface="Microsoft JhengHei"/>
               </a:rPr>
-              <a:t>易發 </a:t>
+              <a:t>耕興 </a:t>
             </a:r>
             <a:r>
               <a:rPr sz="1300" b="0">
@@ -11527,7 +11771,7 @@
                 <a:ea typeface="Microsoft JhengHei"/>
                 <a:cs typeface="Microsoft JhengHei"/>
               </a:rPr>
-              <a:t>6425</a:t>
+              <a:t>6146</a:t>
             </a:r>
           </a:p>
         </p:txBody>
@@ -11547,7 +11791,7 @@
             <a:avLst/>
           </a:prstGeom>
           <a:solidFill>
-            <a:srgbClr val="F4A261"/>
+            <a:srgbClr val="5C6679"/>
           </a:solidFill>
           <a:ln>
             <a:noFill/>
@@ -11608,7 +11852,7 @@
                 <a:ea typeface="Microsoft JhengHei"/>
                 <a:cs typeface="Microsoft JhengHei"/>
               </a:rPr>
-              <a:t>勒索病毒/加密</a:t>
+              <a:t>其他</a:t>
             </a:r>
           </a:p>
         </p:txBody>
@@ -11643,7 +11887,7 @@
             <a:r>
               <a:rPr sz="1100" b="1">
                 <a:solidFill>
-                  <a:srgbClr val="F4A261"/>
+                  <a:srgbClr val="5C6679"/>
                 </a:solidFill>
                 <a:latin typeface="Microsoft JhengHei"/>
                 <a:ea typeface="Microsoft JhengHei"/>
@@ -11660,7 +11904,7 @@
                 <a:ea typeface="Microsoft JhengHei"/>
                 <a:cs typeface="Microsoft JhengHei"/>
               </a:rPr>
-              <a:t>本公司之子公司東野精機(股)公司日福精工(股)公司，發現遭不明駭客入侵主機，並將伺服器資料加密，…</a:t>
+              <a:t>本公司部分資訊系統發生網路資安事件。</a:t>
             </a:r>
           </a:p>
         </p:txBody>
@@ -11695,7 +11939,7 @@
             <a:r>
               <a:rPr sz="1100" b="1">
                 <a:solidFill>
-                  <a:srgbClr val="F4A261"/>
+                  <a:srgbClr val="5C6679"/>
                 </a:solidFill>
                 <a:latin typeface="Microsoft JhengHei"/>
                 <a:ea typeface="Microsoft JhengHei"/>
@@ -11712,7 +11956,7 @@
                 <a:ea typeface="Microsoft JhengHei"/>
                 <a:cs typeface="Microsoft JhengHei"/>
               </a:rPr>
-              <a:t>本公司之子公司東野精機(股)公司日福精工(股)公司將修復安全漏洞，持續提升網路與資訊基礎架構之安全管控，以確保資訊安全。</a:t>
+              <a:t>本公司將持續提升網路與資訊基礎架構之安全管控，並依外部資安技術專家之建議加強防護，確保資訊安全。</a:t>
             </a:r>
           </a:p>
         </p:txBody>
@@ -11975,7 +12219,7 @@
                 <a:ea typeface="Microsoft JhengHei"/>
                 <a:cs typeface="Microsoft JhengHei"/>
               </a:rPr>
-              <a:t>尼得科超眾 </a:t>
+              <a:t>易發 </a:t>
             </a:r>
             <a:r>
               <a:rPr sz="1300" b="0">
@@ -11986,7 +12230,7 @@
                 <a:ea typeface="Microsoft JhengHei"/>
                 <a:cs typeface="Microsoft JhengHei"/>
               </a:rPr>
-              <a:t>6230</a:t>
+              <a:t>6425</a:t>
             </a:r>
           </a:p>
         </p:txBody>
@@ -12119,7 +12363,7 @@
                 <a:ea typeface="Microsoft JhengHei"/>
                 <a:cs typeface="Microsoft JhengHei"/>
               </a:rPr>
-              <a:t>本公司於今日偵測到部份伺服器遭受網路勒索病毒攻擊，致使包含ERP在內之部份資訊系統無法正常運作。</a:t>
+              <a:t>本公司之子公司東野精機(股)公司日福精工(股)公司，發現遭不明駭客入侵主機，並將伺服器資料加密，…</a:t>
             </a:r>
           </a:p>
         </p:txBody>
@@ -12133,6 +12377,329 @@
         <p:spPr>
           <a:xfrm>
             <a:off x="777240" y="2926080"/>
+            <a:ext cx="4937760" cy="713232"/>
+          </a:xfrm>
+          <a:prstGeom prst="rect">
+            <a:avLst/>
+          </a:prstGeom>
+          <a:noFill/>
+        </p:spPr>
+        <p:txBody>
+          <a:bodyPr wrap="square" anchor="t" lIns="0" rIns="0" tIns="0" bIns="0">
+            <a:spAutoFit/>
+          </a:bodyPr>
+          <a:lstStyle/>
+          <a:p>
+            <a:pPr algn="l">
+              <a:lnSpc>
+                <a:spcPts val="1500"/>
+              </a:lnSpc>
+            </a:pPr>
+            <a:r>
+              <a:rPr sz="1100" b="1">
+                <a:solidFill>
+                  <a:srgbClr val="F4A261"/>
+                </a:solidFill>
+                <a:latin typeface="Microsoft JhengHei"/>
+                <a:ea typeface="Microsoft JhengHei"/>
+                <a:cs typeface="Microsoft JhengHei"/>
+              </a:rPr>
+              <a:t>因應　</a:t>
+            </a:r>
+            <a:r>
+              <a:rPr sz="1100" b="0">
+                <a:solidFill>
+                  <a:srgbClr val="1A2233"/>
+                </a:solidFill>
+                <a:latin typeface="Microsoft JhengHei"/>
+                <a:ea typeface="Microsoft JhengHei"/>
+                <a:cs typeface="Microsoft JhengHei"/>
+              </a:rPr>
+              <a:t>本公司之子公司東野精機(股)公司日福精工(股)公司將修復安全漏洞，持續提升網路與資訊基礎架構之安全管控，以確保資訊安全。</a:t>
+            </a:r>
+          </a:p>
+        </p:txBody>
+      </p:sp>
+      <p:sp>
+        <p:nvSpPr>
+          <p:cNvPr id="12" name="Rounded Rectangle 11"/>
+          <p:cNvSpPr/>
+          <p:nvPr/>
+        </p:nvSpPr>
+        <p:spPr>
+          <a:xfrm>
+            <a:off x="6172200" y="1554480"/>
+            <a:ext cx="5394960" cy="2148840"/>
+          </a:xfrm>
+          <a:prstGeom prst="roundRect">
+            <a:avLst/>
+          </a:prstGeom>
+          <a:solidFill>
+            <a:srgbClr val="FFFFFF"/>
+          </a:solidFill>
+          <a:ln w="12700">
+            <a:solidFill>
+              <a:srgbClr val="DDE3EE"/>
+            </a:solidFill>
+          </a:ln>
+          <a:effectLst/>
+        </p:spPr>
+        <p:style>
+          <a:lnRef idx="1">
+            <a:schemeClr val="accent1"/>
+          </a:lnRef>
+          <a:fillRef idx="3">
+            <a:schemeClr val="accent1"/>
+          </a:fillRef>
+          <a:effectRef idx="2">
+            <a:schemeClr val="accent1"/>
+          </a:effectRef>
+          <a:fontRef idx="minor">
+            <a:schemeClr val="lt1"/>
+          </a:fontRef>
+        </p:style>
+        <p:txBody>
+          <a:bodyPr rtlCol="0" anchor="ctr"/>
+          <a:lstStyle/>
+          <a:p>
+            <a:pPr algn="ctr"/>
+          </a:p>
+        </p:txBody>
+      </p:sp>
+      <p:sp>
+        <p:nvSpPr>
+          <p:cNvPr id="13" name="Rectangle 12"/>
+          <p:cNvSpPr/>
+          <p:nvPr/>
+        </p:nvSpPr>
+        <p:spPr>
+          <a:xfrm>
+            <a:off x="6172200" y="1554480"/>
+            <a:ext cx="5394960" cy="109728"/>
+          </a:xfrm>
+          <a:prstGeom prst="rect">
+            <a:avLst/>
+          </a:prstGeom>
+          <a:solidFill>
+            <a:srgbClr val="F4A261"/>
+          </a:solidFill>
+          <a:ln>
+            <a:noFill/>
+          </a:ln>
+          <a:effectLst/>
+        </p:spPr>
+        <p:style>
+          <a:lnRef idx="1">
+            <a:schemeClr val="accent1"/>
+          </a:lnRef>
+          <a:fillRef idx="3">
+            <a:schemeClr val="accent1"/>
+          </a:fillRef>
+          <a:effectRef idx="2">
+            <a:schemeClr val="accent1"/>
+          </a:effectRef>
+          <a:fontRef idx="minor">
+            <a:schemeClr val="lt1"/>
+          </a:fontRef>
+        </p:style>
+        <p:txBody>
+          <a:bodyPr rtlCol="0" anchor="ctr"/>
+          <a:lstStyle/>
+          <a:p>
+            <a:pPr algn="ctr"/>
+          </a:p>
+        </p:txBody>
+      </p:sp>
+      <p:sp>
+        <p:nvSpPr>
+          <p:cNvPr id="14" name="TextBox 13"/>
+          <p:cNvSpPr txBox="1"/>
+          <p:nvPr/>
+        </p:nvSpPr>
+        <p:spPr>
+          <a:xfrm>
+            <a:off x="6400800" y="1773936"/>
+            <a:ext cx="3657600" cy="365760"/>
+          </a:xfrm>
+          <a:prstGeom prst="rect">
+            <a:avLst/>
+          </a:prstGeom>
+          <a:noFill/>
+        </p:spPr>
+        <p:txBody>
+          <a:bodyPr wrap="square" anchor="ctr" lIns="0" rIns="0" tIns="0" bIns="0">
+            <a:spAutoFit/>
+          </a:bodyPr>
+          <a:lstStyle/>
+          <a:p>
+            <a:pPr algn="l"/>
+            <a:r>
+              <a:rPr sz="1600" b="1">
+                <a:solidFill>
+                  <a:srgbClr val="1A2233"/>
+                </a:solidFill>
+                <a:latin typeface="Microsoft JhengHei"/>
+                <a:ea typeface="Microsoft JhengHei"/>
+                <a:cs typeface="Microsoft JhengHei"/>
+              </a:rPr>
+              <a:t>尼得科超眾 </a:t>
+            </a:r>
+            <a:r>
+              <a:rPr sz="1300" b="0">
+                <a:solidFill>
+                  <a:srgbClr val="5C6679"/>
+                </a:solidFill>
+                <a:latin typeface="Microsoft JhengHei"/>
+                <a:ea typeface="Microsoft JhengHei"/>
+                <a:cs typeface="Microsoft JhengHei"/>
+              </a:rPr>
+              <a:t>6230</a:t>
+            </a:r>
+          </a:p>
+        </p:txBody>
+      </p:sp>
+      <p:sp>
+        <p:nvSpPr>
+          <p:cNvPr id="15" name="Rounded Rectangle 14"/>
+          <p:cNvSpPr/>
+          <p:nvPr/>
+        </p:nvSpPr>
+        <p:spPr>
+          <a:xfrm>
+            <a:off x="10149840" y="1792224"/>
+            <a:ext cx="1234440" cy="347472"/>
+          </a:xfrm>
+          <a:prstGeom prst="roundRect">
+            <a:avLst/>
+          </a:prstGeom>
+          <a:solidFill>
+            <a:srgbClr val="F4A261"/>
+          </a:solidFill>
+          <a:ln>
+            <a:noFill/>
+          </a:ln>
+          <a:effectLst/>
+        </p:spPr>
+        <p:style>
+          <a:lnRef idx="1">
+            <a:schemeClr val="accent1"/>
+          </a:lnRef>
+          <a:fillRef idx="3">
+            <a:schemeClr val="accent1"/>
+          </a:fillRef>
+          <a:effectRef idx="2">
+            <a:schemeClr val="accent1"/>
+          </a:effectRef>
+          <a:fontRef idx="minor">
+            <a:schemeClr val="lt1"/>
+          </a:fontRef>
+        </p:style>
+        <p:txBody>
+          <a:bodyPr rtlCol="0" anchor="ctr"/>
+          <a:lstStyle/>
+          <a:p>
+            <a:pPr algn="ctr"/>
+          </a:p>
+        </p:txBody>
+      </p:sp>
+      <p:sp>
+        <p:nvSpPr>
+          <p:cNvPr id="16" name="TextBox 15"/>
+          <p:cNvSpPr txBox="1"/>
+          <p:nvPr/>
+        </p:nvSpPr>
+        <p:spPr>
+          <a:xfrm>
+            <a:off x="10149840" y="1792224"/>
+            <a:ext cx="1234440" cy="347472"/>
+          </a:xfrm>
+          <a:prstGeom prst="rect">
+            <a:avLst/>
+          </a:prstGeom>
+          <a:noFill/>
+        </p:spPr>
+        <p:txBody>
+          <a:bodyPr wrap="square" anchor="ctr" lIns="0" rIns="0" tIns="0" bIns="0">
+            <a:spAutoFit/>
+          </a:bodyPr>
+          <a:lstStyle/>
+          <a:p>
+            <a:pPr algn="ctr"/>
+            <a:r>
+              <a:rPr sz="1050" b="1">
+                <a:solidFill>
+                  <a:srgbClr val="FFFFFF"/>
+                </a:solidFill>
+                <a:latin typeface="Microsoft JhengHei"/>
+                <a:ea typeface="Microsoft JhengHei"/>
+                <a:cs typeface="Microsoft JhengHei"/>
+              </a:rPr>
+              <a:t>勒索病毒/加密</a:t>
+            </a:r>
+          </a:p>
+        </p:txBody>
+      </p:sp>
+      <p:sp>
+        <p:nvSpPr>
+          <p:cNvPr id="17" name="TextBox 16"/>
+          <p:cNvSpPr txBox="1"/>
+          <p:nvPr/>
+        </p:nvSpPr>
+        <p:spPr>
+          <a:xfrm>
+            <a:off x="6400800" y="2267712"/>
+            <a:ext cx="4937760" cy="640080"/>
+          </a:xfrm>
+          <a:prstGeom prst="rect">
+            <a:avLst/>
+          </a:prstGeom>
+          <a:noFill/>
+        </p:spPr>
+        <p:txBody>
+          <a:bodyPr wrap="square" anchor="t" lIns="0" rIns="0" tIns="0" bIns="0">
+            <a:spAutoFit/>
+          </a:bodyPr>
+          <a:lstStyle/>
+          <a:p>
+            <a:pPr algn="l">
+              <a:lnSpc>
+                <a:spcPts val="1500"/>
+              </a:lnSpc>
+            </a:pPr>
+            <a:r>
+              <a:rPr sz="1100" b="1">
+                <a:solidFill>
+                  <a:srgbClr val="F4A261"/>
+                </a:solidFill>
+                <a:latin typeface="Microsoft JhengHei"/>
+                <a:ea typeface="Microsoft JhengHei"/>
+                <a:cs typeface="Microsoft JhengHei"/>
+              </a:rPr>
+              <a:t>緣由　</a:t>
+            </a:r>
+            <a:r>
+              <a:rPr sz="1100" b="0">
+                <a:solidFill>
+                  <a:srgbClr val="1A2233"/>
+                </a:solidFill>
+                <a:latin typeface="Microsoft JhengHei"/>
+                <a:ea typeface="Microsoft JhengHei"/>
+                <a:cs typeface="Microsoft JhengHei"/>
+              </a:rPr>
+              <a:t>本公司於今日偵測到部份伺服器遭受網路勒索病毒攻擊，致使包含ERP在內之部份資訊系統無法正常運作。</a:t>
+            </a:r>
+          </a:p>
+        </p:txBody>
+      </p:sp>
+      <p:sp>
+        <p:nvSpPr>
+          <p:cNvPr id="18" name="TextBox 17"/>
+          <p:cNvSpPr txBox="1"/>
+          <p:nvPr/>
+        </p:nvSpPr>
+        <p:spPr>
+          <a:xfrm>
+            <a:off x="6400800" y="2926080"/>
             <a:ext cx="4937760" cy="713232"/>
           </a:xfrm>
           <a:prstGeom prst="rect">

--- a/資安事件因應分析.pptx
+++ b/資安事件因應分析.pptx
@@ -12,7 +12,6 @@
     <p:sldId id="260" r:id="rId11"/>
     <p:sldId id="261" r:id="rId12"/>
     <p:sldId id="262" r:id="rId13"/>
-    <p:sldId id="263" r:id="rId14"/>
   </p:sldIdLst>
   <p:sldSz cx="12191695" cy="6858000" type="screen4x3"/>
   <p:notesSz cx="6858000" cy="9144000"/>
@@ -150,30 +149,19 @@
             <c:idx val="1"/>
             <c:spPr>
               <a:solidFill>
-                <a:srgbClr val="F4A261"/>
-              </a:solidFill>
-            </c:spPr>
-          </c:dPt>
-          <c:dPt>
-            <c:idx val="2"/>
-            <c:spPr>
-              <a:solidFill>
                 <a:srgbClr val="5C6679"/>
               </a:solidFill>
             </c:spPr>
           </c:dPt>
           <c:cat>
             <c:strRef>
-              <c:f>Sheet1!$A$2:$A$4</c:f>
+              <c:f>Sheet1!$A$2:$A$3</c:f>
               <c:strCache>
-                <c:ptCount val="3"/>
+                <c:ptCount val="2"/>
                 <c:pt idx="0">
                   <c:v>駭客攻擊</c:v>
                 </c:pt>
                 <c:pt idx="1">
-                  <c:v>勒索病毒/加密</c:v>
-                </c:pt>
-                <c:pt idx="2">
                   <c:v>其他</c:v>
                 </c:pt>
               </c:strCache>
@@ -181,18 +169,15 @@
           </c:cat>
           <c:val>
             <c:numRef>
-              <c:f>Sheet1!$B$2:$B$4</c:f>
+              <c:f>Sheet1!$B$2:$B$3</c:f>
               <c:numCache>
                 <c:formatCode>General</c:formatCode>
-                <c:ptCount val="3"/>
+                <c:ptCount val="2"/>
                 <c:pt idx="0">
                   <c:v>4</c:v>
                 </c:pt>
                 <c:pt idx="1">
-                  <c:v>2</c:v>
-                </c:pt>
-                <c:pt idx="2">
-                  <c:v>4</c:v>
+                  <c:v>3</c:v>
                 </c:pt>
               </c:numCache>
             </c:numRef>
@@ -3529,7 +3514,7 @@
                 <a:ea typeface="Microsoft JhengHei"/>
                 <a:cs typeface="Microsoft JhengHei"/>
               </a:rPr>
-              <a:t>資料期間 2026-06-22 ~ 2026-07-22　｜　MOPS 重大訊息全文檢索　｜　10 家公司</a:t>
+              <a:t>資料期間 2026-06-25 ~ 2026-07-25　｜　MOPS 重大訊息全文檢索　｜　7 家公司</a:t>
             </a:r>
           </a:p>
         </p:txBody>
@@ -3746,7 +3731,7 @@
                 <a:ea typeface="Microsoft JhengHei"/>
                 <a:cs typeface="Microsoft JhengHei"/>
               </a:rPr>
-              <a:t>資料期間內 MOPS 揭露之 10 起資安相關重大訊息</a:t>
+              <a:t>資料期間內 MOPS 揭露之 7 起資安相關重大訊息</a:t>
             </a:r>
           </a:p>
         </p:txBody>
@@ -3829,7 +3814,7 @@
                 <a:ea typeface="Microsoft JhengHei"/>
                 <a:cs typeface="Microsoft JhengHei"/>
               </a:rPr>
-              <a:t>10</a:t>
+              <a:t>7</a:t>
             </a:r>
           </a:p>
         </p:txBody>
@@ -3949,7 +3934,7 @@
                 <a:ea typeface="Microsoft JhengHei"/>
                 <a:cs typeface="Microsoft JhengHei"/>
               </a:rPr>
-              <a:t>3</a:t>
+              <a:t>2</a:t>
             </a:r>
           </a:p>
         </p:txBody>
@@ -4121,7 +4106,7 @@
         </p:nvGraphicFramePr>
         <p:xfrm>
           <a:off x="548640" y="2697480"/>
-          <a:ext cx="11064240" cy="3566160"/>
+          <a:ext cx="11064240" cy="3072384"/>
         </p:xfrm>
         <a:graphic>
           <a:graphicData uri="http://schemas.openxmlformats.org/drawingml/2006/table">
@@ -4136,7 +4121,7 @@
                 <a:gridCol w="2286000"/>
                 <a:gridCol w="5120640"/>
               </a:tblGrid>
-              <a:tr h="324196">
+              <a:tr h="384048">
                 <a:tc>
                   <a:txBody>
                     <a:bodyPr/>
@@ -4258,7 +4243,7 @@
                   </a:tcPr>
                 </a:tc>
               </a:tr>
-              <a:tr h="324196">
+              <a:tr h="384048">
                 <a:tc>
                   <a:txBody>
                     <a:bodyPr/>
@@ -4380,7 +4365,7 @@
                   </a:tcPr>
                 </a:tc>
               </a:tr>
-              <a:tr h="324196">
+              <a:tr h="384048">
                 <a:tc>
                   <a:txBody>
                     <a:bodyPr/>
@@ -4502,7 +4487,7 @@
                   </a:tcPr>
                 </a:tc>
               </a:tr>
-              <a:tr h="324196">
+              <a:tr h="384048">
                 <a:tc>
                   <a:txBody>
                     <a:bodyPr/>
@@ -4624,7 +4609,7 @@
                   </a:tcPr>
                 </a:tc>
               </a:tr>
-              <a:tr h="324196">
+              <a:tr h="384048">
                 <a:tc>
                   <a:txBody>
                     <a:bodyPr/>
@@ -4746,7 +4731,7 @@
                   </a:tcPr>
                 </a:tc>
               </a:tr>
-              <a:tr h="324196">
+              <a:tr h="384048">
                 <a:tc>
                   <a:txBody>
                     <a:bodyPr/>
@@ -4868,7 +4853,7 @@
                   </a:tcPr>
                 </a:tc>
               </a:tr>
-              <a:tr h="324196">
+              <a:tr h="384048">
                 <a:tc>
                   <a:txBody>
                     <a:bodyPr/>
@@ -4990,7 +4975,7 @@
                   </a:tcPr>
                 </a:tc>
               </a:tr>
-              <a:tr h="324196">
+              <a:tr h="384048">
                 <a:tc>
                   <a:txBody>
                     <a:bodyPr/>
@@ -5112,372 +5097,6 @@
                   </a:tcPr>
                 </a:tc>
               </a:tr>
-              <a:tr h="324196">
-                <a:tc>
-                  <a:txBody>
-                    <a:bodyPr/>
-                    <a:lstStyle/>
-                    <a:p>
-                      <a:r>
-                        <a:rPr sz="1150" b="0">
-                          <a:solidFill>
-                            <a:srgbClr val="1A2233"/>
-                          </a:solidFill>
-                          <a:latin typeface="Microsoft JhengHei"/>
-                          <a:ea typeface="Microsoft JhengHei"/>
-                          <a:cs typeface="Microsoft JhengHei"/>
-                        </a:rPr>
-                        <a:t>耕興</a:t>
-                      </a:r>
-                    </a:p>
-                  </a:txBody>
-                  <a:tcPr anchor="ctr" marL="73152" marT="9144" marB="9144">
-                    <a:solidFill>
-                      <a:srgbClr val="EEF2F9"/>
-                    </a:solidFill>
-                  </a:tcPr>
-                </a:tc>
-                <a:tc>
-                  <a:txBody>
-                    <a:bodyPr/>
-                    <a:lstStyle/>
-                    <a:p>
-                      <a:r>
-                        <a:rPr sz="1150" b="0">
-                          <a:solidFill>
-                            <a:srgbClr val="1A2233"/>
-                          </a:solidFill>
-                          <a:latin typeface="Microsoft JhengHei"/>
-                          <a:ea typeface="Microsoft JhengHei"/>
-                          <a:cs typeface="Microsoft JhengHei"/>
-                        </a:rPr>
-                        <a:t>6146</a:t>
-                      </a:r>
-                    </a:p>
-                  </a:txBody>
-                  <a:tcPr anchor="ctr" marL="73152" marT="9144" marB="9144">
-                    <a:solidFill>
-                      <a:srgbClr val="EEF2F9"/>
-                    </a:solidFill>
-                  </a:tcPr>
-                </a:tc>
-                <a:tc>
-                  <a:txBody>
-                    <a:bodyPr/>
-                    <a:lstStyle/>
-                    <a:p>
-                      <a:r>
-                        <a:rPr sz="1150" b="0">
-                          <a:solidFill>
-                            <a:srgbClr val="1A2233"/>
-                          </a:solidFill>
-                          <a:latin typeface="Microsoft JhengHei"/>
-                          <a:ea typeface="Microsoft JhengHei"/>
-                          <a:cs typeface="Microsoft JhengHei"/>
-                        </a:rPr>
-                        <a:t>06/22</a:t>
-                      </a:r>
-                    </a:p>
-                  </a:txBody>
-                  <a:tcPr anchor="ctr" marL="73152" marT="9144" marB="9144">
-                    <a:solidFill>
-                      <a:srgbClr val="EEF2F9"/>
-                    </a:solidFill>
-                  </a:tcPr>
-                </a:tc>
-                <a:tc>
-                  <a:txBody>
-                    <a:bodyPr/>
-                    <a:lstStyle/>
-                    <a:p>
-                      <a:r>
-                        <a:rPr sz="1150" b="1">
-                          <a:solidFill>
-                            <a:srgbClr val="5C6679"/>
-                          </a:solidFill>
-                          <a:latin typeface="Microsoft JhengHei"/>
-                          <a:ea typeface="Microsoft JhengHei"/>
-                          <a:cs typeface="Microsoft JhengHei"/>
-                        </a:rPr>
-                        <a:t>其他</a:t>
-                      </a:r>
-                    </a:p>
-                  </a:txBody>
-                  <a:tcPr anchor="ctr" marL="73152" marT="9144" marB="9144">
-                    <a:solidFill>
-                      <a:srgbClr val="EEF2F9"/>
-                    </a:solidFill>
-                  </a:tcPr>
-                </a:tc>
-                <a:tc>
-                  <a:txBody>
-                    <a:bodyPr/>
-                    <a:lstStyle/>
-                    <a:p>
-                      <a:r>
-                        <a:rPr sz="1150" b="0">
-                          <a:solidFill>
-                            <a:srgbClr val="1A2233"/>
-                          </a:solidFill>
-                          <a:latin typeface="Microsoft JhengHei"/>
-                          <a:ea typeface="Microsoft JhengHei"/>
-                          <a:cs typeface="Microsoft JhengHei"/>
-                        </a:rPr>
-                        <a:t>受影響之資料檔案留有備份，不影響公司營運、業務進行等。</a:t>
-                      </a:r>
-                    </a:p>
-                  </a:txBody>
-                  <a:tcPr anchor="ctr" marL="73152" marT="9144" marB="9144">
-                    <a:solidFill>
-                      <a:srgbClr val="EEF2F9"/>
-                    </a:solidFill>
-                  </a:tcPr>
-                </a:tc>
-              </a:tr>
-              <a:tr h="324196">
-                <a:tc>
-                  <a:txBody>
-                    <a:bodyPr/>
-                    <a:lstStyle/>
-                    <a:p>
-                      <a:r>
-                        <a:rPr sz="1150" b="0">
-                          <a:solidFill>
-                            <a:srgbClr val="1A2233"/>
-                          </a:solidFill>
-                          <a:latin typeface="Microsoft JhengHei"/>
-                          <a:ea typeface="Microsoft JhengHei"/>
-                          <a:cs typeface="Microsoft JhengHei"/>
-                        </a:rPr>
-                        <a:t>易發</a:t>
-                      </a:r>
-                    </a:p>
-                  </a:txBody>
-                  <a:tcPr anchor="ctr" marL="73152" marT="9144" marB="9144">
-                    <a:solidFill>
-                      <a:srgbClr val="FFFFFF"/>
-                    </a:solidFill>
-                  </a:tcPr>
-                </a:tc>
-                <a:tc>
-                  <a:txBody>
-                    <a:bodyPr/>
-                    <a:lstStyle/>
-                    <a:p>
-                      <a:r>
-                        <a:rPr sz="1150" b="0">
-                          <a:solidFill>
-                            <a:srgbClr val="1A2233"/>
-                          </a:solidFill>
-                          <a:latin typeface="Microsoft JhengHei"/>
-                          <a:ea typeface="Microsoft JhengHei"/>
-                          <a:cs typeface="Microsoft JhengHei"/>
-                        </a:rPr>
-                        <a:t>6425</a:t>
-                      </a:r>
-                    </a:p>
-                  </a:txBody>
-                  <a:tcPr anchor="ctr" marL="73152" marT="9144" marB="9144">
-                    <a:solidFill>
-                      <a:srgbClr val="FFFFFF"/>
-                    </a:solidFill>
-                  </a:tcPr>
-                </a:tc>
-                <a:tc>
-                  <a:txBody>
-                    <a:bodyPr/>
-                    <a:lstStyle/>
-                    <a:p>
-                      <a:r>
-                        <a:rPr sz="1150" b="0">
-                          <a:solidFill>
-                            <a:srgbClr val="1A2233"/>
-                          </a:solidFill>
-                          <a:latin typeface="Microsoft JhengHei"/>
-                          <a:ea typeface="Microsoft JhengHei"/>
-                          <a:cs typeface="Microsoft JhengHei"/>
-                        </a:rPr>
-                        <a:t>06/22</a:t>
-                      </a:r>
-                    </a:p>
-                  </a:txBody>
-                  <a:tcPr anchor="ctr" marL="73152" marT="9144" marB="9144">
-                    <a:solidFill>
-                      <a:srgbClr val="FFFFFF"/>
-                    </a:solidFill>
-                  </a:tcPr>
-                </a:tc>
-                <a:tc>
-                  <a:txBody>
-                    <a:bodyPr/>
-                    <a:lstStyle/>
-                    <a:p>
-                      <a:r>
-                        <a:rPr sz="1150" b="1">
-                          <a:solidFill>
-                            <a:srgbClr val="F4A261"/>
-                          </a:solidFill>
-                          <a:latin typeface="Microsoft JhengHei"/>
-                          <a:ea typeface="Microsoft JhengHei"/>
-                          <a:cs typeface="Microsoft JhengHei"/>
-                        </a:rPr>
-                        <a:t>勒索病毒/加密</a:t>
-                      </a:r>
-                    </a:p>
-                  </a:txBody>
-                  <a:tcPr anchor="ctr" marL="73152" marT="9144" marB="9144">
-                    <a:solidFill>
-                      <a:srgbClr val="FFFFFF"/>
-                    </a:solidFill>
-                  </a:tcPr>
-                </a:tc>
-                <a:tc>
-                  <a:txBody>
-                    <a:bodyPr/>
-                    <a:lstStyle/>
-                    <a:p>
-                      <a:r>
-                        <a:rPr sz="1150" b="0">
-                          <a:solidFill>
-                            <a:srgbClr val="1A2233"/>
-                          </a:solidFill>
-                          <a:latin typeface="Microsoft JhengHei"/>
-                          <a:ea typeface="Microsoft JhengHei"/>
-                          <a:cs typeface="Microsoft JhengHei"/>
-                        </a:rPr>
-                        <a:t>目前初步評估對公司運作無重大影響。</a:t>
-                      </a:r>
-                    </a:p>
-                  </a:txBody>
-                  <a:tcPr anchor="ctr" marL="73152" marT="9144" marB="9144">
-                    <a:solidFill>
-                      <a:srgbClr val="FFFFFF"/>
-                    </a:solidFill>
-                  </a:tcPr>
-                </a:tc>
-              </a:tr>
-              <a:tr h="324200">
-                <a:tc>
-                  <a:txBody>
-                    <a:bodyPr/>
-                    <a:lstStyle/>
-                    <a:p>
-                      <a:r>
-                        <a:rPr sz="1150" b="0">
-                          <a:solidFill>
-                            <a:srgbClr val="1A2233"/>
-                          </a:solidFill>
-                          <a:latin typeface="Microsoft JhengHei"/>
-                          <a:ea typeface="Microsoft JhengHei"/>
-                          <a:cs typeface="Microsoft JhengHei"/>
-                        </a:rPr>
-                        <a:t>尼得科超眾</a:t>
-                      </a:r>
-                    </a:p>
-                  </a:txBody>
-                  <a:tcPr anchor="ctr" marL="73152" marT="9144" marB="9144">
-                    <a:solidFill>
-                      <a:srgbClr val="EEF2F9"/>
-                    </a:solidFill>
-                  </a:tcPr>
-                </a:tc>
-                <a:tc>
-                  <a:txBody>
-                    <a:bodyPr/>
-                    <a:lstStyle/>
-                    <a:p>
-                      <a:r>
-                        <a:rPr sz="1150" b="0">
-                          <a:solidFill>
-                            <a:srgbClr val="1A2233"/>
-                          </a:solidFill>
-                          <a:latin typeface="Microsoft JhengHei"/>
-                          <a:ea typeface="Microsoft JhengHei"/>
-                          <a:cs typeface="Microsoft JhengHei"/>
-                        </a:rPr>
-                        <a:t>6230</a:t>
-                      </a:r>
-                    </a:p>
-                  </a:txBody>
-                  <a:tcPr anchor="ctr" marL="73152" marT="9144" marB="9144">
-                    <a:solidFill>
-                      <a:srgbClr val="EEF2F9"/>
-                    </a:solidFill>
-                  </a:tcPr>
-                </a:tc>
-                <a:tc>
-                  <a:txBody>
-                    <a:bodyPr/>
-                    <a:lstStyle/>
-                    <a:p>
-                      <a:r>
-                        <a:rPr sz="1150" b="0">
-                          <a:solidFill>
-                            <a:srgbClr val="1A2233"/>
-                          </a:solidFill>
-                          <a:latin typeface="Microsoft JhengHei"/>
-                          <a:ea typeface="Microsoft JhengHei"/>
-                          <a:cs typeface="Microsoft JhengHei"/>
-                        </a:rPr>
-                        <a:t>06/22</a:t>
-                      </a:r>
-                    </a:p>
-                  </a:txBody>
-                  <a:tcPr anchor="ctr" marL="73152" marT="9144" marB="9144">
-                    <a:solidFill>
-                      <a:srgbClr val="EEF2F9"/>
-                    </a:solidFill>
-                  </a:tcPr>
-                </a:tc>
-                <a:tc>
-                  <a:txBody>
-                    <a:bodyPr/>
-                    <a:lstStyle/>
-                    <a:p>
-                      <a:r>
-                        <a:rPr sz="1150" b="1">
-                          <a:solidFill>
-                            <a:srgbClr val="F4A261"/>
-                          </a:solidFill>
-                          <a:latin typeface="Microsoft JhengHei"/>
-                          <a:ea typeface="Microsoft JhengHei"/>
-                          <a:cs typeface="Microsoft JhengHei"/>
-                        </a:rPr>
-                        <a:t>勒索病毒/加密</a:t>
-                      </a:r>
-                    </a:p>
-                  </a:txBody>
-                  <a:tcPr anchor="ctr" marL="73152" marT="9144" marB="9144">
-                    <a:solidFill>
-                      <a:srgbClr val="EEF2F9"/>
-                    </a:solidFill>
-                  </a:tcPr>
-                </a:tc>
-                <a:tc>
-                  <a:txBody>
-                    <a:bodyPr/>
-                    <a:lstStyle/>
-                    <a:p>
-                      <a:r>
-                        <a:rPr sz="1150" b="0">
-                          <a:solidFill>
-                            <a:srgbClr val="1A2233"/>
-                          </a:solidFill>
-                          <a:latin typeface="Microsoft JhengHei"/>
-                          <a:ea typeface="Microsoft JhengHei"/>
-                          <a:cs typeface="Microsoft JhengHei"/>
-                        </a:rPr>
-                        <a:t>目前受影響之系統正陸續復原中，對公司整體營運及財務之影響程度尚在評估…</a:t>
-                      </a:r>
-                    </a:p>
-                  </a:txBody>
-                  <a:tcPr anchor="ctr" marL="73152" marT="9144" marB="9144">
-                    <a:solidFill>
-                      <a:srgbClr val="EEF2F9"/>
-                    </a:solidFill>
-                  </a:tcPr>
-                </a:tc>
-              </a:tr>
             </a:tbl>
           </a:graphicData>
         </a:graphic>
@@ -5935,244 +5554,6 @@
             <a:avLst/>
           </a:prstGeom>
           <a:solidFill>
-            <a:srgbClr val="F4A261"/>
-          </a:solidFill>
-          <a:ln>
-            <a:noFill/>
-          </a:ln>
-          <a:effectLst/>
-        </p:spPr>
-        <p:style>
-          <a:lnRef idx="1">
-            <a:schemeClr val="accent1"/>
-          </a:lnRef>
-          <a:fillRef idx="3">
-            <a:schemeClr val="accent1"/>
-          </a:fillRef>
-          <a:effectRef idx="2">
-            <a:schemeClr val="accent1"/>
-          </a:effectRef>
-          <a:fontRef idx="minor">
-            <a:schemeClr val="lt1"/>
-          </a:fontRef>
-        </p:style>
-        <p:txBody>
-          <a:bodyPr rtlCol="0" anchor="ctr"/>
-          <a:lstStyle/>
-          <a:p>
-            <a:pPr algn="ctr"/>
-          </a:p>
-        </p:txBody>
-      </p:sp>
-      <p:sp>
-        <p:nvSpPr>
-          <p:cNvPr id="14" name="TextBox 13"/>
-          <p:cNvSpPr txBox="1"/>
-          <p:nvPr/>
-        </p:nvSpPr>
-        <p:spPr>
-          <a:xfrm>
-            <a:off x="5897880" y="3127248"/>
-            <a:ext cx="4206240" cy="365760"/>
-          </a:xfrm>
-          <a:prstGeom prst="rect">
-            <a:avLst/>
-          </a:prstGeom>
-          <a:noFill/>
-        </p:spPr>
-        <p:txBody>
-          <a:bodyPr wrap="square" anchor="ctr" lIns="0" rIns="0" tIns="0" bIns="0">
-            <a:spAutoFit/>
-          </a:bodyPr>
-          <a:lstStyle/>
-          <a:p>
-            <a:pPr algn="l"/>
-            <a:r>
-              <a:rPr sz="1600" b="1">
-                <a:solidFill>
-                  <a:srgbClr val="1A2233"/>
-                </a:solidFill>
-                <a:latin typeface="Microsoft JhengHei"/>
-                <a:ea typeface="Microsoft JhengHei"/>
-                <a:cs typeface="Microsoft JhengHei"/>
-              </a:rPr>
-              <a:t>勒索病毒/加密</a:t>
-            </a:r>
-          </a:p>
-        </p:txBody>
-      </p:sp>
-      <p:sp>
-        <p:nvSpPr>
-          <p:cNvPr id="15" name="TextBox 14"/>
-          <p:cNvSpPr txBox="1"/>
-          <p:nvPr/>
-        </p:nvSpPr>
-        <p:spPr>
-          <a:xfrm>
-            <a:off x="10058400" y="3127248"/>
-            <a:ext cx="1463040" cy="365760"/>
-          </a:xfrm>
-          <a:prstGeom prst="rect">
-            <a:avLst/>
-          </a:prstGeom>
-          <a:noFill/>
-        </p:spPr>
-        <p:txBody>
-          <a:bodyPr wrap="square" anchor="ctr" lIns="0" rIns="0" tIns="0" bIns="0">
-            <a:spAutoFit/>
-          </a:bodyPr>
-          <a:lstStyle/>
-          <a:p>
-            <a:pPr algn="r"/>
-            <a:r>
-              <a:rPr sz="1800" b="1">
-                <a:solidFill>
-                  <a:srgbClr val="F4A261"/>
-                </a:solidFill>
-                <a:latin typeface="Microsoft JhengHei"/>
-                <a:ea typeface="Microsoft JhengHei"/>
-                <a:cs typeface="Microsoft JhengHei"/>
-              </a:rPr>
-              <a:t>2 起</a:t>
-            </a:r>
-          </a:p>
-        </p:txBody>
-      </p:sp>
-      <p:sp>
-        <p:nvSpPr>
-          <p:cNvPr id="16" name="TextBox 15"/>
-          <p:cNvSpPr txBox="1"/>
-          <p:nvPr/>
-        </p:nvSpPr>
-        <p:spPr>
-          <a:xfrm>
-            <a:off x="5897880" y="3520439"/>
-            <a:ext cx="5577840" cy="274320"/>
-          </a:xfrm>
-          <a:prstGeom prst="rect">
-            <a:avLst/>
-          </a:prstGeom>
-          <a:noFill/>
-        </p:spPr>
-        <p:txBody>
-          <a:bodyPr wrap="square" anchor="t" lIns="0" rIns="0" tIns="0" bIns="0">
-            <a:spAutoFit/>
-          </a:bodyPr>
-          <a:lstStyle/>
-          <a:p>
-            <a:pPr algn="l"/>
-            <a:r>
-              <a:rPr sz="1150" b="1">
-                <a:solidFill>
-                  <a:srgbClr val="1A2233"/>
-                </a:solidFill>
-                <a:latin typeface="Microsoft JhengHei"/>
-                <a:ea typeface="Microsoft JhengHei"/>
-                <a:cs typeface="Microsoft JhengHei"/>
-              </a:rPr>
-              <a:t>易發、尼得科超眾</a:t>
-            </a:r>
-          </a:p>
-        </p:txBody>
-      </p:sp>
-      <p:sp>
-        <p:nvSpPr>
-          <p:cNvPr id="17" name="TextBox 16"/>
-          <p:cNvSpPr txBox="1"/>
-          <p:nvPr/>
-        </p:nvSpPr>
-        <p:spPr>
-          <a:xfrm>
-            <a:off x="5897880" y="3785615"/>
-            <a:ext cx="5669280" cy="329184"/>
-          </a:xfrm>
-          <a:prstGeom prst="rect">
-            <a:avLst/>
-          </a:prstGeom>
-          <a:noFill/>
-        </p:spPr>
-        <p:txBody>
-          <a:bodyPr wrap="square" anchor="t" lIns="0" rIns="0" tIns="0" bIns="0">
-            <a:spAutoFit/>
-          </a:bodyPr>
-          <a:lstStyle/>
-          <a:p>
-            <a:pPr algn="l"/>
-            <a:r>
-              <a:rPr sz="1100" b="0">
-                <a:solidFill>
-                  <a:srgbClr val="5C6679"/>
-                </a:solidFill>
-                <a:latin typeface="Microsoft JhengHei"/>
-                <a:ea typeface="Microsoft JhengHei"/>
-                <a:cs typeface="Microsoft JhengHei"/>
-              </a:rPr>
-              <a:t>伺服器資料遭加密，須系統隔離與資料復原</a:t>
-            </a:r>
-          </a:p>
-        </p:txBody>
-      </p:sp>
-      <p:sp>
-        <p:nvSpPr>
-          <p:cNvPr id="18" name="Rounded Rectangle 17"/>
-          <p:cNvSpPr/>
-          <p:nvPr/>
-        </p:nvSpPr>
-        <p:spPr>
-          <a:xfrm>
-            <a:off x="5669280" y="4343400"/>
-            <a:ext cx="6035040" cy="1170432"/>
-          </a:xfrm>
-          <a:prstGeom prst="roundRect">
-            <a:avLst/>
-          </a:prstGeom>
-          <a:solidFill>
-            <a:srgbClr val="FFFFFF"/>
-          </a:solidFill>
-          <a:ln w="12700">
-            <a:solidFill>
-              <a:srgbClr val="DDE3EE"/>
-            </a:solidFill>
-          </a:ln>
-          <a:effectLst/>
-        </p:spPr>
-        <p:style>
-          <a:lnRef idx="1">
-            <a:schemeClr val="accent1"/>
-          </a:lnRef>
-          <a:fillRef idx="3">
-            <a:schemeClr val="accent1"/>
-          </a:fillRef>
-          <a:effectRef idx="2">
-            <a:schemeClr val="accent1"/>
-          </a:effectRef>
-          <a:fontRef idx="minor">
-            <a:schemeClr val="lt1"/>
-          </a:fontRef>
-        </p:style>
-        <p:txBody>
-          <a:bodyPr rtlCol="0" anchor="ctr"/>
-          <a:lstStyle/>
-          <a:p>
-            <a:pPr algn="ctr"/>
-          </a:p>
-        </p:txBody>
-      </p:sp>
-      <p:sp>
-        <p:nvSpPr>
-          <p:cNvPr id="19" name="Rectangle 18"/>
-          <p:cNvSpPr/>
-          <p:nvPr/>
-        </p:nvSpPr>
-        <p:spPr>
-          <a:xfrm>
-            <a:off x="5669280" y="4343400"/>
-            <a:ext cx="109728" cy="1170432"/>
-          </a:xfrm>
-          <a:prstGeom prst="rect">
-            <a:avLst/>
-          </a:prstGeom>
-          <a:solidFill>
             <a:srgbClr val="5C6679"/>
           </a:solidFill>
           <a:ln>
@@ -6204,13 +5585,13 @@
       </p:sp>
       <p:sp>
         <p:nvSpPr>
-          <p:cNvPr id="20" name="TextBox 19"/>
+          <p:cNvPr id="14" name="TextBox 13"/>
           <p:cNvSpPr txBox="1"/>
           <p:nvPr/>
         </p:nvSpPr>
         <p:spPr>
           <a:xfrm>
-            <a:off x="5897880" y="4453128"/>
+            <a:off x="5897880" y="3127248"/>
             <a:ext cx="4206240" cy="365760"/>
           </a:xfrm>
           <a:prstGeom prst="rect">
@@ -6241,13 +5622,13 @@
       </p:sp>
       <p:sp>
         <p:nvSpPr>
-          <p:cNvPr id="21" name="TextBox 20"/>
+          <p:cNvPr id="15" name="TextBox 14"/>
           <p:cNvSpPr txBox="1"/>
           <p:nvPr/>
         </p:nvSpPr>
         <p:spPr>
           <a:xfrm>
-            <a:off x="10058400" y="4453128"/>
+            <a:off x="10058400" y="3127248"/>
             <a:ext cx="1463040" cy="365760"/>
           </a:xfrm>
           <a:prstGeom prst="rect">
@@ -6271,20 +5652,20 @@
                 <a:ea typeface="Microsoft JhengHei"/>
                 <a:cs typeface="Microsoft JhengHei"/>
               </a:rPr>
-              <a:t>4 起</a:t>
-            </a:r>
-          </a:p>
-        </p:txBody>
-      </p:sp>
-      <p:sp>
-        <p:nvSpPr>
-          <p:cNvPr id="22" name="TextBox 21"/>
+              <a:t>3 起</a:t>
+            </a:r>
+          </a:p>
+        </p:txBody>
+      </p:sp>
+      <p:sp>
+        <p:nvSpPr>
+          <p:cNvPr id="16" name="TextBox 15"/>
           <p:cNvSpPr txBox="1"/>
           <p:nvPr/>
         </p:nvSpPr>
         <p:spPr>
           <a:xfrm>
-            <a:off x="5897880" y="4846320"/>
+            <a:off x="5897880" y="3520439"/>
             <a:ext cx="5577840" cy="274320"/>
           </a:xfrm>
           <a:prstGeom prst="rect">
@@ -6308,20 +5689,20 @@
                 <a:ea typeface="Microsoft JhengHei"/>
                 <a:cs typeface="Microsoft JhengHei"/>
               </a:rPr>
-              <a:t>淳安、淳安、GOGOLOOK、耕興</a:t>
-            </a:r>
-          </a:p>
-        </p:txBody>
-      </p:sp>
-      <p:sp>
-        <p:nvSpPr>
-          <p:cNvPr id="23" name="TextBox 22"/>
+              <a:t>淳安、淳安、GOGOLOOK</a:t>
+            </a:r>
+          </a:p>
+        </p:txBody>
+      </p:sp>
+      <p:sp>
+        <p:nvSpPr>
+          <p:cNvPr id="17" name="TextBox 16"/>
           <p:cNvSpPr txBox="1"/>
           <p:nvPr/>
         </p:nvSpPr>
         <p:spPr>
           <a:xfrm>
-            <a:off x="5897880" y="5111496"/>
+            <a:off x="5897880" y="3785615"/>
             <a:ext cx="5669280" cy="329184"/>
           </a:xfrm>
           <a:prstGeom prst="rect">
@@ -6496,7 +5877,7 @@
         </p:nvGraphicFramePr>
         <p:xfrm>
           <a:off x="548640" y="1600200"/>
-          <a:ext cx="10789920" cy="4480560"/>
+          <a:ext cx="10789920" cy="3657600"/>
         </p:xfrm>
         <a:graphic>
           <a:graphicData uri="http://schemas.openxmlformats.org/drawingml/2006/table">
@@ -6511,7 +5892,7 @@
                 <a:gridCol w="3383280"/>
                 <a:gridCol w="2606040"/>
               </a:tblGrid>
-              <a:tr h="407323">
+              <a:tr h="457200">
                 <a:tc>
                   <a:txBody>
                     <a:bodyPr/>
@@ -6633,7 +6014,7 @@
                   </a:tcPr>
                 </a:tc>
               </a:tr>
-              <a:tr h="407323">
+              <a:tr h="457200">
                 <a:tc>
                   <a:txBody>
                     <a:bodyPr/>
@@ -6755,7 +6136,7 @@
                   </a:tcPr>
                 </a:tc>
               </a:tr>
-              <a:tr h="407323">
+              <a:tr h="457200">
                 <a:tc>
                   <a:txBody>
                     <a:bodyPr/>
@@ -6877,7 +6258,7 @@
                   </a:tcPr>
                 </a:tc>
               </a:tr>
-              <a:tr h="407323">
+              <a:tr h="457200">
                 <a:tc>
                   <a:txBody>
                     <a:bodyPr/>
@@ -6999,7 +6380,7 @@
                   </a:tcPr>
                 </a:tc>
               </a:tr>
-              <a:tr h="407323">
+              <a:tr h="457200">
                 <a:tc>
                   <a:txBody>
                     <a:bodyPr/>
@@ -7121,7 +6502,7 @@
                   </a:tcPr>
                 </a:tc>
               </a:tr>
-              <a:tr h="407323">
+              <a:tr h="457200">
                 <a:tc>
                   <a:txBody>
                     <a:bodyPr/>
@@ -7243,7 +6624,7 @@
                   </a:tcPr>
                 </a:tc>
               </a:tr>
-              <a:tr h="407323">
+              <a:tr h="457200">
                 <a:tc>
                   <a:txBody>
                     <a:bodyPr/>
@@ -7365,7 +6746,7 @@
                   </a:tcPr>
                 </a:tc>
               </a:tr>
-              <a:tr h="407323">
+              <a:tr h="457200">
                 <a:tc>
                   <a:txBody>
                     <a:bodyPr/>
@@ -7487,372 +6868,6 @@
                   </a:tcPr>
                 </a:tc>
               </a:tr>
-              <a:tr h="407323">
-                <a:tc>
-                  <a:txBody>
-                    <a:bodyPr/>
-                    <a:lstStyle/>
-                    <a:p>
-                      <a:r>
-                        <a:rPr sz="1150" b="0">
-                          <a:solidFill>
-                            <a:srgbClr val="1A2233"/>
-                          </a:solidFill>
-                          <a:latin typeface="Microsoft JhengHei"/>
-                          <a:ea typeface="Microsoft JhengHei"/>
-                          <a:cs typeface="Microsoft JhengHei"/>
-                        </a:rPr>
-                        <a:t>耕興</a:t>
-                      </a:r>
-                    </a:p>
-                  </a:txBody>
-                  <a:tcPr anchor="ctr" marL="73152" marT="9144" marB="9144">
-                    <a:solidFill>
-                      <a:srgbClr val="EEF2F9"/>
-                    </a:solidFill>
-                  </a:tcPr>
-                </a:tc>
-                <a:tc>
-                  <a:txBody>
-                    <a:bodyPr/>
-                    <a:lstStyle/>
-                    <a:p>
-                      <a:r>
-                        <a:rPr sz="1150" b="0">
-                          <a:solidFill>
-                            <a:srgbClr val="1A2233"/>
-                          </a:solidFill>
-                          <a:latin typeface="Microsoft JhengHei"/>
-                          <a:ea typeface="Microsoft JhengHei"/>
-                          <a:cs typeface="Microsoft JhengHei"/>
-                        </a:rPr>
-                        <a:t>6146</a:t>
-                      </a:r>
-                    </a:p>
-                  </a:txBody>
-                  <a:tcPr anchor="ctr" marL="73152" marT="9144" marB="9144">
-                    <a:solidFill>
-                      <a:srgbClr val="EEF2F9"/>
-                    </a:solidFill>
-                  </a:tcPr>
-                </a:tc>
-                <a:tc>
-                  <a:txBody>
-                    <a:bodyPr/>
-                    <a:lstStyle/>
-                    <a:p>
-                      <a:r>
-                        <a:rPr sz="1150" b="1">
-                          <a:solidFill>
-                            <a:srgbClr val="5C6679"/>
-                          </a:solidFill>
-                          <a:latin typeface="Microsoft JhengHei"/>
-                          <a:ea typeface="Microsoft JhengHei"/>
-                          <a:cs typeface="Microsoft JhengHei"/>
-                        </a:rPr>
-                        <a:t>其他</a:t>
-                      </a:r>
-                    </a:p>
-                  </a:txBody>
-                  <a:tcPr anchor="ctr" marL="73152" marT="9144" marB="9144">
-                    <a:solidFill>
-                      <a:srgbClr val="EEF2F9"/>
-                    </a:solidFill>
-                  </a:tcPr>
-                </a:tc>
-                <a:tc>
-                  <a:txBody>
-                    <a:bodyPr/>
-                    <a:lstStyle/>
-                    <a:p>
-                      <a:r>
-                        <a:rPr sz="1150" b="0">
-                          <a:solidFill>
-                            <a:srgbClr val="1A2233"/>
-                          </a:solidFill>
-                          <a:latin typeface="Microsoft JhengHei"/>
-                          <a:ea typeface="Microsoft JhengHei"/>
-                          <a:cs typeface="Microsoft JhengHei"/>
-                        </a:rPr>
-                        <a:t>勤業眾信聯合會計師事務所</a:t>
-                      </a:r>
-                    </a:p>
-                  </a:txBody>
-                  <a:tcPr anchor="ctr" marL="73152" marT="9144" marB="9144">
-                    <a:solidFill>
-                      <a:srgbClr val="EEF2F9"/>
-                    </a:solidFill>
-                  </a:tcPr>
-                </a:tc>
-                <a:tc>
-                  <a:txBody>
-                    <a:bodyPr/>
-                    <a:lstStyle/>
-                    <a:p>
-                      <a:r>
-                        <a:rPr sz="1150" b="0">
-                          <a:solidFill>
-                            <a:srgbClr val="1A2233"/>
-                          </a:solidFill>
-                          <a:latin typeface="Microsoft JhengHei"/>
-                          <a:ea typeface="Microsoft JhengHei"/>
-                          <a:cs typeface="Microsoft JhengHei"/>
-                        </a:rPr>
-                        <a:t>黃毅民、陳文香</a:t>
-                      </a:r>
-                    </a:p>
-                  </a:txBody>
-                  <a:tcPr anchor="ctr" marL="73152" marT="9144" marB="9144">
-                    <a:solidFill>
-                      <a:srgbClr val="EEF2F9"/>
-                    </a:solidFill>
-                  </a:tcPr>
-                </a:tc>
-              </a:tr>
-              <a:tr h="407323">
-                <a:tc>
-                  <a:txBody>
-                    <a:bodyPr/>
-                    <a:lstStyle/>
-                    <a:p>
-                      <a:r>
-                        <a:rPr sz="1150" b="0">
-                          <a:solidFill>
-                            <a:srgbClr val="1A2233"/>
-                          </a:solidFill>
-                          <a:latin typeface="Microsoft JhengHei"/>
-                          <a:ea typeface="Microsoft JhengHei"/>
-                          <a:cs typeface="Microsoft JhengHei"/>
-                        </a:rPr>
-                        <a:t>易發</a:t>
-                      </a:r>
-                    </a:p>
-                  </a:txBody>
-                  <a:tcPr anchor="ctr" marL="73152" marT="9144" marB="9144">
-                    <a:solidFill>
-                      <a:srgbClr val="FFFFFF"/>
-                    </a:solidFill>
-                  </a:tcPr>
-                </a:tc>
-                <a:tc>
-                  <a:txBody>
-                    <a:bodyPr/>
-                    <a:lstStyle/>
-                    <a:p>
-                      <a:r>
-                        <a:rPr sz="1150" b="0">
-                          <a:solidFill>
-                            <a:srgbClr val="1A2233"/>
-                          </a:solidFill>
-                          <a:latin typeface="Microsoft JhengHei"/>
-                          <a:ea typeface="Microsoft JhengHei"/>
-                          <a:cs typeface="Microsoft JhengHei"/>
-                        </a:rPr>
-                        <a:t>6425</a:t>
-                      </a:r>
-                    </a:p>
-                  </a:txBody>
-                  <a:tcPr anchor="ctr" marL="73152" marT="9144" marB="9144">
-                    <a:solidFill>
-                      <a:srgbClr val="FFFFFF"/>
-                    </a:solidFill>
-                  </a:tcPr>
-                </a:tc>
-                <a:tc>
-                  <a:txBody>
-                    <a:bodyPr/>
-                    <a:lstStyle/>
-                    <a:p>
-                      <a:r>
-                        <a:rPr sz="1150" b="1">
-                          <a:solidFill>
-                            <a:srgbClr val="F4A261"/>
-                          </a:solidFill>
-                          <a:latin typeface="Microsoft JhengHei"/>
-                          <a:ea typeface="Microsoft JhengHei"/>
-                          <a:cs typeface="Microsoft JhengHei"/>
-                        </a:rPr>
-                        <a:t>勒索病毒/加密</a:t>
-                      </a:r>
-                    </a:p>
-                  </a:txBody>
-                  <a:tcPr anchor="ctr" marL="73152" marT="9144" marB="9144">
-                    <a:solidFill>
-                      <a:srgbClr val="FFFFFF"/>
-                    </a:solidFill>
-                  </a:tcPr>
-                </a:tc>
-                <a:tc>
-                  <a:txBody>
-                    <a:bodyPr/>
-                    <a:lstStyle/>
-                    <a:p>
-                      <a:r>
-                        <a:rPr sz="1150" b="0">
-                          <a:solidFill>
-                            <a:srgbClr val="1A2233"/>
-                          </a:solidFill>
-                          <a:latin typeface="Microsoft JhengHei"/>
-                          <a:ea typeface="Microsoft JhengHei"/>
-                          <a:cs typeface="Microsoft JhengHei"/>
-                        </a:rPr>
-                        <a:t>勤業眾信聯合會計師事務所</a:t>
-                      </a:r>
-                    </a:p>
-                  </a:txBody>
-                  <a:tcPr anchor="ctr" marL="73152" marT="9144" marB="9144">
-                    <a:solidFill>
-                      <a:srgbClr val="FFFFFF"/>
-                    </a:solidFill>
-                  </a:tcPr>
-                </a:tc>
-                <a:tc>
-                  <a:txBody>
-                    <a:bodyPr/>
-                    <a:lstStyle/>
-                    <a:p>
-                      <a:r>
-                        <a:rPr sz="1150" b="0">
-                          <a:solidFill>
-                            <a:srgbClr val="1A2233"/>
-                          </a:solidFill>
-                          <a:latin typeface="Microsoft JhengHei"/>
-                          <a:ea typeface="Microsoft JhengHei"/>
-                          <a:cs typeface="Microsoft JhengHei"/>
-                        </a:rPr>
-                        <a:t>張至誼、洪國田</a:t>
-                      </a:r>
-                    </a:p>
-                  </a:txBody>
-                  <a:tcPr anchor="ctr" marL="73152" marT="9144" marB="9144">
-                    <a:solidFill>
-                      <a:srgbClr val="FFFFFF"/>
-                    </a:solidFill>
-                  </a:tcPr>
-                </a:tc>
-              </a:tr>
-              <a:tr h="407330">
-                <a:tc>
-                  <a:txBody>
-                    <a:bodyPr/>
-                    <a:lstStyle/>
-                    <a:p>
-                      <a:r>
-                        <a:rPr sz="1150" b="0">
-                          <a:solidFill>
-                            <a:srgbClr val="1A2233"/>
-                          </a:solidFill>
-                          <a:latin typeface="Microsoft JhengHei"/>
-                          <a:ea typeface="Microsoft JhengHei"/>
-                          <a:cs typeface="Microsoft JhengHei"/>
-                        </a:rPr>
-                        <a:t>尼得科超眾</a:t>
-                      </a:r>
-                    </a:p>
-                  </a:txBody>
-                  <a:tcPr anchor="ctr" marL="73152" marT="9144" marB="9144">
-                    <a:solidFill>
-                      <a:srgbClr val="EEF2F9"/>
-                    </a:solidFill>
-                  </a:tcPr>
-                </a:tc>
-                <a:tc>
-                  <a:txBody>
-                    <a:bodyPr/>
-                    <a:lstStyle/>
-                    <a:p>
-                      <a:r>
-                        <a:rPr sz="1150" b="0">
-                          <a:solidFill>
-                            <a:srgbClr val="1A2233"/>
-                          </a:solidFill>
-                          <a:latin typeface="Microsoft JhengHei"/>
-                          <a:ea typeface="Microsoft JhengHei"/>
-                          <a:cs typeface="Microsoft JhengHei"/>
-                        </a:rPr>
-                        <a:t>6230</a:t>
-                      </a:r>
-                    </a:p>
-                  </a:txBody>
-                  <a:tcPr anchor="ctr" marL="73152" marT="9144" marB="9144">
-                    <a:solidFill>
-                      <a:srgbClr val="EEF2F9"/>
-                    </a:solidFill>
-                  </a:tcPr>
-                </a:tc>
-                <a:tc>
-                  <a:txBody>
-                    <a:bodyPr/>
-                    <a:lstStyle/>
-                    <a:p>
-                      <a:r>
-                        <a:rPr sz="1150" b="1">
-                          <a:solidFill>
-                            <a:srgbClr val="F4A261"/>
-                          </a:solidFill>
-                          <a:latin typeface="Microsoft JhengHei"/>
-                          <a:ea typeface="Microsoft JhengHei"/>
-                          <a:cs typeface="Microsoft JhengHei"/>
-                        </a:rPr>
-                        <a:t>勒索病毒/加密</a:t>
-                      </a:r>
-                    </a:p>
-                  </a:txBody>
-                  <a:tcPr anchor="ctr" marL="73152" marT="9144" marB="9144">
-                    <a:solidFill>
-                      <a:srgbClr val="EEF2F9"/>
-                    </a:solidFill>
-                  </a:tcPr>
-                </a:tc>
-                <a:tc>
-                  <a:txBody>
-                    <a:bodyPr/>
-                    <a:lstStyle/>
-                    <a:p>
-                      <a:r>
-                        <a:rPr sz="1150" b="0">
-                          <a:solidFill>
-                            <a:srgbClr val="1A2233"/>
-                          </a:solidFill>
-                          <a:latin typeface="Microsoft JhengHei"/>
-                          <a:ea typeface="Microsoft JhengHei"/>
-                          <a:cs typeface="Microsoft JhengHei"/>
-                        </a:rPr>
-                        <a:t>安侯建業聯合會計師事務所</a:t>
-                      </a:r>
-                    </a:p>
-                  </a:txBody>
-                  <a:tcPr anchor="ctr" marL="73152" marT="9144" marB="9144">
-                    <a:solidFill>
-                      <a:srgbClr val="EEF2F9"/>
-                    </a:solidFill>
-                  </a:tcPr>
-                </a:tc>
-                <a:tc>
-                  <a:txBody>
-                    <a:bodyPr/>
-                    <a:lstStyle/>
-                    <a:p>
-                      <a:r>
-                        <a:rPr sz="1150" b="0">
-                          <a:solidFill>
-                            <a:srgbClr val="1A2233"/>
-                          </a:solidFill>
-                          <a:latin typeface="Microsoft JhengHei"/>
-                          <a:ea typeface="Microsoft JhengHei"/>
-                          <a:cs typeface="Microsoft JhengHei"/>
-                        </a:rPr>
-                        <a:t>郭欣頤、張肇文</a:t>
-                      </a:r>
-                    </a:p>
-                  </a:txBody>
-                  <a:tcPr anchor="ctr" marL="73152" marT="9144" marB="9144">
-                    <a:solidFill>
-                      <a:srgbClr val="EEF2F9"/>
-                    </a:solidFill>
-                  </a:tcPr>
-                </a:tc>
-              </a:tr>
             </a:tbl>
           </a:graphicData>
         </a:graphic>
@@ -11634,1111 +10649,6 @@
                 <a:cs typeface="Microsoft JhengHei"/>
               </a:rPr>
               <a:t>(1)全面啟動應變與調查：拍付國際獲悉駭客聲稱之入侵及勒索訊息後，已立即啟動資安應變程序，會同資安專家進行全面系統檢測與…</a:t>
-            </a:r>
-          </a:p>
-        </p:txBody>
-      </p:sp>
-      <p:sp>
-        <p:nvSpPr>
-          <p:cNvPr id="26" name="Rounded Rectangle 25"/>
-          <p:cNvSpPr/>
-          <p:nvPr/>
-        </p:nvSpPr>
-        <p:spPr>
-          <a:xfrm>
-            <a:off x="6172200" y="3886200"/>
-            <a:ext cx="5394960" cy="2148840"/>
-          </a:xfrm>
-          <a:prstGeom prst="roundRect">
-            <a:avLst/>
-          </a:prstGeom>
-          <a:solidFill>
-            <a:srgbClr val="FFFFFF"/>
-          </a:solidFill>
-          <a:ln w="12700">
-            <a:solidFill>
-              <a:srgbClr val="DDE3EE"/>
-            </a:solidFill>
-          </a:ln>
-          <a:effectLst/>
-        </p:spPr>
-        <p:style>
-          <a:lnRef idx="1">
-            <a:schemeClr val="accent1"/>
-          </a:lnRef>
-          <a:fillRef idx="3">
-            <a:schemeClr val="accent1"/>
-          </a:fillRef>
-          <a:effectRef idx="2">
-            <a:schemeClr val="accent1"/>
-          </a:effectRef>
-          <a:fontRef idx="minor">
-            <a:schemeClr val="lt1"/>
-          </a:fontRef>
-        </p:style>
-        <p:txBody>
-          <a:bodyPr rtlCol="0" anchor="ctr"/>
-          <a:lstStyle/>
-          <a:p>
-            <a:pPr algn="ctr"/>
-          </a:p>
-        </p:txBody>
-      </p:sp>
-      <p:sp>
-        <p:nvSpPr>
-          <p:cNvPr id="27" name="Rectangle 26"/>
-          <p:cNvSpPr/>
-          <p:nvPr/>
-        </p:nvSpPr>
-        <p:spPr>
-          <a:xfrm>
-            <a:off x="6172200" y="3886200"/>
-            <a:ext cx="5394960" cy="109728"/>
-          </a:xfrm>
-          <a:prstGeom prst="rect">
-            <a:avLst/>
-          </a:prstGeom>
-          <a:solidFill>
-            <a:srgbClr val="5C6679"/>
-          </a:solidFill>
-          <a:ln>
-            <a:noFill/>
-          </a:ln>
-          <a:effectLst/>
-        </p:spPr>
-        <p:style>
-          <a:lnRef idx="1">
-            <a:schemeClr val="accent1"/>
-          </a:lnRef>
-          <a:fillRef idx="3">
-            <a:schemeClr val="accent1"/>
-          </a:fillRef>
-          <a:effectRef idx="2">
-            <a:schemeClr val="accent1"/>
-          </a:effectRef>
-          <a:fontRef idx="minor">
-            <a:schemeClr val="lt1"/>
-          </a:fontRef>
-        </p:style>
-        <p:txBody>
-          <a:bodyPr rtlCol="0" anchor="ctr"/>
-          <a:lstStyle/>
-          <a:p>
-            <a:pPr algn="ctr"/>
-          </a:p>
-        </p:txBody>
-      </p:sp>
-      <p:sp>
-        <p:nvSpPr>
-          <p:cNvPr id="28" name="TextBox 27"/>
-          <p:cNvSpPr txBox="1"/>
-          <p:nvPr/>
-        </p:nvSpPr>
-        <p:spPr>
-          <a:xfrm>
-            <a:off x="6400800" y="4105656"/>
-            <a:ext cx="3657600" cy="365760"/>
-          </a:xfrm>
-          <a:prstGeom prst="rect">
-            <a:avLst/>
-          </a:prstGeom>
-          <a:noFill/>
-        </p:spPr>
-        <p:txBody>
-          <a:bodyPr wrap="square" anchor="ctr" lIns="0" rIns="0" tIns="0" bIns="0">
-            <a:spAutoFit/>
-          </a:bodyPr>
-          <a:lstStyle/>
-          <a:p>
-            <a:pPr algn="l"/>
-            <a:r>
-              <a:rPr sz="1600" b="1">
-                <a:solidFill>
-                  <a:srgbClr val="1A2233"/>
-                </a:solidFill>
-                <a:latin typeface="Microsoft JhengHei"/>
-                <a:ea typeface="Microsoft JhengHei"/>
-                <a:cs typeface="Microsoft JhengHei"/>
-              </a:rPr>
-              <a:t>耕興 </a:t>
-            </a:r>
-            <a:r>
-              <a:rPr sz="1300" b="0">
-                <a:solidFill>
-                  <a:srgbClr val="5C6679"/>
-                </a:solidFill>
-                <a:latin typeface="Microsoft JhengHei"/>
-                <a:ea typeface="Microsoft JhengHei"/>
-                <a:cs typeface="Microsoft JhengHei"/>
-              </a:rPr>
-              <a:t>6146</a:t>
-            </a:r>
-          </a:p>
-        </p:txBody>
-      </p:sp>
-      <p:sp>
-        <p:nvSpPr>
-          <p:cNvPr id="29" name="Rounded Rectangle 28"/>
-          <p:cNvSpPr/>
-          <p:nvPr/>
-        </p:nvSpPr>
-        <p:spPr>
-          <a:xfrm>
-            <a:off x="10149840" y="4123944"/>
-            <a:ext cx="1234440" cy="347472"/>
-          </a:xfrm>
-          <a:prstGeom prst="roundRect">
-            <a:avLst/>
-          </a:prstGeom>
-          <a:solidFill>
-            <a:srgbClr val="5C6679"/>
-          </a:solidFill>
-          <a:ln>
-            <a:noFill/>
-          </a:ln>
-          <a:effectLst/>
-        </p:spPr>
-        <p:style>
-          <a:lnRef idx="1">
-            <a:schemeClr val="accent1"/>
-          </a:lnRef>
-          <a:fillRef idx="3">
-            <a:schemeClr val="accent1"/>
-          </a:fillRef>
-          <a:effectRef idx="2">
-            <a:schemeClr val="accent1"/>
-          </a:effectRef>
-          <a:fontRef idx="minor">
-            <a:schemeClr val="lt1"/>
-          </a:fontRef>
-        </p:style>
-        <p:txBody>
-          <a:bodyPr rtlCol="0" anchor="ctr"/>
-          <a:lstStyle/>
-          <a:p>
-            <a:pPr algn="ctr"/>
-          </a:p>
-        </p:txBody>
-      </p:sp>
-      <p:sp>
-        <p:nvSpPr>
-          <p:cNvPr id="30" name="TextBox 29"/>
-          <p:cNvSpPr txBox="1"/>
-          <p:nvPr/>
-        </p:nvSpPr>
-        <p:spPr>
-          <a:xfrm>
-            <a:off x="10149840" y="4123944"/>
-            <a:ext cx="1234440" cy="347472"/>
-          </a:xfrm>
-          <a:prstGeom prst="rect">
-            <a:avLst/>
-          </a:prstGeom>
-          <a:noFill/>
-        </p:spPr>
-        <p:txBody>
-          <a:bodyPr wrap="square" anchor="ctr" lIns="0" rIns="0" tIns="0" bIns="0">
-            <a:spAutoFit/>
-          </a:bodyPr>
-          <a:lstStyle/>
-          <a:p>
-            <a:pPr algn="ctr"/>
-            <a:r>
-              <a:rPr sz="1050" b="1">
-                <a:solidFill>
-                  <a:srgbClr val="FFFFFF"/>
-                </a:solidFill>
-                <a:latin typeface="Microsoft JhengHei"/>
-                <a:ea typeface="Microsoft JhengHei"/>
-                <a:cs typeface="Microsoft JhengHei"/>
-              </a:rPr>
-              <a:t>其他</a:t>
-            </a:r>
-          </a:p>
-        </p:txBody>
-      </p:sp>
-      <p:sp>
-        <p:nvSpPr>
-          <p:cNvPr id="31" name="TextBox 30"/>
-          <p:cNvSpPr txBox="1"/>
-          <p:nvPr/>
-        </p:nvSpPr>
-        <p:spPr>
-          <a:xfrm>
-            <a:off x="6400800" y="4599432"/>
-            <a:ext cx="4937760" cy="640080"/>
-          </a:xfrm>
-          <a:prstGeom prst="rect">
-            <a:avLst/>
-          </a:prstGeom>
-          <a:noFill/>
-        </p:spPr>
-        <p:txBody>
-          <a:bodyPr wrap="square" anchor="t" lIns="0" rIns="0" tIns="0" bIns="0">
-            <a:spAutoFit/>
-          </a:bodyPr>
-          <a:lstStyle/>
-          <a:p>
-            <a:pPr algn="l">
-              <a:lnSpc>
-                <a:spcPts val="1500"/>
-              </a:lnSpc>
-            </a:pPr>
-            <a:r>
-              <a:rPr sz="1100" b="1">
-                <a:solidFill>
-                  <a:srgbClr val="5C6679"/>
-                </a:solidFill>
-                <a:latin typeface="Microsoft JhengHei"/>
-                <a:ea typeface="Microsoft JhengHei"/>
-                <a:cs typeface="Microsoft JhengHei"/>
-              </a:rPr>
-              <a:t>緣由　</a:t>
-            </a:r>
-            <a:r>
-              <a:rPr sz="1100" b="0">
-                <a:solidFill>
-                  <a:srgbClr val="1A2233"/>
-                </a:solidFill>
-                <a:latin typeface="Microsoft JhengHei"/>
-                <a:ea typeface="Microsoft JhengHei"/>
-                <a:cs typeface="Microsoft JhengHei"/>
-              </a:rPr>
-              <a:t>本公司部分資訊系統發生網路資安事件。</a:t>
-            </a:r>
-          </a:p>
-        </p:txBody>
-      </p:sp>
-      <p:sp>
-        <p:nvSpPr>
-          <p:cNvPr id="32" name="TextBox 31"/>
-          <p:cNvSpPr txBox="1"/>
-          <p:nvPr/>
-        </p:nvSpPr>
-        <p:spPr>
-          <a:xfrm>
-            <a:off x="6400800" y="5257800"/>
-            <a:ext cx="4937760" cy="713232"/>
-          </a:xfrm>
-          <a:prstGeom prst="rect">
-            <a:avLst/>
-          </a:prstGeom>
-          <a:noFill/>
-        </p:spPr>
-        <p:txBody>
-          <a:bodyPr wrap="square" anchor="t" lIns="0" rIns="0" tIns="0" bIns="0">
-            <a:spAutoFit/>
-          </a:bodyPr>
-          <a:lstStyle/>
-          <a:p>
-            <a:pPr algn="l">
-              <a:lnSpc>
-                <a:spcPts val="1500"/>
-              </a:lnSpc>
-            </a:pPr>
-            <a:r>
-              <a:rPr sz="1100" b="1">
-                <a:solidFill>
-                  <a:srgbClr val="5C6679"/>
-                </a:solidFill>
-                <a:latin typeface="Microsoft JhengHei"/>
-                <a:ea typeface="Microsoft JhengHei"/>
-                <a:cs typeface="Microsoft JhengHei"/>
-              </a:rPr>
-              <a:t>因應　</a:t>
-            </a:r>
-            <a:r>
-              <a:rPr sz="1100" b="0">
-                <a:solidFill>
-                  <a:srgbClr val="1A2233"/>
-                </a:solidFill>
-                <a:latin typeface="Microsoft JhengHei"/>
-                <a:ea typeface="Microsoft JhengHei"/>
-                <a:cs typeface="Microsoft JhengHei"/>
-              </a:rPr>
-              <a:t>本公司將持續提升網路與資訊基礎架構之安全管控，並依外部資安技術專家之建議加強防護，確保資訊安全。</a:t>
-            </a:r>
-          </a:p>
-        </p:txBody>
-      </p:sp>
-    </p:spTree>
-  </p:cSld>
-  <p:clrMapOvr>
-    <a:masterClrMapping/>
-  </p:clrMapOvr>
-</p:sld>
-</file>
-
-<file path=ppt/slides/slide8.xml><?xml version="1.0" encoding="utf-8"?>
-<p:sld xmlns:a="http://schemas.openxmlformats.org/drawingml/2006/main" xmlns:p="http://schemas.openxmlformats.org/presentationml/2006/main" xmlns:r="http://schemas.openxmlformats.org/officeDocument/2006/relationships">
-  <p:cSld>
-    <p:spTree>
-      <p:nvGrpSpPr>
-        <p:cNvPr id="1" name=""/>
-        <p:cNvGrpSpPr/>
-        <p:nvPr/>
-      </p:nvGrpSpPr>
-      <p:grpSpPr/>
-      <p:sp>
-        <p:nvSpPr>
-          <p:cNvPr id="2" name="Rectangle 1"/>
-          <p:cNvSpPr/>
-          <p:nvPr/>
-        </p:nvSpPr>
-        <p:spPr>
-          <a:xfrm>
-            <a:off x="0" y="0"/>
-            <a:ext cx="12191695" cy="6858000"/>
-          </a:xfrm>
-          <a:prstGeom prst="rect">
-            <a:avLst/>
-          </a:prstGeom>
-          <a:solidFill>
-            <a:srgbClr val="F6F8FC"/>
-          </a:solidFill>
-          <a:ln>
-            <a:noFill/>
-          </a:ln>
-          <a:effectLst/>
-        </p:spPr>
-        <p:style>
-          <a:lnRef idx="1">
-            <a:schemeClr val="accent1"/>
-          </a:lnRef>
-          <a:fillRef idx="3">
-            <a:schemeClr val="accent1"/>
-          </a:fillRef>
-          <a:effectRef idx="2">
-            <a:schemeClr val="accent1"/>
-          </a:effectRef>
-          <a:fontRef idx="minor">
-            <a:schemeClr val="lt1"/>
-          </a:fontRef>
-        </p:style>
-        <p:txBody>
-          <a:bodyPr rtlCol="0" anchor="ctr"/>
-          <a:lstStyle/>
-          <a:p>
-            <a:pPr algn="ctr"/>
-          </a:p>
-        </p:txBody>
-      </p:sp>
-      <p:sp>
-        <p:nvSpPr>
-          <p:cNvPr id="3" name="TextBox 2"/>
-          <p:cNvSpPr txBox="1"/>
-          <p:nvPr/>
-        </p:nvSpPr>
-        <p:spPr>
-          <a:xfrm>
-            <a:off x="548640" y="365760"/>
-            <a:ext cx="9144000" cy="640080"/>
-          </a:xfrm>
-          <a:prstGeom prst="rect">
-            <a:avLst/>
-          </a:prstGeom>
-          <a:noFill/>
-        </p:spPr>
-        <p:txBody>
-          <a:bodyPr wrap="square" anchor="t" lIns="0" rIns="0" tIns="0" bIns="0">
-            <a:spAutoFit/>
-          </a:bodyPr>
-          <a:lstStyle/>
-          <a:p>
-            <a:pPr algn="l"/>
-            <a:r>
-              <a:rPr sz="3000" b="1">
-                <a:solidFill>
-                  <a:srgbClr val="1A2233"/>
-                </a:solidFill>
-                <a:latin typeface="Microsoft JhengHei"/>
-                <a:ea typeface="Microsoft JhengHei"/>
-                <a:cs typeface="Microsoft JhengHei"/>
-              </a:rPr>
-              <a:t>個案因應重點（3）</a:t>
-            </a:r>
-          </a:p>
-        </p:txBody>
-      </p:sp>
-      <p:sp>
-        <p:nvSpPr>
-          <p:cNvPr id="4" name="TextBox 3"/>
-          <p:cNvSpPr txBox="1"/>
-          <p:nvPr/>
-        </p:nvSpPr>
-        <p:spPr>
-          <a:xfrm>
-            <a:off x="566928" y="1005840"/>
-            <a:ext cx="10058400" cy="365760"/>
-          </a:xfrm>
-          <a:prstGeom prst="rect">
-            <a:avLst/>
-          </a:prstGeom>
-          <a:noFill/>
-        </p:spPr>
-        <p:txBody>
-          <a:bodyPr wrap="square" anchor="t" lIns="0" rIns="0" tIns="0" bIns="0">
-            <a:spAutoFit/>
-          </a:bodyPr>
-          <a:lstStyle/>
-          <a:p>
-            <a:pPr algn="l"/>
-            <a:r>
-              <a:rPr sz="1300" b="0">
-                <a:solidFill>
-                  <a:srgbClr val="5C6679"/>
-                </a:solidFill>
-                <a:latin typeface="Microsoft JhengHei"/>
-                <a:ea typeface="Microsoft JhengHei"/>
-                <a:cs typeface="Microsoft JhengHei"/>
-              </a:rPr>
-              <a:t>各公司公告之發生緣由與因應措施摘要</a:t>
-            </a:r>
-          </a:p>
-        </p:txBody>
-      </p:sp>
-      <p:sp>
-        <p:nvSpPr>
-          <p:cNvPr id="5" name="Rounded Rectangle 4"/>
-          <p:cNvSpPr/>
-          <p:nvPr/>
-        </p:nvSpPr>
-        <p:spPr>
-          <a:xfrm>
-            <a:off x="548640" y="1554480"/>
-            <a:ext cx="5394960" cy="2148840"/>
-          </a:xfrm>
-          <a:prstGeom prst="roundRect">
-            <a:avLst/>
-          </a:prstGeom>
-          <a:solidFill>
-            <a:srgbClr val="FFFFFF"/>
-          </a:solidFill>
-          <a:ln w="12700">
-            <a:solidFill>
-              <a:srgbClr val="DDE3EE"/>
-            </a:solidFill>
-          </a:ln>
-          <a:effectLst/>
-        </p:spPr>
-        <p:style>
-          <a:lnRef idx="1">
-            <a:schemeClr val="accent1"/>
-          </a:lnRef>
-          <a:fillRef idx="3">
-            <a:schemeClr val="accent1"/>
-          </a:fillRef>
-          <a:effectRef idx="2">
-            <a:schemeClr val="accent1"/>
-          </a:effectRef>
-          <a:fontRef idx="minor">
-            <a:schemeClr val="lt1"/>
-          </a:fontRef>
-        </p:style>
-        <p:txBody>
-          <a:bodyPr rtlCol="0" anchor="ctr"/>
-          <a:lstStyle/>
-          <a:p>
-            <a:pPr algn="ctr"/>
-          </a:p>
-        </p:txBody>
-      </p:sp>
-      <p:sp>
-        <p:nvSpPr>
-          <p:cNvPr id="6" name="Rectangle 5"/>
-          <p:cNvSpPr/>
-          <p:nvPr/>
-        </p:nvSpPr>
-        <p:spPr>
-          <a:xfrm>
-            <a:off x="548640" y="1554480"/>
-            <a:ext cx="5394960" cy="109728"/>
-          </a:xfrm>
-          <a:prstGeom prst="rect">
-            <a:avLst/>
-          </a:prstGeom>
-          <a:solidFill>
-            <a:srgbClr val="F4A261"/>
-          </a:solidFill>
-          <a:ln>
-            <a:noFill/>
-          </a:ln>
-          <a:effectLst/>
-        </p:spPr>
-        <p:style>
-          <a:lnRef idx="1">
-            <a:schemeClr val="accent1"/>
-          </a:lnRef>
-          <a:fillRef idx="3">
-            <a:schemeClr val="accent1"/>
-          </a:fillRef>
-          <a:effectRef idx="2">
-            <a:schemeClr val="accent1"/>
-          </a:effectRef>
-          <a:fontRef idx="minor">
-            <a:schemeClr val="lt1"/>
-          </a:fontRef>
-        </p:style>
-        <p:txBody>
-          <a:bodyPr rtlCol="0" anchor="ctr"/>
-          <a:lstStyle/>
-          <a:p>
-            <a:pPr algn="ctr"/>
-          </a:p>
-        </p:txBody>
-      </p:sp>
-      <p:sp>
-        <p:nvSpPr>
-          <p:cNvPr id="7" name="TextBox 6"/>
-          <p:cNvSpPr txBox="1"/>
-          <p:nvPr/>
-        </p:nvSpPr>
-        <p:spPr>
-          <a:xfrm>
-            <a:off x="777240" y="1773936"/>
-            <a:ext cx="3657600" cy="365760"/>
-          </a:xfrm>
-          <a:prstGeom prst="rect">
-            <a:avLst/>
-          </a:prstGeom>
-          <a:noFill/>
-        </p:spPr>
-        <p:txBody>
-          <a:bodyPr wrap="square" anchor="ctr" lIns="0" rIns="0" tIns="0" bIns="0">
-            <a:spAutoFit/>
-          </a:bodyPr>
-          <a:lstStyle/>
-          <a:p>
-            <a:pPr algn="l"/>
-            <a:r>
-              <a:rPr sz="1600" b="1">
-                <a:solidFill>
-                  <a:srgbClr val="1A2233"/>
-                </a:solidFill>
-                <a:latin typeface="Microsoft JhengHei"/>
-                <a:ea typeface="Microsoft JhengHei"/>
-                <a:cs typeface="Microsoft JhengHei"/>
-              </a:rPr>
-              <a:t>易發 </a:t>
-            </a:r>
-            <a:r>
-              <a:rPr sz="1300" b="0">
-                <a:solidFill>
-                  <a:srgbClr val="5C6679"/>
-                </a:solidFill>
-                <a:latin typeface="Microsoft JhengHei"/>
-                <a:ea typeface="Microsoft JhengHei"/>
-                <a:cs typeface="Microsoft JhengHei"/>
-              </a:rPr>
-              <a:t>6425</a:t>
-            </a:r>
-          </a:p>
-        </p:txBody>
-      </p:sp>
-      <p:sp>
-        <p:nvSpPr>
-          <p:cNvPr id="8" name="Rounded Rectangle 7"/>
-          <p:cNvSpPr/>
-          <p:nvPr/>
-        </p:nvSpPr>
-        <p:spPr>
-          <a:xfrm>
-            <a:off x="4526280" y="1792224"/>
-            <a:ext cx="1234440" cy="347472"/>
-          </a:xfrm>
-          <a:prstGeom prst="roundRect">
-            <a:avLst/>
-          </a:prstGeom>
-          <a:solidFill>
-            <a:srgbClr val="F4A261"/>
-          </a:solidFill>
-          <a:ln>
-            <a:noFill/>
-          </a:ln>
-          <a:effectLst/>
-        </p:spPr>
-        <p:style>
-          <a:lnRef idx="1">
-            <a:schemeClr val="accent1"/>
-          </a:lnRef>
-          <a:fillRef idx="3">
-            <a:schemeClr val="accent1"/>
-          </a:fillRef>
-          <a:effectRef idx="2">
-            <a:schemeClr val="accent1"/>
-          </a:effectRef>
-          <a:fontRef idx="minor">
-            <a:schemeClr val="lt1"/>
-          </a:fontRef>
-        </p:style>
-        <p:txBody>
-          <a:bodyPr rtlCol="0" anchor="ctr"/>
-          <a:lstStyle/>
-          <a:p>
-            <a:pPr algn="ctr"/>
-          </a:p>
-        </p:txBody>
-      </p:sp>
-      <p:sp>
-        <p:nvSpPr>
-          <p:cNvPr id="9" name="TextBox 8"/>
-          <p:cNvSpPr txBox="1"/>
-          <p:nvPr/>
-        </p:nvSpPr>
-        <p:spPr>
-          <a:xfrm>
-            <a:off x="4526280" y="1792224"/>
-            <a:ext cx="1234440" cy="347472"/>
-          </a:xfrm>
-          <a:prstGeom prst="rect">
-            <a:avLst/>
-          </a:prstGeom>
-          <a:noFill/>
-        </p:spPr>
-        <p:txBody>
-          <a:bodyPr wrap="square" anchor="ctr" lIns="0" rIns="0" tIns="0" bIns="0">
-            <a:spAutoFit/>
-          </a:bodyPr>
-          <a:lstStyle/>
-          <a:p>
-            <a:pPr algn="ctr"/>
-            <a:r>
-              <a:rPr sz="1050" b="1">
-                <a:solidFill>
-                  <a:srgbClr val="FFFFFF"/>
-                </a:solidFill>
-                <a:latin typeface="Microsoft JhengHei"/>
-                <a:ea typeface="Microsoft JhengHei"/>
-                <a:cs typeface="Microsoft JhengHei"/>
-              </a:rPr>
-              <a:t>勒索病毒/加密</a:t>
-            </a:r>
-          </a:p>
-        </p:txBody>
-      </p:sp>
-      <p:sp>
-        <p:nvSpPr>
-          <p:cNvPr id="10" name="TextBox 9"/>
-          <p:cNvSpPr txBox="1"/>
-          <p:nvPr/>
-        </p:nvSpPr>
-        <p:spPr>
-          <a:xfrm>
-            <a:off x="777240" y="2267712"/>
-            <a:ext cx="4937760" cy="640080"/>
-          </a:xfrm>
-          <a:prstGeom prst="rect">
-            <a:avLst/>
-          </a:prstGeom>
-          <a:noFill/>
-        </p:spPr>
-        <p:txBody>
-          <a:bodyPr wrap="square" anchor="t" lIns="0" rIns="0" tIns="0" bIns="0">
-            <a:spAutoFit/>
-          </a:bodyPr>
-          <a:lstStyle/>
-          <a:p>
-            <a:pPr algn="l">
-              <a:lnSpc>
-                <a:spcPts val="1500"/>
-              </a:lnSpc>
-            </a:pPr>
-            <a:r>
-              <a:rPr sz="1100" b="1">
-                <a:solidFill>
-                  <a:srgbClr val="F4A261"/>
-                </a:solidFill>
-                <a:latin typeface="Microsoft JhengHei"/>
-                <a:ea typeface="Microsoft JhengHei"/>
-                <a:cs typeface="Microsoft JhengHei"/>
-              </a:rPr>
-              <a:t>緣由　</a:t>
-            </a:r>
-            <a:r>
-              <a:rPr sz="1100" b="0">
-                <a:solidFill>
-                  <a:srgbClr val="1A2233"/>
-                </a:solidFill>
-                <a:latin typeface="Microsoft JhengHei"/>
-                <a:ea typeface="Microsoft JhengHei"/>
-                <a:cs typeface="Microsoft JhengHei"/>
-              </a:rPr>
-              <a:t>本公司之子公司東野精機(股)公司日福精工(股)公司，發現遭不明駭客入侵主機，並將伺服器資料加密，…</a:t>
-            </a:r>
-          </a:p>
-        </p:txBody>
-      </p:sp>
-      <p:sp>
-        <p:nvSpPr>
-          <p:cNvPr id="11" name="TextBox 10"/>
-          <p:cNvSpPr txBox="1"/>
-          <p:nvPr/>
-        </p:nvSpPr>
-        <p:spPr>
-          <a:xfrm>
-            <a:off x="777240" y="2926080"/>
-            <a:ext cx="4937760" cy="713232"/>
-          </a:xfrm>
-          <a:prstGeom prst="rect">
-            <a:avLst/>
-          </a:prstGeom>
-          <a:noFill/>
-        </p:spPr>
-        <p:txBody>
-          <a:bodyPr wrap="square" anchor="t" lIns="0" rIns="0" tIns="0" bIns="0">
-            <a:spAutoFit/>
-          </a:bodyPr>
-          <a:lstStyle/>
-          <a:p>
-            <a:pPr algn="l">
-              <a:lnSpc>
-                <a:spcPts val="1500"/>
-              </a:lnSpc>
-            </a:pPr>
-            <a:r>
-              <a:rPr sz="1100" b="1">
-                <a:solidFill>
-                  <a:srgbClr val="F4A261"/>
-                </a:solidFill>
-                <a:latin typeface="Microsoft JhengHei"/>
-                <a:ea typeface="Microsoft JhengHei"/>
-                <a:cs typeface="Microsoft JhengHei"/>
-              </a:rPr>
-              <a:t>因應　</a:t>
-            </a:r>
-            <a:r>
-              <a:rPr sz="1100" b="0">
-                <a:solidFill>
-                  <a:srgbClr val="1A2233"/>
-                </a:solidFill>
-                <a:latin typeface="Microsoft JhengHei"/>
-                <a:ea typeface="Microsoft JhengHei"/>
-                <a:cs typeface="Microsoft JhengHei"/>
-              </a:rPr>
-              <a:t>本公司之子公司東野精機(股)公司日福精工(股)公司將修復安全漏洞，持續提升網路與資訊基礎架構之安全管控，以確保資訊安全。</a:t>
-            </a:r>
-          </a:p>
-        </p:txBody>
-      </p:sp>
-      <p:sp>
-        <p:nvSpPr>
-          <p:cNvPr id="12" name="Rounded Rectangle 11"/>
-          <p:cNvSpPr/>
-          <p:nvPr/>
-        </p:nvSpPr>
-        <p:spPr>
-          <a:xfrm>
-            <a:off x="6172200" y="1554480"/>
-            <a:ext cx="5394960" cy="2148840"/>
-          </a:xfrm>
-          <a:prstGeom prst="roundRect">
-            <a:avLst/>
-          </a:prstGeom>
-          <a:solidFill>
-            <a:srgbClr val="FFFFFF"/>
-          </a:solidFill>
-          <a:ln w="12700">
-            <a:solidFill>
-              <a:srgbClr val="DDE3EE"/>
-            </a:solidFill>
-          </a:ln>
-          <a:effectLst/>
-        </p:spPr>
-        <p:style>
-          <a:lnRef idx="1">
-            <a:schemeClr val="accent1"/>
-          </a:lnRef>
-          <a:fillRef idx="3">
-            <a:schemeClr val="accent1"/>
-          </a:fillRef>
-          <a:effectRef idx="2">
-            <a:schemeClr val="accent1"/>
-          </a:effectRef>
-          <a:fontRef idx="minor">
-            <a:schemeClr val="lt1"/>
-          </a:fontRef>
-        </p:style>
-        <p:txBody>
-          <a:bodyPr rtlCol="0" anchor="ctr"/>
-          <a:lstStyle/>
-          <a:p>
-            <a:pPr algn="ctr"/>
-          </a:p>
-        </p:txBody>
-      </p:sp>
-      <p:sp>
-        <p:nvSpPr>
-          <p:cNvPr id="13" name="Rectangle 12"/>
-          <p:cNvSpPr/>
-          <p:nvPr/>
-        </p:nvSpPr>
-        <p:spPr>
-          <a:xfrm>
-            <a:off x="6172200" y="1554480"/>
-            <a:ext cx="5394960" cy="109728"/>
-          </a:xfrm>
-          <a:prstGeom prst="rect">
-            <a:avLst/>
-          </a:prstGeom>
-          <a:solidFill>
-            <a:srgbClr val="F4A261"/>
-          </a:solidFill>
-          <a:ln>
-            <a:noFill/>
-          </a:ln>
-          <a:effectLst/>
-        </p:spPr>
-        <p:style>
-          <a:lnRef idx="1">
-            <a:schemeClr val="accent1"/>
-          </a:lnRef>
-          <a:fillRef idx="3">
-            <a:schemeClr val="accent1"/>
-          </a:fillRef>
-          <a:effectRef idx="2">
-            <a:schemeClr val="accent1"/>
-          </a:effectRef>
-          <a:fontRef idx="minor">
-            <a:schemeClr val="lt1"/>
-          </a:fontRef>
-        </p:style>
-        <p:txBody>
-          <a:bodyPr rtlCol="0" anchor="ctr"/>
-          <a:lstStyle/>
-          <a:p>
-            <a:pPr algn="ctr"/>
-          </a:p>
-        </p:txBody>
-      </p:sp>
-      <p:sp>
-        <p:nvSpPr>
-          <p:cNvPr id="14" name="TextBox 13"/>
-          <p:cNvSpPr txBox="1"/>
-          <p:nvPr/>
-        </p:nvSpPr>
-        <p:spPr>
-          <a:xfrm>
-            <a:off x="6400800" y="1773936"/>
-            <a:ext cx="3657600" cy="365760"/>
-          </a:xfrm>
-          <a:prstGeom prst="rect">
-            <a:avLst/>
-          </a:prstGeom>
-          <a:noFill/>
-        </p:spPr>
-        <p:txBody>
-          <a:bodyPr wrap="square" anchor="ctr" lIns="0" rIns="0" tIns="0" bIns="0">
-            <a:spAutoFit/>
-          </a:bodyPr>
-          <a:lstStyle/>
-          <a:p>
-            <a:pPr algn="l"/>
-            <a:r>
-              <a:rPr sz="1600" b="1">
-                <a:solidFill>
-                  <a:srgbClr val="1A2233"/>
-                </a:solidFill>
-                <a:latin typeface="Microsoft JhengHei"/>
-                <a:ea typeface="Microsoft JhengHei"/>
-                <a:cs typeface="Microsoft JhengHei"/>
-              </a:rPr>
-              <a:t>尼得科超眾 </a:t>
-            </a:r>
-            <a:r>
-              <a:rPr sz="1300" b="0">
-                <a:solidFill>
-                  <a:srgbClr val="5C6679"/>
-                </a:solidFill>
-                <a:latin typeface="Microsoft JhengHei"/>
-                <a:ea typeface="Microsoft JhengHei"/>
-                <a:cs typeface="Microsoft JhengHei"/>
-              </a:rPr>
-              <a:t>6230</a:t>
-            </a:r>
-          </a:p>
-        </p:txBody>
-      </p:sp>
-      <p:sp>
-        <p:nvSpPr>
-          <p:cNvPr id="15" name="Rounded Rectangle 14"/>
-          <p:cNvSpPr/>
-          <p:nvPr/>
-        </p:nvSpPr>
-        <p:spPr>
-          <a:xfrm>
-            <a:off x="10149840" y="1792224"/>
-            <a:ext cx="1234440" cy="347472"/>
-          </a:xfrm>
-          <a:prstGeom prst="roundRect">
-            <a:avLst/>
-          </a:prstGeom>
-          <a:solidFill>
-            <a:srgbClr val="F4A261"/>
-          </a:solidFill>
-          <a:ln>
-            <a:noFill/>
-          </a:ln>
-          <a:effectLst/>
-        </p:spPr>
-        <p:style>
-          <a:lnRef idx="1">
-            <a:schemeClr val="accent1"/>
-          </a:lnRef>
-          <a:fillRef idx="3">
-            <a:schemeClr val="accent1"/>
-          </a:fillRef>
-          <a:effectRef idx="2">
-            <a:schemeClr val="accent1"/>
-          </a:effectRef>
-          <a:fontRef idx="minor">
-            <a:schemeClr val="lt1"/>
-          </a:fontRef>
-        </p:style>
-        <p:txBody>
-          <a:bodyPr rtlCol="0" anchor="ctr"/>
-          <a:lstStyle/>
-          <a:p>
-            <a:pPr algn="ctr"/>
-          </a:p>
-        </p:txBody>
-      </p:sp>
-      <p:sp>
-        <p:nvSpPr>
-          <p:cNvPr id="16" name="TextBox 15"/>
-          <p:cNvSpPr txBox="1"/>
-          <p:nvPr/>
-        </p:nvSpPr>
-        <p:spPr>
-          <a:xfrm>
-            <a:off x="10149840" y="1792224"/>
-            <a:ext cx="1234440" cy="347472"/>
-          </a:xfrm>
-          <a:prstGeom prst="rect">
-            <a:avLst/>
-          </a:prstGeom>
-          <a:noFill/>
-        </p:spPr>
-        <p:txBody>
-          <a:bodyPr wrap="square" anchor="ctr" lIns="0" rIns="0" tIns="0" bIns="0">
-            <a:spAutoFit/>
-          </a:bodyPr>
-          <a:lstStyle/>
-          <a:p>
-            <a:pPr algn="ctr"/>
-            <a:r>
-              <a:rPr sz="1050" b="1">
-                <a:solidFill>
-                  <a:srgbClr val="FFFFFF"/>
-                </a:solidFill>
-                <a:latin typeface="Microsoft JhengHei"/>
-                <a:ea typeface="Microsoft JhengHei"/>
-                <a:cs typeface="Microsoft JhengHei"/>
-              </a:rPr>
-              <a:t>勒索病毒/加密</a:t>
-            </a:r>
-          </a:p>
-        </p:txBody>
-      </p:sp>
-      <p:sp>
-        <p:nvSpPr>
-          <p:cNvPr id="17" name="TextBox 16"/>
-          <p:cNvSpPr txBox="1"/>
-          <p:nvPr/>
-        </p:nvSpPr>
-        <p:spPr>
-          <a:xfrm>
-            <a:off x="6400800" y="2267712"/>
-            <a:ext cx="4937760" cy="640080"/>
-          </a:xfrm>
-          <a:prstGeom prst="rect">
-            <a:avLst/>
-          </a:prstGeom>
-          <a:noFill/>
-        </p:spPr>
-        <p:txBody>
-          <a:bodyPr wrap="square" anchor="t" lIns="0" rIns="0" tIns="0" bIns="0">
-            <a:spAutoFit/>
-          </a:bodyPr>
-          <a:lstStyle/>
-          <a:p>
-            <a:pPr algn="l">
-              <a:lnSpc>
-                <a:spcPts val="1500"/>
-              </a:lnSpc>
-            </a:pPr>
-            <a:r>
-              <a:rPr sz="1100" b="1">
-                <a:solidFill>
-                  <a:srgbClr val="F4A261"/>
-                </a:solidFill>
-                <a:latin typeface="Microsoft JhengHei"/>
-                <a:ea typeface="Microsoft JhengHei"/>
-                <a:cs typeface="Microsoft JhengHei"/>
-              </a:rPr>
-              <a:t>緣由　</a:t>
-            </a:r>
-            <a:r>
-              <a:rPr sz="1100" b="0">
-                <a:solidFill>
-                  <a:srgbClr val="1A2233"/>
-                </a:solidFill>
-                <a:latin typeface="Microsoft JhengHei"/>
-                <a:ea typeface="Microsoft JhengHei"/>
-                <a:cs typeface="Microsoft JhengHei"/>
-              </a:rPr>
-              <a:t>本公司於今日偵測到部份伺服器遭受網路勒索病毒攻擊，致使包含ERP在內之部份資訊系統無法正常運作。</a:t>
-            </a:r>
-          </a:p>
-        </p:txBody>
-      </p:sp>
-      <p:sp>
-        <p:nvSpPr>
-          <p:cNvPr id="18" name="TextBox 17"/>
-          <p:cNvSpPr txBox="1"/>
-          <p:nvPr/>
-        </p:nvSpPr>
-        <p:spPr>
-          <a:xfrm>
-            <a:off x="6400800" y="2926080"/>
-            <a:ext cx="4937760" cy="713232"/>
-          </a:xfrm>
-          <a:prstGeom prst="rect">
-            <a:avLst/>
-          </a:prstGeom>
-          <a:noFill/>
-        </p:spPr>
-        <p:txBody>
-          <a:bodyPr wrap="square" anchor="t" lIns="0" rIns="0" tIns="0" bIns="0">
-            <a:spAutoFit/>
-          </a:bodyPr>
-          <a:lstStyle/>
-          <a:p>
-            <a:pPr algn="l">
-              <a:lnSpc>
-                <a:spcPts val="1500"/>
-              </a:lnSpc>
-            </a:pPr>
-            <a:r>
-              <a:rPr sz="1100" b="1">
-                <a:solidFill>
-                  <a:srgbClr val="F4A261"/>
-                </a:solidFill>
-                <a:latin typeface="Microsoft JhengHei"/>
-                <a:ea typeface="Microsoft JhengHei"/>
-                <a:cs typeface="Microsoft JhengHei"/>
-              </a:rPr>
-              <a:t>因應　</a:t>
-            </a:r>
-            <a:r>
-              <a:rPr sz="1100" b="0">
-                <a:solidFill>
-                  <a:srgbClr val="1A2233"/>
-                </a:solidFill>
-                <a:latin typeface="Microsoft JhengHei"/>
-                <a:ea typeface="Microsoft JhengHei"/>
-                <a:cs typeface="Microsoft JhengHei"/>
-              </a:rPr>
-              <a:t>本公司亦將視系統復原進度，適時調整生產與出貨排程。</a:t>
             </a:r>
           </a:p>
         </p:txBody>

--- a/資安事件因應分析.pptx
+++ b/資安事件因應分析.pptx
@@ -149,19 +149,30 @@
             <c:idx val="1"/>
             <c:spPr>
               <a:solidFill>
+                <a:srgbClr val="27A6C4"/>
+              </a:solidFill>
+            </c:spPr>
+          </c:dPt>
+          <c:dPt>
+            <c:idx val="2"/>
+            <c:spPr>
+              <a:solidFill>
                 <a:srgbClr val="5C6679"/>
               </a:solidFill>
             </c:spPr>
           </c:dPt>
           <c:cat>
             <c:strRef>
-              <c:f>Sheet1!$A$2:$A$3</c:f>
+              <c:f>Sheet1!$A$2:$A$4</c:f>
               <c:strCache>
-                <c:ptCount val="2"/>
+                <c:ptCount val="3"/>
                 <c:pt idx="0">
                   <c:v>駭客攻擊</c:v>
                 </c:pt>
                 <c:pt idx="1">
+                  <c:v>個資外洩</c:v>
+                </c:pt>
+                <c:pt idx="2">
                   <c:v>其他</c:v>
                 </c:pt>
               </c:strCache>
@@ -169,14 +180,17 @@
           </c:cat>
           <c:val>
             <c:numRef>
-              <c:f>Sheet1!$B$2:$B$3</c:f>
+              <c:f>Sheet1!$B$2:$B$4</c:f>
               <c:numCache>
                 <c:formatCode>General</c:formatCode>
-                <c:ptCount val="2"/>
+                <c:ptCount val="3"/>
                 <c:pt idx="0">
                   <c:v>4</c:v>
                 </c:pt>
                 <c:pt idx="1">
+                  <c:v>1</c:v>
+                </c:pt>
+                <c:pt idx="2">
                   <c:v>3</c:v>
                 </c:pt>
               </c:numCache>
@@ -3514,7 +3528,7 @@
                 <a:ea typeface="Microsoft JhengHei"/>
                 <a:cs typeface="Microsoft JhengHei"/>
               </a:rPr>
-              <a:t>資料期間 2026-06-25 ~ 2026-07-25　｜　MOPS 重大訊息全文檢索　｜　7 家公司</a:t>
+              <a:t>資料期間 2026-06-28 ~ 2026-07-28　｜　MOPS 重大訊息全文檢索　｜　8 家公司</a:t>
             </a:r>
           </a:p>
         </p:txBody>
@@ -3731,7 +3745,7 @@
                 <a:ea typeface="Microsoft JhengHei"/>
                 <a:cs typeface="Microsoft JhengHei"/>
               </a:rPr>
-              <a:t>資料期間內 MOPS 揭露之 7 起資安相關重大訊息</a:t>
+              <a:t>資料期間內 MOPS 揭露之 8 起資安相關重大訊息</a:t>
             </a:r>
           </a:p>
         </p:txBody>
@@ -3814,7 +3828,7 @@
                 <a:ea typeface="Microsoft JhengHei"/>
                 <a:cs typeface="Microsoft JhengHei"/>
               </a:rPr>
-              <a:t>7</a:t>
+              <a:t>8</a:t>
             </a:r>
           </a:p>
         </p:txBody>
@@ -3934,7 +3948,7 @@
                 <a:ea typeface="Microsoft JhengHei"/>
                 <a:cs typeface="Microsoft JhengHei"/>
               </a:rPr>
-              <a:t>2</a:t>
+              <a:t>3</a:t>
             </a:r>
           </a:p>
         </p:txBody>
@@ -4106,7 +4120,7 @@
         </p:nvGraphicFramePr>
         <p:xfrm>
           <a:off x="548640" y="2697480"/>
-          <a:ext cx="11064240" cy="3072384"/>
+          <a:ext cx="11064240" cy="3456432"/>
         </p:xfrm>
         <a:graphic>
           <a:graphicData uri="http://schemas.openxmlformats.org/drawingml/2006/table">
@@ -4258,6 +4272,250 @@
                           <a:ea typeface="Microsoft JhengHei"/>
                           <a:cs typeface="Microsoft JhengHei"/>
                         </a:rPr>
+                        <a:t>萬達寵物</a:t>
+                      </a:r>
+                    </a:p>
+                  </a:txBody>
+                  <a:tcPr anchor="ctr" marL="73152" marT="9144" marB="9144">
+                    <a:solidFill>
+                      <a:srgbClr val="FFFFFF"/>
+                    </a:solidFill>
+                  </a:tcPr>
+                </a:tc>
+                <a:tc>
+                  <a:txBody>
+                    <a:bodyPr/>
+                    <a:lstStyle/>
+                    <a:p>
+                      <a:r>
+                        <a:rPr sz="1150" b="0">
+                          <a:solidFill>
+                            <a:srgbClr val="1A2233"/>
+                          </a:solidFill>
+                          <a:latin typeface="Microsoft JhengHei"/>
+                          <a:ea typeface="Microsoft JhengHei"/>
+                          <a:cs typeface="Microsoft JhengHei"/>
+                        </a:rPr>
+                        <a:t>6968</a:t>
+                      </a:r>
+                    </a:p>
+                  </a:txBody>
+                  <a:tcPr anchor="ctr" marL="73152" marT="9144" marB="9144">
+                    <a:solidFill>
+                      <a:srgbClr val="FFFFFF"/>
+                    </a:solidFill>
+                  </a:tcPr>
+                </a:tc>
+                <a:tc>
+                  <a:txBody>
+                    <a:bodyPr/>
+                    <a:lstStyle/>
+                    <a:p>
+                      <a:r>
+                        <a:rPr sz="1150" b="0">
+                          <a:solidFill>
+                            <a:srgbClr val="1A2233"/>
+                          </a:solidFill>
+                          <a:latin typeface="Microsoft JhengHei"/>
+                          <a:ea typeface="Microsoft JhengHei"/>
+                          <a:cs typeface="Microsoft JhengHei"/>
+                        </a:rPr>
+                        <a:t>07/27</a:t>
+                      </a:r>
+                    </a:p>
+                  </a:txBody>
+                  <a:tcPr anchor="ctr" marL="73152" marT="9144" marB="9144">
+                    <a:solidFill>
+                      <a:srgbClr val="FFFFFF"/>
+                    </a:solidFill>
+                  </a:tcPr>
+                </a:tc>
+                <a:tc>
+                  <a:txBody>
+                    <a:bodyPr/>
+                    <a:lstStyle/>
+                    <a:p>
+                      <a:r>
+                        <a:rPr sz="1150" b="1">
+                          <a:solidFill>
+                            <a:srgbClr val="27A6C4"/>
+                          </a:solidFill>
+                          <a:latin typeface="Microsoft JhengHei"/>
+                          <a:ea typeface="Microsoft JhengHei"/>
+                          <a:cs typeface="Microsoft JhengHei"/>
+                        </a:rPr>
+                        <a:t>個資外洩</a:t>
+                      </a:r>
+                    </a:p>
+                  </a:txBody>
+                  <a:tcPr anchor="ctr" marL="73152" marT="9144" marB="9144">
+                    <a:solidFill>
+                      <a:srgbClr val="FFFFFF"/>
+                    </a:solidFill>
+                  </a:tcPr>
+                </a:tc>
+                <a:tc>
+                  <a:txBody>
+                    <a:bodyPr/>
+                    <a:lstStyle/>
+                    <a:p>
+                      <a:r>
+                        <a:rPr sz="1150" b="0">
+                          <a:solidFill>
+                            <a:srgbClr val="1A2233"/>
+                          </a:solidFill>
+                          <a:latin typeface="Microsoft JhengHei"/>
+                          <a:ea typeface="Microsoft JhengHei"/>
+                          <a:cs typeface="Microsoft JhengHei"/>
+                        </a:rPr>
+                        <a:t>對本公司財務或業務並無重大影響。</a:t>
+                      </a:r>
+                    </a:p>
+                  </a:txBody>
+                  <a:tcPr anchor="ctr" marL="73152" marT="9144" marB="9144">
+                    <a:solidFill>
+                      <a:srgbClr val="FFFFFF"/>
+                    </a:solidFill>
+                  </a:tcPr>
+                </a:tc>
+              </a:tr>
+              <a:tr h="384048">
+                <a:tc>
+                  <a:txBody>
+                    <a:bodyPr/>
+                    <a:lstStyle/>
+                    <a:p>
+                      <a:r>
+                        <a:rPr sz="1150" b="0">
+                          <a:solidFill>
+                            <a:srgbClr val="1A2233"/>
+                          </a:solidFill>
+                          <a:latin typeface="Microsoft JhengHei"/>
+                          <a:ea typeface="Microsoft JhengHei"/>
+                          <a:cs typeface="Microsoft JhengHei"/>
+                        </a:rPr>
+                        <a:t>淳安</a:t>
+                      </a:r>
+                    </a:p>
+                  </a:txBody>
+                  <a:tcPr anchor="ctr" marL="73152" marT="9144" marB="9144">
+                    <a:solidFill>
+                      <a:srgbClr val="EEF2F9"/>
+                    </a:solidFill>
+                  </a:tcPr>
+                </a:tc>
+                <a:tc>
+                  <a:txBody>
+                    <a:bodyPr/>
+                    <a:lstStyle/>
+                    <a:p>
+                      <a:r>
+                        <a:rPr sz="1150" b="0">
+                          <a:solidFill>
+                            <a:srgbClr val="1A2233"/>
+                          </a:solidFill>
+                          <a:latin typeface="Microsoft JhengHei"/>
+                          <a:ea typeface="Microsoft JhengHei"/>
+                          <a:cs typeface="Microsoft JhengHei"/>
+                        </a:rPr>
+                        <a:t>6283</a:t>
+                      </a:r>
+                    </a:p>
+                  </a:txBody>
+                  <a:tcPr anchor="ctr" marL="73152" marT="9144" marB="9144">
+                    <a:solidFill>
+                      <a:srgbClr val="EEF2F9"/>
+                    </a:solidFill>
+                  </a:tcPr>
+                </a:tc>
+                <a:tc>
+                  <a:txBody>
+                    <a:bodyPr/>
+                    <a:lstStyle/>
+                    <a:p>
+                      <a:r>
+                        <a:rPr sz="1150" b="0">
+                          <a:solidFill>
+                            <a:srgbClr val="1A2233"/>
+                          </a:solidFill>
+                          <a:latin typeface="Microsoft JhengHei"/>
+                          <a:ea typeface="Microsoft JhengHei"/>
+                          <a:cs typeface="Microsoft JhengHei"/>
+                        </a:rPr>
+                        <a:t>07/21</a:t>
+                      </a:r>
+                    </a:p>
+                  </a:txBody>
+                  <a:tcPr anchor="ctr" marL="73152" marT="9144" marB="9144">
+                    <a:solidFill>
+                      <a:srgbClr val="EEF2F9"/>
+                    </a:solidFill>
+                  </a:tcPr>
+                </a:tc>
+                <a:tc>
+                  <a:txBody>
+                    <a:bodyPr/>
+                    <a:lstStyle/>
+                    <a:p>
+                      <a:r>
+                        <a:rPr sz="1150" b="1">
+                          <a:solidFill>
+                            <a:srgbClr val="5C6679"/>
+                          </a:solidFill>
+                          <a:latin typeface="Microsoft JhengHei"/>
+                          <a:ea typeface="Microsoft JhengHei"/>
+                          <a:cs typeface="Microsoft JhengHei"/>
+                        </a:rPr>
+                        <a:t>其他</a:t>
+                      </a:r>
+                    </a:p>
+                  </a:txBody>
+                  <a:tcPr anchor="ctr" marL="73152" marT="9144" marB="9144">
+                    <a:solidFill>
+                      <a:srgbClr val="EEF2F9"/>
+                    </a:solidFill>
+                  </a:tcPr>
+                </a:tc>
+                <a:tc>
+                  <a:txBody>
+                    <a:bodyPr/>
+                    <a:lstStyle/>
+                    <a:p>
+                      <a:r>
+                        <a:rPr sz="1150" b="0">
+                          <a:solidFill>
+                            <a:srgbClr val="1A2233"/>
+                          </a:solidFill>
+                          <a:latin typeface="Microsoft JhengHei"/>
+                          <a:ea typeface="Microsoft JhengHei"/>
+                          <a:cs typeface="Microsoft JhengHei"/>
+                        </a:rPr>
+                        <a:t>經評估對公司營運無重大影響。</a:t>
+                      </a:r>
+                    </a:p>
+                  </a:txBody>
+                  <a:tcPr anchor="ctr" marL="73152" marT="9144" marB="9144">
+                    <a:solidFill>
+                      <a:srgbClr val="EEF2F9"/>
+                    </a:solidFill>
+                  </a:tcPr>
+                </a:tc>
+              </a:tr>
+              <a:tr h="384048">
+                <a:tc>
+                  <a:txBody>
+                    <a:bodyPr/>
+                    <a:lstStyle/>
+                    <a:p>
+                      <a:r>
+                        <a:rPr sz="1150" b="0">
+                          <a:solidFill>
+                            <a:srgbClr val="1A2233"/>
+                          </a:solidFill>
+                          <a:latin typeface="Microsoft JhengHei"/>
+                          <a:ea typeface="Microsoft JhengHei"/>
+                          <a:cs typeface="Microsoft JhengHei"/>
+                        </a:rPr>
                         <a:t>淳安</a:t>
                       </a:r>
                     </a:p>
@@ -4306,7 +4564,7 @@
                           <a:ea typeface="Microsoft JhengHei"/>
                           <a:cs typeface="Microsoft JhengHei"/>
                         </a:rPr>
-                        <a:t>07/21</a:t>
+                        <a:t>07/20</a:t>
                       </a:r>
                     </a:p>
                   </a:txBody>
@@ -4380,7 +4638,7 @@
                           <a:ea typeface="Microsoft JhengHei"/>
                           <a:cs typeface="Microsoft JhengHei"/>
                         </a:rPr>
-                        <a:t>淳安</a:t>
+                        <a:t>松上</a:t>
                       </a:r>
                     </a:p>
                   </a:txBody>
@@ -4404,7 +4662,7 @@
                           <a:ea typeface="Microsoft JhengHei"/>
                           <a:cs typeface="Microsoft JhengHei"/>
                         </a:rPr>
-                        <a:t>6283</a:t>
+                        <a:t>6156</a:t>
                       </a:r>
                     </a:p>
                   </a:txBody>
@@ -4428,7 +4686,7 @@
                           <a:ea typeface="Microsoft JhengHei"/>
                           <a:cs typeface="Microsoft JhengHei"/>
                         </a:rPr>
-                        <a:t>07/20</a:t>
+                        <a:t>07/17</a:t>
                       </a:r>
                     </a:p>
                   </a:txBody>
@@ -4446,13 +4704,13 @@
                       <a:r>
                         <a:rPr sz="1150" b="1">
                           <a:solidFill>
-                            <a:srgbClr val="5C6679"/>
+                            <a:srgbClr val="E63946"/>
                           </a:solidFill>
                           <a:latin typeface="Microsoft JhengHei"/>
                           <a:ea typeface="Microsoft JhengHei"/>
                           <a:cs typeface="Microsoft JhengHei"/>
                         </a:rPr>
-                        <a:t>其他</a:t>
+                        <a:t>駭客攻擊</a:t>
                       </a:r>
                     </a:p>
                   </a:txBody>
@@ -4476,7 +4734,7 @@
                           <a:ea typeface="Microsoft JhengHei"/>
                           <a:cs typeface="Microsoft JhengHei"/>
                         </a:rPr>
-                        <a:t>經評估對公司營運無重大影響。</a:t>
+                        <a:t>目前評估對公司營運無重大影響。</a:t>
                       </a:r>
                     </a:p>
                   </a:txBody>
@@ -4502,7 +4760,7 @@
                           <a:ea typeface="Microsoft JhengHei"/>
                           <a:cs typeface="Microsoft JhengHei"/>
                         </a:rPr>
-                        <a:t>松上</a:t>
+                        <a:t>優盛</a:t>
                       </a:r>
                     </a:p>
                   </a:txBody>
@@ -4526,7 +4784,7 @@
                           <a:ea typeface="Microsoft JhengHei"/>
                           <a:cs typeface="Microsoft JhengHei"/>
                         </a:rPr>
-                        <a:t>6156</a:t>
+                        <a:t>4121</a:t>
                       </a:r>
                     </a:p>
                   </a:txBody>
@@ -4550,7 +4808,7 @@
                           <a:ea typeface="Microsoft JhengHei"/>
                           <a:cs typeface="Microsoft JhengHei"/>
                         </a:rPr>
-                        <a:t>07/17</a:t>
+                        <a:t>07/07</a:t>
                       </a:r>
                     </a:p>
                   </a:txBody>
@@ -4598,7 +4856,7 @@
                           <a:ea typeface="Microsoft JhengHei"/>
                           <a:cs typeface="Microsoft JhengHei"/>
                         </a:rPr>
-                        <a:t>目前評估對公司營運無重大影響。</a:t>
+                        <a:t>本資訊網站已暫時停止服務，該事件對公司營運、資訊安全、個資等無重大影…</a:t>
                       </a:r>
                     </a:p>
                   </a:txBody>
@@ -4624,7 +4882,7 @@
                           <a:ea typeface="Microsoft JhengHei"/>
                           <a:cs typeface="Microsoft JhengHei"/>
                         </a:rPr>
-                        <a:t>優盛</a:t>
+                        <a:t>麗清</a:t>
                       </a:r>
                     </a:p>
                   </a:txBody>
@@ -4648,7 +4906,7 @@
                           <a:ea typeface="Microsoft JhengHei"/>
                           <a:cs typeface="Microsoft JhengHei"/>
                         </a:rPr>
-                        <a:t>4121</a:t>
+                        <a:t>3346</a:t>
                       </a:r>
                     </a:p>
                   </a:txBody>
@@ -4672,7 +4930,7 @@
                           <a:ea typeface="Microsoft JhengHei"/>
                           <a:cs typeface="Microsoft JhengHei"/>
                         </a:rPr>
-                        <a:t>07/07</a:t>
+                        <a:t>07/02</a:t>
                       </a:r>
                     </a:p>
                   </a:txBody>
@@ -4720,7 +4978,7 @@
                           <a:ea typeface="Microsoft JhengHei"/>
                           <a:cs typeface="Microsoft JhengHei"/>
                         </a:rPr>
-                        <a:t>本資訊網站已暫時停止服務，該事件對公司營運、資訊安全、個資等無重大影…</a:t>
+                        <a:t>目前初步評估對公司運作無重大影響。</a:t>
                       </a:r>
                     </a:p>
                   </a:txBody>
@@ -4746,7 +5004,7 @@
                           <a:ea typeface="Microsoft JhengHei"/>
                           <a:cs typeface="Microsoft JhengHei"/>
                         </a:rPr>
-                        <a:t>麗清</a:t>
+                        <a:t>GOGOLOOK</a:t>
                       </a:r>
                     </a:p>
                   </a:txBody>
@@ -4770,7 +5028,7 @@
                           <a:ea typeface="Microsoft JhengHei"/>
                           <a:cs typeface="Microsoft JhengHei"/>
                         </a:rPr>
-                        <a:t>3346</a:t>
+                        <a:t>6902</a:t>
                       </a:r>
                     </a:p>
                   </a:txBody>
@@ -4794,7 +5052,7 @@
                           <a:ea typeface="Microsoft JhengHei"/>
                           <a:cs typeface="Microsoft JhengHei"/>
                         </a:rPr>
-                        <a:t>07/02</a:t>
+                        <a:t>07/01</a:t>
                       </a:r>
                     </a:p>
                   </a:txBody>
@@ -4812,13 +5070,13 @@
                       <a:r>
                         <a:rPr sz="1150" b="1">
                           <a:solidFill>
-                            <a:srgbClr val="E63946"/>
+                            <a:srgbClr val="5C6679"/>
                           </a:solidFill>
                           <a:latin typeface="Microsoft JhengHei"/>
                           <a:ea typeface="Microsoft JhengHei"/>
                           <a:cs typeface="Microsoft JhengHei"/>
                         </a:rPr>
-                        <a:t>駭客攻擊</a:t>
+                        <a:t>其他</a:t>
                       </a:r>
                     </a:p>
                   </a:txBody>
@@ -4842,7 +5100,7 @@
                           <a:ea typeface="Microsoft JhengHei"/>
                           <a:cs typeface="Microsoft JhengHei"/>
                         </a:rPr>
-                        <a:t>目前初步評估對公司運作無重大影響。</a:t>
+                        <a:t>目前評估對公司營運尚無重大影響。</a:t>
                       </a:r>
                     </a:p>
                   </a:txBody>
@@ -4868,7 +5126,7 @@
                           <a:ea typeface="Microsoft JhengHei"/>
                           <a:cs typeface="Microsoft JhengHei"/>
                         </a:rPr>
-                        <a:t>GOGOLOOK</a:t>
+                        <a:t>網家</a:t>
                       </a:r>
                     </a:p>
                   </a:txBody>
@@ -4892,7 +5150,7 @@
                           <a:ea typeface="Microsoft JhengHei"/>
                           <a:cs typeface="Microsoft JhengHei"/>
                         </a:rPr>
-                        <a:t>6902</a:t>
+                        <a:t>8044</a:t>
                       </a:r>
                     </a:p>
                   </a:txBody>
@@ -4934,13 +5192,13 @@
                       <a:r>
                         <a:rPr sz="1150" b="1">
                           <a:solidFill>
-                            <a:srgbClr val="5C6679"/>
+                            <a:srgbClr val="E63946"/>
                           </a:solidFill>
                           <a:latin typeface="Microsoft JhengHei"/>
                           <a:ea typeface="Microsoft JhengHei"/>
                           <a:cs typeface="Microsoft JhengHei"/>
                         </a:rPr>
-                        <a:t>其他</a:t>
+                        <a:t>駭客攻擊</a:t>
                       </a:r>
                     </a:p>
                   </a:txBody>
@@ -4964,135 +5222,13 @@
                           <a:ea typeface="Microsoft JhengHei"/>
                           <a:cs typeface="Microsoft JhengHei"/>
                         </a:rPr>
-                        <a:t>目前評估對公司營運尚無重大影響。</a:t>
+                        <a:t>—</a:t>
                       </a:r>
                     </a:p>
                   </a:txBody>
                   <a:tcPr anchor="ctr" marL="73152" marT="9144" marB="9144">
                     <a:solidFill>
                       <a:srgbClr val="EEF2F9"/>
-                    </a:solidFill>
-                  </a:tcPr>
-                </a:tc>
-              </a:tr>
-              <a:tr h="384048">
-                <a:tc>
-                  <a:txBody>
-                    <a:bodyPr/>
-                    <a:lstStyle/>
-                    <a:p>
-                      <a:r>
-                        <a:rPr sz="1150" b="0">
-                          <a:solidFill>
-                            <a:srgbClr val="1A2233"/>
-                          </a:solidFill>
-                          <a:latin typeface="Microsoft JhengHei"/>
-                          <a:ea typeface="Microsoft JhengHei"/>
-                          <a:cs typeface="Microsoft JhengHei"/>
-                        </a:rPr>
-                        <a:t>網家</a:t>
-                      </a:r>
-                    </a:p>
-                  </a:txBody>
-                  <a:tcPr anchor="ctr" marL="73152" marT="9144" marB="9144">
-                    <a:solidFill>
-                      <a:srgbClr val="FFFFFF"/>
-                    </a:solidFill>
-                  </a:tcPr>
-                </a:tc>
-                <a:tc>
-                  <a:txBody>
-                    <a:bodyPr/>
-                    <a:lstStyle/>
-                    <a:p>
-                      <a:r>
-                        <a:rPr sz="1150" b="0">
-                          <a:solidFill>
-                            <a:srgbClr val="1A2233"/>
-                          </a:solidFill>
-                          <a:latin typeface="Microsoft JhengHei"/>
-                          <a:ea typeface="Microsoft JhengHei"/>
-                          <a:cs typeface="Microsoft JhengHei"/>
-                        </a:rPr>
-                        <a:t>8044</a:t>
-                      </a:r>
-                    </a:p>
-                  </a:txBody>
-                  <a:tcPr anchor="ctr" marL="73152" marT="9144" marB="9144">
-                    <a:solidFill>
-                      <a:srgbClr val="FFFFFF"/>
-                    </a:solidFill>
-                  </a:tcPr>
-                </a:tc>
-                <a:tc>
-                  <a:txBody>
-                    <a:bodyPr/>
-                    <a:lstStyle/>
-                    <a:p>
-                      <a:r>
-                        <a:rPr sz="1150" b="0">
-                          <a:solidFill>
-                            <a:srgbClr val="1A2233"/>
-                          </a:solidFill>
-                          <a:latin typeface="Microsoft JhengHei"/>
-                          <a:ea typeface="Microsoft JhengHei"/>
-                          <a:cs typeface="Microsoft JhengHei"/>
-                        </a:rPr>
-                        <a:t>07/01</a:t>
-                      </a:r>
-                    </a:p>
-                  </a:txBody>
-                  <a:tcPr anchor="ctr" marL="73152" marT="9144" marB="9144">
-                    <a:solidFill>
-                      <a:srgbClr val="FFFFFF"/>
-                    </a:solidFill>
-                  </a:tcPr>
-                </a:tc>
-                <a:tc>
-                  <a:txBody>
-                    <a:bodyPr/>
-                    <a:lstStyle/>
-                    <a:p>
-                      <a:r>
-                        <a:rPr sz="1150" b="1">
-                          <a:solidFill>
-                            <a:srgbClr val="E63946"/>
-                          </a:solidFill>
-                          <a:latin typeface="Microsoft JhengHei"/>
-                          <a:ea typeface="Microsoft JhengHei"/>
-                          <a:cs typeface="Microsoft JhengHei"/>
-                        </a:rPr>
-                        <a:t>駭客攻擊</a:t>
-                      </a:r>
-                    </a:p>
-                  </a:txBody>
-                  <a:tcPr anchor="ctr" marL="73152" marT="9144" marB="9144">
-                    <a:solidFill>
-                      <a:srgbClr val="FFFFFF"/>
-                    </a:solidFill>
-                  </a:tcPr>
-                </a:tc>
-                <a:tc>
-                  <a:txBody>
-                    <a:bodyPr/>
-                    <a:lstStyle/>
-                    <a:p>
-                      <a:r>
-                        <a:rPr sz="1150" b="0">
-                          <a:solidFill>
-                            <a:srgbClr val="1A2233"/>
-                          </a:solidFill>
-                          <a:latin typeface="Microsoft JhengHei"/>
-                          <a:ea typeface="Microsoft JhengHei"/>
-                          <a:cs typeface="Microsoft JhengHei"/>
-                        </a:rPr>
-                        <a:t>—</a:t>
-                      </a:r>
-                    </a:p>
-                  </a:txBody>
-                  <a:tcPr anchor="ctr" marL="73152" marT="9144" marB="9144">
-                    <a:solidFill>
-                      <a:srgbClr val="FFFFFF"/>
                     </a:solidFill>
                   </a:tcPr>
                 </a:tc>
@@ -5554,6 +5690,244 @@
             <a:avLst/>
           </a:prstGeom>
           <a:solidFill>
+            <a:srgbClr val="27A6C4"/>
+          </a:solidFill>
+          <a:ln>
+            <a:noFill/>
+          </a:ln>
+          <a:effectLst/>
+        </p:spPr>
+        <p:style>
+          <a:lnRef idx="1">
+            <a:schemeClr val="accent1"/>
+          </a:lnRef>
+          <a:fillRef idx="3">
+            <a:schemeClr val="accent1"/>
+          </a:fillRef>
+          <a:effectRef idx="2">
+            <a:schemeClr val="accent1"/>
+          </a:effectRef>
+          <a:fontRef idx="minor">
+            <a:schemeClr val="lt1"/>
+          </a:fontRef>
+        </p:style>
+        <p:txBody>
+          <a:bodyPr rtlCol="0" anchor="ctr"/>
+          <a:lstStyle/>
+          <a:p>
+            <a:pPr algn="ctr"/>
+          </a:p>
+        </p:txBody>
+      </p:sp>
+      <p:sp>
+        <p:nvSpPr>
+          <p:cNvPr id="14" name="TextBox 13"/>
+          <p:cNvSpPr txBox="1"/>
+          <p:nvPr/>
+        </p:nvSpPr>
+        <p:spPr>
+          <a:xfrm>
+            <a:off x="5897880" y="3127248"/>
+            <a:ext cx="4206240" cy="365760"/>
+          </a:xfrm>
+          <a:prstGeom prst="rect">
+            <a:avLst/>
+          </a:prstGeom>
+          <a:noFill/>
+        </p:spPr>
+        <p:txBody>
+          <a:bodyPr wrap="square" anchor="ctr" lIns="0" rIns="0" tIns="0" bIns="0">
+            <a:spAutoFit/>
+          </a:bodyPr>
+          <a:lstStyle/>
+          <a:p>
+            <a:pPr algn="l"/>
+            <a:r>
+              <a:rPr sz="1600" b="1">
+                <a:solidFill>
+                  <a:srgbClr val="1A2233"/>
+                </a:solidFill>
+                <a:latin typeface="Microsoft JhengHei"/>
+                <a:ea typeface="Microsoft JhengHei"/>
+                <a:cs typeface="Microsoft JhengHei"/>
+              </a:rPr>
+              <a:t>個資外洩</a:t>
+            </a:r>
+          </a:p>
+        </p:txBody>
+      </p:sp>
+      <p:sp>
+        <p:nvSpPr>
+          <p:cNvPr id="15" name="TextBox 14"/>
+          <p:cNvSpPr txBox="1"/>
+          <p:nvPr/>
+        </p:nvSpPr>
+        <p:spPr>
+          <a:xfrm>
+            <a:off x="10058400" y="3127248"/>
+            <a:ext cx="1463040" cy="365760"/>
+          </a:xfrm>
+          <a:prstGeom prst="rect">
+            <a:avLst/>
+          </a:prstGeom>
+          <a:noFill/>
+        </p:spPr>
+        <p:txBody>
+          <a:bodyPr wrap="square" anchor="ctr" lIns="0" rIns="0" tIns="0" bIns="0">
+            <a:spAutoFit/>
+          </a:bodyPr>
+          <a:lstStyle/>
+          <a:p>
+            <a:pPr algn="r"/>
+            <a:r>
+              <a:rPr sz="1800" b="1">
+                <a:solidFill>
+                  <a:srgbClr val="27A6C4"/>
+                </a:solidFill>
+                <a:latin typeface="Microsoft JhengHei"/>
+                <a:ea typeface="Microsoft JhengHei"/>
+                <a:cs typeface="Microsoft JhengHei"/>
+              </a:rPr>
+              <a:t>1 起</a:t>
+            </a:r>
+          </a:p>
+        </p:txBody>
+      </p:sp>
+      <p:sp>
+        <p:nvSpPr>
+          <p:cNvPr id="16" name="TextBox 15"/>
+          <p:cNvSpPr txBox="1"/>
+          <p:nvPr/>
+        </p:nvSpPr>
+        <p:spPr>
+          <a:xfrm>
+            <a:off x="5897880" y="3520439"/>
+            <a:ext cx="5577840" cy="274320"/>
+          </a:xfrm>
+          <a:prstGeom prst="rect">
+            <a:avLst/>
+          </a:prstGeom>
+          <a:noFill/>
+        </p:spPr>
+        <p:txBody>
+          <a:bodyPr wrap="square" anchor="t" lIns="0" rIns="0" tIns="0" bIns="0">
+            <a:spAutoFit/>
+          </a:bodyPr>
+          <a:lstStyle/>
+          <a:p>
+            <a:pPr algn="l"/>
+            <a:r>
+              <a:rPr sz="1150" b="1">
+                <a:solidFill>
+                  <a:srgbClr val="1A2233"/>
+                </a:solidFill>
+                <a:latin typeface="Microsoft JhengHei"/>
+                <a:ea typeface="Microsoft JhengHei"/>
+                <a:cs typeface="Microsoft JhengHei"/>
+              </a:rPr>
+              <a:t>萬達寵物</a:t>
+            </a:r>
+          </a:p>
+        </p:txBody>
+      </p:sp>
+      <p:sp>
+        <p:nvSpPr>
+          <p:cNvPr id="17" name="TextBox 16"/>
+          <p:cNvSpPr txBox="1"/>
+          <p:nvPr/>
+        </p:nvSpPr>
+        <p:spPr>
+          <a:xfrm>
+            <a:off x="5897880" y="3785615"/>
+            <a:ext cx="5669280" cy="329184"/>
+          </a:xfrm>
+          <a:prstGeom prst="rect">
+            <a:avLst/>
+          </a:prstGeom>
+          <a:noFill/>
+        </p:spPr>
+        <p:txBody>
+          <a:bodyPr wrap="square" anchor="t" lIns="0" rIns="0" tIns="0" bIns="0">
+            <a:spAutoFit/>
+          </a:bodyPr>
+          <a:lstStyle/>
+          <a:p>
+            <a:pPr algn="l"/>
+            <a:r>
+              <a:rPr sz="1100" b="0">
+                <a:solidFill>
+                  <a:srgbClr val="5C6679"/>
+                </a:solidFill>
+                <a:latin typeface="Microsoft JhengHei"/>
+                <a:ea typeface="Microsoft JhengHei"/>
+                <a:cs typeface="Microsoft JhengHei"/>
+              </a:rPr>
+              <a:t>源自開發流程或委外廠商，須通報並通知當事人</a:t>
+            </a:r>
+          </a:p>
+        </p:txBody>
+      </p:sp>
+      <p:sp>
+        <p:nvSpPr>
+          <p:cNvPr id="18" name="Rounded Rectangle 17"/>
+          <p:cNvSpPr/>
+          <p:nvPr/>
+        </p:nvSpPr>
+        <p:spPr>
+          <a:xfrm>
+            <a:off x="5669280" y="4343400"/>
+            <a:ext cx="6035040" cy="1170432"/>
+          </a:xfrm>
+          <a:prstGeom prst="roundRect">
+            <a:avLst/>
+          </a:prstGeom>
+          <a:solidFill>
+            <a:srgbClr val="FFFFFF"/>
+          </a:solidFill>
+          <a:ln w="12700">
+            <a:solidFill>
+              <a:srgbClr val="DDE3EE"/>
+            </a:solidFill>
+          </a:ln>
+          <a:effectLst/>
+        </p:spPr>
+        <p:style>
+          <a:lnRef idx="1">
+            <a:schemeClr val="accent1"/>
+          </a:lnRef>
+          <a:fillRef idx="3">
+            <a:schemeClr val="accent1"/>
+          </a:fillRef>
+          <a:effectRef idx="2">
+            <a:schemeClr val="accent1"/>
+          </a:effectRef>
+          <a:fontRef idx="minor">
+            <a:schemeClr val="lt1"/>
+          </a:fontRef>
+        </p:style>
+        <p:txBody>
+          <a:bodyPr rtlCol="0" anchor="ctr"/>
+          <a:lstStyle/>
+          <a:p>
+            <a:pPr algn="ctr"/>
+          </a:p>
+        </p:txBody>
+      </p:sp>
+      <p:sp>
+        <p:nvSpPr>
+          <p:cNvPr id="19" name="Rectangle 18"/>
+          <p:cNvSpPr/>
+          <p:nvPr/>
+        </p:nvSpPr>
+        <p:spPr>
+          <a:xfrm>
+            <a:off x="5669280" y="4343400"/>
+            <a:ext cx="109728" cy="1170432"/>
+          </a:xfrm>
+          <a:prstGeom prst="rect">
+            <a:avLst/>
+          </a:prstGeom>
+          <a:solidFill>
             <a:srgbClr val="5C6679"/>
           </a:solidFill>
           <a:ln>
@@ -5585,13 +5959,13 @@
       </p:sp>
       <p:sp>
         <p:nvSpPr>
-          <p:cNvPr id="14" name="TextBox 13"/>
+          <p:cNvPr id="20" name="TextBox 19"/>
           <p:cNvSpPr txBox="1"/>
           <p:nvPr/>
         </p:nvSpPr>
         <p:spPr>
           <a:xfrm>
-            <a:off x="5897880" y="3127248"/>
+            <a:off x="5897880" y="4453128"/>
             <a:ext cx="4206240" cy="365760"/>
           </a:xfrm>
           <a:prstGeom prst="rect">
@@ -5622,13 +5996,13 @@
       </p:sp>
       <p:sp>
         <p:nvSpPr>
-          <p:cNvPr id="15" name="TextBox 14"/>
+          <p:cNvPr id="21" name="TextBox 20"/>
           <p:cNvSpPr txBox="1"/>
           <p:nvPr/>
         </p:nvSpPr>
         <p:spPr>
           <a:xfrm>
-            <a:off x="10058400" y="3127248"/>
+            <a:off x="10058400" y="4453128"/>
             <a:ext cx="1463040" cy="365760"/>
           </a:xfrm>
           <a:prstGeom prst="rect">
@@ -5659,13 +6033,13 @@
       </p:sp>
       <p:sp>
         <p:nvSpPr>
-          <p:cNvPr id="16" name="TextBox 15"/>
+          <p:cNvPr id="22" name="TextBox 21"/>
           <p:cNvSpPr txBox="1"/>
           <p:nvPr/>
         </p:nvSpPr>
         <p:spPr>
           <a:xfrm>
-            <a:off x="5897880" y="3520439"/>
+            <a:off x="5897880" y="4846320"/>
             <a:ext cx="5577840" cy="274320"/>
           </a:xfrm>
           <a:prstGeom prst="rect">
@@ -5696,13 +6070,13 @@
       </p:sp>
       <p:sp>
         <p:nvSpPr>
-          <p:cNvPr id="17" name="TextBox 16"/>
+          <p:cNvPr id="23" name="TextBox 22"/>
           <p:cNvSpPr txBox="1"/>
           <p:nvPr/>
         </p:nvSpPr>
         <p:spPr>
           <a:xfrm>
-            <a:off x="5897880" y="3785615"/>
+            <a:off x="5897880" y="5111496"/>
             <a:ext cx="5669280" cy="329184"/>
           </a:xfrm>
           <a:prstGeom prst="rect">
@@ -5877,7 +6251,7 @@
         </p:nvGraphicFramePr>
         <p:xfrm>
           <a:off x="548640" y="1600200"/>
-          <a:ext cx="10789920" cy="3657600"/>
+          <a:ext cx="10789920" cy="4114800"/>
         </p:xfrm>
         <a:graphic>
           <a:graphicData uri="http://schemas.openxmlformats.org/drawingml/2006/table">
@@ -6029,7 +6403,7 @@
                           <a:ea typeface="Microsoft JhengHei"/>
                           <a:cs typeface="Microsoft JhengHei"/>
                         </a:rPr>
-                        <a:t>淳安</a:t>
+                        <a:t>萬達寵物</a:t>
                       </a:r>
                     </a:p>
                   </a:txBody>
@@ -6053,7 +6427,7 @@
                           <a:ea typeface="Microsoft JhengHei"/>
                           <a:cs typeface="Microsoft JhengHei"/>
                         </a:rPr>
-                        <a:t>6283</a:t>
+                        <a:t>6968</a:t>
                       </a:r>
                     </a:p>
                   </a:txBody>
@@ -6071,13 +6445,13 @@
                       <a:r>
                         <a:rPr sz="1150" b="1">
                           <a:solidFill>
-                            <a:srgbClr val="5C6679"/>
+                            <a:srgbClr val="27A6C4"/>
                           </a:solidFill>
                           <a:latin typeface="Microsoft JhengHei"/>
                           <a:ea typeface="Microsoft JhengHei"/>
                           <a:cs typeface="Microsoft JhengHei"/>
                         </a:rPr>
-                        <a:t>其他</a:t>
+                        <a:t>個資外洩</a:t>
                       </a:r>
                     </a:p>
                   </a:txBody>
@@ -6125,7 +6499,7 @@
                           <a:ea typeface="Microsoft JhengHei"/>
                           <a:cs typeface="Microsoft JhengHei"/>
                         </a:rPr>
-                        <a:t>林永智、廖福銘</a:t>
+                        <a:t>葉翠苗、黃世鈞</a:t>
                       </a:r>
                     </a:p>
                   </a:txBody>
@@ -6273,7 +6647,7 @@
                           <a:ea typeface="Microsoft JhengHei"/>
                           <a:cs typeface="Microsoft JhengHei"/>
                         </a:rPr>
-                        <a:t>松上</a:t>
+                        <a:t>淳安</a:t>
                       </a:r>
                     </a:p>
                   </a:txBody>
@@ -6297,7 +6671,251 @@
                           <a:ea typeface="Microsoft JhengHei"/>
                           <a:cs typeface="Microsoft JhengHei"/>
                         </a:rPr>
+                        <a:t>6283</a:t>
+                      </a:r>
+                    </a:p>
+                  </a:txBody>
+                  <a:tcPr anchor="ctr" marL="73152" marT="9144" marB="9144">
+                    <a:solidFill>
+                      <a:srgbClr val="FFFFFF"/>
+                    </a:solidFill>
+                  </a:tcPr>
+                </a:tc>
+                <a:tc>
+                  <a:txBody>
+                    <a:bodyPr/>
+                    <a:lstStyle/>
+                    <a:p>
+                      <a:r>
+                        <a:rPr sz="1150" b="1">
+                          <a:solidFill>
+                            <a:srgbClr val="5C6679"/>
+                          </a:solidFill>
+                          <a:latin typeface="Microsoft JhengHei"/>
+                          <a:ea typeface="Microsoft JhengHei"/>
+                          <a:cs typeface="Microsoft JhengHei"/>
+                        </a:rPr>
+                        <a:t>其他</a:t>
+                      </a:r>
+                    </a:p>
+                  </a:txBody>
+                  <a:tcPr anchor="ctr" marL="73152" marT="9144" marB="9144">
+                    <a:solidFill>
+                      <a:srgbClr val="FFFFFF"/>
+                    </a:solidFill>
+                  </a:tcPr>
+                </a:tc>
+                <a:tc>
+                  <a:txBody>
+                    <a:bodyPr/>
+                    <a:lstStyle/>
+                    <a:p>
+                      <a:r>
+                        <a:rPr sz="1150" b="0">
+                          <a:solidFill>
+                            <a:srgbClr val="1A2233"/>
+                          </a:solidFill>
+                          <a:latin typeface="Microsoft JhengHei"/>
+                          <a:ea typeface="Microsoft JhengHei"/>
+                          <a:cs typeface="Microsoft JhengHei"/>
+                        </a:rPr>
+                        <a:t>資誠聯合會計師事務所</a:t>
+                      </a:r>
+                    </a:p>
+                  </a:txBody>
+                  <a:tcPr anchor="ctr" marL="73152" marT="9144" marB="9144">
+                    <a:solidFill>
+                      <a:srgbClr val="FFFFFF"/>
+                    </a:solidFill>
+                  </a:tcPr>
+                </a:tc>
+                <a:tc>
+                  <a:txBody>
+                    <a:bodyPr/>
+                    <a:lstStyle/>
+                    <a:p>
+                      <a:r>
+                        <a:rPr sz="1150" b="0">
+                          <a:solidFill>
+                            <a:srgbClr val="1A2233"/>
+                          </a:solidFill>
+                          <a:latin typeface="Microsoft JhengHei"/>
+                          <a:ea typeface="Microsoft JhengHei"/>
+                          <a:cs typeface="Microsoft JhengHei"/>
+                        </a:rPr>
+                        <a:t>林永智、廖福銘</a:t>
+                      </a:r>
+                    </a:p>
+                  </a:txBody>
+                  <a:tcPr anchor="ctr" marL="73152" marT="9144" marB="9144">
+                    <a:solidFill>
+                      <a:srgbClr val="FFFFFF"/>
+                    </a:solidFill>
+                  </a:tcPr>
+                </a:tc>
+              </a:tr>
+              <a:tr h="457200">
+                <a:tc>
+                  <a:txBody>
+                    <a:bodyPr/>
+                    <a:lstStyle/>
+                    <a:p>
+                      <a:r>
+                        <a:rPr sz="1150" b="0">
+                          <a:solidFill>
+                            <a:srgbClr val="1A2233"/>
+                          </a:solidFill>
+                          <a:latin typeface="Microsoft JhengHei"/>
+                          <a:ea typeface="Microsoft JhengHei"/>
+                          <a:cs typeface="Microsoft JhengHei"/>
+                        </a:rPr>
+                        <a:t>松上</a:t>
+                      </a:r>
+                    </a:p>
+                  </a:txBody>
+                  <a:tcPr anchor="ctr" marL="73152" marT="9144" marB="9144">
+                    <a:solidFill>
+                      <a:srgbClr val="EEF2F9"/>
+                    </a:solidFill>
+                  </a:tcPr>
+                </a:tc>
+                <a:tc>
+                  <a:txBody>
+                    <a:bodyPr/>
+                    <a:lstStyle/>
+                    <a:p>
+                      <a:r>
+                        <a:rPr sz="1150" b="0">
+                          <a:solidFill>
+                            <a:srgbClr val="1A2233"/>
+                          </a:solidFill>
+                          <a:latin typeface="Microsoft JhengHei"/>
+                          <a:ea typeface="Microsoft JhengHei"/>
+                          <a:cs typeface="Microsoft JhengHei"/>
+                        </a:rPr>
                         <a:t>6156</a:t>
+                      </a:r>
+                    </a:p>
+                  </a:txBody>
+                  <a:tcPr anchor="ctr" marL="73152" marT="9144" marB="9144">
+                    <a:solidFill>
+                      <a:srgbClr val="EEF2F9"/>
+                    </a:solidFill>
+                  </a:tcPr>
+                </a:tc>
+                <a:tc>
+                  <a:txBody>
+                    <a:bodyPr/>
+                    <a:lstStyle/>
+                    <a:p>
+                      <a:r>
+                        <a:rPr sz="1150" b="1">
+                          <a:solidFill>
+                            <a:srgbClr val="E63946"/>
+                          </a:solidFill>
+                          <a:latin typeface="Microsoft JhengHei"/>
+                          <a:ea typeface="Microsoft JhengHei"/>
+                          <a:cs typeface="Microsoft JhengHei"/>
+                        </a:rPr>
+                        <a:t>駭客攻擊</a:t>
+                      </a:r>
+                    </a:p>
+                  </a:txBody>
+                  <a:tcPr anchor="ctr" marL="73152" marT="9144" marB="9144">
+                    <a:solidFill>
+                      <a:srgbClr val="EEF2F9"/>
+                    </a:solidFill>
+                  </a:tcPr>
+                </a:tc>
+                <a:tc>
+                  <a:txBody>
+                    <a:bodyPr/>
+                    <a:lstStyle/>
+                    <a:p>
+                      <a:r>
+                        <a:rPr sz="1150" b="0">
+                          <a:solidFill>
+                            <a:srgbClr val="1A2233"/>
+                          </a:solidFill>
+                          <a:latin typeface="Microsoft JhengHei"/>
+                          <a:ea typeface="Microsoft JhengHei"/>
+                          <a:cs typeface="Microsoft JhengHei"/>
+                        </a:rPr>
+                        <a:t>安永聯合會計師事務所</a:t>
+                      </a:r>
+                    </a:p>
+                  </a:txBody>
+                  <a:tcPr anchor="ctr" marL="73152" marT="9144" marB="9144">
+                    <a:solidFill>
+                      <a:srgbClr val="EEF2F9"/>
+                    </a:solidFill>
+                  </a:tcPr>
+                </a:tc>
+                <a:tc>
+                  <a:txBody>
+                    <a:bodyPr/>
+                    <a:lstStyle/>
+                    <a:p>
+                      <a:r>
+                        <a:rPr sz="1150" b="0">
+                          <a:solidFill>
+                            <a:srgbClr val="1A2233"/>
+                          </a:solidFill>
+                          <a:latin typeface="Microsoft JhengHei"/>
+                          <a:ea typeface="Microsoft JhengHei"/>
+                          <a:cs typeface="Microsoft JhengHei"/>
+                        </a:rPr>
+                        <a:t>羅筱靖、陳國帥</a:t>
+                      </a:r>
+                    </a:p>
+                  </a:txBody>
+                  <a:tcPr anchor="ctr" marL="73152" marT="9144" marB="9144">
+                    <a:solidFill>
+                      <a:srgbClr val="EEF2F9"/>
+                    </a:solidFill>
+                  </a:tcPr>
+                </a:tc>
+              </a:tr>
+              <a:tr h="457200">
+                <a:tc>
+                  <a:txBody>
+                    <a:bodyPr/>
+                    <a:lstStyle/>
+                    <a:p>
+                      <a:r>
+                        <a:rPr sz="1150" b="0">
+                          <a:solidFill>
+                            <a:srgbClr val="1A2233"/>
+                          </a:solidFill>
+                          <a:latin typeface="Microsoft JhengHei"/>
+                          <a:ea typeface="Microsoft JhengHei"/>
+                          <a:cs typeface="Microsoft JhengHei"/>
+                        </a:rPr>
+                        <a:t>優盛</a:t>
+                      </a:r>
+                    </a:p>
+                  </a:txBody>
+                  <a:tcPr anchor="ctr" marL="73152" marT="9144" marB="9144">
+                    <a:solidFill>
+                      <a:srgbClr val="FFFFFF"/>
+                    </a:solidFill>
+                  </a:tcPr>
+                </a:tc>
+                <a:tc>
+                  <a:txBody>
+                    <a:bodyPr/>
+                    <a:lstStyle/>
+                    <a:p>
+                      <a:r>
+                        <a:rPr sz="1150" b="0">
+                          <a:solidFill>
+                            <a:srgbClr val="1A2233"/>
+                          </a:solidFill>
+                          <a:latin typeface="Microsoft JhengHei"/>
+                          <a:ea typeface="Microsoft JhengHei"/>
+                          <a:cs typeface="Microsoft JhengHei"/>
+                        </a:rPr>
+                        <a:t>4121</a:t>
                       </a:r>
                     </a:p>
                   </a:txBody>
@@ -6345,7 +6963,7 @@
                           <a:ea typeface="Microsoft JhengHei"/>
                           <a:cs typeface="Microsoft JhengHei"/>
                         </a:rPr>
-                        <a:t>安永聯合會計師事務所</a:t>
+                        <a:t>安侯建業聯合會計師事務所</a:t>
                       </a:r>
                     </a:p>
                   </a:txBody>
@@ -6369,7 +6987,7 @@
                           <a:ea typeface="Microsoft JhengHei"/>
                           <a:cs typeface="Microsoft JhengHei"/>
                         </a:rPr>
-                        <a:t>羅筱靖、陳國帥</a:t>
+                        <a:t>鄒依芸、毛聖崴</a:t>
                       </a:r>
                     </a:p>
                   </a:txBody>
@@ -6395,7 +7013,7 @@
                           <a:ea typeface="Microsoft JhengHei"/>
                           <a:cs typeface="Microsoft JhengHei"/>
                         </a:rPr>
-                        <a:t>優盛</a:t>
+                        <a:t>麗清</a:t>
                       </a:r>
                     </a:p>
                   </a:txBody>
@@ -6419,7 +7037,7 @@
                           <a:ea typeface="Microsoft JhengHei"/>
                           <a:cs typeface="Microsoft JhengHei"/>
                         </a:rPr>
-                        <a:t>4121</a:t>
+                        <a:t>3346</a:t>
                       </a:r>
                     </a:p>
                   </a:txBody>
@@ -6467,7 +7085,7 @@
                           <a:ea typeface="Microsoft JhengHei"/>
                           <a:cs typeface="Microsoft JhengHei"/>
                         </a:rPr>
-                        <a:t>安侯建業聯合會計師事務所</a:t>
+                        <a:t>勤業眾信聯合會計師事務所</a:t>
                       </a:r>
                     </a:p>
                   </a:txBody>
@@ -6491,7 +7109,7 @@
                           <a:ea typeface="Microsoft JhengHei"/>
                           <a:cs typeface="Microsoft JhengHei"/>
                         </a:rPr>
-                        <a:t>鄒依芸、毛聖崴</a:t>
+                        <a:t>陳致源、黃堯麟</a:t>
                       </a:r>
                     </a:p>
                   </a:txBody>
@@ -6517,7 +7135,7 @@
                           <a:ea typeface="Microsoft JhengHei"/>
                           <a:cs typeface="Microsoft JhengHei"/>
                         </a:rPr>
-                        <a:t>麗清</a:t>
+                        <a:t>GOGOLOOK</a:t>
                       </a:r>
                     </a:p>
                   </a:txBody>
@@ -6541,7 +7159,7 @@
                           <a:ea typeface="Microsoft JhengHei"/>
                           <a:cs typeface="Microsoft JhengHei"/>
                         </a:rPr>
-                        <a:t>3346</a:t>
+                        <a:t>6902</a:t>
                       </a:r>
                     </a:p>
                   </a:txBody>
@@ -6559,13 +7177,13 @@
                       <a:r>
                         <a:rPr sz="1150" b="1">
                           <a:solidFill>
-                            <a:srgbClr val="E63946"/>
+                            <a:srgbClr val="5C6679"/>
                           </a:solidFill>
                           <a:latin typeface="Microsoft JhengHei"/>
                           <a:ea typeface="Microsoft JhengHei"/>
                           <a:cs typeface="Microsoft JhengHei"/>
                         </a:rPr>
-                        <a:t>駭客攻擊</a:t>
+                        <a:t>其他</a:t>
                       </a:r>
                     </a:p>
                   </a:txBody>
@@ -6589,7 +7207,7 @@
                           <a:ea typeface="Microsoft JhengHei"/>
                           <a:cs typeface="Microsoft JhengHei"/>
                         </a:rPr>
-                        <a:t>勤業眾信聯合會計師事務所</a:t>
+                        <a:t>資誠聯合會計師事務所</a:t>
                       </a:r>
                     </a:p>
                   </a:txBody>
@@ -6613,7 +7231,7 @@
                           <a:ea typeface="Microsoft JhengHei"/>
                           <a:cs typeface="Microsoft JhengHei"/>
                         </a:rPr>
-                        <a:t>陳致源、黃堯麟</a:t>
+                        <a:t>吳尚燉、王昱欣</a:t>
                       </a:r>
                     </a:p>
                   </a:txBody>
@@ -6639,7 +7257,7 @@
                           <a:ea typeface="Microsoft JhengHei"/>
                           <a:cs typeface="Microsoft JhengHei"/>
                         </a:rPr>
-                        <a:t>GOGOLOOK</a:t>
+                        <a:t>網家</a:t>
                       </a:r>
                     </a:p>
                   </a:txBody>
@@ -6663,7 +7281,7 @@
                           <a:ea typeface="Microsoft JhengHei"/>
                           <a:cs typeface="Microsoft JhengHei"/>
                         </a:rPr>
-                        <a:t>6902</a:t>
+                        <a:t>8044</a:t>
                       </a:r>
                     </a:p>
                   </a:txBody>
@@ -6681,13 +7299,13 @@
                       <a:r>
                         <a:rPr sz="1150" b="1">
                           <a:solidFill>
-                            <a:srgbClr val="5C6679"/>
+                            <a:srgbClr val="E63946"/>
                           </a:solidFill>
                           <a:latin typeface="Microsoft JhengHei"/>
                           <a:ea typeface="Microsoft JhengHei"/>
                           <a:cs typeface="Microsoft JhengHei"/>
                         </a:rPr>
-                        <a:t>其他</a:t>
+                        <a:t>駭客攻擊</a:t>
                       </a:r>
                     </a:p>
                   </a:txBody>
@@ -6735,135 +7353,13 @@
                           <a:ea typeface="Microsoft JhengHei"/>
                           <a:cs typeface="Microsoft JhengHei"/>
                         </a:rPr>
-                        <a:t>吳尚燉、王昱欣</a:t>
+                        <a:t>廖容翎、梁嬋女</a:t>
                       </a:r>
                     </a:p>
                   </a:txBody>
                   <a:tcPr anchor="ctr" marL="73152" marT="9144" marB="9144">
                     <a:solidFill>
                       <a:srgbClr val="EEF2F9"/>
-                    </a:solidFill>
-                  </a:tcPr>
-                </a:tc>
-              </a:tr>
-              <a:tr h="457200">
-                <a:tc>
-                  <a:txBody>
-                    <a:bodyPr/>
-                    <a:lstStyle/>
-                    <a:p>
-                      <a:r>
-                        <a:rPr sz="1150" b="0">
-                          <a:solidFill>
-                            <a:srgbClr val="1A2233"/>
-                          </a:solidFill>
-                          <a:latin typeface="Microsoft JhengHei"/>
-                          <a:ea typeface="Microsoft JhengHei"/>
-                          <a:cs typeface="Microsoft JhengHei"/>
-                        </a:rPr>
-                        <a:t>網家</a:t>
-                      </a:r>
-                    </a:p>
-                  </a:txBody>
-                  <a:tcPr anchor="ctr" marL="73152" marT="9144" marB="9144">
-                    <a:solidFill>
-                      <a:srgbClr val="FFFFFF"/>
-                    </a:solidFill>
-                  </a:tcPr>
-                </a:tc>
-                <a:tc>
-                  <a:txBody>
-                    <a:bodyPr/>
-                    <a:lstStyle/>
-                    <a:p>
-                      <a:r>
-                        <a:rPr sz="1150" b="0">
-                          <a:solidFill>
-                            <a:srgbClr val="1A2233"/>
-                          </a:solidFill>
-                          <a:latin typeface="Microsoft JhengHei"/>
-                          <a:ea typeface="Microsoft JhengHei"/>
-                          <a:cs typeface="Microsoft JhengHei"/>
-                        </a:rPr>
-                        <a:t>8044</a:t>
-                      </a:r>
-                    </a:p>
-                  </a:txBody>
-                  <a:tcPr anchor="ctr" marL="73152" marT="9144" marB="9144">
-                    <a:solidFill>
-                      <a:srgbClr val="FFFFFF"/>
-                    </a:solidFill>
-                  </a:tcPr>
-                </a:tc>
-                <a:tc>
-                  <a:txBody>
-                    <a:bodyPr/>
-                    <a:lstStyle/>
-                    <a:p>
-                      <a:r>
-                        <a:rPr sz="1150" b="1">
-                          <a:solidFill>
-                            <a:srgbClr val="E63946"/>
-                          </a:solidFill>
-                          <a:latin typeface="Microsoft JhengHei"/>
-                          <a:ea typeface="Microsoft JhengHei"/>
-                          <a:cs typeface="Microsoft JhengHei"/>
-                        </a:rPr>
-                        <a:t>駭客攻擊</a:t>
-                      </a:r>
-                    </a:p>
-                  </a:txBody>
-                  <a:tcPr anchor="ctr" marL="73152" marT="9144" marB="9144">
-                    <a:solidFill>
-                      <a:srgbClr val="FFFFFF"/>
-                    </a:solidFill>
-                  </a:tcPr>
-                </a:tc>
-                <a:tc>
-                  <a:txBody>
-                    <a:bodyPr/>
-                    <a:lstStyle/>
-                    <a:p>
-                      <a:r>
-                        <a:rPr sz="1150" b="0">
-                          <a:solidFill>
-                            <a:srgbClr val="1A2233"/>
-                          </a:solidFill>
-                          <a:latin typeface="Microsoft JhengHei"/>
-                          <a:ea typeface="Microsoft JhengHei"/>
-                          <a:cs typeface="Microsoft JhengHei"/>
-                        </a:rPr>
-                        <a:t>資誠聯合會計師事務所</a:t>
-                      </a:r>
-                    </a:p>
-                  </a:txBody>
-                  <a:tcPr anchor="ctr" marL="73152" marT="9144" marB="9144">
-                    <a:solidFill>
-                      <a:srgbClr val="FFFFFF"/>
-                    </a:solidFill>
-                  </a:tcPr>
-                </a:tc>
-                <a:tc>
-                  <a:txBody>
-                    <a:bodyPr/>
-                    <a:lstStyle/>
-                    <a:p>
-                      <a:r>
-                        <a:rPr sz="1150" b="0">
-                          <a:solidFill>
-                            <a:srgbClr val="1A2233"/>
-                          </a:solidFill>
-                          <a:latin typeface="Microsoft JhengHei"/>
-                          <a:ea typeface="Microsoft JhengHei"/>
-                          <a:cs typeface="Microsoft JhengHei"/>
-                        </a:rPr>
-                        <a:t>廖容翎、梁嬋女</a:t>
-                      </a:r>
-                    </a:p>
-                  </a:txBody>
-                  <a:tcPr anchor="ctr" marL="73152" marT="9144" marB="9144">
-                    <a:solidFill>
-                      <a:srgbClr val="FFFFFF"/>
                     </a:solidFill>
                   </a:tcPr>
                 </a:tc>
@@ -8317,7 +8813,7 @@
             <a:avLst/>
           </a:prstGeom>
           <a:solidFill>
-            <a:srgbClr val="5C6679"/>
+            <a:srgbClr val="27A6C4"/>
           </a:solidFill>
           <a:ln>
             <a:noFill/>
@@ -8378,7 +8874,7 @@
                 <a:ea typeface="Microsoft JhengHei"/>
                 <a:cs typeface="Microsoft JhengHei"/>
               </a:rPr>
-              <a:t>淳安 </a:t>
+              <a:t>萬達寵物 </a:t>
             </a:r>
             <a:r>
               <a:rPr sz="1300" b="0">
@@ -8389,7 +8885,7 @@
                 <a:ea typeface="Microsoft JhengHei"/>
                 <a:cs typeface="Microsoft JhengHei"/>
               </a:rPr>
-              <a:t>6283</a:t>
+              <a:t>6968</a:t>
             </a:r>
           </a:p>
         </p:txBody>
@@ -8409,7 +8905,7 @@
             <a:avLst/>
           </a:prstGeom>
           <a:solidFill>
-            <a:srgbClr val="5C6679"/>
+            <a:srgbClr val="27A6C4"/>
           </a:solidFill>
           <a:ln>
             <a:noFill/>
@@ -8470,7 +8966,7 @@
                 <a:ea typeface="Microsoft JhengHei"/>
                 <a:cs typeface="Microsoft JhengHei"/>
               </a:rPr>
-              <a:t>其他</a:t>
+              <a:t>個資外洩</a:t>
             </a:r>
           </a:p>
         </p:txBody>
@@ -8505,7 +9001,7 @@
             <a:r>
               <a:rPr sz="1100" b="1">
                 <a:solidFill>
-                  <a:srgbClr val="5C6679"/>
+                  <a:srgbClr val="27A6C4"/>
                 </a:solidFill>
                 <a:latin typeface="Microsoft JhengHei"/>
                 <a:ea typeface="Microsoft JhengHei"/>
@@ -8522,7 +9018,7 @@
                 <a:ea typeface="Microsoft JhengHei"/>
                 <a:cs typeface="Microsoft JhengHei"/>
               </a:rPr>
-              <a:t>本公司網路資安事件說明</a:t>
+              <a:t>本公司因合作廠商資訊系統遭不明人士入侵，疑似部份資料外洩</a:t>
             </a:r>
           </a:p>
         </p:txBody>
@@ -8557,7 +9053,7 @@
             <a:r>
               <a:rPr sz="1100" b="1">
                 <a:solidFill>
-                  <a:srgbClr val="5C6679"/>
+                  <a:srgbClr val="27A6C4"/>
                 </a:solidFill>
                 <a:latin typeface="Microsoft JhengHei"/>
                 <a:ea typeface="Microsoft JhengHei"/>
@@ -8574,7 +9070,7 @@
                 <a:ea typeface="Microsoft JhengHei"/>
                 <a:cs typeface="Microsoft JhengHei"/>
               </a:rPr>
-              <a:t>本公司後續將持續提升網路與資訊基礎架構之安全管控，以確保資訊安全。</a:t>
+              <a:t>本公司並無與合作廠商串接會員資料、信用卡號、銀行帳戶等敏感資訊，不會產生任何金流交易。本公司已嚴正要求合作廠商技術團隊，…</a:t>
             </a:r>
           </a:p>
         </p:txBody>
@@ -8963,7 +9459,7 @@
             <a:avLst/>
           </a:prstGeom>
           <a:solidFill>
-            <a:srgbClr val="E63946"/>
+            <a:srgbClr val="5C6679"/>
           </a:solidFill>
           <a:ln>
             <a:noFill/>
@@ -9024,7 +9520,7 @@
                 <a:ea typeface="Microsoft JhengHei"/>
                 <a:cs typeface="Microsoft JhengHei"/>
               </a:rPr>
-              <a:t>松上 </a:t>
+              <a:t>淳安 </a:t>
             </a:r>
             <a:r>
               <a:rPr sz="1300" b="0">
@@ -9035,7 +9531,7 @@
                 <a:ea typeface="Microsoft JhengHei"/>
                 <a:cs typeface="Microsoft JhengHei"/>
               </a:rPr>
-              <a:t>6156</a:t>
+              <a:t>6283</a:t>
             </a:r>
           </a:p>
         </p:txBody>
@@ -9055,7 +9551,7 @@
             <a:avLst/>
           </a:prstGeom>
           <a:solidFill>
-            <a:srgbClr val="E63946"/>
+            <a:srgbClr val="5C6679"/>
           </a:solidFill>
           <a:ln>
             <a:noFill/>
@@ -9116,7 +9612,7 @@
                 <a:ea typeface="Microsoft JhengHei"/>
                 <a:cs typeface="Microsoft JhengHei"/>
               </a:rPr>
-              <a:t>駭客攻擊</a:t>
+              <a:t>其他</a:t>
             </a:r>
           </a:p>
         </p:txBody>
@@ -9151,7 +9647,7 @@
             <a:r>
               <a:rPr sz="1100" b="1">
                 <a:solidFill>
-                  <a:srgbClr val="E63946"/>
+                  <a:srgbClr val="5C6679"/>
                 </a:solidFill>
                 <a:latin typeface="Microsoft JhengHei"/>
                 <a:ea typeface="Microsoft JhengHei"/>
@@ -9168,7 +9664,7 @@
                 <a:ea typeface="Microsoft JhengHei"/>
                 <a:cs typeface="Microsoft JhengHei"/>
               </a:rPr>
-              <a:t>本公司使用之部分資訊系統遭受駭客網路攻擊。</a:t>
+              <a:t>本公司網路資安事件說明</a:t>
             </a:r>
           </a:p>
         </p:txBody>
@@ -9203,7 +9699,7 @@
             <a:r>
               <a:rPr sz="1100" b="1">
                 <a:solidFill>
-                  <a:srgbClr val="E63946"/>
+                  <a:srgbClr val="5C6679"/>
                 </a:solidFill>
                 <a:latin typeface="Microsoft JhengHei"/>
                 <a:ea typeface="Microsoft JhengHei"/>
@@ -9220,7 +9716,7 @@
                 <a:ea typeface="Microsoft JhengHei"/>
                 <a:cs typeface="Microsoft JhengHei"/>
               </a:rPr>
-              <a:t>本公司後續仍將持續提升網路與資訊基礎架構之安全管控以確保資訊安全。</a:t>
+              <a:t>本公司後續將持續提升網路與資訊基礎架構之安全管控，以確保資訊安全。</a:t>
             </a:r>
           </a:p>
         </p:txBody>
@@ -9347,7 +9843,7 @@
                 <a:ea typeface="Microsoft JhengHei"/>
                 <a:cs typeface="Microsoft JhengHei"/>
               </a:rPr>
-              <a:t>優盛 </a:t>
+              <a:t>松上 </a:t>
             </a:r>
             <a:r>
               <a:rPr sz="1300" b="0">
@@ -9358,7 +9854,7 @@
                 <a:ea typeface="Microsoft JhengHei"/>
                 <a:cs typeface="Microsoft JhengHei"/>
               </a:rPr>
-              <a:t>4121</a:t>
+              <a:t>6156</a:t>
             </a:r>
           </a:p>
         </p:txBody>
@@ -9491,7 +9987,7 @@
                 <a:ea typeface="Microsoft JhengHei"/>
                 <a:cs typeface="Microsoft JhengHei"/>
               </a:rPr>
-              <a:t>本公司之官網於今天下午遭受網路駭客攻擊</a:t>
+              <a:t>本公司使用之部分資訊系統遭受駭客網路攻擊。</a:t>
             </a:r>
           </a:p>
         </p:txBody>
@@ -9543,7 +10039,7 @@
                 <a:ea typeface="Microsoft JhengHei"/>
                 <a:cs typeface="Microsoft JhengHei"/>
               </a:rPr>
-              <a:t>本公司後續將持續提升網路與資訊基礎架構之安全管控以確保資訊安全。</a:t>
+              <a:t>本公司後續仍將持續提升網路與資訊基礎架構之安全管控以確保資訊安全。</a:t>
             </a:r>
           </a:p>
         </p:txBody>
@@ -9806,7 +10302,7 @@
                 <a:ea typeface="Microsoft JhengHei"/>
                 <a:cs typeface="Microsoft JhengHei"/>
               </a:rPr>
-              <a:t>麗清 </a:t>
+              <a:t>優盛 </a:t>
             </a:r>
             <a:r>
               <a:rPr sz="1300" b="0">
@@ -9817,7 +10313,7 @@
                 <a:ea typeface="Microsoft JhengHei"/>
                 <a:cs typeface="Microsoft JhengHei"/>
               </a:rPr>
-              <a:t>3346</a:t>
+              <a:t>4121</a:t>
             </a:r>
           </a:p>
         </p:txBody>
@@ -9950,7 +10446,7 @@
                 <a:ea typeface="Microsoft JhengHei"/>
                 <a:cs typeface="Microsoft JhengHei"/>
               </a:rPr>
-              <a:t>本公司部份資訊系統遭受駭客網路攻擊。</a:t>
+              <a:t>本公司之官網於今天下午遭受網路駭客攻擊</a:t>
             </a:r>
           </a:p>
         </p:txBody>
@@ -10002,7 +10498,7 @@
                 <a:ea typeface="Microsoft JhengHei"/>
                 <a:cs typeface="Microsoft JhengHei"/>
               </a:rPr>
-              <a:t>修復安全漏洞並持續提升網路與資訊基礎架構之安全管控以確保資訊安全。</a:t>
+              <a:t>本公司後續將持續提升網路與資訊基礎架構之安全管控以確保資訊安全。</a:t>
             </a:r>
           </a:p>
         </p:txBody>
@@ -10068,7 +10564,7 @@
             <a:avLst/>
           </a:prstGeom>
           <a:solidFill>
-            <a:srgbClr val="5C6679"/>
+            <a:srgbClr val="E63946"/>
           </a:solidFill>
           <a:ln>
             <a:noFill/>
@@ -10129,7 +10625,7 @@
                 <a:ea typeface="Microsoft JhengHei"/>
                 <a:cs typeface="Microsoft JhengHei"/>
               </a:rPr>
-              <a:t>GOGOLOOK </a:t>
+              <a:t>麗清 </a:t>
             </a:r>
             <a:r>
               <a:rPr sz="1300" b="0">
@@ -10140,7 +10636,7 @@
                 <a:ea typeface="Microsoft JhengHei"/>
                 <a:cs typeface="Microsoft JhengHei"/>
               </a:rPr>
-              <a:t>6902</a:t>
+              <a:t>3346</a:t>
             </a:r>
           </a:p>
         </p:txBody>
@@ -10160,7 +10656,7 @@
             <a:avLst/>
           </a:prstGeom>
           <a:solidFill>
-            <a:srgbClr val="5C6679"/>
+            <a:srgbClr val="E63946"/>
           </a:solidFill>
           <a:ln>
             <a:noFill/>
@@ -10221,7 +10717,7 @@
                 <a:ea typeface="Microsoft JhengHei"/>
                 <a:cs typeface="Microsoft JhengHei"/>
               </a:rPr>
-              <a:t>其他</a:t>
+              <a:t>駭客攻擊</a:t>
             </a:r>
           </a:p>
         </p:txBody>
@@ -10256,7 +10752,7 @@
             <a:r>
               <a:rPr sz="1100" b="1">
                 <a:solidFill>
-                  <a:srgbClr val="5C6679"/>
+                  <a:srgbClr val="E63946"/>
                 </a:solidFill>
                 <a:latin typeface="Microsoft JhengHei"/>
                 <a:ea typeface="Microsoft JhengHei"/>
@@ -10273,7 +10769,7 @@
                 <a:ea typeface="Microsoft JhengHei"/>
                 <a:cs typeface="Microsoft JhengHei"/>
               </a:rPr>
-              <a:t>本公司發生網路資安事件。</a:t>
+              <a:t>本公司部份資訊系統遭受駭客網路攻擊。</a:t>
             </a:r>
           </a:p>
         </p:txBody>
@@ -10308,7 +10804,7 @@
             <a:r>
               <a:rPr sz="1100" b="1">
                 <a:solidFill>
-                  <a:srgbClr val="5C6679"/>
+                  <a:srgbClr val="E63946"/>
                 </a:solidFill>
                 <a:latin typeface="Microsoft JhengHei"/>
                 <a:ea typeface="Microsoft JhengHei"/>
@@ -10325,7 +10821,7 @@
                 <a:ea typeface="Microsoft JhengHei"/>
                 <a:cs typeface="Microsoft JhengHei"/>
               </a:rPr>
-              <a:t>本公司後續仍持續強化資安管控及防禦機制，確保資訊安全與服務體驗。</a:t>
+              <a:t>修復安全漏洞並持續提升網路與資訊基礎架構之安全管控以確保資訊安全。</a:t>
             </a:r>
           </a:p>
         </p:txBody>
@@ -10391,7 +10887,7 @@
             <a:avLst/>
           </a:prstGeom>
           <a:solidFill>
-            <a:srgbClr val="E63946"/>
+            <a:srgbClr val="5C6679"/>
           </a:solidFill>
           <a:ln>
             <a:noFill/>
@@ -10452,7 +10948,7 @@
                 <a:ea typeface="Microsoft JhengHei"/>
                 <a:cs typeface="Microsoft JhengHei"/>
               </a:rPr>
-              <a:t>網家 </a:t>
+              <a:t>GOGOLOOK </a:t>
             </a:r>
             <a:r>
               <a:rPr sz="1300" b="0">
@@ -10463,7 +10959,7 @@
                 <a:ea typeface="Microsoft JhengHei"/>
                 <a:cs typeface="Microsoft JhengHei"/>
               </a:rPr>
-              <a:t>8044</a:t>
+              <a:t>6902</a:t>
             </a:r>
           </a:p>
         </p:txBody>
@@ -10480,6 +10976,237 @@
             <a:ext cx="1234440" cy="347472"/>
           </a:xfrm>
           <a:prstGeom prst="roundRect">
+            <a:avLst/>
+          </a:prstGeom>
+          <a:solidFill>
+            <a:srgbClr val="5C6679"/>
+          </a:solidFill>
+          <a:ln>
+            <a:noFill/>
+          </a:ln>
+          <a:effectLst/>
+        </p:spPr>
+        <p:style>
+          <a:lnRef idx="1">
+            <a:schemeClr val="accent1"/>
+          </a:lnRef>
+          <a:fillRef idx="3">
+            <a:schemeClr val="accent1"/>
+          </a:fillRef>
+          <a:effectRef idx="2">
+            <a:schemeClr val="accent1"/>
+          </a:effectRef>
+          <a:fontRef idx="minor">
+            <a:schemeClr val="lt1"/>
+          </a:fontRef>
+        </p:style>
+        <p:txBody>
+          <a:bodyPr rtlCol="0" anchor="ctr"/>
+          <a:lstStyle/>
+          <a:p>
+            <a:pPr algn="ctr"/>
+          </a:p>
+        </p:txBody>
+      </p:sp>
+      <p:sp>
+        <p:nvSpPr>
+          <p:cNvPr id="23" name="TextBox 22"/>
+          <p:cNvSpPr txBox="1"/>
+          <p:nvPr/>
+        </p:nvSpPr>
+        <p:spPr>
+          <a:xfrm>
+            <a:off x="4526280" y="4123944"/>
+            <a:ext cx="1234440" cy="347472"/>
+          </a:xfrm>
+          <a:prstGeom prst="rect">
+            <a:avLst/>
+          </a:prstGeom>
+          <a:noFill/>
+        </p:spPr>
+        <p:txBody>
+          <a:bodyPr wrap="square" anchor="ctr" lIns="0" rIns="0" tIns="0" bIns="0">
+            <a:spAutoFit/>
+          </a:bodyPr>
+          <a:lstStyle/>
+          <a:p>
+            <a:pPr algn="ctr"/>
+            <a:r>
+              <a:rPr sz="1050" b="1">
+                <a:solidFill>
+                  <a:srgbClr val="FFFFFF"/>
+                </a:solidFill>
+                <a:latin typeface="Microsoft JhengHei"/>
+                <a:ea typeface="Microsoft JhengHei"/>
+                <a:cs typeface="Microsoft JhengHei"/>
+              </a:rPr>
+              <a:t>其他</a:t>
+            </a:r>
+          </a:p>
+        </p:txBody>
+      </p:sp>
+      <p:sp>
+        <p:nvSpPr>
+          <p:cNvPr id="24" name="TextBox 23"/>
+          <p:cNvSpPr txBox="1"/>
+          <p:nvPr/>
+        </p:nvSpPr>
+        <p:spPr>
+          <a:xfrm>
+            <a:off x="777240" y="4599432"/>
+            <a:ext cx="4937760" cy="640080"/>
+          </a:xfrm>
+          <a:prstGeom prst="rect">
+            <a:avLst/>
+          </a:prstGeom>
+          <a:noFill/>
+        </p:spPr>
+        <p:txBody>
+          <a:bodyPr wrap="square" anchor="t" lIns="0" rIns="0" tIns="0" bIns="0">
+            <a:spAutoFit/>
+          </a:bodyPr>
+          <a:lstStyle/>
+          <a:p>
+            <a:pPr algn="l">
+              <a:lnSpc>
+                <a:spcPts val="1500"/>
+              </a:lnSpc>
+            </a:pPr>
+            <a:r>
+              <a:rPr sz="1100" b="1">
+                <a:solidFill>
+                  <a:srgbClr val="5C6679"/>
+                </a:solidFill>
+                <a:latin typeface="Microsoft JhengHei"/>
+                <a:ea typeface="Microsoft JhengHei"/>
+                <a:cs typeface="Microsoft JhengHei"/>
+              </a:rPr>
+              <a:t>緣由　</a:t>
+            </a:r>
+            <a:r>
+              <a:rPr sz="1100" b="0">
+                <a:solidFill>
+                  <a:srgbClr val="1A2233"/>
+                </a:solidFill>
+                <a:latin typeface="Microsoft JhengHei"/>
+                <a:ea typeface="Microsoft JhengHei"/>
+                <a:cs typeface="Microsoft JhengHei"/>
+              </a:rPr>
+              <a:t>本公司發生網路資安事件。</a:t>
+            </a:r>
+          </a:p>
+        </p:txBody>
+      </p:sp>
+      <p:sp>
+        <p:nvSpPr>
+          <p:cNvPr id="25" name="TextBox 24"/>
+          <p:cNvSpPr txBox="1"/>
+          <p:nvPr/>
+        </p:nvSpPr>
+        <p:spPr>
+          <a:xfrm>
+            <a:off x="777240" y="5257800"/>
+            <a:ext cx="4937760" cy="713232"/>
+          </a:xfrm>
+          <a:prstGeom prst="rect">
+            <a:avLst/>
+          </a:prstGeom>
+          <a:noFill/>
+        </p:spPr>
+        <p:txBody>
+          <a:bodyPr wrap="square" anchor="t" lIns="0" rIns="0" tIns="0" bIns="0">
+            <a:spAutoFit/>
+          </a:bodyPr>
+          <a:lstStyle/>
+          <a:p>
+            <a:pPr algn="l">
+              <a:lnSpc>
+                <a:spcPts val="1500"/>
+              </a:lnSpc>
+            </a:pPr>
+            <a:r>
+              <a:rPr sz="1100" b="1">
+                <a:solidFill>
+                  <a:srgbClr val="5C6679"/>
+                </a:solidFill>
+                <a:latin typeface="Microsoft JhengHei"/>
+                <a:ea typeface="Microsoft JhengHei"/>
+                <a:cs typeface="Microsoft JhengHei"/>
+              </a:rPr>
+              <a:t>因應　</a:t>
+            </a:r>
+            <a:r>
+              <a:rPr sz="1100" b="0">
+                <a:solidFill>
+                  <a:srgbClr val="1A2233"/>
+                </a:solidFill>
+                <a:latin typeface="Microsoft JhengHei"/>
+                <a:ea typeface="Microsoft JhengHei"/>
+                <a:cs typeface="Microsoft JhengHei"/>
+              </a:rPr>
+              <a:t>本公司後續仍持續強化資安管控及防禦機制，確保資訊安全與服務體驗。</a:t>
+            </a:r>
+          </a:p>
+        </p:txBody>
+      </p:sp>
+      <p:sp>
+        <p:nvSpPr>
+          <p:cNvPr id="26" name="Rounded Rectangle 25"/>
+          <p:cNvSpPr/>
+          <p:nvPr/>
+        </p:nvSpPr>
+        <p:spPr>
+          <a:xfrm>
+            <a:off x="6172200" y="3886200"/>
+            <a:ext cx="5394960" cy="2148840"/>
+          </a:xfrm>
+          <a:prstGeom prst="roundRect">
+            <a:avLst/>
+          </a:prstGeom>
+          <a:solidFill>
+            <a:srgbClr val="FFFFFF"/>
+          </a:solidFill>
+          <a:ln w="12700">
+            <a:solidFill>
+              <a:srgbClr val="DDE3EE"/>
+            </a:solidFill>
+          </a:ln>
+          <a:effectLst/>
+        </p:spPr>
+        <p:style>
+          <a:lnRef idx="1">
+            <a:schemeClr val="accent1"/>
+          </a:lnRef>
+          <a:fillRef idx="3">
+            <a:schemeClr val="accent1"/>
+          </a:fillRef>
+          <a:effectRef idx="2">
+            <a:schemeClr val="accent1"/>
+          </a:effectRef>
+          <a:fontRef idx="minor">
+            <a:schemeClr val="lt1"/>
+          </a:fontRef>
+        </p:style>
+        <p:txBody>
+          <a:bodyPr rtlCol="0" anchor="ctr"/>
+          <a:lstStyle/>
+          <a:p>
+            <a:pPr algn="ctr"/>
+          </a:p>
+        </p:txBody>
+      </p:sp>
+      <p:sp>
+        <p:nvSpPr>
+          <p:cNvPr id="27" name="Rectangle 26"/>
+          <p:cNvSpPr/>
+          <p:nvPr/>
+        </p:nvSpPr>
+        <p:spPr>
+          <a:xfrm>
+            <a:off x="6172200" y="3886200"/>
+            <a:ext cx="5394960" cy="109728"/>
+          </a:xfrm>
+          <a:prstGeom prst="rect">
             <a:avLst/>
           </a:prstGeom>
           <a:solidFill>
@@ -10514,13 +11241,105 @@
       </p:sp>
       <p:sp>
         <p:nvSpPr>
-          <p:cNvPr id="23" name="TextBox 22"/>
+          <p:cNvPr id="28" name="TextBox 27"/>
           <p:cNvSpPr txBox="1"/>
           <p:nvPr/>
         </p:nvSpPr>
         <p:spPr>
           <a:xfrm>
-            <a:off x="4526280" y="4123944"/>
+            <a:off x="6400800" y="4105656"/>
+            <a:ext cx="3657600" cy="365760"/>
+          </a:xfrm>
+          <a:prstGeom prst="rect">
+            <a:avLst/>
+          </a:prstGeom>
+          <a:noFill/>
+        </p:spPr>
+        <p:txBody>
+          <a:bodyPr wrap="square" anchor="ctr" lIns="0" rIns="0" tIns="0" bIns="0">
+            <a:spAutoFit/>
+          </a:bodyPr>
+          <a:lstStyle/>
+          <a:p>
+            <a:pPr algn="l"/>
+            <a:r>
+              <a:rPr sz="1600" b="1">
+                <a:solidFill>
+                  <a:srgbClr val="1A2233"/>
+                </a:solidFill>
+                <a:latin typeface="Microsoft JhengHei"/>
+                <a:ea typeface="Microsoft JhengHei"/>
+                <a:cs typeface="Microsoft JhengHei"/>
+              </a:rPr>
+              <a:t>網家 </a:t>
+            </a:r>
+            <a:r>
+              <a:rPr sz="1300" b="0">
+                <a:solidFill>
+                  <a:srgbClr val="5C6679"/>
+                </a:solidFill>
+                <a:latin typeface="Microsoft JhengHei"/>
+                <a:ea typeface="Microsoft JhengHei"/>
+                <a:cs typeface="Microsoft JhengHei"/>
+              </a:rPr>
+              <a:t>8044</a:t>
+            </a:r>
+          </a:p>
+        </p:txBody>
+      </p:sp>
+      <p:sp>
+        <p:nvSpPr>
+          <p:cNvPr id="29" name="Rounded Rectangle 28"/>
+          <p:cNvSpPr/>
+          <p:nvPr/>
+        </p:nvSpPr>
+        <p:spPr>
+          <a:xfrm>
+            <a:off x="10149840" y="4123944"/>
+            <a:ext cx="1234440" cy="347472"/>
+          </a:xfrm>
+          <a:prstGeom prst="roundRect">
+            <a:avLst/>
+          </a:prstGeom>
+          <a:solidFill>
+            <a:srgbClr val="E63946"/>
+          </a:solidFill>
+          <a:ln>
+            <a:noFill/>
+          </a:ln>
+          <a:effectLst/>
+        </p:spPr>
+        <p:style>
+          <a:lnRef idx="1">
+            <a:schemeClr val="accent1"/>
+          </a:lnRef>
+          <a:fillRef idx="3">
+            <a:schemeClr val="accent1"/>
+          </a:fillRef>
+          <a:effectRef idx="2">
+            <a:schemeClr val="accent1"/>
+          </a:effectRef>
+          <a:fontRef idx="minor">
+            <a:schemeClr val="lt1"/>
+          </a:fontRef>
+        </p:style>
+        <p:txBody>
+          <a:bodyPr rtlCol="0" anchor="ctr"/>
+          <a:lstStyle/>
+          <a:p>
+            <a:pPr algn="ctr"/>
+          </a:p>
+        </p:txBody>
+      </p:sp>
+      <p:sp>
+        <p:nvSpPr>
+          <p:cNvPr id="30" name="TextBox 29"/>
+          <p:cNvSpPr txBox="1"/>
+          <p:nvPr/>
+        </p:nvSpPr>
+        <p:spPr>
+          <a:xfrm>
+            <a:off x="10149840" y="4123944"/>
             <a:ext cx="1234440" cy="347472"/>
           </a:xfrm>
           <a:prstGeom prst="rect">
@@ -10551,13 +11370,13 @@
       </p:sp>
       <p:sp>
         <p:nvSpPr>
-          <p:cNvPr id="24" name="TextBox 23"/>
+          <p:cNvPr id="31" name="TextBox 30"/>
           <p:cNvSpPr txBox="1"/>
           <p:nvPr/>
         </p:nvSpPr>
         <p:spPr>
           <a:xfrm>
-            <a:off x="777240" y="4599432"/>
+            <a:off x="6400800" y="4599432"/>
             <a:ext cx="4937760" cy="640080"/>
           </a:xfrm>
           <a:prstGeom prst="rect">
@@ -10603,13 +11422,13 @@
       </p:sp>
       <p:sp>
         <p:nvSpPr>
-          <p:cNvPr id="25" name="TextBox 24"/>
+          <p:cNvPr id="32" name="TextBox 31"/>
           <p:cNvSpPr txBox="1"/>
           <p:nvPr/>
         </p:nvSpPr>
         <p:spPr>
           <a:xfrm>
-            <a:off x="777240" y="5257800"/>
+            <a:off x="6400800" y="5257800"/>
             <a:ext cx="4937760" cy="713232"/>
           </a:xfrm>
           <a:prstGeom prst="rect">

--- a/資安事件因應分析.pptx
+++ b/資安事件因應分析.pptx
@@ -12,6 +12,7 @@
     <p:sldId id="260" r:id="rId11"/>
     <p:sldId id="261" r:id="rId12"/>
     <p:sldId id="262" r:id="rId13"/>
+    <p:sldId id="263" r:id="rId14"/>
   </p:sldIdLst>
   <p:sldSz cx="12191695" cy="6858000" type="screen4x3"/>
   <p:notesSz cx="6858000" cy="9144000"/>
@@ -185,7 +186,7 @@
                 <c:formatCode>General</c:formatCode>
                 <c:ptCount val="3"/>
                 <c:pt idx="0">
-                  <c:v>4</c:v>
+                  <c:v>5</c:v>
                 </c:pt>
                 <c:pt idx="1">
                   <c:v>1</c:v>
@@ -3528,7 +3529,7 @@
                 <a:ea typeface="Microsoft JhengHei"/>
                 <a:cs typeface="Microsoft JhengHei"/>
               </a:rPr>
-              <a:t>資料期間 2026-06-28 ~ 2026-07-28　｜　MOPS 重大訊息全文檢索　｜　8 家公司</a:t>
+              <a:t>資料期間 2026-06-29 ~ 2026-07-29　｜　MOPS 重大訊息全文檢索　｜　9 家公司</a:t>
             </a:r>
           </a:p>
         </p:txBody>
@@ -3745,7 +3746,7 @@
                 <a:ea typeface="Microsoft JhengHei"/>
                 <a:cs typeface="Microsoft JhengHei"/>
               </a:rPr>
-              <a:t>資料期間內 MOPS 揭露之 8 起資安相關重大訊息</a:t>
+              <a:t>資料期間內 MOPS 揭露之 9 起資安相關重大訊息</a:t>
             </a:r>
           </a:p>
         </p:txBody>
@@ -3828,7 +3829,7 @@
                 <a:ea typeface="Microsoft JhengHei"/>
                 <a:cs typeface="Microsoft JhengHei"/>
               </a:rPr>
-              <a:t>8</a:t>
+              <a:t>9</a:t>
             </a:r>
           </a:p>
         </p:txBody>
@@ -4120,7 +4121,7 @@
         </p:nvGraphicFramePr>
         <p:xfrm>
           <a:off x="548640" y="2697480"/>
-          <a:ext cx="11064240" cy="3456432"/>
+          <a:ext cx="11064240" cy="3566160"/>
         </p:xfrm>
         <a:graphic>
           <a:graphicData uri="http://schemas.openxmlformats.org/drawingml/2006/table">
@@ -4135,7 +4136,7 @@
                 <a:gridCol w="2286000"/>
                 <a:gridCol w="5120640"/>
               </a:tblGrid>
-              <a:tr h="384048">
+              <a:tr h="356616">
                 <a:tc>
                   <a:txBody>
                     <a:bodyPr/>
@@ -4257,7 +4258,7 @@
                   </a:tcPr>
                 </a:tc>
               </a:tr>
-              <a:tr h="384048">
+              <a:tr h="356616">
                 <a:tc>
                   <a:txBody>
                     <a:bodyPr/>
@@ -4272,7 +4273,7 @@
                           <a:ea typeface="Microsoft JhengHei"/>
                           <a:cs typeface="Microsoft JhengHei"/>
                         </a:rPr>
-                        <a:t>萬達寵物</a:t>
+                        <a:t>上銀</a:t>
                       </a:r>
                     </a:p>
                   </a:txBody>
@@ -4296,7 +4297,7 @@
                           <a:ea typeface="Microsoft JhengHei"/>
                           <a:cs typeface="Microsoft JhengHei"/>
                         </a:rPr>
-                        <a:t>6968</a:t>
+                        <a:t>2049</a:t>
                       </a:r>
                     </a:p>
                   </a:txBody>
@@ -4320,13 +4321,135 @@
                           <a:ea typeface="Microsoft JhengHei"/>
                           <a:cs typeface="Microsoft JhengHei"/>
                         </a:rPr>
+                        <a:t>07/28</a:t>
+                      </a:r>
+                    </a:p>
+                  </a:txBody>
+                  <a:tcPr anchor="ctr" marL="73152" marT="9144" marB="9144">
+                    <a:solidFill>
+                      <a:srgbClr val="FFFFFF"/>
+                    </a:solidFill>
+                  </a:tcPr>
+                </a:tc>
+                <a:tc>
+                  <a:txBody>
+                    <a:bodyPr/>
+                    <a:lstStyle/>
+                    <a:p>
+                      <a:r>
+                        <a:rPr sz="1150" b="1">
+                          <a:solidFill>
+                            <a:srgbClr val="E63946"/>
+                          </a:solidFill>
+                          <a:latin typeface="Microsoft JhengHei"/>
+                          <a:ea typeface="Microsoft JhengHei"/>
+                          <a:cs typeface="Microsoft JhengHei"/>
+                        </a:rPr>
+                        <a:t>駭客攻擊</a:t>
+                      </a:r>
+                    </a:p>
+                  </a:txBody>
+                  <a:tcPr anchor="ctr" marL="73152" marT="9144" marB="9144">
+                    <a:solidFill>
+                      <a:srgbClr val="FFFFFF"/>
+                    </a:solidFill>
+                  </a:tcPr>
+                </a:tc>
+                <a:tc>
+                  <a:txBody>
+                    <a:bodyPr/>
+                    <a:lstStyle/>
+                    <a:p>
+                      <a:r>
+                        <a:rPr sz="1150" b="0">
+                          <a:solidFill>
+                            <a:srgbClr val="1A2233"/>
+                          </a:solidFill>
+                          <a:latin typeface="Microsoft JhengHei"/>
+                          <a:ea typeface="Microsoft JhengHei"/>
+                          <a:cs typeface="Microsoft JhengHei"/>
+                        </a:rPr>
+                        <a:t>目前初步評估對公司營運無重大影響。</a:t>
+                      </a:r>
+                    </a:p>
+                  </a:txBody>
+                  <a:tcPr anchor="ctr" marL="73152" marT="9144" marB="9144">
+                    <a:solidFill>
+                      <a:srgbClr val="FFFFFF"/>
+                    </a:solidFill>
+                  </a:tcPr>
+                </a:tc>
+              </a:tr>
+              <a:tr h="356616">
+                <a:tc>
+                  <a:txBody>
+                    <a:bodyPr/>
+                    <a:lstStyle/>
+                    <a:p>
+                      <a:r>
+                        <a:rPr sz="1150" b="0">
+                          <a:solidFill>
+                            <a:srgbClr val="1A2233"/>
+                          </a:solidFill>
+                          <a:latin typeface="Microsoft JhengHei"/>
+                          <a:ea typeface="Microsoft JhengHei"/>
+                          <a:cs typeface="Microsoft JhengHei"/>
+                        </a:rPr>
+                        <a:t>萬達寵物</a:t>
+                      </a:r>
+                    </a:p>
+                  </a:txBody>
+                  <a:tcPr anchor="ctr" marL="73152" marT="9144" marB="9144">
+                    <a:solidFill>
+                      <a:srgbClr val="EEF2F9"/>
+                    </a:solidFill>
+                  </a:tcPr>
+                </a:tc>
+                <a:tc>
+                  <a:txBody>
+                    <a:bodyPr/>
+                    <a:lstStyle/>
+                    <a:p>
+                      <a:r>
+                        <a:rPr sz="1150" b="0">
+                          <a:solidFill>
+                            <a:srgbClr val="1A2233"/>
+                          </a:solidFill>
+                          <a:latin typeface="Microsoft JhengHei"/>
+                          <a:ea typeface="Microsoft JhengHei"/>
+                          <a:cs typeface="Microsoft JhengHei"/>
+                        </a:rPr>
+                        <a:t>6968</a:t>
+                      </a:r>
+                    </a:p>
+                  </a:txBody>
+                  <a:tcPr anchor="ctr" marL="73152" marT="9144" marB="9144">
+                    <a:solidFill>
+                      <a:srgbClr val="EEF2F9"/>
+                    </a:solidFill>
+                  </a:tcPr>
+                </a:tc>
+                <a:tc>
+                  <a:txBody>
+                    <a:bodyPr/>
+                    <a:lstStyle/>
+                    <a:p>
+                      <a:r>
+                        <a:rPr sz="1150" b="0">
+                          <a:solidFill>
+                            <a:srgbClr val="1A2233"/>
+                          </a:solidFill>
+                          <a:latin typeface="Microsoft JhengHei"/>
+                          <a:ea typeface="Microsoft JhengHei"/>
+                          <a:cs typeface="Microsoft JhengHei"/>
+                        </a:rPr>
                         <a:t>07/27</a:t>
                       </a:r>
                     </a:p>
                   </a:txBody>
                   <a:tcPr anchor="ctr" marL="73152" marT="9144" marB="9144">
                     <a:solidFill>
-                      <a:srgbClr val="FFFFFF"/>
+                      <a:srgbClr val="EEF2F9"/>
                     </a:solidFill>
                   </a:tcPr>
                 </a:tc>
@@ -4350,7 +4473,7 @@
                   </a:txBody>
                   <a:tcPr anchor="ctr" marL="73152" marT="9144" marB="9144">
                     <a:solidFill>
-                      <a:srgbClr val="FFFFFF"/>
+                      <a:srgbClr val="EEF2F9"/>
                     </a:solidFill>
                   </a:tcPr>
                 </a:tc>
@@ -4374,12 +4497,134 @@
                   </a:txBody>
                   <a:tcPr anchor="ctr" marL="73152" marT="9144" marB="9144">
                     <a:solidFill>
+                      <a:srgbClr val="EEF2F9"/>
+                    </a:solidFill>
+                  </a:tcPr>
+                </a:tc>
+              </a:tr>
+              <a:tr h="356616">
+                <a:tc>
+                  <a:txBody>
+                    <a:bodyPr/>
+                    <a:lstStyle/>
+                    <a:p>
+                      <a:r>
+                        <a:rPr sz="1150" b="0">
+                          <a:solidFill>
+                            <a:srgbClr val="1A2233"/>
+                          </a:solidFill>
+                          <a:latin typeface="Microsoft JhengHei"/>
+                          <a:ea typeface="Microsoft JhengHei"/>
+                          <a:cs typeface="Microsoft JhengHei"/>
+                        </a:rPr>
+                        <a:t>淳安</a:t>
+                      </a:r>
+                    </a:p>
+                  </a:txBody>
+                  <a:tcPr anchor="ctr" marL="73152" marT="9144" marB="9144">
+                    <a:solidFill>
+                      <a:srgbClr val="FFFFFF"/>
+                    </a:solidFill>
+                  </a:tcPr>
+                </a:tc>
+                <a:tc>
+                  <a:txBody>
+                    <a:bodyPr/>
+                    <a:lstStyle/>
+                    <a:p>
+                      <a:r>
+                        <a:rPr sz="1150" b="0">
+                          <a:solidFill>
+                            <a:srgbClr val="1A2233"/>
+                          </a:solidFill>
+                          <a:latin typeface="Microsoft JhengHei"/>
+                          <a:ea typeface="Microsoft JhengHei"/>
+                          <a:cs typeface="Microsoft JhengHei"/>
+                        </a:rPr>
+                        <a:t>6283</a:t>
+                      </a:r>
+                    </a:p>
+                  </a:txBody>
+                  <a:tcPr anchor="ctr" marL="73152" marT="9144" marB="9144">
+                    <a:solidFill>
+                      <a:srgbClr val="FFFFFF"/>
+                    </a:solidFill>
+                  </a:tcPr>
+                </a:tc>
+                <a:tc>
+                  <a:txBody>
+                    <a:bodyPr/>
+                    <a:lstStyle/>
+                    <a:p>
+                      <a:r>
+                        <a:rPr sz="1150" b="0">
+                          <a:solidFill>
+                            <a:srgbClr val="1A2233"/>
+                          </a:solidFill>
+                          <a:latin typeface="Microsoft JhengHei"/>
+                          <a:ea typeface="Microsoft JhengHei"/>
+                          <a:cs typeface="Microsoft JhengHei"/>
+                        </a:rPr>
+                        <a:t>07/21</a:t>
+                      </a:r>
+                    </a:p>
+                  </a:txBody>
+                  <a:tcPr anchor="ctr" marL="73152" marT="9144" marB="9144">
+                    <a:solidFill>
+                      <a:srgbClr val="FFFFFF"/>
+                    </a:solidFill>
+                  </a:tcPr>
+                </a:tc>
+                <a:tc>
+                  <a:txBody>
+                    <a:bodyPr/>
+                    <a:lstStyle/>
+                    <a:p>
+                      <a:r>
+                        <a:rPr sz="1150" b="1">
+                          <a:solidFill>
+                            <a:srgbClr val="5C6679"/>
+                          </a:solidFill>
+                          <a:latin typeface="Microsoft JhengHei"/>
+                          <a:ea typeface="Microsoft JhengHei"/>
+                          <a:cs typeface="Microsoft JhengHei"/>
+                        </a:rPr>
+                        <a:t>其他</a:t>
+                      </a:r>
+                    </a:p>
+                  </a:txBody>
+                  <a:tcPr anchor="ctr" marL="73152" marT="9144" marB="9144">
+                    <a:solidFill>
+                      <a:srgbClr val="FFFFFF"/>
+                    </a:solidFill>
+                  </a:tcPr>
+                </a:tc>
+                <a:tc>
+                  <a:txBody>
+                    <a:bodyPr/>
+                    <a:lstStyle/>
+                    <a:p>
+                      <a:r>
+                        <a:rPr sz="1150" b="0">
+                          <a:solidFill>
+                            <a:srgbClr val="1A2233"/>
+                          </a:solidFill>
+                          <a:latin typeface="Microsoft JhengHei"/>
+                          <a:ea typeface="Microsoft JhengHei"/>
+                          <a:cs typeface="Microsoft JhengHei"/>
+                        </a:rPr>
+                        <a:t>經評估對公司營運無重大影響。</a:t>
+                      </a:r>
+                    </a:p>
+                  </a:txBody>
+                  <a:tcPr anchor="ctr" marL="73152" marT="9144" marB="9144">
+                    <a:solidFill>
                       <a:srgbClr val="FFFFFF"/>
                     </a:solidFill>
                   </a:tcPr>
                 </a:tc>
               </a:tr>
-              <a:tr h="384048">
+              <a:tr h="356616">
                 <a:tc>
                   <a:txBody>
                     <a:bodyPr/>
@@ -4442,7 +4687,7 @@
                           <a:ea typeface="Microsoft JhengHei"/>
                           <a:cs typeface="Microsoft JhengHei"/>
                         </a:rPr>
-                        <a:t>07/21</a:t>
+                        <a:t>07/20</a:t>
                       </a:r>
                     </a:p>
                   </a:txBody>
@@ -4501,7 +4746,7 @@
                   </a:tcPr>
                 </a:tc>
               </a:tr>
-              <a:tr h="384048">
+              <a:tr h="356616">
                 <a:tc>
                   <a:txBody>
                     <a:bodyPr/>
@@ -4516,7 +4761,7 @@
                           <a:ea typeface="Microsoft JhengHei"/>
                           <a:cs typeface="Microsoft JhengHei"/>
                         </a:rPr>
-                        <a:t>淳安</a:t>
+                        <a:t>松上</a:t>
                       </a:r>
                     </a:p>
                   </a:txBody>
@@ -4540,7 +4785,7 @@
                           <a:ea typeface="Microsoft JhengHei"/>
                           <a:cs typeface="Microsoft JhengHei"/>
                         </a:rPr>
-                        <a:t>6283</a:t>
+                        <a:t>6156</a:t>
                       </a:r>
                     </a:p>
                   </a:txBody>
@@ -4564,7 +4809,7 @@
                           <a:ea typeface="Microsoft JhengHei"/>
                           <a:cs typeface="Microsoft JhengHei"/>
                         </a:rPr>
-                        <a:t>07/20</a:t>
+                        <a:t>07/17</a:t>
                       </a:r>
                     </a:p>
                   </a:txBody>
@@ -4582,13 +4827,13 @@
                       <a:r>
                         <a:rPr sz="1150" b="1">
                           <a:solidFill>
-                            <a:srgbClr val="5C6679"/>
+                            <a:srgbClr val="E63946"/>
                           </a:solidFill>
                           <a:latin typeface="Microsoft JhengHei"/>
                           <a:ea typeface="Microsoft JhengHei"/>
                           <a:cs typeface="Microsoft JhengHei"/>
                         </a:rPr>
-                        <a:t>其他</a:t>
+                        <a:t>駭客攻擊</a:t>
                       </a:r>
                     </a:p>
                   </a:txBody>
@@ -4612,7 +4857,7 @@
                           <a:ea typeface="Microsoft JhengHei"/>
                           <a:cs typeface="Microsoft JhengHei"/>
                         </a:rPr>
-                        <a:t>經評估對公司營運無重大影響。</a:t>
+                        <a:t>目前評估對公司營運無重大影響。</a:t>
                       </a:r>
                     </a:p>
                   </a:txBody>
@@ -4623,7 +4868,7 @@
                   </a:tcPr>
                 </a:tc>
               </a:tr>
-              <a:tr h="384048">
+              <a:tr h="356616">
                 <a:tc>
                   <a:txBody>
                     <a:bodyPr/>
@@ -4638,7 +4883,7 @@
                           <a:ea typeface="Microsoft JhengHei"/>
                           <a:cs typeface="Microsoft JhengHei"/>
                         </a:rPr>
-                        <a:t>松上</a:t>
+                        <a:t>優盛</a:t>
                       </a:r>
                     </a:p>
                   </a:txBody>
@@ -4662,7 +4907,7 @@
                           <a:ea typeface="Microsoft JhengHei"/>
                           <a:cs typeface="Microsoft JhengHei"/>
                         </a:rPr>
-                        <a:t>6156</a:t>
+                        <a:t>4121</a:t>
                       </a:r>
                     </a:p>
                   </a:txBody>
@@ -4686,7 +4931,7 @@
                           <a:ea typeface="Microsoft JhengHei"/>
                           <a:cs typeface="Microsoft JhengHei"/>
                         </a:rPr>
-                        <a:t>07/17</a:t>
+                        <a:t>07/07</a:t>
                       </a:r>
                     </a:p>
                   </a:txBody>
@@ -4734,7 +4979,7 @@
                           <a:ea typeface="Microsoft JhengHei"/>
                           <a:cs typeface="Microsoft JhengHei"/>
                         </a:rPr>
-                        <a:t>目前評估對公司營運無重大影響。</a:t>
+                        <a:t>本資訊網站已暫時停止服務，該事件對公司營運、資訊安全、個資等無重大影…</a:t>
                       </a:r>
                     </a:p>
                   </a:txBody>
@@ -4745,7 +4990,7 @@
                   </a:tcPr>
                 </a:tc>
               </a:tr>
-              <a:tr h="384048">
+              <a:tr h="356616">
                 <a:tc>
                   <a:txBody>
                     <a:bodyPr/>
@@ -4760,7 +5005,7 @@
                           <a:ea typeface="Microsoft JhengHei"/>
                           <a:cs typeface="Microsoft JhengHei"/>
                         </a:rPr>
-                        <a:t>優盛</a:t>
+                        <a:t>麗清</a:t>
                       </a:r>
                     </a:p>
                   </a:txBody>
@@ -4784,7 +5029,7 @@
                           <a:ea typeface="Microsoft JhengHei"/>
                           <a:cs typeface="Microsoft JhengHei"/>
                         </a:rPr>
-                        <a:t>4121</a:t>
+                        <a:t>3346</a:t>
                       </a:r>
                     </a:p>
                   </a:txBody>
@@ -4808,7 +5053,7 @@
                           <a:ea typeface="Microsoft JhengHei"/>
                           <a:cs typeface="Microsoft JhengHei"/>
                         </a:rPr>
-                        <a:t>07/07</a:t>
+                        <a:t>07/02</a:t>
                       </a:r>
                     </a:p>
                   </a:txBody>
@@ -4856,7 +5101,7 @@
                           <a:ea typeface="Microsoft JhengHei"/>
                           <a:cs typeface="Microsoft JhengHei"/>
                         </a:rPr>
-                        <a:t>本資訊網站已暫時停止服務，該事件對公司營運、資訊安全、個資等無重大影…</a:t>
+                        <a:t>目前初步評估對公司運作無重大影響。</a:t>
                       </a:r>
                     </a:p>
                   </a:txBody>
@@ -4867,7 +5112,7 @@
                   </a:tcPr>
                 </a:tc>
               </a:tr>
-              <a:tr h="384048">
+              <a:tr h="356616">
                 <a:tc>
                   <a:txBody>
                     <a:bodyPr/>
@@ -4882,7 +5127,7 @@
                           <a:ea typeface="Microsoft JhengHei"/>
                           <a:cs typeface="Microsoft JhengHei"/>
                         </a:rPr>
-                        <a:t>麗清</a:t>
+                        <a:t>GOGOLOOK</a:t>
                       </a:r>
                     </a:p>
                   </a:txBody>
@@ -4906,7 +5151,7 @@
                           <a:ea typeface="Microsoft JhengHei"/>
                           <a:cs typeface="Microsoft JhengHei"/>
                         </a:rPr>
-                        <a:t>3346</a:t>
+                        <a:t>6902</a:t>
                       </a:r>
                     </a:p>
                   </a:txBody>
@@ -4930,7 +5175,7 @@
                           <a:ea typeface="Microsoft JhengHei"/>
                           <a:cs typeface="Microsoft JhengHei"/>
                         </a:rPr>
-                        <a:t>07/02</a:t>
+                        <a:t>07/01</a:t>
                       </a:r>
                     </a:p>
                   </a:txBody>
@@ -4948,13 +5193,13 @@
                       <a:r>
                         <a:rPr sz="1150" b="1">
                           <a:solidFill>
-                            <a:srgbClr val="E63946"/>
+                            <a:srgbClr val="5C6679"/>
                           </a:solidFill>
                           <a:latin typeface="Microsoft JhengHei"/>
                           <a:ea typeface="Microsoft JhengHei"/>
                           <a:cs typeface="Microsoft JhengHei"/>
                         </a:rPr>
-                        <a:t>駭客攻擊</a:t>
+                        <a:t>其他</a:t>
                       </a:r>
                     </a:p>
                   </a:txBody>
@@ -4978,7 +5223,7 @@
                           <a:ea typeface="Microsoft JhengHei"/>
                           <a:cs typeface="Microsoft JhengHei"/>
                         </a:rPr>
-                        <a:t>目前初步評估對公司運作無重大影響。</a:t>
+                        <a:t>目前評估對公司營運尚無重大影響。</a:t>
                       </a:r>
                     </a:p>
                   </a:txBody>
@@ -4989,7 +5234,7 @@
                   </a:tcPr>
                 </a:tc>
               </a:tr>
-              <a:tr h="384048">
+              <a:tr h="356616">
                 <a:tc>
                   <a:txBody>
                     <a:bodyPr/>
@@ -5004,7 +5249,7 @@
                           <a:ea typeface="Microsoft JhengHei"/>
                           <a:cs typeface="Microsoft JhengHei"/>
                         </a:rPr>
-                        <a:t>GOGOLOOK</a:t>
+                        <a:t>網家</a:t>
                       </a:r>
                     </a:p>
                   </a:txBody>
@@ -5028,7 +5273,7 @@
                           <a:ea typeface="Microsoft JhengHei"/>
                           <a:cs typeface="Microsoft JhengHei"/>
                         </a:rPr>
-                        <a:t>6902</a:t>
+                        <a:t>8044</a:t>
                       </a:r>
                     </a:p>
                   </a:txBody>
@@ -5070,13 +5315,13 @@
                       <a:r>
                         <a:rPr sz="1150" b="1">
                           <a:solidFill>
-                            <a:srgbClr val="5C6679"/>
+                            <a:srgbClr val="E63946"/>
                           </a:solidFill>
                           <a:latin typeface="Microsoft JhengHei"/>
                           <a:ea typeface="Microsoft JhengHei"/>
                           <a:cs typeface="Microsoft JhengHei"/>
                         </a:rPr>
-                        <a:t>其他</a:t>
+                        <a:t>駭客攻擊</a:t>
                       </a:r>
                     </a:p>
                   </a:txBody>
@@ -5100,135 +5345,13 @@
                           <a:ea typeface="Microsoft JhengHei"/>
                           <a:cs typeface="Microsoft JhengHei"/>
                         </a:rPr>
-                        <a:t>目前評估對公司營運尚無重大影響。</a:t>
+                        <a:t>—</a:t>
                       </a:r>
                     </a:p>
                   </a:txBody>
                   <a:tcPr anchor="ctr" marL="73152" marT="9144" marB="9144">
                     <a:solidFill>
                       <a:srgbClr val="FFFFFF"/>
-                    </a:solidFill>
-                  </a:tcPr>
-                </a:tc>
-              </a:tr>
-              <a:tr h="384048">
-                <a:tc>
-                  <a:txBody>
-                    <a:bodyPr/>
-                    <a:lstStyle/>
-                    <a:p>
-                      <a:r>
-                        <a:rPr sz="1150" b="0">
-                          <a:solidFill>
-                            <a:srgbClr val="1A2233"/>
-                          </a:solidFill>
-                          <a:latin typeface="Microsoft JhengHei"/>
-                          <a:ea typeface="Microsoft JhengHei"/>
-                          <a:cs typeface="Microsoft JhengHei"/>
-                        </a:rPr>
-                        <a:t>網家</a:t>
-                      </a:r>
-                    </a:p>
-                  </a:txBody>
-                  <a:tcPr anchor="ctr" marL="73152" marT="9144" marB="9144">
-                    <a:solidFill>
-                      <a:srgbClr val="EEF2F9"/>
-                    </a:solidFill>
-                  </a:tcPr>
-                </a:tc>
-                <a:tc>
-                  <a:txBody>
-                    <a:bodyPr/>
-                    <a:lstStyle/>
-                    <a:p>
-                      <a:r>
-                        <a:rPr sz="1150" b="0">
-                          <a:solidFill>
-                            <a:srgbClr val="1A2233"/>
-                          </a:solidFill>
-                          <a:latin typeface="Microsoft JhengHei"/>
-                          <a:ea typeface="Microsoft JhengHei"/>
-                          <a:cs typeface="Microsoft JhengHei"/>
-                        </a:rPr>
-                        <a:t>8044</a:t>
-                      </a:r>
-                    </a:p>
-                  </a:txBody>
-                  <a:tcPr anchor="ctr" marL="73152" marT="9144" marB="9144">
-                    <a:solidFill>
-                      <a:srgbClr val="EEF2F9"/>
-                    </a:solidFill>
-                  </a:tcPr>
-                </a:tc>
-                <a:tc>
-                  <a:txBody>
-                    <a:bodyPr/>
-                    <a:lstStyle/>
-                    <a:p>
-                      <a:r>
-                        <a:rPr sz="1150" b="0">
-                          <a:solidFill>
-                            <a:srgbClr val="1A2233"/>
-                          </a:solidFill>
-                          <a:latin typeface="Microsoft JhengHei"/>
-                          <a:ea typeface="Microsoft JhengHei"/>
-                          <a:cs typeface="Microsoft JhengHei"/>
-                        </a:rPr>
-                        <a:t>07/01</a:t>
-                      </a:r>
-                    </a:p>
-                  </a:txBody>
-                  <a:tcPr anchor="ctr" marL="73152" marT="9144" marB="9144">
-                    <a:solidFill>
-                      <a:srgbClr val="EEF2F9"/>
-                    </a:solidFill>
-                  </a:tcPr>
-                </a:tc>
-                <a:tc>
-                  <a:txBody>
-                    <a:bodyPr/>
-                    <a:lstStyle/>
-                    <a:p>
-                      <a:r>
-                        <a:rPr sz="1150" b="1">
-                          <a:solidFill>
-                            <a:srgbClr val="E63946"/>
-                          </a:solidFill>
-                          <a:latin typeface="Microsoft JhengHei"/>
-                          <a:ea typeface="Microsoft JhengHei"/>
-                          <a:cs typeface="Microsoft JhengHei"/>
-                        </a:rPr>
-                        <a:t>駭客攻擊</a:t>
-                      </a:r>
-                    </a:p>
-                  </a:txBody>
-                  <a:tcPr anchor="ctr" marL="73152" marT="9144" marB="9144">
-                    <a:solidFill>
-                      <a:srgbClr val="EEF2F9"/>
-                    </a:solidFill>
-                  </a:tcPr>
-                </a:tc>
-                <a:tc>
-                  <a:txBody>
-                    <a:bodyPr/>
-                    <a:lstStyle/>
-                    <a:p>
-                      <a:r>
-                        <a:rPr sz="1150" b="0">
-                          <a:solidFill>
-                            <a:srgbClr val="1A2233"/>
-                          </a:solidFill>
-                          <a:latin typeface="Microsoft JhengHei"/>
-                          <a:ea typeface="Microsoft JhengHei"/>
-                          <a:cs typeface="Microsoft JhengHei"/>
-                        </a:rPr>
-                        <a:t>—</a:t>
-                      </a:r>
-                    </a:p>
-                  </a:txBody>
-                  <a:tcPr anchor="ctr" marL="73152" marT="9144" marB="9144">
-                    <a:solidFill>
-                      <a:srgbClr val="EEF2F9"/>
                     </a:solidFill>
                   </a:tcPr>
                 </a:tc>
@@ -5550,7 +5673,7 @@
                 <a:ea typeface="Microsoft JhengHei"/>
                 <a:cs typeface="Microsoft JhengHei"/>
               </a:rPr>
-              <a:t>4 起</a:t>
+              <a:t>5 起</a:t>
             </a:r>
           </a:p>
         </p:txBody>
@@ -5587,7 +5710,7 @@
                 <a:ea typeface="Microsoft JhengHei"/>
                 <a:cs typeface="Microsoft JhengHei"/>
               </a:rPr>
-              <a:t>松上、優盛、麗清、網家</a:t>
+              <a:t>上銀、松上、優盛、麗清、網家</a:t>
             </a:r>
           </a:p>
         </p:txBody>
@@ -6251,7 +6374,7 @@
         </p:nvGraphicFramePr>
         <p:xfrm>
           <a:off x="548640" y="1600200"/>
-          <a:ext cx="10789920" cy="4114800"/>
+          <a:ext cx="10789920" cy="4480560"/>
         </p:xfrm>
         <a:graphic>
           <a:graphicData uri="http://schemas.openxmlformats.org/drawingml/2006/table">
@@ -6266,7 +6389,7 @@
                 <a:gridCol w="3383280"/>
                 <a:gridCol w="2606040"/>
               </a:tblGrid>
-              <a:tr h="457200">
+              <a:tr h="448056">
                 <a:tc>
                   <a:txBody>
                     <a:bodyPr/>
@@ -6388,7 +6511,7 @@
                   </a:tcPr>
                 </a:tc>
               </a:tr>
-              <a:tr h="457200">
+              <a:tr h="448056">
                 <a:tc>
                   <a:txBody>
                     <a:bodyPr/>
@@ -6403,7 +6526,7 @@
                           <a:ea typeface="Microsoft JhengHei"/>
                           <a:cs typeface="Microsoft JhengHei"/>
                         </a:rPr>
-                        <a:t>萬達寵物</a:t>
+                        <a:t>上銀</a:t>
                       </a:r>
                     </a:p>
                   </a:txBody>
@@ -6427,13 +6550,135 @@
                           <a:ea typeface="Microsoft JhengHei"/>
                           <a:cs typeface="Microsoft JhengHei"/>
                         </a:rPr>
+                        <a:t>2049</a:t>
+                      </a:r>
+                    </a:p>
+                  </a:txBody>
+                  <a:tcPr anchor="ctr" marL="73152" marT="9144" marB="9144">
+                    <a:solidFill>
+                      <a:srgbClr val="FFFFFF"/>
+                    </a:solidFill>
+                  </a:tcPr>
+                </a:tc>
+                <a:tc>
+                  <a:txBody>
+                    <a:bodyPr/>
+                    <a:lstStyle/>
+                    <a:p>
+                      <a:r>
+                        <a:rPr sz="1150" b="1">
+                          <a:solidFill>
+                            <a:srgbClr val="E63946"/>
+                          </a:solidFill>
+                          <a:latin typeface="Microsoft JhengHei"/>
+                          <a:ea typeface="Microsoft JhengHei"/>
+                          <a:cs typeface="Microsoft JhengHei"/>
+                        </a:rPr>
+                        <a:t>駭客攻擊</a:t>
+                      </a:r>
+                    </a:p>
+                  </a:txBody>
+                  <a:tcPr anchor="ctr" marL="73152" marT="9144" marB="9144">
+                    <a:solidFill>
+                      <a:srgbClr val="FFFFFF"/>
+                    </a:solidFill>
+                  </a:tcPr>
+                </a:tc>
+                <a:tc>
+                  <a:txBody>
+                    <a:bodyPr/>
+                    <a:lstStyle/>
+                    <a:p>
+                      <a:r>
+                        <a:rPr sz="1150" b="0">
+                          <a:solidFill>
+                            <a:srgbClr val="1A2233"/>
+                          </a:solidFill>
+                          <a:latin typeface="Microsoft JhengHei"/>
+                          <a:ea typeface="Microsoft JhengHei"/>
+                          <a:cs typeface="Microsoft JhengHei"/>
+                        </a:rPr>
+                        <a:t>勤業眾信聯合會計師事務所</a:t>
+                      </a:r>
+                    </a:p>
+                  </a:txBody>
+                  <a:tcPr anchor="ctr" marL="73152" marT="9144" marB="9144">
+                    <a:solidFill>
+                      <a:srgbClr val="FFFFFF"/>
+                    </a:solidFill>
+                  </a:tcPr>
+                </a:tc>
+                <a:tc>
+                  <a:txBody>
+                    <a:bodyPr/>
+                    <a:lstStyle/>
+                    <a:p>
+                      <a:r>
+                        <a:rPr sz="1150" b="0">
+                          <a:solidFill>
+                            <a:srgbClr val="1A2233"/>
+                          </a:solidFill>
+                          <a:latin typeface="Microsoft JhengHei"/>
+                          <a:ea typeface="Microsoft JhengHei"/>
+                          <a:cs typeface="Microsoft JhengHei"/>
+                        </a:rPr>
+                        <a:t>吳麗冬、顏曉芳</a:t>
+                      </a:r>
+                    </a:p>
+                  </a:txBody>
+                  <a:tcPr anchor="ctr" marL="73152" marT="9144" marB="9144">
+                    <a:solidFill>
+                      <a:srgbClr val="FFFFFF"/>
+                    </a:solidFill>
+                  </a:tcPr>
+                </a:tc>
+              </a:tr>
+              <a:tr h="448056">
+                <a:tc>
+                  <a:txBody>
+                    <a:bodyPr/>
+                    <a:lstStyle/>
+                    <a:p>
+                      <a:r>
+                        <a:rPr sz="1150" b="0">
+                          <a:solidFill>
+                            <a:srgbClr val="1A2233"/>
+                          </a:solidFill>
+                          <a:latin typeface="Microsoft JhengHei"/>
+                          <a:ea typeface="Microsoft JhengHei"/>
+                          <a:cs typeface="Microsoft JhengHei"/>
+                        </a:rPr>
+                        <a:t>萬達寵物</a:t>
+                      </a:r>
+                    </a:p>
+                  </a:txBody>
+                  <a:tcPr anchor="ctr" marL="73152" marT="9144" marB="9144">
+                    <a:solidFill>
+                      <a:srgbClr val="EEF2F9"/>
+                    </a:solidFill>
+                  </a:tcPr>
+                </a:tc>
+                <a:tc>
+                  <a:txBody>
+                    <a:bodyPr/>
+                    <a:lstStyle/>
+                    <a:p>
+                      <a:r>
+                        <a:rPr sz="1150" b="0">
+                          <a:solidFill>
+                            <a:srgbClr val="1A2233"/>
+                          </a:solidFill>
+                          <a:latin typeface="Microsoft JhengHei"/>
+                          <a:ea typeface="Microsoft JhengHei"/>
+                          <a:cs typeface="Microsoft JhengHei"/>
+                        </a:rPr>
                         <a:t>6968</a:t>
                       </a:r>
                     </a:p>
                   </a:txBody>
                   <a:tcPr anchor="ctr" marL="73152" marT="9144" marB="9144">
                     <a:solidFill>
-                      <a:srgbClr val="FFFFFF"/>
+                      <a:srgbClr val="EEF2F9"/>
                     </a:solidFill>
                   </a:tcPr>
                 </a:tc>
@@ -6452,6 +6697,128 @@
                           <a:cs typeface="Microsoft JhengHei"/>
                         </a:rPr>
                         <a:t>個資外洩</a:t>
+                      </a:r>
+                    </a:p>
+                  </a:txBody>
+                  <a:tcPr anchor="ctr" marL="73152" marT="9144" marB="9144">
+                    <a:solidFill>
+                      <a:srgbClr val="EEF2F9"/>
+                    </a:solidFill>
+                  </a:tcPr>
+                </a:tc>
+                <a:tc>
+                  <a:txBody>
+                    <a:bodyPr/>
+                    <a:lstStyle/>
+                    <a:p>
+                      <a:r>
+                        <a:rPr sz="1150" b="0">
+                          <a:solidFill>
+                            <a:srgbClr val="1A2233"/>
+                          </a:solidFill>
+                          <a:latin typeface="Microsoft JhengHei"/>
+                          <a:ea typeface="Microsoft JhengHei"/>
+                          <a:cs typeface="Microsoft JhengHei"/>
+                        </a:rPr>
+                        <a:t>資誠聯合會計師事務所</a:t>
+                      </a:r>
+                    </a:p>
+                  </a:txBody>
+                  <a:tcPr anchor="ctr" marL="73152" marT="9144" marB="9144">
+                    <a:solidFill>
+                      <a:srgbClr val="EEF2F9"/>
+                    </a:solidFill>
+                  </a:tcPr>
+                </a:tc>
+                <a:tc>
+                  <a:txBody>
+                    <a:bodyPr/>
+                    <a:lstStyle/>
+                    <a:p>
+                      <a:r>
+                        <a:rPr sz="1150" b="0">
+                          <a:solidFill>
+                            <a:srgbClr val="1A2233"/>
+                          </a:solidFill>
+                          <a:latin typeface="Microsoft JhengHei"/>
+                          <a:ea typeface="Microsoft JhengHei"/>
+                          <a:cs typeface="Microsoft JhengHei"/>
+                        </a:rPr>
+                        <a:t>葉翠苗、黃世鈞</a:t>
+                      </a:r>
+                    </a:p>
+                  </a:txBody>
+                  <a:tcPr anchor="ctr" marL="73152" marT="9144" marB="9144">
+                    <a:solidFill>
+                      <a:srgbClr val="EEF2F9"/>
+                    </a:solidFill>
+                  </a:tcPr>
+                </a:tc>
+              </a:tr>
+              <a:tr h="448056">
+                <a:tc>
+                  <a:txBody>
+                    <a:bodyPr/>
+                    <a:lstStyle/>
+                    <a:p>
+                      <a:r>
+                        <a:rPr sz="1150" b="0">
+                          <a:solidFill>
+                            <a:srgbClr val="1A2233"/>
+                          </a:solidFill>
+                          <a:latin typeface="Microsoft JhengHei"/>
+                          <a:ea typeface="Microsoft JhengHei"/>
+                          <a:cs typeface="Microsoft JhengHei"/>
+                        </a:rPr>
+                        <a:t>淳安</a:t>
+                      </a:r>
+                    </a:p>
+                  </a:txBody>
+                  <a:tcPr anchor="ctr" marL="73152" marT="9144" marB="9144">
+                    <a:solidFill>
+                      <a:srgbClr val="FFFFFF"/>
+                    </a:solidFill>
+                  </a:tcPr>
+                </a:tc>
+                <a:tc>
+                  <a:txBody>
+                    <a:bodyPr/>
+                    <a:lstStyle/>
+                    <a:p>
+                      <a:r>
+                        <a:rPr sz="1150" b="0">
+                          <a:solidFill>
+                            <a:srgbClr val="1A2233"/>
+                          </a:solidFill>
+                          <a:latin typeface="Microsoft JhengHei"/>
+                          <a:ea typeface="Microsoft JhengHei"/>
+                          <a:cs typeface="Microsoft JhengHei"/>
+                        </a:rPr>
+                        <a:t>6283</a:t>
+                      </a:r>
+                    </a:p>
+                  </a:txBody>
+                  <a:tcPr anchor="ctr" marL="73152" marT="9144" marB="9144">
+                    <a:solidFill>
+                      <a:srgbClr val="FFFFFF"/>
+                    </a:solidFill>
+                  </a:tcPr>
+                </a:tc>
+                <a:tc>
+                  <a:txBody>
+                    <a:bodyPr/>
+                    <a:lstStyle/>
+                    <a:p>
+                      <a:r>
+                        <a:rPr sz="1150" b="1">
+                          <a:solidFill>
+                            <a:srgbClr val="5C6679"/>
+                          </a:solidFill>
+                          <a:latin typeface="Microsoft JhengHei"/>
+                          <a:ea typeface="Microsoft JhengHei"/>
+                          <a:cs typeface="Microsoft JhengHei"/>
+                        </a:rPr>
+                        <a:t>其他</a:t>
                       </a:r>
                     </a:p>
                   </a:txBody>
@@ -6499,7 +6866,7 @@
                           <a:ea typeface="Microsoft JhengHei"/>
                           <a:cs typeface="Microsoft JhengHei"/>
                         </a:rPr>
-                        <a:t>葉翠苗、黃世鈞</a:t>
+                        <a:t>林永智、廖福銘</a:t>
                       </a:r>
                     </a:p>
                   </a:txBody>
@@ -6510,7 +6877,7 @@
                   </a:tcPr>
                 </a:tc>
               </a:tr>
-              <a:tr h="457200">
+              <a:tr h="448056">
                 <a:tc>
                   <a:txBody>
                     <a:bodyPr/>
@@ -6632,7 +6999,7 @@
                   </a:tcPr>
                 </a:tc>
               </a:tr>
-              <a:tr h="457200">
+              <a:tr h="448056">
                 <a:tc>
                   <a:txBody>
                     <a:bodyPr/>
@@ -6647,7 +7014,7 @@
                           <a:ea typeface="Microsoft JhengHei"/>
                           <a:cs typeface="Microsoft JhengHei"/>
                         </a:rPr>
-                        <a:t>淳安</a:t>
+                        <a:t>松上</a:t>
                       </a:r>
                     </a:p>
                   </a:txBody>
@@ -6671,13 +7038,379 @@
                           <a:ea typeface="Microsoft JhengHei"/>
                           <a:cs typeface="Microsoft JhengHei"/>
                         </a:rPr>
-                        <a:t>6283</a:t>
+                        <a:t>6156</a:t>
                       </a:r>
                     </a:p>
                   </a:txBody>
                   <a:tcPr anchor="ctr" marL="73152" marT="9144" marB="9144">
                     <a:solidFill>
                       <a:srgbClr val="FFFFFF"/>
+                    </a:solidFill>
+                  </a:tcPr>
+                </a:tc>
+                <a:tc>
+                  <a:txBody>
+                    <a:bodyPr/>
+                    <a:lstStyle/>
+                    <a:p>
+                      <a:r>
+                        <a:rPr sz="1150" b="1">
+                          <a:solidFill>
+                            <a:srgbClr val="E63946"/>
+                          </a:solidFill>
+                          <a:latin typeface="Microsoft JhengHei"/>
+                          <a:ea typeface="Microsoft JhengHei"/>
+                          <a:cs typeface="Microsoft JhengHei"/>
+                        </a:rPr>
+                        <a:t>駭客攻擊</a:t>
+                      </a:r>
+                    </a:p>
+                  </a:txBody>
+                  <a:tcPr anchor="ctr" marL="73152" marT="9144" marB="9144">
+                    <a:solidFill>
+                      <a:srgbClr val="FFFFFF"/>
+                    </a:solidFill>
+                  </a:tcPr>
+                </a:tc>
+                <a:tc>
+                  <a:txBody>
+                    <a:bodyPr/>
+                    <a:lstStyle/>
+                    <a:p>
+                      <a:r>
+                        <a:rPr sz="1150" b="0">
+                          <a:solidFill>
+                            <a:srgbClr val="1A2233"/>
+                          </a:solidFill>
+                          <a:latin typeface="Microsoft JhengHei"/>
+                          <a:ea typeface="Microsoft JhengHei"/>
+                          <a:cs typeface="Microsoft JhengHei"/>
+                        </a:rPr>
+                        <a:t>安永聯合會計師事務所</a:t>
+                      </a:r>
+                    </a:p>
+                  </a:txBody>
+                  <a:tcPr anchor="ctr" marL="73152" marT="9144" marB="9144">
+                    <a:solidFill>
+                      <a:srgbClr val="FFFFFF"/>
+                    </a:solidFill>
+                  </a:tcPr>
+                </a:tc>
+                <a:tc>
+                  <a:txBody>
+                    <a:bodyPr/>
+                    <a:lstStyle/>
+                    <a:p>
+                      <a:r>
+                        <a:rPr sz="1150" b="0">
+                          <a:solidFill>
+                            <a:srgbClr val="1A2233"/>
+                          </a:solidFill>
+                          <a:latin typeface="Microsoft JhengHei"/>
+                          <a:ea typeface="Microsoft JhengHei"/>
+                          <a:cs typeface="Microsoft JhengHei"/>
+                        </a:rPr>
+                        <a:t>羅筱靖、陳國帥</a:t>
+                      </a:r>
+                    </a:p>
+                  </a:txBody>
+                  <a:tcPr anchor="ctr" marL="73152" marT="9144" marB="9144">
+                    <a:solidFill>
+                      <a:srgbClr val="FFFFFF"/>
+                    </a:solidFill>
+                  </a:tcPr>
+                </a:tc>
+              </a:tr>
+              <a:tr h="448056">
+                <a:tc>
+                  <a:txBody>
+                    <a:bodyPr/>
+                    <a:lstStyle/>
+                    <a:p>
+                      <a:r>
+                        <a:rPr sz="1150" b="0">
+                          <a:solidFill>
+                            <a:srgbClr val="1A2233"/>
+                          </a:solidFill>
+                          <a:latin typeface="Microsoft JhengHei"/>
+                          <a:ea typeface="Microsoft JhengHei"/>
+                          <a:cs typeface="Microsoft JhengHei"/>
+                        </a:rPr>
+                        <a:t>優盛</a:t>
+                      </a:r>
+                    </a:p>
+                  </a:txBody>
+                  <a:tcPr anchor="ctr" marL="73152" marT="9144" marB="9144">
+                    <a:solidFill>
+                      <a:srgbClr val="EEF2F9"/>
+                    </a:solidFill>
+                  </a:tcPr>
+                </a:tc>
+                <a:tc>
+                  <a:txBody>
+                    <a:bodyPr/>
+                    <a:lstStyle/>
+                    <a:p>
+                      <a:r>
+                        <a:rPr sz="1150" b="0">
+                          <a:solidFill>
+                            <a:srgbClr val="1A2233"/>
+                          </a:solidFill>
+                          <a:latin typeface="Microsoft JhengHei"/>
+                          <a:ea typeface="Microsoft JhengHei"/>
+                          <a:cs typeface="Microsoft JhengHei"/>
+                        </a:rPr>
+                        <a:t>4121</a:t>
+                      </a:r>
+                    </a:p>
+                  </a:txBody>
+                  <a:tcPr anchor="ctr" marL="73152" marT="9144" marB="9144">
+                    <a:solidFill>
+                      <a:srgbClr val="EEF2F9"/>
+                    </a:solidFill>
+                  </a:tcPr>
+                </a:tc>
+                <a:tc>
+                  <a:txBody>
+                    <a:bodyPr/>
+                    <a:lstStyle/>
+                    <a:p>
+                      <a:r>
+                        <a:rPr sz="1150" b="1">
+                          <a:solidFill>
+                            <a:srgbClr val="E63946"/>
+                          </a:solidFill>
+                          <a:latin typeface="Microsoft JhengHei"/>
+                          <a:ea typeface="Microsoft JhengHei"/>
+                          <a:cs typeface="Microsoft JhengHei"/>
+                        </a:rPr>
+                        <a:t>駭客攻擊</a:t>
+                      </a:r>
+                    </a:p>
+                  </a:txBody>
+                  <a:tcPr anchor="ctr" marL="73152" marT="9144" marB="9144">
+                    <a:solidFill>
+                      <a:srgbClr val="EEF2F9"/>
+                    </a:solidFill>
+                  </a:tcPr>
+                </a:tc>
+                <a:tc>
+                  <a:txBody>
+                    <a:bodyPr/>
+                    <a:lstStyle/>
+                    <a:p>
+                      <a:r>
+                        <a:rPr sz="1150" b="0">
+                          <a:solidFill>
+                            <a:srgbClr val="1A2233"/>
+                          </a:solidFill>
+                          <a:latin typeface="Microsoft JhengHei"/>
+                          <a:ea typeface="Microsoft JhengHei"/>
+                          <a:cs typeface="Microsoft JhengHei"/>
+                        </a:rPr>
+                        <a:t>安侯建業聯合會計師事務所</a:t>
+                      </a:r>
+                    </a:p>
+                  </a:txBody>
+                  <a:tcPr anchor="ctr" marL="73152" marT="9144" marB="9144">
+                    <a:solidFill>
+                      <a:srgbClr val="EEF2F9"/>
+                    </a:solidFill>
+                  </a:tcPr>
+                </a:tc>
+                <a:tc>
+                  <a:txBody>
+                    <a:bodyPr/>
+                    <a:lstStyle/>
+                    <a:p>
+                      <a:r>
+                        <a:rPr sz="1150" b="0">
+                          <a:solidFill>
+                            <a:srgbClr val="1A2233"/>
+                          </a:solidFill>
+                          <a:latin typeface="Microsoft JhengHei"/>
+                          <a:ea typeface="Microsoft JhengHei"/>
+                          <a:cs typeface="Microsoft JhengHei"/>
+                        </a:rPr>
+                        <a:t>鄒依芸、毛聖崴</a:t>
+                      </a:r>
+                    </a:p>
+                  </a:txBody>
+                  <a:tcPr anchor="ctr" marL="73152" marT="9144" marB="9144">
+                    <a:solidFill>
+                      <a:srgbClr val="EEF2F9"/>
+                    </a:solidFill>
+                  </a:tcPr>
+                </a:tc>
+              </a:tr>
+              <a:tr h="448056">
+                <a:tc>
+                  <a:txBody>
+                    <a:bodyPr/>
+                    <a:lstStyle/>
+                    <a:p>
+                      <a:r>
+                        <a:rPr sz="1150" b="0">
+                          <a:solidFill>
+                            <a:srgbClr val="1A2233"/>
+                          </a:solidFill>
+                          <a:latin typeface="Microsoft JhengHei"/>
+                          <a:ea typeface="Microsoft JhengHei"/>
+                          <a:cs typeface="Microsoft JhengHei"/>
+                        </a:rPr>
+                        <a:t>麗清</a:t>
+                      </a:r>
+                    </a:p>
+                  </a:txBody>
+                  <a:tcPr anchor="ctr" marL="73152" marT="9144" marB="9144">
+                    <a:solidFill>
+                      <a:srgbClr val="FFFFFF"/>
+                    </a:solidFill>
+                  </a:tcPr>
+                </a:tc>
+                <a:tc>
+                  <a:txBody>
+                    <a:bodyPr/>
+                    <a:lstStyle/>
+                    <a:p>
+                      <a:r>
+                        <a:rPr sz="1150" b="0">
+                          <a:solidFill>
+                            <a:srgbClr val="1A2233"/>
+                          </a:solidFill>
+                          <a:latin typeface="Microsoft JhengHei"/>
+                          <a:ea typeface="Microsoft JhengHei"/>
+                          <a:cs typeface="Microsoft JhengHei"/>
+                        </a:rPr>
+                        <a:t>3346</a:t>
+                      </a:r>
+                    </a:p>
+                  </a:txBody>
+                  <a:tcPr anchor="ctr" marL="73152" marT="9144" marB="9144">
+                    <a:solidFill>
+                      <a:srgbClr val="FFFFFF"/>
+                    </a:solidFill>
+                  </a:tcPr>
+                </a:tc>
+                <a:tc>
+                  <a:txBody>
+                    <a:bodyPr/>
+                    <a:lstStyle/>
+                    <a:p>
+                      <a:r>
+                        <a:rPr sz="1150" b="1">
+                          <a:solidFill>
+                            <a:srgbClr val="E63946"/>
+                          </a:solidFill>
+                          <a:latin typeface="Microsoft JhengHei"/>
+                          <a:ea typeface="Microsoft JhengHei"/>
+                          <a:cs typeface="Microsoft JhengHei"/>
+                        </a:rPr>
+                        <a:t>駭客攻擊</a:t>
+                      </a:r>
+                    </a:p>
+                  </a:txBody>
+                  <a:tcPr anchor="ctr" marL="73152" marT="9144" marB="9144">
+                    <a:solidFill>
+                      <a:srgbClr val="FFFFFF"/>
+                    </a:solidFill>
+                  </a:tcPr>
+                </a:tc>
+                <a:tc>
+                  <a:txBody>
+                    <a:bodyPr/>
+                    <a:lstStyle/>
+                    <a:p>
+                      <a:r>
+                        <a:rPr sz="1150" b="0">
+                          <a:solidFill>
+                            <a:srgbClr val="1A2233"/>
+                          </a:solidFill>
+                          <a:latin typeface="Microsoft JhengHei"/>
+                          <a:ea typeface="Microsoft JhengHei"/>
+                          <a:cs typeface="Microsoft JhengHei"/>
+                        </a:rPr>
+                        <a:t>勤業眾信聯合會計師事務所</a:t>
+                      </a:r>
+                    </a:p>
+                  </a:txBody>
+                  <a:tcPr anchor="ctr" marL="73152" marT="9144" marB="9144">
+                    <a:solidFill>
+                      <a:srgbClr val="FFFFFF"/>
+                    </a:solidFill>
+                  </a:tcPr>
+                </a:tc>
+                <a:tc>
+                  <a:txBody>
+                    <a:bodyPr/>
+                    <a:lstStyle/>
+                    <a:p>
+                      <a:r>
+                        <a:rPr sz="1150" b="0">
+                          <a:solidFill>
+                            <a:srgbClr val="1A2233"/>
+                          </a:solidFill>
+                          <a:latin typeface="Microsoft JhengHei"/>
+                          <a:ea typeface="Microsoft JhengHei"/>
+                          <a:cs typeface="Microsoft JhengHei"/>
+                        </a:rPr>
+                        <a:t>陳致源、黃堯麟</a:t>
+                      </a:r>
+                    </a:p>
+                  </a:txBody>
+                  <a:tcPr anchor="ctr" marL="73152" marT="9144" marB="9144">
+                    <a:solidFill>
+                      <a:srgbClr val="FFFFFF"/>
+                    </a:solidFill>
+                  </a:tcPr>
+                </a:tc>
+              </a:tr>
+              <a:tr h="448056">
+                <a:tc>
+                  <a:txBody>
+                    <a:bodyPr/>
+                    <a:lstStyle/>
+                    <a:p>
+                      <a:r>
+                        <a:rPr sz="1150" b="0">
+                          <a:solidFill>
+                            <a:srgbClr val="1A2233"/>
+                          </a:solidFill>
+                          <a:latin typeface="Microsoft JhengHei"/>
+                          <a:ea typeface="Microsoft JhengHei"/>
+                          <a:cs typeface="Microsoft JhengHei"/>
+                        </a:rPr>
+                        <a:t>GOGOLOOK</a:t>
+                      </a:r>
+                    </a:p>
+                  </a:txBody>
+                  <a:tcPr anchor="ctr" marL="73152" marT="9144" marB="9144">
+                    <a:solidFill>
+                      <a:srgbClr val="EEF2F9"/>
+                    </a:solidFill>
+                  </a:tcPr>
+                </a:tc>
+                <a:tc>
+                  <a:txBody>
+                    <a:bodyPr/>
+                    <a:lstStyle/>
+                    <a:p>
+                      <a:r>
+                        <a:rPr sz="1150" b="0">
+                          <a:solidFill>
+                            <a:srgbClr val="1A2233"/>
+                          </a:solidFill>
+                          <a:latin typeface="Microsoft JhengHei"/>
+                          <a:ea typeface="Microsoft JhengHei"/>
+                          <a:cs typeface="Microsoft JhengHei"/>
+                        </a:rPr>
+                        <a:t>6902</a:t>
+                      </a:r>
+                    </a:p>
+                  </a:txBody>
+                  <a:tcPr anchor="ctr" marL="73152" marT="9144" marB="9144">
+                    <a:solidFill>
+                      <a:srgbClr val="EEF2F9"/>
                     </a:solidFill>
                   </a:tcPr>
                 </a:tc>
@@ -6696,6 +7429,128 @@
                           <a:cs typeface="Microsoft JhengHei"/>
                         </a:rPr>
                         <a:t>其他</a:t>
+                      </a:r>
+                    </a:p>
+                  </a:txBody>
+                  <a:tcPr anchor="ctr" marL="73152" marT="9144" marB="9144">
+                    <a:solidFill>
+                      <a:srgbClr val="EEF2F9"/>
+                    </a:solidFill>
+                  </a:tcPr>
+                </a:tc>
+                <a:tc>
+                  <a:txBody>
+                    <a:bodyPr/>
+                    <a:lstStyle/>
+                    <a:p>
+                      <a:r>
+                        <a:rPr sz="1150" b="0">
+                          <a:solidFill>
+                            <a:srgbClr val="1A2233"/>
+                          </a:solidFill>
+                          <a:latin typeface="Microsoft JhengHei"/>
+                          <a:ea typeface="Microsoft JhengHei"/>
+                          <a:cs typeface="Microsoft JhengHei"/>
+                        </a:rPr>
+                        <a:t>資誠聯合會計師事務所</a:t>
+                      </a:r>
+                    </a:p>
+                  </a:txBody>
+                  <a:tcPr anchor="ctr" marL="73152" marT="9144" marB="9144">
+                    <a:solidFill>
+                      <a:srgbClr val="EEF2F9"/>
+                    </a:solidFill>
+                  </a:tcPr>
+                </a:tc>
+                <a:tc>
+                  <a:txBody>
+                    <a:bodyPr/>
+                    <a:lstStyle/>
+                    <a:p>
+                      <a:r>
+                        <a:rPr sz="1150" b="0">
+                          <a:solidFill>
+                            <a:srgbClr val="1A2233"/>
+                          </a:solidFill>
+                          <a:latin typeface="Microsoft JhengHei"/>
+                          <a:ea typeface="Microsoft JhengHei"/>
+                          <a:cs typeface="Microsoft JhengHei"/>
+                        </a:rPr>
+                        <a:t>吳尚燉、王昱欣</a:t>
+                      </a:r>
+                    </a:p>
+                  </a:txBody>
+                  <a:tcPr anchor="ctr" marL="73152" marT="9144" marB="9144">
+                    <a:solidFill>
+                      <a:srgbClr val="EEF2F9"/>
+                    </a:solidFill>
+                  </a:tcPr>
+                </a:tc>
+              </a:tr>
+              <a:tr h="448056">
+                <a:tc>
+                  <a:txBody>
+                    <a:bodyPr/>
+                    <a:lstStyle/>
+                    <a:p>
+                      <a:r>
+                        <a:rPr sz="1150" b="0">
+                          <a:solidFill>
+                            <a:srgbClr val="1A2233"/>
+                          </a:solidFill>
+                          <a:latin typeface="Microsoft JhengHei"/>
+                          <a:ea typeface="Microsoft JhengHei"/>
+                          <a:cs typeface="Microsoft JhengHei"/>
+                        </a:rPr>
+                        <a:t>網家</a:t>
+                      </a:r>
+                    </a:p>
+                  </a:txBody>
+                  <a:tcPr anchor="ctr" marL="73152" marT="9144" marB="9144">
+                    <a:solidFill>
+                      <a:srgbClr val="FFFFFF"/>
+                    </a:solidFill>
+                  </a:tcPr>
+                </a:tc>
+                <a:tc>
+                  <a:txBody>
+                    <a:bodyPr/>
+                    <a:lstStyle/>
+                    <a:p>
+                      <a:r>
+                        <a:rPr sz="1150" b="0">
+                          <a:solidFill>
+                            <a:srgbClr val="1A2233"/>
+                          </a:solidFill>
+                          <a:latin typeface="Microsoft JhengHei"/>
+                          <a:ea typeface="Microsoft JhengHei"/>
+                          <a:cs typeface="Microsoft JhengHei"/>
+                        </a:rPr>
+                        <a:t>8044</a:t>
+                      </a:r>
+                    </a:p>
+                  </a:txBody>
+                  <a:tcPr anchor="ctr" marL="73152" marT="9144" marB="9144">
+                    <a:solidFill>
+                      <a:srgbClr val="FFFFFF"/>
+                    </a:solidFill>
+                  </a:tcPr>
+                </a:tc>
+                <a:tc>
+                  <a:txBody>
+                    <a:bodyPr/>
+                    <a:lstStyle/>
+                    <a:p>
+                      <a:r>
+                        <a:rPr sz="1150" b="1">
+                          <a:solidFill>
+                            <a:srgbClr val="E63946"/>
+                          </a:solidFill>
+                          <a:latin typeface="Microsoft JhengHei"/>
+                          <a:ea typeface="Microsoft JhengHei"/>
+                          <a:cs typeface="Microsoft JhengHei"/>
+                        </a:rPr>
+                        <a:t>駭客攻擊</a:t>
                       </a:r>
                     </a:p>
                   </a:txBody>
@@ -6743,623 +7598,13 @@
                           <a:ea typeface="Microsoft JhengHei"/>
                           <a:cs typeface="Microsoft JhengHei"/>
                         </a:rPr>
-                        <a:t>林永智、廖福銘</a:t>
+                        <a:t>廖容翎、梁嬋女</a:t>
                       </a:r>
                     </a:p>
                   </a:txBody>
                   <a:tcPr anchor="ctr" marL="73152" marT="9144" marB="9144">
                     <a:solidFill>
                       <a:srgbClr val="FFFFFF"/>
-                    </a:solidFill>
-                  </a:tcPr>
-                </a:tc>
-              </a:tr>
-              <a:tr h="457200">
-                <a:tc>
-                  <a:txBody>
-                    <a:bodyPr/>
-                    <a:lstStyle/>
-                    <a:p>
-                      <a:r>
-                        <a:rPr sz="1150" b="0">
-                          <a:solidFill>
-                            <a:srgbClr val="1A2233"/>
-                          </a:solidFill>
-                          <a:latin typeface="Microsoft JhengHei"/>
-                          <a:ea typeface="Microsoft JhengHei"/>
-                          <a:cs typeface="Microsoft JhengHei"/>
-                        </a:rPr>
-                        <a:t>松上</a:t>
-                      </a:r>
-                    </a:p>
-                  </a:txBody>
-                  <a:tcPr anchor="ctr" marL="73152" marT="9144" marB="9144">
-                    <a:solidFill>
-                      <a:srgbClr val="EEF2F9"/>
-                    </a:solidFill>
-                  </a:tcPr>
-                </a:tc>
-                <a:tc>
-                  <a:txBody>
-                    <a:bodyPr/>
-                    <a:lstStyle/>
-                    <a:p>
-                      <a:r>
-                        <a:rPr sz="1150" b="0">
-                          <a:solidFill>
-                            <a:srgbClr val="1A2233"/>
-                          </a:solidFill>
-                          <a:latin typeface="Microsoft JhengHei"/>
-                          <a:ea typeface="Microsoft JhengHei"/>
-                          <a:cs typeface="Microsoft JhengHei"/>
-                        </a:rPr>
-                        <a:t>6156</a:t>
-                      </a:r>
-                    </a:p>
-                  </a:txBody>
-                  <a:tcPr anchor="ctr" marL="73152" marT="9144" marB="9144">
-                    <a:solidFill>
-                      <a:srgbClr val="EEF2F9"/>
-                    </a:solidFill>
-                  </a:tcPr>
-                </a:tc>
-                <a:tc>
-                  <a:txBody>
-                    <a:bodyPr/>
-                    <a:lstStyle/>
-                    <a:p>
-                      <a:r>
-                        <a:rPr sz="1150" b="1">
-                          <a:solidFill>
-                            <a:srgbClr val="E63946"/>
-                          </a:solidFill>
-                          <a:latin typeface="Microsoft JhengHei"/>
-                          <a:ea typeface="Microsoft JhengHei"/>
-                          <a:cs typeface="Microsoft JhengHei"/>
-                        </a:rPr>
-                        <a:t>駭客攻擊</a:t>
-                      </a:r>
-                    </a:p>
-                  </a:txBody>
-                  <a:tcPr anchor="ctr" marL="73152" marT="9144" marB="9144">
-                    <a:solidFill>
-                      <a:srgbClr val="EEF2F9"/>
-                    </a:solidFill>
-                  </a:tcPr>
-                </a:tc>
-                <a:tc>
-                  <a:txBody>
-                    <a:bodyPr/>
-                    <a:lstStyle/>
-                    <a:p>
-                      <a:r>
-                        <a:rPr sz="1150" b="0">
-                          <a:solidFill>
-                            <a:srgbClr val="1A2233"/>
-                          </a:solidFill>
-                          <a:latin typeface="Microsoft JhengHei"/>
-                          <a:ea typeface="Microsoft JhengHei"/>
-                          <a:cs typeface="Microsoft JhengHei"/>
-                        </a:rPr>
-                        <a:t>安永聯合會計師事務所</a:t>
-                      </a:r>
-                    </a:p>
-                  </a:txBody>
-                  <a:tcPr anchor="ctr" marL="73152" marT="9144" marB="9144">
-                    <a:solidFill>
-                      <a:srgbClr val="EEF2F9"/>
-                    </a:solidFill>
-                  </a:tcPr>
-                </a:tc>
-                <a:tc>
-                  <a:txBody>
-                    <a:bodyPr/>
-                    <a:lstStyle/>
-                    <a:p>
-                      <a:r>
-                        <a:rPr sz="1150" b="0">
-                          <a:solidFill>
-                            <a:srgbClr val="1A2233"/>
-                          </a:solidFill>
-                          <a:latin typeface="Microsoft JhengHei"/>
-                          <a:ea typeface="Microsoft JhengHei"/>
-                          <a:cs typeface="Microsoft JhengHei"/>
-                        </a:rPr>
-                        <a:t>羅筱靖、陳國帥</a:t>
-                      </a:r>
-                    </a:p>
-                  </a:txBody>
-                  <a:tcPr anchor="ctr" marL="73152" marT="9144" marB="9144">
-                    <a:solidFill>
-                      <a:srgbClr val="EEF2F9"/>
-                    </a:solidFill>
-                  </a:tcPr>
-                </a:tc>
-              </a:tr>
-              <a:tr h="457200">
-                <a:tc>
-                  <a:txBody>
-                    <a:bodyPr/>
-                    <a:lstStyle/>
-                    <a:p>
-                      <a:r>
-                        <a:rPr sz="1150" b="0">
-                          <a:solidFill>
-                            <a:srgbClr val="1A2233"/>
-                          </a:solidFill>
-                          <a:latin typeface="Microsoft JhengHei"/>
-                          <a:ea typeface="Microsoft JhengHei"/>
-                          <a:cs typeface="Microsoft JhengHei"/>
-                        </a:rPr>
-                        <a:t>優盛</a:t>
-                      </a:r>
-                    </a:p>
-                  </a:txBody>
-                  <a:tcPr anchor="ctr" marL="73152" marT="9144" marB="9144">
-                    <a:solidFill>
-                      <a:srgbClr val="FFFFFF"/>
-                    </a:solidFill>
-                  </a:tcPr>
-                </a:tc>
-                <a:tc>
-                  <a:txBody>
-                    <a:bodyPr/>
-                    <a:lstStyle/>
-                    <a:p>
-                      <a:r>
-                        <a:rPr sz="1150" b="0">
-                          <a:solidFill>
-                            <a:srgbClr val="1A2233"/>
-                          </a:solidFill>
-                          <a:latin typeface="Microsoft JhengHei"/>
-                          <a:ea typeface="Microsoft JhengHei"/>
-                          <a:cs typeface="Microsoft JhengHei"/>
-                        </a:rPr>
-                        <a:t>4121</a:t>
-                      </a:r>
-                    </a:p>
-                  </a:txBody>
-                  <a:tcPr anchor="ctr" marL="73152" marT="9144" marB="9144">
-                    <a:solidFill>
-                      <a:srgbClr val="FFFFFF"/>
-                    </a:solidFill>
-                  </a:tcPr>
-                </a:tc>
-                <a:tc>
-                  <a:txBody>
-                    <a:bodyPr/>
-                    <a:lstStyle/>
-                    <a:p>
-                      <a:r>
-                        <a:rPr sz="1150" b="1">
-                          <a:solidFill>
-                            <a:srgbClr val="E63946"/>
-                          </a:solidFill>
-                          <a:latin typeface="Microsoft JhengHei"/>
-                          <a:ea typeface="Microsoft JhengHei"/>
-                          <a:cs typeface="Microsoft JhengHei"/>
-                        </a:rPr>
-                        <a:t>駭客攻擊</a:t>
-                      </a:r>
-                    </a:p>
-                  </a:txBody>
-                  <a:tcPr anchor="ctr" marL="73152" marT="9144" marB="9144">
-                    <a:solidFill>
-                      <a:srgbClr val="FFFFFF"/>
-                    </a:solidFill>
-                  </a:tcPr>
-                </a:tc>
-                <a:tc>
-                  <a:txBody>
-                    <a:bodyPr/>
-                    <a:lstStyle/>
-                    <a:p>
-                      <a:r>
-                        <a:rPr sz="1150" b="0">
-                          <a:solidFill>
-                            <a:srgbClr val="1A2233"/>
-                          </a:solidFill>
-                          <a:latin typeface="Microsoft JhengHei"/>
-                          <a:ea typeface="Microsoft JhengHei"/>
-                          <a:cs typeface="Microsoft JhengHei"/>
-                        </a:rPr>
-                        <a:t>安侯建業聯合會計師事務所</a:t>
-                      </a:r>
-                    </a:p>
-                  </a:txBody>
-                  <a:tcPr anchor="ctr" marL="73152" marT="9144" marB="9144">
-                    <a:solidFill>
-                      <a:srgbClr val="FFFFFF"/>
-                    </a:solidFill>
-                  </a:tcPr>
-                </a:tc>
-                <a:tc>
-                  <a:txBody>
-                    <a:bodyPr/>
-                    <a:lstStyle/>
-                    <a:p>
-                      <a:r>
-                        <a:rPr sz="1150" b="0">
-                          <a:solidFill>
-                            <a:srgbClr val="1A2233"/>
-                          </a:solidFill>
-                          <a:latin typeface="Microsoft JhengHei"/>
-                          <a:ea typeface="Microsoft JhengHei"/>
-                          <a:cs typeface="Microsoft JhengHei"/>
-                        </a:rPr>
-                        <a:t>鄒依芸、毛聖崴</a:t>
-                      </a:r>
-                    </a:p>
-                  </a:txBody>
-                  <a:tcPr anchor="ctr" marL="73152" marT="9144" marB="9144">
-                    <a:solidFill>
-                      <a:srgbClr val="FFFFFF"/>
-                    </a:solidFill>
-                  </a:tcPr>
-                </a:tc>
-              </a:tr>
-              <a:tr h="457200">
-                <a:tc>
-                  <a:txBody>
-                    <a:bodyPr/>
-                    <a:lstStyle/>
-                    <a:p>
-                      <a:r>
-                        <a:rPr sz="1150" b="0">
-                          <a:solidFill>
-                            <a:srgbClr val="1A2233"/>
-                          </a:solidFill>
-                          <a:latin typeface="Microsoft JhengHei"/>
-                          <a:ea typeface="Microsoft JhengHei"/>
-                          <a:cs typeface="Microsoft JhengHei"/>
-                        </a:rPr>
-                        <a:t>麗清</a:t>
-                      </a:r>
-                    </a:p>
-                  </a:txBody>
-                  <a:tcPr anchor="ctr" marL="73152" marT="9144" marB="9144">
-                    <a:solidFill>
-                      <a:srgbClr val="EEF2F9"/>
-                    </a:solidFill>
-                  </a:tcPr>
-                </a:tc>
-                <a:tc>
-                  <a:txBody>
-                    <a:bodyPr/>
-                    <a:lstStyle/>
-                    <a:p>
-                      <a:r>
-                        <a:rPr sz="1150" b="0">
-                          <a:solidFill>
-                            <a:srgbClr val="1A2233"/>
-                          </a:solidFill>
-                          <a:latin typeface="Microsoft JhengHei"/>
-                          <a:ea typeface="Microsoft JhengHei"/>
-                          <a:cs typeface="Microsoft JhengHei"/>
-                        </a:rPr>
-                        <a:t>3346</a:t>
-                      </a:r>
-                    </a:p>
-                  </a:txBody>
-                  <a:tcPr anchor="ctr" marL="73152" marT="9144" marB="9144">
-                    <a:solidFill>
-                      <a:srgbClr val="EEF2F9"/>
-                    </a:solidFill>
-                  </a:tcPr>
-                </a:tc>
-                <a:tc>
-                  <a:txBody>
-                    <a:bodyPr/>
-                    <a:lstStyle/>
-                    <a:p>
-                      <a:r>
-                        <a:rPr sz="1150" b="1">
-                          <a:solidFill>
-                            <a:srgbClr val="E63946"/>
-                          </a:solidFill>
-                          <a:latin typeface="Microsoft JhengHei"/>
-                          <a:ea typeface="Microsoft JhengHei"/>
-                          <a:cs typeface="Microsoft JhengHei"/>
-                        </a:rPr>
-                        <a:t>駭客攻擊</a:t>
-                      </a:r>
-                    </a:p>
-                  </a:txBody>
-                  <a:tcPr anchor="ctr" marL="73152" marT="9144" marB="9144">
-                    <a:solidFill>
-                      <a:srgbClr val="EEF2F9"/>
-                    </a:solidFill>
-                  </a:tcPr>
-                </a:tc>
-                <a:tc>
-                  <a:txBody>
-                    <a:bodyPr/>
-                    <a:lstStyle/>
-                    <a:p>
-                      <a:r>
-                        <a:rPr sz="1150" b="0">
-                          <a:solidFill>
-                            <a:srgbClr val="1A2233"/>
-                          </a:solidFill>
-                          <a:latin typeface="Microsoft JhengHei"/>
-                          <a:ea typeface="Microsoft JhengHei"/>
-                          <a:cs typeface="Microsoft JhengHei"/>
-                        </a:rPr>
-                        <a:t>勤業眾信聯合會計師事務所</a:t>
-                      </a:r>
-                    </a:p>
-                  </a:txBody>
-                  <a:tcPr anchor="ctr" marL="73152" marT="9144" marB="9144">
-                    <a:solidFill>
-                      <a:srgbClr val="EEF2F9"/>
-                    </a:solidFill>
-                  </a:tcPr>
-                </a:tc>
-                <a:tc>
-                  <a:txBody>
-                    <a:bodyPr/>
-                    <a:lstStyle/>
-                    <a:p>
-                      <a:r>
-                        <a:rPr sz="1150" b="0">
-                          <a:solidFill>
-                            <a:srgbClr val="1A2233"/>
-                          </a:solidFill>
-                          <a:latin typeface="Microsoft JhengHei"/>
-                          <a:ea typeface="Microsoft JhengHei"/>
-                          <a:cs typeface="Microsoft JhengHei"/>
-                        </a:rPr>
-                        <a:t>陳致源、黃堯麟</a:t>
-                      </a:r>
-                    </a:p>
-                  </a:txBody>
-                  <a:tcPr anchor="ctr" marL="73152" marT="9144" marB="9144">
-                    <a:solidFill>
-                      <a:srgbClr val="EEF2F9"/>
-                    </a:solidFill>
-                  </a:tcPr>
-                </a:tc>
-              </a:tr>
-              <a:tr h="457200">
-                <a:tc>
-                  <a:txBody>
-                    <a:bodyPr/>
-                    <a:lstStyle/>
-                    <a:p>
-                      <a:r>
-                        <a:rPr sz="1150" b="0">
-                          <a:solidFill>
-                            <a:srgbClr val="1A2233"/>
-                          </a:solidFill>
-                          <a:latin typeface="Microsoft JhengHei"/>
-                          <a:ea typeface="Microsoft JhengHei"/>
-                          <a:cs typeface="Microsoft JhengHei"/>
-                        </a:rPr>
-                        <a:t>GOGOLOOK</a:t>
-                      </a:r>
-                    </a:p>
-                  </a:txBody>
-                  <a:tcPr anchor="ctr" marL="73152" marT="9144" marB="9144">
-                    <a:solidFill>
-                      <a:srgbClr val="FFFFFF"/>
-                    </a:solidFill>
-                  </a:tcPr>
-                </a:tc>
-                <a:tc>
-                  <a:txBody>
-                    <a:bodyPr/>
-                    <a:lstStyle/>
-                    <a:p>
-                      <a:r>
-                        <a:rPr sz="1150" b="0">
-                          <a:solidFill>
-                            <a:srgbClr val="1A2233"/>
-                          </a:solidFill>
-                          <a:latin typeface="Microsoft JhengHei"/>
-                          <a:ea typeface="Microsoft JhengHei"/>
-                          <a:cs typeface="Microsoft JhengHei"/>
-                        </a:rPr>
-                        <a:t>6902</a:t>
-                      </a:r>
-                    </a:p>
-                  </a:txBody>
-                  <a:tcPr anchor="ctr" marL="73152" marT="9144" marB="9144">
-                    <a:solidFill>
-                      <a:srgbClr val="FFFFFF"/>
-                    </a:solidFill>
-                  </a:tcPr>
-                </a:tc>
-                <a:tc>
-                  <a:txBody>
-                    <a:bodyPr/>
-                    <a:lstStyle/>
-                    <a:p>
-                      <a:r>
-                        <a:rPr sz="1150" b="1">
-                          <a:solidFill>
-                            <a:srgbClr val="5C6679"/>
-                          </a:solidFill>
-                          <a:latin typeface="Microsoft JhengHei"/>
-                          <a:ea typeface="Microsoft JhengHei"/>
-                          <a:cs typeface="Microsoft JhengHei"/>
-                        </a:rPr>
-                        <a:t>其他</a:t>
-                      </a:r>
-                    </a:p>
-                  </a:txBody>
-                  <a:tcPr anchor="ctr" marL="73152" marT="9144" marB="9144">
-                    <a:solidFill>
-                      <a:srgbClr val="FFFFFF"/>
-                    </a:solidFill>
-                  </a:tcPr>
-                </a:tc>
-                <a:tc>
-                  <a:txBody>
-                    <a:bodyPr/>
-                    <a:lstStyle/>
-                    <a:p>
-                      <a:r>
-                        <a:rPr sz="1150" b="0">
-                          <a:solidFill>
-                            <a:srgbClr val="1A2233"/>
-                          </a:solidFill>
-                          <a:latin typeface="Microsoft JhengHei"/>
-                          <a:ea typeface="Microsoft JhengHei"/>
-                          <a:cs typeface="Microsoft JhengHei"/>
-                        </a:rPr>
-                        <a:t>資誠聯合會計師事務所</a:t>
-                      </a:r>
-                    </a:p>
-                  </a:txBody>
-                  <a:tcPr anchor="ctr" marL="73152" marT="9144" marB="9144">
-                    <a:solidFill>
-                      <a:srgbClr val="FFFFFF"/>
-                    </a:solidFill>
-                  </a:tcPr>
-                </a:tc>
-                <a:tc>
-                  <a:txBody>
-                    <a:bodyPr/>
-                    <a:lstStyle/>
-                    <a:p>
-                      <a:r>
-                        <a:rPr sz="1150" b="0">
-                          <a:solidFill>
-                            <a:srgbClr val="1A2233"/>
-                          </a:solidFill>
-                          <a:latin typeface="Microsoft JhengHei"/>
-                          <a:ea typeface="Microsoft JhengHei"/>
-                          <a:cs typeface="Microsoft JhengHei"/>
-                        </a:rPr>
-                        <a:t>吳尚燉、王昱欣</a:t>
-                      </a:r>
-                    </a:p>
-                  </a:txBody>
-                  <a:tcPr anchor="ctr" marL="73152" marT="9144" marB="9144">
-                    <a:solidFill>
-                      <a:srgbClr val="FFFFFF"/>
-                    </a:solidFill>
-                  </a:tcPr>
-                </a:tc>
-              </a:tr>
-              <a:tr h="457200">
-                <a:tc>
-                  <a:txBody>
-                    <a:bodyPr/>
-                    <a:lstStyle/>
-                    <a:p>
-                      <a:r>
-                        <a:rPr sz="1150" b="0">
-                          <a:solidFill>
-                            <a:srgbClr val="1A2233"/>
-                          </a:solidFill>
-                          <a:latin typeface="Microsoft JhengHei"/>
-                          <a:ea typeface="Microsoft JhengHei"/>
-                          <a:cs typeface="Microsoft JhengHei"/>
-                        </a:rPr>
-                        <a:t>網家</a:t>
-                      </a:r>
-                    </a:p>
-                  </a:txBody>
-                  <a:tcPr anchor="ctr" marL="73152" marT="9144" marB="9144">
-                    <a:solidFill>
-                      <a:srgbClr val="EEF2F9"/>
-                    </a:solidFill>
-                  </a:tcPr>
-                </a:tc>
-                <a:tc>
-                  <a:txBody>
-                    <a:bodyPr/>
-                    <a:lstStyle/>
-                    <a:p>
-                      <a:r>
-                        <a:rPr sz="1150" b="0">
-                          <a:solidFill>
-                            <a:srgbClr val="1A2233"/>
-                          </a:solidFill>
-                          <a:latin typeface="Microsoft JhengHei"/>
-                          <a:ea typeface="Microsoft JhengHei"/>
-                          <a:cs typeface="Microsoft JhengHei"/>
-                        </a:rPr>
-                        <a:t>8044</a:t>
-                      </a:r>
-                    </a:p>
-                  </a:txBody>
-                  <a:tcPr anchor="ctr" marL="73152" marT="9144" marB="9144">
-                    <a:solidFill>
-                      <a:srgbClr val="EEF2F9"/>
-                    </a:solidFill>
-                  </a:tcPr>
-                </a:tc>
-                <a:tc>
-                  <a:txBody>
-                    <a:bodyPr/>
-                    <a:lstStyle/>
-                    <a:p>
-                      <a:r>
-                        <a:rPr sz="1150" b="1">
-                          <a:solidFill>
-                            <a:srgbClr val="E63946"/>
-                          </a:solidFill>
-                          <a:latin typeface="Microsoft JhengHei"/>
-                          <a:ea typeface="Microsoft JhengHei"/>
-                          <a:cs typeface="Microsoft JhengHei"/>
-                        </a:rPr>
-                        <a:t>駭客攻擊</a:t>
-                      </a:r>
-                    </a:p>
-                  </a:txBody>
-                  <a:tcPr anchor="ctr" marL="73152" marT="9144" marB="9144">
-                    <a:solidFill>
-                      <a:srgbClr val="EEF2F9"/>
-                    </a:solidFill>
-                  </a:tcPr>
-                </a:tc>
-                <a:tc>
-                  <a:txBody>
-                    <a:bodyPr/>
-                    <a:lstStyle/>
-                    <a:p>
-                      <a:r>
-                        <a:rPr sz="1150" b="0">
-                          <a:solidFill>
-                            <a:srgbClr val="1A2233"/>
-                          </a:solidFill>
-                          <a:latin typeface="Microsoft JhengHei"/>
-                          <a:ea typeface="Microsoft JhengHei"/>
-                          <a:cs typeface="Microsoft JhengHei"/>
-                        </a:rPr>
-                        <a:t>資誠聯合會計師事務所</a:t>
-                      </a:r>
-                    </a:p>
-                  </a:txBody>
-                  <a:tcPr anchor="ctr" marL="73152" marT="9144" marB="9144">
-                    <a:solidFill>
-                      <a:srgbClr val="EEF2F9"/>
-                    </a:solidFill>
-                  </a:tcPr>
-                </a:tc>
-                <a:tc>
-                  <a:txBody>
-                    <a:bodyPr/>
-                    <a:lstStyle/>
-                    <a:p>
-                      <a:r>
-                        <a:rPr sz="1150" b="0">
-                          <a:solidFill>
-                            <a:srgbClr val="1A2233"/>
-                          </a:solidFill>
-                          <a:latin typeface="Microsoft JhengHei"/>
-                          <a:ea typeface="Microsoft JhengHei"/>
-                          <a:cs typeface="Microsoft JhengHei"/>
-                        </a:rPr>
-                        <a:t>廖容翎、梁嬋女</a:t>
-                      </a:r>
-                    </a:p>
-                  </a:txBody>
-                  <a:tcPr anchor="ctr" marL="73152" marT="9144" marB="9144">
-                    <a:solidFill>
-                      <a:srgbClr val="EEF2F9"/>
                     </a:solidFill>
                   </a:tcPr>
                 </a:tc>
@@ -8813,7 +9058,7 @@
             <a:avLst/>
           </a:prstGeom>
           <a:solidFill>
-            <a:srgbClr val="27A6C4"/>
+            <a:srgbClr val="E63946"/>
           </a:solidFill>
           <a:ln>
             <a:noFill/>
@@ -8874,7 +9119,7 @@
                 <a:ea typeface="Microsoft JhengHei"/>
                 <a:cs typeface="Microsoft JhengHei"/>
               </a:rPr>
-              <a:t>萬達寵物 </a:t>
+              <a:t>上銀 </a:t>
             </a:r>
             <a:r>
               <a:rPr sz="1300" b="0">
@@ -8885,7 +9130,7 @@
                 <a:ea typeface="Microsoft JhengHei"/>
                 <a:cs typeface="Microsoft JhengHei"/>
               </a:rPr>
-              <a:t>6968</a:t>
+              <a:t>2049</a:t>
             </a:r>
           </a:p>
         </p:txBody>
@@ -8905,7 +9150,7 @@
             <a:avLst/>
           </a:prstGeom>
           <a:solidFill>
-            <a:srgbClr val="27A6C4"/>
+            <a:srgbClr val="E63946"/>
           </a:solidFill>
           <a:ln>
             <a:noFill/>
@@ -8966,7 +9211,7 @@
                 <a:ea typeface="Microsoft JhengHei"/>
                 <a:cs typeface="Microsoft JhengHei"/>
               </a:rPr>
-              <a:t>個資外洩</a:t>
+              <a:t>駭客攻擊</a:t>
             </a:r>
           </a:p>
         </p:txBody>
@@ -9001,7 +9246,7 @@
             <a:r>
               <a:rPr sz="1100" b="1">
                 <a:solidFill>
-                  <a:srgbClr val="27A6C4"/>
+                  <a:srgbClr val="E63946"/>
                 </a:solidFill>
                 <a:latin typeface="Microsoft JhengHei"/>
                 <a:ea typeface="Microsoft JhengHei"/>
@@ -9018,7 +9263,7 @@
                 <a:ea typeface="Microsoft JhengHei"/>
                 <a:cs typeface="Microsoft JhengHei"/>
               </a:rPr>
-              <a:t>本公司因合作廠商資訊系統遭不明人士入侵，疑似部份資料外洩</a:t>
+              <a:t>本公司義大利子公司部份資訊系統遭受駭客網路攻擊</a:t>
             </a:r>
           </a:p>
         </p:txBody>
@@ -9053,7 +9298,7 @@
             <a:r>
               <a:rPr sz="1100" b="1">
                 <a:solidFill>
-                  <a:srgbClr val="27A6C4"/>
+                  <a:srgbClr val="E63946"/>
                 </a:solidFill>
                 <a:latin typeface="Microsoft JhengHei"/>
                 <a:ea typeface="Microsoft JhengHei"/>
@@ -9070,7 +9315,7 @@
                 <a:ea typeface="Microsoft JhengHei"/>
                 <a:cs typeface="Microsoft JhengHei"/>
               </a:rPr>
-              <a:t>本公司並無與合作廠商串接會員資料、信用卡號、銀行帳戶等敏感資訊，不會產生任何金流交易。本公司已嚴正要求合作廠商技術團隊，…</a:t>
+              <a:t>完成相關安全漏洞修復後，將持續強化網路與資訊基礎架構之安全防護機制及管理措施，確保資訊系統穩定運作及資訊安全。</a:t>
             </a:r>
           </a:p>
         </p:txBody>
@@ -9136,7 +9381,7 @@
             <a:avLst/>
           </a:prstGeom>
           <a:solidFill>
-            <a:srgbClr val="5C6679"/>
+            <a:srgbClr val="27A6C4"/>
           </a:solidFill>
           <a:ln>
             <a:noFill/>
@@ -9197,7 +9442,7 @@
                 <a:ea typeface="Microsoft JhengHei"/>
                 <a:cs typeface="Microsoft JhengHei"/>
               </a:rPr>
-              <a:t>淳安 </a:t>
+              <a:t>萬達寵物 </a:t>
             </a:r>
             <a:r>
               <a:rPr sz="1300" b="0">
@@ -9208,7 +9453,7 @@
                 <a:ea typeface="Microsoft JhengHei"/>
                 <a:cs typeface="Microsoft JhengHei"/>
               </a:rPr>
-              <a:t>6283</a:t>
+              <a:t>6968</a:t>
             </a:r>
           </a:p>
         </p:txBody>
@@ -9228,7 +9473,7 @@
             <a:avLst/>
           </a:prstGeom>
           <a:solidFill>
-            <a:srgbClr val="5C6679"/>
+            <a:srgbClr val="27A6C4"/>
           </a:solidFill>
           <a:ln>
             <a:noFill/>
@@ -9289,7 +9534,7 @@
                 <a:ea typeface="Microsoft JhengHei"/>
                 <a:cs typeface="Microsoft JhengHei"/>
               </a:rPr>
-              <a:t>其他</a:t>
+              <a:t>個資外洩</a:t>
             </a:r>
           </a:p>
         </p:txBody>
@@ -9324,7 +9569,7 @@
             <a:r>
               <a:rPr sz="1100" b="1">
                 <a:solidFill>
-                  <a:srgbClr val="5C6679"/>
+                  <a:srgbClr val="27A6C4"/>
                 </a:solidFill>
                 <a:latin typeface="Microsoft JhengHei"/>
                 <a:ea typeface="Microsoft JhengHei"/>
@@ -9341,7 +9586,7 @@
                 <a:ea typeface="Microsoft JhengHei"/>
                 <a:cs typeface="Microsoft JhengHei"/>
               </a:rPr>
-              <a:t>本公司網路資安事件說明</a:t>
+              <a:t>本公司因合作廠商資訊系統遭不明人士入侵，疑似部份資料外洩</a:t>
             </a:r>
           </a:p>
         </p:txBody>
@@ -9376,7 +9621,7 @@
             <a:r>
               <a:rPr sz="1100" b="1">
                 <a:solidFill>
-                  <a:srgbClr val="5C6679"/>
+                  <a:srgbClr val="27A6C4"/>
                 </a:solidFill>
                 <a:latin typeface="Microsoft JhengHei"/>
                 <a:ea typeface="Microsoft JhengHei"/>
@@ -9393,7 +9638,7 @@
                 <a:ea typeface="Microsoft JhengHei"/>
                 <a:cs typeface="Microsoft JhengHei"/>
               </a:rPr>
-              <a:t>本公司後續將持續提升網路與資訊基礎架構之安全管控，以確保資訊安全。</a:t>
+              <a:t>本公司並無與合作廠商串接會員資料、信用卡號、銀行帳戶等敏感資訊，不會產生任何金流交易。本公司已嚴正要求合作廠商技術團隊，…</a:t>
             </a:r>
           </a:p>
         </p:txBody>
@@ -9782,7 +10027,7 @@
             <a:avLst/>
           </a:prstGeom>
           <a:solidFill>
-            <a:srgbClr val="E63946"/>
+            <a:srgbClr val="5C6679"/>
           </a:solidFill>
           <a:ln>
             <a:noFill/>
@@ -9843,7 +10088,7 @@
                 <a:ea typeface="Microsoft JhengHei"/>
                 <a:cs typeface="Microsoft JhengHei"/>
               </a:rPr>
-              <a:t>松上 </a:t>
+              <a:t>淳安 </a:t>
             </a:r>
             <a:r>
               <a:rPr sz="1300" b="0">
@@ -9854,7 +10099,7 @@
                 <a:ea typeface="Microsoft JhengHei"/>
                 <a:cs typeface="Microsoft JhengHei"/>
               </a:rPr>
-              <a:t>6156</a:t>
+              <a:t>6283</a:t>
             </a:r>
           </a:p>
         </p:txBody>
@@ -9874,7 +10119,7 @@
             <a:avLst/>
           </a:prstGeom>
           <a:solidFill>
-            <a:srgbClr val="E63946"/>
+            <a:srgbClr val="5C6679"/>
           </a:solidFill>
           <a:ln>
             <a:noFill/>
@@ -9935,7 +10180,7 @@
                 <a:ea typeface="Microsoft JhengHei"/>
                 <a:cs typeface="Microsoft JhengHei"/>
               </a:rPr>
-              <a:t>駭客攻擊</a:t>
+              <a:t>其他</a:t>
             </a:r>
           </a:p>
         </p:txBody>
@@ -9970,7 +10215,7 @@
             <a:r>
               <a:rPr sz="1100" b="1">
                 <a:solidFill>
-                  <a:srgbClr val="E63946"/>
+                  <a:srgbClr val="5C6679"/>
                 </a:solidFill>
                 <a:latin typeface="Microsoft JhengHei"/>
                 <a:ea typeface="Microsoft JhengHei"/>
@@ -9987,7 +10232,7 @@
                 <a:ea typeface="Microsoft JhengHei"/>
                 <a:cs typeface="Microsoft JhengHei"/>
               </a:rPr>
-              <a:t>本公司使用之部分資訊系統遭受駭客網路攻擊。</a:t>
+              <a:t>本公司網路資安事件說明</a:t>
             </a:r>
           </a:p>
         </p:txBody>
@@ -10022,7 +10267,7 @@
             <a:r>
               <a:rPr sz="1100" b="1">
                 <a:solidFill>
-                  <a:srgbClr val="E63946"/>
+                  <a:srgbClr val="5C6679"/>
                 </a:solidFill>
                 <a:latin typeface="Microsoft JhengHei"/>
                 <a:ea typeface="Microsoft JhengHei"/>
@@ -10039,7 +10284,7 @@
                 <a:ea typeface="Microsoft JhengHei"/>
                 <a:cs typeface="Microsoft JhengHei"/>
               </a:rPr>
-              <a:t>本公司後續仍將持續提升網路與資訊基礎架構之安全管控以確保資訊安全。</a:t>
+              <a:t>本公司後續將持續提升網路與資訊基礎架構之安全管控，以確保資訊安全。</a:t>
             </a:r>
           </a:p>
         </p:txBody>
@@ -10302,7 +10547,7 @@
                 <a:ea typeface="Microsoft JhengHei"/>
                 <a:cs typeface="Microsoft JhengHei"/>
               </a:rPr>
-              <a:t>優盛 </a:t>
+              <a:t>松上 </a:t>
             </a:r>
             <a:r>
               <a:rPr sz="1300" b="0">
@@ -10313,7 +10558,7 @@
                 <a:ea typeface="Microsoft JhengHei"/>
                 <a:cs typeface="Microsoft JhengHei"/>
               </a:rPr>
-              <a:t>4121</a:t>
+              <a:t>6156</a:t>
             </a:r>
           </a:p>
         </p:txBody>
@@ -10446,7 +10691,7 @@
                 <a:ea typeface="Microsoft JhengHei"/>
                 <a:cs typeface="Microsoft JhengHei"/>
               </a:rPr>
-              <a:t>本公司之官網於今天下午遭受網路駭客攻擊</a:t>
+              <a:t>本公司使用之部分資訊系統遭受駭客網路攻擊。</a:t>
             </a:r>
           </a:p>
         </p:txBody>
@@ -10498,7 +10743,7 @@
                 <a:ea typeface="Microsoft JhengHei"/>
                 <a:cs typeface="Microsoft JhengHei"/>
               </a:rPr>
-              <a:t>本公司後續將持續提升網路與資訊基礎架構之安全管控以確保資訊安全。</a:t>
+              <a:t>本公司後續仍將持續提升網路與資訊基礎架構之安全管控以確保資訊安全。</a:t>
             </a:r>
           </a:p>
         </p:txBody>
@@ -10625,7 +10870,7 @@
                 <a:ea typeface="Microsoft JhengHei"/>
                 <a:cs typeface="Microsoft JhengHei"/>
               </a:rPr>
-              <a:t>麗清 </a:t>
+              <a:t>優盛 </a:t>
             </a:r>
             <a:r>
               <a:rPr sz="1300" b="0">
@@ -10636,7 +10881,7 @@
                 <a:ea typeface="Microsoft JhengHei"/>
                 <a:cs typeface="Microsoft JhengHei"/>
               </a:rPr>
-              <a:t>3346</a:t>
+              <a:t>4121</a:t>
             </a:r>
           </a:p>
         </p:txBody>
@@ -10769,7 +11014,7 @@
                 <a:ea typeface="Microsoft JhengHei"/>
                 <a:cs typeface="Microsoft JhengHei"/>
               </a:rPr>
-              <a:t>本公司部份資訊系統遭受駭客網路攻擊。</a:t>
+              <a:t>本公司之官網於今天下午遭受網路駭客攻擊</a:t>
             </a:r>
           </a:p>
         </p:txBody>
@@ -10821,7 +11066,7 @@
                 <a:ea typeface="Microsoft JhengHei"/>
                 <a:cs typeface="Microsoft JhengHei"/>
               </a:rPr>
-              <a:t>修復安全漏洞並持續提升網路與資訊基礎架構之安全管控以確保資訊安全。</a:t>
+              <a:t>本公司後續將持續提升網路與資訊基礎架構之安全管控以確保資訊安全。</a:t>
             </a:r>
           </a:p>
         </p:txBody>
@@ -10887,7 +11132,7 @@
             <a:avLst/>
           </a:prstGeom>
           <a:solidFill>
-            <a:srgbClr val="5C6679"/>
+            <a:srgbClr val="E63946"/>
           </a:solidFill>
           <a:ln>
             <a:noFill/>
@@ -10948,7 +11193,7 @@
                 <a:ea typeface="Microsoft JhengHei"/>
                 <a:cs typeface="Microsoft JhengHei"/>
               </a:rPr>
-              <a:t>GOGOLOOK </a:t>
+              <a:t>麗清 </a:t>
             </a:r>
             <a:r>
               <a:rPr sz="1300" b="0">
@@ -10959,7 +11204,7 @@
                 <a:ea typeface="Microsoft JhengHei"/>
                 <a:cs typeface="Microsoft JhengHei"/>
               </a:rPr>
-              <a:t>6902</a:t>
+              <a:t>3346</a:t>
             </a:r>
           </a:p>
         </p:txBody>
@@ -10979,7 +11224,7 @@
             <a:avLst/>
           </a:prstGeom>
           <a:solidFill>
-            <a:srgbClr val="5C6679"/>
+            <a:srgbClr val="E63946"/>
           </a:solidFill>
           <a:ln>
             <a:noFill/>
@@ -11040,7 +11285,7 @@
                 <a:ea typeface="Microsoft JhengHei"/>
                 <a:cs typeface="Microsoft JhengHei"/>
               </a:rPr>
-              <a:t>其他</a:t>
+              <a:t>駭客攻擊</a:t>
             </a:r>
           </a:p>
         </p:txBody>
@@ -11075,7 +11320,7 @@
             <a:r>
               <a:rPr sz="1100" b="1">
                 <a:solidFill>
-                  <a:srgbClr val="5C6679"/>
+                  <a:srgbClr val="E63946"/>
                 </a:solidFill>
                 <a:latin typeface="Microsoft JhengHei"/>
                 <a:ea typeface="Microsoft JhengHei"/>
@@ -11092,7 +11337,7 @@
                 <a:ea typeface="Microsoft JhengHei"/>
                 <a:cs typeface="Microsoft JhengHei"/>
               </a:rPr>
-              <a:t>本公司發生網路資安事件。</a:t>
+              <a:t>本公司部份資訊系統遭受駭客網路攻擊。</a:t>
             </a:r>
           </a:p>
         </p:txBody>
@@ -11127,7 +11372,7 @@
             <a:r>
               <a:rPr sz="1100" b="1">
                 <a:solidFill>
-                  <a:srgbClr val="5C6679"/>
+                  <a:srgbClr val="E63946"/>
                 </a:solidFill>
                 <a:latin typeface="Microsoft JhengHei"/>
                 <a:ea typeface="Microsoft JhengHei"/>
@@ -11144,7 +11389,7 @@
                 <a:ea typeface="Microsoft JhengHei"/>
                 <a:cs typeface="Microsoft JhengHei"/>
               </a:rPr>
-              <a:t>本公司後續仍持續強化資安管控及防禦機制，確保資訊安全與服務體驗。</a:t>
+              <a:t>修復安全漏洞並持續提升網路與資訊基礎架構之安全管控以確保資訊安全。</a:t>
             </a:r>
           </a:p>
         </p:txBody>
@@ -11210,7 +11455,7 @@
             <a:avLst/>
           </a:prstGeom>
           <a:solidFill>
-            <a:srgbClr val="E63946"/>
+            <a:srgbClr val="5C6679"/>
           </a:solidFill>
           <a:ln>
             <a:noFill/>
@@ -11271,7 +11516,7 @@
                 <a:ea typeface="Microsoft JhengHei"/>
                 <a:cs typeface="Microsoft JhengHei"/>
               </a:rPr>
-              <a:t>網家 </a:t>
+              <a:t>GOGOLOOK </a:t>
             </a:r>
             <a:r>
               <a:rPr sz="1300" b="0">
@@ -11282,7 +11527,7 @@
                 <a:ea typeface="Microsoft JhengHei"/>
                 <a:cs typeface="Microsoft JhengHei"/>
               </a:rPr>
-              <a:t>8044</a:t>
+              <a:t>6902</a:t>
             </a:r>
           </a:p>
         </p:txBody>
@@ -11299,6 +11544,373 @@
             <a:ext cx="1234440" cy="347472"/>
           </a:xfrm>
           <a:prstGeom prst="roundRect">
+            <a:avLst/>
+          </a:prstGeom>
+          <a:solidFill>
+            <a:srgbClr val="5C6679"/>
+          </a:solidFill>
+          <a:ln>
+            <a:noFill/>
+          </a:ln>
+          <a:effectLst/>
+        </p:spPr>
+        <p:style>
+          <a:lnRef idx="1">
+            <a:schemeClr val="accent1"/>
+          </a:lnRef>
+          <a:fillRef idx="3">
+            <a:schemeClr val="accent1"/>
+          </a:fillRef>
+          <a:effectRef idx="2">
+            <a:schemeClr val="accent1"/>
+          </a:effectRef>
+          <a:fontRef idx="minor">
+            <a:schemeClr val="lt1"/>
+          </a:fontRef>
+        </p:style>
+        <p:txBody>
+          <a:bodyPr rtlCol="0" anchor="ctr"/>
+          <a:lstStyle/>
+          <a:p>
+            <a:pPr algn="ctr"/>
+          </a:p>
+        </p:txBody>
+      </p:sp>
+      <p:sp>
+        <p:nvSpPr>
+          <p:cNvPr id="30" name="TextBox 29"/>
+          <p:cNvSpPr txBox="1"/>
+          <p:nvPr/>
+        </p:nvSpPr>
+        <p:spPr>
+          <a:xfrm>
+            <a:off x="10149840" y="4123944"/>
+            <a:ext cx="1234440" cy="347472"/>
+          </a:xfrm>
+          <a:prstGeom prst="rect">
+            <a:avLst/>
+          </a:prstGeom>
+          <a:noFill/>
+        </p:spPr>
+        <p:txBody>
+          <a:bodyPr wrap="square" anchor="ctr" lIns="0" rIns="0" tIns="0" bIns="0">
+            <a:spAutoFit/>
+          </a:bodyPr>
+          <a:lstStyle/>
+          <a:p>
+            <a:pPr algn="ctr"/>
+            <a:r>
+              <a:rPr sz="1050" b="1">
+                <a:solidFill>
+                  <a:srgbClr val="FFFFFF"/>
+                </a:solidFill>
+                <a:latin typeface="Microsoft JhengHei"/>
+                <a:ea typeface="Microsoft JhengHei"/>
+                <a:cs typeface="Microsoft JhengHei"/>
+              </a:rPr>
+              <a:t>其他</a:t>
+            </a:r>
+          </a:p>
+        </p:txBody>
+      </p:sp>
+      <p:sp>
+        <p:nvSpPr>
+          <p:cNvPr id="31" name="TextBox 30"/>
+          <p:cNvSpPr txBox="1"/>
+          <p:nvPr/>
+        </p:nvSpPr>
+        <p:spPr>
+          <a:xfrm>
+            <a:off x="6400800" y="4599432"/>
+            <a:ext cx="4937760" cy="640080"/>
+          </a:xfrm>
+          <a:prstGeom prst="rect">
+            <a:avLst/>
+          </a:prstGeom>
+          <a:noFill/>
+        </p:spPr>
+        <p:txBody>
+          <a:bodyPr wrap="square" anchor="t" lIns="0" rIns="0" tIns="0" bIns="0">
+            <a:spAutoFit/>
+          </a:bodyPr>
+          <a:lstStyle/>
+          <a:p>
+            <a:pPr algn="l">
+              <a:lnSpc>
+                <a:spcPts val="1500"/>
+              </a:lnSpc>
+            </a:pPr>
+            <a:r>
+              <a:rPr sz="1100" b="1">
+                <a:solidFill>
+                  <a:srgbClr val="5C6679"/>
+                </a:solidFill>
+                <a:latin typeface="Microsoft JhengHei"/>
+                <a:ea typeface="Microsoft JhengHei"/>
+                <a:cs typeface="Microsoft JhengHei"/>
+              </a:rPr>
+              <a:t>緣由　</a:t>
+            </a:r>
+            <a:r>
+              <a:rPr sz="1100" b="0">
+                <a:solidFill>
+                  <a:srgbClr val="1A2233"/>
+                </a:solidFill>
+                <a:latin typeface="Microsoft JhengHei"/>
+                <a:ea typeface="Microsoft JhengHei"/>
+                <a:cs typeface="Microsoft JhengHei"/>
+              </a:rPr>
+              <a:t>本公司發生網路資安事件。</a:t>
+            </a:r>
+          </a:p>
+        </p:txBody>
+      </p:sp>
+      <p:sp>
+        <p:nvSpPr>
+          <p:cNvPr id="32" name="TextBox 31"/>
+          <p:cNvSpPr txBox="1"/>
+          <p:nvPr/>
+        </p:nvSpPr>
+        <p:spPr>
+          <a:xfrm>
+            <a:off x="6400800" y="5257800"/>
+            <a:ext cx="4937760" cy="713232"/>
+          </a:xfrm>
+          <a:prstGeom prst="rect">
+            <a:avLst/>
+          </a:prstGeom>
+          <a:noFill/>
+        </p:spPr>
+        <p:txBody>
+          <a:bodyPr wrap="square" anchor="t" lIns="0" rIns="0" tIns="0" bIns="0">
+            <a:spAutoFit/>
+          </a:bodyPr>
+          <a:lstStyle/>
+          <a:p>
+            <a:pPr algn="l">
+              <a:lnSpc>
+                <a:spcPts val="1500"/>
+              </a:lnSpc>
+            </a:pPr>
+            <a:r>
+              <a:rPr sz="1100" b="1">
+                <a:solidFill>
+                  <a:srgbClr val="5C6679"/>
+                </a:solidFill>
+                <a:latin typeface="Microsoft JhengHei"/>
+                <a:ea typeface="Microsoft JhengHei"/>
+                <a:cs typeface="Microsoft JhengHei"/>
+              </a:rPr>
+              <a:t>因應　</a:t>
+            </a:r>
+            <a:r>
+              <a:rPr sz="1100" b="0">
+                <a:solidFill>
+                  <a:srgbClr val="1A2233"/>
+                </a:solidFill>
+                <a:latin typeface="Microsoft JhengHei"/>
+                <a:ea typeface="Microsoft JhengHei"/>
+                <a:cs typeface="Microsoft JhengHei"/>
+              </a:rPr>
+              <a:t>本公司後續仍持續強化資安管控及防禦機制，確保資訊安全與服務體驗。</a:t>
+            </a:r>
+          </a:p>
+        </p:txBody>
+      </p:sp>
+    </p:spTree>
+  </p:cSld>
+  <p:clrMapOvr>
+    <a:masterClrMapping/>
+  </p:clrMapOvr>
+</p:sld>
+</file>
+
+<file path=ppt/slides/slide8.xml><?xml version="1.0" encoding="utf-8"?>
+<p:sld xmlns:a="http://schemas.openxmlformats.org/drawingml/2006/main" xmlns:p="http://schemas.openxmlformats.org/presentationml/2006/main" xmlns:r="http://schemas.openxmlformats.org/officeDocument/2006/relationships">
+  <p:cSld>
+    <p:spTree>
+      <p:nvGrpSpPr>
+        <p:cNvPr id="1" name=""/>
+        <p:cNvGrpSpPr/>
+        <p:nvPr/>
+      </p:nvGrpSpPr>
+      <p:grpSpPr/>
+      <p:sp>
+        <p:nvSpPr>
+          <p:cNvPr id="2" name="Rectangle 1"/>
+          <p:cNvSpPr/>
+          <p:nvPr/>
+        </p:nvSpPr>
+        <p:spPr>
+          <a:xfrm>
+            <a:off x="0" y="0"/>
+            <a:ext cx="12191695" cy="6858000"/>
+          </a:xfrm>
+          <a:prstGeom prst="rect">
+            <a:avLst/>
+          </a:prstGeom>
+          <a:solidFill>
+            <a:srgbClr val="F6F8FC"/>
+          </a:solidFill>
+          <a:ln>
+            <a:noFill/>
+          </a:ln>
+          <a:effectLst/>
+        </p:spPr>
+        <p:style>
+          <a:lnRef idx="1">
+            <a:schemeClr val="accent1"/>
+          </a:lnRef>
+          <a:fillRef idx="3">
+            <a:schemeClr val="accent1"/>
+          </a:fillRef>
+          <a:effectRef idx="2">
+            <a:schemeClr val="accent1"/>
+          </a:effectRef>
+          <a:fontRef idx="minor">
+            <a:schemeClr val="lt1"/>
+          </a:fontRef>
+        </p:style>
+        <p:txBody>
+          <a:bodyPr rtlCol="0" anchor="ctr"/>
+          <a:lstStyle/>
+          <a:p>
+            <a:pPr algn="ctr"/>
+          </a:p>
+        </p:txBody>
+      </p:sp>
+      <p:sp>
+        <p:nvSpPr>
+          <p:cNvPr id="3" name="TextBox 2"/>
+          <p:cNvSpPr txBox="1"/>
+          <p:nvPr/>
+        </p:nvSpPr>
+        <p:spPr>
+          <a:xfrm>
+            <a:off x="548640" y="365760"/>
+            <a:ext cx="9144000" cy="640080"/>
+          </a:xfrm>
+          <a:prstGeom prst="rect">
+            <a:avLst/>
+          </a:prstGeom>
+          <a:noFill/>
+        </p:spPr>
+        <p:txBody>
+          <a:bodyPr wrap="square" anchor="t" lIns="0" rIns="0" tIns="0" bIns="0">
+            <a:spAutoFit/>
+          </a:bodyPr>
+          <a:lstStyle/>
+          <a:p>
+            <a:pPr algn="l"/>
+            <a:r>
+              <a:rPr sz="3000" b="1">
+                <a:solidFill>
+                  <a:srgbClr val="1A2233"/>
+                </a:solidFill>
+                <a:latin typeface="Microsoft JhengHei"/>
+                <a:ea typeface="Microsoft JhengHei"/>
+                <a:cs typeface="Microsoft JhengHei"/>
+              </a:rPr>
+              <a:t>個案因應重點（3）</a:t>
+            </a:r>
+          </a:p>
+        </p:txBody>
+      </p:sp>
+      <p:sp>
+        <p:nvSpPr>
+          <p:cNvPr id="4" name="TextBox 3"/>
+          <p:cNvSpPr txBox="1"/>
+          <p:nvPr/>
+        </p:nvSpPr>
+        <p:spPr>
+          <a:xfrm>
+            <a:off x="566928" y="1005840"/>
+            <a:ext cx="10058400" cy="365760"/>
+          </a:xfrm>
+          <a:prstGeom prst="rect">
+            <a:avLst/>
+          </a:prstGeom>
+          <a:noFill/>
+        </p:spPr>
+        <p:txBody>
+          <a:bodyPr wrap="square" anchor="t" lIns="0" rIns="0" tIns="0" bIns="0">
+            <a:spAutoFit/>
+          </a:bodyPr>
+          <a:lstStyle/>
+          <a:p>
+            <a:pPr algn="l"/>
+            <a:r>
+              <a:rPr sz="1300" b="0">
+                <a:solidFill>
+                  <a:srgbClr val="5C6679"/>
+                </a:solidFill>
+                <a:latin typeface="Microsoft JhengHei"/>
+                <a:ea typeface="Microsoft JhengHei"/>
+                <a:cs typeface="Microsoft JhengHei"/>
+              </a:rPr>
+              <a:t>各公司公告之發生緣由與因應措施摘要</a:t>
+            </a:r>
+          </a:p>
+        </p:txBody>
+      </p:sp>
+      <p:sp>
+        <p:nvSpPr>
+          <p:cNvPr id="5" name="Rounded Rectangle 4"/>
+          <p:cNvSpPr/>
+          <p:nvPr/>
+        </p:nvSpPr>
+        <p:spPr>
+          <a:xfrm>
+            <a:off x="548640" y="1554480"/>
+            <a:ext cx="5394960" cy="2148840"/>
+          </a:xfrm>
+          <a:prstGeom prst="roundRect">
+            <a:avLst/>
+          </a:prstGeom>
+          <a:solidFill>
+            <a:srgbClr val="FFFFFF"/>
+          </a:solidFill>
+          <a:ln w="12700">
+            <a:solidFill>
+              <a:srgbClr val="DDE3EE"/>
+            </a:solidFill>
+          </a:ln>
+          <a:effectLst/>
+        </p:spPr>
+        <p:style>
+          <a:lnRef idx="1">
+            <a:schemeClr val="accent1"/>
+          </a:lnRef>
+          <a:fillRef idx="3">
+            <a:schemeClr val="accent1"/>
+          </a:fillRef>
+          <a:effectRef idx="2">
+            <a:schemeClr val="accent1"/>
+          </a:effectRef>
+          <a:fontRef idx="minor">
+            <a:schemeClr val="lt1"/>
+          </a:fontRef>
+        </p:style>
+        <p:txBody>
+          <a:bodyPr rtlCol="0" anchor="ctr"/>
+          <a:lstStyle/>
+          <a:p>
+            <a:pPr algn="ctr"/>
+          </a:p>
+        </p:txBody>
+      </p:sp>
+      <p:sp>
+        <p:nvSpPr>
+          <p:cNvPr id="6" name="Rectangle 5"/>
+          <p:cNvSpPr/>
+          <p:nvPr/>
+        </p:nvSpPr>
+        <p:spPr>
+          <a:xfrm>
+            <a:off x="548640" y="1554480"/>
+            <a:ext cx="5394960" cy="109728"/>
+          </a:xfrm>
+          <a:prstGeom prst="rect">
             <a:avLst/>
           </a:prstGeom>
           <a:solidFill>
@@ -11333,13 +11945,105 @@
       </p:sp>
       <p:sp>
         <p:nvSpPr>
-          <p:cNvPr id="30" name="TextBox 29"/>
+          <p:cNvPr id="7" name="TextBox 6"/>
           <p:cNvSpPr txBox="1"/>
           <p:nvPr/>
         </p:nvSpPr>
         <p:spPr>
           <a:xfrm>
-            <a:off x="10149840" y="4123944"/>
+            <a:off x="777240" y="1773936"/>
+            <a:ext cx="3657600" cy="365760"/>
+          </a:xfrm>
+          <a:prstGeom prst="rect">
+            <a:avLst/>
+          </a:prstGeom>
+          <a:noFill/>
+        </p:spPr>
+        <p:txBody>
+          <a:bodyPr wrap="square" anchor="ctr" lIns="0" rIns="0" tIns="0" bIns="0">
+            <a:spAutoFit/>
+          </a:bodyPr>
+          <a:lstStyle/>
+          <a:p>
+            <a:pPr algn="l"/>
+            <a:r>
+              <a:rPr sz="1600" b="1">
+                <a:solidFill>
+                  <a:srgbClr val="1A2233"/>
+                </a:solidFill>
+                <a:latin typeface="Microsoft JhengHei"/>
+                <a:ea typeface="Microsoft JhengHei"/>
+                <a:cs typeface="Microsoft JhengHei"/>
+              </a:rPr>
+              <a:t>網家 </a:t>
+            </a:r>
+            <a:r>
+              <a:rPr sz="1300" b="0">
+                <a:solidFill>
+                  <a:srgbClr val="5C6679"/>
+                </a:solidFill>
+                <a:latin typeface="Microsoft JhengHei"/>
+                <a:ea typeface="Microsoft JhengHei"/>
+                <a:cs typeface="Microsoft JhengHei"/>
+              </a:rPr>
+              <a:t>8044</a:t>
+            </a:r>
+          </a:p>
+        </p:txBody>
+      </p:sp>
+      <p:sp>
+        <p:nvSpPr>
+          <p:cNvPr id="8" name="Rounded Rectangle 7"/>
+          <p:cNvSpPr/>
+          <p:nvPr/>
+        </p:nvSpPr>
+        <p:spPr>
+          <a:xfrm>
+            <a:off x="4526280" y="1792224"/>
+            <a:ext cx="1234440" cy="347472"/>
+          </a:xfrm>
+          <a:prstGeom prst="roundRect">
+            <a:avLst/>
+          </a:prstGeom>
+          <a:solidFill>
+            <a:srgbClr val="E63946"/>
+          </a:solidFill>
+          <a:ln>
+            <a:noFill/>
+          </a:ln>
+          <a:effectLst/>
+        </p:spPr>
+        <p:style>
+          <a:lnRef idx="1">
+            <a:schemeClr val="accent1"/>
+          </a:lnRef>
+          <a:fillRef idx="3">
+            <a:schemeClr val="accent1"/>
+          </a:fillRef>
+          <a:effectRef idx="2">
+            <a:schemeClr val="accent1"/>
+          </a:effectRef>
+          <a:fontRef idx="minor">
+            <a:schemeClr val="lt1"/>
+          </a:fontRef>
+        </p:style>
+        <p:txBody>
+          <a:bodyPr rtlCol="0" anchor="ctr"/>
+          <a:lstStyle/>
+          <a:p>
+            <a:pPr algn="ctr"/>
+          </a:p>
+        </p:txBody>
+      </p:sp>
+      <p:sp>
+        <p:nvSpPr>
+          <p:cNvPr id="9" name="TextBox 8"/>
+          <p:cNvSpPr txBox="1"/>
+          <p:nvPr/>
+        </p:nvSpPr>
+        <p:spPr>
+          <a:xfrm>
+            <a:off x="4526280" y="1792224"/>
             <a:ext cx="1234440" cy="347472"/>
           </a:xfrm>
           <a:prstGeom prst="rect">
@@ -11370,13 +12074,13 @@
       </p:sp>
       <p:sp>
         <p:nvSpPr>
-          <p:cNvPr id="31" name="TextBox 30"/>
+          <p:cNvPr id="10" name="TextBox 9"/>
           <p:cNvSpPr txBox="1"/>
           <p:nvPr/>
         </p:nvSpPr>
         <p:spPr>
           <a:xfrm>
-            <a:off x="6400800" y="4599432"/>
+            <a:off x="777240" y="2267712"/>
             <a:ext cx="4937760" cy="640080"/>
           </a:xfrm>
           <a:prstGeom prst="rect">
@@ -11422,13 +12126,13 @@
       </p:sp>
       <p:sp>
         <p:nvSpPr>
-          <p:cNvPr id="32" name="TextBox 31"/>
+          <p:cNvPr id="11" name="TextBox 10"/>
           <p:cNvSpPr txBox="1"/>
           <p:nvPr/>
         </p:nvSpPr>
         <p:spPr>
           <a:xfrm>
-            <a:off x="6400800" y="5257800"/>
+            <a:off x="777240" y="2926080"/>
             <a:ext cx="4937760" cy="713232"/>
           </a:xfrm>
           <a:prstGeom prst="rect">

--- a/資安事件因應分析.pptx
+++ b/資安事件因應分析.pptx
@@ -12,7 +12,6 @@
     <p:sldId id="260" r:id="rId11"/>
     <p:sldId id="261" r:id="rId12"/>
     <p:sldId id="262" r:id="rId13"/>
-    <p:sldId id="263" r:id="rId14"/>
   </p:sldIdLst>
   <p:sldSz cx="12191695" cy="6858000" type="screen4x3"/>
   <p:notesSz cx="6858000" cy="9144000"/>
@@ -186,13 +185,13 @@
                 <c:formatCode>General</c:formatCode>
                 <c:ptCount val="3"/>
                 <c:pt idx="0">
-                  <c:v>5</c:v>
+                  <c:v>4</c:v>
                 </c:pt>
                 <c:pt idx="1">
                   <c:v>1</c:v>
                 </c:pt>
                 <c:pt idx="2">
-                  <c:v>3</c:v>
+                  <c:v>2</c:v>
                 </c:pt>
               </c:numCache>
             </c:numRef>
@@ -3529,7 +3528,7 @@
                 <a:ea typeface="Microsoft JhengHei"/>
                 <a:cs typeface="Microsoft JhengHei"/>
               </a:rPr>
-              <a:t>資料期間 2026-06-29 ~ 2026-07-29　｜　MOPS 重大訊息全文檢索　｜　9 家公司</a:t>
+              <a:t>資料期間 2026-07-04 ~ 2026-08-04　｜　MOPS 重大訊息全文檢索　｜　7 家公司</a:t>
             </a:r>
           </a:p>
         </p:txBody>
@@ -3746,7 +3745,7 @@
                 <a:ea typeface="Microsoft JhengHei"/>
                 <a:cs typeface="Microsoft JhengHei"/>
               </a:rPr>
-              <a:t>資料期間內 MOPS 揭露之 9 起資安相關重大訊息</a:t>
+              <a:t>資料期間內 MOPS 揭露之 7 起資安相關重大訊息</a:t>
             </a:r>
           </a:p>
         </p:txBody>
@@ -3829,7 +3828,7 @@
                 <a:ea typeface="Microsoft JhengHei"/>
                 <a:cs typeface="Microsoft JhengHei"/>
               </a:rPr>
-              <a:t>9</a:t>
+              <a:t>7</a:t>
             </a:r>
           </a:p>
         </p:txBody>
@@ -4121,7 +4120,7 @@
         </p:nvGraphicFramePr>
         <p:xfrm>
           <a:off x="548640" y="2697480"/>
-          <a:ext cx="11064240" cy="3566160"/>
+          <a:ext cx="11064240" cy="3072384"/>
         </p:xfrm>
         <a:graphic>
           <a:graphicData uri="http://schemas.openxmlformats.org/drawingml/2006/table">
@@ -4136,7 +4135,7 @@
                 <a:gridCol w="2286000"/>
                 <a:gridCol w="5120640"/>
               </a:tblGrid>
-              <a:tr h="356616">
+              <a:tr h="384048">
                 <a:tc>
                   <a:txBody>
                     <a:bodyPr/>
@@ -4258,7 +4257,7 @@
                   </a:tcPr>
                 </a:tc>
               </a:tr>
-              <a:tr h="356616">
+              <a:tr h="384048">
                 <a:tc>
                   <a:txBody>
                     <a:bodyPr/>
@@ -4273,7 +4272,7 @@
                           <a:ea typeface="Microsoft JhengHei"/>
                           <a:cs typeface="Microsoft JhengHei"/>
                         </a:rPr>
-                        <a:t>上銀</a:t>
+                        <a:t>藥華藥</a:t>
                       </a:r>
                     </a:p>
                   </a:txBody>
@@ -4297,7 +4296,7 @@
                           <a:ea typeface="Microsoft JhengHei"/>
                           <a:cs typeface="Microsoft JhengHei"/>
                         </a:rPr>
-                        <a:t>2049</a:t>
+                        <a:t>6446</a:t>
                       </a:r>
                     </a:p>
                   </a:txBody>
@@ -4321,7 +4320,7 @@
                           <a:ea typeface="Microsoft JhengHei"/>
                           <a:cs typeface="Microsoft JhengHei"/>
                         </a:rPr>
-                        <a:t>07/28</a:t>
+                        <a:t>08/03</a:t>
                       </a:r>
                     </a:p>
                   </a:txBody>
@@ -4369,7 +4368,7 @@
                           <a:ea typeface="Microsoft JhengHei"/>
                           <a:cs typeface="Microsoft JhengHei"/>
                         </a:rPr>
-                        <a:t>目前初步評估對公司營運無重大影響。</a:t>
+                        <a:t>本公司目前正積極會同技術專家協助調查，初步評估對公司營運無重大影響。</a:t>
                       </a:r>
                     </a:p>
                   </a:txBody>
@@ -4380,7 +4379,7 @@
                   </a:tcPr>
                 </a:tc>
               </a:tr>
-              <a:tr h="356616">
+              <a:tr h="384048">
                 <a:tc>
                   <a:txBody>
                     <a:bodyPr/>
@@ -4395,7 +4394,7 @@
                           <a:ea typeface="Microsoft JhengHei"/>
                           <a:cs typeface="Microsoft JhengHei"/>
                         </a:rPr>
-                        <a:t>萬達寵物</a:t>
+                        <a:t>上銀</a:t>
                       </a:r>
                     </a:p>
                   </a:txBody>
@@ -4419,7 +4418,7 @@
                           <a:ea typeface="Microsoft JhengHei"/>
                           <a:cs typeface="Microsoft JhengHei"/>
                         </a:rPr>
-                        <a:t>6968</a:t>
+                        <a:t>2049</a:t>
                       </a:r>
                     </a:p>
                   </a:txBody>
@@ -4443,13 +4442,135 @@
                           <a:ea typeface="Microsoft JhengHei"/>
                           <a:cs typeface="Microsoft JhengHei"/>
                         </a:rPr>
+                        <a:t>07/28</a:t>
+                      </a:r>
+                    </a:p>
+                  </a:txBody>
+                  <a:tcPr anchor="ctr" marL="73152" marT="9144" marB="9144">
+                    <a:solidFill>
+                      <a:srgbClr val="EEF2F9"/>
+                    </a:solidFill>
+                  </a:tcPr>
+                </a:tc>
+                <a:tc>
+                  <a:txBody>
+                    <a:bodyPr/>
+                    <a:lstStyle/>
+                    <a:p>
+                      <a:r>
+                        <a:rPr sz="1150" b="1">
+                          <a:solidFill>
+                            <a:srgbClr val="E63946"/>
+                          </a:solidFill>
+                          <a:latin typeface="Microsoft JhengHei"/>
+                          <a:ea typeface="Microsoft JhengHei"/>
+                          <a:cs typeface="Microsoft JhengHei"/>
+                        </a:rPr>
+                        <a:t>駭客攻擊</a:t>
+                      </a:r>
+                    </a:p>
+                  </a:txBody>
+                  <a:tcPr anchor="ctr" marL="73152" marT="9144" marB="9144">
+                    <a:solidFill>
+                      <a:srgbClr val="EEF2F9"/>
+                    </a:solidFill>
+                  </a:tcPr>
+                </a:tc>
+                <a:tc>
+                  <a:txBody>
+                    <a:bodyPr/>
+                    <a:lstStyle/>
+                    <a:p>
+                      <a:r>
+                        <a:rPr sz="1150" b="0">
+                          <a:solidFill>
+                            <a:srgbClr val="1A2233"/>
+                          </a:solidFill>
+                          <a:latin typeface="Microsoft JhengHei"/>
+                          <a:ea typeface="Microsoft JhengHei"/>
+                          <a:cs typeface="Microsoft JhengHei"/>
+                        </a:rPr>
+                        <a:t>目前初步評估對公司營運無重大影響。</a:t>
+                      </a:r>
+                    </a:p>
+                  </a:txBody>
+                  <a:tcPr anchor="ctr" marL="73152" marT="9144" marB="9144">
+                    <a:solidFill>
+                      <a:srgbClr val="EEF2F9"/>
+                    </a:solidFill>
+                  </a:tcPr>
+                </a:tc>
+              </a:tr>
+              <a:tr h="384048">
+                <a:tc>
+                  <a:txBody>
+                    <a:bodyPr/>
+                    <a:lstStyle/>
+                    <a:p>
+                      <a:r>
+                        <a:rPr sz="1150" b="0">
+                          <a:solidFill>
+                            <a:srgbClr val="1A2233"/>
+                          </a:solidFill>
+                          <a:latin typeface="Microsoft JhengHei"/>
+                          <a:ea typeface="Microsoft JhengHei"/>
+                          <a:cs typeface="Microsoft JhengHei"/>
+                        </a:rPr>
+                        <a:t>萬達寵物</a:t>
+                      </a:r>
+                    </a:p>
+                  </a:txBody>
+                  <a:tcPr anchor="ctr" marL="73152" marT="9144" marB="9144">
+                    <a:solidFill>
+                      <a:srgbClr val="FFFFFF"/>
+                    </a:solidFill>
+                  </a:tcPr>
+                </a:tc>
+                <a:tc>
+                  <a:txBody>
+                    <a:bodyPr/>
+                    <a:lstStyle/>
+                    <a:p>
+                      <a:r>
+                        <a:rPr sz="1150" b="0">
+                          <a:solidFill>
+                            <a:srgbClr val="1A2233"/>
+                          </a:solidFill>
+                          <a:latin typeface="Microsoft JhengHei"/>
+                          <a:ea typeface="Microsoft JhengHei"/>
+                          <a:cs typeface="Microsoft JhengHei"/>
+                        </a:rPr>
+                        <a:t>6968</a:t>
+                      </a:r>
+                    </a:p>
+                  </a:txBody>
+                  <a:tcPr anchor="ctr" marL="73152" marT="9144" marB="9144">
+                    <a:solidFill>
+                      <a:srgbClr val="FFFFFF"/>
+                    </a:solidFill>
+                  </a:tcPr>
+                </a:tc>
+                <a:tc>
+                  <a:txBody>
+                    <a:bodyPr/>
+                    <a:lstStyle/>
+                    <a:p>
+                      <a:r>
+                        <a:rPr sz="1150" b="0">
+                          <a:solidFill>
+                            <a:srgbClr val="1A2233"/>
+                          </a:solidFill>
+                          <a:latin typeface="Microsoft JhengHei"/>
+                          <a:ea typeface="Microsoft JhengHei"/>
+                          <a:cs typeface="Microsoft JhengHei"/>
+                        </a:rPr>
                         <a:t>07/27</a:t>
                       </a:r>
                     </a:p>
                   </a:txBody>
                   <a:tcPr anchor="ctr" marL="73152" marT="9144" marB="9144">
                     <a:solidFill>
-                      <a:srgbClr val="EEF2F9"/>
+                      <a:srgbClr val="FFFFFF"/>
                     </a:solidFill>
                   </a:tcPr>
                 </a:tc>
@@ -4473,7 +4594,7 @@
                   </a:txBody>
                   <a:tcPr anchor="ctr" marL="73152" marT="9144" marB="9144">
                     <a:solidFill>
-                      <a:srgbClr val="EEF2F9"/>
+                      <a:srgbClr val="FFFFFF"/>
                     </a:solidFill>
                   </a:tcPr>
                 </a:tc>
@@ -4497,12 +4618,134 @@
                   </a:txBody>
                   <a:tcPr anchor="ctr" marL="73152" marT="9144" marB="9144">
                     <a:solidFill>
+                      <a:srgbClr val="FFFFFF"/>
+                    </a:solidFill>
+                  </a:tcPr>
+                </a:tc>
+              </a:tr>
+              <a:tr h="384048">
+                <a:tc>
+                  <a:txBody>
+                    <a:bodyPr/>
+                    <a:lstStyle/>
+                    <a:p>
+                      <a:r>
+                        <a:rPr sz="1150" b="0">
+                          <a:solidFill>
+                            <a:srgbClr val="1A2233"/>
+                          </a:solidFill>
+                          <a:latin typeface="Microsoft JhengHei"/>
+                          <a:ea typeface="Microsoft JhengHei"/>
+                          <a:cs typeface="Microsoft JhengHei"/>
+                        </a:rPr>
+                        <a:t>淳安</a:t>
+                      </a:r>
+                    </a:p>
+                  </a:txBody>
+                  <a:tcPr anchor="ctr" marL="73152" marT="9144" marB="9144">
+                    <a:solidFill>
+                      <a:srgbClr val="EEF2F9"/>
+                    </a:solidFill>
+                  </a:tcPr>
+                </a:tc>
+                <a:tc>
+                  <a:txBody>
+                    <a:bodyPr/>
+                    <a:lstStyle/>
+                    <a:p>
+                      <a:r>
+                        <a:rPr sz="1150" b="0">
+                          <a:solidFill>
+                            <a:srgbClr val="1A2233"/>
+                          </a:solidFill>
+                          <a:latin typeface="Microsoft JhengHei"/>
+                          <a:ea typeface="Microsoft JhengHei"/>
+                          <a:cs typeface="Microsoft JhengHei"/>
+                        </a:rPr>
+                        <a:t>6283</a:t>
+                      </a:r>
+                    </a:p>
+                  </a:txBody>
+                  <a:tcPr anchor="ctr" marL="73152" marT="9144" marB="9144">
+                    <a:solidFill>
+                      <a:srgbClr val="EEF2F9"/>
+                    </a:solidFill>
+                  </a:tcPr>
+                </a:tc>
+                <a:tc>
+                  <a:txBody>
+                    <a:bodyPr/>
+                    <a:lstStyle/>
+                    <a:p>
+                      <a:r>
+                        <a:rPr sz="1150" b="0">
+                          <a:solidFill>
+                            <a:srgbClr val="1A2233"/>
+                          </a:solidFill>
+                          <a:latin typeface="Microsoft JhengHei"/>
+                          <a:ea typeface="Microsoft JhengHei"/>
+                          <a:cs typeface="Microsoft JhengHei"/>
+                        </a:rPr>
+                        <a:t>07/21</a:t>
+                      </a:r>
+                    </a:p>
+                  </a:txBody>
+                  <a:tcPr anchor="ctr" marL="73152" marT="9144" marB="9144">
+                    <a:solidFill>
+                      <a:srgbClr val="EEF2F9"/>
+                    </a:solidFill>
+                  </a:tcPr>
+                </a:tc>
+                <a:tc>
+                  <a:txBody>
+                    <a:bodyPr/>
+                    <a:lstStyle/>
+                    <a:p>
+                      <a:r>
+                        <a:rPr sz="1150" b="1">
+                          <a:solidFill>
+                            <a:srgbClr val="5C6679"/>
+                          </a:solidFill>
+                          <a:latin typeface="Microsoft JhengHei"/>
+                          <a:ea typeface="Microsoft JhengHei"/>
+                          <a:cs typeface="Microsoft JhengHei"/>
+                        </a:rPr>
+                        <a:t>其他</a:t>
+                      </a:r>
+                    </a:p>
+                  </a:txBody>
+                  <a:tcPr anchor="ctr" marL="73152" marT="9144" marB="9144">
+                    <a:solidFill>
+                      <a:srgbClr val="EEF2F9"/>
+                    </a:solidFill>
+                  </a:tcPr>
+                </a:tc>
+                <a:tc>
+                  <a:txBody>
+                    <a:bodyPr/>
+                    <a:lstStyle/>
+                    <a:p>
+                      <a:r>
+                        <a:rPr sz="1150" b="0">
+                          <a:solidFill>
+                            <a:srgbClr val="1A2233"/>
+                          </a:solidFill>
+                          <a:latin typeface="Microsoft JhengHei"/>
+                          <a:ea typeface="Microsoft JhengHei"/>
+                          <a:cs typeface="Microsoft JhengHei"/>
+                        </a:rPr>
+                        <a:t>經評估對公司營運無重大影響。</a:t>
+                      </a:r>
+                    </a:p>
+                  </a:txBody>
+                  <a:tcPr anchor="ctr" marL="73152" marT="9144" marB="9144">
+                    <a:solidFill>
                       <a:srgbClr val="EEF2F9"/>
                     </a:solidFill>
                   </a:tcPr>
                 </a:tc>
               </a:tr>
-              <a:tr h="356616">
+              <a:tr h="384048">
                 <a:tc>
                   <a:txBody>
                     <a:bodyPr/>
@@ -4565,7 +4808,7 @@
                           <a:ea typeface="Microsoft JhengHei"/>
                           <a:cs typeface="Microsoft JhengHei"/>
                         </a:rPr>
-                        <a:t>07/21</a:t>
+                        <a:t>07/20</a:t>
                       </a:r>
                     </a:p>
                   </a:txBody>
@@ -4624,7 +4867,7 @@
                   </a:tcPr>
                 </a:tc>
               </a:tr>
-              <a:tr h="356616">
+              <a:tr h="384048">
                 <a:tc>
                   <a:txBody>
                     <a:bodyPr/>
@@ -4639,7 +4882,7 @@
                           <a:ea typeface="Microsoft JhengHei"/>
                           <a:cs typeface="Microsoft JhengHei"/>
                         </a:rPr>
-                        <a:t>淳安</a:t>
+                        <a:t>松上</a:t>
                       </a:r>
                     </a:p>
                   </a:txBody>
@@ -4663,7 +4906,7 @@
                           <a:ea typeface="Microsoft JhengHei"/>
                           <a:cs typeface="Microsoft JhengHei"/>
                         </a:rPr>
-                        <a:t>6283</a:t>
+                        <a:t>6156</a:t>
                       </a:r>
                     </a:p>
                   </a:txBody>
@@ -4687,7 +4930,7 @@
                           <a:ea typeface="Microsoft JhengHei"/>
                           <a:cs typeface="Microsoft JhengHei"/>
                         </a:rPr>
-                        <a:t>07/20</a:t>
+                        <a:t>07/17</a:t>
                       </a:r>
                     </a:p>
                   </a:txBody>
@@ -4705,13 +4948,13 @@
                       <a:r>
                         <a:rPr sz="1150" b="1">
                           <a:solidFill>
-                            <a:srgbClr val="5C6679"/>
+                            <a:srgbClr val="E63946"/>
                           </a:solidFill>
                           <a:latin typeface="Microsoft JhengHei"/>
                           <a:ea typeface="Microsoft JhengHei"/>
                           <a:cs typeface="Microsoft JhengHei"/>
                         </a:rPr>
-                        <a:t>其他</a:t>
+                        <a:t>駭客攻擊</a:t>
                       </a:r>
                     </a:p>
                   </a:txBody>
@@ -4735,7 +4978,7 @@
                           <a:ea typeface="Microsoft JhengHei"/>
                           <a:cs typeface="Microsoft JhengHei"/>
                         </a:rPr>
-                        <a:t>經評估對公司營運無重大影響。</a:t>
+                        <a:t>目前評估對公司營運無重大影響。</a:t>
                       </a:r>
                     </a:p>
                   </a:txBody>
@@ -4746,7 +4989,7 @@
                   </a:tcPr>
                 </a:tc>
               </a:tr>
-              <a:tr h="356616">
+              <a:tr h="384048">
                 <a:tc>
                   <a:txBody>
                     <a:bodyPr/>
@@ -4761,7 +5004,7 @@
                           <a:ea typeface="Microsoft JhengHei"/>
                           <a:cs typeface="Microsoft JhengHei"/>
                         </a:rPr>
-                        <a:t>松上</a:t>
+                        <a:t>優盛</a:t>
                       </a:r>
                     </a:p>
                   </a:txBody>
@@ -4785,7 +5028,7 @@
                           <a:ea typeface="Microsoft JhengHei"/>
                           <a:cs typeface="Microsoft JhengHei"/>
                         </a:rPr>
-                        <a:t>6156</a:t>
+                        <a:t>4121</a:t>
                       </a:r>
                     </a:p>
                   </a:txBody>
@@ -4809,7 +5052,7 @@
                           <a:ea typeface="Microsoft JhengHei"/>
                           <a:cs typeface="Microsoft JhengHei"/>
                         </a:rPr>
-                        <a:t>07/17</a:t>
+                        <a:t>07/07</a:t>
                       </a:r>
                     </a:p>
                   </a:txBody>
@@ -4857,495 +5100,7 @@
                           <a:ea typeface="Microsoft JhengHei"/>
                           <a:cs typeface="Microsoft JhengHei"/>
                         </a:rPr>
-                        <a:t>目前評估對公司營運無重大影響。</a:t>
-                      </a:r>
-                    </a:p>
-                  </a:txBody>
-                  <a:tcPr anchor="ctr" marL="73152" marT="9144" marB="9144">
-                    <a:solidFill>
-                      <a:srgbClr val="FFFFFF"/>
-                    </a:solidFill>
-                  </a:tcPr>
-                </a:tc>
-              </a:tr>
-              <a:tr h="356616">
-                <a:tc>
-                  <a:txBody>
-                    <a:bodyPr/>
-                    <a:lstStyle/>
-                    <a:p>
-                      <a:r>
-                        <a:rPr sz="1150" b="0">
-                          <a:solidFill>
-                            <a:srgbClr val="1A2233"/>
-                          </a:solidFill>
-                          <a:latin typeface="Microsoft JhengHei"/>
-                          <a:ea typeface="Microsoft JhengHei"/>
-                          <a:cs typeface="Microsoft JhengHei"/>
-                        </a:rPr>
-                        <a:t>優盛</a:t>
-                      </a:r>
-                    </a:p>
-                  </a:txBody>
-                  <a:tcPr anchor="ctr" marL="73152" marT="9144" marB="9144">
-                    <a:solidFill>
-                      <a:srgbClr val="EEF2F9"/>
-                    </a:solidFill>
-                  </a:tcPr>
-                </a:tc>
-                <a:tc>
-                  <a:txBody>
-                    <a:bodyPr/>
-                    <a:lstStyle/>
-                    <a:p>
-                      <a:r>
-                        <a:rPr sz="1150" b="0">
-                          <a:solidFill>
-                            <a:srgbClr val="1A2233"/>
-                          </a:solidFill>
-                          <a:latin typeface="Microsoft JhengHei"/>
-                          <a:ea typeface="Microsoft JhengHei"/>
-                          <a:cs typeface="Microsoft JhengHei"/>
-                        </a:rPr>
-                        <a:t>4121</a:t>
-                      </a:r>
-                    </a:p>
-                  </a:txBody>
-                  <a:tcPr anchor="ctr" marL="73152" marT="9144" marB="9144">
-                    <a:solidFill>
-                      <a:srgbClr val="EEF2F9"/>
-                    </a:solidFill>
-                  </a:tcPr>
-                </a:tc>
-                <a:tc>
-                  <a:txBody>
-                    <a:bodyPr/>
-                    <a:lstStyle/>
-                    <a:p>
-                      <a:r>
-                        <a:rPr sz="1150" b="0">
-                          <a:solidFill>
-                            <a:srgbClr val="1A2233"/>
-                          </a:solidFill>
-                          <a:latin typeface="Microsoft JhengHei"/>
-                          <a:ea typeface="Microsoft JhengHei"/>
-                          <a:cs typeface="Microsoft JhengHei"/>
-                        </a:rPr>
-                        <a:t>07/07</a:t>
-                      </a:r>
-                    </a:p>
-                  </a:txBody>
-                  <a:tcPr anchor="ctr" marL="73152" marT="9144" marB="9144">
-                    <a:solidFill>
-                      <a:srgbClr val="EEF2F9"/>
-                    </a:solidFill>
-                  </a:tcPr>
-                </a:tc>
-                <a:tc>
-                  <a:txBody>
-                    <a:bodyPr/>
-                    <a:lstStyle/>
-                    <a:p>
-                      <a:r>
-                        <a:rPr sz="1150" b="1">
-                          <a:solidFill>
-                            <a:srgbClr val="E63946"/>
-                          </a:solidFill>
-                          <a:latin typeface="Microsoft JhengHei"/>
-                          <a:ea typeface="Microsoft JhengHei"/>
-                          <a:cs typeface="Microsoft JhengHei"/>
-                        </a:rPr>
-                        <a:t>駭客攻擊</a:t>
-                      </a:r>
-                    </a:p>
-                  </a:txBody>
-                  <a:tcPr anchor="ctr" marL="73152" marT="9144" marB="9144">
-                    <a:solidFill>
-                      <a:srgbClr val="EEF2F9"/>
-                    </a:solidFill>
-                  </a:tcPr>
-                </a:tc>
-                <a:tc>
-                  <a:txBody>
-                    <a:bodyPr/>
-                    <a:lstStyle/>
-                    <a:p>
-                      <a:r>
-                        <a:rPr sz="1150" b="0">
-                          <a:solidFill>
-                            <a:srgbClr val="1A2233"/>
-                          </a:solidFill>
-                          <a:latin typeface="Microsoft JhengHei"/>
-                          <a:ea typeface="Microsoft JhengHei"/>
-                          <a:cs typeface="Microsoft JhengHei"/>
-                        </a:rPr>
                         <a:t>本資訊網站已暫時停止服務，該事件對公司營運、資訊安全、個資等無重大影…</a:t>
-                      </a:r>
-                    </a:p>
-                  </a:txBody>
-                  <a:tcPr anchor="ctr" marL="73152" marT="9144" marB="9144">
-                    <a:solidFill>
-                      <a:srgbClr val="EEF2F9"/>
-                    </a:solidFill>
-                  </a:tcPr>
-                </a:tc>
-              </a:tr>
-              <a:tr h="356616">
-                <a:tc>
-                  <a:txBody>
-                    <a:bodyPr/>
-                    <a:lstStyle/>
-                    <a:p>
-                      <a:r>
-                        <a:rPr sz="1150" b="0">
-                          <a:solidFill>
-                            <a:srgbClr val="1A2233"/>
-                          </a:solidFill>
-                          <a:latin typeface="Microsoft JhengHei"/>
-                          <a:ea typeface="Microsoft JhengHei"/>
-                          <a:cs typeface="Microsoft JhengHei"/>
-                        </a:rPr>
-                        <a:t>麗清</a:t>
-                      </a:r>
-                    </a:p>
-                  </a:txBody>
-                  <a:tcPr anchor="ctr" marL="73152" marT="9144" marB="9144">
-                    <a:solidFill>
-                      <a:srgbClr val="FFFFFF"/>
-                    </a:solidFill>
-                  </a:tcPr>
-                </a:tc>
-                <a:tc>
-                  <a:txBody>
-                    <a:bodyPr/>
-                    <a:lstStyle/>
-                    <a:p>
-                      <a:r>
-                        <a:rPr sz="1150" b="0">
-                          <a:solidFill>
-                            <a:srgbClr val="1A2233"/>
-                          </a:solidFill>
-                          <a:latin typeface="Microsoft JhengHei"/>
-                          <a:ea typeface="Microsoft JhengHei"/>
-                          <a:cs typeface="Microsoft JhengHei"/>
-                        </a:rPr>
-                        <a:t>3346</a:t>
-                      </a:r>
-                    </a:p>
-                  </a:txBody>
-                  <a:tcPr anchor="ctr" marL="73152" marT="9144" marB="9144">
-                    <a:solidFill>
-                      <a:srgbClr val="FFFFFF"/>
-                    </a:solidFill>
-                  </a:tcPr>
-                </a:tc>
-                <a:tc>
-                  <a:txBody>
-                    <a:bodyPr/>
-                    <a:lstStyle/>
-                    <a:p>
-                      <a:r>
-                        <a:rPr sz="1150" b="0">
-                          <a:solidFill>
-                            <a:srgbClr val="1A2233"/>
-                          </a:solidFill>
-                          <a:latin typeface="Microsoft JhengHei"/>
-                          <a:ea typeface="Microsoft JhengHei"/>
-                          <a:cs typeface="Microsoft JhengHei"/>
-                        </a:rPr>
-                        <a:t>07/02</a:t>
-                      </a:r>
-                    </a:p>
-                  </a:txBody>
-                  <a:tcPr anchor="ctr" marL="73152" marT="9144" marB="9144">
-                    <a:solidFill>
-                      <a:srgbClr val="FFFFFF"/>
-                    </a:solidFill>
-                  </a:tcPr>
-                </a:tc>
-                <a:tc>
-                  <a:txBody>
-                    <a:bodyPr/>
-                    <a:lstStyle/>
-                    <a:p>
-                      <a:r>
-                        <a:rPr sz="1150" b="1">
-                          <a:solidFill>
-                            <a:srgbClr val="E63946"/>
-                          </a:solidFill>
-                          <a:latin typeface="Microsoft JhengHei"/>
-                          <a:ea typeface="Microsoft JhengHei"/>
-                          <a:cs typeface="Microsoft JhengHei"/>
-                        </a:rPr>
-                        <a:t>駭客攻擊</a:t>
-                      </a:r>
-                    </a:p>
-                  </a:txBody>
-                  <a:tcPr anchor="ctr" marL="73152" marT="9144" marB="9144">
-                    <a:solidFill>
-                      <a:srgbClr val="FFFFFF"/>
-                    </a:solidFill>
-                  </a:tcPr>
-                </a:tc>
-                <a:tc>
-                  <a:txBody>
-                    <a:bodyPr/>
-                    <a:lstStyle/>
-                    <a:p>
-                      <a:r>
-                        <a:rPr sz="1150" b="0">
-                          <a:solidFill>
-                            <a:srgbClr val="1A2233"/>
-                          </a:solidFill>
-                          <a:latin typeface="Microsoft JhengHei"/>
-                          <a:ea typeface="Microsoft JhengHei"/>
-                          <a:cs typeface="Microsoft JhengHei"/>
-                        </a:rPr>
-                        <a:t>目前初步評估對公司運作無重大影響。</a:t>
-                      </a:r>
-                    </a:p>
-                  </a:txBody>
-                  <a:tcPr anchor="ctr" marL="73152" marT="9144" marB="9144">
-                    <a:solidFill>
-                      <a:srgbClr val="FFFFFF"/>
-                    </a:solidFill>
-                  </a:tcPr>
-                </a:tc>
-              </a:tr>
-              <a:tr h="356616">
-                <a:tc>
-                  <a:txBody>
-                    <a:bodyPr/>
-                    <a:lstStyle/>
-                    <a:p>
-                      <a:r>
-                        <a:rPr sz="1150" b="0">
-                          <a:solidFill>
-                            <a:srgbClr val="1A2233"/>
-                          </a:solidFill>
-                          <a:latin typeface="Microsoft JhengHei"/>
-                          <a:ea typeface="Microsoft JhengHei"/>
-                          <a:cs typeface="Microsoft JhengHei"/>
-                        </a:rPr>
-                        <a:t>GOGOLOOK</a:t>
-                      </a:r>
-                    </a:p>
-                  </a:txBody>
-                  <a:tcPr anchor="ctr" marL="73152" marT="9144" marB="9144">
-                    <a:solidFill>
-                      <a:srgbClr val="EEF2F9"/>
-                    </a:solidFill>
-                  </a:tcPr>
-                </a:tc>
-                <a:tc>
-                  <a:txBody>
-                    <a:bodyPr/>
-                    <a:lstStyle/>
-                    <a:p>
-                      <a:r>
-                        <a:rPr sz="1150" b="0">
-                          <a:solidFill>
-                            <a:srgbClr val="1A2233"/>
-                          </a:solidFill>
-                          <a:latin typeface="Microsoft JhengHei"/>
-                          <a:ea typeface="Microsoft JhengHei"/>
-                          <a:cs typeface="Microsoft JhengHei"/>
-                        </a:rPr>
-                        <a:t>6902</a:t>
-                      </a:r>
-                    </a:p>
-                  </a:txBody>
-                  <a:tcPr anchor="ctr" marL="73152" marT="9144" marB="9144">
-                    <a:solidFill>
-                      <a:srgbClr val="EEF2F9"/>
-                    </a:solidFill>
-                  </a:tcPr>
-                </a:tc>
-                <a:tc>
-                  <a:txBody>
-                    <a:bodyPr/>
-                    <a:lstStyle/>
-                    <a:p>
-                      <a:r>
-                        <a:rPr sz="1150" b="0">
-                          <a:solidFill>
-                            <a:srgbClr val="1A2233"/>
-                          </a:solidFill>
-                          <a:latin typeface="Microsoft JhengHei"/>
-                          <a:ea typeface="Microsoft JhengHei"/>
-                          <a:cs typeface="Microsoft JhengHei"/>
-                        </a:rPr>
-                        <a:t>07/01</a:t>
-                      </a:r>
-                    </a:p>
-                  </a:txBody>
-                  <a:tcPr anchor="ctr" marL="73152" marT="9144" marB="9144">
-                    <a:solidFill>
-                      <a:srgbClr val="EEF2F9"/>
-                    </a:solidFill>
-                  </a:tcPr>
-                </a:tc>
-                <a:tc>
-                  <a:txBody>
-                    <a:bodyPr/>
-                    <a:lstStyle/>
-                    <a:p>
-                      <a:r>
-                        <a:rPr sz="1150" b="1">
-                          <a:solidFill>
-                            <a:srgbClr val="5C6679"/>
-                          </a:solidFill>
-                          <a:latin typeface="Microsoft JhengHei"/>
-                          <a:ea typeface="Microsoft JhengHei"/>
-                          <a:cs typeface="Microsoft JhengHei"/>
-                        </a:rPr>
-                        <a:t>其他</a:t>
-                      </a:r>
-                    </a:p>
-                  </a:txBody>
-                  <a:tcPr anchor="ctr" marL="73152" marT="9144" marB="9144">
-                    <a:solidFill>
-                      <a:srgbClr val="EEF2F9"/>
-                    </a:solidFill>
-                  </a:tcPr>
-                </a:tc>
-                <a:tc>
-                  <a:txBody>
-                    <a:bodyPr/>
-                    <a:lstStyle/>
-                    <a:p>
-                      <a:r>
-                        <a:rPr sz="1150" b="0">
-                          <a:solidFill>
-                            <a:srgbClr val="1A2233"/>
-                          </a:solidFill>
-                          <a:latin typeface="Microsoft JhengHei"/>
-                          <a:ea typeface="Microsoft JhengHei"/>
-                          <a:cs typeface="Microsoft JhengHei"/>
-                        </a:rPr>
-                        <a:t>目前評估對公司營運尚無重大影響。</a:t>
-                      </a:r>
-                    </a:p>
-                  </a:txBody>
-                  <a:tcPr anchor="ctr" marL="73152" marT="9144" marB="9144">
-                    <a:solidFill>
-                      <a:srgbClr val="EEF2F9"/>
-                    </a:solidFill>
-                  </a:tcPr>
-                </a:tc>
-              </a:tr>
-              <a:tr h="356616">
-                <a:tc>
-                  <a:txBody>
-                    <a:bodyPr/>
-                    <a:lstStyle/>
-                    <a:p>
-                      <a:r>
-                        <a:rPr sz="1150" b="0">
-                          <a:solidFill>
-                            <a:srgbClr val="1A2233"/>
-                          </a:solidFill>
-                          <a:latin typeface="Microsoft JhengHei"/>
-                          <a:ea typeface="Microsoft JhengHei"/>
-                          <a:cs typeface="Microsoft JhengHei"/>
-                        </a:rPr>
-                        <a:t>網家</a:t>
-                      </a:r>
-                    </a:p>
-                  </a:txBody>
-                  <a:tcPr anchor="ctr" marL="73152" marT="9144" marB="9144">
-                    <a:solidFill>
-                      <a:srgbClr val="FFFFFF"/>
-                    </a:solidFill>
-                  </a:tcPr>
-                </a:tc>
-                <a:tc>
-                  <a:txBody>
-                    <a:bodyPr/>
-                    <a:lstStyle/>
-                    <a:p>
-                      <a:r>
-                        <a:rPr sz="1150" b="0">
-                          <a:solidFill>
-                            <a:srgbClr val="1A2233"/>
-                          </a:solidFill>
-                          <a:latin typeface="Microsoft JhengHei"/>
-                          <a:ea typeface="Microsoft JhengHei"/>
-                          <a:cs typeface="Microsoft JhengHei"/>
-                        </a:rPr>
-                        <a:t>8044</a:t>
-                      </a:r>
-                    </a:p>
-                  </a:txBody>
-                  <a:tcPr anchor="ctr" marL="73152" marT="9144" marB="9144">
-                    <a:solidFill>
-                      <a:srgbClr val="FFFFFF"/>
-                    </a:solidFill>
-                  </a:tcPr>
-                </a:tc>
-                <a:tc>
-                  <a:txBody>
-                    <a:bodyPr/>
-                    <a:lstStyle/>
-                    <a:p>
-                      <a:r>
-                        <a:rPr sz="1150" b="0">
-                          <a:solidFill>
-                            <a:srgbClr val="1A2233"/>
-                          </a:solidFill>
-                          <a:latin typeface="Microsoft JhengHei"/>
-                          <a:ea typeface="Microsoft JhengHei"/>
-                          <a:cs typeface="Microsoft JhengHei"/>
-                        </a:rPr>
-                        <a:t>07/01</a:t>
-                      </a:r>
-                    </a:p>
-                  </a:txBody>
-                  <a:tcPr anchor="ctr" marL="73152" marT="9144" marB="9144">
-                    <a:solidFill>
-                      <a:srgbClr val="FFFFFF"/>
-                    </a:solidFill>
-                  </a:tcPr>
-                </a:tc>
-                <a:tc>
-                  <a:txBody>
-                    <a:bodyPr/>
-                    <a:lstStyle/>
-                    <a:p>
-                      <a:r>
-                        <a:rPr sz="1150" b="1">
-                          <a:solidFill>
-                            <a:srgbClr val="E63946"/>
-                          </a:solidFill>
-                          <a:latin typeface="Microsoft JhengHei"/>
-                          <a:ea typeface="Microsoft JhengHei"/>
-                          <a:cs typeface="Microsoft JhengHei"/>
-                        </a:rPr>
-                        <a:t>駭客攻擊</a:t>
-                      </a:r>
-                    </a:p>
-                  </a:txBody>
-                  <a:tcPr anchor="ctr" marL="73152" marT="9144" marB="9144">
-                    <a:solidFill>
-                      <a:srgbClr val="FFFFFF"/>
-                    </a:solidFill>
-                  </a:tcPr>
-                </a:tc>
-                <a:tc>
-                  <a:txBody>
-                    <a:bodyPr/>
-                    <a:lstStyle/>
-                    <a:p>
-                      <a:r>
-                        <a:rPr sz="1150" b="0">
-                          <a:solidFill>
-                            <a:srgbClr val="1A2233"/>
-                          </a:solidFill>
-                          <a:latin typeface="Microsoft JhengHei"/>
-                          <a:ea typeface="Microsoft JhengHei"/>
-                          <a:cs typeface="Microsoft JhengHei"/>
-                        </a:rPr>
-                        <a:t>—</a:t>
                       </a:r>
                     </a:p>
                   </a:txBody>
@@ -5673,7 +5428,7 @@
                 <a:ea typeface="Microsoft JhengHei"/>
                 <a:cs typeface="Microsoft JhengHei"/>
               </a:rPr>
-              <a:t>5 起</a:t>
+              <a:t>4 起</a:t>
             </a:r>
           </a:p>
         </p:txBody>
@@ -5710,7 +5465,7 @@
                 <a:ea typeface="Microsoft JhengHei"/>
                 <a:cs typeface="Microsoft JhengHei"/>
               </a:rPr>
-              <a:t>上銀、松上、優盛、麗清、網家</a:t>
+              <a:t>藥華藥、上銀、松上、優盛</a:t>
             </a:r>
           </a:p>
         </p:txBody>
@@ -6149,7 +5904,7 @@
                 <a:ea typeface="Microsoft JhengHei"/>
                 <a:cs typeface="Microsoft JhengHei"/>
               </a:rPr>
-              <a:t>3 起</a:t>
+              <a:t>2 起</a:t>
             </a:r>
           </a:p>
         </p:txBody>
@@ -6186,7 +5941,7 @@
                 <a:ea typeface="Microsoft JhengHei"/>
                 <a:cs typeface="Microsoft JhengHei"/>
               </a:rPr>
-              <a:t>淳安、淳安、GOGOLOOK</a:t>
+              <a:t>淳安、淳安</a:t>
             </a:r>
           </a:p>
         </p:txBody>
@@ -6374,7 +6129,7 @@
         </p:nvGraphicFramePr>
         <p:xfrm>
           <a:off x="548640" y="1600200"/>
-          <a:ext cx="10789920" cy="4480560"/>
+          <a:ext cx="10789920" cy="3657600"/>
         </p:xfrm>
         <a:graphic>
           <a:graphicData uri="http://schemas.openxmlformats.org/drawingml/2006/table">
@@ -6389,7 +6144,7 @@
                 <a:gridCol w="3383280"/>
                 <a:gridCol w="2606040"/>
               </a:tblGrid>
-              <a:tr h="448056">
+              <a:tr h="457200">
                 <a:tc>
                   <a:txBody>
                     <a:bodyPr/>
@@ -6511,7 +6266,7 @@
                   </a:tcPr>
                 </a:tc>
               </a:tr>
-              <a:tr h="448056">
+              <a:tr h="457200">
                 <a:tc>
                   <a:txBody>
                     <a:bodyPr/>
@@ -6526,7 +6281,7 @@
                           <a:ea typeface="Microsoft JhengHei"/>
                           <a:cs typeface="Microsoft JhengHei"/>
                         </a:rPr>
-                        <a:t>上銀</a:t>
+                        <a:t>藥華藥</a:t>
                       </a:r>
                     </a:p>
                   </a:txBody>
@@ -6550,7 +6305,7 @@
                           <a:ea typeface="Microsoft JhengHei"/>
                           <a:cs typeface="Microsoft JhengHei"/>
                         </a:rPr>
-                        <a:t>2049</a:t>
+                        <a:t>6446</a:t>
                       </a:r>
                     </a:p>
                   </a:txBody>
@@ -6598,7 +6353,7 @@
                           <a:ea typeface="Microsoft JhengHei"/>
                           <a:cs typeface="Microsoft JhengHei"/>
                         </a:rPr>
-                        <a:t>勤業眾信聯合會計師事務所</a:t>
+                        <a:t>安永聯合會計師事務所</a:t>
                       </a:r>
                     </a:p>
                   </a:txBody>
@@ -6622,7 +6377,7 @@
                           <a:ea typeface="Microsoft JhengHei"/>
                           <a:cs typeface="Microsoft JhengHei"/>
                         </a:rPr>
-                        <a:t>吳麗冬、顏曉芳</a:t>
+                        <a:t>呂倩雯、張巧穎</a:t>
                       </a:r>
                     </a:p>
                   </a:txBody>
@@ -6633,7 +6388,7 @@
                   </a:tcPr>
                 </a:tc>
               </a:tr>
-              <a:tr h="448056">
+              <a:tr h="457200">
                 <a:tc>
                   <a:txBody>
                     <a:bodyPr/>
@@ -6648,7 +6403,7 @@
                           <a:ea typeface="Microsoft JhengHei"/>
                           <a:cs typeface="Microsoft JhengHei"/>
                         </a:rPr>
-                        <a:t>萬達寵物</a:t>
+                        <a:t>上銀</a:t>
                       </a:r>
                     </a:p>
                   </a:txBody>
@@ -6672,13 +6427,135 @@
                           <a:ea typeface="Microsoft JhengHei"/>
                           <a:cs typeface="Microsoft JhengHei"/>
                         </a:rPr>
+                        <a:t>2049</a:t>
+                      </a:r>
+                    </a:p>
+                  </a:txBody>
+                  <a:tcPr anchor="ctr" marL="73152" marT="9144" marB="9144">
+                    <a:solidFill>
+                      <a:srgbClr val="EEF2F9"/>
+                    </a:solidFill>
+                  </a:tcPr>
+                </a:tc>
+                <a:tc>
+                  <a:txBody>
+                    <a:bodyPr/>
+                    <a:lstStyle/>
+                    <a:p>
+                      <a:r>
+                        <a:rPr sz="1150" b="1">
+                          <a:solidFill>
+                            <a:srgbClr val="E63946"/>
+                          </a:solidFill>
+                          <a:latin typeface="Microsoft JhengHei"/>
+                          <a:ea typeface="Microsoft JhengHei"/>
+                          <a:cs typeface="Microsoft JhengHei"/>
+                        </a:rPr>
+                        <a:t>駭客攻擊</a:t>
+                      </a:r>
+                    </a:p>
+                  </a:txBody>
+                  <a:tcPr anchor="ctr" marL="73152" marT="9144" marB="9144">
+                    <a:solidFill>
+                      <a:srgbClr val="EEF2F9"/>
+                    </a:solidFill>
+                  </a:tcPr>
+                </a:tc>
+                <a:tc>
+                  <a:txBody>
+                    <a:bodyPr/>
+                    <a:lstStyle/>
+                    <a:p>
+                      <a:r>
+                        <a:rPr sz="1150" b="0">
+                          <a:solidFill>
+                            <a:srgbClr val="1A2233"/>
+                          </a:solidFill>
+                          <a:latin typeface="Microsoft JhengHei"/>
+                          <a:ea typeface="Microsoft JhengHei"/>
+                          <a:cs typeface="Microsoft JhengHei"/>
+                        </a:rPr>
+                        <a:t>勤業眾信聯合會計師事務所</a:t>
+                      </a:r>
+                    </a:p>
+                  </a:txBody>
+                  <a:tcPr anchor="ctr" marL="73152" marT="9144" marB="9144">
+                    <a:solidFill>
+                      <a:srgbClr val="EEF2F9"/>
+                    </a:solidFill>
+                  </a:tcPr>
+                </a:tc>
+                <a:tc>
+                  <a:txBody>
+                    <a:bodyPr/>
+                    <a:lstStyle/>
+                    <a:p>
+                      <a:r>
+                        <a:rPr sz="1150" b="0">
+                          <a:solidFill>
+                            <a:srgbClr val="1A2233"/>
+                          </a:solidFill>
+                          <a:latin typeface="Microsoft JhengHei"/>
+                          <a:ea typeface="Microsoft JhengHei"/>
+                          <a:cs typeface="Microsoft JhengHei"/>
+                        </a:rPr>
+                        <a:t>吳麗冬、顏曉芳</a:t>
+                      </a:r>
+                    </a:p>
+                  </a:txBody>
+                  <a:tcPr anchor="ctr" marL="73152" marT="9144" marB="9144">
+                    <a:solidFill>
+                      <a:srgbClr val="EEF2F9"/>
+                    </a:solidFill>
+                  </a:tcPr>
+                </a:tc>
+              </a:tr>
+              <a:tr h="457200">
+                <a:tc>
+                  <a:txBody>
+                    <a:bodyPr/>
+                    <a:lstStyle/>
+                    <a:p>
+                      <a:r>
+                        <a:rPr sz="1150" b="0">
+                          <a:solidFill>
+                            <a:srgbClr val="1A2233"/>
+                          </a:solidFill>
+                          <a:latin typeface="Microsoft JhengHei"/>
+                          <a:ea typeface="Microsoft JhengHei"/>
+                          <a:cs typeface="Microsoft JhengHei"/>
+                        </a:rPr>
+                        <a:t>萬達寵物</a:t>
+                      </a:r>
+                    </a:p>
+                  </a:txBody>
+                  <a:tcPr anchor="ctr" marL="73152" marT="9144" marB="9144">
+                    <a:solidFill>
+                      <a:srgbClr val="FFFFFF"/>
+                    </a:solidFill>
+                  </a:tcPr>
+                </a:tc>
+                <a:tc>
+                  <a:txBody>
+                    <a:bodyPr/>
+                    <a:lstStyle/>
+                    <a:p>
+                      <a:r>
+                        <a:rPr sz="1150" b="0">
+                          <a:solidFill>
+                            <a:srgbClr val="1A2233"/>
+                          </a:solidFill>
+                          <a:latin typeface="Microsoft JhengHei"/>
+                          <a:ea typeface="Microsoft JhengHei"/>
+                          <a:cs typeface="Microsoft JhengHei"/>
+                        </a:rPr>
                         <a:t>6968</a:t>
                       </a:r>
                     </a:p>
                   </a:txBody>
                   <a:tcPr anchor="ctr" marL="73152" marT="9144" marB="9144">
                     <a:solidFill>
-                      <a:srgbClr val="EEF2F9"/>
+                      <a:srgbClr val="FFFFFF"/>
                     </a:solidFill>
                   </a:tcPr>
                 </a:tc>
@@ -6697,6 +6574,128 @@
                           <a:cs typeface="Microsoft JhengHei"/>
                         </a:rPr>
                         <a:t>個資外洩</a:t>
+                      </a:r>
+                    </a:p>
+                  </a:txBody>
+                  <a:tcPr anchor="ctr" marL="73152" marT="9144" marB="9144">
+                    <a:solidFill>
+                      <a:srgbClr val="FFFFFF"/>
+                    </a:solidFill>
+                  </a:tcPr>
+                </a:tc>
+                <a:tc>
+                  <a:txBody>
+                    <a:bodyPr/>
+                    <a:lstStyle/>
+                    <a:p>
+                      <a:r>
+                        <a:rPr sz="1150" b="0">
+                          <a:solidFill>
+                            <a:srgbClr val="1A2233"/>
+                          </a:solidFill>
+                          <a:latin typeface="Microsoft JhengHei"/>
+                          <a:ea typeface="Microsoft JhengHei"/>
+                          <a:cs typeface="Microsoft JhengHei"/>
+                        </a:rPr>
+                        <a:t>資誠聯合會計師事務所</a:t>
+                      </a:r>
+                    </a:p>
+                  </a:txBody>
+                  <a:tcPr anchor="ctr" marL="73152" marT="9144" marB="9144">
+                    <a:solidFill>
+                      <a:srgbClr val="FFFFFF"/>
+                    </a:solidFill>
+                  </a:tcPr>
+                </a:tc>
+                <a:tc>
+                  <a:txBody>
+                    <a:bodyPr/>
+                    <a:lstStyle/>
+                    <a:p>
+                      <a:r>
+                        <a:rPr sz="1150" b="0">
+                          <a:solidFill>
+                            <a:srgbClr val="1A2233"/>
+                          </a:solidFill>
+                          <a:latin typeface="Microsoft JhengHei"/>
+                          <a:ea typeface="Microsoft JhengHei"/>
+                          <a:cs typeface="Microsoft JhengHei"/>
+                        </a:rPr>
+                        <a:t>葉翠苗、黃世鈞</a:t>
+                      </a:r>
+                    </a:p>
+                  </a:txBody>
+                  <a:tcPr anchor="ctr" marL="73152" marT="9144" marB="9144">
+                    <a:solidFill>
+                      <a:srgbClr val="FFFFFF"/>
+                    </a:solidFill>
+                  </a:tcPr>
+                </a:tc>
+              </a:tr>
+              <a:tr h="457200">
+                <a:tc>
+                  <a:txBody>
+                    <a:bodyPr/>
+                    <a:lstStyle/>
+                    <a:p>
+                      <a:r>
+                        <a:rPr sz="1150" b="0">
+                          <a:solidFill>
+                            <a:srgbClr val="1A2233"/>
+                          </a:solidFill>
+                          <a:latin typeface="Microsoft JhengHei"/>
+                          <a:ea typeface="Microsoft JhengHei"/>
+                          <a:cs typeface="Microsoft JhengHei"/>
+                        </a:rPr>
+                        <a:t>淳安</a:t>
+                      </a:r>
+                    </a:p>
+                  </a:txBody>
+                  <a:tcPr anchor="ctr" marL="73152" marT="9144" marB="9144">
+                    <a:solidFill>
+                      <a:srgbClr val="EEF2F9"/>
+                    </a:solidFill>
+                  </a:tcPr>
+                </a:tc>
+                <a:tc>
+                  <a:txBody>
+                    <a:bodyPr/>
+                    <a:lstStyle/>
+                    <a:p>
+                      <a:r>
+                        <a:rPr sz="1150" b="0">
+                          <a:solidFill>
+                            <a:srgbClr val="1A2233"/>
+                          </a:solidFill>
+                          <a:latin typeface="Microsoft JhengHei"/>
+                          <a:ea typeface="Microsoft JhengHei"/>
+                          <a:cs typeface="Microsoft JhengHei"/>
+                        </a:rPr>
+                        <a:t>6283</a:t>
+                      </a:r>
+                    </a:p>
+                  </a:txBody>
+                  <a:tcPr anchor="ctr" marL="73152" marT="9144" marB="9144">
+                    <a:solidFill>
+                      <a:srgbClr val="EEF2F9"/>
+                    </a:solidFill>
+                  </a:tcPr>
+                </a:tc>
+                <a:tc>
+                  <a:txBody>
+                    <a:bodyPr/>
+                    <a:lstStyle/>
+                    <a:p>
+                      <a:r>
+                        <a:rPr sz="1150" b="1">
+                          <a:solidFill>
+                            <a:srgbClr val="5C6679"/>
+                          </a:solidFill>
+                          <a:latin typeface="Microsoft JhengHei"/>
+                          <a:ea typeface="Microsoft JhengHei"/>
+                          <a:cs typeface="Microsoft JhengHei"/>
+                        </a:rPr>
+                        <a:t>其他</a:t>
                       </a:r>
                     </a:p>
                   </a:txBody>
@@ -6744,7 +6743,7 @@
                           <a:ea typeface="Microsoft JhengHei"/>
                           <a:cs typeface="Microsoft JhengHei"/>
                         </a:rPr>
-                        <a:t>葉翠苗、黃世鈞</a:t>
+                        <a:t>林永智、廖福銘</a:t>
                       </a:r>
                     </a:p>
                   </a:txBody>
@@ -6755,7 +6754,7 @@
                   </a:tcPr>
                 </a:tc>
               </a:tr>
-              <a:tr h="448056">
+              <a:tr h="457200">
                 <a:tc>
                   <a:txBody>
                     <a:bodyPr/>
@@ -6877,7 +6876,7 @@
                   </a:tcPr>
                 </a:tc>
               </a:tr>
-              <a:tr h="448056">
+              <a:tr h="457200">
                 <a:tc>
                   <a:txBody>
                     <a:bodyPr/>
@@ -6892,7 +6891,7 @@
                           <a:ea typeface="Microsoft JhengHei"/>
                           <a:cs typeface="Microsoft JhengHei"/>
                         </a:rPr>
-                        <a:t>淳安</a:t>
+                        <a:t>松上</a:t>
                       </a:r>
                     </a:p>
                   </a:txBody>
@@ -6916,7 +6915,7 @@
                           <a:ea typeface="Microsoft JhengHei"/>
                           <a:cs typeface="Microsoft JhengHei"/>
                         </a:rPr>
-                        <a:t>6283</a:t>
+                        <a:t>6156</a:t>
                       </a:r>
                     </a:p>
                   </a:txBody>
@@ -6934,13 +6933,13 @@
                       <a:r>
                         <a:rPr sz="1150" b="1">
                           <a:solidFill>
-                            <a:srgbClr val="5C6679"/>
+                            <a:srgbClr val="E63946"/>
                           </a:solidFill>
                           <a:latin typeface="Microsoft JhengHei"/>
                           <a:ea typeface="Microsoft JhengHei"/>
                           <a:cs typeface="Microsoft JhengHei"/>
                         </a:rPr>
-                        <a:t>其他</a:t>
+                        <a:t>駭客攻擊</a:t>
                       </a:r>
                     </a:p>
                   </a:txBody>
@@ -6964,7 +6963,7 @@
                           <a:ea typeface="Microsoft JhengHei"/>
                           <a:cs typeface="Microsoft JhengHei"/>
                         </a:rPr>
-                        <a:t>資誠聯合會計師事務所</a:t>
+                        <a:t>安永聯合會計師事務所</a:t>
                       </a:r>
                     </a:p>
                   </a:txBody>
@@ -6988,7 +6987,7 @@
                           <a:ea typeface="Microsoft JhengHei"/>
                           <a:cs typeface="Microsoft JhengHei"/>
                         </a:rPr>
-                        <a:t>林永智、廖福銘</a:t>
+                        <a:t>羅筱靖、陳國帥</a:t>
                       </a:r>
                     </a:p>
                   </a:txBody>
@@ -6999,7 +6998,7 @@
                   </a:tcPr>
                 </a:tc>
               </a:tr>
-              <a:tr h="448056">
+              <a:tr h="457200">
                 <a:tc>
                   <a:txBody>
                     <a:bodyPr/>
@@ -7014,7 +7013,7 @@
                           <a:ea typeface="Microsoft JhengHei"/>
                           <a:cs typeface="Microsoft JhengHei"/>
                         </a:rPr>
-                        <a:t>松上</a:t>
+                        <a:t>優盛</a:t>
                       </a:r>
                     </a:p>
                   </a:txBody>
@@ -7038,7 +7037,7 @@
                           <a:ea typeface="Microsoft JhengHei"/>
                           <a:cs typeface="Microsoft JhengHei"/>
                         </a:rPr>
-                        <a:t>6156</a:t>
+                        <a:t>4121</a:t>
                       </a:r>
                     </a:p>
                   </a:txBody>
@@ -7086,7 +7085,7 @@
                           <a:ea typeface="Microsoft JhengHei"/>
                           <a:cs typeface="Microsoft JhengHei"/>
                         </a:rPr>
-                        <a:t>安永聯合會計師事務所</a:t>
+                        <a:t>安侯建業聯合會計師事務所</a:t>
                       </a:r>
                     </a:p>
                   </a:txBody>
@@ -7110,495 +7109,7 @@
                           <a:ea typeface="Microsoft JhengHei"/>
                           <a:cs typeface="Microsoft JhengHei"/>
                         </a:rPr>
-                        <a:t>羅筱靖、陳國帥</a:t>
-                      </a:r>
-                    </a:p>
-                  </a:txBody>
-                  <a:tcPr anchor="ctr" marL="73152" marT="9144" marB="9144">
-                    <a:solidFill>
-                      <a:srgbClr val="FFFFFF"/>
-                    </a:solidFill>
-                  </a:tcPr>
-                </a:tc>
-              </a:tr>
-              <a:tr h="448056">
-                <a:tc>
-                  <a:txBody>
-                    <a:bodyPr/>
-                    <a:lstStyle/>
-                    <a:p>
-                      <a:r>
-                        <a:rPr sz="1150" b="0">
-                          <a:solidFill>
-                            <a:srgbClr val="1A2233"/>
-                          </a:solidFill>
-                          <a:latin typeface="Microsoft JhengHei"/>
-                          <a:ea typeface="Microsoft JhengHei"/>
-                          <a:cs typeface="Microsoft JhengHei"/>
-                        </a:rPr>
-                        <a:t>優盛</a:t>
-                      </a:r>
-                    </a:p>
-                  </a:txBody>
-                  <a:tcPr anchor="ctr" marL="73152" marT="9144" marB="9144">
-                    <a:solidFill>
-                      <a:srgbClr val="EEF2F9"/>
-                    </a:solidFill>
-                  </a:tcPr>
-                </a:tc>
-                <a:tc>
-                  <a:txBody>
-                    <a:bodyPr/>
-                    <a:lstStyle/>
-                    <a:p>
-                      <a:r>
-                        <a:rPr sz="1150" b="0">
-                          <a:solidFill>
-                            <a:srgbClr val="1A2233"/>
-                          </a:solidFill>
-                          <a:latin typeface="Microsoft JhengHei"/>
-                          <a:ea typeface="Microsoft JhengHei"/>
-                          <a:cs typeface="Microsoft JhengHei"/>
-                        </a:rPr>
-                        <a:t>4121</a:t>
-                      </a:r>
-                    </a:p>
-                  </a:txBody>
-                  <a:tcPr anchor="ctr" marL="73152" marT="9144" marB="9144">
-                    <a:solidFill>
-                      <a:srgbClr val="EEF2F9"/>
-                    </a:solidFill>
-                  </a:tcPr>
-                </a:tc>
-                <a:tc>
-                  <a:txBody>
-                    <a:bodyPr/>
-                    <a:lstStyle/>
-                    <a:p>
-                      <a:r>
-                        <a:rPr sz="1150" b="1">
-                          <a:solidFill>
-                            <a:srgbClr val="E63946"/>
-                          </a:solidFill>
-                          <a:latin typeface="Microsoft JhengHei"/>
-                          <a:ea typeface="Microsoft JhengHei"/>
-                          <a:cs typeface="Microsoft JhengHei"/>
-                        </a:rPr>
-                        <a:t>駭客攻擊</a:t>
-                      </a:r>
-                    </a:p>
-                  </a:txBody>
-                  <a:tcPr anchor="ctr" marL="73152" marT="9144" marB="9144">
-                    <a:solidFill>
-                      <a:srgbClr val="EEF2F9"/>
-                    </a:solidFill>
-                  </a:tcPr>
-                </a:tc>
-                <a:tc>
-                  <a:txBody>
-                    <a:bodyPr/>
-                    <a:lstStyle/>
-                    <a:p>
-                      <a:r>
-                        <a:rPr sz="1150" b="0">
-                          <a:solidFill>
-                            <a:srgbClr val="1A2233"/>
-                          </a:solidFill>
-                          <a:latin typeface="Microsoft JhengHei"/>
-                          <a:ea typeface="Microsoft JhengHei"/>
-                          <a:cs typeface="Microsoft JhengHei"/>
-                        </a:rPr>
-                        <a:t>安侯建業聯合會計師事務所</a:t>
-                      </a:r>
-                    </a:p>
-                  </a:txBody>
-                  <a:tcPr anchor="ctr" marL="73152" marT="9144" marB="9144">
-                    <a:solidFill>
-                      <a:srgbClr val="EEF2F9"/>
-                    </a:solidFill>
-                  </a:tcPr>
-                </a:tc>
-                <a:tc>
-                  <a:txBody>
-                    <a:bodyPr/>
-                    <a:lstStyle/>
-                    <a:p>
-                      <a:r>
-                        <a:rPr sz="1150" b="0">
-                          <a:solidFill>
-                            <a:srgbClr val="1A2233"/>
-                          </a:solidFill>
-                          <a:latin typeface="Microsoft JhengHei"/>
-                          <a:ea typeface="Microsoft JhengHei"/>
-                          <a:cs typeface="Microsoft JhengHei"/>
-                        </a:rPr>
                         <a:t>鄒依芸、毛聖崴</a:t>
-                      </a:r>
-                    </a:p>
-                  </a:txBody>
-                  <a:tcPr anchor="ctr" marL="73152" marT="9144" marB="9144">
-                    <a:solidFill>
-                      <a:srgbClr val="EEF2F9"/>
-                    </a:solidFill>
-                  </a:tcPr>
-                </a:tc>
-              </a:tr>
-              <a:tr h="448056">
-                <a:tc>
-                  <a:txBody>
-                    <a:bodyPr/>
-                    <a:lstStyle/>
-                    <a:p>
-                      <a:r>
-                        <a:rPr sz="1150" b="0">
-                          <a:solidFill>
-                            <a:srgbClr val="1A2233"/>
-                          </a:solidFill>
-                          <a:latin typeface="Microsoft JhengHei"/>
-                          <a:ea typeface="Microsoft JhengHei"/>
-                          <a:cs typeface="Microsoft JhengHei"/>
-                        </a:rPr>
-                        <a:t>麗清</a:t>
-                      </a:r>
-                    </a:p>
-                  </a:txBody>
-                  <a:tcPr anchor="ctr" marL="73152" marT="9144" marB="9144">
-                    <a:solidFill>
-                      <a:srgbClr val="FFFFFF"/>
-                    </a:solidFill>
-                  </a:tcPr>
-                </a:tc>
-                <a:tc>
-                  <a:txBody>
-                    <a:bodyPr/>
-                    <a:lstStyle/>
-                    <a:p>
-                      <a:r>
-                        <a:rPr sz="1150" b="0">
-                          <a:solidFill>
-                            <a:srgbClr val="1A2233"/>
-                          </a:solidFill>
-                          <a:latin typeface="Microsoft JhengHei"/>
-                          <a:ea typeface="Microsoft JhengHei"/>
-                          <a:cs typeface="Microsoft JhengHei"/>
-                        </a:rPr>
-                        <a:t>3346</a:t>
-                      </a:r>
-                    </a:p>
-                  </a:txBody>
-                  <a:tcPr anchor="ctr" marL="73152" marT="9144" marB="9144">
-                    <a:solidFill>
-                      <a:srgbClr val="FFFFFF"/>
-                    </a:solidFill>
-                  </a:tcPr>
-                </a:tc>
-                <a:tc>
-                  <a:txBody>
-                    <a:bodyPr/>
-                    <a:lstStyle/>
-                    <a:p>
-                      <a:r>
-                        <a:rPr sz="1150" b="1">
-                          <a:solidFill>
-                            <a:srgbClr val="E63946"/>
-                          </a:solidFill>
-                          <a:latin typeface="Microsoft JhengHei"/>
-                          <a:ea typeface="Microsoft JhengHei"/>
-                          <a:cs typeface="Microsoft JhengHei"/>
-                        </a:rPr>
-                        <a:t>駭客攻擊</a:t>
-                      </a:r>
-                    </a:p>
-                  </a:txBody>
-                  <a:tcPr anchor="ctr" marL="73152" marT="9144" marB="9144">
-                    <a:solidFill>
-                      <a:srgbClr val="FFFFFF"/>
-                    </a:solidFill>
-                  </a:tcPr>
-                </a:tc>
-                <a:tc>
-                  <a:txBody>
-                    <a:bodyPr/>
-                    <a:lstStyle/>
-                    <a:p>
-                      <a:r>
-                        <a:rPr sz="1150" b="0">
-                          <a:solidFill>
-                            <a:srgbClr val="1A2233"/>
-                          </a:solidFill>
-                          <a:latin typeface="Microsoft JhengHei"/>
-                          <a:ea typeface="Microsoft JhengHei"/>
-                          <a:cs typeface="Microsoft JhengHei"/>
-                        </a:rPr>
-                        <a:t>勤業眾信聯合會計師事務所</a:t>
-                      </a:r>
-                    </a:p>
-                  </a:txBody>
-                  <a:tcPr anchor="ctr" marL="73152" marT="9144" marB="9144">
-                    <a:solidFill>
-                      <a:srgbClr val="FFFFFF"/>
-                    </a:solidFill>
-                  </a:tcPr>
-                </a:tc>
-                <a:tc>
-                  <a:txBody>
-                    <a:bodyPr/>
-                    <a:lstStyle/>
-                    <a:p>
-                      <a:r>
-                        <a:rPr sz="1150" b="0">
-                          <a:solidFill>
-                            <a:srgbClr val="1A2233"/>
-                          </a:solidFill>
-                          <a:latin typeface="Microsoft JhengHei"/>
-                          <a:ea typeface="Microsoft JhengHei"/>
-                          <a:cs typeface="Microsoft JhengHei"/>
-                        </a:rPr>
-                        <a:t>陳致源、黃堯麟</a:t>
-                      </a:r>
-                    </a:p>
-                  </a:txBody>
-                  <a:tcPr anchor="ctr" marL="73152" marT="9144" marB="9144">
-                    <a:solidFill>
-                      <a:srgbClr val="FFFFFF"/>
-                    </a:solidFill>
-                  </a:tcPr>
-                </a:tc>
-              </a:tr>
-              <a:tr h="448056">
-                <a:tc>
-                  <a:txBody>
-                    <a:bodyPr/>
-                    <a:lstStyle/>
-                    <a:p>
-                      <a:r>
-                        <a:rPr sz="1150" b="0">
-                          <a:solidFill>
-                            <a:srgbClr val="1A2233"/>
-                          </a:solidFill>
-                          <a:latin typeface="Microsoft JhengHei"/>
-                          <a:ea typeface="Microsoft JhengHei"/>
-                          <a:cs typeface="Microsoft JhengHei"/>
-                        </a:rPr>
-                        <a:t>GOGOLOOK</a:t>
-                      </a:r>
-                    </a:p>
-                  </a:txBody>
-                  <a:tcPr anchor="ctr" marL="73152" marT="9144" marB="9144">
-                    <a:solidFill>
-                      <a:srgbClr val="EEF2F9"/>
-                    </a:solidFill>
-                  </a:tcPr>
-                </a:tc>
-                <a:tc>
-                  <a:txBody>
-                    <a:bodyPr/>
-                    <a:lstStyle/>
-                    <a:p>
-                      <a:r>
-                        <a:rPr sz="1150" b="0">
-                          <a:solidFill>
-                            <a:srgbClr val="1A2233"/>
-                          </a:solidFill>
-                          <a:latin typeface="Microsoft JhengHei"/>
-                          <a:ea typeface="Microsoft JhengHei"/>
-                          <a:cs typeface="Microsoft JhengHei"/>
-                        </a:rPr>
-                        <a:t>6902</a:t>
-                      </a:r>
-                    </a:p>
-                  </a:txBody>
-                  <a:tcPr anchor="ctr" marL="73152" marT="9144" marB="9144">
-                    <a:solidFill>
-                      <a:srgbClr val="EEF2F9"/>
-                    </a:solidFill>
-                  </a:tcPr>
-                </a:tc>
-                <a:tc>
-                  <a:txBody>
-                    <a:bodyPr/>
-                    <a:lstStyle/>
-                    <a:p>
-                      <a:r>
-                        <a:rPr sz="1150" b="1">
-                          <a:solidFill>
-                            <a:srgbClr val="5C6679"/>
-                          </a:solidFill>
-                          <a:latin typeface="Microsoft JhengHei"/>
-                          <a:ea typeface="Microsoft JhengHei"/>
-                          <a:cs typeface="Microsoft JhengHei"/>
-                        </a:rPr>
-                        <a:t>其他</a:t>
-                      </a:r>
-                    </a:p>
-                  </a:txBody>
-                  <a:tcPr anchor="ctr" marL="73152" marT="9144" marB="9144">
-                    <a:solidFill>
-                      <a:srgbClr val="EEF2F9"/>
-                    </a:solidFill>
-                  </a:tcPr>
-                </a:tc>
-                <a:tc>
-                  <a:txBody>
-                    <a:bodyPr/>
-                    <a:lstStyle/>
-                    <a:p>
-                      <a:r>
-                        <a:rPr sz="1150" b="0">
-                          <a:solidFill>
-                            <a:srgbClr val="1A2233"/>
-                          </a:solidFill>
-                          <a:latin typeface="Microsoft JhengHei"/>
-                          <a:ea typeface="Microsoft JhengHei"/>
-                          <a:cs typeface="Microsoft JhengHei"/>
-                        </a:rPr>
-                        <a:t>資誠聯合會計師事務所</a:t>
-                      </a:r>
-                    </a:p>
-                  </a:txBody>
-                  <a:tcPr anchor="ctr" marL="73152" marT="9144" marB="9144">
-                    <a:solidFill>
-                      <a:srgbClr val="EEF2F9"/>
-                    </a:solidFill>
-                  </a:tcPr>
-                </a:tc>
-                <a:tc>
-                  <a:txBody>
-                    <a:bodyPr/>
-                    <a:lstStyle/>
-                    <a:p>
-                      <a:r>
-                        <a:rPr sz="1150" b="0">
-                          <a:solidFill>
-                            <a:srgbClr val="1A2233"/>
-                          </a:solidFill>
-                          <a:latin typeface="Microsoft JhengHei"/>
-                          <a:ea typeface="Microsoft JhengHei"/>
-                          <a:cs typeface="Microsoft JhengHei"/>
-                        </a:rPr>
-                        <a:t>吳尚燉、王昱欣</a:t>
-                      </a:r>
-                    </a:p>
-                  </a:txBody>
-                  <a:tcPr anchor="ctr" marL="73152" marT="9144" marB="9144">
-                    <a:solidFill>
-                      <a:srgbClr val="EEF2F9"/>
-                    </a:solidFill>
-                  </a:tcPr>
-                </a:tc>
-              </a:tr>
-              <a:tr h="448056">
-                <a:tc>
-                  <a:txBody>
-                    <a:bodyPr/>
-                    <a:lstStyle/>
-                    <a:p>
-                      <a:r>
-                        <a:rPr sz="1150" b="0">
-                          <a:solidFill>
-                            <a:srgbClr val="1A2233"/>
-                          </a:solidFill>
-                          <a:latin typeface="Microsoft JhengHei"/>
-                          <a:ea typeface="Microsoft JhengHei"/>
-                          <a:cs typeface="Microsoft JhengHei"/>
-                        </a:rPr>
-                        <a:t>網家</a:t>
-                      </a:r>
-                    </a:p>
-                  </a:txBody>
-                  <a:tcPr anchor="ctr" marL="73152" marT="9144" marB="9144">
-                    <a:solidFill>
-                      <a:srgbClr val="FFFFFF"/>
-                    </a:solidFill>
-                  </a:tcPr>
-                </a:tc>
-                <a:tc>
-                  <a:txBody>
-                    <a:bodyPr/>
-                    <a:lstStyle/>
-                    <a:p>
-                      <a:r>
-                        <a:rPr sz="1150" b="0">
-                          <a:solidFill>
-                            <a:srgbClr val="1A2233"/>
-                          </a:solidFill>
-                          <a:latin typeface="Microsoft JhengHei"/>
-                          <a:ea typeface="Microsoft JhengHei"/>
-                          <a:cs typeface="Microsoft JhengHei"/>
-                        </a:rPr>
-                        <a:t>8044</a:t>
-                      </a:r>
-                    </a:p>
-                  </a:txBody>
-                  <a:tcPr anchor="ctr" marL="73152" marT="9144" marB="9144">
-                    <a:solidFill>
-                      <a:srgbClr val="FFFFFF"/>
-                    </a:solidFill>
-                  </a:tcPr>
-                </a:tc>
-                <a:tc>
-                  <a:txBody>
-                    <a:bodyPr/>
-                    <a:lstStyle/>
-                    <a:p>
-                      <a:r>
-                        <a:rPr sz="1150" b="1">
-                          <a:solidFill>
-                            <a:srgbClr val="E63946"/>
-                          </a:solidFill>
-                          <a:latin typeface="Microsoft JhengHei"/>
-                          <a:ea typeface="Microsoft JhengHei"/>
-                          <a:cs typeface="Microsoft JhengHei"/>
-                        </a:rPr>
-                        <a:t>駭客攻擊</a:t>
-                      </a:r>
-                    </a:p>
-                  </a:txBody>
-                  <a:tcPr anchor="ctr" marL="73152" marT="9144" marB="9144">
-                    <a:solidFill>
-                      <a:srgbClr val="FFFFFF"/>
-                    </a:solidFill>
-                  </a:tcPr>
-                </a:tc>
-                <a:tc>
-                  <a:txBody>
-                    <a:bodyPr/>
-                    <a:lstStyle/>
-                    <a:p>
-                      <a:r>
-                        <a:rPr sz="1150" b="0">
-                          <a:solidFill>
-                            <a:srgbClr val="1A2233"/>
-                          </a:solidFill>
-                          <a:latin typeface="Microsoft JhengHei"/>
-                          <a:ea typeface="Microsoft JhengHei"/>
-                          <a:cs typeface="Microsoft JhengHei"/>
-                        </a:rPr>
-                        <a:t>資誠聯合會計師事務所</a:t>
-                      </a:r>
-                    </a:p>
-                  </a:txBody>
-                  <a:tcPr anchor="ctr" marL="73152" marT="9144" marB="9144">
-                    <a:solidFill>
-                      <a:srgbClr val="FFFFFF"/>
-                    </a:solidFill>
-                  </a:tcPr>
-                </a:tc>
-                <a:tc>
-                  <a:txBody>
-                    <a:bodyPr/>
-                    <a:lstStyle/>
-                    <a:p>
-                      <a:r>
-                        <a:rPr sz="1150" b="0">
-                          <a:solidFill>
-                            <a:srgbClr val="1A2233"/>
-                          </a:solidFill>
-                          <a:latin typeface="Microsoft JhengHei"/>
-                          <a:ea typeface="Microsoft JhengHei"/>
-                          <a:cs typeface="Microsoft JhengHei"/>
-                        </a:rPr>
-                        <a:t>廖容翎、梁嬋女</a:t>
                       </a:r>
                     </a:p>
                   </a:txBody>
@@ -9119,7 +8630,7 @@
                 <a:ea typeface="Microsoft JhengHei"/>
                 <a:cs typeface="Microsoft JhengHei"/>
               </a:rPr>
-              <a:t>上銀 </a:t>
+              <a:t>藥華藥 </a:t>
             </a:r>
             <a:r>
               <a:rPr sz="1300" b="0">
@@ -9130,7 +8641,7 @@
                 <a:ea typeface="Microsoft JhengHei"/>
                 <a:cs typeface="Microsoft JhengHei"/>
               </a:rPr>
-              <a:t>2049</a:t>
+              <a:t>6446</a:t>
             </a:r>
           </a:p>
         </p:txBody>
@@ -9263,7 +8774,7 @@
                 <a:ea typeface="Microsoft JhengHei"/>
                 <a:cs typeface="Microsoft JhengHei"/>
               </a:rPr>
-              <a:t>本公司義大利子公司部份資訊系統遭受駭客網路攻擊</a:t>
+              <a:t>本公司及泛泰醫療子公司之部分資訊系統遭受駭客網路攻擊，初步評估對公司營運無重大影響。</a:t>
             </a:r>
           </a:p>
         </p:txBody>
@@ -9315,7 +8826,7 @@
                 <a:ea typeface="Microsoft JhengHei"/>
                 <a:cs typeface="Microsoft JhengHei"/>
               </a:rPr>
-              <a:t>完成相關安全漏洞修復後，將持續強化網路與資訊基礎架構之安全防護機制及管理措施，確保資訊系統穩定運作及資訊安全。</a:t>
+              <a:t>本公司將持續提升網路與資訊基礎架構之安全管控，以確保資訊安全。</a:t>
             </a:r>
           </a:p>
         </p:txBody>
@@ -9381,7 +8892,7 @@
             <a:avLst/>
           </a:prstGeom>
           <a:solidFill>
-            <a:srgbClr val="27A6C4"/>
+            <a:srgbClr val="E63946"/>
           </a:solidFill>
           <a:ln>
             <a:noFill/>
@@ -9442,7 +8953,7 @@
                 <a:ea typeface="Microsoft JhengHei"/>
                 <a:cs typeface="Microsoft JhengHei"/>
               </a:rPr>
-              <a:t>萬達寵物 </a:t>
+              <a:t>上銀 </a:t>
             </a:r>
             <a:r>
               <a:rPr sz="1300" b="0">
@@ -9453,7 +8964,7 @@
                 <a:ea typeface="Microsoft JhengHei"/>
                 <a:cs typeface="Microsoft JhengHei"/>
               </a:rPr>
-              <a:t>6968</a:t>
+              <a:t>2049</a:t>
             </a:r>
           </a:p>
         </p:txBody>
@@ -9473,7 +8984,7 @@
             <a:avLst/>
           </a:prstGeom>
           <a:solidFill>
-            <a:srgbClr val="27A6C4"/>
+            <a:srgbClr val="E63946"/>
           </a:solidFill>
           <a:ln>
             <a:noFill/>
@@ -9534,7 +9045,7 @@
                 <a:ea typeface="Microsoft JhengHei"/>
                 <a:cs typeface="Microsoft JhengHei"/>
               </a:rPr>
-              <a:t>個資外洩</a:t>
+              <a:t>駭客攻擊</a:t>
             </a:r>
           </a:p>
         </p:txBody>
@@ -9569,7 +9080,7 @@
             <a:r>
               <a:rPr sz="1100" b="1">
                 <a:solidFill>
-                  <a:srgbClr val="27A6C4"/>
+                  <a:srgbClr val="E63946"/>
                 </a:solidFill>
                 <a:latin typeface="Microsoft JhengHei"/>
                 <a:ea typeface="Microsoft JhengHei"/>
@@ -9586,7 +9097,7 @@
                 <a:ea typeface="Microsoft JhengHei"/>
                 <a:cs typeface="Microsoft JhengHei"/>
               </a:rPr>
-              <a:t>本公司因合作廠商資訊系統遭不明人士入侵，疑似部份資料外洩</a:t>
+              <a:t>本公司義大利子公司部份資訊系統遭受駭客網路攻擊</a:t>
             </a:r>
           </a:p>
         </p:txBody>
@@ -9621,7 +9132,7 @@
             <a:r>
               <a:rPr sz="1100" b="1">
                 <a:solidFill>
-                  <a:srgbClr val="27A6C4"/>
+                  <a:srgbClr val="E63946"/>
                 </a:solidFill>
                 <a:latin typeface="Microsoft JhengHei"/>
                 <a:ea typeface="Microsoft JhengHei"/>
@@ -9638,7 +9149,7 @@
                 <a:ea typeface="Microsoft JhengHei"/>
                 <a:cs typeface="Microsoft JhengHei"/>
               </a:rPr>
-              <a:t>本公司並無與合作廠商串接會員資料、信用卡號、銀行帳戶等敏感資訊，不會產生任何金流交易。本公司已嚴正要求合作廠商技術團隊，…</a:t>
+              <a:t>完成相關安全漏洞修復後，將持續強化網路與資訊基礎架構之安全防護機制及管理措施，確保資訊系統穩定運作及資訊安全。</a:t>
             </a:r>
           </a:p>
         </p:txBody>
@@ -9704,7 +9215,7 @@
             <a:avLst/>
           </a:prstGeom>
           <a:solidFill>
-            <a:srgbClr val="5C6679"/>
+            <a:srgbClr val="27A6C4"/>
           </a:solidFill>
           <a:ln>
             <a:noFill/>
@@ -9765,7 +9276,7 @@
                 <a:ea typeface="Microsoft JhengHei"/>
                 <a:cs typeface="Microsoft JhengHei"/>
               </a:rPr>
-              <a:t>淳安 </a:t>
+              <a:t>萬達寵物 </a:t>
             </a:r>
             <a:r>
               <a:rPr sz="1300" b="0">
@@ -9776,7 +9287,7 @@
                 <a:ea typeface="Microsoft JhengHei"/>
                 <a:cs typeface="Microsoft JhengHei"/>
               </a:rPr>
-              <a:t>6283</a:t>
+              <a:t>6968</a:t>
             </a:r>
           </a:p>
         </p:txBody>
@@ -9796,7 +9307,7 @@
             <a:avLst/>
           </a:prstGeom>
           <a:solidFill>
-            <a:srgbClr val="5C6679"/>
+            <a:srgbClr val="27A6C4"/>
           </a:solidFill>
           <a:ln>
             <a:noFill/>
@@ -9857,7 +9368,7 @@
                 <a:ea typeface="Microsoft JhengHei"/>
                 <a:cs typeface="Microsoft JhengHei"/>
               </a:rPr>
-              <a:t>其他</a:t>
+              <a:t>個資外洩</a:t>
             </a:r>
           </a:p>
         </p:txBody>
@@ -9892,7 +9403,7 @@
             <a:r>
               <a:rPr sz="1100" b="1">
                 <a:solidFill>
-                  <a:srgbClr val="5C6679"/>
+                  <a:srgbClr val="27A6C4"/>
                 </a:solidFill>
                 <a:latin typeface="Microsoft JhengHei"/>
                 <a:ea typeface="Microsoft JhengHei"/>
@@ -9909,7 +9420,7 @@
                 <a:ea typeface="Microsoft JhengHei"/>
                 <a:cs typeface="Microsoft JhengHei"/>
               </a:rPr>
-              <a:t>本公司網路資安事件說明</a:t>
+              <a:t>本公司因合作廠商資訊系統遭不明人士入侵，疑似部份資料外洩</a:t>
             </a:r>
           </a:p>
         </p:txBody>
@@ -9944,7 +9455,7 @@
             <a:r>
               <a:rPr sz="1100" b="1">
                 <a:solidFill>
-                  <a:srgbClr val="5C6679"/>
+                  <a:srgbClr val="27A6C4"/>
                 </a:solidFill>
                 <a:latin typeface="Microsoft JhengHei"/>
                 <a:ea typeface="Microsoft JhengHei"/>
@@ -9961,7 +9472,7 @@
                 <a:ea typeface="Microsoft JhengHei"/>
                 <a:cs typeface="Microsoft JhengHei"/>
               </a:rPr>
-              <a:t>本公司後續將持續提升網路與資訊基礎架構之安全管控，以確保資訊安全。</a:t>
+              <a:t>本公司並無與合作廠商串接會員資料、信用卡號、銀行帳戶等敏感資訊，不會產生任何金流交易。本公司已嚴正要求合作廠商技術團隊，…</a:t>
             </a:r>
           </a:p>
         </p:txBody>
@@ -10486,7 +9997,7 @@
             <a:avLst/>
           </a:prstGeom>
           <a:solidFill>
-            <a:srgbClr val="E63946"/>
+            <a:srgbClr val="5C6679"/>
           </a:solidFill>
           <a:ln>
             <a:noFill/>
@@ -10547,7 +10058,7 @@
                 <a:ea typeface="Microsoft JhengHei"/>
                 <a:cs typeface="Microsoft JhengHei"/>
               </a:rPr>
-              <a:t>松上 </a:t>
+              <a:t>淳安 </a:t>
             </a:r>
             <a:r>
               <a:rPr sz="1300" b="0">
@@ -10558,7 +10069,7 @@
                 <a:ea typeface="Microsoft JhengHei"/>
                 <a:cs typeface="Microsoft JhengHei"/>
               </a:rPr>
-              <a:t>6156</a:t>
+              <a:t>6283</a:t>
             </a:r>
           </a:p>
         </p:txBody>
@@ -10578,7 +10089,7 @@
             <a:avLst/>
           </a:prstGeom>
           <a:solidFill>
-            <a:srgbClr val="E63946"/>
+            <a:srgbClr val="5C6679"/>
           </a:solidFill>
           <a:ln>
             <a:noFill/>
@@ -10639,7 +10150,7 @@
                 <a:ea typeface="Microsoft JhengHei"/>
                 <a:cs typeface="Microsoft JhengHei"/>
               </a:rPr>
-              <a:t>駭客攻擊</a:t>
+              <a:t>其他</a:t>
             </a:r>
           </a:p>
         </p:txBody>
@@ -10674,7 +10185,7 @@
             <a:r>
               <a:rPr sz="1100" b="1">
                 <a:solidFill>
-                  <a:srgbClr val="E63946"/>
+                  <a:srgbClr val="5C6679"/>
                 </a:solidFill>
                 <a:latin typeface="Microsoft JhengHei"/>
                 <a:ea typeface="Microsoft JhengHei"/>
@@ -10691,7 +10202,7 @@
                 <a:ea typeface="Microsoft JhengHei"/>
                 <a:cs typeface="Microsoft JhengHei"/>
               </a:rPr>
-              <a:t>本公司使用之部分資訊系統遭受駭客網路攻擊。</a:t>
+              <a:t>本公司網路資安事件說明</a:t>
             </a:r>
           </a:p>
         </p:txBody>
@@ -10726,7 +10237,7 @@
             <a:r>
               <a:rPr sz="1100" b="1">
                 <a:solidFill>
-                  <a:srgbClr val="E63946"/>
+                  <a:srgbClr val="5C6679"/>
                 </a:solidFill>
                 <a:latin typeface="Microsoft JhengHei"/>
                 <a:ea typeface="Microsoft JhengHei"/>
@@ -10743,7 +10254,7 @@
                 <a:ea typeface="Microsoft JhengHei"/>
                 <a:cs typeface="Microsoft JhengHei"/>
               </a:rPr>
-              <a:t>本公司後續仍將持續提升網路與資訊基礎架構之安全管控以確保資訊安全。</a:t>
+              <a:t>本公司後續將持續提升網路與資訊基礎架構之安全管控，以確保資訊安全。</a:t>
             </a:r>
           </a:p>
         </p:txBody>
@@ -10870,7 +10381,7 @@
                 <a:ea typeface="Microsoft JhengHei"/>
                 <a:cs typeface="Microsoft JhengHei"/>
               </a:rPr>
-              <a:t>優盛 </a:t>
+              <a:t>松上 </a:t>
             </a:r>
             <a:r>
               <a:rPr sz="1300" b="0">
@@ -10881,7 +10392,7 @@
                 <a:ea typeface="Microsoft JhengHei"/>
                 <a:cs typeface="Microsoft JhengHei"/>
               </a:rPr>
-              <a:t>4121</a:t>
+              <a:t>6156</a:t>
             </a:r>
           </a:p>
         </p:txBody>
@@ -11014,7 +10525,7 @@
                 <a:ea typeface="Microsoft JhengHei"/>
                 <a:cs typeface="Microsoft JhengHei"/>
               </a:rPr>
-              <a:t>本公司之官網於今天下午遭受網路駭客攻擊</a:t>
+              <a:t>本公司使用之部分資訊系統遭受駭客網路攻擊。</a:t>
             </a:r>
           </a:p>
         </p:txBody>
@@ -11066,7 +10577,7 @@
                 <a:ea typeface="Microsoft JhengHei"/>
                 <a:cs typeface="Microsoft JhengHei"/>
               </a:rPr>
-              <a:t>本公司後續將持續提升網路與資訊基礎架構之安全管控以確保資訊安全。</a:t>
+              <a:t>本公司後續仍將持續提升網路與資訊基礎架構之安全管控以確保資訊安全。</a:t>
             </a:r>
           </a:p>
         </p:txBody>
@@ -11193,7 +10704,7 @@
                 <a:ea typeface="Microsoft JhengHei"/>
                 <a:cs typeface="Microsoft JhengHei"/>
               </a:rPr>
-              <a:t>麗清 </a:t>
+              <a:t>優盛 </a:t>
             </a:r>
             <a:r>
               <a:rPr sz="1300" b="0">
@@ -11204,7 +10715,7 @@
                 <a:ea typeface="Microsoft JhengHei"/>
                 <a:cs typeface="Microsoft JhengHei"/>
               </a:rPr>
-              <a:t>3346</a:t>
+              <a:t>4121</a:t>
             </a:r>
           </a:p>
         </p:txBody>
@@ -11337,7 +10848,7 @@
                 <a:ea typeface="Microsoft JhengHei"/>
                 <a:cs typeface="Microsoft JhengHei"/>
               </a:rPr>
-              <a:t>本公司部份資訊系統遭受駭客網路攻擊。</a:t>
+              <a:t>本公司之官網於今天下午遭受網路駭客攻擊</a:t>
             </a:r>
           </a:p>
         </p:txBody>
@@ -11389,789 +10900,7 @@
                 <a:ea typeface="Microsoft JhengHei"/>
                 <a:cs typeface="Microsoft JhengHei"/>
               </a:rPr>
-              <a:t>修復安全漏洞並持續提升網路與資訊基礎架構之安全管控以確保資訊安全。</a:t>
-            </a:r>
-          </a:p>
-        </p:txBody>
-      </p:sp>
-      <p:sp>
-        <p:nvSpPr>
-          <p:cNvPr id="26" name="Rounded Rectangle 25"/>
-          <p:cNvSpPr/>
-          <p:nvPr/>
-        </p:nvSpPr>
-        <p:spPr>
-          <a:xfrm>
-            <a:off x="6172200" y="3886200"/>
-            <a:ext cx="5394960" cy="2148840"/>
-          </a:xfrm>
-          <a:prstGeom prst="roundRect">
-            <a:avLst/>
-          </a:prstGeom>
-          <a:solidFill>
-            <a:srgbClr val="FFFFFF"/>
-          </a:solidFill>
-          <a:ln w="12700">
-            <a:solidFill>
-              <a:srgbClr val="DDE3EE"/>
-            </a:solidFill>
-          </a:ln>
-          <a:effectLst/>
-        </p:spPr>
-        <p:style>
-          <a:lnRef idx="1">
-            <a:schemeClr val="accent1"/>
-          </a:lnRef>
-          <a:fillRef idx="3">
-            <a:schemeClr val="accent1"/>
-          </a:fillRef>
-          <a:effectRef idx="2">
-            <a:schemeClr val="accent1"/>
-          </a:effectRef>
-          <a:fontRef idx="minor">
-            <a:schemeClr val="lt1"/>
-          </a:fontRef>
-        </p:style>
-        <p:txBody>
-          <a:bodyPr rtlCol="0" anchor="ctr"/>
-          <a:lstStyle/>
-          <a:p>
-            <a:pPr algn="ctr"/>
-          </a:p>
-        </p:txBody>
-      </p:sp>
-      <p:sp>
-        <p:nvSpPr>
-          <p:cNvPr id="27" name="Rectangle 26"/>
-          <p:cNvSpPr/>
-          <p:nvPr/>
-        </p:nvSpPr>
-        <p:spPr>
-          <a:xfrm>
-            <a:off x="6172200" y="3886200"/>
-            <a:ext cx="5394960" cy="109728"/>
-          </a:xfrm>
-          <a:prstGeom prst="rect">
-            <a:avLst/>
-          </a:prstGeom>
-          <a:solidFill>
-            <a:srgbClr val="5C6679"/>
-          </a:solidFill>
-          <a:ln>
-            <a:noFill/>
-          </a:ln>
-          <a:effectLst/>
-        </p:spPr>
-        <p:style>
-          <a:lnRef idx="1">
-            <a:schemeClr val="accent1"/>
-          </a:lnRef>
-          <a:fillRef idx="3">
-            <a:schemeClr val="accent1"/>
-          </a:fillRef>
-          <a:effectRef idx="2">
-            <a:schemeClr val="accent1"/>
-          </a:effectRef>
-          <a:fontRef idx="minor">
-            <a:schemeClr val="lt1"/>
-          </a:fontRef>
-        </p:style>
-        <p:txBody>
-          <a:bodyPr rtlCol="0" anchor="ctr"/>
-          <a:lstStyle/>
-          <a:p>
-            <a:pPr algn="ctr"/>
-          </a:p>
-        </p:txBody>
-      </p:sp>
-      <p:sp>
-        <p:nvSpPr>
-          <p:cNvPr id="28" name="TextBox 27"/>
-          <p:cNvSpPr txBox="1"/>
-          <p:nvPr/>
-        </p:nvSpPr>
-        <p:spPr>
-          <a:xfrm>
-            <a:off x="6400800" y="4105656"/>
-            <a:ext cx="3657600" cy="365760"/>
-          </a:xfrm>
-          <a:prstGeom prst="rect">
-            <a:avLst/>
-          </a:prstGeom>
-          <a:noFill/>
-        </p:spPr>
-        <p:txBody>
-          <a:bodyPr wrap="square" anchor="ctr" lIns="0" rIns="0" tIns="0" bIns="0">
-            <a:spAutoFit/>
-          </a:bodyPr>
-          <a:lstStyle/>
-          <a:p>
-            <a:pPr algn="l"/>
-            <a:r>
-              <a:rPr sz="1600" b="1">
-                <a:solidFill>
-                  <a:srgbClr val="1A2233"/>
-                </a:solidFill>
-                <a:latin typeface="Microsoft JhengHei"/>
-                <a:ea typeface="Microsoft JhengHei"/>
-                <a:cs typeface="Microsoft JhengHei"/>
-              </a:rPr>
-              <a:t>GOGOLOOK </a:t>
-            </a:r>
-            <a:r>
-              <a:rPr sz="1300" b="0">
-                <a:solidFill>
-                  <a:srgbClr val="5C6679"/>
-                </a:solidFill>
-                <a:latin typeface="Microsoft JhengHei"/>
-                <a:ea typeface="Microsoft JhengHei"/>
-                <a:cs typeface="Microsoft JhengHei"/>
-              </a:rPr>
-              <a:t>6902</a:t>
-            </a:r>
-          </a:p>
-        </p:txBody>
-      </p:sp>
-      <p:sp>
-        <p:nvSpPr>
-          <p:cNvPr id="29" name="Rounded Rectangle 28"/>
-          <p:cNvSpPr/>
-          <p:nvPr/>
-        </p:nvSpPr>
-        <p:spPr>
-          <a:xfrm>
-            <a:off x="10149840" y="4123944"/>
-            <a:ext cx="1234440" cy="347472"/>
-          </a:xfrm>
-          <a:prstGeom prst="roundRect">
-            <a:avLst/>
-          </a:prstGeom>
-          <a:solidFill>
-            <a:srgbClr val="5C6679"/>
-          </a:solidFill>
-          <a:ln>
-            <a:noFill/>
-          </a:ln>
-          <a:effectLst/>
-        </p:spPr>
-        <p:style>
-          <a:lnRef idx="1">
-            <a:schemeClr val="accent1"/>
-          </a:lnRef>
-          <a:fillRef idx="3">
-            <a:schemeClr val="accent1"/>
-          </a:fillRef>
-          <a:effectRef idx="2">
-            <a:schemeClr val="accent1"/>
-          </a:effectRef>
-          <a:fontRef idx="minor">
-            <a:schemeClr val="lt1"/>
-          </a:fontRef>
-        </p:style>
-        <p:txBody>
-          <a:bodyPr rtlCol="0" anchor="ctr"/>
-          <a:lstStyle/>
-          <a:p>
-            <a:pPr algn="ctr"/>
-          </a:p>
-        </p:txBody>
-      </p:sp>
-      <p:sp>
-        <p:nvSpPr>
-          <p:cNvPr id="30" name="TextBox 29"/>
-          <p:cNvSpPr txBox="1"/>
-          <p:nvPr/>
-        </p:nvSpPr>
-        <p:spPr>
-          <a:xfrm>
-            <a:off x="10149840" y="4123944"/>
-            <a:ext cx="1234440" cy="347472"/>
-          </a:xfrm>
-          <a:prstGeom prst="rect">
-            <a:avLst/>
-          </a:prstGeom>
-          <a:noFill/>
-        </p:spPr>
-        <p:txBody>
-          <a:bodyPr wrap="square" anchor="ctr" lIns="0" rIns="0" tIns="0" bIns="0">
-            <a:spAutoFit/>
-          </a:bodyPr>
-          <a:lstStyle/>
-          <a:p>
-            <a:pPr algn="ctr"/>
-            <a:r>
-              <a:rPr sz="1050" b="1">
-                <a:solidFill>
-                  <a:srgbClr val="FFFFFF"/>
-                </a:solidFill>
-                <a:latin typeface="Microsoft JhengHei"/>
-                <a:ea typeface="Microsoft JhengHei"/>
-                <a:cs typeface="Microsoft JhengHei"/>
-              </a:rPr>
-              <a:t>其他</a:t>
-            </a:r>
-          </a:p>
-        </p:txBody>
-      </p:sp>
-      <p:sp>
-        <p:nvSpPr>
-          <p:cNvPr id="31" name="TextBox 30"/>
-          <p:cNvSpPr txBox="1"/>
-          <p:nvPr/>
-        </p:nvSpPr>
-        <p:spPr>
-          <a:xfrm>
-            <a:off x="6400800" y="4599432"/>
-            <a:ext cx="4937760" cy="640080"/>
-          </a:xfrm>
-          <a:prstGeom prst="rect">
-            <a:avLst/>
-          </a:prstGeom>
-          <a:noFill/>
-        </p:spPr>
-        <p:txBody>
-          <a:bodyPr wrap="square" anchor="t" lIns="0" rIns="0" tIns="0" bIns="0">
-            <a:spAutoFit/>
-          </a:bodyPr>
-          <a:lstStyle/>
-          <a:p>
-            <a:pPr algn="l">
-              <a:lnSpc>
-                <a:spcPts val="1500"/>
-              </a:lnSpc>
-            </a:pPr>
-            <a:r>
-              <a:rPr sz="1100" b="1">
-                <a:solidFill>
-                  <a:srgbClr val="5C6679"/>
-                </a:solidFill>
-                <a:latin typeface="Microsoft JhengHei"/>
-                <a:ea typeface="Microsoft JhengHei"/>
-                <a:cs typeface="Microsoft JhengHei"/>
-              </a:rPr>
-              <a:t>緣由　</a:t>
-            </a:r>
-            <a:r>
-              <a:rPr sz="1100" b="0">
-                <a:solidFill>
-                  <a:srgbClr val="1A2233"/>
-                </a:solidFill>
-                <a:latin typeface="Microsoft JhengHei"/>
-                <a:ea typeface="Microsoft JhengHei"/>
-                <a:cs typeface="Microsoft JhengHei"/>
-              </a:rPr>
-              <a:t>本公司發生網路資安事件。</a:t>
-            </a:r>
-          </a:p>
-        </p:txBody>
-      </p:sp>
-      <p:sp>
-        <p:nvSpPr>
-          <p:cNvPr id="32" name="TextBox 31"/>
-          <p:cNvSpPr txBox="1"/>
-          <p:nvPr/>
-        </p:nvSpPr>
-        <p:spPr>
-          <a:xfrm>
-            <a:off x="6400800" y="5257800"/>
-            <a:ext cx="4937760" cy="713232"/>
-          </a:xfrm>
-          <a:prstGeom prst="rect">
-            <a:avLst/>
-          </a:prstGeom>
-          <a:noFill/>
-        </p:spPr>
-        <p:txBody>
-          <a:bodyPr wrap="square" anchor="t" lIns="0" rIns="0" tIns="0" bIns="0">
-            <a:spAutoFit/>
-          </a:bodyPr>
-          <a:lstStyle/>
-          <a:p>
-            <a:pPr algn="l">
-              <a:lnSpc>
-                <a:spcPts val="1500"/>
-              </a:lnSpc>
-            </a:pPr>
-            <a:r>
-              <a:rPr sz="1100" b="1">
-                <a:solidFill>
-                  <a:srgbClr val="5C6679"/>
-                </a:solidFill>
-                <a:latin typeface="Microsoft JhengHei"/>
-                <a:ea typeface="Microsoft JhengHei"/>
-                <a:cs typeface="Microsoft JhengHei"/>
-              </a:rPr>
-              <a:t>因應　</a:t>
-            </a:r>
-            <a:r>
-              <a:rPr sz="1100" b="0">
-                <a:solidFill>
-                  <a:srgbClr val="1A2233"/>
-                </a:solidFill>
-                <a:latin typeface="Microsoft JhengHei"/>
-                <a:ea typeface="Microsoft JhengHei"/>
-                <a:cs typeface="Microsoft JhengHei"/>
-              </a:rPr>
-              <a:t>本公司後續仍持續強化資安管控及防禦機制，確保資訊安全與服務體驗。</a:t>
-            </a:r>
-          </a:p>
-        </p:txBody>
-      </p:sp>
-    </p:spTree>
-  </p:cSld>
-  <p:clrMapOvr>
-    <a:masterClrMapping/>
-  </p:clrMapOvr>
-</p:sld>
-</file>
-
-<file path=ppt/slides/slide8.xml><?xml version="1.0" encoding="utf-8"?>
-<p:sld xmlns:a="http://schemas.openxmlformats.org/drawingml/2006/main" xmlns:p="http://schemas.openxmlformats.org/presentationml/2006/main" xmlns:r="http://schemas.openxmlformats.org/officeDocument/2006/relationships">
-  <p:cSld>
-    <p:spTree>
-      <p:nvGrpSpPr>
-        <p:cNvPr id="1" name=""/>
-        <p:cNvGrpSpPr/>
-        <p:nvPr/>
-      </p:nvGrpSpPr>
-      <p:grpSpPr/>
-      <p:sp>
-        <p:nvSpPr>
-          <p:cNvPr id="2" name="Rectangle 1"/>
-          <p:cNvSpPr/>
-          <p:nvPr/>
-        </p:nvSpPr>
-        <p:spPr>
-          <a:xfrm>
-            <a:off x="0" y="0"/>
-            <a:ext cx="12191695" cy="6858000"/>
-          </a:xfrm>
-          <a:prstGeom prst="rect">
-            <a:avLst/>
-          </a:prstGeom>
-          <a:solidFill>
-            <a:srgbClr val="F6F8FC"/>
-          </a:solidFill>
-          <a:ln>
-            <a:noFill/>
-          </a:ln>
-          <a:effectLst/>
-        </p:spPr>
-        <p:style>
-          <a:lnRef idx="1">
-            <a:schemeClr val="accent1"/>
-          </a:lnRef>
-          <a:fillRef idx="3">
-            <a:schemeClr val="accent1"/>
-          </a:fillRef>
-          <a:effectRef idx="2">
-            <a:schemeClr val="accent1"/>
-          </a:effectRef>
-          <a:fontRef idx="minor">
-            <a:schemeClr val="lt1"/>
-          </a:fontRef>
-        </p:style>
-        <p:txBody>
-          <a:bodyPr rtlCol="0" anchor="ctr"/>
-          <a:lstStyle/>
-          <a:p>
-            <a:pPr algn="ctr"/>
-          </a:p>
-        </p:txBody>
-      </p:sp>
-      <p:sp>
-        <p:nvSpPr>
-          <p:cNvPr id="3" name="TextBox 2"/>
-          <p:cNvSpPr txBox="1"/>
-          <p:nvPr/>
-        </p:nvSpPr>
-        <p:spPr>
-          <a:xfrm>
-            <a:off x="548640" y="365760"/>
-            <a:ext cx="9144000" cy="640080"/>
-          </a:xfrm>
-          <a:prstGeom prst="rect">
-            <a:avLst/>
-          </a:prstGeom>
-          <a:noFill/>
-        </p:spPr>
-        <p:txBody>
-          <a:bodyPr wrap="square" anchor="t" lIns="0" rIns="0" tIns="0" bIns="0">
-            <a:spAutoFit/>
-          </a:bodyPr>
-          <a:lstStyle/>
-          <a:p>
-            <a:pPr algn="l"/>
-            <a:r>
-              <a:rPr sz="3000" b="1">
-                <a:solidFill>
-                  <a:srgbClr val="1A2233"/>
-                </a:solidFill>
-                <a:latin typeface="Microsoft JhengHei"/>
-                <a:ea typeface="Microsoft JhengHei"/>
-                <a:cs typeface="Microsoft JhengHei"/>
-              </a:rPr>
-              <a:t>個案因應重點（3）</a:t>
-            </a:r>
-          </a:p>
-        </p:txBody>
-      </p:sp>
-      <p:sp>
-        <p:nvSpPr>
-          <p:cNvPr id="4" name="TextBox 3"/>
-          <p:cNvSpPr txBox="1"/>
-          <p:nvPr/>
-        </p:nvSpPr>
-        <p:spPr>
-          <a:xfrm>
-            <a:off x="566928" y="1005840"/>
-            <a:ext cx="10058400" cy="365760"/>
-          </a:xfrm>
-          <a:prstGeom prst="rect">
-            <a:avLst/>
-          </a:prstGeom>
-          <a:noFill/>
-        </p:spPr>
-        <p:txBody>
-          <a:bodyPr wrap="square" anchor="t" lIns="0" rIns="0" tIns="0" bIns="0">
-            <a:spAutoFit/>
-          </a:bodyPr>
-          <a:lstStyle/>
-          <a:p>
-            <a:pPr algn="l"/>
-            <a:r>
-              <a:rPr sz="1300" b="0">
-                <a:solidFill>
-                  <a:srgbClr val="5C6679"/>
-                </a:solidFill>
-                <a:latin typeface="Microsoft JhengHei"/>
-                <a:ea typeface="Microsoft JhengHei"/>
-                <a:cs typeface="Microsoft JhengHei"/>
-              </a:rPr>
-              <a:t>各公司公告之發生緣由與因應措施摘要</a:t>
-            </a:r>
-          </a:p>
-        </p:txBody>
-      </p:sp>
-      <p:sp>
-        <p:nvSpPr>
-          <p:cNvPr id="5" name="Rounded Rectangle 4"/>
-          <p:cNvSpPr/>
-          <p:nvPr/>
-        </p:nvSpPr>
-        <p:spPr>
-          <a:xfrm>
-            <a:off x="548640" y="1554480"/>
-            <a:ext cx="5394960" cy="2148840"/>
-          </a:xfrm>
-          <a:prstGeom prst="roundRect">
-            <a:avLst/>
-          </a:prstGeom>
-          <a:solidFill>
-            <a:srgbClr val="FFFFFF"/>
-          </a:solidFill>
-          <a:ln w="12700">
-            <a:solidFill>
-              <a:srgbClr val="DDE3EE"/>
-            </a:solidFill>
-          </a:ln>
-          <a:effectLst/>
-        </p:spPr>
-        <p:style>
-          <a:lnRef idx="1">
-            <a:schemeClr val="accent1"/>
-          </a:lnRef>
-          <a:fillRef idx="3">
-            <a:schemeClr val="accent1"/>
-          </a:fillRef>
-          <a:effectRef idx="2">
-            <a:schemeClr val="accent1"/>
-          </a:effectRef>
-          <a:fontRef idx="minor">
-            <a:schemeClr val="lt1"/>
-          </a:fontRef>
-        </p:style>
-        <p:txBody>
-          <a:bodyPr rtlCol="0" anchor="ctr"/>
-          <a:lstStyle/>
-          <a:p>
-            <a:pPr algn="ctr"/>
-          </a:p>
-        </p:txBody>
-      </p:sp>
-      <p:sp>
-        <p:nvSpPr>
-          <p:cNvPr id="6" name="Rectangle 5"/>
-          <p:cNvSpPr/>
-          <p:nvPr/>
-        </p:nvSpPr>
-        <p:spPr>
-          <a:xfrm>
-            <a:off x="548640" y="1554480"/>
-            <a:ext cx="5394960" cy="109728"/>
-          </a:xfrm>
-          <a:prstGeom prst="rect">
-            <a:avLst/>
-          </a:prstGeom>
-          <a:solidFill>
-            <a:srgbClr val="E63946"/>
-          </a:solidFill>
-          <a:ln>
-            <a:noFill/>
-          </a:ln>
-          <a:effectLst/>
-        </p:spPr>
-        <p:style>
-          <a:lnRef idx="1">
-            <a:schemeClr val="accent1"/>
-          </a:lnRef>
-          <a:fillRef idx="3">
-            <a:schemeClr val="accent1"/>
-          </a:fillRef>
-          <a:effectRef idx="2">
-            <a:schemeClr val="accent1"/>
-          </a:effectRef>
-          <a:fontRef idx="minor">
-            <a:schemeClr val="lt1"/>
-          </a:fontRef>
-        </p:style>
-        <p:txBody>
-          <a:bodyPr rtlCol="0" anchor="ctr"/>
-          <a:lstStyle/>
-          <a:p>
-            <a:pPr algn="ctr"/>
-          </a:p>
-        </p:txBody>
-      </p:sp>
-      <p:sp>
-        <p:nvSpPr>
-          <p:cNvPr id="7" name="TextBox 6"/>
-          <p:cNvSpPr txBox="1"/>
-          <p:nvPr/>
-        </p:nvSpPr>
-        <p:spPr>
-          <a:xfrm>
-            <a:off x="777240" y="1773936"/>
-            <a:ext cx="3657600" cy="365760"/>
-          </a:xfrm>
-          <a:prstGeom prst="rect">
-            <a:avLst/>
-          </a:prstGeom>
-          <a:noFill/>
-        </p:spPr>
-        <p:txBody>
-          <a:bodyPr wrap="square" anchor="ctr" lIns="0" rIns="0" tIns="0" bIns="0">
-            <a:spAutoFit/>
-          </a:bodyPr>
-          <a:lstStyle/>
-          <a:p>
-            <a:pPr algn="l"/>
-            <a:r>
-              <a:rPr sz="1600" b="1">
-                <a:solidFill>
-                  <a:srgbClr val="1A2233"/>
-                </a:solidFill>
-                <a:latin typeface="Microsoft JhengHei"/>
-                <a:ea typeface="Microsoft JhengHei"/>
-                <a:cs typeface="Microsoft JhengHei"/>
-              </a:rPr>
-              <a:t>網家 </a:t>
-            </a:r>
-            <a:r>
-              <a:rPr sz="1300" b="0">
-                <a:solidFill>
-                  <a:srgbClr val="5C6679"/>
-                </a:solidFill>
-                <a:latin typeface="Microsoft JhengHei"/>
-                <a:ea typeface="Microsoft JhengHei"/>
-                <a:cs typeface="Microsoft JhengHei"/>
-              </a:rPr>
-              <a:t>8044</a:t>
-            </a:r>
-          </a:p>
-        </p:txBody>
-      </p:sp>
-      <p:sp>
-        <p:nvSpPr>
-          <p:cNvPr id="8" name="Rounded Rectangle 7"/>
-          <p:cNvSpPr/>
-          <p:nvPr/>
-        </p:nvSpPr>
-        <p:spPr>
-          <a:xfrm>
-            <a:off x="4526280" y="1792224"/>
-            <a:ext cx="1234440" cy="347472"/>
-          </a:xfrm>
-          <a:prstGeom prst="roundRect">
-            <a:avLst/>
-          </a:prstGeom>
-          <a:solidFill>
-            <a:srgbClr val="E63946"/>
-          </a:solidFill>
-          <a:ln>
-            <a:noFill/>
-          </a:ln>
-          <a:effectLst/>
-        </p:spPr>
-        <p:style>
-          <a:lnRef idx="1">
-            <a:schemeClr val="accent1"/>
-          </a:lnRef>
-          <a:fillRef idx="3">
-            <a:schemeClr val="accent1"/>
-          </a:fillRef>
-          <a:effectRef idx="2">
-            <a:schemeClr val="accent1"/>
-          </a:effectRef>
-          <a:fontRef idx="minor">
-            <a:schemeClr val="lt1"/>
-          </a:fontRef>
-        </p:style>
-        <p:txBody>
-          <a:bodyPr rtlCol="0" anchor="ctr"/>
-          <a:lstStyle/>
-          <a:p>
-            <a:pPr algn="ctr"/>
-          </a:p>
-        </p:txBody>
-      </p:sp>
-      <p:sp>
-        <p:nvSpPr>
-          <p:cNvPr id="9" name="TextBox 8"/>
-          <p:cNvSpPr txBox="1"/>
-          <p:nvPr/>
-        </p:nvSpPr>
-        <p:spPr>
-          <a:xfrm>
-            <a:off x="4526280" y="1792224"/>
-            <a:ext cx="1234440" cy="347472"/>
-          </a:xfrm>
-          <a:prstGeom prst="rect">
-            <a:avLst/>
-          </a:prstGeom>
-          <a:noFill/>
-        </p:spPr>
-        <p:txBody>
-          <a:bodyPr wrap="square" anchor="ctr" lIns="0" rIns="0" tIns="0" bIns="0">
-            <a:spAutoFit/>
-          </a:bodyPr>
-          <a:lstStyle/>
-          <a:p>
-            <a:pPr algn="ctr"/>
-            <a:r>
-              <a:rPr sz="1050" b="1">
-                <a:solidFill>
-                  <a:srgbClr val="FFFFFF"/>
-                </a:solidFill>
-                <a:latin typeface="Microsoft JhengHei"/>
-                <a:ea typeface="Microsoft JhengHei"/>
-                <a:cs typeface="Microsoft JhengHei"/>
-              </a:rPr>
-              <a:t>駭客攻擊</a:t>
-            </a:r>
-          </a:p>
-        </p:txBody>
-      </p:sp>
-      <p:sp>
-        <p:nvSpPr>
-          <p:cNvPr id="10" name="TextBox 9"/>
-          <p:cNvSpPr txBox="1"/>
-          <p:nvPr/>
-        </p:nvSpPr>
-        <p:spPr>
-          <a:xfrm>
-            <a:off x="777240" y="2267712"/>
-            <a:ext cx="4937760" cy="640080"/>
-          </a:xfrm>
-          <a:prstGeom prst="rect">
-            <a:avLst/>
-          </a:prstGeom>
-          <a:noFill/>
-        </p:spPr>
-        <p:txBody>
-          <a:bodyPr wrap="square" anchor="t" lIns="0" rIns="0" tIns="0" bIns="0">
-            <a:spAutoFit/>
-          </a:bodyPr>
-          <a:lstStyle/>
-          <a:p>
-            <a:pPr algn="l">
-              <a:lnSpc>
-                <a:spcPts val="1500"/>
-              </a:lnSpc>
-            </a:pPr>
-            <a:r>
-              <a:rPr sz="1100" b="1">
-                <a:solidFill>
-                  <a:srgbClr val="E63946"/>
-                </a:solidFill>
-                <a:latin typeface="Microsoft JhengHei"/>
-                <a:ea typeface="Microsoft JhengHei"/>
-                <a:cs typeface="Microsoft JhengHei"/>
-              </a:rPr>
-              <a:t>緣由　</a:t>
-            </a:r>
-            <a:r>
-              <a:rPr sz="1100" b="0">
-                <a:solidFill>
-                  <a:srgbClr val="1A2233"/>
-                </a:solidFill>
-                <a:latin typeface="Microsoft JhengHei"/>
-                <a:ea typeface="Microsoft JhengHei"/>
-                <a:cs typeface="Microsoft JhengHei"/>
-              </a:rPr>
-              <a:t>公司對該等報導或提供訊息之說明:(1)資訊安全防線：本公司及各轉投資事業係依不同服務型態各自營運…</a:t>
-            </a:r>
-          </a:p>
-        </p:txBody>
-      </p:sp>
-      <p:sp>
-        <p:nvSpPr>
-          <p:cNvPr id="11" name="TextBox 10"/>
-          <p:cNvSpPr txBox="1"/>
-          <p:nvPr/>
-        </p:nvSpPr>
-        <p:spPr>
-          <a:xfrm>
-            <a:off x="777240" y="2926080"/>
-            <a:ext cx="4937760" cy="713232"/>
-          </a:xfrm>
-          <a:prstGeom prst="rect">
-            <a:avLst/>
-          </a:prstGeom>
-          <a:noFill/>
-        </p:spPr>
-        <p:txBody>
-          <a:bodyPr wrap="square" anchor="t" lIns="0" rIns="0" tIns="0" bIns="0">
-            <a:spAutoFit/>
-          </a:bodyPr>
-          <a:lstStyle/>
-          <a:p>
-            <a:pPr algn="l">
-              <a:lnSpc>
-                <a:spcPts val="1500"/>
-              </a:lnSpc>
-            </a:pPr>
-            <a:r>
-              <a:rPr sz="1100" b="1">
-                <a:solidFill>
-                  <a:srgbClr val="E63946"/>
-                </a:solidFill>
-                <a:latin typeface="Microsoft JhengHei"/>
-                <a:ea typeface="Microsoft JhengHei"/>
-                <a:cs typeface="Microsoft JhengHei"/>
-              </a:rPr>
-              <a:t>因應　</a:t>
-            </a:r>
-            <a:r>
-              <a:rPr sz="1100" b="0">
-                <a:solidFill>
-                  <a:srgbClr val="1A2233"/>
-                </a:solidFill>
-                <a:latin typeface="Microsoft JhengHei"/>
-                <a:ea typeface="Microsoft JhengHei"/>
-                <a:cs typeface="Microsoft JhengHei"/>
-              </a:rPr>
-              <a:t>(1)全面啟動應變與調查：拍付國際獲悉駭客聲稱之入侵及勒索訊息後，已立即啟動資安應變程序，會同資安專家進行全面系統檢測與…</a:t>
+              <a:t>本公司後續將持續提升網路與資訊基礎架構之安全管控以確保資訊安全。</a:t>
             </a:r>
           </a:p>
         </p:txBody>

--- a/資安事件因應分析.pptx
+++ b/資安事件因應分析.pptx
@@ -185,7 +185,7 @@
                 <c:formatCode>General</c:formatCode>
                 <c:ptCount val="3"/>
                 <c:pt idx="0">
-                  <c:v>4</c:v>
+                  <c:v>5</c:v>
                 </c:pt>
                 <c:pt idx="1">
                   <c:v>1</c:v>
@@ -3528,7 +3528,7 @@
                 <a:ea typeface="Microsoft JhengHei"/>
                 <a:cs typeface="Microsoft JhengHei"/>
               </a:rPr>
-              <a:t>資料期間 2026-07-04 ~ 2026-08-04　｜　MOPS 重大訊息全文檢索　｜　7 家公司</a:t>
+              <a:t>資料期間 2026-07-06 ~ 2026-08-06　｜　MOPS 重大訊息全文檢索　｜　8 家公司</a:t>
             </a:r>
           </a:p>
         </p:txBody>
@@ -3745,7 +3745,7 @@
                 <a:ea typeface="Microsoft JhengHei"/>
                 <a:cs typeface="Microsoft JhengHei"/>
               </a:rPr>
-              <a:t>資料期間內 MOPS 揭露之 7 起資安相關重大訊息</a:t>
+              <a:t>資料期間內 MOPS 揭露之 8 起資安相關重大訊息</a:t>
             </a:r>
           </a:p>
         </p:txBody>
@@ -3828,7 +3828,7 @@
                 <a:ea typeface="Microsoft JhengHei"/>
                 <a:cs typeface="Microsoft JhengHei"/>
               </a:rPr>
-              <a:t>7</a:t>
+              <a:t>8</a:t>
             </a:r>
           </a:p>
         </p:txBody>
@@ -4120,7 +4120,7 @@
         </p:nvGraphicFramePr>
         <p:xfrm>
           <a:off x="548640" y="2697480"/>
-          <a:ext cx="11064240" cy="3072384"/>
+          <a:ext cx="11064240" cy="3456432"/>
         </p:xfrm>
         <a:graphic>
           <a:graphicData uri="http://schemas.openxmlformats.org/drawingml/2006/table">
@@ -4272,7 +4272,7 @@
                           <a:ea typeface="Microsoft JhengHei"/>
                           <a:cs typeface="Microsoft JhengHei"/>
                         </a:rPr>
-                        <a:t>藥華藥</a:t>
+                        <a:t>州巧</a:t>
                       </a:r>
                     </a:p>
                   </a:txBody>
@@ -4296,7 +4296,7 @@
                           <a:ea typeface="Microsoft JhengHei"/>
                           <a:cs typeface="Microsoft JhengHei"/>
                         </a:rPr>
-                        <a:t>6446</a:t>
+                        <a:t>3543</a:t>
                       </a:r>
                     </a:p>
                   </a:txBody>
@@ -4320,7 +4320,7 @@
                           <a:ea typeface="Microsoft JhengHei"/>
                           <a:cs typeface="Microsoft JhengHei"/>
                         </a:rPr>
-                        <a:t>08/03</a:t>
+                        <a:t>08/05</a:t>
                       </a:r>
                     </a:p>
                   </a:txBody>
@@ -4368,7 +4368,7 @@
                           <a:ea typeface="Microsoft JhengHei"/>
                           <a:cs typeface="Microsoft JhengHei"/>
                         </a:rPr>
-                        <a:t>本公司目前正積極會同技術專家協助調查，初步評估對公司營運無重大影響。</a:t>
+                        <a:t>目前初步評估對公司營運無重大影響。</a:t>
                       </a:r>
                     </a:p>
                   </a:txBody>
@@ -4394,7 +4394,7 @@
                           <a:ea typeface="Microsoft JhengHei"/>
                           <a:cs typeface="Microsoft JhengHei"/>
                         </a:rPr>
-                        <a:t>上銀</a:t>
+                        <a:t>藥華藥</a:t>
                       </a:r>
                     </a:p>
                   </a:txBody>
@@ -4418,7 +4418,7 @@
                           <a:ea typeface="Microsoft JhengHei"/>
                           <a:cs typeface="Microsoft JhengHei"/>
                         </a:rPr>
-                        <a:t>2049</a:t>
+                        <a:t>6446</a:t>
                       </a:r>
                     </a:p>
                   </a:txBody>
@@ -4442,7 +4442,7 @@
                           <a:ea typeface="Microsoft JhengHei"/>
                           <a:cs typeface="Microsoft JhengHei"/>
                         </a:rPr>
-                        <a:t>07/28</a:t>
+                        <a:t>08/03</a:t>
                       </a:r>
                     </a:p>
                   </a:txBody>
@@ -4490,7 +4490,7 @@
                           <a:ea typeface="Microsoft JhengHei"/>
                           <a:cs typeface="Microsoft JhengHei"/>
                         </a:rPr>
-                        <a:t>目前初步評估對公司營運無重大影響。</a:t>
+                        <a:t>本公司目前正積極會同技術專家協助調查，初步評估對公司營運無重大影響。</a:t>
                       </a:r>
                     </a:p>
                   </a:txBody>
@@ -4516,7 +4516,7 @@
                           <a:ea typeface="Microsoft JhengHei"/>
                           <a:cs typeface="Microsoft JhengHei"/>
                         </a:rPr>
-                        <a:t>萬達寵物</a:t>
+                        <a:t>上銀</a:t>
                       </a:r>
                     </a:p>
                   </a:txBody>
@@ -4540,7 +4540,7 @@
                           <a:ea typeface="Microsoft JhengHei"/>
                           <a:cs typeface="Microsoft JhengHei"/>
                         </a:rPr>
-                        <a:t>6968</a:t>
+                        <a:t>2049</a:t>
                       </a:r>
                     </a:p>
                   </a:txBody>
@@ -4564,13 +4564,135 @@
                           <a:ea typeface="Microsoft JhengHei"/>
                           <a:cs typeface="Microsoft JhengHei"/>
                         </a:rPr>
+                        <a:t>07/28</a:t>
+                      </a:r>
+                    </a:p>
+                  </a:txBody>
+                  <a:tcPr anchor="ctr" marL="73152" marT="9144" marB="9144">
+                    <a:solidFill>
+                      <a:srgbClr val="FFFFFF"/>
+                    </a:solidFill>
+                  </a:tcPr>
+                </a:tc>
+                <a:tc>
+                  <a:txBody>
+                    <a:bodyPr/>
+                    <a:lstStyle/>
+                    <a:p>
+                      <a:r>
+                        <a:rPr sz="1150" b="1">
+                          <a:solidFill>
+                            <a:srgbClr val="E63946"/>
+                          </a:solidFill>
+                          <a:latin typeface="Microsoft JhengHei"/>
+                          <a:ea typeface="Microsoft JhengHei"/>
+                          <a:cs typeface="Microsoft JhengHei"/>
+                        </a:rPr>
+                        <a:t>駭客攻擊</a:t>
+                      </a:r>
+                    </a:p>
+                  </a:txBody>
+                  <a:tcPr anchor="ctr" marL="73152" marT="9144" marB="9144">
+                    <a:solidFill>
+                      <a:srgbClr val="FFFFFF"/>
+                    </a:solidFill>
+                  </a:tcPr>
+                </a:tc>
+                <a:tc>
+                  <a:txBody>
+                    <a:bodyPr/>
+                    <a:lstStyle/>
+                    <a:p>
+                      <a:r>
+                        <a:rPr sz="1150" b="0">
+                          <a:solidFill>
+                            <a:srgbClr val="1A2233"/>
+                          </a:solidFill>
+                          <a:latin typeface="Microsoft JhengHei"/>
+                          <a:ea typeface="Microsoft JhengHei"/>
+                          <a:cs typeface="Microsoft JhengHei"/>
+                        </a:rPr>
+                        <a:t>目前初步評估對公司營運無重大影響。</a:t>
+                      </a:r>
+                    </a:p>
+                  </a:txBody>
+                  <a:tcPr anchor="ctr" marL="73152" marT="9144" marB="9144">
+                    <a:solidFill>
+                      <a:srgbClr val="FFFFFF"/>
+                    </a:solidFill>
+                  </a:tcPr>
+                </a:tc>
+              </a:tr>
+              <a:tr h="384048">
+                <a:tc>
+                  <a:txBody>
+                    <a:bodyPr/>
+                    <a:lstStyle/>
+                    <a:p>
+                      <a:r>
+                        <a:rPr sz="1150" b="0">
+                          <a:solidFill>
+                            <a:srgbClr val="1A2233"/>
+                          </a:solidFill>
+                          <a:latin typeface="Microsoft JhengHei"/>
+                          <a:ea typeface="Microsoft JhengHei"/>
+                          <a:cs typeface="Microsoft JhengHei"/>
+                        </a:rPr>
+                        <a:t>萬達寵物</a:t>
+                      </a:r>
+                    </a:p>
+                  </a:txBody>
+                  <a:tcPr anchor="ctr" marL="73152" marT="9144" marB="9144">
+                    <a:solidFill>
+                      <a:srgbClr val="EEF2F9"/>
+                    </a:solidFill>
+                  </a:tcPr>
+                </a:tc>
+                <a:tc>
+                  <a:txBody>
+                    <a:bodyPr/>
+                    <a:lstStyle/>
+                    <a:p>
+                      <a:r>
+                        <a:rPr sz="1150" b="0">
+                          <a:solidFill>
+                            <a:srgbClr val="1A2233"/>
+                          </a:solidFill>
+                          <a:latin typeface="Microsoft JhengHei"/>
+                          <a:ea typeface="Microsoft JhengHei"/>
+                          <a:cs typeface="Microsoft JhengHei"/>
+                        </a:rPr>
+                        <a:t>6968</a:t>
+                      </a:r>
+                    </a:p>
+                  </a:txBody>
+                  <a:tcPr anchor="ctr" marL="73152" marT="9144" marB="9144">
+                    <a:solidFill>
+                      <a:srgbClr val="EEF2F9"/>
+                    </a:solidFill>
+                  </a:tcPr>
+                </a:tc>
+                <a:tc>
+                  <a:txBody>
+                    <a:bodyPr/>
+                    <a:lstStyle/>
+                    <a:p>
+                      <a:r>
+                        <a:rPr sz="1150" b="0">
+                          <a:solidFill>
+                            <a:srgbClr val="1A2233"/>
+                          </a:solidFill>
+                          <a:latin typeface="Microsoft JhengHei"/>
+                          <a:ea typeface="Microsoft JhengHei"/>
+                          <a:cs typeface="Microsoft JhengHei"/>
+                        </a:rPr>
                         <a:t>07/27</a:t>
                       </a:r>
                     </a:p>
                   </a:txBody>
                   <a:tcPr anchor="ctr" marL="73152" marT="9144" marB="9144">
                     <a:solidFill>
-                      <a:srgbClr val="FFFFFF"/>
+                      <a:srgbClr val="EEF2F9"/>
                     </a:solidFill>
                   </a:tcPr>
                 </a:tc>
@@ -4594,6 +4716,56 @@
                   </a:txBody>
                   <a:tcPr anchor="ctr" marL="73152" marT="9144" marB="9144">
                     <a:solidFill>
+                      <a:srgbClr val="EEF2F9"/>
+                    </a:solidFill>
+                  </a:tcPr>
+                </a:tc>
+                <a:tc>
+                  <a:txBody>
+                    <a:bodyPr/>
+                    <a:lstStyle/>
+                    <a:p>
+                      <a:r>
+                        <a:rPr sz="1150" b="0">
+                          <a:solidFill>
+                            <a:srgbClr val="1A2233"/>
+                          </a:solidFill>
+                          <a:latin typeface="Microsoft JhengHei"/>
+                          <a:ea typeface="Microsoft JhengHei"/>
+                          <a:cs typeface="Microsoft JhengHei"/>
+                        </a:rPr>
+                        <a:t>對本公司財務或業務並無重大影響。</a:t>
+                      </a:r>
+                    </a:p>
+                  </a:txBody>
+                  <a:tcPr anchor="ctr" marL="73152" marT="9144" marB="9144">
+                    <a:solidFill>
+                      <a:srgbClr val="EEF2F9"/>
+                    </a:solidFill>
+                  </a:tcPr>
+                </a:tc>
+              </a:tr>
+              <a:tr h="384048">
+                <a:tc>
+                  <a:txBody>
+                    <a:bodyPr/>
+                    <a:lstStyle/>
+                    <a:p>
+                      <a:r>
+                        <a:rPr sz="1150" b="0">
+                          <a:solidFill>
+                            <a:srgbClr val="1A2233"/>
+                          </a:solidFill>
+                          <a:latin typeface="Microsoft JhengHei"/>
+                          <a:ea typeface="Microsoft JhengHei"/>
+                          <a:cs typeface="Microsoft JhengHei"/>
+                        </a:rPr>
+                        <a:t>淳安</a:t>
+                      </a:r>
+                    </a:p>
+                  </a:txBody>
+                  <a:tcPr anchor="ctr" marL="73152" marT="9144" marB="9144">
+                    <a:solidFill>
                       <a:srgbClr val="FFFFFF"/>
                     </a:solidFill>
                   </a:tcPr>
@@ -4612,7 +4784,79 @@
                           <a:ea typeface="Microsoft JhengHei"/>
                           <a:cs typeface="Microsoft JhengHei"/>
                         </a:rPr>
-                        <a:t>對本公司財務或業務並無重大影響。</a:t>
+                        <a:t>6283</a:t>
+                      </a:r>
+                    </a:p>
+                  </a:txBody>
+                  <a:tcPr anchor="ctr" marL="73152" marT="9144" marB="9144">
+                    <a:solidFill>
+                      <a:srgbClr val="FFFFFF"/>
+                    </a:solidFill>
+                  </a:tcPr>
+                </a:tc>
+                <a:tc>
+                  <a:txBody>
+                    <a:bodyPr/>
+                    <a:lstStyle/>
+                    <a:p>
+                      <a:r>
+                        <a:rPr sz="1150" b="0">
+                          <a:solidFill>
+                            <a:srgbClr val="1A2233"/>
+                          </a:solidFill>
+                          <a:latin typeface="Microsoft JhengHei"/>
+                          <a:ea typeface="Microsoft JhengHei"/>
+                          <a:cs typeface="Microsoft JhengHei"/>
+                        </a:rPr>
+                        <a:t>07/21</a:t>
+                      </a:r>
+                    </a:p>
+                  </a:txBody>
+                  <a:tcPr anchor="ctr" marL="73152" marT="9144" marB="9144">
+                    <a:solidFill>
+                      <a:srgbClr val="FFFFFF"/>
+                    </a:solidFill>
+                  </a:tcPr>
+                </a:tc>
+                <a:tc>
+                  <a:txBody>
+                    <a:bodyPr/>
+                    <a:lstStyle/>
+                    <a:p>
+                      <a:r>
+                        <a:rPr sz="1150" b="1">
+                          <a:solidFill>
+                            <a:srgbClr val="5C6679"/>
+                          </a:solidFill>
+                          <a:latin typeface="Microsoft JhengHei"/>
+                          <a:ea typeface="Microsoft JhengHei"/>
+                          <a:cs typeface="Microsoft JhengHei"/>
+                        </a:rPr>
+                        <a:t>其他</a:t>
+                      </a:r>
+                    </a:p>
+                  </a:txBody>
+                  <a:tcPr anchor="ctr" marL="73152" marT="9144" marB="9144">
+                    <a:solidFill>
+                      <a:srgbClr val="FFFFFF"/>
+                    </a:solidFill>
+                  </a:tcPr>
+                </a:tc>
+                <a:tc>
+                  <a:txBody>
+                    <a:bodyPr/>
+                    <a:lstStyle/>
+                    <a:p>
+                      <a:r>
+                        <a:rPr sz="1150" b="0">
+                          <a:solidFill>
+                            <a:srgbClr val="1A2233"/>
+                          </a:solidFill>
+                          <a:latin typeface="Microsoft JhengHei"/>
+                          <a:ea typeface="Microsoft JhengHei"/>
+                          <a:cs typeface="Microsoft JhengHei"/>
+                        </a:rPr>
+                        <a:t>經評估對公司營運無重大影響。</a:t>
                       </a:r>
                     </a:p>
                   </a:txBody>
@@ -4686,7 +4930,7 @@
                           <a:ea typeface="Microsoft JhengHei"/>
                           <a:cs typeface="Microsoft JhengHei"/>
                         </a:rPr>
-                        <a:t>07/21</a:t>
+                        <a:t>07/20</a:t>
                       </a:r>
                     </a:p>
                   </a:txBody>
@@ -4760,7 +5004,7 @@
                           <a:ea typeface="Microsoft JhengHei"/>
                           <a:cs typeface="Microsoft JhengHei"/>
                         </a:rPr>
-                        <a:t>淳安</a:t>
+                        <a:t>松上</a:t>
                       </a:r>
                     </a:p>
                   </a:txBody>
@@ -4784,7 +5028,7 @@
                           <a:ea typeface="Microsoft JhengHei"/>
                           <a:cs typeface="Microsoft JhengHei"/>
                         </a:rPr>
-                        <a:t>6283</a:t>
+                        <a:t>6156</a:t>
                       </a:r>
                     </a:p>
                   </a:txBody>
@@ -4808,7 +5052,7 @@
                           <a:ea typeface="Microsoft JhengHei"/>
                           <a:cs typeface="Microsoft JhengHei"/>
                         </a:rPr>
-                        <a:t>07/20</a:t>
+                        <a:t>07/17</a:t>
                       </a:r>
                     </a:p>
                   </a:txBody>
@@ -4826,13 +5070,13 @@
                       <a:r>
                         <a:rPr sz="1150" b="1">
                           <a:solidFill>
-                            <a:srgbClr val="5C6679"/>
+                            <a:srgbClr val="E63946"/>
                           </a:solidFill>
                           <a:latin typeface="Microsoft JhengHei"/>
                           <a:ea typeface="Microsoft JhengHei"/>
                           <a:cs typeface="Microsoft JhengHei"/>
                         </a:rPr>
-                        <a:t>其他</a:t>
+                        <a:t>駭客攻擊</a:t>
                       </a:r>
                     </a:p>
                   </a:txBody>
@@ -4856,7 +5100,7 @@
                           <a:ea typeface="Microsoft JhengHei"/>
                           <a:cs typeface="Microsoft JhengHei"/>
                         </a:rPr>
-                        <a:t>經評估對公司營運無重大影響。</a:t>
+                        <a:t>目前評估對公司營運無重大影響。</a:t>
                       </a:r>
                     </a:p>
                   </a:txBody>
@@ -4882,7 +5126,7 @@
                           <a:ea typeface="Microsoft JhengHei"/>
                           <a:cs typeface="Microsoft JhengHei"/>
                         </a:rPr>
-                        <a:t>松上</a:t>
+                        <a:t>優盛</a:t>
                       </a:r>
                     </a:p>
                   </a:txBody>
@@ -4906,7 +5150,7 @@
                           <a:ea typeface="Microsoft JhengHei"/>
                           <a:cs typeface="Microsoft JhengHei"/>
                         </a:rPr>
-                        <a:t>6156</a:t>
+                        <a:t>4121</a:t>
                       </a:r>
                     </a:p>
                   </a:txBody>
@@ -4930,7 +5174,7 @@
                           <a:ea typeface="Microsoft JhengHei"/>
                           <a:cs typeface="Microsoft JhengHei"/>
                         </a:rPr>
-                        <a:t>07/17</a:t>
+                        <a:t>07/07</a:t>
                       </a:r>
                     </a:p>
                   </a:txBody>
@@ -4978,135 +5222,13 @@
                           <a:ea typeface="Microsoft JhengHei"/>
                           <a:cs typeface="Microsoft JhengHei"/>
                         </a:rPr>
-                        <a:t>目前評估對公司營運無重大影響。</a:t>
+                        <a:t>本資訊網站已暫時停止服務，該事件對公司營運、資訊安全、個資等無重大影…</a:t>
                       </a:r>
                     </a:p>
                   </a:txBody>
                   <a:tcPr anchor="ctr" marL="73152" marT="9144" marB="9144">
                     <a:solidFill>
                       <a:srgbClr val="EEF2F9"/>
-                    </a:solidFill>
-                  </a:tcPr>
-                </a:tc>
-              </a:tr>
-              <a:tr h="384048">
-                <a:tc>
-                  <a:txBody>
-                    <a:bodyPr/>
-                    <a:lstStyle/>
-                    <a:p>
-                      <a:r>
-                        <a:rPr sz="1150" b="0">
-                          <a:solidFill>
-                            <a:srgbClr val="1A2233"/>
-                          </a:solidFill>
-                          <a:latin typeface="Microsoft JhengHei"/>
-                          <a:ea typeface="Microsoft JhengHei"/>
-                          <a:cs typeface="Microsoft JhengHei"/>
-                        </a:rPr>
-                        <a:t>優盛</a:t>
-                      </a:r>
-                    </a:p>
-                  </a:txBody>
-                  <a:tcPr anchor="ctr" marL="73152" marT="9144" marB="9144">
-                    <a:solidFill>
-                      <a:srgbClr val="FFFFFF"/>
-                    </a:solidFill>
-                  </a:tcPr>
-                </a:tc>
-                <a:tc>
-                  <a:txBody>
-                    <a:bodyPr/>
-                    <a:lstStyle/>
-                    <a:p>
-                      <a:r>
-                        <a:rPr sz="1150" b="0">
-                          <a:solidFill>
-                            <a:srgbClr val="1A2233"/>
-                          </a:solidFill>
-                          <a:latin typeface="Microsoft JhengHei"/>
-                          <a:ea typeface="Microsoft JhengHei"/>
-                          <a:cs typeface="Microsoft JhengHei"/>
-                        </a:rPr>
-                        <a:t>4121</a:t>
-                      </a:r>
-                    </a:p>
-                  </a:txBody>
-                  <a:tcPr anchor="ctr" marL="73152" marT="9144" marB="9144">
-                    <a:solidFill>
-                      <a:srgbClr val="FFFFFF"/>
-                    </a:solidFill>
-                  </a:tcPr>
-                </a:tc>
-                <a:tc>
-                  <a:txBody>
-                    <a:bodyPr/>
-                    <a:lstStyle/>
-                    <a:p>
-                      <a:r>
-                        <a:rPr sz="1150" b="0">
-                          <a:solidFill>
-                            <a:srgbClr val="1A2233"/>
-                          </a:solidFill>
-                          <a:latin typeface="Microsoft JhengHei"/>
-                          <a:ea typeface="Microsoft JhengHei"/>
-                          <a:cs typeface="Microsoft JhengHei"/>
-                        </a:rPr>
-                        <a:t>07/07</a:t>
-                      </a:r>
-                    </a:p>
-                  </a:txBody>
-                  <a:tcPr anchor="ctr" marL="73152" marT="9144" marB="9144">
-                    <a:solidFill>
-                      <a:srgbClr val="FFFFFF"/>
-                    </a:solidFill>
-                  </a:tcPr>
-                </a:tc>
-                <a:tc>
-                  <a:txBody>
-                    <a:bodyPr/>
-                    <a:lstStyle/>
-                    <a:p>
-                      <a:r>
-                        <a:rPr sz="1150" b="1">
-                          <a:solidFill>
-                            <a:srgbClr val="E63946"/>
-                          </a:solidFill>
-                          <a:latin typeface="Microsoft JhengHei"/>
-                          <a:ea typeface="Microsoft JhengHei"/>
-                          <a:cs typeface="Microsoft JhengHei"/>
-                        </a:rPr>
-                        <a:t>駭客攻擊</a:t>
-                      </a:r>
-                    </a:p>
-                  </a:txBody>
-                  <a:tcPr anchor="ctr" marL="73152" marT="9144" marB="9144">
-                    <a:solidFill>
-                      <a:srgbClr val="FFFFFF"/>
-                    </a:solidFill>
-                  </a:tcPr>
-                </a:tc>
-                <a:tc>
-                  <a:txBody>
-                    <a:bodyPr/>
-                    <a:lstStyle/>
-                    <a:p>
-                      <a:r>
-                        <a:rPr sz="1150" b="0">
-                          <a:solidFill>
-                            <a:srgbClr val="1A2233"/>
-                          </a:solidFill>
-                          <a:latin typeface="Microsoft JhengHei"/>
-                          <a:ea typeface="Microsoft JhengHei"/>
-                          <a:cs typeface="Microsoft JhengHei"/>
-                        </a:rPr>
-                        <a:t>本資訊網站已暫時停止服務，該事件對公司營運、資訊安全、個資等無重大影…</a:t>
-                      </a:r>
-                    </a:p>
-                  </a:txBody>
-                  <a:tcPr anchor="ctr" marL="73152" marT="9144" marB="9144">
-                    <a:solidFill>
-                      <a:srgbClr val="FFFFFF"/>
                     </a:solidFill>
                   </a:tcPr>
                 </a:tc>
@@ -5428,7 +5550,7 @@
                 <a:ea typeface="Microsoft JhengHei"/>
                 <a:cs typeface="Microsoft JhengHei"/>
               </a:rPr>
-              <a:t>4 起</a:t>
+              <a:t>5 起</a:t>
             </a:r>
           </a:p>
         </p:txBody>
@@ -5465,7 +5587,7 @@
                 <a:ea typeface="Microsoft JhengHei"/>
                 <a:cs typeface="Microsoft JhengHei"/>
               </a:rPr>
-              <a:t>藥華藥、上銀、松上、優盛</a:t>
+              <a:t>州巧、藥華藥、上銀、松上、優盛</a:t>
             </a:r>
           </a:p>
         </p:txBody>
@@ -6129,7 +6251,7 @@
         </p:nvGraphicFramePr>
         <p:xfrm>
           <a:off x="548640" y="1600200"/>
-          <a:ext cx="10789920" cy="3657600"/>
+          <a:ext cx="10789920" cy="4114800"/>
         </p:xfrm>
         <a:graphic>
           <a:graphicData uri="http://schemas.openxmlformats.org/drawingml/2006/table">
@@ -6281,7 +6403,7 @@
                           <a:ea typeface="Microsoft JhengHei"/>
                           <a:cs typeface="Microsoft JhengHei"/>
                         </a:rPr>
-                        <a:t>藥華藥</a:t>
+                        <a:t>州巧</a:t>
                       </a:r>
                     </a:p>
                   </a:txBody>
@@ -6305,7 +6427,7 @@
                           <a:ea typeface="Microsoft JhengHei"/>
                           <a:cs typeface="Microsoft JhengHei"/>
                         </a:rPr>
-                        <a:t>6446</a:t>
+                        <a:t>3543</a:t>
                       </a:r>
                     </a:p>
                   </a:txBody>
@@ -6353,7 +6475,7 @@
                           <a:ea typeface="Microsoft JhengHei"/>
                           <a:cs typeface="Microsoft JhengHei"/>
                         </a:rPr>
-                        <a:t>安永聯合會計師事務所</a:t>
+                        <a:t>資誠聯合會計師事務所</a:t>
                       </a:r>
                     </a:p>
                   </a:txBody>
@@ -6377,7 +6499,7 @@
                           <a:ea typeface="Microsoft JhengHei"/>
                           <a:cs typeface="Microsoft JhengHei"/>
                         </a:rPr>
-                        <a:t>呂倩雯、張巧穎</a:t>
+                        <a:t>廖福銘、林永智</a:t>
                       </a:r>
                     </a:p>
                   </a:txBody>
@@ -6403,7 +6525,7 @@
                           <a:ea typeface="Microsoft JhengHei"/>
                           <a:cs typeface="Microsoft JhengHei"/>
                         </a:rPr>
-                        <a:t>上銀</a:t>
+                        <a:t>藥華藥</a:t>
                       </a:r>
                     </a:p>
                   </a:txBody>
@@ -6427,7 +6549,7 @@
                           <a:ea typeface="Microsoft JhengHei"/>
                           <a:cs typeface="Microsoft JhengHei"/>
                         </a:rPr>
-                        <a:t>2049</a:t>
+                        <a:t>6446</a:t>
                       </a:r>
                     </a:p>
                   </a:txBody>
@@ -6475,7 +6597,7 @@
                           <a:ea typeface="Microsoft JhengHei"/>
                           <a:cs typeface="Microsoft JhengHei"/>
                         </a:rPr>
-                        <a:t>勤業眾信聯合會計師事務所</a:t>
+                        <a:t>安永聯合會計師事務所</a:t>
                       </a:r>
                     </a:p>
                   </a:txBody>
@@ -6499,7 +6621,7 @@
                           <a:ea typeface="Microsoft JhengHei"/>
                           <a:cs typeface="Microsoft JhengHei"/>
                         </a:rPr>
-                        <a:t>吳麗冬、顏曉芳</a:t>
+                        <a:t>呂倩雯、張巧穎</a:t>
                       </a:r>
                     </a:p>
                   </a:txBody>
@@ -6525,7 +6647,7 @@
                           <a:ea typeface="Microsoft JhengHei"/>
                           <a:cs typeface="Microsoft JhengHei"/>
                         </a:rPr>
-                        <a:t>萬達寵物</a:t>
+                        <a:t>上銀</a:t>
                       </a:r>
                     </a:p>
                   </a:txBody>
@@ -6549,13 +6671,135 @@
                           <a:ea typeface="Microsoft JhengHei"/>
                           <a:cs typeface="Microsoft JhengHei"/>
                         </a:rPr>
+                        <a:t>2049</a:t>
+                      </a:r>
+                    </a:p>
+                  </a:txBody>
+                  <a:tcPr anchor="ctr" marL="73152" marT="9144" marB="9144">
+                    <a:solidFill>
+                      <a:srgbClr val="FFFFFF"/>
+                    </a:solidFill>
+                  </a:tcPr>
+                </a:tc>
+                <a:tc>
+                  <a:txBody>
+                    <a:bodyPr/>
+                    <a:lstStyle/>
+                    <a:p>
+                      <a:r>
+                        <a:rPr sz="1150" b="1">
+                          <a:solidFill>
+                            <a:srgbClr val="E63946"/>
+                          </a:solidFill>
+                          <a:latin typeface="Microsoft JhengHei"/>
+                          <a:ea typeface="Microsoft JhengHei"/>
+                          <a:cs typeface="Microsoft JhengHei"/>
+                        </a:rPr>
+                        <a:t>駭客攻擊</a:t>
+                      </a:r>
+                    </a:p>
+                  </a:txBody>
+                  <a:tcPr anchor="ctr" marL="73152" marT="9144" marB="9144">
+                    <a:solidFill>
+                      <a:srgbClr val="FFFFFF"/>
+                    </a:solidFill>
+                  </a:tcPr>
+                </a:tc>
+                <a:tc>
+                  <a:txBody>
+                    <a:bodyPr/>
+                    <a:lstStyle/>
+                    <a:p>
+                      <a:r>
+                        <a:rPr sz="1150" b="0">
+                          <a:solidFill>
+                            <a:srgbClr val="1A2233"/>
+                          </a:solidFill>
+                          <a:latin typeface="Microsoft JhengHei"/>
+                          <a:ea typeface="Microsoft JhengHei"/>
+                          <a:cs typeface="Microsoft JhengHei"/>
+                        </a:rPr>
+                        <a:t>勤業眾信聯合會計師事務所</a:t>
+                      </a:r>
+                    </a:p>
+                  </a:txBody>
+                  <a:tcPr anchor="ctr" marL="73152" marT="9144" marB="9144">
+                    <a:solidFill>
+                      <a:srgbClr val="FFFFFF"/>
+                    </a:solidFill>
+                  </a:tcPr>
+                </a:tc>
+                <a:tc>
+                  <a:txBody>
+                    <a:bodyPr/>
+                    <a:lstStyle/>
+                    <a:p>
+                      <a:r>
+                        <a:rPr sz="1150" b="0">
+                          <a:solidFill>
+                            <a:srgbClr val="1A2233"/>
+                          </a:solidFill>
+                          <a:latin typeface="Microsoft JhengHei"/>
+                          <a:ea typeface="Microsoft JhengHei"/>
+                          <a:cs typeface="Microsoft JhengHei"/>
+                        </a:rPr>
+                        <a:t>吳麗冬、顏曉芳</a:t>
+                      </a:r>
+                    </a:p>
+                  </a:txBody>
+                  <a:tcPr anchor="ctr" marL="73152" marT="9144" marB="9144">
+                    <a:solidFill>
+                      <a:srgbClr val="FFFFFF"/>
+                    </a:solidFill>
+                  </a:tcPr>
+                </a:tc>
+              </a:tr>
+              <a:tr h="457200">
+                <a:tc>
+                  <a:txBody>
+                    <a:bodyPr/>
+                    <a:lstStyle/>
+                    <a:p>
+                      <a:r>
+                        <a:rPr sz="1150" b="0">
+                          <a:solidFill>
+                            <a:srgbClr val="1A2233"/>
+                          </a:solidFill>
+                          <a:latin typeface="Microsoft JhengHei"/>
+                          <a:ea typeface="Microsoft JhengHei"/>
+                          <a:cs typeface="Microsoft JhengHei"/>
+                        </a:rPr>
+                        <a:t>萬達寵物</a:t>
+                      </a:r>
+                    </a:p>
+                  </a:txBody>
+                  <a:tcPr anchor="ctr" marL="73152" marT="9144" marB="9144">
+                    <a:solidFill>
+                      <a:srgbClr val="EEF2F9"/>
+                    </a:solidFill>
+                  </a:tcPr>
+                </a:tc>
+                <a:tc>
+                  <a:txBody>
+                    <a:bodyPr/>
+                    <a:lstStyle/>
+                    <a:p>
+                      <a:r>
+                        <a:rPr sz="1150" b="0">
+                          <a:solidFill>
+                            <a:srgbClr val="1A2233"/>
+                          </a:solidFill>
+                          <a:latin typeface="Microsoft JhengHei"/>
+                          <a:ea typeface="Microsoft JhengHei"/>
+                          <a:cs typeface="Microsoft JhengHei"/>
+                        </a:rPr>
                         <a:t>6968</a:t>
                       </a:r>
                     </a:p>
                   </a:txBody>
                   <a:tcPr anchor="ctr" marL="73152" marT="9144" marB="9144">
                     <a:solidFill>
-                      <a:srgbClr val="FFFFFF"/>
+                      <a:srgbClr val="EEF2F9"/>
                     </a:solidFill>
                   </a:tcPr>
                 </a:tc>
@@ -6574,6 +6818,128 @@
                           <a:cs typeface="Microsoft JhengHei"/>
                         </a:rPr>
                         <a:t>個資外洩</a:t>
+                      </a:r>
+                    </a:p>
+                  </a:txBody>
+                  <a:tcPr anchor="ctr" marL="73152" marT="9144" marB="9144">
+                    <a:solidFill>
+                      <a:srgbClr val="EEF2F9"/>
+                    </a:solidFill>
+                  </a:tcPr>
+                </a:tc>
+                <a:tc>
+                  <a:txBody>
+                    <a:bodyPr/>
+                    <a:lstStyle/>
+                    <a:p>
+                      <a:r>
+                        <a:rPr sz="1150" b="0">
+                          <a:solidFill>
+                            <a:srgbClr val="1A2233"/>
+                          </a:solidFill>
+                          <a:latin typeface="Microsoft JhengHei"/>
+                          <a:ea typeface="Microsoft JhengHei"/>
+                          <a:cs typeface="Microsoft JhengHei"/>
+                        </a:rPr>
+                        <a:t>資誠聯合會計師事務所</a:t>
+                      </a:r>
+                    </a:p>
+                  </a:txBody>
+                  <a:tcPr anchor="ctr" marL="73152" marT="9144" marB="9144">
+                    <a:solidFill>
+                      <a:srgbClr val="EEF2F9"/>
+                    </a:solidFill>
+                  </a:tcPr>
+                </a:tc>
+                <a:tc>
+                  <a:txBody>
+                    <a:bodyPr/>
+                    <a:lstStyle/>
+                    <a:p>
+                      <a:r>
+                        <a:rPr sz="1150" b="0">
+                          <a:solidFill>
+                            <a:srgbClr val="1A2233"/>
+                          </a:solidFill>
+                          <a:latin typeface="Microsoft JhengHei"/>
+                          <a:ea typeface="Microsoft JhengHei"/>
+                          <a:cs typeface="Microsoft JhengHei"/>
+                        </a:rPr>
+                        <a:t>葉翠苗、黃世鈞</a:t>
+                      </a:r>
+                    </a:p>
+                  </a:txBody>
+                  <a:tcPr anchor="ctr" marL="73152" marT="9144" marB="9144">
+                    <a:solidFill>
+                      <a:srgbClr val="EEF2F9"/>
+                    </a:solidFill>
+                  </a:tcPr>
+                </a:tc>
+              </a:tr>
+              <a:tr h="457200">
+                <a:tc>
+                  <a:txBody>
+                    <a:bodyPr/>
+                    <a:lstStyle/>
+                    <a:p>
+                      <a:r>
+                        <a:rPr sz="1150" b="0">
+                          <a:solidFill>
+                            <a:srgbClr val="1A2233"/>
+                          </a:solidFill>
+                          <a:latin typeface="Microsoft JhengHei"/>
+                          <a:ea typeface="Microsoft JhengHei"/>
+                          <a:cs typeface="Microsoft JhengHei"/>
+                        </a:rPr>
+                        <a:t>淳安</a:t>
+                      </a:r>
+                    </a:p>
+                  </a:txBody>
+                  <a:tcPr anchor="ctr" marL="73152" marT="9144" marB="9144">
+                    <a:solidFill>
+                      <a:srgbClr val="FFFFFF"/>
+                    </a:solidFill>
+                  </a:tcPr>
+                </a:tc>
+                <a:tc>
+                  <a:txBody>
+                    <a:bodyPr/>
+                    <a:lstStyle/>
+                    <a:p>
+                      <a:r>
+                        <a:rPr sz="1150" b="0">
+                          <a:solidFill>
+                            <a:srgbClr val="1A2233"/>
+                          </a:solidFill>
+                          <a:latin typeface="Microsoft JhengHei"/>
+                          <a:ea typeface="Microsoft JhengHei"/>
+                          <a:cs typeface="Microsoft JhengHei"/>
+                        </a:rPr>
+                        <a:t>6283</a:t>
+                      </a:r>
+                    </a:p>
+                  </a:txBody>
+                  <a:tcPr anchor="ctr" marL="73152" marT="9144" marB="9144">
+                    <a:solidFill>
+                      <a:srgbClr val="FFFFFF"/>
+                    </a:solidFill>
+                  </a:tcPr>
+                </a:tc>
+                <a:tc>
+                  <a:txBody>
+                    <a:bodyPr/>
+                    <a:lstStyle/>
+                    <a:p>
+                      <a:r>
+                        <a:rPr sz="1150" b="1">
+                          <a:solidFill>
+                            <a:srgbClr val="5C6679"/>
+                          </a:solidFill>
+                          <a:latin typeface="Microsoft JhengHei"/>
+                          <a:ea typeface="Microsoft JhengHei"/>
+                          <a:cs typeface="Microsoft JhengHei"/>
+                        </a:rPr>
+                        <a:t>其他</a:t>
                       </a:r>
                     </a:p>
                   </a:txBody>
@@ -6621,7 +6987,7 @@
                           <a:ea typeface="Microsoft JhengHei"/>
                           <a:cs typeface="Microsoft JhengHei"/>
                         </a:rPr>
-                        <a:t>葉翠苗、黃世鈞</a:t>
+                        <a:t>林永智、廖福銘</a:t>
                       </a:r>
                     </a:p>
                   </a:txBody>
@@ -6769,7 +7135,7 @@
                           <a:ea typeface="Microsoft JhengHei"/>
                           <a:cs typeface="Microsoft JhengHei"/>
                         </a:rPr>
-                        <a:t>淳安</a:t>
+                        <a:t>松上</a:t>
                       </a:r>
                     </a:p>
                   </a:txBody>
@@ -6793,7 +7159,7 @@
                           <a:ea typeface="Microsoft JhengHei"/>
                           <a:cs typeface="Microsoft JhengHei"/>
                         </a:rPr>
-                        <a:t>6283</a:t>
+                        <a:t>6156</a:t>
                       </a:r>
                     </a:p>
                   </a:txBody>
@@ -6811,13 +7177,13 @@
                       <a:r>
                         <a:rPr sz="1150" b="1">
                           <a:solidFill>
-                            <a:srgbClr val="5C6679"/>
+                            <a:srgbClr val="E63946"/>
                           </a:solidFill>
                           <a:latin typeface="Microsoft JhengHei"/>
                           <a:ea typeface="Microsoft JhengHei"/>
                           <a:cs typeface="Microsoft JhengHei"/>
                         </a:rPr>
-                        <a:t>其他</a:t>
+                        <a:t>駭客攻擊</a:t>
                       </a:r>
                     </a:p>
                   </a:txBody>
@@ -6841,7 +7207,7 @@
                           <a:ea typeface="Microsoft JhengHei"/>
                           <a:cs typeface="Microsoft JhengHei"/>
                         </a:rPr>
-                        <a:t>資誠聯合會計師事務所</a:t>
+                        <a:t>安永聯合會計師事務所</a:t>
                       </a:r>
                     </a:p>
                   </a:txBody>
@@ -6865,7 +7231,7 @@
                           <a:ea typeface="Microsoft JhengHei"/>
                           <a:cs typeface="Microsoft JhengHei"/>
                         </a:rPr>
-                        <a:t>林永智、廖福銘</a:t>
+                        <a:t>羅筱靖、陳國帥</a:t>
                       </a:r>
                     </a:p>
                   </a:txBody>
@@ -6891,7 +7257,7 @@
                           <a:ea typeface="Microsoft JhengHei"/>
                           <a:cs typeface="Microsoft JhengHei"/>
                         </a:rPr>
-                        <a:t>松上</a:t>
+                        <a:t>優盛</a:t>
                       </a:r>
                     </a:p>
                   </a:txBody>
@@ -6915,7 +7281,7 @@
                           <a:ea typeface="Microsoft JhengHei"/>
                           <a:cs typeface="Microsoft JhengHei"/>
                         </a:rPr>
-                        <a:t>6156</a:t>
+                        <a:t>4121</a:t>
                       </a:r>
                     </a:p>
                   </a:txBody>
@@ -6963,7 +7329,7 @@
                           <a:ea typeface="Microsoft JhengHei"/>
                           <a:cs typeface="Microsoft JhengHei"/>
                         </a:rPr>
-                        <a:t>安永聯合會計師事務所</a:t>
+                        <a:t>安侯建業聯合會計師事務所</a:t>
                       </a:r>
                     </a:p>
                   </a:txBody>
@@ -6987,135 +7353,13 @@
                           <a:ea typeface="Microsoft JhengHei"/>
                           <a:cs typeface="Microsoft JhengHei"/>
                         </a:rPr>
-                        <a:t>羅筱靖、陳國帥</a:t>
+                        <a:t>鄒依芸、毛聖崴</a:t>
                       </a:r>
                     </a:p>
                   </a:txBody>
                   <a:tcPr anchor="ctr" marL="73152" marT="9144" marB="9144">
                     <a:solidFill>
                       <a:srgbClr val="EEF2F9"/>
-                    </a:solidFill>
-                  </a:tcPr>
-                </a:tc>
-              </a:tr>
-              <a:tr h="457200">
-                <a:tc>
-                  <a:txBody>
-                    <a:bodyPr/>
-                    <a:lstStyle/>
-                    <a:p>
-                      <a:r>
-                        <a:rPr sz="1150" b="0">
-                          <a:solidFill>
-                            <a:srgbClr val="1A2233"/>
-                          </a:solidFill>
-                          <a:latin typeface="Microsoft JhengHei"/>
-                          <a:ea typeface="Microsoft JhengHei"/>
-                          <a:cs typeface="Microsoft JhengHei"/>
-                        </a:rPr>
-                        <a:t>優盛</a:t>
-                      </a:r>
-                    </a:p>
-                  </a:txBody>
-                  <a:tcPr anchor="ctr" marL="73152" marT="9144" marB="9144">
-                    <a:solidFill>
-                      <a:srgbClr val="FFFFFF"/>
-                    </a:solidFill>
-                  </a:tcPr>
-                </a:tc>
-                <a:tc>
-                  <a:txBody>
-                    <a:bodyPr/>
-                    <a:lstStyle/>
-                    <a:p>
-                      <a:r>
-                        <a:rPr sz="1150" b="0">
-                          <a:solidFill>
-                            <a:srgbClr val="1A2233"/>
-                          </a:solidFill>
-                          <a:latin typeface="Microsoft JhengHei"/>
-                          <a:ea typeface="Microsoft JhengHei"/>
-                          <a:cs typeface="Microsoft JhengHei"/>
-                        </a:rPr>
-                        <a:t>4121</a:t>
-                      </a:r>
-                    </a:p>
-                  </a:txBody>
-                  <a:tcPr anchor="ctr" marL="73152" marT="9144" marB="9144">
-                    <a:solidFill>
-                      <a:srgbClr val="FFFFFF"/>
-                    </a:solidFill>
-                  </a:tcPr>
-                </a:tc>
-                <a:tc>
-                  <a:txBody>
-                    <a:bodyPr/>
-                    <a:lstStyle/>
-                    <a:p>
-                      <a:r>
-                        <a:rPr sz="1150" b="1">
-                          <a:solidFill>
-                            <a:srgbClr val="E63946"/>
-                          </a:solidFill>
-                          <a:latin typeface="Microsoft JhengHei"/>
-                          <a:ea typeface="Microsoft JhengHei"/>
-                          <a:cs typeface="Microsoft JhengHei"/>
-                        </a:rPr>
-                        <a:t>駭客攻擊</a:t>
-                      </a:r>
-                    </a:p>
-                  </a:txBody>
-                  <a:tcPr anchor="ctr" marL="73152" marT="9144" marB="9144">
-                    <a:solidFill>
-                      <a:srgbClr val="FFFFFF"/>
-                    </a:solidFill>
-                  </a:tcPr>
-                </a:tc>
-                <a:tc>
-                  <a:txBody>
-                    <a:bodyPr/>
-                    <a:lstStyle/>
-                    <a:p>
-                      <a:r>
-                        <a:rPr sz="1150" b="0">
-                          <a:solidFill>
-                            <a:srgbClr val="1A2233"/>
-                          </a:solidFill>
-                          <a:latin typeface="Microsoft JhengHei"/>
-                          <a:ea typeface="Microsoft JhengHei"/>
-                          <a:cs typeface="Microsoft JhengHei"/>
-                        </a:rPr>
-                        <a:t>安侯建業聯合會計師事務所</a:t>
-                      </a:r>
-                    </a:p>
-                  </a:txBody>
-                  <a:tcPr anchor="ctr" marL="73152" marT="9144" marB="9144">
-                    <a:solidFill>
-                      <a:srgbClr val="FFFFFF"/>
-                    </a:solidFill>
-                  </a:tcPr>
-                </a:tc>
-                <a:tc>
-                  <a:txBody>
-                    <a:bodyPr/>
-                    <a:lstStyle/>
-                    <a:p>
-                      <a:r>
-                        <a:rPr sz="1150" b="0">
-                          <a:solidFill>
-                            <a:srgbClr val="1A2233"/>
-                          </a:solidFill>
-                          <a:latin typeface="Microsoft JhengHei"/>
-                          <a:ea typeface="Microsoft JhengHei"/>
-                          <a:cs typeface="Microsoft JhengHei"/>
-                        </a:rPr>
-                        <a:t>鄒依芸、毛聖崴</a:t>
-                      </a:r>
-                    </a:p>
-                  </a:txBody>
-                  <a:tcPr anchor="ctr" marL="73152" marT="9144" marB="9144">
-                    <a:solidFill>
-                      <a:srgbClr val="FFFFFF"/>
                     </a:solidFill>
                   </a:tcPr>
                 </a:tc>
@@ -8630,7 +8874,7 @@
                 <a:ea typeface="Microsoft JhengHei"/>
                 <a:cs typeface="Microsoft JhengHei"/>
               </a:rPr>
-              <a:t>藥華藥 </a:t>
+              <a:t>州巧 </a:t>
             </a:r>
             <a:r>
               <a:rPr sz="1300" b="0">
@@ -8641,7 +8885,7 @@
                 <a:ea typeface="Microsoft JhengHei"/>
                 <a:cs typeface="Microsoft JhengHei"/>
               </a:rPr>
-              <a:t>6446</a:t>
+              <a:t>3543</a:t>
             </a:r>
           </a:p>
         </p:txBody>
@@ -8774,7 +9018,7 @@
                 <a:ea typeface="Microsoft JhengHei"/>
                 <a:cs typeface="Microsoft JhengHei"/>
               </a:rPr>
-              <a:t>本公司及泛泰醫療子公司之部分資訊系統遭受駭客網路攻擊，初步評估對公司營運無重大影響。</a:t>
+              <a:t>本公司及重要子公司(蘇州州巧、廈門州巧及越南州巧)之部份資訊系統遭不明駭客入侵，導致部分系統無法…</a:t>
             </a:r>
           </a:p>
         </p:txBody>
@@ -8826,7 +9070,7 @@
                 <a:ea typeface="Microsoft JhengHei"/>
                 <a:cs typeface="Microsoft JhengHei"/>
               </a:rPr>
-              <a:t>本公司將持續提升網路與資訊基礎架構之安全管控，以確保資訊安全。</a:t>
+              <a:t>完成相關安全漏洞修復後，將持續強化網路與資訊基礎架構之安全防護機制及管理措施，確保資訊系統穩定運作及資訊安全。</a:t>
             </a:r>
           </a:p>
         </p:txBody>
@@ -8953,7 +9197,7 @@
                 <a:ea typeface="Microsoft JhengHei"/>
                 <a:cs typeface="Microsoft JhengHei"/>
               </a:rPr>
-              <a:t>上銀 </a:t>
+              <a:t>藥華藥 </a:t>
             </a:r>
             <a:r>
               <a:rPr sz="1300" b="0">
@@ -8964,7 +9208,7 @@
                 <a:ea typeface="Microsoft JhengHei"/>
                 <a:cs typeface="Microsoft JhengHei"/>
               </a:rPr>
-              <a:t>2049</a:t>
+              <a:t>6446</a:t>
             </a:r>
           </a:p>
         </p:txBody>
@@ -9097,7 +9341,7 @@
                 <a:ea typeface="Microsoft JhengHei"/>
                 <a:cs typeface="Microsoft JhengHei"/>
               </a:rPr>
-              <a:t>本公司義大利子公司部份資訊系統遭受駭客網路攻擊</a:t>
+              <a:t>本公司及泛泰醫療子公司之部分資訊系統遭受駭客網路攻擊，初步評估對公司營運無重大影響。</a:t>
             </a:r>
           </a:p>
         </p:txBody>
@@ -9149,7 +9393,7 @@
                 <a:ea typeface="Microsoft JhengHei"/>
                 <a:cs typeface="Microsoft JhengHei"/>
               </a:rPr>
-              <a:t>完成相關安全漏洞修復後，將持續強化網路與資訊基礎架構之安全防護機制及管理措施，確保資訊系統穩定運作及資訊安全。</a:t>
+              <a:t>本公司將持續提升網路與資訊基礎架構之安全管控，以確保資訊安全。</a:t>
             </a:r>
           </a:p>
         </p:txBody>
@@ -9215,7 +9459,7 @@
             <a:avLst/>
           </a:prstGeom>
           <a:solidFill>
-            <a:srgbClr val="27A6C4"/>
+            <a:srgbClr val="E63946"/>
           </a:solidFill>
           <a:ln>
             <a:noFill/>
@@ -9276,7 +9520,7 @@
                 <a:ea typeface="Microsoft JhengHei"/>
                 <a:cs typeface="Microsoft JhengHei"/>
               </a:rPr>
-              <a:t>萬達寵物 </a:t>
+              <a:t>上銀 </a:t>
             </a:r>
             <a:r>
               <a:rPr sz="1300" b="0">
@@ -9287,7 +9531,7 @@
                 <a:ea typeface="Microsoft JhengHei"/>
                 <a:cs typeface="Microsoft JhengHei"/>
               </a:rPr>
-              <a:t>6968</a:t>
+              <a:t>2049</a:t>
             </a:r>
           </a:p>
         </p:txBody>
@@ -9307,7 +9551,7 @@
             <a:avLst/>
           </a:prstGeom>
           <a:solidFill>
-            <a:srgbClr val="27A6C4"/>
+            <a:srgbClr val="E63946"/>
           </a:solidFill>
           <a:ln>
             <a:noFill/>
@@ -9368,7 +9612,7 @@
                 <a:ea typeface="Microsoft JhengHei"/>
                 <a:cs typeface="Microsoft JhengHei"/>
               </a:rPr>
-              <a:t>個資外洩</a:t>
+              <a:t>駭客攻擊</a:t>
             </a:r>
           </a:p>
         </p:txBody>
@@ -9403,7 +9647,7 @@
             <a:r>
               <a:rPr sz="1100" b="1">
                 <a:solidFill>
-                  <a:srgbClr val="27A6C4"/>
+                  <a:srgbClr val="E63946"/>
                 </a:solidFill>
                 <a:latin typeface="Microsoft JhengHei"/>
                 <a:ea typeface="Microsoft JhengHei"/>
@@ -9420,7 +9664,7 @@
                 <a:ea typeface="Microsoft JhengHei"/>
                 <a:cs typeface="Microsoft JhengHei"/>
               </a:rPr>
-              <a:t>本公司因合作廠商資訊系統遭不明人士入侵，疑似部份資料外洩</a:t>
+              <a:t>本公司義大利子公司部份資訊系統遭受駭客網路攻擊</a:t>
             </a:r>
           </a:p>
         </p:txBody>
@@ -9455,7 +9699,7 @@
             <a:r>
               <a:rPr sz="1100" b="1">
                 <a:solidFill>
-                  <a:srgbClr val="27A6C4"/>
+                  <a:srgbClr val="E63946"/>
                 </a:solidFill>
                 <a:latin typeface="Microsoft JhengHei"/>
                 <a:ea typeface="Microsoft JhengHei"/>
@@ -9472,7 +9716,7 @@
                 <a:ea typeface="Microsoft JhengHei"/>
                 <a:cs typeface="Microsoft JhengHei"/>
               </a:rPr>
-              <a:t>本公司並無與合作廠商串接會員資料、信用卡號、銀行帳戶等敏感資訊，不會產生任何金流交易。本公司已嚴正要求合作廠商技術團隊，…</a:t>
+              <a:t>完成相關安全漏洞修復後，將持續強化網路與資訊基礎架構之安全防護機制及管理措施，確保資訊系統穩定運作及資訊安全。</a:t>
             </a:r>
           </a:p>
         </p:txBody>
@@ -9538,7 +9782,7 @@
             <a:avLst/>
           </a:prstGeom>
           <a:solidFill>
-            <a:srgbClr val="5C6679"/>
+            <a:srgbClr val="27A6C4"/>
           </a:solidFill>
           <a:ln>
             <a:noFill/>
@@ -9599,7 +9843,7 @@
                 <a:ea typeface="Microsoft JhengHei"/>
                 <a:cs typeface="Microsoft JhengHei"/>
               </a:rPr>
-              <a:t>淳安 </a:t>
+              <a:t>萬達寵物 </a:t>
             </a:r>
             <a:r>
               <a:rPr sz="1300" b="0">
@@ -9610,7 +9854,7 @@
                 <a:ea typeface="Microsoft JhengHei"/>
                 <a:cs typeface="Microsoft JhengHei"/>
               </a:rPr>
-              <a:t>6283</a:t>
+              <a:t>6968</a:t>
             </a:r>
           </a:p>
         </p:txBody>
@@ -9630,7 +9874,7 @@
             <a:avLst/>
           </a:prstGeom>
           <a:solidFill>
-            <a:srgbClr val="5C6679"/>
+            <a:srgbClr val="27A6C4"/>
           </a:solidFill>
           <a:ln>
             <a:noFill/>
@@ -9691,7 +9935,7 @@
                 <a:ea typeface="Microsoft JhengHei"/>
                 <a:cs typeface="Microsoft JhengHei"/>
               </a:rPr>
-              <a:t>其他</a:t>
+              <a:t>個資外洩</a:t>
             </a:r>
           </a:p>
         </p:txBody>
@@ -9726,7 +9970,7 @@
             <a:r>
               <a:rPr sz="1100" b="1">
                 <a:solidFill>
-                  <a:srgbClr val="5C6679"/>
+                  <a:srgbClr val="27A6C4"/>
                 </a:solidFill>
                 <a:latin typeface="Microsoft JhengHei"/>
                 <a:ea typeface="Microsoft JhengHei"/>
@@ -9743,7 +9987,7 @@
                 <a:ea typeface="Microsoft JhengHei"/>
                 <a:cs typeface="Microsoft JhengHei"/>
               </a:rPr>
-              <a:t>本公司網路資安事件說明</a:t>
+              <a:t>本公司因合作廠商資訊系統遭不明人士入侵，疑似部份資料外洩</a:t>
             </a:r>
           </a:p>
         </p:txBody>
@@ -9778,7 +10022,7 @@
             <a:r>
               <a:rPr sz="1100" b="1">
                 <a:solidFill>
-                  <a:srgbClr val="5C6679"/>
+                  <a:srgbClr val="27A6C4"/>
                 </a:solidFill>
                 <a:latin typeface="Microsoft JhengHei"/>
                 <a:ea typeface="Microsoft JhengHei"/>
@@ -9795,7 +10039,7 @@
                 <a:ea typeface="Microsoft JhengHei"/>
                 <a:cs typeface="Microsoft JhengHei"/>
               </a:rPr>
-              <a:t>本公司後續將持續提升網路與資訊基礎架構之安全管控，以確保資訊安全。</a:t>
+              <a:t>本公司並無與合作廠商串接會員資料、信用卡號、銀行帳戶等敏感資訊，不會產生任何金流交易。本公司已嚴正要求合作廠商技術團隊，…</a:t>
             </a:r>
           </a:p>
         </p:txBody>
@@ -10320,7 +10564,7 @@
             <a:avLst/>
           </a:prstGeom>
           <a:solidFill>
-            <a:srgbClr val="E63946"/>
+            <a:srgbClr val="5C6679"/>
           </a:solidFill>
           <a:ln>
             <a:noFill/>
@@ -10381,7 +10625,7 @@
                 <a:ea typeface="Microsoft JhengHei"/>
                 <a:cs typeface="Microsoft JhengHei"/>
               </a:rPr>
-              <a:t>松上 </a:t>
+              <a:t>淳安 </a:t>
             </a:r>
             <a:r>
               <a:rPr sz="1300" b="0">
@@ -10392,7 +10636,7 @@
                 <a:ea typeface="Microsoft JhengHei"/>
                 <a:cs typeface="Microsoft JhengHei"/>
               </a:rPr>
-              <a:t>6156</a:t>
+              <a:t>6283</a:t>
             </a:r>
           </a:p>
         </p:txBody>
@@ -10412,7 +10656,7 @@
             <a:avLst/>
           </a:prstGeom>
           <a:solidFill>
-            <a:srgbClr val="E63946"/>
+            <a:srgbClr val="5C6679"/>
           </a:solidFill>
           <a:ln>
             <a:noFill/>
@@ -10473,7 +10717,7 @@
                 <a:ea typeface="Microsoft JhengHei"/>
                 <a:cs typeface="Microsoft JhengHei"/>
               </a:rPr>
-              <a:t>駭客攻擊</a:t>
+              <a:t>其他</a:t>
             </a:r>
           </a:p>
         </p:txBody>
@@ -10508,7 +10752,7 @@
             <a:r>
               <a:rPr sz="1100" b="1">
                 <a:solidFill>
-                  <a:srgbClr val="E63946"/>
+                  <a:srgbClr val="5C6679"/>
                 </a:solidFill>
                 <a:latin typeface="Microsoft JhengHei"/>
                 <a:ea typeface="Microsoft JhengHei"/>
@@ -10525,7 +10769,7 @@
                 <a:ea typeface="Microsoft JhengHei"/>
                 <a:cs typeface="Microsoft JhengHei"/>
               </a:rPr>
-              <a:t>本公司使用之部分資訊系統遭受駭客網路攻擊。</a:t>
+              <a:t>本公司網路資安事件說明</a:t>
             </a:r>
           </a:p>
         </p:txBody>
@@ -10560,7 +10804,7 @@
             <a:r>
               <a:rPr sz="1100" b="1">
                 <a:solidFill>
-                  <a:srgbClr val="E63946"/>
+                  <a:srgbClr val="5C6679"/>
                 </a:solidFill>
                 <a:latin typeface="Microsoft JhengHei"/>
                 <a:ea typeface="Microsoft JhengHei"/>
@@ -10577,7 +10821,7 @@
                 <a:ea typeface="Microsoft JhengHei"/>
                 <a:cs typeface="Microsoft JhengHei"/>
               </a:rPr>
-              <a:t>本公司後續仍將持續提升網路與資訊基礎架構之安全管控以確保資訊安全。</a:t>
+              <a:t>本公司後續將持續提升網路與資訊基礎架構之安全管控，以確保資訊安全。</a:t>
             </a:r>
           </a:p>
         </p:txBody>
@@ -10704,7 +10948,7 @@
                 <a:ea typeface="Microsoft JhengHei"/>
                 <a:cs typeface="Microsoft JhengHei"/>
               </a:rPr>
-              <a:t>優盛 </a:t>
+              <a:t>松上 </a:t>
             </a:r>
             <a:r>
               <a:rPr sz="1300" b="0">
@@ -10715,7 +10959,7 @@
                 <a:ea typeface="Microsoft JhengHei"/>
                 <a:cs typeface="Microsoft JhengHei"/>
               </a:rPr>
-              <a:t>4121</a:t>
+              <a:t>6156</a:t>
             </a:r>
           </a:p>
         </p:txBody>
@@ -10848,7 +11092,7 @@
                 <a:ea typeface="Microsoft JhengHei"/>
                 <a:cs typeface="Microsoft JhengHei"/>
               </a:rPr>
-              <a:t>本公司之官網於今天下午遭受網路駭客攻擊</a:t>
+              <a:t>本公司使用之部分資訊系統遭受駭客網路攻擊。</a:t>
             </a:r>
           </a:p>
         </p:txBody>
@@ -10862,6 +11106,329 @@
         <p:spPr>
           <a:xfrm>
             <a:off x="777240" y="5257800"/>
+            <a:ext cx="4937760" cy="713232"/>
+          </a:xfrm>
+          <a:prstGeom prst="rect">
+            <a:avLst/>
+          </a:prstGeom>
+          <a:noFill/>
+        </p:spPr>
+        <p:txBody>
+          <a:bodyPr wrap="square" anchor="t" lIns="0" rIns="0" tIns="0" bIns="0">
+            <a:spAutoFit/>
+          </a:bodyPr>
+          <a:lstStyle/>
+          <a:p>
+            <a:pPr algn="l">
+              <a:lnSpc>
+                <a:spcPts val="1500"/>
+              </a:lnSpc>
+            </a:pPr>
+            <a:r>
+              <a:rPr sz="1100" b="1">
+                <a:solidFill>
+                  <a:srgbClr val="E63946"/>
+                </a:solidFill>
+                <a:latin typeface="Microsoft JhengHei"/>
+                <a:ea typeface="Microsoft JhengHei"/>
+                <a:cs typeface="Microsoft JhengHei"/>
+              </a:rPr>
+              <a:t>因應　</a:t>
+            </a:r>
+            <a:r>
+              <a:rPr sz="1100" b="0">
+                <a:solidFill>
+                  <a:srgbClr val="1A2233"/>
+                </a:solidFill>
+                <a:latin typeface="Microsoft JhengHei"/>
+                <a:ea typeface="Microsoft JhengHei"/>
+                <a:cs typeface="Microsoft JhengHei"/>
+              </a:rPr>
+              <a:t>本公司後續仍將持續提升網路與資訊基礎架構之安全管控以確保資訊安全。</a:t>
+            </a:r>
+          </a:p>
+        </p:txBody>
+      </p:sp>
+      <p:sp>
+        <p:nvSpPr>
+          <p:cNvPr id="26" name="Rounded Rectangle 25"/>
+          <p:cNvSpPr/>
+          <p:nvPr/>
+        </p:nvSpPr>
+        <p:spPr>
+          <a:xfrm>
+            <a:off x="6172200" y="3886200"/>
+            <a:ext cx="5394960" cy="2148840"/>
+          </a:xfrm>
+          <a:prstGeom prst="roundRect">
+            <a:avLst/>
+          </a:prstGeom>
+          <a:solidFill>
+            <a:srgbClr val="FFFFFF"/>
+          </a:solidFill>
+          <a:ln w="12700">
+            <a:solidFill>
+              <a:srgbClr val="DDE3EE"/>
+            </a:solidFill>
+          </a:ln>
+          <a:effectLst/>
+        </p:spPr>
+        <p:style>
+          <a:lnRef idx="1">
+            <a:schemeClr val="accent1"/>
+          </a:lnRef>
+          <a:fillRef idx="3">
+            <a:schemeClr val="accent1"/>
+          </a:fillRef>
+          <a:effectRef idx="2">
+            <a:schemeClr val="accent1"/>
+          </a:effectRef>
+          <a:fontRef idx="minor">
+            <a:schemeClr val="lt1"/>
+          </a:fontRef>
+        </p:style>
+        <p:txBody>
+          <a:bodyPr rtlCol="0" anchor="ctr"/>
+          <a:lstStyle/>
+          <a:p>
+            <a:pPr algn="ctr"/>
+          </a:p>
+        </p:txBody>
+      </p:sp>
+      <p:sp>
+        <p:nvSpPr>
+          <p:cNvPr id="27" name="Rectangle 26"/>
+          <p:cNvSpPr/>
+          <p:nvPr/>
+        </p:nvSpPr>
+        <p:spPr>
+          <a:xfrm>
+            <a:off x="6172200" y="3886200"/>
+            <a:ext cx="5394960" cy="109728"/>
+          </a:xfrm>
+          <a:prstGeom prst="rect">
+            <a:avLst/>
+          </a:prstGeom>
+          <a:solidFill>
+            <a:srgbClr val="E63946"/>
+          </a:solidFill>
+          <a:ln>
+            <a:noFill/>
+          </a:ln>
+          <a:effectLst/>
+        </p:spPr>
+        <p:style>
+          <a:lnRef idx="1">
+            <a:schemeClr val="accent1"/>
+          </a:lnRef>
+          <a:fillRef idx="3">
+            <a:schemeClr val="accent1"/>
+          </a:fillRef>
+          <a:effectRef idx="2">
+            <a:schemeClr val="accent1"/>
+          </a:effectRef>
+          <a:fontRef idx="minor">
+            <a:schemeClr val="lt1"/>
+          </a:fontRef>
+        </p:style>
+        <p:txBody>
+          <a:bodyPr rtlCol="0" anchor="ctr"/>
+          <a:lstStyle/>
+          <a:p>
+            <a:pPr algn="ctr"/>
+          </a:p>
+        </p:txBody>
+      </p:sp>
+      <p:sp>
+        <p:nvSpPr>
+          <p:cNvPr id="28" name="TextBox 27"/>
+          <p:cNvSpPr txBox="1"/>
+          <p:nvPr/>
+        </p:nvSpPr>
+        <p:spPr>
+          <a:xfrm>
+            <a:off x="6400800" y="4105656"/>
+            <a:ext cx="3657600" cy="365760"/>
+          </a:xfrm>
+          <a:prstGeom prst="rect">
+            <a:avLst/>
+          </a:prstGeom>
+          <a:noFill/>
+        </p:spPr>
+        <p:txBody>
+          <a:bodyPr wrap="square" anchor="ctr" lIns="0" rIns="0" tIns="0" bIns="0">
+            <a:spAutoFit/>
+          </a:bodyPr>
+          <a:lstStyle/>
+          <a:p>
+            <a:pPr algn="l"/>
+            <a:r>
+              <a:rPr sz="1600" b="1">
+                <a:solidFill>
+                  <a:srgbClr val="1A2233"/>
+                </a:solidFill>
+                <a:latin typeface="Microsoft JhengHei"/>
+                <a:ea typeface="Microsoft JhengHei"/>
+                <a:cs typeface="Microsoft JhengHei"/>
+              </a:rPr>
+              <a:t>優盛 </a:t>
+            </a:r>
+            <a:r>
+              <a:rPr sz="1300" b="0">
+                <a:solidFill>
+                  <a:srgbClr val="5C6679"/>
+                </a:solidFill>
+                <a:latin typeface="Microsoft JhengHei"/>
+                <a:ea typeface="Microsoft JhengHei"/>
+                <a:cs typeface="Microsoft JhengHei"/>
+              </a:rPr>
+              <a:t>4121</a:t>
+            </a:r>
+          </a:p>
+        </p:txBody>
+      </p:sp>
+      <p:sp>
+        <p:nvSpPr>
+          <p:cNvPr id="29" name="Rounded Rectangle 28"/>
+          <p:cNvSpPr/>
+          <p:nvPr/>
+        </p:nvSpPr>
+        <p:spPr>
+          <a:xfrm>
+            <a:off x="10149840" y="4123944"/>
+            <a:ext cx="1234440" cy="347472"/>
+          </a:xfrm>
+          <a:prstGeom prst="roundRect">
+            <a:avLst/>
+          </a:prstGeom>
+          <a:solidFill>
+            <a:srgbClr val="E63946"/>
+          </a:solidFill>
+          <a:ln>
+            <a:noFill/>
+          </a:ln>
+          <a:effectLst/>
+        </p:spPr>
+        <p:style>
+          <a:lnRef idx="1">
+            <a:schemeClr val="accent1"/>
+          </a:lnRef>
+          <a:fillRef idx="3">
+            <a:schemeClr val="accent1"/>
+          </a:fillRef>
+          <a:effectRef idx="2">
+            <a:schemeClr val="accent1"/>
+          </a:effectRef>
+          <a:fontRef idx="minor">
+            <a:schemeClr val="lt1"/>
+          </a:fontRef>
+        </p:style>
+        <p:txBody>
+          <a:bodyPr rtlCol="0" anchor="ctr"/>
+          <a:lstStyle/>
+          <a:p>
+            <a:pPr algn="ctr"/>
+          </a:p>
+        </p:txBody>
+      </p:sp>
+      <p:sp>
+        <p:nvSpPr>
+          <p:cNvPr id="30" name="TextBox 29"/>
+          <p:cNvSpPr txBox="1"/>
+          <p:nvPr/>
+        </p:nvSpPr>
+        <p:spPr>
+          <a:xfrm>
+            <a:off x="10149840" y="4123944"/>
+            <a:ext cx="1234440" cy="347472"/>
+          </a:xfrm>
+          <a:prstGeom prst="rect">
+            <a:avLst/>
+          </a:prstGeom>
+          <a:noFill/>
+        </p:spPr>
+        <p:txBody>
+          <a:bodyPr wrap="square" anchor="ctr" lIns="0" rIns="0" tIns="0" bIns="0">
+            <a:spAutoFit/>
+          </a:bodyPr>
+          <a:lstStyle/>
+          <a:p>
+            <a:pPr algn="ctr"/>
+            <a:r>
+              <a:rPr sz="1050" b="1">
+                <a:solidFill>
+                  <a:srgbClr val="FFFFFF"/>
+                </a:solidFill>
+                <a:latin typeface="Microsoft JhengHei"/>
+                <a:ea typeface="Microsoft JhengHei"/>
+                <a:cs typeface="Microsoft JhengHei"/>
+              </a:rPr>
+              <a:t>駭客攻擊</a:t>
+            </a:r>
+          </a:p>
+        </p:txBody>
+      </p:sp>
+      <p:sp>
+        <p:nvSpPr>
+          <p:cNvPr id="31" name="TextBox 30"/>
+          <p:cNvSpPr txBox="1"/>
+          <p:nvPr/>
+        </p:nvSpPr>
+        <p:spPr>
+          <a:xfrm>
+            <a:off x="6400800" y="4599432"/>
+            <a:ext cx="4937760" cy="640080"/>
+          </a:xfrm>
+          <a:prstGeom prst="rect">
+            <a:avLst/>
+          </a:prstGeom>
+          <a:noFill/>
+        </p:spPr>
+        <p:txBody>
+          <a:bodyPr wrap="square" anchor="t" lIns="0" rIns="0" tIns="0" bIns="0">
+            <a:spAutoFit/>
+          </a:bodyPr>
+          <a:lstStyle/>
+          <a:p>
+            <a:pPr algn="l">
+              <a:lnSpc>
+                <a:spcPts val="1500"/>
+              </a:lnSpc>
+            </a:pPr>
+            <a:r>
+              <a:rPr sz="1100" b="1">
+                <a:solidFill>
+                  <a:srgbClr val="E63946"/>
+                </a:solidFill>
+                <a:latin typeface="Microsoft JhengHei"/>
+                <a:ea typeface="Microsoft JhengHei"/>
+                <a:cs typeface="Microsoft JhengHei"/>
+              </a:rPr>
+              <a:t>緣由　</a:t>
+            </a:r>
+            <a:r>
+              <a:rPr sz="1100" b="0">
+                <a:solidFill>
+                  <a:srgbClr val="1A2233"/>
+                </a:solidFill>
+                <a:latin typeface="Microsoft JhengHei"/>
+                <a:ea typeface="Microsoft JhengHei"/>
+                <a:cs typeface="Microsoft JhengHei"/>
+              </a:rPr>
+              <a:t>本公司之官網於今天下午遭受網路駭客攻擊</a:t>
+            </a:r>
+          </a:p>
+        </p:txBody>
+      </p:sp>
+      <p:sp>
+        <p:nvSpPr>
+          <p:cNvPr id="32" name="TextBox 31"/>
+          <p:cNvSpPr txBox="1"/>
+          <p:nvPr/>
+        </p:nvSpPr>
+        <p:spPr>
+          <a:xfrm>
+            <a:off x="6400800" y="5257800"/>
             <a:ext cx="4937760" cy="713232"/>
           </a:xfrm>
           <a:prstGeom prst="rect">

--- a/資安事件因應分析.pptx
+++ b/資安事件因應分析.pptx
@@ -3528,7 +3528,7 @@
                 <a:ea typeface="Microsoft JhengHei"/>
                 <a:cs typeface="Microsoft JhengHei"/>
               </a:rPr>
-              <a:t>資料期間 2026-07-06 ~ 2026-08-06　｜　MOPS 重大訊息全文檢索　｜　8 家公司</a:t>
+              <a:t>資料期間 2026-07-08 ~ 2026-08-08　｜　MOPS 重大訊息全文檢索　｜　8 家公司</a:t>
             </a:r>
           </a:p>
         </p:txBody>
@@ -4272,7 +4272,7 @@
                           <a:ea typeface="Microsoft JhengHei"/>
                           <a:cs typeface="Microsoft JhengHei"/>
                         </a:rPr>
-                        <a:t>州巧</a:t>
+                        <a:t>逸達</a:t>
                       </a:r>
                     </a:p>
                   </a:txBody>
@@ -4296,7 +4296,7 @@
                           <a:ea typeface="Microsoft JhengHei"/>
                           <a:cs typeface="Microsoft JhengHei"/>
                         </a:rPr>
-                        <a:t>3543</a:t>
+                        <a:t>6576</a:t>
                       </a:r>
                     </a:p>
                   </a:txBody>
@@ -4320,7 +4320,7 @@
                           <a:ea typeface="Microsoft JhengHei"/>
                           <a:cs typeface="Microsoft JhengHei"/>
                         </a:rPr>
-                        <a:t>08/05</a:t>
+                        <a:t>08/07</a:t>
                       </a:r>
                     </a:p>
                   </a:txBody>
@@ -4368,7 +4368,7 @@
                           <a:ea typeface="Microsoft JhengHei"/>
                           <a:cs typeface="Microsoft JhengHei"/>
                         </a:rPr>
-                        <a:t>目前初步評估對公司營運無重大影響。</a:t>
+                        <a:t>本公司目前正積極會同技術專家協助調查，初步評估對公司營運暫無重大影響…</a:t>
                       </a:r>
                     </a:p>
                   </a:txBody>
@@ -4394,7 +4394,7 @@
                           <a:ea typeface="Microsoft JhengHei"/>
                           <a:cs typeface="Microsoft JhengHei"/>
                         </a:rPr>
-                        <a:t>藥華藥</a:t>
+                        <a:t>州巧</a:t>
                       </a:r>
                     </a:p>
                   </a:txBody>
@@ -4418,7 +4418,7 @@
                           <a:ea typeface="Microsoft JhengHei"/>
                           <a:cs typeface="Microsoft JhengHei"/>
                         </a:rPr>
-                        <a:t>6446</a:t>
+                        <a:t>3543</a:t>
                       </a:r>
                     </a:p>
                   </a:txBody>
@@ -4442,7 +4442,7 @@
                           <a:ea typeface="Microsoft JhengHei"/>
                           <a:cs typeface="Microsoft JhengHei"/>
                         </a:rPr>
-                        <a:t>08/03</a:t>
+                        <a:t>08/05</a:t>
                       </a:r>
                     </a:p>
                   </a:txBody>
@@ -4490,7 +4490,7 @@
                           <a:ea typeface="Microsoft JhengHei"/>
                           <a:cs typeface="Microsoft JhengHei"/>
                         </a:rPr>
-                        <a:t>本公司目前正積極會同技術專家協助調查，初步評估對公司營運無重大影響。</a:t>
+                        <a:t>目前初步評估對公司營運無重大影響。</a:t>
                       </a:r>
                     </a:p>
                   </a:txBody>
@@ -4516,7 +4516,7 @@
                           <a:ea typeface="Microsoft JhengHei"/>
                           <a:cs typeface="Microsoft JhengHei"/>
                         </a:rPr>
-                        <a:t>上銀</a:t>
+                        <a:t>藥華藥</a:t>
                       </a:r>
                     </a:p>
                   </a:txBody>
@@ -4540,7 +4540,7 @@
                           <a:ea typeface="Microsoft JhengHei"/>
                           <a:cs typeface="Microsoft JhengHei"/>
                         </a:rPr>
-                        <a:t>2049</a:t>
+                        <a:t>6446</a:t>
                       </a:r>
                     </a:p>
                   </a:txBody>
@@ -4564,7 +4564,7 @@
                           <a:ea typeface="Microsoft JhengHei"/>
                           <a:cs typeface="Microsoft JhengHei"/>
                         </a:rPr>
-                        <a:t>07/28</a:t>
+                        <a:t>08/03</a:t>
                       </a:r>
                     </a:p>
                   </a:txBody>
@@ -4612,7 +4612,7 @@
                           <a:ea typeface="Microsoft JhengHei"/>
                           <a:cs typeface="Microsoft JhengHei"/>
                         </a:rPr>
-                        <a:t>目前初步評估對公司營運無重大影響。</a:t>
+                        <a:t>本公司目前正積極會同技術專家協助調查，初步評估對公司營運無重大影響。</a:t>
                       </a:r>
                     </a:p>
                   </a:txBody>
@@ -4638,7 +4638,7 @@
                           <a:ea typeface="Microsoft JhengHei"/>
                           <a:cs typeface="Microsoft JhengHei"/>
                         </a:rPr>
-                        <a:t>萬達寵物</a:t>
+                        <a:t>上銀</a:t>
                       </a:r>
                     </a:p>
                   </a:txBody>
@@ -4662,7 +4662,7 @@
                           <a:ea typeface="Microsoft JhengHei"/>
                           <a:cs typeface="Microsoft JhengHei"/>
                         </a:rPr>
-                        <a:t>6968</a:t>
+                        <a:t>2049</a:t>
                       </a:r>
                     </a:p>
                   </a:txBody>
@@ -4686,13 +4686,135 @@
                           <a:ea typeface="Microsoft JhengHei"/>
                           <a:cs typeface="Microsoft JhengHei"/>
                         </a:rPr>
+                        <a:t>07/28</a:t>
+                      </a:r>
+                    </a:p>
+                  </a:txBody>
+                  <a:tcPr anchor="ctr" marL="73152" marT="9144" marB="9144">
+                    <a:solidFill>
+                      <a:srgbClr val="EEF2F9"/>
+                    </a:solidFill>
+                  </a:tcPr>
+                </a:tc>
+                <a:tc>
+                  <a:txBody>
+                    <a:bodyPr/>
+                    <a:lstStyle/>
+                    <a:p>
+                      <a:r>
+                        <a:rPr sz="1150" b="1">
+                          <a:solidFill>
+                            <a:srgbClr val="E63946"/>
+                          </a:solidFill>
+                          <a:latin typeface="Microsoft JhengHei"/>
+                          <a:ea typeface="Microsoft JhengHei"/>
+                          <a:cs typeface="Microsoft JhengHei"/>
+                        </a:rPr>
+                        <a:t>駭客攻擊</a:t>
+                      </a:r>
+                    </a:p>
+                  </a:txBody>
+                  <a:tcPr anchor="ctr" marL="73152" marT="9144" marB="9144">
+                    <a:solidFill>
+                      <a:srgbClr val="EEF2F9"/>
+                    </a:solidFill>
+                  </a:tcPr>
+                </a:tc>
+                <a:tc>
+                  <a:txBody>
+                    <a:bodyPr/>
+                    <a:lstStyle/>
+                    <a:p>
+                      <a:r>
+                        <a:rPr sz="1150" b="0">
+                          <a:solidFill>
+                            <a:srgbClr val="1A2233"/>
+                          </a:solidFill>
+                          <a:latin typeface="Microsoft JhengHei"/>
+                          <a:ea typeface="Microsoft JhengHei"/>
+                          <a:cs typeface="Microsoft JhengHei"/>
+                        </a:rPr>
+                        <a:t>目前初步評估對公司營運無重大影響。</a:t>
+                      </a:r>
+                    </a:p>
+                  </a:txBody>
+                  <a:tcPr anchor="ctr" marL="73152" marT="9144" marB="9144">
+                    <a:solidFill>
+                      <a:srgbClr val="EEF2F9"/>
+                    </a:solidFill>
+                  </a:tcPr>
+                </a:tc>
+              </a:tr>
+              <a:tr h="384048">
+                <a:tc>
+                  <a:txBody>
+                    <a:bodyPr/>
+                    <a:lstStyle/>
+                    <a:p>
+                      <a:r>
+                        <a:rPr sz="1150" b="0">
+                          <a:solidFill>
+                            <a:srgbClr val="1A2233"/>
+                          </a:solidFill>
+                          <a:latin typeface="Microsoft JhengHei"/>
+                          <a:ea typeface="Microsoft JhengHei"/>
+                          <a:cs typeface="Microsoft JhengHei"/>
+                        </a:rPr>
+                        <a:t>萬達寵物</a:t>
+                      </a:r>
+                    </a:p>
+                  </a:txBody>
+                  <a:tcPr anchor="ctr" marL="73152" marT="9144" marB="9144">
+                    <a:solidFill>
+                      <a:srgbClr val="FFFFFF"/>
+                    </a:solidFill>
+                  </a:tcPr>
+                </a:tc>
+                <a:tc>
+                  <a:txBody>
+                    <a:bodyPr/>
+                    <a:lstStyle/>
+                    <a:p>
+                      <a:r>
+                        <a:rPr sz="1150" b="0">
+                          <a:solidFill>
+                            <a:srgbClr val="1A2233"/>
+                          </a:solidFill>
+                          <a:latin typeface="Microsoft JhengHei"/>
+                          <a:ea typeface="Microsoft JhengHei"/>
+                          <a:cs typeface="Microsoft JhengHei"/>
+                        </a:rPr>
+                        <a:t>6968</a:t>
+                      </a:r>
+                    </a:p>
+                  </a:txBody>
+                  <a:tcPr anchor="ctr" marL="73152" marT="9144" marB="9144">
+                    <a:solidFill>
+                      <a:srgbClr val="FFFFFF"/>
+                    </a:solidFill>
+                  </a:tcPr>
+                </a:tc>
+                <a:tc>
+                  <a:txBody>
+                    <a:bodyPr/>
+                    <a:lstStyle/>
+                    <a:p>
+                      <a:r>
+                        <a:rPr sz="1150" b="0">
+                          <a:solidFill>
+                            <a:srgbClr val="1A2233"/>
+                          </a:solidFill>
+                          <a:latin typeface="Microsoft JhengHei"/>
+                          <a:ea typeface="Microsoft JhengHei"/>
+                          <a:cs typeface="Microsoft JhengHei"/>
+                        </a:rPr>
                         <a:t>07/27</a:t>
                       </a:r>
                     </a:p>
                   </a:txBody>
                   <a:tcPr anchor="ctr" marL="73152" marT="9144" marB="9144">
                     <a:solidFill>
-                      <a:srgbClr val="EEF2F9"/>
+                      <a:srgbClr val="FFFFFF"/>
                     </a:solidFill>
                   </a:tcPr>
                 </a:tc>
@@ -4716,6 +4838,56 @@
                   </a:txBody>
                   <a:tcPr anchor="ctr" marL="73152" marT="9144" marB="9144">
                     <a:solidFill>
+                      <a:srgbClr val="FFFFFF"/>
+                    </a:solidFill>
+                  </a:tcPr>
+                </a:tc>
+                <a:tc>
+                  <a:txBody>
+                    <a:bodyPr/>
+                    <a:lstStyle/>
+                    <a:p>
+                      <a:r>
+                        <a:rPr sz="1150" b="0">
+                          <a:solidFill>
+                            <a:srgbClr val="1A2233"/>
+                          </a:solidFill>
+                          <a:latin typeface="Microsoft JhengHei"/>
+                          <a:ea typeface="Microsoft JhengHei"/>
+                          <a:cs typeface="Microsoft JhengHei"/>
+                        </a:rPr>
+                        <a:t>對本公司財務或業務並無重大影響。</a:t>
+                      </a:r>
+                    </a:p>
+                  </a:txBody>
+                  <a:tcPr anchor="ctr" marL="73152" marT="9144" marB="9144">
+                    <a:solidFill>
+                      <a:srgbClr val="FFFFFF"/>
+                    </a:solidFill>
+                  </a:tcPr>
+                </a:tc>
+              </a:tr>
+              <a:tr h="384048">
+                <a:tc>
+                  <a:txBody>
+                    <a:bodyPr/>
+                    <a:lstStyle/>
+                    <a:p>
+                      <a:r>
+                        <a:rPr sz="1150" b="0">
+                          <a:solidFill>
+                            <a:srgbClr val="1A2233"/>
+                          </a:solidFill>
+                          <a:latin typeface="Microsoft JhengHei"/>
+                          <a:ea typeface="Microsoft JhengHei"/>
+                          <a:cs typeface="Microsoft JhengHei"/>
+                        </a:rPr>
+                        <a:t>淳安</a:t>
+                      </a:r>
+                    </a:p>
+                  </a:txBody>
+                  <a:tcPr anchor="ctr" marL="73152" marT="9144" marB="9144">
+                    <a:solidFill>
                       <a:srgbClr val="EEF2F9"/>
                     </a:solidFill>
                   </a:tcPr>
@@ -4734,7 +4906,79 @@
                           <a:ea typeface="Microsoft JhengHei"/>
                           <a:cs typeface="Microsoft JhengHei"/>
                         </a:rPr>
-                        <a:t>對本公司財務或業務並無重大影響。</a:t>
+                        <a:t>6283</a:t>
+                      </a:r>
+                    </a:p>
+                  </a:txBody>
+                  <a:tcPr anchor="ctr" marL="73152" marT="9144" marB="9144">
+                    <a:solidFill>
+                      <a:srgbClr val="EEF2F9"/>
+                    </a:solidFill>
+                  </a:tcPr>
+                </a:tc>
+                <a:tc>
+                  <a:txBody>
+                    <a:bodyPr/>
+                    <a:lstStyle/>
+                    <a:p>
+                      <a:r>
+                        <a:rPr sz="1150" b="0">
+                          <a:solidFill>
+                            <a:srgbClr val="1A2233"/>
+                          </a:solidFill>
+                          <a:latin typeface="Microsoft JhengHei"/>
+                          <a:ea typeface="Microsoft JhengHei"/>
+                          <a:cs typeface="Microsoft JhengHei"/>
+                        </a:rPr>
+                        <a:t>07/21</a:t>
+                      </a:r>
+                    </a:p>
+                  </a:txBody>
+                  <a:tcPr anchor="ctr" marL="73152" marT="9144" marB="9144">
+                    <a:solidFill>
+                      <a:srgbClr val="EEF2F9"/>
+                    </a:solidFill>
+                  </a:tcPr>
+                </a:tc>
+                <a:tc>
+                  <a:txBody>
+                    <a:bodyPr/>
+                    <a:lstStyle/>
+                    <a:p>
+                      <a:r>
+                        <a:rPr sz="1150" b="1">
+                          <a:solidFill>
+                            <a:srgbClr val="5C6679"/>
+                          </a:solidFill>
+                          <a:latin typeface="Microsoft JhengHei"/>
+                          <a:ea typeface="Microsoft JhengHei"/>
+                          <a:cs typeface="Microsoft JhengHei"/>
+                        </a:rPr>
+                        <a:t>其他</a:t>
+                      </a:r>
+                    </a:p>
+                  </a:txBody>
+                  <a:tcPr anchor="ctr" marL="73152" marT="9144" marB="9144">
+                    <a:solidFill>
+                      <a:srgbClr val="EEF2F9"/>
+                    </a:solidFill>
+                  </a:tcPr>
+                </a:tc>
+                <a:tc>
+                  <a:txBody>
+                    <a:bodyPr/>
+                    <a:lstStyle/>
+                    <a:p>
+                      <a:r>
+                        <a:rPr sz="1150" b="0">
+                          <a:solidFill>
+                            <a:srgbClr val="1A2233"/>
+                          </a:solidFill>
+                          <a:latin typeface="Microsoft JhengHei"/>
+                          <a:ea typeface="Microsoft JhengHei"/>
+                          <a:cs typeface="Microsoft JhengHei"/>
+                        </a:rPr>
+                        <a:t>經評估對公司營運無重大影響。</a:t>
                       </a:r>
                     </a:p>
                   </a:txBody>
@@ -4808,7 +5052,7 @@
                           <a:ea typeface="Microsoft JhengHei"/>
                           <a:cs typeface="Microsoft JhengHei"/>
                         </a:rPr>
-                        <a:t>07/21</a:t>
+                        <a:t>07/20</a:t>
                       </a:r>
                     </a:p>
                   </a:txBody>
@@ -4882,7 +5126,7 @@
                           <a:ea typeface="Microsoft JhengHei"/>
                           <a:cs typeface="Microsoft JhengHei"/>
                         </a:rPr>
-                        <a:t>淳安</a:t>
+                        <a:t>松上</a:t>
                       </a:r>
                     </a:p>
                   </a:txBody>
@@ -4906,7 +5150,7 @@
                           <a:ea typeface="Microsoft JhengHei"/>
                           <a:cs typeface="Microsoft JhengHei"/>
                         </a:rPr>
-                        <a:t>6283</a:t>
+                        <a:t>6156</a:t>
                       </a:r>
                     </a:p>
                   </a:txBody>
@@ -4930,251 +5174,7 @@
                           <a:ea typeface="Microsoft JhengHei"/>
                           <a:cs typeface="Microsoft JhengHei"/>
                         </a:rPr>
-                        <a:t>07/20</a:t>
-                      </a:r>
-                    </a:p>
-                  </a:txBody>
-                  <a:tcPr anchor="ctr" marL="73152" marT="9144" marB="9144">
-                    <a:solidFill>
-                      <a:srgbClr val="EEF2F9"/>
-                    </a:solidFill>
-                  </a:tcPr>
-                </a:tc>
-                <a:tc>
-                  <a:txBody>
-                    <a:bodyPr/>
-                    <a:lstStyle/>
-                    <a:p>
-                      <a:r>
-                        <a:rPr sz="1150" b="1">
-                          <a:solidFill>
-                            <a:srgbClr val="5C6679"/>
-                          </a:solidFill>
-                          <a:latin typeface="Microsoft JhengHei"/>
-                          <a:ea typeface="Microsoft JhengHei"/>
-                          <a:cs typeface="Microsoft JhengHei"/>
-                        </a:rPr>
-                        <a:t>其他</a:t>
-                      </a:r>
-                    </a:p>
-                  </a:txBody>
-                  <a:tcPr anchor="ctr" marL="73152" marT="9144" marB="9144">
-                    <a:solidFill>
-                      <a:srgbClr val="EEF2F9"/>
-                    </a:solidFill>
-                  </a:tcPr>
-                </a:tc>
-                <a:tc>
-                  <a:txBody>
-                    <a:bodyPr/>
-                    <a:lstStyle/>
-                    <a:p>
-                      <a:r>
-                        <a:rPr sz="1150" b="0">
-                          <a:solidFill>
-                            <a:srgbClr val="1A2233"/>
-                          </a:solidFill>
-                          <a:latin typeface="Microsoft JhengHei"/>
-                          <a:ea typeface="Microsoft JhengHei"/>
-                          <a:cs typeface="Microsoft JhengHei"/>
-                        </a:rPr>
-                        <a:t>經評估對公司營運無重大影響。</a:t>
-                      </a:r>
-                    </a:p>
-                  </a:txBody>
-                  <a:tcPr anchor="ctr" marL="73152" marT="9144" marB="9144">
-                    <a:solidFill>
-                      <a:srgbClr val="EEF2F9"/>
-                    </a:solidFill>
-                  </a:tcPr>
-                </a:tc>
-              </a:tr>
-              <a:tr h="384048">
-                <a:tc>
-                  <a:txBody>
-                    <a:bodyPr/>
-                    <a:lstStyle/>
-                    <a:p>
-                      <a:r>
-                        <a:rPr sz="1150" b="0">
-                          <a:solidFill>
-                            <a:srgbClr val="1A2233"/>
-                          </a:solidFill>
-                          <a:latin typeface="Microsoft JhengHei"/>
-                          <a:ea typeface="Microsoft JhengHei"/>
-                          <a:cs typeface="Microsoft JhengHei"/>
-                        </a:rPr>
-                        <a:t>松上</a:t>
-                      </a:r>
-                    </a:p>
-                  </a:txBody>
-                  <a:tcPr anchor="ctr" marL="73152" marT="9144" marB="9144">
-                    <a:solidFill>
-                      <a:srgbClr val="FFFFFF"/>
-                    </a:solidFill>
-                  </a:tcPr>
-                </a:tc>
-                <a:tc>
-                  <a:txBody>
-                    <a:bodyPr/>
-                    <a:lstStyle/>
-                    <a:p>
-                      <a:r>
-                        <a:rPr sz="1150" b="0">
-                          <a:solidFill>
-                            <a:srgbClr val="1A2233"/>
-                          </a:solidFill>
-                          <a:latin typeface="Microsoft JhengHei"/>
-                          <a:ea typeface="Microsoft JhengHei"/>
-                          <a:cs typeface="Microsoft JhengHei"/>
-                        </a:rPr>
-                        <a:t>6156</a:t>
-                      </a:r>
-                    </a:p>
-                  </a:txBody>
-                  <a:tcPr anchor="ctr" marL="73152" marT="9144" marB="9144">
-                    <a:solidFill>
-                      <a:srgbClr val="FFFFFF"/>
-                    </a:solidFill>
-                  </a:tcPr>
-                </a:tc>
-                <a:tc>
-                  <a:txBody>
-                    <a:bodyPr/>
-                    <a:lstStyle/>
-                    <a:p>
-                      <a:r>
-                        <a:rPr sz="1150" b="0">
-                          <a:solidFill>
-                            <a:srgbClr val="1A2233"/>
-                          </a:solidFill>
-                          <a:latin typeface="Microsoft JhengHei"/>
-                          <a:ea typeface="Microsoft JhengHei"/>
-                          <a:cs typeface="Microsoft JhengHei"/>
-                        </a:rPr>
                         <a:t>07/17</a:t>
-                      </a:r>
-                    </a:p>
-                  </a:txBody>
-                  <a:tcPr anchor="ctr" marL="73152" marT="9144" marB="9144">
-                    <a:solidFill>
-                      <a:srgbClr val="FFFFFF"/>
-                    </a:solidFill>
-                  </a:tcPr>
-                </a:tc>
-                <a:tc>
-                  <a:txBody>
-                    <a:bodyPr/>
-                    <a:lstStyle/>
-                    <a:p>
-                      <a:r>
-                        <a:rPr sz="1150" b="1">
-                          <a:solidFill>
-                            <a:srgbClr val="E63946"/>
-                          </a:solidFill>
-                          <a:latin typeface="Microsoft JhengHei"/>
-                          <a:ea typeface="Microsoft JhengHei"/>
-                          <a:cs typeface="Microsoft JhengHei"/>
-                        </a:rPr>
-                        <a:t>駭客攻擊</a:t>
-                      </a:r>
-                    </a:p>
-                  </a:txBody>
-                  <a:tcPr anchor="ctr" marL="73152" marT="9144" marB="9144">
-                    <a:solidFill>
-                      <a:srgbClr val="FFFFFF"/>
-                    </a:solidFill>
-                  </a:tcPr>
-                </a:tc>
-                <a:tc>
-                  <a:txBody>
-                    <a:bodyPr/>
-                    <a:lstStyle/>
-                    <a:p>
-                      <a:r>
-                        <a:rPr sz="1150" b="0">
-                          <a:solidFill>
-                            <a:srgbClr val="1A2233"/>
-                          </a:solidFill>
-                          <a:latin typeface="Microsoft JhengHei"/>
-                          <a:ea typeface="Microsoft JhengHei"/>
-                          <a:cs typeface="Microsoft JhengHei"/>
-                        </a:rPr>
-                        <a:t>目前評估對公司營運無重大影響。</a:t>
-                      </a:r>
-                    </a:p>
-                  </a:txBody>
-                  <a:tcPr anchor="ctr" marL="73152" marT="9144" marB="9144">
-                    <a:solidFill>
-                      <a:srgbClr val="FFFFFF"/>
-                    </a:solidFill>
-                  </a:tcPr>
-                </a:tc>
-              </a:tr>
-              <a:tr h="384048">
-                <a:tc>
-                  <a:txBody>
-                    <a:bodyPr/>
-                    <a:lstStyle/>
-                    <a:p>
-                      <a:r>
-                        <a:rPr sz="1150" b="0">
-                          <a:solidFill>
-                            <a:srgbClr val="1A2233"/>
-                          </a:solidFill>
-                          <a:latin typeface="Microsoft JhengHei"/>
-                          <a:ea typeface="Microsoft JhengHei"/>
-                          <a:cs typeface="Microsoft JhengHei"/>
-                        </a:rPr>
-                        <a:t>優盛</a:t>
-                      </a:r>
-                    </a:p>
-                  </a:txBody>
-                  <a:tcPr anchor="ctr" marL="73152" marT="9144" marB="9144">
-                    <a:solidFill>
-                      <a:srgbClr val="EEF2F9"/>
-                    </a:solidFill>
-                  </a:tcPr>
-                </a:tc>
-                <a:tc>
-                  <a:txBody>
-                    <a:bodyPr/>
-                    <a:lstStyle/>
-                    <a:p>
-                      <a:r>
-                        <a:rPr sz="1150" b="0">
-                          <a:solidFill>
-                            <a:srgbClr val="1A2233"/>
-                          </a:solidFill>
-                          <a:latin typeface="Microsoft JhengHei"/>
-                          <a:ea typeface="Microsoft JhengHei"/>
-                          <a:cs typeface="Microsoft JhengHei"/>
-                        </a:rPr>
-                        <a:t>4121</a:t>
-                      </a:r>
-                    </a:p>
-                  </a:txBody>
-                  <a:tcPr anchor="ctr" marL="73152" marT="9144" marB="9144">
-                    <a:solidFill>
-                      <a:srgbClr val="EEF2F9"/>
-                    </a:solidFill>
-                  </a:tcPr>
-                </a:tc>
-                <a:tc>
-                  <a:txBody>
-                    <a:bodyPr/>
-                    <a:lstStyle/>
-                    <a:p>
-                      <a:r>
-                        <a:rPr sz="1150" b="0">
-                          <a:solidFill>
-                            <a:srgbClr val="1A2233"/>
-                          </a:solidFill>
-                          <a:latin typeface="Microsoft JhengHei"/>
-                          <a:ea typeface="Microsoft JhengHei"/>
-                          <a:cs typeface="Microsoft JhengHei"/>
-                        </a:rPr>
-                        <a:t>07/07</a:t>
                       </a:r>
                     </a:p>
                   </a:txBody>
@@ -5222,7 +5222,7 @@
                           <a:ea typeface="Microsoft JhengHei"/>
                           <a:cs typeface="Microsoft JhengHei"/>
                         </a:rPr>
-                        <a:t>本資訊網站已暫時停止服務，該事件對公司營運、資訊安全、個資等無重大影…</a:t>
+                        <a:t>目前評估對公司營運無重大影響。</a:t>
                       </a:r>
                     </a:p>
                   </a:txBody>
@@ -5587,7 +5587,7 @@
                 <a:ea typeface="Microsoft JhengHei"/>
                 <a:cs typeface="Microsoft JhengHei"/>
               </a:rPr>
-              <a:t>州巧、藥華藥、上銀、松上、優盛</a:t>
+              <a:t>逸達、州巧、藥華藥、上銀、松上</a:t>
             </a:r>
           </a:p>
         </p:txBody>
@@ -6403,7 +6403,7 @@
                           <a:ea typeface="Microsoft JhengHei"/>
                           <a:cs typeface="Microsoft JhengHei"/>
                         </a:rPr>
-                        <a:t>州巧</a:t>
+                        <a:t>逸達</a:t>
                       </a:r>
                     </a:p>
                   </a:txBody>
@@ -6427,7 +6427,7 @@
                           <a:ea typeface="Microsoft JhengHei"/>
                           <a:cs typeface="Microsoft JhengHei"/>
                         </a:rPr>
-                        <a:t>3543</a:t>
+                        <a:t>6576</a:t>
                       </a:r>
                     </a:p>
                   </a:txBody>
@@ -6499,7 +6499,7 @@
                           <a:ea typeface="Microsoft JhengHei"/>
                           <a:cs typeface="Microsoft JhengHei"/>
                         </a:rPr>
-                        <a:t>廖福銘、林永智</a:t>
+                        <a:t>蔡蓓華、顏裕芳</a:t>
                       </a:r>
                     </a:p>
                   </a:txBody>
@@ -6525,7 +6525,7 @@
                           <a:ea typeface="Microsoft JhengHei"/>
                           <a:cs typeface="Microsoft JhengHei"/>
                         </a:rPr>
-                        <a:t>藥華藥</a:t>
+                        <a:t>州巧</a:t>
                       </a:r>
                     </a:p>
                   </a:txBody>
@@ -6549,7 +6549,7 @@
                           <a:ea typeface="Microsoft JhengHei"/>
                           <a:cs typeface="Microsoft JhengHei"/>
                         </a:rPr>
-                        <a:t>6446</a:t>
+                        <a:t>3543</a:t>
                       </a:r>
                     </a:p>
                   </a:txBody>
@@ -6597,7 +6597,7 @@
                           <a:ea typeface="Microsoft JhengHei"/>
                           <a:cs typeface="Microsoft JhengHei"/>
                         </a:rPr>
-                        <a:t>安永聯合會計師事務所</a:t>
+                        <a:t>資誠聯合會計師事務所</a:t>
                       </a:r>
                     </a:p>
                   </a:txBody>
@@ -6621,7 +6621,7 @@
                           <a:ea typeface="Microsoft JhengHei"/>
                           <a:cs typeface="Microsoft JhengHei"/>
                         </a:rPr>
-                        <a:t>呂倩雯、張巧穎</a:t>
+                        <a:t>廖福銘、林永智</a:t>
                       </a:r>
                     </a:p>
                   </a:txBody>
@@ -6647,7 +6647,7 @@
                           <a:ea typeface="Microsoft JhengHei"/>
                           <a:cs typeface="Microsoft JhengHei"/>
                         </a:rPr>
-                        <a:t>上銀</a:t>
+                        <a:t>藥華藥</a:t>
                       </a:r>
                     </a:p>
                   </a:txBody>
@@ -6671,7 +6671,7 @@
                           <a:ea typeface="Microsoft JhengHei"/>
                           <a:cs typeface="Microsoft JhengHei"/>
                         </a:rPr>
-                        <a:t>2049</a:t>
+                        <a:t>6446</a:t>
                       </a:r>
                     </a:p>
                   </a:txBody>
@@ -6719,7 +6719,7 @@
                           <a:ea typeface="Microsoft JhengHei"/>
                           <a:cs typeface="Microsoft JhengHei"/>
                         </a:rPr>
-                        <a:t>勤業眾信聯合會計師事務所</a:t>
+                        <a:t>安永聯合會計師事務所</a:t>
                       </a:r>
                     </a:p>
                   </a:txBody>
@@ -6743,7 +6743,7 @@
                           <a:ea typeface="Microsoft JhengHei"/>
                           <a:cs typeface="Microsoft JhengHei"/>
                         </a:rPr>
-                        <a:t>吳麗冬、顏曉芳</a:t>
+                        <a:t>呂倩雯、張巧穎</a:t>
                       </a:r>
                     </a:p>
                   </a:txBody>
@@ -6769,7 +6769,7 @@
                           <a:ea typeface="Microsoft JhengHei"/>
                           <a:cs typeface="Microsoft JhengHei"/>
                         </a:rPr>
-                        <a:t>萬達寵物</a:t>
+                        <a:t>上銀</a:t>
                       </a:r>
                     </a:p>
                   </a:txBody>
@@ -6793,13 +6793,135 @@
                           <a:ea typeface="Microsoft JhengHei"/>
                           <a:cs typeface="Microsoft JhengHei"/>
                         </a:rPr>
+                        <a:t>2049</a:t>
+                      </a:r>
+                    </a:p>
+                  </a:txBody>
+                  <a:tcPr anchor="ctr" marL="73152" marT="9144" marB="9144">
+                    <a:solidFill>
+                      <a:srgbClr val="EEF2F9"/>
+                    </a:solidFill>
+                  </a:tcPr>
+                </a:tc>
+                <a:tc>
+                  <a:txBody>
+                    <a:bodyPr/>
+                    <a:lstStyle/>
+                    <a:p>
+                      <a:r>
+                        <a:rPr sz="1150" b="1">
+                          <a:solidFill>
+                            <a:srgbClr val="E63946"/>
+                          </a:solidFill>
+                          <a:latin typeface="Microsoft JhengHei"/>
+                          <a:ea typeface="Microsoft JhengHei"/>
+                          <a:cs typeface="Microsoft JhengHei"/>
+                        </a:rPr>
+                        <a:t>駭客攻擊</a:t>
+                      </a:r>
+                    </a:p>
+                  </a:txBody>
+                  <a:tcPr anchor="ctr" marL="73152" marT="9144" marB="9144">
+                    <a:solidFill>
+                      <a:srgbClr val="EEF2F9"/>
+                    </a:solidFill>
+                  </a:tcPr>
+                </a:tc>
+                <a:tc>
+                  <a:txBody>
+                    <a:bodyPr/>
+                    <a:lstStyle/>
+                    <a:p>
+                      <a:r>
+                        <a:rPr sz="1150" b="0">
+                          <a:solidFill>
+                            <a:srgbClr val="1A2233"/>
+                          </a:solidFill>
+                          <a:latin typeface="Microsoft JhengHei"/>
+                          <a:ea typeface="Microsoft JhengHei"/>
+                          <a:cs typeface="Microsoft JhengHei"/>
+                        </a:rPr>
+                        <a:t>勤業眾信聯合會計師事務所</a:t>
+                      </a:r>
+                    </a:p>
+                  </a:txBody>
+                  <a:tcPr anchor="ctr" marL="73152" marT="9144" marB="9144">
+                    <a:solidFill>
+                      <a:srgbClr val="EEF2F9"/>
+                    </a:solidFill>
+                  </a:tcPr>
+                </a:tc>
+                <a:tc>
+                  <a:txBody>
+                    <a:bodyPr/>
+                    <a:lstStyle/>
+                    <a:p>
+                      <a:r>
+                        <a:rPr sz="1150" b="0">
+                          <a:solidFill>
+                            <a:srgbClr val="1A2233"/>
+                          </a:solidFill>
+                          <a:latin typeface="Microsoft JhengHei"/>
+                          <a:ea typeface="Microsoft JhengHei"/>
+                          <a:cs typeface="Microsoft JhengHei"/>
+                        </a:rPr>
+                        <a:t>吳麗冬、顏曉芳</a:t>
+                      </a:r>
+                    </a:p>
+                  </a:txBody>
+                  <a:tcPr anchor="ctr" marL="73152" marT="9144" marB="9144">
+                    <a:solidFill>
+                      <a:srgbClr val="EEF2F9"/>
+                    </a:solidFill>
+                  </a:tcPr>
+                </a:tc>
+              </a:tr>
+              <a:tr h="457200">
+                <a:tc>
+                  <a:txBody>
+                    <a:bodyPr/>
+                    <a:lstStyle/>
+                    <a:p>
+                      <a:r>
+                        <a:rPr sz="1150" b="0">
+                          <a:solidFill>
+                            <a:srgbClr val="1A2233"/>
+                          </a:solidFill>
+                          <a:latin typeface="Microsoft JhengHei"/>
+                          <a:ea typeface="Microsoft JhengHei"/>
+                          <a:cs typeface="Microsoft JhengHei"/>
+                        </a:rPr>
+                        <a:t>萬達寵物</a:t>
+                      </a:r>
+                    </a:p>
+                  </a:txBody>
+                  <a:tcPr anchor="ctr" marL="73152" marT="9144" marB="9144">
+                    <a:solidFill>
+                      <a:srgbClr val="FFFFFF"/>
+                    </a:solidFill>
+                  </a:tcPr>
+                </a:tc>
+                <a:tc>
+                  <a:txBody>
+                    <a:bodyPr/>
+                    <a:lstStyle/>
+                    <a:p>
+                      <a:r>
+                        <a:rPr sz="1150" b="0">
+                          <a:solidFill>
+                            <a:srgbClr val="1A2233"/>
+                          </a:solidFill>
+                          <a:latin typeface="Microsoft JhengHei"/>
+                          <a:ea typeface="Microsoft JhengHei"/>
+                          <a:cs typeface="Microsoft JhengHei"/>
+                        </a:rPr>
                         <a:t>6968</a:t>
                       </a:r>
                     </a:p>
                   </a:txBody>
                   <a:tcPr anchor="ctr" marL="73152" marT="9144" marB="9144">
                     <a:solidFill>
-                      <a:srgbClr val="EEF2F9"/>
+                      <a:srgbClr val="FFFFFF"/>
                     </a:solidFill>
                   </a:tcPr>
                 </a:tc>
@@ -6818,6 +6940,128 @@
                           <a:cs typeface="Microsoft JhengHei"/>
                         </a:rPr>
                         <a:t>個資外洩</a:t>
+                      </a:r>
+                    </a:p>
+                  </a:txBody>
+                  <a:tcPr anchor="ctr" marL="73152" marT="9144" marB="9144">
+                    <a:solidFill>
+                      <a:srgbClr val="FFFFFF"/>
+                    </a:solidFill>
+                  </a:tcPr>
+                </a:tc>
+                <a:tc>
+                  <a:txBody>
+                    <a:bodyPr/>
+                    <a:lstStyle/>
+                    <a:p>
+                      <a:r>
+                        <a:rPr sz="1150" b="0">
+                          <a:solidFill>
+                            <a:srgbClr val="1A2233"/>
+                          </a:solidFill>
+                          <a:latin typeface="Microsoft JhengHei"/>
+                          <a:ea typeface="Microsoft JhengHei"/>
+                          <a:cs typeface="Microsoft JhengHei"/>
+                        </a:rPr>
+                        <a:t>資誠聯合會計師事務所</a:t>
+                      </a:r>
+                    </a:p>
+                  </a:txBody>
+                  <a:tcPr anchor="ctr" marL="73152" marT="9144" marB="9144">
+                    <a:solidFill>
+                      <a:srgbClr val="FFFFFF"/>
+                    </a:solidFill>
+                  </a:tcPr>
+                </a:tc>
+                <a:tc>
+                  <a:txBody>
+                    <a:bodyPr/>
+                    <a:lstStyle/>
+                    <a:p>
+                      <a:r>
+                        <a:rPr sz="1150" b="0">
+                          <a:solidFill>
+                            <a:srgbClr val="1A2233"/>
+                          </a:solidFill>
+                          <a:latin typeface="Microsoft JhengHei"/>
+                          <a:ea typeface="Microsoft JhengHei"/>
+                          <a:cs typeface="Microsoft JhengHei"/>
+                        </a:rPr>
+                        <a:t>葉翠苗、黃世鈞</a:t>
+                      </a:r>
+                    </a:p>
+                  </a:txBody>
+                  <a:tcPr anchor="ctr" marL="73152" marT="9144" marB="9144">
+                    <a:solidFill>
+                      <a:srgbClr val="FFFFFF"/>
+                    </a:solidFill>
+                  </a:tcPr>
+                </a:tc>
+              </a:tr>
+              <a:tr h="457200">
+                <a:tc>
+                  <a:txBody>
+                    <a:bodyPr/>
+                    <a:lstStyle/>
+                    <a:p>
+                      <a:r>
+                        <a:rPr sz="1150" b="0">
+                          <a:solidFill>
+                            <a:srgbClr val="1A2233"/>
+                          </a:solidFill>
+                          <a:latin typeface="Microsoft JhengHei"/>
+                          <a:ea typeface="Microsoft JhengHei"/>
+                          <a:cs typeface="Microsoft JhengHei"/>
+                        </a:rPr>
+                        <a:t>淳安</a:t>
+                      </a:r>
+                    </a:p>
+                  </a:txBody>
+                  <a:tcPr anchor="ctr" marL="73152" marT="9144" marB="9144">
+                    <a:solidFill>
+                      <a:srgbClr val="EEF2F9"/>
+                    </a:solidFill>
+                  </a:tcPr>
+                </a:tc>
+                <a:tc>
+                  <a:txBody>
+                    <a:bodyPr/>
+                    <a:lstStyle/>
+                    <a:p>
+                      <a:r>
+                        <a:rPr sz="1150" b="0">
+                          <a:solidFill>
+                            <a:srgbClr val="1A2233"/>
+                          </a:solidFill>
+                          <a:latin typeface="Microsoft JhengHei"/>
+                          <a:ea typeface="Microsoft JhengHei"/>
+                          <a:cs typeface="Microsoft JhengHei"/>
+                        </a:rPr>
+                        <a:t>6283</a:t>
+                      </a:r>
+                    </a:p>
+                  </a:txBody>
+                  <a:tcPr anchor="ctr" marL="73152" marT="9144" marB="9144">
+                    <a:solidFill>
+                      <a:srgbClr val="EEF2F9"/>
+                    </a:solidFill>
+                  </a:tcPr>
+                </a:tc>
+                <a:tc>
+                  <a:txBody>
+                    <a:bodyPr/>
+                    <a:lstStyle/>
+                    <a:p>
+                      <a:r>
+                        <a:rPr sz="1150" b="1">
+                          <a:solidFill>
+                            <a:srgbClr val="5C6679"/>
+                          </a:solidFill>
+                          <a:latin typeface="Microsoft JhengHei"/>
+                          <a:ea typeface="Microsoft JhengHei"/>
+                          <a:cs typeface="Microsoft JhengHei"/>
+                        </a:rPr>
+                        <a:t>其他</a:t>
                       </a:r>
                     </a:p>
                   </a:txBody>
@@ -6865,7 +7109,7 @@
                           <a:ea typeface="Microsoft JhengHei"/>
                           <a:cs typeface="Microsoft JhengHei"/>
                         </a:rPr>
-                        <a:t>葉翠苗、黃世鈞</a:t>
+                        <a:t>林永智、廖福銘</a:t>
                       </a:r>
                     </a:p>
                   </a:txBody>
@@ -7013,7 +7257,7 @@
                           <a:ea typeface="Microsoft JhengHei"/>
                           <a:cs typeface="Microsoft JhengHei"/>
                         </a:rPr>
-                        <a:t>淳安</a:t>
+                        <a:t>松上</a:t>
                       </a:r>
                     </a:p>
                   </a:txBody>
@@ -7037,251 +7281,7 @@
                           <a:ea typeface="Microsoft JhengHei"/>
                           <a:cs typeface="Microsoft JhengHei"/>
                         </a:rPr>
-                        <a:t>6283</a:t>
-                      </a:r>
-                    </a:p>
-                  </a:txBody>
-                  <a:tcPr anchor="ctr" marL="73152" marT="9144" marB="9144">
-                    <a:solidFill>
-                      <a:srgbClr val="EEF2F9"/>
-                    </a:solidFill>
-                  </a:tcPr>
-                </a:tc>
-                <a:tc>
-                  <a:txBody>
-                    <a:bodyPr/>
-                    <a:lstStyle/>
-                    <a:p>
-                      <a:r>
-                        <a:rPr sz="1150" b="1">
-                          <a:solidFill>
-                            <a:srgbClr val="5C6679"/>
-                          </a:solidFill>
-                          <a:latin typeface="Microsoft JhengHei"/>
-                          <a:ea typeface="Microsoft JhengHei"/>
-                          <a:cs typeface="Microsoft JhengHei"/>
-                        </a:rPr>
-                        <a:t>其他</a:t>
-                      </a:r>
-                    </a:p>
-                  </a:txBody>
-                  <a:tcPr anchor="ctr" marL="73152" marT="9144" marB="9144">
-                    <a:solidFill>
-                      <a:srgbClr val="EEF2F9"/>
-                    </a:solidFill>
-                  </a:tcPr>
-                </a:tc>
-                <a:tc>
-                  <a:txBody>
-                    <a:bodyPr/>
-                    <a:lstStyle/>
-                    <a:p>
-                      <a:r>
-                        <a:rPr sz="1150" b="0">
-                          <a:solidFill>
-                            <a:srgbClr val="1A2233"/>
-                          </a:solidFill>
-                          <a:latin typeface="Microsoft JhengHei"/>
-                          <a:ea typeface="Microsoft JhengHei"/>
-                          <a:cs typeface="Microsoft JhengHei"/>
-                        </a:rPr>
-                        <a:t>資誠聯合會計師事務所</a:t>
-                      </a:r>
-                    </a:p>
-                  </a:txBody>
-                  <a:tcPr anchor="ctr" marL="73152" marT="9144" marB="9144">
-                    <a:solidFill>
-                      <a:srgbClr val="EEF2F9"/>
-                    </a:solidFill>
-                  </a:tcPr>
-                </a:tc>
-                <a:tc>
-                  <a:txBody>
-                    <a:bodyPr/>
-                    <a:lstStyle/>
-                    <a:p>
-                      <a:r>
-                        <a:rPr sz="1150" b="0">
-                          <a:solidFill>
-                            <a:srgbClr val="1A2233"/>
-                          </a:solidFill>
-                          <a:latin typeface="Microsoft JhengHei"/>
-                          <a:ea typeface="Microsoft JhengHei"/>
-                          <a:cs typeface="Microsoft JhengHei"/>
-                        </a:rPr>
-                        <a:t>林永智、廖福銘</a:t>
-                      </a:r>
-                    </a:p>
-                  </a:txBody>
-                  <a:tcPr anchor="ctr" marL="73152" marT="9144" marB="9144">
-                    <a:solidFill>
-                      <a:srgbClr val="EEF2F9"/>
-                    </a:solidFill>
-                  </a:tcPr>
-                </a:tc>
-              </a:tr>
-              <a:tr h="457200">
-                <a:tc>
-                  <a:txBody>
-                    <a:bodyPr/>
-                    <a:lstStyle/>
-                    <a:p>
-                      <a:r>
-                        <a:rPr sz="1150" b="0">
-                          <a:solidFill>
-                            <a:srgbClr val="1A2233"/>
-                          </a:solidFill>
-                          <a:latin typeface="Microsoft JhengHei"/>
-                          <a:ea typeface="Microsoft JhengHei"/>
-                          <a:cs typeface="Microsoft JhengHei"/>
-                        </a:rPr>
-                        <a:t>松上</a:t>
-                      </a:r>
-                    </a:p>
-                  </a:txBody>
-                  <a:tcPr anchor="ctr" marL="73152" marT="9144" marB="9144">
-                    <a:solidFill>
-                      <a:srgbClr val="FFFFFF"/>
-                    </a:solidFill>
-                  </a:tcPr>
-                </a:tc>
-                <a:tc>
-                  <a:txBody>
-                    <a:bodyPr/>
-                    <a:lstStyle/>
-                    <a:p>
-                      <a:r>
-                        <a:rPr sz="1150" b="0">
-                          <a:solidFill>
-                            <a:srgbClr val="1A2233"/>
-                          </a:solidFill>
-                          <a:latin typeface="Microsoft JhengHei"/>
-                          <a:ea typeface="Microsoft JhengHei"/>
-                          <a:cs typeface="Microsoft JhengHei"/>
-                        </a:rPr>
                         <a:t>6156</a:t>
-                      </a:r>
-                    </a:p>
-                  </a:txBody>
-                  <a:tcPr anchor="ctr" marL="73152" marT="9144" marB="9144">
-                    <a:solidFill>
-                      <a:srgbClr val="FFFFFF"/>
-                    </a:solidFill>
-                  </a:tcPr>
-                </a:tc>
-                <a:tc>
-                  <a:txBody>
-                    <a:bodyPr/>
-                    <a:lstStyle/>
-                    <a:p>
-                      <a:r>
-                        <a:rPr sz="1150" b="1">
-                          <a:solidFill>
-                            <a:srgbClr val="E63946"/>
-                          </a:solidFill>
-                          <a:latin typeface="Microsoft JhengHei"/>
-                          <a:ea typeface="Microsoft JhengHei"/>
-                          <a:cs typeface="Microsoft JhengHei"/>
-                        </a:rPr>
-                        <a:t>駭客攻擊</a:t>
-                      </a:r>
-                    </a:p>
-                  </a:txBody>
-                  <a:tcPr anchor="ctr" marL="73152" marT="9144" marB="9144">
-                    <a:solidFill>
-                      <a:srgbClr val="FFFFFF"/>
-                    </a:solidFill>
-                  </a:tcPr>
-                </a:tc>
-                <a:tc>
-                  <a:txBody>
-                    <a:bodyPr/>
-                    <a:lstStyle/>
-                    <a:p>
-                      <a:r>
-                        <a:rPr sz="1150" b="0">
-                          <a:solidFill>
-                            <a:srgbClr val="1A2233"/>
-                          </a:solidFill>
-                          <a:latin typeface="Microsoft JhengHei"/>
-                          <a:ea typeface="Microsoft JhengHei"/>
-                          <a:cs typeface="Microsoft JhengHei"/>
-                        </a:rPr>
-                        <a:t>安永聯合會計師事務所</a:t>
-                      </a:r>
-                    </a:p>
-                  </a:txBody>
-                  <a:tcPr anchor="ctr" marL="73152" marT="9144" marB="9144">
-                    <a:solidFill>
-                      <a:srgbClr val="FFFFFF"/>
-                    </a:solidFill>
-                  </a:tcPr>
-                </a:tc>
-                <a:tc>
-                  <a:txBody>
-                    <a:bodyPr/>
-                    <a:lstStyle/>
-                    <a:p>
-                      <a:r>
-                        <a:rPr sz="1150" b="0">
-                          <a:solidFill>
-                            <a:srgbClr val="1A2233"/>
-                          </a:solidFill>
-                          <a:latin typeface="Microsoft JhengHei"/>
-                          <a:ea typeface="Microsoft JhengHei"/>
-                          <a:cs typeface="Microsoft JhengHei"/>
-                        </a:rPr>
-                        <a:t>羅筱靖、陳國帥</a:t>
-                      </a:r>
-                    </a:p>
-                  </a:txBody>
-                  <a:tcPr anchor="ctr" marL="73152" marT="9144" marB="9144">
-                    <a:solidFill>
-                      <a:srgbClr val="FFFFFF"/>
-                    </a:solidFill>
-                  </a:tcPr>
-                </a:tc>
-              </a:tr>
-              <a:tr h="457200">
-                <a:tc>
-                  <a:txBody>
-                    <a:bodyPr/>
-                    <a:lstStyle/>
-                    <a:p>
-                      <a:r>
-                        <a:rPr sz="1150" b="0">
-                          <a:solidFill>
-                            <a:srgbClr val="1A2233"/>
-                          </a:solidFill>
-                          <a:latin typeface="Microsoft JhengHei"/>
-                          <a:ea typeface="Microsoft JhengHei"/>
-                          <a:cs typeface="Microsoft JhengHei"/>
-                        </a:rPr>
-                        <a:t>優盛</a:t>
-                      </a:r>
-                    </a:p>
-                  </a:txBody>
-                  <a:tcPr anchor="ctr" marL="73152" marT="9144" marB="9144">
-                    <a:solidFill>
-                      <a:srgbClr val="EEF2F9"/>
-                    </a:solidFill>
-                  </a:tcPr>
-                </a:tc>
-                <a:tc>
-                  <a:txBody>
-                    <a:bodyPr/>
-                    <a:lstStyle/>
-                    <a:p>
-                      <a:r>
-                        <a:rPr sz="1150" b="0">
-                          <a:solidFill>
-                            <a:srgbClr val="1A2233"/>
-                          </a:solidFill>
-                          <a:latin typeface="Microsoft JhengHei"/>
-                          <a:ea typeface="Microsoft JhengHei"/>
-                          <a:cs typeface="Microsoft JhengHei"/>
-                        </a:rPr>
-                        <a:t>4121</a:t>
                       </a:r>
                     </a:p>
                   </a:txBody>
@@ -7329,7 +7329,7 @@
                           <a:ea typeface="Microsoft JhengHei"/>
                           <a:cs typeface="Microsoft JhengHei"/>
                         </a:rPr>
-                        <a:t>安侯建業聯合會計師事務所</a:t>
+                        <a:t>安永聯合會計師事務所</a:t>
                       </a:r>
                     </a:p>
                   </a:txBody>
@@ -7353,7 +7353,7 @@
                           <a:ea typeface="Microsoft JhengHei"/>
                           <a:cs typeface="Microsoft JhengHei"/>
                         </a:rPr>
-                        <a:t>鄒依芸、毛聖崴</a:t>
+                        <a:t>羅筱靖、陳國帥</a:t>
                       </a:r>
                     </a:p>
                   </a:txBody>
@@ -8874,7 +8874,7 @@
                 <a:ea typeface="Microsoft JhengHei"/>
                 <a:cs typeface="Microsoft JhengHei"/>
               </a:rPr>
-              <a:t>州巧 </a:t>
+              <a:t>逸達 </a:t>
             </a:r>
             <a:r>
               <a:rPr sz="1300" b="0">
@@ -8885,7 +8885,7 @@
                 <a:ea typeface="Microsoft JhengHei"/>
                 <a:cs typeface="Microsoft JhengHei"/>
               </a:rPr>
-              <a:t>3543</a:t>
+              <a:t>6576</a:t>
             </a:r>
           </a:p>
         </p:txBody>
@@ -9018,7 +9018,7 @@
                 <a:ea typeface="Microsoft JhengHei"/>
                 <a:cs typeface="Microsoft JhengHei"/>
               </a:rPr>
-              <a:t>本公司及重要子公司(蘇州州巧、廈門州巧及越南州巧)之部份資訊系統遭不明駭客入侵，導致部分系統無法…</a:t>
+              <a:t>本公司資訊系統遭受駭客網路攻擊，初步評估對公司營運暫無重大影響。</a:t>
             </a:r>
           </a:p>
         </p:txBody>
@@ -9070,7 +9070,7 @@
                 <a:ea typeface="Microsoft JhengHei"/>
                 <a:cs typeface="Microsoft JhengHei"/>
               </a:rPr>
-              <a:t>完成相關安全漏洞修復後，將持續強化網路與資訊基礎架構之安全防護機制及管理措施，確保資訊系統穩定運作及資訊安全。</a:t>
+              <a:t>本公司將持續提升網路與資訊基礎架構之安全管控，以確保資訊安全。</a:t>
             </a:r>
           </a:p>
         </p:txBody>
@@ -9197,7 +9197,7 @@
                 <a:ea typeface="Microsoft JhengHei"/>
                 <a:cs typeface="Microsoft JhengHei"/>
               </a:rPr>
-              <a:t>藥華藥 </a:t>
+              <a:t>州巧 </a:t>
             </a:r>
             <a:r>
               <a:rPr sz="1300" b="0">
@@ -9208,7 +9208,7 @@
                 <a:ea typeface="Microsoft JhengHei"/>
                 <a:cs typeface="Microsoft JhengHei"/>
               </a:rPr>
-              <a:t>6446</a:t>
+              <a:t>3543</a:t>
             </a:r>
           </a:p>
         </p:txBody>
@@ -9341,7 +9341,7 @@
                 <a:ea typeface="Microsoft JhengHei"/>
                 <a:cs typeface="Microsoft JhengHei"/>
               </a:rPr>
-              <a:t>本公司及泛泰醫療子公司之部分資訊系統遭受駭客網路攻擊，初步評估對公司營運無重大影響。</a:t>
+              <a:t>本公司及重要子公司(蘇州州巧、廈門州巧及越南州巧)之部份資訊系統遭不明駭客入侵，導致部分系統無法…</a:t>
             </a:r>
           </a:p>
         </p:txBody>
@@ -9393,7 +9393,7 @@
                 <a:ea typeface="Microsoft JhengHei"/>
                 <a:cs typeface="Microsoft JhengHei"/>
               </a:rPr>
-              <a:t>本公司將持續提升網路與資訊基礎架構之安全管控，以確保資訊安全。</a:t>
+              <a:t>完成相關安全漏洞修復後，將持續強化網路與資訊基礎架構之安全防護機制及管理措施，確保資訊系統穩定運作及資訊安全。</a:t>
             </a:r>
           </a:p>
         </p:txBody>
@@ -9520,7 +9520,7 @@
                 <a:ea typeface="Microsoft JhengHei"/>
                 <a:cs typeface="Microsoft JhengHei"/>
               </a:rPr>
-              <a:t>上銀 </a:t>
+              <a:t>藥華藥 </a:t>
             </a:r>
             <a:r>
               <a:rPr sz="1300" b="0">
@@ -9531,7 +9531,7 @@
                 <a:ea typeface="Microsoft JhengHei"/>
                 <a:cs typeface="Microsoft JhengHei"/>
               </a:rPr>
-              <a:t>2049</a:t>
+              <a:t>6446</a:t>
             </a:r>
           </a:p>
         </p:txBody>
@@ -9664,7 +9664,7 @@
                 <a:ea typeface="Microsoft JhengHei"/>
                 <a:cs typeface="Microsoft JhengHei"/>
               </a:rPr>
-              <a:t>本公司義大利子公司部份資訊系統遭受駭客網路攻擊</a:t>
+              <a:t>本公司及泛泰醫療子公司之部分資訊系統遭受駭客網路攻擊，初步評估對公司營運無重大影響。</a:t>
             </a:r>
           </a:p>
         </p:txBody>
@@ -9716,7 +9716,7 @@
                 <a:ea typeface="Microsoft JhengHei"/>
                 <a:cs typeface="Microsoft JhengHei"/>
               </a:rPr>
-              <a:t>完成相關安全漏洞修復後，將持續強化網路與資訊基礎架構之安全防護機制及管理措施，確保資訊系統穩定運作及資訊安全。</a:t>
+              <a:t>本公司將持續提升網路與資訊基礎架構之安全管控，以確保資訊安全。</a:t>
             </a:r>
           </a:p>
         </p:txBody>
@@ -9782,7 +9782,7 @@
             <a:avLst/>
           </a:prstGeom>
           <a:solidFill>
-            <a:srgbClr val="27A6C4"/>
+            <a:srgbClr val="E63946"/>
           </a:solidFill>
           <a:ln>
             <a:noFill/>
@@ -9843,7 +9843,7 @@
                 <a:ea typeface="Microsoft JhengHei"/>
                 <a:cs typeface="Microsoft JhengHei"/>
               </a:rPr>
-              <a:t>萬達寵物 </a:t>
+              <a:t>上銀 </a:t>
             </a:r>
             <a:r>
               <a:rPr sz="1300" b="0">
@@ -9854,7 +9854,7 @@
                 <a:ea typeface="Microsoft JhengHei"/>
                 <a:cs typeface="Microsoft JhengHei"/>
               </a:rPr>
-              <a:t>6968</a:t>
+              <a:t>2049</a:t>
             </a:r>
           </a:p>
         </p:txBody>
@@ -9874,7 +9874,7 @@
             <a:avLst/>
           </a:prstGeom>
           <a:solidFill>
-            <a:srgbClr val="27A6C4"/>
+            <a:srgbClr val="E63946"/>
           </a:solidFill>
           <a:ln>
             <a:noFill/>
@@ -9935,7 +9935,7 @@
                 <a:ea typeface="Microsoft JhengHei"/>
                 <a:cs typeface="Microsoft JhengHei"/>
               </a:rPr>
-              <a:t>個資外洩</a:t>
+              <a:t>駭客攻擊</a:t>
             </a:r>
           </a:p>
         </p:txBody>
@@ -9970,7 +9970,7 @@
             <a:r>
               <a:rPr sz="1100" b="1">
                 <a:solidFill>
-                  <a:srgbClr val="27A6C4"/>
+                  <a:srgbClr val="E63946"/>
                 </a:solidFill>
                 <a:latin typeface="Microsoft JhengHei"/>
                 <a:ea typeface="Microsoft JhengHei"/>
@@ -9987,7 +9987,7 @@
                 <a:ea typeface="Microsoft JhengHei"/>
                 <a:cs typeface="Microsoft JhengHei"/>
               </a:rPr>
-              <a:t>本公司因合作廠商資訊系統遭不明人士入侵，疑似部份資料外洩</a:t>
+              <a:t>本公司義大利子公司部份資訊系統遭受駭客網路攻擊</a:t>
             </a:r>
           </a:p>
         </p:txBody>
@@ -10022,7 +10022,7 @@
             <a:r>
               <a:rPr sz="1100" b="1">
                 <a:solidFill>
-                  <a:srgbClr val="27A6C4"/>
+                  <a:srgbClr val="E63946"/>
                 </a:solidFill>
                 <a:latin typeface="Microsoft JhengHei"/>
                 <a:ea typeface="Microsoft JhengHei"/>
@@ -10039,7 +10039,7 @@
                 <a:ea typeface="Microsoft JhengHei"/>
                 <a:cs typeface="Microsoft JhengHei"/>
               </a:rPr>
-              <a:t>本公司並無與合作廠商串接會員資料、信用卡號、銀行帳戶等敏感資訊，不會產生任何金流交易。本公司已嚴正要求合作廠商技術團隊，…</a:t>
+              <a:t>完成相關安全漏洞修復後，將持續強化網路與資訊基礎架構之安全防護機制及管理措施，確保資訊系統穩定運作及資訊安全。</a:t>
             </a:r>
           </a:p>
         </p:txBody>
@@ -10241,7 +10241,7 @@
             <a:avLst/>
           </a:prstGeom>
           <a:solidFill>
-            <a:srgbClr val="5C6679"/>
+            <a:srgbClr val="27A6C4"/>
           </a:solidFill>
           <a:ln>
             <a:noFill/>
@@ -10302,7 +10302,7 @@
                 <a:ea typeface="Microsoft JhengHei"/>
                 <a:cs typeface="Microsoft JhengHei"/>
               </a:rPr>
-              <a:t>淳安 </a:t>
+              <a:t>萬達寵物 </a:t>
             </a:r>
             <a:r>
               <a:rPr sz="1300" b="0">
@@ -10313,7 +10313,7 @@
                 <a:ea typeface="Microsoft JhengHei"/>
                 <a:cs typeface="Microsoft JhengHei"/>
               </a:rPr>
-              <a:t>6283</a:t>
+              <a:t>6968</a:t>
             </a:r>
           </a:p>
         </p:txBody>
@@ -10333,7 +10333,7 @@
             <a:avLst/>
           </a:prstGeom>
           <a:solidFill>
-            <a:srgbClr val="5C6679"/>
+            <a:srgbClr val="27A6C4"/>
           </a:solidFill>
           <a:ln>
             <a:noFill/>
@@ -10394,7 +10394,7 @@
                 <a:ea typeface="Microsoft JhengHei"/>
                 <a:cs typeface="Microsoft JhengHei"/>
               </a:rPr>
-              <a:t>其他</a:t>
+              <a:t>個資外洩</a:t>
             </a:r>
           </a:p>
         </p:txBody>
@@ -10429,7 +10429,7 @@
             <a:r>
               <a:rPr sz="1100" b="1">
                 <a:solidFill>
-                  <a:srgbClr val="5C6679"/>
+                  <a:srgbClr val="27A6C4"/>
                 </a:solidFill>
                 <a:latin typeface="Microsoft JhengHei"/>
                 <a:ea typeface="Microsoft JhengHei"/>
@@ -10446,7 +10446,7 @@
                 <a:ea typeface="Microsoft JhengHei"/>
                 <a:cs typeface="Microsoft JhengHei"/>
               </a:rPr>
-              <a:t>本公司網路資安事件說明</a:t>
+              <a:t>本公司因合作廠商資訊系統遭不明人士入侵，疑似部份資料外洩</a:t>
             </a:r>
           </a:p>
         </p:txBody>
@@ -10481,7 +10481,7 @@
             <a:r>
               <a:rPr sz="1100" b="1">
                 <a:solidFill>
-                  <a:srgbClr val="5C6679"/>
+                  <a:srgbClr val="27A6C4"/>
                 </a:solidFill>
                 <a:latin typeface="Microsoft JhengHei"/>
                 <a:ea typeface="Microsoft JhengHei"/>
@@ -10498,7 +10498,7 @@
                 <a:ea typeface="Microsoft JhengHei"/>
                 <a:cs typeface="Microsoft JhengHei"/>
               </a:rPr>
-              <a:t>本公司後續將持續提升網路與資訊基礎架構之安全管控，以確保資訊安全。</a:t>
+              <a:t>本公司並無與合作廠商串接會員資料、信用卡號、銀行帳戶等敏感資訊，不會產生任何金流交易。本公司已嚴正要求合作廠商技術團隊，…</a:t>
             </a:r>
           </a:p>
         </p:txBody>
@@ -10887,7 +10887,7 @@
             <a:avLst/>
           </a:prstGeom>
           <a:solidFill>
-            <a:srgbClr val="E63946"/>
+            <a:srgbClr val="5C6679"/>
           </a:solidFill>
           <a:ln>
             <a:noFill/>
@@ -10948,7 +10948,7 @@
                 <a:ea typeface="Microsoft JhengHei"/>
                 <a:cs typeface="Microsoft JhengHei"/>
               </a:rPr>
-              <a:t>松上 </a:t>
+              <a:t>淳安 </a:t>
             </a:r>
             <a:r>
               <a:rPr sz="1300" b="0">
@@ -10959,7 +10959,7 @@
                 <a:ea typeface="Microsoft JhengHei"/>
                 <a:cs typeface="Microsoft JhengHei"/>
               </a:rPr>
-              <a:t>6156</a:t>
+              <a:t>6283</a:t>
             </a:r>
           </a:p>
         </p:txBody>
@@ -10979,7 +10979,7 @@
             <a:avLst/>
           </a:prstGeom>
           <a:solidFill>
-            <a:srgbClr val="E63946"/>
+            <a:srgbClr val="5C6679"/>
           </a:solidFill>
           <a:ln>
             <a:noFill/>
@@ -11040,7 +11040,7 @@
                 <a:ea typeface="Microsoft JhengHei"/>
                 <a:cs typeface="Microsoft JhengHei"/>
               </a:rPr>
-              <a:t>駭客攻擊</a:t>
+              <a:t>其他</a:t>
             </a:r>
           </a:p>
         </p:txBody>
@@ -11075,7 +11075,7 @@
             <a:r>
               <a:rPr sz="1100" b="1">
                 <a:solidFill>
-                  <a:srgbClr val="E63946"/>
+                  <a:srgbClr val="5C6679"/>
                 </a:solidFill>
                 <a:latin typeface="Microsoft JhengHei"/>
                 <a:ea typeface="Microsoft JhengHei"/>
@@ -11092,7 +11092,7 @@
                 <a:ea typeface="Microsoft JhengHei"/>
                 <a:cs typeface="Microsoft JhengHei"/>
               </a:rPr>
-              <a:t>本公司使用之部分資訊系統遭受駭客網路攻擊。</a:t>
+              <a:t>本公司網路資安事件說明</a:t>
             </a:r>
           </a:p>
         </p:txBody>
@@ -11127,7 +11127,7 @@
             <a:r>
               <a:rPr sz="1100" b="1">
                 <a:solidFill>
-                  <a:srgbClr val="E63946"/>
+                  <a:srgbClr val="5C6679"/>
                 </a:solidFill>
                 <a:latin typeface="Microsoft JhengHei"/>
                 <a:ea typeface="Microsoft JhengHei"/>
@@ -11144,7 +11144,7 @@
                 <a:ea typeface="Microsoft JhengHei"/>
                 <a:cs typeface="Microsoft JhengHei"/>
               </a:rPr>
-              <a:t>本公司後續仍將持續提升網路與資訊基礎架構之安全管控以確保資訊安全。</a:t>
+              <a:t>本公司後續將持續提升網路與資訊基礎架構之安全管控，以確保資訊安全。</a:t>
             </a:r>
           </a:p>
         </p:txBody>
@@ -11271,7 +11271,7 @@
                 <a:ea typeface="Microsoft JhengHei"/>
                 <a:cs typeface="Microsoft JhengHei"/>
               </a:rPr>
-              <a:t>優盛 </a:t>
+              <a:t>松上 </a:t>
             </a:r>
             <a:r>
               <a:rPr sz="1300" b="0">
@@ -11282,7 +11282,7 @@
                 <a:ea typeface="Microsoft JhengHei"/>
                 <a:cs typeface="Microsoft JhengHei"/>
               </a:rPr>
-              <a:t>4121</a:t>
+              <a:t>6156</a:t>
             </a:r>
           </a:p>
         </p:txBody>
@@ -11415,7 +11415,7 @@
                 <a:ea typeface="Microsoft JhengHei"/>
                 <a:cs typeface="Microsoft JhengHei"/>
               </a:rPr>
-              <a:t>本公司之官網於今天下午遭受網路駭客攻擊</a:t>
+              <a:t>本公司使用之部分資訊系統遭受駭客網路攻擊。</a:t>
             </a:r>
           </a:p>
         </p:txBody>
@@ -11467,7 +11467,7 @@
                 <a:ea typeface="Microsoft JhengHei"/>
                 <a:cs typeface="Microsoft JhengHei"/>
               </a:rPr>
-              <a:t>本公司後續將持續提升網路與資訊基礎架構之安全管控以確保資訊安全。</a:t>
+              <a:t>本公司後續仍將持續提升網路與資訊基礎架構之安全管控以確保資訊安全。</a:t>
             </a:r>
           </a:p>
         </p:txBody>

--- a/資安事件因應分析.pptx
+++ b/資安事件因應分析.pptx
@@ -3528,7 +3528,7 @@
                 <a:ea typeface="Microsoft JhengHei"/>
                 <a:cs typeface="Microsoft JhengHei"/>
               </a:rPr>
-              <a:t>資料期間 2026-07-08 ~ 2026-08-08　｜　MOPS 重大訊息全文檢索　｜　8 家公司</a:t>
+              <a:t>資料期間 2026-07-10 ~ 2026-08-10　｜　MOPS 重大訊息全文檢索　｜　8 家公司</a:t>
             </a:r>
           </a:p>
         </p:txBody>

--- a/資安事件因應分析.pptx
+++ b/資安事件因應分析.pptx
@@ -12,6 +12,7 @@
     <p:sldId id="260" r:id="rId11"/>
     <p:sldId id="261" r:id="rId12"/>
     <p:sldId id="262" r:id="rId13"/>
+    <p:sldId id="263" r:id="rId14"/>
   </p:sldIdLst>
   <p:sldSz cx="12191695" cy="6858000" type="screen4x3"/>
   <p:notesSz cx="6858000" cy="9144000"/>
@@ -185,7 +186,7 @@
                 <c:formatCode>General</c:formatCode>
                 <c:ptCount val="3"/>
                 <c:pt idx="0">
-                  <c:v>5</c:v>
+                  <c:v>6</c:v>
                 </c:pt>
                 <c:pt idx="1">
                   <c:v>1</c:v>
@@ -3528,7 +3529,7 @@
                 <a:ea typeface="Microsoft JhengHei"/>
                 <a:cs typeface="Microsoft JhengHei"/>
               </a:rPr>
-              <a:t>資料期間 2026-07-10 ~ 2026-08-10　｜　MOPS 重大訊息全文檢索　｜　8 家公司</a:t>
+              <a:t>資料期間 2026-07-11 ~ 2026-08-11　｜　MOPS 重大訊息全文檢索　｜　9 家公司</a:t>
             </a:r>
           </a:p>
         </p:txBody>
@@ -3745,7 +3746,7 @@
                 <a:ea typeface="Microsoft JhengHei"/>
                 <a:cs typeface="Microsoft JhengHei"/>
               </a:rPr>
-              <a:t>資料期間內 MOPS 揭露之 8 起資安相關重大訊息</a:t>
+              <a:t>資料期間內 MOPS 揭露之 9 起資安相關重大訊息</a:t>
             </a:r>
           </a:p>
         </p:txBody>
@@ -3828,7 +3829,7 @@
                 <a:ea typeface="Microsoft JhengHei"/>
                 <a:cs typeface="Microsoft JhengHei"/>
               </a:rPr>
-              <a:t>8</a:t>
+              <a:t>9</a:t>
             </a:r>
           </a:p>
         </p:txBody>
@@ -4120,7 +4121,7 @@
         </p:nvGraphicFramePr>
         <p:xfrm>
           <a:off x="548640" y="2697480"/>
-          <a:ext cx="11064240" cy="3456432"/>
+          <a:ext cx="11064240" cy="3566160"/>
         </p:xfrm>
         <a:graphic>
           <a:graphicData uri="http://schemas.openxmlformats.org/drawingml/2006/table">
@@ -4135,7 +4136,7 @@
                 <a:gridCol w="2286000"/>
                 <a:gridCol w="5120640"/>
               </a:tblGrid>
-              <a:tr h="384048">
+              <a:tr h="356616">
                 <a:tc>
                   <a:txBody>
                     <a:bodyPr/>
@@ -4257,7 +4258,7 @@
                   </a:tcPr>
                 </a:tc>
               </a:tr>
-              <a:tr h="384048">
+              <a:tr h="356616">
                 <a:tc>
                   <a:txBody>
                     <a:bodyPr/>
@@ -4272,7 +4273,7 @@
                           <a:ea typeface="Microsoft JhengHei"/>
                           <a:cs typeface="Microsoft JhengHei"/>
                         </a:rPr>
-                        <a:t>逸達</a:t>
+                        <a:t>久裕</a:t>
                       </a:r>
                     </a:p>
                   </a:txBody>
@@ -4296,7 +4297,7 @@
                           <a:ea typeface="Microsoft JhengHei"/>
                           <a:cs typeface="Microsoft JhengHei"/>
                         </a:rPr>
-                        <a:t>6576</a:t>
+                        <a:t>4173</a:t>
                       </a:r>
                     </a:p>
                   </a:txBody>
@@ -4320,251 +4321,7 @@
                           <a:ea typeface="Microsoft JhengHei"/>
                           <a:cs typeface="Microsoft JhengHei"/>
                         </a:rPr>
-                        <a:t>08/07</a:t>
-                      </a:r>
-                    </a:p>
-                  </a:txBody>
-                  <a:tcPr anchor="ctr" marL="73152" marT="9144" marB="9144">
-                    <a:solidFill>
-                      <a:srgbClr val="FFFFFF"/>
-                    </a:solidFill>
-                  </a:tcPr>
-                </a:tc>
-                <a:tc>
-                  <a:txBody>
-                    <a:bodyPr/>
-                    <a:lstStyle/>
-                    <a:p>
-                      <a:r>
-                        <a:rPr sz="1150" b="1">
-                          <a:solidFill>
-                            <a:srgbClr val="E63946"/>
-                          </a:solidFill>
-                          <a:latin typeface="Microsoft JhengHei"/>
-                          <a:ea typeface="Microsoft JhengHei"/>
-                          <a:cs typeface="Microsoft JhengHei"/>
-                        </a:rPr>
-                        <a:t>駭客攻擊</a:t>
-                      </a:r>
-                    </a:p>
-                  </a:txBody>
-                  <a:tcPr anchor="ctr" marL="73152" marT="9144" marB="9144">
-                    <a:solidFill>
-                      <a:srgbClr val="FFFFFF"/>
-                    </a:solidFill>
-                  </a:tcPr>
-                </a:tc>
-                <a:tc>
-                  <a:txBody>
-                    <a:bodyPr/>
-                    <a:lstStyle/>
-                    <a:p>
-                      <a:r>
-                        <a:rPr sz="1150" b="0">
-                          <a:solidFill>
-                            <a:srgbClr val="1A2233"/>
-                          </a:solidFill>
-                          <a:latin typeface="Microsoft JhengHei"/>
-                          <a:ea typeface="Microsoft JhengHei"/>
-                          <a:cs typeface="Microsoft JhengHei"/>
-                        </a:rPr>
-                        <a:t>本公司目前正積極會同技術專家協助調查，初步評估對公司營運暫無重大影響…</a:t>
-                      </a:r>
-                    </a:p>
-                  </a:txBody>
-                  <a:tcPr anchor="ctr" marL="73152" marT="9144" marB="9144">
-                    <a:solidFill>
-                      <a:srgbClr val="FFFFFF"/>
-                    </a:solidFill>
-                  </a:tcPr>
-                </a:tc>
-              </a:tr>
-              <a:tr h="384048">
-                <a:tc>
-                  <a:txBody>
-                    <a:bodyPr/>
-                    <a:lstStyle/>
-                    <a:p>
-                      <a:r>
-                        <a:rPr sz="1150" b="0">
-                          <a:solidFill>
-                            <a:srgbClr val="1A2233"/>
-                          </a:solidFill>
-                          <a:latin typeface="Microsoft JhengHei"/>
-                          <a:ea typeface="Microsoft JhengHei"/>
-                          <a:cs typeface="Microsoft JhengHei"/>
-                        </a:rPr>
-                        <a:t>州巧</a:t>
-                      </a:r>
-                    </a:p>
-                  </a:txBody>
-                  <a:tcPr anchor="ctr" marL="73152" marT="9144" marB="9144">
-                    <a:solidFill>
-                      <a:srgbClr val="EEF2F9"/>
-                    </a:solidFill>
-                  </a:tcPr>
-                </a:tc>
-                <a:tc>
-                  <a:txBody>
-                    <a:bodyPr/>
-                    <a:lstStyle/>
-                    <a:p>
-                      <a:r>
-                        <a:rPr sz="1150" b="0">
-                          <a:solidFill>
-                            <a:srgbClr val="1A2233"/>
-                          </a:solidFill>
-                          <a:latin typeface="Microsoft JhengHei"/>
-                          <a:ea typeface="Microsoft JhengHei"/>
-                          <a:cs typeface="Microsoft JhengHei"/>
-                        </a:rPr>
-                        <a:t>3543</a:t>
-                      </a:r>
-                    </a:p>
-                  </a:txBody>
-                  <a:tcPr anchor="ctr" marL="73152" marT="9144" marB="9144">
-                    <a:solidFill>
-                      <a:srgbClr val="EEF2F9"/>
-                    </a:solidFill>
-                  </a:tcPr>
-                </a:tc>
-                <a:tc>
-                  <a:txBody>
-                    <a:bodyPr/>
-                    <a:lstStyle/>
-                    <a:p>
-                      <a:r>
-                        <a:rPr sz="1150" b="0">
-                          <a:solidFill>
-                            <a:srgbClr val="1A2233"/>
-                          </a:solidFill>
-                          <a:latin typeface="Microsoft JhengHei"/>
-                          <a:ea typeface="Microsoft JhengHei"/>
-                          <a:cs typeface="Microsoft JhengHei"/>
-                        </a:rPr>
-                        <a:t>08/05</a:t>
-                      </a:r>
-                    </a:p>
-                  </a:txBody>
-                  <a:tcPr anchor="ctr" marL="73152" marT="9144" marB="9144">
-                    <a:solidFill>
-                      <a:srgbClr val="EEF2F9"/>
-                    </a:solidFill>
-                  </a:tcPr>
-                </a:tc>
-                <a:tc>
-                  <a:txBody>
-                    <a:bodyPr/>
-                    <a:lstStyle/>
-                    <a:p>
-                      <a:r>
-                        <a:rPr sz="1150" b="1">
-                          <a:solidFill>
-                            <a:srgbClr val="E63946"/>
-                          </a:solidFill>
-                          <a:latin typeface="Microsoft JhengHei"/>
-                          <a:ea typeface="Microsoft JhengHei"/>
-                          <a:cs typeface="Microsoft JhengHei"/>
-                        </a:rPr>
-                        <a:t>駭客攻擊</a:t>
-                      </a:r>
-                    </a:p>
-                  </a:txBody>
-                  <a:tcPr anchor="ctr" marL="73152" marT="9144" marB="9144">
-                    <a:solidFill>
-                      <a:srgbClr val="EEF2F9"/>
-                    </a:solidFill>
-                  </a:tcPr>
-                </a:tc>
-                <a:tc>
-                  <a:txBody>
-                    <a:bodyPr/>
-                    <a:lstStyle/>
-                    <a:p>
-                      <a:r>
-                        <a:rPr sz="1150" b="0">
-                          <a:solidFill>
-                            <a:srgbClr val="1A2233"/>
-                          </a:solidFill>
-                          <a:latin typeface="Microsoft JhengHei"/>
-                          <a:ea typeface="Microsoft JhengHei"/>
-                          <a:cs typeface="Microsoft JhengHei"/>
-                        </a:rPr>
-                        <a:t>目前初步評估對公司營運無重大影響。</a:t>
-                      </a:r>
-                    </a:p>
-                  </a:txBody>
-                  <a:tcPr anchor="ctr" marL="73152" marT="9144" marB="9144">
-                    <a:solidFill>
-                      <a:srgbClr val="EEF2F9"/>
-                    </a:solidFill>
-                  </a:tcPr>
-                </a:tc>
-              </a:tr>
-              <a:tr h="384048">
-                <a:tc>
-                  <a:txBody>
-                    <a:bodyPr/>
-                    <a:lstStyle/>
-                    <a:p>
-                      <a:r>
-                        <a:rPr sz="1150" b="0">
-                          <a:solidFill>
-                            <a:srgbClr val="1A2233"/>
-                          </a:solidFill>
-                          <a:latin typeface="Microsoft JhengHei"/>
-                          <a:ea typeface="Microsoft JhengHei"/>
-                          <a:cs typeface="Microsoft JhengHei"/>
-                        </a:rPr>
-                        <a:t>藥華藥</a:t>
-                      </a:r>
-                    </a:p>
-                  </a:txBody>
-                  <a:tcPr anchor="ctr" marL="73152" marT="9144" marB="9144">
-                    <a:solidFill>
-                      <a:srgbClr val="FFFFFF"/>
-                    </a:solidFill>
-                  </a:tcPr>
-                </a:tc>
-                <a:tc>
-                  <a:txBody>
-                    <a:bodyPr/>
-                    <a:lstStyle/>
-                    <a:p>
-                      <a:r>
-                        <a:rPr sz="1150" b="0">
-                          <a:solidFill>
-                            <a:srgbClr val="1A2233"/>
-                          </a:solidFill>
-                          <a:latin typeface="Microsoft JhengHei"/>
-                          <a:ea typeface="Microsoft JhengHei"/>
-                          <a:cs typeface="Microsoft JhengHei"/>
-                        </a:rPr>
-                        <a:t>6446</a:t>
-                      </a:r>
-                    </a:p>
-                  </a:txBody>
-                  <a:tcPr anchor="ctr" marL="73152" marT="9144" marB="9144">
-                    <a:solidFill>
-                      <a:srgbClr val="FFFFFF"/>
-                    </a:solidFill>
-                  </a:tcPr>
-                </a:tc>
-                <a:tc>
-                  <a:txBody>
-                    <a:bodyPr/>
-                    <a:lstStyle/>
-                    <a:p>
-                      <a:r>
-                        <a:rPr sz="1150" b="0">
-                          <a:solidFill>
-                            <a:srgbClr val="1A2233"/>
-                          </a:solidFill>
-                          <a:latin typeface="Microsoft JhengHei"/>
-                          <a:ea typeface="Microsoft JhengHei"/>
-                          <a:cs typeface="Microsoft JhengHei"/>
-                        </a:rPr>
-                        <a:t>08/03</a:t>
+                        <a:t>08/10</a:t>
                       </a:r>
                     </a:p>
                   </a:txBody>
@@ -4623,7 +4380,7 @@
                   </a:tcPr>
                 </a:tc>
               </a:tr>
-              <a:tr h="384048">
+              <a:tr h="356616">
                 <a:tc>
                   <a:txBody>
                     <a:bodyPr/>
@@ -4638,7 +4395,7 @@
                           <a:ea typeface="Microsoft JhengHei"/>
                           <a:cs typeface="Microsoft JhengHei"/>
                         </a:rPr>
-                        <a:t>上銀</a:t>
+                        <a:t>逸達</a:t>
                       </a:r>
                     </a:p>
                   </a:txBody>
@@ -4662,7 +4419,7 @@
                           <a:ea typeface="Microsoft JhengHei"/>
                           <a:cs typeface="Microsoft JhengHei"/>
                         </a:rPr>
-                        <a:t>2049</a:t>
+                        <a:t>6576</a:t>
                       </a:r>
                     </a:p>
                   </a:txBody>
@@ -4686,7 +4443,7 @@
                           <a:ea typeface="Microsoft JhengHei"/>
                           <a:cs typeface="Microsoft JhengHei"/>
                         </a:rPr>
-                        <a:t>07/28</a:t>
+                        <a:t>08/07</a:t>
                       </a:r>
                     </a:p>
                   </a:txBody>
@@ -4734,7 +4491,7 @@
                           <a:ea typeface="Microsoft JhengHei"/>
                           <a:cs typeface="Microsoft JhengHei"/>
                         </a:rPr>
-                        <a:t>目前初步評估對公司營運無重大影響。</a:t>
+                        <a:t>本公司目前正積極會同技術專家協助調查，初步評估對公司營運暫無重大影響…</a:t>
                       </a:r>
                     </a:p>
                   </a:txBody>
@@ -4745,7 +4502,7 @@
                   </a:tcPr>
                 </a:tc>
               </a:tr>
-              <a:tr h="384048">
+              <a:tr h="356616">
                 <a:tc>
                   <a:txBody>
                     <a:bodyPr/>
@@ -4760,7 +4517,7 @@
                           <a:ea typeface="Microsoft JhengHei"/>
                           <a:cs typeface="Microsoft JhengHei"/>
                         </a:rPr>
-                        <a:t>萬達寵物</a:t>
+                        <a:t>州巧</a:t>
                       </a:r>
                     </a:p>
                   </a:txBody>
@@ -4784,7 +4541,7 @@
                           <a:ea typeface="Microsoft JhengHei"/>
                           <a:cs typeface="Microsoft JhengHei"/>
                         </a:rPr>
-                        <a:t>6968</a:t>
+                        <a:t>3543</a:t>
                       </a:r>
                     </a:p>
                   </a:txBody>
@@ -4808,13 +4565,379 @@
                           <a:ea typeface="Microsoft JhengHei"/>
                           <a:cs typeface="Microsoft JhengHei"/>
                         </a:rPr>
+                        <a:t>08/05</a:t>
+                      </a:r>
+                    </a:p>
+                  </a:txBody>
+                  <a:tcPr anchor="ctr" marL="73152" marT="9144" marB="9144">
+                    <a:solidFill>
+                      <a:srgbClr val="FFFFFF"/>
+                    </a:solidFill>
+                  </a:tcPr>
+                </a:tc>
+                <a:tc>
+                  <a:txBody>
+                    <a:bodyPr/>
+                    <a:lstStyle/>
+                    <a:p>
+                      <a:r>
+                        <a:rPr sz="1150" b="1">
+                          <a:solidFill>
+                            <a:srgbClr val="E63946"/>
+                          </a:solidFill>
+                          <a:latin typeface="Microsoft JhengHei"/>
+                          <a:ea typeface="Microsoft JhengHei"/>
+                          <a:cs typeface="Microsoft JhengHei"/>
+                        </a:rPr>
+                        <a:t>駭客攻擊</a:t>
+                      </a:r>
+                    </a:p>
+                  </a:txBody>
+                  <a:tcPr anchor="ctr" marL="73152" marT="9144" marB="9144">
+                    <a:solidFill>
+                      <a:srgbClr val="FFFFFF"/>
+                    </a:solidFill>
+                  </a:tcPr>
+                </a:tc>
+                <a:tc>
+                  <a:txBody>
+                    <a:bodyPr/>
+                    <a:lstStyle/>
+                    <a:p>
+                      <a:r>
+                        <a:rPr sz="1150" b="0">
+                          <a:solidFill>
+                            <a:srgbClr val="1A2233"/>
+                          </a:solidFill>
+                          <a:latin typeface="Microsoft JhengHei"/>
+                          <a:ea typeface="Microsoft JhengHei"/>
+                          <a:cs typeface="Microsoft JhengHei"/>
+                        </a:rPr>
+                        <a:t>目前初步評估對公司營運無重大影響。</a:t>
+                      </a:r>
+                    </a:p>
+                  </a:txBody>
+                  <a:tcPr anchor="ctr" marL="73152" marT="9144" marB="9144">
+                    <a:solidFill>
+                      <a:srgbClr val="FFFFFF"/>
+                    </a:solidFill>
+                  </a:tcPr>
+                </a:tc>
+              </a:tr>
+              <a:tr h="356616">
+                <a:tc>
+                  <a:txBody>
+                    <a:bodyPr/>
+                    <a:lstStyle/>
+                    <a:p>
+                      <a:r>
+                        <a:rPr sz="1150" b="0">
+                          <a:solidFill>
+                            <a:srgbClr val="1A2233"/>
+                          </a:solidFill>
+                          <a:latin typeface="Microsoft JhengHei"/>
+                          <a:ea typeface="Microsoft JhengHei"/>
+                          <a:cs typeface="Microsoft JhengHei"/>
+                        </a:rPr>
+                        <a:t>藥華藥</a:t>
+                      </a:r>
+                    </a:p>
+                  </a:txBody>
+                  <a:tcPr anchor="ctr" marL="73152" marT="9144" marB="9144">
+                    <a:solidFill>
+                      <a:srgbClr val="EEF2F9"/>
+                    </a:solidFill>
+                  </a:tcPr>
+                </a:tc>
+                <a:tc>
+                  <a:txBody>
+                    <a:bodyPr/>
+                    <a:lstStyle/>
+                    <a:p>
+                      <a:r>
+                        <a:rPr sz="1150" b="0">
+                          <a:solidFill>
+                            <a:srgbClr val="1A2233"/>
+                          </a:solidFill>
+                          <a:latin typeface="Microsoft JhengHei"/>
+                          <a:ea typeface="Microsoft JhengHei"/>
+                          <a:cs typeface="Microsoft JhengHei"/>
+                        </a:rPr>
+                        <a:t>6446</a:t>
+                      </a:r>
+                    </a:p>
+                  </a:txBody>
+                  <a:tcPr anchor="ctr" marL="73152" marT="9144" marB="9144">
+                    <a:solidFill>
+                      <a:srgbClr val="EEF2F9"/>
+                    </a:solidFill>
+                  </a:tcPr>
+                </a:tc>
+                <a:tc>
+                  <a:txBody>
+                    <a:bodyPr/>
+                    <a:lstStyle/>
+                    <a:p>
+                      <a:r>
+                        <a:rPr sz="1150" b="0">
+                          <a:solidFill>
+                            <a:srgbClr val="1A2233"/>
+                          </a:solidFill>
+                          <a:latin typeface="Microsoft JhengHei"/>
+                          <a:ea typeface="Microsoft JhengHei"/>
+                          <a:cs typeface="Microsoft JhengHei"/>
+                        </a:rPr>
+                        <a:t>08/03</a:t>
+                      </a:r>
+                    </a:p>
+                  </a:txBody>
+                  <a:tcPr anchor="ctr" marL="73152" marT="9144" marB="9144">
+                    <a:solidFill>
+                      <a:srgbClr val="EEF2F9"/>
+                    </a:solidFill>
+                  </a:tcPr>
+                </a:tc>
+                <a:tc>
+                  <a:txBody>
+                    <a:bodyPr/>
+                    <a:lstStyle/>
+                    <a:p>
+                      <a:r>
+                        <a:rPr sz="1150" b="1">
+                          <a:solidFill>
+                            <a:srgbClr val="E63946"/>
+                          </a:solidFill>
+                          <a:latin typeface="Microsoft JhengHei"/>
+                          <a:ea typeface="Microsoft JhengHei"/>
+                          <a:cs typeface="Microsoft JhengHei"/>
+                        </a:rPr>
+                        <a:t>駭客攻擊</a:t>
+                      </a:r>
+                    </a:p>
+                  </a:txBody>
+                  <a:tcPr anchor="ctr" marL="73152" marT="9144" marB="9144">
+                    <a:solidFill>
+                      <a:srgbClr val="EEF2F9"/>
+                    </a:solidFill>
+                  </a:tcPr>
+                </a:tc>
+                <a:tc>
+                  <a:txBody>
+                    <a:bodyPr/>
+                    <a:lstStyle/>
+                    <a:p>
+                      <a:r>
+                        <a:rPr sz="1150" b="0">
+                          <a:solidFill>
+                            <a:srgbClr val="1A2233"/>
+                          </a:solidFill>
+                          <a:latin typeface="Microsoft JhengHei"/>
+                          <a:ea typeface="Microsoft JhengHei"/>
+                          <a:cs typeface="Microsoft JhengHei"/>
+                        </a:rPr>
+                        <a:t>本公司目前正積極會同技術專家協助調查，初步評估對公司營運無重大影響。</a:t>
+                      </a:r>
+                    </a:p>
+                  </a:txBody>
+                  <a:tcPr anchor="ctr" marL="73152" marT="9144" marB="9144">
+                    <a:solidFill>
+                      <a:srgbClr val="EEF2F9"/>
+                    </a:solidFill>
+                  </a:tcPr>
+                </a:tc>
+              </a:tr>
+              <a:tr h="356616">
+                <a:tc>
+                  <a:txBody>
+                    <a:bodyPr/>
+                    <a:lstStyle/>
+                    <a:p>
+                      <a:r>
+                        <a:rPr sz="1150" b="0">
+                          <a:solidFill>
+                            <a:srgbClr val="1A2233"/>
+                          </a:solidFill>
+                          <a:latin typeface="Microsoft JhengHei"/>
+                          <a:ea typeface="Microsoft JhengHei"/>
+                          <a:cs typeface="Microsoft JhengHei"/>
+                        </a:rPr>
+                        <a:t>上銀</a:t>
+                      </a:r>
+                    </a:p>
+                  </a:txBody>
+                  <a:tcPr anchor="ctr" marL="73152" marT="9144" marB="9144">
+                    <a:solidFill>
+                      <a:srgbClr val="FFFFFF"/>
+                    </a:solidFill>
+                  </a:tcPr>
+                </a:tc>
+                <a:tc>
+                  <a:txBody>
+                    <a:bodyPr/>
+                    <a:lstStyle/>
+                    <a:p>
+                      <a:r>
+                        <a:rPr sz="1150" b="0">
+                          <a:solidFill>
+                            <a:srgbClr val="1A2233"/>
+                          </a:solidFill>
+                          <a:latin typeface="Microsoft JhengHei"/>
+                          <a:ea typeface="Microsoft JhengHei"/>
+                          <a:cs typeface="Microsoft JhengHei"/>
+                        </a:rPr>
+                        <a:t>2049</a:t>
+                      </a:r>
+                    </a:p>
+                  </a:txBody>
+                  <a:tcPr anchor="ctr" marL="73152" marT="9144" marB="9144">
+                    <a:solidFill>
+                      <a:srgbClr val="FFFFFF"/>
+                    </a:solidFill>
+                  </a:tcPr>
+                </a:tc>
+                <a:tc>
+                  <a:txBody>
+                    <a:bodyPr/>
+                    <a:lstStyle/>
+                    <a:p>
+                      <a:r>
+                        <a:rPr sz="1150" b="0">
+                          <a:solidFill>
+                            <a:srgbClr val="1A2233"/>
+                          </a:solidFill>
+                          <a:latin typeface="Microsoft JhengHei"/>
+                          <a:ea typeface="Microsoft JhengHei"/>
+                          <a:cs typeface="Microsoft JhengHei"/>
+                        </a:rPr>
+                        <a:t>07/28</a:t>
+                      </a:r>
+                    </a:p>
+                  </a:txBody>
+                  <a:tcPr anchor="ctr" marL="73152" marT="9144" marB="9144">
+                    <a:solidFill>
+                      <a:srgbClr val="FFFFFF"/>
+                    </a:solidFill>
+                  </a:tcPr>
+                </a:tc>
+                <a:tc>
+                  <a:txBody>
+                    <a:bodyPr/>
+                    <a:lstStyle/>
+                    <a:p>
+                      <a:r>
+                        <a:rPr sz="1150" b="1">
+                          <a:solidFill>
+                            <a:srgbClr val="E63946"/>
+                          </a:solidFill>
+                          <a:latin typeface="Microsoft JhengHei"/>
+                          <a:ea typeface="Microsoft JhengHei"/>
+                          <a:cs typeface="Microsoft JhengHei"/>
+                        </a:rPr>
+                        <a:t>駭客攻擊</a:t>
+                      </a:r>
+                    </a:p>
+                  </a:txBody>
+                  <a:tcPr anchor="ctr" marL="73152" marT="9144" marB="9144">
+                    <a:solidFill>
+                      <a:srgbClr val="FFFFFF"/>
+                    </a:solidFill>
+                  </a:tcPr>
+                </a:tc>
+                <a:tc>
+                  <a:txBody>
+                    <a:bodyPr/>
+                    <a:lstStyle/>
+                    <a:p>
+                      <a:r>
+                        <a:rPr sz="1150" b="0">
+                          <a:solidFill>
+                            <a:srgbClr val="1A2233"/>
+                          </a:solidFill>
+                          <a:latin typeface="Microsoft JhengHei"/>
+                          <a:ea typeface="Microsoft JhengHei"/>
+                          <a:cs typeface="Microsoft JhengHei"/>
+                        </a:rPr>
+                        <a:t>目前初步評估對公司營運無重大影響。</a:t>
+                      </a:r>
+                    </a:p>
+                  </a:txBody>
+                  <a:tcPr anchor="ctr" marL="73152" marT="9144" marB="9144">
+                    <a:solidFill>
+                      <a:srgbClr val="FFFFFF"/>
+                    </a:solidFill>
+                  </a:tcPr>
+                </a:tc>
+              </a:tr>
+              <a:tr h="356616">
+                <a:tc>
+                  <a:txBody>
+                    <a:bodyPr/>
+                    <a:lstStyle/>
+                    <a:p>
+                      <a:r>
+                        <a:rPr sz="1150" b="0">
+                          <a:solidFill>
+                            <a:srgbClr val="1A2233"/>
+                          </a:solidFill>
+                          <a:latin typeface="Microsoft JhengHei"/>
+                          <a:ea typeface="Microsoft JhengHei"/>
+                          <a:cs typeface="Microsoft JhengHei"/>
+                        </a:rPr>
+                        <a:t>萬達寵物</a:t>
+                      </a:r>
+                    </a:p>
+                  </a:txBody>
+                  <a:tcPr anchor="ctr" marL="73152" marT="9144" marB="9144">
+                    <a:solidFill>
+                      <a:srgbClr val="EEF2F9"/>
+                    </a:solidFill>
+                  </a:tcPr>
+                </a:tc>
+                <a:tc>
+                  <a:txBody>
+                    <a:bodyPr/>
+                    <a:lstStyle/>
+                    <a:p>
+                      <a:r>
+                        <a:rPr sz="1150" b="0">
+                          <a:solidFill>
+                            <a:srgbClr val="1A2233"/>
+                          </a:solidFill>
+                          <a:latin typeface="Microsoft JhengHei"/>
+                          <a:ea typeface="Microsoft JhengHei"/>
+                          <a:cs typeface="Microsoft JhengHei"/>
+                        </a:rPr>
+                        <a:t>6968</a:t>
+                      </a:r>
+                    </a:p>
+                  </a:txBody>
+                  <a:tcPr anchor="ctr" marL="73152" marT="9144" marB="9144">
+                    <a:solidFill>
+                      <a:srgbClr val="EEF2F9"/>
+                    </a:solidFill>
+                  </a:tcPr>
+                </a:tc>
+                <a:tc>
+                  <a:txBody>
+                    <a:bodyPr/>
+                    <a:lstStyle/>
+                    <a:p>
+                      <a:r>
+                        <a:rPr sz="1150" b="0">
+                          <a:solidFill>
+                            <a:srgbClr val="1A2233"/>
+                          </a:solidFill>
+                          <a:latin typeface="Microsoft JhengHei"/>
+                          <a:ea typeface="Microsoft JhengHei"/>
+                          <a:cs typeface="Microsoft JhengHei"/>
+                        </a:rPr>
                         <a:t>07/27</a:t>
                       </a:r>
                     </a:p>
                   </a:txBody>
                   <a:tcPr anchor="ctr" marL="73152" marT="9144" marB="9144">
                     <a:solidFill>
-                      <a:srgbClr val="FFFFFF"/>
+                      <a:srgbClr val="EEF2F9"/>
                     </a:solidFill>
                   </a:tcPr>
                 </a:tc>
@@ -4838,7 +4961,7 @@
                   </a:txBody>
                   <a:tcPr anchor="ctr" marL="73152" marT="9144" marB="9144">
                     <a:solidFill>
-                      <a:srgbClr val="FFFFFF"/>
+                      <a:srgbClr val="EEF2F9"/>
                     </a:solidFill>
                   </a:tcPr>
                 </a:tc>
@@ -4862,12 +4985,134 @@
                   </a:txBody>
                   <a:tcPr anchor="ctr" marL="73152" marT="9144" marB="9144">
                     <a:solidFill>
+                      <a:srgbClr val="EEF2F9"/>
+                    </a:solidFill>
+                  </a:tcPr>
+                </a:tc>
+              </a:tr>
+              <a:tr h="356616">
+                <a:tc>
+                  <a:txBody>
+                    <a:bodyPr/>
+                    <a:lstStyle/>
+                    <a:p>
+                      <a:r>
+                        <a:rPr sz="1150" b="0">
+                          <a:solidFill>
+                            <a:srgbClr val="1A2233"/>
+                          </a:solidFill>
+                          <a:latin typeface="Microsoft JhengHei"/>
+                          <a:ea typeface="Microsoft JhengHei"/>
+                          <a:cs typeface="Microsoft JhengHei"/>
+                        </a:rPr>
+                        <a:t>淳安</a:t>
+                      </a:r>
+                    </a:p>
+                  </a:txBody>
+                  <a:tcPr anchor="ctr" marL="73152" marT="9144" marB="9144">
+                    <a:solidFill>
+                      <a:srgbClr val="FFFFFF"/>
+                    </a:solidFill>
+                  </a:tcPr>
+                </a:tc>
+                <a:tc>
+                  <a:txBody>
+                    <a:bodyPr/>
+                    <a:lstStyle/>
+                    <a:p>
+                      <a:r>
+                        <a:rPr sz="1150" b="0">
+                          <a:solidFill>
+                            <a:srgbClr val="1A2233"/>
+                          </a:solidFill>
+                          <a:latin typeface="Microsoft JhengHei"/>
+                          <a:ea typeface="Microsoft JhengHei"/>
+                          <a:cs typeface="Microsoft JhengHei"/>
+                        </a:rPr>
+                        <a:t>6283</a:t>
+                      </a:r>
+                    </a:p>
+                  </a:txBody>
+                  <a:tcPr anchor="ctr" marL="73152" marT="9144" marB="9144">
+                    <a:solidFill>
+                      <a:srgbClr val="FFFFFF"/>
+                    </a:solidFill>
+                  </a:tcPr>
+                </a:tc>
+                <a:tc>
+                  <a:txBody>
+                    <a:bodyPr/>
+                    <a:lstStyle/>
+                    <a:p>
+                      <a:r>
+                        <a:rPr sz="1150" b="0">
+                          <a:solidFill>
+                            <a:srgbClr val="1A2233"/>
+                          </a:solidFill>
+                          <a:latin typeface="Microsoft JhengHei"/>
+                          <a:ea typeface="Microsoft JhengHei"/>
+                          <a:cs typeface="Microsoft JhengHei"/>
+                        </a:rPr>
+                        <a:t>07/21</a:t>
+                      </a:r>
+                    </a:p>
+                  </a:txBody>
+                  <a:tcPr anchor="ctr" marL="73152" marT="9144" marB="9144">
+                    <a:solidFill>
+                      <a:srgbClr val="FFFFFF"/>
+                    </a:solidFill>
+                  </a:tcPr>
+                </a:tc>
+                <a:tc>
+                  <a:txBody>
+                    <a:bodyPr/>
+                    <a:lstStyle/>
+                    <a:p>
+                      <a:r>
+                        <a:rPr sz="1150" b="1">
+                          <a:solidFill>
+                            <a:srgbClr val="5C6679"/>
+                          </a:solidFill>
+                          <a:latin typeface="Microsoft JhengHei"/>
+                          <a:ea typeface="Microsoft JhengHei"/>
+                          <a:cs typeface="Microsoft JhengHei"/>
+                        </a:rPr>
+                        <a:t>其他</a:t>
+                      </a:r>
+                    </a:p>
+                  </a:txBody>
+                  <a:tcPr anchor="ctr" marL="73152" marT="9144" marB="9144">
+                    <a:solidFill>
+                      <a:srgbClr val="FFFFFF"/>
+                    </a:solidFill>
+                  </a:tcPr>
+                </a:tc>
+                <a:tc>
+                  <a:txBody>
+                    <a:bodyPr/>
+                    <a:lstStyle/>
+                    <a:p>
+                      <a:r>
+                        <a:rPr sz="1150" b="0">
+                          <a:solidFill>
+                            <a:srgbClr val="1A2233"/>
+                          </a:solidFill>
+                          <a:latin typeface="Microsoft JhengHei"/>
+                          <a:ea typeface="Microsoft JhengHei"/>
+                          <a:cs typeface="Microsoft JhengHei"/>
+                        </a:rPr>
+                        <a:t>經評估對公司營運無重大影響。</a:t>
+                      </a:r>
+                    </a:p>
+                  </a:txBody>
+                  <a:tcPr anchor="ctr" marL="73152" marT="9144" marB="9144">
+                    <a:solidFill>
                       <a:srgbClr val="FFFFFF"/>
                     </a:solidFill>
                   </a:tcPr>
                 </a:tc>
               </a:tr>
-              <a:tr h="384048">
+              <a:tr h="356616">
                 <a:tc>
                   <a:txBody>
                     <a:bodyPr/>
@@ -4930,7 +5175,7 @@
                           <a:ea typeface="Microsoft JhengHei"/>
                           <a:cs typeface="Microsoft JhengHei"/>
                         </a:rPr>
-                        <a:t>07/21</a:t>
+                        <a:t>07/20</a:t>
                       </a:r>
                     </a:p>
                   </a:txBody>
@@ -4989,7 +5234,7 @@
                   </a:tcPr>
                 </a:tc>
               </a:tr>
-              <a:tr h="384048">
+              <a:tr h="356616">
                 <a:tc>
                   <a:txBody>
                     <a:bodyPr/>
@@ -5004,7 +5249,7 @@
                           <a:ea typeface="Microsoft JhengHei"/>
                           <a:cs typeface="Microsoft JhengHei"/>
                         </a:rPr>
-                        <a:t>淳安</a:t>
+                        <a:t>松上</a:t>
                       </a:r>
                     </a:p>
                   </a:txBody>
@@ -5028,7 +5273,7 @@
                           <a:ea typeface="Microsoft JhengHei"/>
                           <a:cs typeface="Microsoft JhengHei"/>
                         </a:rPr>
-                        <a:t>6283</a:t>
+                        <a:t>6156</a:t>
                       </a:r>
                     </a:p>
                   </a:txBody>
@@ -5052,7 +5297,7 @@
                           <a:ea typeface="Microsoft JhengHei"/>
                           <a:cs typeface="Microsoft JhengHei"/>
                         </a:rPr>
-                        <a:t>07/20</a:t>
+                        <a:t>07/17</a:t>
                       </a:r>
                     </a:p>
                   </a:txBody>
@@ -5070,13 +5315,13 @@
                       <a:r>
                         <a:rPr sz="1150" b="1">
                           <a:solidFill>
-                            <a:srgbClr val="5C6679"/>
+                            <a:srgbClr val="E63946"/>
                           </a:solidFill>
                           <a:latin typeface="Microsoft JhengHei"/>
                           <a:ea typeface="Microsoft JhengHei"/>
                           <a:cs typeface="Microsoft JhengHei"/>
                         </a:rPr>
-                        <a:t>其他</a:t>
+                        <a:t>駭客攻擊</a:t>
                       </a:r>
                     </a:p>
                   </a:txBody>
@@ -5100,135 +5345,13 @@
                           <a:ea typeface="Microsoft JhengHei"/>
                           <a:cs typeface="Microsoft JhengHei"/>
                         </a:rPr>
-                        <a:t>經評估對公司營運無重大影響。</a:t>
+                        <a:t>目前評估對公司營運無重大影響。</a:t>
                       </a:r>
                     </a:p>
                   </a:txBody>
                   <a:tcPr anchor="ctr" marL="73152" marT="9144" marB="9144">
                     <a:solidFill>
                       <a:srgbClr val="FFFFFF"/>
-                    </a:solidFill>
-                  </a:tcPr>
-                </a:tc>
-              </a:tr>
-              <a:tr h="384048">
-                <a:tc>
-                  <a:txBody>
-                    <a:bodyPr/>
-                    <a:lstStyle/>
-                    <a:p>
-                      <a:r>
-                        <a:rPr sz="1150" b="0">
-                          <a:solidFill>
-                            <a:srgbClr val="1A2233"/>
-                          </a:solidFill>
-                          <a:latin typeface="Microsoft JhengHei"/>
-                          <a:ea typeface="Microsoft JhengHei"/>
-                          <a:cs typeface="Microsoft JhengHei"/>
-                        </a:rPr>
-                        <a:t>松上</a:t>
-                      </a:r>
-                    </a:p>
-                  </a:txBody>
-                  <a:tcPr anchor="ctr" marL="73152" marT="9144" marB="9144">
-                    <a:solidFill>
-                      <a:srgbClr val="EEF2F9"/>
-                    </a:solidFill>
-                  </a:tcPr>
-                </a:tc>
-                <a:tc>
-                  <a:txBody>
-                    <a:bodyPr/>
-                    <a:lstStyle/>
-                    <a:p>
-                      <a:r>
-                        <a:rPr sz="1150" b="0">
-                          <a:solidFill>
-                            <a:srgbClr val="1A2233"/>
-                          </a:solidFill>
-                          <a:latin typeface="Microsoft JhengHei"/>
-                          <a:ea typeface="Microsoft JhengHei"/>
-                          <a:cs typeface="Microsoft JhengHei"/>
-                        </a:rPr>
-                        <a:t>6156</a:t>
-                      </a:r>
-                    </a:p>
-                  </a:txBody>
-                  <a:tcPr anchor="ctr" marL="73152" marT="9144" marB="9144">
-                    <a:solidFill>
-                      <a:srgbClr val="EEF2F9"/>
-                    </a:solidFill>
-                  </a:tcPr>
-                </a:tc>
-                <a:tc>
-                  <a:txBody>
-                    <a:bodyPr/>
-                    <a:lstStyle/>
-                    <a:p>
-                      <a:r>
-                        <a:rPr sz="1150" b="0">
-                          <a:solidFill>
-                            <a:srgbClr val="1A2233"/>
-                          </a:solidFill>
-                          <a:latin typeface="Microsoft JhengHei"/>
-                          <a:ea typeface="Microsoft JhengHei"/>
-                          <a:cs typeface="Microsoft JhengHei"/>
-                        </a:rPr>
-                        <a:t>07/17</a:t>
-                      </a:r>
-                    </a:p>
-                  </a:txBody>
-                  <a:tcPr anchor="ctr" marL="73152" marT="9144" marB="9144">
-                    <a:solidFill>
-                      <a:srgbClr val="EEF2F9"/>
-                    </a:solidFill>
-                  </a:tcPr>
-                </a:tc>
-                <a:tc>
-                  <a:txBody>
-                    <a:bodyPr/>
-                    <a:lstStyle/>
-                    <a:p>
-                      <a:r>
-                        <a:rPr sz="1150" b="1">
-                          <a:solidFill>
-                            <a:srgbClr val="E63946"/>
-                          </a:solidFill>
-                          <a:latin typeface="Microsoft JhengHei"/>
-                          <a:ea typeface="Microsoft JhengHei"/>
-                          <a:cs typeface="Microsoft JhengHei"/>
-                        </a:rPr>
-                        <a:t>駭客攻擊</a:t>
-                      </a:r>
-                    </a:p>
-                  </a:txBody>
-                  <a:tcPr anchor="ctr" marL="73152" marT="9144" marB="9144">
-                    <a:solidFill>
-                      <a:srgbClr val="EEF2F9"/>
-                    </a:solidFill>
-                  </a:tcPr>
-                </a:tc>
-                <a:tc>
-                  <a:txBody>
-                    <a:bodyPr/>
-                    <a:lstStyle/>
-                    <a:p>
-                      <a:r>
-                        <a:rPr sz="1150" b="0">
-                          <a:solidFill>
-                            <a:srgbClr val="1A2233"/>
-                          </a:solidFill>
-                          <a:latin typeface="Microsoft JhengHei"/>
-                          <a:ea typeface="Microsoft JhengHei"/>
-                          <a:cs typeface="Microsoft JhengHei"/>
-                        </a:rPr>
-                        <a:t>目前評估對公司營運無重大影響。</a:t>
-                      </a:r>
-                    </a:p>
-                  </a:txBody>
-                  <a:tcPr anchor="ctr" marL="73152" marT="9144" marB="9144">
-                    <a:solidFill>
-                      <a:srgbClr val="EEF2F9"/>
                     </a:solidFill>
                   </a:tcPr>
                 </a:tc>
@@ -5550,7 +5673,7 @@
                 <a:ea typeface="Microsoft JhengHei"/>
                 <a:cs typeface="Microsoft JhengHei"/>
               </a:rPr>
-              <a:t>5 起</a:t>
+              <a:t>6 起</a:t>
             </a:r>
           </a:p>
         </p:txBody>
@@ -5587,7 +5710,7 @@
                 <a:ea typeface="Microsoft JhengHei"/>
                 <a:cs typeface="Microsoft JhengHei"/>
               </a:rPr>
-              <a:t>逸達、州巧、藥華藥、上銀、松上</a:t>
+              <a:t>久裕、逸達、州巧、藥華藥、上銀、松上</a:t>
             </a:r>
           </a:p>
         </p:txBody>
@@ -6251,7 +6374,7 @@
         </p:nvGraphicFramePr>
         <p:xfrm>
           <a:off x="548640" y="1600200"/>
-          <a:ext cx="10789920" cy="4114800"/>
+          <a:ext cx="10789920" cy="4480560"/>
         </p:xfrm>
         <a:graphic>
           <a:graphicData uri="http://schemas.openxmlformats.org/drawingml/2006/table">
@@ -6266,7 +6389,7 @@
                 <a:gridCol w="3383280"/>
                 <a:gridCol w="2606040"/>
               </a:tblGrid>
-              <a:tr h="457200">
+              <a:tr h="448056">
                 <a:tc>
                   <a:txBody>
                     <a:bodyPr/>
@@ -6388,7 +6511,7 @@
                   </a:tcPr>
                 </a:tc>
               </a:tr>
-              <a:tr h="457200">
+              <a:tr h="448056">
                 <a:tc>
                   <a:txBody>
                     <a:bodyPr/>
@@ -6403,7 +6526,7 @@
                           <a:ea typeface="Microsoft JhengHei"/>
                           <a:cs typeface="Microsoft JhengHei"/>
                         </a:rPr>
-                        <a:t>逸達</a:t>
+                        <a:t>久裕</a:t>
                       </a:r>
                     </a:p>
                   </a:txBody>
@@ -6427,7 +6550,251 @@
                           <a:ea typeface="Microsoft JhengHei"/>
                           <a:cs typeface="Microsoft JhengHei"/>
                         </a:rPr>
+                        <a:t>4173</a:t>
+                      </a:r>
+                    </a:p>
+                  </a:txBody>
+                  <a:tcPr anchor="ctr" marL="73152" marT="9144" marB="9144">
+                    <a:solidFill>
+                      <a:srgbClr val="FFFFFF"/>
+                    </a:solidFill>
+                  </a:tcPr>
+                </a:tc>
+                <a:tc>
+                  <a:txBody>
+                    <a:bodyPr/>
+                    <a:lstStyle/>
+                    <a:p>
+                      <a:r>
+                        <a:rPr sz="1150" b="1">
+                          <a:solidFill>
+                            <a:srgbClr val="E63946"/>
+                          </a:solidFill>
+                          <a:latin typeface="Microsoft JhengHei"/>
+                          <a:ea typeface="Microsoft JhengHei"/>
+                          <a:cs typeface="Microsoft JhengHei"/>
+                        </a:rPr>
+                        <a:t>駭客攻擊</a:t>
+                      </a:r>
+                    </a:p>
+                  </a:txBody>
+                  <a:tcPr anchor="ctr" marL="73152" marT="9144" marB="9144">
+                    <a:solidFill>
+                      <a:srgbClr val="FFFFFF"/>
+                    </a:solidFill>
+                  </a:tcPr>
+                </a:tc>
+                <a:tc>
+                  <a:txBody>
+                    <a:bodyPr/>
+                    <a:lstStyle/>
+                    <a:p>
+                      <a:r>
+                        <a:rPr sz="1150" b="0">
+                          <a:solidFill>
+                            <a:srgbClr val="1A2233"/>
+                          </a:solidFill>
+                          <a:latin typeface="Microsoft JhengHei"/>
+                          <a:ea typeface="Microsoft JhengHei"/>
+                          <a:cs typeface="Microsoft JhengHei"/>
+                        </a:rPr>
+                        <a:t>安侯建業聯合會計師事務所</a:t>
+                      </a:r>
+                    </a:p>
+                  </a:txBody>
+                  <a:tcPr anchor="ctr" marL="73152" marT="9144" marB="9144">
+                    <a:solidFill>
+                      <a:srgbClr val="FFFFFF"/>
+                    </a:solidFill>
+                  </a:tcPr>
+                </a:tc>
+                <a:tc>
+                  <a:txBody>
+                    <a:bodyPr/>
+                    <a:lstStyle/>
+                    <a:p>
+                      <a:r>
+                        <a:rPr sz="1150" b="0">
+                          <a:solidFill>
+                            <a:srgbClr val="1A2233"/>
+                          </a:solidFill>
+                          <a:latin typeface="Microsoft JhengHei"/>
+                          <a:ea typeface="Microsoft JhengHei"/>
+                          <a:cs typeface="Microsoft JhengHei"/>
+                        </a:rPr>
+                        <a:t>郭柔蘭、江曉苓</a:t>
+                      </a:r>
+                    </a:p>
+                  </a:txBody>
+                  <a:tcPr anchor="ctr" marL="73152" marT="9144" marB="9144">
+                    <a:solidFill>
+                      <a:srgbClr val="FFFFFF"/>
+                    </a:solidFill>
+                  </a:tcPr>
+                </a:tc>
+              </a:tr>
+              <a:tr h="448056">
+                <a:tc>
+                  <a:txBody>
+                    <a:bodyPr/>
+                    <a:lstStyle/>
+                    <a:p>
+                      <a:r>
+                        <a:rPr sz="1150" b="0">
+                          <a:solidFill>
+                            <a:srgbClr val="1A2233"/>
+                          </a:solidFill>
+                          <a:latin typeface="Microsoft JhengHei"/>
+                          <a:ea typeface="Microsoft JhengHei"/>
+                          <a:cs typeface="Microsoft JhengHei"/>
+                        </a:rPr>
+                        <a:t>逸達</a:t>
+                      </a:r>
+                    </a:p>
+                  </a:txBody>
+                  <a:tcPr anchor="ctr" marL="73152" marT="9144" marB="9144">
+                    <a:solidFill>
+                      <a:srgbClr val="EEF2F9"/>
+                    </a:solidFill>
+                  </a:tcPr>
+                </a:tc>
+                <a:tc>
+                  <a:txBody>
+                    <a:bodyPr/>
+                    <a:lstStyle/>
+                    <a:p>
+                      <a:r>
+                        <a:rPr sz="1150" b="0">
+                          <a:solidFill>
+                            <a:srgbClr val="1A2233"/>
+                          </a:solidFill>
+                          <a:latin typeface="Microsoft JhengHei"/>
+                          <a:ea typeface="Microsoft JhengHei"/>
+                          <a:cs typeface="Microsoft JhengHei"/>
+                        </a:rPr>
                         <a:t>6576</a:t>
+                      </a:r>
+                    </a:p>
+                  </a:txBody>
+                  <a:tcPr anchor="ctr" marL="73152" marT="9144" marB="9144">
+                    <a:solidFill>
+                      <a:srgbClr val="EEF2F9"/>
+                    </a:solidFill>
+                  </a:tcPr>
+                </a:tc>
+                <a:tc>
+                  <a:txBody>
+                    <a:bodyPr/>
+                    <a:lstStyle/>
+                    <a:p>
+                      <a:r>
+                        <a:rPr sz="1150" b="1">
+                          <a:solidFill>
+                            <a:srgbClr val="E63946"/>
+                          </a:solidFill>
+                          <a:latin typeface="Microsoft JhengHei"/>
+                          <a:ea typeface="Microsoft JhengHei"/>
+                          <a:cs typeface="Microsoft JhengHei"/>
+                        </a:rPr>
+                        <a:t>駭客攻擊</a:t>
+                      </a:r>
+                    </a:p>
+                  </a:txBody>
+                  <a:tcPr anchor="ctr" marL="73152" marT="9144" marB="9144">
+                    <a:solidFill>
+                      <a:srgbClr val="EEF2F9"/>
+                    </a:solidFill>
+                  </a:tcPr>
+                </a:tc>
+                <a:tc>
+                  <a:txBody>
+                    <a:bodyPr/>
+                    <a:lstStyle/>
+                    <a:p>
+                      <a:r>
+                        <a:rPr sz="1150" b="0">
+                          <a:solidFill>
+                            <a:srgbClr val="1A2233"/>
+                          </a:solidFill>
+                          <a:latin typeface="Microsoft JhengHei"/>
+                          <a:ea typeface="Microsoft JhengHei"/>
+                          <a:cs typeface="Microsoft JhengHei"/>
+                        </a:rPr>
+                        <a:t>資誠聯合會計師事務所</a:t>
+                      </a:r>
+                    </a:p>
+                  </a:txBody>
+                  <a:tcPr anchor="ctr" marL="73152" marT="9144" marB="9144">
+                    <a:solidFill>
+                      <a:srgbClr val="EEF2F9"/>
+                    </a:solidFill>
+                  </a:tcPr>
+                </a:tc>
+                <a:tc>
+                  <a:txBody>
+                    <a:bodyPr/>
+                    <a:lstStyle/>
+                    <a:p>
+                      <a:r>
+                        <a:rPr sz="1150" b="0">
+                          <a:solidFill>
+                            <a:srgbClr val="1A2233"/>
+                          </a:solidFill>
+                          <a:latin typeface="Microsoft JhengHei"/>
+                          <a:ea typeface="Microsoft JhengHei"/>
+                          <a:cs typeface="Microsoft JhengHei"/>
+                        </a:rPr>
+                        <a:t>蔡蓓華、顏裕芳</a:t>
+                      </a:r>
+                    </a:p>
+                  </a:txBody>
+                  <a:tcPr anchor="ctr" marL="73152" marT="9144" marB="9144">
+                    <a:solidFill>
+                      <a:srgbClr val="EEF2F9"/>
+                    </a:solidFill>
+                  </a:tcPr>
+                </a:tc>
+              </a:tr>
+              <a:tr h="448056">
+                <a:tc>
+                  <a:txBody>
+                    <a:bodyPr/>
+                    <a:lstStyle/>
+                    <a:p>
+                      <a:r>
+                        <a:rPr sz="1150" b="0">
+                          <a:solidFill>
+                            <a:srgbClr val="1A2233"/>
+                          </a:solidFill>
+                          <a:latin typeface="Microsoft JhengHei"/>
+                          <a:ea typeface="Microsoft JhengHei"/>
+                          <a:cs typeface="Microsoft JhengHei"/>
+                        </a:rPr>
+                        <a:t>州巧</a:t>
+                      </a:r>
+                    </a:p>
+                  </a:txBody>
+                  <a:tcPr anchor="ctr" marL="73152" marT="9144" marB="9144">
+                    <a:solidFill>
+                      <a:srgbClr val="FFFFFF"/>
+                    </a:solidFill>
+                  </a:tcPr>
+                </a:tc>
+                <a:tc>
+                  <a:txBody>
+                    <a:bodyPr/>
+                    <a:lstStyle/>
+                    <a:p>
+                      <a:r>
+                        <a:rPr sz="1150" b="0">
+                          <a:solidFill>
+                            <a:srgbClr val="1A2233"/>
+                          </a:solidFill>
+                          <a:latin typeface="Microsoft JhengHei"/>
+                          <a:ea typeface="Microsoft JhengHei"/>
+                          <a:cs typeface="Microsoft JhengHei"/>
+                        </a:rPr>
+                        <a:t>3543</a:t>
                       </a:r>
                     </a:p>
                   </a:txBody>
@@ -6499,7 +6866,7 @@
                           <a:ea typeface="Microsoft JhengHei"/>
                           <a:cs typeface="Microsoft JhengHei"/>
                         </a:rPr>
-                        <a:t>蔡蓓華、顏裕芳</a:t>
+                        <a:t>廖福銘、林永智</a:t>
                       </a:r>
                     </a:p>
                   </a:txBody>
@@ -6510,7 +6877,7 @@
                   </a:tcPr>
                 </a:tc>
               </a:tr>
-              <a:tr h="457200">
+              <a:tr h="448056">
                 <a:tc>
                   <a:txBody>
                     <a:bodyPr/>
@@ -6525,7 +6892,7 @@
                           <a:ea typeface="Microsoft JhengHei"/>
                           <a:cs typeface="Microsoft JhengHei"/>
                         </a:rPr>
-                        <a:t>州巧</a:t>
+                        <a:t>藥華藥</a:t>
                       </a:r>
                     </a:p>
                   </a:txBody>
@@ -6549,7 +6916,7 @@
                           <a:ea typeface="Microsoft JhengHei"/>
                           <a:cs typeface="Microsoft JhengHei"/>
                         </a:rPr>
-                        <a:t>3543</a:t>
+                        <a:t>6446</a:t>
                       </a:r>
                     </a:p>
                   </a:txBody>
@@ -6597,7 +6964,7 @@
                           <a:ea typeface="Microsoft JhengHei"/>
                           <a:cs typeface="Microsoft JhengHei"/>
                         </a:rPr>
-                        <a:t>資誠聯合會計師事務所</a:t>
+                        <a:t>安永聯合會計師事務所</a:t>
                       </a:r>
                     </a:p>
                   </a:txBody>
@@ -6621,7 +6988,7 @@
                           <a:ea typeface="Microsoft JhengHei"/>
                           <a:cs typeface="Microsoft JhengHei"/>
                         </a:rPr>
-                        <a:t>廖福銘、林永智</a:t>
+                        <a:t>呂倩雯、張巧穎</a:t>
                       </a:r>
                     </a:p>
                   </a:txBody>
@@ -6632,7 +6999,7 @@
                   </a:tcPr>
                 </a:tc>
               </a:tr>
-              <a:tr h="457200">
+              <a:tr h="448056">
                 <a:tc>
                   <a:txBody>
                     <a:bodyPr/>
@@ -6647,7 +7014,7 @@
                           <a:ea typeface="Microsoft JhengHei"/>
                           <a:cs typeface="Microsoft JhengHei"/>
                         </a:rPr>
-                        <a:t>藥華藥</a:t>
+                        <a:t>上銀</a:t>
                       </a:r>
                     </a:p>
                   </a:txBody>
@@ -6671,7 +7038,7 @@
                           <a:ea typeface="Microsoft JhengHei"/>
                           <a:cs typeface="Microsoft JhengHei"/>
                         </a:rPr>
-                        <a:t>6446</a:t>
+                        <a:t>2049</a:t>
                       </a:r>
                     </a:p>
                   </a:txBody>
@@ -6719,7 +7086,7 @@
                           <a:ea typeface="Microsoft JhengHei"/>
                           <a:cs typeface="Microsoft JhengHei"/>
                         </a:rPr>
-                        <a:t>安永聯合會計師事務所</a:t>
+                        <a:t>勤業眾信聯合會計師事務所</a:t>
                       </a:r>
                     </a:p>
                   </a:txBody>
@@ -6743,7 +7110,7 @@
                           <a:ea typeface="Microsoft JhengHei"/>
                           <a:cs typeface="Microsoft JhengHei"/>
                         </a:rPr>
-                        <a:t>呂倩雯、張巧穎</a:t>
+                        <a:t>吳麗冬、顏曉芳</a:t>
                       </a:r>
                     </a:p>
                   </a:txBody>
@@ -6754,7 +7121,7 @@
                   </a:tcPr>
                 </a:tc>
               </a:tr>
-              <a:tr h="457200">
+              <a:tr h="448056">
                 <a:tc>
                   <a:txBody>
                     <a:bodyPr/>
@@ -6769,7 +7136,7 @@
                           <a:ea typeface="Microsoft JhengHei"/>
                           <a:cs typeface="Microsoft JhengHei"/>
                         </a:rPr>
-                        <a:t>上銀</a:t>
+                        <a:t>萬達寵物</a:t>
                       </a:r>
                     </a:p>
                   </a:txBody>
@@ -6793,7 +7160,7 @@
                           <a:ea typeface="Microsoft JhengHei"/>
                           <a:cs typeface="Microsoft JhengHei"/>
                         </a:rPr>
-                        <a:t>2049</a:t>
+                        <a:t>6968</a:t>
                       </a:r>
                     </a:p>
                   </a:txBody>
@@ -6811,13 +7178,13 @@
                       <a:r>
                         <a:rPr sz="1150" b="1">
                           <a:solidFill>
-                            <a:srgbClr val="E63946"/>
+                            <a:srgbClr val="27A6C4"/>
                           </a:solidFill>
                           <a:latin typeface="Microsoft JhengHei"/>
                           <a:ea typeface="Microsoft JhengHei"/>
                           <a:cs typeface="Microsoft JhengHei"/>
                         </a:rPr>
-                        <a:t>駭客攻擊</a:t>
+                        <a:t>個資外洩</a:t>
                       </a:r>
                     </a:p>
                   </a:txBody>
@@ -6841,7 +7208,7 @@
                           <a:ea typeface="Microsoft JhengHei"/>
                           <a:cs typeface="Microsoft JhengHei"/>
                         </a:rPr>
-                        <a:t>勤業眾信聯合會計師事務所</a:t>
+                        <a:t>資誠聯合會計師事務所</a:t>
                       </a:r>
                     </a:p>
                   </a:txBody>
@@ -6865,7 +7232,7 @@
                           <a:ea typeface="Microsoft JhengHei"/>
                           <a:cs typeface="Microsoft JhengHei"/>
                         </a:rPr>
-                        <a:t>吳麗冬、顏曉芳</a:t>
+                        <a:t>葉翠苗、黃世鈞</a:t>
                       </a:r>
                     </a:p>
                   </a:txBody>
@@ -6876,7 +7243,7 @@
                   </a:tcPr>
                 </a:tc>
               </a:tr>
-              <a:tr h="457200">
+              <a:tr h="448056">
                 <a:tc>
                   <a:txBody>
                     <a:bodyPr/>
@@ -6891,7 +7258,7 @@
                           <a:ea typeface="Microsoft JhengHei"/>
                           <a:cs typeface="Microsoft JhengHei"/>
                         </a:rPr>
-                        <a:t>萬達寵物</a:t>
+                        <a:t>淳安</a:t>
                       </a:r>
                     </a:p>
                   </a:txBody>
@@ -6915,7 +7282,7 @@
                           <a:ea typeface="Microsoft JhengHei"/>
                           <a:cs typeface="Microsoft JhengHei"/>
                         </a:rPr>
-                        <a:t>6968</a:t>
+                        <a:t>6283</a:t>
                       </a:r>
                     </a:p>
                   </a:txBody>
@@ -6933,13 +7300,13 @@
                       <a:r>
                         <a:rPr sz="1150" b="1">
                           <a:solidFill>
-                            <a:srgbClr val="27A6C4"/>
+                            <a:srgbClr val="5C6679"/>
                           </a:solidFill>
                           <a:latin typeface="Microsoft JhengHei"/>
                           <a:ea typeface="Microsoft JhengHei"/>
                           <a:cs typeface="Microsoft JhengHei"/>
                         </a:rPr>
-                        <a:t>個資外洩</a:t>
+                        <a:t>其他</a:t>
                       </a:r>
                     </a:p>
                   </a:txBody>
@@ -6987,7 +7354,7 @@
                           <a:ea typeface="Microsoft JhengHei"/>
                           <a:cs typeface="Microsoft JhengHei"/>
                         </a:rPr>
-                        <a:t>葉翠苗、黃世鈞</a:t>
+                        <a:t>林永智、廖福銘</a:t>
                       </a:r>
                     </a:p>
                   </a:txBody>
@@ -6998,7 +7365,7 @@
                   </a:tcPr>
                 </a:tc>
               </a:tr>
-              <a:tr h="457200">
+              <a:tr h="448056">
                 <a:tc>
                   <a:txBody>
                     <a:bodyPr/>
@@ -7120,7 +7487,7 @@
                   </a:tcPr>
                 </a:tc>
               </a:tr>
-              <a:tr h="457200">
+              <a:tr h="448056">
                 <a:tc>
                   <a:txBody>
                     <a:bodyPr/>
@@ -7135,7 +7502,7 @@
                           <a:ea typeface="Microsoft JhengHei"/>
                           <a:cs typeface="Microsoft JhengHei"/>
                         </a:rPr>
-                        <a:t>淳安</a:t>
+                        <a:t>松上</a:t>
                       </a:r>
                     </a:p>
                   </a:txBody>
@@ -7159,7 +7526,7 @@
                           <a:ea typeface="Microsoft JhengHei"/>
                           <a:cs typeface="Microsoft JhengHei"/>
                         </a:rPr>
-                        <a:t>6283</a:t>
+                        <a:t>6156</a:t>
                       </a:r>
                     </a:p>
                   </a:txBody>
@@ -7177,13 +7544,13 @@
                       <a:r>
                         <a:rPr sz="1150" b="1">
                           <a:solidFill>
-                            <a:srgbClr val="5C6679"/>
+                            <a:srgbClr val="E63946"/>
                           </a:solidFill>
                           <a:latin typeface="Microsoft JhengHei"/>
                           <a:ea typeface="Microsoft JhengHei"/>
                           <a:cs typeface="Microsoft JhengHei"/>
                         </a:rPr>
-                        <a:t>其他</a:t>
+                        <a:t>駭客攻擊</a:t>
                       </a:r>
                     </a:p>
                   </a:txBody>
@@ -7207,7 +7574,7 @@
                           <a:ea typeface="Microsoft JhengHei"/>
                           <a:cs typeface="Microsoft JhengHei"/>
                         </a:rPr>
-                        <a:t>資誠聯合會計師事務所</a:t>
+                        <a:t>安永聯合會計師事務所</a:t>
                       </a:r>
                     </a:p>
                   </a:txBody>
@@ -7231,135 +7598,13 @@
                           <a:ea typeface="Microsoft JhengHei"/>
                           <a:cs typeface="Microsoft JhengHei"/>
                         </a:rPr>
-                        <a:t>林永智、廖福銘</a:t>
+                        <a:t>羅筱靖、陳國帥</a:t>
                       </a:r>
                     </a:p>
                   </a:txBody>
                   <a:tcPr anchor="ctr" marL="73152" marT="9144" marB="9144">
                     <a:solidFill>
                       <a:srgbClr val="FFFFFF"/>
-                    </a:solidFill>
-                  </a:tcPr>
-                </a:tc>
-              </a:tr>
-              <a:tr h="457200">
-                <a:tc>
-                  <a:txBody>
-                    <a:bodyPr/>
-                    <a:lstStyle/>
-                    <a:p>
-                      <a:r>
-                        <a:rPr sz="1150" b="0">
-                          <a:solidFill>
-                            <a:srgbClr val="1A2233"/>
-                          </a:solidFill>
-                          <a:latin typeface="Microsoft JhengHei"/>
-                          <a:ea typeface="Microsoft JhengHei"/>
-                          <a:cs typeface="Microsoft JhengHei"/>
-                        </a:rPr>
-                        <a:t>松上</a:t>
-                      </a:r>
-                    </a:p>
-                  </a:txBody>
-                  <a:tcPr anchor="ctr" marL="73152" marT="9144" marB="9144">
-                    <a:solidFill>
-                      <a:srgbClr val="EEF2F9"/>
-                    </a:solidFill>
-                  </a:tcPr>
-                </a:tc>
-                <a:tc>
-                  <a:txBody>
-                    <a:bodyPr/>
-                    <a:lstStyle/>
-                    <a:p>
-                      <a:r>
-                        <a:rPr sz="1150" b="0">
-                          <a:solidFill>
-                            <a:srgbClr val="1A2233"/>
-                          </a:solidFill>
-                          <a:latin typeface="Microsoft JhengHei"/>
-                          <a:ea typeface="Microsoft JhengHei"/>
-                          <a:cs typeface="Microsoft JhengHei"/>
-                        </a:rPr>
-                        <a:t>6156</a:t>
-                      </a:r>
-                    </a:p>
-                  </a:txBody>
-                  <a:tcPr anchor="ctr" marL="73152" marT="9144" marB="9144">
-                    <a:solidFill>
-                      <a:srgbClr val="EEF2F9"/>
-                    </a:solidFill>
-                  </a:tcPr>
-                </a:tc>
-                <a:tc>
-                  <a:txBody>
-                    <a:bodyPr/>
-                    <a:lstStyle/>
-                    <a:p>
-                      <a:r>
-                        <a:rPr sz="1150" b="1">
-                          <a:solidFill>
-                            <a:srgbClr val="E63946"/>
-                          </a:solidFill>
-                          <a:latin typeface="Microsoft JhengHei"/>
-                          <a:ea typeface="Microsoft JhengHei"/>
-                          <a:cs typeface="Microsoft JhengHei"/>
-                        </a:rPr>
-                        <a:t>駭客攻擊</a:t>
-                      </a:r>
-                    </a:p>
-                  </a:txBody>
-                  <a:tcPr anchor="ctr" marL="73152" marT="9144" marB="9144">
-                    <a:solidFill>
-                      <a:srgbClr val="EEF2F9"/>
-                    </a:solidFill>
-                  </a:tcPr>
-                </a:tc>
-                <a:tc>
-                  <a:txBody>
-                    <a:bodyPr/>
-                    <a:lstStyle/>
-                    <a:p>
-                      <a:r>
-                        <a:rPr sz="1150" b="0">
-                          <a:solidFill>
-                            <a:srgbClr val="1A2233"/>
-                          </a:solidFill>
-                          <a:latin typeface="Microsoft JhengHei"/>
-                          <a:ea typeface="Microsoft JhengHei"/>
-                          <a:cs typeface="Microsoft JhengHei"/>
-                        </a:rPr>
-                        <a:t>安永聯合會計師事務所</a:t>
-                      </a:r>
-                    </a:p>
-                  </a:txBody>
-                  <a:tcPr anchor="ctr" marL="73152" marT="9144" marB="9144">
-                    <a:solidFill>
-                      <a:srgbClr val="EEF2F9"/>
-                    </a:solidFill>
-                  </a:tcPr>
-                </a:tc>
-                <a:tc>
-                  <a:txBody>
-                    <a:bodyPr/>
-                    <a:lstStyle/>
-                    <a:p>
-                      <a:r>
-                        <a:rPr sz="1150" b="0">
-                          <a:solidFill>
-                            <a:srgbClr val="1A2233"/>
-                          </a:solidFill>
-                          <a:latin typeface="Microsoft JhengHei"/>
-                          <a:ea typeface="Microsoft JhengHei"/>
-                          <a:cs typeface="Microsoft JhengHei"/>
-                        </a:rPr>
-                        <a:t>羅筱靖、陳國帥</a:t>
-                      </a:r>
-                    </a:p>
-                  </a:txBody>
-                  <a:tcPr anchor="ctr" marL="73152" marT="9144" marB="9144">
-                    <a:solidFill>
-                      <a:srgbClr val="EEF2F9"/>
                     </a:solidFill>
                   </a:tcPr>
                 </a:tc>
@@ -8874,7 +9119,7 @@
                 <a:ea typeface="Microsoft JhengHei"/>
                 <a:cs typeface="Microsoft JhengHei"/>
               </a:rPr>
-              <a:t>逸達 </a:t>
+              <a:t>久裕 </a:t>
             </a:r>
             <a:r>
               <a:rPr sz="1300" b="0">
@@ -8885,7 +9130,7 @@
                 <a:ea typeface="Microsoft JhengHei"/>
                 <a:cs typeface="Microsoft JhengHei"/>
               </a:rPr>
-              <a:t>6576</a:t>
+              <a:t>4173</a:t>
             </a:r>
           </a:p>
         </p:txBody>
@@ -9018,7 +9263,7 @@
                 <a:ea typeface="Microsoft JhengHei"/>
                 <a:cs typeface="Microsoft JhengHei"/>
               </a:rPr>
-              <a:t>本公司資訊系統遭受駭客網路攻擊，初步評估對公司營運暫無重大影響。</a:t>
+              <a:t>本公司部分資訊系統遭受駭客網路攻擊，初步評估對公司營運無重大影響。</a:t>
             </a:r>
           </a:p>
         </p:txBody>
@@ -9197,7 +9442,7 @@
                 <a:ea typeface="Microsoft JhengHei"/>
                 <a:cs typeface="Microsoft JhengHei"/>
               </a:rPr>
-              <a:t>州巧 </a:t>
+              <a:t>逸達 </a:t>
             </a:r>
             <a:r>
               <a:rPr sz="1300" b="0">
@@ -9208,7 +9453,7 @@
                 <a:ea typeface="Microsoft JhengHei"/>
                 <a:cs typeface="Microsoft JhengHei"/>
               </a:rPr>
-              <a:t>3543</a:t>
+              <a:t>6576</a:t>
             </a:r>
           </a:p>
         </p:txBody>
@@ -9341,7 +9586,7 @@
                 <a:ea typeface="Microsoft JhengHei"/>
                 <a:cs typeface="Microsoft JhengHei"/>
               </a:rPr>
-              <a:t>本公司及重要子公司(蘇州州巧、廈門州巧及越南州巧)之部份資訊系統遭不明駭客入侵，導致部分系統無法…</a:t>
+              <a:t>本公司資訊系統遭受駭客網路攻擊，初步評估對公司營運暫無重大影響。</a:t>
             </a:r>
           </a:p>
         </p:txBody>
@@ -9393,7 +9638,7 @@
                 <a:ea typeface="Microsoft JhengHei"/>
                 <a:cs typeface="Microsoft JhengHei"/>
               </a:rPr>
-              <a:t>完成相關安全漏洞修復後，將持續強化網路與資訊基礎架構之安全防護機制及管理措施，確保資訊系統穩定運作及資訊安全。</a:t>
+              <a:t>本公司將持續提升網路與資訊基礎架構之安全管控，以確保資訊安全。</a:t>
             </a:r>
           </a:p>
         </p:txBody>
@@ -9520,7 +9765,7 @@
                 <a:ea typeface="Microsoft JhengHei"/>
                 <a:cs typeface="Microsoft JhengHei"/>
               </a:rPr>
-              <a:t>藥華藥 </a:t>
+              <a:t>州巧 </a:t>
             </a:r>
             <a:r>
               <a:rPr sz="1300" b="0">
@@ -9531,7 +9776,7 @@
                 <a:ea typeface="Microsoft JhengHei"/>
                 <a:cs typeface="Microsoft JhengHei"/>
               </a:rPr>
-              <a:t>6446</a:t>
+              <a:t>3543</a:t>
             </a:r>
           </a:p>
         </p:txBody>
@@ -9664,7 +9909,7 @@
                 <a:ea typeface="Microsoft JhengHei"/>
                 <a:cs typeface="Microsoft JhengHei"/>
               </a:rPr>
-              <a:t>本公司及泛泰醫療子公司之部分資訊系統遭受駭客網路攻擊，初步評估對公司營運無重大影響。</a:t>
+              <a:t>本公司及重要子公司(蘇州州巧、廈門州巧及越南州巧)之部份資訊系統遭不明駭客入侵，導致部分系統無法…</a:t>
             </a:r>
           </a:p>
         </p:txBody>
@@ -9716,7 +9961,7 @@
                 <a:ea typeface="Microsoft JhengHei"/>
                 <a:cs typeface="Microsoft JhengHei"/>
               </a:rPr>
-              <a:t>本公司將持續提升網路與資訊基礎架構之安全管控，以確保資訊安全。</a:t>
+              <a:t>完成相關安全漏洞修復後，將持續強化網路與資訊基礎架構之安全防護機制及管理措施，確保資訊系統穩定運作及資訊安全。</a:t>
             </a:r>
           </a:p>
         </p:txBody>
@@ -9843,7 +10088,7 @@
                 <a:ea typeface="Microsoft JhengHei"/>
                 <a:cs typeface="Microsoft JhengHei"/>
               </a:rPr>
-              <a:t>上銀 </a:t>
+              <a:t>藥華藥 </a:t>
             </a:r>
             <a:r>
               <a:rPr sz="1300" b="0">
@@ -9854,7 +10099,7 @@
                 <a:ea typeface="Microsoft JhengHei"/>
                 <a:cs typeface="Microsoft JhengHei"/>
               </a:rPr>
-              <a:t>2049</a:t>
+              <a:t>6446</a:t>
             </a:r>
           </a:p>
         </p:txBody>
@@ -9987,7 +10232,7 @@
                 <a:ea typeface="Microsoft JhengHei"/>
                 <a:cs typeface="Microsoft JhengHei"/>
               </a:rPr>
-              <a:t>本公司義大利子公司部份資訊系統遭受駭客網路攻擊</a:t>
+              <a:t>本公司及泛泰醫療子公司之部分資訊系統遭受駭客網路攻擊，初步評估對公司營運無重大影響。</a:t>
             </a:r>
           </a:p>
         </p:txBody>
@@ -10039,7 +10284,7 @@
                 <a:ea typeface="Microsoft JhengHei"/>
                 <a:cs typeface="Microsoft JhengHei"/>
               </a:rPr>
-              <a:t>完成相關安全漏洞修復後，將持續強化網路與資訊基礎架構之安全防護機制及管理措施，確保資訊系統穩定運作及資訊安全。</a:t>
+              <a:t>本公司將持續提升網路與資訊基礎架構之安全管控，以確保資訊安全。</a:t>
             </a:r>
           </a:p>
         </p:txBody>
@@ -10241,7 +10486,7 @@
             <a:avLst/>
           </a:prstGeom>
           <a:solidFill>
-            <a:srgbClr val="27A6C4"/>
+            <a:srgbClr val="E63946"/>
           </a:solidFill>
           <a:ln>
             <a:noFill/>
@@ -10302,7 +10547,7 @@
                 <a:ea typeface="Microsoft JhengHei"/>
                 <a:cs typeface="Microsoft JhengHei"/>
               </a:rPr>
-              <a:t>萬達寵物 </a:t>
+              <a:t>上銀 </a:t>
             </a:r>
             <a:r>
               <a:rPr sz="1300" b="0">
@@ -10313,7 +10558,7 @@
                 <a:ea typeface="Microsoft JhengHei"/>
                 <a:cs typeface="Microsoft JhengHei"/>
               </a:rPr>
-              <a:t>6968</a:t>
+              <a:t>2049</a:t>
             </a:r>
           </a:p>
         </p:txBody>
@@ -10333,7 +10578,7 @@
             <a:avLst/>
           </a:prstGeom>
           <a:solidFill>
-            <a:srgbClr val="27A6C4"/>
+            <a:srgbClr val="E63946"/>
           </a:solidFill>
           <a:ln>
             <a:noFill/>
@@ -10394,7 +10639,7 @@
                 <a:ea typeface="Microsoft JhengHei"/>
                 <a:cs typeface="Microsoft JhengHei"/>
               </a:rPr>
-              <a:t>個資外洩</a:t>
+              <a:t>駭客攻擊</a:t>
             </a:r>
           </a:p>
         </p:txBody>
@@ -10429,7 +10674,7 @@
             <a:r>
               <a:rPr sz="1100" b="1">
                 <a:solidFill>
-                  <a:srgbClr val="27A6C4"/>
+                  <a:srgbClr val="E63946"/>
                 </a:solidFill>
                 <a:latin typeface="Microsoft JhengHei"/>
                 <a:ea typeface="Microsoft JhengHei"/>
@@ -10446,7 +10691,7 @@
                 <a:ea typeface="Microsoft JhengHei"/>
                 <a:cs typeface="Microsoft JhengHei"/>
               </a:rPr>
-              <a:t>本公司因合作廠商資訊系統遭不明人士入侵，疑似部份資料外洩</a:t>
+              <a:t>本公司義大利子公司部份資訊系統遭受駭客網路攻擊</a:t>
             </a:r>
           </a:p>
         </p:txBody>
@@ -10481,7 +10726,7 @@
             <a:r>
               <a:rPr sz="1100" b="1">
                 <a:solidFill>
-                  <a:srgbClr val="27A6C4"/>
+                  <a:srgbClr val="E63946"/>
                 </a:solidFill>
                 <a:latin typeface="Microsoft JhengHei"/>
                 <a:ea typeface="Microsoft JhengHei"/>
@@ -10498,7 +10743,7 @@
                 <a:ea typeface="Microsoft JhengHei"/>
                 <a:cs typeface="Microsoft JhengHei"/>
               </a:rPr>
-              <a:t>本公司並無與合作廠商串接會員資料、信用卡號、銀行帳戶等敏感資訊，不會產生任何金流交易。本公司已嚴正要求合作廠商技術團隊，…</a:t>
+              <a:t>完成相關安全漏洞修復後，將持續強化網路與資訊基礎架構之安全防護機制及管理措施，確保資訊系統穩定運作及資訊安全。</a:t>
             </a:r>
           </a:p>
         </p:txBody>
@@ -10564,7 +10809,7 @@
             <a:avLst/>
           </a:prstGeom>
           <a:solidFill>
-            <a:srgbClr val="5C6679"/>
+            <a:srgbClr val="27A6C4"/>
           </a:solidFill>
           <a:ln>
             <a:noFill/>
@@ -10625,7 +10870,7 @@
                 <a:ea typeface="Microsoft JhengHei"/>
                 <a:cs typeface="Microsoft JhengHei"/>
               </a:rPr>
-              <a:t>淳安 </a:t>
+              <a:t>萬達寵物 </a:t>
             </a:r>
             <a:r>
               <a:rPr sz="1300" b="0">
@@ -10636,7 +10881,7 @@
                 <a:ea typeface="Microsoft JhengHei"/>
                 <a:cs typeface="Microsoft JhengHei"/>
               </a:rPr>
-              <a:t>6283</a:t>
+              <a:t>6968</a:t>
             </a:r>
           </a:p>
         </p:txBody>
@@ -10656,7 +10901,7 @@
             <a:avLst/>
           </a:prstGeom>
           <a:solidFill>
-            <a:srgbClr val="5C6679"/>
+            <a:srgbClr val="27A6C4"/>
           </a:solidFill>
           <a:ln>
             <a:noFill/>
@@ -10717,7 +10962,7 @@
                 <a:ea typeface="Microsoft JhengHei"/>
                 <a:cs typeface="Microsoft JhengHei"/>
               </a:rPr>
-              <a:t>其他</a:t>
+              <a:t>個資外洩</a:t>
             </a:r>
           </a:p>
         </p:txBody>
@@ -10752,7 +10997,7 @@
             <a:r>
               <a:rPr sz="1100" b="1">
                 <a:solidFill>
-                  <a:srgbClr val="5C6679"/>
+                  <a:srgbClr val="27A6C4"/>
                 </a:solidFill>
                 <a:latin typeface="Microsoft JhengHei"/>
                 <a:ea typeface="Microsoft JhengHei"/>
@@ -10769,7 +11014,7 @@
                 <a:ea typeface="Microsoft JhengHei"/>
                 <a:cs typeface="Microsoft JhengHei"/>
               </a:rPr>
-              <a:t>本公司網路資安事件說明</a:t>
+              <a:t>本公司因合作廠商資訊系統遭不明人士入侵，疑似部份資料外洩</a:t>
             </a:r>
           </a:p>
         </p:txBody>
@@ -10804,7 +11049,7 @@
             <a:r>
               <a:rPr sz="1100" b="1">
                 <a:solidFill>
-                  <a:srgbClr val="5C6679"/>
+                  <a:srgbClr val="27A6C4"/>
                 </a:solidFill>
                 <a:latin typeface="Microsoft JhengHei"/>
                 <a:ea typeface="Microsoft JhengHei"/>
@@ -10821,7 +11066,7 @@
                 <a:ea typeface="Microsoft JhengHei"/>
                 <a:cs typeface="Microsoft JhengHei"/>
               </a:rPr>
-              <a:t>本公司後續將持續提升網路與資訊基礎架構之安全管控，以確保資訊安全。</a:t>
+              <a:t>本公司並無與合作廠商串接會員資料、信用卡號、銀行帳戶等敏感資訊，不會產生任何金流交易。本公司已嚴正要求合作廠商技術團隊，…</a:t>
             </a:r>
           </a:p>
         </p:txBody>
@@ -11210,7 +11455,7 @@
             <a:avLst/>
           </a:prstGeom>
           <a:solidFill>
-            <a:srgbClr val="E63946"/>
+            <a:srgbClr val="5C6679"/>
           </a:solidFill>
           <a:ln>
             <a:noFill/>
@@ -11271,7 +11516,7 @@
                 <a:ea typeface="Microsoft JhengHei"/>
                 <a:cs typeface="Microsoft JhengHei"/>
               </a:rPr>
-              <a:t>松上 </a:t>
+              <a:t>淳安 </a:t>
             </a:r>
             <a:r>
               <a:rPr sz="1300" b="0">
@@ -11282,7 +11527,7 @@
                 <a:ea typeface="Microsoft JhengHei"/>
                 <a:cs typeface="Microsoft JhengHei"/>
               </a:rPr>
-              <a:t>6156</a:t>
+              <a:t>6283</a:t>
             </a:r>
           </a:p>
         </p:txBody>
@@ -11299,6 +11544,373 @@
             <a:ext cx="1234440" cy="347472"/>
           </a:xfrm>
           <a:prstGeom prst="roundRect">
+            <a:avLst/>
+          </a:prstGeom>
+          <a:solidFill>
+            <a:srgbClr val="5C6679"/>
+          </a:solidFill>
+          <a:ln>
+            <a:noFill/>
+          </a:ln>
+          <a:effectLst/>
+        </p:spPr>
+        <p:style>
+          <a:lnRef idx="1">
+            <a:schemeClr val="accent1"/>
+          </a:lnRef>
+          <a:fillRef idx="3">
+            <a:schemeClr val="accent1"/>
+          </a:fillRef>
+          <a:effectRef idx="2">
+            <a:schemeClr val="accent1"/>
+          </a:effectRef>
+          <a:fontRef idx="minor">
+            <a:schemeClr val="lt1"/>
+          </a:fontRef>
+        </p:style>
+        <p:txBody>
+          <a:bodyPr rtlCol="0" anchor="ctr"/>
+          <a:lstStyle/>
+          <a:p>
+            <a:pPr algn="ctr"/>
+          </a:p>
+        </p:txBody>
+      </p:sp>
+      <p:sp>
+        <p:nvSpPr>
+          <p:cNvPr id="30" name="TextBox 29"/>
+          <p:cNvSpPr txBox="1"/>
+          <p:nvPr/>
+        </p:nvSpPr>
+        <p:spPr>
+          <a:xfrm>
+            <a:off x="10149840" y="4123944"/>
+            <a:ext cx="1234440" cy="347472"/>
+          </a:xfrm>
+          <a:prstGeom prst="rect">
+            <a:avLst/>
+          </a:prstGeom>
+          <a:noFill/>
+        </p:spPr>
+        <p:txBody>
+          <a:bodyPr wrap="square" anchor="ctr" lIns="0" rIns="0" tIns="0" bIns="0">
+            <a:spAutoFit/>
+          </a:bodyPr>
+          <a:lstStyle/>
+          <a:p>
+            <a:pPr algn="ctr"/>
+            <a:r>
+              <a:rPr sz="1050" b="1">
+                <a:solidFill>
+                  <a:srgbClr val="FFFFFF"/>
+                </a:solidFill>
+                <a:latin typeface="Microsoft JhengHei"/>
+                <a:ea typeface="Microsoft JhengHei"/>
+                <a:cs typeface="Microsoft JhengHei"/>
+              </a:rPr>
+              <a:t>其他</a:t>
+            </a:r>
+          </a:p>
+        </p:txBody>
+      </p:sp>
+      <p:sp>
+        <p:nvSpPr>
+          <p:cNvPr id="31" name="TextBox 30"/>
+          <p:cNvSpPr txBox="1"/>
+          <p:nvPr/>
+        </p:nvSpPr>
+        <p:spPr>
+          <a:xfrm>
+            <a:off x="6400800" y="4599432"/>
+            <a:ext cx="4937760" cy="640080"/>
+          </a:xfrm>
+          <a:prstGeom prst="rect">
+            <a:avLst/>
+          </a:prstGeom>
+          <a:noFill/>
+        </p:spPr>
+        <p:txBody>
+          <a:bodyPr wrap="square" anchor="t" lIns="0" rIns="0" tIns="0" bIns="0">
+            <a:spAutoFit/>
+          </a:bodyPr>
+          <a:lstStyle/>
+          <a:p>
+            <a:pPr algn="l">
+              <a:lnSpc>
+                <a:spcPts val="1500"/>
+              </a:lnSpc>
+            </a:pPr>
+            <a:r>
+              <a:rPr sz="1100" b="1">
+                <a:solidFill>
+                  <a:srgbClr val="5C6679"/>
+                </a:solidFill>
+                <a:latin typeface="Microsoft JhengHei"/>
+                <a:ea typeface="Microsoft JhengHei"/>
+                <a:cs typeface="Microsoft JhengHei"/>
+              </a:rPr>
+              <a:t>緣由　</a:t>
+            </a:r>
+            <a:r>
+              <a:rPr sz="1100" b="0">
+                <a:solidFill>
+                  <a:srgbClr val="1A2233"/>
+                </a:solidFill>
+                <a:latin typeface="Microsoft JhengHei"/>
+                <a:ea typeface="Microsoft JhengHei"/>
+                <a:cs typeface="Microsoft JhengHei"/>
+              </a:rPr>
+              <a:t>本公司網路資安事件說明</a:t>
+            </a:r>
+          </a:p>
+        </p:txBody>
+      </p:sp>
+      <p:sp>
+        <p:nvSpPr>
+          <p:cNvPr id="32" name="TextBox 31"/>
+          <p:cNvSpPr txBox="1"/>
+          <p:nvPr/>
+        </p:nvSpPr>
+        <p:spPr>
+          <a:xfrm>
+            <a:off x="6400800" y="5257800"/>
+            <a:ext cx="4937760" cy="713232"/>
+          </a:xfrm>
+          <a:prstGeom prst="rect">
+            <a:avLst/>
+          </a:prstGeom>
+          <a:noFill/>
+        </p:spPr>
+        <p:txBody>
+          <a:bodyPr wrap="square" anchor="t" lIns="0" rIns="0" tIns="0" bIns="0">
+            <a:spAutoFit/>
+          </a:bodyPr>
+          <a:lstStyle/>
+          <a:p>
+            <a:pPr algn="l">
+              <a:lnSpc>
+                <a:spcPts val="1500"/>
+              </a:lnSpc>
+            </a:pPr>
+            <a:r>
+              <a:rPr sz="1100" b="1">
+                <a:solidFill>
+                  <a:srgbClr val="5C6679"/>
+                </a:solidFill>
+                <a:latin typeface="Microsoft JhengHei"/>
+                <a:ea typeface="Microsoft JhengHei"/>
+                <a:cs typeface="Microsoft JhengHei"/>
+              </a:rPr>
+              <a:t>因應　</a:t>
+            </a:r>
+            <a:r>
+              <a:rPr sz="1100" b="0">
+                <a:solidFill>
+                  <a:srgbClr val="1A2233"/>
+                </a:solidFill>
+                <a:latin typeface="Microsoft JhengHei"/>
+                <a:ea typeface="Microsoft JhengHei"/>
+                <a:cs typeface="Microsoft JhengHei"/>
+              </a:rPr>
+              <a:t>本公司後續將持續提升網路與資訊基礎架構之安全管控，以確保資訊安全。</a:t>
+            </a:r>
+          </a:p>
+        </p:txBody>
+      </p:sp>
+    </p:spTree>
+  </p:cSld>
+  <p:clrMapOvr>
+    <a:masterClrMapping/>
+  </p:clrMapOvr>
+</p:sld>
+</file>
+
+<file path=ppt/slides/slide8.xml><?xml version="1.0" encoding="utf-8"?>
+<p:sld xmlns:a="http://schemas.openxmlformats.org/drawingml/2006/main" xmlns:p="http://schemas.openxmlformats.org/presentationml/2006/main" xmlns:r="http://schemas.openxmlformats.org/officeDocument/2006/relationships">
+  <p:cSld>
+    <p:spTree>
+      <p:nvGrpSpPr>
+        <p:cNvPr id="1" name=""/>
+        <p:cNvGrpSpPr/>
+        <p:nvPr/>
+      </p:nvGrpSpPr>
+      <p:grpSpPr/>
+      <p:sp>
+        <p:nvSpPr>
+          <p:cNvPr id="2" name="Rectangle 1"/>
+          <p:cNvSpPr/>
+          <p:nvPr/>
+        </p:nvSpPr>
+        <p:spPr>
+          <a:xfrm>
+            <a:off x="0" y="0"/>
+            <a:ext cx="12191695" cy="6858000"/>
+          </a:xfrm>
+          <a:prstGeom prst="rect">
+            <a:avLst/>
+          </a:prstGeom>
+          <a:solidFill>
+            <a:srgbClr val="F6F8FC"/>
+          </a:solidFill>
+          <a:ln>
+            <a:noFill/>
+          </a:ln>
+          <a:effectLst/>
+        </p:spPr>
+        <p:style>
+          <a:lnRef idx="1">
+            <a:schemeClr val="accent1"/>
+          </a:lnRef>
+          <a:fillRef idx="3">
+            <a:schemeClr val="accent1"/>
+          </a:fillRef>
+          <a:effectRef idx="2">
+            <a:schemeClr val="accent1"/>
+          </a:effectRef>
+          <a:fontRef idx="minor">
+            <a:schemeClr val="lt1"/>
+          </a:fontRef>
+        </p:style>
+        <p:txBody>
+          <a:bodyPr rtlCol="0" anchor="ctr"/>
+          <a:lstStyle/>
+          <a:p>
+            <a:pPr algn="ctr"/>
+          </a:p>
+        </p:txBody>
+      </p:sp>
+      <p:sp>
+        <p:nvSpPr>
+          <p:cNvPr id="3" name="TextBox 2"/>
+          <p:cNvSpPr txBox="1"/>
+          <p:nvPr/>
+        </p:nvSpPr>
+        <p:spPr>
+          <a:xfrm>
+            <a:off x="548640" y="365760"/>
+            <a:ext cx="9144000" cy="640080"/>
+          </a:xfrm>
+          <a:prstGeom prst="rect">
+            <a:avLst/>
+          </a:prstGeom>
+          <a:noFill/>
+        </p:spPr>
+        <p:txBody>
+          <a:bodyPr wrap="square" anchor="t" lIns="0" rIns="0" tIns="0" bIns="0">
+            <a:spAutoFit/>
+          </a:bodyPr>
+          <a:lstStyle/>
+          <a:p>
+            <a:pPr algn="l"/>
+            <a:r>
+              <a:rPr sz="3000" b="1">
+                <a:solidFill>
+                  <a:srgbClr val="1A2233"/>
+                </a:solidFill>
+                <a:latin typeface="Microsoft JhengHei"/>
+                <a:ea typeface="Microsoft JhengHei"/>
+                <a:cs typeface="Microsoft JhengHei"/>
+              </a:rPr>
+              <a:t>個案因應重點（3）</a:t>
+            </a:r>
+          </a:p>
+        </p:txBody>
+      </p:sp>
+      <p:sp>
+        <p:nvSpPr>
+          <p:cNvPr id="4" name="TextBox 3"/>
+          <p:cNvSpPr txBox="1"/>
+          <p:nvPr/>
+        </p:nvSpPr>
+        <p:spPr>
+          <a:xfrm>
+            <a:off x="566928" y="1005840"/>
+            <a:ext cx="10058400" cy="365760"/>
+          </a:xfrm>
+          <a:prstGeom prst="rect">
+            <a:avLst/>
+          </a:prstGeom>
+          <a:noFill/>
+        </p:spPr>
+        <p:txBody>
+          <a:bodyPr wrap="square" anchor="t" lIns="0" rIns="0" tIns="0" bIns="0">
+            <a:spAutoFit/>
+          </a:bodyPr>
+          <a:lstStyle/>
+          <a:p>
+            <a:pPr algn="l"/>
+            <a:r>
+              <a:rPr sz="1300" b="0">
+                <a:solidFill>
+                  <a:srgbClr val="5C6679"/>
+                </a:solidFill>
+                <a:latin typeface="Microsoft JhengHei"/>
+                <a:ea typeface="Microsoft JhengHei"/>
+                <a:cs typeface="Microsoft JhengHei"/>
+              </a:rPr>
+              <a:t>各公司公告之發生緣由與因應措施摘要</a:t>
+            </a:r>
+          </a:p>
+        </p:txBody>
+      </p:sp>
+      <p:sp>
+        <p:nvSpPr>
+          <p:cNvPr id="5" name="Rounded Rectangle 4"/>
+          <p:cNvSpPr/>
+          <p:nvPr/>
+        </p:nvSpPr>
+        <p:spPr>
+          <a:xfrm>
+            <a:off x="548640" y="1554480"/>
+            <a:ext cx="5394960" cy="2148840"/>
+          </a:xfrm>
+          <a:prstGeom prst="roundRect">
+            <a:avLst/>
+          </a:prstGeom>
+          <a:solidFill>
+            <a:srgbClr val="FFFFFF"/>
+          </a:solidFill>
+          <a:ln w="12700">
+            <a:solidFill>
+              <a:srgbClr val="DDE3EE"/>
+            </a:solidFill>
+          </a:ln>
+          <a:effectLst/>
+        </p:spPr>
+        <p:style>
+          <a:lnRef idx="1">
+            <a:schemeClr val="accent1"/>
+          </a:lnRef>
+          <a:fillRef idx="3">
+            <a:schemeClr val="accent1"/>
+          </a:fillRef>
+          <a:effectRef idx="2">
+            <a:schemeClr val="accent1"/>
+          </a:effectRef>
+          <a:fontRef idx="minor">
+            <a:schemeClr val="lt1"/>
+          </a:fontRef>
+        </p:style>
+        <p:txBody>
+          <a:bodyPr rtlCol="0" anchor="ctr"/>
+          <a:lstStyle/>
+          <a:p>
+            <a:pPr algn="ctr"/>
+          </a:p>
+        </p:txBody>
+      </p:sp>
+      <p:sp>
+        <p:nvSpPr>
+          <p:cNvPr id="6" name="Rectangle 5"/>
+          <p:cNvSpPr/>
+          <p:nvPr/>
+        </p:nvSpPr>
+        <p:spPr>
+          <a:xfrm>
+            <a:off x="548640" y="1554480"/>
+            <a:ext cx="5394960" cy="109728"/>
+          </a:xfrm>
+          <a:prstGeom prst="rect">
             <a:avLst/>
           </a:prstGeom>
           <a:solidFill>
@@ -11333,13 +11945,105 @@
       </p:sp>
       <p:sp>
         <p:nvSpPr>
-          <p:cNvPr id="30" name="TextBox 29"/>
+          <p:cNvPr id="7" name="TextBox 6"/>
           <p:cNvSpPr txBox="1"/>
           <p:nvPr/>
         </p:nvSpPr>
         <p:spPr>
           <a:xfrm>
-            <a:off x="10149840" y="4123944"/>
+            <a:off x="777240" y="1773936"/>
+            <a:ext cx="3657600" cy="365760"/>
+          </a:xfrm>
+          <a:prstGeom prst="rect">
+            <a:avLst/>
+          </a:prstGeom>
+          <a:noFill/>
+        </p:spPr>
+        <p:txBody>
+          <a:bodyPr wrap="square" anchor="ctr" lIns="0" rIns="0" tIns="0" bIns="0">
+            <a:spAutoFit/>
+          </a:bodyPr>
+          <a:lstStyle/>
+          <a:p>
+            <a:pPr algn="l"/>
+            <a:r>
+              <a:rPr sz="1600" b="1">
+                <a:solidFill>
+                  <a:srgbClr val="1A2233"/>
+                </a:solidFill>
+                <a:latin typeface="Microsoft JhengHei"/>
+                <a:ea typeface="Microsoft JhengHei"/>
+                <a:cs typeface="Microsoft JhengHei"/>
+              </a:rPr>
+              <a:t>松上 </a:t>
+            </a:r>
+            <a:r>
+              <a:rPr sz="1300" b="0">
+                <a:solidFill>
+                  <a:srgbClr val="5C6679"/>
+                </a:solidFill>
+                <a:latin typeface="Microsoft JhengHei"/>
+                <a:ea typeface="Microsoft JhengHei"/>
+                <a:cs typeface="Microsoft JhengHei"/>
+              </a:rPr>
+              <a:t>6156</a:t>
+            </a:r>
+          </a:p>
+        </p:txBody>
+      </p:sp>
+      <p:sp>
+        <p:nvSpPr>
+          <p:cNvPr id="8" name="Rounded Rectangle 7"/>
+          <p:cNvSpPr/>
+          <p:nvPr/>
+        </p:nvSpPr>
+        <p:spPr>
+          <a:xfrm>
+            <a:off x="4526280" y="1792224"/>
+            <a:ext cx="1234440" cy="347472"/>
+          </a:xfrm>
+          <a:prstGeom prst="roundRect">
+            <a:avLst/>
+          </a:prstGeom>
+          <a:solidFill>
+            <a:srgbClr val="E63946"/>
+          </a:solidFill>
+          <a:ln>
+            <a:noFill/>
+          </a:ln>
+          <a:effectLst/>
+        </p:spPr>
+        <p:style>
+          <a:lnRef idx="1">
+            <a:schemeClr val="accent1"/>
+          </a:lnRef>
+          <a:fillRef idx="3">
+            <a:schemeClr val="accent1"/>
+          </a:fillRef>
+          <a:effectRef idx="2">
+            <a:schemeClr val="accent1"/>
+          </a:effectRef>
+          <a:fontRef idx="minor">
+            <a:schemeClr val="lt1"/>
+          </a:fontRef>
+        </p:style>
+        <p:txBody>
+          <a:bodyPr rtlCol="0" anchor="ctr"/>
+          <a:lstStyle/>
+          <a:p>
+            <a:pPr algn="ctr"/>
+          </a:p>
+        </p:txBody>
+      </p:sp>
+      <p:sp>
+        <p:nvSpPr>
+          <p:cNvPr id="9" name="TextBox 8"/>
+          <p:cNvSpPr txBox="1"/>
+          <p:nvPr/>
+        </p:nvSpPr>
+        <p:spPr>
+          <a:xfrm>
+            <a:off x="4526280" y="1792224"/>
             <a:ext cx="1234440" cy="347472"/>
           </a:xfrm>
           <a:prstGeom prst="rect">
@@ -11370,13 +12074,13 @@
       </p:sp>
       <p:sp>
         <p:nvSpPr>
-          <p:cNvPr id="31" name="TextBox 30"/>
+          <p:cNvPr id="10" name="TextBox 9"/>
           <p:cNvSpPr txBox="1"/>
           <p:nvPr/>
         </p:nvSpPr>
         <p:spPr>
           <a:xfrm>
-            <a:off x="6400800" y="4599432"/>
+            <a:off x="777240" y="2267712"/>
             <a:ext cx="4937760" cy="640080"/>
           </a:xfrm>
           <a:prstGeom prst="rect">
@@ -11422,13 +12126,13 @@
       </p:sp>
       <p:sp>
         <p:nvSpPr>
-          <p:cNvPr id="32" name="TextBox 31"/>
+          <p:cNvPr id="11" name="TextBox 10"/>
           <p:cNvSpPr txBox="1"/>
           <p:nvPr/>
         </p:nvSpPr>
         <p:spPr>
           <a:xfrm>
-            <a:off x="6400800" y="5257800"/>
+            <a:off x="777240" y="2926080"/>
             <a:ext cx="4937760" cy="713232"/>
           </a:xfrm>
           <a:prstGeom prst="rect">

--- a/資安事件因應分析.pptx
+++ b/資安事件因應分析.pptx
@@ -150,12 +150,20 @@
             <c:idx val="1"/>
             <c:spPr>
               <a:solidFill>
+                <a:srgbClr val="F4A261"/>
+              </a:solidFill>
+            </c:spPr>
+          </c:dPt>
+          <c:dPt>
+            <c:idx val="2"/>
+            <c:spPr>
+              <a:solidFill>
                 <a:srgbClr val="27A6C4"/>
               </a:solidFill>
             </c:spPr>
           </c:dPt>
           <c:dPt>
-            <c:idx val="2"/>
+            <c:idx val="3"/>
             <c:spPr>
               <a:solidFill>
                 <a:srgbClr val="5C6679"/>
@@ -164,16 +172,19 @@
           </c:dPt>
           <c:cat>
             <c:strRef>
-              <c:f>Sheet1!$A$2:$A$4</c:f>
+              <c:f>Sheet1!$A$2:$A$5</c:f>
               <c:strCache>
-                <c:ptCount val="3"/>
+                <c:ptCount val="4"/>
                 <c:pt idx="0">
                   <c:v>駭客攻擊</c:v>
                 </c:pt>
                 <c:pt idx="1">
+                  <c:v>勒索病毒/加密</c:v>
+                </c:pt>
+                <c:pt idx="2">
                   <c:v>個資外洩</c:v>
                 </c:pt>
-                <c:pt idx="2">
+                <c:pt idx="3">
                   <c:v>其他</c:v>
                 </c:pt>
               </c:strCache>
@@ -181,17 +192,20 @@
           </c:cat>
           <c:val>
             <c:numRef>
-              <c:f>Sheet1!$B$2:$B$4</c:f>
+              <c:f>Sheet1!$B$2:$B$5</c:f>
               <c:numCache>
                 <c:formatCode>General</c:formatCode>
-                <c:ptCount val="3"/>
+                <c:ptCount val="4"/>
                 <c:pt idx="0">
-                  <c:v>6</c:v>
+                  <c:v>7</c:v>
                 </c:pt>
                 <c:pt idx="1">
                   <c:v>1</c:v>
                 </c:pt>
                 <c:pt idx="2">
+                  <c:v>1</c:v>
+                </c:pt>
+                <c:pt idx="3">
                   <c:v>2</c:v>
                 </c:pt>
               </c:numCache>
@@ -3529,7 +3543,7 @@
                 <a:ea typeface="Microsoft JhengHei"/>
                 <a:cs typeface="Microsoft JhengHei"/>
               </a:rPr>
-              <a:t>資料期間 2026-07-11 ~ 2026-08-11　｜　MOPS 重大訊息全文檢索　｜　9 家公司</a:t>
+              <a:t>資料期間 2026-07-12 ~ 2026-08-12　｜　MOPS 重大訊息全文檢索　｜　11 家公司</a:t>
             </a:r>
           </a:p>
         </p:txBody>
@@ -3746,7 +3760,7 @@
                 <a:ea typeface="Microsoft JhengHei"/>
                 <a:cs typeface="Microsoft JhengHei"/>
               </a:rPr>
-              <a:t>資料期間內 MOPS 揭露之 9 起資安相關重大訊息</a:t>
+              <a:t>資料期間內 MOPS 揭露之 11 起資安相關重大訊息</a:t>
             </a:r>
           </a:p>
         </p:txBody>
@@ -3829,7 +3843,7 @@
                 <a:ea typeface="Microsoft JhengHei"/>
                 <a:cs typeface="Microsoft JhengHei"/>
               </a:rPr>
-              <a:t>9</a:t>
+              <a:t>11</a:t>
             </a:r>
           </a:p>
         </p:txBody>
@@ -3949,7 +3963,7 @@
                 <a:ea typeface="Microsoft JhengHei"/>
                 <a:cs typeface="Microsoft JhengHei"/>
               </a:rPr>
-              <a:t>3</a:t>
+              <a:t>4</a:t>
             </a:r>
           </a:p>
         </p:txBody>
@@ -4136,7 +4150,7 @@
                 <a:gridCol w="2286000"/>
                 <a:gridCol w="5120640"/>
               </a:tblGrid>
-              <a:tr h="356616">
+              <a:tr h="297180">
                 <a:tc>
                   <a:txBody>
                     <a:bodyPr/>
@@ -4258,7 +4272,251 @@
                   </a:tcPr>
                 </a:tc>
               </a:tr>
-              <a:tr h="356616">
+              <a:tr h="297180">
+                <a:tc>
+                  <a:txBody>
+                    <a:bodyPr/>
+                    <a:lstStyle/>
+                    <a:p>
+                      <a:r>
+                        <a:rPr sz="1150" b="0">
+                          <a:solidFill>
+                            <a:srgbClr val="1A2233"/>
+                          </a:solidFill>
+                          <a:latin typeface="Microsoft JhengHei"/>
+                          <a:ea typeface="Microsoft JhengHei"/>
+                          <a:cs typeface="Microsoft JhengHei"/>
+                        </a:rPr>
+                        <a:t>久裕</a:t>
+                      </a:r>
+                    </a:p>
+                  </a:txBody>
+                  <a:tcPr anchor="ctr" marL="73152" marT="9144" marB="9144">
+                    <a:solidFill>
+                      <a:srgbClr val="FFFFFF"/>
+                    </a:solidFill>
+                  </a:tcPr>
+                </a:tc>
+                <a:tc>
+                  <a:txBody>
+                    <a:bodyPr/>
+                    <a:lstStyle/>
+                    <a:p>
+                      <a:r>
+                        <a:rPr sz="1150" b="0">
+                          <a:solidFill>
+                            <a:srgbClr val="1A2233"/>
+                          </a:solidFill>
+                          <a:latin typeface="Microsoft JhengHei"/>
+                          <a:ea typeface="Microsoft JhengHei"/>
+                          <a:cs typeface="Microsoft JhengHei"/>
+                        </a:rPr>
+                        <a:t>4173</a:t>
+                      </a:r>
+                    </a:p>
+                  </a:txBody>
+                  <a:tcPr anchor="ctr" marL="73152" marT="9144" marB="9144">
+                    <a:solidFill>
+                      <a:srgbClr val="FFFFFF"/>
+                    </a:solidFill>
+                  </a:tcPr>
+                </a:tc>
+                <a:tc>
+                  <a:txBody>
+                    <a:bodyPr/>
+                    <a:lstStyle/>
+                    <a:p>
+                      <a:r>
+                        <a:rPr sz="1150" b="0">
+                          <a:solidFill>
+                            <a:srgbClr val="1A2233"/>
+                          </a:solidFill>
+                          <a:latin typeface="Microsoft JhengHei"/>
+                          <a:ea typeface="Microsoft JhengHei"/>
+                          <a:cs typeface="Microsoft JhengHei"/>
+                        </a:rPr>
+                        <a:t>08/11</a:t>
+                      </a:r>
+                    </a:p>
+                  </a:txBody>
+                  <a:tcPr anchor="ctr" marL="73152" marT="9144" marB="9144">
+                    <a:solidFill>
+                      <a:srgbClr val="FFFFFF"/>
+                    </a:solidFill>
+                  </a:tcPr>
+                </a:tc>
+                <a:tc>
+                  <a:txBody>
+                    <a:bodyPr/>
+                    <a:lstStyle/>
+                    <a:p>
+                      <a:r>
+                        <a:rPr sz="1150" b="1">
+                          <a:solidFill>
+                            <a:srgbClr val="F4A261"/>
+                          </a:solidFill>
+                          <a:latin typeface="Microsoft JhengHei"/>
+                          <a:ea typeface="Microsoft JhengHei"/>
+                          <a:cs typeface="Microsoft JhengHei"/>
+                        </a:rPr>
+                        <a:t>勒索病毒/加密</a:t>
+                      </a:r>
+                    </a:p>
+                  </a:txBody>
+                  <a:tcPr anchor="ctr" marL="73152" marT="9144" marB="9144">
+                    <a:solidFill>
+                      <a:srgbClr val="FFFFFF"/>
+                    </a:solidFill>
+                  </a:tcPr>
+                </a:tc>
+                <a:tc>
+                  <a:txBody>
+                    <a:bodyPr/>
+                    <a:lstStyle/>
+                    <a:p>
+                      <a:r>
+                        <a:rPr sz="1150" b="0">
+                          <a:solidFill>
+                            <a:srgbClr val="1A2233"/>
+                          </a:solidFill>
+                          <a:latin typeface="Microsoft JhengHei"/>
+                          <a:ea typeface="Microsoft JhengHei"/>
+                          <a:cs typeface="Microsoft JhengHei"/>
+                        </a:rPr>
+                        <a:t>尚在評估中，依目前評估對公司營運無重大影響。</a:t>
+                      </a:r>
+                    </a:p>
+                  </a:txBody>
+                  <a:tcPr anchor="ctr" marL="73152" marT="9144" marB="9144">
+                    <a:solidFill>
+                      <a:srgbClr val="FFFFFF"/>
+                    </a:solidFill>
+                  </a:tcPr>
+                </a:tc>
+              </a:tr>
+              <a:tr h="297180">
+                <a:tc>
+                  <a:txBody>
+                    <a:bodyPr/>
+                    <a:lstStyle/>
+                    <a:p>
+                      <a:r>
+                        <a:rPr sz="1150" b="0">
+                          <a:solidFill>
+                            <a:srgbClr val="1A2233"/>
+                          </a:solidFill>
+                          <a:latin typeface="Microsoft JhengHei"/>
+                          <a:ea typeface="Microsoft JhengHei"/>
+                          <a:cs typeface="Microsoft JhengHei"/>
+                        </a:rPr>
+                        <a:t>正瀚-創</a:t>
+                      </a:r>
+                    </a:p>
+                  </a:txBody>
+                  <a:tcPr anchor="ctr" marL="73152" marT="9144" marB="9144">
+                    <a:solidFill>
+                      <a:srgbClr val="EEF2F9"/>
+                    </a:solidFill>
+                  </a:tcPr>
+                </a:tc>
+                <a:tc>
+                  <a:txBody>
+                    <a:bodyPr/>
+                    <a:lstStyle/>
+                    <a:p>
+                      <a:r>
+                        <a:rPr sz="1150" b="0">
+                          <a:solidFill>
+                            <a:srgbClr val="1A2233"/>
+                          </a:solidFill>
+                          <a:latin typeface="Microsoft JhengHei"/>
+                          <a:ea typeface="Microsoft JhengHei"/>
+                          <a:cs typeface="Microsoft JhengHei"/>
+                        </a:rPr>
+                        <a:t>6534</a:t>
+                      </a:r>
+                    </a:p>
+                  </a:txBody>
+                  <a:tcPr anchor="ctr" marL="73152" marT="9144" marB="9144">
+                    <a:solidFill>
+                      <a:srgbClr val="EEF2F9"/>
+                    </a:solidFill>
+                  </a:tcPr>
+                </a:tc>
+                <a:tc>
+                  <a:txBody>
+                    <a:bodyPr/>
+                    <a:lstStyle/>
+                    <a:p>
+                      <a:r>
+                        <a:rPr sz="1150" b="0">
+                          <a:solidFill>
+                            <a:srgbClr val="1A2233"/>
+                          </a:solidFill>
+                          <a:latin typeface="Microsoft JhengHei"/>
+                          <a:ea typeface="Microsoft JhengHei"/>
+                          <a:cs typeface="Microsoft JhengHei"/>
+                        </a:rPr>
+                        <a:t>08/11</a:t>
+                      </a:r>
+                    </a:p>
+                  </a:txBody>
+                  <a:tcPr anchor="ctr" marL="73152" marT="9144" marB="9144">
+                    <a:solidFill>
+                      <a:srgbClr val="EEF2F9"/>
+                    </a:solidFill>
+                  </a:tcPr>
+                </a:tc>
+                <a:tc>
+                  <a:txBody>
+                    <a:bodyPr/>
+                    <a:lstStyle/>
+                    <a:p>
+                      <a:r>
+                        <a:rPr sz="1150" b="1">
+                          <a:solidFill>
+                            <a:srgbClr val="E63946"/>
+                          </a:solidFill>
+                          <a:latin typeface="Microsoft JhengHei"/>
+                          <a:ea typeface="Microsoft JhengHei"/>
+                          <a:cs typeface="Microsoft JhengHei"/>
+                        </a:rPr>
+                        <a:t>駭客攻擊</a:t>
+                      </a:r>
+                    </a:p>
+                  </a:txBody>
+                  <a:tcPr anchor="ctr" marL="73152" marT="9144" marB="9144">
+                    <a:solidFill>
+                      <a:srgbClr val="EEF2F9"/>
+                    </a:solidFill>
+                  </a:tcPr>
+                </a:tc>
+                <a:tc>
+                  <a:txBody>
+                    <a:bodyPr/>
+                    <a:lstStyle/>
+                    <a:p>
+                      <a:r>
+                        <a:rPr sz="1150" b="0">
+                          <a:solidFill>
+                            <a:srgbClr val="1A2233"/>
+                          </a:solidFill>
+                          <a:latin typeface="Microsoft JhengHei"/>
+                          <a:ea typeface="Microsoft JhengHei"/>
+                          <a:cs typeface="Microsoft JhengHei"/>
+                        </a:rPr>
+                        <a:t>本公司目前正積極會同技術專家協助調查，初步評估對公司營運無重大影響。</a:t>
+                      </a:r>
+                    </a:p>
+                  </a:txBody>
+                  <a:tcPr anchor="ctr" marL="73152" marT="9144" marB="9144">
+                    <a:solidFill>
+                      <a:srgbClr val="EEF2F9"/>
+                    </a:solidFill>
+                  </a:tcPr>
+                </a:tc>
+              </a:tr>
+              <a:tr h="297180">
                 <a:tc>
                   <a:txBody>
                     <a:bodyPr/>
@@ -4380,7 +4638,7 @@
                   </a:tcPr>
                 </a:tc>
               </a:tr>
-              <a:tr h="356616">
+              <a:tr h="297180">
                 <a:tc>
                   <a:txBody>
                     <a:bodyPr/>
@@ -4502,7 +4760,7 @@
                   </a:tcPr>
                 </a:tc>
               </a:tr>
-              <a:tr h="356616">
+              <a:tr h="297180">
                 <a:tc>
                   <a:txBody>
                     <a:bodyPr/>
@@ -4624,7 +4882,7 @@
                   </a:tcPr>
                 </a:tc>
               </a:tr>
-              <a:tr h="356616">
+              <a:tr h="297180">
                 <a:tc>
                   <a:txBody>
                     <a:bodyPr/>
@@ -4746,7 +5004,7 @@
                   </a:tcPr>
                 </a:tc>
               </a:tr>
-              <a:tr h="356616">
+              <a:tr h="297180">
                 <a:tc>
                   <a:txBody>
                     <a:bodyPr/>
@@ -4868,7 +5126,7 @@
                   </a:tcPr>
                 </a:tc>
               </a:tr>
-              <a:tr h="356616">
+              <a:tr h="297180">
                 <a:tc>
                   <a:txBody>
                     <a:bodyPr/>
@@ -4990,7 +5248,7 @@
                   </a:tcPr>
                 </a:tc>
               </a:tr>
-              <a:tr h="356616">
+              <a:tr h="297180">
                 <a:tc>
                   <a:txBody>
                     <a:bodyPr/>
@@ -5112,7 +5370,7 @@
                   </a:tcPr>
                 </a:tc>
               </a:tr>
-              <a:tr h="356616">
+              <a:tr h="297180">
                 <a:tc>
                   <a:txBody>
                     <a:bodyPr/>
@@ -5234,7 +5492,7 @@
                   </a:tcPr>
                 </a:tc>
               </a:tr>
-              <a:tr h="356616">
+              <a:tr h="297180">
                 <a:tc>
                   <a:txBody>
                     <a:bodyPr/>
@@ -5673,7 +5931,7 @@
                 <a:ea typeface="Microsoft JhengHei"/>
                 <a:cs typeface="Microsoft JhengHei"/>
               </a:rPr>
-              <a:t>6 起</a:t>
+              <a:t>7 起</a:t>
             </a:r>
           </a:p>
         </p:txBody>
@@ -5710,7 +5968,7 @@
                 <a:ea typeface="Microsoft JhengHei"/>
                 <a:cs typeface="Microsoft JhengHei"/>
               </a:rPr>
-              <a:t>久裕、逸達、州巧、藥華藥、上銀、松上</a:t>
+              <a:t>正瀚-創、久裕、逸達、州巧、藥華藥、上銀、松上</a:t>
             </a:r>
           </a:p>
         </p:txBody>
@@ -5813,7 +6071,7 @@
             <a:avLst/>
           </a:prstGeom>
           <a:solidFill>
-            <a:srgbClr val="27A6C4"/>
+            <a:srgbClr val="F4A261"/>
           </a:solidFill>
           <a:ln>
             <a:noFill/>
@@ -5874,7 +6132,7 @@
                 <a:ea typeface="Microsoft JhengHei"/>
                 <a:cs typeface="Microsoft JhengHei"/>
               </a:rPr>
-              <a:t>個資外洩</a:t>
+              <a:t>勒索病毒/加密</a:t>
             </a:r>
           </a:p>
         </p:txBody>
@@ -5905,7 +6163,7 @@
             <a:r>
               <a:rPr sz="1800" b="1">
                 <a:solidFill>
-                  <a:srgbClr val="27A6C4"/>
+                  <a:srgbClr val="F4A261"/>
                 </a:solidFill>
                 <a:latin typeface="Microsoft JhengHei"/>
                 <a:ea typeface="Microsoft JhengHei"/>
@@ -5948,7 +6206,7 @@
                 <a:ea typeface="Microsoft JhengHei"/>
                 <a:cs typeface="Microsoft JhengHei"/>
               </a:rPr>
-              <a:t>萬達寵物</a:t>
+              <a:t>久裕</a:t>
             </a:r>
           </a:p>
         </p:txBody>
@@ -5985,7 +6243,7 @@
                 <a:ea typeface="Microsoft JhengHei"/>
                 <a:cs typeface="Microsoft JhengHei"/>
               </a:rPr>
-              <a:t>源自開發流程或委外廠商，須通報並通知當事人</a:t>
+              <a:t>伺服器資料遭加密，須系統隔離與資料復原</a:t>
             </a:r>
           </a:p>
         </p:txBody>
@@ -6051,6 +6309,244 @@
             <a:avLst/>
           </a:prstGeom>
           <a:solidFill>
+            <a:srgbClr val="27A6C4"/>
+          </a:solidFill>
+          <a:ln>
+            <a:noFill/>
+          </a:ln>
+          <a:effectLst/>
+        </p:spPr>
+        <p:style>
+          <a:lnRef idx="1">
+            <a:schemeClr val="accent1"/>
+          </a:lnRef>
+          <a:fillRef idx="3">
+            <a:schemeClr val="accent1"/>
+          </a:fillRef>
+          <a:effectRef idx="2">
+            <a:schemeClr val="accent1"/>
+          </a:effectRef>
+          <a:fontRef idx="minor">
+            <a:schemeClr val="lt1"/>
+          </a:fontRef>
+        </p:style>
+        <p:txBody>
+          <a:bodyPr rtlCol="0" anchor="ctr"/>
+          <a:lstStyle/>
+          <a:p>
+            <a:pPr algn="ctr"/>
+          </a:p>
+        </p:txBody>
+      </p:sp>
+      <p:sp>
+        <p:nvSpPr>
+          <p:cNvPr id="20" name="TextBox 19"/>
+          <p:cNvSpPr txBox="1"/>
+          <p:nvPr/>
+        </p:nvSpPr>
+        <p:spPr>
+          <a:xfrm>
+            <a:off x="5897880" y="4453128"/>
+            <a:ext cx="4206240" cy="365760"/>
+          </a:xfrm>
+          <a:prstGeom prst="rect">
+            <a:avLst/>
+          </a:prstGeom>
+          <a:noFill/>
+        </p:spPr>
+        <p:txBody>
+          <a:bodyPr wrap="square" anchor="ctr" lIns="0" rIns="0" tIns="0" bIns="0">
+            <a:spAutoFit/>
+          </a:bodyPr>
+          <a:lstStyle/>
+          <a:p>
+            <a:pPr algn="l"/>
+            <a:r>
+              <a:rPr sz="1600" b="1">
+                <a:solidFill>
+                  <a:srgbClr val="1A2233"/>
+                </a:solidFill>
+                <a:latin typeface="Microsoft JhengHei"/>
+                <a:ea typeface="Microsoft JhengHei"/>
+                <a:cs typeface="Microsoft JhengHei"/>
+              </a:rPr>
+              <a:t>個資外洩</a:t>
+            </a:r>
+          </a:p>
+        </p:txBody>
+      </p:sp>
+      <p:sp>
+        <p:nvSpPr>
+          <p:cNvPr id="21" name="TextBox 20"/>
+          <p:cNvSpPr txBox="1"/>
+          <p:nvPr/>
+        </p:nvSpPr>
+        <p:spPr>
+          <a:xfrm>
+            <a:off x="10058400" y="4453128"/>
+            <a:ext cx="1463040" cy="365760"/>
+          </a:xfrm>
+          <a:prstGeom prst="rect">
+            <a:avLst/>
+          </a:prstGeom>
+          <a:noFill/>
+        </p:spPr>
+        <p:txBody>
+          <a:bodyPr wrap="square" anchor="ctr" lIns="0" rIns="0" tIns="0" bIns="0">
+            <a:spAutoFit/>
+          </a:bodyPr>
+          <a:lstStyle/>
+          <a:p>
+            <a:pPr algn="r"/>
+            <a:r>
+              <a:rPr sz="1800" b="1">
+                <a:solidFill>
+                  <a:srgbClr val="27A6C4"/>
+                </a:solidFill>
+                <a:latin typeface="Microsoft JhengHei"/>
+                <a:ea typeface="Microsoft JhengHei"/>
+                <a:cs typeface="Microsoft JhengHei"/>
+              </a:rPr>
+              <a:t>1 起</a:t>
+            </a:r>
+          </a:p>
+        </p:txBody>
+      </p:sp>
+      <p:sp>
+        <p:nvSpPr>
+          <p:cNvPr id="22" name="TextBox 21"/>
+          <p:cNvSpPr txBox="1"/>
+          <p:nvPr/>
+        </p:nvSpPr>
+        <p:spPr>
+          <a:xfrm>
+            <a:off x="5897880" y="4846320"/>
+            <a:ext cx="5577840" cy="274320"/>
+          </a:xfrm>
+          <a:prstGeom prst="rect">
+            <a:avLst/>
+          </a:prstGeom>
+          <a:noFill/>
+        </p:spPr>
+        <p:txBody>
+          <a:bodyPr wrap="square" anchor="t" lIns="0" rIns="0" tIns="0" bIns="0">
+            <a:spAutoFit/>
+          </a:bodyPr>
+          <a:lstStyle/>
+          <a:p>
+            <a:pPr algn="l"/>
+            <a:r>
+              <a:rPr sz="1150" b="1">
+                <a:solidFill>
+                  <a:srgbClr val="1A2233"/>
+                </a:solidFill>
+                <a:latin typeface="Microsoft JhengHei"/>
+                <a:ea typeface="Microsoft JhengHei"/>
+                <a:cs typeface="Microsoft JhengHei"/>
+              </a:rPr>
+              <a:t>萬達寵物</a:t>
+            </a:r>
+          </a:p>
+        </p:txBody>
+      </p:sp>
+      <p:sp>
+        <p:nvSpPr>
+          <p:cNvPr id="23" name="TextBox 22"/>
+          <p:cNvSpPr txBox="1"/>
+          <p:nvPr/>
+        </p:nvSpPr>
+        <p:spPr>
+          <a:xfrm>
+            <a:off x="5897880" y="5111496"/>
+            <a:ext cx="5669280" cy="329184"/>
+          </a:xfrm>
+          <a:prstGeom prst="rect">
+            <a:avLst/>
+          </a:prstGeom>
+          <a:noFill/>
+        </p:spPr>
+        <p:txBody>
+          <a:bodyPr wrap="square" anchor="t" lIns="0" rIns="0" tIns="0" bIns="0">
+            <a:spAutoFit/>
+          </a:bodyPr>
+          <a:lstStyle/>
+          <a:p>
+            <a:pPr algn="l"/>
+            <a:r>
+              <a:rPr sz="1100" b="0">
+                <a:solidFill>
+                  <a:srgbClr val="5C6679"/>
+                </a:solidFill>
+                <a:latin typeface="Microsoft JhengHei"/>
+                <a:ea typeface="Microsoft JhengHei"/>
+                <a:cs typeface="Microsoft JhengHei"/>
+              </a:rPr>
+              <a:t>源自開發流程或委外廠商，須通報並通知當事人</a:t>
+            </a:r>
+          </a:p>
+        </p:txBody>
+      </p:sp>
+      <p:sp>
+        <p:nvSpPr>
+          <p:cNvPr id="24" name="Rounded Rectangle 23"/>
+          <p:cNvSpPr/>
+          <p:nvPr/>
+        </p:nvSpPr>
+        <p:spPr>
+          <a:xfrm>
+            <a:off x="5669280" y="5669279"/>
+            <a:ext cx="6035040" cy="1170432"/>
+          </a:xfrm>
+          <a:prstGeom prst="roundRect">
+            <a:avLst/>
+          </a:prstGeom>
+          <a:solidFill>
+            <a:srgbClr val="FFFFFF"/>
+          </a:solidFill>
+          <a:ln w="12700">
+            <a:solidFill>
+              <a:srgbClr val="DDE3EE"/>
+            </a:solidFill>
+          </a:ln>
+          <a:effectLst/>
+        </p:spPr>
+        <p:style>
+          <a:lnRef idx="1">
+            <a:schemeClr val="accent1"/>
+          </a:lnRef>
+          <a:fillRef idx="3">
+            <a:schemeClr val="accent1"/>
+          </a:fillRef>
+          <a:effectRef idx="2">
+            <a:schemeClr val="accent1"/>
+          </a:effectRef>
+          <a:fontRef idx="minor">
+            <a:schemeClr val="lt1"/>
+          </a:fontRef>
+        </p:style>
+        <p:txBody>
+          <a:bodyPr rtlCol="0" anchor="ctr"/>
+          <a:lstStyle/>
+          <a:p>
+            <a:pPr algn="ctr"/>
+          </a:p>
+        </p:txBody>
+      </p:sp>
+      <p:sp>
+        <p:nvSpPr>
+          <p:cNvPr id="25" name="Rectangle 24"/>
+          <p:cNvSpPr/>
+          <p:nvPr/>
+        </p:nvSpPr>
+        <p:spPr>
+          <a:xfrm>
+            <a:off x="5669280" y="5669279"/>
+            <a:ext cx="109728" cy="1170432"/>
+          </a:xfrm>
+          <a:prstGeom prst="rect">
+            <a:avLst/>
+          </a:prstGeom>
+          <a:solidFill>
             <a:srgbClr val="5C6679"/>
           </a:solidFill>
           <a:ln>
@@ -6082,13 +6578,13 @@
       </p:sp>
       <p:sp>
         <p:nvSpPr>
-          <p:cNvPr id="20" name="TextBox 19"/>
+          <p:cNvPr id="26" name="TextBox 25"/>
           <p:cNvSpPr txBox="1"/>
           <p:nvPr/>
         </p:nvSpPr>
         <p:spPr>
           <a:xfrm>
-            <a:off x="5897880" y="4453128"/>
+            <a:off x="5897880" y="5779007"/>
             <a:ext cx="4206240" cy="365760"/>
           </a:xfrm>
           <a:prstGeom prst="rect">
@@ -6119,13 +6615,13 @@
       </p:sp>
       <p:sp>
         <p:nvSpPr>
-          <p:cNvPr id="21" name="TextBox 20"/>
+          <p:cNvPr id="27" name="TextBox 26"/>
           <p:cNvSpPr txBox="1"/>
           <p:nvPr/>
         </p:nvSpPr>
         <p:spPr>
           <a:xfrm>
-            <a:off x="10058400" y="4453128"/>
+            <a:off x="10058400" y="5779007"/>
             <a:ext cx="1463040" cy="365760"/>
           </a:xfrm>
           <a:prstGeom prst="rect">
@@ -6156,13 +6652,13 @@
       </p:sp>
       <p:sp>
         <p:nvSpPr>
-          <p:cNvPr id="22" name="TextBox 21"/>
+          <p:cNvPr id="28" name="TextBox 27"/>
           <p:cNvSpPr txBox="1"/>
           <p:nvPr/>
         </p:nvSpPr>
         <p:spPr>
           <a:xfrm>
-            <a:off x="5897880" y="4846320"/>
+            <a:off x="5897880" y="6172199"/>
             <a:ext cx="5577840" cy="274320"/>
           </a:xfrm>
           <a:prstGeom prst="rect">
@@ -6193,13 +6689,13 @@
       </p:sp>
       <p:sp>
         <p:nvSpPr>
-          <p:cNvPr id="23" name="TextBox 22"/>
+          <p:cNvPr id="29" name="TextBox 28"/>
           <p:cNvSpPr txBox="1"/>
           <p:nvPr/>
         </p:nvSpPr>
         <p:spPr>
           <a:xfrm>
-            <a:off x="5897880" y="5111496"/>
+            <a:off x="5897880" y="6437375"/>
             <a:ext cx="5669280" cy="329184"/>
           </a:xfrm>
           <a:prstGeom prst="rect">
@@ -6389,7 +6885,7 @@
                 <a:gridCol w="3383280"/>
                 <a:gridCol w="2606040"/>
               </a:tblGrid>
-              <a:tr h="448056">
+              <a:tr h="373380">
                 <a:tc>
                   <a:txBody>
                     <a:bodyPr/>
@@ -6511,7 +7007,251 @@
                   </a:tcPr>
                 </a:tc>
               </a:tr>
-              <a:tr h="448056">
+              <a:tr h="373380">
+                <a:tc>
+                  <a:txBody>
+                    <a:bodyPr/>
+                    <a:lstStyle/>
+                    <a:p>
+                      <a:r>
+                        <a:rPr sz="1150" b="0">
+                          <a:solidFill>
+                            <a:srgbClr val="1A2233"/>
+                          </a:solidFill>
+                          <a:latin typeface="Microsoft JhengHei"/>
+                          <a:ea typeface="Microsoft JhengHei"/>
+                          <a:cs typeface="Microsoft JhengHei"/>
+                        </a:rPr>
+                        <a:t>久裕</a:t>
+                      </a:r>
+                    </a:p>
+                  </a:txBody>
+                  <a:tcPr anchor="ctr" marL="73152" marT="9144" marB="9144">
+                    <a:solidFill>
+                      <a:srgbClr val="FFFFFF"/>
+                    </a:solidFill>
+                  </a:tcPr>
+                </a:tc>
+                <a:tc>
+                  <a:txBody>
+                    <a:bodyPr/>
+                    <a:lstStyle/>
+                    <a:p>
+                      <a:r>
+                        <a:rPr sz="1150" b="0">
+                          <a:solidFill>
+                            <a:srgbClr val="1A2233"/>
+                          </a:solidFill>
+                          <a:latin typeface="Microsoft JhengHei"/>
+                          <a:ea typeface="Microsoft JhengHei"/>
+                          <a:cs typeface="Microsoft JhengHei"/>
+                        </a:rPr>
+                        <a:t>4173</a:t>
+                      </a:r>
+                    </a:p>
+                  </a:txBody>
+                  <a:tcPr anchor="ctr" marL="73152" marT="9144" marB="9144">
+                    <a:solidFill>
+                      <a:srgbClr val="FFFFFF"/>
+                    </a:solidFill>
+                  </a:tcPr>
+                </a:tc>
+                <a:tc>
+                  <a:txBody>
+                    <a:bodyPr/>
+                    <a:lstStyle/>
+                    <a:p>
+                      <a:r>
+                        <a:rPr sz="1150" b="1">
+                          <a:solidFill>
+                            <a:srgbClr val="F4A261"/>
+                          </a:solidFill>
+                          <a:latin typeface="Microsoft JhengHei"/>
+                          <a:ea typeface="Microsoft JhengHei"/>
+                          <a:cs typeface="Microsoft JhengHei"/>
+                        </a:rPr>
+                        <a:t>勒索病毒/加密</a:t>
+                      </a:r>
+                    </a:p>
+                  </a:txBody>
+                  <a:tcPr anchor="ctr" marL="73152" marT="9144" marB="9144">
+                    <a:solidFill>
+                      <a:srgbClr val="FFFFFF"/>
+                    </a:solidFill>
+                  </a:tcPr>
+                </a:tc>
+                <a:tc>
+                  <a:txBody>
+                    <a:bodyPr/>
+                    <a:lstStyle/>
+                    <a:p>
+                      <a:r>
+                        <a:rPr sz="1150" b="0">
+                          <a:solidFill>
+                            <a:srgbClr val="1A2233"/>
+                          </a:solidFill>
+                          <a:latin typeface="Microsoft JhengHei"/>
+                          <a:ea typeface="Microsoft JhengHei"/>
+                          <a:cs typeface="Microsoft JhengHei"/>
+                        </a:rPr>
+                        <a:t>安侯建業聯合會計師事務所</a:t>
+                      </a:r>
+                    </a:p>
+                  </a:txBody>
+                  <a:tcPr anchor="ctr" marL="73152" marT="9144" marB="9144">
+                    <a:solidFill>
+                      <a:srgbClr val="FFFFFF"/>
+                    </a:solidFill>
+                  </a:tcPr>
+                </a:tc>
+                <a:tc>
+                  <a:txBody>
+                    <a:bodyPr/>
+                    <a:lstStyle/>
+                    <a:p>
+                      <a:r>
+                        <a:rPr sz="1150" b="0">
+                          <a:solidFill>
+                            <a:srgbClr val="1A2233"/>
+                          </a:solidFill>
+                          <a:latin typeface="Microsoft JhengHei"/>
+                          <a:ea typeface="Microsoft JhengHei"/>
+                          <a:cs typeface="Microsoft JhengHei"/>
+                        </a:rPr>
+                        <a:t>郭柔蘭、江曉苓</a:t>
+                      </a:r>
+                    </a:p>
+                  </a:txBody>
+                  <a:tcPr anchor="ctr" marL="73152" marT="9144" marB="9144">
+                    <a:solidFill>
+                      <a:srgbClr val="FFFFFF"/>
+                    </a:solidFill>
+                  </a:tcPr>
+                </a:tc>
+              </a:tr>
+              <a:tr h="373380">
+                <a:tc>
+                  <a:txBody>
+                    <a:bodyPr/>
+                    <a:lstStyle/>
+                    <a:p>
+                      <a:r>
+                        <a:rPr sz="1150" b="0">
+                          <a:solidFill>
+                            <a:srgbClr val="1A2233"/>
+                          </a:solidFill>
+                          <a:latin typeface="Microsoft JhengHei"/>
+                          <a:ea typeface="Microsoft JhengHei"/>
+                          <a:cs typeface="Microsoft JhengHei"/>
+                        </a:rPr>
+                        <a:t>正瀚-創</a:t>
+                      </a:r>
+                    </a:p>
+                  </a:txBody>
+                  <a:tcPr anchor="ctr" marL="73152" marT="9144" marB="9144">
+                    <a:solidFill>
+                      <a:srgbClr val="EEF2F9"/>
+                    </a:solidFill>
+                  </a:tcPr>
+                </a:tc>
+                <a:tc>
+                  <a:txBody>
+                    <a:bodyPr/>
+                    <a:lstStyle/>
+                    <a:p>
+                      <a:r>
+                        <a:rPr sz="1150" b="0">
+                          <a:solidFill>
+                            <a:srgbClr val="1A2233"/>
+                          </a:solidFill>
+                          <a:latin typeface="Microsoft JhengHei"/>
+                          <a:ea typeface="Microsoft JhengHei"/>
+                          <a:cs typeface="Microsoft JhengHei"/>
+                        </a:rPr>
+                        <a:t>6534</a:t>
+                      </a:r>
+                    </a:p>
+                  </a:txBody>
+                  <a:tcPr anchor="ctr" marL="73152" marT="9144" marB="9144">
+                    <a:solidFill>
+                      <a:srgbClr val="EEF2F9"/>
+                    </a:solidFill>
+                  </a:tcPr>
+                </a:tc>
+                <a:tc>
+                  <a:txBody>
+                    <a:bodyPr/>
+                    <a:lstStyle/>
+                    <a:p>
+                      <a:r>
+                        <a:rPr sz="1150" b="1">
+                          <a:solidFill>
+                            <a:srgbClr val="E63946"/>
+                          </a:solidFill>
+                          <a:latin typeface="Microsoft JhengHei"/>
+                          <a:ea typeface="Microsoft JhengHei"/>
+                          <a:cs typeface="Microsoft JhengHei"/>
+                        </a:rPr>
+                        <a:t>駭客攻擊</a:t>
+                      </a:r>
+                    </a:p>
+                  </a:txBody>
+                  <a:tcPr anchor="ctr" marL="73152" marT="9144" marB="9144">
+                    <a:solidFill>
+                      <a:srgbClr val="EEF2F9"/>
+                    </a:solidFill>
+                  </a:tcPr>
+                </a:tc>
+                <a:tc>
+                  <a:txBody>
+                    <a:bodyPr/>
+                    <a:lstStyle/>
+                    <a:p>
+                      <a:r>
+                        <a:rPr sz="1150" b="0">
+                          <a:solidFill>
+                            <a:srgbClr val="1A2233"/>
+                          </a:solidFill>
+                          <a:latin typeface="Microsoft JhengHei"/>
+                          <a:ea typeface="Microsoft JhengHei"/>
+                          <a:cs typeface="Microsoft JhengHei"/>
+                        </a:rPr>
+                        <a:t>安侯建業聯合會計師事務所</a:t>
+                      </a:r>
+                    </a:p>
+                  </a:txBody>
+                  <a:tcPr anchor="ctr" marL="73152" marT="9144" marB="9144">
+                    <a:solidFill>
+                      <a:srgbClr val="EEF2F9"/>
+                    </a:solidFill>
+                  </a:tcPr>
+                </a:tc>
+                <a:tc>
+                  <a:txBody>
+                    <a:bodyPr/>
+                    <a:lstStyle/>
+                    <a:p>
+                      <a:r>
+                        <a:rPr sz="1150" b="0">
+                          <a:solidFill>
+                            <a:srgbClr val="1A2233"/>
+                          </a:solidFill>
+                          <a:latin typeface="Microsoft JhengHei"/>
+                          <a:ea typeface="Microsoft JhengHei"/>
+                          <a:cs typeface="Microsoft JhengHei"/>
+                        </a:rPr>
+                        <a:t>陳政學、張字信</a:t>
+                      </a:r>
+                    </a:p>
+                  </a:txBody>
+                  <a:tcPr anchor="ctr" marL="73152" marT="9144" marB="9144">
+                    <a:solidFill>
+                      <a:srgbClr val="EEF2F9"/>
+                    </a:solidFill>
+                  </a:tcPr>
+                </a:tc>
+              </a:tr>
+              <a:tr h="373380">
                 <a:tc>
                   <a:txBody>
                     <a:bodyPr/>
@@ -6633,7 +7373,7 @@
                   </a:tcPr>
                 </a:tc>
               </a:tr>
-              <a:tr h="448056">
+              <a:tr h="373380">
                 <a:tc>
                   <a:txBody>
                     <a:bodyPr/>
@@ -6755,7 +7495,7 @@
                   </a:tcPr>
                 </a:tc>
               </a:tr>
-              <a:tr h="448056">
+              <a:tr h="373380">
                 <a:tc>
                   <a:txBody>
                     <a:bodyPr/>
@@ -6877,7 +7617,7 @@
                   </a:tcPr>
                 </a:tc>
               </a:tr>
-              <a:tr h="448056">
+              <a:tr h="373380">
                 <a:tc>
                   <a:txBody>
                     <a:bodyPr/>
@@ -6999,7 +7739,7 @@
                   </a:tcPr>
                 </a:tc>
               </a:tr>
-              <a:tr h="448056">
+              <a:tr h="373380">
                 <a:tc>
                   <a:txBody>
                     <a:bodyPr/>
@@ -7121,7 +7861,7 @@
                   </a:tcPr>
                 </a:tc>
               </a:tr>
-              <a:tr h="448056">
+              <a:tr h="373380">
                 <a:tc>
                   <a:txBody>
                     <a:bodyPr/>
@@ -7243,7 +7983,7 @@
                   </a:tcPr>
                 </a:tc>
               </a:tr>
-              <a:tr h="448056">
+              <a:tr h="373380">
                 <a:tc>
                   <a:txBody>
                     <a:bodyPr/>
@@ -7365,7 +8105,7 @@
                   </a:tcPr>
                 </a:tc>
               </a:tr>
-              <a:tr h="448056">
+              <a:tr h="373380">
                 <a:tc>
                   <a:txBody>
                     <a:bodyPr/>
@@ -7487,7 +8227,7 @@
                   </a:tcPr>
                 </a:tc>
               </a:tr>
-              <a:tr h="448056">
+              <a:tr h="373380">
                 <a:tc>
                   <a:txBody>
                     <a:bodyPr/>
@@ -9058,7 +9798,7 @@
             <a:avLst/>
           </a:prstGeom>
           <a:solidFill>
-            <a:srgbClr val="E63946"/>
+            <a:srgbClr val="F4A261"/>
           </a:solidFill>
           <a:ln>
             <a:noFill/>
@@ -9150,7 +9890,7 @@
             <a:avLst/>
           </a:prstGeom>
           <a:solidFill>
-            <a:srgbClr val="E63946"/>
+            <a:srgbClr val="F4A261"/>
           </a:solidFill>
           <a:ln>
             <a:noFill/>
@@ -9211,7 +9951,7 @@
                 <a:ea typeface="Microsoft JhengHei"/>
                 <a:cs typeface="Microsoft JhengHei"/>
               </a:rPr>
-              <a:t>駭客攻擊</a:t>
+              <a:t>勒索病毒/加密</a:t>
             </a:r>
           </a:p>
         </p:txBody>
@@ -9246,7 +9986,7 @@
             <a:r>
               <a:rPr sz="1100" b="1">
                 <a:solidFill>
-                  <a:srgbClr val="E63946"/>
+                  <a:srgbClr val="F4A261"/>
                 </a:solidFill>
                 <a:latin typeface="Microsoft JhengHei"/>
                 <a:ea typeface="Microsoft JhengHei"/>
@@ -9263,7 +10003,7 @@
                 <a:ea typeface="Microsoft JhengHei"/>
                 <a:cs typeface="Microsoft JhengHei"/>
               </a:rPr>
-              <a:t>本公司部分資訊系統遭受駭客網路攻擊，初步評估對公司營運無重大影響。</a:t>
+              <a:t>本公司遭受駭客加密攻擊事件，部分檔案無法解密。</a:t>
             </a:r>
           </a:p>
         </p:txBody>
@@ -9298,7 +10038,7 @@
             <a:r>
               <a:rPr sz="1100" b="1">
                 <a:solidFill>
-                  <a:srgbClr val="E63946"/>
+                  <a:srgbClr val="F4A261"/>
                 </a:solidFill>
                 <a:latin typeface="Microsoft JhengHei"/>
                 <a:ea typeface="Microsoft JhengHei"/>
@@ -9315,7 +10055,7 @@
                 <a:ea typeface="Microsoft JhengHei"/>
                 <a:cs typeface="Microsoft JhengHei"/>
               </a:rPr>
-              <a:t>本公司將持續提升網路與資訊基礎架構之安全管控，以確保資訊安全。</a:t>
+              <a:t>(1)本公司業已啟動資安相關防禦機制與應變作業，並將通報相關機關。(2)本公司將繼續尋求資安專家協助，改善及提升本公司資…</a:t>
             </a:r>
           </a:p>
         </p:txBody>
@@ -9442,7 +10182,7 @@
                 <a:ea typeface="Microsoft JhengHei"/>
                 <a:cs typeface="Microsoft JhengHei"/>
               </a:rPr>
-              <a:t>逸達 </a:t>
+              <a:t>正瀚-創 </a:t>
             </a:r>
             <a:r>
               <a:rPr sz="1300" b="0">
@@ -9453,7 +10193,7 @@
                 <a:ea typeface="Microsoft JhengHei"/>
                 <a:cs typeface="Microsoft JhengHei"/>
               </a:rPr>
-              <a:t>6576</a:t>
+              <a:t>6534</a:t>
             </a:r>
           </a:p>
         </p:txBody>
@@ -9586,7 +10326,7 @@
                 <a:ea typeface="Microsoft JhengHei"/>
                 <a:cs typeface="Microsoft JhengHei"/>
               </a:rPr>
-              <a:t>本公司資訊系統遭受駭客網路攻擊，初步評估對公司營運暫無重大影響。</a:t>
+              <a:t>本公司部分資訊系統遭受駭客網路攻擊，初步評估對公司營運無重大影響。</a:t>
             </a:r>
           </a:p>
         </p:txBody>
@@ -9765,7 +10505,7 @@
                 <a:ea typeface="Microsoft JhengHei"/>
                 <a:cs typeface="Microsoft JhengHei"/>
               </a:rPr>
-              <a:t>州巧 </a:t>
+              <a:t>久裕 </a:t>
             </a:r>
             <a:r>
               <a:rPr sz="1300" b="0">
@@ -9776,7 +10516,7 @@
                 <a:ea typeface="Microsoft JhengHei"/>
                 <a:cs typeface="Microsoft JhengHei"/>
               </a:rPr>
-              <a:t>3543</a:t>
+              <a:t>4173</a:t>
             </a:r>
           </a:p>
         </p:txBody>
@@ -9909,7 +10649,7 @@
                 <a:ea typeface="Microsoft JhengHei"/>
                 <a:cs typeface="Microsoft JhengHei"/>
               </a:rPr>
-              <a:t>本公司及重要子公司(蘇州州巧、廈門州巧及越南州巧)之部份資訊系統遭不明駭客入侵，導致部分系統無法…</a:t>
+              <a:t>本公司部分資訊系統遭受駭客網路攻擊，初步評估對公司營運無重大影響。</a:t>
             </a:r>
           </a:p>
         </p:txBody>
@@ -9961,7 +10701,7 @@
                 <a:ea typeface="Microsoft JhengHei"/>
                 <a:cs typeface="Microsoft JhengHei"/>
               </a:rPr>
-              <a:t>完成相關安全漏洞修復後，將持續強化網路與資訊基礎架構之安全防護機制及管理措施，確保資訊系統穩定運作及資訊安全。</a:t>
+              <a:t>本公司將持續提升網路與資訊基礎架構之安全管控，以確保資訊安全。</a:t>
             </a:r>
           </a:p>
         </p:txBody>
@@ -10088,7 +10828,7 @@
                 <a:ea typeface="Microsoft JhengHei"/>
                 <a:cs typeface="Microsoft JhengHei"/>
               </a:rPr>
-              <a:t>藥華藥 </a:t>
+              <a:t>逸達 </a:t>
             </a:r>
             <a:r>
               <a:rPr sz="1300" b="0">
@@ -10099,7 +10839,7 @@
                 <a:ea typeface="Microsoft JhengHei"/>
                 <a:cs typeface="Microsoft JhengHei"/>
               </a:rPr>
-              <a:t>6446</a:t>
+              <a:t>6576</a:t>
             </a:r>
           </a:p>
         </p:txBody>
@@ -10232,7 +10972,7 @@
                 <a:ea typeface="Microsoft JhengHei"/>
                 <a:cs typeface="Microsoft JhengHei"/>
               </a:rPr>
-              <a:t>本公司及泛泰醫療子公司之部分資訊系統遭受駭客網路攻擊，初步評估對公司營運無重大影響。</a:t>
+              <a:t>本公司資訊系統遭受駭客網路攻擊，初步評估對公司營運暫無重大影響。</a:t>
             </a:r>
           </a:p>
         </p:txBody>
@@ -10547,7 +11287,7 @@
                 <a:ea typeface="Microsoft JhengHei"/>
                 <a:cs typeface="Microsoft JhengHei"/>
               </a:rPr>
-              <a:t>上銀 </a:t>
+              <a:t>州巧 </a:t>
             </a:r>
             <a:r>
               <a:rPr sz="1300" b="0">
@@ -10558,7 +11298,7 @@
                 <a:ea typeface="Microsoft JhengHei"/>
                 <a:cs typeface="Microsoft JhengHei"/>
               </a:rPr>
-              <a:t>2049</a:t>
+              <a:t>3543</a:t>
             </a:r>
           </a:p>
         </p:txBody>
@@ -10691,7 +11431,7 @@
                 <a:ea typeface="Microsoft JhengHei"/>
                 <a:cs typeface="Microsoft JhengHei"/>
               </a:rPr>
-              <a:t>本公司義大利子公司部份資訊系統遭受駭客網路攻擊</a:t>
+              <a:t>本公司及重要子公司(蘇州州巧、廈門州巧及越南州巧)之部份資訊系統遭不明駭客入侵，導致部分系統無法…</a:t>
             </a:r>
           </a:p>
         </p:txBody>
@@ -10809,7 +11549,7 @@
             <a:avLst/>
           </a:prstGeom>
           <a:solidFill>
-            <a:srgbClr val="27A6C4"/>
+            <a:srgbClr val="E63946"/>
           </a:solidFill>
           <a:ln>
             <a:noFill/>
@@ -10870,7 +11610,7 @@
                 <a:ea typeface="Microsoft JhengHei"/>
                 <a:cs typeface="Microsoft JhengHei"/>
               </a:rPr>
-              <a:t>萬達寵物 </a:t>
+              <a:t>藥華藥 </a:t>
             </a:r>
             <a:r>
               <a:rPr sz="1300" b="0">
@@ -10881,7 +11621,7 @@
                 <a:ea typeface="Microsoft JhengHei"/>
                 <a:cs typeface="Microsoft JhengHei"/>
               </a:rPr>
-              <a:t>6968</a:t>
+              <a:t>6446</a:t>
             </a:r>
           </a:p>
         </p:txBody>
@@ -10901,7 +11641,7 @@
             <a:avLst/>
           </a:prstGeom>
           <a:solidFill>
-            <a:srgbClr val="27A6C4"/>
+            <a:srgbClr val="E63946"/>
           </a:solidFill>
           <a:ln>
             <a:noFill/>
@@ -10962,7 +11702,7 @@
                 <a:ea typeface="Microsoft JhengHei"/>
                 <a:cs typeface="Microsoft JhengHei"/>
               </a:rPr>
-              <a:t>個資外洩</a:t>
+              <a:t>駭客攻擊</a:t>
             </a:r>
           </a:p>
         </p:txBody>
@@ -10997,7 +11737,7 @@
             <a:r>
               <a:rPr sz="1100" b="1">
                 <a:solidFill>
-                  <a:srgbClr val="27A6C4"/>
+                  <a:srgbClr val="E63946"/>
                 </a:solidFill>
                 <a:latin typeface="Microsoft JhengHei"/>
                 <a:ea typeface="Microsoft JhengHei"/>
@@ -11014,7 +11754,7 @@
                 <a:ea typeface="Microsoft JhengHei"/>
                 <a:cs typeface="Microsoft JhengHei"/>
               </a:rPr>
-              <a:t>本公司因合作廠商資訊系統遭不明人士入侵，疑似部份資料外洩</a:t>
+              <a:t>本公司及泛泰醫療子公司之部分資訊系統遭受駭客網路攻擊，初步評估對公司營運無重大影響。</a:t>
             </a:r>
           </a:p>
         </p:txBody>
@@ -11049,7 +11789,7 @@
             <a:r>
               <a:rPr sz="1100" b="1">
                 <a:solidFill>
-                  <a:srgbClr val="27A6C4"/>
+                  <a:srgbClr val="E63946"/>
                 </a:solidFill>
                 <a:latin typeface="Microsoft JhengHei"/>
                 <a:ea typeface="Microsoft JhengHei"/>
@@ -11066,7 +11806,7 @@
                 <a:ea typeface="Microsoft JhengHei"/>
                 <a:cs typeface="Microsoft JhengHei"/>
               </a:rPr>
-              <a:t>本公司並無與合作廠商串接會員資料、信用卡號、銀行帳戶等敏感資訊，不會產生任何金流交易。本公司已嚴正要求合作廠商技術團隊，…</a:t>
+              <a:t>本公司將持續提升網路與資訊基礎架構之安全管控，以確保資訊安全。</a:t>
             </a:r>
           </a:p>
         </p:txBody>
@@ -11132,7 +11872,7 @@
             <a:avLst/>
           </a:prstGeom>
           <a:solidFill>
-            <a:srgbClr val="5C6679"/>
+            <a:srgbClr val="E63946"/>
           </a:solidFill>
           <a:ln>
             <a:noFill/>
@@ -11193,7 +11933,7 @@
                 <a:ea typeface="Microsoft JhengHei"/>
                 <a:cs typeface="Microsoft JhengHei"/>
               </a:rPr>
-              <a:t>淳安 </a:t>
+              <a:t>上銀 </a:t>
             </a:r>
             <a:r>
               <a:rPr sz="1300" b="0">
@@ -11204,7 +11944,7 @@
                 <a:ea typeface="Microsoft JhengHei"/>
                 <a:cs typeface="Microsoft JhengHei"/>
               </a:rPr>
-              <a:t>6283</a:t>
+              <a:t>2049</a:t>
             </a:r>
           </a:p>
         </p:txBody>
@@ -11224,7 +11964,7 @@
             <a:avLst/>
           </a:prstGeom>
           <a:solidFill>
-            <a:srgbClr val="5C6679"/>
+            <a:srgbClr val="E63946"/>
           </a:solidFill>
           <a:ln>
             <a:noFill/>
@@ -11285,7 +12025,7 @@
                 <a:ea typeface="Microsoft JhengHei"/>
                 <a:cs typeface="Microsoft JhengHei"/>
               </a:rPr>
-              <a:t>其他</a:t>
+              <a:t>駭客攻擊</a:t>
             </a:r>
           </a:p>
         </p:txBody>
@@ -11320,7 +12060,7 @@
             <a:r>
               <a:rPr sz="1100" b="1">
                 <a:solidFill>
-                  <a:srgbClr val="5C6679"/>
+                  <a:srgbClr val="E63946"/>
                 </a:solidFill>
                 <a:latin typeface="Microsoft JhengHei"/>
                 <a:ea typeface="Microsoft JhengHei"/>
@@ -11337,7 +12077,7 @@
                 <a:ea typeface="Microsoft JhengHei"/>
                 <a:cs typeface="Microsoft JhengHei"/>
               </a:rPr>
-              <a:t>本公司網路資安事件說明</a:t>
+              <a:t>本公司義大利子公司部份資訊系統遭受駭客網路攻擊</a:t>
             </a:r>
           </a:p>
         </p:txBody>
@@ -11372,7 +12112,7 @@
             <a:r>
               <a:rPr sz="1100" b="1">
                 <a:solidFill>
-                  <a:srgbClr val="5C6679"/>
+                  <a:srgbClr val="E63946"/>
                 </a:solidFill>
                 <a:latin typeface="Microsoft JhengHei"/>
                 <a:ea typeface="Microsoft JhengHei"/>
@@ -11389,7 +12129,7 @@
                 <a:ea typeface="Microsoft JhengHei"/>
                 <a:cs typeface="Microsoft JhengHei"/>
               </a:rPr>
-              <a:t>本公司後續將持續提升網路與資訊基礎架構之安全管控，以確保資訊安全。</a:t>
+              <a:t>完成相關安全漏洞修復後，將持續強化網路與資訊基礎架構之安全防護機制及管理措施，確保資訊系統穩定運作及資訊安全。</a:t>
             </a:r>
           </a:p>
         </p:txBody>
@@ -11455,7 +12195,7 @@
             <a:avLst/>
           </a:prstGeom>
           <a:solidFill>
-            <a:srgbClr val="5C6679"/>
+            <a:srgbClr val="27A6C4"/>
           </a:solidFill>
           <a:ln>
             <a:noFill/>
@@ -11516,7 +12256,7 @@
                 <a:ea typeface="Microsoft JhengHei"/>
                 <a:cs typeface="Microsoft JhengHei"/>
               </a:rPr>
-              <a:t>淳安 </a:t>
+              <a:t>萬達寵物 </a:t>
             </a:r>
             <a:r>
               <a:rPr sz="1300" b="0">
@@ -11527,7 +12267,7 @@
                 <a:ea typeface="Microsoft JhengHei"/>
                 <a:cs typeface="Microsoft JhengHei"/>
               </a:rPr>
-              <a:t>6283</a:t>
+              <a:t>6968</a:t>
             </a:r>
           </a:p>
         </p:txBody>
@@ -11547,7 +12287,7 @@
             <a:avLst/>
           </a:prstGeom>
           <a:solidFill>
-            <a:srgbClr val="5C6679"/>
+            <a:srgbClr val="27A6C4"/>
           </a:solidFill>
           <a:ln>
             <a:noFill/>
@@ -11608,7 +12348,7 @@
                 <a:ea typeface="Microsoft JhengHei"/>
                 <a:cs typeface="Microsoft JhengHei"/>
               </a:rPr>
-              <a:t>其他</a:t>
+              <a:t>個資外洩</a:t>
             </a:r>
           </a:p>
         </p:txBody>
@@ -11643,7 +12383,7 @@
             <a:r>
               <a:rPr sz="1100" b="1">
                 <a:solidFill>
-                  <a:srgbClr val="5C6679"/>
+                  <a:srgbClr val="27A6C4"/>
                 </a:solidFill>
                 <a:latin typeface="Microsoft JhengHei"/>
                 <a:ea typeface="Microsoft JhengHei"/>
@@ -11660,7 +12400,7 @@
                 <a:ea typeface="Microsoft JhengHei"/>
                 <a:cs typeface="Microsoft JhengHei"/>
               </a:rPr>
-              <a:t>本公司網路資安事件說明</a:t>
+              <a:t>本公司因合作廠商資訊系統遭不明人士入侵，疑似部份資料外洩</a:t>
             </a:r>
           </a:p>
         </p:txBody>
@@ -11695,7 +12435,7 @@
             <a:r>
               <a:rPr sz="1100" b="1">
                 <a:solidFill>
-                  <a:srgbClr val="5C6679"/>
+                  <a:srgbClr val="27A6C4"/>
                 </a:solidFill>
                 <a:latin typeface="Microsoft JhengHei"/>
                 <a:ea typeface="Microsoft JhengHei"/>
@@ -11712,7 +12452,7 @@
                 <a:ea typeface="Microsoft JhengHei"/>
                 <a:cs typeface="Microsoft JhengHei"/>
               </a:rPr>
-              <a:t>本公司後續將持續提升網路與資訊基礎架構之安全管控，以確保資訊安全。</a:t>
+              <a:t>本公司並無與合作廠商串接會員資料、信用卡號、銀行帳戶等敏感資訊，不會產生任何金流交易。本公司已嚴正要求合作廠商技術團隊，…</a:t>
             </a:r>
           </a:p>
         </p:txBody>
@@ -11914,7 +12654,7 @@
             <a:avLst/>
           </a:prstGeom>
           <a:solidFill>
-            <a:srgbClr val="E63946"/>
+            <a:srgbClr val="5C6679"/>
           </a:solidFill>
           <a:ln>
             <a:noFill/>
@@ -11975,7 +12715,7 @@
                 <a:ea typeface="Microsoft JhengHei"/>
                 <a:cs typeface="Microsoft JhengHei"/>
               </a:rPr>
-              <a:t>松上 </a:t>
+              <a:t>淳安 </a:t>
             </a:r>
             <a:r>
               <a:rPr sz="1300" b="0">
@@ -11986,7 +12726,7 @@
                 <a:ea typeface="Microsoft JhengHei"/>
                 <a:cs typeface="Microsoft JhengHei"/>
               </a:rPr>
-              <a:t>6156</a:t>
+              <a:t>6283</a:t>
             </a:r>
           </a:p>
         </p:txBody>
@@ -12003,6 +12743,560 @@
             <a:ext cx="1234440" cy="347472"/>
           </a:xfrm>
           <a:prstGeom prst="roundRect">
+            <a:avLst/>
+          </a:prstGeom>
+          <a:solidFill>
+            <a:srgbClr val="5C6679"/>
+          </a:solidFill>
+          <a:ln>
+            <a:noFill/>
+          </a:ln>
+          <a:effectLst/>
+        </p:spPr>
+        <p:style>
+          <a:lnRef idx="1">
+            <a:schemeClr val="accent1"/>
+          </a:lnRef>
+          <a:fillRef idx="3">
+            <a:schemeClr val="accent1"/>
+          </a:fillRef>
+          <a:effectRef idx="2">
+            <a:schemeClr val="accent1"/>
+          </a:effectRef>
+          <a:fontRef idx="minor">
+            <a:schemeClr val="lt1"/>
+          </a:fontRef>
+        </p:style>
+        <p:txBody>
+          <a:bodyPr rtlCol="0" anchor="ctr"/>
+          <a:lstStyle/>
+          <a:p>
+            <a:pPr algn="ctr"/>
+          </a:p>
+        </p:txBody>
+      </p:sp>
+      <p:sp>
+        <p:nvSpPr>
+          <p:cNvPr id="9" name="TextBox 8"/>
+          <p:cNvSpPr txBox="1"/>
+          <p:nvPr/>
+        </p:nvSpPr>
+        <p:spPr>
+          <a:xfrm>
+            <a:off x="4526280" y="1792224"/>
+            <a:ext cx="1234440" cy="347472"/>
+          </a:xfrm>
+          <a:prstGeom prst="rect">
+            <a:avLst/>
+          </a:prstGeom>
+          <a:noFill/>
+        </p:spPr>
+        <p:txBody>
+          <a:bodyPr wrap="square" anchor="ctr" lIns="0" rIns="0" tIns="0" bIns="0">
+            <a:spAutoFit/>
+          </a:bodyPr>
+          <a:lstStyle/>
+          <a:p>
+            <a:pPr algn="ctr"/>
+            <a:r>
+              <a:rPr sz="1050" b="1">
+                <a:solidFill>
+                  <a:srgbClr val="FFFFFF"/>
+                </a:solidFill>
+                <a:latin typeface="Microsoft JhengHei"/>
+                <a:ea typeface="Microsoft JhengHei"/>
+                <a:cs typeface="Microsoft JhengHei"/>
+              </a:rPr>
+              <a:t>其他</a:t>
+            </a:r>
+          </a:p>
+        </p:txBody>
+      </p:sp>
+      <p:sp>
+        <p:nvSpPr>
+          <p:cNvPr id="10" name="TextBox 9"/>
+          <p:cNvSpPr txBox="1"/>
+          <p:nvPr/>
+        </p:nvSpPr>
+        <p:spPr>
+          <a:xfrm>
+            <a:off x="777240" y="2267712"/>
+            <a:ext cx="4937760" cy="640080"/>
+          </a:xfrm>
+          <a:prstGeom prst="rect">
+            <a:avLst/>
+          </a:prstGeom>
+          <a:noFill/>
+        </p:spPr>
+        <p:txBody>
+          <a:bodyPr wrap="square" anchor="t" lIns="0" rIns="0" tIns="0" bIns="0">
+            <a:spAutoFit/>
+          </a:bodyPr>
+          <a:lstStyle/>
+          <a:p>
+            <a:pPr algn="l">
+              <a:lnSpc>
+                <a:spcPts val="1500"/>
+              </a:lnSpc>
+            </a:pPr>
+            <a:r>
+              <a:rPr sz="1100" b="1">
+                <a:solidFill>
+                  <a:srgbClr val="5C6679"/>
+                </a:solidFill>
+                <a:latin typeface="Microsoft JhengHei"/>
+                <a:ea typeface="Microsoft JhengHei"/>
+                <a:cs typeface="Microsoft JhengHei"/>
+              </a:rPr>
+              <a:t>緣由　</a:t>
+            </a:r>
+            <a:r>
+              <a:rPr sz="1100" b="0">
+                <a:solidFill>
+                  <a:srgbClr val="1A2233"/>
+                </a:solidFill>
+                <a:latin typeface="Microsoft JhengHei"/>
+                <a:ea typeface="Microsoft JhengHei"/>
+                <a:cs typeface="Microsoft JhengHei"/>
+              </a:rPr>
+              <a:t>本公司網路資安事件說明</a:t>
+            </a:r>
+          </a:p>
+        </p:txBody>
+      </p:sp>
+      <p:sp>
+        <p:nvSpPr>
+          <p:cNvPr id="11" name="TextBox 10"/>
+          <p:cNvSpPr txBox="1"/>
+          <p:nvPr/>
+        </p:nvSpPr>
+        <p:spPr>
+          <a:xfrm>
+            <a:off x="777240" y="2926080"/>
+            <a:ext cx="4937760" cy="713232"/>
+          </a:xfrm>
+          <a:prstGeom prst="rect">
+            <a:avLst/>
+          </a:prstGeom>
+          <a:noFill/>
+        </p:spPr>
+        <p:txBody>
+          <a:bodyPr wrap="square" anchor="t" lIns="0" rIns="0" tIns="0" bIns="0">
+            <a:spAutoFit/>
+          </a:bodyPr>
+          <a:lstStyle/>
+          <a:p>
+            <a:pPr algn="l">
+              <a:lnSpc>
+                <a:spcPts val="1500"/>
+              </a:lnSpc>
+            </a:pPr>
+            <a:r>
+              <a:rPr sz="1100" b="1">
+                <a:solidFill>
+                  <a:srgbClr val="5C6679"/>
+                </a:solidFill>
+                <a:latin typeface="Microsoft JhengHei"/>
+                <a:ea typeface="Microsoft JhengHei"/>
+                <a:cs typeface="Microsoft JhengHei"/>
+              </a:rPr>
+              <a:t>因應　</a:t>
+            </a:r>
+            <a:r>
+              <a:rPr sz="1100" b="0">
+                <a:solidFill>
+                  <a:srgbClr val="1A2233"/>
+                </a:solidFill>
+                <a:latin typeface="Microsoft JhengHei"/>
+                <a:ea typeface="Microsoft JhengHei"/>
+                <a:cs typeface="Microsoft JhengHei"/>
+              </a:rPr>
+              <a:t>本公司後續將持續提升網路與資訊基礎架構之安全管控，以確保資訊安全。</a:t>
+            </a:r>
+          </a:p>
+        </p:txBody>
+      </p:sp>
+      <p:sp>
+        <p:nvSpPr>
+          <p:cNvPr id="12" name="Rounded Rectangle 11"/>
+          <p:cNvSpPr/>
+          <p:nvPr/>
+        </p:nvSpPr>
+        <p:spPr>
+          <a:xfrm>
+            <a:off x="6172200" y="1554480"/>
+            <a:ext cx="5394960" cy="2148840"/>
+          </a:xfrm>
+          <a:prstGeom prst="roundRect">
+            <a:avLst/>
+          </a:prstGeom>
+          <a:solidFill>
+            <a:srgbClr val="FFFFFF"/>
+          </a:solidFill>
+          <a:ln w="12700">
+            <a:solidFill>
+              <a:srgbClr val="DDE3EE"/>
+            </a:solidFill>
+          </a:ln>
+          <a:effectLst/>
+        </p:spPr>
+        <p:style>
+          <a:lnRef idx="1">
+            <a:schemeClr val="accent1"/>
+          </a:lnRef>
+          <a:fillRef idx="3">
+            <a:schemeClr val="accent1"/>
+          </a:fillRef>
+          <a:effectRef idx="2">
+            <a:schemeClr val="accent1"/>
+          </a:effectRef>
+          <a:fontRef idx="minor">
+            <a:schemeClr val="lt1"/>
+          </a:fontRef>
+        </p:style>
+        <p:txBody>
+          <a:bodyPr rtlCol="0" anchor="ctr"/>
+          <a:lstStyle/>
+          <a:p>
+            <a:pPr algn="ctr"/>
+          </a:p>
+        </p:txBody>
+      </p:sp>
+      <p:sp>
+        <p:nvSpPr>
+          <p:cNvPr id="13" name="Rectangle 12"/>
+          <p:cNvSpPr/>
+          <p:nvPr/>
+        </p:nvSpPr>
+        <p:spPr>
+          <a:xfrm>
+            <a:off x="6172200" y="1554480"/>
+            <a:ext cx="5394960" cy="109728"/>
+          </a:xfrm>
+          <a:prstGeom prst="rect">
+            <a:avLst/>
+          </a:prstGeom>
+          <a:solidFill>
+            <a:srgbClr val="5C6679"/>
+          </a:solidFill>
+          <a:ln>
+            <a:noFill/>
+          </a:ln>
+          <a:effectLst/>
+        </p:spPr>
+        <p:style>
+          <a:lnRef idx="1">
+            <a:schemeClr val="accent1"/>
+          </a:lnRef>
+          <a:fillRef idx="3">
+            <a:schemeClr val="accent1"/>
+          </a:fillRef>
+          <a:effectRef idx="2">
+            <a:schemeClr val="accent1"/>
+          </a:effectRef>
+          <a:fontRef idx="minor">
+            <a:schemeClr val="lt1"/>
+          </a:fontRef>
+        </p:style>
+        <p:txBody>
+          <a:bodyPr rtlCol="0" anchor="ctr"/>
+          <a:lstStyle/>
+          <a:p>
+            <a:pPr algn="ctr"/>
+          </a:p>
+        </p:txBody>
+      </p:sp>
+      <p:sp>
+        <p:nvSpPr>
+          <p:cNvPr id="14" name="TextBox 13"/>
+          <p:cNvSpPr txBox="1"/>
+          <p:nvPr/>
+        </p:nvSpPr>
+        <p:spPr>
+          <a:xfrm>
+            <a:off x="6400800" y="1773936"/>
+            <a:ext cx="3657600" cy="365760"/>
+          </a:xfrm>
+          <a:prstGeom prst="rect">
+            <a:avLst/>
+          </a:prstGeom>
+          <a:noFill/>
+        </p:spPr>
+        <p:txBody>
+          <a:bodyPr wrap="square" anchor="ctr" lIns="0" rIns="0" tIns="0" bIns="0">
+            <a:spAutoFit/>
+          </a:bodyPr>
+          <a:lstStyle/>
+          <a:p>
+            <a:pPr algn="l"/>
+            <a:r>
+              <a:rPr sz="1600" b="1">
+                <a:solidFill>
+                  <a:srgbClr val="1A2233"/>
+                </a:solidFill>
+                <a:latin typeface="Microsoft JhengHei"/>
+                <a:ea typeface="Microsoft JhengHei"/>
+                <a:cs typeface="Microsoft JhengHei"/>
+              </a:rPr>
+              <a:t>淳安 </a:t>
+            </a:r>
+            <a:r>
+              <a:rPr sz="1300" b="0">
+                <a:solidFill>
+                  <a:srgbClr val="5C6679"/>
+                </a:solidFill>
+                <a:latin typeface="Microsoft JhengHei"/>
+                <a:ea typeface="Microsoft JhengHei"/>
+                <a:cs typeface="Microsoft JhengHei"/>
+              </a:rPr>
+              <a:t>6283</a:t>
+            </a:r>
+          </a:p>
+        </p:txBody>
+      </p:sp>
+      <p:sp>
+        <p:nvSpPr>
+          <p:cNvPr id="15" name="Rounded Rectangle 14"/>
+          <p:cNvSpPr/>
+          <p:nvPr/>
+        </p:nvSpPr>
+        <p:spPr>
+          <a:xfrm>
+            <a:off x="10149840" y="1792224"/>
+            <a:ext cx="1234440" cy="347472"/>
+          </a:xfrm>
+          <a:prstGeom prst="roundRect">
+            <a:avLst/>
+          </a:prstGeom>
+          <a:solidFill>
+            <a:srgbClr val="5C6679"/>
+          </a:solidFill>
+          <a:ln>
+            <a:noFill/>
+          </a:ln>
+          <a:effectLst/>
+        </p:spPr>
+        <p:style>
+          <a:lnRef idx="1">
+            <a:schemeClr val="accent1"/>
+          </a:lnRef>
+          <a:fillRef idx="3">
+            <a:schemeClr val="accent1"/>
+          </a:fillRef>
+          <a:effectRef idx="2">
+            <a:schemeClr val="accent1"/>
+          </a:effectRef>
+          <a:fontRef idx="minor">
+            <a:schemeClr val="lt1"/>
+          </a:fontRef>
+        </p:style>
+        <p:txBody>
+          <a:bodyPr rtlCol="0" anchor="ctr"/>
+          <a:lstStyle/>
+          <a:p>
+            <a:pPr algn="ctr"/>
+          </a:p>
+        </p:txBody>
+      </p:sp>
+      <p:sp>
+        <p:nvSpPr>
+          <p:cNvPr id="16" name="TextBox 15"/>
+          <p:cNvSpPr txBox="1"/>
+          <p:nvPr/>
+        </p:nvSpPr>
+        <p:spPr>
+          <a:xfrm>
+            <a:off x="10149840" y="1792224"/>
+            <a:ext cx="1234440" cy="347472"/>
+          </a:xfrm>
+          <a:prstGeom prst="rect">
+            <a:avLst/>
+          </a:prstGeom>
+          <a:noFill/>
+        </p:spPr>
+        <p:txBody>
+          <a:bodyPr wrap="square" anchor="ctr" lIns="0" rIns="0" tIns="0" bIns="0">
+            <a:spAutoFit/>
+          </a:bodyPr>
+          <a:lstStyle/>
+          <a:p>
+            <a:pPr algn="ctr"/>
+            <a:r>
+              <a:rPr sz="1050" b="1">
+                <a:solidFill>
+                  <a:srgbClr val="FFFFFF"/>
+                </a:solidFill>
+                <a:latin typeface="Microsoft JhengHei"/>
+                <a:ea typeface="Microsoft JhengHei"/>
+                <a:cs typeface="Microsoft JhengHei"/>
+              </a:rPr>
+              <a:t>其他</a:t>
+            </a:r>
+          </a:p>
+        </p:txBody>
+      </p:sp>
+      <p:sp>
+        <p:nvSpPr>
+          <p:cNvPr id="17" name="TextBox 16"/>
+          <p:cNvSpPr txBox="1"/>
+          <p:nvPr/>
+        </p:nvSpPr>
+        <p:spPr>
+          <a:xfrm>
+            <a:off x="6400800" y="2267712"/>
+            <a:ext cx="4937760" cy="640080"/>
+          </a:xfrm>
+          <a:prstGeom prst="rect">
+            <a:avLst/>
+          </a:prstGeom>
+          <a:noFill/>
+        </p:spPr>
+        <p:txBody>
+          <a:bodyPr wrap="square" anchor="t" lIns="0" rIns="0" tIns="0" bIns="0">
+            <a:spAutoFit/>
+          </a:bodyPr>
+          <a:lstStyle/>
+          <a:p>
+            <a:pPr algn="l">
+              <a:lnSpc>
+                <a:spcPts val="1500"/>
+              </a:lnSpc>
+            </a:pPr>
+            <a:r>
+              <a:rPr sz="1100" b="1">
+                <a:solidFill>
+                  <a:srgbClr val="5C6679"/>
+                </a:solidFill>
+                <a:latin typeface="Microsoft JhengHei"/>
+                <a:ea typeface="Microsoft JhengHei"/>
+                <a:cs typeface="Microsoft JhengHei"/>
+              </a:rPr>
+              <a:t>緣由　</a:t>
+            </a:r>
+            <a:r>
+              <a:rPr sz="1100" b="0">
+                <a:solidFill>
+                  <a:srgbClr val="1A2233"/>
+                </a:solidFill>
+                <a:latin typeface="Microsoft JhengHei"/>
+                <a:ea typeface="Microsoft JhengHei"/>
+                <a:cs typeface="Microsoft JhengHei"/>
+              </a:rPr>
+              <a:t>本公司網路資安事件說明</a:t>
+            </a:r>
+          </a:p>
+        </p:txBody>
+      </p:sp>
+      <p:sp>
+        <p:nvSpPr>
+          <p:cNvPr id="18" name="TextBox 17"/>
+          <p:cNvSpPr txBox="1"/>
+          <p:nvPr/>
+        </p:nvSpPr>
+        <p:spPr>
+          <a:xfrm>
+            <a:off x="6400800" y="2926080"/>
+            <a:ext cx="4937760" cy="713232"/>
+          </a:xfrm>
+          <a:prstGeom prst="rect">
+            <a:avLst/>
+          </a:prstGeom>
+          <a:noFill/>
+        </p:spPr>
+        <p:txBody>
+          <a:bodyPr wrap="square" anchor="t" lIns="0" rIns="0" tIns="0" bIns="0">
+            <a:spAutoFit/>
+          </a:bodyPr>
+          <a:lstStyle/>
+          <a:p>
+            <a:pPr algn="l">
+              <a:lnSpc>
+                <a:spcPts val="1500"/>
+              </a:lnSpc>
+            </a:pPr>
+            <a:r>
+              <a:rPr sz="1100" b="1">
+                <a:solidFill>
+                  <a:srgbClr val="5C6679"/>
+                </a:solidFill>
+                <a:latin typeface="Microsoft JhengHei"/>
+                <a:ea typeface="Microsoft JhengHei"/>
+                <a:cs typeface="Microsoft JhengHei"/>
+              </a:rPr>
+              <a:t>因應　</a:t>
+            </a:r>
+            <a:r>
+              <a:rPr sz="1100" b="0">
+                <a:solidFill>
+                  <a:srgbClr val="1A2233"/>
+                </a:solidFill>
+                <a:latin typeface="Microsoft JhengHei"/>
+                <a:ea typeface="Microsoft JhengHei"/>
+                <a:cs typeface="Microsoft JhengHei"/>
+              </a:rPr>
+              <a:t>本公司後續將持續提升網路與資訊基礎架構之安全管控，以確保資訊安全。</a:t>
+            </a:r>
+          </a:p>
+        </p:txBody>
+      </p:sp>
+      <p:sp>
+        <p:nvSpPr>
+          <p:cNvPr id="19" name="Rounded Rectangle 18"/>
+          <p:cNvSpPr/>
+          <p:nvPr/>
+        </p:nvSpPr>
+        <p:spPr>
+          <a:xfrm>
+            <a:off x="548640" y="3886200"/>
+            <a:ext cx="5394960" cy="2148840"/>
+          </a:xfrm>
+          <a:prstGeom prst="roundRect">
+            <a:avLst/>
+          </a:prstGeom>
+          <a:solidFill>
+            <a:srgbClr val="FFFFFF"/>
+          </a:solidFill>
+          <a:ln w="12700">
+            <a:solidFill>
+              <a:srgbClr val="DDE3EE"/>
+            </a:solidFill>
+          </a:ln>
+          <a:effectLst/>
+        </p:spPr>
+        <p:style>
+          <a:lnRef idx="1">
+            <a:schemeClr val="accent1"/>
+          </a:lnRef>
+          <a:fillRef idx="3">
+            <a:schemeClr val="accent1"/>
+          </a:fillRef>
+          <a:effectRef idx="2">
+            <a:schemeClr val="accent1"/>
+          </a:effectRef>
+          <a:fontRef idx="minor">
+            <a:schemeClr val="lt1"/>
+          </a:fontRef>
+        </p:style>
+        <p:txBody>
+          <a:bodyPr rtlCol="0" anchor="ctr"/>
+          <a:lstStyle/>
+          <a:p>
+            <a:pPr algn="ctr"/>
+          </a:p>
+        </p:txBody>
+      </p:sp>
+      <p:sp>
+        <p:nvSpPr>
+          <p:cNvPr id="20" name="Rectangle 19"/>
+          <p:cNvSpPr/>
+          <p:nvPr/>
+        </p:nvSpPr>
+        <p:spPr>
+          <a:xfrm>
+            <a:off x="548640" y="3886200"/>
+            <a:ext cx="5394960" cy="109728"/>
+          </a:xfrm>
+          <a:prstGeom prst="rect">
             <a:avLst/>
           </a:prstGeom>
           <a:solidFill>
@@ -12037,13 +13331,105 @@
       </p:sp>
       <p:sp>
         <p:nvSpPr>
-          <p:cNvPr id="9" name="TextBox 8"/>
+          <p:cNvPr id="21" name="TextBox 20"/>
           <p:cNvSpPr txBox="1"/>
           <p:nvPr/>
         </p:nvSpPr>
         <p:spPr>
           <a:xfrm>
-            <a:off x="4526280" y="1792224"/>
+            <a:off x="777240" y="4105656"/>
+            <a:ext cx="3657600" cy="365760"/>
+          </a:xfrm>
+          <a:prstGeom prst="rect">
+            <a:avLst/>
+          </a:prstGeom>
+          <a:noFill/>
+        </p:spPr>
+        <p:txBody>
+          <a:bodyPr wrap="square" anchor="ctr" lIns="0" rIns="0" tIns="0" bIns="0">
+            <a:spAutoFit/>
+          </a:bodyPr>
+          <a:lstStyle/>
+          <a:p>
+            <a:pPr algn="l"/>
+            <a:r>
+              <a:rPr sz="1600" b="1">
+                <a:solidFill>
+                  <a:srgbClr val="1A2233"/>
+                </a:solidFill>
+                <a:latin typeface="Microsoft JhengHei"/>
+                <a:ea typeface="Microsoft JhengHei"/>
+                <a:cs typeface="Microsoft JhengHei"/>
+              </a:rPr>
+              <a:t>松上 </a:t>
+            </a:r>
+            <a:r>
+              <a:rPr sz="1300" b="0">
+                <a:solidFill>
+                  <a:srgbClr val="5C6679"/>
+                </a:solidFill>
+                <a:latin typeface="Microsoft JhengHei"/>
+                <a:ea typeface="Microsoft JhengHei"/>
+                <a:cs typeface="Microsoft JhengHei"/>
+              </a:rPr>
+              <a:t>6156</a:t>
+            </a:r>
+          </a:p>
+        </p:txBody>
+      </p:sp>
+      <p:sp>
+        <p:nvSpPr>
+          <p:cNvPr id="22" name="Rounded Rectangle 21"/>
+          <p:cNvSpPr/>
+          <p:nvPr/>
+        </p:nvSpPr>
+        <p:spPr>
+          <a:xfrm>
+            <a:off x="4526280" y="4123944"/>
+            <a:ext cx="1234440" cy="347472"/>
+          </a:xfrm>
+          <a:prstGeom prst="roundRect">
+            <a:avLst/>
+          </a:prstGeom>
+          <a:solidFill>
+            <a:srgbClr val="E63946"/>
+          </a:solidFill>
+          <a:ln>
+            <a:noFill/>
+          </a:ln>
+          <a:effectLst/>
+        </p:spPr>
+        <p:style>
+          <a:lnRef idx="1">
+            <a:schemeClr val="accent1"/>
+          </a:lnRef>
+          <a:fillRef idx="3">
+            <a:schemeClr val="accent1"/>
+          </a:fillRef>
+          <a:effectRef idx="2">
+            <a:schemeClr val="accent1"/>
+          </a:effectRef>
+          <a:fontRef idx="minor">
+            <a:schemeClr val="lt1"/>
+          </a:fontRef>
+        </p:style>
+        <p:txBody>
+          <a:bodyPr rtlCol="0" anchor="ctr"/>
+          <a:lstStyle/>
+          <a:p>
+            <a:pPr algn="ctr"/>
+          </a:p>
+        </p:txBody>
+      </p:sp>
+      <p:sp>
+        <p:nvSpPr>
+          <p:cNvPr id="23" name="TextBox 22"/>
+          <p:cNvSpPr txBox="1"/>
+          <p:nvPr/>
+        </p:nvSpPr>
+        <p:spPr>
+          <a:xfrm>
+            <a:off x="4526280" y="4123944"/>
             <a:ext cx="1234440" cy="347472"/>
           </a:xfrm>
           <a:prstGeom prst="rect">
@@ -12074,13 +13460,13 @@
       </p:sp>
       <p:sp>
         <p:nvSpPr>
-          <p:cNvPr id="10" name="TextBox 9"/>
+          <p:cNvPr id="24" name="TextBox 23"/>
           <p:cNvSpPr txBox="1"/>
           <p:nvPr/>
         </p:nvSpPr>
         <p:spPr>
           <a:xfrm>
-            <a:off x="777240" y="2267712"/>
+            <a:off x="777240" y="4599432"/>
             <a:ext cx="4937760" cy="640080"/>
           </a:xfrm>
           <a:prstGeom prst="rect">
@@ -12126,13 +13512,13 @@
       </p:sp>
       <p:sp>
         <p:nvSpPr>
-          <p:cNvPr id="11" name="TextBox 10"/>
+          <p:cNvPr id="25" name="TextBox 24"/>
           <p:cNvSpPr txBox="1"/>
           <p:nvPr/>
         </p:nvSpPr>
         <p:spPr>
           <a:xfrm>
-            <a:off x="777240" y="2926080"/>
+            <a:off x="777240" y="5257800"/>
             <a:ext cx="4937760" cy="713232"/>
           </a:xfrm>
           <a:prstGeom prst="rect">

--- a/資安事件因應分析.pptx
+++ b/資安事件因應分析.pptx
@@ -197,7 +197,7 @@
                 <c:formatCode>General</c:formatCode>
                 <c:ptCount val="4"/>
                 <c:pt idx="0">
-                  <c:v>7</c:v>
+                  <c:v>6</c:v>
                 </c:pt>
                 <c:pt idx="1">
                   <c:v>1</c:v>
@@ -3543,7 +3543,7 @@
                 <a:ea typeface="Microsoft JhengHei"/>
                 <a:cs typeface="Microsoft JhengHei"/>
               </a:rPr>
-              <a:t>資料期間 2026-07-12 ~ 2026-08-12　｜　MOPS 重大訊息全文檢索　｜　11 家公司</a:t>
+              <a:t>資料期間 2026-07-18 ~ 2026-08-18　｜　MOPS 重大訊息全文檢索　｜　10 家公司</a:t>
             </a:r>
           </a:p>
         </p:txBody>
@@ -3760,7 +3760,7 @@
                 <a:ea typeface="Microsoft JhengHei"/>
                 <a:cs typeface="Microsoft JhengHei"/>
               </a:rPr>
-              <a:t>資料期間內 MOPS 揭露之 11 起資安相關重大訊息</a:t>
+              <a:t>資料期間內 MOPS 揭露之 10 起資安相關重大訊息</a:t>
             </a:r>
           </a:p>
         </p:txBody>
@@ -3843,7 +3843,7 @@
                 <a:ea typeface="Microsoft JhengHei"/>
                 <a:cs typeface="Microsoft JhengHei"/>
               </a:rPr>
-              <a:t>11</a:t>
+              <a:t>10</a:t>
             </a:r>
           </a:p>
         </p:txBody>
@@ -4150,7 +4150,7 @@
                 <a:gridCol w="2286000"/>
                 <a:gridCol w="5120640"/>
               </a:tblGrid>
-              <a:tr h="297180">
+              <a:tr h="324196">
                 <a:tc>
                   <a:txBody>
                     <a:bodyPr/>
@@ -4272,7 +4272,7 @@
                   </a:tcPr>
                 </a:tc>
               </a:tr>
-              <a:tr h="297180">
+              <a:tr h="324196">
                 <a:tc>
                   <a:txBody>
                     <a:bodyPr/>
@@ -4394,7 +4394,7 @@
                   </a:tcPr>
                 </a:tc>
               </a:tr>
-              <a:tr h="297180">
+              <a:tr h="324196">
                 <a:tc>
                   <a:txBody>
                     <a:bodyPr/>
@@ -4516,7 +4516,7 @@
                   </a:tcPr>
                 </a:tc>
               </a:tr>
-              <a:tr h="297180">
+              <a:tr h="324196">
                 <a:tc>
                   <a:txBody>
                     <a:bodyPr/>
@@ -4638,7 +4638,7 @@
                   </a:tcPr>
                 </a:tc>
               </a:tr>
-              <a:tr h="297180">
+              <a:tr h="324196">
                 <a:tc>
                   <a:txBody>
                     <a:bodyPr/>
@@ -4760,7 +4760,7 @@
                   </a:tcPr>
                 </a:tc>
               </a:tr>
-              <a:tr h="297180">
+              <a:tr h="324196">
                 <a:tc>
                   <a:txBody>
                     <a:bodyPr/>
@@ -4882,7 +4882,7 @@
                   </a:tcPr>
                 </a:tc>
               </a:tr>
-              <a:tr h="297180">
+              <a:tr h="324196">
                 <a:tc>
                   <a:txBody>
                     <a:bodyPr/>
@@ -5004,7 +5004,7 @@
                   </a:tcPr>
                 </a:tc>
               </a:tr>
-              <a:tr h="297180">
+              <a:tr h="324196">
                 <a:tc>
                   <a:txBody>
                     <a:bodyPr/>
@@ -5126,7 +5126,7 @@
                   </a:tcPr>
                 </a:tc>
               </a:tr>
-              <a:tr h="297180">
+              <a:tr h="324196">
                 <a:tc>
                   <a:txBody>
                     <a:bodyPr/>
@@ -5248,7 +5248,7 @@
                   </a:tcPr>
                 </a:tc>
               </a:tr>
-              <a:tr h="297180">
+              <a:tr h="324196">
                 <a:tc>
                   <a:txBody>
                     <a:bodyPr/>
@@ -5370,7 +5370,7 @@
                   </a:tcPr>
                 </a:tc>
               </a:tr>
-              <a:tr h="297180">
+              <a:tr h="324200">
                 <a:tc>
                   <a:txBody>
                     <a:bodyPr/>
@@ -5492,128 +5492,6 @@
                   </a:tcPr>
                 </a:tc>
               </a:tr>
-              <a:tr h="297180">
-                <a:tc>
-                  <a:txBody>
-                    <a:bodyPr/>
-                    <a:lstStyle/>
-                    <a:p>
-                      <a:r>
-                        <a:rPr sz="1150" b="0">
-                          <a:solidFill>
-                            <a:srgbClr val="1A2233"/>
-                          </a:solidFill>
-                          <a:latin typeface="Microsoft JhengHei"/>
-                          <a:ea typeface="Microsoft JhengHei"/>
-                          <a:cs typeface="Microsoft JhengHei"/>
-                        </a:rPr>
-                        <a:t>松上</a:t>
-                      </a:r>
-                    </a:p>
-                  </a:txBody>
-                  <a:tcPr anchor="ctr" marL="73152" marT="9144" marB="9144">
-                    <a:solidFill>
-                      <a:srgbClr val="FFFFFF"/>
-                    </a:solidFill>
-                  </a:tcPr>
-                </a:tc>
-                <a:tc>
-                  <a:txBody>
-                    <a:bodyPr/>
-                    <a:lstStyle/>
-                    <a:p>
-                      <a:r>
-                        <a:rPr sz="1150" b="0">
-                          <a:solidFill>
-                            <a:srgbClr val="1A2233"/>
-                          </a:solidFill>
-                          <a:latin typeface="Microsoft JhengHei"/>
-                          <a:ea typeface="Microsoft JhengHei"/>
-                          <a:cs typeface="Microsoft JhengHei"/>
-                        </a:rPr>
-                        <a:t>6156</a:t>
-                      </a:r>
-                    </a:p>
-                  </a:txBody>
-                  <a:tcPr anchor="ctr" marL="73152" marT="9144" marB="9144">
-                    <a:solidFill>
-                      <a:srgbClr val="FFFFFF"/>
-                    </a:solidFill>
-                  </a:tcPr>
-                </a:tc>
-                <a:tc>
-                  <a:txBody>
-                    <a:bodyPr/>
-                    <a:lstStyle/>
-                    <a:p>
-                      <a:r>
-                        <a:rPr sz="1150" b="0">
-                          <a:solidFill>
-                            <a:srgbClr val="1A2233"/>
-                          </a:solidFill>
-                          <a:latin typeface="Microsoft JhengHei"/>
-                          <a:ea typeface="Microsoft JhengHei"/>
-                          <a:cs typeface="Microsoft JhengHei"/>
-                        </a:rPr>
-                        <a:t>07/17</a:t>
-                      </a:r>
-                    </a:p>
-                  </a:txBody>
-                  <a:tcPr anchor="ctr" marL="73152" marT="9144" marB="9144">
-                    <a:solidFill>
-                      <a:srgbClr val="FFFFFF"/>
-                    </a:solidFill>
-                  </a:tcPr>
-                </a:tc>
-                <a:tc>
-                  <a:txBody>
-                    <a:bodyPr/>
-                    <a:lstStyle/>
-                    <a:p>
-                      <a:r>
-                        <a:rPr sz="1150" b="1">
-                          <a:solidFill>
-                            <a:srgbClr val="E63946"/>
-                          </a:solidFill>
-                          <a:latin typeface="Microsoft JhengHei"/>
-                          <a:ea typeface="Microsoft JhengHei"/>
-                          <a:cs typeface="Microsoft JhengHei"/>
-                        </a:rPr>
-                        <a:t>駭客攻擊</a:t>
-                      </a:r>
-                    </a:p>
-                  </a:txBody>
-                  <a:tcPr anchor="ctr" marL="73152" marT="9144" marB="9144">
-                    <a:solidFill>
-                      <a:srgbClr val="FFFFFF"/>
-                    </a:solidFill>
-                  </a:tcPr>
-                </a:tc>
-                <a:tc>
-                  <a:txBody>
-                    <a:bodyPr/>
-                    <a:lstStyle/>
-                    <a:p>
-                      <a:r>
-                        <a:rPr sz="1150" b="0">
-                          <a:solidFill>
-                            <a:srgbClr val="1A2233"/>
-                          </a:solidFill>
-                          <a:latin typeface="Microsoft JhengHei"/>
-                          <a:ea typeface="Microsoft JhengHei"/>
-                          <a:cs typeface="Microsoft JhengHei"/>
-                        </a:rPr>
-                        <a:t>目前評估對公司營運無重大影響。</a:t>
-                      </a:r>
-                    </a:p>
-                  </a:txBody>
-                  <a:tcPr anchor="ctr" marL="73152" marT="9144" marB="9144">
-                    <a:solidFill>
-                      <a:srgbClr val="FFFFFF"/>
-                    </a:solidFill>
-                  </a:tcPr>
-                </a:tc>
-              </a:tr>
             </a:tbl>
           </a:graphicData>
         </a:graphic>
@@ -5931,7 +5809,7 @@
                 <a:ea typeface="Microsoft JhengHei"/>
                 <a:cs typeface="Microsoft JhengHei"/>
               </a:rPr>
-              <a:t>7 起</a:t>
+              <a:t>6 起</a:t>
             </a:r>
           </a:p>
         </p:txBody>
@@ -5968,7 +5846,7 @@
                 <a:ea typeface="Microsoft JhengHei"/>
                 <a:cs typeface="Microsoft JhengHei"/>
               </a:rPr>
-              <a:t>正瀚-創、久裕、逸達、州巧、藥華藥、上銀、松上</a:t>
+              <a:t>正瀚-創、久裕、逸達、州巧、藥華藥、上銀</a:t>
             </a:r>
           </a:p>
         </p:txBody>
@@ -6885,7 +6763,7 @@
                 <a:gridCol w="3383280"/>
                 <a:gridCol w="2606040"/>
               </a:tblGrid>
-              <a:tr h="373380">
+              <a:tr h="407323">
                 <a:tc>
                   <a:txBody>
                     <a:bodyPr/>
@@ -7007,7 +6885,7 @@
                   </a:tcPr>
                 </a:tc>
               </a:tr>
-              <a:tr h="373380">
+              <a:tr h="407323">
                 <a:tc>
                   <a:txBody>
                     <a:bodyPr/>
@@ -7129,7 +7007,7 @@
                   </a:tcPr>
                 </a:tc>
               </a:tr>
-              <a:tr h="373380">
+              <a:tr h="407323">
                 <a:tc>
                   <a:txBody>
                     <a:bodyPr/>
@@ -7251,7 +7129,7 @@
                   </a:tcPr>
                 </a:tc>
               </a:tr>
-              <a:tr h="373380">
+              <a:tr h="407323">
                 <a:tc>
                   <a:txBody>
                     <a:bodyPr/>
@@ -7373,7 +7251,7 @@
                   </a:tcPr>
                 </a:tc>
               </a:tr>
-              <a:tr h="373380">
+              <a:tr h="407323">
                 <a:tc>
                   <a:txBody>
                     <a:bodyPr/>
@@ -7495,7 +7373,7 @@
                   </a:tcPr>
                 </a:tc>
               </a:tr>
-              <a:tr h="373380">
+              <a:tr h="407323">
                 <a:tc>
                   <a:txBody>
                     <a:bodyPr/>
@@ -7617,7 +7495,7 @@
                   </a:tcPr>
                 </a:tc>
               </a:tr>
-              <a:tr h="373380">
+              <a:tr h="407323">
                 <a:tc>
                   <a:txBody>
                     <a:bodyPr/>
@@ -7739,7 +7617,7 @@
                   </a:tcPr>
                 </a:tc>
               </a:tr>
-              <a:tr h="373380">
+              <a:tr h="407323">
                 <a:tc>
                   <a:txBody>
                     <a:bodyPr/>
@@ -7861,7 +7739,7 @@
                   </a:tcPr>
                 </a:tc>
               </a:tr>
-              <a:tr h="373380">
+              <a:tr h="407323">
                 <a:tc>
                   <a:txBody>
                     <a:bodyPr/>
@@ -7983,7 +7861,7 @@
                   </a:tcPr>
                 </a:tc>
               </a:tr>
-              <a:tr h="373380">
+              <a:tr h="407323">
                 <a:tc>
                   <a:txBody>
                     <a:bodyPr/>
@@ -8105,7 +7983,7 @@
                   </a:tcPr>
                 </a:tc>
               </a:tr>
-              <a:tr h="373380">
+              <a:tr h="407330">
                 <a:tc>
                   <a:txBody>
                     <a:bodyPr/>
@@ -8227,128 +8105,6 @@
                   </a:tcPr>
                 </a:tc>
               </a:tr>
-              <a:tr h="373380">
-                <a:tc>
-                  <a:txBody>
-                    <a:bodyPr/>
-                    <a:lstStyle/>
-                    <a:p>
-                      <a:r>
-                        <a:rPr sz="1150" b="0">
-                          <a:solidFill>
-                            <a:srgbClr val="1A2233"/>
-                          </a:solidFill>
-                          <a:latin typeface="Microsoft JhengHei"/>
-                          <a:ea typeface="Microsoft JhengHei"/>
-                          <a:cs typeface="Microsoft JhengHei"/>
-                        </a:rPr>
-                        <a:t>松上</a:t>
-                      </a:r>
-                    </a:p>
-                  </a:txBody>
-                  <a:tcPr anchor="ctr" marL="73152" marT="9144" marB="9144">
-                    <a:solidFill>
-                      <a:srgbClr val="FFFFFF"/>
-                    </a:solidFill>
-                  </a:tcPr>
-                </a:tc>
-                <a:tc>
-                  <a:txBody>
-                    <a:bodyPr/>
-                    <a:lstStyle/>
-                    <a:p>
-                      <a:r>
-                        <a:rPr sz="1150" b="0">
-                          <a:solidFill>
-                            <a:srgbClr val="1A2233"/>
-                          </a:solidFill>
-                          <a:latin typeface="Microsoft JhengHei"/>
-                          <a:ea typeface="Microsoft JhengHei"/>
-                          <a:cs typeface="Microsoft JhengHei"/>
-                        </a:rPr>
-                        <a:t>6156</a:t>
-                      </a:r>
-                    </a:p>
-                  </a:txBody>
-                  <a:tcPr anchor="ctr" marL="73152" marT="9144" marB="9144">
-                    <a:solidFill>
-                      <a:srgbClr val="FFFFFF"/>
-                    </a:solidFill>
-                  </a:tcPr>
-                </a:tc>
-                <a:tc>
-                  <a:txBody>
-                    <a:bodyPr/>
-                    <a:lstStyle/>
-                    <a:p>
-                      <a:r>
-                        <a:rPr sz="1150" b="1">
-                          <a:solidFill>
-                            <a:srgbClr val="E63946"/>
-                          </a:solidFill>
-                          <a:latin typeface="Microsoft JhengHei"/>
-                          <a:ea typeface="Microsoft JhengHei"/>
-                          <a:cs typeface="Microsoft JhengHei"/>
-                        </a:rPr>
-                        <a:t>駭客攻擊</a:t>
-                      </a:r>
-                    </a:p>
-                  </a:txBody>
-                  <a:tcPr anchor="ctr" marL="73152" marT="9144" marB="9144">
-                    <a:solidFill>
-                      <a:srgbClr val="FFFFFF"/>
-                    </a:solidFill>
-                  </a:tcPr>
-                </a:tc>
-                <a:tc>
-                  <a:txBody>
-                    <a:bodyPr/>
-                    <a:lstStyle/>
-                    <a:p>
-                      <a:r>
-                        <a:rPr sz="1150" b="0">
-                          <a:solidFill>
-                            <a:srgbClr val="1A2233"/>
-                          </a:solidFill>
-                          <a:latin typeface="Microsoft JhengHei"/>
-                          <a:ea typeface="Microsoft JhengHei"/>
-                          <a:cs typeface="Microsoft JhengHei"/>
-                        </a:rPr>
-                        <a:t>安永聯合會計師事務所</a:t>
-                      </a:r>
-                    </a:p>
-                  </a:txBody>
-                  <a:tcPr anchor="ctr" marL="73152" marT="9144" marB="9144">
-                    <a:solidFill>
-                      <a:srgbClr val="FFFFFF"/>
-                    </a:solidFill>
-                  </a:tcPr>
-                </a:tc>
-                <a:tc>
-                  <a:txBody>
-                    <a:bodyPr/>
-                    <a:lstStyle/>
-                    <a:p>
-                      <a:r>
-                        <a:rPr sz="1150" b="0">
-                          <a:solidFill>
-                            <a:srgbClr val="1A2233"/>
-                          </a:solidFill>
-                          <a:latin typeface="Microsoft JhengHei"/>
-                          <a:ea typeface="Microsoft JhengHei"/>
-                          <a:cs typeface="Microsoft JhengHei"/>
-                        </a:rPr>
-                        <a:t>羅筱靖、陳國帥</a:t>
-                      </a:r>
-                    </a:p>
-                  </a:txBody>
-                  <a:tcPr anchor="ctr" marL="73152" marT="9144" marB="9144">
-                    <a:solidFill>
-                      <a:srgbClr val="FFFFFF"/>
-                    </a:solidFill>
-                  </a:tcPr>
-                </a:tc>
-              </a:tr>
             </a:tbl>
           </a:graphicData>
         </a:graphic>
@@ -13235,329 +12991,6 @@
                 <a:cs typeface="Microsoft JhengHei"/>
               </a:rPr>
               <a:t>本公司後續將持續提升網路與資訊基礎架構之安全管控，以確保資訊安全。</a:t>
-            </a:r>
-          </a:p>
-        </p:txBody>
-      </p:sp>
-      <p:sp>
-        <p:nvSpPr>
-          <p:cNvPr id="19" name="Rounded Rectangle 18"/>
-          <p:cNvSpPr/>
-          <p:nvPr/>
-        </p:nvSpPr>
-        <p:spPr>
-          <a:xfrm>
-            <a:off x="548640" y="3886200"/>
-            <a:ext cx="5394960" cy="2148840"/>
-          </a:xfrm>
-          <a:prstGeom prst="roundRect">
-            <a:avLst/>
-          </a:prstGeom>
-          <a:solidFill>
-            <a:srgbClr val="FFFFFF"/>
-          </a:solidFill>
-          <a:ln w="12700">
-            <a:solidFill>
-              <a:srgbClr val="DDE3EE"/>
-            </a:solidFill>
-          </a:ln>
-          <a:effectLst/>
-        </p:spPr>
-        <p:style>
-          <a:lnRef idx="1">
-            <a:schemeClr val="accent1"/>
-          </a:lnRef>
-          <a:fillRef idx="3">
-            <a:schemeClr val="accent1"/>
-          </a:fillRef>
-          <a:effectRef idx="2">
-            <a:schemeClr val="accent1"/>
-          </a:effectRef>
-          <a:fontRef idx="minor">
-            <a:schemeClr val="lt1"/>
-          </a:fontRef>
-        </p:style>
-        <p:txBody>
-          <a:bodyPr rtlCol="0" anchor="ctr"/>
-          <a:lstStyle/>
-          <a:p>
-            <a:pPr algn="ctr"/>
-          </a:p>
-        </p:txBody>
-      </p:sp>
-      <p:sp>
-        <p:nvSpPr>
-          <p:cNvPr id="20" name="Rectangle 19"/>
-          <p:cNvSpPr/>
-          <p:nvPr/>
-        </p:nvSpPr>
-        <p:spPr>
-          <a:xfrm>
-            <a:off x="548640" y="3886200"/>
-            <a:ext cx="5394960" cy="109728"/>
-          </a:xfrm>
-          <a:prstGeom prst="rect">
-            <a:avLst/>
-          </a:prstGeom>
-          <a:solidFill>
-            <a:srgbClr val="E63946"/>
-          </a:solidFill>
-          <a:ln>
-            <a:noFill/>
-          </a:ln>
-          <a:effectLst/>
-        </p:spPr>
-        <p:style>
-          <a:lnRef idx="1">
-            <a:schemeClr val="accent1"/>
-          </a:lnRef>
-          <a:fillRef idx="3">
-            <a:schemeClr val="accent1"/>
-          </a:fillRef>
-          <a:effectRef idx="2">
-            <a:schemeClr val="accent1"/>
-          </a:effectRef>
-          <a:fontRef idx="minor">
-            <a:schemeClr val="lt1"/>
-          </a:fontRef>
-        </p:style>
-        <p:txBody>
-          <a:bodyPr rtlCol="0" anchor="ctr"/>
-          <a:lstStyle/>
-          <a:p>
-            <a:pPr algn="ctr"/>
-          </a:p>
-        </p:txBody>
-      </p:sp>
-      <p:sp>
-        <p:nvSpPr>
-          <p:cNvPr id="21" name="TextBox 20"/>
-          <p:cNvSpPr txBox="1"/>
-          <p:nvPr/>
-        </p:nvSpPr>
-        <p:spPr>
-          <a:xfrm>
-            <a:off x="777240" y="4105656"/>
-            <a:ext cx="3657600" cy="365760"/>
-          </a:xfrm>
-          <a:prstGeom prst="rect">
-            <a:avLst/>
-          </a:prstGeom>
-          <a:noFill/>
-        </p:spPr>
-        <p:txBody>
-          <a:bodyPr wrap="square" anchor="ctr" lIns="0" rIns="0" tIns="0" bIns="0">
-            <a:spAutoFit/>
-          </a:bodyPr>
-          <a:lstStyle/>
-          <a:p>
-            <a:pPr algn="l"/>
-            <a:r>
-              <a:rPr sz="1600" b="1">
-                <a:solidFill>
-                  <a:srgbClr val="1A2233"/>
-                </a:solidFill>
-                <a:latin typeface="Microsoft JhengHei"/>
-                <a:ea typeface="Microsoft JhengHei"/>
-                <a:cs typeface="Microsoft JhengHei"/>
-              </a:rPr>
-              <a:t>松上 </a:t>
-            </a:r>
-            <a:r>
-              <a:rPr sz="1300" b="0">
-                <a:solidFill>
-                  <a:srgbClr val="5C6679"/>
-                </a:solidFill>
-                <a:latin typeface="Microsoft JhengHei"/>
-                <a:ea typeface="Microsoft JhengHei"/>
-                <a:cs typeface="Microsoft JhengHei"/>
-              </a:rPr>
-              <a:t>6156</a:t>
-            </a:r>
-          </a:p>
-        </p:txBody>
-      </p:sp>
-      <p:sp>
-        <p:nvSpPr>
-          <p:cNvPr id="22" name="Rounded Rectangle 21"/>
-          <p:cNvSpPr/>
-          <p:nvPr/>
-        </p:nvSpPr>
-        <p:spPr>
-          <a:xfrm>
-            <a:off x="4526280" y="4123944"/>
-            <a:ext cx="1234440" cy="347472"/>
-          </a:xfrm>
-          <a:prstGeom prst="roundRect">
-            <a:avLst/>
-          </a:prstGeom>
-          <a:solidFill>
-            <a:srgbClr val="E63946"/>
-          </a:solidFill>
-          <a:ln>
-            <a:noFill/>
-          </a:ln>
-          <a:effectLst/>
-        </p:spPr>
-        <p:style>
-          <a:lnRef idx="1">
-            <a:schemeClr val="accent1"/>
-          </a:lnRef>
-          <a:fillRef idx="3">
-            <a:schemeClr val="accent1"/>
-          </a:fillRef>
-          <a:effectRef idx="2">
-            <a:schemeClr val="accent1"/>
-          </a:effectRef>
-          <a:fontRef idx="minor">
-            <a:schemeClr val="lt1"/>
-          </a:fontRef>
-        </p:style>
-        <p:txBody>
-          <a:bodyPr rtlCol="0" anchor="ctr"/>
-          <a:lstStyle/>
-          <a:p>
-            <a:pPr algn="ctr"/>
-          </a:p>
-        </p:txBody>
-      </p:sp>
-      <p:sp>
-        <p:nvSpPr>
-          <p:cNvPr id="23" name="TextBox 22"/>
-          <p:cNvSpPr txBox="1"/>
-          <p:nvPr/>
-        </p:nvSpPr>
-        <p:spPr>
-          <a:xfrm>
-            <a:off x="4526280" y="4123944"/>
-            <a:ext cx="1234440" cy="347472"/>
-          </a:xfrm>
-          <a:prstGeom prst="rect">
-            <a:avLst/>
-          </a:prstGeom>
-          <a:noFill/>
-        </p:spPr>
-        <p:txBody>
-          <a:bodyPr wrap="square" anchor="ctr" lIns="0" rIns="0" tIns="0" bIns="0">
-            <a:spAutoFit/>
-          </a:bodyPr>
-          <a:lstStyle/>
-          <a:p>
-            <a:pPr algn="ctr"/>
-            <a:r>
-              <a:rPr sz="1050" b="1">
-                <a:solidFill>
-                  <a:srgbClr val="FFFFFF"/>
-                </a:solidFill>
-                <a:latin typeface="Microsoft JhengHei"/>
-                <a:ea typeface="Microsoft JhengHei"/>
-                <a:cs typeface="Microsoft JhengHei"/>
-              </a:rPr>
-              <a:t>駭客攻擊</a:t>
-            </a:r>
-          </a:p>
-        </p:txBody>
-      </p:sp>
-      <p:sp>
-        <p:nvSpPr>
-          <p:cNvPr id="24" name="TextBox 23"/>
-          <p:cNvSpPr txBox="1"/>
-          <p:nvPr/>
-        </p:nvSpPr>
-        <p:spPr>
-          <a:xfrm>
-            <a:off x="777240" y="4599432"/>
-            <a:ext cx="4937760" cy="640080"/>
-          </a:xfrm>
-          <a:prstGeom prst="rect">
-            <a:avLst/>
-          </a:prstGeom>
-          <a:noFill/>
-        </p:spPr>
-        <p:txBody>
-          <a:bodyPr wrap="square" anchor="t" lIns="0" rIns="0" tIns="0" bIns="0">
-            <a:spAutoFit/>
-          </a:bodyPr>
-          <a:lstStyle/>
-          <a:p>
-            <a:pPr algn="l">
-              <a:lnSpc>
-                <a:spcPts val="1500"/>
-              </a:lnSpc>
-            </a:pPr>
-            <a:r>
-              <a:rPr sz="1100" b="1">
-                <a:solidFill>
-                  <a:srgbClr val="E63946"/>
-                </a:solidFill>
-                <a:latin typeface="Microsoft JhengHei"/>
-                <a:ea typeface="Microsoft JhengHei"/>
-                <a:cs typeface="Microsoft JhengHei"/>
-              </a:rPr>
-              <a:t>緣由　</a:t>
-            </a:r>
-            <a:r>
-              <a:rPr sz="1100" b="0">
-                <a:solidFill>
-                  <a:srgbClr val="1A2233"/>
-                </a:solidFill>
-                <a:latin typeface="Microsoft JhengHei"/>
-                <a:ea typeface="Microsoft JhengHei"/>
-                <a:cs typeface="Microsoft JhengHei"/>
-              </a:rPr>
-              <a:t>本公司使用之部分資訊系統遭受駭客網路攻擊。</a:t>
-            </a:r>
-          </a:p>
-        </p:txBody>
-      </p:sp>
-      <p:sp>
-        <p:nvSpPr>
-          <p:cNvPr id="25" name="TextBox 24"/>
-          <p:cNvSpPr txBox="1"/>
-          <p:nvPr/>
-        </p:nvSpPr>
-        <p:spPr>
-          <a:xfrm>
-            <a:off x="777240" y="5257800"/>
-            <a:ext cx="4937760" cy="713232"/>
-          </a:xfrm>
-          <a:prstGeom prst="rect">
-            <a:avLst/>
-          </a:prstGeom>
-          <a:noFill/>
-        </p:spPr>
-        <p:txBody>
-          <a:bodyPr wrap="square" anchor="t" lIns="0" rIns="0" tIns="0" bIns="0">
-            <a:spAutoFit/>
-          </a:bodyPr>
-          <a:lstStyle/>
-          <a:p>
-            <a:pPr algn="l">
-              <a:lnSpc>
-                <a:spcPts val="1500"/>
-              </a:lnSpc>
-            </a:pPr>
-            <a:r>
-              <a:rPr sz="1100" b="1">
-                <a:solidFill>
-                  <a:srgbClr val="E63946"/>
-                </a:solidFill>
-                <a:latin typeface="Microsoft JhengHei"/>
-                <a:ea typeface="Microsoft JhengHei"/>
-                <a:cs typeface="Microsoft JhengHei"/>
-              </a:rPr>
-              <a:t>因應　</a:t>
-            </a:r>
-            <a:r>
-              <a:rPr sz="1100" b="0">
-                <a:solidFill>
-                  <a:srgbClr val="1A2233"/>
-                </a:solidFill>
-                <a:latin typeface="Microsoft JhengHei"/>
-                <a:ea typeface="Microsoft JhengHei"/>
-                <a:cs typeface="Microsoft JhengHei"/>
-              </a:rPr>
-              <a:t>本公司後續仍將持續提升網路與資訊基礎架構之安全管控以確保資訊安全。</a:t>
             </a:r>
           </a:p>
         </p:txBody>

--- a/資安事件因應分析.pptx
+++ b/資安事件因應分析.pptx
@@ -197,7 +197,7 @@
                 <c:formatCode>General</c:formatCode>
                 <c:ptCount val="4"/>
                 <c:pt idx="0">
-                  <c:v>6</c:v>
+                  <c:v>7</c:v>
                 </c:pt>
                 <c:pt idx="1">
                   <c:v>1</c:v>
@@ -3543,7 +3543,7 @@
                 <a:ea typeface="Microsoft JhengHei"/>
                 <a:cs typeface="Microsoft JhengHei"/>
               </a:rPr>
-              <a:t>資料期間 2026-07-18 ~ 2026-08-18　｜　MOPS 重大訊息全文檢索　｜　10 家公司</a:t>
+              <a:t>資料期間 2026-07-20 ~ 2026-08-20　｜　MOPS 重大訊息全文檢索　｜　11 家公司</a:t>
             </a:r>
           </a:p>
         </p:txBody>
@@ -3760,7 +3760,7 @@
                 <a:ea typeface="Microsoft JhengHei"/>
                 <a:cs typeface="Microsoft JhengHei"/>
               </a:rPr>
-              <a:t>資料期間內 MOPS 揭露之 10 起資安相關重大訊息</a:t>
+              <a:t>資料期間內 MOPS 揭露之 11 起資安相關重大訊息</a:t>
             </a:r>
           </a:p>
         </p:txBody>
@@ -3843,7 +3843,7 @@
                 <a:ea typeface="Microsoft JhengHei"/>
                 <a:cs typeface="Microsoft JhengHei"/>
               </a:rPr>
-              <a:t>10</a:t>
+              <a:t>11</a:t>
             </a:r>
           </a:p>
         </p:txBody>
@@ -4150,7 +4150,7 @@
                 <a:gridCol w="2286000"/>
                 <a:gridCol w="5120640"/>
               </a:tblGrid>
-              <a:tr h="324196">
+              <a:tr h="297180">
                 <a:tc>
                   <a:txBody>
                     <a:bodyPr/>
@@ -4272,7 +4272,7 @@
                   </a:tcPr>
                 </a:tc>
               </a:tr>
-              <a:tr h="324196">
+              <a:tr h="297180">
                 <a:tc>
                   <a:txBody>
                     <a:bodyPr/>
@@ -4287,7 +4287,7 @@
                           <a:ea typeface="Microsoft JhengHei"/>
                           <a:cs typeface="Microsoft JhengHei"/>
                         </a:rPr>
-                        <a:t>久裕</a:t>
+                        <a:t>上詮</a:t>
                       </a:r>
                     </a:p>
                   </a:txBody>
@@ -4311,7 +4311,251 @@
                           <a:ea typeface="Microsoft JhengHei"/>
                           <a:cs typeface="Microsoft JhengHei"/>
                         </a:rPr>
+                        <a:t>3363</a:t>
+                      </a:r>
+                    </a:p>
+                  </a:txBody>
+                  <a:tcPr anchor="ctr" marL="73152" marT="9144" marB="9144">
+                    <a:solidFill>
+                      <a:srgbClr val="FFFFFF"/>
+                    </a:solidFill>
+                  </a:tcPr>
+                </a:tc>
+                <a:tc>
+                  <a:txBody>
+                    <a:bodyPr/>
+                    <a:lstStyle/>
+                    <a:p>
+                      <a:r>
+                        <a:rPr sz="1150" b="0">
+                          <a:solidFill>
+                            <a:srgbClr val="1A2233"/>
+                          </a:solidFill>
+                          <a:latin typeface="Microsoft JhengHei"/>
+                          <a:ea typeface="Microsoft JhengHei"/>
+                          <a:cs typeface="Microsoft JhengHei"/>
+                        </a:rPr>
+                        <a:t>08/19</a:t>
+                      </a:r>
+                    </a:p>
+                  </a:txBody>
+                  <a:tcPr anchor="ctr" marL="73152" marT="9144" marB="9144">
+                    <a:solidFill>
+                      <a:srgbClr val="FFFFFF"/>
+                    </a:solidFill>
+                  </a:tcPr>
+                </a:tc>
+                <a:tc>
+                  <a:txBody>
+                    <a:bodyPr/>
+                    <a:lstStyle/>
+                    <a:p>
+                      <a:r>
+                        <a:rPr sz="1150" b="1">
+                          <a:solidFill>
+                            <a:srgbClr val="E63946"/>
+                          </a:solidFill>
+                          <a:latin typeface="Microsoft JhengHei"/>
+                          <a:ea typeface="Microsoft JhengHei"/>
+                          <a:cs typeface="Microsoft JhengHei"/>
+                        </a:rPr>
+                        <a:t>駭客攻擊</a:t>
+                      </a:r>
+                    </a:p>
+                  </a:txBody>
+                  <a:tcPr anchor="ctr" marL="73152" marT="9144" marB="9144">
+                    <a:solidFill>
+                      <a:srgbClr val="FFFFFF"/>
+                    </a:solidFill>
+                  </a:tcPr>
+                </a:tc>
+                <a:tc>
+                  <a:txBody>
+                    <a:bodyPr/>
+                    <a:lstStyle/>
+                    <a:p>
+                      <a:r>
+                        <a:rPr sz="1150" b="0">
+                          <a:solidFill>
+                            <a:srgbClr val="1A2233"/>
+                          </a:solidFill>
+                          <a:latin typeface="Microsoft JhengHei"/>
+                          <a:ea typeface="Microsoft JhengHei"/>
+                          <a:cs typeface="Microsoft JhengHei"/>
+                        </a:rPr>
+                        <a:t>目前評估對公司營運無重大影響。</a:t>
+                      </a:r>
+                    </a:p>
+                  </a:txBody>
+                  <a:tcPr anchor="ctr" marL="73152" marT="9144" marB="9144">
+                    <a:solidFill>
+                      <a:srgbClr val="FFFFFF"/>
+                    </a:solidFill>
+                  </a:tcPr>
+                </a:tc>
+              </a:tr>
+              <a:tr h="297180">
+                <a:tc>
+                  <a:txBody>
+                    <a:bodyPr/>
+                    <a:lstStyle/>
+                    <a:p>
+                      <a:r>
+                        <a:rPr sz="1150" b="0">
+                          <a:solidFill>
+                            <a:srgbClr val="1A2233"/>
+                          </a:solidFill>
+                          <a:latin typeface="Microsoft JhengHei"/>
+                          <a:ea typeface="Microsoft JhengHei"/>
+                          <a:cs typeface="Microsoft JhengHei"/>
+                        </a:rPr>
+                        <a:t>久裕</a:t>
+                      </a:r>
+                    </a:p>
+                  </a:txBody>
+                  <a:tcPr anchor="ctr" marL="73152" marT="9144" marB="9144">
+                    <a:solidFill>
+                      <a:srgbClr val="EEF2F9"/>
+                    </a:solidFill>
+                  </a:tcPr>
+                </a:tc>
+                <a:tc>
+                  <a:txBody>
+                    <a:bodyPr/>
+                    <a:lstStyle/>
+                    <a:p>
+                      <a:r>
+                        <a:rPr sz="1150" b="0">
+                          <a:solidFill>
+                            <a:srgbClr val="1A2233"/>
+                          </a:solidFill>
+                          <a:latin typeface="Microsoft JhengHei"/>
+                          <a:ea typeface="Microsoft JhengHei"/>
+                          <a:cs typeface="Microsoft JhengHei"/>
+                        </a:rPr>
                         <a:t>4173</a:t>
+                      </a:r>
+                    </a:p>
+                  </a:txBody>
+                  <a:tcPr anchor="ctr" marL="73152" marT="9144" marB="9144">
+                    <a:solidFill>
+                      <a:srgbClr val="EEF2F9"/>
+                    </a:solidFill>
+                  </a:tcPr>
+                </a:tc>
+                <a:tc>
+                  <a:txBody>
+                    <a:bodyPr/>
+                    <a:lstStyle/>
+                    <a:p>
+                      <a:r>
+                        <a:rPr sz="1150" b="0">
+                          <a:solidFill>
+                            <a:srgbClr val="1A2233"/>
+                          </a:solidFill>
+                          <a:latin typeface="Microsoft JhengHei"/>
+                          <a:ea typeface="Microsoft JhengHei"/>
+                          <a:cs typeface="Microsoft JhengHei"/>
+                        </a:rPr>
+                        <a:t>08/11</a:t>
+                      </a:r>
+                    </a:p>
+                  </a:txBody>
+                  <a:tcPr anchor="ctr" marL="73152" marT="9144" marB="9144">
+                    <a:solidFill>
+                      <a:srgbClr val="EEF2F9"/>
+                    </a:solidFill>
+                  </a:tcPr>
+                </a:tc>
+                <a:tc>
+                  <a:txBody>
+                    <a:bodyPr/>
+                    <a:lstStyle/>
+                    <a:p>
+                      <a:r>
+                        <a:rPr sz="1150" b="1">
+                          <a:solidFill>
+                            <a:srgbClr val="F4A261"/>
+                          </a:solidFill>
+                          <a:latin typeface="Microsoft JhengHei"/>
+                          <a:ea typeface="Microsoft JhengHei"/>
+                          <a:cs typeface="Microsoft JhengHei"/>
+                        </a:rPr>
+                        <a:t>勒索病毒/加密</a:t>
+                      </a:r>
+                    </a:p>
+                  </a:txBody>
+                  <a:tcPr anchor="ctr" marL="73152" marT="9144" marB="9144">
+                    <a:solidFill>
+                      <a:srgbClr val="EEF2F9"/>
+                    </a:solidFill>
+                  </a:tcPr>
+                </a:tc>
+                <a:tc>
+                  <a:txBody>
+                    <a:bodyPr/>
+                    <a:lstStyle/>
+                    <a:p>
+                      <a:r>
+                        <a:rPr sz="1150" b="0">
+                          <a:solidFill>
+                            <a:srgbClr val="1A2233"/>
+                          </a:solidFill>
+                          <a:latin typeface="Microsoft JhengHei"/>
+                          <a:ea typeface="Microsoft JhengHei"/>
+                          <a:cs typeface="Microsoft JhengHei"/>
+                        </a:rPr>
+                        <a:t>尚在評估中，依目前評估對公司營運無重大影響。</a:t>
+                      </a:r>
+                    </a:p>
+                  </a:txBody>
+                  <a:tcPr anchor="ctr" marL="73152" marT="9144" marB="9144">
+                    <a:solidFill>
+                      <a:srgbClr val="EEF2F9"/>
+                    </a:solidFill>
+                  </a:tcPr>
+                </a:tc>
+              </a:tr>
+              <a:tr h="297180">
+                <a:tc>
+                  <a:txBody>
+                    <a:bodyPr/>
+                    <a:lstStyle/>
+                    <a:p>
+                      <a:r>
+                        <a:rPr sz="1150" b="0">
+                          <a:solidFill>
+                            <a:srgbClr val="1A2233"/>
+                          </a:solidFill>
+                          <a:latin typeface="Microsoft JhengHei"/>
+                          <a:ea typeface="Microsoft JhengHei"/>
+                          <a:cs typeface="Microsoft JhengHei"/>
+                        </a:rPr>
+                        <a:t>正瀚-創</a:t>
+                      </a:r>
+                    </a:p>
+                  </a:txBody>
+                  <a:tcPr anchor="ctr" marL="73152" marT="9144" marB="9144">
+                    <a:solidFill>
+                      <a:srgbClr val="FFFFFF"/>
+                    </a:solidFill>
+                  </a:tcPr>
+                </a:tc>
+                <a:tc>
+                  <a:txBody>
+                    <a:bodyPr/>
+                    <a:lstStyle/>
+                    <a:p>
+                      <a:r>
+                        <a:rPr sz="1150" b="0">
+                          <a:solidFill>
+                            <a:srgbClr val="1A2233"/>
+                          </a:solidFill>
+                          <a:latin typeface="Microsoft JhengHei"/>
+                          <a:ea typeface="Microsoft JhengHei"/>
+                          <a:cs typeface="Microsoft JhengHei"/>
+                        </a:rPr>
+                        <a:t>6534</a:t>
                       </a:r>
                     </a:p>
                   </a:txBody>
@@ -4353,13 +4597,13 @@
                       <a:r>
                         <a:rPr sz="1150" b="1">
                           <a:solidFill>
-                            <a:srgbClr val="F4A261"/>
+                            <a:srgbClr val="E63946"/>
                           </a:solidFill>
                           <a:latin typeface="Microsoft JhengHei"/>
                           <a:ea typeface="Microsoft JhengHei"/>
                           <a:cs typeface="Microsoft JhengHei"/>
                         </a:rPr>
-                        <a:t>勒索病毒/加密</a:t>
+                        <a:t>駭客攻擊</a:t>
                       </a:r>
                     </a:p>
                   </a:txBody>
@@ -4383,7 +4627,7 @@
                           <a:ea typeface="Microsoft JhengHei"/>
                           <a:cs typeface="Microsoft JhengHei"/>
                         </a:rPr>
-                        <a:t>尚在評估中，依目前評估對公司營運無重大影響。</a:t>
+                        <a:t>本公司目前正積極會同技術專家協助調查，初步評估對公司營運無重大影響。</a:t>
                       </a:r>
                     </a:p>
                   </a:txBody>
@@ -4394,7 +4638,7 @@
                   </a:tcPr>
                 </a:tc>
               </a:tr>
-              <a:tr h="324196">
+              <a:tr h="297180">
                 <a:tc>
                   <a:txBody>
                     <a:bodyPr/>
@@ -4409,7 +4653,7 @@
                           <a:ea typeface="Microsoft JhengHei"/>
                           <a:cs typeface="Microsoft JhengHei"/>
                         </a:rPr>
-                        <a:t>正瀚-創</a:t>
+                        <a:t>久裕</a:t>
                       </a:r>
                     </a:p>
                   </a:txBody>
@@ -4433,7 +4677,7 @@
                           <a:ea typeface="Microsoft JhengHei"/>
                           <a:cs typeface="Microsoft JhengHei"/>
                         </a:rPr>
-                        <a:t>6534</a:t>
+                        <a:t>4173</a:t>
                       </a:r>
                     </a:p>
                   </a:txBody>
@@ -4457,7 +4701,7 @@
                           <a:ea typeface="Microsoft JhengHei"/>
                           <a:cs typeface="Microsoft JhengHei"/>
                         </a:rPr>
-                        <a:t>08/11</a:t>
+                        <a:t>08/10</a:t>
                       </a:r>
                     </a:p>
                   </a:txBody>
@@ -4516,7 +4760,7 @@
                   </a:tcPr>
                 </a:tc>
               </a:tr>
-              <a:tr h="324196">
+              <a:tr h="297180">
                 <a:tc>
                   <a:txBody>
                     <a:bodyPr/>
@@ -4531,7 +4775,7 @@
                           <a:ea typeface="Microsoft JhengHei"/>
                           <a:cs typeface="Microsoft JhengHei"/>
                         </a:rPr>
-                        <a:t>久裕</a:t>
+                        <a:t>逸達</a:t>
                       </a:r>
                     </a:p>
                   </a:txBody>
@@ -4555,7 +4799,7 @@
                           <a:ea typeface="Microsoft JhengHei"/>
                           <a:cs typeface="Microsoft JhengHei"/>
                         </a:rPr>
-                        <a:t>4173</a:t>
+                        <a:t>6576</a:t>
                       </a:r>
                     </a:p>
                   </a:txBody>
@@ -4579,7 +4823,251 @@
                           <a:ea typeface="Microsoft JhengHei"/>
                           <a:cs typeface="Microsoft JhengHei"/>
                         </a:rPr>
-                        <a:t>08/10</a:t>
+                        <a:t>08/07</a:t>
+                      </a:r>
+                    </a:p>
+                  </a:txBody>
+                  <a:tcPr anchor="ctr" marL="73152" marT="9144" marB="9144">
+                    <a:solidFill>
+                      <a:srgbClr val="FFFFFF"/>
+                    </a:solidFill>
+                  </a:tcPr>
+                </a:tc>
+                <a:tc>
+                  <a:txBody>
+                    <a:bodyPr/>
+                    <a:lstStyle/>
+                    <a:p>
+                      <a:r>
+                        <a:rPr sz="1150" b="1">
+                          <a:solidFill>
+                            <a:srgbClr val="E63946"/>
+                          </a:solidFill>
+                          <a:latin typeface="Microsoft JhengHei"/>
+                          <a:ea typeface="Microsoft JhengHei"/>
+                          <a:cs typeface="Microsoft JhengHei"/>
+                        </a:rPr>
+                        <a:t>駭客攻擊</a:t>
+                      </a:r>
+                    </a:p>
+                  </a:txBody>
+                  <a:tcPr anchor="ctr" marL="73152" marT="9144" marB="9144">
+                    <a:solidFill>
+                      <a:srgbClr val="FFFFFF"/>
+                    </a:solidFill>
+                  </a:tcPr>
+                </a:tc>
+                <a:tc>
+                  <a:txBody>
+                    <a:bodyPr/>
+                    <a:lstStyle/>
+                    <a:p>
+                      <a:r>
+                        <a:rPr sz="1150" b="0">
+                          <a:solidFill>
+                            <a:srgbClr val="1A2233"/>
+                          </a:solidFill>
+                          <a:latin typeface="Microsoft JhengHei"/>
+                          <a:ea typeface="Microsoft JhengHei"/>
+                          <a:cs typeface="Microsoft JhengHei"/>
+                        </a:rPr>
+                        <a:t>本公司目前正積極會同技術專家協助調查，初步評估對公司營運暫無重大影響…</a:t>
+                      </a:r>
+                    </a:p>
+                  </a:txBody>
+                  <a:tcPr anchor="ctr" marL="73152" marT="9144" marB="9144">
+                    <a:solidFill>
+                      <a:srgbClr val="FFFFFF"/>
+                    </a:solidFill>
+                  </a:tcPr>
+                </a:tc>
+              </a:tr>
+              <a:tr h="297180">
+                <a:tc>
+                  <a:txBody>
+                    <a:bodyPr/>
+                    <a:lstStyle/>
+                    <a:p>
+                      <a:r>
+                        <a:rPr sz="1150" b="0">
+                          <a:solidFill>
+                            <a:srgbClr val="1A2233"/>
+                          </a:solidFill>
+                          <a:latin typeface="Microsoft JhengHei"/>
+                          <a:ea typeface="Microsoft JhengHei"/>
+                          <a:cs typeface="Microsoft JhengHei"/>
+                        </a:rPr>
+                        <a:t>州巧</a:t>
+                      </a:r>
+                    </a:p>
+                  </a:txBody>
+                  <a:tcPr anchor="ctr" marL="73152" marT="9144" marB="9144">
+                    <a:solidFill>
+                      <a:srgbClr val="EEF2F9"/>
+                    </a:solidFill>
+                  </a:tcPr>
+                </a:tc>
+                <a:tc>
+                  <a:txBody>
+                    <a:bodyPr/>
+                    <a:lstStyle/>
+                    <a:p>
+                      <a:r>
+                        <a:rPr sz="1150" b="0">
+                          <a:solidFill>
+                            <a:srgbClr val="1A2233"/>
+                          </a:solidFill>
+                          <a:latin typeface="Microsoft JhengHei"/>
+                          <a:ea typeface="Microsoft JhengHei"/>
+                          <a:cs typeface="Microsoft JhengHei"/>
+                        </a:rPr>
+                        <a:t>3543</a:t>
+                      </a:r>
+                    </a:p>
+                  </a:txBody>
+                  <a:tcPr anchor="ctr" marL="73152" marT="9144" marB="9144">
+                    <a:solidFill>
+                      <a:srgbClr val="EEF2F9"/>
+                    </a:solidFill>
+                  </a:tcPr>
+                </a:tc>
+                <a:tc>
+                  <a:txBody>
+                    <a:bodyPr/>
+                    <a:lstStyle/>
+                    <a:p>
+                      <a:r>
+                        <a:rPr sz="1150" b="0">
+                          <a:solidFill>
+                            <a:srgbClr val="1A2233"/>
+                          </a:solidFill>
+                          <a:latin typeface="Microsoft JhengHei"/>
+                          <a:ea typeface="Microsoft JhengHei"/>
+                          <a:cs typeface="Microsoft JhengHei"/>
+                        </a:rPr>
+                        <a:t>08/05</a:t>
+                      </a:r>
+                    </a:p>
+                  </a:txBody>
+                  <a:tcPr anchor="ctr" marL="73152" marT="9144" marB="9144">
+                    <a:solidFill>
+                      <a:srgbClr val="EEF2F9"/>
+                    </a:solidFill>
+                  </a:tcPr>
+                </a:tc>
+                <a:tc>
+                  <a:txBody>
+                    <a:bodyPr/>
+                    <a:lstStyle/>
+                    <a:p>
+                      <a:r>
+                        <a:rPr sz="1150" b="1">
+                          <a:solidFill>
+                            <a:srgbClr val="E63946"/>
+                          </a:solidFill>
+                          <a:latin typeface="Microsoft JhengHei"/>
+                          <a:ea typeface="Microsoft JhengHei"/>
+                          <a:cs typeface="Microsoft JhengHei"/>
+                        </a:rPr>
+                        <a:t>駭客攻擊</a:t>
+                      </a:r>
+                    </a:p>
+                  </a:txBody>
+                  <a:tcPr anchor="ctr" marL="73152" marT="9144" marB="9144">
+                    <a:solidFill>
+                      <a:srgbClr val="EEF2F9"/>
+                    </a:solidFill>
+                  </a:tcPr>
+                </a:tc>
+                <a:tc>
+                  <a:txBody>
+                    <a:bodyPr/>
+                    <a:lstStyle/>
+                    <a:p>
+                      <a:r>
+                        <a:rPr sz="1150" b="0">
+                          <a:solidFill>
+                            <a:srgbClr val="1A2233"/>
+                          </a:solidFill>
+                          <a:latin typeface="Microsoft JhengHei"/>
+                          <a:ea typeface="Microsoft JhengHei"/>
+                          <a:cs typeface="Microsoft JhengHei"/>
+                        </a:rPr>
+                        <a:t>目前初步評估對公司營運無重大影響。</a:t>
+                      </a:r>
+                    </a:p>
+                  </a:txBody>
+                  <a:tcPr anchor="ctr" marL="73152" marT="9144" marB="9144">
+                    <a:solidFill>
+                      <a:srgbClr val="EEF2F9"/>
+                    </a:solidFill>
+                  </a:tcPr>
+                </a:tc>
+              </a:tr>
+              <a:tr h="297180">
+                <a:tc>
+                  <a:txBody>
+                    <a:bodyPr/>
+                    <a:lstStyle/>
+                    <a:p>
+                      <a:r>
+                        <a:rPr sz="1150" b="0">
+                          <a:solidFill>
+                            <a:srgbClr val="1A2233"/>
+                          </a:solidFill>
+                          <a:latin typeface="Microsoft JhengHei"/>
+                          <a:ea typeface="Microsoft JhengHei"/>
+                          <a:cs typeface="Microsoft JhengHei"/>
+                        </a:rPr>
+                        <a:t>藥華藥</a:t>
+                      </a:r>
+                    </a:p>
+                  </a:txBody>
+                  <a:tcPr anchor="ctr" marL="73152" marT="9144" marB="9144">
+                    <a:solidFill>
+                      <a:srgbClr val="FFFFFF"/>
+                    </a:solidFill>
+                  </a:tcPr>
+                </a:tc>
+                <a:tc>
+                  <a:txBody>
+                    <a:bodyPr/>
+                    <a:lstStyle/>
+                    <a:p>
+                      <a:r>
+                        <a:rPr sz="1150" b="0">
+                          <a:solidFill>
+                            <a:srgbClr val="1A2233"/>
+                          </a:solidFill>
+                          <a:latin typeface="Microsoft JhengHei"/>
+                          <a:ea typeface="Microsoft JhengHei"/>
+                          <a:cs typeface="Microsoft JhengHei"/>
+                        </a:rPr>
+                        <a:t>6446</a:t>
+                      </a:r>
+                    </a:p>
+                  </a:txBody>
+                  <a:tcPr anchor="ctr" marL="73152" marT="9144" marB="9144">
+                    <a:solidFill>
+                      <a:srgbClr val="FFFFFF"/>
+                    </a:solidFill>
+                  </a:tcPr>
+                </a:tc>
+                <a:tc>
+                  <a:txBody>
+                    <a:bodyPr/>
+                    <a:lstStyle/>
+                    <a:p>
+                      <a:r>
+                        <a:rPr sz="1150" b="0">
+                          <a:solidFill>
+                            <a:srgbClr val="1A2233"/>
+                          </a:solidFill>
+                          <a:latin typeface="Microsoft JhengHei"/>
+                          <a:ea typeface="Microsoft JhengHei"/>
+                          <a:cs typeface="Microsoft JhengHei"/>
+                        </a:rPr>
+                        <a:t>08/03</a:t>
                       </a:r>
                     </a:p>
                   </a:txBody>
@@ -4638,7 +5126,7 @@
                   </a:tcPr>
                 </a:tc>
               </a:tr>
-              <a:tr h="324196">
+              <a:tr h="297180">
                 <a:tc>
                   <a:txBody>
                     <a:bodyPr/>
@@ -4653,7 +5141,7 @@
                           <a:ea typeface="Microsoft JhengHei"/>
                           <a:cs typeface="Microsoft JhengHei"/>
                         </a:rPr>
-                        <a:t>逸達</a:t>
+                        <a:t>上銀</a:t>
                       </a:r>
                     </a:p>
                   </a:txBody>
@@ -4677,7 +5165,7 @@
                           <a:ea typeface="Microsoft JhengHei"/>
                           <a:cs typeface="Microsoft JhengHei"/>
                         </a:rPr>
-                        <a:t>6576</a:t>
+                        <a:t>2049</a:t>
                       </a:r>
                     </a:p>
                   </a:txBody>
@@ -4701,7 +5189,7 @@
                           <a:ea typeface="Microsoft JhengHei"/>
                           <a:cs typeface="Microsoft JhengHei"/>
                         </a:rPr>
-                        <a:t>08/07</a:t>
+                        <a:t>07/28</a:t>
                       </a:r>
                     </a:p>
                   </a:txBody>
@@ -4749,7 +5237,7 @@
                           <a:ea typeface="Microsoft JhengHei"/>
                           <a:cs typeface="Microsoft JhengHei"/>
                         </a:rPr>
-                        <a:t>本公司目前正積極會同技術專家協助調查，初步評估對公司營運暫無重大影響…</a:t>
+                        <a:t>目前初步評估對公司營運無重大影響。</a:t>
                       </a:r>
                     </a:p>
                   </a:txBody>
@@ -4760,7 +5248,7 @@
                   </a:tcPr>
                 </a:tc>
               </a:tr>
-              <a:tr h="324196">
+              <a:tr h="297180">
                 <a:tc>
                   <a:txBody>
                     <a:bodyPr/>
@@ -4775,7 +5263,7 @@
                           <a:ea typeface="Microsoft JhengHei"/>
                           <a:cs typeface="Microsoft JhengHei"/>
                         </a:rPr>
-                        <a:t>州巧</a:t>
+                        <a:t>萬達寵物</a:t>
                       </a:r>
                     </a:p>
                   </a:txBody>
@@ -4799,7 +5287,7 @@
                           <a:ea typeface="Microsoft JhengHei"/>
                           <a:cs typeface="Microsoft JhengHei"/>
                         </a:rPr>
-                        <a:t>3543</a:t>
+                        <a:t>6968</a:t>
                       </a:r>
                     </a:p>
                   </a:txBody>
@@ -4823,7 +5311,7 @@
                           <a:ea typeface="Microsoft JhengHei"/>
                           <a:cs typeface="Microsoft JhengHei"/>
                         </a:rPr>
-                        <a:t>08/05</a:t>
+                        <a:t>07/27</a:t>
                       </a:r>
                     </a:p>
                   </a:txBody>
@@ -4841,13 +5329,13 @@
                       <a:r>
                         <a:rPr sz="1150" b="1">
                           <a:solidFill>
-                            <a:srgbClr val="E63946"/>
+                            <a:srgbClr val="27A6C4"/>
                           </a:solidFill>
                           <a:latin typeface="Microsoft JhengHei"/>
                           <a:ea typeface="Microsoft JhengHei"/>
                           <a:cs typeface="Microsoft JhengHei"/>
                         </a:rPr>
-                        <a:t>駭客攻擊</a:t>
+                        <a:t>個資外洩</a:t>
                       </a:r>
                     </a:p>
                   </a:txBody>
@@ -4871,7 +5359,7 @@
                           <a:ea typeface="Microsoft JhengHei"/>
                           <a:cs typeface="Microsoft JhengHei"/>
                         </a:rPr>
-                        <a:t>目前初步評估對公司營運無重大影響。</a:t>
+                        <a:t>對本公司財務或業務並無重大影響。</a:t>
                       </a:r>
                     </a:p>
                   </a:txBody>
@@ -4882,7 +5370,7 @@
                   </a:tcPr>
                 </a:tc>
               </a:tr>
-              <a:tr h="324196">
+              <a:tr h="297180">
                 <a:tc>
                   <a:txBody>
                     <a:bodyPr/>
@@ -4897,7 +5385,7 @@
                           <a:ea typeface="Microsoft JhengHei"/>
                           <a:cs typeface="Microsoft JhengHei"/>
                         </a:rPr>
-                        <a:t>藥華藥</a:t>
+                        <a:t>淳安</a:t>
                       </a:r>
                     </a:p>
                   </a:txBody>
@@ -4921,7 +5409,7 @@
                           <a:ea typeface="Microsoft JhengHei"/>
                           <a:cs typeface="Microsoft JhengHei"/>
                         </a:rPr>
-                        <a:t>6446</a:t>
+                        <a:t>6283</a:t>
                       </a:r>
                     </a:p>
                   </a:txBody>
@@ -4945,7 +5433,7 @@
                           <a:ea typeface="Microsoft JhengHei"/>
                           <a:cs typeface="Microsoft JhengHei"/>
                         </a:rPr>
-                        <a:t>08/03</a:t>
+                        <a:t>07/21</a:t>
                       </a:r>
                     </a:p>
                   </a:txBody>
@@ -4963,13 +5451,13 @@
                       <a:r>
                         <a:rPr sz="1150" b="1">
                           <a:solidFill>
-                            <a:srgbClr val="E63946"/>
+                            <a:srgbClr val="5C6679"/>
                           </a:solidFill>
                           <a:latin typeface="Microsoft JhengHei"/>
                           <a:ea typeface="Microsoft JhengHei"/>
                           <a:cs typeface="Microsoft JhengHei"/>
                         </a:rPr>
-                        <a:t>駭客攻擊</a:t>
+                        <a:t>其他</a:t>
                       </a:r>
                     </a:p>
                   </a:txBody>
@@ -4993,7 +5481,7 @@
                           <a:ea typeface="Microsoft JhengHei"/>
                           <a:cs typeface="Microsoft JhengHei"/>
                         </a:rPr>
-                        <a:t>本公司目前正積極會同技術專家協助調查，初步評估對公司營運無重大影響。</a:t>
+                        <a:t>經評估對公司營運無重大影響。</a:t>
                       </a:r>
                     </a:p>
                   </a:txBody>
@@ -5004,251 +5492,7 @@
                   </a:tcPr>
                 </a:tc>
               </a:tr>
-              <a:tr h="324196">
-                <a:tc>
-                  <a:txBody>
-                    <a:bodyPr/>
-                    <a:lstStyle/>
-                    <a:p>
-                      <a:r>
-                        <a:rPr sz="1150" b="0">
-                          <a:solidFill>
-                            <a:srgbClr val="1A2233"/>
-                          </a:solidFill>
-                          <a:latin typeface="Microsoft JhengHei"/>
-                          <a:ea typeface="Microsoft JhengHei"/>
-                          <a:cs typeface="Microsoft JhengHei"/>
-                        </a:rPr>
-                        <a:t>上銀</a:t>
-                      </a:r>
-                    </a:p>
-                  </a:txBody>
-                  <a:tcPr anchor="ctr" marL="73152" marT="9144" marB="9144">
-                    <a:solidFill>
-                      <a:srgbClr val="FFFFFF"/>
-                    </a:solidFill>
-                  </a:tcPr>
-                </a:tc>
-                <a:tc>
-                  <a:txBody>
-                    <a:bodyPr/>
-                    <a:lstStyle/>
-                    <a:p>
-                      <a:r>
-                        <a:rPr sz="1150" b="0">
-                          <a:solidFill>
-                            <a:srgbClr val="1A2233"/>
-                          </a:solidFill>
-                          <a:latin typeface="Microsoft JhengHei"/>
-                          <a:ea typeface="Microsoft JhengHei"/>
-                          <a:cs typeface="Microsoft JhengHei"/>
-                        </a:rPr>
-                        <a:t>2049</a:t>
-                      </a:r>
-                    </a:p>
-                  </a:txBody>
-                  <a:tcPr anchor="ctr" marL="73152" marT="9144" marB="9144">
-                    <a:solidFill>
-                      <a:srgbClr val="FFFFFF"/>
-                    </a:solidFill>
-                  </a:tcPr>
-                </a:tc>
-                <a:tc>
-                  <a:txBody>
-                    <a:bodyPr/>
-                    <a:lstStyle/>
-                    <a:p>
-                      <a:r>
-                        <a:rPr sz="1150" b="0">
-                          <a:solidFill>
-                            <a:srgbClr val="1A2233"/>
-                          </a:solidFill>
-                          <a:latin typeface="Microsoft JhengHei"/>
-                          <a:ea typeface="Microsoft JhengHei"/>
-                          <a:cs typeface="Microsoft JhengHei"/>
-                        </a:rPr>
-                        <a:t>07/28</a:t>
-                      </a:r>
-                    </a:p>
-                  </a:txBody>
-                  <a:tcPr anchor="ctr" marL="73152" marT="9144" marB="9144">
-                    <a:solidFill>
-                      <a:srgbClr val="FFFFFF"/>
-                    </a:solidFill>
-                  </a:tcPr>
-                </a:tc>
-                <a:tc>
-                  <a:txBody>
-                    <a:bodyPr/>
-                    <a:lstStyle/>
-                    <a:p>
-                      <a:r>
-                        <a:rPr sz="1150" b="1">
-                          <a:solidFill>
-                            <a:srgbClr val="E63946"/>
-                          </a:solidFill>
-                          <a:latin typeface="Microsoft JhengHei"/>
-                          <a:ea typeface="Microsoft JhengHei"/>
-                          <a:cs typeface="Microsoft JhengHei"/>
-                        </a:rPr>
-                        <a:t>駭客攻擊</a:t>
-                      </a:r>
-                    </a:p>
-                  </a:txBody>
-                  <a:tcPr anchor="ctr" marL="73152" marT="9144" marB="9144">
-                    <a:solidFill>
-                      <a:srgbClr val="FFFFFF"/>
-                    </a:solidFill>
-                  </a:tcPr>
-                </a:tc>
-                <a:tc>
-                  <a:txBody>
-                    <a:bodyPr/>
-                    <a:lstStyle/>
-                    <a:p>
-                      <a:r>
-                        <a:rPr sz="1150" b="0">
-                          <a:solidFill>
-                            <a:srgbClr val="1A2233"/>
-                          </a:solidFill>
-                          <a:latin typeface="Microsoft JhengHei"/>
-                          <a:ea typeface="Microsoft JhengHei"/>
-                          <a:cs typeface="Microsoft JhengHei"/>
-                        </a:rPr>
-                        <a:t>目前初步評估對公司營運無重大影響。</a:t>
-                      </a:r>
-                    </a:p>
-                  </a:txBody>
-                  <a:tcPr anchor="ctr" marL="73152" marT="9144" marB="9144">
-                    <a:solidFill>
-                      <a:srgbClr val="FFFFFF"/>
-                    </a:solidFill>
-                  </a:tcPr>
-                </a:tc>
-              </a:tr>
-              <a:tr h="324196">
-                <a:tc>
-                  <a:txBody>
-                    <a:bodyPr/>
-                    <a:lstStyle/>
-                    <a:p>
-                      <a:r>
-                        <a:rPr sz="1150" b="0">
-                          <a:solidFill>
-                            <a:srgbClr val="1A2233"/>
-                          </a:solidFill>
-                          <a:latin typeface="Microsoft JhengHei"/>
-                          <a:ea typeface="Microsoft JhengHei"/>
-                          <a:cs typeface="Microsoft JhengHei"/>
-                        </a:rPr>
-                        <a:t>萬達寵物</a:t>
-                      </a:r>
-                    </a:p>
-                  </a:txBody>
-                  <a:tcPr anchor="ctr" marL="73152" marT="9144" marB="9144">
-                    <a:solidFill>
-                      <a:srgbClr val="EEF2F9"/>
-                    </a:solidFill>
-                  </a:tcPr>
-                </a:tc>
-                <a:tc>
-                  <a:txBody>
-                    <a:bodyPr/>
-                    <a:lstStyle/>
-                    <a:p>
-                      <a:r>
-                        <a:rPr sz="1150" b="0">
-                          <a:solidFill>
-                            <a:srgbClr val="1A2233"/>
-                          </a:solidFill>
-                          <a:latin typeface="Microsoft JhengHei"/>
-                          <a:ea typeface="Microsoft JhengHei"/>
-                          <a:cs typeface="Microsoft JhengHei"/>
-                        </a:rPr>
-                        <a:t>6968</a:t>
-                      </a:r>
-                    </a:p>
-                  </a:txBody>
-                  <a:tcPr anchor="ctr" marL="73152" marT="9144" marB="9144">
-                    <a:solidFill>
-                      <a:srgbClr val="EEF2F9"/>
-                    </a:solidFill>
-                  </a:tcPr>
-                </a:tc>
-                <a:tc>
-                  <a:txBody>
-                    <a:bodyPr/>
-                    <a:lstStyle/>
-                    <a:p>
-                      <a:r>
-                        <a:rPr sz="1150" b="0">
-                          <a:solidFill>
-                            <a:srgbClr val="1A2233"/>
-                          </a:solidFill>
-                          <a:latin typeface="Microsoft JhengHei"/>
-                          <a:ea typeface="Microsoft JhengHei"/>
-                          <a:cs typeface="Microsoft JhengHei"/>
-                        </a:rPr>
-                        <a:t>07/27</a:t>
-                      </a:r>
-                    </a:p>
-                  </a:txBody>
-                  <a:tcPr anchor="ctr" marL="73152" marT="9144" marB="9144">
-                    <a:solidFill>
-                      <a:srgbClr val="EEF2F9"/>
-                    </a:solidFill>
-                  </a:tcPr>
-                </a:tc>
-                <a:tc>
-                  <a:txBody>
-                    <a:bodyPr/>
-                    <a:lstStyle/>
-                    <a:p>
-                      <a:r>
-                        <a:rPr sz="1150" b="1">
-                          <a:solidFill>
-                            <a:srgbClr val="27A6C4"/>
-                          </a:solidFill>
-                          <a:latin typeface="Microsoft JhengHei"/>
-                          <a:ea typeface="Microsoft JhengHei"/>
-                          <a:cs typeface="Microsoft JhengHei"/>
-                        </a:rPr>
-                        <a:t>個資外洩</a:t>
-                      </a:r>
-                    </a:p>
-                  </a:txBody>
-                  <a:tcPr anchor="ctr" marL="73152" marT="9144" marB="9144">
-                    <a:solidFill>
-                      <a:srgbClr val="EEF2F9"/>
-                    </a:solidFill>
-                  </a:tcPr>
-                </a:tc>
-                <a:tc>
-                  <a:txBody>
-                    <a:bodyPr/>
-                    <a:lstStyle/>
-                    <a:p>
-                      <a:r>
-                        <a:rPr sz="1150" b="0">
-                          <a:solidFill>
-                            <a:srgbClr val="1A2233"/>
-                          </a:solidFill>
-                          <a:latin typeface="Microsoft JhengHei"/>
-                          <a:ea typeface="Microsoft JhengHei"/>
-                          <a:cs typeface="Microsoft JhengHei"/>
-                        </a:rPr>
-                        <a:t>對本公司財務或業務並無重大影響。</a:t>
-                      </a:r>
-                    </a:p>
-                  </a:txBody>
-                  <a:tcPr anchor="ctr" marL="73152" marT="9144" marB="9144">
-                    <a:solidFill>
-                      <a:srgbClr val="EEF2F9"/>
-                    </a:solidFill>
-                  </a:tcPr>
-                </a:tc>
-              </a:tr>
-              <a:tr h="324196">
+              <a:tr h="297180">
                 <a:tc>
                   <a:txBody>
                     <a:bodyPr/>
@@ -5311,7 +5555,7 @@
                           <a:ea typeface="Microsoft JhengHei"/>
                           <a:cs typeface="Microsoft JhengHei"/>
                         </a:rPr>
-                        <a:t>07/21</a:t>
+                        <a:t>07/20</a:t>
                       </a:r>
                     </a:p>
                   </a:txBody>
@@ -5370,128 +5614,6 @@
                   </a:tcPr>
                 </a:tc>
               </a:tr>
-              <a:tr h="324200">
-                <a:tc>
-                  <a:txBody>
-                    <a:bodyPr/>
-                    <a:lstStyle/>
-                    <a:p>
-                      <a:r>
-                        <a:rPr sz="1150" b="0">
-                          <a:solidFill>
-                            <a:srgbClr val="1A2233"/>
-                          </a:solidFill>
-                          <a:latin typeface="Microsoft JhengHei"/>
-                          <a:ea typeface="Microsoft JhengHei"/>
-                          <a:cs typeface="Microsoft JhengHei"/>
-                        </a:rPr>
-                        <a:t>淳安</a:t>
-                      </a:r>
-                    </a:p>
-                  </a:txBody>
-                  <a:tcPr anchor="ctr" marL="73152" marT="9144" marB="9144">
-                    <a:solidFill>
-                      <a:srgbClr val="EEF2F9"/>
-                    </a:solidFill>
-                  </a:tcPr>
-                </a:tc>
-                <a:tc>
-                  <a:txBody>
-                    <a:bodyPr/>
-                    <a:lstStyle/>
-                    <a:p>
-                      <a:r>
-                        <a:rPr sz="1150" b="0">
-                          <a:solidFill>
-                            <a:srgbClr val="1A2233"/>
-                          </a:solidFill>
-                          <a:latin typeface="Microsoft JhengHei"/>
-                          <a:ea typeface="Microsoft JhengHei"/>
-                          <a:cs typeface="Microsoft JhengHei"/>
-                        </a:rPr>
-                        <a:t>6283</a:t>
-                      </a:r>
-                    </a:p>
-                  </a:txBody>
-                  <a:tcPr anchor="ctr" marL="73152" marT="9144" marB="9144">
-                    <a:solidFill>
-                      <a:srgbClr val="EEF2F9"/>
-                    </a:solidFill>
-                  </a:tcPr>
-                </a:tc>
-                <a:tc>
-                  <a:txBody>
-                    <a:bodyPr/>
-                    <a:lstStyle/>
-                    <a:p>
-                      <a:r>
-                        <a:rPr sz="1150" b="0">
-                          <a:solidFill>
-                            <a:srgbClr val="1A2233"/>
-                          </a:solidFill>
-                          <a:latin typeface="Microsoft JhengHei"/>
-                          <a:ea typeface="Microsoft JhengHei"/>
-                          <a:cs typeface="Microsoft JhengHei"/>
-                        </a:rPr>
-                        <a:t>07/20</a:t>
-                      </a:r>
-                    </a:p>
-                  </a:txBody>
-                  <a:tcPr anchor="ctr" marL="73152" marT="9144" marB="9144">
-                    <a:solidFill>
-                      <a:srgbClr val="EEF2F9"/>
-                    </a:solidFill>
-                  </a:tcPr>
-                </a:tc>
-                <a:tc>
-                  <a:txBody>
-                    <a:bodyPr/>
-                    <a:lstStyle/>
-                    <a:p>
-                      <a:r>
-                        <a:rPr sz="1150" b="1">
-                          <a:solidFill>
-                            <a:srgbClr val="5C6679"/>
-                          </a:solidFill>
-                          <a:latin typeface="Microsoft JhengHei"/>
-                          <a:ea typeface="Microsoft JhengHei"/>
-                          <a:cs typeface="Microsoft JhengHei"/>
-                        </a:rPr>
-                        <a:t>其他</a:t>
-                      </a:r>
-                    </a:p>
-                  </a:txBody>
-                  <a:tcPr anchor="ctr" marL="73152" marT="9144" marB="9144">
-                    <a:solidFill>
-                      <a:srgbClr val="EEF2F9"/>
-                    </a:solidFill>
-                  </a:tcPr>
-                </a:tc>
-                <a:tc>
-                  <a:txBody>
-                    <a:bodyPr/>
-                    <a:lstStyle/>
-                    <a:p>
-                      <a:r>
-                        <a:rPr sz="1150" b="0">
-                          <a:solidFill>
-                            <a:srgbClr val="1A2233"/>
-                          </a:solidFill>
-                          <a:latin typeface="Microsoft JhengHei"/>
-                          <a:ea typeface="Microsoft JhengHei"/>
-                          <a:cs typeface="Microsoft JhengHei"/>
-                        </a:rPr>
-                        <a:t>經評估對公司營運無重大影響。</a:t>
-                      </a:r>
-                    </a:p>
-                  </a:txBody>
-                  <a:tcPr anchor="ctr" marL="73152" marT="9144" marB="9144">
-                    <a:solidFill>
-                      <a:srgbClr val="EEF2F9"/>
-                    </a:solidFill>
-                  </a:tcPr>
-                </a:tc>
-              </a:tr>
             </a:tbl>
           </a:graphicData>
         </a:graphic>
@@ -5809,7 +5931,7 @@
                 <a:ea typeface="Microsoft JhengHei"/>
                 <a:cs typeface="Microsoft JhengHei"/>
               </a:rPr>
-              <a:t>6 起</a:t>
+              <a:t>7 起</a:t>
             </a:r>
           </a:p>
         </p:txBody>
@@ -5846,7 +5968,7 @@
                 <a:ea typeface="Microsoft JhengHei"/>
                 <a:cs typeface="Microsoft JhengHei"/>
               </a:rPr>
-              <a:t>正瀚-創、久裕、逸達、州巧、藥華藥、上銀</a:t>
+              <a:t>上詮、正瀚-創、久裕、逸達、州巧、藥華藥、上銀</a:t>
             </a:r>
           </a:p>
         </p:txBody>
@@ -6763,7 +6885,7 @@
                 <a:gridCol w="3383280"/>
                 <a:gridCol w="2606040"/>
               </a:tblGrid>
-              <a:tr h="407323">
+              <a:tr h="373380">
                 <a:tc>
                   <a:txBody>
                     <a:bodyPr/>
@@ -6885,7 +7007,7 @@
                   </a:tcPr>
                 </a:tc>
               </a:tr>
-              <a:tr h="407323">
+              <a:tr h="373380">
                 <a:tc>
                   <a:txBody>
                     <a:bodyPr/>
@@ -6900,7 +7022,7 @@
                           <a:ea typeface="Microsoft JhengHei"/>
                           <a:cs typeface="Microsoft JhengHei"/>
                         </a:rPr>
-                        <a:t>久裕</a:t>
+                        <a:t>上詮</a:t>
                       </a:r>
                     </a:p>
                   </a:txBody>
@@ -6924,13 +7046,135 @@
                           <a:ea typeface="Microsoft JhengHei"/>
                           <a:cs typeface="Microsoft JhengHei"/>
                         </a:rPr>
+                        <a:t>3363</a:t>
+                      </a:r>
+                    </a:p>
+                  </a:txBody>
+                  <a:tcPr anchor="ctr" marL="73152" marT="9144" marB="9144">
+                    <a:solidFill>
+                      <a:srgbClr val="FFFFFF"/>
+                    </a:solidFill>
+                  </a:tcPr>
+                </a:tc>
+                <a:tc>
+                  <a:txBody>
+                    <a:bodyPr/>
+                    <a:lstStyle/>
+                    <a:p>
+                      <a:r>
+                        <a:rPr sz="1150" b="1">
+                          <a:solidFill>
+                            <a:srgbClr val="E63946"/>
+                          </a:solidFill>
+                          <a:latin typeface="Microsoft JhengHei"/>
+                          <a:ea typeface="Microsoft JhengHei"/>
+                          <a:cs typeface="Microsoft JhengHei"/>
+                        </a:rPr>
+                        <a:t>駭客攻擊</a:t>
+                      </a:r>
+                    </a:p>
+                  </a:txBody>
+                  <a:tcPr anchor="ctr" marL="73152" marT="9144" marB="9144">
+                    <a:solidFill>
+                      <a:srgbClr val="FFFFFF"/>
+                    </a:solidFill>
+                  </a:tcPr>
+                </a:tc>
+                <a:tc>
+                  <a:txBody>
+                    <a:bodyPr/>
+                    <a:lstStyle/>
+                    <a:p>
+                      <a:r>
+                        <a:rPr sz="1150" b="0">
+                          <a:solidFill>
+                            <a:srgbClr val="1A2233"/>
+                          </a:solidFill>
+                          <a:latin typeface="Microsoft JhengHei"/>
+                          <a:ea typeface="Microsoft JhengHei"/>
+                          <a:cs typeface="Microsoft JhengHei"/>
+                        </a:rPr>
+                        <a:t>資誠聯合會計師事務所</a:t>
+                      </a:r>
+                    </a:p>
+                  </a:txBody>
+                  <a:tcPr anchor="ctr" marL="73152" marT="9144" marB="9144">
+                    <a:solidFill>
+                      <a:srgbClr val="FFFFFF"/>
+                    </a:solidFill>
+                  </a:tcPr>
+                </a:tc>
+                <a:tc>
+                  <a:txBody>
+                    <a:bodyPr/>
+                    <a:lstStyle/>
+                    <a:p>
+                      <a:r>
+                        <a:rPr sz="1150" b="0">
+                          <a:solidFill>
+                            <a:srgbClr val="1A2233"/>
+                          </a:solidFill>
+                          <a:latin typeface="Microsoft JhengHei"/>
+                          <a:ea typeface="Microsoft JhengHei"/>
+                          <a:cs typeface="Microsoft JhengHei"/>
+                        </a:rPr>
+                        <a:t>白淑蒨、李典易</a:t>
+                      </a:r>
+                    </a:p>
+                  </a:txBody>
+                  <a:tcPr anchor="ctr" marL="73152" marT="9144" marB="9144">
+                    <a:solidFill>
+                      <a:srgbClr val="FFFFFF"/>
+                    </a:solidFill>
+                  </a:tcPr>
+                </a:tc>
+              </a:tr>
+              <a:tr h="373380">
+                <a:tc>
+                  <a:txBody>
+                    <a:bodyPr/>
+                    <a:lstStyle/>
+                    <a:p>
+                      <a:r>
+                        <a:rPr sz="1150" b="0">
+                          <a:solidFill>
+                            <a:srgbClr val="1A2233"/>
+                          </a:solidFill>
+                          <a:latin typeface="Microsoft JhengHei"/>
+                          <a:ea typeface="Microsoft JhengHei"/>
+                          <a:cs typeface="Microsoft JhengHei"/>
+                        </a:rPr>
+                        <a:t>久裕</a:t>
+                      </a:r>
+                    </a:p>
+                  </a:txBody>
+                  <a:tcPr anchor="ctr" marL="73152" marT="9144" marB="9144">
+                    <a:solidFill>
+                      <a:srgbClr val="EEF2F9"/>
+                    </a:solidFill>
+                  </a:tcPr>
+                </a:tc>
+                <a:tc>
+                  <a:txBody>
+                    <a:bodyPr/>
+                    <a:lstStyle/>
+                    <a:p>
+                      <a:r>
+                        <a:rPr sz="1150" b="0">
+                          <a:solidFill>
+                            <a:srgbClr val="1A2233"/>
+                          </a:solidFill>
+                          <a:latin typeface="Microsoft JhengHei"/>
+                          <a:ea typeface="Microsoft JhengHei"/>
+                          <a:cs typeface="Microsoft JhengHei"/>
+                        </a:rPr>
                         <a:t>4173</a:t>
                       </a:r>
                     </a:p>
                   </a:txBody>
                   <a:tcPr anchor="ctr" marL="73152" marT="9144" marB="9144">
                     <a:solidFill>
-                      <a:srgbClr val="FFFFFF"/>
+                      <a:srgbClr val="EEF2F9"/>
                     </a:solidFill>
                   </a:tcPr>
                 </a:tc>
@@ -6949,6 +7193,128 @@
                           <a:cs typeface="Microsoft JhengHei"/>
                         </a:rPr>
                         <a:t>勒索病毒/加密</a:t>
+                      </a:r>
+                    </a:p>
+                  </a:txBody>
+                  <a:tcPr anchor="ctr" marL="73152" marT="9144" marB="9144">
+                    <a:solidFill>
+                      <a:srgbClr val="EEF2F9"/>
+                    </a:solidFill>
+                  </a:tcPr>
+                </a:tc>
+                <a:tc>
+                  <a:txBody>
+                    <a:bodyPr/>
+                    <a:lstStyle/>
+                    <a:p>
+                      <a:r>
+                        <a:rPr sz="1150" b="0">
+                          <a:solidFill>
+                            <a:srgbClr val="1A2233"/>
+                          </a:solidFill>
+                          <a:latin typeface="Microsoft JhengHei"/>
+                          <a:ea typeface="Microsoft JhengHei"/>
+                          <a:cs typeface="Microsoft JhengHei"/>
+                        </a:rPr>
+                        <a:t>安侯建業聯合會計師事務所</a:t>
+                      </a:r>
+                    </a:p>
+                  </a:txBody>
+                  <a:tcPr anchor="ctr" marL="73152" marT="9144" marB="9144">
+                    <a:solidFill>
+                      <a:srgbClr val="EEF2F9"/>
+                    </a:solidFill>
+                  </a:tcPr>
+                </a:tc>
+                <a:tc>
+                  <a:txBody>
+                    <a:bodyPr/>
+                    <a:lstStyle/>
+                    <a:p>
+                      <a:r>
+                        <a:rPr sz="1150" b="0">
+                          <a:solidFill>
+                            <a:srgbClr val="1A2233"/>
+                          </a:solidFill>
+                          <a:latin typeface="Microsoft JhengHei"/>
+                          <a:ea typeface="Microsoft JhengHei"/>
+                          <a:cs typeface="Microsoft JhengHei"/>
+                        </a:rPr>
+                        <a:t>郭柔蘭、江曉苓</a:t>
+                      </a:r>
+                    </a:p>
+                  </a:txBody>
+                  <a:tcPr anchor="ctr" marL="73152" marT="9144" marB="9144">
+                    <a:solidFill>
+                      <a:srgbClr val="EEF2F9"/>
+                    </a:solidFill>
+                  </a:tcPr>
+                </a:tc>
+              </a:tr>
+              <a:tr h="373380">
+                <a:tc>
+                  <a:txBody>
+                    <a:bodyPr/>
+                    <a:lstStyle/>
+                    <a:p>
+                      <a:r>
+                        <a:rPr sz="1150" b="0">
+                          <a:solidFill>
+                            <a:srgbClr val="1A2233"/>
+                          </a:solidFill>
+                          <a:latin typeface="Microsoft JhengHei"/>
+                          <a:ea typeface="Microsoft JhengHei"/>
+                          <a:cs typeface="Microsoft JhengHei"/>
+                        </a:rPr>
+                        <a:t>正瀚-創</a:t>
+                      </a:r>
+                    </a:p>
+                  </a:txBody>
+                  <a:tcPr anchor="ctr" marL="73152" marT="9144" marB="9144">
+                    <a:solidFill>
+                      <a:srgbClr val="FFFFFF"/>
+                    </a:solidFill>
+                  </a:tcPr>
+                </a:tc>
+                <a:tc>
+                  <a:txBody>
+                    <a:bodyPr/>
+                    <a:lstStyle/>
+                    <a:p>
+                      <a:r>
+                        <a:rPr sz="1150" b="0">
+                          <a:solidFill>
+                            <a:srgbClr val="1A2233"/>
+                          </a:solidFill>
+                          <a:latin typeface="Microsoft JhengHei"/>
+                          <a:ea typeface="Microsoft JhengHei"/>
+                          <a:cs typeface="Microsoft JhengHei"/>
+                        </a:rPr>
+                        <a:t>6534</a:t>
+                      </a:r>
+                    </a:p>
+                  </a:txBody>
+                  <a:tcPr anchor="ctr" marL="73152" marT="9144" marB="9144">
+                    <a:solidFill>
+                      <a:srgbClr val="FFFFFF"/>
+                    </a:solidFill>
+                  </a:tcPr>
+                </a:tc>
+                <a:tc>
+                  <a:txBody>
+                    <a:bodyPr/>
+                    <a:lstStyle/>
+                    <a:p>
+                      <a:r>
+                        <a:rPr sz="1150" b="1">
+                          <a:solidFill>
+                            <a:srgbClr val="E63946"/>
+                          </a:solidFill>
+                          <a:latin typeface="Microsoft JhengHei"/>
+                          <a:ea typeface="Microsoft JhengHei"/>
+                          <a:cs typeface="Microsoft JhengHei"/>
+                        </a:rPr>
+                        <a:t>駭客攻擊</a:t>
                       </a:r>
                     </a:p>
                   </a:txBody>
@@ -6996,7 +7362,7 @@
                           <a:ea typeface="Microsoft JhengHei"/>
                           <a:cs typeface="Microsoft JhengHei"/>
                         </a:rPr>
-                        <a:t>郭柔蘭、江曉苓</a:t>
+                        <a:t>陳政學、張字信</a:t>
                       </a:r>
                     </a:p>
                   </a:txBody>
@@ -7007,7 +7373,7 @@
                   </a:tcPr>
                 </a:tc>
               </a:tr>
-              <a:tr h="407323">
+              <a:tr h="373380">
                 <a:tc>
                   <a:txBody>
                     <a:bodyPr/>
@@ -7022,7 +7388,7 @@
                           <a:ea typeface="Microsoft JhengHei"/>
                           <a:cs typeface="Microsoft JhengHei"/>
                         </a:rPr>
-                        <a:t>正瀚-創</a:t>
+                        <a:t>久裕</a:t>
                       </a:r>
                     </a:p>
                   </a:txBody>
@@ -7046,7 +7412,7 @@
                           <a:ea typeface="Microsoft JhengHei"/>
                           <a:cs typeface="Microsoft JhengHei"/>
                         </a:rPr>
-                        <a:t>6534</a:t>
+                        <a:t>4173</a:t>
                       </a:r>
                     </a:p>
                   </a:txBody>
@@ -7118,7 +7484,7 @@
                           <a:ea typeface="Microsoft JhengHei"/>
                           <a:cs typeface="Microsoft JhengHei"/>
                         </a:rPr>
-                        <a:t>陳政學、張字信</a:t>
+                        <a:t>郭柔蘭、江曉苓</a:t>
                       </a:r>
                     </a:p>
                   </a:txBody>
@@ -7129,7 +7495,7 @@
                   </a:tcPr>
                 </a:tc>
               </a:tr>
-              <a:tr h="407323">
+              <a:tr h="373380">
                 <a:tc>
                   <a:txBody>
                     <a:bodyPr/>
@@ -7144,7 +7510,7 @@
                           <a:ea typeface="Microsoft JhengHei"/>
                           <a:cs typeface="Microsoft JhengHei"/>
                         </a:rPr>
-                        <a:t>久裕</a:t>
+                        <a:t>逸達</a:t>
                       </a:r>
                     </a:p>
                   </a:txBody>
@@ -7168,7 +7534,7 @@
                           <a:ea typeface="Microsoft JhengHei"/>
                           <a:cs typeface="Microsoft JhengHei"/>
                         </a:rPr>
-                        <a:t>4173</a:t>
+                        <a:t>6576</a:t>
                       </a:r>
                     </a:p>
                   </a:txBody>
@@ -7216,7 +7582,7 @@
                           <a:ea typeface="Microsoft JhengHei"/>
                           <a:cs typeface="Microsoft JhengHei"/>
                         </a:rPr>
-                        <a:t>安侯建業聯合會計師事務所</a:t>
+                        <a:t>資誠聯合會計師事務所</a:t>
                       </a:r>
                     </a:p>
                   </a:txBody>
@@ -7240,7 +7606,7 @@
                           <a:ea typeface="Microsoft JhengHei"/>
                           <a:cs typeface="Microsoft JhengHei"/>
                         </a:rPr>
-                        <a:t>郭柔蘭、江曉苓</a:t>
+                        <a:t>蔡蓓華、顏裕芳</a:t>
                       </a:r>
                     </a:p>
                   </a:txBody>
@@ -7251,7 +7617,7 @@
                   </a:tcPr>
                 </a:tc>
               </a:tr>
-              <a:tr h="407323">
+              <a:tr h="373380">
                 <a:tc>
                   <a:txBody>
                     <a:bodyPr/>
@@ -7266,7 +7632,7 @@
                           <a:ea typeface="Microsoft JhengHei"/>
                           <a:cs typeface="Microsoft JhengHei"/>
                         </a:rPr>
-                        <a:t>逸達</a:t>
+                        <a:t>州巧</a:t>
                       </a:r>
                     </a:p>
                   </a:txBody>
@@ -7290,7 +7656,7 @@
                           <a:ea typeface="Microsoft JhengHei"/>
                           <a:cs typeface="Microsoft JhengHei"/>
                         </a:rPr>
-                        <a:t>6576</a:t>
+                        <a:t>3543</a:t>
                       </a:r>
                     </a:p>
                   </a:txBody>
@@ -7362,7 +7728,7 @@
                           <a:ea typeface="Microsoft JhengHei"/>
                           <a:cs typeface="Microsoft JhengHei"/>
                         </a:rPr>
-                        <a:t>蔡蓓華、顏裕芳</a:t>
+                        <a:t>廖福銘、林永智</a:t>
                       </a:r>
                     </a:p>
                   </a:txBody>
@@ -7373,7 +7739,7 @@
                   </a:tcPr>
                 </a:tc>
               </a:tr>
-              <a:tr h="407323">
+              <a:tr h="373380">
                 <a:tc>
                   <a:txBody>
                     <a:bodyPr/>
@@ -7388,7 +7754,7 @@
                           <a:ea typeface="Microsoft JhengHei"/>
                           <a:cs typeface="Microsoft JhengHei"/>
                         </a:rPr>
-                        <a:t>州巧</a:t>
+                        <a:t>藥華藥</a:t>
                       </a:r>
                     </a:p>
                   </a:txBody>
@@ -7412,7 +7778,7 @@
                           <a:ea typeface="Microsoft JhengHei"/>
                           <a:cs typeface="Microsoft JhengHei"/>
                         </a:rPr>
-                        <a:t>3543</a:t>
+                        <a:t>6446</a:t>
                       </a:r>
                     </a:p>
                   </a:txBody>
@@ -7460,7 +7826,7 @@
                           <a:ea typeface="Microsoft JhengHei"/>
                           <a:cs typeface="Microsoft JhengHei"/>
                         </a:rPr>
-                        <a:t>資誠聯合會計師事務所</a:t>
+                        <a:t>安永聯合會計師事務所</a:t>
                       </a:r>
                     </a:p>
                   </a:txBody>
@@ -7484,7 +7850,7 @@
                           <a:ea typeface="Microsoft JhengHei"/>
                           <a:cs typeface="Microsoft JhengHei"/>
                         </a:rPr>
-                        <a:t>廖福銘、林永智</a:t>
+                        <a:t>呂倩雯、張巧穎</a:t>
                       </a:r>
                     </a:p>
                   </a:txBody>
@@ -7495,7 +7861,7 @@
                   </a:tcPr>
                 </a:tc>
               </a:tr>
-              <a:tr h="407323">
+              <a:tr h="373380">
                 <a:tc>
                   <a:txBody>
                     <a:bodyPr/>
@@ -7510,7 +7876,7 @@
                           <a:ea typeface="Microsoft JhengHei"/>
                           <a:cs typeface="Microsoft JhengHei"/>
                         </a:rPr>
-                        <a:t>藥華藥</a:t>
+                        <a:t>上銀</a:t>
                       </a:r>
                     </a:p>
                   </a:txBody>
@@ -7534,7 +7900,7 @@
                           <a:ea typeface="Microsoft JhengHei"/>
                           <a:cs typeface="Microsoft JhengHei"/>
                         </a:rPr>
-                        <a:t>6446</a:t>
+                        <a:t>2049</a:t>
                       </a:r>
                     </a:p>
                   </a:txBody>
@@ -7582,7 +7948,7 @@
                           <a:ea typeface="Microsoft JhengHei"/>
                           <a:cs typeface="Microsoft JhengHei"/>
                         </a:rPr>
-                        <a:t>安永聯合會計師事務所</a:t>
+                        <a:t>勤業眾信聯合會計師事務所</a:t>
                       </a:r>
                     </a:p>
                   </a:txBody>
@@ -7606,7 +7972,7 @@
                           <a:ea typeface="Microsoft JhengHei"/>
                           <a:cs typeface="Microsoft JhengHei"/>
                         </a:rPr>
-                        <a:t>呂倩雯、張巧穎</a:t>
+                        <a:t>吳麗冬、顏曉芳</a:t>
                       </a:r>
                     </a:p>
                   </a:txBody>
@@ -7617,7 +7983,7 @@
                   </a:tcPr>
                 </a:tc>
               </a:tr>
-              <a:tr h="407323">
+              <a:tr h="373380">
                 <a:tc>
                   <a:txBody>
                     <a:bodyPr/>
@@ -7632,7 +7998,7 @@
                           <a:ea typeface="Microsoft JhengHei"/>
                           <a:cs typeface="Microsoft JhengHei"/>
                         </a:rPr>
-                        <a:t>上銀</a:t>
+                        <a:t>萬達寵物</a:t>
                       </a:r>
                     </a:p>
                   </a:txBody>
@@ -7656,7 +8022,7 @@
                           <a:ea typeface="Microsoft JhengHei"/>
                           <a:cs typeface="Microsoft JhengHei"/>
                         </a:rPr>
-                        <a:t>2049</a:t>
+                        <a:t>6968</a:t>
                       </a:r>
                     </a:p>
                   </a:txBody>
@@ -7674,13 +8040,13 @@
                       <a:r>
                         <a:rPr sz="1150" b="1">
                           <a:solidFill>
-                            <a:srgbClr val="E63946"/>
+                            <a:srgbClr val="27A6C4"/>
                           </a:solidFill>
                           <a:latin typeface="Microsoft JhengHei"/>
                           <a:ea typeface="Microsoft JhengHei"/>
                           <a:cs typeface="Microsoft JhengHei"/>
                         </a:rPr>
-                        <a:t>駭客攻擊</a:t>
+                        <a:t>個資外洩</a:t>
                       </a:r>
                     </a:p>
                   </a:txBody>
@@ -7704,7 +8070,7 @@
                           <a:ea typeface="Microsoft JhengHei"/>
                           <a:cs typeface="Microsoft JhengHei"/>
                         </a:rPr>
-                        <a:t>勤業眾信聯合會計師事務所</a:t>
+                        <a:t>資誠聯合會計師事務所</a:t>
                       </a:r>
                     </a:p>
                   </a:txBody>
@@ -7728,7 +8094,7 @@
                           <a:ea typeface="Microsoft JhengHei"/>
                           <a:cs typeface="Microsoft JhengHei"/>
                         </a:rPr>
-                        <a:t>吳麗冬、顏曉芳</a:t>
+                        <a:t>葉翠苗、黃世鈞</a:t>
                       </a:r>
                     </a:p>
                   </a:txBody>
@@ -7739,7 +8105,7 @@
                   </a:tcPr>
                 </a:tc>
               </a:tr>
-              <a:tr h="407323">
+              <a:tr h="373380">
                 <a:tc>
                   <a:txBody>
                     <a:bodyPr/>
@@ -7754,7 +8120,7 @@
                           <a:ea typeface="Microsoft JhengHei"/>
                           <a:cs typeface="Microsoft JhengHei"/>
                         </a:rPr>
-                        <a:t>萬達寵物</a:t>
+                        <a:t>淳安</a:t>
                       </a:r>
                     </a:p>
                   </a:txBody>
@@ -7778,7 +8144,7 @@
                           <a:ea typeface="Microsoft JhengHei"/>
                           <a:cs typeface="Microsoft JhengHei"/>
                         </a:rPr>
-                        <a:t>6968</a:t>
+                        <a:t>6283</a:t>
                       </a:r>
                     </a:p>
                   </a:txBody>
@@ -7796,13 +8162,13 @@
                       <a:r>
                         <a:rPr sz="1150" b="1">
                           <a:solidFill>
-                            <a:srgbClr val="27A6C4"/>
+                            <a:srgbClr val="5C6679"/>
                           </a:solidFill>
                           <a:latin typeface="Microsoft JhengHei"/>
                           <a:ea typeface="Microsoft JhengHei"/>
                           <a:cs typeface="Microsoft JhengHei"/>
                         </a:rPr>
-                        <a:t>個資外洩</a:t>
+                        <a:t>其他</a:t>
                       </a:r>
                     </a:p>
                   </a:txBody>
@@ -7850,7 +8216,7 @@
                           <a:ea typeface="Microsoft JhengHei"/>
                           <a:cs typeface="Microsoft JhengHei"/>
                         </a:rPr>
-                        <a:t>葉翠苗、黃世鈞</a:t>
+                        <a:t>林永智、廖福銘</a:t>
                       </a:r>
                     </a:p>
                   </a:txBody>
@@ -7861,7 +8227,7 @@
                   </a:tcPr>
                 </a:tc>
               </a:tr>
-              <a:tr h="407323">
+              <a:tr h="373380">
                 <a:tc>
                   <a:txBody>
                     <a:bodyPr/>
@@ -7983,128 +8349,6 @@
                   </a:tcPr>
                 </a:tc>
               </a:tr>
-              <a:tr h="407330">
-                <a:tc>
-                  <a:txBody>
-                    <a:bodyPr/>
-                    <a:lstStyle/>
-                    <a:p>
-                      <a:r>
-                        <a:rPr sz="1150" b="0">
-                          <a:solidFill>
-                            <a:srgbClr val="1A2233"/>
-                          </a:solidFill>
-                          <a:latin typeface="Microsoft JhengHei"/>
-                          <a:ea typeface="Microsoft JhengHei"/>
-                          <a:cs typeface="Microsoft JhengHei"/>
-                        </a:rPr>
-                        <a:t>淳安</a:t>
-                      </a:r>
-                    </a:p>
-                  </a:txBody>
-                  <a:tcPr anchor="ctr" marL="73152" marT="9144" marB="9144">
-                    <a:solidFill>
-                      <a:srgbClr val="EEF2F9"/>
-                    </a:solidFill>
-                  </a:tcPr>
-                </a:tc>
-                <a:tc>
-                  <a:txBody>
-                    <a:bodyPr/>
-                    <a:lstStyle/>
-                    <a:p>
-                      <a:r>
-                        <a:rPr sz="1150" b="0">
-                          <a:solidFill>
-                            <a:srgbClr val="1A2233"/>
-                          </a:solidFill>
-                          <a:latin typeface="Microsoft JhengHei"/>
-                          <a:ea typeface="Microsoft JhengHei"/>
-                          <a:cs typeface="Microsoft JhengHei"/>
-                        </a:rPr>
-                        <a:t>6283</a:t>
-                      </a:r>
-                    </a:p>
-                  </a:txBody>
-                  <a:tcPr anchor="ctr" marL="73152" marT="9144" marB="9144">
-                    <a:solidFill>
-                      <a:srgbClr val="EEF2F9"/>
-                    </a:solidFill>
-                  </a:tcPr>
-                </a:tc>
-                <a:tc>
-                  <a:txBody>
-                    <a:bodyPr/>
-                    <a:lstStyle/>
-                    <a:p>
-                      <a:r>
-                        <a:rPr sz="1150" b="1">
-                          <a:solidFill>
-                            <a:srgbClr val="5C6679"/>
-                          </a:solidFill>
-                          <a:latin typeface="Microsoft JhengHei"/>
-                          <a:ea typeface="Microsoft JhengHei"/>
-                          <a:cs typeface="Microsoft JhengHei"/>
-                        </a:rPr>
-                        <a:t>其他</a:t>
-                      </a:r>
-                    </a:p>
-                  </a:txBody>
-                  <a:tcPr anchor="ctr" marL="73152" marT="9144" marB="9144">
-                    <a:solidFill>
-                      <a:srgbClr val="EEF2F9"/>
-                    </a:solidFill>
-                  </a:tcPr>
-                </a:tc>
-                <a:tc>
-                  <a:txBody>
-                    <a:bodyPr/>
-                    <a:lstStyle/>
-                    <a:p>
-                      <a:r>
-                        <a:rPr sz="1150" b="0">
-                          <a:solidFill>
-                            <a:srgbClr val="1A2233"/>
-                          </a:solidFill>
-                          <a:latin typeface="Microsoft JhengHei"/>
-                          <a:ea typeface="Microsoft JhengHei"/>
-                          <a:cs typeface="Microsoft JhengHei"/>
-                        </a:rPr>
-                        <a:t>資誠聯合會計師事務所</a:t>
-                      </a:r>
-                    </a:p>
-                  </a:txBody>
-                  <a:tcPr anchor="ctr" marL="73152" marT="9144" marB="9144">
-                    <a:solidFill>
-                      <a:srgbClr val="EEF2F9"/>
-                    </a:solidFill>
-                  </a:tcPr>
-                </a:tc>
-                <a:tc>
-                  <a:txBody>
-                    <a:bodyPr/>
-                    <a:lstStyle/>
-                    <a:p>
-                      <a:r>
-                        <a:rPr sz="1150" b="0">
-                          <a:solidFill>
-                            <a:srgbClr val="1A2233"/>
-                          </a:solidFill>
-                          <a:latin typeface="Microsoft JhengHei"/>
-                          <a:ea typeface="Microsoft JhengHei"/>
-                          <a:cs typeface="Microsoft JhengHei"/>
-                        </a:rPr>
-                        <a:t>林永智、廖福銘</a:t>
-                      </a:r>
-                    </a:p>
-                  </a:txBody>
-                  <a:tcPr anchor="ctr" marL="73152" marT="9144" marB="9144">
-                    <a:solidFill>
-                      <a:srgbClr val="EEF2F9"/>
-                    </a:solidFill>
-                  </a:tcPr>
-                </a:tc>
-              </a:tr>
             </a:tbl>
           </a:graphicData>
         </a:graphic>
@@ -9554,7 +9798,7 @@
             <a:avLst/>
           </a:prstGeom>
           <a:solidFill>
-            <a:srgbClr val="F4A261"/>
+            <a:srgbClr val="E63946"/>
           </a:solidFill>
           <a:ln>
             <a:noFill/>
@@ -9615,7 +9859,7 @@
                 <a:ea typeface="Microsoft JhengHei"/>
                 <a:cs typeface="Microsoft JhengHei"/>
               </a:rPr>
-              <a:t>久裕 </a:t>
+              <a:t>上詮 </a:t>
             </a:r>
             <a:r>
               <a:rPr sz="1300" b="0">
@@ -9626,7 +9870,7 @@
                 <a:ea typeface="Microsoft JhengHei"/>
                 <a:cs typeface="Microsoft JhengHei"/>
               </a:rPr>
-              <a:t>4173</a:t>
+              <a:t>3363</a:t>
             </a:r>
           </a:p>
         </p:txBody>
@@ -9646,7 +9890,7 @@
             <a:avLst/>
           </a:prstGeom>
           <a:solidFill>
-            <a:srgbClr val="F4A261"/>
+            <a:srgbClr val="E63946"/>
           </a:solidFill>
           <a:ln>
             <a:noFill/>
@@ -9707,7 +9951,7 @@
                 <a:ea typeface="Microsoft JhengHei"/>
                 <a:cs typeface="Microsoft JhengHei"/>
               </a:rPr>
-              <a:t>勒索病毒/加密</a:t>
+              <a:t>駭客攻擊</a:t>
             </a:r>
           </a:p>
         </p:txBody>
@@ -9742,7 +9986,7 @@
             <a:r>
               <a:rPr sz="1100" b="1">
                 <a:solidFill>
-                  <a:srgbClr val="F4A261"/>
+                  <a:srgbClr val="E63946"/>
                 </a:solidFill>
                 <a:latin typeface="Microsoft JhengHei"/>
                 <a:ea typeface="Microsoft JhengHei"/>
@@ -9759,7 +10003,7 @@
                 <a:ea typeface="Microsoft JhengHei"/>
                 <a:cs typeface="Microsoft JhengHei"/>
               </a:rPr>
-              <a:t>本公司遭受駭客加密攻擊事件，部分檔案無法解密。</a:t>
+              <a:t>本公司資訊系統遭受駭客網路攻擊，部分主機與電腦遭受病毒攻擊。</a:t>
             </a:r>
           </a:p>
         </p:txBody>
@@ -9794,7 +10038,7 @@
             <a:r>
               <a:rPr sz="1100" b="1">
                 <a:solidFill>
-                  <a:srgbClr val="F4A261"/>
+                  <a:srgbClr val="E63946"/>
                 </a:solidFill>
                 <a:latin typeface="Microsoft JhengHei"/>
                 <a:ea typeface="Microsoft JhengHei"/>
@@ -9811,7 +10055,7 @@
                 <a:ea typeface="Microsoft JhengHei"/>
                 <a:cs typeface="Microsoft JhengHei"/>
               </a:rPr>
-              <a:t>(1)本公司業已啟動資安相關防禦機制與應變作業，並將通報相關機關。(2)本公司將繼續尋求資安專家協助，改善及提升本公司資…</a:t>
+              <a:t>本公司已於第一時間啟動資安防禦，並對網路攻擊進行清查，亦同步持續檢視與提升網路與資訊基礎架構之安全控管，以確保資訊安全。</a:t>
             </a:r>
           </a:p>
         </p:txBody>
@@ -9877,7 +10121,7 @@
             <a:avLst/>
           </a:prstGeom>
           <a:solidFill>
-            <a:srgbClr val="E63946"/>
+            <a:srgbClr val="F4A261"/>
           </a:solidFill>
           <a:ln>
             <a:noFill/>
@@ -9938,7 +10182,7 @@
                 <a:ea typeface="Microsoft JhengHei"/>
                 <a:cs typeface="Microsoft JhengHei"/>
               </a:rPr>
-              <a:t>正瀚-創 </a:t>
+              <a:t>久裕 </a:t>
             </a:r>
             <a:r>
               <a:rPr sz="1300" b="0">
@@ -9949,7 +10193,7 @@
                 <a:ea typeface="Microsoft JhengHei"/>
                 <a:cs typeface="Microsoft JhengHei"/>
               </a:rPr>
-              <a:t>6534</a:t>
+              <a:t>4173</a:t>
             </a:r>
           </a:p>
         </p:txBody>
@@ -9969,7 +10213,7 @@
             <a:avLst/>
           </a:prstGeom>
           <a:solidFill>
-            <a:srgbClr val="E63946"/>
+            <a:srgbClr val="F4A261"/>
           </a:solidFill>
           <a:ln>
             <a:noFill/>
@@ -10030,7 +10274,7 @@
                 <a:ea typeface="Microsoft JhengHei"/>
                 <a:cs typeface="Microsoft JhengHei"/>
               </a:rPr>
-              <a:t>駭客攻擊</a:t>
+              <a:t>勒索病毒/加密</a:t>
             </a:r>
           </a:p>
         </p:txBody>
@@ -10065,7 +10309,7 @@
             <a:r>
               <a:rPr sz="1100" b="1">
                 <a:solidFill>
-                  <a:srgbClr val="E63946"/>
+                  <a:srgbClr val="F4A261"/>
                 </a:solidFill>
                 <a:latin typeface="Microsoft JhengHei"/>
                 <a:ea typeface="Microsoft JhengHei"/>
@@ -10082,7 +10326,7 @@
                 <a:ea typeface="Microsoft JhengHei"/>
                 <a:cs typeface="Microsoft JhengHei"/>
               </a:rPr>
-              <a:t>本公司部分資訊系統遭受駭客網路攻擊，初步評估對公司營運無重大影響。</a:t>
+              <a:t>本公司遭受駭客加密攻擊事件，部分檔案無法解密。</a:t>
             </a:r>
           </a:p>
         </p:txBody>
@@ -10117,7 +10361,7 @@
             <a:r>
               <a:rPr sz="1100" b="1">
                 <a:solidFill>
-                  <a:srgbClr val="E63946"/>
+                  <a:srgbClr val="F4A261"/>
                 </a:solidFill>
                 <a:latin typeface="Microsoft JhengHei"/>
                 <a:ea typeface="Microsoft JhengHei"/>
@@ -10134,7 +10378,7 @@
                 <a:ea typeface="Microsoft JhengHei"/>
                 <a:cs typeface="Microsoft JhengHei"/>
               </a:rPr>
-              <a:t>本公司將持續提升網路與資訊基礎架構之安全管控，以確保資訊安全。</a:t>
+              <a:t>(1)本公司業已啟動資安相關防禦機制與應變作業，並將通報相關機關。(2)本公司將繼續尋求資安專家協助，改善及提升本公司資…</a:t>
             </a:r>
           </a:p>
         </p:txBody>
@@ -10261,7 +10505,7 @@
                 <a:ea typeface="Microsoft JhengHei"/>
                 <a:cs typeface="Microsoft JhengHei"/>
               </a:rPr>
-              <a:t>久裕 </a:t>
+              <a:t>正瀚-創 </a:t>
             </a:r>
             <a:r>
               <a:rPr sz="1300" b="0">
@@ -10272,7 +10516,7 @@
                 <a:ea typeface="Microsoft JhengHei"/>
                 <a:cs typeface="Microsoft JhengHei"/>
               </a:rPr>
-              <a:t>4173</a:t>
+              <a:t>6534</a:t>
             </a:r>
           </a:p>
         </p:txBody>
@@ -10584,7 +10828,7 @@
                 <a:ea typeface="Microsoft JhengHei"/>
                 <a:cs typeface="Microsoft JhengHei"/>
               </a:rPr>
-              <a:t>逸達 </a:t>
+              <a:t>久裕 </a:t>
             </a:r>
             <a:r>
               <a:rPr sz="1300" b="0">
@@ -10595,7 +10839,7 @@
                 <a:ea typeface="Microsoft JhengHei"/>
                 <a:cs typeface="Microsoft JhengHei"/>
               </a:rPr>
-              <a:t>6576</a:t>
+              <a:t>4173</a:t>
             </a:r>
           </a:p>
         </p:txBody>
@@ -10728,7 +10972,7 @@
                 <a:ea typeface="Microsoft JhengHei"/>
                 <a:cs typeface="Microsoft JhengHei"/>
               </a:rPr>
-              <a:t>本公司資訊系統遭受駭客網路攻擊，初步評估對公司營運暫無重大影響。</a:t>
+              <a:t>本公司部分資訊系統遭受駭客網路攻擊，初步評估對公司營運無重大影響。</a:t>
             </a:r>
           </a:p>
         </p:txBody>
@@ -11043,7 +11287,7 @@
                 <a:ea typeface="Microsoft JhengHei"/>
                 <a:cs typeface="Microsoft JhengHei"/>
               </a:rPr>
-              <a:t>州巧 </a:t>
+              <a:t>逸達 </a:t>
             </a:r>
             <a:r>
               <a:rPr sz="1300" b="0">
@@ -11054,7 +11298,7 @@
                 <a:ea typeface="Microsoft JhengHei"/>
                 <a:cs typeface="Microsoft JhengHei"/>
               </a:rPr>
-              <a:t>3543</a:t>
+              <a:t>6576</a:t>
             </a:r>
           </a:p>
         </p:txBody>
@@ -11187,7 +11431,7 @@
                 <a:ea typeface="Microsoft JhengHei"/>
                 <a:cs typeface="Microsoft JhengHei"/>
               </a:rPr>
-              <a:t>本公司及重要子公司(蘇州州巧、廈門州巧及越南州巧)之部份資訊系統遭不明駭客入侵，導致部分系統無法…</a:t>
+              <a:t>本公司資訊系統遭受駭客網路攻擊，初步評估對公司營運暫無重大影響。</a:t>
             </a:r>
           </a:p>
         </p:txBody>
@@ -11239,7 +11483,7 @@
                 <a:ea typeface="Microsoft JhengHei"/>
                 <a:cs typeface="Microsoft JhengHei"/>
               </a:rPr>
-              <a:t>完成相關安全漏洞修復後，將持續強化網路與資訊基礎架構之安全防護機制及管理措施，確保資訊系統穩定運作及資訊安全。</a:t>
+              <a:t>本公司將持續提升網路與資訊基礎架構之安全管控，以確保資訊安全。</a:t>
             </a:r>
           </a:p>
         </p:txBody>
@@ -11366,7 +11610,7 @@
                 <a:ea typeface="Microsoft JhengHei"/>
                 <a:cs typeface="Microsoft JhengHei"/>
               </a:rPr>
-              <a:t>藥華藥 </a:t>
+              <a:t>州巧 </a:t>
             </a:r>
             <a:r>
               <a:rPr sz="1300" b="0">
@@ -11377,7 +11621,7 @@
                 <a:ea typeface="Microsoft JhengHei"/>
                 <a:cs typeface="Microsoft JhengHei"/>
               </a:rPr>
-              <a:t>6446</a:t>
+              <a:t>3543</a:t>
             </a:r>
           </a:p>
         </p:txBody>
@@ -11510,7 +11754,7 @@
                 <a:ea typeface="Microsoft JhengHei"/>
                 <a:cs typeface="Microsoft JhengHei"/>
               </a:rPr>
-              <a:t>本公司及泛泰醫療子公司之部分資訊系統遭受駭客網路攻擊，初步評估對公司營運無重大影響。</a:t>
+              <a:t>本公司及重要子公司(蘇州州巧、廈門州巧及越南州巧)之部份資訊系統遭不明駭客入侵，導致部分系統無法…</a:t>
             </a:r>
           </a:p>
         </p:txBody>
@@ -11562,7 +11806,7 @@
                 <a:ea typeface="Microsoft JhengHei"/>
                 <a:cs typeface="Microsoft JhengHei"/>
               </a:rPr>
-              <a:t>本公司將持續提升網路與資訊基礎架構之安全管控，以確保資訊安全。</a:t>
+              <a:t>完成相關安全漏洞修復後，將持續強化網路與資訊基礎架構之安全防護機制及管理措施，確保資訊系統穩定運作及資訊安全。</a:t>
             </a:r>
           </a:p>
         </p:txBody>
@@ -11689,7 +11933,7 @@
                 <a:ea typeface="Microsoft JhengHei"/>
                 <a:cs typeface="Microsoft JhengHei"/>
               </a:rPr>
-              <a:t>上銀 </a:t>
+              <a:t>藥華藥 </a:t>
             </a:r>
             <a:r>
               <a:rPr sz="1300" b="0">
@@ -11700,7 +11944,7 @@
                 <a:ea typeface="Microsoft JhengHei"/>
                 <a:cs typeface="Microsoft JhengHei"/>
               </a:rPr>
-              <a:t>2049</a:t>
+              <a:t>6446</a:t>
             </a:r>
           </a:p>
         </p:txBody>
@@ -11833,7 +12077,7 @@
                 <a:ea typeface="Microsoft JhengHei"/>
                 <a:cs typeface="Microsoft JhengHei"/>
               </a:rPr>
-              <a:t>本公司義大利子公司部份資訊系統遭受駭客網路攻擊</a:t>
+              <a:t>本公司及泛泰醫療子公司之部分資訊系統遭受駭客網路攻擊，初步評估對公司營運無重大影響。</a:t>
             </a:r>
           </a:p>
         </p:txBody>
@@ -11885,7 +12129,7 @@
                 <a:ea typeface="Microsoft JhengHei"/>
                 <a:cs typeface="Microsoft JhengHei"/>
               </a:rPr>
-              <a:t>完成相關安全漏洞修復後，將持續強化網路與資訊基礎架構之安全防護機制及管理措施，確保資訊系統穩定運作及資訊安全。</a:t>
+              <a:t>本公司將持續提升網路與資訊基礎架構之安全管控，以確保資訊安全。</a:t>
             </a:r>
           </a:p>
         </p:txBody>
@@ -11951,7 +12195,7 @@
             <a:avLst/>
           </a:prstGeom>
           <a:solidFill>
-            <a:srgbClr val="27A6C4"/>
+            <a:srgbClr val="E63946"/>
           </a:solidFill>
           <a:ln>
             <a:noFill/>
@@ -12012,7 +12256,7 @@
                 <a:ea typeface="Microsoft JhengHei"/>
                 <a:cs typeface="Microsoft JhengHei"/>
               </a:rPr>
-              <a:t>萬達寵物 </a:t>
+              <a:t>上銀 </a:t>
             </a:r>
             <a:r>
               <a:rPr sz="1300" b="0">
@@ -12023,7 +12267,7 @@
                 <a:ea typeface="Microsoft JhengHei"/>
                 <a:cs typeface="Microsoft JhengHei"/>
               </a:rPr>
-              <a:t>6968</a:t>
+              <a:t>2049</a:t>
             </a:r>
           </a:p>
         </p:txBody>
@@ -12043,7 +12287,7 @@
             <a:avLst/>
           </a:prstGeom>
           <a:solidFill>
-            <a:srgbClr val="27A6C4"/>
+            <a:srgbClr val="E63946"/>
           </a:solidFill>
           <a:ln>
             <a:noFill/>
@@ -12104,7 +12348,7 @@
                 <a:ea typeface="Microsoft JhengHei"/>
                 <a:cs typeface="Microsoft JhengHei"/>
               </a:rPr>
-              <a:t>個資外洩</a:t>
+              <a:t>駭客攻擊</a:t>
             </a:r>
           </a:p>
         </p:txBody>
@@ -12139,7 +12383,7 @@
             <a:r>
               <a:rPr sz="1100" b="1">
                 <a:solidFill>
-                  <a:srgbClr val="27A6C4"/>
+                  <a:srgbClr val="E63946"/>
                 </a:solidFill>
                 <a:latin typeface="Microsoft JhengHei"/>
                 <a:ea typeface="Microsoft JhengHei"/>
@@ -12156,7 +12400,7 @@
                 <a:ea typeface="Microsoft JhengHei"/>
                 <a:cs typeface="Microsoft JhengHei"/>
               </a:rPr>
-              <a:t>本公司因合作廠商資訊系統遭不明人士入侵，疑似部份資料外洩</a:t>
+              <a:t>本公司義大利子公司部份資訊系統遭受駭客網路攻擊</a:t>
             </a:r>
           </a:p>
         </p:txBody>
@@ -12191,7 +12435,7 @@
             <a:r>
               <a:rPr sz="1100" b="1">
                 <a:solidFill>
-                  <a:srgbClr val="27A6C4"/>
+                  <a:srgbClr val="E63946"/>
                 </a:solidFill>
                 <a:latin typeface="Microsoft JhengHei"/>
                 <a:ea typeface="Microsoft JhengHei"/>
@@ -12208,7 +12452,7 @@
                 <a:ea typeface="Microsoft JhengHei"/>
                 <a:cs typeface="Microsoft JhengHei"/>
               </a:rPr>
-              <a:t>本公司並無與合作廠商串接會員資料、信用卡號、銀行帳戶等敏感資訊，不會產生任何金流交易。本公司已嚴正要求合作廠商技術團隊，…</a:t>
+              <a:t>完成相關安全漏洞修復後，將持續強化網路與資訊基礎架構之安全防護機制及管理措施，確保資訊系統穩定運作及資訊安全。</a:t>
             </a:r>
           </a:p>
         </p:txBody>
@@ -12410,7 +12654,7 @@
             <a:avLst/>
           </a:prstGeom>
           <a:solidFill>
-            <a:srgbClr val="5C6679"/>
+            <a:srgbClr val="27A6C4"/>
           </a:solidFill>
           <a:ln>
             <a:noFill/>
@@ -12471,7 +12715,7 @@
                 <a:ea typeface="Microsoft JhengHei"/>
                 <a:cs typeface="Microsoft JhengHei"/>
               </a:rPr>
-              <a:t>淳安 </a:t>
+              <a:t>萬達寵物 </a:t>
             </a:r>
             <a:r>
               <a:rPr sz="1300" b="0">
@@ -12482,7 +12726,7 @@
                 <a:ea typeface="Microsoft JhengHei"/>
                 <a:cs typeface="Microsoft JhengHei"/>
               </a:rPr>
-              <a:t>6283</a:t>
+              <a:t>6968</a:t>
             </a:r>
           </a:p>
         </p:txBody>
@@ -12502,7 +12746,7 @@
             <a:avLst/>
           </a:prstGeom>
           <a:solidFill>
-            <a:srgbClr val="5C6679"/>
+            <a:srgbClr val="27A6C4"/>
           </a:solidFill>
           <a:ln>
             <a:noFill/>
@@ -12563,7 +12807,7 @@
                 <a:ea typeface="Microsoft JhengHei"/>
                 <a:cs typeface="Microsoft JhengHei"/>
               </a:rPr>
-              <a:t>其他</a:t>
+              <a:t>個資外洩</a:t>
             </a:r>
           </a:p>
         </p:txBody>
@@ -12598,7 +12842,7 @@
             <a:r>
               <a:rPr sz="1100" b="1">
                 <a:solidFill>
-                  <a:srgbClr val="5C6679"/>
+                  <a:srgbClr val="27A6C4"/>
                 </a:solidFill>
                 <a:latin typeface="Microsoft JhengHei"/>
                 <a:ea typeface="Microsoft JhengHei"/>
@@ -12615,7 +12859,7 @@
                 <a:ea typeface="Microsoft JhengHei"/>
                 <a:cs typeface="Microsoft JhengHei"/>
               </a:rPr>
-              <a:t>本公司網路資安事件說明</a:t>
+              <a:t>本公司因合作廠商資訊系統遭不明人士入侵，疑似部份資料外洩</a:t>
             </a:r>
           </a:p>
         </p:txBody>
@@ -12650,7 +12894,7 @@
             <a:r>
               <a:rPr sz="1100" b="1">
                 <a:solidFill>
-                  <a:srgbClr val="5C6679"/>
+                  <a:srgbClr val="27A6C4"/>
                 </a:solidFill>
                 <a:latin typeface="Microsoft JhengHei"/>
                 <a:ea typeface="Microsoft JhengHei"/>
@@ -12667,7 +12911,7 @@
                 <a:ea typeface="Microsoft JhengHei"/>
                 <a:cs typeface="Microsoft JhengHei"/>
               </a:rPr>
-              <a:t>本公司後續將持續提升網路與資訊基礎架構之安全管控，以確保資訊安全。</a:t>
+              <a:t>本公司並無與合作廠商串接會員資料、信用卡號、銀行帳戶等敏感資訊，不會產生任何金流交易。本公司已嚴正要求合作廠商技術團隊，…</a:t>
             </a:r>
           </a:p>
         </p:txBody>
@@ -12952,6 +13196,329 @@
         <p:spPr>
           <a:xfrm>
             <a:off x="6400800" y="2926080"/>
+            <a:ext cx="4937760" cy="713232"/>
+          </a:xfrm>
+          <a:prstGeom prst="rect">
+            <a:avLst/>
+          </a:prstGeom>
+          <a:noFill/>
+        </p:spPr>
+        <p:txBody>
+          <a:bodyPr wrap="square" anchor="t" lIns="0" rIns="0" tIns="0" bIns="0">
+            <a:spAutoFit/>
+          </a:bodyPr>
+          <a:lstStyle/>
+          <a:p>
+            <a:pPr algn="l">
+              <a:lnSpc>
+                <a:spcPts val="1500"/>
+              </a:lnSpc>
+            </a:pPr>
+            <a:r>
+              <a:rPr sz="1100" b="1">
+                <a:solidFill>
+                  <a:srgbClr val="5C6679"/>
+                </a:solidFill>
+                <a:latin typeface="Microsoft JhengHei"/>
+                <a:ea typeface="Microsoft JhengHei"/>
+                <a:cs typeface="Microsoft JhengHei"/>
+              </a:rPr>
+              <a:t>因應　</a:t>
+            </a:r>
+            <a:r>
+              <a:rPr sz="1100" b="0">
+                <a:solidFill>
+                  <a:srgbClr val="1A2233"/>
+                </a:solidFill>
+                <a:latin typeface="Microsoft JhengHei"/>
+                <a:ea typeface="Microsoft JhengHei"/>
+                <a:cs typeface="Microsoft JhengHei"/>
+              </a:rPr>
+              <a:t>本公司後續將持續提升網路與資訊基礎架構之安全管控，以確保資訊安全。</a:t>
+            </a:r>
+          </a:p>
+        </p:txBody>
+      </p:sp>
+      <p:sp>
+        <p:nvSpPr>
+          <p:cNvPr id="19" name="Rounded Rectangle 18"/>
+          <p:cNvSpPr/>
+          <p:nvPr/>
+        </p:nvSpPr>
+        <p:spPr>
+          <a:xfrm>
+            <a:off x="548640" y="3886200"/>
+            <a:ext cx="5394960" cy="2148840"/>
+          </a:xfrm>
+          <a:prstGeom prst="roundRect">
+            <a:avLst/>
+          </a:prstGeom>
+          <a:solidFill>
+            <a:srgbClr val="FFFFFF"/>
+          </a:solidFill>
+          <a:ln w="12700">
+            <a:solidFill>
+              <a:srgbClr val="DDE3EE"/>
+            </a:solidFill>
+          </a:ln>
+          <a:effectLst/>
+        </p:spPr>
+        <p:style>
+          <a:lnRef idx="1">
+            <a:schemeClr val="accent1"/>
+          </a:lnRef>
+          <a:fillRef idx="3">
+            <a:schemeClr val="accent1"/>
+          </a:fillRef>
+          <a:effectRef idx="2">
+            <a:schemeClr val="accent1"/>
+          </a:effectRef>
+          <a:fontRef idx="minor">
+            <a:schemeClr val="lt1"/>
+          </a:fontRef>
+        </p:style>
+        <p:txBody>
+          <a:bodyPr rtlCol="0" anchor="ctr"/>
+          <a:lstStyle/>
+          <a:p>
+            <a:pPr algn="ctr"/>
+          </a:p>
+        </p:txBody>
+      </p:sp>
+      <p:sp>
+        <p:nvSpPr>
+          <p:cNvPr id="20" name="Rectangle 19"/>
+          <p:cNvSpPr/>
+          <p:nvPr/>
+        </p:nvSpPr>
+        <p:spPr>
+          <a:xfrm>
+            <a:off x="548640" y="3886200"/>
+            <a:ext cx="5394960" cy="109728"/>
+          </a:xfrm>
+          <a:prstGeom prst="rect">
+            <a:avLst/>
+          </a:prstGeom>
+          <a:solidFill>
+            <a:srgbClr val="5C6679"/>
+          </a:solidFill>
+          <a:ln>
+            <a:noFill/>
+          </a:ln>
+          <a:effectLst/>
+        </p:spPr>
+        <p:style>
+          <a:lnRef idx="1">
+            <a:schemeClr val="accent1"/>
+          </a:lnRef>
+          <a:fillRef idx="3">
+            <a:schemeClr val="accent1"/>
+          </a:fillRef>
+          <a:effectRef idx="2">
+            <a:schemeClr val="accent1"/>
+          </a:effectRef>
+          <a:fontRef idx="minor">
+            <a:schemeClr val="lt1"/>
+          </a:fontRef>
+        </p:style>
+        <p:txBody>
+          <a:bodyPr rtlCol="0" anchor="ctr"/>
+          <a:lstStyle/>
+          <a:p>
+            <a:pPr algn="ctr"/>
+          </a:p>
+        </p:txBody>
+      </p:sp>
+      <p:sp>
+        <p:nvSpPr>
+          <p:cNvPr id="21" name="TextBox 20"/>
+          <p:cNvSpPr txBox="1"/>
+          <p:nvPr/>
+        </p:nvSpPr>
+        <p:spPr>
+          <a:xfrm>
+            <a:off x="777240" y="4105656"/>
+            <a:ext cx="3657600" cy="365760"/>
+          </a:xfrm>
+          <a:prstGeom prst="rect">
+            <a:avLst/>
+          </a:prstGeom>
+          <a:noFill/>
+        </p:spPr>
+        <p:txBody>
+          <a:bodyPr wrap="square" anchor="ctr" lIns="0" rIns="0" tIns="0" bIns="0">
+            <a:spAutoFit/>
+          </a:bodyPr>
+          <a:lstStyle/>
+          <a:p>
+            <a:pPr algn="l"/>
+            <a:r>
+              <a:rPr sz="1600" b="1">
+                <a:solidFill>
+                  <a:srgbClr val="1A2233"/>
+                </a:solidFill>
+                <a:latin typeface="Microsoft JhengHei"/>
+                <a:ea typeface="Microsoft JhengHei"/>
+                <a:cs typeface="Microsoft JhengHei"/>
+              </a:rPr>
+              <a:t>淳安 </a:t>
+            </a:r>
+            <a:r>
+              <a:rPr sz="1300" b="0">
+                <a:solidFill>
+                  <a:srgbClr val="5C6679"/>
+                </a:solidFill>
+                <a:latin typeface="Microsoft JhengHei"/>
+                <a:ea typeface="Microsoft JhengHei"/>
+                <a:cs typeface="Microsoft JhengHei"/>
+              </a:rPr>
+              <a:t>6283</a:t>
+            </a:r>
+          </a:p>
+        </p:txBody>
+      </p:sp>
+      <p:sp>
+        <p:nvSpPr>
+          <p:cNvPr id="22" name="Rounded Rectangle 21"/>
+          <p:cNvSpPr/>
+          <p:nvPr/>
+        </p:nvSpPr>
+        <p:spPr>
+          <a:xfrm>
+            <a:off x="4526280" y="4123944"/>
+            <a:ext cx="1234440" cy="347472"/>
+          </a:xfrm>
+          <a:prstGeom prst="roundRect">
+            <a:avLst/>
+          </a:prstGeom>
+          <a:solidFill>
+            <a:srgbClr val="5C6679"/>
+          </a:solidFill>
+          <a:ln>
+            <a:noFill/>
+          </a:ln>
+          <a:effectLst/>
+        </p:spPr>
+        <p:style>
+          <a:lnRef idx="1">
+            <a:schemeClr val="accent1"/>
+          </a:lnRef>
+          <a:fillRef idx="3">
+            <a:schemeClr val="accent1"/>
+          </a:fillRef>
+          <a:effectRef idx="2">
+            <a:schemeClr val="accent1"/>
+          </a:effectRef>
+          <a:fontRef idx="minor">
+            <a:schemeClr val="lt1"/>
+          </a:fontRef>
+        </p:style>
+        <p:txBody>
+          <a:bodyPr rtlCol="0" anchor="ctr"/>
+          <a:lstStyle/>
+          <a:p>
+            <a:pPr algn="ctr"/>
+          </a:p>
+        </p:txBody>
+      </p:sp>
+      <p:sp>
+        <p:nvSpPr>
+          <p:cNvPr id="23" name="TextBox 22"/>
+          <p:cNvSpPr txBox="1"/>
+          <p:nvPr/>
+        </p:nvSpPr>
+        <p:spPr>
+          <a:xfrm>
+            <a:off x="4526280" y="4123944"/>
+            <a:ext cx="1234440" cy="347472"/>
+          </a:xfrm>
+          <a:prstGeom prst="rect">
+            <a:avLst/>
+          </a:prstGeom>
+          <a:noFill/>
+        </p:spPr>
+        <p:txBody>
+          <a:bodyPr wrap="square" anchor="ctr" lIns="0" rIns="0" tIns="0" bIns="0">
+            <a:spAutoFit/>
+          </a:bodyPr>
+          <a:lstStyle/>
+          <a:p>
+            <a:pPr algn="ctr"/>
+            <a:r>
+              <a:rPr sz="1050" b="1">
+                <a:solidFill>
+                  <a:srgbClr val="FFFFFF"/>
+                </a:solidFill>
+                <a:latin typeface="Microsoft JhengHei"/>
+                <a:ea typeface="Microsoft JhengHei"/>
+                <a:cs typeface="Microsoft JhengHei"/>
+              </a:rPr>
+              <a:t>其他</a:t>
+            </a:r>
+          </a:p>
+        </p:txBody>
+      </p:sp>
+      <p:sp>
+        <p:nvSpPr>
+          <p:cNvPr id="24" name="TextBox 23"/>
+          <p:cNvSpPr txBox="1"/>
+          <p:nvPr/>
+        </p:nvSpPr>
+        <p:spPr>
+          <a:xfrm>
+            <a:off x="777240" y="4599432"/>
+            <a:ext cx="4937760" cy="640080"/>
+          </a:xfrm>
+          <a:prstGeom prst="rect">
+            <a:avLst/>
+          </a:prstGeom>
+          <a:noFill/>
+        </p:spPr>
+        <p:txBody>
+          <a:bodyPr wrap="square" anchor="t" lIns="0" rIns="0" tIns="0" bIns="0">
+            <a:spAutoFit/>
+          </a:bodyPr>
+          <a:lstStyle/>
+          <a:p>
+            <a:pPr algn="l">
+              <a:lnSpc>
+                <a:spcPts val="1500"/>
+              </a:lnSpc>
+            </a:pPr>
+            <a:r>
+              <a:rPr sz="1100" b="1">
+                <a:solidFill>
+                  <a:srgbClr val="5C6679"/>
+                </a:solidFill>
+                <a:latin typeface="Microsoft JhengHei"/>
+                <a:ea typeface="Microsoft JhengHei"/>
+                <a:cs typeface="Microsoft JhengHei"/>
+              </a:rPr>
+              <a:t>緣由　</a:t>
+            </a:r>
+            <a:r>
+              <a:rPr sz="1100" b="0">
+                <a:solidFill>
+                  <a:srgbClr val="1A2233"/>
+                </a:solidFill>
+                <a:latin typeface="Microsoft JhengHei"/>
+                <a:ea typeface="Microsoft JhengHei"/>
+                <a:cs typeface="Microsoft JhengHei"/>
+              </a:rPr>
+              <a:t>本公司網路資安事件說明</a:t>
+            </a:r>
+          </a:p>
+        </p:txBody>
+      </p:sp>
+      <p:sp>
+        <p:nvSpPr>
+          <p:cNvPr id="25" name="TextBox 24"/>
+          <p:cNvSpPr txBox="1"/>
+          <p:nvPr/>
+        </p:nvSpPr>
+        <p:spPr>
+          <a:xfrm>
+            <a:off x="777240" y="5257800"/>
             <a:ext cx="4937760" cy="713232"/>
           </a:xfrm>
           <a:prstGeom prst="rect">

--- a/資安事件因應分析.pptx
+++ b/資安事件因應分析.pptx
@@ -197,7 +197,7 @@
                 <c:formatCode>General</c:formatCode>
                 <c:ptCount val="4"/>
                 <c:pt idx="0">
-                  <c:v>7</c:v>
+                  <c:v>8</c:v>
                 </c:pt>
                 <c:pt idx="1">
                   <c:v>1</c:v>
@@ -206,7 +206,7 @@
                   <c:v>1</c:v>
                 </c:pt>
                 <c:pt idx="3">
-                  <c:v>2</c:v>
+                  <c:v>1</c:v>
                 </c:pt>
               </c:numCache>
             </c:numRef>
@@ -3543,7 +3543,7 @@
                 <a:ea typeface="Microsoft JhengHei"/>
                 <a:cs typeface="Microsoft JhengHei"/>
               </a:rPr>
-              <a:t>資料期間 2026-07-20 ~ 2026-08-20　｜　MOPS 重大訊息全文檢索　｜　11 家公司</a:t>
+              <a:t>資料期間 2026-07-21 ~ 2026-08-21　｜　MOPS 重大訊息全文檢索　｜　11 家公司</a:t>
             </a:r>
           </a:p>
         </p:txBody>
@@ -4287,7 +4287,7 @@
                           <a:ea typeface="Microsoft JhengHei"/>
                           <a:cs typeface="Microsoft JhengHei"/>
                         </a:rPr>
-                        <a:t>上詮</a:t>
+                        <a:t>數字</a:t>
                       </a:r>
                     </a:p>
                   </a:txBody>
@@ -4311,7 +4311,7 @@
                           <a:ea typeface="Microsoft JhengHei"/>
                           <a:cs typeface="Microsoft JhengHei"/>
                         </a:rPr>
-                        <a:t>3363</a:t>
+                        <a:t>5287</a:t>
                       </a:r>
                     </a:p>
                   </a:txBody>
@@ -4335,7 +4335,7 @@
                           <a:ea typeface="Microsoft JhengHei"/>
                           <a:cs typeface="Microsoft JhengHei"/>
                         </a:rPr>
-                        <a:t>08/19</a:t>
+                        <a:t>08/20</a:t>
                       </a:r>
                     </a:p>
                   </a:txBody>
@@ -4383,7 +4383,7 @@
                           <a:ea typeface="Microsoft JhengHei"/>
                           <a:cs typeface="Microsoft JhengHei"/>
                         </a:rPr>
-                        <a:t>目前評估對公司營運無重大影響。</a:t>
+                        <a:t>目前評估對公司營運尚無重大影響</a:t>
                       </a:r>
                     </a:p>
                   </a:txBody>
@@ -4409,7 +4409,7 @@
                           <a:ea typeface="Microsoft JhengHei"/>
                           <a:cs typeface="Microsoft JhengHei"/>
                         </a:rPr>
-                        <a:t>久裕</a:t>
+                        <a:t>上詮</a:t>
                       </a:r>
                     </a:p>
                   </a:txBody>
@@ -4433,7 +4433,251 @@
                           <a:ea typeface="Microsoft JhengHei"/>
                           <a:cs typeface="Microsoft JhengHei"/>
                         </a:rPr>
+                        <a:t>3363</a:t>
+                      </a:r>
+                    </a:p>
+                  </a:txBody>
+                  <a:tcPr anchor="ctr" marL="73152" marT="9144" marB="9144">
+                    <a:solidFill>
+                      <a:srgbClr val="EEF2F9"/>
+                    </a:solidFill>
+                  </a:tcPr>
+                </a:tc>
+                <a:tc>
+                  <a:txBody>
+                    <a:bodyPr/>
+                    <a:lstStyle/>
+                    <a:p>
+                      <a:r>
+                        <a:rPr sz="1150" b="0">
+                          <a:solidFill>
+                            <a:srgbClr val="1A2233"/>
+                          </a:solidFill>
+                          <a:latin typeface="Microsoft JhengHei"/>
+                          <a:ea typeface="Microsoft JhengHei"/>
+                          <a:cs typeface="Microsoft JhengHei"/>
+                        </a:rPr>
+                        <a:t>08/19</a:t>
+                      </a:r>
+                    </a:p>
+                  </a:txBody>
+                  <a:tcPr anchor="ctr" marL="73152" marT="9144" marB="9144">
+                    <a:solidFill>
+                      <a:srgbClr val="EEF2F9"/>
+                    </a:solidFill>
+                  </a:tcPr>
+                </a:tc>
+                <a:tc>
+                  <a:txBody>
+                    <a:bodyPr/>
+                    <a:lstStyle/>
+                    <a:p>
+                      <a:r>
+                        <a:rPr sz="1150" b="1">
+                          <a:solidFill>
+                            <a:srgbClr val="E63946"/>
+                          </a:solidFill>
+                          <a:latin typeface="Microsoft JhengHei"/>
+                          <a:ea typeface="Microsoft JhengHei"/>
+                          <a:cs typeface="Microsoft JhengHei"/>
+                        </a:rPr>
+                        <a:t>駭客攻擊</a:t>
+                      </a:r>
+                    </a:p>
+                  </a:txBody>
+                  <a:tcPr anchor="ctr" marL="73152" marT="9144" marB="9144">
+                    <a:solidFill>
+                      <a:srgbClr val="EEF2F9"/>
+                    </a:solidFill>
+                  </a:tcPr>
+                </a:tc>
+                <a:tc>
+                  <a:txBody>
+                    <a:bodyPr/>
+                    <a:lstStyle/>
+                    <a:p>
+                      <a:r>
+                        <a:rPr sz="1150" b="0">
+                          <a:solidFill>
+                            <a:srgbClr val="1A2233"/>
+                          </a:solidFill>
+                          <a:latin typeface="Microsoft JhengHei"/>
+                          <a:ea typeface="Microsoft JhengHei"/>
+                          <a:cs typeface="Microsoft JhengHei"/>
+                        </a:rPr>
+                        <a:t>目前評估對公司營運無重大影響。</a:t>
+                      </a:r>
+                    </a:p>
+                  </a:txBody>
+                  <a:tcPr anchor="ctr" marL="73152" marT="9144" marB="9144">
+                    <a:solidFill>
+                      <a:srgbClr val="EEF2F9"/>
+                    </a:solidFill>
+                  </a:tcPr>
+                </a:tc>
+              </a:tr>
+              <a:tr h="297180">
+                <a:tc>
+                  <a:txBody>
+                    <a:bodyPr/>
+                    <a:lstStyle/>
+                    <a:p>
+                      <a:r>
+                        <a:rPr sz="1150" b="0">
+                          <a:solidFill>
+                            <a:srgbClr val="1A2233"/>
+                          </a:solidFill>
+                          <a:latin typeface="Microsoft JhengHei"/>
+                          <a:ea typeface="Microsoft JhengHei"/>
+                          <a:cs typeface="Microsoft JhengHei"/>
+                        </a:rPr>
+                        <a:t>久裕</a:t>
+                      </a:r>
+                    </a:p>
+                  </a:txBody>
+                  <a:tcPr anchor="ctr" marL="73152" marT="9144" marB="9144">
+                    <a:solidFill>
+                      <a:srgbClr val="FFFFFF"/>
+                    </a:solidFill>
+                  </a:tcPr>
+                </a:tc>
+                <a:tc>
+                  <a:txBody>
+                    <a:bodyPr/>
+                    <a:lstStyle/>
+                    <a:p>
+                      <a:r>
+                        <a:rPr sz="1150" b="0">
+                          <a:solidFill>
+                            <a:srgbClr val="1A2233"/>
+                          </a:solidFill>
+                          <a:latin typeface="Microsoft JhengHei"/>
+                          <a:ea typeface="Microsoft JhengHei"/>
+                          <a:cs typeface="Microsoft JhengHei"/>
+                        </a:rPr>
                         <a:t>4173</a:t>
+                      </a:r>
+                    </a:p>
+                  </a:txBody>
+                  <a:tcPr anchor="ctr" marL="73152" marT="9144" marB="9144">
+                    <a:solidFill>
+                      <a:srgbClr val="FFFFFF"/>
+                    </a:solidFill>
+                  </a:tcPr>
+                </a:tc>
+                <a:tc>
+                  <a:txBody>
+                    <a:bodyPr/>
+                    <a:lstStyle/>
+                    <a:p>
+                      <a:r>
+                        <a:rPr sz="1150" b="0">
+                          <a:solidFill>
+                            <a:srgbClr val="1A2233"/>
+                          </a:solidFill>
+                          <a:latin typeface="Microsoft JhengHei"/>
+                          <a:ea typeface="Microsoft JhengHei"/>
+                          <a:cs typeface="Microsoft JhengHei"/>
+                        </a:rPr>
+                        <a:t>08/11</a:t>
+                      </a:r>
+                    </a:p>
+                  </a:txBody>
+                  <a:tcPr anchor="ctr" marL="73152" marT="9144" marB="9144">
+                    <a:solidFill>
+                      <a:srgbClr val="FFFFFF"/>
+                    </a:solidFill>
+                  </a:tcPr>
+                </a:tc>
+                <a:tc>
+                  <a:txBody>
+                    <a:bodyPr/>
+                    <a:lstStyle/>
+                    <a:p>
+                      <a:r>
+                        <a:rPr sz="1150" b="1">
+                          <a:solidFill>
+                            <a:srgbClr val="F4A261"/>
+                          </a:solidFill>
+                          <a:latin typeface="Microsoft JhengHei"/>
+                          <a:ea typeface="Microsoft JhengHei"/>
+                          <a:cs typeface="Microsoft JhengHei"/>
+                        </a:rPr>
+                        <a:t>勒索病毒/加密</a:t>
+                      </a:r>
+                    </a:p>
+                  </a:txBody>
+                  <a:tcPr anchor="ctr" marL="73152" marT="9144" marB="9144">
+                    <a:solidFill>
+                      <a:srgbClr val="FFFFFF"/>
+                    </a:solidFill>
+                  </a:tcPr>
+                </a:tc>
+                <a:tc>
+                  <a:txBody>
+                    <a:bodyPr/>
+                    <a:lstStyle/>
+                    <a:p>
+                      <a:r>
+                        <a:rPr sz="1150" b="0">
+                          <a:solidFill>
+                            <a:srgbClr val="1A2233"/>
+                          </a:solidFill>
+                          <a:latin typeface="Microsoft JhengHei"/>
+                          <a:ea typeface="Microsoft JhengHei"/>
+                          <a:cs typeface="Microsoft JhengHei"/>
+                        </a:rPr>
+                        <a:t>尚在評估中，依目前評估對公司營運無重大影響。</a:t>
+                      </a:r>
+                    </a:p>
+                  </a:txBody>
+                  <a:tcPr anchor="ctr" marL="73152" marT="9144" marB="9144">
+                    <a:solidFill>
+                      <a:srgbClr val="FFFFFF"/>
+                    </a:solidFill>
+                  </a:tcPr>
+                </a:tc>
+              </a:tr>
+              <a:tr h="297180">
+                <a:tc>
+                  <a:txBody>
+                    <a:bodyPr/>
+                    <a:lstStyle/>
+                    <a:p>
+                      <a:r>
+                        <a:rPr sz="1150" b="0">
+                          <a:solidFill>
+                            <a:srgbClr val="1A2233"/>
+                          </a:solidFill>
+                          <a:latin typeface="Microsoft JhengHei"/>
+                          <a:ea typeface="Microsoft JhengHei"/>
+                          <a:cs typeface="Microsoft JhengHei"/>
+                        </a:rPr>
+                        <a:t>正瀚-創</a:t>
+                      </a:r>
+                    </a:p>
+                  </a:txBody>
+                  <a:tcPr anchor="ctr" marL="73152" marT="9144" marB="9144">
+                    <a:solidFill>
+                      <a:srgbClr val="EEF2F9"/>
+                    </a:solidFill>
+                  </a:tcPr>
+                </a:tc>
+                <a:tc>
+                  <a:txBody>
+                    <a:bodyPr/>
+                    <a:lstStyle/>
+                    <a:p>
+                      <a:r>
+                        <a:rPr sz="1150" b="0">
+                          <a:solidFill>
+                            <a:srgbClr val="1A2233"/>
+                          </a:solidFill>
+                          <a:latin typeface="Microsoft JhengHei"/>
+                          <a:ea typeface="Microsoft JhengHei"/>
+                          <a:cs typeface="Microsoft JhengHei"/>
+                        </a:rPr>
+                        <a:t>6534</a:t>
                       </a:r>
                     </a:p>
                   </a:txBody>
@@ -4475,13 +4719,13 @@
                       <a:r>
                         <a:rPr sz="1150" b="1">
                           <a:solidFill>
-                            <a:srgbClr val="F4A261"/>
+                            <a:srgbClr val="E63946"/>
                           </a:solidFill>
                           <a:latin typeface="Microsoft JhengHei"/>
                           <a:ea typeface="Microsoft JhengHei"/>
                           <a:cs typeface="Microsoft JhengHei"/>
                         </a:rPr>
-                        <a:t>勒索病毒/加密</a:t>
+                        <a:t>駭客攻擊</a:t>
                       </a:r>
                     </a:p>
                   </a:txBody>
@@ -4505,7 +4749,7 @@
                           <a:ea typeface="Microsoft JhengHei"/>
                           <a:cs typeface="Microsoft JhengHei"/>
                         </a:rPr>
-                        <a:t>尚在評估中，依目前評估對公司營運無重大影響。</a:t>
+                        <a:t>本公司目前正積極會同技術專家協助調查，初步評估對公司營運無重大影響。</a:t>
                       </a:r>
                     </a:p>
                   </a:txBody>
@@ -4531,7 +4775,7 @@
                           <a:ea typeface="Microsoft JhengHei"/>
                           <a:cs typeface="Microsoft JhengHei"/>
                         </a:rPr>
-                        <a:t>正瀚-創</a:t>
+                        <a:t>久裕</a:t>
                       </a:r>
                     </a:p>
                   </a:txBody>
@@ -4555,7 +4799,7 @@
                           <a:ea typeface="Microsoft JhengHei"/>
                           <a:cs typeface="Microsoft JhengHei"/>
                         </a:rPr>
-                        <a:t>6534</a:t>
+                        <a:t>4173</a:t>
                       </a:r>
                     </a:p>
                   </a:txBody>
@@ -4579,7 +4823,7 @@
                           <a:ea typeface="Microsoft JhengHei"/>
                           <a:cs typeface="Microsoft JhengHei"/>
                         </a:rPr>
-                        <a:t>08/11</a:t>
+                        <a:t>08/10</a:t>
                       </a:r>
                     </a:p>
                   </a:txBody>
@@ -4653,7 +4897,7 @@
                           <a:ea typeface="Microsoft JhengHei"/>
                           <a:cs typeface="Microsoft JhengHei"/>
                         </a:rPr>
-                        <a:t>久裕</a:t>
+                        <a:t>逸達</a:t>
                       </a:r>
                     </a:p>
                   </a:txBody>
@@ -4677,7 +4921,7 @@
                           <a:ea typeface="Microsoft JhengHei"/>
                           <a:cs typeface="Microsoft JhengHei"/>
                         </a:rPr>
-                        <a:t>4173</a:t>
+                        <a:t>6576</a:t>
                       </a:r>
                     </a:p>
                   </a:txBody>
@@ -4701,7 +4945,251 @@
                           <a:ea typeface="Microsoft JhengHei"/>
                           <a:cs typeface="Microsoft JhengHei"/>
                         </a:rPr>
-                        <a:t>08/10</a:t>
+                        <a:t>08/07</a:t>
+                      </a:r>
+                    </a:p>
+                  </a:txBody>
+                  <a:tcPr anchor="ctr" marL="73152" marT="9144" marB="9144">
+                    <a:solidFill>
+                      <a:srgbClr val="EEF2F9"/>
+                    </a:solidFill>
+                  </a:tcPr>
+                </a:tc>
+                <a:tc>
+                  <a:txBody>
+                    <a:bodyPr/>
+                    <a:lstStyle/>
+                    <a:p>
+                      <a:r>
+                        <a:rPr sz="1150" b="1">
+                          <a:solidFill>
+                            <a:srgbClr val="E63946"/>
+                          </a:solidFill>
+                          <a:latin typeface="Microsoft JhengHei"/>
+                          <a:ea typeface="Microsoft JhengHei"/>
+                          <a:cs typeface="Microsoft JhengHei"/>
+                        </a:rPr>
+                        <a:t>駭客攻擊</a:t>
+                      </a:r>
+                    </a:p>
+                  </a:txBody>
+                  <a:tcPr anchor="ctr" marL="73152" marT="9144" marB="9144">
+                    <a:solidFill>
+                      <a:srgbClr val="EEF2F9"/>
+                    </a:solidFill>
+                  </a:tcPr>
+                </a:tc>
+                <a:tc>
+                  <a:txBody>
+                    <a:bodyPr/>
+                    <a:lstStyle/>
+                    <a:p>
+                      <a:r>
+                        <a:rPr sz="1150" b="0">
+                          <a:solidFill>
+                            <a:srgbClr val="1A2233"/>
+                          </a:solidFill>
+                          <a:latin typeface="Microsoft JhengHei"/>
+                          <a:ea typeface="Microsoft JhengHei"/>
+                          <a:cs typeface="Microsoft JhengHei"/>
+                        </a:rPr>
+                        <a:t>本公司目前正積極會同技術專家協助調查，初步評估對公司營運暫無重大影響…</a:t>
+                      </a:r>
+                    </a:p>
+                  </a:txBody>
+                  <a:tcPr anchor="ctr" marL="73152" marT="9144" marB="9144">
+                    <a:solidFill>
+                      <a:srgbClr val="EEF2F9"/>
+                 